--- a/linux-networking-feature-evolution.pptx
+++ b/linux-networking-feature-evolution.pptx
@@ -14759,6 +14759,9617 @@
           </a:p>
         </p:txBody>
       </p:sp>
+      <p:sp>
+        <p:nvSpPr>
+          <p:cNvPr id="294" name="TextBox 293"/>
+          <p:cNvSpPr txBox="1"/>
+          <p:nvPr/>
+        </p:nvSpPr>
+        <p:spPr>
+          <a:xfrm>
+            <a:off x="10561320" y="658368"/>
+            <a:ext cx="3703320" cy="201168"/>
+          </a:xfrm>
+          <a:prstGeom prst="rect">
+            <a:avLst/>
+          </a:prstGeom>
+          <a:noFill/>
+        </p:spPr>
+        <p:txBody>
+          <a:bodyPr wrap="none">
+            <a:spAutoFit/>
+          </a:bodyPr>
+          <a:lstStyle/>
+          <a:p>
+            <a:pPr algn="r">
+              <a:defRPr sz="650">
+                <a:solidFill>
+                  <a:srgbClr val="475569"/>
+                </a:solidFill>
+              </a:defRPr>
+            </a:pPr>
+            <a:r>
+              <a:t>dotted vertical grid = Linux X.Y GA</a:t>
+            </a:r>
+          </a:p>
+        </p:txBody>
+      </p:sp>
+      <p:sp>
+        <p:nvSpPr>
+          <p:cNvPr id="295" name="Rectangle 294"/>
+          <p:cNvSpPr/>
+          <p:nvPr/>
+        </p:nvSpPr>
+        <p:spPr>
+          <a:xfrm>
+            <a:off x="2746861" y="1024127"/>
+            <a:ext cx="4572" cy="6729983"/>
+          </a:xfrm>
+          <a:prstGeom prst="rect">
+            <a:avLst/>
+          </a:prstGeom>
+          <a:solidFill>
+            <a:srgbClr val="94A3B8"/>
+          </a:solidFill>
+          <a:ln>
+            <a:noFill/>
+          </a:ln>
+        </p:spPr>
+        <p:style>
+          <a:lnRef idx="1">
+            <a:schemeClr val="accent1"/>
+          </a:lnRef>
+          <a:fillRef idx="3">
+            <a:schemeClr val="accent1"/>
+          </a:fillRef>
+          <a:effectRef idx="2">
+            <a:schemeClr val="accent1"/>
+          </a:effectRef>
+          <a:fontRef idx="minor">
+            <a:schemeClr val="lt1"/>
+          </a:fontRef>
+        </p:style>
+        <p:txBody>
+          <a:bodyPr rtlCol="0" anchor="ctr"/>
+          <a:lstStyle/>
+          <a:p>
+            <a:pPr algn="ctr"/>
+          </a:p>
+        </p:txBody>
+      </p:sp>
+      <p:cxnSp>
+        <p:nvCxnSpPr>
+          <p:cNvPr id="296" name="Connector 295"/>
+          <p:cNvCxnSpPr/>
+          <p:nvPr/>
+        </p:nvCxnSpPr>
+        <p:spPr>
+          <a:xfrm>
+            <a:off x="2746861" y="1024127"/>
+            <a:ext cx="0" cy="6729984"/>
+          </a:xfrm>
+          <a:prstGeom prst="line">
+            <a:avLst/>
+          </a:prstGeom>
+          <a:ln w="5715">
+            <a:solidFill>
+              <a:srgbClr val="94A3B8"/>
+            </a:solidFill>
+            <a:prstDash val="sysDot"/>
+          </a:ln>
+        </p:spPr>
+        <p:style>
+          <a:lnRef idx="2">
+            <a:schemeClr val="accent1"/>
+          </a:lnRef>
+          <a:fillRef idx="0">
+            <a:schemeClr val="accent1"/>
+          </a:fillRef>
+          <a:effectRef idx="1">
+            <a:schemeClr val="accent1"/>
+          </a:effectRef>
+          <a:fontRef idx="minor">
+            <a:schemeClr val="tx1"/>
+          </a:fontRef>
+        </p:style>
+      </p:cxnSp>
+      <p:sp>
+        <p:nvSpPr>
+          <p:cNvPr id="297" name="TextBox 296"/>
+          <p:cNvSpPr txBox="1"/>
+          <p:nvPr/>
+        </p:nvSpPr>
+        <p:spPr>
+          <a:xfrm rot="16200000">
+            <a:off x="2696569" y="813816"/>
+            <a:ext cx="164592" cy="292608"/>
+          </a:xfrm>
+          <a:prstGeom prst="rect">
+            <a:avLst/>
+          </a:prstGeom>
+          <a:noFill/>
+        </p:spPr>
+        <p:txBody>
+          <a:bodyPr wrap="none">
+            <a:spAutoFit/>
+          </a:bodyPr>
+          <a:lstStyle/>
+          <a:p>
+            <a:pPr algn="ctr">
+              <a:defRPr sz="470">
+                <a:solidFill>
+                  <a:srgbClr val="475569"/>
+                </a:solidFill>
+              </a:defRPr>
+            </a:pPr>
+            <a:r>
+              <a:t>3.0</a:t>
+            </a:r>
+          </a:p>
+        </p:txBody>
+      </p:sp>
+      <p:sp>
+        <p:nvSpPr>
+          <p:cNvPr id="298" name="Rectangle 297"/>
+          <p:cNvSpPr/>
+          <p:nvPr/>
+        </p:nvSpPr>
+        <p:spPr>
+          <a:xfrm>
+            <a:off x="2943072" y="1024127"/>
+            <a:ext cx="4572" cy="6729983"/>
+          </a:xfrm>
+          <a:prstGeom prst="rect">
+            <a:avLst/>
+          </a:prstGeom>
+          <a:solidFill>
+            <a:srgbClr val="94A3B8"/>
+          </a:solidFill>
+          <a:ln>
+            <a:noFill/>
+          </a:ln>
+        </p:spPr>
+        <p:style>
+          <a:lnRef idx="1">
+            <a:schemeClr val="accent1"/>
+          </a:lnRef>
+          <a:fillRef idx="3">
+            <a:schemeClr val="accent1"/>
+          </a:fillRef>
+          <a:effectRef idx="2">
+            <a:schemeClr val="accent1"/>
+          </a:effectRef>
+          <a:fontRef idx="minor">
+            <a:schemeClr val="lt1"/>
+          </a:fontRef>
+        </p:style>
+        <p:txBody>
+          <a:bodyPr rtlCol="0" anchor="ctr"/>
+          <a:lstStyle/>
+          <a:p>
+            <a:pPr algn="ctr"/>
+          </a:p>
+        </p:txBody>
+      </p:sp>
+      <p:cxnSp>
+        <p:nvCxnSpPr>
+          <p:cNvPr id="299" name="Connector 298"/>
+          <p:cNvCxnSpPr/>
+          <p:nvPr/>
+        </p:nvCxnSpPr>
+        <p:spPr>
+          <a:xfrm>
+            <a:off x="2943072" y="1024127"/>
+            <a:ext cx="0" cy="6729984"/>
+          </a:xfrm>
+          <a:prstGeom prst="line">
+            <a:avLst/>
+          </a:prstGeom>
+          <a:ln w="5715">
+            <a:solidFill>
+              <a:srgbClr val="94A3B8"/>
+            </a:solidFill>
+            <a:prstDash val="sysDot"/>
+          </a:ln>
+        </p:spPr>
+        <p:style>
+          <a:lnRef idx="2">
+            <a:schemeClr val="accent1"/>
+          </a:lnRef>
+          <a:fillRef idx="0">
+            <a:schemeClr val="accent1"/>
+          </a:fillRef>
+          <a:effectRef idx="1">
+            <a:schemeClr val="accent1"/>
+          </a:effectRef>
+          <a:fontRef idx="minor">
+            <a:schemeClr val="tx1"/>
+          </a:fontRef>
+        </p:style>
+      </p:cxnSp>
+      <p:sp>
+        <p:nvSpPr>
+          <p:cNvPr id="300" name="TextBox 299"/>
+          <p:cNvSpPr txBox="1"/>
+          <p:nvPr/>
+        </p:nvSpPr>
+        <p:spPr>
+          <a:xfrm rot="16200000">
+            <a:off x="2892780" y="896112"/>
+            <a:ext cx="164592" cy="292608"/>
+          </a:xfrm>
+          <a:prstGeom prst="rect">
+            <a:avLst/>
+          </a:prstGeom>
+          <a:noFill/>
+        </p:spPr>
+        <p:txBody>
+          <a:bodyPr wrap="none">
+            <a:spAutoFit/>
+          </a:bodyPr>
+          <a:lstStyle/>
+          <a:p>
+            <a:pPr algn="ctr">
+              <a:defRPr sz="470">
+                <a:solidFill>
+                  <a:srgbClr val="475569"/>
+                </a:solidFill>
+              </a:defRPr>
+            </a:pPr>
+            <a:r>
+              <a:t>3.1</a:t>
+            </a:r>
+          </a:p>
+        </p:txBody>
+      </p:sp>
+      <p:sp>
+        <p:nvSpPr>
+          <p:cNvPr id="301" name="Rectangle 300"/>
+          <p:cNvSpPr/>
+          <p:nvPr/>
+        </p:nvSpPr>
+        <p:spPr>
+          <a:xfrm>
+            <a:off x="3091779" y="1024127"/>
+            <a:ext cx="4572" cy="6729983"/>
+          </a:xfrm>
+          <a:prstGeom prst="rect">
+            <a:avLst/>
+          </a:prstGeom>
+          <a:solidFill>
+            <a:srgbClr val="94A3B8"/>
+          </a:solidFill>
+          <a:ln>
+            <a:noFill/>
+          </a:ln>
+        </p:spPr>
+        <p:style>
+          <a:lnRef idx="1">
+            <a:schemeClr val="accent1"/>
+          </a:lnRef>
+          <a:fillRef idx="3">
+            <a:schemeClr val="accent1"/>
+          </a:fillRef>
+          <a:effectRef idx="2">
+            <a:schemeClr val="accent1"/>
+          </a:effectRef>
+          <a:fontRef idx="minor">
+            <a:schemeClr val="lt1"/>
+          </a:fontRef>
+        </p:style>
+        <p:txBody>
+          <a:bodyPr rtlCol="0" anchor="ctr"/>
+          <a:lstStyle/>
+          <a:p>
+            <a:pPr algn="ctr"/>
+          </a:p>
+        </p:txBody>
+      </p:sp>
+      <p:cxnSp>
+        <p:nvCxnSpPr>
+          <p:cNvPr id="302" name="Connector 301"/>
+          <p:cNvCxnSpPr/>
+          <p:nvPr/>
+        </p:nvCxnSpPr>
+        <p:spPr>
+          <a:xfrm>
+            <a:off x="3091779" y="1024127"/>
+            <a:ext cx="0" cy="6729984"/>
+          </a:xfrm>
+          <a:prstGeom prst="line">
+            <a:avLst/>
+          </a:prstGeom>
+          <a:ln w="5715">
+            <a:solidFill>
+              <a:srgbClr val="94A3B8"/>
+            </a:solidFill>
+            <a:prstDash val="sysDot"/>
+          </a:ln>
+        </p:spPr>
+        <p:style>
+          <a:lnRef idx="2">
+            <a:schemeClr val="accent1"/>
+          </a:lnRef>
+          <a:fillRef idx="0">
+            <a:schemeClr val="accent1"/>
+          </a:fillRef>
+          <a:effectRef idx="1">
+            <a:schemeClr val="accent1"/>
+          </a:effectRef>
+          <a:fontRef idx="minor">
+            <a:schemeClr val="tx1"/>
+          </a:fontRef>
+        </p:style>
+      </p:cxnSp>
+      <p:sp>
+        <p:nvSpPr>
+          <p:cNvPr id="303" name="TextBox 302"/>
+          <p:cNvSpPr txBox="1"/>
+          <p:nvPr/>
+        </p:nvSpPr>
+        <p:spPr>
+          <a:xfrm rot="16200000">
+            <a:off x="3041487" y="813816"/>
+            <a:ext cx="164592" cy="292608"/>
+          </a:xfrm>
+          <a:prstGeom prst="rect">
+            <a:avLst/>
+          </a:prstGeom>
+          <a:noFill/>
+        </p:spPr>
+        <p:txBody>
+          <a:bodyPr wrap="none">
+            <a:spAutoFit/>
+          </a:bodyPr>
+          <a:lstStyle/>
+          <a:p>
+            <a:pPr algn="ctr">
+              <a:defRPr sz="470">
+                <a:solidFill>
+                  <a:srgbClr val="475569"/>
+                </a:solidFill>
+              </a:defRPr>
+            </a:pPr>
+            <a:r>
+              <a:t>3.2</a:t>
+            </a:r>
+          </a:p>
+        </p:txBody>
+      </p:sp>
+      <p:sp>
+        <p:nvSpPr>
+          <p:cNvPr id="304" name="Rectangle 303"/>
+          <p:cNvSpPr/>
+          <p:nvPr/>
+        </p:nvSpPr>
+        <p:spPr>
+          <a:xfrm>
+            <a:off x="3244617" y="1024127"/>
+            <a:ext cx="4572" cy="6729983"/>
+          </a:xfrm>
+          <a:prstGeom prst="rect">
+            <a:avLst/>
+          </a:prstGeom>
+          <a:solidFill>
+            <a:srgbClr val="94A3B8"/>
+          </a:solidFill>
+          <a:ln>
+            <a:noFill/>
+          </a:ln>
+        </p:spPr>
+        <p:style>
+          <a:lnRef idx="1">
+            <a:schemeClr val="accent1"/>
+          </a:lnRef>
+          <a:fillRef idx="3">
+            <a:schemeClr val="accent1"/>
+          </a:fillRef>
+          <a:effectRef idx="2">
+            <a:schemeClr val="accent1"/>
+          </a:effectRef>
+          <a:fontRef idx="minor">
+            <a:schemeClr val="lt1"/>
+          </a:fontRef>
+        </p:style>
+        <p:txBody>
+          <a:bodyPr rtlCol="0" anchor="ctr"/>
+          <a:lstStyle/>
+          <a:p>
+            <a:pPr algn="ctr"/>
+          </a:p>
+        </p:txBody>
+      </p:sp>
+      <p:cxnSp>
+        <p:nvCxnSpPr>
+          <p:cNvPr id="305" name="Connector 304"/>
+          <p:cNvCxnSpPr/>
+          <p:nvPr/>
+        </p:nvCxnSpPr>
+        <p:spPr>
+          <a:xfrm>
+            <a:off x="3244617" y="1024127"/>
+            <a:ext cx="0" cy="6729984"/>
+          </a:xfrm>
+          <a:prstGeom prst="line">
+            <a:avLst/>
+          </a:prstGeom>
+          <a:ln w="5715">
+            <a:solidFill>
+              <a:srgbClr val="94A3B8"/>
+            </a:solidFill>
+            <a:prstDash val="sysDot"/>
+          </a:ln>
+        </p:spPr>
+        <p:style>
+          <a:lnRef idx="2">
+            <a:schemeClr val="accent1"/>
+          </a:lnRef>
+          <a:fillRef idx="0">
+            <a:schemeClr val="accent1"/>
+          </a:fillRef>
+          <a:effectRef idx="1">
+            <a:schemeClr val="accent1"/>
+          </a:effectRef>
+          <a:fontRef idx="minor">
+            <a:schemeClr val="tx1"/>
+          </a:fontRef>
+        </p:style>
+      </p:cxnSp>
+      <p:sp>
+        <p:nvSpPr>
+          <p:cNvPr id="306" name="TextBox 305"/>
+          <p:cNvSpPr txBox="1"/>
+          <p:nvPr/>
+        </p:nvSpPr>
+        <p:spPr>
+          <a:xfrm rot="16200000">
+            <a:off x="3194325" y="896112"/>
+            <a:ext cx="164592" cy="292608"/>
+          </a:xfrm>
+          <a:prstGeom prst="rect">
+            <a:avLst/>
+          </a:prstGeom>
+          <a:noFill/>
+        </p:spPr>
+        <p:txBody>
+          <a:bodyPr wrap="none">
+            <a:spAutoFit/>
+          </a:bodyPr>
+          <a:lstStyle/>
+          <a:p>
+            <a:pPr algn="ctr">
+              <a:defRPr sz="470">
+                <a:solidFill>
+                  <a:srgbClr val="475569"/>
+                </a:solidFill>
+              </a:defRPr>
+            </a:pPr>
+            <a:r>
+              <a:t>3.3</a:t>
+            </a:r>
+          </a:p>
+        </p:txBody>
+      </p:sp>
+      <p:sp>
+        <p:nvSpPr>
+          <p:cNvPr id="307" name="Rectangle 306"/>
+          <p:cNvSpPr/>
+          <p:nvPr/>
+        </p:nvSpPr>
+        <p:spPr>
+          <a:xfrm>
+            <a:off x="3374736" y="1024127"/>
+            <a:ext cx="4572" cy="6729983"/>
+          </a:xfrm>
+          <a:prstGeom prst="rect">
+            <a:avLst/>
+          </a:prstGeom>
+          <a:solidFill>
+            <a:srgbClr val="94A3B8"/>
+          </a:solidFill>
+          <a:ln>
+            <a:noFill/>
+          </a:ln>
+        </p:spPr>
+        <p:style>
+          <a:lnRef idx="1">
+            <a:schemeClr val="accent1"/>
+          </a:lnRef>
+          <a:fillRef idx="3">
+            <a:schemeClr val="accent1"/>
+          </a:fillRef>
+          <a:effectRef idx="2">
+            <a:schemeClr val="accent1"/>
+          </a:effectRef>
+          <a:fontRef idx="minor">
+            <a:schemeClr val="lt1"/>
+          </a:fontRef>
+        </p:style>
+        <p:txBody>
+          <a:bodyPr rtlCol="0" anchor="ctr"/>
+          <a:lstStyle/>
+          <a:p>
+            <a:pPr algn="ctr"/>
+          </a:p>
+        </p:txBody>
+      </p:sp>
+      <p:cxnSp>
+        <p:nvCxnSpPr>
+          <p:cNvPr id="308" name="Connector 307"/>
+          <p:cNvCxnSpPr/>
+          <p:nvPr/>
+        </p:nvCxnSpPr>
+        <p:spPr>
+          <a:xfrm>
+            <a:off x="3374736" y="1024127"/>
+            <a:ext cx="0" cy="6729984"/>
+          </a:xfrm>
+          <a:prstGeom prst="line">
+            <a:avLst/>
+          </a:prstGeom>
+          <a:ln w="5715">
+            <a:solidFill>
+              <a:srgbClr val="94A3B8"/>
+            </a:solidFill>
+            <a:prstDash val="sysDot"/>
+          </a:ln>
+        </p:spPr>
+        <p:style>
+          <a:lnRef idx="2">
+            <a:schemeClr val="accent1"/>
+          </a:lnRef>
+          <a:fillRef idx="0">
+            <a:schemeClr val="accent1"/>
+          </a:fillRef>
+          <a:effectRef idx="1">
+            <a:schemeClr val="accent1"/>
+          </a:effectRef>
+          <a:fontRef idx="minor">
+            <a:schemeClr val="tx1"/>
+          </a:fontRef>
+        </p:style>
+      </p:cxnSp>
+      <p:sp>
+        <p:nvSpPr>
+          <p:cNvPr id="309" name="TextBox 308"/>
+          <p:cNvSpPr txBox="1"/>
+          <p:nvPr/>
+        </p:nvSpPr>
+        <p:spPr>
+          <a:xfrm rot="16200000">
+            <a:off x="3324444" y="813816"/>
+            <a:ext cx="164592" cy="292608"/>
+          </a:xfrm>
+          <a:prstGeom prst="rect">
+            <a:avLst/>
+          </a:prstGeom>
+          <a:noFill/>
+        </p:spPr>
+        <p:txBody>
+          <a:bodyPr wrap="none">
+            <a:spAutoFit/>
+          </a:bodyPr>
+          <a:lstStyle/>
+          <a:p>
+            <a:pPr algn="ctr">
+              <a:defRPr sz="470">
+                <a:solidFill>
+                  <a:srgbClr val="475569"/>
+                </a:solidFill>
+              </a:defRPr>
+            </a:pPr>
+            <a:r>
+              <a:t>3.4</a:t>
+            </a:r>
+          </a:p>
+        </p:txBody>
+      </p:sp>
+      <p:sp>
+        <p:nvSpPr>
+          <p:cNvPr id="310" name="Rectangle 309"/>
+          <p:cNvSpPr/>
+          <p:nvPr/>
+        </p:nvSpPr>
+        <p:spPr>
+          <a:xfrm>
+            <a:off x="3502790" y="1024127"/>
+            <a:ext cx="4572" cy="6729983"/>
+          </a:xfrm>
+          <a:prstGeom prst="rect">
+            <a:avLst/>
+          </a:prstGeom>
+          <a:solidFill>
+            <a:srgbClr val="94A3B8"/>
+          </a:solidFill>
+          <a:ln>
+            <a:noFill/>
+          </a:ln>
+        </p:spPr>
+        <p:style>
+          <a:lnRef idx="1">
+            <a:schemeClr val="accent1"/>
+          </a:lnRef>
+          <a:fillRef idx="3">
+            <a:schemeClr val="accent1"/>
+          </a:fillRef>
+          <a:effectRef idx="2">
+            <a:schemeClr val="accent1"/>
+          </a:effectRef>
+          <a:fontRef idx="minor">
+            <a:schemeClr val="lt1"/>
+          </a:fontRef>
+        </p:style>
+        <p:txBody>
+          <a:bodyPr rtlCol="0" anchor="ctr"/>
+          <a:lstStyle/>
+          <a:p>
+            <a:pPr algn="ctr"/>
+          </a:p>
+        </p:txBody>
+      </p:sp>
+      <p:cxnSp>
+        <p:nvCxnSpPr>
+          <p:cNvPr id="311" name="Connector 310"/>
+          <p:cNvCxnSpPr/>
+          <p:nvPr/>
+        </p:nvCxnSpPr>
+        <p:spPr>
+          <a:xfrm>
+            <a:off x="3502790" y="1024127"/>
+            <a:ext cx="0" cy="6729984"/>
+          </a:xfrm>
+          <a:prstGeom prst="line">
+            <a:avLst/>
+          </a:prstGeom>
+          <a:ln w="5715">
+            <a:solidFill>
+              <a:srgbClr val="94A3B8"/>
+            </a:solidFill>
+            <a:prstDash val="sysDot"/>
+          </a:ln>
+        </p:spPr>
+        <p:style>
+          <a:lnRef idx="2">
+            <a:schemeClr val="accent1"/>
+          </a:lnRef>
+          <a:fillRef idx="0">
+            <a:schemeClr val="accent1"/>
+          </a:fillRef>
+          <a:effectRef idx="1">
+            <a:schemeClr val="accent1"/>
+          </a:effectRef>
+          <a:fontRef idx="minor">
+            <a:schemeClr val="tx1"/>
+          </a:fontRef>
+        </p:style>
+      </p:cxnSp>
+      <p:sp>
+        <p:nvSpPr>
+          <p:cNvPr id="312" name="TextBox 311"/>
+          <p:cNvSpPr txBox="1"/>
+          <p:nvPr/>
+        </p:nvSpPr>
+        <p:spPr>
+          <a:xfrm rot="16200000">
+            <a:off x="3452498" y="896112"/>
+            <a:ext cx="164592" cy="292608"/>
+          </a:xfrm>
+          <a:prstGeom prst="rect">
+            <a:avLst/>
+          </a:prstGeom>
+          <a:noFill/>
+        </p:spPr>
+        <p:txBody>
+          <a:bodyPr wrap="none">
+            <a:spAutoFit/>
+          </a:bodyPr>
+          <a:lstStyle/>
+          <a:p>
+            <a:pPr algn="ctr">
+              <a:defRPr sz="470">
+                <a:solidFill>
+                  <a:srgbClr val="475569"/>
+                </a:solidFill>
+              </a:defRPr>
+            </a:pPr>
+            <a:r>
+              <a:t>3.5</a:t>
+            </a:r>
+          </a:p>
+        </p:txBody>
+      </p:sp>
+      <p:sp>
+        <p:nvSpPr>
+          <p:cNvPr id="313" name="Rectangle 312"/>
+          <p:cNvSpPr/>
+          <p:nvPr/>
+        </p:nvSpPr>
+        <p:spPr>
+          <a:xfrm>
+            <a:off x="3649432" y="1024127"/>
+            <a:ext cx="4572" cy="6729983"/>
+          </a:xfrm>
+          <a:prstGeom prst="rect">
+            <a:avLst/>
+          </a:prstGeom>
+          <a:solidFill>
+            <a:srgbClr val="94A3B8"/>
+          </a:solidFill>
+          <a:ln>
+            <a:noFill/>
+          </a:ln>
+        </p:spPr>
+        <p:style>
+          <a:lnRef idx="1">
+            <a:schemeClr val="accent1"/>
+          </a:lnRef>
+          <a:fillRef idx="3">
+            <a:schemeClr val="accent1"/>
+          </a:fillRef>
+          <a:effectRef idx="2">
+            <a:schemeClr val="accent1"/>
+          </a:effectRef>
+          <a:fontRef idx="minor">
+            <a:schemeClr val="lt1"/>
+          </a:fontRef>
+        </p:style>
+        <p:txBody>
+          <a:bodyPr rtlCol="0" anchor="ctr"/>
+          <a:lstStyle/>
+          <a:p>
+            <a:pPr algn="ctr"/>
+          </a:p>
+        </p:txBody>
+      </p:sp>
+      <p:cxnSp>
+        <p:nvCxnSpPr>
+          <p:cNvPr id="314" name="Connector 313"/>
+          <p:cNvCxnSpPr/>
+          <p:nvPr/>
+        </p:nvCxnSpPr>
+        <p:spPr>
+          <a:xfrm>
+            <a:off x="3649432" y="1024127"/>
+            <a:ext cx="0" cy="6729984"/>
+          </a:xfrm>
+          <a:prstGeom prst="line">
+            <a:avLst/>
+          </a:prstGeom>
+          <a:ln w="5715">
+            <a:solidFill>
+              <a:srgbClr val="94A3B8"/>
+            </a:solidFill>
+            <a:prstDash val="sysDot"/>
+          </a:ln>
+        </p:spPr>
+        <p:style>
+          <a:lnRef idx="2">
+            <a:schemeClr val="accent1"/>
+          </a:lnRef>
+          <a:fillRef idx="0">
+            <a:schemeClr val="accent1"/>
+          </a:fillRef>
+          <a:effectRef idx="1">
+            <a:schemeClr val="accent1"/>
+          </a:effectRef>
+          <a:fontRef idx="minor">
+            <a:schemeClr val="tx1"/>
+          </a:fontRef>
+        </p:style>
+      </p:cxnSp>
+      <p:sp>
+        <p:nvSpPr>
+          <p:cNvPr id="315" name="TextBox 314"/>
+          <p:cNvSpPr txBox="1"/>
+          <p:nvPr/>
+        </p:nvSpPr>
+        <p:spPr>
+          <a:xfrm rot="16200000">
+            <a:off x="3599140" y="813816"/>
+            <a:ext cx="164592" cy="292608"/>
+          </a:xfrm>
+          <a:prstGeom prst="rect">
+            <a:avLst/>
+          </a:prstGeom>
+          <a:noFill/>
+        </p:spPr>
+        <p:txBody>
+          <a:bodyPr wrap="none">
+            <a:spAutoFit/>
+          </a:bodyPr>
+          <a:lstStyle/>
+          <a:p>
+            <a:pPr algn="ctr">
+              <a:defRPr sz="470">
+                <a:solidFill>
+                  <a:srgbClr val="475569"/>
+                </a:solidFill>
+              </a:defRPr>
+            </a:pPr>
+            <a:r>
+              <a:t>3.6</a:t>
+            </a:r>
+          </a:p>
+        </p:txBody>
+      </p:sp>
+      <p:sp>
+        <p:nvSpPr>
+          <p:cNvPr id="316" name="Rectangle 315"/>
+          <p:cNvSpPr/>
+          <p:nvPr/>
+        </p:nvSpPr>
+        <p:spPr>
+          <a:xfrm>
+            <a:off x="3796074" y="1024127"/>
+            <a:ext cx="4572" cy="6729983"/>
+          </a:xfrm>
+          <a:prstGeom prst="rect">
+            <a:avLst/>
+          </a:prstGeom>
+          <a:solidFill>
+            <a:srgbClr val="94A3B8"/>
+          </a:solidFill>
+          <a:ln>
+            <a:noFill/>
+          </a:ln>
+        </p:spPr>
+        <p:style>
+          <a:lnRef idx="1">
+            <a:schemeClr val="accent1"/>
+          </a:lnRef>
+          <a:fillRef idx="3">
+            <a:schemeClr val="accent1"/>
+          </a:fillRef>
+          <a:effectRef idx="2">
+            <a:schemeClr val="accent1"/>
+          </a:effectRef>
+          <a:fontRef idx="minor">
+            <a:schemeClr val="lt1"/>
+          </a:fontRef>
+        </p:style>
+        <p:txBody>
+          <a:bodyPr rtlCol="0" anchor="ctr"/>
+          <a:lstStyle/>
+          <a:p>
+            <a:pPr algn="ctr"/>
+          </a:p>
+        </p:txBody>
+      </p:sp>
+      <p:cxnSp>
+        <p:nvCxnSpPr>
+          <p:cNvPr id="317" name="Connector 316"/>
+          <p:cNvCxnSpPr/>
+          <p:nvPr/>
+        </p:nvCxnSpPr>
+        <p:spPr>
+          <a:xfrm>
+            <a:off x="3796074" y="1024127"/>
+            <a:ext cx="0" cy="6729984"/>
+          </a:xfrm>
+          <a:prstGeom prst="line">
+            <a:avLst/>
+          </a:prstGeom>
+          <a:ln w="5715">
+            <a:solidFill>
+              <a:srgbClr val="94A3B8"/>
+            </a:solidFill>
+            <a:prstDash val="sysDot"/>
+          </a:ln>
+        </p:spPr>
+        <p:style>
+          <a:lnRef idx="2">
+            <a:schemeClr val="accent1"/>
+          </a:lnRef>
+          <a:fillRef idx="0">
+            <a:schemeClr val="accent1"/>
+          </a:fillRef>
+          <a:effectRef idx="1">
+            <a:schemeClr val="accent1"/>
+          </a:effectRef>
+          <a:fontRef idx="minor">
+            <a:schemeClr val="tx1"/>
+          </a:fontRef>
+        </p:style>
+      </p:cxnSp>
+      <p:sp>
+        <p:nvSpPr>
+          <p:cNvPr id="318" name="TextBox 317"/>
+          <p:cNvSpPr txBox="1"/>
+          <p:nvPr/>
+        </p:nvSpPr>
+        <p:spPr>
+          <a:xfrm rot="16200000">
+            <a:off x="3745782" y="896112"/>
+            <a:ext cx="164592" cy="292608"/>
+          </a:xfrm>
+          <a:prstGeom prst="rect">
+            <a:avLst/>
+          </a:prstGeom>
+          <a:noFill/>
+        </p:spPr>
+        <p:txBody>
+          <a:bodyPr wrap="none">
+            <a:spAutoFit/>
+          </a:bodyPr>
+          <a:lstStyle/>
+          <a:p>
+            <a:pPr algn="ctr">
+              <a:defRPr sz="470">
+                <a:solidFill>
+                  <a:srgbClr val="475569"/>
+                </a:solidFill>
+              </a:defRPr>
+            </a:pPr>
+            <a:r>
+              <a:t>3.7</a:t>
+            </a:r>
+          </a:p>
+        </p:txBody>
+      </p:sp>
+      <p:sp>
+        <p:nvSpPr>
+          <p:cNvPr id="319" name="Rectangle 318"/>
+          <p:cNvSpPr/>
+          <p:nvPr/>
+        </p:nvSpPr>
+        <p:spPr>
+          <a:xfrm>
+            <a:off x="3940650" y="1024127"/>
+            <a:ext cx="4572" cy="6729983"/>
+          </a:xfrm>
+          <a:prstGeom prst="rect">
+            <a:avLst/>
+          </a:prstGeom>
+          <a:solidFill>
+            <a:srgbClr val="94A3B8"/>
+          </a:solidFill>
+          <a:ln>
+            <a:noFill/>
+          </a:ln>
+        </p:spPr>
+        <p:style>
+          <a:lnRef idx="1">
+            <a:schemeClr val="accent1"/>
+          </a:lnRef>
+          <a:fillRef idx="3">
+            <a:schemeClr val="accent1"/>
+          </a:fillRef>
+          <a:effectRef idx="2">
+            <a:schemeClr val="accent1"/>
+          </a:effectRef>
+          <a:fontRef idx="minor">
+            <a:schemeClr val="lt1"/>
+          </a:fontRef>
+        </p:style>
+        <p:txBody>
+          <a:bodyPr rtlCol="0" anchor="ctr"/>
+          <a:lstStyle/>
+          <a:p>
+            <a:pPr algn="ctr"/>
+          </a:p>
+        </p:txBody>
+      </p:sp>
+      <p:cxnSp>
+        <p:nvCxnSpPr>
+          <p:cNvPr id="320" name="Connector 319"/>
+          <p:cNvCxnSpPr/>
+          <p:nvPr/>
+        </p:nvCxnSpPr>
+        <p:spPr>
+          <a:xfrm>
+            <a:off x="3940650" y="1024127"/>
+            <a:ext cx="0" cy="6729984"/>
+          </a:xfrm>
+          <a:prstGeom prst="line">
+            <a:avLst/>
+          </a:prstGeom>
+          <a:ln w="5715">
+            <a:solidFill>
+              <a:srgbClr val="94A3B8"/>
+            </a:solidFill>
+            <a:prstDash val="sysDot"/>
+          </a:ln>
+        </p:spPr>
+        <p:style>
+          <a:lnRef idx="2">
+            <a:schemeClr val="accent1"/>
+          </a:lnRef>
+          <a:fillRef idx="0">
+            <a:schemeClr val="accent1"/>
+          </a:fillRef>
+          <a:effectRef idx="1">
+            <a:schemeClr val="accent1"/>
+          </a:effectRef>
+          <a:fontRef idx="minor">
+            <a:schemeClr val="tx1"/>
+          </a:fontRef>
+        </p:style>
+      </p:cxnSp>
+      <p:sp>
+        <p:nvSpPr>
+          <p:cNvPr id="321" name="TextBox 320"/>
+          <p:cNvSpPr txBox="1"/>
+          <p:nvPr/>
+        </p:nvSpPr>
+        <p:spPr>
+          <a:xfrm rot="16200000">
+            <a:off x="3890358" y="813816"/>
+            <a:ext cx="164592" cy="292608"/>
+          </a:xfrm>
+          <a:prstGeom prst="rect">
+            <a:avLst/>
+          </a:prstGeom>
+          <a:noFill/>
+        </p:spPr>
+        <p:txBody>
+          <a:bodyPr wrap="none">
+            <a:spAutoFit/>
+          </a:bodyPr>
+          <a:lstStyle/>
+          <a:p>
+            <a:pPr algn="ctr">
+              <a:defRPr sz="470">
+                <a:solidFill>
+                  <a:srgbClr val="475569"/>
+                </a:solidFill>
+              </a:defRPr>
+            </a:pPr>
+            <a:r>
+              <a:t>3.8</a:t>
+            </a:r>
+          </a:p>
+        </p:txBody>
+      </p:sp>
+      <p:sp>
+        <p:nvSpPr>
+          <p:cNvPr id="322" name="Rectangle 321"/>
+          <p:cNvSpPr/>
+          <p:nvPr/>
+        </p:nvSpPr>
+        <p:spPr>
+          <a:xfrm>
+            <a:off x="4083162" y="1024127"/>
+            <a:ext cx="4572" cy="6729983"/>
+          </a:xfrm>
+          <a:prstGeom prst="rect">
+            <a:avLst/>
+          </a:prstGeom>
+          <a:solidFill>
+            <a:srgbClr val="94A3B8"/>
+          </a:solidFill>
+          <a:ln>
+            <a:noFill/>
+          </a:ln>
+        </p:spPr>
+        <p:style>
+          <a:lnRef idx="1">
+            <a:schemeClr val="accent1"/>
+          </a:lnRef>
+          <a:fillRef idx="3">
+            <a:schemeClr val="accent1"/>
+          </a:fillRef>
+          <a:effectRef idx="2">
+            <a:schemeClr val="accent1"/>
+          </a:effectRef>
+          <a:fontRef idx="minor">
+            <a:schemeClr val="lt1"/>
+          </a:fontRef>
+        </p:style>
+        <p:txBody>
+          <a:bodyPr rtlCol="0" anchor="ctr"/>
+          <a:lstStyle/>
+          <a:p>
+            <a:pPr algn="ctr"/>
+          </a:p>
+        </p:txBody>
+      </p:sp>
+      <p:cxnSp>
+        <p:nvCxnSpPr>
+          <p:cNvPr id="323" name="Connector 322"/>
+          <p:cNvCxnSpPr/>
+          <p:nvPr/>
+        </p:nvCxnSpPr>
+        <p:spPr>
+          <a:xfrm>
+            <a:off x="4083162" y="1024127"/>
+            <a:ext cx="0" cy="6729984"/>
+          </a:xfrm>
+          <a:prstGeom prst="line">
+            <a:avLst/>
+          </a:prstGeom>
+          <a:ln w="5715">
+            <a:solidFill>
+              <a:srgbClr val="94A3B8"/>
+            </a:solidFill>
+            <a:prstDash val="sysDot"/>
+          </a:ln>
+        </p:spPr>
+        <p:style>
+          <a:lnRef idx="2">
+            <a:schemeClr val="accent1"/>
+          </a:lnRef>
+          <a:fillRef idx="0">
+            <a:schemeClr val="accent1"/>
+          </a:fillRef>
+          <a:effectRef idx="1">
+            <a:schemeClr val="accent1"/>
+          </a:effectRef>
+          <a:fontRef idx="minor">
+            <a:schemeClr val="tx1"/>
+          </a:fontRef>
+        </p:style>
+      </p:cxnSp>
+      <p:sp>
+        <p:nvSpPr>
+          <p:cNvPr id="324" name="TextBox 323"/>
+          <p:cNvSpPr txBox="1"/>
+          <p:nvPr/>
+        </p:nvSpPr>
+        <p:spPr>
+          <a:xfrm rot="16200000">
+            <a:off x="4032870" y="896112"/>
+            <a:ext cx="164592" cy="292608"/>
+          </a:xfrm>
+          <a:prstGeom prst="rect">
+            <a:avLst/>
+          </a:prstGeom>
+          <a:noFill/>
+        </p:spPr>
+        <p:txBody>
+          <a:bodyPr wrap="none">
+            <a:spAutoFit/>
+          </a:bodyPr>
+          <a:lstStyle/>
+          <a:p>
+            <a:pPr algn="ctr">
+              <a:defRPr sz="470">
+                <a:solidFill>
+                  <a:srgbClr val="475569"/>
+                </a:solidFill>
+              </a:defRPr>
+            </a:pPr>
+            <a:r>
+              <a:t>3.9</a:t>
+            </a:r>
+          </a:p>
+        </p:txBody>
+      </p:sp>
+      <p:sp>
+        <p:nvSpPr>
+          <p:cNvPr id="325" name="Rectangle 324"/>
+          <p:cNvSpPr/>
+          <p:nvPr/>
+        </p:nvSpPr>
+        <p:spPr>
+          <a:xfrm>
+            <a:off x="4213281" y="1024127"/>
+            <a:ext cx="4572" cy="6729983"/>
+          </a:xfrm>
+          <a:prstGeom prst="rect">
+            <a:avLst/>
+          </a:prstGeom>
+          <a:solidFill>
+            <a:srgbClr val="94A3B8"/>
+          </a:solidFill>
+          <a:ln>
+            <a:noFill/>
+          </a:ln>
+        </p:spPr>
+        <p:style>
+          <a:lnRef idx="1">
+            <a:schemeClr val="accent1"/>
+          </a:lnRef>
+          <a:fillRef idx="3">
+            <a:schemeClr val="accent1"/>
+          </a:fillRef>
+          <a:effectRef idx="2">
+            <a:schemeClr val="accent1"/>
+          </a:effectRef>
+          <a:fontRef idx="minor">
+            <a:schemeClr val="lt1"/>
+          </a:fontRef>
+        </p:style>
+        <p:txBody>
+          <a:bodyPr rtlCol="0" anchor="ctr"/>
+          <a:lstStyle/>
+          <a:p>
+            <a:pPr algn="ctr"/>
+          </a:p>
+        </p:txBody>
+      </p:sp>
+      <p:cxnSp>
+        <p:nvCxnSpPr>
+          <p:cNvPr id="326" name="Connector 325"/>
+          <p:cNvCxnSpPr/>
+          <p:nvPr/>
+        </p:nvCxnSpPr>
+        <p:spPr>
+          <a:xfrm>
+            <a:off x="4213281" y="1024127"/>
+            <a:ext cx="0" cy="6729984"/>
+          </a:xfrm>
+          <a:prstGeom prst="line">
+            <a:avLst/>
+          </a:prstGeom>
+          <a:ln w="5715">
+            <a:solidFill>
+              <a:srgbClr val="94A3B8"/>
+            </a:solidFill>
+            <a:prstDash val="sysDot"/>
+          </a:ln>
+        </p:spPr>
+        <p:style>
+          <a:lnRef idx="2">
+            <a:schemeClr val="accent1"/>
+          </a:lnRef>
+          <a:fillRef idx="0">
+            <a:schemeClr val="accent1"/>
+          </a:fillRef>
+          <a:effectRef idx="1">
+            <a:schemeClr val="accent1"/>
+          </a:effectRef>
+          <a:fontRef idx="minor">
+            <a:schemeClr val="tx1"/>
+          </a:fontRef>
+        </p:style>
+      </p:cxnSp>
+      <p:sp>
+        <p:nvSpPr>
+          <p:cNvPr id="327" name="TextBox 326"/>
+          <p:cNvSpPr txBox="1"/>
+          <p:nvPr/>
+        </p:nvSpPr>
+        <p:spPr>
+          <a:xfrm rot="16200000">
+            <a:off x="4162989" y="813816"/>
+            <a:ext cx="164592" cy="292608"/>
+          </a:xfrm>
+          <a:prstGeom prst="rect">
+            <a:avLst/>
+          </a:prstGeom>
+          <a:noFill/>
+        </p:spPr>
+        <p:txBody>
+          <a:bodyPr wrap="none">
+            <a:spAutoFit/>
+          </a:bodyPr>
+          <a:lstStyle/>
+          <a:p>
+            <a:pPr algn="ctr">
+              <a:defRPr sz="470">
+                <a:solidFill>
+                  <a:srgbClr val="475569"/>
+                </a:solidFill>
+              </a:defRPr>
+            </a:pPr>
+            <a:r>
+              <a:t>3.10</a:t>
+            </a:r>
+          </a:p>
+        </p:txBody>
+      </p:sp>
+      <p:sp>
+        <p:nvSpPr>
+          <p:cNvPr id="328" name="Rectangle 327"/>
+          <p:cNvSpPr/>
+          <p:nvPr/>
+        </p:nvSpPr>
+        <p:spPr>
+          <a:xfrm>
+            <a:off x="4345465" y="1024127"/>
+            <a:ext cx="4572" cy="6729983"/>
+          </a:xfrm>
+          <a:prstGeom prst="rect">
+            <a:avLst/>
+          </a:prstGeom>
+          <a:solidFill>
+            <a:srgbClr val="94A3B8"/>
+          </a:solidFill>
+          <a:ln>
+            <a:noFill/>
+          </a:ln>
+        </p:spPr>
+        <p:style>
+          <a:lnRef idx="1">
+            <a:schemeClr val="accent1"/>
+          </a:lnRef>
+          <a:fillRef idx="3">
+            <a:schemeClr val="accent1"/>
+          </a:fillRef>
+          <a:effectRef idx="2">
+            <a:schemeClr val="accent1"/>
+          </a:effectRef>
+          <a:fontRef idx="minor">
+            <a:schemeClr val="lt1"/>
+          </a:fontRef>
+        </p:style>
+        <p:txBody>
+          <a:bodyPr rtlCol="0" anchor="ctr"/>
+          <a:lstStyle/>
+          <a:p>
+            <a:pPr algn="ctr"/>
+          </a:p>
+        </p:txBody>
+      </p:sp>
+      <p:cxnSp>
+        <p:nvCxnSpPr>
+          <p:cNvPr id="329" name="Connector 328"/>
+          <p:cNvCxnSpPr/>
+          <p:nvPr/>
+        </p:nvCxnSpPr>
+        <p:spPr>
+          <a:xfrm>
+            <a:off x="4345465" y="1024127"/>
+            <a:ext cx="0" cy="6729984"/>
+          </a:xfrm>
+          <a:prstGeom prst="line">
+            <a:avLst/>
+          </a:prstGeom>
+          <a:ln w="5715">
+            <a:solidFill>
+              <a:srgbClr val="94A3B8"/>
+            </a:solidFill>
+            <a:prstDash val="sysDot"/>
+          </a:ln>
+        </p:spPr>
+        <p:style>
+          <a:lnRef idx="2">
+            <a:schemeClr val="accent1"/>
+          </a:lnRef>
+          <a:fillRef idx="0">
+            <a:schemeClr val="accent1"/>
+          </a:fillRef>
+          <a:effectRef idx="1">
+            <a:schemeClr val="accent1"/>
+          </a:effectRef>
+          <a:fontRef idx="minor">
+            <a:schemeClr val="tx1"/>
+          </a:fontRef>
+        </p:style>
+      </p:cxnSp>
+      <p:sp>
+        <p:nvSpPr>
+          <p:cNvPr id="330" name="TextBox 329"/>
+          <p:cNvSpPr txBox="1"/>
+          <p:nvPr/>
+        </p:nvSpPr>
+        <p:spPr>
+          <a:xfrm rot="16200000">
+            <a:off x="4295173" y="896112"/>
+            <a:ext cx="164592" cy="292608"/>
+          </a:xfrm>
+          <a:prstGeom prst="rect">
+            <a:avLst/>
+          </a:prstGeom>
+          <a:noFill/>
+        </p:spPr>
+        <p:txBody>
+          <a:bodyPr wrap="none">
+            <a:spAutoFit/>
+          </a:bodyPr>
+          <a:lstStyle/>
+          <a:p>
+            <a:pPr algn="ctr">
+              <a:defRPr sz="470">
+                <a:solidFill>
+                  <a:srgbClr val="475569"/>
+                </a:solidFill>
+              </a:defRPr>
+            </a:pPr>
+            <a:r>
+              <a:t>3.11</a:t>
+            </a:r>
+          </a:p>
+        </p:txBody>
+      </p:sp>
+      <p:sp>
+        <p:nvSpPr>
+          <p:cNvPr id="331" name="Rectangle 330"/>
+          <p:cNvSpPr/>
+          <p:nvPr/>
+        </p:nvSpPr>
+        <p:spPr>
+          <a:xfrm>
+            <a:off x="4473518" y="1024127"/>
+            <a:ext cx="4572" cy="6729983"/>
+          </a:xfrm>
+          <a:prstGeom prst="rect">
+            <a:avLst/>
+          </a:prstGeom>
+          <a:solidFill>
+            <a:srgbClr val="94A3B8"/>
+          </a:solidFill>
+          <a:ln>
+            <a:noFill/>
+          </a:ln>
+        </p:spPr>
+        <p:style>
+          <a:lnRef idx="1">
+            <a:schemeClr val="accent1"/>
+          </a:lnRef>
+          <a:fillRef idx="3">
+            <a:schemeClr val="accent1"/>
+          </a:fillRef>
+          <a:effectRef idx="2">
+            <a:schemeClr val="accent1"/>
+          </a:effectRef>
+          <a:fontRef idx="minor">
+            <a:schemeClr val="lt1"/>
+          </a:fontRef>
+        </p:style>
+        <p:txBody>
+          <a:bodyPr rtlCol="0" anchor="ctr"/>
+          <a:lstStyle/>
+          <a:p>
+            <a:pPr algn="ctr"/>
+          </a:p>
+        </p:txBody>
+      </p:sp>
+      <p:cxnSp>
+        <p:nvCxnSpPr>
+          <p:cNvPr id="332" name="Connector 331"/>
+          <p:cNvCxnSpPr/>
+          <p:nvPr/>
+        </p:nvCxnSpPr>
+        <p:spPr>
+          <a:xfrm>
+            <a:off x="4473518" y="1024127"/>
+            <a:ext cx="0" cy="6729984"/>
+          </a:xfrm>
+          <a:prstGeom prst="line">
+            <a:avLst/>
+          </a:prstGeom>
+          <a:ln w="5715">
+            <a:solidFill>
+              <a:srgbClr val="94A3B8"/>
+            </a:solidFill>
+            <a:prstDash val="sysDot"/>
+          </a:ln>
+        </p:spPr>
+        <p:style>
+          <a:lnRef idx="2">
+            <a:schemeClr val="accent1"/>
+          </a:lnRef>
+          <a:fillRef idx="0">
+            <a:schemeClr val="accent1"/>
+          </a:fillRef>
+          <a:effectRef idx="1">
+            <a:schemeClr val="accent1"/>
+          </a:effectRef>
+          <a:fontRef idx="minor">
+            <a:schemeClr val="tx1"/>
+          </a:fontRef>
+        </p:style>
+      </p:cxnSp>
+      <p:sp>
+        <p:nvSpPr>
+          <p:cNvPr id="333" name="TextBox 332"/>
+          <p:cNvSpPr txBox="1"/>
+          <p:nvPr/>
+        </p:nvSpPr>
+        <p:spPr>
+          <a:xfrm rot="16200000">
+            <a:off x="4423226" y="813816"/>
+            <a:ext cx="164592" cy="292608"/>
+          </a:xfrm>
+          <a:prstGeom prst="rect">
+            <a:avLst/>
+          </a:prstGeom>
+          <a:noFill/>
+        </p:spPr>
+        <p:txBody>
+          <a:bodyPr wrap="none">
+            <a:spAutoFit/>
+          </a:bodyPr>
+          <a:lstStyle/>
+          <a:p>
+            <a:pPr algn="ctr">
+              <a:defRPr sz="470">
+                <a:solidFill>
+                  <a:srgbClr val="475569"/>
+                </a:solidFill>
+              </a:defRPr>
+            </a:pPr>
+            <a:r>
+              <a:t>3.12</a:t>
+            </a:r>
+          </a:p>
+        </p:txBody>
+      </p:sp>
+      <p:sp>
+        <p:nvSpPr>
+          <p:cNvPr id="334" name="Rectangle 333"/>
+          <p:cNvSpPr/>
+          <p:nvPr/>
+        </p:nvSpPr>
+        <p:spPr>
+          <a:xfrm>
+            <a:off x="4632553" y="1024127"/>
+            <a:ext cx="4572" cy="6729983"/>
+          </a:xfrm>
+          <a:prstGeom prst="rect">
+            <a:avLst/>
+          </a:prstGeom>
+          <a:solidFill>
+            <a:srgbClr val="94A3B8"/>
+          </a:solidFill>
+          <a:ln>
+            <a:noFill/>
+          </a:ln>
+        </p:spPr>
+        <p:style>
+          <a:lnRef idx="1">
+            <a:schemeClr val="accent1"/>
+          </a:lnRef>
+          <a:fillRef idx="3">
+            <a:schemeClr val="accent1"/>
+          </a:fillRef>
+          <a:effectRef idx="2">
+            <a:schemeClr val="accent1"/>
+          </a:effectRef>
+          <a:fontRef idx="minor">
+            <a:schemeClr val="lt1"/>
+          </a:fontRef>
+        </p:style>
+        <p:txBody>
+          <a:bodyPr rtlCol="0" anchor="ctr"/>
+          <a:lstStyle/>
+          <a:p>
+            <a:pPr algn="ctr"/>
+          </a:p>
+        </p:txBody>
+      </p:sp>
+      <p:cxnSp>
+        <p:nvCxnSpPr>
+          <p:cNvPr id="335" name="Connector 334"/>
+          <p:cNvCxnSpPr/>
+          <p:nvPr/>
+        </p:nvCxnSpPr>
+        <p:spPr>
+          <a:xfrm>
+            <a:off x="4632553" y="1024127"/>
+            <a:ext cx="0" cy="6729984"/>
+          </a:xfrm>
+          <a:prstGeom prst="line">
+            <a:avLst/>
+          </a:prstGeom>
+          <a:ln w="5715">
+            <a:solidFill>
+              <a:srgbClr val="94A3B8"/>
+            </a:solidFill>
+            <a:prstDash val="sysDot"/>
+          </a:ln>
+        </p:spPr>
+        <p:style>
+          <a:lnRef idx="2">
+            <a:schemeClr val="accent1"/>
+          </a:lnRef>
+          <a:fillRef idx="0">
+            <a:schemeClr val="accent1"/>
+          </a:fillRef>
+          <a:effectRef idx="1">
+            <a:schemeClr val="accent1"/>
+          </a:effectRef>
+          <a:fontRef idx="minor">
+            <a:schemeClr val="tx1"/>
+          </a:fontRef>
+        </p:style>
+      </p:cxnSp>
+      <p:sp>
+        <p:nvSpPr>
+          <p:cNvPr id="336" name="TextBox 335"/>
+          <p:cNvSpPr txBox="1"/>
+          <p:nvPr/>
+        </p:nvSpPr>
+        <p:spPr>
+          <a:xfrm rot="16200000">
+            <a:off x="4582261" y="896112"/>
+            <a:ext cx="164592" cy="292608"/>
+          </a:xfrm>
+          <a:prstGeom prst="rect">
+            <a:avLst/>
+          </a:prstGeom>
+          <a:noFill/>
+        </p:spPr>
+        <p:txBody>
+          <a:bodyPr wrap="none">
+            <a:spAutoFit/>
+          </a:bodyPr>
+          <a:lstStyle/>
+          <a:p>
+            <a:pPr algn="ctr">
+              <a:defRPr sz="470">
+                <a:solidFill>
+                  <a:srgbClr val="475569"/>
+                </a:solidFill>
+              </a:defRPr>
+            </a:pPr>
+            <a:r>
+              <a:t>3.13</a:t>
+            </a:r>
+          </a:p>
+        </p:txBody>
+      </p:sp>
+      <p:sp>
+        <p:nvSpPr>
+          <p:cNvPr id="337" name="Rectangle 336"/>
+          <p:cNvSpPr/>
+          <p:nvPr/>
+        </p:nvSpPr>
+        <p:spPr>
+          <a:xfrm>
+            <a:off x="4777129" y="1024127"/>
+            <a:ext cx="4572" cy="6729983"/>
+          </a:xfrm>
+          <a:prstGeom prst="rect">
+            <a:avLst/>
+          </a:prstGeom>
+          <a:solidFill>
+            <a:srgbClr val="94A3B8"/>
+          </a:solidFill>
+          <a:ln>
+            <a:noFill/>
+          </a:ln>
+        </p:spPr>
+        <p:style>
+          <a:lnRef idx="1">
+            <a:schemeClr val="accent1"/>
+          </a:lnRef>
+          <a:fillRef idx="3">
+            <a:schemeClr val="accent1"/>
+          </a:fillRef>
+          <a:effectRef idx="2">
+            <a:schemeClr val="accent1"/>
+          </a:effectRef>
+          <a:fontRef idx="minor">
+            <a:schemeClr val="lt1"/>
+          </a:fontRef>
+        </p:style>
+        <p:txBody>
+          <a:bodyPr rtlCol="0" anchor="ctr"/>
+          <a:lstStyle/>
+          <a:p>
+            <a:pPr algn="ctr"/>
+          </a:p>
+        </p:txBody>
+      </p:sp>
+      <p:cxnSp>
+        <p:nvCxnSpPr>
+          <p:cNvPr id="338" name="Connector 337"/>
+          <p:cNvCxnSpPr/>
+          <p:nvPr/>
+        </p:nvCxnSpPr>
+        <p:spPr>
+          <a:xfrm>
+            <a:off x="4777129" y="1024127"/>
+            <a:ext cx="0" cy="6729984"/>
+          </a:xfrm>
+          <a:prstGeom prst="line">
+            <a:avLst/>
+          </a:prstGeom>
+          <a:ln w="5715">
+            <a:solidFill>
+              <a:srgbClr val="94A3B8"/>
+            </a:solidFill>
+            <a:prstDash val="sysDot"/>
+          </a:ln>
+        </p:spPr>
+        <p:style>
+          <a:lnRef idx="2">
+            <a:schemeClr val="accent1"/>
+          </a:lnRef>
+          <a:fillRef idx="0">
+            <a:schemeClr val="accent1"/>
+          </a:fillRef>
+          <a:effectRef idx="1">
+            <a:schemeClr val="accent1"/>
+          </a:effectRef>
+          <a:fontRef idx="minor">
+            <a:schemeClr val="tx1"/>
+          </a:fontRef>
+        </p:style>
+      </p:cxnSp>
+      <p:sp>
+        <p:nvSpPr>
+          <p:cNvPr id="339" name="TextBox 338"/>
+          <p:cNvSpPr txBox="1"/>
+          <p:nvPr/>
+        </p:nvSpPr>
+        <p:spPr>
+          <a:xfrm rot="16200000">
+            <a:off x="4726837" y="813816"/>
+            <a:ext cx="164592" cy="292608"/>
+          </a:xfrm>
+          <a:prstGeom prst="rect">
+            <a:avLst/>
+          </a:prstGeom>
+          <a:noFill/>
+        </p:spPr>
+        <p:txBody>
+          <a:bodyPr wrap="none">
+            <a:spAutoFit/>
+          </a:bodyPr>
+          <a:lstStyle/>
+          <a:p>
+            <a:pPr algn="ctr">
+              <a:defRPr sz="470">
+                <a:solidFill>
+                  <a:srgbClr val="475569"/>
+                </a:solidFill>
+              </a:defRPr>
+            </a:pPr>
+            <a:r>
+              <a:t>3.14</a:t>
+            </a:r>
+          </a:p>
+        </p:txBody>
+      </p:sp>
+      <p:sp>
+        <p:nvSpPr>
+          <p:cNvPr id="340" name="Rectangle 339"/>
+          <p:cNvSpPr/>
+          <p:nvPr/>
+        </p:nvSpPr>
+        <p:spPr>
+          <a:xfrm>
+            <a:off x="4921706" y="1024127"/>
+            <a:ext cx="4572" cy="6729983"/>
+          </a:xfrm>
+          <a:prstGeom prst="rect">
+            <a:avLst/>
+          </a:prstGeom>
+          <a:solidFill>
+            <a:srgbClr val="94A3B8"/>
+          </a:solidFill>
+          <a:ln>
+            <a:noFill/>
+          </a:ln>
+        </p:spPr>
+        <p:style>
+          <a:lnRef idx="1">
+            <a:schemeClr val="accent1"/>
+          </a:lnRef>
+          <a:fillRef idx="3">
+            <a:schemeClr val="accent1"/>
+          </a:fillRef>
+          <a:effectRef idx="2">
+            <a:schemeClr val="accent1"/>
+          </a:effectRef>
+          <a:fontRef idx="minor">
+            <a:schemeClr val="lt1"/>
+          </a:fontRef>
+        </p:style>
+        <p:txBody>
+          <a:bodyPr rtlCol="0" anchor="ctr"/>
+          <a:lstStyle/>
+          <a:p>
+            <a:pPr algn="ctr"/>
+          </a:p>
+        </p:txBody>
+      </p:sp>
+      <p:cxnSp>
+        <p:nvCxnSpPr>
+          <p:cNvPr id="341" name="Connector 340"/>
+          <p:cNvCxnSpPr/>
+          <p:nvPr/>
+        </p:nvCxnSpPr>
+        <p:spPr>
+          <a:xfrm>
+            <a:off x="4921706" y="1024127"/>
+            <a:ext cx="0" cy="6729984"/>
+          </a:xfrm>
+          <a:prstGeom prst="line">
+            <a:avLst/>
+          </a:prstGeom>
+          <a:ln w="5715">
+            <a:solidFill>
+              <a:srgbClr val="94A3B8"/>
+            </a:solidFill>
+            <a:prstDash val="sysDot"/>
+          </a:ln>
+        </p:spPr>
+        <p:style>
+          <a:lnRef idx="2">
+            <a:schemeClr val="accent1"/>
+          </a:lnRef>
+          <a:fillRef idx="0">
+            <a:schemeClr val="accent1"/>
+          </a:fillRef>
+          <a:effectRef idx="1">
+            <a:schemeClr val="accent1"/>
+          </a:effectRef>
+          <a:fontRef idx="minor">
+            <a:schemeClr val="tx1"/>
+          </a:fontRef>
+        </p:style>
+      </p:cxnSp>
+      <p:sp>
+        <p:nvSpPr>
+          <p:cNvPr id="342" name="TextBox 341"/>
+          <p:cNvSpPr txBox="1"/>
+          <p:nvPr/>
+        </p:nvSpPr>
+        <p:spPr>
+          <a:xfrm rot="16200000">
+            <a:off x="4871414" y="896112"/>
+            <a:ext cx="164592" cy="292608"/>
+          </a:xfrm>
+          <a:prstGeom prst="rect">
+            <a:avLst/>
+          </a:prstGeom>
+          <a:noFill/>
+        </p:spPr>
+        <p:txBody>
+          <a:bodyPr wrap="none">
+            <a:spAutoFit/>
+          </a:bodyPr>
+          <a:lstStyle/>
+          <a:p>
+            <a:pPr algn="ctr">
+              <a:defRPr sz="470">
+                <a:solidFill>
+                  <a:srgbClr val="475569"/>
+                </a:solidFill>
+              </a:defRPr>
+            </a:pPr>
+            <a:r>
+              <a:t>3.15</a:t>
+            </a:r>
+          </a:p>
+        </p:txBody>
+      </p:sp>
+      <p:sp>
+        <p:nvSpPr>
+          <p:cNvPr id="343" name="Rectangle 342"/>
+          <p:cNvSpPr/>
+          <p:nvPr/>
+        </p:nvSpPr>
+        <p:spPr>
+          <a:xfrm>
+            <a:off x="5037367" y="1024127"/>
+            <a:ext cx="4572" cy="6729983"/>
+          </a:xfrm>
+          <a:prstGeom prst="rect">
+            <a:avLst/>
+          </a:prstGeom>
+          <a:solidFill>
+            <a:srgbClr val="94A3B8"/>
+          </a:solidFill>
+          <a:ln>
+            <a:noFill/>
+          </a:ln>
+        </p:spPr>
+        <p:style>
+          <a:lnRef idx="1">
+            <a:schemeClr val="accent1"/>
+          </a:lnRef>
+          <a:fillRef idx="3">
+            <a:schemeClr val="accent1"/>
+          </a:fillRef>
+          <a:effectRef idx="2">
+            <a:schemeClr val="accent1"/>
+          </a:effectRef>
+          <a:fontRef idx="minor">
+            <a:schemeClr val="lt1"/>
+          </a:fontRef>
+        </p:style>
+        <p:txBody>
+          <a:bodyPr rtlCol="0" anchor="ctr"/>
+          <a:lstStyle/>
+          <a:p>
+            <a:pPr algn="ctr"/>
+          </a:p>
+        </p:txBody>
+      </p:sp>
+      <p:cxnSp>
+        <p:nvCxnSpPr>
+          <p:cNvPr id="344" name="Connector 343"/>
+          <p:cNvCxnSpPr/>
+          <p:nvPr/>
+        </p:nvCxnSpPr>
+        <p:spPr>
+          <a:xfrm>
+            <a:off x="5037367" y="1024127"/>
+            <a:ext cx="0" cy="6729984"/>
+          </a:xfrm>
+          <a:prstGeom prst="line">
+            <a:avLst/>
+          </a:prstGeom>
+          <a:ln w="5715">
+            <a:solidFill>
+              <a:srgbClr val="94A3B8"/>
+            </a:solidFill>
+            <a:prstDash val="sysDot"/>
+          </a:ln>
+        </p:spPr>
+        <p:style>
+          <a:lnRef idx="2">
+            <a:schemeClr val="accent1"/>
+          </a:lnRef>
+          <a:fillRef idx="0">
+            <a:schemeClr val="accent1"/>
+          </a:fillRef>
+          <a:effectRef idx="1">
+            <a:schemeClr val="accent1"/>
+          </a:effectRef>
+          <a:fontRef idx="minor">
+            <a:schemeClr val="tx1"/>
+          </a:fontRef>
+        </p:style>
+      </p:cxnSp>
+      <p:sp>
+        <p:nvSpPr>
+          <p:cNvPr id="345" name="TextBox 344"/>
+          <p:cNvSpPr txBox="1"/>
+          <p:nvPr/>
+        </p:nvSpPr>
+        <p:spPr>
+          <a:xfrm rot="16200000">
+            <a:off x="4987075" y="813816"/>
+            <a:ext cx="164592" cy="292608"/>
+          </a:xfrm>
+          <a:prstGeom prst="rect">
+            <a:avLst/>
+          </a:prstGeom>
+          <a:noFill/>
+        </p:spPr>
+        <p:txBody>
+          <a:bodyPr wrap="none">
+            <a:spAutoFit/>
+          </a:bodyPr>
+          <a:lstStyle/>
+          <a:p>
+            <a:pPr algn="ctr">
+              <a:defRPr sz="470">
+                <a:solidFill>
+                  <a:srgbClr val="475569"/>
+                </a:solidFill>
+              </a:defRPr>
+            </a:pPr>
+            <a:r>
+              <a:t>3.16</a:t>
+            </a:r>
+          </a:p>
+        </p:txBody>
+      </p:sp>
+      <p:sp>
+        <p:nvSpPr>
+          <p:cNvPr id="346" name="Rectangle 345"/>
+          <p:cNvSpPr/>
+          <p:nvPr/>
+        </p:nvSpPr>
+        <p:spPr>
+          <a:xfrm>
+            <a:off x="5167486" y="1024127"/>
+            <a:ext cx="4572" cy="6729983"/>
+          </a:xfrm>
+          <a:prstGeom prst="rect">
+            <a:avLst/>
+          </a:prstGeom>
+          <a:solidFill>
+            <a:srgbClr val="94A3B8"/>
+          </a:solidFill>
+          <a:ln>
+            <a:noFill/>
+          </a:ln>
+        </p:spPr>
+        <p:style>
+          <a:lnRef idx="1">
+            <a:schemeClr val="accent1"/>
+          </a:lnRef>
+          <a:fillRef idx="3">
+            <a:schemeClr val="accent1"/>
+          </a:fillRef>
+          <a:effectRef idx="2">
+            <a:schemeClr val="accent1"/>
+          </a:effectRef>
+          <a:fontRef idx="minor">
+            <a:schemeClr val="lt1"/>
+          </a:fontRef>
+        </p:style>
+        <p:txBody>
+          <a:bodyPr rtlCol="0" anchor="ctr"/>
+          <a:lstStyle/>
+          <a:p>
+            <a:pPr algn="ctr"/>
+          </a:p>
+        </p:txBody>
+      </p:sp>
+      <p:cxnSp>
+        <p:nvCxnSpPr>
+          <p:cNvPr id="347" name="Connector 346"/>
+          <p:cNvCxnSpPr/>
+          <p:nvPr/>
+        </p:nvCxnSpPr>
+        <p:spPr>
+          <a:xfrm>
+            <a:off x="5167486" y="1024127"/>
+            <a:ext cx="0" cy="6729984"/>
+          </a:xfrm>
+          <a:prstGeom prst="line">
+            <a:avLst/>
+          </a:prstGeom>
+          <a:ln w="5715">
+            <a:solidFill>
+              <a:srgbClr val="94A3B8"/>
+            </a:solidFill>
+            <a:prstDash val="sysDot"/>
+          </a:ln>
+        </p:spPr>
+        <p:style>
+          <a:lnRef idx="2">
+            <a:schemeClr val="accent1"/>
+          </a:lnRef>
+          <a:fillRef idx="0">
+            <a:schemeClr val="accent1"/>
+          </a:fillRef>
+          <a:effectRef idx="1">
+            <a:schemeClr val="accent1"/>
+          </a:effectRef>
+          <a:fontRef idx="minor">
+            <a:schemeClr val="tx1"/>
+          </a:fontRef>
+        </p:style>
+      </p:cxnSp>
+      <p:sp>
+        <p:nvSpPr>
+          <p:cNvPr id="348" name="TextBox 347"/>
+          <p:cNvSpPr txBox="1"/>
+          <p:nvPr/>
+        </p:nvSpPr>
+        <p:spPr>
+          <a:xfrm rot="16200000">
+            <a:off x="5117194" y="896112"/>
+            <a:ext cx="164592" cy="292608"/>
+          </a:xfrm>
+          <a:prstGeom prst="rect">
+            <a:avLst/>
+          </a:prstGeom>
+          <a:noFill/>
+        </p:spPr>
+        <p:txBody>
+          <a:bodyPr wrap="none">
+            <a:spAutoFit/>
+          </a:bodyPr>
+          <a:lstStyle/>
+          <a:p>
+            <a:pPr algn="ctr">
+              <a:defRPr sz="470">
+                <a:solidFill>
+                  <a:srgbClr val="475569"/>
+                </a:solidFill>
+              </a:defRPr>
+            </a:pPr>
+            <a:r>
+              <a:t>3.17</a:t>
+            </a:r>
+          </a:p>
+        </p:txBody>
+      </p:sp>
+      <p:sp>
+        <p:nvSpPr>
+          <p:cNvPr id="349" name="Rectangle 348"/>
+          <p:cNvSpPr/>
+          <p:nvPr/>
+        </p:nvSpPr>
+        <p:spPr>
+          <a:xfrm>
+            <a:off x="5297605" y="1024127"/>
+            <a:ext cx="4572" cy="6729983"/>
+          </a:xfrm>
+          <a:prstGeom prst="rect">
+            <a:avLst/>
+          </a:prstGeom>
+          <a:solidFill>
+            <a:srgbClr val="94A3B8"/>
+          </a:solidFill>
+          <a:ln>
+            <a:noFill/>
+          </a:ln>
+        </p:spPr>
+        <p:style>
+          <a:lnRef idx="1">
+            <a:schemeClr val="accent1"/>
+          </a:lnRef>
+          <a:fillRef idx="3">
+            <a:schemeClr val="accent1"/>
+          </a:fillRef>
+          <a:effectRef idx="2">
+            <a:schemeClr val="accent1"/>
+          </a:effectRef>
+          <a:fontRef idx="minor">
+            <a:schemeClr val="lt1"/>
+          </a:fontRef>
+        </p:style>
+        <p:txBody>
+          <a:bodyPr rtlCol="0" anchor="ctr"/>
+          <a:lstStyle/>
+          <a:p>
+            <a:pPr algn="ctr"/>
+          </a:p>
+        </p:txBody>
+      </p:sp>
+      <p:cxnSp>
+        <p:nvCxnSpPr>
+          <p:cNvPr id="350" name="Connector 349"/>
+          <p:cNvCxnSpPr/>
+          <p:nvPr/>
+        </p:nvCxnSpPr>
+        <p:spPr>
+          <a:xfrm>
+            <a:off x="5297605" y="1024127"/>
+            <a:ext cx="0" cy="6729984"/>
+          </a:xfrm>
+          <a:prstGeom prst="line">
+            <a:avLst/>
+          </a:prstGeom>
+          <a:ln w="5715">
+            <a:solidFill>
+              <a:srgbClr val="94A3B8"/>
+            </a:solidFill>
+            <a:prstDash val="sysDot"/>
+          </a:ln>
+        </p:spPr>
+        <p:style>
+          <a:lnRef idx="2">
+            <a:schemeClr val="accent1"/>
+          </a:lnRef>
+          <a:fillRef idx="0">
+            <a:schemeClr val="accent1"/>
+          </a:fillRef>
+          <a:effectRef idx="1">
+            <a:schemeClr val="accent1"/>
+          </a:effectRef>
+          <a:fontRef idx="minor">
+            <a:schemeClr val="tx1"/>
+          </a:fontRef>
+        </p:style>
+      </p:cxnSp>
+      <p:sp>
+        <p:nvSpPr>
+          <p:cNvPr id="351" name="TextBox 350"/>
+          <p:cNvSpPr txBox="1"/>
+          <p:nvPr/>
+        </p:nvSpPr>
+        <p:spPr>
+          <a:xfrm rot="16200000">
+            <a:off x="5247313" y="813816"/>
+            <a:ext cx="164592" cy="292608"/>
+          </a:xfrm>
+          <a:prstGeom prst="rect">
+            <a:avLst/>
+          </a:prstGeom>
+          <a:noFill/>
+        </p:spPr>
+        <p:txBody>
+          <a:bodyPr wrap="none">
+            <a:spAutoFit/>
+          </a:bodyPr>
+          <a:lstStyle/>
+          <a:p>
+            <a:pPr algn="ctr">
+              <a:defRPr sz="470">
+                <a:solidFill>
+                  <a:srgbClr val="475569"/>
+                </a:solidFill>
+              </a:defRPr>
+            </a:pPr>
+            <a:r>
+              <a:t>3.18</a:t>
+            </a:r>
+          </a:p>
+        </p:txBody>
+      </p:sp>
+      <p:sp>
+        <p:nvSpPr>
+          <p:cNvPr id="352" name="Rectangle 351"/>
+          <p:cNvSpPr/>
+          <p:nvPr/>
+        </p:nvSpPr>
+        <p:spPr>
+          <a:xfrm>
+            <a:off x="5427724" y="1024127"/>
+            <a:ext cx="4572" cy="6729983"/>
+          </a:xfrm>
+          <a:prstGeom prst="rect">
+            <a:avLst/>
+          </a:prstGeom>
+          <a:solidFill>
+            <a:srgbClr val="94A3B8"/>
+          </a:solidFill>
+          <a:ln>
+            <a:noFill/>
+          </a:ln>
+        </p:spPr>
+        <p:style>
+          <a:lnRef idx="1">
+            <a:schemeClr val="accent1"/>
+          </a:lnRef>
+          <a:fillRef idx="3">
+            <a:schemeClr val="accent1"/>
+          </a:fillRef>
+          <a:effectRef idx="2">
+            <a:schemeClr val="accent1"/>
+          </a:effectRef>
+          <a:fontRef idx="minor">
+            <a:schemeClr val="lt1"/>
+          </a:fontRef>
+        </p:style>
+        <p:txBody>
+          <a:bodyPr rtlCol="0" anchor="ctr"/>
+          <a:lstStyle/>
+          <a:p>
+            <a:pPr algn="ctr"/>
+          </a:p>
+        </p:txBody>
+      </p:sp>
+      <p:cxnSp>
+        <p:nvCxnSpPr>
+          <p:cNvPr id="353" name="Connector 352"/>
+          <p:cNvCxnSpPr/>
+          <p:nvPr/>
+        </p:nvCxnSpPr>
+        <p:spPr>
+          <a:xfrm>
+            <a:off x="5427724" y="1024127"/>
+            <a:ext cx="0" cy="6729984"/>
+          </a:xfrm>
+          <a:prstGeom prst="line">
+            <a:avLst/>
+          </a:prstGeom>
+          <a:ln w="5715">
+            <a:solidFill>
+              <a:srgbClr val="94A3B8"/>
+            </a:solidFill>
+            <a:prstDash val="sysDot"/>
+          </a:ln>
+        </p:spPr>
+        <p:style>
+          <a:lnRef idx="2">
+            <a:schemeClr val="accent1"/>
+          </a:lnRef>
+          <a:fillRef idx="0">
+            <a:schemeClr val="accent1"/>
+          </a:fillRef>
+          <a:effectRef idx="1">
+            <a:schemeClr val="accent1"/>
+          </a:effectRef>
+          <a:fontRef idx="minor">
+            <a:schemeClr val="tx1"/>
+          </a:fontRef>
+        </p:style>
+      </p:cxnSp>
+      <p:sp>
+        <p:nvSpPr>
+          <p:cNvPr id="354" name="TextBox 353"/>
+          <p:cNvSpPr txBox="1"/>
+          <p:nvPr/>
+        </p:nvSpPr>
+        <p:spPr>
+          <a:xfrm rot="16200000">
+            <a:off x="5377432" y="896112"/>
+            <a:ext cx="164592" cy="292608"/>
+          </a:xfrm>
+          <a:prstGeom prst="rect">
+            <a:avLst/>
+          </a:prstGeom>
+          <a:noFill/>
+        </p:spPr>
+        <p:txBody>
+          <a:bodyPr wrap="none">
+            <a:spAutoFit/>
+          </a:bodyPr>
+          <a:lstStyle/>
+          <a:p>
+            <a:pPr algn="ctr">
+              <a:defRPr sz="470">
+                <a:solidFill>
+                  <a:srgbClr val="475569"/>
+                </a:solidFill>
+              </a:defRPr>
+            </a:pPr>
+            <a:r>
+              <a:t>3.19</a:t>
+            </a:r>
+          </a:p>
+        </p:txBody>
+      </p:sp>
+      <p:sp>
+        <p:nvSpPr>
+          <p:cNvPr id="355" name="Rectangle 354"/>
+          <p:cNvSpPr/>
+          <p:nvPr/>
+        </p:nvSpPr>
+        <p:spPr>
+          <a:xfrm>
+            <a:off x="5557843" y="1024127"/>
+            <a:ext cx="4572" cy="6729983"/>
+          </a:xfrm>
+          <a:prstGeom prst="rect">
+            <a:avLst/>
+          </a:prstGeom>
+          <a:solidFill>
+            <a:srgbClr val="94A3B8"/>
+          </a:solidFill>
+          <a:ln>
+            <a:noFill/>
+          </a:ln>
+        </p:spPr>
+        <p:style>
+          <a:lnRef idx="1">
+            <a:schemeClr val="accent1"/>
+          </a:lnRef>
+          <a:fillRef idx="3">
+            <a:schemeClr val="accent1"/>
+          </a:fillRef>
+          <a:effectRef idx="2">
+            <a:schemeClr val="accent1"/>
+          </a:effectRef>
+          <a:fontRef idx="minor">
+            <a:schemeClr val="lt1"/>
+          </a:fontRef>
+        </p:style>
+        <p:txBody>
+          <a:bodyPr rtlCol="0" anchor="ctr"/>
+          <a:lstStyle/>
+          <a:p>
+            <a:pPr algn="ctr"/>
+          </a:p>
+        </p:txBody>
+      </p:sp>
+      <p:cxnSp>
+        <p:nvCxnSpPr>
+          <p:cNvPr id="356" name="Connector 355"/>
+          <p:cNvCxnSpPr/>
+          <p:nvPr/>
+        </p:nvCxnSpPr>
+        <p:spPr>
+          <a:xfrm>
+            <a:off x="5557843" y="1024127"/>
+            <a:ext cx="0" cy="6729984"/>
+          </a:xfrm>
+          <a:prstGeom prst="line">
+            <a:avLst/>
+          </a:prstGeom>
+          <a:ln w="5715">
+            <a:solidFill>
+              <a:srgbClr val="94A3B8"/>
+            </a:solidFill>
+            <a:prstDash val="sysDot"/>
+          </a:ln>
+        </p:spPr>
+        <p:style>
+          <a:lnRef idx="2">
+            <a:schemeClr val="accent1"/>
+          </a:lnRef>
+          <a:fillRef idx="0">
+            <a:schemeClr val="accent1"/>
+          </a:fillRef>
+          <a:effectRef idx="1">
+            <a:schemeClr val="accent1"/>
+          </a:effectRef>
+          <a:fontRef idx="minor">
+            <a:schemeClr val="tx1"/>
+          </a:fontRef>
+        </p:style>
+      </p:cxnSp>
+      <p:sp>
+        <p:nvSpPr>
+          <p:cNvPr id="357" name="TextBox 356"/>
+          <p:cNvSpPr txBox="1"/>
+          <p:nvPr/>
+        </p:nvSpPr>
+        <p:spPr>
+          <a:xfrm rot="16200000">
+            <a:off x="5507551" y="813816"/>
+            <a:ext cx="164592" cy="292608"/>
+          </a:xfrm>
+          <a:prstGeom prst="rect">
+            <a:avLst/>
+          </a:prstGeom>
+          <a:noFill/>
+        </p:spPr>
+        <p:txBody>
+          <a:bodyPr wrap="none">
+            <a:spAutoFit/>
+          </a:bodyPr>
+          <a:lstStyle/>
+          <a:p>
+            <a:pPr algn="ctr">
+              <a:defRPr sz="470">
+                <a:solidFill>
+                  <a:srgbClr val="475569"/>
+                </a:solidFill>
+              </a:defRPr>
+            </a:pPr>
+            <a:r>
+              <a:t>4.0</a:t>
+            </a:r>
+          </a:p>
+        </p:txBody>
+      </p:sp>
+      <p:sp>
+        <p:nvSpPr>
+          <p:cNvPr id="358" name="Rectangle 357"/>
+          <p:cNvSpPr/>
+          <p:nvPr/>
+        </p:nvSpPr>
+        <p:spPr>
+          <a:xfrm>
+            <a:off x="5702419" y="1024127"/>
+            <a:ext cx="4572" cy="6729983"/>
+          </a:xfrm>
+          <a:prstGeom prst="rect">
+            <a:avLst/>
+          </a:prstGeom>
+          <a:solidFill>
+            <a:srgbClr val="94A3B8"/>
+          </a:solidFill>
+          <a:ln>
+            <a:noFill/>
+          </a:ln>
+        </p:spPr>
+        <p:style>
+          <a:lnRef idx="1">
+            <a:schemeClr val="accent1"/>
+          </a:lnRef>
+          <a:fillRef idx="3">
+            <a:schemeClr val="accent1"/>
+          </a:fillRef>
+          <a:effectRef idx="2">
+            <a:schemeClr val="accent1"/>
+          </a:effectRef>
+          <a:fontRef idx="minor">
+            <a:schemeClr val="lt1"/>
+          </a:fontRef>
+        </p:style>
+        <p:txBody>
+          <a:bodyPr rtlCol="0" anchor="ctr"/>
+          <a:lstStyle/>
+          <a:p>
+            <a:pPr algn="ctr"/>
+          </a:p>
+        </p:txBody>
+      </p:sp>
+      <p:cxnSp>
+        <p:nvCxnSpPr>
+          <p:cNvPr id="359" name="Connector 358"/>
+          <p:cNvCxnSpPr/>
+          <p:nvPr/>
+        </p:nvCxnSpPr>
+        <p:spPr>
+          <a:xfrm>
+            <a:off x="5702419" y="1024127"/>
+            <a:ext cx="0" cy="6729984"/>
+          </a:xfrm>
+          <a:prstGeom prst="line">
+            <a:avLst/>
+          </a:prstGeom>
+          <a:ln w="5715">
+            <a:solidFill>
+              <a:srgbClr val="94A3B8"/>
+            </a:solidFill>
+            <a:prstDash val="sysDot"/>
+          </a:ln>
+        </p:spPr>
+        <p:style>
+          <a:lnRef idx="2">
+            <a:schemeClr val="accent1"/>
+          </a:lnRef>
+          <a:fillRef idx="0">
+            <a:schemeClr val="accent1"/>
+          </a:fillRef>
+          <a:effectRef idx="1">
+            <a:schemeClr val="accent1"/>
+          </a:effectRef>
+          <a:fontRef idx="minor">
+            <a:schemeClr val="tx1"/>
+          </a:fontRef>
+        </p:style>
+      </p:cxnSp>
+      <p:sp>
+        <p:nvSpPr>
+          <p:cNvPr id="360" name="TextBox 359"/>
+          <p:cNvSpPr txBox="1"/>
+          <p:nvPr/>
+        </p:nvSpPr>
+        <p:spPr>
+          <a:xfrm rot="16200000">
+            <a:off x="5652127" y="896112"/>
+            <a:ext cx="164592" cy="292608"/>
+          </a:xfrm>
+          <a:prstGeom prst="rect">
+            <a:avLst/>
+          </a:prstGeom>
+          <a:noFill/>
+        </p:spPr>
+        <p:txBody>
+          <a:bodyPr wrap="none">
+            <a:spAutoFit/>
+          </a:bodyPr>
+          <a:lstStyle/>
+          <a:p>
+            <a:pPr algn="ctr">
+              <a:defRPr sz="470">
+                <a:solidFill>
+                  <a:srgbClr val="475569"/>
+                </a:solidFill>
+              </a:defRPr>
+            </a:pPr>
+            <a:r>
+              <a:t>4.1</a:t>
+            </a:r>
+          </a:p>
+        </p:txBody>
+      </p:sp>
+      <p:sp>
+        <p:nvSpPr>
+          <p:cNvPr id="361" name="Rectangle 360"/>
+          <p:cNvSpPr/>
+          <p:nvPr/>
+        </p:nvSpPr>
+        <p:spPr>
+          <a:xfrm>
+            <a:off x="5846996" y="1024127"/>
+            <a:ext cx="4572" cy="6729983"/>
+          </a:xfrm>
+          <a:prstGeom prst="rect">
+            <a:avLst/>
+          </a:prstGeom>
+          <a:solidFill>
+            <a:srgbClr val="94A3B8"/>
+          </a:solidFill>
+          <a:ln>
+            <a:noFill/>
+          </a:ln>
+        </p:spPr>
+        <p:style>
+          <a:lnRef idx="1">
+            <a:schemeClr val="accent1"/>
+          </a:lnRef>
+          <a:fillRef idx="3">
+            <a:schemeClr val="accent1"/>
+          </a:fillRef>
+          <a:effectRef idx="2">
+            <a:schemeClr val="accent1"/>
+          </a:effectRef>
+          <a:fontRef idx="minor">
+            <a:schemeClr val="lt1"/>
+          </a:fontRef>
+        </p:style>
+        <p:txBody>
+          <a:bodyPr rtlCol="0" anchor="ctr"/>
+          <a:lstStyle/>
+          <a:p>
+            <a:pPr algn="ctr"/>
+          </a:p>
+        </p:txBody>
+      </p:sp>
+      <p:cxnSp>
+        <p:nvCxnSpPr>
+          <p:cNvPr id="362" name="Connector 361"/>
+          <p:cNvCxnSpPr/>
+          <p:nvPr/>
+        </p:nvCxnSpPr>
+        <p:spPr>
+          <a:xfrm>
+            <a:off x="5846996" y="1024127"/>
+            <a:ext cx="0" cy="6729984"/>
+          </a:xfrm>
+          <a:prstGeom prst="line">
+            <a:avLst/>
+          </a:prstGeom>
+          <a:ln w="5715">
+            <a:solidFill>
+              <a:srgbClr val="94A3B8"/>
+            </a:solidFill>
+            <a:prstDash val="sysDot"/>
+          </a:ln>
+        </p:spPr>
+        <p:style>
+          <a:lnRef idx="2">
+            <a:schemeClr val="accent1"/>
+          </a:lnRef>
+          <a:fillRef idx="0">
+            <a:schemeClr val="accent1"/>
+          </a:fillRef>
+          <a:effectRef idx="1">
+            <a:schemeClr val="accent1"/>
+          </a:effectRef>
+          <a:fontRef idx="minor">
+            <a:schemeClr val="tx1"/>
+          </a:fontRef>
+        </p:style>
+      </p:cxnSp>
+      <p:sp>
+        <p:nvSpPr>
+          <p:cNvPr id="363" name="TextBox 362"/>
+          <p:cNvSpPr txBox="1"/>
+          <p:nvPr/>
+        </p:nvSpPr>
+        <p:spPr>
+          <a:xfrm rot="16200000">
+            <a:off x="5796704" y="813816"/>
+            <a:ext cx="164592" cy="292608"/>
+          </a:xfrm>
+          <a:prstGeom prst="rect">
+            <a:avLst/>
+          </a:prstGeom>
+          <a:noFill/>
+        </p:spPr>
+        <p:txBody>
+          <a:bodyPr wrap="none">
+            <a:spAutoFit/>
+          </a:bodyPr>
+          <a:lstStyle/>
+          <a:p>
+            <a:pPr algn="ctr">
+              <a:defRPr sz="470">
+                <a:solidFill>
+                  <a:srgbClr val="475569"/>
+                </a:solidFill>
+              </a:defRPr>
+            </a:pPr>
+            <a:r>
+              <a:t>4.2</a:t>
+            </a:r>
+          </a:p>
+        </p:txBody>
+      </p:sp>
+      <p:sp>
+        <p:nvSpPr>
+          <p:cNvPr id="364" name="Rectangle 363"/>
+          <p:cNvSpPr/>
+          <p:nvPr/>
+        </p:nvSpPr>
+        <p:spPr>
+          <a:xfrm>
+            <a:off x="5977115" y="1024127"/>
+            <a:ext cx="4572" cy="6729983"/>
+          </a:xfrm>
+          <a:prstGeom prst="rect">
+            <a:avLst/>
+          </a:prstGeom>
+          <a:solidFill>
+            <a:srgbClr val="94A3B8"/>
+          </a:solidFill>
+          <a:ln>
+            <a:noFill/>
+          </a:ln>
+        </p:spPr>
+        <p:style>
+          <a:lnRef idx="1">
+            <a:schemeClr val="accent1"/>
+          </a:lnRef>
+          <a:fillRef idx="3">
+            <a:schemeClr val="accent1"/>
+          </a:fillRef>
+          <a:effectRef idx="2">
+            <a:schemeClr val="accent1"/>
+          </a:effectRef>
+          <a:fontRef idx="minor">
+            <a:schemeClr val="lt1"/>
+          </a:fontRef>
+        </p:style>
+        <p:txBody>
+          <a:bodyPr rtlCol="0" anchor="ctr"/>
+          <a:lstStyle/>
+          <a:p>
+            <a:pPr algn="ctr"/>
+          </a:p>
+        </p:txBody>
+      </p:sp>
+      <p:cxnSp>
+        <p:nvCxnSpPr>
+          <p:cNvPr id="365" name="Connector 364"/>
+          <p:cNvCxnSpPr/>
+          <p:nvPr/>
+        </p:nvCxnSpPr>
+        <p:spPr>
+          <a:xfrm>
+            <a:off x="5977115" y="1024127"/>
+            <a:ext cx="0" cy="6729984"/>
+          </a:xfrm>
+          <a:prstGeom prst="line">
+            <a:avLst/>
+          </a:prstGeom>
+          <a:ln w="5715">
+            <a:solidFill>
+              <a:srgbClr val="94A3B8"/>
+            </a:solidFill>
+            <a:prstDash val="sysDot"/>
+          </a:ln>
+        </p:spPr>
+        <p:style>
+          <a:lnRef idx="2">
+            <a:schemeClr val="accent1"/>
+          </a:lnRef>
+          <a:fillRef idx="0">
+            <a:schemeClr val="accent1"/>
+          </a:fillRef>
+          <a:effectRef idx="1">
+            <a:schemeClr val="accent1"/>
+          </a:effectRef>
+          <a:fontRef idx="minor">
+            <a:schemeClr val="tx1"/>
+          </a:fontRef>
+        </p:style>
+      </p:cxnSp>
+      <p:sp>
+        <p:nvSpPr>
+          <p:cNvPr id="366" name="TextBox 365"/>
+          <p:cNvSpPr txBox="1"/>
+          <p:nvPr/>
+        </p:nvSpPr>
+        <p:spPr>
+          <a:xfrm rot="16200000">
+            <a:off x="5926823" y="896112"/>
+            <a:ext cx="164592" cy="292608"/>
+          </a:xfrm>
+          <a:prstGeom prst="rect">
+            <a:avLst/>
+          </a:prstGeom>
+          <a:noFill/>
+        </p:spPr>
+        <p:txBody>
+          <a:bodyPr wrap="none">
+            <a:spAutoFit/>
+          </a:bodyPr>
+          <a:lstStyle/>
+          <a:p>
+            <a:pPr algn="ctr">
+              <a:defRPr sz="470">
+                <a:solidFill>
+                  <a:srgbClr val="475569"/>
+                </a:solidFill>
+              </a:defRPr>
+            </a:pPr>
+            <a:r>
+              <a:t>4.3</a:t>
+            </a:r>
+          </a:p>
+        </p:txBody>
+      </p:sp>
+      <p:sp>
+        <p:nvSpPr>
+          <p:cNvPr id="367" name="Rectangle 366"/>
+          <p:cNvSpPr/>
+          <p:nvPr/>
+        </p:nvSpPr>
+        <p:spPr>
+          <a:xfrm>
+            <a:off x="6121692" y="1024127"/>
+            <a:ext cx="4572" cy="6729983"/>
+          </a:xfrm>
+          <a:prstGeom prst="rect">
+            <a:avLst/>
+          </a:prstGeom>
+          <a:solidFill>
+            <a:srgbClr val="94A3B8"/>
+          </a:solidFill>
+          <a:ln>
+            <a:noFill/>
+          </a:ln>
+        </p:spPr>
+        <p:style>
+          <a:lnRef idx="1">
+            <a:schemeClr val="accent1"/>
+          </a:lnRef>
+          <a:fillRef idx="3">
+            <a:schemeClr val="accent1"/>
+          </a:fillRef>
+          <a:effectRef idx="2">
+            <a:schemeClr val="accent1"/>
+          </a:effectRef>
+          <a:fontRef idx="minor">
+            <a:schemeClr val="lt1"/>
+          </a:fontRef>
+        </p:style>
+        <p:txBody>
+          <a:bodyPr rtlCol="0" anchor="ctr"/>
+          <a:lstStyle/>
+          <a:p>
+            <a:pPr algn="ctr"/>
+          </a:p>
+        </p:txBody>
+      </p:sp>
+      <p:cxnSp>
+        <p:nvCxnSpPr>
+          <p:cNvPr id="368" name="Connector 367"/>
+          <p:cNvCxnSpPr/>
+          <p:nvPr/>
+        </p:nvCxnSpPr>
+        <p:spPr>
+          <a:xfrm>
+            <a:off x="6121692" y="1024127"/>
+            <a:ext cx="0" cy="6729984"/>
+          </a:xfrm>
+          <a:prstGeom prst="line">
+            <a:avLst/>
+          </a:prstGeom>
+          <a:ln w="5715">
+            <a:solidFill>
+              <a:srgbClr val="94A3B8"/>
+            </a:solidFill>
+            <a:prstDash val="sysDot"/>
+          </a:ln>
+        </p:spPr>
+        <p:style>
+          <a:lnRef idx="2">
+            <a:schemeClr val="accent1"/>
+          </a:lnRef>
+          <a:fillRef idx="0">
+            <a:schemeClr val="accent1"/>
+          </a:fillRef>
+          <a:effectRef idx="1">
+            <a:schemeClr val="accent1"/>
+          </a:effectRef>
+          <a:fontRef idx="minor">
+            <a:schemeClr val="tx1"/>
+          </a:fontRef>
+        </p:style>
+      </p:cxnSp>
+      <p:sp>
+        <p:nvSpPr>
+          <p:cNvPr id="369" name="TextBox 368"/>
+          <p:cNvSpPr txBox="1"/>
+          <p:nvPr/>
+        </p:nvSpPr>
+        <p:spPr>
+          <a:xfrm rot="16200000">
+            <a:off x="6071400" y="813816"/>
+            <a:ext cx="164592" cy="292608"/>
+          </a:xfrm>
+          <a:prstGeom prst="rect">
+            <a:avLst/>
+          </a:prstGeom>
+          <a:noFill/>
+        </p:spPr>
+        <p:txBody>
+          <a:bodyPr wrap="none">
+            <a:spAutoFit/>
+          </a:bodyPr>
+          <a:lstStyle/>
+          <a:p>
+            <a:pPr algn="ctr">
+              <a:defRPr sz="470">
+                <a:solidFill>
+                  <a:srgbClr val="475569"/>
+                </a:solidFill>
+              </a:defRPr>
+            </a:pPr>
+            <a:r>
+              <a:t>4.4</a:t>
+            </a:r>
+          </a:p>
+        </p:txBody>
+      </p:sp>
+      <p:sp>
+        <p:nvSpPr>
+          <p:cNvPr id="370" name="Rectangle 369"/>
+          <p:cNvSpPr/>
+          <p:nvPr/>
+        </p:nvSpPr>
+        <p:spPr>
+          <a:xfrm>
+            <a:off x="6251811" y="1024127"/>
+            <a:ext cx="4572" cy="6729983"/>
+          </a:xfrm>
+          <a:prstGeom prst="rect">
+            <a:avLst/>
+          </a:prstGeom>
+          <a:solidFill>
+            <a:srgbClr val="94A3B8"/>
+          </a:solidFill>
+          <a:ln>
+            <a:noFill/>
+          </a:ln>
+        </p:spPr>
+        <p:style>
+          <a:lnRef idx="1">
+            <a:schemeClr val="accent1"/>
+          </a:lnRef>
+          <a:fillRef idx="3">
+            <a:schemeClr val="accent1"/>
+          </a:fillRef>
+          <a:effectRef idx="2">
+            <a:schemeClr val="accent1"/>
+          </a:effectRef>
+          <a:fontRef idx="minor">
+            <a:schemeClr val="lt1"/>
+          </a:fontRef>
+        </p:style>
+        <p:txBody>
+          <a:bodyPr rtlCol="0" anchor="ctr"/>
+          <a:lstStyle/>
+          <a:p>
+            <a:pPr algn="ctr"/>
+          </a:p>
+        </p:txBody>
+      </p:sp>
+      <p:cxnSp>
+        <p:nvCxnSpPr>
+          <p:cNvPr id="371" name="Connector 370"/>
+          <p:cNvCxnSpPr/>
+          <p:nvPr/>
+        </p:nvCxnSpPr>
+        <p:spPr>
+          <a:xfrm>
+            <a:off x="6251811" y="1024127"/>
+            <a:ext cx="0" cy="6729984"/>
+          </a:xfrm>
+          <a:prstGeom prst="line">
+            <a:avLst/>
+          </a:prstGeom>
+          <a:ln w="5715">
+            <a:solidFill>
+              <a:srgbClr val="94A3B8"/>
+            </a:solidFill>
+            <a:prstDash val="sysDot"/>
+          </a:ln>
+        </p:spPr>
+        <p:style>
+          <a:lnRef idx="2">
+            <a:schemeClr val="accent1"/>
+          </a:lnRef>
+          <a:fillRef idx="0">
+            <a:schemeClr val="accent1"/>
+          </a:fillRef>
+          <a:effectRef idx="1">
+            <a:schemeClr val="accent1"/>
+          </a:effectRef>
+          <a:fontRef idx="minor">
+            <a:schemeClr val="tx1"/>
+          </a:fontRef>
+        </p:style>
+      </p:cxnSp>
+      <p:sp>
+        <p:nvSpPr>
+          <p:cNvPr id="372" name="TextBox 371"/>
+          <p:cNvSpPr txBox="1"/>
+          <p:nvPr/>
+        </p:nvSpPr>
+        <p:spPr>
+          <a:xfrm rot="16200000">
+            <a:off x="6201519" y="896112"/>
+            <a:ext cx="164592" cy="292608"/>
+          </a:xfrm>
+          <a:prstGeom prst="rect">
+            <a:avLst/>
+          </a:prstGeom>
+          <a:noFill/>
+        </p:spPr>
+        <p:txBody>
+          <a:bodyPr wrap="none">
+            <a:spAutoFit/>
+          </a:bodyPr>
+          <a:lstStyle/>
+          <a:p>
+            <a:pPr algn="ctr">
+              <a:defRPr sz="470">
+                <a:solidFill>
+                  <a:srgbClr val="475569"/>
+                </a:solidFill>
+              </a:defRPr>
+            </a:pPr>
+            <a:r>
+              <a:t>4.5</a:t>
+            </a:r>
+          </a:p>
+        </p:txBody>
+      </p:sp>
+      <p:sp>
+        <p:nvSpPr>
+          <p:cNvPr id="373" name="Rectangle 372"/>
+          <p:cNvSpPr/>
+          <p:nvPr/>
+        </p:nvSpPr>
+        <p:spPr>
+          <a:xfrm>
+            <a:off x="6381929" y="1024127"/>
+            <a:ext cx="4572" cy="6729983"/>
+          </a:xfrm>
+          <a:prstGeom prst="rect">
+            <a:avLst/>
+          </a:prstGeom>
+          <a:solidFill>
+            <a:srgbClr val="94A3B8"/>
+          </a:solidFill>
+          <a:ln>
+            <a:noFill/>
+          </a:ln>
+        </p:spPr>
+        <p:style>
+          <a:lnRef idx="1">
+            <a:schemeClr val="accent1"/>
+          </a:lnRef>
+          <a:fillRef idx="3">
+            <a:schemeClr val="accent1"/>
+          </a:fillRef>
+          <a:effectRef idx="2">
+            <a:schemeClr val="accent1"/>
+          </a:effectRef>
+          <a:fontRef idx="minor">
+            <a:schemeClr val="lt1"/>
+          </a:fontRef>
+        </p:style>
+        <p:txBody>
+          <a:bodyPr rtlCol="0" anchor="ctr"/>
+          <a:lstStyle/>
+          <a:p>
+            <a:pPr algn="ctr"/>
+          </a:p>
+        </p:txBody>
+      </p:sp>
+      <p:cxnSp>
+        <p:nvCxnSpPr>
+          <p:cNvPr id="374" name="Connector 373"/>
+          <p:cNvCxnSpPr/>
+          <p:nvPr/>
+        </p:nvCxnSpPr>
+        <p:spPr>
+          <a:xfrm>
+            <a:off x="6381929" y="1024127"/>
+            <a:ext cx="0" cy="6729984"/>
+          </a:xfrm>
+          <a:prstGeom prst="line">
+            <a:avLst/>
+          </a:prstGeom>
+          <a:ln w="5715">
+            <a:solidFill>
+              <a:srgbClr val="94A3B8"/>
+            </a:solidFill>
+            <a:prstDash val="sysDot"/>
+          </a:ln>
+        </p:spPr>
+        <p:style>
+          <a:lnRef idx="2">
+            <a:schemeClr val="accent1"/>
+          </a:lnRef>
+          <a:fillRef idx="0">
+            <a:schemeClr val="accent1"/>
+          </a:fillRef>
+          <a:effectRef idx="1">
+            <a:schemeClr val="accent1"/>
+          </a:effectRef>
+          <a:fontRef idx="minor">
+            <a:schemeClr val="tx1"/>
+          </a:fontRef>
+        </p:style>
+      </p:cxnSp>
+      <p:sp>
+        <p:nvSpPr>
+          <p:cNvPr id="375" name="TextBox 374"/>
+          <p:cNvSpPr txBox="1"/>
+          <p:nvPr/>
+        </p:nvSpPr>
+        <p:spPr>
+          <a:xfrm rot="16200000">
+            <a:off x="6331637" y="813816"/>
+            <a:ext cx="164592" cy="292608"/>
+          </a:xfrm>
+          <a:prstGeom prst="rect">
+            <a:avLst/>
+          </a:prstGeom>
+          <a:noFill/>
+        </p:spPr>
+        <p:txBody>
+          <a:bodyPr wrap="none">
+            <a:spAutoFit/>
+          </a:bodyPr>
+          <a:lstStyle/>
+          <a:p>
+            <a:pPr algn="ctr">
+              <a:defRPr sz="470">
+                <a:solidFill>
+                  <a:srgbClr val="475569"/>
+                </a:solidFill>
+              </a:defRPr>
+            </a:pPr>
+            <a:r>
+              <a:t>4.6</a:t>
+            </a:r>
+          </a:p>
+        </p:txBody>
+      </p:sp>
+      <p:sp>
+        <p:nvSpPr>
+          <p:cNvPr id="376" name="Rectangle 375"/>
+          <p:cNvSpPr/>
+          <p:nvPr/>
+        </p:nvSpPr>
+        <p:spPr>
+          <a:xfrm>
+            <a:off x="6526506" y="1024127"/>
+            <a:ext cx="4572" cy="6729983"/>
+          </a:xfrm>
+          <a:prstGeom prst="rect">
+            <a:avLst/>
+          </a:prstGeom>
+          <a:solidFill>
+            <a:srgbClr val="94A3B8"/>
+          </a:solidFill>
+          <a:ln>
+            <a:noFill/>
+          </a:ln>
+        </p:spPr>
+        <p:style>
+          <a:lnRef idx="1">
+            <a:schemeClr val="accent1"/>
+          </a:lnRef>
+          <a:fillRef idx="3">
+            <a:schemeClr val="accent1"/>
+          </a:fillRef>
+          <a:effectRef idx="2">
+            <a:schemeClr val="accent1"/>
+          </a:effectRef>
+          <a:fontRef idx="minor">
+            <a:schemeClr val="lt1"/>
+          </a:fontRef>
+        </p:style>
+        <p:txBody>
+          <a:bodyPr rtlCol="0" anchor="ctr"/>
+          <a:lstStyle/>
+          <a:p>
+            <a:pPr algn="ctr"/>
+          </a:p>
+        </p:txBody>
+      </p:sp>
+      <p:cxnSp>
+        <p:nvCxnSpPr>
+          <p:cNvPr id="377" name="Connector 376"/>
+          <p:cNvCxnSpPr/>
+          <p:nvPr/>
+        </p:nvCxnSpPr>
+        <p:spPr>
+          <a:xfrm>
+            <a:off x="6526506" y="1024127"/>
+            <a:ext cx="0" cy="6729984"/>
+          </a:xfrm>
+          <a:prstGeom prst="line">
+            <a:avLst/>
+          </a:prstGeom>
+          <a:ln w="5715">
+            <a:solidFill>
+              <a:srgbClr val="94A3B8"/>
+            </a:solidFill>
+            <a:prstDash val="sysDot"/>
+          </a:ln>
+        </p:spPr>
+        <p:style>
+          <a:lnRef idx="2">
+            <a:schemeClr val="accent1"/>
+          </a:lnRef>
+          <a:fillRef idx="0">
+            <a:schemeClr val="accent1"/>
+          </a:fillRef>
+          <a:effectRef idx="1">
+            <a:schemeClr val="accent1"/>
+          </a:effectRef>
+          <a:fontRef idx="minor">
+            <a:schemeClr val="tx1"/>
+          </a:fontRef>
+        </p:style>
+      </p:cxnSp>
+      <p:sp>
+        <p:nvSpPr>
+          <p:cNvPr id="378" name="TextBox 377"/>
+          <p:cNvSpPr txBox="1"/>
+          <p:nvPr/>
+        </p:nvSpPr>
+        <p:spPr>
+          <a:xfrm rot="16200000">
+            <a:off x="6476214" y="896112"/>
+            <a:ext cx="164592" cy="292608"/>
+          </a:xfrm>
+          <a:prstGeom prst="rect">
+            <a:avLst/>
+          </a:prstGeom>
+          <a:noFill/>
+        </p:spPr>
+        <p:txBody>
+          <a:bodyPr wrap="none">
+            <a:spAutoFit/>
+          </a:bodyPr>
+          <a:lstStyle/>
+          <a:p>
+            <a:pPr algn="ctr">
+              <a:defRPr sz="470">
+                <a:solidFill>
+                  <a:srgbClr val="475569"/>
+                </a:solidFill>
+              </a:defRPr>
+            </a:pPr>
+            <a:r>
+              <a:t>4.7</a:t>
+            </a:r>
+          </a:p>
+        </p:txBody>
+      </p:sp>
+      <p:sp>
+        <p:nvSpPr>
+          <p:cNvPr id="379" name="Rectangle 378"/>
+          <p:cNvSpPr/>
+          <p:nvPr/>
+        </p:nvSpPr>
+        <p:spPr>
+          <a:xfrm>
+            <a:off x="6671083" y="1024127"/>
+            <a:ext cx="4572" cy="6729983"/>
+          </a:xfrm>
+          <a:prstGeom prst="rect">
+            <a:avLst/>
+          </a:prstGeom>
+          <a:solidFill>
+            <a:srgbClr val="94A3B8"/>
+          </a:solidFill>
+          <a:ln>
+            <a:noFill/>
+          </a:ln>
+        </p:spPr>
+        <p:style>
+          <a:lnRef idx="1">
+            <a:schemeClr val="accent1"/>
+          </a:lnRef>
+          <a:fillRef idx="3">
+            <a:schemeClr val="accent1"/>
+          </a:fillRef>
+          <a:effectRef idx="2">
+            <a:schemeClr val="accent1"/>
+          </a:effectRef>
+          <a:fontRef idx="minor">
+            <a:schemeClr val="lt1"/>
+          </a:fontRef>
+        </p:style>
+        <p:txBody>
+          <a:bodyPr rtlCol="0" anchor="ctr"/>
+          <a:lstStyle/>
+          <a:p>
+            <a:pPr algn="ctr"/>
+          </a:p>
+        </p:txBody>
+      </p:sp>
+      <p:cxnSp>
+        <p:nvCxnSpPr>
+          <p:cNvPr id="380" name="Connector 379"/>
+          <p:cNvCxnSpPr/>
+          <p:nvPr/>
+        </p:nvCxnSpPr>
+        <p:spPr>
+          <a:xfrm>
+            <a:off x="6671083" y="1024127"/>
+            <a:ext cx="0" cy="6729984"/>
+          </a:xfrm>
+          <a:prstGeom prst="line">
+            <a:avLst/>
+          </a:prstGeom>
+          <a:ln w="5715">
+            <a:solidFill>
+              <a:srgbClr val="94A3B8"/>
+            </a:solidFill>
+            <a:prstDash val="sysDot"/>
+          </a:ln>
+        </p:spPr>
+        <p:style>
+          <a:lnRef idx="2">
+            <a:schemeClr val="accent1"/>
+          </a:lnRef>
+          <a:fillRef idx="0">
+            <a:schemeClr val="accent1"/>
+          </a:fillRef>
+          <a:effectRef idx="1">
+            <a:schemeClr val="accent1"/>
+          </a:effectRef>
+          <a:fontRef idx="minor">
+            <a:schemeClr val="tx1"/>
+          </a:fontRef>
+        </p:style>
+      </p:cxnSp>
+      <p:sp>
+        <p:nvSpPr>
+          <p:cNvPr id="381" name="TextBox 380"/>
+          <p:cNvSpPr txBox="1"/>
+          <p:nvPr/>
+        </p:nvSpPr>
+        <p:spPr>
+          <a:xfrm rot="16200000">
+            <a:off x="6620791" y="813816"/>
+            <a:ext cx="164592" cy="292608"/>
+          </a:xfrm>
+          <a:prstGeom prst="rect">
+            <a:avLst/>
+          </a:prstGeom>
+          <a:noFill/>
+        </p:spPr>
+        <p:txBody>
+          <a:bodyPr wrap="none">
+            <a:spAutoFit/>
+          </a:bodyPr>
+          <a:lstStyle/>
+          <a:p>
+            <a:pPr algn="ctr">
+              <a:defRPr sz="470">
+                <a:solidFill>
+                  <a:srgbClr val="475569"/>
+                </a:solidFill>
+              </a:defRPr>
+            </a:pPr>
+            <a:r>
+              <a:t>4.8</a:t>
+            </a:r>
+          </a:p>
+        </p:txBody>
+      </p:sp>
+      <p:sp>
+        <p:nvSpPr>
+          <p:cNvPr id="382" name="Rectangle 381"/>
+          <p:cNvSpPr/>
+          <p:nvPr/>
+        </p:nvSpPr>
+        <p:spPr>
+          <a:xfrm>
+            <a:off x="6815659" y="1024127"/>
+            <a:ext cx="4572" cy="6729983"/>
+          </a:xfrm>
+          <a:prstGeom prst="rect">
+            <a:avLst/>
+          </a:prstGeom>
+          <a:solidFill>
+            <a:srgbClr val="94A3B8"/>
+          </a:solidFill>
+          <a:ln>
+            <a:noFill/>
+          </a:ln>
+        </p:spPr>
+        <p:style>
+          <a:lnRef idx="1">
+            <a:schemeClr val="accent1"/>
+          </a:lnRef>
+          <a:fillRef idx="3">
+            <a:schemeClr val="accent1"/>
+          </a:fillRef>
+          <a:effectRef idx="2">
+            <a:schemeClr val="accent1"/>
+          </a:effectRef>
+          <a:fontRef idx="minor">
+            <a:schemeClr val="lt1"/>
+          </a:fontRef>
+        </p:style>
+        <p:txBody>
+          <a:bodyPr rtlCol="0" anchor="ctr"/>
+          <a:lstStyle/>
+          <a:p>
+            <a:pPr algn="ctr"/>
+          </a:p>
+        </p:txBody>
+      </p:sp>
+      <p:cxnSp>
+        <p:nvCxnSpPr>
+          <p:cNvPr id="383" name="Connector 382"/>
+          <p:cNvCxnSpPr/>
+          <p:nvPr/>
+        </p:nvCxnSpPr>
+        <p:spPr>
+          <a:xfrm>
+            <a:off x="6815659" y="1024127"/>
+            <a:ext cx="0" cy="6729984"/>
+          </a:xfrm>
+          <a:prstGeom prst="line">
+            <a:avLst/>
+          </a:prstGeom>
+          <a:ln w="5715">
+            <a:solidFill>
+              <a:srgbClr val="94A3B8"/>
+            </a:solidFill>
+            <a:prstDash val="sysDot"/>
+          </a:ln>
+        </p:spPr>
+        <p:style>
+          <a:lnRef idx="2">
+            <a:schemeClr val="accent1"/>
+          </a:lnRef>
+          <a:fillRef idx="0">
+            <a:schemeClr val="accent1"/>
+          </a:fillRef>
+          <a:effectRef idx="1">
+            <a:schemeClr val="accent1"/>
+          </a:effectRef>
+          <a:fontRef idx="minor">
+            <a:schemeClr val="tx1"/>
+          </a:fontRef>
+        </p:style>
+      </p:cxnSp>
+      <p:sp>
+        <p:nvSpPr>
+          <p:cNvPr id="384" name="TextBox 383"/>
+          <p:cNvSpPr txBox="1"/>
+          <p:nvPr/>
+        </p:nvSpPr>
+        <p:spPr>
+          <a:xfrm rot="16200000">
+            <a:off x="6765367" y="896112"/>
+            <a:ext cx="164592" cy="292608"/>
+          </a:xfrm>
+          <a:prstGeom prst="rect">
+            <a:avLst/>
+          </a:prstGeom>
+          <a:noFill/>
+        </p:spPr>
+        <p:txBody>
+          <a:bodyPr wrap="none">
+            <a:spAutoFit/>
+          </a:bodyPr>
+          <a:lstStyle/>
+          <a:p>
+            <a:pPr algn="ctr">
+              <a:defRPr sz="470">
+                <a:solidFill>
+                  <a:srgbClr val="475569"/>
+                </a:solidFill>
+              </a:defRPr>
+            </a:pPr>
+            <a:r>
+              <a:t>4.9</a:t>
+            </a:r>
+          </a:p>
+        </p:txBody>
+      </p:sp>
+      <p:sp>
+        <p:nvSpPr>
+          <p:cNvPr id="385" name="Rectangle 384"/>
+          <p:cNvSpPr/>
+          <p:nvPr/>
+        </p:nvSpPr>
+        <p:spPr>
+          <a:xfrm>
+            <a:off x="6960236" y="1024127"/>
+            <a:ext cx="4572" cy="6729983"/>
+          </a:xfrm>
+          <a:prstGeom prst="rect">
+            <a:avLst/>
+          </a:prstGeom>
+          <a:solidFill>
+            <a:srgbClr val="94A3B8"/>
+          </a:solidFill>
+          <a:ln>
+            <a:noFill/>
+          </a:ln>
+        </p:spPr>
+        <p:style>
+          <a:lnRef idx="1">
+            <a:schemeClr val="accent1"/>
+          </a:lnRef>
+          <a:fillRef idx="3">
+            <a:schemeClr val="accent1"/>
+          </a:fillRef>
+          <a:effectRef idx="2">
+            <a:schemeClr val="accent1"/>
+          </a:effectRef>
+          <a:fontRef idx="minor">
+            <a:schemeClr val="lt1"/>
+          </a:fontRef>
+        </p:style>
+        <p:txBody>
+          <a:bodyPr rtlCol="0" anchor="ctr"/>
+          <a:lstStyle/>
+          <a:p>
+            <a:pPr algn="ctr"/>
+          </a:p>
+        </p:txBody>
+      </p:sp>
+      <p:cxnSp>
+        <p:nvCxnSpPr>
+          <p:cNvPr id="386" name="Connector 385"/>
+          <p:cNvCxnSpPr/>
+          <p:nvPr/>
+        </p:nvCxnSpPr>
+        <p:spPr>
+          <a:xfrm>
+            <a:off x="6960236" y="1024127"/>
+            <a:ext cx="0" cy="6729984"/>
+          </a:xfrm>
+          <a:prstGeom prst="line">
+            <a:avLst/>
+          </a:prstGeom>
+          <a:ln w="5715">
+            <a:solidFill>
+              <a:srgbClr val="94A3B8"/>
+            </a:solidFill>
+            <a:prstDash val="sysDot"/>
+          </a:ln>
+        </p:spPr>
+        <p:style>
+          <a:lnRef idx="2">
+            <a:schemeClr val="accent1"/>
+          </a:lnRef>
+          <a:fillRef idx="0">
+            <a:schemeClr val="accent1"/>
+          </a:fillRef>
+          <a:effectRef idx="1">
+            <a:schemeClr val="accent1"/>
+          </a:effectRef>
+          <a:fontRef idx="minor">
+            <a:schemeClr val="tx1"/>
+          </a:fontRef>
+        </p:style>
+      </p:cxnSp>
+      <p:sp>
+        <p:nvSpPr>
+          <p:cNvPr id="387" name="TextBox 386"/>
+          <p:cNvSpPr txBox="1"/>
+          <p:nvPr/>
+        </p:nvSpPr>
+        <p:spPr>
+          <a:xfrm rot="16200000">
+            <a:off x="6909944" y="813816"/>
+            <a:ext cx="164592" cy="292608"/>
+          </a:xfrm>
+          <a:prstGeom prst="rect">
+            <a:avLst/>
+          </a:prstGeom>
+          <a:noFill/>
+        </p:spPr>
+        <p:txBody>
+          <a:bodyPr wrap="none">
+            <a:spAutoFit/>
+          </a:bodyPr>
+          <a:lstStyle/>
+          <a:p>
+            <a:pPr algn="ctr">
+              <a:defRPr sz="470">
+                <a:solidFill>
+                  <a:srgbClr val="475569"/>
+                </a:solidFill>
+              </a:defRPr>
+            </a:pPr>
+            <a:r>
+              <a:t>4.10</a:t>
+            </a:r>
+          </a:p>
+        </p:txBody>
+      </p:sp>
+      <p:sp>
+        <p:nvSpPr>
+          <p:cNvPr id="388" name="Rectangle 387"/>
+          <p:cNvSpPr/>
+          <p:nvPr/>
+        </p:nvSpPr>
+        <p:spPr>
+          <a:xfrm>
+            <a:off x="7104812" y="1024127"/>
+            <a:ext cx="4572" cy="6729983"/>
+          </a:xfrm>
+          <a:prstGeom prst="rect">
+            <a:avLst/>
+          </a:prstGeom>
+          <a:solidFill>
+            <a:srgbClr val="94A3B8"/>
+          </a:solidFill>
+          <a:ln>
+            <a:noFill/>
+          </a:ln>
+        </p:spPr>
+        <p:style>
+          <a:lnRef idx="1">
+            <a:schemeClr val="accent1"/>
+          </a:lnRef>
+          <a:fillRef idx="3">
+            <a:schemeClr val="accent1"/>
+          </a:fillRef>
+          <a:effectRef idx="2">
+            <a:schemeClr val="accent1"/>
+          </a:effectRef>
+          <a:fontRef idx="minor">
+            <a:schemeClr val="lt1"/>
+          </a:fontRef>
+        </p:style>
+        <p:txBody>
+          <a:bodyPr rtlCol="0" anchor="ctr"/>
+          <a:lstStyle/>
+          <a:p>
+            <a:pPr algn="ctr"/>
+          </a:p>
+        </p:txBody>
+      </p:sp>
+      <p:cxnSp>
+        <p:nvCxnSpPr>
+          <p:cNvPr id="389" name="Connector 388"/>
+          <p:cNvCxnSpPr/>
+          <p:nvPr/>
+        </p:nvCxnSpPr>
+        <p:spPr>
+          <a:xfrm>
+            <a:off x="7104812" y="1024127"/>
+            <a:ext cx="0" cy="6729984"/>
+          </a:xfrm>
+          <a:prstGeom prst="line">
+            <a:avLst/>
+          </a:prstGeom>
+          <a:ln w="5715">
+            <a:solidFill>
+              <a:srgbClr val="94A3B8"/>
+            </a:solidFill>
+            <a:prstDash val="sysDot"/>
+          </a:ln>
+        </p:spPr>
+        <p:style>
+          <a:lnRef idx="2">
+            <a:schemeClr val="accent1"/>
+          </a:lnRef>
+          <a:fillRef idx="0">
+            <a:schemeClr val="accent1"/>
+          </a:fillRef>
+          <a:effectRef idx="1">
+            <a:schemeClr val="accent1"/>
+          </a:effectRef>
+          <a:fontRef idx="minor">
+            <a:schemeClr val="tx1"/>
+          </a:fontRef>
+        </p:style>
+      </p:cxnSp>
+      <p:sp>
+        <p:nvSpPr>
+          <p:cNvPr id="390" name="TextBox 389"/>
+          <p:cNvSpPr txBox="1"/>
+          <p:nvPr/>
+        </p:nvSpPr>
+        <p:spPr>
+          <a:xfrm rot="16200000">
+            <a:off x="7054520" y="896112"/>
+            <a:ext cx="164592" cy="292608"/>
+          </a:xfrm>
+          <a:prstGeom prst="rect">
+            <a:avLst/>
+          </a:prstGeom>
+          <a:noFill/>
+        </p:spPr>
+        <p:txBody>
+          <a:bodyPr wrap="none">
+            <a:spAutoFit/>
+          </a:bodyPr>
+          <a:lstStyle/>
+          <a:p>
+            <a:pPr algn="ctr">
+              <a:defRPr sz="470">
+                <a:solidFill>
+                  <a:srgbClr val="475569"/>
+                </a:solidFill>
+              </a:defRPr>
+            </a:pPr>
+            <a:r>
+              <a:t>4.11</a:t>
+            </a:r>
+          </a:p>
+        </p:txBody>
+      </p:sp>
+      <p:sp>
+        <p:nvSpPr>
+          <p:cNvPr id="391" name="Rectangle 390"/>
+          <p:cNvSpPr/>
+          <p:nvPr/>
+        </p:nvSpPr>
+        <p:spPr>
+          <a:xfrm>
+            <a:off x="7234931" y="1024127"/>
+            <a:ext cx="4572" cy="6729983"/>
+          </a:xfrm>
+          <a:prstGeom prst="rect">
+            <a:avLst/>
+          </a:prstGeom>
+          <a:solidFill>
+            <a:srgbClr val="94A3B8"/>
+          </a:solidFill>
+          <a:ln>
+            <a:noFill/>
+          </a:ln>
+        </p:spPr>
+        <p:style>
+          <a:lnRef idx="1">
+            <a:schemeClr val="accent1"/>
+          </a:lnRef>
+          <a:fillRef idx="3">
+            <a:schemeClr val="accent1"/>
+          </a:fillRef>
+          <a:effectRef idx="2">
+            <a:schemeClr val="accent1"/>
+          </a:effectRef>
+          <a:fontRef idx="minor">
+            <a:schemeClr val="lt1"/>
+          </a:fontRef>
+        </p:style>
+        <p:txBody>
+          <a:bodyPr rtlCol="0" anchor="ctr"/>
+          <a:lstStyle/>
+          <a:p>
+            <a:pPr algn="ctr"/>
+          </a:p>
+        </p:txBody>
+      </p:sp>
+      <p:cxnSp>
+        <p:nvCxnSpPr>
+          <p:cNvPr id="392" name="Connector 391"/>
+          <p:cNvCxnSpPr/>
+          <p:nvPr/>
+        </p:nvCxnSpPr>
+        <p:spPr>
+          <a:xfrm>
+            <a:off x="7234931" y="1024127"/>
+            <a:ext cx="0" cy="6729984"/>
+          </a:xfrm>
+          <a:prstGeom prst="line">
+            <a:avLst/>
+          </a:prstGeom>
+          <a:ln w="5715">
+            <a:solidFill>
+              <a:srgbClr val="94A3B8"/>
+            </a:solidFill>
+            <a:prstDash val="sysDot"/>
+          </a:ln>
+        </p:spPr>
+        <p:style>
+          <a:lnRef idx="2">
+            <a:schemeClr val="accent1"/>
+          </a:lnRef>
+          <a:fillRef idx="0">
+            <a:schemeClr val="accent1"/>
+          </a:fillRef>
+          <a:effectRef idx="1">
+            <a:schemeClr val="accent1"/>
+          </a:effectRef>
+          <a:fontRef idx="minor">
+            <a:schemeClr val="tx1"/>
+          </a:fontRef>
+        </p:style>
+      </p:cxnSp>
+      <p:sp>
+        <p:nvSpPr>
+          <p:cNvPr id="393" name="TextBox 392"/>
+          <p:cNvSpPr txBox="1"/>
+          <p:nvPr/>
+        </p:nvSpPr>
+        <p:spPr>
+          <a:xfrm rot="16200000">
+            <a:off x="7184639" y="813816"/>
+            <a:ext cx="164592" cy="292608"/>
+          </a:xfrm>
+          <a:prstGeom prst="rect">
+            <a:avLst/>
+          </a:prstGeom>
+          <a:noFill/>
+        </p:spPr>
+        <p:txBody>
+          <a:bodyPr wrap="none">
+            <a:spAutoFit/>
+          </a:bodyPr>
+          <a:lstStyle/>
+          <a:p>
+            <a:pPr algn="ctr">
+              <a:defRPr sz="470">
+                <a:solidFill>
+                  <a:srgbClr val="475569"/>
+                </a:solidFill>
+              </a:defRPr>
+            </a:pPr>
+            <a:r>
+              <a:t>4.12</a:t>
+            </a:r>
+          </a:p>
+        </p:txBody>
+      </p:sp>
+      <p:sp>
+        <p:nvSpPr>
+          <p:cNvPr id="394" name="Rectangle 393"/>
+          <p:cNvSpPr/>
+          <p:nvPr/>
+        </p:nvSpPr>
+        <p:spPr>
+          <a:xfrm>
+            <a:off x="7365050" y="1024127"/>
+            <a:ext cx="4572" cy="6729983"/>
+          </a:xfrm>
+          <a:prstGeom prst="rect">
+            <a:avLst/>
+          </a:prstGeom>
+          <a:solidFill>
+            <a:srgbClr val="94A3B8"/>
+          </a:solidFill>
+          <a:ln>
+            <a:noFill/>
+          </a:ln>
+        </p:spPr>
+        <p:style>
+          <a:lnRef idx="1">
+            <a:schemeClr val="accent1"/>
+          </a:lnRef>
+          <a:fillRef idx="3">
+            <a:schemeClr val="accent1"/>
+          </a:fillRef>
+          <a:effectRef idx="2">
+            <a:schemeClr val="accent1"/>
+          </a:effectRef>
+          <a:fontRef idx="minor">
+            <a:schemeClr val="lt1"/>
+          </a:fontRef>
+        </p:style>
+        <p:txBody>
+          <a:bodyPr rtlCol="0" anchor="ctr"/>
+          <a:lstStyle/>
+          <a:p>
+            <a:pPr algn="ctr"/>
+          </a:p>
+        </p:txBody>
+      </p:sp>
+      <p:cxnSp>
+        <p:nvCxnSpPr>
+          <p:cNvPr id="395" name="Connector 394"/>
+          <p:cNvCxnSpPr/>
+          <p:nvPr/>
+        </p:nvCxnSpPr>
+        <p:spPr>
+          <a:xfrm>
+            <a:off x="7365050" y="1024127"/>
+            <a:ext cx="0" cy="6729984"/>
+          </a:xfrm>
+          <a:prstGeom prst="line">
+            <a:avLst/>
+          </a:prstGeom>
+          <a:ln w="5715">
+            <a:solidFill>
+              <a:srgbClr val="94A3B8"/>
+            </a:solidFill>
+            <a:prstDash val="sysDot"/>
+          </a:ln>
+        </p:spPr>
+        <p:style>
+          <a:lnRef idx="2">
+            <a:schemeClr val="accent1"/>
+          </a:lnRef>
+          <a:fillRef idx="0">
+            <a:schemeClr val="accent1"/>
+          </a:fillRef>
+          <a:effectRef idx="1">
+            <a:schemeClr val="accent1"/>
+          </a:effectRef>
+          <a:fontRef idx="minor">
+            <a:schemeClr val="tx1"/>
+          </a:fontRef>
+        </p:style>
+      </p:cxnSp>
+      <p:sp>
+        <p:nvSpPr>
+          <p:cNvPr id="396" name="TextBox 395"/>
+          <p:cNvSpPr txBox="1"/>
+          <p:nvPr/>
+        </p:nvSpPr>
+        <p:spPr>
+          <a:xfrm rot="16200000">
+            <a:off x="7314758" y="896112"/>
+            <a:ext cx="164592" cy="292608"/>
+          </a:xfrm>
+          <a:prstGeom prst="rect">
+            <a:avLst/>
+          </a:prstGeom>
+          <a:noFill/>
+        </p:spPr>
+        <p:txBody>
+          <a:bodyPr wrap="none">
+            <a:spAutoFit/>
+          </a:bodyPr>
+          <a:lstStyle/>
+          <a:p>
+            <a:pPr algn="ctr">
+              <a:defRPr sz="470">
+                <a:solidFill>
+                  <a:srgbClr val="475569"/>
+                </a:solidFill>
+              </a:defRPr>
+            </a:pPr>
+            <a:r>
+              <a:t>4.13</a:t>
+            </a:r>
+          </a:p>
+        </p:txBody>
+      </p:sp>
+      <p:sp>
+        <p:nvSpPr>
+          <p:cNvPr id="397" name="Rectangle 396"/>
+          <p:cNvSpPr/>
+          <p:nvPr/>
+        </p:nvSpPr>
+        <p:spPr>
+          <a:xfrm>
+            <a:off x="7509627" y="1024127"/>
+            <a:ext cx="4572" cy="6729983"/>
+          </a:xfrm>
+          <a:prstGeom prst="rect">
+            <a:avLst/>
+          </a:prstGeom>
+          <a:solidFill>
+            <a:srgbClr val="94A3B8"/>
+          </a:solidFill>
+          <a:ln>
+            <a:noFill/>
+          </a:ln>
+        </p:spPr>
+        <p:style>
+          <a:lnRef idx="1">
+            <a:schemeClr val="accent1"/>
+          </a:lnRef>
+          <a:fillRef idx="3">
+            <a:schemeClr val="accent1"/>
+          </a:fillRef>
+          <a:effectRef idx="2">
+            <a:schemeClr val="accent1"/>
+          </a:effectRef>
+          <a:fontRef idx="minor">
+            <a:schemeClr val="lt1"/>
+          </a:fontRef>
+        </p:style>
+        <p:txBody>
+          <a:bodyPr rtlCol="0" anchor="ctr"/>
+          <a:lstStyle/>
+          <a:p>
+            <a:pPr algn="ctr"/>
+          </a:p>
+        </p:txBody>
+      </p:sp>
+      <p:cxnSp>
+        <p:nvCxnSpPr>
+          <p:cNvPr id="398" name="Connector 397"/>
+          <p:cNvCxnSpPr/>
+          <p:nvPr/>
+        </p:nvCxnSpPr>
+        <p:spPr>
+          <a:xfrm>
+            <a:off x="7509627" y="1024127"/>
+            <a:ext cx="0" cy="6729984"/>
+          </a:xfrm>
+          <a:prstGeom prst="line">
+            <a:avLst/>
+          </a:prstGeom>
+          <a:ln w="5715">
+            <a:solidFill>
+              <a:srgbClr val="94A3B8"/>
+            </a:solidFill>
+            <a:prstDash val="sysDot"/>
+          </a:ln>
+        </p:spPr>
+        <p:style>
+          <a:lnRef idx="2">
+            <a:schemeClr val="accent1"/>
+          </a:lnRef>
+          <a:fillRef idx="0">
+            <a:schemeClr val="accent1"/>
+          </a:fillRef>
+          <a:effectRef idx="1">
+            <a:schemeClr val="accent1"/>
+          </a:effectRef>
+          <a:fontRef idx="minor">
+            <a:schemeClr val="tx1"/>
+          </a:fontRef>
+        </p:style>
+      </p:cxnSp>
+      <p:sp>
+        <p:nvSpPr>
+          <p:cNvPr id="399" name="TextBox 398"/>
+          <p:cNvSpPr txBox="1"/>
+          <p:nvPr/>
+        </p:nvSpPr>
+        <p:spPr>
+          <a:xfrm rot="16200000">
+            <a:off x="7459335" y="813816"/>
+            <a:ext cx="164592" cy="292608"/>
+          </a:xfrm>
+          <a:prstGeom prst="rect">
+            <a:avLst/>
+          </a:prstGeom>
+          <a:noFill/>
+        </p:spPr>
+        <p:txBody>
+          <a:bodyPr wrap="none">
+            <a:spAutoFit/>
+          </a:bodyPr>
+          <a:lstStyle/>
+          <a:p>
+            <a:pPr algn="ctr">
+              <a:defRPr sz="470">
+                <a:solidFill>
+                  <a:srgbClr val="475569"/>
+                </a:solidFill>
+              </a:defRPr>
+            </a:pPr>
+            <a:r>
+              <a:t>4.14</a:t>
+            </a:r>
+          </a:p>
+        </p:txBody>
+      </p:sp>
+      <p:sp>
+        <p:nvSpPr>
+          <p:cNvPr id="400" name="Rectangle 399"/>
+          <p:cNvSpPr/>
+          <p:nvPr/>
+        </p:nvSpPr>
+        <p:spPr>
+          <a:xfrm>
+            <a:off x="7668661" y="1024127"/>
+            <a:ext cx="4572" cy="6729983"/>
+          </a:xfrm>
+          <a:prstGeom prst="rect">
+            <a:avLst/>
+          </a:prstGeom>
+          <a:solidFill>
+            <a:srgbClr val="94A3B8"/>
+          </a:solidFill>
+          <a:ln>
+            <a:noFill/>
+          </a:ln>
+        </p:spPr>
+        <p:style>
+          <a:lnRef idx="1">
+            <a:schemeClr val="accent1"/>
+          </a:lnRef>
+          <a:fillRef idx="3">
+            <a:schemeClr val="accent1"/>
+          </a:fillRef>
+          <a:effectRef idx="2">
+            <a:schemeClr val="accent1"/>
+          </a:effectRef>
+          <a:fontRef idx="minor">
+            <a:schemeClr val="lt1"/>
+          </a:fontRef>
+        </p:style>
+        <p:txBody>
+          <a:bodyPr rtlCol="0" anchor="ctr"/>
+          <a:lstStyle/>
+          <a:p>
+            <a:pPr algn="ctr"/>
+          </a:p>
+        </p:txBody>
+      </p:sp>
+      <p:cxnSp>
+        <p:nvCxnSpPr>
+          <p:cNvPr id="401" name="Connector 400"/>
+          <p:cNvCxnSpPr/>
+          <p:nvPr/>
+        </p:nvCxnSpPr>
+        <p:spPr>
+          <a:xfrm>
+            <a:off x="7668661" y="1024127"/>
+            <a:ext cx="0" cy="6729984"/>
+          </a:xfrm>
+          <a:prstGeom prst="line">
+            <a:avLst/>
+          </a:prstGeom>
+          <a:ln w="5715">
+            <a:solidFill>
+              <a:srgbClr val="94A3B8"/>
+            </a:solidFill>
+            <a:prstDash val="sysDot"/>
+          </a:ln>
+        </p:spPr>
+        <p:style>
+          <a:lnRef idx="2">
+            <a:schemeClr val="accent1"/>
+          </a:lnRef>
+          <a:fillRef idx="0">
+            <a:schemeClr val="accent1"/>
+          </a:fillRef>
+          <a:effectRef idx="1">
+            <a:schemeClr val="accent1"/>
+          </a:effectRef>
+          <a:fontRef idx="minor">
+            <a:schemeClr val="tx1"/>
+          </a:fontRef>
+        </p:style>
+      </p:cxnSp>
+      <p:sp>
+        <p:nvSpPr>
+          <p:cNvPr id="402" name="TextBox 401"/>
+          <p:cNvSpPr txBox="1"/>
+          <p:nvPr/>
+        </p:nvSpPr>
+        <p:spPr>
+          <a:xfrm rot="16200000">
+            <a:off x="7618369" y="896112"/>
+            <a:ext cx="164592" cy="292608"/>
+          </a:xfrm>
+          <a:prstGeom prst="rect">
+            <a:avLst/>
+          </a:prstGeom>
+          <a:noFill/>
+        </p:spPr>
+        <p:txBody>
+          <a:bodyPr wrap="none">
+            <a:spAutoFit/>
+          </a:bodyPr>
+          <a:lstStyle/>
+          <a:p>
+            <a:pPr algn="ctr">
+              <a:defRPr sz="470">
+                <a:solidFill>
+                  <a:srgbClr val="475569"/>
+                </a:solidFill>
+              </a:defRPr>
+            </a:pPr>
+            <a:r>
+              <a:t>4.15</a:t>
+            </a:r>
+          </a:p>
+        </p:txBody>
+      </p:sp>
+      <p:sp>
+        <p:nvSpPr>
+          <p:cNvPr id="403" name="Rectangle 402"/>
+          <p:cNvSpPr/>
+          <p:nvPr/>
+        </p:nvSpPr>
+        <p:spPr>
+          <a:xfrm>
+            <a:off x="7798780" y="1024127"/>
+            <a:ext cx="4572" cy="6729983"/>
+          </a:xfrm>
+          <a:prstGeom prst="rect">
+            <a:avLst/>
+          </a:prstGeom>
+          <a:solidFill>
+            <a:srgbClr val="94A3B8"/>
+          </a:solidFill>
+          <a:ln>
+            <a:noFill/>
+          </a:ln>
+        </p:spPr>
+        <p:style>
+          <a:lnRef idx="1">
+            <a:schemeClr val="accent1"/>
+          </a:lnRef>
+          <a:fillRef idx="3">
+            <a:schemeClr val="accent1"/>
+          </a:fillRef>
+          <a:effectRef idx="2">
+            <a:schemeClr val="accent1"/>
+          </a:effectRef>
+          <a:fontRef idx="minor">
+            <a:schemeClr val="lt1"/>
+          </a:fontRef>
+        </p:style>
+        <p:txBody>
+          <a:bodyPr rtlCol="0" anchor="ctr"/>
+          <a:lstStyle/>
+          <a:p>
+            <a:pPr algn="ctr"/>
+          </a:p>
+        </p:txBody>
+      </p:sp>
+      <p:cxnSp>
+        <p:nvCxnSpPr>
+          <p:cNvPr id="404" name="Connector 403"/>
+          <p:cNvCxnSpPr/>
+          <p:nvPr/>
+        </p:nvCxnSpPr>
+        <p:spPr>
+          <a:xfrm>
+            <a:off x="7798780" y="1024127"/>
+            <a:ext cx="0" cy="6729984"/>
+          </a:xfrm>
+          <a:prstGeom prst="line">
+            <a:avLst/>
+          </a:prstGeom>
+          <a:ln w="5715">
+            <a:solidFill>
+              <a:srgbClr val="94A3B8"/>
+            </a:solidFill>
+            <a:prstDash val="sysDot"/>
+          </a:ln>
+        </p:spPr>
+        <p:style>
+          <a:lnRef idx="2">
+            <a:schemeClr val="accent1"/>
+          </a:lnRef>
+          <a:fillRef idx="0">
+            <a:schemeClr val="accent1"/>
+          </a:fillRef>
+          <a:effectRef idx="1">
+            <a:schemeClr val="accent1"/>
+          </a:effectRef>
+          <a:fontRef idx="minor">
+            <a:schemeClr val="tx1"/>
+          </a:fontRef>
+        </p:style>
+      </p:cxnSp>
+      <p:sp>
+        <p:nvSpPr>
+          <p:cNvPr id="405" name="TextBox 404"/>
+          <p:cNvSpPr txBox="1"/>
+          <p:nvPr/>
+        </p:nvSpPr>
+        <p:spPr>
+          <a:xfrm rot="16200000">
+            <a:off x="7748488" y="813816"/>
+            <a:ext cx="164592" cy="292608"/>
+          </a:xfrm>
+          <a:prstGeom prst="rect">
+            <a:avLst/>
+          </a:prstGeom>
+          <a:noFill/>
+        </p:spPr>
+        <p:txBody>
+          <a:bodyPr wrap="none">
+            <a:spAutoFit/>
+          </a:bodyPr>
+          <a:lstStyle/>
+          <a:p>
+            <a:pPr algn="ctr">
+              <a:defRPr sz="470">
+                <a:solidFill>
+                  <a:srgbClr val="475569"/>
+                </a:solidFill>
+              </a:defRPr>
+            </a:pPr>
+            <a:r>
+              <a:t>4.16</a:t>
+            </a:r>
+          </a:p>
+        </p:txBody>
+      </p:sp>
+      <p:sp>
+        <p:nvSpPr>
+          <p:cNvPr id="406" name="Rectangle 405"/>
+          <p:cNvSpPr/>
+          <p:nvPr/>
+        </p:nvSpPr>
+        <p:spPr>
+          <a:xfrm>
+            <a:off x="7928899" y="1024127"/>
+            <a:ext cx="4572" cy="6729983"/>
+          </a:xfrm>
+          <a:prstGeom prst="rect">
+            <a:avLst/>
+          </a:prstGeom>
+          <a:solidFill>
+            <a:srgbClr val="94A3B8"/>
+          </a:solidFill>
+          <a:ln>
+            <a:noFill/>
+          </a:ln>
+        </p:spPr>
+        <p:style>
+          <a:lnRef idx="1">
+            <a:schemeClr val="accent1"/>
+          </a:lnRef>
+          <a:fillRef idx="3">
+            <a:schemeClr val="accent1"/>
+          </a:fillRef>
+          <a:effectRef idx="2">
+            <a:schemeClr val="accent1"/>
+          </a:effectRef>
+          <a:fontRef idx="minor">
+            <a:schemeClr val="lt1"/>
+          </a:fontRef>
+        </p:style>
+        <p:txBody>
+          <a:bodyPr rtlCol="0" anchor="ctr"/>
+          <a:lstStyle/>
+          <a:p>
+            <a:pPr algn="ctr"/>
+          </a:p>
+        </p:txBody>
+      </p:sp>
+      <p:cxnSp>
+        <p:nvCxnSpPr>
+          <p:cNvPr id="407" name="Connector 406"/>
+          <p:cNvCxnSpPr/>
+          <p:nvPr/>
+        </p:nvCxnSpPr>
+        <p:spPr>
+          <a:xfrm>
+            <a:off x="7928899" y="1024127"/>
+            <a:ext cx="0" cy="6729984"/>
+          </a:xfrm>
+          <a:prstGeom prst="line">
+            <a:avLst/>
+          </a:prstGeom>
+          <a:ln w="5715">
+            <a:solidFill>
+              <a:srgbClr val="94A3B8"/>
+            </a:solidFill>
+            <a:prstDash val="sysDot"/>
+          </a:ln>
+        </p:spPr>
+        <p:style>
+          <a:lnRef idx="2">
+            <a:schemeClr val="accent1"/>
+          </a:lnRef>
+          <a:fillRef idx="0">
+            <a:schemeClr val="accent1"/>
+          </a:fillRef>
+          <a:effectRef idx="1">
+            <a:schemeClr val="accent1"/>
+          </a:effectRef>
+          <a:fontRef idx="minor">
+            <a:schemeClr val="tx1"/>
+          </a:fontRef>
+        </p:style>
+      </p:cxnSp>
+      <p:sp>
+        <p:nvSpPr>
+          <p:cNvPr id="408" name="TextBox 407"/>
+          <p:cNvSpPr txBox="1"/>
+          <p:nvPr/>
+        </p:nvSpPr>
+        <p:spPr>
+          <a:xfrm rot="16200000">
+            <a:off x="7878607" y="896112"/>
+            <a:ext cx="164592" cy="292608"/>
+          </a:xfrm>
+          <a:prstGeom prst="rect">
+            <a:avLst/>
+          </a:prstGeom>
+          <a:noFill/>
+        </p:spPr>
+        <p:txBody>
+          <a:bodyPr wrap="none">
+            <a:spAutoFit/>
+          </a:bodyPr>
+          <a:lstStyle/>
+          <a:p>
+            <a:pPr algn="ctr">
+              <a:defRPr sz="470">
+                <a:solidFill>
+                  <a:srgbClr val="475569"/>
+                </a:solidFill>
+              </a:defRPr>
+            </a:pPr>
+            <a:r>
+              <a:t>4.17</a:t>
+            </a:r>
+          </a:p>
+        </p:txBody>
+      </p:sp>
+      <p:sp>
+        <p:nvSpPr>
+          <p:cNvPr id="409" name="Rectangle 408"/>
+          <p:cNvSpPr/>
+          <p:nvPr/>
+        </p:nvSpPr>
+        <p:spPr>
+          <a:xfrm>
+            <a:off x="8073476" y="1024127"/>
+            <a:ext cx="4572" cy="6729983"/>
+          </a:xfrm>
+          <a:prstGeom prst="rect">
+            <a:avLst/>
+          </a:prstGeom>
+          <a:solidFill>
+            <a:srgbClr val="94A3B8"/>
+          </a:solidFill>
+          <a:ln>
+            <a:noFill/>
+          </a:ln>
+        </p:spPr>
+        <p:style>
+          <a:lnRef idx="1">
+            <a:schemeClr val="accent1"/>
+          </a:lnRef>
+          <a:fillRef idx="3">
+            <a:schemeClr val="accent1"/>
+          </a:fillRef>
+          <a:effectRef idx="2">
+            <a:schemeClr val="accent1"/>
+          </a:effectRef>
+          <a:fontRef idx="minor">
+            <a:schemeClr val="lt1"/>
+          </a:fontRef>
+        </p:style>
+        <p:txBody>
+          <a:bodyPr rtlCol="0" anchor="ctr"/>
+          <a:lstStyle/>
+          <a:p>
+            <a:pPr algn="ctr"/>
+          </a:p>
+        </p:txBody>
+      </p:sp>
+      <p:cxnSp>
+        <p:nvCxnSpPr>
+          <p:cNvPr id="410" name="Connector 409"/>
+          <p:cNvCxnSpPr/>
+          <p:nvPr/>
+        </p:nvCxnSpPr>
+        <p:spPr>
+          <a:xfrm>
+            <a:off x="8073476" y="1024127"/>
+            <a:ext cx="0" cy="6729984"/>
+          </a:xfrm>
+          <a:prstGeom prst="line">
+            <a:avLst/>
+          </a:prstGeom>
+          <a:ln w="5715">
+            <a:solidFill>
+              <a:srgbClr val="94A3B8"/>
+            </a:solidFill>
+            <a:prstDash val="sysDot"/>
+          </a:ln>
+        </p:spPr>
+        <p:style>
+          <a:lnRef idx="2">
+            <a:schemeClr val="accent1"/>
+          </a:lnRef>
+          <a:fillRef idx="0">
+            <a:schemeClr val="accent1"/>
+          </a:fillRef>
+          <a:effectRef idx="1">
+            <a:schemeClr val="accent1"/>
+          </a:effectRef>
+          <a:fontRef idx="minor">
+            <a:schemeClr val="tx1"/>
+          </a:fontRef>
+        </p:style>
+      </p:cxnSp>
+      <p:sp>
+        <p:nvSpPr>
+          <p:cNvPr id="411" name="TextBox 410"/>
+          <p:cNvSpPr txBox="1"/>
+          <p:nvPr/>
+        </p:nvSpPr>
+        <p:spPr>
+          <a:xfrm rot="16200000">
+            <a:off x="8023184" y="813816"/>
+            <a:ext cx="164592" cy="292608"/>
+          </a:xfrm>
+          <a:prstGeom prst="rect">
+            <a:avLst/>
+          </a:prstGeom>
+          <a:noFill/>
+        </p:spPr>
+        <p:txBody>
+          <a:bodyPr wrap="none">
+            <a:spAutoFit/>
+          </a:bodyPr>
+          <a:lstStyle/>
+          <a:p>
+            <a:pPr algn="ctr">
+              <a:defRPr sz="470">
+                <a:solidFill>
+                  <a:srgbClr val="475569"/>
+                </a:solidFill>
+              </a:defRPr>
+            </a:pPr>
+            <a:r>
+              <a:t>4.18</a:t>
+            </a:r>
+          </a:p>
+        </p:txBody>
+      </p:sp>
+      <p:sp>
+        <p:nvSpPr>
+          <p:cNvPr id="412" name="Rectangle 411"/>
+          <p:cNvSpPr/>
+          <p:nvPr/>
+        </p:nvSpPr>
+        <p:spPr>
+          <a:xfrm>
+            <a:off x="8220118" y="1024127"/>
+            <a:ext cx="4572" cy="6729983"/>
+          </a:xfrm>
+          <a:prstGeom prst="rect">
+            <a:avLst/>
+          </a:prstGeom>
+          <a:solidFill>
+            <a:srgbClr val="94A3B8"/>
+          </a:solidFill>
+          <a:ln>
+            <a:noFill/>
+          </a:ln>
+        </p:spPr>
+        <p:style>
+          <a:lnRef idx="1">
+            <a:schemeClr val="accent1"/>
+          </a:lnRef>
+          <a:fillRef idx="3">
+            <a:schemeClr val="accent1"/>
+          </a:fillRef>
+          <a:effectRef idx="2">
+            <a:schemeClr val="accent1"/>
+          </a:effectRef>
+          <a:fontRef idx="minor">
+            <a:schemeClr val="lt1"/>
+          </a:fontRef>
+        </p:style>
+        <p:txBody>
+          <a:bodyPr rtlCol="0" anchor="ctr"/>
+          <a:lstStyle/>
+          <a:p>
+            <a:pPr algn="ctr"/>
+          </a:p>
+        </p:txBody>
+      </p:sp>
+      <p:cxnSp>
+        <p:nvCxnSpPr>
+          <p:cNvPr id="413" name="Connector 412"/>
+          <p:cNvCxnSpPr/>
+          <p:nvPr/>
+        </p:nvCxnSpPr>
+        <p:spPr>
+          <a:xfrm>
+            <a:off x="8220118" y="1024127"/>
+            <a:ext cx="0" cy="6729984"/>
+          </a:xfrm>
+          <a:prstGeom prst="line">
+            <a:avLst/>
+          </a:prstGeom>
+          <a:ln w="5715">
+            <a:solidFill>
+              <a:srgbClr val="94A3B8"/>
+            </a:solidFill>
+            <a:prstDash val="sysDot"/>
+          </a:ln>
+        </p:spPr>
+        <p:style>
+          <a:lnRef idx="2">
+            <a:schemeClr val="accent1"/>
+          </a:lnRef>
+          <a:fillRef idx="0">
+            <a:schemeClr val="accent1"/>
+          </a:fillRef>
+          <a:effectRef idx="1">
+            <a:schemeClr val="accent1"/>
+          </a:effectRef>
+          <a:fontRef idx="minor">
+            <a:schemeClr val="tx1"/>
+          </a:fontRef>
+        </p:style>
+      </p:cxnSp>
+      <p:sp>
+        <p:nvSpPr>
+          <p:cNvPr id="414" name="TextBox 413"/>
+          <p:cNvSpPr txBox="1"/>
+          <p:nvPr/>
+        </p:nvSpPr>
+        <p:spPr>
+          <a:xfrm rot="16200000">
+            <a:off x="8169826" y="896112"/>
+            <a:ext cx="164592" cy="292608"/>
+          </a:xfrm>
+          <a:prstGeom prst="rect">
+            <a:avLst/>
+          </a:prstGeom>
+          <a:noFill/>
+        </p:spPr>
+        <p:txBody>
+          <a:bodyPr wrap="none">
+            <a:spAutoFit/>
+          </a:bodyPr>
+          <a:lstStyle/>
+          <a:p>
+            <a:pPr algn="ctr">
+              <a:defRPr sz="470">
+                <a:solidFill>
+                  <a:srgbClr val="475569"/>
+                </a:solidFill>
+              </a:defRPr>
+            </a:pPr>
+            <a:r>
+              <a:t>4.19</a:t>
+            </a:r>
+          </a:p>
+        </p:txBody>
+      </p:sp>
+      <p:sp>
+        <p:nvSpPr>
+          <p:cNvPr id="415" name="Rectangle 414"/>
+          <p:cNvSpPr/>
+          <p:nvPr/>
+        </p:nvSpPr>
+        <p:spPr>
+          <a:xfrm>
+            <a:off x="8348171" y="1024127"/>
+            <a:ext cx="4572" cy="6729983"/>
+          </a:xfrm>
+          <a:prstGeom prst="rect">
+            <a:avLst/>
+          </a:prstGeom>
+          <a:solidFill>
+            <a:srgbClr val="94A3B8"/>
+          </a:solidFill>
+          <a:ln>
+            <a:noFill/>
+          </a:ln>
+        </p:spPr>
+        <p:style>
+          <a:lnRef idx="1">
+            <a:schemeClr val="accent1"/>
+          </a:lnRef>
+          <a:fillRef idx="3">
+            <a:schemeClr val="accent1"/>
+          </a:fillRef>
+          <a:effectRef idx="2">
+            <a:schemeClr val="accent1"/>
+          </a:effectRef>
+          <a:fontRef idx="minor">
+            <a:schemeClr val="lt1"/>
+          </a:fontRef>
+        </p:style>
+        <p:txBody>
+          <a:bodyPr rtlCol="0" anchor="ctr"/>
+          <a:lstStyle/>
+          <a:p>
+            <a:pPr algn="ctr"/>
+          </a:p>
+        </p:txBody>
+      </p:sp>
+      <p:cxnSp>
+        <p:nvCxnSpPr>
+          <p:cNvPr id="416" name="Connector 415"/>
+          <p:cNvCxnSpPr/>
+          <p:nvPr/>
+        </p:nvCxnSpPr>
+        <p:spPr>
+          <a:xfrm>
+            <a:off x="8348171" y="1024127"/>
+            <a:ext cx="0" cy="6729984"/>
+          </a:xfrm>
+          <a:prstGeom prst="line">
+            <a:avLst/>
+          </a:prstGeom>
+          <a:ln w="5715">
+            <a:solidFill>
+              <a:srgbClr val="94A3B8"/>
+            </a:solidFill>
+            <a:prstDash val="sysDot"/>
+          </a:ln>
+        </p:spPr>
+        <p:style>
+          <a:lnRef idx="2">
+            <a:schemeClr val="accent1"/>
+          </a:lnRef>
+          <a:fillRef idx="0">
+            <a:schemeClr val="accent1"/>
+          </a:fillRef>
+          <a:effectRef idx="1">
+            <a:schemeClr val="accent1"/>
+          </a:effectRef>
+          <a:fontRef idx="minor">
+            <a:schemeClr val="tx1"/>
+          </a:fontRef>
+        </p:style>
+      </p:cxnSp>
+      <p:sp>
+        <p:nvSpPr>
+          <p:cNvPr id="417" name="TextBox 416"/>
+          <p:cNvSpPr txBox="1"/>
+          <p:nvPr/>
+        </p:nvSpPr>
+        <p:spPr>
+          <a:xfrm rot="16200000">
+            <a:off x="8297879" y="813816"/>
+            <a:ext cx="164592" cy="292608"/>
+          </a:xfrm>
+          <a:prstGeom prst="rect">
+            <a:avLst/>
+          </a:prstGeom>
+          <a:noFill/>
+        </p:spPr>
+        <p:txBody>
+          <a:bodyPr wrap="none">
+            <a:spAutoFit/>
+          </a:bodyPr>
+          <a:lstStyle/>
+          <a:p>
+            <a:pPr algn="ctr">
+              <a:defRPr sz="470">
+                <a:solidFill>
+                  <a:srgbClr val="475569"/>
+                </a:solidFill>
+              </a:defRPr>
+            </a:pPr>
+            <a:r>
+              <a:t>4.20</a:t>
+            </a:r>
+          </a:p>
+        </p:txBody>
+      </p:sp>
+      <p:sp>
+        <p:nvSpPr>
+          <p:cNvPr id="418" name="Rectangle 417"/>
+          <p:cNvSpPr/>
+          <p:nvPr/>
+        </p:nvSpPr>
+        <p:spPr>
+          <a:xfrm>
+            <a:off x="8492748" y="1024127"/>
+            <a:ext cx="4572" cy="6729983"/>
+          </a:xfrm>
+          <a:prstGeom prst="rect">
+            <a:avLst/>
+          </a:prstGeom>
+          <a:solidFill>
+            <a:srgbClr val="94A3B8"/>
+          </a:solidFill>
+          <a:ln>
+            <a:noFill/>
+          </a:ln>
+        </p:spPr>
+        <p:style>
+          <a:lnRef idx="1">
+            <a:schemeClr val="accent1"/>
+          </a:lnRef>
+          <a:fillRef idx="3">
+            <a:schemeClr val="accent1"/>
+          </a:fillRef>
+          <a:effectRef idx="2">
+            <a:schemeClr val="accent1"/>
+          </a:effectRef>
+          <a:fontRef idx="minor">
+            <a:schemeClr val="lt1"/>
+          </a:fontRef>
+        </p:style>
+        <p:txBody>
+          <a:bodyPr rtlCol="0" anchor="ctr"/>
+          <a:lstStyle/>
+          <a:p>
+            <a:pPr algn="ctr"/>
+          </a:p>
+        </p:txBody>
+      </p:sp>
+      <p:cxnSp>
+        <p:nvCxnSpPr>
+          <p:cNvPr id="419" name="Connector 418"/>
+          <p:cNvCxnSpPr/>
+          <p:nvPr/>
+        </p:nvCxnSpPr>
+        <p:spPr>
+          <a:xfrm>
+            <a:off x="8492748" y="1024127"/>
+            <a:ext cx="0" cy="6729984"/>
+          </a:xfrm>
+          <a:prstGeom prst="line">
+            <a:avLst/>
+          </a:prstGeom>
+          <a:ln w="5715">
+            <a:solidFill>
+              <a:srgbClr val="94A3B8"/>
+            </a:solidFill>
+            <a:prstDash val="sysDot"/>
+          </a:ln>
+        </p:spPr>
+        <p:style>
+          <a:lnRef idx="2">
+            <a:schemeClr val="accent1"/>
+          </a:lnRef>
+          <a:fillRef idx="0">
+            <a:schemeClr val="accent1"/>
+          </a:fillRef>
+          <a:effectRef idx="1">
+            <a:schemeClr val="accent1"/>
+          </a:effectRef>
+          <a:fontRef idx="minor">
+            <a:schemeClr val="tx1"/>
+          </a:fontRef>
+        </p:style>
+      </p:cxnSp>
+      <p:sp>
+        <p:nvSpPr>
+          <p:cNvPr id="420" name="TextBox 419"/>
+          <p:cNvSpPr txBox="1"/>
+          <p:nvPr/>
+        </p:nvSpPr>
+        <p:spPr>
+          <a:xfrm rot="16200000">
+            <a:off x="8442456" y="896112"/>
+            <a:ext cx="164592" cy="292608"/>
+          </a:xfrm>
+          <a:prstGeom prst="rect">
+            <a:avLst/>
+          </a:prstGeom>
+          <a:noFill/>
+        </p:spPr>
+        <p:txBody>
+          <a:bodyPr wrap="none">
+            <a:spAutoFit/>
+          </a:bodyPr>
+          <a:lstStyle/>
+          <a:p>
+            <a:pPr algn="ctr">
+              <a:defRPr sz="470">
+                <a:solidFill>
+                  <a:srgbClr val="475569"/>
+                </a:solidFill>
+              </a:defRPr>
+            </a:pPr>
+            <a:r>
+              <a:t>5.0</a:t>
+            </a:r>
+          </a:p>
+        </p:txBody>
+      </p:sp>
+      <p:sp>
+        <p:nvSpPr>
+          <p:cNvPr id="421" name="Rectangle 420"/>
+          <p:cNvSpPr/>
+          <p:nvPr/>
+        </p:nvSpPr>
+        <p:spPr>
+          <a:xfrm>
+            <a:off x="8622867" y="1024127"/>
+            <a:ext cx="4572" cy="6729983"/>
+          </a:xfrm>
+          <a:prstGeom prst="rect">
+            <a:avLst/>
+          </a:prstGeom>
+          <a:solidFill>
+            <a:srgbClr val="94A3B8"/>
+          </a:solidFill>
+          <a:ln>
+            <a:noFill/>
+          </a:ln>
+        </p:spPr>
+        <p:style>
+          <a:lnRef idx="1">
+            <a:schemeClr val="accent1"/>
+          </a:lnRef>
+          <a:fillRef idx="3">
+            <a:schemeClr val="accent1"/>
+          </a:fillRef>
+          <a:effectRef idx="2">
+            <a:schemeClr val="accent1"/>
+          </a:effectRef>
+          <a:fontRef idx="minor">
+            <a:schemeClr val="lt1"/>
+          </a:fontRef>
+        </p:style>
+        <p:txBody>
+          <a:bodyPr rtlCol="0" anchor="ctr"/>
+          <a:lstStyle/>
+          <a:p>
+            <a:pPr algn="ctr"/>
+          </a:p>
+        </p:txBody>
+      </p:sp>
+      <p:cxnSp>
+        <p:nvCxnSpPr>
+          <p:cNvPr id="422" name="Connector 421"/>
+          <p:cNvCxnSpPr/>
+          <p:nvPr/>
+        </p:nvCxnSpPr>
+        <p:spPr>
+          <a:xfrm>
+            <a:off x="8622867" y="1024127"/>
+            <a:ext cx="0" cy="6729984"/>
+          </a:xfrm>
+          <a:prstGeom prst="line">
+            <a:avLst/>
+          </a:prstGeom>
+          <a:ln w="5715">
+            <a:solidFill>
+              <a:srgbClr val="94A3B8"/>
+            </a:solidFill>
+            <a:prstDash val="sysDot"/>
+          </a:ln>
+        </p:spPr>
+        <p:style>
+          <a:lnRef idx="2">
+            <a:schemeClr val="accent1"/>
+          </a:lnRef>
+          <a:fillRef idx="0">
+            <a:schemeClr val="accent1"/>
+          </a:fillRef>
+          <a:effectRef idx="1">
+            <a:schemeClr val="accent1"/>
+          </a:effectRef>
+          <a:fontRef idx="minor">
+            <a:schemeClr val="tx1"/>
+          </a:fontRef>
+        </p:style>
+      </p:cxnSp>
+      <p:sp>
+        <p:nvSpPr>
+          <p:cNvPr id="423" name="TextBox 422"/>
+          <p:cNvSpPr txBox="1"/>
+          <p:nvPr/>
+        </p:nvSpPr>
+        <p:spPr>
+          <a:xfrm rot="16200000">
+            <a:off x="8572575" y="813816"/>
+            <a:ext cx="164592" cy="292608"/>
+          </a:xfrm>
+          <a:prstGeom prst="rect">
+            <a:avLst/>
+          </a:prstGeom>
+          <a:noFill/>
+        </p:spPr>
+        <p:txBody>
+          <a:bodyPr wrap="none">
+            <a:spAutoFit/>
+          </a:bodyPr>
+          <a:lstStyle/>
+          <a:p>
+            <a:pPr algn="ctr">
+              <a:defRPr sz="470">
+                <a:solidFill>
+                  <a:srgbClr val="475569"/>
+                </a:solidFill>
+              </a:defRPr>
+            </a:pPr>
+            <a:r>
+              <a:t>5.1</a:t>
+            </a:r>
+          </a:p>
+        </p:txBody>
+      </p:sp>
+      <p:sp>
+        <p:nvSpPr>
+          <p:cNvPr id="424" name="Rectangle 423"/>
+          <p:cNvSpPr/>
+          <p:nvPr/>
+        </p:nvSpPr>
+        <p:spPr>
+          <a:xfrm>
+            <a:off x="8752986" y="1024127"/>
+            <a:ext cx="4572" cy="6729983"/>
+          </a:xfrm>
+          <a:prstGeom prst="rect">
+            <a:avLst/>
+          </a:prstGeom>
+          <a:solidFill>
+            <a:srgbClr val="94A3B8"/>
+          </a:solidFill>
+          <a:ln>
+            <a:noFill/>
+          </a:ln>
+        </p:spPr>
+        <p:style>
+          <a:lnRef idx="1">
+            <a:schemeClr val="accent1"/>
+          </a:lnRef>
+          <a:fillRef idx="3">
+            <a:schemeClr val="accent1"/>
+          </a:fillRef>
+          <a:effectRef idx="2">
+            <a:schemeClr val="accent1"/>
+          </a:effectRef>
+          <a:fontRef idx="minor">
+            <a:schemeClr val="lt1"/>
+          </a:fontRef>
+        </p:style>
+        <p:txBody>
+          <a:bodyPr rtlCol="0" anchor="ctr"/>
+          <a:lstStyle/>
+          <a:p>
+            <a:pPr algn="ctr"/>
+          </a:p>
+        </p:txBody>
+      </p:sp>
+      <p:cxnSp>
+        <p:nvCxnSpPr>
+          <p:cNvPr id="425" name="Connector 424"/>
+          <p:cNvCxnSpPr/>
+          <p:nvPr/>
+        </p:nvCxnSpPr>
+        <p:spPr>
+          <a:xfrm>
+            <a:off x="8752986" y="1024127"/>
+            <a:ext cx="0" cy="6729984"/>
+          </a:xfrm>
+          <a:prstGeom prst="line">
+            <a:avLst/>
+          </a:prstGeom>
+          <a:ln w="5715">
+            <a:solidFill>
+              <a:srgbClr val="94A3B8"/>
+            </a:solidFill>
+            <a:prstDash val="sysDot"/>
+          </a:ln>
+        </p:spPr>
+        <p:style>
+          <a:lnRef idx="2">
+            <a:schemeClr val="accent1"/>
+          </a:lnRef>
+          <a:fillRef idx="0">
+            <a:schemeClr val="accent1"/>
+          </a:fillRef>
+          <a:effectRef idx="1">
+            <a:schemeClr val="accent1"/>
+          </a:effectRef>
+          <a:fontRef idx="minor">
+            <a:schemeClr val="tx1"/>
+          </a:fontRef>
+        </p:style>
+      </p:cxnSp>
+      <p:sp>
+        <p:nvSpPr>
+          <p:cNvPr id="426" name="TextBox 425"/>
+          <p:cNvSpPr txBox="1"/>
+          <p:nvPr/>
+        </p:nvSpPr>
+        <p:spPr>
+          <a:xfrm rot="16200000">
+            <a:off x="8702694" y="896112"/>
+            <a:ext cx="164592" cy="292608"/>
+          </a:xfrm>
+          <a:prstGeom prst="rect">
+            <a:avLst/>
+          </a:prstGeom>
+          <a:noFill/>
+        </p:spPr>
+        <p:txBody>
+          <a:bodyPr wrap="none">
+            <a:spAutoFit/>
+          </a:bodyPr>
+          <a:lstStyle/>
+          <a:p>
+            <a:pPr algn="ctr">
+              <a:defRPr sz="470">
+                <a:solidFill>
+                  <a:srgbClr val="475569"/>
+                </a:solidFill>
+              </a:defRPr>
+            </a:pPr>
+            <a:r>
+              <a:t>5.2</a:t>
+            </a:r>
+          </a:p>
+        </p:txBody>
+      </p:sp>
+      <p:sp>
+        <p:nvSpPr>
+          <p:cNvPr id="427" name="Rectangle 426"/>
+          <p:cNvSpPr/>
+          <p:nvPr/>
+        </p:nvSpPr>
+        <p:spPr>
+          <a:xfrm>
+            <a:off x="8897562" y="1024127"/>
+            <a:ext cx="4572" cy="6729983"/>
+          </a:xfrm>
+          <a:prstGeom prst="rect">
+            <a:avLst/>
+          </a:prstGeom>
+          <a:solidFill>
+            <a:srgbClr val="94A3B8"/>
+          </a:solidFill>
+          <a:ln>
+            <a:noFill/>
+          </a:ln>
+        </p:spPr>
+        <p:style>
+          <a:lnRef idx="1">
+            <a:schemeClr val="accent1"/>
+          </a:lnRef>
+          <a:fillRef idx="3">
+            <a:schemeClr val="accent1"/>
+          </a:fillRef>
+          <a:effectRef idx="2">
+            <a:schemeClr val="accent1"/>
+          </a:effectRef>
+          <a:fontRef idx="minor">
+            <a:schemeClr val="lt1"/>
+          </a:fontRef>
+        </p:style>
+        <p:txBody>
+          <a:bodyPr rtlCol="0" anchor="ctr"/>
+          <a:lstStyle/>
+          <a:p>
+            <a:pPr algn="ctr"/>
+          </a:p>
+        </p:txBody>
+      </p:sp>
+      <p:cxnSp>
+        <p:nvCxnSpPr>
+          <p:cNvPr id="428" name="Connector 427"/>
+          <p:cNvCxnSpPr/>
+          <p:nvPr/>
+        </p:nvCxnSpPr>
+        <p:spPr>
+          <a:xfrm>
+            <a:off x="8897562" y="1024127"/>
+            <a:ext cx="0" cy="6729984"/>
+          </a:xfrm>
+          <a:prstGeom prst="line">
+            <a:avLst/>
+          </a:prstGeom>
+          <a:ln w="5715">
+            <a:solidFill>
+              <a:srgbClr val="94A3B8"/>
+            </a:solidFill>
+            <a:prstDash val="sysDot"/>
+          </a:ln>
+        </p:spPr>
+        <p:style>
+          <a:lnRef idx="2">
+            <a:schemeClr val="accent1"/>
+          </a:lnRef>
+          <a:fillRef idx="0">
+            <a:schemeClr val="accent1"/>
+          </a:fillRef>
+          <a:effectRef idx="1">
+            <a:schemeClr val="accent1"/>
+          </a:effectRef>
+          <a:fontRef idx="minor">
+            <a:schemeClr val="tx1"/>
+          </a:fontRef>
+        </p:style>
+      </p:cxnSp>
+      <p:sp>
+        <p:nvSpPr>
+          <p:cNvPr id="429" name="TextBox 428"/>
+          <p:cNvSpPr txBox="1"/>
+          <p:nvPr/>
+        </p:nvSpPr>
+        <p:spPr>
+          <a:xfrm rot="16200000">
+            <a:off x="8847270" y="813816"/>
+            <a:ext cx="164592" cy="292608"/>
+          </a:xfrm>
+          <a:prstGeom prst="rect">
+            <a:avLst/>
+          </a:prstGeom>
+          <a:noFill/>
+        </p:spPr>
+        <p:txBody>
+          <a:bodyPr wrap="none">
+            <a:spAutoFit/>
+          </a:bodyPr>
+          <a:lstStyle/>
+          <a:p>
+            <a:pPr algn="ctr">
+              <a:defRPr sz="470">
+                <a:solidFill>
+                  <a:srgbClr val="475569"/>
+                </a:solidFill>
+              </a:defRPr>
+            </a:pPr>
+            <a:r>
+              <a:t>5.3</a:t>
+            </a:r>
+          </a:p>
+        </p:txBody>
+      </p:sp>
+      <p:sp>
+        <p:nvSpPr>
+          <p:cNvPr id="430" name="Rectangle 429"/>
+          <p:cNvSpPr/>
+          <p:nvPr/>
+        </p:nvSpPr>
+        <p:spPr>
+          <a:xfrm>
+            <a:off x="9042139" y="1024127"/>
+            <a:ext cx="4572" cy="6729983"/>
+          </a:xfrm>
+          <a:prstGeom prst="rect">
+            <a:avLst/>
+          </a:prstGeom>
+          <a:solidFill>
+            <a:srgbClr val="94A3B8"/>
+          </a:solidFill>
+          <a:ln>
+            <a:noFill/>
+          </a:ln>
+        </p:spPr>
+        <p:style>
+          <a:lnRef idx="1">
+            <a:schemeClr val="accent1"/>
+          </a:lnRef>
+          <a:fillRef idx="3">
+            <a:schemeClr val="accent1"/>
+          </a:fillRef>
+          <a:effectRef idx="2">
+            <a:schemeClr val="accent1"/>
+          </a:effectRef>
+          <a:fontRef idx="minor">
+            <a:schemeClr val="lt1"/>
+          </a:fontRef>
+        </p:style>
+        <p:txBody>
+          <a:bodyPr rtlCol="0" anchor="ctr"/>
+          <a:lstStyle/>
+          <a:p>
+            <a:pPr algn="ctr"/>
+          </a:p>
+        </p:txBody>
+      </p:sp>
+      <p:cxnSp>
+        <p:nvCxnSpPr>
+          <p:cNvPr id="431" name="Connector 430"/>
+          <p:cNvCxnSpPr/>
+          <p:nvPr/>
+        </p:nvCxnSpPr>
+        <p:spPr>
+          <a:xfrm>
+            <a:off x="9042139" y="1024127"/>
+            <a:ext cx="0" cy="6729984"/>
+          </a:xfrm>
+          <a:prstGeom prst="line">
+            <a:avLst/>
+          </a:prstGeom>
+          <a:ln w="5715">
+            <a:solidFill>
+              <a:srgbClr val="94A3B8"/>
+            </a:solidFill>
+            <a:prstDash val="sysDot"/>
+          </a:ln>
+        </p:spPr>
+        <p:style>
+          <a:lnRef idx="2">
+            <a:schemeClr val="accent1"/>
+          </a:lnRef>
+          <a:fillRef idx="0">
+            <a:schemeClr val="accent1"/>
+          </a:fillRef>
+          <a:effectRef idx="1">
+            <a:schemeClr val="accent1"/>
+          </a:effectRef>
+          <a:fontRef idx="minor">
+            <a:schemeClr val="tx1"/>
+          </a:fontRef>
+        </p:style>
+      </p:cxnSp>
+      <p:sp>
+        <p:nvSpPr>
+          <p:cNvPr id="432" name="TextBox 431"/>
+          <p:cNvSpPr txBox="1"/>
+          <p:nvPr/>
+        </p:nvSpPr>
+        <p:spPr>
+          <a:xfrm rot="16200000">
+            <a:off x="8991847" y="896112"/>
+            <a:ext cx="164592" cy="292608"/>
+          </a:xfrm>
+          <a:prstGeom prst="rect">
+            <a:avLst/>
+          </a:prstGeom>
+          <a:noFill/>
+        </p:spPr>
+        <p:txBody>
+          <a:bodyPr wrap="none">
+            <a:spAutoFit/>
+          </a:bodyPr>
+          <a:lstStyle/>
+          <a:p>
+            <a:pPr algn="ctr">
+              <a:defRPr sz="470">
+                <a:solidFill>
+                  <a:srgbClr val="475569"/>
+                </a:solidFill>
+              </a:defRPr>
+            </a:pPr>
+            <a:r>
+              <a:t>5.4</a:t>
+            </a:r>
+          </a:p>
+        </p:txBody>
+      </p:sp>
+      <p:sp>
+        <p:nvSpPr>
+          <p:cNvPr id="433" name="Rectangle 432"/>
+          <p:cNvSpPr/>
+          <p:nvPr/>
+        </p:nvSpPr>
+        <p:spPr>
+          <a:xfrm>
+            <a:off x="9172258" y="1024127"/>
+            <a:ext cx="4572" cy="6729983"/>
+          </a:xfrm>
+          <a:prstGeom prst="rect">
+            <a:avLst/>
+          </a:prstGeom>
+          <a:solidFill>
+            <a:srgbClr val="94A3B8"/>
+          </a:solidFill>
+          <a:ln>
+            <a:noFill/>
+          </a:ln>
+        </p:spPr>
+        <p:style>
+          <a:lnRef idx="1">
+            <a:schemeClr val="accent1"/>
+          </a:lnRef>
+          <a:fillRef idx="3">
+            <a:schemeClr val="accent1"/>
+          </a:fillRef>
+          <a:effectRef idx="2">
+            <a:schemeClr val="accent1"/>
+          </a:effectRef>
+          <a:fontRef idx="minor">
+            <a:schemeClr val="lt1"/>
+          </a:fontRef>
+        </p:style>
+        <p:txBody>
+          <a:bodyPr rtlCol="0" anchor="ctr"/>
+          <a:lstStyle/>
+          <a:p>
+            <a:pPr algn="ctr"/>
+          </a:p>
+        </p:txBody>
+      </p:sp>
+      <p:cxnSp>
+        <p:nvCxnSpPr>
+          <p:cNvPr id="434" name="Connector 433"/>
+          <p:cNvCxnSpPr/>
+          <p:nvPr/>
+        </p:nvCxnSpPr>
+        <p:spPr>
+          <a:xfrm>
+            <a:off x="9172258" y="1024127"/>
+            <a:ext cx="0" cy="6729984"/>
+          </a:xfrm>
+          <a:prstGeom prst="line">
+            <a:avLst/>
+          </a:prstGeom>
+          <a:ln w="5715">
+            <a:solidFill>
+              <a:srgbClr val="94A3B8"/>
+            </a:solidFill>
+            <a:prstDash val="sysDot"/>
+          </a:ln>
+        </p:spPr>
+        <p:style>
+          <a:lnRef idx="2">
+            <a:schemeClr val="accent1"/>
+          </a:lnRef>
+          <a:fillRef idx="0">
+            <a:schemeClr val="accent1"/>
+          </a:fillRef>
+          <a:effectRef idx="1">
+            <a:schemeClr val="accent1"/>
+          </a:effectRef>
+          <a:fontRef idx="minor">
+            <a:schemeClr val="tx1"/>
+          </a:fontRef>
+        </p:style>
+      </p:cxnSp>
+      <p:sp>
+        <p:nvSpPr>
+          <p:cNvPr id="435" name="TextBox 434"/>
+          <p:cNvSpPr txBox="1"/>
+          <p:nvPr/>
+        </p:nvSpPr>
+        <p:spPr>
+          <a:xfrm rot="16200000">
+            <a:off x="9121966" y="813816"/>
+            <a:ext cx="164592" cy="292608"/>
+          </a:xfrm>
+          <a:prstGeom prst="rect">
+            <a:avLst/>
+          </a:prstGeom>
+          <a:noFill/>
+        </p:spPr>
+        <p:txBody>
+          <a:bodyPr wrap="none">
+            <a:spAutoFit/>
+          </a:bodyPr>
+          <a:lstStyle/>
+          <a:p>
+            <a:pPr algn="ctr">
+              <a:defRPr sz="470">
+                <a:solidFill>
+                  <a:srgbClr val="475569"/>
+                </a:solidFill>
+              </a:defRPr>
+            </a:pPr>
+            <a:r>
+              <a:t>5.5</a:t>
+            </a:r>
+          </a:p>
+        </p:txBody>
+      </p:sp>
+      <p:sp>
+        <p:nvSpPr>
+          <p:cNvPr id="436" name="Rectangle 435"/>
+          <p:cNvSpPr/>
+          <p:nvPr/>
+        </p:nvSpPr>
+        <p:spPr>
+          <a:xfrm>
+            <a:off x="9302377" y="1024127"/>
+            <a:ext cx="4572" cy="6729983"/>
+          </a:xfrm>
+          <a:prstGeom prst="rect">
+            <a:avLst/>
+          </a:prstGeom>
+          <a:solidFill>
+            <a:srgbClr val="94A3B8"/>
+          </a:solidFill>
+          <a:ln>
+            <a:noFill/>
+          </a:ln>
+        </p:spPr>
+        <p:style>
+          <a:lnRef idx="1">
+            <a:schemeClr val="accent1"/>
+          </a:lnRef>
+          <a:fillRef idx="3">
+            <a:schemeClr val="accent1"/>
+          </a:fillRef>
+          <a:effectRef idx="2">
+            <a:schemeClr val="accent1"/>
+          </a:effectRef>
+          <a:fontRef idx="minor">
+            <a:schemeClr val="lt1"/>
+          </a:fontRef>
+        </p:style>
+        <p:txBody>
+          <a:bodyPr rtlCol="0" anchor="ctr"/>
+          <a:lstStyle/>
+          <a:p>
+            <a:pPr algn="ctr"/>
+          </a:p>
+        </p:txBody>
+      </p:sp>
+      <p:cxnSp>
+        <p:nvCxnSpPr>
+          <p:cNvPr id="437" name="Connector 436"/>
+          <p:cNvCxnSpPr/>
+          <p:nvPr/>
+        </p:nvCxnSpPr>
+        <p:spPr>
+          <a:xfrm>
+            <a:off x="9302377" y="1024127"/>
+            <a:ext cx="0" cy="6729984"/>
+          </a:xfrm>
+          <a:prstGeom prst="line">
+            <a:avLst/>
+          </a:prstGeom>
+          <a:ln w="5715">
+            <a:solidFill>
+              <a:srgbClr val="94A3B8"/>
+            </a:solidFill>
+            <a:prstDash val="sysDot"/>
+          </a:ln>
+        </p:spPr>
+        <p:style>
+          <a:lnRef idx="2">
+            <a:schemeClr val="accent1"/>
+          </a:lnRef>
+          <a:fillRef idx="0">
+            <a:schemeClr val="accent1"/>
+          </a:fillRef>
+          <a:effectRef idx="1">
+            <a:schemeClr val="accent1"/>
+          </a:effectRef>
+          <a:fontRef idx="minor">
+            <a:schemeClr val="tx1"/>
+          </a:fontRef>
+        </p:style>
+      </p:cxnSp>
+      <p:sp>
+        <p:nvSpPr>
+          <p:cNvPr id="438" name="TextBox 437"/>
+          <p:cNvSpPr txBox="1"/>
+          <p:nvPr/>
+        </p:nvSpPr>
+        <p:spPr>
+          <a:xfrm rot="16200000">
+            <a:off x="9252085" y="896112"/>
+            <a:ext cx="164592" cy="292608"/>
+          </a:xfrm>
+          <a:prstGeom prst="rect">
+            <a:avLst/>
+          </a:prstGeom>
+          <a:noFill/>
+        </p:spPr>
+        <p:txBody>
+          <a:bodyPr wrap="none">
+            <a:spAutoFit/>
+          </a:bodyPr>
+          <a:lstStyle/>
+          <a:p>
+            <a:pPr algn="ctr">
+              <a:defRPr sz="470">
+                <a:solidFill>
+                  <a:srgbClr val="475569"/>
+                </a:solidFill>
+              </a:defRPr>
+            </a:pPr>
+            <a:r>
+              <a:t>5.6</a:t>
+            </a:r>
+          </a:p>
+        </p:txBody>
+      </p:sp>
+      <p:sp>
+        <p:nvSpPr>
+          <p:cNvPr id="439" name="Rectangle 438"/>
+          <p:cNvSpPr/>
+          <p:nvPr/>
+        </p:nvSpPr>
+        <p:spPr>
+          <a:xfrm>
+            <a:off x="9432496" y="1024127"/>
+            <a:ext cx="4572" cy="6729983"/>
+          </a:xfrm>
+          <a:prstGeom prst="rect">
+            <a:avLst/>
+          </a:prstGeom>
+          <a:solidFill>
+            <a:srgbClr val="94A3B8"/>
+          </a:solidFill>
+          <a:ln>
+            <a:noFill/>
+          </a:ln>
+        </p:spPr>
+        <p:style>
+          <a:lnRef idx="1">
+            <a:schemeClr val="accent1"/>
+          </a:lnRef>
+          <a:fillRef idx="3">
+            <a:schemeClr val="accent1"/>
+          </a:fillRef>
+          <a:effectRef idx="2">
+            <a:schemeClr val="accent1"/>
+          </a:effectRef>
+          <a:fontRef idx="minor">
+            <a:schemeClr val="lt1"/>
+          </a:fontRef>
+        </p:style>
+        <p:txBody>
+          <a:bodyPr rtlCol="0" anchor="ctr"/>
+          <a:lstStyle/>
+          <a:p>
+            <a:pPr algn="ctr"/>
+          </a:p>
+        </p:txBody>
+      </p:sp>
+      <p:cxnSp>
+        <p:nvCxnSpPr>
+          <p:cNvPr id="440" name="Connector 439"/>
+          <p:cNvCxnSpPr/>
+          <p:nvPr/>
+        </p:nvCxnSpPr>
+        <p:spPr>
+          <a:xfrm>
+            <a:off x="9432496" y="1024127"/>
+            <a:ext cx="0" cy="6729984"/>
+          </a:xfrm>
+          <a:prstGeom prst="line">
+            <a:avLst/>
+          </a:prstGeom>
+          <a:ln w="5715">
+            <a:solidFill>
+              <a:srgbClr val="94A3B8"/>
+            </a:solidFill>
+            <a:prstDash val="sysDot"/>
+          </a:ln>
+        </p:spPr>
+        <p:style>
+          <a:lnRef idx="2">
+            <a:schemeClr val="accent1"/>
+          </a:lnRef>
+          <a:fillRef idx="0">
+            <a:schemeClr val="accent1"/>
+          </a:fillRef>
+          <a:effectRef idx="1">
+            <a:schemeClr val="accent1"/>
+          </a:effectRef>
+          <a:fontRef idx="minor">
+            <a:schemeClr val="tx1"/>
+          </a:fontRef>
+        </p:style>
+      </p:cxnSp>
+      <p:sp>
+        <p:nvSpPr>
+          <p:cNvPr id="441" name="TextBox 440"/>
+          <p:cNvSpPr txBox="1"/>
+          <p:nvPr/>
+        </p:nvSpPr>
+        <p:spPr>
+          <a:xfrm rot="16200000">
+            <a:off x="9382204" y="813816"/>
+            <a:ext cx="164592" cy="292608"/>
+          </a:xfrm>
+          <a:prstGeom prst="rect">
+            <a:avLst/>
+          </a:prstGeom>
+          <a:noFill/>
+        </p:spPr>
+        <p:txBody>
+          <a:bodyPr wrap="none">
+            <a:spAutoFit/>
+          </a:bodyPr>
+          <a:lstStyle/>
+          <a:p>
+            <a:pPr algn="ctr">
+              <a:defRPr sz="470">
+                <a:solidFill>
+                  <a:srgbClr val="475569"/>
+                </a:solidFill>
+              </a:defRPr>
+            </a:pPr>
+            <a:r>
+              <a:t>5.7</a:t>
+            </a:r>
+          </a:p>
+        </p:txBody>
+      </p:sp>
+      <p:sp>
+        <p:nvSpPr>
+          <p:cNvPr id="442" name="Rectangle 441"/>
+          <p:cNvSpPr/>
+          <p:nvPr/>
+        </p:nvSpPr>
+        <p:spPr>
+          <a:xfrm>
+            <a:off x="9562614" y="1024127"/>
+            <a:ext cx="4572" cy="6729983"/>
+          </a:xfrm>
+          <a:prstGeom prst="rect">
+            <a:avLst/>
+          </a:prstGeom>
+          <a:solidFill>
+            <a:srgbClr val="94A3B8"/>
+          </a:solidFill>
+          <a:ln>
+            <a:noFill/>
+          </a:ln>
+        </p:spPr>
+        <p:style>
+          <a:lnRef idx="1">
+            <a:schemeClr val="accent1"/>
+          </a:lnRef>
+          <a:fillRef idx="3">
+            <a:schemeClr val="accent1"/>
+          </a:fillRef>
+          <a:effectRef idx="2">
+            <a:schemeClr val="accent1"/>
+          </a:effectRef>
+          <a:fontRef idx="minor">
+            <a:schemeClr val="lt1"/>
+          </a:fontRef>
+        </p:style>
+        <p:txBody>
+          <a:bodyPr rtlCol="0" anchor="ctr"/>
+          <a:lstStyle/>
+          <a:p>
+            <a:pPr algn="ctr"/>
+          </a:p>
+        </p:txBody>
+      </p:sp>
+      <p:cxnSp>
+        <p:nvCxnSpPr>
+          <p:cNvPr id="443" name="Connector 442"/>
+          <p:cNvCxnSpPr/>
+          <p:nvPr/>
+        </p:nvCxnSpPr>
+        <p:spPr>
+          <a:xfrm>
+            <a:off x="9562614" y="1024127"/>
+            <a:ext cx="0" cy="6729984"/>
+          </a:xfrm>
+          <a:prstGeom prst="line">
+            <a:avLst/>
+          </a:prstGeom>
+          <a:ln w="5715">
+            <a:solidFill>
+              <a:srgbClr val="94A3B8"/>
+            </a:solidFill>
+            <a:prstDash val="sysDot"/>
+          </a:ln>
+        </p:spPr>
+        <p:style>
+          <a:lnRef idx="2">
+            <a:schemeClr val="accent1"/>
+          </a:lnRef>
+          <a:fillRef idx="0">
+            <a:schemeClr val="accent1"/>
+          </a:fillRef>
+          <a:effectRef idx="1">
+            <a:schemeClr val="accent1"/>
+          </a:effectRef>
+          <a:fontRef idx="minor">
+            <a:schemeClr val="tx1"/>
+          </a:fontRef>
+        </p:style>
+      </p:cxnSp>
+      <p:sp>
+        <p:nvSpPr>
+          <p:cNvPr id="444" name="TextBox 443"/>
+          <p:cNvSpPr txBox="1"/>
+          <p:nvPr/>
+        </p:nvSpPr>
+        <p:spPr>
+          <a:xfrm rot="16200000">
+            <a:off x="9512322" y="896112"/>
+            <a:ext cx="164592" cy="292608"/>
+          </a:xfrm>
+          <a:prstGeom prst="rect">
+            <a:avLst/>
+          </a:prstGeom>
+          <a:noFill/>
+        </p:spPr>
+        <p:txBody>
+          <a:bodyPr wrap="none">
+            <a:spAutoFit/>
+          </a:bodyPr>
+          <a:lstStyle/>
+          <a:p>
+            <a:pPr algn="ctr">
+              <a:defRPr sz="470">
+                <a:solidFill>
+                  <a:srgbClr val="475569"/>
+                </a:solidFill>
+              </a:defRPr>
+            </a:pPr>
+            <a:r>
+              <a:t>5.8</a:t>
+            </a:r>
+          </a:p>
+        </p:txBody>
+      </p:sp>
+      <p:sp>
+        <p:nvSpPr>
+          <p:cNvPr id="445" name="Rectangle 444"/>
+          <p:cNvSpPr/>
+          <p:nvPr/>
+        </p:nvSpPr>
+        <p:spPr>
+          <a:xfrm>
+            <a:off x="9707191" y="1024127"/>
+            <a:ext cx="4572" cy="6729983"/>
+          </a:xfrm>
+          <a:prstGeom prst="rect">
+            <a:avLst/>
+          </a:prstGeom>
+          <a:solidFill>
+            <a:srgbClr val="94A3B8"/>
+          </a:solidFill>
+          <a:ln>
+            <a:noFill/>
+          </a:ln>
+        </p:spPr>
+        <p:style>
+          <a:lnRef idx="1">
+            <a:schemeClr val="accent1"/>
+          </a:lnRef>
+          <a:fillRef idx="3">
+            <a:schemeClr val="accent1"/>
+          </a:fillRef>
+          <a:effectRef idx="2">
+            <a:schemeClr val="accent1"/>
+          </a:effectRef>
+          <a:fontRef idx="minor">
+            <a:schemeClr val="lt1"/>
+          </a:fontRef>
+        </p:style>
+        <p:txBody>
+          <a:bodyPr rtlCol="0" anchor="ctr"/>
+          <a:lstStyle/>
+          <a:p>
+            <a:pPr algn="ctr"/>
+          </a:p>
+        </p:txBody>
+      </p:sp>
+      <p:cxnSp>
+        <p:nvCxnSpPr>
+          <p:cNvPr id="446" name="Connector 445"/>
+          <p:cNvCxnSpPr/>
+          <p:nvPr/>
+        </p:nvCxnSpPr>
+        <p:spPr>
+          <a:xfrm>
+            <a:off x="9707191" y="1024127"/>
+            <a:ext cx="0" cy="6729984"/>
+          </a:xfrm>
+          <a:prstGeom prst="line">
+            <a:avLst/>
+          </a:prstGeom>
+          <a:ln w="5715">
+            <a:solidFill>
+              <a:srgbClr val="94A3B8"/>
+            </a:solidFill>
+            <a:prstDash val="sysDot"/>
+          </a:ln>
+        </p:spPr>
+        <p:style>
+          <a:lnRef idx="2">
+            <a:schemeClr val="accent1"/>
+          </a:lnRef>
+          <a:fillRef idx="0">
+            <a:schemeClr val="accent1"/>
+          </a:fillRef>
+          <a:effectRef idx="1">
+            <a:schemeClr val="accent1"/>
+          </a:effectRef>
+          <a:fontRef idx="minor">
+            <a:schemeClr val="tx1"/>
+          </a:fontRef>
+        </p:style>
+      </p:cxnSp>
+      <p:sp>
+        <p:nvSpPr>
+          <p:cNvPr id="447" name="TextBox 446"/>
+          <p:cNvSpPr txBox="1"/>
+          <p:nvPr/>
+        </p:nvSpPr>
+        <p:spPr>
+          <a:xfrm rot="16200000">
+            <a:off x="9656899" y="813816"/>
+            <a:ext cx="164592" cy="292608"/>
+          </a:xfrm>
+          <a:prstGeom prst="rect">
+            <a:avLst/>
+          </a:prstGeom>
+          <a:noFill/>
+        </p:spPr>
+        <p:txBody>
+          <a:bodyPr wrap="none">
+            <a:spAutoFit/>
+          </a:bodyPr>
+          <a:lstStyle/>
+          <a:p>
+            <a:pPr algn="ctr">
+              <a:defRPr sz="470">
+                <a:solidFill>
+                  <a:srgbClr val="475569"/>
+                </a:solidFill>
+              </a:defRPr>
+            </a:pPr>
+            <a:r>
+              <a:t>5.9</a:t>
+            </a:r>
+          </a:p>
+        </p:txBody>
+      </p:sp>
+      <p:sp>
+        <p:nvSpPr>
+          <p:cNvPr id="448" name="Rectangle 447"/>
+          <p:cNvSpPr/>
+          <p:nvPr/>
+        </p:nvSpPr>
+        <p:spPr>
+          <a:xfrm>
+            <a:off x="9837310" y="1024127"/>
+            <a:ext cx="4572" cy="6729983"/>
+          </a:xfrm>
+          <a:prstGeom prst="rect">
+            <a:avLst/>
+          </a:prstGeom>
+          <a:solidFill>
+            <a:srgbClr val="94A3B8"/>
+          </a:solidFill>
+          <a:ln>
+            <a:noFill/>
+          </a:ln>
+        </p:spPr>
+        <p:style>
+          <a:lnRef idx="1">
+            <a:schemeClr val="accent1"/>
+          </a:lnRef>
+          <a:fillRef idx="3">
+            <a:schemeClr val="accent1"/>
+          </a:fillRef>
+          <a:effectRef idx="2">
+            <a:schemeClr val="accent1"/>
+          </a:effectRef>
+          <a:fontRef idx="minor">
+            <a:schemeClr val="lt1"/>
+          </a:fontRef>
+        </p:style>
+        <p:txBody>
+          <a:bodyPr rtlCol="0" anchor="ctr"/>
+          <a:lstStyle/>
+          <a:p>
+            <a:pPr algn="ctr"/>
+          </a:p>
+        </p:txBody>
+      </p:sp>
+      <p:cxnSp>
+        <p:nvCxnSpPr>
+          <p:cNvPr id="449" name="Connector 448"/>
+          <p:cNvCxnSpPr/>
+          <p:nvPr/>
+        </p:nvCxnSpPr>
+        <p:spPr>
+          <a:xfrm>
+            <a:off x="9837310" y="1024127"/>
+            <a:ext cx="0" cy="6729984"/>
+          </a:xfrm>
+          <a:prstGeom prst="line">
+            <a:avLst/>
+          </a:prstGeom>
+          <a:ln w="5715">
+            <a:solidFill>
+              <a:srgbClr val="94A3B8"/>
+            </a:solidFill>
+            <a:prstDash val="sysDot"/>
+          </a:ln>
+        </p:spPr>
+        <p:style>
+          <a:lnRef idx="2">
+            <a:schemeClr val="accent1"/>
+          </a:lnRef>
+          <a:fillRef idx="0">
+            <a:schemeClr val="accent1"/>
+          </a:fillRef>
+          <a:effectRef idx="1">
+            <a:schemeClr val="accent1"/>
+          </a:effectRef>
+          <a:fontRef idx="minor">
+            <a:schemeClr val="tx1"/>
+          </a:fontRef>
+        </p:style>
+      </p:cxnSp>
+      <p:sp>
+        <p:nvSpPr>
+          <p:cNvPr id="450" name="TextBox 449"/>
+          <p:cNvSpPr txBox="1"/>
+          <p:nvPr/>
+        </p:nvSpPr>
+        <p:spPr>
+          <a:xfrm rot="16200000">
+            <a:off x="9787018" y="896112"/>
+            <a:ext cx="164592" cy="292608"/>
+          </a:xfrm>
+          <a:prstGeom prst="rect">
+            <a:avLst/>
+          </a:prstGeom>
+          <a:noFill/>
+        </p:spPr>
+        <p:txBody>
+          <a:bodyPr wrap="none">
+            <a:spAutoFit/>
+          </a:bodyPr>
+          <a:lstStyle/>
+          <a:p>
+            <a:pPr algn="ctr">
+              <a:defRPr sz="470">
+                <a:solidFill>
+                  <a:srgbClr val="475569"/>
+                </a:solidFill>
+              </a:defRPr>
+            </a:pPr>
+            <a:r>
+              <a:t>5.10</a:t>
+            </a:r>
+          </a:p>
+        </p:txBody>
+      </p:sp>
+      <p:sp>
+        <p:nvSpPr>
+          <p:cNvPr id="451" name="Rectangle 450"/>
+          <p:cNvSpPr/>
+          <p:nvPr/>
+        </p:nvSpPr>
+        <p:spPr>
+          <a:xfrm>
+            <a:off x="9967429" y="1024127"/>
+            <a:ext cx="4572" cy="6729983"/>
+          </a:xfrm>
+          <a:prstGeom prst="rect">
+            <a:avLst/>
+          </a:prstGeom>
+          <a:solidFill>
+            <a:srgbClr val="94A3B8"/>
+          </a:solidFill>
+          <a:ln>
+            <a:noFill/>
+          </a:ln>
+        </p:spPr>
+        <p:style>
+          <a:lnRef idx="1">
+            <a:schemeClr val="accent1"/>
+          </a:lnRef>
+          <a:fillRef idx="3">
+            <a:schemeClr val="accent1"/>
+          </a:fillRef>
+          <a:effectRef idx="2">
+            <a:schemeClr val="accent1"/>
+          </a:effectRef>
+          <a:fontRef idx="minor">
+            <a:schemeClr val="lt1"/>
+          </a:fontRef>
+        </p:style>
+        <p:txBody>
+          <a:bodyPr rtlCol="0" anchor="ctr"/>
+          <a:lstStyle/>
+          <a:p>
+            <a:pPr algn="ctr"/>
+          </a:p>
+        </p:txBody>
+      </p:sp>
+      <p:cxnSp>
+        <p:nvCxnSpPr>
+          <p:cNvPr id="452" name="Connector 451"/>
+          <p:cNvCxnSpPr/>
+          <p:nvPr/>
+        </p:nvCxnSpPr>
+        <p:spPr>
+          <a:xfrm>
+            <a:off x="9967429" y="1024127"/>
+            <a:ext cx="0" cy="6729984"/>
+          </a:xfrm>
+          <a:prstGeom prst="line">
+            <a:avLst/>
+          </a:prstGeom>
+          <a:ln w="5715">
+            <a:solidFill>
+              <a:srgbClr val="94A3B8"/>
+            </a:solidFill>
+            <a:prstDash val="sysDot"/>
+          </a:ln>
+        </p:spPr>
+        <p:style>
+          <a:lnRef idx="2">
+            <a:schemeClr val="accent1"/>
+          </a:lnRef>
+          <a:fillRef idx="0">
+            <a:schemeClr val="accent1"/>
+          </a:fillRef>
+          <a:effectRef idx="1">
+            <a:schemeClr val="accent1"/>
+          </a:effectRef>
+          <a:fontRef idx="minor">
+            <a:schemeClr val="tx1"/>
+          </a:fontRef>
+        </p:style>
+      </p:cxnSp>
+      <p:sp>
+        <p:nvSpPr>
+          <p:cNvPr id="453" name="TextBox 452"/>
+          <p:cNvSpPr txBox="1"/>
+          <p:nvPr/>
+        </p:nvSpPr>
+        <p:spPr>
+          <a:xfrm rot="16200000">
+            <a:off x="9917137" y="813816"/>
+            <a:ext cx="164592" cy="292608"/>
+          </a:xfrm>
+          <a:prstGeom prst="rect">
+            <a:avLst/>
+          </a:prstGeom>
+          <a:noFill/>
+        </p:spPr>
+        <p:txBody>
+          <a:bodyPr wrap="none">
+            <a:spAutoFit/>
+          </a:bodyPr>
+          <a:lstStyle/>
+          <a:p>
+            <a:pPr algn="ctr">
+              <a:defRPr sz="470">
+                <a:solidFill>
+                  <a:srgbClr val="475569"/>
+                </a:solidFill>
+              </a:defRPr>
+            </a:pPr>
+            <a:r>
+              <a:t>5.11</a:t>
+            </a:r>
+          </a:p>
+        </p:txBody>
+      </p:sp>
+      <p:sp>
+        <p:nvSpPr>
+          <p:cNvPr id="454" name="Rectangle 453"/>
+          <p:cNvSpPr/>
+          <p:nvPr/>
+        </p:nvSpPr>
+        <p:spPr>
+          <a:xfrm>
+            <a:off x="10112005" y="1024127"/>
+            <a:ext cx="4572" cy="6729983"/>
+          </a:xfrm>
+          <a:prstGeom prst="rect">
+            <a:avLst/>
+          </a:prstGeom>
+          <a:solidFill>
+            <a:srgbClr val="94A3B8"/>
+          </a:solidFill>
+          <a:ln>
+            <a:noFill/>
+          </a:ln>
+        </p:spPr>
+        <p:style>
+          <a:lnRef idx="1">
+            <a:schemeClr val="accent1"/>
+          </a:lnRef>
+          <a:fillRef idx="3">
+            <a:schemeClr val="accent1"/>
+          </a:fillRef>
+          <a:effectRef idx="2">
+            <a:schemeClr val="accent1"/>
+          </a:effectRef>
+          <a:fontRef idx="minor">
+            <a:schemeClr val="lt1"/>
+          </a:fontRef>
+        </p:style>
+        <p:txBody>
+          <a:bodyPr rtlCol="0" anchor="ctr"/>
+          <a:lstStyle/>
+          <a:p>
+            <a:pPr algn="ctr"/>
+          </a:p>
+        </p:txBody>
+      </p:sp>
+      <p:cxnSp>
+        <p:nvCxnSpPr>
+          <p:cNvPr id="455" name="Connector 454"/>
+          <p:cNvCxnSpPr/>
+          <p:nvPr/>
+        </p:nvCxnSpPr>
+        <p:spPr>
+          <a:xfrm>
+            <a:off x="10112005" y="1024127"/>
+            <a:ext cx="0" cy="6729984"/>
+          </a:xfrm>
+          <a:prstGeom prst="line">
+            <a:avLst/>
+          </a:prstGeom>
+          <a:ln w="5715">
+            <a:solidFill>
+              <a:srgbClr val="94A3B8"/>
+            </a:solidFill>
+            <a:prstDash val="sysDot"/>
+          </a:ln>
+        </p:spPr>
+        <p:style>
+          <a:lnRef idx="2">
+            <a:schemeClr val="accent1"/>
+          </a:lnRef>
+          <a:fillRef idx="0">
+            <a:schemeClr val="accent1"/>
+          </a:fillRef>
+          <a:effectRef idx="1">
+            <a:schemeClr val="accent1"/>
+          </a:effectRef>
+          <a:fontRef idx="minor">
+            <a:schemeClr val="tx1"/>
+          </a:fontRef>
+        </p:style>
+      </p:cxnSp>
+      <p:sp>
+        <p:nvSpPr>
+          <p:cNvPr id="456" name="TextBox 455"/>
+          <p:cNvSpPr txBox="1"/>
+          <p:nvPr/>
+        </p:nvSpPr>
+        <p:spPr>
+          <a:xfrm rot="16200000">
+            <a:off x="10061713" y="896112"/>
+            <a:ext cx="164592" cy="292608"/>
+          </a:xfrm>
+          <a:prstGeom prst="rect">
+            <a:avLst/>
+          </a:prstGeom>
+          <a:noFill/>
+        </p:spPr>
+        <p:txBody>
+          <a:bodyPr wrap="none">
+            <a:spAutoFit/>
+          </a:bodyPr>
+          <a:lstStyle/>
+          <a:p>
+            <a:pPr algn="ctr">
+              <a:defRPr sz="470">
+                <a:solidFill>
+                  <a:srgbClr val="475569"/>
+                </a:solidFill>
+              </a:defRPr>
+            </a:pPr>
+            <a:r>
+              <a:t>5.12</a:t>
+            </a:r>
+          </a:p>
+        </p:txBody>
+      </p:sp>
+      <p:sp>
+        <p:nvSpPr>
+          <p:cNvPr id="457" name="Rectangle 456"/>
+          <p:cNvSpPr/>
+          <p:nvPr/>
+        </p:nvSpPr>
+        <p:spPr>
+          <a:xfrm>
+            <a:off x="10242124" y="1024127"/>
+            <a:ext cx="4572" cy="6729983"/>
+          </a:xfrm>
+          <a:prstGeom prst="rect">
+            <a:avLst/>
+          </a:prstGeom>
+          <a:solidFill>
+            <a:srgbClr val="94A3B8"/>
+          </a:solidFill>
+          <a:ln>
+            <a:noFill/>
+          </a:ln>
+        </p:spPr>
+        <p:style>
+          <a:lnRef idx="1">
+            <a:schemeClr val="accent1"/>
+          </a:lnRef>
+          <a:fillRef idx="3">
+            <a:schemeClr val="accent1"/>
+          </a:fillRef>
+          <a:effectRef idx="2">
+            <a:schemeClr val="accent1"/>
+          </a:effectRef>
+          <a:fontRef idx="minor">
+            <a:schemeClr val="lt1"/>
+          </a:fontRef>
+        </p:style>
+        <p:txBody>
+          <a:bodyPr rtlCol="0" anchor="ctr"/>
+          <a:lstStyle/>
+          <a:p>
+            <a:pPr algn="ctr"/>
+          </a:p>
+        </p:txBody>
+      </p:sp>
+      <p:cxnSp>
+        <p:nvCxnSpPr>
+          <p:cNvPr id="458" name="Connector 457"/>
+          <p:cNvCxnSpPr/>
+          <p:nvPr/>
+        </p:nvCxnSpPr>
+        <p:spPr>
+          <a:xfrm>
+            <a:off x="10242124" y="1024127"/>
+            <a:ext cx="0" cy="6729984"/>
+          </a:xfrm>
+          <a:prstGeom prst="line">
+            <a:avLst/>
+          </a:prstGeom>
+          <a:ln w="5715">
+            <a:solidFill>
+              <a:srgbClr val="94A3B8"/>
+            </a:solidFill>
+            <a:prstDash val="sysDot"/>
+          </a:ln>
+        </p:spPr>
+        <p:style>
+          <a:lnRef idx="2">
+            <a:schemeClr val="accent1"/>
+          </a:lnRef>
+          <a:fillRef idx="0">
+            <a:schemeClr val="accent1"/>
+          </a:fillRef>
+          <a:effectRef idx="1">
+            <a:schemeClr val="accent1"/>
+          </a:effectRef>
+          <a:fontRef idx="minor">
+            <a:schemeClr val="tx1"/>
+          </a:fontRef>
+        </p:style>
+      </p:cxnSp>
+      <p:sp>
+        <p:nvSpPr>
+          <p:cNvPr id="459" name="TextBox 458"/>
+          <p:cNvSpPr txBox="1"/>
+          <p:nvPr/>
+        </p:nvSpPr>
+        <p:spPr>
+          <a:xfrm rot="16200000">
+            <a:off x="10191832" y="813816"/>
+            <a:ext cx="164592" cy="292608"/>
+          </a:xfrm>
+          <a:prstGeom prst="rect">
+            <a:avLst/>
+          </a:prstGeom>
+          <a:noFill/>
+        </p:spPr>
+        <p:txBody>
+          <a:bodyPr wrap="none">
+            <a:spAutoFit/>
+          </a:bodyPr>
+          <a:lstStyle/>
+          <a:p>
+            <a:pPr algn="ctr">
+              <a:defRPr sz="470">
+                <a:solidFill>
+                  <a:srgbClr val="475569"/>
+                </a:solidFill>
+              </a:defRPr>
+            </a:pPr>
+            <a:r>
+              <a:t>5.13</a:t>
+            </a:r>
+          </a:p>
+        </p:txBody>
+      </p:sp>
+      <p:sp>
+        <p:nvSpPr>
+          <p:cNvPr id="460" name="Rectangle 459"/>
+          <p:cNvSpPr/>
+          <p:nvPr/>
+        </p:nvSpPr>
+        <p:spPr>
+          <a:xfrm>
+            <a:off x="10372243" y="1024127"/>
+            <a:ext cx="4572" cy="6729983"/>
+          </a:xfrm>
+          <a:prstGeom prst="rect">
+            <a:avLst/>
+          </a:prstGeom>
+          <a:solidFill>
+            <a:srgbClr val="94A3B8"/>
+          </a:solidFill>
+          <a:ln>
+            <a:noFill/>
+          </a:ln>
+        </p:spPr>
+        <p:style>
+          <a:lnRef idx="1">
+            <a:schemeClr val="accent1"/>
+          </a:lnRef>
+          <a:fillRef idx="3">
+            <a:schemeClr val="accent1"/>
+          </a:fillRef>
+          <a:effectRef idx="2">
+            <a:schemeClr val="accent1"/>
+          </a:effectRef>
+          <a:fontRef idx="minor">
+            <a:schemeClr val="lt1"/>
+          </a:fontRef>
+        </p:style>
+        <p:txBody>
+          <a:bodyPr rtlCol="0" anchor="ctr"/>
+          <a:lstStyle/>
+          <a:p>
+            <a:pPr algn="ctr"/>
+          </a:p>
+        </p:txBody>
+      </p:sp>
+      <p:cxnSp>
+        <p:nvCxnSpPr>
+          <p:cNvPr id="461" name="Connector 460"/>
+          <p:cNvCxnSpPr/>
+          <p:nvPr/>
+        </p:nvCxnSpPr>
+        <p:spPr>
+          <a:xfrm>
+            <a:off x="10372243" y="1024127"/>
+            <a:ext cx="0" cy="6729984"/>
+          </a:xfrm>
+          <a:prstGeom prst="line">
+            <a:avLst/>
+          </a:prstGeom>
+          <a:ln w="5715">
+            <a:solidFill>
+              <a:srgbClr val="94A3B8"/>
+            </a:solidFill>
+            <a:prstDash val="sysDot"/>
+          </a:ln>
+        </p:spPr>
+        <p:style>
+          <a:lnRef idx="2">
+            <a:schemeClr val="accent1"/>
+          </a:lnRef>
+          <a:fillRef idx="0">
+            <a:schemeClr val="accent1"/>
+          </a:fillRef>
+          <a:effectRef idx="1">
+            <a:schemeClr val="accent1"/>
+          </a:effectRef>
+          <a:fontRef idx="minor">
+            <a:schemeClr val="tx1"/>
+          </a:fontRef>
+        </p:style>
+      </p:cxnSp>
+      <p:sp>
+        <p:nvSpPr>
+          <p:cNvPr id="462" name="TextBox 461"/>
+          <p:cNvSpPr txBox="1"/>
+          <p:nvPr/>
+        </p:nvSpPr>
+        <p:spPr>
+          <a:xfrm rot="16200000">
+            <a:off x="10321951" y="896112"/>
+            <a:ext cx="164592" cy="292608"/>
+          </a:xfrm>
+          <a:prstGeom prst="rect">
+            <a:avLst/>
+          </a:prstGeom>
+          <a:noFill/>
+        </p:spPr>
+        <p:txBody>
+          <a:bodyPr wrap="none">
+            <a:spAutoFit/>
+          </a:bodyPr>
+          <a:lstStyle/>
+          <a:p>
+            <a:pPr algn="ctr">
+              <a:defRPr sz="470">
+                <a:solidFill>
+                  <a:srgbClr val="475569"/>
+                </a:solidFill>
+              </a:defRPr>
+            </a:pPr>
+            <a:r>
+              <a:t>5.14</a:t>
+            </a:r>
+          </a:p>
+        </p:txBody>
+      </p:sp>
+      <p:sp>
+        <p:nvSpPr>
+          <p:cNvPr id="463" name="Rectangle 462"/>
+          <p:cNvSpPr/>
+          <p:nvPr/>
+        </p:nvSpPr>
+        <p:spPr>
+          <a:xfrm>
+            <a:off x="10502362" y="1024127"/>
+            <a:ext cx="4572" cy="6729983"/>
+          </a:xfrm>
+          <a:prstGeom prst="rect">
+            <a:avLst/>
+          </a:prstGeom>
+          <a:solidFill>
+            <a:srgbClr val="94A3B8"/>
+          </a:solidFill>
+          <a:ln>
+            <a:noFill/>
+          </a:ln>
+        </p:spPr>
+        <p:style>
+          <a:lnRef idx="1">
+            <a:schemeClr val="accent1"/>
+          </a:lnRef>
+          <a:fillRef idx="3">
+            <a:schemeClr val="accent1"/>
+          </a:fillRef>
+          <a:effectRef idx="2">
+            <a:schemeClr val="accent1"/>
+          </a:effectRef>
+          <a:fontRef idx="minor">
+            <a:schemeClr val="lt1"/>
+          </a:fontRef>
+        </p:style>
+        <p:txBody>
+          <a:bodyPr rtlCol="0" anchor="ctr"/>
+          <a:lstStyle/>
+          <a:p>
+            <a:pPr algn="ctr"/>
+          </a:p>
+        </p:txBody>
+      </p:sp>
+      <p:cxnSp>
+        <p:nvCxnSpPr>
+          <p:cNvPr id="464" name="Connector 463"/>
+          <p:cNvCxnSpPr/>
+          <p:nvPr/>
+        </p:nvCxnSpPr>
+        <p:spPr>
+          <a:xfrm>
+            <a:off x="10502362" y="1024127"/>
+            <a:ext cx="0" cy="6729984"/>
+          </a:xfrm>
+          <a:prstGeom prst="line">
+            <a:avLst/>
+          </a:prstGeom>
+          <a:ln w="5715">
+            <a:solidFill>
+              <a:srgbClr val="94A3B8"/>
+            </a:solidFill>
+            <a:prstDash val="sysDot"/>
+          </a:ln>
+        </p:spPr>
+        <p:style>
+          <a:lnRef idx="2">
+            <a:schemeClr val="accent1"/>
+          </a:lnRef>
+          <a:fillRef idx="0">
+            <a:schemeClr val="accent1"/>
+          </a:fillRef>
+          <a:effectRef idx="1">
+            <a:schemeClr val="accent1"/>
+          </a:effectRef>
+          <a:fontRef idx="minor">
+            <a:schemeClr val="tx1"/>
+          </a:fontRef>
+        </p:style>
+      </p:cxnSp>
+      <p:sp>
+        <p:nvSpPr>
+          <p:cNvPr id="465" name="TextBox 464"/>
+          <p:cNvSpPr txBox="1"/>
+          <p:nvPr/>
+        </p:nvSpPr>
+        <p:spPr>
+          <a:xfrm rot="16200000">
+            <a:off x="10452070" y="813816"/>
+            <a:ext cx="164592" cy="292608"/>
+          </a:xfrm>
+          <a:prstGeom prst="rect">
+            <a:avLst/>
+          </a:prstGeom>
+          <a:noFill/>
+        </p:spPr>
+        <p:txBody>
+          <a:bodyPr wrap="none">
+            <a:spAutoFit/>
+          </a:bodyPr>
+          <a:lstStyle/>
+          <a:p>
+            <a:pPr algn="ctr">
+              <a:defRPr sz="470">
+                <a:solidFill>
+                  <a:srgbClr val="475569"/>
+                </a:solidFill>
+              </a:defRPr>
+            </a:pPr>
+            <a:r>
+              <a:t>5.15</a:t>
+            </a:r>
+          </a:p>
+        </p:txBody>
+      </p:sp>
+      <p:sp>
+        <p:nvSpPr>
+          <p:cNvPr id="466" name="Rectangle 465"/>
+          <p:cNvSpPr/>
+          <p:nvPr/>
+        </p:nvSpPr>
+        <p:spPr>
+          <a:xfrm>
+            <a:off x="10646939" y="1024127"/>
+            <a:ext cx="4572" cy="6729983"/>
+          </a:xfrm>
+          <a:prstGeom prst="rect">
+            <a:avLst/>
+          </a:prstGeom>
+          <a:solidFill>
+            <a:srgbClr val="94A3B8"/>
+          </a:solidFill>
+          <a:ln>
+            <a:noFill/>
+          </a:ln>
+        </p:spPr>
+        <p:style>
+          <a:lnRef idx="1">
+            <a:schemeClr val="accent1"/>
+          </a:lnRef>
+          <a:fillRef idx="3">
+            <a:schemeClr val="accent1"/>
+          </a:fillRef>
+          <a:effectRef idx="2">
+            <a:schemeClr val="accent1"/>
+          </a:effectRef>
+          <a:fontRef idx="minor">
+            <a:schemeClr val="lt1"/>
+          </a:fontRef>
+        </p:style>
+        <p:txBody>
+          <a:bodyPr rtlCol="0" anchor="ctr"/>
+          <a:lstStyle/>
+          <a:p>
+            <a:pPr algn="ctr"/>
+          </a:p>
+        </p:txBody>
+      </p:sp>
+      <p:cxnSp>
+        <p:nvCxnSpPr>
+          <p:cNvPr id="467" name="Connector 466"/>
+          <p:cNvCxnSpPr/>
+          <p:nvPr/>
+        </p:nvCxnSpPr>
+        <p:spPr>
+          <a:xfrm>
+            <a:off x="10646939" y="1024127"/>
+            <a:ext cx="0" cy="6729984"/>
+          </a:xfrm>
+          <a:prstGeom prst="line">
+            <a:avLst/>
+          </a:prstGeom>
+          <a:ln w="5715">
+            <a:solidFill>
+              <a:srgbClr val="94A3B8"/>
+            </a:solidFill>
+            <a:prstDash val="sysDot"/>
+          </a:ln>
+        </p:spPr>
+        <p:style>
+          <a:lnRef idx="2">
+            <a:schemeClr val="accent1"/>
+          </a:lnRef>
+          <a:fillRef idx="0">
+            <a:schemeClr val="accent1"/>
+          </a:fillRef>
+          <a:effectRef idx="1">
+            <a:schemeClr val="accent1"/>
+          </a:effectRef>
+          <a:fontRef idx="minor">
+            <a:schemeClr val="tx1"/>
+          </a:fontRef>
+        </p:style>
+      </p:cxnSp>
+      <p:sp>
+        <p:nvSpPr>
+          <p:cNvPr id="468" name="TextBox 467"/>
+          <p:cNvSpPr txBox="1"/>
+          <p:nvPr/>
+        </p:nvSpPr>
+        <p:spPr>
+          <a:xfrm rot="16200000">
+            <a:off x="10596647" y="896112"/>
+            <a:ext cx="164592" cy="292608"/>
+          </a:xfrm>
+          <a:prstGeom prst="rect">
+            <a:avLst/>
+          </a:prstGeom>
+          <a:noFill/>
+        </p:spPr>
+        <p:txBody>
+          <a:bodyPr wrap="none">
+            <a:spAutoFit/>
+          </a:bodyPr>
+          <a:lstStyle/>
+          <a:p>
+            <a:pPr algn="ctr">
+              <a:defRPr sz="470">
+                <a:solidFill>
+                  <a:srgbClr val="475569"/>
+                </a:solidFill>
+              </a:defRPr>
+            </a:pPr>
+            <a:r>
+              <a:t>5.16</a:t>
+            </a:r>
+          </a:p>
+        </p:txBody>
+      </p:sp>
+      <p:sp>
+        <p:nvSpPr>
+          <p:cNvPr id="469" name="Rectangle 468"/>
+          <p:cNvSpPr/>
+          <p:nvPr/>
+        </p:nvSpPr>
+        <p:spPr>
+          <a:xfrm>
+            <a:off x="10791515" y="1024127"/>
+            <a:ext cx="4572" cy="6729983"/>
+          </a:xfrm>
+          <a:prstGeom prst="rect">
+            <a:avLst/>
+          </a:prstGeom>
+          <a:solidFill>
+            <a:srgbClr val="94A3B8"/>
+          </a:solidFill>
+          <a:ln>
+            <a:noFill/>
+          </a:ln>
+        </p:spPr>
+        <p:style>
+          <a:lnRef idx="1">
+            <a:schemeClr val="accent1"/>
+          </a:lnRef>
+          <a:fillRef idx="3">
+            <a:schemeClr val="accent1"/>
+          </a:fillRef>
+          <a:effectRef idx="2">
+            <a:schemeClr val="accent1"/>
+          </a:effectRef>
+          <a:fontRef idx="minor">
+            <a:schemeClr val="lt1"/>
+          </a:fontRef>
+        </p:style>
+        <p:txBody>
+          <a:bodyPr rtlCol="0" anchor="ctr"/>
+          <a:lstStyle/>
+          <a:p>
+            <a:pPr algn="ctr"/>
+          </a:p>
+        </p:txBody>
+      </p:sp>
+      <p:cxnSp>
+        <p:nvCxnSpPr>
+          <p:cNvPr id="470" name="Connector 469"/>
+          <p:cNvCxnSpPr/>
+          <p:nvPr/>
+        </p:nvCxnSpPr>
+        <p:spPr>
+          <a:xfrm>
+            <a:off x="10791515" y="1024127"/>
+            <a:ext cx="0" cy="6729984"/>
+          </a:xfrm>
+          <a:prstGeom prst="line">
+            <a:avLst/>
+          </a:prstGeom>
+          <a:ln w="5715">
+            <a:solidFill>
+              <a:srgbClr val="94A3B8"/>
+            </a:solidFill>
+            <a:prstDash val="sysDot"/>
+          </a:ln>
+        </p:spPr>
+        <p:style>
+          <a:lnRef idx="2">
+            <a:schemeClr val="accent1"/>
+          </a:lnRef>
+          <a:fillRef idx="0">
+            <a:schemeClr val="accent1"/>
+          </a:fillRef>
+          <a:effectRef idx="1">
+            <a:schemeClr val="accent1"/>
+          </a:effectRef>
+          <a:fontRef idx="minor">
+            <a:schemeClr val="tx1"/>
+          </a:fontRef>
+        </p:style>
+      </p:cxnSp>
+      <p:sp>
+        <p:nvSpPr>
+          <p:cNvPr id="471" name="TextBox 470"/>
+          <p:cNvSpPr txBox="1"/>
+          <p:nvPr/>
+        </p:nvSpPr>
+        <p:spPr>
+          <a:xfrm rot="16200000">
+            <a:off x="10741223" y="813816"/>
+            <a:ext cx="164592" cy="292608"/>
+          </a:xfrm>
+          <a:prstGeom prst="rect">
+            <a:avLst/>
+          </a:prstGeom>
+          <a:noFill/>
+        </p:spPr>
+        <p:txBody>
+          <a:bodyPr wrap="none">
+            <a:spAutoFit/>
+          </a:bodyPr>
+          <a:lstStyle/>
+          <a:p>
+            <a:pPr algn="ctr">
+              <a:defRPr sz="470">
+                <a:solidFill>
+                  <a:srgbClr val="475569"/>
+                </a:solidFill>
+              </a:defRPr>
+            </a:pPr>
+            <a:r>
+              <a:t>5.17</a:t>
+            </a:r>
+          </a:p>
+        </p:txBody>
+      </p:sp>
+      <p:sp>
+        <p:nvSpPr>
+          <p:cNvPr id="472" name="Rectangle 471"/>
+          <p:cNvSpPr/>
+          <p:nvPr/>
+        </p:nvSpPr>
+        <p:spPr>
+          <a:xfrm>
+            <a:off x="10921634" y="1024127"/>
+            <a:ext cx="4572" cy="6729983"/>
+          </a:xfrm>
+          <a:prstGeom prst="rect">
+            <a:avLst/>
+          </a:prstGeom>
+          <a:solidFill>
+            <a:srgbClr val="94A3B8"/>
+          </a:solidFill>
+          <a:ln>
+            <a:noFill/>
+          </a:ln>
+        </p:spPr>
+        <p:style>
+          <a:lnRef idx="1">
+            <a:schemeClr val="accent1"/>
+          </a:lnRef>
+          <a:fillRef idx="3">
+            <a:schemeClr val="accent1"/>
+          </a:fillRef>
+          <a:effectRef idx="2">
+            <a:schemeClr val="accent1"/>
+          </a:effectRef>
+          <a:fontRef idx="minor">
+            <a:schemeClr val="lt1"/>
+          </a:fontRef>
+        </p:style>
+        <p:txBody>
+          <a:bodyPr rtlCol="0" anchor="ctr"/>
+          <a:lstStyle/>
+          <a:p>
+            <a:pPr algn="ctr"/>
+          </a:p>
+        </p:txBody>
+      </p:sp>
+      <p:cxnSp>
+        <p:nvCxnSpPr>
+          <p:cNvPr id="473" name="Connector 472"/>
+          <p:cNvCxnSpPr/>
+          <p:nvPr/>
+        </p:nvCxnSpPr>
+        <p:spPr>
+          <a:xfrm>
+            <a:off x="10921634" y="1024127"/>
+            <a:ext cx="0" cy="6729984"/>
+          </a:xfrm>
+          <a:prstGeom prst="line">
+            <a:avLst/>
+          </a:prstGeom>
+          <a:ln w="5715">
+            <a:solidFill>
+              <a:srgbClr val="94A3B8"/>
+            </a:solidFill>
+            <a:prstDash val="sysDot"/>
+          </a:ln>
+        </p:spPr>
+        <p:style>
+          <a:lnRef idx="2">
+            <a:schemeClr val="accent1"/>
+          </a:lnRef>
+          <a:fillRef idx="0">
+            <a:schemeClr val="accent1"/>
+          </a:fillRef>
+          <a:effectRef idx="1">
+            <a:schemeClr val="accent1"/>
+          </a:effectRef>
+          <a:fontRef idx="minor">
+            <a:schemeClr val="tx1"/>
+          </a:fontRef>
+        </p:style>
+      </p:cxnSp>
+      <p:sp>
+        <p:nvSpPr>
+          <p:cNvPr id="474" name="TextBox 473"/>
+          <p:cNvSpPr txBox="1"/>
+          <p:nvPr/>
+        </p:nvSpPr>
+        <p:spPr>
+          <a:xfrm rot="16200000">
+            <a:off x="10871342" y="896112"/>
+            <a:ext cx="164592" cy="292608"/>
+          </a:xfrm>
+          <a:prstGeom prst="rect">
+            <a:avLst/>
+          </a:prstGeom>
+          <a:noFill/>
+        </p:spPr>
+        <p:txBody>
+          <a:bodyPr wrap="none">
+            <a:spAutoFit/>
+          </a:bodyPr>
+          <a:lstStyle/>
+          <a:p>
+            <a:pPr algn="ctr">
+              <a:defRPr sz="470">
+                <a:solidFill>
+                  <a:srgbClr val="475569"/>
+                </a:solidFill>
+              </a:defRPr>
+            </a:pPr>
+            <a:r>
+              <a:t>5.18</a:t>
+            </a:r>
+          </a:p>
+        </p:txBody>
+      </p:sp>
+      <p:sp>
+        <p:nvSpPr>
+          <p:cNvPr id="475" name="Rectangle 474"/>
+          <p:cNvSpPr/>
+          <p:nvPr/>
+        </p:nvSpPr>
+        <p:spPr>
+          <a:xfrm>
+            <a:off x="11066211" y="1024127"/>
+            <a:ext cx="4572" cy="6729983"/>
+          </a:xfrm>
+          <a:prstGeom prst="rect">
+            <a:avLst/>
+          </a:prstGeom>
+          <a:solidFill>
+            <a:srgbClr val="94A3B8"/>
+          </a:solidFill>
+          <a:ln>
+            <a:noFill/>
+          </a:ln>
+        </p:spPr>
+        <p:style>
+          <a:lnRef idx="1">
+            <a:schemeClr val="accent1"/>
+          </a:lnRef>
+          <a:fillRef idx="3">
+            <a:schemeClr val="accent1"/>
+          </a:fillRef>
+          <a:effectRef idx="2">
+            <a:schemeClr val="accent1"/>
+          </a:effectRef>
+          <a:fontRef idx="minor">
+            <a:schemeClr val="lt1"/>
+          </a:fontRef>
+        </p:style>
+        <p:txBody>
+          <a:bodyPr rtlCol="0" anchor="ctr"/>
+          <a:lstStyle/>
+          <a:p>
+            <a:pPr algn="ctr"/>
+          </a:p>
+        </p:txBody>
+      </p:sp>
+      <p:cxnSp>
+        <p:nvCxnSpPr>
+          <p:cNvPr id="476" name="Connector 475"/>
+          <p:cNvCxnSpPr/>
+          <p:nvPr/>
+        </p:nvCxnSpPr>
+        <p:spPr>
+          <a:xfrm>
+            <a:off x="11066211" y="1024127"/>
+            <a:ext cx="0" cy="6729984"/>
+          </a:xfrm>
+          <a:prstGeom prst="line">
+            <a:avLst/>
+          </a:prstGeom>
+          <a:ln w="5715">
+            <a:solidFill>
+              <a:srgbClr val="94A3B8"/>
+            </a:solidFill>
+            <a:prstDash val="sysDot"/>
+          </a:ln>
+        </p:spPr>
+        <p:style>
+          <a:lnRef idx="2">
+            <a:schemeClr val="accent1"/>
+          </a:lnRef>
+          <a:fillRef idx="0">
+            <a:schemeClr val="accent1"/>
+          </a:fillRef>
+          <a:effectRef idx="1">
+            <a:schemeClr val="accent1"/>
+          </a:effectRef>
+          <a:fontRef idx="minor">
+            <a:schemeClr val="tx1"/>
+          </a:fontRef>
+        </p:style>
+      </p:cxnSp>
+      <p:sp>
+        <p:nvSpPr>
+          <p:cNvPr id="477" name="TextBox 476"/>
+          <p:cNvSpPr txBox="1"/>
+          <p:nvPr/>
+        </p:nvSpPr>
+        <p:spPr>
+          <a:xfrm rot="16200000">
+            <a:off x="11015919" y="813816"/>
+            <a:ext cx="164592" cy="292608"/>
+          </a:xfrm>
+          <a:prstGeom prst="rect">
+            <a:avLst/>
+          </a:prstGeom>
+          <a:noFill/>
+        </p:spPr>
+        <p:txBody>
+          <a:bodyPr wrap="none">
+            <a:spAutoFit/>
+          </a:bodyPr>
+          <a:lstStyle/>
+          <a:p>
+            <a:pPr algn="ctr">
+              <a:defRPr sz="470">
+                <a:solidFill>
+                  <a:srgbClr val="475569"/>
+                </a:solidFill>
+              </a:defRPr>
+            </a:pPr>
+            <a:r>
+              <a:t>5.19</a:t>
+            </a:r>
+          </a:p>
+        </p:txBody>
+      </p:sp>
+      <p:sp>
+        <p:nvSpPr>
+          <p:cNvPr id="478" name="Rectangle 477"/>
+          <p:cNvSpPr/>
+          <p:nvPr/>
+        </p:nvSpPr>
+        <p:spPr>
+          <a:xfrm>
+            <a:off x="11196330" y="1024127"/>
+            <a:ext cx="4572" cy="6729983"/>
+          </a:xfrm>
+          <a:prstGeom prst="rect">
+            <a:avLst/>
+          </a:prstGeom>
+          <a:solidFill>
+            <a:srgbClr val="94A3B8"/>
+          </a:solidFill>
+          <a:ln>
+            <a:noFill/>
+          </a:ln>
+        </p:spPr>
+        <p:style>
+          <a:lnRef idx="1">
+            <a:schemeClr val="accent1"/>
+          </a:lnRef>
+          <a:fillRef idx="3">
+            <a:schemeClr val="accent1"/>
+          </a:fillRef>
+          <a:effectRef idx="2">
+            <a:schemeClr val="accent1"/>
+          </a:effectRef>
+          <a:fontRef idx="minor">
+            <a:schemeClr val="lt1"/>
+          </a:fontRef>
+        </p:style>
+        <p:txBody>
+          <a:bodyPr rtlCol="0" anchor="ctr"/>
+          <a:lstStyle/>
+          <a:p>
+            <a:pPr algn="ctr"/>
+          </a:p>
+        </p:txBody>
+      </p:sp>
+      <p:cxnSp>
+        <p:nvCxnSpPr>
+          <p:cNvPr id="479" name="Connector 478"/>
+          <p:cNvCxnSpPr/>
+          <p:nvPr/>
+        </p:nvCxnSpPr>
+        <p:spPr>
+          <a:xfrm>
+            <a:off x="11196330" y="1024127"/>
+            <a:ext cx="0" cy="6729984"/>
+          </a:xfrm>
+          <a:prstGeom prst="line">
+            <a:avLst/>
+          </a:prstGeom>
+          <a:ln w="5715">
+            <a:solidFill>
+              <a:srgbClr val="94A3B8"/>
+            </a:solidFill>
+            <a:prstDash val="sysDot"/>
+          </a:ln>
+        </p:spPr>
+        <p:style>
+          <a:lnRef idx="2">
+            <a:schemeClr val="accent1"/>
+          </a:lnRef>
+          <a:fillRef idx="0">
+            <a:schemeClr val="accent1"/>
+          </a:fillRef>
+          <a:effectRef idx="1">
+            <a:schemeClr val="accent1"/>
+          </a:effectRef>
+          <a:fontRef idx="minor">
+            <a:schemeClr val="tx1"/>
+          </a:fontRef>
+        </p:style>
+      </p:cxnSp>
+      <p:sp>
+        <p:nvSpPr>
+          <p:cNvPr id="480" name="TextBox 479"/>
+          <p:cNvSpPr txBox="1"/>
+          <p:nvPr/>
+        </p:nvSpPr>
+        <p:spPr>
+          <a:xfrm rot="16200000">
+            <a:off x="11146038" y="896112"/>
+            <a:ext cx="164592" cy="292608"/>
+          </a:xfrm>
+          <a:prstGeom prst="rect">
+            <a:avLst/>
+          </a:prstGeom>
+          <a:noFill/>
+        </p:spPr>
+        <p:txBody>
+          <a:bodyPr wrap="none">
+            <a:spAutoFit/>
+          </a:bodyPr>
+          <a:lstStyle/>
+          <a:p>
+            <a:pPr algn="ctr">
+              <a:defRPr sz="470">
+                <a:solidFill>
+                  <a:srgbClr val="475569"/>
+                </a:solidFill>
+              </a:defRPr>
+            </a:pPr>
+            <a:r>
+              <a:t>6.0</a:t>
+            </a:r>
+          </a:p>
+        </p:txBody>
+      </p:sp>
+      <p:sp>
+        <p:nvSpPr>
+          <p:cNvPr id="481" name="Rectangle 480"/>
+          <p:cNvSpPr/>
+          <p:nvPr/>
+        </p:nvSpPr>
+        <p:spPr>
+          <a:xfrm>
+            <a:off x="11340907" y="1024127"/>
+            <a:ext cx="4572" cy="6729983"/>
+          </a:xfrm>
+          <a:prstGeom prst="rect">
+            <a:avLst/>
+          </a:prstGeom>
+          <a:solidFill>
+            <a:srgbClr val="94A3B8"/>
+          </a:solidFill>
+          <a:ln>
+            <a:noFill/>
+          </a:ln>
+        </p:spPr>
+        <p:style>
+          <a:lnRef idx="1">
+            <a:schemeClr val="accent1"/>
+          </a:lnRef>
+          <a:fillRef idx="3">
+            <a:schemeClr val="accent1"/>
+          </a:fillRef>
+          <a:effectRef idx="2">
+            <a:schemeClr val="accent1"/>
+          </a:effectRef>
+          <a:fontRef idx="minor">
+            <a:schemeClr val="lt1"/>
+          </a:fontRef>
+        </p:style>
+        <p:txBody>
+          <a:bodyPr rtlCol="0" anchor="ctr"/>
+          <a:lstStyle/>
+          <a:p>
+            <a:pPr algn="ctr"/>
+          </a:p>
+        </p:txBody>
+      </p:sp>
+      <p:cxnSp>
+        <p:nvCxnSpPr>
+          <p:cNvPr id="482" name="Connector 481"/>
+          <p:cNvCxnSpPr/>
+          <p:nvPr/>
+        </p:nvCxnSpPr>
+        <p:spPr>
+          <a:xfrm>
+            <a:off x="11340907" y="1024127"/>
+            <a:ext cx="0" cy="6729984"/>
+          </a:xfrm>
+          <a:prstGeom prst="line">
+            <a:avLst/>
+          </a:prstGeom>
+          <a:ln w="5715">
+            <a:solidFill>
+              <a:srgbClr val="94A3B8"/>
+            </a:solidFill>
+            <a:prstDash val="sysDot"/>
+          </a:ln>
+        </p:spPr>
+        <p:style>
+          <a:lnRef idx="2">
+            <a:schemeClr val="accent1"/>
+          </a:lnRef>
+          <a:fillRef idx="0">
+            <a:schemeClr val="accent1"/>
+          </a:fillRef>
+          <a:effectRef idx="1">
+            <a:schemeClr val="accent1"/>
+          </a:effectRef>
+          <a:fontRef idx="minor">
+            <a:schemeClr val="tx1"/>
+          </a:fontRef>
+        </p:style>
+      </p:cxnSp>
+      <p:sp>
+        <p:nvSpPr>
+          <p:cNvPr id="483" name="TextBox 482"/>
+          <p:cNvSpPr txBox="1"/>
+          <p:nvPr/>
+        </p:nvSpPr>
+        <p:spPr>
+          <a:xfrm rot="16200000">
+            <a:off x="11290615" y="813816"/>
+            <a:ext cx="164592" cy="292608"/>
+          </a:xfrm>
+          <a:prstGeom prst="rect">
+            <a:avLst/>
+          </a:prstGeom>
+          <a:noFill/>
+        </p:spPr>
+        <p:txBody>
+          <a:bodyPr wrap="none">
+            <a:spAutoFit/>
+          </a:bodyPr>
+          <a:lstStyle/>
+          <a:p>
+            <a:pPr algn="ctr">
+              <a:defRPr sz="470">
+                <a:solidFill>
+                  <a:srgbClr val="475569"/>
+                </a:solidFill>
+              </a:defRPr>
+            </a:pPr>
+            <a:r>
+              <a:t>6.1</a:t>
+            </a:r>
+          </a:p>
+        </p:txBody>
+      </p:sp>
+      <p:sp>
+        <p:nvSpPr>
+          <p:cNvPr id="484" name="Rectangle 483"/>
+          <p:cNvSpPr/>
+          <p:nvPr/>
+        </p:nvSpPr>
+        <p:spPr>
+          <a:xfrm>
+            <a:off x="11485483" y="1024127"/>
+            <a:ext cx="4572" cy="6729983"/>
+          </a:xfrm>
+          <a:prstGeom prst="rect">
+            <a:avLst/>
+          </a:prstGeom>
+          <a:solidFill>
+            <a:srgbClr val="94A3B8"/>
+          </a:solidFill>
+          <a:ln>
+            <a:noFill/>
+          </a:ln>
+        </p:spPr>
+        <p:style>
+          <a:lnRef idx="1">
+            <a:schemeClr val="accent1"/>
+          </a:lnRef>
+          <a:fillRef idx="3">
+            <a:schemeClr val="accent1"/>
+          </a:fillRef>
+          <a:effectRef idx="2">
+            <a:schemeClr val="accent1"/>
+          </a:effectRef>
+          <a:fontRef idx="minor">
+            <a:schemeClr val="lt1"/>
+          </a:fontRef>
+        </p:style>
+        <p:txBody>
+          <a:bodyPr rtlCol="0" anchor="ctr"/>
+          <a:lstStyle/>
+          <a:p>
+            <a:pPr algn="ctr"/>
+          </a:p>
+        </p:txBody>
+      </p:sp>
+      <p:cxnSp>
+        <p:nvCxnSpPr>
+          <p:cNvPr id="485" name="Connector 484"/>
+          <p:cNvCxnSpPr/>
+          <p:nvPr/>
+        </p:nvCxnSpPr>
+        <p:spPr>
+          <a:xfrm>
+            <a:off x="11485483" y="1024127"/>
+            <a:ext cx="0" cy="6729984"/>
+          </a:xfrm>
+          <a:prstGeom prst="line">
+            <a:avLst/>
+          </a:prstGeom>
+          <a:ln w="5715">
+            <a:solidFill>
+              <a:srgbClr val="94A3B8"/>
+            </a:solidFill>
+            <a:prstDash val="sysDot"/>
+          </a:ln>
+        </p:spPr>
+        <p:style>
+          <a:lnRef idx="2">
+            <a:schemeClr val="accent1"/>
+          </a:lnRef>
+          <a:fillRef idx="0">
+            <a:schemeClr val="accent1"/>
+          </a:fillRef>
+          <a:effectRef idx="1">
+            <a:schemeClr val="accent1"/>
+          </a:effectRef>
+          <a:fontRef idx="minor">
+            <a:schemeClr val="tx1"/>
+          </a:fontRef>
+        </p:style>
+      </p:cxnSp>
+      <p:sp>
+        <p:nvSpPr>
+          <p:cNvPr id="486" name="TextBox 485"/>
+          <p:cNvSpPr txBox="1"/>
+          <p:nvPr/>
+        </p:nvSpPr>
+        <p:spPr>
+          <a:xfrm rot="16200000">
+            <a:off x="11435191" y="896112"/>
+            <a:ext cx="164592" cy="292608"/>
+          </a:xfrm>
+          <a:prstGeom prst="rect">
+            <a:avLst/>
+          </a:prstGeom>
+          <a:noFill/>
+        </p:spPr>
+        <p:txBody>
+          <a:bodyPr wrap="none">
+            <a:spAutoFit/>
+          </a:bodyPr>
+          <a:lstStyle/>
+          <a:p>
+            <a:pPr algn="ctr">
+              <a:defRPr sz="470">
+                <a:solidFill>
+                  <a:srgbClr val="475569"/>
+                </a:solidFill>
+              </a:defRPr>
+            </a:pPr>
+            <a:r>
+              <a:t>6.2</a:t>
+            </a:r>
+          </a:p>
+        </p:txBody>
+      </p:sp>
+      <p:sp>
+        <p:nvSpPr>
+          <p:cNvPr id="487" name="Rectangle 486"/>
+          <p:cNvSpPr/>
+          <p:nvPr/>
+        </p:nvSpPr>
+        <p:spPr>
+          <a:xfrm>
+            <a:off x="11615602" y="1024127"/>
+            <a:ext cx="4572" cy="6729983"/>
+          </a:xfrm>
+          <a:prstGeom prst="rect">
+            <a:avLst/>
+          </a:prstGeom>
+          <a:solidFill>
+            <a:srgbClr val="94A3B8"/>
+          </a:solidFill>
+          <a:ln>
+            <a:noFill/>
+          </a:ln>
+        </p:spPr>
+        <p:style>
+          <a:lnRef idx="1">
+            <a:schemeClr val="accent1"/>
+          </a:lnRef>
+          <a:fillRef idx="3">
+            <a:schemeClr val="accent1"/>
+          </a:fillRef>
+          <a:effectRef idx="2">
+            <a:schemeClr val="accent1"/>
+          </a:effectRef>
+          <a:fontRef idx="minor">
+            <a:schemeClr val="lt1"/>
+          </a:fontRef>
+        </p:style>
+        <p:txBody>
+          <a:bodyPr rtlCol="0" anchor="ctr"/>
+          <a:lstStyle/>
+          <a:p>
+            <a:pPr algn="ctr"/>
+          </a:p>
+        </p:txBody>
+      </p:sp>
+      <p:cxnSp>
+        <p:nvCxnSpPr>
+          <p:cNvPr id="488" name="Connector 487"/>
+          <p:cNvCxnSpPr/>
+          <p:nvPr/>
+        </p:nvCxnSpPr>
+        <p:spPr>
+          <a:xfrm>
+            <a:off x="11615602" y="1024127"/>
+            <a:ext cx="0" cy="6729984"/>
+          </a:xfrm>
+          <a:prstGeom prst="line">
+            <a:avLst/>
+          </a:prstGeom>
+          <a:ln w="5715">
+            <a:solidFill>
+              <a:srgbClr val="94A3B8"/>
+            </a:solidFill>
+            <a:prstDash val="sysDot"/>
+          </a:ln>
+        </p:spPr>
+        <p:style>
+          <a:lnRef idx="2">
+            <a:schemeClr val="accent1"/>
+          </a:lnRef>
+          <a:fillRef idx="0">
+            <a:schemeClr val="accent1"/>
+          </a:fillRef>
+          <a:effectRef idx="1">
+            <a:schemeClr val="accent1"/>
+          </a:effectRef>
+          <a:fontRef idx="minor">
+            <a:schemeClr val="tx1"/>
+          </a:fontRef>
+        </p:style>
+      </p:cxnSp>
+      <p:sp>
+        <p:nvSpPr>
+          <p:cNvPr id="489" name="TextBox 488"/>
+          <p:cNvSpPr txBox="1"/>
+          <p:nvPr/>
+        </p:nvSpPr>
+        <p:spPr>
+          <a:xfrm rot="16200000">
+            <a:off x="11565310" y="813816"/>
+            <a:ext cx="164592" cy="292608"/>
+          </a:xfrm>
+          <a:prstGeom prst="rect">
+            <a:avLst/>
+          </a:prstGeom>
+          <a:noFill/>
+        </p:spPr>
+        <p:txBody>
+          <a:bodyPr wrap="none">
+            <a:spAutoFit/>
+          </a:bodyPr>
+          <a:lstStyle/>
+          <a:p>
+            <a:pPr algn="ctr">
+              <a:defRPr sz="470">
+                <a:solidFill>
+                  <a:srgbClr val="475569"/>
+                </a:solidFill>
+              </a:defRPr>
+            </a:pPr>
+            <a:r>
+              <a:t>6.3</a:t>
+            </a:r>
+          </a:p>
+        </p:txBody>
+      </p:sp>
+      <p:sp>
+        <p:nvSpPr>
+          <p:cNvPr id="490" name="Rectangle 489"/>
+          <p:cNvSpPr/>
+          <p:nvPr/>
+        </p:nvSpPr>
+        <p:spPr>
+          <a:xfrm>
+            <a:off x="11745721" y="1024127"/>
+            <a:ext cx="4572" cy="6729983"/>
+          </a:xfrm>
+          <a:prstGeom prst="rect">
+            <a:avLst/>
+          </a:prstGeom>
+          <a:solidFill>
+            <a:srgbClr val="94A3B8"/>
+          </a:solidFill>
+          <a:ln>
+            <a:noFill/>
+          </a:ln>
+        </p:spPr>
+        <p:style>
+          <a:lnRef idx="1">
+            <a:schemeClr val="accent1"/>
+          </a:lnRef>
+          <a:fillRef idx="3">
+            <a:schemeClr val="accent1"/>
+          </a:fillRef>
+          <a:effectRef idx="2">
+            <a:schemeClr val="accent1"/>
+          </a:effectRef>
+          <a:fontRef idx="minor">
+            <a:schemeClr val="lt1"/>
+          </a:fontRef>
+        </p:style>
+        <p:txBody>
+          <a:bodyPr rtlCol="0" anchor="ctr"/>
+          <a:lstStyle/>
+          <a:p>
+            <a:pPr algn="ctr"/>
+          </a:p>
+        </p:txBody>
+      </p:sp>
+      <p:cxnSp>
+        <p:nvCxnSpPr>
+          <p:cNvPr id="491" name="Connector 490"/>
+          <p:cNvCxnSpPr/>
+          <p:nvPr/>
+        </p:nvCxnSpPr>
+        <p:spPr>
+          <a:xfrm>
+            <a:off x="11745721" y="1024127"/>
+            <a:ext cx="0" cy="6729984"/>
+          </a:xfrm>
+          <a:prstGeom prst="line">
+            <a:avLst/>
+          </a:prstGeom>
+          <a:ln w="5715">
+            <a:solidFill>
+              <a:srgbClr val="94A3B8"/>
+            </a:solidFill>
+            <a:prstDash val="sysDot"/>
+          </a:ln>
+        </p:spPr>
+        <p:style>
+          <a:lnRef idx="2">
+            <a:schemeClr val="accent1"/>
+          </a:lnRef>
+          <a:fillRef idx="0">
+            <a:schemeClr val="accent1"/>
+          </a:fillRef>
+          <a:effectRef idx="1">
+            <a:schemeClr val="accent1"/>
+          </a:effectRef>
+          <a:fontRef idx="minor">
+            <a:schemeClr val="tx1"/>
+          </a:fontRef>
+        </p:style>
+      </p:cxnSp>
+      <p:sp>
+        <p:nvSpPr>
+          <p:cNvPr id="492" name="TextBox 491"/>
+          <p:cNvSpPr txBox="1"/>
+          <p:nvPr/>
+        </p:nvSpPr>
+        <p:spPr>
+          <a:xfrm rot="16200000">
+            <a:off x="11695429" y="896112"/>
+            <a:ext cx="164592" cy="292608"/>
+          </a:xfrm>
+          <a:prstGeom prst="rect">
+            <a:avLst/>
+          </a:prstGeom>
+          <a:noFill/>
+        </p:spPr>
+        <p:txBody>
+          <a:bodyPr wrap="none">
+            <a:spAutoFit/>
+          </a:bodyPr>
+          <a:lstStyle/>
+          <a:p>
+            <a:pPr algn="ctr">
+              <a:defRPr sz="470">
+                <a:solidFill>
+                  <a:srgbClr val="475569"/>
+                </a:solidFill>
+              </a:defRPr>
+            </a:pPr>
+            <a:r>
+              <a:t>6.4</a:t>
+            </a:r>
+          </a:p>
+        </p:txBody>
+      </p:sp>
+      <p:sp>
+        <p:nvSpPr>
+          <p:cNvPr id="493" name="Rectangle 492"/>
+          <p:cNvSpPr/>
+          <p:nvPr/>
+        </p:nvSpPr>
+        <p:spPr>
+          <a:xfrm>
+            <a:off x="11875840" y="1024127"/>
+            <a:ext cx="4572" cy="6729983"/>
+          </a:xfrm>
+          <a:prstGeom prst="rect">
+            <a:avLst/>
+          </a:prstGeom>
+          <a:solidFill>
+            <a:srgbClr val="94A3B8"/>
+          </a:solidFill>
+          <a:ln>
+            <a:noFill/>
+          </a:ln>
+        </p:spPr>
+        <p:style>
+          <a:lnRef idx="1">
+            <a:schemeClr val="accent1"/>
+          </a:lnRef>
+          <a:fillRef idx="3">
+            <a:schemeClr val="accent1"/>
+          </a:fillRef>
+          <a:effectRef idx="2">
+            <a:schemeClr val="accent1"/>
+          </a:effectRef>
+          <a:fontRef idx="minor">
+            <a:schemeClr val="lt1"/>
+          </a:fontRef>
+        </p:style>
+        <p:txBody>
+          <a:bodyPr rtlCol="0" anchor="ctr"/>
+          <a:lstStyle/>
+          <a:p>
+            <a:pPr algn="ctr"/>
+          </a:p>
+        </p:txBody>
+      </p:sp>
+      <p:cxnSp>
+        <p:nvCxnSpPr>
+          <p:cNvPr id="494" name="Connector 493"/>
+          <p:cNvCxnSpPr/>
+          <p:nvPr/>
+        </p:nvCxnSpPr>
+        <p:spPr>
+          <a:xfrm>
+            <a:off x="11875840" y="1024127"/>
+            <a:ext cx="0" cy="6729984"/>
+          </a:xfrm>
+          <a:prstGeom prst="line">
+            <a:avLst/>
+          </a:prstGeom>
+          <a:ln w="5715">
+            <a:solidFill>
+              <a:srgbClr val="94A3B8"/>
+            </a:solidFill>
+            <a:prstDash val="sysDot"/>
+          </a:ln>
+        </p:spPr>
+        <p:style>
+          <a:lnRef idx="2">
+            <a:schemeClr val="accent1"/>
+          </a:lnRef>
+          <a:fillRef idx="0">
+            <a:schemeClr val="accent1"/>
+          </a:fillRef>
+          <a:effectRef idx="1">
+            <a:schemeClr val="accent1"/>
+          </a:effectRef>
+          <a:fontRef idx="minor">
+            <a:schemeClr val="tx1"/>
+          </a:fontRef>
+        </p:style>
+      </p:cxnSp>
+      <p:sp>
+        <p:nvSpPr>
+          <p:cNvPr id="495" name="TextBox 494"/>
+          <p:cNvSpPr txBox="1"/>
+          <p:nvPr/>
+        </p:nvSpPr>
+        <p:spPr>
+          <a:xfrm rot="16200000">
+            <a:off x="11825548" y="813816"/>
+            <a:ext cx="164592" cy="292608"/>
+          </a:xfrm>
+          <a:prstGeom prst="rect">
+            <a:avLst/>
+          </a:prstGeom>
+          <a:noFill/>
+        </p:spPr>
+        <p:txBody>
+          <a:bodyPr wrap="none">
+            <a:spAutoFit/>
+          </a:bodyPr>
+          <a:lstStyle/>
+          <a:p>
+            <a:pPr algn="ctr">
+              <a:defRPr sz="470">
+                <a:solidFill>
+                  <a:srgbClr val="475569"/>
+                </a:solidFill>
+              </a:defRPr>
+            </a:pPr>
+            <a:r>
+              <a:t>6.5</a:t>
+            </a:r>
+          </a:p>
+        </p:txBody>
+      </p:sp>
+      <p:sp>
+        <p:nvSpPr>
+          <p:cNvPr id="496" name="Rectangle 495"/>
+          <p:cNvSpPr/>
+          <p:nvPr/>
+        </p:nvSpPr>
+        <p:spPr>
+          <a:xfrm>
+            <a:off x="12005959" y="1024127"/>
+            <a:ext cx="4572" cy="6729983"/>
+          </a:xfrm>
+          <a:prstGeom prst="rect">
+            <a:avLst/>
+          </a:prstGeom>
+          <a:solidFill>
+            <a:srgbClr val="94A3B8"/>
+          </a:solidFill>
+          <a:ln>
+            <a:noFill/>
+          </a:ln>
+        </p:spPr>
+        <p:style>
+          <a:lnRef idx="1">
+            <a:schemeClr val="accent1"/>
+          </a:lnRef>
+          <a:fillRef idx="3">
+            <a:schemeClr val="accent1"/>
+          </a:fillRef>
+          <a:effectRef idx="2">
+            <a:schemeClr val="accent1"/>
+          </a:effectRef>
+          <a:fontRef idx="minor">
+            <a:schemeClr val="lt1"/>
+          </a:fontRef>
+        </p:style>
+        <p:txBody>
+          <a:bodyPr rtlCol="0" anchor="ctr"/>
+          <a:lstStyle/>
+          <a:p>
+            <a:pPr algn="ctr"/>
+          </a:p>
+        </p:txBody>
+      </p:sp>
+      <p:cxnSp>
+        <p:nvCxnSpPr>
+          <p:cNvPr id="497" name="Connector 496"/>
+          <p:cNvCxnSpPr/>
+          <p:nvPr/>
+        </p:nvCxnSpPr>
+        <p:spPr>
+          <a:xfrm>
+            <a:off x="12005959" y="1024127"/>
+            <a:ext cx="0" cy="6729984"/>
+          </a:xfrm>
+          <a:prstGeom prst="line">
+            <a:avLst/>
+          </a:prstGeom>
+          <a:ln w="5715">
+            <a:solidFill>
+              <a:srgbClr val="94A3B8"/>
+            </a:solidFill>
+            <a:prstDash val="sysDot"/>
+          </a:ln>
+        </p:spPr>
+        <p:style>
+          <a:lnRef idx="2">
+            <a:schemeClr val="accent1"/>
+          </a:lnRef>
+          <a:fillRef idx="0">
+            <a:schemeClr val="accent1"/>
+          </a:fillRef>
+          <a:effectRef idx="1">
+            <a:schemeClr val="accent1"/>
+          </a:effectRef>
+          <a:fontRef idx="minor">
+            <a:schemeClr val="tx1"/>
+          </a:fontRef>
+        </p:style>
+      </p:cxnSp>
+      <p:sp>
+        <p:nvSpPr>
+          <p:cNvPr id="498" name="TextBox 497"/>
+          <p:cNvSpPr txBox="1"/>
+          <p:nvPr/>
+        </p:nvSpPr>
+        <p:spPr>
+          <a:xfrm rot="16200000">
+            <a:off x="11955667" y="896112"/>
+            <a:ext cx="164592" cy="292608"/>
+          </a:xfrm>
+          <a:prstGeom prst="rect">
+            <a:avLst/>
+          </a:prstGeom>
+          <a:noFill/>
+        </p:spPr>
+        <p:txBody>
+          <a:bodyPr wrap="none">
+            <a:spAutoFit/>
+          </a:bodyPr>
+          <a:lstStyle/>
+          <a:p>
+            <a:pPr algn="ctr">
+              <a:defRPr sz="470">
+                <a:solidFill>
+                  <a:srgbClr val="475569"/>
+                </a:solidFill>
+              </a:defRPr>
+            </a:pPr>
+            <a:r>
+              <a:t>6.6</a:t>
+            </a:r>
+          </a:p>
+        </p:txBody>
+      </p:sp>
+      <p:sp>
+        <p:nvSpPr>
+          <p:cNvPr id="499" name="Rectangle 498"/>
+          <p:cNvSpPr/>
+          <p:nvPr/>
+        </p:nvSpPr>
+        <p:spPr>
+          <a:xfrm>
+            <a:off x="12150535" y="1024127"/>
+            <a:ext cx="4572" cy="6729983"/>
+          </a:xfrm>
+          <a:prstGeom prst="rect">
+            <a:avLst/>
+          </a:prstGeom>
+          <a:solidFill>
+            <a:srgbClr val="94A3B8"/>
+          </a:solidFill>
+          <a:ln>
+            <a:noFill/>
+          </a:ln>
+        </p:spPr>
+        <p:style>
+          <a:lnRef idx="1">
+            <a:schemeClr val="accent1"/>
+          </a:lnRef>
+          <a:fillRef idx="3">
+            <a:schemeClr val="accent1"/>
+          </a:fillRef>
+          <a:effectRef idx="2">
+            <a:schemeClr val="accent1"/>
+          </a:effectRef>
+          <a:fontRef idx="minor">
+            <a:schemeClr val="lt1"/>
+          </a:fontRef>
+        </p:style>
+        <p:txBody>
+          <a:bodyPr rtlCol="0" anchor="ctr"/>
+          <a:lstStyle/>
+          <a:p>
+            <a:pPr algn="ctr"/>
+          </a:p>
+        </p:txBody>
+      </p:sp>
+      <p:cxnSp>
+        <p:nvCxnSpPr>
+          <p:cNvPr id="500" name="Connector 499"/>
+          <p:cNvCxnSpPr/>
+          <p:nvPr/>
+        </p:nvCxnSpPr>
+        <p:spPr>
+          <a:xfrm>
+            <a:off x="12150535" y="1024127"/>
+            <a:ext cx="0" cy="6729984"/>
+          </a:xfrm>
+          <a:prstGeom prst="line">
+            <a:avLst/>
+          </a:prstGeom>
+          <a:ln w="5715">
+            <a:solidFill>
+              <a:srgbClr val="94A3B8"/>
+            </a:solidFill>
+            <a:prstDash val="sysDot"/>
+          </a:ln>
+        </p:spPr>
+        <p:style>
+          <a:lnRef idx="2">
+            <a:schemeClr val="accent1"/>
+          </a:lnRef>
+          <a:fillRef idx="0">
+            <a:schemeClr val="accent1"/>
+          </a:fillRef>
+          <a:effectRef idx="1">
+            <a:schemeClr val="accent1"/>
+          </a:effectRef>
+          <a:fontRef idx="minor">
+            <a:schemeClr val="tx1"/>
+          </a:fontRef>
+        </p:style>
+      </p:cxnSp>
+      <p:sp>
+        <p:nvSpPr>
+          <p:cNvPr id="501" name="TextBox 500"/>
+          <p:cNvSpPr txBox="1"/>
+          <p:nvPr/>
+        </p:nvSpPr>
+        <p:spPr>
+          <a:xfrm rot="16200000">
+            <a:off x="12100243" y="813816"/>
+            <a:ext cx="164592" cy="292608"/>
+          </a:xfrm>
+          <a:prstGeom prst="rect">
+            <a:avLst/>
+          </a:prstGeom>
+          <a:noFill/>
+        </p:spPr>
+        <p:txBody>
+          <a:bodyPr wrap="none">
+            <a:spAutoFit/>
+          </a:bodyPr>
+          <a:lstStyle/>
+          <a:p>
+            <a:pPr algn="ctr">
+              <a:defRPr sz="470">
+                <a:solidFill>
+                  <a:srgbClr val="475569"/>
+                </a:solidFill>
+              </a:defRPr>
+            </a:pPr>
+            <a:r>
+              <a:t>6.7</a:t>
+            </a:r>
+          </a:p>
+        </p:txBody>
+      </p:sp>
+      <p:sp>
+        <p:nvSpPr>
+          <p:cNvPr id="502" name="Rectangle 501"/>
+          <p:cNvSpPr/>
+          <p:nvPr/>
+        </p:nvSpPr>
+        <p:spPr>
+          <a:xfrm>
+            <a:off x="12280654" y="1024127"/>
+            <a:ext cx="4572" cy="6729983"/>
+          </a:xfrm>
+          <a:prstGeom prst="rect">
+            <a:avLst/>
+          </a:prstGeom>
+          <a:solidFill>
+            <a:srgbClr val="94A3B8"/>
+          </a:solidFill>
+          <a:ln>
+            <a:noFill/>
+          </a:ln>
+        </p:spPr>
+        <p:style>
+          <a:lnRef idx="1">
+            <a:schemeClr val="accent1"/>
+          </a:lnRef>
+          <a:fillRef idx="3">
+            <a:schemeClr val="accent1"/>
+          </a:fillRef>
+          <a:effectRef idx="2">
+            <a:schemeClr val="accent1"/>
+          </a:effectRef>
+          <a:fontRef idx="minor">
+            <a:schemeClr val="lt1"/>
+          </a:fontRef>
+        </p:style>
+        <p:txBody>
+          <a:bodyPr rtlCol="0" anchor="ctr"/>
+          <a:lstStyle/>
+          <a:p>
+            <a:pPr algn="ctr"/>
+          </a:p>
+        </p:txBody>
+      </p:sp>
+      <p:cxnSp>
+        <p:nvCxnSpPr>
+          <p:cNvPr id="503" name="Connector 502"/>
+          <p:cNvCxnSpPr/>
+          <p:nvPr/>
+        </p:nvCxnSpPr>
+        <p:spPr>
+          <a:xfrm>
+            <a:off x="12280654" y="1024127"/>
+            <a:ext cx="0" cy="6729984"/>
+          </a:xfrm>
+          <a:prstGeom prst="line">
+            <a:avLst/>
+          </a:prstGeom>
+          <a:ln w="5715">
+            <a:solidFill>
+              <a:srgbClr val="94A3B8"/>
+            </a:solidFill>
+            <a:prstDash val="sysDot"/>
+          </a:ln>
+        </p:spPr>
+        <p:style>
+          <a:lnRef idx="2">
+            <a:schemeClr val="accent1"/>
+          </a:lnRef>
+          <a:fillRef idx="0">
+            <a:schemeClr val="accent1"/>
+          </a:fillRef>
+          <a:effectRef idx="1">
+            <a:schemeClr val="accent1"/>
+          </a:effectRef>
+          <a:fontRef idx="minor">
+            <a:schemeClr val="tx1"/>
+          </a:fontRef>
+        </p:style>
+      </p:cxnSp>
+      <p:sp>
+        <p:nvSpPr>
+          <p:cNvPr id="504" name="TextBox 503"/>
+          <p:cNvSpPr txBox="1"/>
+          <p:nvPr/>
+        </p:nvSpPr>
+        <p:spPr>
+          <a:xfrm rot="16200000">
+            <a:off x="12230362" y="896112"/>
+            <a:ext cx="164592" cy="292608"/>
+          </a:xfrm>
+          <a:prstGeom prst="rect">
+            <a:avLst/>
+          </a:prstGeom>
+          <a:noFill/>
+        </p:spPr>
+        <p:txBody>
+          <a:bodyPr wrap="none">
+            <a:spAutoFit/>
+          </a:bodyPr>
+          <a:lstStyle/>
+          <a:p>
+            <a:pPr algn="ctr">
+              <a:defRPr sz="470">
+                <a:solidFill>
+                  <a:srgbClr val="475569"/>
+                </a:solidFill>
+              </a:defRPr>
+            </a:pPr>
+            <a:r>
+              <a:t>6.8</a:t>
+            </a:r>
+          </a:p>
+        </p:txBody>
+      </p:sp>
+      <p:sp>
+        <p:nvSpPr>
+          <p:cNvPr id="505" name="Rectangle 504"/>
+          <p:cNvSpPr/>
+          <p:nvPr/>
+        </p:nvSpPr>
+        <p:spPr>
+          <a:xfrm>
+            <a:off x="12410773" y="1024127"/>
+            <a:ext cx="4572" cy="6729983"/>
+          </a:xfrm>
+          <a:prstGeom prst="rect">
+            <a:avLst/>
+          </a:prstGeom>
+          <a:solidFill>
+            <a:srgbClr val="94A3B8"/>
+          </a:solidFill>
+          <a:ln>
+            <a:noFill/>
+          </a:ln>
+        </p:spPr>
+        <p:style>
+          <a:lnRef idx="1">
+            <a:schemeClr val="accent1"/>
+          </a:lnRef>
+          <a:fillRef idx="3">
+            <a:schemeClr val="accent1"/>
+          </a:fillRef>
+          <a:effectRef idx="2">
+            <a:schemeClr val="accent1"/>
+          </a:effectRef>
+          <a:fontRef idx="minor">
+            <a:schemeClr val="lt1"/>
+          </a:fontRef>
+        </p:style>
+        <p:txBody>
+          <a:bodyPr rtlCol="0" anchor="ctr"/>
+          <a:lstStyle/>
+          <a:p>
+            <a:pPr algn="ctr"/>
+          </a:p>
+        </p:txBody>
+      </p:sp>
+      <p:cxnSp>
+        <p:nvCxnSpPr>
+          <p:cNvPr id="506" name="Connector 505"/>
+          <p:cNvCxnSpPr/>
+          <p:nvPr/>
+        </p:nvCxnSpPr>
+        <p:spPr>
+          <a:xfrm>
+            <a:off x="12410773" y="1024127"/>
+            <a:ext cx="0" cy="6729984"/>
+          </a:xfrm>
+          <a:prstGeom prst="line">
+            <a:avLst/>
+          </a:prstGeom>
+          <a:ln w="5715">
+            <a:solidFill>
+              <a:srgbClr val="94A3B8"/>
+            </a:solidFill>
+            <a:prstDash val="sysDot"/>
+          </a:ln>
+        </p:spPr>
+        <p:style>
+          <a:lnRef idx="2">
+            <a:schemeClr val="accent1"/>
+          </a:lnRef>
+          <a:fillRef idx="0">
+            <a:schemeClr val="accent1"/>
+          </a:fillRef>
+          <a:effectRef idx="1">
+            <a:schemeClr val="accent1"/>
+          </a:effectRef>
+          <a:fontRef idx="minor">
+            <a:schemeClr val="tx1"/>
+          </a:fontRef>
+        </p:style>
+      </p:cxnSp>
+      <p:sp>
+        <p:nvSpPr>
+          <p:cNvPr id="507" name="TextBox 506"/>
+          <p:cNvSpPr txBox="1"/>
+          <p:nvPr/>
+        </p:nvSpPr>
+        <p:spPr>
+          <a:xfrm rot="16200000">
+            <a:off x="12360481" y="813816"/>
+            <a:ext cx="164592" cy="292608"/>
+          </a:xfrm>
+          <a:prstGeom prst="rect">
+            <a:avLst/>
+          </a:prstGeom>
+          <a:noFill/>
+        </p:spPr>
+        <p:txBody>
+          <a:bodyPr wrap="none">
+            <a:spAutoFit/>
+          </a:bodyPr>
+          <a:lstStyle/>
+          <a:p>
+            <a:pPr algn="ctr">
+              <a:defRPr sz="470">
+                <a:solidFill>
+                  <a:srgbClr val="475569"/>
+                </a:solidFill>
+              </a:defRPr>
+            </a:pPr>
+            <a:r>
+              <a:t>6.9</a:t>
+            </a:r>
+          </a:p>
+        </p:txBody>
+      </p:sp>
+      <p:sp>
+        <p:nvSpPr>
+          <p:cNvPr id="508" name="Rectangle 507"/>
+          <p:cNvSpPr/>
+          <p:nvPr/>
+        </p:nvSpPr>
+        <p:spPr>
+          <a:xfrm>
+            <a:off x="12540892" y="1024127"/>
+            <a:ext cx="4572" cy="6729983"/>
+          </a:xfrm>
+          <a:prstGeom prst="rect">
+            <a:avLst/>
+          </a:prstGeom>
+          <a:solidFill>
+            <a:srgbClr val="94A3B8"/>
+          </a:solidFill>
+          <a:ln>
+            <a:noFill/>
+          </a:ln>
+        </p:spPr>
+        <p:style>
+          <a:lnRef idx="1">
+            <a:schemeClr val="accent1"/>
+          </a:lnRef>
+          <a:fillRef idx="3">
+            <a:schemeClr val="accent1"/>
+          </a:fillRef>
+          <a:effectRef idx="2">
+            <a:schemeClr val="accent1"/>
+          </a:effectRef>
+          <a:fontRef idx="minor">
+            <a:schemeClr val="lt1"/>
+          </a:fontRef>
+        </p:style>
+        <p:txBody>
+          <a:bodyPr rtlCol="0" anchor="ctr"/>
+          <a:lstStyle/>
+          <a:p>
+            <a:pPr algn="ctr"/>
+          </a:p>
+        </p:txBody>
+      </p:sp>
+      <p:cxnSp>
+        <p:nvCxnSpPr>
+          <p:cNvPr id="509" name="Connector 508"/>
+          <p:cNvCxnSpPr/>
+          <p:nvPr/>
+        </p:nvCxnSpPr>
+        <p:spPr>
+          <a:xfrm>
+            <a:off x="12540892" y="1024127"/>
+            <a:ext cx="0" cy="6729984"/>
+          </a:xfrm>
+          <a:prstGeom prst="line">
+            <a:avLst/>
+          </a:prstGeom>
+          <a:ln w="5715">
+            <a:solidFill>
+              <a:srgbClr val="94A3B8"/>
+            </a:solidFill>
+            <a:prstDash val="sysDot"/>
+          </a:ln>
+        </p:spPr>
+        <p:style>
+          <a:lnRef idx="2">
+            <a:schemeClr val="accent1"/>
+          </a:lnRef>
+          <a:fillRef idx="0">
+            <a:schemeClr val="accent1"/>
+          </a:fillRef>
+          <a:effectRef idx="1">
+            <a:schemeClr val="accent1"/>
+          </a:effectRef>
+          <a:fontRef idx="minor">
+            <a:schemeClr val="tx1"/>
+          </a:fontRef>
+        </p:style>
+      </p:cxnSp>
+      <p:sp>
+        <p:nvSpPr>
+          <p:cNvPr id="510" name="TextBox 509"/>
+          <p:cNvSpPr txBox="1"/>
+          <p:nvPr/>
+        </p:nvSpPr>
+        <p:spPr>
+          <a:xfrm rot="16200000">
+            <a:off x="12490600" y="896112"/>
+            <a:ext cx="164592" cy="292608"/>
+          </a:xfrm>
+          <a:prstGeom prst="rect">
+            <a:avLst/>
+          </a:prstGeom>
+          <a:noFill/>
+        </p:spPr>
+        <p:txBody>
+          <a:bodyPr wrap="none">
+            <a:spAutoFit/>
+          </a:bodyPr>
+          <a:lstStyle/>
+          <a:p>
+            <a:pPr algn="ctr">
+              <a:defRPr sz="470">
+                <a:solidFill>
+                  <a:srgbClr val="475569"/>
+                </a:solidFill>
+              </a:defRPr>
+            </a:pPr>
+            <a:r>
+              <a:t>6.10</a:t>
+            </a:r>
+          </a:p>
+        </p:txBody>
+      </p:sp>
+      <p:sp>
+        <p:nvSpPr>
+          <p:cNvPr id="511" name="Rectangle 510"/>
+          <p:cNvSpPr/>
+          <p:nvPr/>
+        </p:nvSpPr>
+        <p:spPr>
+          <a:xfrm>
+            <a:off x="12671011" y="1024127"/>
+            <a:ext cx="4572" cy="6729983"/>
+          </a:xfrm>
+          <a:prstGeom prst="rect">
+            <a:avLst/>
+          </a:prstGeom>
+          <a:solidFill>
+            <a:srgbClr val="94A3B8"/>
+          </a:solidFill>
+          <a:ln>
+            <a:noFill/>
+          </a:ln>
+        </p:spPr>
+        <p:style>
+          <a:lnRef idx="1">
+            <a:schemeClr val="accent1"/>
+          </a:lnRef>
+          <a:fillRef idx="3">
+            <a:schemeClr val="accent1"/>
+          </a:fillRef>
+          <a:effectRef idx="2">
+            <a:schemeClr val="accent1"/>
+          </a:effectRef>
+          <a:fontRef idx="minor">
+            <a:schemeClr val="lt1"/>
+          </a:fontRef>
+        </p:style>
+        <p:txBody>
+          <a:bodyPr rtlCol="0" anchor="ctr"/>
+          <a:lstStyle/>
+          <a:p>
+            <a:pPr algn="ctr"/>
+          </a:p>
+        </p:txBody>
+      </p:sp>
+      <p:cxnSp>
+        <p:nvCxnSpPr>
+          <p:cNvPr id="512" name="Connector 511"/>
+          <p:cNvCxnSpPr/>
+          <p:nvPr/>
+        </p:nvCxnSpPr>
+        <p:spPr>
+          <a:xfrm>
+            <a:off x="12671011" y="1024127"/>
+            <a:ext cx="0" cy="6729984"/>
+          </a:xfrm>
+          <a:prstGeom prst="line">
+            <a:avLst/>
+          </a:prstGeom>
+          <a:ln w="5715">
+            <a:solidFill>
+              <a:srgbClr val="94A3B8"/>
+            </a:solidFill>
+            <a:prstDash val="sysDot"/>
+          </a:ln>
+        </p:spPr>
+        <p:style>
+          <a:lnRef idx="2">
+            <a:schemeClr val="accent1"/>
+          </a:lnRef>
+          <a:fillRef idx="0">
+            <a:schemeClr val="accent1"/>
+          </a:fillRef>
+          <a:effectRef idx="1">
+            <a:schemeClr val="accent1"/>
+          </a:effectRef>
+          <a:fontRef idx="minor">
+            <a:schemeClr val="tx1"/>
+          </a:fontRef>
+        </p:style>
+      </p:cxnSp>
+      <p:sp>
+        <p:nvSpPr>
+          <p:cNvPr id="513" name="TextBox 512"/>
+          <p:cNvSpPr txBox="1"/>
+          <p:nvPr/>
+        </p:nvSpPr>
+        <p:spPr>
+          <a:xfrm rot="16200000">
+            <a:off x="12620719" y="813816"/>
+            <a:ext cx="164592" cy="292608"/>
+          </a:xfrm>
+          <a:prstGeom prst="rect">
+            <a:avLst/>
+          </a:prstGeom>
+          <a:noFill/>
+        </p:spPr>
+        <p:txBody>
+          <a:bodyPr wrap="none">
+            <a:spAutoFit/>
+          </a:bodyPr>
+          <a:lstStyle/>
+          <a:p>
+            <a:pPr algn="ctr">
+              <a:defRPr sz="470">
+                <a:solidFill>
+                  <a:srgbClr val="475569"/>
+                </a:solidFill>
+              </a:defRPr>
+            </a:pPr>
+            <a:r>
+              <a:t>6.11</a:t>
+            </a:r>
+          </a:p>
+        </p:txBody>
+      </p:sp>
+      <p:sp>
+        <p:nvSpPr>
+          <p:cNvPr id="514" name="Rectangle 513"/>
+          <p:cNvSpPr/>
+          <p:nvPr/>
+        </p:nvSpPr>
+        <p:spPr>
+          <a:xfrm>
+            <a:off x="12801130" y="1024127"/>
+            <a:ext cx="4572" cy="6729983"/>
+          </a:xfrm>
+          <a:prstGeom prst="rect">
+            <a:avLst/>
+          </a:prstGeom>
+          <a:solidFill>
+            <a:srgbClr val="94A3B8"/>
+          </a:solidFill>
+          <a:ln>
+            <a:noFill/>
+          </a:ln>
+        </p:spPr>
+        <p:style>
+          <a:lnRef idx="1">
+            <a:schemeClr val="accent1"/>
+          </a:lnRef>
+          <a:fillRef idx="3">
+            <a:schemeClr val="accent1"/>
+          </a:fillRef>
+          <a:effectRef idx="2">
+            <a:schemeClr val="accent1"/>
+          </a:effectRef>
+          <a:fontRef idx="minor">
+            <a:schemeClr val="lt1"/>
+          </a:fontRef>
+        </p:style>
+        <p:txBody>
+          <a:bodyPr rtlCol="0" anchor="ctr"/>
+          <a:lstStyle/>
+          <a:p>
+            <a:pPr algn="ctr"/>
+          </a:p>
+        </p:txBody>
+      </p:sp>
+      <p:cxnSp>
+        <p:nvCxnSpPr>
+          <p:cNvPr id="515" name="Connector 514"/>
+          <p:cNvCxnSpPr/>
+          <p:nvPr/>
+        </p:nvCxnSpPr>
+        <p:spPr>
+          <a:xfrm>
+            <a:off x="12801130" y="1024127"/>
+            <a:ext cx="0" cy="6729984"/>
+          </a:xfrm>
+          <a:prstGeom prst="line">
+            <a:avLst/>
+          </a:prstGeom>
+          <a:ln w="5715">
+            <a:solidFill>
+              <a:srgbClr val="94A3B8"/>
+            </a:solidFill>
+            <a:prstDash val="sysDot"/>
+          </a:ln>
+        </p:spPr>
+        <p:style>
+          <a:lnRef idx="2">
+            <a:schemeClr val="accent1"/>
+          </a:lnRef>
+          <a:fillRef idx="0">
+            <a:schemeClr val="accent1"/>
+          </a:fillRef>
+          <a:effectRef idx="1">
+            <a:schemeClr val="accent1"/>
+          </a:effectRef>
+          <a:fontRef idx="minor">
+            <a:schemeClr val="tx1"/>
+          </a:fontRef>
+        </p:style>
+      </p:cxnSp>
+      <p:sp>
+        <p:nvSpPr>
+          <p:cNvPr id="516" name="TextBox 515"/>
+          <p:cNvSpPr txBox="1"/>
+          <p:nvPr/>
+        </p:nvSpPr>
+        <p:spPr>
+          <a:xfrm rot="16200000">
+            <a:off x="12750838" y="896112"/>
+            <a:ext cx="164592" cy="292608"/>
+          </a:xfrm>
+          <a:prstGeom prst="rect">
+            <a:avLst/>
+          </a:prstGeom>
+          <a:noFill/>
+        </p:spPr>
+        <p:txBody>
+          <a:bodyPr wrap="none">
+            <a:spAutoFit/>
+          </a:bodyPr>
+          <a:lstStyle/>
+          <a:p>
+            <a:pPr algn="ctr">
+              <a:defRPr sz="470">
+                <a:solidFill>
+                  <a:srgbClr val="475569"/>
+                </a:solidFill>
+              </a:defRPr>
+            </a:pPr>
+            <a:r>
+              <a:t>6.12</a:t>
+            </a:r>
+          </a:p>
+        </p:txBody>
+      </p:sp>
+      <p:sp>
+        <p:nvSpPr>
+          <p:cNvPr id="517" name="Rectangle 516"/>
+          <p:cNvSpPr/>
+          <p:nvPr/>
+        </p:nvSpPr>
+        <p:spPr>
+          <a:xfrm>
+            <a:off x="12933314" y="1024127"/>
+            <a:ext cx="4572" cy="6729983"/>
+          </a:xfrm>
+          <a:prstGeom prst="rect">
+            <a:avLst/>
+          </a:prstGeom>
+          <a:solidFill>
+            <a:srgbClr val="94A3B8"/>
+          </a:solidFill>
+          <a:ln>
+            <a:noFill/>
+          </a:ln>
+        </p:spPr>
+        <p:style>
+          <a:lnRef idx="1">
+            <a:schemeClr val="accent1"/>
+          </a:lnRef>
+          <a:fillRef idx="3">
+            <a:schemeClr val="accent1"/>
+          </a:fillRef>
+          <a:effectRef idx="2">
+            <a:schemeClr val="accent1"/>
+          </a:effectRef>
+          <a:fontRef idx="minor">
+            <a:schemeClr val="lt1"/>
+          </a:fontRef>
+        </p:style>
+        <p:txBody>
+          <a:bodyPr rtlCol="0" anchor="ctr"/>
+          <a:lstStyle/>
+          <a:p>
+            <a:pPr algn="ctr"/>
+          </a:p>
+        </p:txBody>
+      </p:sp>
+      <p:cxnSp>
+        <p:nvCxnSpPr>
+          <p:cNvPr id="518" name="Connector 517"/>
+          <p:cNvCxnSpPr/>
+          <p:nvPr/>
+        </p:nvCxnSpPr>
+        <p:spPr>
+          <a:xfrm>
+            <a:off x="12933314" y="1024127"/>
+            <a:ext cx="0" cy="6729984"/>
+          </a:xfrm>
+          <a:prstGeom prst="line">
+            <a:avLst/>
+          </a:prstGeom>
+          <a:ln w="5715">
+            <a:solidFill>
+              <a:srgbClr val="94A3B8"/>
+            </a:solidFill>
+            <a:prstDash val="sysDot"/>
+          </a:ln>
+        </p:spPr>
+        <p:style>
+          <a:lnRef idx="2">
+            <a:schemeClr val="accent1"/>
+          </a:lnRef>
+          <a:fillRef idx="0">
+            <a:schemeClr val="accent1"/>
+          </a:fillRef>
+          <a:effectRef idx="1">
+            <a:schemeClr val="accent1"/>
+          </a:effectRef>
+          <a:fontRef idx="minor">
+            <a:schemeClr val="tx1"/>
+          </a:fontRef>
+        </p:style>
+      </p:cxnSp>
+      <p:sp>
+        <p:nvSpPr>
+          <p:cNvPr id="519" name="TextBox 518"/>
+          <p:cNvSpPr txBox="1"/>
+          <p:nvPr/>
+        </p:nvSpPr>
+        <p:spPr>
+          <a:xfrm rot="16200000">
+            <a:off x="12883022" y="813816"/>
+            <a:ext cx="164592" cy="292608"/>
+          </a:xfrm>
+          <a:prstGeom prst="rect">
+            <a:avLst/>
+          </a:prstGeom>
+          <a:noFill/>
+        </p:spPr>
+        <p:txBody>
+          <a:bodyPr wrap="none">
+            <a:spAutoFit/>
+          </a:bodyPr>
+          <a:lstStyle/>
+          <a:p>
+            <a:pPr algn="ctr">
+              <a:defRPr sz="470">
+                <a:solidFill>
+                  <a:srgbClr val="475569"/>
+                </a:solidFill>
+              </a:defRPr>
+            </a:pPr>
+            <a:r>
+              <a:t>6.13</a:t>
+            </a:r>
+          </a:p>
+        </p:txBody>
+      </p:sp>
+      <p:sp>
+        <p:nvSpPr>
+          <p:cNvPr id="520" name="Rectangle 519"/>
+          <p:cNvSpPr/>
+          <p:nvPr/>
+        </p:nvSpPr>
+        <p:spPr>
+          <a:xfrm>
+            <a:off x="13063433" y="1024127"/>
+            <a:ext cx="4572" cy="6729983"/>
+          </a:xfrm>
+          <a:prstGeom prst="rect">
+            <a:avLst/>
+          </a:prstGeom>
+          <a:solidFill>
+            <a:srgbClr val="94A3B8"/>
+          </a:solidFill>
+          <a:ln>
+            <a:noFill/>
+          </a:ln>
+        </p:spPr>
+        <p:style>
+          <a:lnRef idx="1">
+            <a:schemeClr val="accent1"/>
+          </a:lnRef>
+          <a:fillRef idx="3">
+            <a:schemeClr val="accent1"/>
+          </a:fillRef>
+          <a:effectRef idx="2">
+            <a:schemeClr val="accent1"/>
+          </a:effectRef>
+          <a:fontRef idx="minor">
+            <a:schemeClr val="lt1"/>
+          </a:fontRef>
+        </p:style>
+        <p:txBody>
+          <a:bodyPr rtlCol="0" anchor="ctr"/>
+          <a:lstStyle/>
+          <a:p>
+            <a:pPr algn="ctr"/>
+          </a:p>
+        </p:txBody>
+      </p:sp>
+      <p:cxnSp>
+        <p:nvCxnSpPr>
+          <p:cNvPr id="521" name="Connector 520"/>
+          <p:cNvCxnSpPr/>
+          <p:nvPr/>
+        </p:nvCxnSpPr>
+        <p:spPr>
+          <a:xfrm>
+            <a:off x="13063433" y="1024127"/>
+            <a:ext cx="0" cy="6729984"/>
+          </a:xfrm>
+          <a:prstGeom prst="line">
+            <a:avLst/>
+          </a:prstGeom>
+          <a:ln w="5715">
+            <a:solidFill>
+              <a:srgbClr val="94A3B8"/>
+            </a:solidFill>
+            <a:prstDash val="sysDot"/>
+          </a:ln>
+        </p:spPr>
+        <p:style>
+          <a:lnRef idx="2">
+            <a:schemeClr val="accent1"/>
+          </a:lnRef>
+          <a:fillRef idx="0">
+            <a:schemeClr val="accent1"/>
+          </a:fillRef>
+          <a:effectRef idx="1">
+            <a:schemeClr val="accent1"/>
+          </a:effectRef>
+          <a:fontRef idx="minor">
+            <a:schemeClr val="tx1"/>
+          </a:fontRef>
+        </p:style>
+      </p:cxnSp>
+      <p:sp>
+        <p:nvSpPr>
+          <p:cNvPr id="522" name="TextBox 521"/>
+          <p:cNvSpPr txBox="1"/>
+          <p:nvPr/>
+        </p:nvSpPr>
+        <p:spPr>
+          <a:xfrm rot="16200000">
+            <a:off x="13013141" y="896112"/>
+            <a:ext cx="164592" cy="292608"/>
+          </a:xfrm>
+          <a:prstGeom prst="rect">
+            <a:avLst/>
+          </a:prstGeom>
+          <a:noFill/>
+        </p:spPr>
+        <p:txBody>
+          <a:bodyPr wrap="none">
+            <a:spAutoFit/>
+          </a:bodyPr>
+          <a:lstStyle/>
+          <a:p>
+            <a:pPr algn="ctr">
+              <a:defRPr sz="470">
+                <a:solidFill>
+                  <a:srgbClr val="475569"/>
+                </a:solidFill>
+              </a:defRPr>
+            </a:pPr>
+            <a:r>
+              <a:t>6.14</a:t>
+            </a:r>
+          </a:p>
+        </p:txBody>
+      </p:sp>
+      <p:sp>
+        <p:nvSpPr>
+          <p:cNvPr id="523" name="Rectangle 522"/>
+          <p:cNvSpPr/>
+          <p:nvPr/>
+        </p:nvSpPr>
+        <p:spPr>
+          <a:xfrm>
+            <a:off x="13191487" y="1024127"/>
+            <a:ext cx="4572" cy="6729983"/>
+          </a:xfrm>
+          <a:prstGeom prst="rect">
+            <a:avLst/>
+          </a:prstGeom>
+          <a:solidFill>
+            <a:srgbClr val="94A3B8"/>
+          </a:solidFill>
+          <a:ln>
+            <a:noFill/>
+          </a:ln>
+        </p:spPr>
+        <p:style>
+          <a:lnRef idx="1">
+            <a:schemeClr val="accent1"/>
+          </a:lnRef>
+          <a:fillRef idx="3">
+            <a:schemeClr val="accent1"/>
+          </a:fillRef>
+          <a:effectRef idx="2">
+            <a:schemeClr val="accent1"/>
+          </a:effectRef>
+          <a:fontRef idx="minor">
+            <a:schemeClr val="lt1"/>
+          </a:fontRef>
+        </p:style>
+        <p:txBody>
+          <a:bodyPr rtlCol="0" anchor="ctr"/>
+          <a:lstStyle/>
+          <a:p>
+            <a:pPr algn="ctr"/>
+          </a:p>
+        </p:txBody>
+      </p:sp>
+      <p:cxnSp>
+        <p:nvCxnSpPr>
+          <p:cNvPr id="524" name="Connector 523"/>
+          <p:cNvCxnSpPr/>
+          <p:nvPr/>
+        </p:nvCxnSpPr>
+        <p:spPr>
+          <a:xfrm>
+            <a:off x="13191487" y="1024127"/>
+            <a:ext cx="0" cy="6729984"/>
+          </a:xfrm>
+          <a:prstGeom prst="line">
+            <a:avLst/>
+          </a:prstGeom>
+          <a:ln w="5715">
+            <a:solidFill>
+              <a:srgbClr val="94A3B8"/>
+            </a:solidFill>
+            <a:prstDash val="sysDot"/>
+          </a:ln>
+        </p:spPr>
+        <p:style>
+          <a:lnRef idx="2">
+            <a:schemeClr val="accent1"/>
+          </a:lnRef>
+          <a:fillRef idx="0">
+            <a:schemeClr val="accent1"/>
+          </a:fillRef>
+          <a:effectRef idx="1">
+            <a:schemeClr val="accent1"/>
+          </a:effectRef>
+          <a:fontRef idx="minor">
+            <a:schemeClr val="tx1"/>
+          </a:fontRef>
+        </p:style>
+      </p:cxnSp>
+      <p:sp>
+        <p:nvSpPr>
+          <p:cNvPr id="525" name="TextBox 524"/>
+          <p:cNvSpPr txBox="1"/>
+          <p:nvPr/>
+        </p:nvSpPr>
+        <p:spPr>
+          <a:xfrm rot="16200000">
+            <a:off x="13141195" y="813816"/>
+            <a:ext cx="164592" cy="292608"/>
+          </a:xfrm>
+          <a:prstGeom prst="rect">
+            <a:avLst/>
+          </a:prstGeom>
+          <a:noFill/>
+        </p:spPr>
+        <p:txBody>
+          <a:bodyPr wrap="none">
+            <a:spAutoFit/>
+          </a:bodyPr>
+          <a:lstStyle/>
+          <a:p>
+            <a:pPr algn="ctr">
+              <a:defRPr sz="470">
+                <a:solidFill>
+                  <a:srgbClr val="475569"/>
+                </a:solidFill>
+              </a:defRPr>
+            </a:pPr>
+            <a:r>
+              <a:t>6.15</a:t>
+            </a:r>
+          </a:p>
+        </p:txBody>
+      </p:sp>
+      <p:sp>
+        <p:nvSpPr>
+          <p:cNvPr id="526" name="Rectangle 525"/>
+          <p:cNvSpPr/>
+          <p:nvPr/>
+        </p:nvSpPr>
+        <p:spPr>
+          <a:xfrm>
+            <a:off x="13321606" y="1024127"/>
+            <a:ext cx="4572" cy="6729983"/>
+          </a:xfrm>
+          <a:prstGeom prst="rect">
+            <a:avLst/>
+          </a:prstGeom>
+          <a:solidFill>
+            <a:srgbClr val="94A3B8"/>
+          </a:solidFill>
+          <a:ln>
+            <a:noFill/>
+          </a:ln>
+        </p:spPr>
+        <p:style>
+          <a:lnRef idx="1">
+            <a:schemeClr val="accent1"/>
+          </a:lnRef>
+          <a:fillRef idx="3">
+            <a:schemeClr val="accent1"/>
+          </a:fillRef>
+          <a:effectRef idx="2">
+            <a:schemeClr val="accent1"/>
+          </a:effectRef>
+          <a:fontRef idx="minor">
+            <a:schemeClr val="lt1"/>
+          </a:fontRef>
+        </p:style>
+        <p:txBody>
+          <a:bodyPr rtlCol="0" anchor="ctr"/>
+          <a:lstStyle/>
+          <a:p>
+            <a:pPr algn="ctr"/>
+          </a:p>
+        </p:txBody>
+      </p:sp>
+      <p:cxnSp>
+        <p:nvCxnSpPr>
+          <p:cNvPr id="527" name="Connector 526"/>
+          <p:cNvCxnSpPr/>
+          <p:nvPr/>
+        </p:nvCxnSpPr>
+        <p:spPr>
+          <a:xfrm>
+            <a:off x="13321606" y="1024127"/>
+            <a:ext cx="0" cy="6729984"/>
+          </a:xfrm>
+          <a:prstGeom prst="line">
+            <a:avLst/>
+          </a:prstGeom>
+          <a:ln w="5715">
+            <a:solidFill>
+              <a:srgbClr val="94A3B8"/>
+            </a:solidFill>
+            <a:prstDash val="sysDot"/>
+          </a:ln>
+        </p:spPr>
+        <p:style>
+          <a:lnRef idx="2">
+            <a:schemeClr val="accent1"/>
+          </a:lnRef>
+          <a:fillRef idx="0">
+            <a:schemeClr val="accent1"/>
+          </a:fillRef>
+          <a:effectRef idx="1">
+            <a:schemeClr val="accent1"/>
+          </a:effectRef>
+          <a:fontRef idx="minor">
+            <a:schemeClr val="tx1"/>
+          </a:fontRef>
+        </p:style>
+      </p:cxnSp>
+      <p:sp>
+        <p:nvSpPr>
+          <p:cNvPr id="528" name="TextBox 527"/>
+          <p:cNvSpPr txBox="1"/>
+          <p:nvPr/>
+        </p:nvSpPr>
+        <p:spPr>
+          <a:xfrm rot="16200000">
+            <a:off x="13271314" y="896112"/>
+            <a:ext cx="164592" cy="292608"/>
+          </a:xfrm>
+          <a:prstGeom prst="rect">
+            <a:avLst/>
+          </a:prstGeom>
+          <a:noFill/>
+        </p:spPr>
+        <p:txBody>
+          <a:bodyPr wrap="none">
+            <a:spAutoFit/>
+          </a:bodyPr>
+          <a:lstStyle/>
+          <a:p>
+            <a:pPr algn="ctr">
+              <a:defRPr sz="470">
+                <a:solidFill>
+                  <a:srgbClr val="475569"/>
+                </a:solidFill>
+              </a:defRPr>
+            </a:pPr>
+            <a:r>
+              <a:t>6.16</a:t>
+            </a:r>
+          </a:p>
+        </p:txBody>
+      </p:sp>
+      <p:sp>
+        <p:nvSpPr>
+          <p:cNvPr id="529" name="Rectangle 528"/>
+          <p:cNvSpPr/>
+          <p:nvPr/>
+        </p:nvSpPr>
+        <p:spPr>
+          <a:xfrm>
+            <a:off x="13451725" y="1024127"/>
+            <a:ext cx="4572" cy="6729983"/>
+          </a:xfrm>
+          <a:prstGeom prst="rect">
+            <a:avLst/>
+          </a:prstGeom>
+          <a:solidFill>
+            <a:srgbClr val="94A3B8"/>
+          </a:solidFill>
+          <a:ln>
+            <a:noFill/>
+          </a:ln>
+        </p:spPr>
+        <p:style>
+          <a:lnRef idx="1">
+            <a:schemeClr val="accent1"/>
+          </a:lnRef>
+          <a:fillRef idx="3">
+            <a:schemeClr val="accent1"/>
+          </a:fillRef>
+          <a:effectRef idx="2">
+            <a:schemeClr val="accent1"/>
+          </a:effectRef>
+          <a:fontRef idx="minor">
+            <a:schemeClr val="lt1"/>
+          </a:fontRef>
+        </p:style>
+        <p:txBody>
+          <a:bodyPr rtlCol="0" anchor="ctr"/>
+          <a:lstStyle/>
+          <a:p>
+            <a:pPr algn="ctr"/>
+          </a:p>
+        </p:txBody>
+      </p:sp>
+      <p:cxnSp>
+        <p:nvCxnSpPr>
+          <p:cNvPr id="530" name="Connector 529"/>
+          <p:cNvCxnSpPr/>
+          <p:nvPr/>
+        </p:nvCxnSpPr>
+        <p:spPr>
+          <a:xfrm>
+            <a:off x="13451725" y="1024127"/>
+            <a:ext cx="0" cy="6729984"/>
+          </a:xfrm>
+          <a:prstGeom prst="line">
+            <a:avLst/>
+          </a:prstGeom>
+          <a:ln w="5715">
+            <a:solidFill>
+              <a:srgbClr val="94A3B8"/>
+            </a:solidFill>
+            <a:prstDash val="sysDot"/>
+          </a:ln>
+        </p:spPr>
+        <p:style>
+          <a:lnRef idx="2">
+            <a:schemeClr val="accent1"/>
+          </a:lnRef>
+          <a:fillRef idx="0">
+            <a:schemeClr val="accent1"/>
+          </a:fillRef>
+          <a:effectRef idx="1">
+            <a:schemeClr val="accent1"/>
+          </a:effectRef>
+          <a:fontRef idx="minor">
+            <a:schemeClr val="tx1"/>
+          </a:fontRef>
+        </p:style>
+      </p:cxnSp>
+      <p:sp>
+        <p:nvSpPr>
+          <p:cNvPr id="531" name="TextBox 530"/>
+          <p:cNvSpPr txBox="1"/>
+          <p:nvPr/>
+        </p:nvSpPr>
+        <p:spPr>
+          <a:xfrm rot="16200000">
+            <a:off x="13401433" y="813816"/>
+            <a:ext cx="164592" cy="292608"/>
+          </a:xfrm>
+          <a:prstGeom prst="rect">
+            <a:avLst/>
+          </a:prstGeom>
+          <a:noFill/>
+        </p:spPr>
+        <p:txBody>
+          <a:bodyPr wrap="none">
+            <a:spAutoFit/>
+          </a:bodyPr>
+          <a:lstStyle/>
+          <a:p>
+            <a:pPr algn="ctr">
+              <a:defRPr sz="470">
+                <a:solidFill>
+                  <a:srgbClr val="475569"/>
+                </a:solidFill>
+              </a:defRPr>
+            </a:pPr>
+            <a:r>
+              <a:t>6.17</a:t>
+            </a:r>
+          </a:p>
+        </p:txBody>
+      </p:sp>
+      <p:sp>
+        <p:nvSpPr>
+          <p:cNvPr id="532" name="Rectangle 531"/>
+          <p:cNvSpPr/>
+          <p:nvPr/>
+        </p:nvSpPr>
+        <p:spPr>
+          <a:xfrm>
+            <a:off x="13581844" y="1024127"/>
+            <a:ext cx="4572" cy="6729983"/>
+          </a:xfrm>
+          <a:prstGeom prst="rect">
+            <a:avLst/>
+          </a:prstGeom>
+          <a:solidFill>
+            <a:srgbClr val="94A3B8"/>
+          </a:solidFill>
+          <a:ln>
+            <a:noFill/>
+          </a:ln>
+        </p:spPr>
+        <p:style>
+          <a:lnRef idx="1">
+            <a:schemeClr val="accent1"/>
+          </a:lnRef>
+          <a:fillRef idx="3">
+            <a:schemeClr val="accent1"/>
+          </a:fillRef>
+          <a:effectRef idx="2">
+            <a:schemeClr val="accent1"/>
+          </a:effectRef>
+          <a:fontRef idx="minor">
+            <a:schemeClr val="lt1"/>
+          </a:fontRef>
+        </p:style>
+        <p:txBody>
+          <a:bodyPr rtlCol="0" anchor="ctr"/>
+          <a:lstStyle/>
+          <a:p>
+            <a:pPr algn="ctr"/>
+          </a:p>
+        </p:txBody>
+      </p:sp>
+      <p:cxnSp>
+        <p:nvCxnSpPr>
+          <p:cNvPr id="533" name="Connector 532"/>
+          <p:cNvCxnSpPr/>
+          <p:nvPr/>
+        </p:nvCxnSpPr>
+        <p:spPr>
+          <a:xfrm>
+            <a:off x="13581844" y="1024127"/>
+            <a:ext cx="0" cy="6729984"/>
+          </a:xfrm>
+          <a:prstGeom prst="line">
+            <a:avLst/>
+          </a:prstGeom>
+          <a:ln w="5715">
+            <a:solidFill>
+              <a:srgbClr val="94A3B8"/>
+            </a:solidFill>
+            <a:prstDash val="sysDot"/>
+          </a:ln>
+        </p:spPr>
+        <p:style>
+          <a:lnRef idx="2">
+            <a:schemeClr val="accent1"/>
+          </a:lnRef>
+          <a:fillRef idx="0">
+            <a:schemeClr val="accent1"/>
+          </a:fillRef>
+          <a:effectRef idx="1">
+            <a:schemeClr val="accent1"/>
+          </a:effectRef>
+          <a:fontRef idx="minor">
+            <a:schemeClr val="tx1"/>
+          </a:fontRef>
+        </p:style>
+      </p:cxnSp>
+      <p:sp>
+        <p:nvSpPr>
+          <p:cNvPr id="534" name="TextBox 533"/>
+          <p:cNvSpPr txBox="1"/>
+          <p:nvPr/>
+        </p:nvSpPr>
+        <p:spPr>
+          <a:xfrm rot="16200000">
+            <a:off x="13531552" y="896112"/>
+            <a:ext cx="164592" cy="292608"/>
+          </a:xfrm>
+          <a:prstGeom prst="rect">
+            <a:avLst/>
+          </a:prstGeom>
+          <a:noFill/>
+        </p:spPr>
+        <p:txBody>
+          <a:bodyPr wrap="none">
+            <a:spAutoFit/>
+          </a:bodyPr>
+          <a:lstStyle/>
+          <a:p>
+            <a:pPr algn="ctr">
+              <a:defRPr sz="470">
+                <a:solidFill>
+                  <a:srgbClr val="475569"/>
+                </a:solidFill>
+              </a:defRPr>
+            </a:pPr>
+            <a:r>
+              <a:t>6.18</a:t>
+            </a:r>
+          </a:p>
+        </p:txBody>
+      </p:sp>
+      <p:sp>
+        <p:nvSpPr>
+          <p:cNvPr id="535" name="Rectangle 534"/>
+          <p:cNvSpPr/>
+          <p:nvPr/>
+        </p:nvSpPr>
+        <p:spPr>
+          <a:xfrm>
+            <a:off x="13726420" y="1024127"/>
+            <a:ext cx="4572" cy="6729983"/>
+          </a:xfrm>
+          <a:prstGeom prst="rect">
+            <a:avLst/>
+          </a:prstGeom>
+          <a:solidFill>
+            <a:srgbClr val="94A3B8"/>
+          </a:solidFill>
+          <a:ln>
+            <a:noFill/>
+          </a:ln>
+        </p:spPr>
+        <p:style>
+          <a:lnRef idx="1">
+            <a:schemeClr val="accent1"/>
+          </a:lnRef>
+          <a:fillRef idx="3">
+            <a:schemeClr val="accent1"/>
+          </a:fillRef>
+          <a:effectRef idx="2">
+            <a:schemeClr val="accent1"/>
+          </a:effectRef>
+          <a:fontRef idx="minor">
+            <a:schemeClr val="lt1"/>
+          </a:fontRef>
+        </p:style>
+        <p:txBody>
+          <a:bodyPr rtlCol="0" anchor="ctr"/>
+          <a:lstStyle/>
+          <a:p>
+            <a:pPr algn="ctr"/>
+          </a:p>
+        </p:txBody>
+      </p:sp>
+      <p:cxnSp>
+        <p:nvCxnSpPr>
+          <p:cNvPr id="536" name="Connector 535"/>
+          <p:cNvCxnSpPr/>
+          <p:nvPr/>
+        </p:nvCxnSpPr>
+        <p:spPr>
+          <a:xfrm>
+            <a:off x="13726420" y="1024127"/>
+            <a:ext cx="0" cy="6729984"/>
+          </a:xfrm>
+          <a:prstGeom prst="line">
+            <a:avLst/>
+          </a:prstGeom>
+          <a:ln w="5715">
+            <a:solidFill>
+              <a:srgbClr val="94A3B8"/>
+            </a:solidFill>
+            <a:prstDash val="sysDot"/>
+          </a:ln>
+        </p:spPr>
+        <p:style>
+          <a:lnRef idx="2">
+            <a:schemeClr val="accent1"/>
+          </a:lnRef>
+          <a:fillRef idx="0">
+            <a:schemeClr val="accent1"/>
+          </a:fillRef>
+          <a:effectRef idx="1">
+            <a:schemeClr val="accent1"/>
+          </a:effectRef>
+          <a:fontRef idx="minor">
+            <a:schemeClr val="tx1"/>
+          </a:fontRef>
+        </p:style>
+      </p:cxnSp>
+      <p:sp>
+        <p:nvSpPr>
+          <p:cNvPr id="537" name="TextBox 536"/>
+          <p:cNvSpPr txBox="1"/>
+          <p:nvPr/>
+        </p:nvSpPr>
+        <p:spPr>
+          <a:xfrm rot="16200000">
+            <a:off x="13676128" y="813816"/>
+            <a:ext cx="164592" cy="292608"/>
+          </a:xfrm>
+          <a:prstGeom prst="rect">
+            <a:avLst/>
+          </a:prstGeom>
+          <a:noFill/>
+        </p:spPr>
+        <p:txBody>
+          <a:bodyPr wrap="none">
+            <a:spAutoFit/>
+          </a:bodyPr>
+          <a:lstStyle/>
+          <a:p>
+            <a:pPr algn="ctr">
+              <a:defRPr sz="470">
+                <a:solidFill>
+                  <a:srgbClr val="475569"/>
+                </a:solidFill>
+              </a:defRPr>
+            </a:pPr>
+            <a:r>
+              <a:t>6.19</a:t>
+            </a:r>
+          </a:p>
+        </p:txBody>
+      </p:sp>
+      <p:sp>
+        <p:nvSpPr>
+          <p:cNvPr id="538" name="Rectangle 537"/>
+          <p:cNvSpPr/>
+          <p:nvPr/>
+        </p:nvSpPr>
+        <p:spPr>
+          <a:xfrm>
+            <a:off x="13856539" y="1024127"/>
+            <a:ext cx="4572" cy="6729983"/>
+          </a:xfrm>
+          <a:prstGeom prst="rect">
+            <a:avLst/>
+          </a:prstGeom>
+          <a:solidFill>
+            <a:srgbClr val="94A3B8"/>
+          </a:solidFill>
+          <a:ln>
+            <a:noFill/>
+          </a:ln>
+        </p:spPr>
+        <p:style>
+          <a:lnRef idx="1">
+            <a:schemeClr val="accent1"/>
+          </a:lnRef>
+          <a:fillRef idx="3">
+            <a:schemeClr val="accent1"/>
+          </a:fillRef>
+          <a:effectRef idx="2">
+            <a:schemeClr val="accent1"/>
+          </a:effectRef>
+          <a:fontRef idx="minor">
+            <a:schemeClr val="lt1"/>
+          </a:fontRef>
+        </p:style>
+        <p:txBody>
+          <a:bodyPr rtlCol="0" anchor="ctr"/>
+          <a:lstStyle/>
+          <a:p>
+            <a:pPr algn="ctr"/>
+          </a:p>
+        </p:txBody>
+      </p:sp>
+      <p:cxnSp>
+        <p:nvCxnSpPr>
+          <p:cNvPr id="539" name="Connector 538"/>
+          <p:cNvCxnSpPr/>
+          <p:nvPr/>
+        </p:nvCxnSpPr>
+        <p:spPr>
+          <a:xfrm>
+            <a:off x="13856539" y="1024127"/>
+            <a:ext cx="0" cy="6729984"/>
+          </a:xfrm>
+          <a:prstGeom prst="line">
+            <a:avLst/>
+          </a:prstGeom>
+          <a:ln w="5715">
+            <a:solidFill>
+              <a:srgbClr val="94A3B8"/>
+            </a:solidFill>
+            <a:prstDash val="sysDot"/>
+          </a:ln>
+        </p:spPr>
+        <p:style>
+          <a:lnRef idx="2">
+            <a:schemeClr val="accent1"/>
+          </a:lnRef>
+          <a:fillRef idx="0">
+            <a:schemeClr val="accent1"/>
+          </a:fillRef>
+          <a:effectRef idx="1">
+            <a:schemeClr val="accent1"/>
+          </a:effectRef>
+          <a:fontRef idx="minor">
+            <a:schemeClr val="tx1"/>
+          </a:fontRef>
+        </p:style>
+      </p:cxnSp>
+      <p:sp>
+        <p:nvSpPr>
+          <p:cNvPr id="540" name="TextBox 539"/>
+          <p:cNvSpPr txBox="1"/>
+          <p:nvPr/>
+        </p:nvSpPr>
+        <p:spPr>
+          <a:xfrm rot="16200000">
+            <a:off x="13806247" y="896112"/>
+            <a:ext cx="164592" cy="292608"/>
+          </a:xfrm>
+          <a:prstGeom prst="rect">
+            <a:avLst/>
+          </a:prstGeom>
+          <a:noFill/>
+        </p:spPr>
+        <p:txBody>
+          <a:bodyPr wrap="none">
+            <a:spAutoFit/>
+          </a:bodyPr>
+          <a:lstStyle/>
+          <a:p>
+            <a:pPr algn="ctr">
+              <a:defRPr sz="470">
+                <a:solidFill>
+                  <a:srgbClr val="475569"/>
+                </a:solidFill>
+              </a:defRPr>
+            </a:pPr>
+            <a:r>
+              <a:t>7.0</a:t>
+            </a:r>
+          </a:p>
+        </p:txBody>
+      </p:sp>
+      <p:sp>
+        <p:nvSpPr>
+          <p:cNvPr id="541" name="Rectangle 540"/>
+          <p:cNvSpPr/>
+          <p:nvPr/>
+        </p:nvSpPr>
+        <p:spPr>
+          <a:xfrm>
+            <a:off x="13986658" y="1024127"/>
+            <a:ext cx="4572" cy="6729983"/>
+          </a:xfrm>
+          <a:prstGeom prst="rect">
+            <a:avLst/>
+          </a:prstGeom>
+          <a:solidFill>
+            <a:srgbClr val="94A3B8"/>
+          </a:solidFill>
+          <a:ln>
+            <a:noFill/>
+          </a:ln>
+        </p:spPr>
+        <p:style>
+          <a:lnRef idx="1">
+            <a:schemeClr val="accent1"/>
+          </a:lnRef>
+          <a:fillRef idx="3">
+            <a:schemeClr val="accent1"/>
+          </a:fillRef>
+          <a:effectRef idx="2">
+            <a:schemeClr val="accent1"/>
+          </a:effectRef>
+          <a:fontRef idx="minor">
+            <a:schemeClr val="lt1"/>
+          </a:fontRef>
+        </p:style>
+        <p:txBody>
+          <a:bodyPr rtlCol="0" anchor="ctr"/>
+          <a:lstStyle/>
+          <a:p>
+            <a:pPr algn="ctr"/>
+          </a:p>
+        </p:txBody>
+      </p:sp>
+      <p:cxnSp>
+        <p:nvCxnSpPr>
+          <p:cNvPr id="542" name="Connector 541"/>
+          <p:cNvCxnSpPr/>
+          <p:nvPr/>
+        </p:nvCxnSpPr>
+        <p:spPr>
+          <a:xfrm>
+            <a:off x="13986658" y="1024127"/>
+            <a:ext cx="0" cy="6729984"/>
+          </a:xfrm>
+          <a:prstGeom prst="line">
+            <a:avLst/>
+          </a:prstGeom>
+          <a:ln w="5715">
+            <a:solidFill>
+              <a:srgbClr val="94A3B8"/>
+            </a:solidFill>
+            <a:prstDash val="sysDot"/>
+          </a:ln>
+        </p:spPr>
+        <p:style>
+          <a:lnRef idx="2">
+            <a:schemeClr val="accent1"/>
+          </a:lnRef>
+          <a:fillRef idx="0">
+            <a:schemeClr val="accent1"/>
+          </a:fillRef>
+          <a:effectRef idx="1">
+            <a:schemeClr val="accent1"/>
+          </a:effectRef>
+          <a:fontRef idx="minor">
+            <a:schemeClr val="tx1"/>
+          </a:fontRef>
+        </p:style>
+      </p:cxnSp>
+      <p:sp>
+        <p:nvSpPr>
+          <p:cNvPr id="543" name="TextBox 542"/>
+          <p:cNvSpPr txBox="1"/>
+          <p:nvPr/>
+        </p:nvSpPr>
+        <p:spPr>
+          <a:xfrm rot="16200000">
+            <a:off x="13936366" y="813816"/>
+            <a:ext cx="164592" cy="292608"/>
+          </a:xfrm>
+          <a:prstGeom prst="rect">
+            <a:avLst/>
+          </a:prstGeom>
+          <a:noFill/>
+        </p:spPr>
+        <p:txBody>
+          <a:bodyPr wrap="none">
+            <a:spAutoFit/>
+          </a:bodyPr>
+          <a:lstStyle/>
+          <a:p>
+            <a:pPr algn="ctr">
+              <a:defRPr sz="470">
+                <a:solidFill>
+                  <a:srgbClr val="475569"/>
+                </a:solidFill>
+              </a:defRPr>
+            </a:pPr>
+            <a:r>
+              <a:t>7.1</a:t>
+            </a:r>
+          </a:p>
+        </p:txBody>
+      </p:sp>
+      <p:sp>
+        <p:nvSpPr>
+          <p:cNvPr id="544" name="Rectangle 543"/>
+          <p:cNvSpPr/>
+          <p:nvPr/>
+        </p:nvSpPr>
+        <p:spPr>
+          <a:xfrm>
+            <a:off x="14116777" y="1024127"/>
+            <a:ext cx="4572" cy="6729983"/>
+          </a:xfrm>
+          <a:prstGeom prst="rect">
+            <a:avLst/>
+          </a:prstGeom>
+          <a:solidFill>
+            <a:srgbClr val="94A3B8"/>
+          </a:solidFill>
+          <a:ln>
+            <a:noFill/>
+          </a:ln>
+        </p:spPr>
+        <p:style>
+          <a:lnRef idx="1">
+            <a:schemeClr val="accent1"/>
+          </a:lnRef>
+          <a:fillRef idx="3">
+            <a:schemeClr val="accent1"/>
+          </a:fillRef>
+          <a:effectRef idx="2">
+            <a:schemeClr val="accent1"/>
+          </a:effectRef>
+          <a:fontRef idx="minor">
+            <a:schemeClr val="lt1"/>
+          </a:fontRef>
+        </p:style>
+        <p:txBody>
+          <a:bodyPr rtlCol="0" anchor="ctr"/>
+          <a:lstStyle/>
+          <a:p>
+            <a:pPr algn="ctr"/>
+          </a:p>
+        </p:txBody>
+      </p:sp>
+      <p:cxnSp>
+        <p:nvCxnSpPr>
+          <p:cNvPr id="545" name="Connector 544"/>
+          <p:cNvCxnSpPr/>
+          <p:nvPr/>
+        </p:nvCxnSpPr>
+        <p:spPr>
+          <a:xfrm>
+            <a:off x="14116777" y="1024127"/>
+            <a:ext cx="0" cy="6729984"/>
+          </a:xfrm>
+          <a:prstGeom prst="line">
+            <a:avLst/>
+          </a:prstGeom>
+          <a:ln w="5715">
+            <a:solidFill>
+              <a:srgbClr val="94A3B8"/>
+            </a:solidFill>
+            <a:prstDash val="sysDot"/>
+          </a:ln>
+        </p:spPr>
+        <p:style>
+          <a:lnRef idx="2">
+            <a:schemeClr val="accent1"/>
+          </a:lnRef>
+          <a:fillRef idx="0">
+            <a:schemeClr val="accent1"/>
+          </a:fillRef>
+          <a:effectRef idx="1">
+            <a:schemeClr val="accent1"/>
+          </a:effectRef>
+          <a:fontRef idx="minor">
+            <a:schemeClr val="tx1"/>
+          </a:fontRef>
+        </p:style>
+      </p:cxnSp>
+      <p:sp>
+        <p:nvSpPr>
+          <p:cNvPr id="546" name="TextBox 545"/>
+          <p:cNvSpPr txBox="1"/>
+          <p:nvPr/>
+        </p:nvSpPr>
+        <p:spPr>
+          <a:xfrm rot="16200000">
+            <a:off x="14066485" y="896112"/>
+            <a:ext cx="164592" cy="292608"/>
+          </a:xfrm>
+          <a:prstGeom prst="rect">
+            <a:avLst/>
+          </a:prstGeom>
+          <a:noFill/>
+        </p:spPr>
+        <p:txBody>
+          <a:bodyPr wrap="none">
+            <a:spAutoFit/>
+          </a:bodyPr>
+          <a:lstStyle/>
+          <a:p>
+            <a:pPr algn="ctr">
+              <a:defRPr sz="470">
+                <a:solidFill>
+                  <a:srgbClr val="475569"/>
+                </a:solidFill>
+              </a:defRPr>
+            </a:pPr>
+            <a:r>
+              <a:t>7.2</a:t>
+            </a:r>
+          </a:p>
+        </p:txBody>
+      </p:sp>
     </p:spTree>
   </p:cSld>
   <p:clrMapOvr>
@@ -15026,6 +24637,41 @@
             </a:pPr>
             <a:r>
               <a:t>6. Cross-cutting domains (TRANSPORT / VIRTUAL-OVERLAY / SECURITY) are not separate vertical groups here because the requested vertical grouping is by architecture Axis.</a:t>
+            </a:r>
+          </a:p>
+        </p:txBody>
+      </p:sp>
+      <p:sp>
+        <p:nvSpPr>
+          <p:cNvPr id="9" name="TextBox 8"/>
+          <p:cNvSpPr txBox="1"/>
+          <p:nvPr/>
+        </p:nvSpPr>
+        <p:spPr>
+          <a:xfrm>
+            <a:off x="868680" y="6400800"/>
+            <a:ext cx="12801600" cy="731520"/>
+          </a:xfrm>
+          <a:prstGeom prst="rect">
+            <a:avLst/>
+          </a:prstGeom>
+          <a:noFill/>
+        </p:spPr>
+        <p:txBody>
+          <a:bodyPr wrap="square">
+            <a:spAutoFit/>
+          </a:bodyPr>
+          <a:lstStyle/>
+          <a:p>
+            <a:pPr>
+              <a:defRPr sz="1200">
+                <a:solidFill>
+                  <a:srgbClr val="1F2937"/>
+                </a:solidFill>
+              </a:defRPr>
+            </a:pPr>
+            <a:r>
+              <a:t>GA grid: slide 1 now includes a dotted vertical line for every Linux feature release from 3.0 through 7.2, positioned by its GA calendar date. 7.3 is not drawn because it is still an -rc series as of 2026-10-04.</a:t>
             </a:r>
           </a:p>
         </p:txBody>

--- a/linux-networking-feature-evolution.pptx
+++ b/linux-networking-feature-evolution.pptx
@@ -533,6 +533,16 @@
           <a:p>
             <a:r>
               <a:t>- Only X.0 releases are drawn as vertical lines.</a:t>
+            </a:r>
+          </a:p>
+          <a:p>
+            <a:r>
+              <a:t>- MEMORY rows are ordered by lineage. Lineage arrows run from a parent release (●) either to the start (○) of a feature that began afterwards, or straight down onto the dashed line of a feature already in development: page_pool → Device Memory TCP RX / io_uring ZCRX; Device Memory TCP RX → TX; io_uring ZCRX → large RX buffers; AF_XDP and XDP multi-buffer → AF_XDP multi-buffer. RX HW queue leasing interacts with AF_XDP / io_uring but is not drawn as a child.</a:t>
+            </a:r>
+          </a:p>
+          <a:p>
+            <a:r>
+              <a:t>- Development starts revised from memory (not audited): nftables ~2008 (shown as off-chart), XDP ~early 2016.</a:t>
             </a:r>
           </a:p>
         </p:txBody>
@@ -5747,9 +5757,330 @@
           </a:fontRef>
         </p:style>
       </p:cxnSp>
-      <p:sp>
-        <p:nvSpPr>
-          <p:cNvPr id="62" name="band-label:PERFORMANCE"/>
+      <p:cxnSp>
+        <p:nvCxnSpPr>
+          <p:cNvPr id="62" name="lineage:page_pool-&gt;Device Memory TCP RX:down"/>
+          <p:cNvCxnSpPr/>
+          <p:nvPr/>
+        </p:nvCxnSpPr>
+        <p:spPr>
+          <a:xfrm>
+            <a:off x="8302070" y="3860863"/>
+            <a:ext cx="0" cy="63627"/>
+          </a:xfrm>
+          <a:prstGeom prst="line">
+            <a:avLst/>
+          </a:prstGeom>
+          <a:ln w="12700">
+            <a:solidFill>
+              <a:srgbClr val="475569"/>
+            </a:solidFill>
+          </a:ln>
+        </p:spPr>
+        <p:style>
+          <a:lnRef idx="2">
+            <a:schemeClr val="accent1"/>
+          </a:lnRef>
+          <a:fillRef idx="0">
+            <a:schemeClr val="accent1"/>
+          </a:fillRef>
+          <a:effectRef idx="1">
+            <a:schemeClr val="accent1"/>
+          </a:effectRef>
+          <a:fontRef idx="minor">
+            <a:schemeClr val="tx1"/>
+          </a:fontRef>
+        </p:style>
+      </p:cxnSp>
+      <p:cxnSp>
+        <p:nvCxnSpPr>
+          <p:cNvPr id="63" name="lineage:page_pool-&gt;Device Memory TCP RX:across"/>
+          <p:cNvCxnSpPr/>
+          <p:nvPr/>
+        </p:nvCxnSpPr>
+        <p:spPr>
+          <a:xfrm>
+            <a:off x="8302070" y="3924490"/>
+            <a:ext cx="3062321" cy="0"/>
+          </a:xfrm>
+          <a:prstGeom prst="line">
+            <a:avLst/>
+          </a:prstGeom>
+          <a:ln w="12700">
+            <a:solidFill>
+              <a:srgbClr val="475569"/>
+            </a:solidFill>
+            <a:tailEnd type="triangle" w="sm" len="sm"/>
+          </a:ln>
+        </p:spPr>
+        <p:style>
+          <a:lnRef idx="2">
+            <a:schemeClr val="accent1"/>
+          </a:lnRef>
+          <a:fillRef idx="0">
+            <a:schemeClr val="accent1"/>
+          </a:fillRef>
+          <a:effectRef idx="1">
+            <a:schemeClr val="accent1"/>
+          </a:effectRef>
+          <a:fontRef idx="minor">
+            <a:schemeClr val="tx1"/>
+          </a:fontRef>
+        </p:style>
+      </p:cxnSp>
+      <p:cxnSp>
+        <p:nvCxnSpPr>
+          <p:cNvPr id="64" name="lineage:page_pool-&gt;io_uring ZCRX:down"/>
+          <p:cNvCxnSpPr/>
+          <p:nvPr/>
+        </p:nvCxnSpPr>
+        <p:spPr>
+          <a:xfrm>
+            <a:off x="8302070" y="3860863"/>
+            <a:ext cx="0" cy="282321"/>
+          </a:xfrm>
+          <a:prstGeom prst="line">
+            <a:avLst/>
+          </a:prstGeom>
+          <a:ln w="12700">
+            <a:solidFill>
+              <a:srgbClr val="475569"/>
+            </a:solidFill>
+          </a:ln>
+        </p:spPr>
+        <p:style>
+          <a:lnRef idx="2">
+            <a:schemeClr val="accent1"/>
+          </a:lnRef>
+          <a:fillRef idx="0">
+            <a:schemeClr val="accent1"/>
+          </a:fillRef>
+          <a:effectRef idx="1">
+            <a:schemeClr val="accent1"/>
+          </a:effectRef>
+          <a:fontRef idx="minor">
+            <a:schemeClr val="tx1"/>
+          </a:fontRef>
+        </p:style>
+      </p:cxnSp>
+      <p:cxnSp>
+        <p:nvCxnSpPr>
+          <p:cNvPr id="65" name="lineage:page_pool-&gt;io_uring ZCRX:across"/>
+          <p:cNvCxnSpPr/>
+          <p:nvPr/>
+        </p:nvCxnSpPr>
+        <p:spPr>
+          <a:xfrm>
+            <a:off x="8302070" y="4143184"/>
+            <a:ext cx="3270633" cy="0"/>
+          </a:xfrm>
+          <a:prstGeom prst="line">
+            <a:avLst/>
+          </a:prstGeom>
+          <a:ln w="12700">
+            <a:solidFill>
+              <a:srgbClr val="475569"/>
+            </a:solidFill>
+            <a:tailEnd type="triangle" w="sm" len="sm"/>
+          </a:ln>
+        </p:spPr>
+        <p:style>
+          <a:lnRef idx="2">
+            <a:schemeClr val="accent1"/>
+          </a:lnRef>
+          <a:fillRef idx="0">
+            <a:schemeClr val="accent1"/>
+          </a:fillRef>
+          <a:effectRef idx="1">
+            <a:schemeClr val="accent1"/>
+          </a:effectRef>
+          <a:fontRef idx="minor">
+            <a:schemeClr val="tx1"/>
+          </a:fontRef>
+        </p:style>
+      </p:cxnSp>
+      <p:cxnSp>
+        <p:nvCxnSpPr>
+          <p:cNvPr id="66" name="lineage:Device Memory TCP RX-&gt;Device Memory TCP TX"/>
+          <p:cNvCxnSpPr/>
+          <p:nvPr/>
+        </p:nvCxnSpPr>
+        <p:spPr>
+          <a:xfrm>
+            <a:off x="12654611" y="3970210"/>
+            <a:ext cx="0" cy="54483"/>
+          </a:xfrm>
+          <a:prstGeom prst="line">
+            <a:avLst/>
+          </a:prstGeom>
+          <a:ln w="12700">
+            <a:solidFill>
+              <a:srgbClr val="475569"/>
+            </a:solidFill>
+            <a:tailEnd type="triangle" w="sm" len="sm"/>
+          </a:ln>
+        </p:spPr>
+        <p:style>
+          <a:lnRef idx="2">
+            <a:schemeClr val="accent1"/>
+          </a:lnRef>
+          <a:fillRef idx="0">
+            <a:schemeClr val="accent1"/>
+          </a:fillRef>
+          <a:effectRef idx="1">
+            <a:schemeClr val="accent1"/>
+          </a:effectRef>
+          <a:fontRef idx="minor">
+            <a:schemeClr val="tx1"/>
+          </a:fontRef>
+        </p:style>
+      </p:cxnSp>
+      <p:cxnSp>
+        <p:nvCxnSpPr>
+          <p:cNvPr id="67" name="lineage:io_uring ZCRX-&gt;large RX buffers (mem. providers)"/>
+          <p:cNvCxnSpPr/>
+          <p:nvPr/>
+        </p:nvCxnSpPr>
+        <p:spPr>
+          <a:xfrm>
+            <a:off x="13012491" y="4188904"/>
+            <a:ext cx="0" cy="54483"/>
+          </a:xfrm>
+          <a:prstGeom prst="line">
+            <a:avLst/>
+          </a:prstGeom>
+          <a:ln w="12700">
+            <a:solidFill>
+              <a:srgbClr val="475569"/>
+            </a:solidFill>
+            <a:tailEnd type="triangle" w="sm" len="sm"/>
+          </a:ln>
+        </p:spPr>
+        <p:style>
+          <a:lnRef idx="2">
+            <a:schemeClr val="accent1"/>
+          </a:lnRef>
+          <a:fillRef idx="0">
+            <a:schemeClr val="accent1"/>
+          </a:fillRef>
+          <a:effectRef idx="1">
+            <a:schemeClr val="accent1"/>
+          </a:effectRef>
+          <a:fontRef idx="minor">
+            <a:schemeClr val="tx1"/>
+          </a:fontRef>
+        </p:style>
+      </p:cxnSp>
+      <p:cxnSp>
+        <p:nvCxnSpPr>
+          <p:cNvPr id="68" name="lineage:AF_XDP-&gt;AF_XDP multi-buffer:down"/>
+          <p:cNvCxnSpPr/>
+          <p:nvPr/>
+        </p:nvCxnSpPr>
+        <p:spPr>
+          <a:xfrm>
+            <a:off x="8302070" y="4407598"/>
+            <a:ext cx="0" cy="172974"/>
+          </a:xfrm>
+          <a:prstGeom prst="line">
+            <a:avLst/>
+          </a:prstGeom>
+          <a:ln w="12700">
+            <a:solidFill>
+              <a:srgbClr val="475569"/>
+            </a:solidFill>
+          </a:ln>
+        </p:spPr>
+        <p:style>
+          <a:lnRef idx="2">
+            <a:schemeClr val="accent1"/>
+          </a:lnRef>
+          <a:fillRef idx="0">
+            <a:schemeClr val="accent1"/>
+          </a:fillRef>
+          <a:effectRef idx="1">
+            <a:schemeClr val="accent1"/>
+          </a:effectRef>
+          <a:fontRef idx="minor">
+            <a:schemeClr val="tx1"/>
+          </a:fontRef>
+        </p:style>
+      </p:cxnSp>
+      <p:cxnSp>
+        <p:nvCxnSpPr>
+          <p:cNvPr id="69" name="lineage:AF_XDP-&gt;AF_XDP multi-buffer:across"/>
+          <p:cNvCxnSpPr/>
+          <p:nvPr/>
+        </p:nvCxnSpPr>
+        <p:spPr>
+          <a:xfrm>
+            <a:off x="8302070" y="4580572"/>
+            <a:ext cx="2298512" cy="0"/>
+          </a:xfrm>
+          <a:prstGeom prst="line">
+            <a:avLst/>
+          </a:prstGeom>
+          <a:ln w="12700">
+            <a:solidFill>
+              <a:srgbClr val="475569"/>
+            </a:solidFill>
+            <a:tailEnd type="triangle" w="sm" len="sm"/>
+          </a:ln>
+        </p:spPr>
+        <p:style>
+          <a:lnRef idx="2">
+            <a:schemeClr val="accent1"/>
+          </a:lnRef>
+          <a:fillRef idx="0">
+            <a:schemeClr val="accent1"/>
+          </a:fillRef>
+          <a:effectRef idx="1">
+            <a:schemeClr val="accent1"/>
+          </a:effectRef>
+          <a:fontRef idx="minor">
+            <a:schemeClr val="tx1"/>
+          </a:fontRef>
+        </p:style>
+      </p:cxnSp>
+      <p:cxnSp>
+        <p:nvCxnSpPr>
+          <p:cNvPr id="70" name="lineage:XDP multi-buffer-&gt;AF_XDP multi-buffer"/>
+          <p:cNvCxnSpPr/>
+          <p:nvPr/>
+        </p:nvCxnSpPr>
+        <p:spPr>
+          <a:xfrm>
+            <a:off x="10923670" y="4516945"/>
+            <a:ext cx="0" cy="54483"/>
+          </a:xfrm>
+          <a:prstGeom prst="line">
+            <a:avLst/>
+          </a:prstGeom>
+          <a:ln w="12700">
+            <a:solidFill>
+              <a:srgbClr val="475569"/>
+            </a:solidFill>
+            <a:tailEnd type="triangle" w="sm" len="sm"/>
+          </a:ln>
+        </p:spPr>
+        <p:style>
+          <a:lnRef idx="2">
+            <a:schemeClr val="accent1"/>
+          </a:lnRef>
+          <a:fillRef idx="0">
+            <a:schemeClr val="accent1"/>
+          </a:fillRef>
+          <a:effectRef idx="1">
+            <a:schemeClr val="accent1"/>
+          </a:effectRef>
+          <a:fontRef idx="minor">
+            <a:schemeClr val="tx1"/>
+          </a:fontRef>
+        </p:style>
+      </p:cxnSp>
+      <p:sp>
+        <p:nvSpPr>
+          <p:cNvPr id="71" name="band-label:PERFORMANCE"/>
           <p:cNvSpPr txBox="1"/>
           <p:nvPr/>
         </p:nvSpPr>
@@ -5783,7 +6114,7 @@
       </p:sp>
       <p:sp>
         <p:nvSpPr>
-          <p:cNvPr id="63" name="row:DQL / BQL:name"/>
+          <p:cNvPr id="72" name="row:DQL / BQL:name"/>
           <p:cNvSpPr txBox="1"/>
           <p:nvPr/>
         </p:nvSpPr>
@@ -5817,7 +6148,7 @@
       </p:sp>
       <p:cxnSp>
         <p:nvCxnSpPr>
-          <p:cNvPr id="64" name="row:DQL / BQL:development"/>
+          <p:cNvPr id="73" name="row:DQL / BQL:development"/>
           <p:cNvCxnSpPr/>
           <p:nvPr/>
         </p:nvCxnSpPr>
@@ -5853,7 +6184,7 @@
       </p:cxnSp>
       <p:sp>
         <p:nvSpPr>
-          <p:cNvPr id="65" name="row:DQL / BQL:start"/>
+          <p:cNvPr id="74" name="row:DQL / BQL:start"/>
           <p:cNvSpPr/>
           <p:nvPr/>
         </p:nvSpPr>
@@ -5897,7 +6228,7 @@
       </p:sp>
       <p:sp>
         <p:nvSpPr>
-          <p:cNvPr id="66" name="row:DQL / BQL:release:3.3"/>
+          <p:cNvPr id="75" name="row:DQL / BQL:release:3.3"/>
           <p:cNvSpPr/>
           <p:nvPr/>
         </p:nvSpPr>
@@ -5941,7 +6272,7 @@
       </p:sp>
       <p:sp>
         <p:nvSpPr>
-          <p:cNvPr id="67" name="row:DQL / BQL:label"/>
+          <p:cNvPr id="76" name="row:DQL / BQL:label"/>
           <p:cNvSpPr txBox="1"/>
           <p:nvPr/>
         </p:nvSpPr>
@@ -5975,7 +6306,7 @@
       </p:sp>
       <p:sp>
         <p:nvSpPr>
-          <p:cNvPr id="68" name="row:TSQ:name"/>
+          <p:cNvPr id="77" name="row:TSQ:name"/>
           <p:cNvSpPr txBox="1"/>
           <p:nvPr/>
         </p:nvSpPr>
@@ -6009,7 +6340,7 @@
       </p:sp>
       <p:cxnSp>
         <p:nvCxnSpPr>
-          <p:cNvPr id="69" name="row:TSQ:development"/>
+          <p:cNvPr id="78" name="row:TSQ:development"/>
           <p:cNvCxnSpPr/>
           <p:nvPr/>
         </p:nvCxnSpPr>
@@ -6045,7 +6376,7 @@
       </p:cxnSp>
       <p:sp>
         <p:nvSpPr>
-          <p:cNvPr id="70" name="row:TSQ:start"/>
+          <p:cNvPr id="79" name="row:TSQ:start"/>
           <p:cNvSpPr/>
           <p:nvPr/>
         </p:nvSpPr>
@@ -6089,7 +6420,7 @@
       </p:sp>
       <p:sp>
         <p:nvSpPr>
-          <p:cNvPr id="71" name="row:TSQ:release:3.6"/>
+          <p:cNvPr id="80" name="row:TSQ:release:3.6"/>
           <p:cNvSpPr/>
           <p:nvPr/>
         </p:nvSpPr>
@@ -6133,7 +6464,7 @@
       </p:sp>
       <p:sp>
         <p:nvSpPr>
-          <p:cNvPr id="72" name="row:TSQ:label"/>
+          <p:cNvPr id="81" name="row:TSQ:label"/>
           <p:cNvSpPr txBox="1"/>
           <p:nvPr/>
         </p:nvSpPr>
@@ -6167,7 +6498,7 @@
       </p:sp>
       <p:sp>
         <p:nvSpPr>
-          <p:cNvPr id="73" name="row:sch_fq / TCP pacing:name"/>
+          <p:cNvPr id="82" name="row:sch_fq / TCP pacing:name"/>
           <p:cNvSpPr txBox="1"/>
           <p:nvPr/>
         </p:nvSpPr>
@@ -6201,7 +6532,7 @@
       </p:sp>
       <p:cxnSp>
         <p:nvCxnSpPr>
-          <p:cNvPr id="74" name="row:sch_fq / TCP pacing:development"/>
+          <p:cNvPr id="83" name="row:sch_fq / TCP pacing:development"/>
           <p:cNvCxnSpPr/>
           <p:nvPr/>
         </p:nvCxnSpPr>
@@ -6237,7 +6568,7 @@
       </p:cxnSp>
       <p:sp>
         <p:nvSpPr>
-          <p:cNvPr id="75" name="row:sch_fq / TCP pacing:start"/>
+          <p:cNvPr id="84" name="row:sch_fq / TCP pacing:start"/>
           <p:cNvSpPr/>
           <p:nvPr/>
         </p:nvSpPr>
@@ -6281,7 +6612,7 @@
       </p:sp>
       <p:sp>
         <p:nvSpPr>
-          <p:cNvPr id="76" name="row:sch_fq / TCP pacing:release:3.12"/>
+          <p:cNvPr id="85" name="row:sch_fq / TCP pacing:release:3.12"/>
           <p:cNvSpPr/>
           <p:nvPr/>
         </p:nvSpPr>
@@ -6325,7 +6656,7 @@
       </p:sp>
       <p:sp>
         <p:nvSpPr>
-          <p:cNvPr id="77" name="row:sch_fq / TCP pacing:label"/>
+          <p:cNvPr id="86" name="row:sch_fq / TCP pacing:label"/>
           <p:cNvSpPr txBox="1"/>
           <p:nvPr/>
         </p:nvSpPr>
@@ -6359,7 +6690,7 @@
       </p:sp>
       <p:sp>
         <p:nvSpPr>
-          <p:cNvPr id="78" name="row:SO_BUSY_POLL:name"/>
+          <p:cNvPr id="87" name="row:SO_BUSY_POLL:name"/>
           <p:cNvSpPr txBox="1"/>
           <p:nvPr/>
         </p:nvSpPr>
@@ -6393,7 +6724,7 @@
       </p:sp>
       <p:cxnSp>
         <p:nvCxnSpPr>
-          <p:cNvPr id="79" name="row:SO_BUSY_POLL:development"/>
+          <p:cNvPr id="88" name="row:SO_BUSY_POLL:development"/>
           <p:cNvCxnSpPr/>
           <p:nvPr/>
         </p:nvCxnSpPr>
@@ -6429,7 +6760,7 @@
       </p:cxnSp>
       <p:sp>
         <p:nvSpPr>
-          <p:cNvPr id="80" name="row:SO_BUSY_POLL:start"/>
+          <p:cNvPr id="89" name="row:SO_BUSY_POLL:start"/>
           <p:cNvSpPr/>
           <p:nvPr/>
         </p:nvSpPr>
@@ -6473,7 +6804,7 @@
       </p:sp>
       <p:sp>
         <p:nvSpPr>
-          <p:cNvPr id="81" name="row:SO_BUSY_POLL:release:3.11"/>
+          <p:cNvPr id="90" name="row:SO_BUSY_POLL:release:3.11"/>
           <p:cNvSpPr/>
           <p:nvPr/>
         </p:nvSpPr>
@@ -6517,7 +6848,7 @@
       </p:sp>
       <p:sp>
         <p:nvSpPr>
-          <p:cNvPr id="82" name="row:SO_BUSY_POLL:label"/>
+          <p:cNvPr id="91" name="row:SO_BUSY_POLL:label"/>
           <p:cNvSpPr txBox="1"/>
           <p:nvPr/>
         </p:nvSpPr>
@@ -6551,7 +6882,7 @@
       </p:sp>
       <p:sp>
         <p:nvSpPr>
-          <p:cNvPr id="83" name="row:SO_TXTIME / EDT / taprio:name"/>
+          <p:cNvPr id="92" name="row:SO_TXTIME / EDT / taprio:name"/>
           <p:cNvSpPr txBox="1"/>
           <p:nvPr/>
         </p:nvSpPr>
@@ -6585,7 +6916,7 @@
       </p:sp>
       <p:cxnSp>
         <p:nvCxnSpPr>
-          <p:cNvPr id="84" name="row:SO_TXTIME / EDT / taprio:development"/>
+          <p:cNvPr id="93" name="row:SO_TXTIME / EDT / taprio:development"/>
           <p:cNvCxnSpPr/>
           <p:nvPr/>
         </p:nvCxnSpPr>
@@ -6621,7 +6952,7 @@
       </p:cxnSp>
       <p:sp>
         <p:nvSpPr>
-          <p:cNvPr id="85" name="row:SO_TXTIME / EDT / taprio:start"/>
+          <p:cNvPr id="94" name="row:SO_TXTIME / EDT / taprio:start"/>
           <p:cNvSpPr/>
           <p:nvPr/>
         </p:nvSpPr>
@@ -6665,7 +6996,7 @@
       </p:sp>
       <p:cxnSp>
         <p:nvCxnSpPr>
-          <p:cNvPr id="86" name="row:SO_TXTIME / EDT / taprio:milestones"/>
+          <p:cNvPr id="95" name="row:SO_TXTIME / EDT / taprio:milestones"/>
           <p:cNvCxnSpPr/>
           <p:nvPr/>
         </p:nvCxnSpPr>
@@ -6700,7 +7031,7 @@
       </p:cxnSp>
       <p:sp>
         <p:nvSpPr>
-          <p:cNvPr id="87" name="row:SO_TXTIME / EDT / taprio:release:4.19"/>
+          <p:cNvPr id="96" name="row:SO_TXTIME / EDT / taprio:release:4.19"/>
           <p:cNvSpPr/>
           <p:nvPr/>
         </p:nvSpPr>
@@ -6744,7 +7075,7 @@
       </p:sp>
       <p:sp>
         <p:nvSpPr>
-          <p:cNvPr id="88" name="row:SO_TXTIME / EDT / taprio:release:4.20"/>
+          <p:cNvPr id="97" name="row:SO_TXTIME / EDT / taprio:release:4.20"/>
           <p:cNvSpPr/>
           <p:nvPr/>
         </p:nvSpPr>
@@ -6788,7 +7119,7 @@
       </p:sp>
       <p:sp>
         <p:nvSpPr>
-          <p:cNvPr id="89" name="row:SO_TXTIME / EDT / taprio:label"/>
+          <p:cNvPr id="98" name="row:SO_TXTIME / EDT / taprio:label"/>
           <p:cNvSpPr txBox="1"/>
           <p:nvPr/>
         </p:nvSpPr>
@@ -6822,7 +7153,7 @@
       </p:sp>
       <p:sp>
         <p:nvSpPr>
-          <p:cNvPr id="90" name="row:BIG TCP:name"/>
+          <p:cNvPr id="99" name="row:BIG TCP:name"/>
           <p:cNvSpPr txBox="1"/>
           <p:nvPr/>
         </p:nvSpPr>
@@ -6856,7 +7187,7 @@
       </p:sp>
       <p:cxnSp>
         <p:nvCxnSpPr>
-          <p:cNvPr id="91" name="row:BIG TCP:development"/>
+          <p:cNvPr id="100" name="row:BIG TCP:development"/>
           <p:cNvCxnSpPr/>
           <p:nvPr/>
         </p:nvCxnSpPr>
@@ -6892,7 +7223,7 @@
       </p:cxnSp>
       <p:sp>
         <p:nvSpPr>
-          <p:cNvPr id="92" name="row:BIG TCP:start"/>
+          <p:cNvPr id="101" name="row:BIG TCP:start"/>
           <p:cNvSpPr/>
           <p:nvPr/>
         </p:nvSpPr>
@@ -6936,7 +7267,7 @@
       </p:sp>
       <p:sp>
         <p:nvSpPr>
-          <p:cNvPr id="93" name="row:BIG TCP:release:5.19"/>
+          <p:cNvPr id="102" name="row:BIG TCP:release:5.19"/>
           <p:cNvSpPr/>
           <p:nvPr/>
         </p:nvSpPr>
@@ -6980,7 +7311,7 @@
       </p:sp>
       <p:sp>
         <p:nvSpPr>
-          <p:cNvPr id="94" name="row:BIG TCP:label"/>
+          <p:cNvPr id="103" name="row:BIG TCP:label"/>
           <p:cNvSpPr txBox="1"/>
           <p:nvPr/>
         </p:nvSpPr>
@@ -7014,7 +7345,7 @@
       </p:sp>
       <p:sp>
         <p:nvSpPr>
-          <p:cNvPr id="95" name="row:BIG TCP extensions:name"/>
+          <p:cNvPr id="104" name="row:BIG TCP extensions:name"/>
           <p:cNvSpPr txBox="1"/>
           <p:nvPr/>
         </p:nvSpPr>
@@ -7048,7 +7379,7 @@
       </p:sp>
       <p:cxnSp>
         <p:nvCxnSpPr>
-          <p:cNvPr id="96" name="row:BIG TCP extensions:milestones"/>
+          <p:cNvPr id="105" name="row:BIG TCP extensions:milestones"/>
           <p:cNvCxnSpPr/>
           <p:nvPr/>
         </p:nvCxnSpPr>
@@ -7083,7 +7414,7 @@
       </p:cxnSp>
       <p:sp>
         <p:nvSpPr>
-          <p:cNvPr id="97" name="row:BIG TCP extensions:release:6.3"/>
+          <p:cNvPr id="106" name="row:BIG TCP extensions:release:6.3"/>
           <p:cNvSpPr/>
           <p:nvPr/>
         </p:nvSpPr>
@@ -7127,7 +7458,7 @@
       </p:sp>
       <p:sp>
         <p:nvSpPr>
-          <p:cNvPr id="98" name="row:BIG TCP extensions:release:7.0"/>
+          <p:cNvPr id="107" name="row:BIG TCP extensions:release:7.0"/>
           <p:cNvSpPr/>
           <p:nvPr/>
         </p:nvSpPr>
@@ -7171,7 +7502,7 @@
       </p:sp>
       <p:sp>
         <p:nvSpPr>
-          <p:cNvPr id="99" name="row:BIG TCP extensions:release:7.3-rc"/>
+          <p:cNvPr id="108" name="row:BIG TCP extensions:release:7.3-rc"/>
           <p:cNvSpPr/>
           <p:nvPr/>
         </p:nvSpPr>
@@ -7215,7 +7546,7 @@
       </p:sp>
       <p:sp>
         <p:nvSpPr>
-          <p:cNvPr id="100" name="row:BIG TCP extensions:label"/>
+          <p:cNvPr id="109" name="row:BIG TCP extensions:label"/>
           <p:cNvSpPr txBox="1"/>
           <p:nvPr/>
         </p:nvSpPr>
@@ -7249,7 +7580,7 @@
       </p:sp>
       <p:sp>
         <p:nvSpPr>
-          <p:cNvPr id="101" name="row:cake_mq:name"/>
+          <p:cNvPr id="110" name="row:cake_mq:name"/>
           <p:cNvSpPr txBox="1"/>
           <p:nvPr/>
         </p:nvSpPr>
@@ -7283,7 +7614,7 @@
       </p:sp>
       <p:cxnSp>
         <p:nvCxnSpPr>
-          <p:cNvPr id="102" name="row:cake_mq:development"/>
+          <p:cNvPr id="111" name="row:cake_mq:development"/>
           <p:cNvCxnSpPr/>
           <p:nvPr/>
         </p:nvCxnSpPr>
@@ -7319,7 +7650,7 @@
       </p:cxnSp>
       <p:sp>
         <p:nvSpPr>
-          <p:cNvPr id="103" name="row:cake_mq:start"/>
+          <p:cNvPr id="112" name="row:cake_mq:start"/>
           <p:cNvSpPr/>
           <p:nvPr/>
         </p:nvSpPr>
@@ -7363,7 +7694,7 @@
       </p:sp>
       <p:sp>
         <p:nvSpPr>
-          <p:cNvPr id="104" name="row:cake_mq:release:7.0"/>
+          <p:cNvPr id="113" name="row:cake_mq:release:7.0"/>
           <p:cNvSpPr/>
           <p:nvPr/>
         </p:nvSpPr>
@@ -7407,7 +7738,7 @@
       </p:sp>
       <p:sp>
         <p:nvSpPr>
-          <p:cNvPr id="105" name="row:cake_mq:label"/>
+          <p:cNvPr id="114" name="row:cake_mq:label"/>
           <p:cNvSpPr txBox="1"/>
           <p:nvPr/>
         </p:nvSpPr>
@@ -7441,7 +7772,7 @@
       </p:sp>
       <p:sp>
         <p:nvSpPr>
-          <p:cNvPr id="106" name="band-label:PROGRAMMABILITY"/>
+          <p:cNvPr id="115" name="band-label:PROGRAMMABILITY"/>
           <p:cNvSpPr txBox="1"/>
           <p:nvPr/>
         </p:nvSpPr>
@@ -7476,7 +7807,7 @@
       </p:sp>
       <p:sp>
         <p:nvSpPr>
-          <p:cNvPr id="107" name="row:eBPF foundation:name"/>
+          <p:cNvPr id="116" name="row:eBPF foundation:name"/>
           <p:cNvSpPr txBox="1"/>
           <p:nvPr/>
         </p:nvSpPr>
@@ -7510,7 +7841,7 @@
       </p:sp>
       <p:cxnSp>
         <p:nvCxnSpPr>
-          <p:cNvPr id="108" name="row:eBPF foundation:development"/>
+          <p:cNvPr id="117" name="row:eBPF foundation:development"/>
           <p:cNvCxnSpPr/>
           <p:nvPr/>
         </p:nvCxnSpPr>
@@ -7546,7 +7877,7 @@
       </p:cxnSp>
       <p:sp>
         <p:nvSpPr>
-          <p:cNvPr id="109" name="row:eBPF foundation:start"/>
+          <p:cNvPr id="118" name="row:eBPF foundation:start"/>
           <p:cNvSpPr/>
           <p:nvPr/>
         </p:nvSpPr>
@@ -7590,7 +7921,7 @@
       </p:sp>
       <p:sp>
         <p:nvSpPr>
-          <p:cNvPr id="110" name="row:eBPF foundation:release:3.18"/>
+          <p:cNvPr id="119" name="row:eBPF foundation:release:3.18"/>
           <p:cNvSpPr/>
           <p:nvPr/>
         </p:nvSpPr>
@@ -7634,7 +7965,7 @@
       </p:sp>
       <p:sp>
         <p:nvSpPr>
-          <p:cNvPr id="111" name="row:eBPF foundation:label"/>
+          <p:cNvPr id="120" name="row:eBPF foundation:label"/>
           <p:cNvSpPr txBox="1"/>
           <p:nvPr/>
         </p:nvSpPr>
@@ -7668,7 +7999,7 @@
       </p:sp>
       <p:sp>
         <p:nvSpPr>
-          <p:cNvPr id="112" name="row:TC BPF:name"/>
+          <p:cNvPr id="121" name="row:TC BPF:name"/>
           <p:cNvSpPr txBox="1"/>
           <p:nvPr/>
         </p:nvSpPr>
@@ -7702,7 +8033,7 @@
       </p:sp>
       <p:cxnSp>
         <p:nvCxnSpPr>
-          <p:cNvPr id="113" name="row:TC BPF:development"/>
+          <p:cNvPr id="122" name="row:TC BPF:development"/>
           <p:cNvCxnSpPr/>
           <p:nvPr/>
         </p:nvCxnSpPr>
@@ -7738,7 +8069,7 @@
       </p:cxnSp>
       <p:sp>
         <p:nvSpPr>
-          <p:cNvPr id="114" name="row:TC BPF:start"/>
+          <p:cNvPr id="123" name="row:TC BPF:start"/>
           <p:cNvSpPr/>
           <p:nvPr/>
         </p:nvSpPr>
@@ -7782,7 +8113,7 @@
       </p:sp>
       <p:sp>
         <p:nvSpPr>
-          <p:cNvPr id="115" name="row:TC BPF:release:4.1"/>
+          <p:cNvPr id="124" name="row:TC BPF:release:4.1"/>
           <p:cNvSpPr/>
           <p:nvPr/>
         </p:nvSpPr>
@@ -7826,7 +8157,7 @@
       </p:sp>
       <p:sp>
         <p:nvSpPr>
-          <p:cNvPr id="116" name="row:TC BPF:label"/>
+          <p:cNvPr id="125" name="row:TC BPF:label"/>
           <p:cNvSpPr txBox="1"/>
           <p:nvPr/>
         </p:nvSpPr>
@@ -7860,7 +8191,7 @@
       </p:sp>
       <p:sp>
         <p:nvSpPr>
-          <p:cNvPr id="117" name="row:XDP:name"/>
+          <p:cNvPr id="126" name="row:XDP:name"/>
           <p:cNvSpPr txBox="1"/>
           <p:nvPr/>
         </p:nvSpPr>
@@ -7894,14 +8225,14 @@
       </p:sp>
       <p:cxnSp>
         <p:nvCxnSpPr>
-          <p:cNvPr id="118" name="row:XDP:development"/>
+          <p:cNvPr id="127" name="row:XDP:development"/>
           <p:cNvCxnSpPr/>
           <p:nvPr/>
         </p:nvCxnSpPr>
         <p:spPr>
           <a:xfrm>
-            <a:off x="6058871" y="2848927"/>
-            <a:ext cx="953310" cy="0"/>
+            <a:off x="6558819" y="2848927"/>
+            <a:ext cx="453362" cy="0"/>
           </a:xfrm>
           <a:prstGeom prst="line">
             <a:avLst/>
@@ -7930,13 +8261,13 @@
       </p:cxnSp>
       <p:sp>
         <p:nvSpPr>
-          <p:cNvPr id="119" name="row:XDP:start"/>
+          <p:cNvPr id="128" name="row:XDP:start"/>
           <p:cNvSpPr/>
           <p:nvPr/>
         </p:nvSpPr>
         <p:spPr>
           <a:xfrm>
-            <a:off x="6026867" y="2816923"/>
+            <a:off x="6526815" y="2816923"/>
             <a:ext cx="64008" cy="64008"/>
           </a:xfrm>
           <a:prstGeom prst="ellipse">
@@ -7974,7 +8305,7 @@
       </p:sp>
       <p:sp>
         <p:nvSpPr>
-          <p:cNvPr id="120" name="row:XDP:release:4.8"/>
+          <p:cNvPr id="129" name="row:XDP:release:4.8"/>
           <p:cNvSpPr/>
           <p:nvPr/>
         </p:nvSpPr>
@@ -8018,7 +8349,7 @@
       </p:sp>
       <p:sp>
         <p:nvSpPr>
-          <p:cNvPr id="121" name="row:XDP:label"/>
+          <p:cNvPr id="130" name="row:XDP:label"/>
           <p:cNvSpPr txBox="1"/>
           <p:nvPr/>
         </p:nvSpPr>
@@ -8052,7 +8383,7 @@
       </p:sp>
       <p:sp>
         <p:nvSpPr>
-          <p:cNvPr id="122" name="row:cgroup / LWT BPF:name"/>
+          <p:cNvPr id="131" name="row:cgroup / LWT BPF:name"/>
           <p:cNvSpPr txBox="1"/>
           <p:nvPr/>
         </p:nvSpPr>
@@ -8086,7 +8417,7 @@
       </p:sp>
       <p:cxnSp>
         <p:nvCxnSpPr>
-          <p:cNvPr id="123" name="row:cgroup / LWT BPF:development"/>
+          <p:cNvPr id="132" name="row:cgroup / LWT BPF:development"/>
           <p:cNvCxnSpPr/>
           <p:nvPr/>
         </p:nvCxnSpPr>
@@ -8122,7 +8453,7 @@
       </p:cxnSp>
       <p:sp>
         <p:nvSpPr>
-          <p:cNvPr id="124" name="row:cgroup / LWT BPF:start"/>
+          <p:cNvPr id="133" name="row:cgroup / LWT BPF:start"/>
           <p:cNvSpPr/>
           <p:nvPr/>
         </p:nvSpPr>
@@ -8166,7 +8497,7 @@
       </p:sp>
       <p:sp>
         <p:nvSpPr>
-          <p:cNvPr id="125" name="row:cgroup / LWT BPF:release:4.10"/>
+          <p:cNvPr id="134" name="row:cgroup / LWT BPF:release:4.10"/>
           <p:cNvSpPr/>
           <p:nvPr/>
         </p:nvSpPr>
@@ -8210,7 +8541,7 @@
       </p:sp>
       <p:sp>
         <p:nvSpPr>
-          <p:cNvPr id="126" name="row:cgroup / LWT BPF:label"/>
+          <p:cNvPr id="135" name="row:cgroup / LWT BPF:label"/>
           <p:cNvSpPr txBox="1"/>
           <p:nvPr/>
         </p:nvSpPr>
@@ -8244,7 +8575,7 @@
       </p:sp>
       <p:sp>
         <p:nvSpPr>
-          <p:cNvPr id="127" name="row:SOCK_OPS / SOCKMAP:name"/>
+          <p:cNvPr id="136" name="row:SOCK_OPS / SOCKMAP:name"/>
           <p:cNvSpPr txBox="1"/>
           <p:nvPr/>
         </p:nvSpPr>
@@ -8278,7 +8609,7 @@
       </p:sp>
       <p:cxnSp>
         <p:nvCxnSpPr>
-          <p:cNvPr id="128" name="row:SOCK_OPS / SOCKMAP:development"/>
+          <p:cNvPr id="137" name="row:SOCK_OPS / SOCKMAP:development"/>
           <p:cNvCxnSpPr/>
           <p:nvPr/>
         </p:nvCxnSpPr>
@@ -8314,7 +8645,7 @@
       </p:cxnSp>
       <p:sp>
         <p:nvSpPr>
-          <p:cNvPr id="129" name="row:SOCK_OPS / SOCKMAP:start"/>
+          <p:cNvPr id="138" name="row:SOCK_OPS / SOCKMAP:start"/>
           <p:cNvSpPr/>
           <p:nvPr/>
         </p:nvSpPr>
@@ -8358,7 +8689,7 @@
       </p:sp>
       <p:cxnSp>
         <p:nvCxnSpPr>
-          <p:cNvPr id="130" name="row:SOCK_OPS / SOCKMAP:milestones"/>
+          <p:cNvPr id="139" name="row:SOCK_OPS / SOCKMAP:milestones"/>
           <p:cNvCxnSpPr/>
           <p:nvPr/>
         </p:nvCxnSpPr>
@@ -8393,7 +8724,7 @@
       </p:cxnSp>
       <p:sp>
         <p:nvSpPr>
-          <p:cNvPr id="131" name="row:SOCK_OPS / SOCKMAP:release:4.13"/>
+          <p:cNvPr id="140" name="row:SOCK_OPS / SOCKMAP:release:4.13"/>
           <p:cNvSpPr/>
           <p:nvPr/>
         </p:nvSpPr>
@@ -8437,7 +8768,7 @@
       </p:sp>
       <p:sp>
         <p:nvSpPr>
-          <p:cNvPr id="132" name="row:SOCK_OPS / SOCKMAP:release:4.14"/>
+          <p:cNvPr id="141" name="row:SOCK_OPS / SOCKMAP:release:4.14"/>
           <p:cNvSpPr/>
           <p:nvPr/>
         </p:nvSpPr>
@@ -8481,7 +8812,7 @@
       </p:sp>
       <p:sp>
         <p:nvSpPr>
-          <p:cNvPr id="133" name="row:SOCK_OPS / SOCKMAP:label"/>
+          <p:cNvPr id="142" name="row:SOCK_OPS / SOCKMAP:label"/>
           <p:cNvSpPr txBox="1"/>
           <p:nvPr/>
         </p:nvSpPr>
@@ -8515,7 +8846,7 @@
       </p:sp>
       <p:sp>
         <p:nvSpPr>
-          <p:cNvPr id="134" name="row:BPF struct_ops:name"/>
+          <p:cNvPr id="143" name="row:BPF struct_ops:name"/>
           <p:cNvSpPr txBox="1"/>
           <p:nvPr/>
         </p:nvSpPr>
@@ -8549,7 +8880,7 @@
       </p:sp>
       <p:cxnSp>
         <p:nvCxnSpPr>
-          <p:cNvPr id="135" name="row:BPF struct_ops:development"/>
+          <p:cNvPr id="144" name="row:BPF struct_ops:development"/>
           <p:cNvCxnSpPr/>
           <p:nvPr/>
         </p:nvCxnSpPr>
@@ -8585,7 +8916,7 @@
       </p:cxnSp>
       <p:sp>
         <p:nvSpPr>
-          <p:cNvPr id="136" name="row:BPF struct_ops:start"/>
+          <p:cNvPr id="145" name="row:BPF struct_ops:start"/>
           <p:cNvSpPr/>
           <p:nvPr/>
         </p:nvSpPr>
@@ -8629,7 +8960,7 @@
       </p:sp>
       <p:sp>
         <p:nvSpPr>
-          <p:cNvPr id="137" name="row:BPF struct_ops:release:5.6"/>
+          <p:cNvPr id="146" name="row:BPF struct_ops:release:5.6"/>
           <p:cNvSpPr/>
           <p:nvPr/>
         </p:nvSpPr>
@@ -8673,7 +9004,7 @@
       </p:sp>
       <p:sp>
         <p:nvSpPr>
-          <p:cNvPr id="138" name="row:BPF struct_ops:label"/>
+          <p:cNvPr id="147" name="row:BPF struct_ops:label"/>
           <p:cNvSpPr txBox="1"/>
           <p:nvPr/>
         </p:nvSpPr>
@@ -8707,7 +9038,7 @@
       </p:sp>
       <p:sp>
         <p:nvSpPr>
-          <p:cNvPr id="139" name="row:SK_LOOKUP:name"/>
+          <p:cNvPr id="148" name="row:SK_LOOKUP:name"/>
           <p:cNvSpPr txBox="1"/>
           <p:nvPr/>
         </p:nvSpPr>
@@ -8741,7 +9072,7 @@
       </p:sp>
       <p:cxnSp>
         <p:nvCxnSpPr>
-          <p:cNvPr id="140" name="row:SK_LOOKUP:development"/>
+          <p:cNvPr id="149" name="row:SK_LOOKUP:development"/>
           <p:cNvCxnSpPr/>
           <p:nvPr/>
         </p:nvCxnSpPr>
@@ -8777,7 +9108,7 @@
       </p:cxnSp>
       <p:sp>
         <p:nvSpPr>
-          <p:cNvPr id="141" name="row:SK_LOOKUP:start"/>
+          <p:cNvPr id="150" name="row:SK_LOOKUP:start"/>
           <p:cNvSpPr/>
           <p:nvPr/>
         </p:nvSpPr>
@@ -8821,7 +9152,7 @@
       </p:sp>
       <p:sp>
         <p:nvSpPr>
-          <p:cNvPr id="142" name="row:SK_LOOKUP:release:5.9"/>
+          <p:cNvPr id="151" name="row:SK_LOOKUP:release:5.9"/>
           <p:cNvSpPr/>
           <p:nvPr/>
         </p:nvSpPr>
@@ -8865,7 +9196,7 @@
       </p:sp>
       <p:sp>
         <p:nvSpPr>
-          <p:cNvPr id="143" name="row:SK_LOOKUP:label"/>
+          <p:cNvPr id="152" name="row:SK_LOOKUP:label"/>
           <p:cNvSpPr txBox="1"/>
           <p:nvPr/>
         </p:nvSpPr>
@@ -8899,7 +9230,7 @@
       </p:sp>
       <p:sp>
         <p:nvSpPr>
-          <p:cNvPr id="144" name="row:TCX:name"/>
+          <p:cNvPr id="153" name="row:TCX:name"/>
           <p:cNvSpPr txBox="1"/>
           <p:nvPr/>
         </p:nvSpPr>
@@ -8933,7 +9264,7 @@
       </p:sp>
       <p:cxnSp>
         <p:nvCxnSpPr>
-          <p:cNvPr id="145" name="row:TCX:development"/>
+          <p:cNvPr id="154" name="row:TCX:development"/>
           <p:cNvCxnSpPr/>
           <p:nvPr/>
         </p:nvCxnSpPr>
@@ -8969,7 +9300,7 @@
       </p:cxnSp>
       <p:sp>
         <p:nvSpPr>
-          <p:cNvPr id="146" name="row:TCX:start"/>
+          <p:cNvPr id="155" name="row:TCX:start"/>
           <p:cNvSpPr/>
           <p:nvPr/>
         </p:nvSpPr>
@@ -9013,7 +9344,7 @@
       </p:sp>
       <p:sp>
         <p:nvSpPr>
-          <p:cNvPr id="147" name="row:TCX:release:6.6"/>
+          <p:cNvPr id="156" name="row:TCX:release:6.6"/>
           <p:cNvSpPr/>
           <p:nvPr/>
         </p:nvSpPr>
@@ -9057,7 +9388,7 @@
       </p:sp>
       <p:sp>
         <p:nvSpPr>
-          <p:cNvPr id="148" name="row:TCX:label"/>
+          <p:cNvPr id="157" name="row:TCX:label"/>
           <p:cNvSpPr txBox="1"/>
           <p:nvPr/>
         </p:nvSpPr>
@@ -9091,7 +9422,7 @@
       </p:sp>
       <p:sp>
         <p:nvSpPr>
-          <p:cNvPr id="149" name="row:netkit:name"/>
+          <p:cNvPr id="158" name="row:netkit:name"/>
           <p:cNvSpPr txBox="1"/>
           <p:nvPr/>
         </p:nvSpPr>
@@ -9125,7 +9456,7 @@
       </p:sp>
       <p:cxnSp>
         <p:nvCxnSpPr>
-          <p:cNvPr id="150" name="row:netkit:development"/>
+          <p:cNvPr id="159" name="row:netkit:development"/>
           <p:cNvCxnSpPr/>
           <p:nvPr/>
         </p:nvCxnSpPr>
@@ -9161,7 +9492,7 @@
       </p:cxnSp>
       <p:sp>
         <p:nvSpPr>
-          <p:cNvPr id="151" name="row:netkit:start"/>
+          <p:cNvPr id="160" name="row:netkit:start"/>
           <p:cNvSpPr/>
           <p:nvPr/>
         </p:nvSpPr>
@@ -9205,7 +9536,7 @@
       </p:sp>
       <p:sp>
         <p:nvSpPr>
-          <p:cNvPr id="152" name="row:netkit:release:6.7"/>
+          <p:cNvPr id="161" name="row:netkit:release:6.7"/>
           <p:cNvSpPr/>
           <p:nvPr/>
         </p:nvSpPr>
@@ -9249,7 +9580,7 @@
       </p:sp>
       <p:sp>
         <p:nvSpPr>
-          <p:cNvPr id="153" name="row:netkit:label"/>
+          <p:cNvPr id="162" name="row:netkit:label"/>
           <p:cNvSpPr txBox="1"/>
           <p:nvPr/>
         </p:nvSpPr>
@@ -9283,7 +9614,7 @@
       </p:sp>
       <p:sp>
         <p:nvSpPr>
-          <p:cNvPr id="154" name="row:BPF qdisc:name"/>
+          <p:cNvPr id="163" name="row:BPF qdisc:name"/>
           <p:cNvSpPr txBox="1"/>
           <p:nvPr/>
         </p:nvSpPr>
@@ -9317,7 +9648,7 @@
       </p:sp>
       <p:cxnSp>
         <p:nvCxnSpPr>
-          <p:cNvPr id="155" name="row:BPF qdisc:development"/>
+          <p:cNvPr id="164" name="row:BPF qdisc:development"/>
           <p:cNvCxnSpPr/>
           <p:nvPr/>
         </p:nvCxnSpPr>
@@ -9353,7 +9684,7 @@
       </p:cxnSp>
       <p:sp>
         <p:nvSpPr>
-          <p:cNvPr id="156" name="row:BPF qdisc:start"/>
+          <p:cNvPr id="165" name="row:BPF qdisc:start"/>
           <p:cNvSpPr/>
           <p:nvPr/>
         </p:nvSpPr>
@@ -9397,7 +9728,7 @@
       </p:sp>
       <p:sp>
         <p:nvSpPr>
-          <p:cNvPr id="157" name="row:BPF qdisc:release:6.16"/>
+          <p:cNvPr id="166" name="row:BPF qdisc:release:6.16"/>
           <p:cNvSpPr/>
           <p:nvPr/>
         </p:nvSpPr>
@@ -9441,7 +9772,7 @@
       </p:sp>
       <p:sp>
         <p:nvSpPr>
-          <p:cNvPr id="158" name="row:BPF qdisc:label"/>
+          <p:cNvPr id="167" name="row:BPF qdisc:label"/>
           <p:cNvSpPr txBox="1"/>
           <p:nvPr/>
         </p:nvSpPr>
@@ -9475,7 +9806,7 @@
       </p:sp>
       <p:sp>
         <p:nvSpPr>
-          <p:cNvPr id="159" name="band-label:MEMORY"/>
+          <p:cNvPr id="168" name="band-label:MEMORY"/>
           <p:cNvSpPr txBox="1"/>
           <p:nvPr/>
         </p:nvSpPr>
@@ -9509,7 +9840,7 @@
       </p:sp>
       <p:sp>
         <p:nvSpPr>
-          <p:cNvPr id="160" name="row:page_pool:name"/>
+          <p:cNvPr id="169" name="row:page_pool:name"/>
           <p:cNvSpPr txBox="1"/>
           <p:nvPr/>
         </p:nvSpPr>
@@ -9543,7 +9874,7 @@
       </p:sp>
       <p:cxnSp>
         <p:nvCxnSpPr>
-          <p:cNvPr id="161" name="row:page_pool:development"/>
+          <p:cNvPr id="170" name="row:page_pool:development"/>
           <p:cNvCxnSpPr/>
           <p:nvPr/>
         </p:nvCxnSpPr>
@@ -9579,7 +9910,7 @@
       </p:cxnSp>
       <p:sp>
         <p:nvSpPr>
-          <p:cNvPr id="162" name="row:page_pool:start"/>
+          <p:cNvPr id="171" name="row:page_pool:start"/>
           <p:cNvSpPr/>
           <p:nvPr/>
         </p:nvSpPr>
@@ -9623,7 +9954,7 @@
       </p:sp>
       <p:sp>
         <p:nvSpPr>
-          <p:cNvPr id="163" name="row:page_pool:release:4.18"/>
+          <p:cNvPr id="172" name="row:page_pool:release:4.18"/>
           <p:cNvSpPr/>
           <p:nvPr/>
         </p:nvSpPr>
@@ -9667,7 +9998,7 @@
       </p:sp>
       <p:sp>
         <p:nvSpPr>
-          <p:cNvPr id="164" name="row:page_pool:label"/>
+          <p:cNvPr id="173" name="row:page_pool:label"/>
           <p:cNvSpPr txBox="1"/>
           <p:nvPr/>
         </p:nvSpPr>
@@ -9701,13 +10032,781 @@
       </p:sp>
       <p:sp>
         <p:nvSpPr>
-          <p:cNvPr id="165" name="row:AF_XDP:name"/>
+          <p:cNvPr id="174" name="row:Device Memory TCP RX:name"/>
           <p:cNvSpPr txBox="1"/>
           <p:nvPr/>
         </p:nvSpPr>
         <p:spPr>
           <a:xfrm>
             <a:off x="1325880" y="3814762"/>
+            <a:ext cx="1572768" cy="219456"/>
+          </a:xfrm>
+          <a:prstGeom prst="rect">
+            <a:avLst/>
+          </a:prstGeom>
+          <a:noFill/>
+        </p:spPr>
+        <p:txBody>
+          <a:bodyPr wrap="square" anchor="ctr" lIns="0" rIns="0" tIns="0" bIns="0">
+            <a:noAutofit/>
+          </a:bodyPr>
+          <a:lstStyle/>
+          <a:p>
+            <a:pPr algn="r"/>
+            <a:r>
+              <a:rPr sz="850" b="0" i="0">
+                <a:solidFill>
+                  <a:srgbClr val="1F2937"/>
+                </a:solidFill>
+              </a:rPr>
+              <a:t>Device Memory TCP RX</a:t>
+            </a:r>
+          </a:p>
+        </p:txBody>
+      </p:sp>
+      <p:cxnSp>
+        <p:nvCxnSpPr>
+          <p:cNvPr id="175" name="row:Device Memory TCP RX:development"/>
+          <p:cNvCxnSpPr/>
+          <p:nvPr/>
+        </p:nvCxnSpPr>
+        <p:spPr>
+          <a:xfrm>
+            <a:off x="11405539" y="3924490"/>
+            <a:ext cx="1249072" cy="0"/>
+          </a:xfrm>
+          <a:prstGeom prst="line">
+            <a:avLst/>
+          </a:prstGeom>
+          <a:ln w="12700">
+            <a:solidFill>
+              <a:srgbClr val="16A34A"/>
+            </a:solidFill>
+            <a:prstDash val="dash"/>
+          </a:ln>
+        </p:spPr>
+        <p:style>
+          <a:lnRef idx="2">
+            <a:schemeClr val="accent1"/>
+          </a:lnRef>
+          <a:fillRef idx="0">
+            <a:schemeClr val="accent1"/>
+          </a:fillRef>
+          <a:effectRef idx="1">
+            <a:schemeClr val="accent1"/>
+          </a:effectRef>
+          <a:fontRef idx="minor">
+            <a:schemeClr val="tx1"/>
+          </a:fontRef>
+        </p:style>
+      </p:cxnSp>
+      <p:sp>
+        <p:nvSpPr>
+          <p:cNvPr id="176" name="row:Device Memory TCP RX:start"/>
+          <p:cNvSpPr/>
+          <p:nvPr/>
+        </p:nvSpPr>
+        <p:spPr>
+          <a:xfrm>
+            <a:off x="11373535" y="3892486"/>
+            <a:ext cx="64008" cy="64008"/>
+          </a:xfrm>
+          <a:prstGeom prst="ellipse">
+            <a:avLst/>
+          </a:prstGeom>
+          <a:solidFill>
+            <a:srgbClr val="FFFFFF"/>
+          </a:solidFill>
+          <a:ln w="12700">
+            <a:solidFill>
+              <a:srgbClr val="16A34A"/>
+            </a:solidFill>
+          </a:ln>
+          <a:effectLst/>
+        </p:spPr>
+        <p:style>
+          <a:lnRef idx="1">
+            <a:schemeClr val="accent1"/>
+          </a:lnRef>
+          <a:fillRef idx="3">
+            <a:schemeClr val="accent1"/>
+          </a:fillRef>
+          <a:effectRef idx="2">
+            <a:schemeClr val="accent1"/>
+          </a:effectRef>
+          <a:fontRef idx="minor">
+            <a:schemeClr val="lt1"/>
+          </a:fontRef>
+        </p:style>
+        <p:txBody>
+          <a:bodyPr rtlCol="0" anchor="ctr"/>
+          <a:lstStyle/>
+          <a:p/>
+        </p:txBody>
+      </p:sp>
+      <p:sp>
+        <p:nvSpPr>
+          <p:cNvPr id="177" name="row:Device Memory TCP RX:release:6.12"/>
+          <p:cNvSpPr/>
+          <p:nvPr/>
+        </p:nvSpPr>
+        <p:spPr>
+          <a:xfrm>
+            <a:off x="12611177" y="3881056"/>
+            <a:ext cx="86868" cy="86868"/>
+          </a:xfrm>
+          <a:prstGeom prst="ellipse">
+            <a:avLst/>
+          </a:prstGeom>
+          <a:solidFill>
+            <a:srgbClr val="16A34A"/>
+          </a:solidFill>
+          <a:ln w="12700">
+            <a:solidFill>
+              <a:srgbClr val="16A34A"/>
+            </a:solidFill>
+          </a:ln>
+          <a:effectLst/>
+        </p:spPr>
+        <p:style>
+          <a:lnRef idx="1">
+            <a:schemeClr val="accent1"/>
+          </a:lnRef>
+          <a:fillRef idx="3">
+            <a:schemeClr val="accent1"/>
+          </a:fillRef>
+          <a:effectRef idx="2">
+            <a:schemeClr val="accent1"/>
+          </a:effectRef>
+          <a:fontRef idx="minor">
+            <a:schemeClr val="lt1"/>
+          </a:fontRef>
+        </p:style>
+        <p:txBody>
+          <a:bodyPr rtlCol="0" anchor="ctr"/>
+          <a:lstStyle/>
+          <a:p/>
+        </p:txBody>
+      </p:sp>
+      <p:sp>
+        <p:nvSpPr>
+          <p:cNvPr id="178" name="row:Device Memory TCP RX:label"/>
+          <p:cNvSpPr txBox="1"/>
+          <p:nvPr/>
+        </p:nvSpPr>
+        <p:spPr>
+          <a:xfrm>
+            <a:off x="12727763" y="3814762"/>
+            <a:ext cx="731520" cy="219456"/>
+          </a:xfrm>
+          <a:prstGeom prst="rect">
+            <a:avLst/>
+          </a:prstGeom>
+          <a:noFill/>
+        </p:spPr>
+        <p:txBody>
+          <a:bodyPr wrap="square" anchor="ctr" lIns="0" rIns="0" tIns="0" bIns="0">
+            <a:noAutofit/>
+          </a:bodyPr>
+          <a:lstStyle/>
+          <a:p>
+            <a:pPr algn="l"/>
+            <a:r>
+              <a:rPr sz="800" b="1" i="0">
+                <a:solidFill>
+                  <a:srgbClr val="1F2937"/>
+                </a:solidFill>
+              </a:rPr>
+              <a:t>6.12</a:t>
+            </a:r>
+          </a:p>
+        </p:txBody>
+      </p:sp>
+      <p:sp>
+        <p:nvSpPr>
+          <p:cNvPr id="179" name="row:Device Memory TCP TX:name"/>
+          <p:cNvSpPr txBox="1"/>
+          <p:nvPr/>
+        </p:nvSpPr>
+        <p:spPr>
+          <a:xfrm>
+            <a:off x="1325880" y="3924109"/>
+            <a:ext cx="1572768" cy="219456"/>
+          </a:xfrm>
+          <a:prstGeom prst="rect">
+            <a:avLst/>
+          </a:prstGeom>
+          <a:noFill/>
+        </p:spPr>
+        <p:txBody>
+          <a:bodyPr wrap="square" anchor="ctr" lIns="0" rIns="0" tIns="0" bIns="0">
+            <a:noAutofit/>
+          </a:bodyPr>
+          <a:lstStyle/>
+          <a:p>
+            <a:pPr algn="r"/>
+            <a:r>
+              <a:rPr sz="850" b="0" i="0">
+                <a:solidFill>
+                  <a:srgbClr val="1F2937"/>
+                </a:solidFill>
+              </a:rPr>
+              <a:t>Device Memory TCP TX</a:t>
+            </a:r>
+          </a:p>
+        </p:txBody>
+      </p:sp>
+      <p:cxnSp>
+        <p:nvCxnSpPr>
+          <p:cNvPr id="180" name="row:Device Memory TCP TX:development"/>
+          <p:cNvCxnSpPr/>
+          <p:nvPr/>
+        </p:nvCxnSpPr>
+        <p:spPr>
+          <a:xfrm>
+            <a:off x="12030475" y="4033837"/>
+            <a:ext cx="1101785" cy="0"/>
+          </a:xfrm>
+          <a:prstGeom prst="line">
+            <a:avLst/>
+          </a:prstGeom>
+          <a:ln w="12700">
+            <a:solidFill>
+              <a:srgbClr val="16A34A"/>
+            </a:solidFill>
+            <a:prstDash val="dash"/>
+          </a:ln>
+        </p:spPr>
+        <p:style>
+          <a:lnRef idx="2">
+            <a:schemeClr val="accent1"/>
+          </a:lnRef>
+          <a:fillRef idx="0">
+            <a:schemeClr val="accent1"/>
+          </a:fillRef>
+          <a:effectRef idx="1">
+            <a:schemeClr val="accent1"/>
+          </a:effectRef>
+          <a:fontRef idx="minor">
+            <a:schemeClr val="tx1"/>
+          </a:fontRef>
+        </p:style>
+      </p:cxnSp>
+      <p:sp>
+        <p:nvSpPr>
+          <p:cNvPr id="181" name="row:Device Memory TCP TX:start"/>
+          <p:cNvSpPr/>
+          <p:nvPr/>
+        </p:nvSpPr>
+        <p:spPr>
+          <a:xfrm>
+            <a:off x="11998471" y="4001833"/>
+            <a:ext cx="64008" cy="64008"/>
+          </a:xfrm>
+          <a:prstGeom prst="ellipse">
+            <a:avLst/>
+          </a:prstGeom>
+          <a:solidFill>
+            <a:srgbClr val="FFFFFF"/>
+          </a:solidFill>
+          <a:ln w="12700">
+            <a:solidFill>
+              <a:srgbClr val="16A34A"/>
+            </a:solidFill>
+          </a:ln>
+          <a:effectLst/>
+        </p:spPr>
+        <p:style>
+          <a:lnRef idx="1">
+            <a:schemeClr val="accent1"/>
+          </a:lnRef>
+          <a:fillRef idx="3">
+            <a:schemeClr val="accent1"/>
+          </a:fillRef>
+          <a:effectRef idx="2">
+            <a:schemeClr val="accent1"/>
+          </a:effectRef>
+          <a:fontRef idx="minor">
+            <a:schemeClr val="lt1"/>
+          </a:fontRef>
+        </p:style>
+        <p:txBody>
+          <a:bodyPr rtlCol="0" anchor="ctr"/>
+          <a:lstStyle/>
+          <a:p/>
+        </p:txBody>
+      </p:sp>
+      <p:sp>
+        <p:nvSpPr>
+          <p:cNvPr id="182" name="row:Device Memory TCP TX:release:6.16"/>
+          <p:cNvSpPr/>
+          <p:nvPr/>
+        </p:nvSpPr>
+        <p:spPr>
+          <a:xfrm>
+            <a:off x="13088826" y="3990403"/>
+            <a:ext cx="86868" cy="86868"/>
+          </a:xfrm>
+          <a:prstGeom prst="ellipse">
+            <a:avLst/>
+          </a:prstGeom>
+          <a:solidFill>
+            <a:srgbClr val="16A34A"/>
+          </a:solidFill>
+          <a:ln w="12700">
+            <a:solidFill>
+              <a:srgbClr val="16A34A"/>
+            </a:solidFill>
+          </a:ln>
+          <a:effectLst/>
+        </p:spPr>
+        <p:style>
+          <a:lnRef idx="1">
+            <a:schemeClr val="accent1"/>
+          </a:lnRef>
+          <a:fillRef idx="3">
+            <a:schemeClr val="accent1"/>
+          </a:fillRef>
+          <a:effectRef idx="2">
+            <a:schemeClr val="accent1"/>
+          </a:effectRef>
+          <a:fontRef idx="minor">
+            <a:schemeClr val="lt1"/>
+          </a:fontRef>
+        </p:style>
+        <p:txBody>
+          <a:bodyPr rtlCol="0" anchor="ctr"/>
+          <a:lstStyle/>
+          <a:p/>
+        </p:txBody>
+      </p:sp>
+      <p:sp>
+        <p:nvSpPr>
+          <p:cNvPr id="183" name="row:Device Memory TCP TX:label"/>
+          <p:cNvSpPr txBox="1"/>
+          <p:nvPr/>
+        </p:nvSpPr>
+        <p:spPr>
+          <a:xfrm>
+            <a:off x="13205412" y="3924109"/>
+            <a:ext cx="731520" cy="219456"/>
+          </a:xfrm>
+          <a:prstGeom prst="rect">
+            <a:avLst/>
+          </a:prstGeom>
+          <a:noFill/>
+        </p:spPr>
+        <p:txBody>
+          <a:bodyPr wrap="square" anchor="ctr" lIns="0" rIns="0" tIns="0" bIns="0">
+            <a:noAutofit/>
+          </a:bodyPr>
+          <a:lstStyle/>
+          <a:p>
+            <a:pPr algn="l"/>
+            <a:r>
+              <a:rPr sz="800" b="1" i="0">
+                <a:solidFill>
+                  <a:srgbClr val="1F2937"/>
+                </a:solidFill>
+              </a:rPr>
+              <a:t>6.16</a:t>
+            </a:r>
+          </a:p>
+        </p:txBody>
+      </p:sp>
+      <p:sp>
+        <p:nvSpPr>
+          <p:cNvPr id="184" name="row:io_uring ZCRX:name"/>
+          <p:cNvSpPr txBox="1"/>
+          <p:nvPr/>
+        </p:nvSpPr>
+        <p:spPr>
+          <a:xfrm>
+            <a:off x="1325880" y="4033456"/>
+            <a:ext cx="1572768" cy="219456"/>
+          </a:xfrm>
+          <a:prstGeom prst="rect">
+            <a:avLst/>
+          </a:prstGeom>
+          <a:noFill/>
+        </p:spPr>
+        <p:txBody>
+          <a:bodyPr wrap="square" anchor="ctr" lIns="0" rIns="0" tIns="0" bIns="0">
+            <a:noAutofit/>
+          </a:bodyPr>
+          <a:lstStyle/>
+          <a:p>
+            <a:pPr algn="r"/>
+            <a:r>
+              <a:rPr sz="850" b="0" i="0">
+                <a:solidFill>
+                  <a:srgbClr val="1F2937"/>
+                </a:solidFill>
+              </a:rPr>
+              <a:t>io_uring ZCRX</a:t>
+            </a:r>
+          </a:p>
+        </p:txBody>
+      </p:sp>
+      <p:cxnSp>
+        <p:nvCxnSpPr>
+          <p:cNvPr id="185" name="row:io_uring ZCRX:development"/>
+          <p:cNvCxnSpPr/>
+          <p:nvPr/>
+        </p:nvCxnSpPr>
+        <p:spPr>
+          <a:xfrm>
+            <a:off x="11613851" y="4143184"/>
+            <a:ext cx="1398640" cy="0"/>
+          </a:xfrm>
+          <a:prstGeom prst="line">
+            <a:avLst/>
+          </a:prstGeom>
+          <a:ln w="12700">
+            <a:solidFill>
+              <a:srgbClr val="16A34A"/>
+            </a:solidFill>
+            <a:prstDash val="dash"/>
+          </a:ln>
+        </p:spPr>
+        <p:style>
+          <a:lnRef idx="2">
+            <a:schemeClr val="accent1"/>
+          </a:lnRef>
+          <a:fillRef idx="0">
+            <a:schemeClr val="accent1"/>
+          </a:fillRef>
+          <a:effectRef idx="1">
+            <a:schemeClr val="accent1"/>
+          </a:effectRef>
+          <a:fontRef idx="minor">
+            <a:schemeClr val="tx1"/>
+          </a:fontRef>
+        </p:style>
+      </p:cxnSp>
+      <p:sp>
+        <p:nvSpPr>
+          <p:cNvPr id="186" name="row:io_uring ZCRX:start"/>
+          <p:cNvSpPr/>
+          <p:nvPr/>
+        </p:nvSpPr>
+        <p:spPr>
+          <a:xfrm>
+            <a:off x="11581847" y="4111180"/>
+            <a:ext cx="64008" cy="64008"/>
+          </a:xfrm>
+          <a:prstGeom prst="ellipse">
+            <a:avLst/>
+          </a:prstGeom>
+          <a:solidFill>
+            <a:srgbClr val="FFFFFF"/>
+          </a:solidFill>
+          <a:ln w="12700">
+            <a:solidFill>
+              <a:srgbClr val="16A34A"/>
+            </a:solidFill>
+          </a:ln>
+          <a:effectLst/>
+        </p:spPr>
+        <p:style>
+          <a:lnRef idx="1">
+            <a:schemeClr val="accent1"/>
+          </a:lnRef>
+          <a:fillRef idx="3">
+            <a:schemeClr val="accent1"/>
+          </a:fillRef>
+          <a:effectRef idx="2">
+            <a:schemeClr val="accent1"/>
+          </a:effectRef>
+          <a:fontRef idx="minor">
+            <a:schemeClr val="lt1"/>
+          </a:fontRef>
+        </p:style>
+        <p:txBody>
+          <a:bodyPr rtlCol="0" anchor="ctr"/>
+          <a:lstStyle/>
+          <a:p/>
+        </p:txBody>
+      </p:sp>
+      <p:sp>
+        <p:nvSpPr>
+          <p:cNvPr id="187" name="row:io_uring ZCRX:release:6.15"/>
+          <p:cNvSpPr/>
+          <p:nvPr/>
+        </p:nvSpPr>
+        <p:spPr>
+          <a:xfrm>
+            <a:off x="12969057" y="4099750"/>
+            <a:ext cx="86868" cy="86868"/>
+          </a:xfrm>
+          <a:prstGeom prst="ellipse">
+            <a:avLst/>
+          </a:prstGeom>
+          <a:solidFill>
+            <a:srgbClr val="16A34A"/>
+          </a:solidFill>
+          <a:ln w="12700">
+            <a:solidFill>
+              <a:srgbClr val="16A34A"/>
+            </a:solidFill>
+          </a:ln>
+          <a:effectLst/>
+        </p:spPr>
+        <p:style>
+          <a:lnRef idx="1">
+            <a:schemeClr val="accent1"/>
+          </a:lnRef>
+          <a:fillRef idx="3">
+            <a:schemeClr val="accent1"/>
+          </a:fillRef>
+          <a:effectRef idx="2">
+            <a:schemeClr val="accent1"/>
+          </a:effectRef>
+          <a:fontRef idx="minor">
+            <a:schemeClr val="lt1"/>
+          </a:fontRef>
+        </p:style>
+        <p:txBody>
+          <a:bodyPr rtlCol="0" anchor="ctr"/>
+          <a:lstStyle/>
+          <a:p/>
+        </p:txBody>
+      </p:sp>
+      <p:sp>
+        <p:nvSpPr>
+          <p:cNvPr id="188" name="row:io_uring ZCRX:label"/>
+          <p:cNvSpPr txBox="1"/>
+          <p:nvPr/>
+        </p:nvSpPr>
+        <p:spPr>
+          <a:xfrm>
+            <a:off x="13085643" y="4033456"/>
+            <a:ext cx="731520" cy="219456"/>
+          </a:xfrm>
+          <a:prstGeom prst="rect">
+            <a:avLst/>
+          </a:prstGeom>
+          <a:noFill/>
+        </p:spPr>
+        <p:txBody>
+          <a:bodyPr wrap="square" anchor="ctr" lIns="0" rIns="0" tIns="0" bIns="0">
+            <a:noAutofit/>
+          </a:bodyPr>
+          <a:lstStyle/>
+          <a:p>
+            <a:pPr algn="l"/>
+            <a:r>
+              <a:rPr sz="800" b="1" i="0">
+                <a:solidFill>
+                  <a:srgbClr val="1F2937"/>
+                </a:solidFill>
+              </a:rPr>
+              <a:t>6.15</a:t>
+            </a:r>
+          </a:p>
+        </p:txBody>
+      </p:sp>
+      <p:sp>
+        <p:nvSpPr>
+          <p:cNvPr id="189" name="row:large RX buffers (mem. providers):name"/>
+          <p:cNvSpPr txBox="1"/>
+          <p:nvPr/>
+        </p:nvSpPr>
+        <p:spPr>
+          <a:xfrm>
+            <a:off x="1325880" y="4142803"/>
+            <a:ext cx="1572768" cy="219456"/>
+          </a:xfrm>
+          <a:prstGeom prst="rect">
+            <a:avLst/>
+          </a:prstGeom>
+          <a:noFill/>
+        </p:spPr>
+        <p:txBody>
+          <a:bodyPr wrap="square" anchor="ctr" lIns="0" rIns="0" tIns="0" bIns="0">
+            <a:noAutofit/>
+          </a:bodyPr>
+          <a:lstStyle/>
+          <a:p>
+            <a:pPr algn="r"/>
+            <a:r>
+              <a:rPr sz="850" b="0" i="0">
+                <a:solidFill>
+                  <a:srgbClr val="1F2937"/>
+                </a:solidFill>
+              </a:rPr>
+              <a:t>large RX buffers (mem. providers)</a:t>
+            </a:r>
+          </a:p>
+        </p:txBody>
+      </p:sp>
+      <p:cxnSp>
+        <p:nvCxnSpPr>
+          <p:cNvPr id="190" name="row:large RX buffers (mem. providers):development"/>
+          <p:cNvCxnSpPr/>
+          <p:nvPr/>
+        </p:nvCxnSpPr>
+        <p:spPr>
+          <a:xfrm>
+            <a:off x="12724847" y="4252531"/>
+            <a:ext cx="900270" cy="0"/>
+          </a:xfrm>
+          <a:prstGeom prst="line">
+            <a:avLst/>
+          </a:prstGeom>
+          <a:ln w="12700">
+            <a:solidFill>
+              <a:srgbClr val="16A34A"/>
+            </a:solidFill>
+            <a:prstDash val="dash"/>
+          </a:ln>
+        </p:spPr>
+        <p:style>
+          <a:lnRef idx="2">
+            <a:schemeClr val="accent1"/>
+          </a:lnRef>
+          <a:fillRef idx="0">
+            <a:schemeClr val="accent1"/>
+          </a:fillRef>
+          <a:effectRef idx="1">
+            <a:schemeClr val="accent1"/>
+          </a:effectRef>
+          <a:fontRef idx="minor">
+            <a:schemeClr val="tx1"/>
+          </a:fontRef>
+        </p:style>
+      </p:cxnSp>
+      <p:sp>
+        <p:nvSpPr>
+          <p:cNvPr id="191" name="row:large RX buffers (mem. providers):start"/>
+          <p:cNvSpPr/>
+          <p:nvPr/>
+        </p:nvSpPr>
+        <p:spPr>
+          <a:xfrm>
+            <a:off x="12692843" y="4220527"/>
+            <a:ext cx="64008" cy="64008"/>
+          </a:xfrm>
+          <a:prstGeom prst="ellipse">
+            <a:avLst/>
+          </a:prstGeom>
+          <a:solidFill>
+            <a:srgbClr val="FFFFFF"/>
+          </a:solidFill>
+          <a:ln w="12700">
+            <a:solidFill>
+              <a:srgbClr val="16A34A"/>
+            </a:solidFill>
+          </a:ln>
+          <a:effectLst/>
+        </p:spPr>
+        <p:style>
+          <a:lnRef idx="1">
+            <a:schemeClr val="accent1"/>
+          </a:lnRef>
+          <a:fillRef idx="3">
+            <a:schemeClr val="accent1"/>
+          </a:fillRef>
+          <a:effectRef idx="2">
+            <a:schemeClr val="accent1"/>
+          </a:effectRef>
+          <a:fontRef idx="minor">
+            <a:schemeClr val="lt1"/>
+          </a:fontRef>
+        </p:style>
+        <p:txBody>
+          <a:bodyPr rtlCol="0" anchor="ctr"/>
+          <a:lstStyle/>
+          <a:p/>
+        </p:txBody>
+      </p:sp>
+      <p:sp>
+        <p:nvSpPr>
+          <p:cNvPr id="192" name="row:large RX buffers (mem. providers):release:7.0"/>
+          <p:cNvSpPr/>
+          <p:nvPr/>
+        </p:nvSpPr>
+        <p:spPr>
+          <a:xfrm>
+            <a:off x="13581683" y="4209097"/>
+            <a:ext cx="86868" cy="86868"/>
+          </a:xfrm>
+          <a:prstGeom prst="ellipse">
+            <a:avLst/>
+          </a:prstGeom>
+          <a:solidFill>
+            <a:srgbClr val="16A34A"/>
+          </a:solidFill>
+          <a:ln w="12700">
+            <a:solidFill>
+              <a:srgbClr val="16A34A"/>
+            </a:solidFill>
+          </a:ln>
+          <a:effectLst/>
+        </p:spPr>
+        <p:style>
+          <a:lnRef idx="1">
+            <a:schemeClr val="accent1"/>
+          </a:lnRef>
+          <a:fillRef idx="3">
+            <a:schemeClr val="accent1"/>
+          </a:fillRef>
+          <a:effectRef idx="2">
+            <a:schemeClr val="accent1"/>
+          </a:effectRef>
+          <a:fontRef idx="minor">
+            <a:schemeClr val="lt1"/>
+          </a:fontRef>
+        </p:style>
+        <p:txBody>
+          <a:bodyPr rtlCol="0" anchor="ctr"/>
+          <a:lstStyle/>
+          <a:p/>
+        </p:txBody>
+      </p:sp>
+      <p:sp>
+        <p:nvSpPr>
+          <p:cNvPr id="193" name="row:large RX buffers (mem. providers):label"/>
+          <p:cNvSpPr txBox="1"/>
+          <p:nvPr/>
+        </p:nvSpPr>
+        <p:spPr>
+          <a:xfrm>
+            <a:off x="13698269" y="4142803"/>
+            <a:ext cx="731520" cy="219456"/>
+          </a:xfrm>
+          <a:prstGeom prst="rect">
+            <a:avLst/>
+          </a:prstGeom>
+          <a:noFill/>
+        </p:spPr>
+        <p:txBody>
+          <a:bodyPr wrap="square" anchor="ctr" lIns="0" rIns="0" tIns="0" bIns="0">
+            <a:noAutofit/>
+          </a:bodyPr>
+          <a:lstStyle/>
+          <a:p>
+            <a:pPr algn="l"/>
+            <a:r>
+              <a:rPr sz="800" b="1" i="0">
+                <a:solidFill>
+                  <a:srgbClr val="1F2937"/>
+                </a:solidFill>
+              </a:rPr>
+              <a:t>7.0</a:t>
+            </a:r>
+          </a:p>
+        </p:txBody>
+      </p:sp>
+      <p:sp>
+        <p:nvSpPr>
+          <p:cNvPr id="194" name="row:AF_XDP:name"/>
+          <p:cNvSpPr txBox="1"/>
+          <p:nvPr/>
+        </p:nvSpPr>
+        <p:spPr>
+          <a:xfrm>
+            <a:off x="1325880" y="4252150"/>
             <a:ext cx="1572768" cy="219456"/>
           </a:xfrm>
           <a:prstGeom prst="rect">
@@ -9735,13 +10834,13 @@
       </p:sp>
       <p:cxnSp>
         <p:nvCxnSpPr>
-          <p:cNvPr id="166" name="row:AF_XDP:development"/>
+          <p:cNvPr id="195" name="row:AF_XDP:development"/>
           <p:cNvCxnSpPr/>
           <p:nvPr/>
         </p:nvCxnSpPr>
         <p:spPr>
           <a:xfrm>
-            <a:off x="7169867" y="3924490"/>
+            <a:off x="7169867" y="4361878"/>
             <a:ext cx="1132203" cy="0"/>
           </a:xfrm>
           <a:prstGeom prst="line">
@@ -9771,13 +10870,13 @@
       </p:cxnSp>
       <p:sp>
         <p:nvSpPr>
-          <p:cNvPr id="167" name="row:AF_XDP:start"/>
+          <p:cNvPr id="196" name="row:AF_XDP:start"/>
           <p:cNvSpPr/>
           <p:nvPr/>
         </p:nvSpPr>
         <p:spPr>
           <a:xfrm>
-            <a:off x="7137863" y="3892486"/>
+            <a:off x="7137863" y="4329874"/>
             <a:ext cx="64008" cy="64008"/>
           </a:xfrm>
           <a:prstGeom prst="ellipse">
@@ -9815,13 +10914,13 @@
       </p:sp>
       <p:sp>
         <p:nvSpPr>
-          <p:cNvPr id="168" name="row:AF_XDP:release:4.18"/>
+          <p:cNvPr id="197" name="row:AF_XDP:release:4.18"/>
           <p:cNvSpPr/>
           <p:nvPr/>
         </p:nvSpPr>
         <p:spPr>
           <a:xfrm>
-            <a:off x="8258636" y="3881056"/>
+            <a:off x="8258636" y="4318444"/>
             <a:ext cx="86868" cy="86868"/>
           </a:xfrm>
           <a:prstGeom prst="ellipse">
@@ -9859,13 +10958,13 @@
       </p:sp>
       <p:sp>
         <p:nvSpPr>
-          <p:cNvPr id="169" name="row:AF_XDP:label"/>
+          <p:cNvPr id="198" name="row:AF_XDP:label"/>
           <p:cNvSpPr txBox="1"/>
           <p:nvPr/>
         </p:nvSpPr>
         <p:spPr>
           <a:xfrm>
-            <a:off x="8375222" y="3814762"/>
+            <a:off x="8375222" y="4252150"/>
             <a:ext cx="731520" cy="219456"/>
           </a:xfrm>
           <a:prstGeom prst="rect">
@@ -9893,13 +10992,13 @@
       </p:sp>
       <p:sp>
         <p:nvSpPr>
-          <p:cNvPr id="170" name="row:XDP multi-buffer:name"/>
+          <p:cNvPr id="199" name="row:XDP multi-buffer:name"/>
           <p:cNvSpPr txBox="1"/>
           <p:nvPr/>
         </p:nvSpPr>
         <p:spPr>
           <a:xfrm>
-            <a:off x="1325880" y="3924109"/>
+            <a:off x="1325880" y="4361497"/>
             <a:ext cx="1572768" cy="219456"/>
           </a:xfrm>
           <a:prstGeom prst="rect">
@@ -9927,13 +11026,13 @@
       </p:sp>
       <p:cxnSp>
         <p:nvCxnSpPr>
-          <p:cNvPr id="171" name="row:XDP multi-buffer:development"/>
+          <p:cNvPr id="200" name="row:XDP multi-buffer:development"/>
           <p:cNvCxnSpPr/>
           <p:nvPr/>
         </p:nvCxnSpPr>
         <p:spPr>
           <a:xfrm>
-            <a:off x="9947357" y="4033837"/>
+            <a:off x="9947357" y="4471225"/>
             <a:ext cx="976313" cy="0"/>
           </a:xfrm>
           <a:prstGeom prst="line">
@@ -9963,13 +11062,13 @@
       </p:cxnSp>
       <p:sp>
         <p:nvSpPr>
-          <p:cNvPr id="172" name="row:XDP multi-buffer:start"/>
+          <p:cNvPr id="201" name="row:XDP multi-buffer:start"/>
           <p:cNvSpPr/>
           <p:nvPr/>
         </p:nvSpPr>
         <p:spPr>
           <a:xfrm>
-            <a:off x="9915353" y="4001833"/>
+            <a:off x="9915353" y="4439221"/>
             <a:ext cx="64008" cy="64008"/>
           </a:xfrm>
           <a:prstGeom prst="ellipse">
@@ -10007,13 +11106,13 @@
       </p:sp>
       <p:sp>
         <p:nvSpPr>
-          <p:cNvPr id="173" name="row:XDP multi-buffer:release:5.18"/>
+          <p:cNvPr id="202" name="row:XDP multi-buffer:release:5.18"/>
           <p:cNvSpPr/>
           <p:nvPr/>
         </p:nvSpPr>
         <p:spPr>
           <a:xfrm>
-            <a:off x="10880236" y="3990403"/>
+            <a:off x="10880236" y="4427791"/>
             <a:ext cx="86868" cy="86868"/>
           </a:xfrm>
           <a:prstGeom prst="ellipse">
@@ -10051,13 +11150,13 @@
       </p:sp>
       <p:sp>
         <p:nvSpPr>
-          <p:cNvPr id="174" name="row:XDP multi-buffer:label"/>
+          <p:cNvPr id="203" name="row:XDP multi-buffer:label"/>
           <p:cNvSpPr txBox="1"/>
           <p:nvPr/>
         </p:nvSpPr>
         <p:spPr>
           <a:xfrm>
-            <a:off x="10996822" y="3924109"/>
+            <a:off x="10996822" y="4361497"/>
             <a:ext cx="731520" cy="219456"/>
           </a:xfrm>
           <a:prstGeom prst="rect">
@@ -10085,13 +11184,13 @@
       </p:sp>
       <p:sp>
         <p:nvSpPr>
-          <p:cNvPr id="175" name="row:AF_XDP multi-buffer:name"/>
+          <p:cNvPr id="204" name="row:AF_XDP multi-buffer:name"/>
           <p:cNvSpPr txBox="1"/>
           <p:nvPr/>
         </p:nvSpPr>
         <p:spPr>
           <a:xfrm>
-            <a:off x="1325880" y="4033456"/>
+            <a:off x="1325880" y="4470844"/>
             <a:ext cx="1572768" cy="219456"/>
           </a:xfrm>
           <a:prstGeom prst="rect">
@@ -10119,13 +11218,13 @@
       </p:sp>
       <p:cxnSp>
         <p:nvCxnSpPr>
-          <p:cNvPr id="176" name="row:AF_XDP multi-buffer:development"/>
+          <p:cNvPr id="205" name="row:AF_XDP multi-buffer:development"/>
           <p:cNvCxnSpPr/>
           <p:nvPr/>
         </p:nvCxnSpPr>
         <p:spPr>
           <a:xfrm>
-            <a:off x="10641730" y="4143184"/>
+            <a:off x="10641730" y="4580572"/>
             <a:ext cx="1282388" cy="0"/>
           </a:xfrm>
           <a:prstGeom prst="line">
@@ -10155,13 +11254,13 @@
       </p:cxnSp>
       <p:sp>
         <p:nvSpPr>
-          <p:cNvPr id="177" name="row:AF_XDP multi-buffer:start"/>
+          <p:cNvPr id="206" name="row:AF_XDP multi-buffer:start"/>
           <p:cNvSpPr/>
           <p:nvPr/>
         </p:nvSpPr>
         <p:spPr>
           <a:xfrm>
-            <a:off x="10609726" y="4111180"/>
+            <a:off x="10609726" y="4548568"/>
             <a:ext cx="64008" cy="64008"/>
           </a:xfrm>
           <a:prstGeom prst="ellipse">
@@ -10199,13 +11298,13 @@
       </p:sp>
       <p:sp>
         <p:nvSpPr>
-          <p:cNvPr id="178" name="row:AF_XDP multi-buffer:release:6.6"/>
+          <p:cNvPr id="207" name="row:AF_XDP multi-buffer:release:6.6"/>
           <p:cNvSpPr/>
           <p:nvPr/>
         </p:nvSpPr>
         <p:spPr>
           <a:xfrm>
-            <a:off x="11880684" y="4099750"/>
+            <a:off x="11880684" y="4537138"/>
             <a:ext cx="86868" cy="86868"/>
           </a:xfrm>
           <a:prstGeom prst="ellipse">
@@ -10243,13 +11342,13 @@
       </p:sp>
       <p:sp>
         <p:nvSpPr>
-          <p:cNvPr id="179" name="row:AF_XDP multi-buffer:label"/>
+          <p:cNvPr id="208" name="row:AF_XDP multi-buffer:label"/>
           <p:cNvSpPr txBox="1"/>
           <p:nvPr/>
         </p:nvSpPr>
         <p:spPr>
           <a:xfrm>
-            <a:off x="11997270" y="4033456"/>
+            <a:off x="11997270" y="4470844"/>
             <a:ext cx="731520" cy="219456"/>
           </a:xfrm>
           <a:prstGeom prst="rect">
@@ -10277,589 +11376,13 @@
       </p:sp>
       <p:sp>
         <p:nvSpPr>
-          <p:cNvPr id="180" name="row:Device Memory TCP RX:name"/>
+          <p:cNvPr id="209" name="row:RX HW queue leasing:name"/>
           <p:cNvSpPr txBox="1"/>
           <p:nvPr/>
         </p:nvSpPr>
         <p:spPr>
           <a:xfrm>
-            <a:off x="1325880" y="4142803"/>
-            <a:ext cx="1572768" cy="219456"/>
-          </a:xfrm>
-          <a:prstGeom prst="rect">
-            <a:avLst/>
-          </a:prstGeom>
-          <a:noFill/>
-        </p:spPr>
-        <p:txBody>
-          <a:bodyPr wrap="square" anchor="ctr" lIns="0" rIns="0" tIns="0" bIns="0">
-            <a:noAutofit/>
-          </a:bodyPr>
-          <a:lstStyle/>
-          <a:p>
-            <a:pPr algn="r"/>
-            <a:r>
-              <a:rPr sz="850" b="0" i="0">
-                <a:solidFill>
-                  <a:srgbClr val="1F2937"/>
-                </a:solidFill>
-              </a:rPr>
-              <a:t>Device Memory TCP RX</a:t>
-            </a:r>
-          </a:p>
-        </p:txBody>
-      </p:sp>
-      <p:cxnSp>
-        <p:nvCxnSpPr>
-          <p:cNvPr id="181" name="row:Device Memory TCP RX:development"/>
-          <p:cNvCxnSpPr/>
-          <p:nvPr/>
-        </p:nvCxnSpPr>
-        <p:spPr>
-          <a:xfrm>
-            <a:off x="11405539" y="4252531"/>
-            <a:ext cx="1249072" cy="0"/>
-          </a:xfrm>
-          <a:prstGeom prst="line">
-            <a:avLst/>
-          </a:prstGeom>
-          <a:ln w="12700">
-            <a:solidFill>
-              <a:srgbClr val="16A34A"/>
-            </a:solidFill>
-            <a:prstDash val="dash"/>
-          </a:ln>
-        </p:spPr>
-        <p:style>
-          <a:lnRef idx="2">
-            <a:schemeClr val="accent1"/>
-          </a:lnRef>
-          <a:fillRef idx="0">
-            <a:schemeClr val="accent1"/>
-          </a:fillRef>
-          <a:effectRef idx="1">
-            <a:schemeClr val="accent1"/>
-          </a:effectRef>
-          <a:fontRef idx="minor">
-            <a:schemeClr val="tx1"/>
-          </a:fontRef>
-        </p:style>
-      </p:cxnSp>
-      <p:sp>
-        <p:nvSpPr>
-          <p:cNvPr id="182" name="row:Device Memory TCP RX:start"/>
-          <p:cNvSpPr/>
-          <p:nvPr/>
-        </p:nvSpPr>
-        <p:spPr>
-          <a:xfrm>
-            <a:off x="11373535" y="4220527"/>
-            <a:ext cx="64008" cy="64008"/>
-          </a:xfrm>
-          <a:prstGeom prst="ellipse">
-            <a:avLst/>
-          </a:prstGeom>
-          <a:solidFill>
-            <a:srgbClr val="FFFFFF"/>
-          </a:solidFill>
-          <a:ln w="12700">
-            <a:solidFill>
-              <a:srgbClr val="16A34A"/>
-            </a:solidFill>
-          </a:ln>
-          <a:effectLst/>
-        </p:spPr>
-        <p:style>
-          <a:lnRef idx="1">
-            <a:schemeClr val="accent1"/>
-          </a:lnRef>
-          <a:fillRef idx="3">
-            <a:schemeClr val="accent1"/>
-          </a:fillRef>
-          <a:effectRef idx="2">
-            <a:schemeClr val="accent1"/>
-          </a:effectRef>
-          <a:fontRef idx="minor">
-            <a:schemeClr val="lt1"/>
-          </a:fontRef>
-        </p:style>
-        <p:txBody>
-          <a:bodyPr rtlCol="0" anchor="ctr"/>
-          <a:lstStyle/>
-          <a:p/>
-        </p:txBody>
-      </p:sp>
-      <p:sp>
-        <p:nvSpPr>
-          <p:cNvPr id="183" name="row:Device Memory TCP RX:release:6.12"/>
-          <p:cNvSpPr/>
-          <p:nvPr/>
-        </p:nvSpPr>
-        <p:spPr>
-          <a:xfrm>
-            <a:off x="12611177" y="4209097"/>
-            <a:ext cx="86868" cy="86868"/>
-          </a:xfrm>
-          <a:prstGeom prst="ellipse">
-            <a:avLst/>
-          </a:prstGeom>
-          <a:solidFill>
-            <a:srgbClr val="16A34A"/>
-          </a:solidFill>
-          <a:ln w="12700">
-            <a:solidFill>
-              <a:srgbClr val="16A34A"/>
-            </a:solidFill>
-          </a:ln>
-          <a:effectLst/>
-        </p:spPr>
-        <p:style>
-          <a:lnRef idx="1">
-            <a:schemeClr val="accent1"/>
-          </a:lnRef>
-          <a:fillRef idx="3">
-            <a:schemeClr val="accent1"/>
-          </a:fillRef>
-          <a:effectRef idx="2">
-            <a:schemeClr val="accent1"/>
-          </a:effectRef>
-          <a:fontRef idx="minor">
-            <a:schemeClr val="lt1"/>
-          </a:fontRef>
-        </p:style>
-        <p:txBody>
-          <a:bodyPr rtlCol="0" anchor="ctr"/>
-          <a:lstStyle/>
-          <a:p/>
-        </p:txBody>
-      </p:sp>
-      <p:sp>
-        <p:nvSpPr>
-          <p:cNvPr id="184" name="row:Device Memory TCP RX:label"/>
-          <p:cNvSpPr txBox="1"/>
-          <p:nvPr/>
-        </p:nvSpPr>
-        <p:spPr>
-          <a:xfrm>
-            <a:off x="12727763" y="4142803"/>
-            <a:ext cx="731520" cy="219456"/>
-          </a:xfrm>
-          <a:prstGeom prst="rect">
-            <a:avLst/>
-          </a:prstGeom>
-          <a:noFill/>
-        </p:spPr>
-        <p:txBody>
-          <a:bodyPr wrap="square" anchor="ctr" lIns="0" rIns="0" tIns="0" bIns="0">
-            <a:noAutofit/>
-          </a:bodyPr>
-          <a:lstStyle/>
-          <a:p>
-            <a:pPr algn="l"/>
-            <a:r>
-              <a:rPr sz="800" b="1" i="0">
-                <a:solidFill>
-                  <a:srgbClr val="1F2937"/>
-                </a:solidFill>
-              </a:rPr>
-              <a:t>6.12</a:t>
-            </a:r>
-          </a:p>
-        </p:txBody>
-      </p:sp>
-      <p:sp>
-        <p:nvSpPr>
-          <p:cNvPr id="185" name="row:io_uring ZCRX:name"/>
-          <p:cNvSpPr txBox="1"/>
-          <p:nvPr/>
-        </p:nvSpPr>
-        <p:spPr>
-          <a:xfrm>
-            <a:off x="1325880" y="4252150"/>
-            <a:ext cx="1572768" cy="219456"/>
-          </a:xfrm>
-          <a:prstGeom prst="rect">
-            <a:avLst/>
-          </a:prstGeom>
-          <a:noFill/>
-        </p:spPr>
-        <p:txBody>
-          <a:bodyPr wrap="square" anchor="ctr" lIns="0" rIns="0" tIns="0" bIns="0">
-            <a:noAutofit/>
-          </a:bodyPr>
-          <a:lstStyle/>
-          <a:p>
-            <a:pPr algn="r"/>
-            <a:r>
-              <a:rPr sz="850" b="0" i="0">
-                <a:solidFill>
-                  <a:srgbClr val="1F2937"/>
-                </a:solidFill>
-              </a:rPr>
-              <a:t>io_uring ZCRX</a:t>
-            </a:r>
-          </a:p>
-        </p:txBody>
-      </p:sp>
-      <p:cxnSp>
-        <p:nvCxnSpPr>
-          <p:cNvPr id="186" name="row:io_uring ZCRX:development"/>
-          <p:cNvCxnSpPr/>
-          <p:nvPr/>
-        </p:nvCxnSpPr>
-        <p:spPr>
-          <a:xfrm>
-            <a:off x="11613851" y="4361878"/>
-            <a:ext cx="1398640" cy="0"/>
-          </a:xfrm>
-          <a:prstGeom prst="line">
-            <a:avLst/>
-          </a:prstGeom>
-          <a:ln w="12700">
-            <a:solidFill>
-              <a:srgbClr val="16A34A"/>
-            </a:solidFill>
-            <a:prstDash val="dash"/>
-          </a:ln>
-        </p:spPr>
-        <p:style>
-          <a:lnRef idx="2">
-            <a:schemeClr val="accent1"/>
-          </a:lnRef>
-          <a:fillRef idx="0">
-            <a:schemeClr val="accent1"/>
-          </a:fillRef>
-          <a:effectRef idx="1">
-            <a:schemeClr val="accent1"/>
-          </a:effectRef>
-          <a:fontRef idx="minor">
-            <a:schemeClr val="tx1"/>
-          </a:fontRef>
-        </p:style>
-      </p:cxnSp>
-      <p:sp>
-        <p:nvSpPr>
-          <p:cNvPr id="187" name="row:io_uring ZCRX:start"/>
-          <p:cNvSpPr/>
-          <p:nvPr/>
-        </p:nvSpPr>
-        <p:spPr>
-          <a:xfrm>
-            <a:off x="11581847" y="4329874"/>
-            <a:ext cx="64008" cy="64008"/>
-          </a:xfrm>
-          <a:prstGeom prst="ellipse">
-            <a:avLst/>
-          </a:prstGeom>
-          <a:solidFill>
-            <a:srgbClr val="FFFFFF"/>
-          </a:solidFill>
-          <a:ln w="12700">
-            <a:solidFill>
-              <a:srgbClr val="16A34A"/>
-            </a:solidFill>
-          </a:ln>
-          <a:effectLst/>
-        </p:spPr>
-        <p:style>
-          <a:lnRef idx="1">
-            <a:schemeClr val="accent1"/>
-          </a:lnRef>
-          <a:fillRef idx="3">
-            <a:schemeClr val="accent1"/>
-          </a:fillRef>
-          <a:effectRef idx="2">
-            <a:schemeClr val="accent1"/>
-          </a:effectRef>
-          <a:fontRef idx="minor">
-            <a:schemeClr val="lt1"/>
-          </a:fontRef>
-        </p:style>
-        <p:txBody>
-          <a:bodyPr rtlCol="0" anchor="ctr"/>
-          <a:lstStyle/>
-          <a:p/>
-        </p:txBody>
-      </p:sp>
-      <p:sp>
-        <p:nvSpPr>
-          <p:cNvPr id="188" name="row:io_uring ZCRX:release:6.15"/>
-          <p:cNvSpPr/>
-          <p:nvPr/>
-        </p:nvSpPr>
-        <p:spPr>
-          <a:xfrm>
-            <a:off x="12969057" y="4318444"/>
-            <a:ext cx="86868" cy="86868"/>
-          </a:xfrm>
-          <a:prstGeom prst="ellipse">
-            <a:avLst/>
-          </a:prstGeom>
-          <a:solidFill>
-            <a:srgbClr val="16A34A"/>
-          </a:solidFill>
-          <a:ln w="12700">
-            <a:solidFill>
-              <a:srgbClr val="16A34A"/>
-            </a:solidFill>
-          </a:ln>
-          <a:effectLst/>
-        </p:spPr>
-        <p:style>
-          <a:lnRef idx="1">
-            <a:schemeClr val="accent1"/>
-          </a:lnRef>
-          <a:fillRef idx="3">
-            <a:schemeClr val="accent1"/>
-          </a:fillRef>
-          <a:effectRef idx="2">
-            <a:schemeClr val="accent1"/>
-          </a:effectRef>
-          <a:fontRef idx="minor">
-            <a:schemeClr val="lt1"/>
-          </a:fontRef>
-        </p:style>
-        <p:txBody>
-          <a:bodyPr rtlCol="0" anchor="ctr"/>
-          <a:lstStyle/>
-          <a:p/>
-        </p:txBody>
-      </p:sp>
-      <p:sp>
-        <p:nvSpPr>
-          <p:cNvPr id="189" name="row:io_uring ZCRX:label"/>
-          <p:cNvSpPr txBox="1"/>
-          <p:nvPr/>
-        </p:nvSpPr>
-        <p:spPr>
-          <a:xfrm>
-            <a:off x="13085643" y="4252150"/>
-            <a:ext cx="731520" cy="219456"/>
-          </a:xfrm>
-          <a:prstGeom prst="rect">
-            <a:avLst/>
-          </a:prstGeom>
-          <a:noFill/>
-        </p:spPr>
-        <p:txBody>
-          <a:bodyPr wrap="square" anchor="ctr" lIns="0" rIns="0" tIns="0" bIns="0">
-            <a:noAutofit/>
-          </a:bodyPr>
-          <a:lstStyle/>
-          <a:p>
-            <a:pPr algn="l"/>
-            <a:r>
-              <a:rPr sz="800" b="1" i="0">
-                <a:solidFill>
-                  <a:srgbClr val="1F2937"/>
-                </a:solidFill>
-              </a:rPr>
-              <a:t>6.15</a:t>
-            </a:r>
-          </a:p>
-        </p:txBody>
-      </p:sp>
-      <p:sp>
-        <p:nvSpPr>
-          <p:cNvPr id="190" name="row:Device Memory TCP TX:name"/>
-          <p:cNvSpPr txBox="1"/>
-          <p:nvPr/>
-        </p:nvSpPr>
-        <p:spPr>
-          <a:xfrm>
-            <a:off x="1325880" y="4361497"/>
-            <a:ext cx="1572768" cy="219456"/>
-          </a:xfrm>
-          <a:prstGeom prst="rect">
-            <a:avLst/>
-          </a:prstGeom>
-          <a:noFill/>
-        </p:spPr>
-        <p:txBody>
-          <a:bodyPr wrap="square" anchor="ctr" lIns="0" rIns="0" tIns="0" bIns="0">
-            <a:noAutofit/>
-          </a:bodyPr>
-          <a:lstStyle/>
-          <a:p>
-            <a:pPr algn="r"/>
-            <a:r>
-              <a:rPr sz="850" b="0" i="0">
-                <a:solidFill>
-                  <a:srgbClr val="1F2937"/>
-                </a:solidFill>
-              </a:rPr>
-              <a:t>Device Memory TCP TX</a:t>
-            </a:r>
-          </a:p>
-        </p:txBody>
-      </p:sp>
-      <p:cxnSp>
-        <p:nvCxnSpPr>
-          <p:cNvPr id="191" name="row:Device Memory TCP TX:development"/>
-          <p:cNvCxnSpPr/>
-          <p:nvPr/>
-        </p:nvCxnSpPr>
-        <p:spPr>
-          <a:xfrm>
-            <a:off x="12030475" y="4471225"/>
-            <a:ext cx="1101785" cy="0"/>
-          </a:xfrm>
-          <a:prstGeom prst="line">
-            <a:avLst/>
-          </a:prstGeom>
-          <a:ln w="12700">
-            <a:solidFill>
-              <a:srgbClr val="16A34A"/>
-            </a:solidFill>
-            <a:prstDash val="dash"/>
-          </a:ln>
-        </p:spPr>
-        <p:style>
-          <a:lnRef idx="2">
-            <a:schemeClr val="accent1"/>
-          </a:lnRef>
-          <a:fillRef idx="0">
-            <a:schemeClr val="accent1"/>
-          </a:fillRef>
-          <a:effectRef idx="1">
-            <a:schemeClr val="accent1"/>
-          </a:effectRef>
-          <a:fontRef idx="minor">
-            <a:schemeClr val="tx1"/>
-          </a:fontRef>
-        </p:style>
-      </p:cxnSp>
-      <p:sp>
-        <p:nvSpPr>
-          <p:cNvPr id="192" name="row:Device Memory TCP TX:start"/>
-          <p:cNvSpPr/>
-          <p:nvPr/>
-        </p:nvSpPr>
-        <p:spPr>
-          <a:xfrm>
-            <a:off x="11998471" y="4439221"/>
-            <a:ext cx="64008" cy="64008"/>
-          </a:xfrm>
-          <a:prstGeom prst="ellipse">
-            <a:avLst/>
-          </a:prstGeom>
-          <a:solidFill>
-            <a:srgbClr val="FFFFFF"/>
-          </a:solidFill>
-          <a:ln w="12700">
-            <a:solidFill>
-              <a:srgbClr val="16A34A"/>
-            </a:solidFill>
-          </a:ln>
-          <a:effectLst/>
-        </p:spPr>
-        <p:style>
-          <a:lnRef idx="1">
-            <a:schemeClr val="accent1"/>
-          </a:lnRef>
-          <a:fillRef idx="3">
-            <a:schemeClr val="accent1"/>
-          </a:fillRef>
-          <a:effectRef idx="2">
-            <a:schemeClr val="accent1"/>
-          </a:effectRef>
-          <a:fontRef idx="minor">
-            <a:schemeClr val="lt1"/>
-          </a:fontRef>
-        </p:style>
-        <p:txBody>
-          <a:bodyPr rtlCol="0" anchor="ctr"/>
-          <a:lstStyle/>
-          <a:p/>
-        </p:txBody>
-      </p:sp>
-      <p:sp>
-        <p:nvSpPr>
-          <p:cNvPr id="193" name="row:Device Memory TCP TX:release:6.16"/>
-          <p:cNvSpPr/>
-          <p:nvPr/>
-        </p:nvSpPr>
-        <p:spPr>
-          <a:xfrm>
-            <a:off x="13088826" y="4427791"/>
-            <a:ext cx="86868" cy="86868"/>
-          </a:xfrm>
-          <a:prstGeom prst="ellipse">
-            <a:avLst/>
-          </a:prstGeom>
-          <a:solidFill>
-            <a:srgbClr val="16A34A"/>
-          </a:solidFill>
-          <a:ln w="12700">
-            <a:solidFill>
-              <a:srgbClr val="16A34A"/>
-            </a:solidFill>
-          </a:ln>
-          <a:effectLst/>
-        </p:spPr>
-        <p:style>
-          <a:lnRef idx="1">
-            <a:schemeClr val="accent1"/>
-          </a:lnRef>
-          <a:fillRef idx="3">
-            <a:schemeClr val="accent1"/>
-          </a:fillRef>
-          <a:effectRef idx="2">
-            <a:schemeClr val="accent1"/>
-          </a:effectRef>
-          <a:fontRef idx="minor">
-            <a:schemeClr val="lt1"/>
-          </a:fontRef>
-        </p:style>
-        <p:txBody>
-          <a:bodyPr rtlCol="0" anchor="ctr"/>
-          <a:lstStyle/>
-          <a:p/>
-        </p:txBody>
-      </p:sp>
-      <p:sp>
-        <p:nvSpPr>
-          <p:cNvPr id="194" name="row:Device Memory TCP TX:label"/>
-          <p:cNvSpPr txBox="1"/>
-          <p:nvPr/>
-        </p:nvSpPr>
-        <p:spPr>
-          <a:xfrm>
-            <a:off x="13205412" y="4361497"/>
-            <a:ext cx="731520" cy="219456"/>
-          </a:xfrm>
-          <a:prstGeom prst="rect">
-            <a:avLst/>
-          </a:prstGeom>
-          <a:noFill/>
-        </p:spPr>
-        <p:txBody>
-          <a:bodyPr wrap="square" anchor="ctr" lIns="0" rIns="0" tIns="0" bIns="0">
-            <a:noAutofit/>
-          </a:bodyPr>
-          <a:lstStyle/>
-          <a:p>
-            <a:pPr algn="l"/>
-            <a:r>
-              <a:rPr sz="800" b="1" i="0">
-                <a:solidFill>
-                  <a:srgbClr val="1F2937"/>
-                </a:solidFill>
-              </a:rPr>
-              <a:t>6.16</a:t>
-            </a:r>
-          </a:p>
-        </p:txBody>
-      </p:sp>
-      <p:sp>
-        <p:nvSpPr>
-          <p:cNvPr id="195" name="row:RX HW queue leasing:name"/>
-          <p:cNvSpPr txBox="1"/>
-          <p:nvPr/>
-        </p:nvSpPr>
-        <p:spPr>
-          <a:xfrm>
-            <a:off x="1325880" y="4470844"/>
+            <a:off x="1325880" y="4580191"/>
             <a:ext cx="1572768" cy="219456"/>
           </a:xfrm>
           <a:prstGeom prst="rect">
@@ -10887,13 +11410,13 @@
       </p:sp>
       <p:cxnSp>
         <p:nvCxnSpPr>
-          <p:cNvPr id="196" name="row:RX HW queue leasing:development"/>
+          <p:cNvPr id="210" name="row:RX HW queue leasing:development"/>
           <p:cNvCxnSpPr/>
           <p:nvPr/>
         </p:nvCxnSpPr>
         <p:spPr>
           <a:xfrm>
-            <a:off x="12377661" y="4580572"/>
+            <a:off x="12377661" y="4689919"/>
             <a:ext cx="1367224" cy="0"/>
           </a:xfrm>
           <a:prstGeom prst="line">
@@ -10923,13 +11446,13 @@
       </p:cxnSp>
       <p:sp>
         <p:nvSpPr>
-          <p:cNvPr id="197" name="row:RX HW queue leasing:start"/>
+          <p:cNvPr id="211" name="row:RX HW queue leasing:start"/>
           <p:cNvSpPr/>
           <p:nvPr/>
         </p:nvSpPr>
         <p:spPr>
           <a:xfrm>
-            <a:off x="12345657" y="4548568"/>
+            <a:off x="12345657" y="4657915"/>
             <a:ext cx="64008" cy="64008"/>
           </a:xfrm>
           <a:prstGeom prst="ellipse">
@@ -10967,13 +11490,13 @@
       </p:sp>
       <p:sp>
         <p:nvSpPr>
-          <p:cNvPr id="198" name="row:RX HW queue leasing:release:7.1"/>
+          <p:cNvPr id="212" name="row:RX HW queue leasing:release:7.1"/>
           <p:cNvSpPr/>
           <p:nvPr/>
         </p:nvSpPr>
         <p:spPr>
           <a:xfrm>
-            <a:off x="13701451" y="4537138"/>
+            <a:off x="13701451" y="4646485"/>
             <a:ext cx="86868" cy="86868"/>
           </a:xfrm>
           <a:prstGeom prst="ellipse">
@@ -11011,13 +11534,13 @@
       </p:sp>
       <p:sp>
         <p:nvSpPr>
-          <p:cNvPr id="199" name="row:RX HW queue leasing:label"/>
+          <p:cNvPr id="213" name="row:RX HW queue leasing:label"/>
           <p:cNvSpPr txBox="1"/>
           <p:nvPr/>
         </p:nvSpPr>
         <p:spPr>
           <a:xfrm>
-            <a:off x="13818037" y="4470844"/>
+            <a:off x="13818037" y="4580191"/>
             <a:ext cx="731520" cy="219456"/>
           </a:xfrm>
           <a:prstGeom prst="rect">
@@ -11045,199 +11568,7 @@
       </p:sp>
       <p:sp>
         <p:nvSpPr>
-          <p:cNvPr id="200" name="row:large RX buffers (mem. providers):name"/>
-          <p:cNvSpPr txBox="1"/>
-          <p:nvPr/>
-        </p:nvSpPr>
-        <p:spPr>
-          <a:xfrm>
-            <a:off x="1325880" y="4580191"/>
-            <a:ext cx="1572768" cy="219456"/>
-          </a:xfrm>
-          <a:prstGeom prst="rect">
-            <a:avLst/>
-          </a:prstGeom>
-          <a:noFill/>
-        </p:spPr>
-        <p:txBody>
-          <a:bodyPr wrap="square" anchor="ctr" lIns="0" rIns="0" tIns="0" bIns="0">
-            <a:noAutofit/>
-          </a:bodyPr>
-          <a:lstStyle/>
-          <a:p>
-            <a:pPr algn="r"/>
-            <a:r>
-              <a:rPr sz="850" b="0" i="0">
-                <a:solidFill>
-                  <a:srgbClr val="1F2937"/>
-                </a:solidFill>
-              </a:rPr>
-              <a:t>large RX buffers (mem. providers)</a:t>
-            </a:r>
-          </a:p>
-        </p:txBody>
-      </p:sp>
-      <p:cxnSp>
-        <p:nvCxnSpPr>
-          <p:cNvPr id="201" name="row:large RX buffers (mem. providers):development"/>
-          <p:cNvCxnSpPr/>
-          <p:nvPr/>
-        </p:nvCxnSpPr>
-        <p:spPr>
-          <a:xfrm>
-            <a:off x="12724847" y="4689919"/>
-            <a:ext cx="900270" cy="0"/>
-          </a:xfrm>
-          <a:prstGeom prst="line">
-            <a:avLst/>
-          </a:prstGeom>
-          <a:ln w="12700">
-            <a:solidFill>
-              <a:srgbClr val="16A34A"/>
-            </a:solidFill>
-            <a:prstDash val="dash"/>
-          </a:ln>
-        </p:spPr>
-        <p:style>
-          <a:lnRef idx="2">
-            <a:schemeClr val="accent1"/>
-          </a:lnRef>
-          <a:fillRef idx="0">
-            <a:schemeClr val="accent1"/>
-          </a:fillRef>
-          <a:effectRef idx="1">
-            <a:schemeClr val="accent1"/>
-          </a:effectRef>
-          <a:fontRef idx="minor">
-            <a:schemeClr val="tx1"/>
-          </a:fontRef>
-        </p:style>
-      </p:cxnSp>
-      <p:sp>
-        <p:nvSpPr>
-          <p:cNvPr id="202" name="row:large RX buffers (mem. providers):start"/>
-          <p:cNvSpPr/>
-          <p:nvPr/>
-        </p:nvSpPr>
-        <p:spPr>
-          <a:xfrm>
-            <a:off x="12692843" y="4657915"/>
-            <a:ext cx="64008" cy="64008"/>
-          </a:xfrm>
-          <a:prstGeom prst="ellipse">
-            <a:avLst/>
-          </a:prstGeom>
-          <a:solidFill>
-            <a:srgbClr val="FFFFFF"/>
-          </a:solidFill>
-          <a:ln w="12700">
-            <a:solidFill>
-              <a:srgbClr val="16A34A"/>
-            </a:solidFill>
-          </a:ln>
-          <a:effectLst/>
-        </p:spPr>
-        <p:style>
-          <a:lnRef idx="1">
-            <a:schemeClr val="accent1"/>
-          </a:lnRef>
-          <a:fillRef idx="3">
-            <a:schemeClr val="accent1"/>
-          </a:fillRef>
-          <a:effectRef idx="2">
-            <a:schemeClr val="accent1"/>
-          </a:effectRef>
-          <a:fontRef idx="minor">
-            <a:schemeClr val="lt1"/>
-          </a:fontRef>
-        </p:style>
-        <p:txBody>
-          <a:bodyPr rtlCol="0" anchor="ctr"/>
-          <a:lstStyle/>
-          <a:p/>
-        </p:txBody>
-      </p:sp>
-      <p:sp>
-        <p:nvSpPr>
-          <p:cNvPr id="203" name="row:large RX buffers (mem. providers):release:7.0"/>
-          <p:cNvSpPr/>
-          <p:nvPr/>
-        </p:nvSpPr>
-        <p:spPr>
-          <a:xfrm>
-            <a:off x="13581683" y="4646485"/>
-            <a:ext cx="86868" cy="86868"/>
-          </a:xfrm>
-          <a:prstGeom prst="ellipse">
-            <a:avLst/>
-          </a:prstGeom>
-          <a:solidFill>
-            <a:srgbClr val="16A34A"/>
-          </a:solidFill>
-          <a:ln w="12700">
-            <a:solidFill>
-              <a:srgbClr val="16A34A"/>
-            </a:solidFill>
-          </a:ln>
-          <a:effectLst/>
-        </p:spPr>
-        <p:style>
-          <a:lnRef idx="1">
-            <a:schemeClr val="accent1"/>
-          </a:lnRef>
-          <a:fillRef idx="3">
-            <a:schemeClr val="accent1"/>
-          </a:fillRef>
-          <a:effectRef idx="2">
-            <a:schemeClr val="accent1"/>
-          </a:effectRef>
-          <a:fontRef idx="minor">
-            <a:schemeClr val="lt1"/>
-          </a:fontRef>
-        </p:style>
-        <p:txBody>
-          <a:bodyPr rtlCol="0" anchor="ctr"/>
-          <a:lstStyle/>
-          <a:p/>
-        </p:txBody>
-      </p:sp>
-      <p:sp>
-        <p:nvSpPr>
-          <p:cNvPr id="204" name="row:large RX buffers (mem. providers):label"/>
-          <p:cNvSpPr txBox="1"/>
-          <p:nvPr/>
-        </p:nvSpPr>
-        <p:spPr>
-          <a:xfrm>
-            <a:off x="13698269" y="4580191"/>
-            <a:ext cx="731520" cy="219456"/>
-          </a:xfrm>
-          <a:prstGeom prst="rect">
-            <a:avLst/>
-          </a:prstGeom>
-          <a:noFill/>
-        </p:spPr>
-        <p:txBody>
-          <a:bodyPr wrap="square" anchor="ctr" lIns="0" rIns="0" tIns="0" bIns="0">
-            <a:noAutofit/>
-          </a:bodyPr>
-          <a:lstStyle/>
-          <a:p>
-            <a:pPr algn="l"/>
-            <a:r>
-              <a:rPr sz="800" b="1" i="0">
-                <a:solidFill>
-                  <a:srgbClr val="1F2937"/>
-                </a:solidFill>
-              </a:rPr>
-              <a:t>7.0</a:t>
-            </a:r>
-          </a:p>
-        </p:txBody>
-      </p:sp>
-      <p:sp>
-        <p:nvSpPr>
-          <p:cNvPr id="205" name="band-label:CONTROL PLANE"/>
+          <p:cNvPr id="214" name="band-label:CONTROL PLANE"/>
           <p:cNvSpPr txBox="1"/>
           <p:nvPr/>
         </p:nvSpPr>
@@ -11272,7 +11603,7 @@
       </p:sp>
       <p:sp>
         <p:nvSpPr>
-          <p:cNvPr id="206" name="row:nftables:name"/>
+          <p:cNvPr id="215" name="row:nftables (dev. from 2008):name"/>
           <p:cNvSpPr txBox="1"/>
           <p:nvPr/>
         </p:nvSpPr>
@@ -11299,21 +11630,21 @@
                   <a:srgbClr val="1F2937"/>
                 </a:solidFill>
               </a:rPr>
-              <a:t>nftables</a:t>
+              <a:t>nftables (dev. from 2008)</a:t>
             </a:r>
           </a:p>
         </p:txBody>
       </p:sp>
       <p:cxnSp>
         <p:nvCxnSpPr>
-          <p:cNvPr id="207" name="row:nftables:development"/>
+          <p:cNvPr id="216" name="row:nftables (dev. from 2008):development"/>
           <p:cNvCxnSpPr/>
           <p:nvPr/>
         </p:nvCxnSpPr>
         <p:spPr>
           <a:xfrm>
-            <a:off x="3698005" y="4890706"/>
-            <a:ext cx="1436852" cy="0"/>
+            <a:off x="3044951" y="4890706"/>
+            <a:ext cx="2089906" cy="0"/>
           </a:xfrm>
           <a:prstGeom prst="line">
             <a:avLst/>
@@ -11342,25 +11673,23 @@
       </p:cxnSp>
       <p:sp>
         <p:nvSpPr>
-          <p:cNvPr id="208" name="row:nftables:start"/>
+          <p:cNvPr id="217" name="row:nftables (dev. from 2008):start-offchart"/>
           <p:cNvSpPr/>
           <p:nvPr/>
         </p:nvSpPr>
         <p:spPr>
-          <a:xfrm>
-            <a:off x="3666001" y="4858702"/>
-            <a:ext cx="64008" cy="64008"/>
-          </a:xfrm>
-          <a:prstGeom prst="ellipse">
+          <a:xfrm rot="16200000">
+            <a:off x="2980944" y="4849558"/>
+            <a:ext cx="82296" cy="82296"/>
+          </a:xfrm>
+          <a:prstGeom prst="triangle">
             <a:avLst/>
           </a:prstGeom>
           <a:solidFill>
-            <a:srgbClr val="FFFFFF"/>
+            <a:srgbClr val="DC2626"/>
           </a:solidFill>
-          <a:ln w="12700">
-            <a:solidFill>
-              <a:srgbClr val="DC2626"/>
-            </a:solidFill>
+          <a:ln>
+            <a:noFill/>
           </a:ln>
           <a:effectLst/>
         </p:spPr>
@@ -11386,7 +11715,7 @@
       </p:sp>
       <p:sp>
         <p:nvSpPr>
-          <p:cNvPr id="209" name="row:nftables:release:3.13"/>
+          <p:cNvPr id="218" name="row:nftables (dev. from 2008):release:3.13"/>
           <p:cNvSpPr/>
           <p:nvPr/>
         </p:nvSpPr>
@@ -11430,7 +11759,7 @@
       </p:sp>
       <p:sp>
         <p:nvSpPr>
-          <p:cNvPr id="210" name="row:nftables:label"/>
+          <p:cNvPr id="219" name="row:nftables (dev. from 2008):label"/>
           <p:cNvSpPr txBox="1"/>
           <p:nvPr/>
         </p:nvSpPr>
@@ -11464,7 +11793,7 @@
       </p:sp>
       <p:sp>
         <p:nvSpPr>
-          <p:cNvPr id="211" name="row:nexthop objects:name"/>
+          <p:cNvPr id="220" name="row:nexthop objects:name"/>
           <p:cNvSpPr txBox="1"/>
           <p:nvPr/>
         </p:nvSpPr>
@@ -11498,7 +11827,7 @@
       </p:sp>
       <p:cxnSp>
         <p:nvCxnSpPr>
-          <p:cNvPr id="212" name="row:nexthop objects:development"/>
+          <p:cNvPr id="221" name="row:nexthop objects:development"/>
           <p:cNvCxnSpPr/>
           <p:nvPr/>
         </p:nvCxnSpPr>
@@ -11534,7 +11863,7 @@
       </p:cxnSp>
       <p:sp>
         <p:nvSpPr>
-          <p:cNvPr id="213" name="row:nexthop objects:start"/>
+          <p:cNvPr id="222" name="row:nexthop objects:start"/>
           <p:cNvSpPr/>
           <p:nvPr/>
         </p:nvSpPr>
@@ -11578,7 +11907,7 @@
       </p:sp>
       <p:sp>
         <p:nvSpPr>
-          <p:cNvPr id="214" name="row:nexthop objects:release:5.3"/>
+          <p:cNvPr id="223" name="row:nexthop objects:release:5.3"/>
           <p:cNvSpPr/>
           <p:nvPr/>
         </p:nvSpPr>
@@ -11622,7 +11951,7 @@
       </p:sp>
       <p:sp>
         <p:nvSpPr>
-          <p:cNvPr id="215" name="row:nexthop objects:label"/>
+          <p:cNvPr id="224" name="row:nexthop objects:label"/>
           <p:cNvSpPr txBox="1"/>
           <p:nvPr/>
         </p:nvSpPr>
@@ -11656,7 +11985,7 @@
       </p:sp>
       <p:sp>
         <p:nvSpPr>
-          <p:cNvPr id="216" name="row:YNL tooling:name"/>
+          <p:cNvPr id="225" name="row:YNL tooling:name"/>
           <p:cNvSpPr txBox="1"/>
           <p:nvPr/>
         </p:nvSpPr>
@@ -11690,7 +12019,7 @@
       </p:sp>
       <p:cxnSp>
         <p:nvCxnSpPr>
-          <p:cNvPr id="217" name="row:YNL tooling:development"/>
+          <p:cNvPr id="226" name="row:YNL tooling:development"/>
           <p:cNvCxnSpPr/>
           <p:nvPr/>
         </p:nvCxnSpPr>
@@ -11726,7 +12055,7 @@
       </p:cxnSp>
       <p:sp>
         <p:nvSpPr>
-          <p:cNvPr id="218" name="row:YNL tooling:start"/>
+          <p:cNvPr id="227" name="row:YNL tooling:start"/>
           <p:cNvSpPr/>
           <p:nvPr/>
         </p:nvSpPr>
@@ -11770,7 +12099,7 @@
       </p:sp>
       <p:sp>
         <p:nvSpPr>
-          <p:cNvPr id="219" name="row:YNL tooling:release:6.3"/>
+          <p:cNvPr id="228" name="row:YNL tooling:release:6.3"/>
           <p:cNvSpPr/>
           <p:nvPr/>
         </p:nvSpPr>
@@ -11814,7 +12143,7 @@
       </p:sp>
       <p:sp>
         <p:nvSpPr>
-          <p:cNvPr id="220" name="row:YNL tooling:label"/>
+          <p:cNvPr id="229" name="row:YNL tooling:label"/>
           <p:cNvSpPr txBox="1"/>
           <p:nvPr/>
         </p:nvSpPr>
@@ -11848,7 +12177,7 @@
       </p:sp>
       <p:sp>
         <p:nvSpPr>
-          <p:cNvPr id="221" name="row:per-netns RTNL:name"/>
+          <p:cNvPr id="230" name="row:per-netns RTNL:name"/>
           <p:cNvSpPr txBox="1"/>
           <p:nvPr/>
         </p:nvSpPr>
@@ -11882,7 +12211,7 @@
       </p:sp>
       <p:cxnSp>
         <p:nvCxnSpPr>
-          <p:cNvPr id="222" name="row:per-netns RTNL:development"/>
+          <p:cNvPr id="231" name="row:per-netns RTNL:development"/>
           <p:cNvCxnSpPr/>
           <p:nvPr/>
         </p:nvCxnSpPr>
@@ -11918,7 +12247,7 @@
       </p:cxnSp>
       <p:sp>
         <p:nvSpPr>
-          <p:cNvPr id="223" name="row:per-netns RTNL:start"/>
+          <p:cNvPr id="232" name="row:per-netns RTNL:start"/>
           <p:cNvSpPr/>
           <p:nvPr/>
         </p:nvSpPr>
@@ -11962,7 +12291,7 @@
       </p:sp>
       <p:sp>
         <p:nvSpPr>
-          <p:cNvPr id="224" name="row:per-netns RTNL:release:6.13"/>
+          <p:cNvPr id="233" name="row:per-netns RTNL:release:6.13"/>
           <p:cNvSpPr/>
           <p:nvPr/>
         </p:nvSpPr>
@@ -12006,7 +12335,7 @@
       </p:sp>
       <p:sp>
         <p:nvSpPr>
-          <p:cNvPr id="225" name="row:per-netns RTNL:label"/>
+          <p:cNvPr id="234" name="row:per-netns RTNL:label"/>
           <p:cNvSpPr txBox="1"/>
           <p:nvPr/>
         </p:nvSpPr>
@@ -12040,7 +12369,7 @@
       </p:sp>
       <p:sp>
         <p:nvSpPr>
-          <p:cNvPr id="226" name="row:further RTNL breakup:name"/>
+          <p:cNvPr id="235" name="row:further RTNL breakup:name"/>
           <p:cNvSpPr txBox="1"/>
           <p:nvPr/>
         </p:nvSpPr>
@@ -12074,7 +12403,7 @@
       </p:sp>
       <p:cxnSp>
         <p:nvCxnSpPr>
-          <p:cNvPr id="227" name="row:further RTNL breakup:development"/>
+          <p:cNvPr id="236" name="row:further RTNL breakup:development"/>
           <p:cNvCxnSpPr/>
           <p:nvPr/>
         </p:nvCxnSpPr>
@@ -12110,7 +12439,7 @@
       </p:cxnSp>
       <p:sp>
         <p:nvSpPr>
-          <p:cNvPr id="228" name="row:further RTNL breakup:start"/>
+          <p:cNvPr id="237" name="row:further RTNL breakup:start"/>
           <p:cNvSpPr/>
           <p:nvPr/>
         </p:nvSpPr>
@@ -12154,7 +12483,7 @@
       </p:sp>
       <p:sp>
         <p:nvSpPr>
-          <p:cNvPr id="229" name="row:further RTNL breakup:release:6.15"/>
+          <p:cNvPr id="238" name="row:further RTNL breakup:release:6.15"/>
           <p:cNvSpPr/>
           <p:nvPr/>
         </p:nvSpPr>
@@ -12198,7 +12527,7 @@
       </p:sp>
       <p:sp>
         <p:nvSpPr>
-          <p:cNvPr id="230" name="row:further RTNL breakup:label"/>
+          <p:cNvPr id="239" name="row:further RTNL breakup:label"/>
           <p:cNvSpPr txBox="1"/>
           <p:nvPr/>
         </p:nvSpPr>
@@ -12232,7 +12561,7 @@
       </p:sp>
       <p:sp>
         <p:nvSpPr>
-          <p:cNvPr id="231" name="row:RTNL-less FIB rules:name"/>
+          <p:cNvPr id="240" name="row:RTNL-less FIB rules:name"/>
           <p:cNvSpPr txBox="1"/>
           <p:nvPr/>
         </p:nvSpPr>
@@ -12266,7 +12595,7 @@
       </p:sp>
       <p:cxnSp>
         <p:nvCxnSpPr>
-          <p:cNvPr id="232" name="row:RTNL-less FIB rules:development"/>
+          <p:cNvPr id="241" name="row:RTNL-less FIB rules:development"/>
           <p:cNvCxnSpPr/>
           <p:nvPr/>
         </p:nvCxnSpPr>
@@ -12302,7 +12631,7 @@
       </p:cxnSp>
       <p:sp>
         <p:nvSpPr>
-          <p:cNvPr id="233" name="row:RTNL-less FIB rules:start"/>
+          <p:cNvPr id="242" name="row:RTNL-less FIB rules:start"/>
           <p:cNvSpPr/>
           <p:nvPr/>
         </p:nvSpPr>
@@ -12346,7 +12675,7 @@
       </p:sp>
       <p:sp>
         <p:nvSpPr>
-          <p:cNvPr id="234" name="row:RTNL-less FIB rules:release:7.3-rc"/>
+          <p:cNvPr id="243" name="row:RTNL-less FIB rules:release:7.3-rc"/>
           <p:cNvSpPr/>
           <p:nvPr/>
         </p:nvSpPr>
@@ -12390,7 +12719,7 @@
       </p:sp>
       <p:sp>
         <p:nvSpPr>
-          <p:cNvPr id="235" name="row:RTNL-less FIB rules:label"/>
+          <p:cNvPr id="244" name="row:RTNL-less FIB rules:label"/>
           <p:cNvSpPr txBox="1"/>
           <p:nvPr/>
         </p:nvSpPr>
@@ -12424,7 +12753,7 @@
       </p:sp>
       <p:sp>
         <p:nvSpPr>
-          <p:cNvPr id="236" name="band-label:OBSERVABILITY"/>
+          <p:cNvPr id="245" name="band-label:OBSERVABILITY"/>
           <p:cNvSpPr txBox="1"/>
           <p:nvPr/>
         </p:nvSpPr>
@@ -12459,7 +12788,7 @@
       </p:sp>
       <p:sp>
         <p:nvSpPr>
-          <p:cNvPr id="237" name="row:kprobe BPF:name"/>
+          <p:cNvPr id="246" name="row:kprobe BPF:name"/>
           <p:cNvSpPr txBox="1"/>
           <p:nvPr/>
         </p:nvSpPr>
@@ -12493,7 +12822,7 @@
       </p:sp>
       <p:cxnSp>
         <p:nvCxnSpPr>
-          <p:cNvPr id="238" name="row:kprobe BPF:development"/>
+          <p:cNvPr id="247" name="row:kprobe BPF:development"/>
           <p:cNvCxnSpPr/>
           <p:nvPr/>
         </p:nvCxnSpPr>
@@ -12529,7 +12858,7 @@
       </p:cxnSp>
       <p:sp>
         <p:nvSpPr>
-          <p:cNvPr id="239" name="row:kprobe BPF:start"/>
+          <p:cNvPr id="248" name="row:kprobe BPF:start"/>
           <p:cNvSpPr/>
           <p:nvPr/>
         </p:nvSpPr>
@@ -12573,7 +12902,7 @@
       </p:sp>
       <p:sp>
         <p:nvSpPr>
-          <p:cNvPr id="240" name="row:kprobe BPF:release:4.1"/>
+          <p:cNvPr id="249" name="row:kprobe BPF:release:4.1"/>
           <p:cNvSpPr/>
           <p:nvPr/>
         </p:nvSpPr>
@@ -12617,7 +12946,7 @@
       </p:sp>
       <p:sp>
         <p:nvSpPr>
-          <p:cNvPr id="241" name="row:kprobe BPF:label"/>
+          <p:cNvPr id="250" name="row:kprobe BPF:label"/>
           <p:cNvSpPr txBox="1"/>
           <p:nvPr/>
         </p:nvSpPr>
@@ -12651,7 +12980,7 @@
       </p:sp>
       <p:sp>
         <p:nvSpPr>
-          <p:cNvPr id="242" name="row:structured drop reason:name"/>
+          <p:cNvPr id="251" name="row:structured drop reason:name"/>
           <p:cNvSpPr txBox="1"/>
           <p:nvPr/>
         </p:nvSpPr>
@@ -12685,7 +13014,7 @@
       </p:sp>
       <p:cxnSp>
         <p:nvCxnSpPr>
-          <p:cNvPr id="243" name="row:structured drop reason:development"/>
+          <p:cNvPr id="252" name="row:structured drop reason:development"/>
           <p:cNvCxnSpPr/>
           <p:nvPr/>
         </p:nvCxnSpPr>
@@ -12721,7 +13050,7 @@
       </p:cxnSp>
       <p:sp>
         <p:nvSpPr>
-          <p:cNvPr id="244" name="row:structured drop reason:start"/>
+          <p:cNvPr id="253" name="row:structured drop reason:start"/>
           <p:cNvSpPr/>
           <p:nvPr/>
         </p:nvSpPr>
@@ -12765,7 +13094,7 @@
       </p:sp>
       <p:sp>
         <p:nvSpPr>
-          <p:cNvPr id="245" name="row:structured drop reason:release:5.17"/>
+          <p:cNvPr id="254" name="row:structured drop reason:release:5.17"/>
           <p:cNvSpPr/>
           <p:nvPr/>
         </p:nvSpPr>
@@ -12809,7 +13138,7 @@
       </p:sp>
       <p:sp>
         <p:nvSpPr>
-          <p:cNvPr id="246" name="row:structured drop reason:label"/>
+          <p:cNvPr id="255" name="row:structured drop reason:label"/>
           <p:cNvSpPr txBox="1"/>
           <p:nvPr/>
         </p:nvSpPr>
@@ -12843,7 +13172,7 @@
       </p:sp>
       <p:sp>
         <p:nvSpPr>
-          <p:cNvPr id="247" name="row:drop-reason expansion:name"/>
+          <p:cNvPr id="256" name="row:drop-reason expansion:name"/>
           <p:cNvSpPr txBox="1"/>
           <p:nvPr/>
         </p:nvSpPr>
@@ -12877,7 +13206,7 @@
       </p:sp>
       <p:cxnSp>
         <p:nvCxnSpPr>
-          <p:cNvPr id="248" name="row:drop-reason expansion:development"/>
+          <p:cNvPr id="257" name="row:drop-reason expansion:development"/>
           <p:cNvCxnSpPr/>
           <p:nvPr/>
         </p:nvCxnSpPr>
@@ -12913,7 +13242,7 @@
       </p:cxnSp>
       <p:sp>
         <p:nvSpPr>
-          <p:cNvPr id="249" name="row:drop-reason expansion:start"/>
+          <p:cNvPr id="258" name="row:drop-reason expansion:start"/>
           <p:cNvSpPr/>
           <p:nvPr/>
         </p:nvSpPr>
@@ -12957,7 +13286,7 @@
       </p:sp>
       <p:sp>
         <p:nvSpPr>
-          <p:cNvPr id="250" name="row:drop-reason expansion:release:5.19"/>
+          <p:cNvPr id="259" name="row:drop-reason expansion:release:5.19"/>
           <p:cNvSpPr/>
           <p:nvPr/>
         </p:nvSpPr>
@@ -13001,7 +13330,7 @@
       </p:sp>
       <p:sp>
         <p:nvSpPr>
-          <p:cNvPr id="251" name="row:drop-reason expansion:label"/>
+          <p:cNvPr id="260" name="row:drop-reason expansion:label"/>
           <p:cNvSpPr txBox="1"/>
           <p:nvPr/>
         </p:nvSpPr>
@@ -13035,7 +13364,7 @@
       </p:sp>
       <p:sp>
         <p:nvSpPr>
-          <p:cNvPr id="252" name="row:queue/NAPI netdev-genl:name"/>
+          <p:cNvPr id="261" name="row:queue/NAPI netdev-genl:name"/>
           <p:cNvSpPr txBox="1"/>
           <p:nvPr/>
         </p:nvSpPr>
@@ -13069,7 +13398,7 @@
       </p:sp>
       <p:cxnSp>
         <p:nvCxnSpPr>
-          <p:cNvPr id="253" name="row:queue/NAPI netdev-genl:development"/>
+          <p:cNvPr id="262" name="row:queue/NAPI netdev-genl:development"/>
           <p:cNvCxnSpPr/>
           <p:nvPr/>
         </p:nvCxnSpPr>
@@ -13105,7 +13434,7 @@
       </p:cxnSp>
       <p:sp>
         <p:nvSpPr>
-          <p:cNvPr id="254" name="row:queue/NAPI netdev-genl:start"/>
+          <p:cNvPr id="263" name="row:queue/NAPI netdev-genl:start"/>
           <p:cNvSpPr/>
           <p:nvPr/>
         </p:nvSpPr>
@@ -13149,7 +13478,7 @@
       </p:sp>
       <p:sp>
         <p:nvSpPr>
-          <p:cNvPr id="255" name="row:queue/NAPI netdev-genl:release:6.8"/>
+          <p:cNvPr id="264" name="row:queue/NAPI netdev-genl:release:6.8"/>
           <p:cNvSpPr/>
           <p:nvPr/>
         </p:nvSpPr>
@@ -13193,7 +13522,7 @@
       </p:sp>
       <p:sp>
         <p:nvSpPr>
-          <p:cNvPr id="256" name="row:queue/NAPI netdev-genl:label"/>
+          <p:cNvPr id="265" name="row:queue/NAPI netdev-genl:label"/>
           <p:cNvSpPr txBox="1"/>
           <p:nvPr/>
         </p:nvSpPr>
@@ -13227,7 +13556,7 @@
       </p:sp>
       <p:sp>
         <p:nvSpPr>
-          <p:cNvPr id="257" name="row:qdisc-drop tracepoint:name"/>
+          <p:cNvPr id="266" name="row:qdisc-drop tracepoint:name"/>
           <p:cNvSpPr txBox="1"/>
           <p:nvPr/>
         </p:nvSpPr>
@@ -13261,7 +13590,7 @@
       </p:sp>
       <p:cxnSp>
         <p:nvCxnSpPr>
-          <p:cNvPr id="258" name="row:qdisc-drop tracepoint:development"/>
+          <p:cNvPr id="267" name="row:qdisc-drop tracepoint:development"/>
           <p:cNvCxnSpPr/>
           <p:nvPr/>
         </p:nvCxnSpPr>
@@ -13297,7 +13626,7 @@
       </p:cxnSp>
       <p:sp>
         <p:nvSpPr>
-          <p:cNvPr id="259" name="row:qdisc-drop tracepoint:start"/>
+          <p:cNvPr id="268" name="row:qdisc-drop tracepoint:start"/>
           <p:cNvSpPr/>
           <p:nvPr/>
         </p:nvSpPr>
@@ -13341,7 +13670,7 @@
       </p:sp>
       <p:sp>
         <p:nvSpPr>
-          <p:cNvPr id="260" name="row:qdisc-drop tracepoint:release:7.1"/>
+          <p:cNvPr id="269" name="row:qdisc-drop tracepoint:release:7.1"/>
           <p:cNvSpPr/>
           <p:nvPr/>
         </p:nvSpPr>
@@ -13385,7 +13714,7 @@
       </p:sp>
       <p:sp>
         <p:nvSpPr>
-          <p:cNvPr id="261" name="row:qdisc-drop tracepoint:label"/>
+          <p:cNvPr id="270" name="row:qdisc-drop tracepoint:label"/>
           <p:cNvSpPr txBox="1"/>
           <p:nvPr/>
         </p:nvSpPr>
@@ -13419,7 +13748,7 @@
       </p:sp>
       <p:sp>
         <p:nvSpPr>
-          <p:cNvPr id="262" name="band-label:DRIVER FRAMEWORK"/>
+          <p:cNvPr id="271" name="band-label:DRIVER FRAMEWORK"/>
           <p:cNvSpPr txBox="1"/>
           <p:nvPr/>
         </p:nvSpPr>
@@ -13454,7 +13783,7 @@
       </p:sp>
       <p:sp>
         <p:nvSpPr>
-          <p:cNvPr id="263" name="row:switchdev:name"/>
+          <p:cNvPr id="272" name="row:switchdev:name"/>
           <p:cNvSpPr txBox="1"/>
           <p:nvPr/>
         </p:nvSpPr>
@@ -13488,7 +13817,7 @@
       </p:sp>
       <p:cxnSp>
         <p:nvCxnSpPr>
-          <p:cNvPr id="264" name="row:switchdev:development"/>
+          <p:cNvPr id="273" name="row:switchdev:development"/>
           <p:cNvCxnSpPr/>
           <p:nvPr/>
         </p:nvCxnSpPr>
@@ -13524,7 +13853,7 @@
       </p:cxnSp>
       <p:sp>
         <p:nvSpPr>
-          <p:cNvPr id="265" name="row:switchdev:start"/>
+          <p:cNvPr id="274" name="row:switchdev:start"/>
           <p:cNvSpPr/>
           <p:nvPr/>
         </p:nvSpPr>
@@ -13568,7 +13897,7 @@
       </p:sp>
       <p:sp>
         <p:nvSpPr>
-          <p:cNvPr id="266" name="row:switchdev:release:3.19"/>
+          <p:cNvPr id="275" name="row:switchdev:release:3.19"/>
           <p:cNvSpPr/>
           <p:nvPr/>
         </p:nvSpPr>
@@ -13612,7 +13941,7 @@
       </p:sp>
       <p:sp>
         <p:nvSpPr>
-          <p:cNvPr id="267" name="row:switchdev:label"/>
+          <p:cNvPr id="276" name="row:switchdev:label"/>
           <p:cNvSpPr txBox="1"/>
           <p:nvPr/>
         </p:nvSpPr>
@@ -13646,7 +13975,7 @@
       </p:sp>
       <p:sp>
         <p:nvSpPr>
-          <p:cNvPr id="268" name="row:devlink:name"/>
+          <p:cNvPr id="277" name="row:devlink:name"/>
           <p:cNvSpPr txBox="1"/>
           <p:nvPr/>
         </p:nvSpPr>
@@ -13680,7 +14009,7 @@
       </p:sp>
       <p:cxnSp>
         <p:nvCxnSpPr>
-          <p:cNvPr id="269" name="row:devlink:development"/>
+          <p:cNvPr id="278" name="row:devlink:development"/>
           <p:cNvCxnSpPr/>
           <p:nvPr/>
         </p:nvCxnSpPr>
@@ -13716,7 +14045,7 @@
       </p:cxnSp>
       <p:sp>
         <p:nvSpPr>
-          <p:cNvPr id="270" name="row:devlink:start"/>
+          <p:cNvPr id="279" name="row:devlink:start"/>
           <p:cNvSpPr/>
           <p:nvPr/>
         </p:nvSpPr>
@@ -13760,7 +14089,7 @@
       </p:sp>
       <p:sp>
         <p:nvSpPr>
-          <p:cNvPr id="271" name="row:devlink:release:4.6"/>
+          <p:cNvPr id="280" name="row:devlink:release:4.6"/>
           <p:cNvSpPr/>
           <p:nvPr/>
         </p:nvSpPr>
@@ -13804,7 +14133,7 @@
       </p:sp>
       <p:sp>
         <p:nvSpPr>
-          <p:cNvPr id="272" name="row:devlink:label"/>
+          <p:cNvPr id="281" name="row:devlink:label"/>
           <p:cNvSpPr txBox="1"/>
           <p:nvPr/>
         </p:nvSpPr>
@@ -13838,7 +14167,7 @@
       </p:sp>
       <p:sp>
         <p:nvSpPr>
-          <p:cNvPr id="273" name="row:phylink:name"/>
+          <p:cNvPr id="282" name="row:phylink:name"/>
           <p:cNvSpPr txBox="1"/>
           <p:nvPr/>
         </p:nvSpPr>
@@ -13872,7 +14201,7 @@
       </p:sp>
       <p:cxnSp>
         <p:nvCxnSpPr>
-          <p:cNvPr id="274" name="row:phylink:development"/>
+          <p:cNvPr id="283" name="row:phylink:development"/>
           <p:cNvCxnSpPr/>
           <p:nvPr/>
         </p:nvCxnSpPr>
@@ -13908,7 +14237,7 @@
       </p:cxnSp>
       <p:sp>
         <p:nvSpPr>
-          <p:cNvPr id="275" name="row:phylink:start"/>
+          <p:cNvPr id="284" name="row:phylink:start"/>
           <p:cNvSpPr/>
           <p:nvPr/>
         </p:nvSpPr>
@@ -13952,7 +14281,7 @@
       </p:sp>
       <p:sp>
         <p:nvSpPr>
-          <p:cNvPr id="276" name="row:phylink:release:4.14"/>
+          <p:cNvPr id="285" name="row:phylink:release:4.14"/>
           <p:cNvSpPr/>
           <p:nvPr/>
         </p:nvSpPr>
@@ -13996,7 +14325,7 @@
       </p:sp>
       <p:sp>
         <p:nvSpPr>
-          <p:cNvPr id="277" name="row:phylink:label"/>
+          <p:cNvPr id="286" name="row:phylink:label"/>
           <p:cNvSpPr txBox="1"/>
           <p:nvPr/>
         </p:nvSpPr>
@@ -14030,7 +14359,7 @@
       </p:sp>
       <p:sp>
         <p:nvSpPr>
-          <p:cNvPr id="278" name="row:Net DIM:name"/>
+          <p:cNvPr id="287" name="row:Net DIM:name"/>
           <p:cNvSpPr txBox="1"/>
           <p:nvPr/>
         </p:nvSpPr>
@@ -14064,7 +14393,7 @@
       </p:sp>
       <p:cxnSp>
         <p:nvCxnSpPr>
-          <p:cNvPr id="279" name="row:Net DIM:development"/>
+          <p:cNvPr id="288" name="row:Net DIM:development"/>
           <p:cNvCxnSpPr/>
           <p:nvPr/>
         </p:nvCxnSpPr>
@@ -14100,7 +14429,7 @@
       </p:cxnSp>
       <p:sp>
         <p:nvSpPr>
-          <p:cNvPr id="280" name="row:Net DIM:start"/>
+          <p:cNvPr id="289" name="row:Net DIM:start"/>
           <p:cNvSpPr/>
           <p:nvPr/>
         </p:nvSpPr>
@@ -14144,7 +14473,7 @@
       </p:sp>
       <p:sp>
         <p:nvSpPr>
-          <p:cNvPr id="281" name="row:Net DIM:release:4.16"/>
+          <p:cNvPr id="290" name="row:Net DIM:release:4.16"/>
           <p:cNvSpPr/>
           <p:nvPr/>
         </p:nvSpPr>
@@ -14188,7 +14517,7 @@
       </p:sp>
       <p:sp>
         <p:nvSpPr>
-          <p:cNvPr id="282" name="row:Net DIM:label"/>
+          <p:cNvPr id="291" name="row:Net DIM:label"/>
           <p:cNvSpPr txBox="1"/>
           <p:nvPr/>
         </p:nvSpPr>
@@ -14222,7 +14551,7 @@
       </p:sp>
       <p:sp>
         <p:nvSpPr>
-          <p:cNvPr id="283" name="row:netdevsim:name"/>
+          <p:cNvPr id="292" name="row:netdevsim:name"/>
           <p:cNvSpPr txBox="1"/>
           <p:nvPr/>
         </p:nvSpPr>
@@ -14256,7 +14585,7 @@
       </p:sp>
       <p:cxnSp>
         <p:nvCxnSpPr>
-          <p:cNvPr id="284" name="row:netdevsim:development"/>
+          <p:cNvPr id="293" name="row:netdevsim:development"/>
           <p:cNvCxnSpPr/>
           <p:nvPr/>
         </p:nvCxnSpPr>
@@ -14292,7 +14621,7 @@
       </p:cxnSp>
       <p:sp>
         <p:nvSpPr>
-          <p:cNvPr id="285" name="row:netdevsim:start"/>
+          <p:cNvPr id="294" name="row:netdevsim:start"/>
           <p:cNvSpPr/>
           <p:nvPr/>
         </p:nvSpPr>
@@ -14336,7 +14665,7 @@
       </p:sp>
       <p:sp>
         <p:nvSpPr>
-          <p:cNvPr id="286" name="row:netdevsim:release:4.16"/>
+          <p:cNvPr id="295" name="row:netdevsim:release:4.16"/>
           <p:cNvSpPr/>
           <p:nvPr/>
         </p:nvSpPr>
@@ -14380,7 +14709,7 @@
       </p:sp>
       <p:sp>
         <p:nvSpPr>
-          <p:cNvPr id="287" name="row:netdevsim:label"/>
+          <p:cNvPr id="296" name="row:netdevsim:label"/>
           <p:cNvSpPr txBox="1"/>
           <p:nvPr/>
         </p:nvSpPr>
@@ -14414,7 +14743,7 @@
       </p:sp>
       <p:sp>
         <p:nvSpPr>
-          <p:cNvPr id="288" name="row:devlink health:name"/>
+          <p:cNvPr id="297" name="row:devlink health:name"/>
           <p:cNvSpPr txBox="1"/>
           <p:nvPr/>
         </p:nvSpPr>
@@ -14448,7 +14777,7 @@
       </p:sp>
       <p:cxnSp>
         <p:nvCxnSpPr>
-          <p:cNvPr id="289" name="row:devlink health:development"/>
+          <p:cNvPr id="298" name="row:devlink health:development"/>
           <p:cNvCxnSpPr/>
           <p:nvPr/>
         </p:nvCxnSpPr>
@@ -14484,7 +14813,7 @@
       </p:cxnSp>
       <p:sp>
         <p:nvSpPr>
-          <p:cNvPr id="290" name="row:devlink health:start"/>
+          <p:cNvPr id="299" name="row:devlink health:start"/>
           <p:cNvSpPr/>
           <p:nvPr/>
         </p:nvSpPr>
@@ -14528,7 +14857,7 @@
       </p:sp>
       <p:sp>
         <p:nvSpPr>
-          <p:cNvPr id="291" name="row:devlink health:release:5.1"/>
+          <p:cNvPr id="300" name="row:devlink health:release:5.1"/>
           <p:cNvSpPr/>
           <p:nvPr/>
         </p:nvSpPr>
@@ -14572,7 +14901,7 @@
       </p:sp>
       <p:sp>
         <p:nvSpPr>
-          <p:cNvPr id="292" name="row:devlink health:label"/>
+          <p:cNvPr id="301" name="row:devlink health:label"/>
           <p:cNvSpPr txBox="1"/>
           <p:nvPr/>
         </p:nvSpPr>
@@ -14606,7 +14935,7 @@
       </p:sp>
       <p:sp>
         <p:nvSpPr>
-          <p:cNvPr id="293" name="row:ethtool netlink:name"/>
+          <p:cNvPr id="302" name="row:ethtool netlink:name"/>
           <p:cNvSpPr txBox="1"/>
           <p:nvPr/>
         </p:nvSpPr>
@@ -14640,7 +14969,7 @@
       </p:sp>
       <p:cxnSp>
         <p:nvCxnSpPr>
-          <p:cNvPr id="294" name="row:ethtool netlink:development"/>
+          <p:cNvPr id="303" name="row:ethtool netlink:development"/>
           <p:cNvCxnSpPr/>
           <p:nvPr/>
         </p:nvCxnSpPr>
@@ -14676,7 +15005,7 @@
       </p:cxnSp>
       <p:sp>
         <p:nvSpPr>
-          <p:cNvPr id="295" name="row:ethtool netlink:start"/>
+          <p:cNvPr id="304" name="row:ethtool netlink:start"/>
           <p:cNvSpPr/>
           <p:nvPr/>
         </p:nvSpPr>
@@ -14720,7 +15049,7 @@
       </p:sp>
       <p:sp>
         <p:nvSpPr>
-          <p:cNvPr id="296" name="row:ethtool netlink:release:5.6"/>
+          <p:cNvPr id="305" name="row:ethtool netlink:release:5.6"/>
           <p:cNvSpPr/>
           <p:nvPr/>
         </p:nvSpPr>
@@ -14764,7 +15093,7 @@
       </p:sp>
       <p:sp>
         <p:nvSpPr>
-          <p:cNvPr id="297" name="row:ethtool netlink:label"/>
+          <p:cNvPr id="306" name="row:ethtool netlink:label"/>
           <p:cNvSpPr txBox="1"/>
           <p:nvPr/>
         </p:nvSpPr>
@@ -14798,7 +15127,7 @@
       </p:sp>
       <p:sp>
         <p:nvSpPr>
-          <p:cNvPr id="298" name="row:auxiliary bus:name"/>
+          <p:cNvPr id="307" name="row:auxiliary bus:name"/>
           <p:cNvSpPr txBox="1"/>
           <p:nvPr/>
         </p:nvSpPr>
@@ -14832,7 +15161,7 @@
       </p:sp>
       <p:cxnSp>
         <p:nvCxnSpPr>
-          <p:cNvPr id="299" name="row:auxiliary bus:development"/>
+          <p:cNvPr id="308" name="row:auxiliary bus:development"/>
           <p:cNvCxnSpPr/>
           <p:nvPr/>
         </p:nvCxnSpPr>
@@ -14868,7 +15197,7 @@
       </p:cxnSp>
       <p:sp>
         <p:nvSpPr>
-          <p:cNvPr id="300" name="row:auxiliary bus:start"/>
+          <p:cNvPr id="309" name="row:auxiliary bus:start"/>
           <p:cNvSpPr/>
           <p:nvPr/>
         </p:nvSpPr>
@@ -14912,7 +15241,7 @@
       </p:sp>
       <p:sp>
         <p:nvSpPr>
-          <p:cNvPr id="301" name="row:auxiliary bus:release:5.11"/>
+          <p:cNvPr id="310" name="row:auxiliary bus:release:5.11"/>
           <p:cNvSpPr/>
           <p:nvPr/>
         </p:nvSpPr>
@@ -14956,7 +15285,7 @@
       </p:sp>
       <p:sp>
         <p:nvSpPr>
-          <p:cNvPr id="302" name="row:auxiliary bus:label"/>
+          <p:cNvPr id="311" name="row:auxiliary bus:label"/>
           <p:cNvSpPr txBox="1"/>
           <p:nvPr/>
         </p:nvSpPr>
@@ -14990,7 +15319,7 @@
       </p:sp>
       <p:sp>
         <p:nvSpPr>
-          <p:cNvPr id="303" name="row:threaded NAPI:name"/>
+          <p:cNvPr id="312" name="row:threaded NAPI:name"/>
           <p:cNvSpPr txBox="1"/>
           <p:nvPr/>
         </p:nvSpPr>
@@ -15024,7 +15353,7 @@
       </p:sp>
       <p:cxnSp>
         <p:nvCxnSpPr>
-          <p:cNvPr id="304" name="row:threaded NAPI:development"/>
+          <p:cNvPr id="313" name="row:threaded NAPI:development"/>
           <p:cNvCxnSpPr/>
           <p:nvPr/>
         </p:nvCxnSpPr>
@@ -15060,7 +15389,7 @@
       </p:cxnSp>
       <p:sp>
         <p:nvSpPr>
-          <p:cNvPr id="305" name="row:threaded NAPI:start"/>
+          <p:cNvPr id="314" name="row:threaded NAPI:start"/>
           <p:cNvSpPr/>
           <p:nvPr/>
         </p:nvSpPr>
@@ -15104,7 +15433,7 @@
       </p:sp>
       <p:sp>
         <p:nvSpPr>
-          <p:cNvPr id="306" name="row:threaded NAPI:release:5.12"/>
+          <p:cNvPr id="315" name="row:threaded NAPI:release:5.12"/>
           <p:cNvSpPr/>
           <p:nvPr/>
         </p:nvSpPr>
@@ -15148,7 +15477,7 @@
       </p:sp>
       <p:sp>
         <p:nvSpPr>
-          <p:cNvPr id="307" name="row:threaded NAPI:label"/>
+          <p:cNvPr id="316" name="row:threaded NAPI:label"/>
           <p:cNvSpPr txBox="1"/>
           <p:nvPr/>
         </p:nvSpPr>
@@ -15182,7 +15511,7 @@
       </p:sp>
       <p:sp>
         <p:nvSpPr>
-          <p:cNvPr id="308" name="row:Rust phylib:name"/>
+          <p:cNvPr id="317" name="row:Rust phylib:name"/>
           <p:cNvSpPr txBox="1"/>
           <p:nvPr/>
         </p:nvSpPr>
@@ -15216,7 +15545,7 @@
       </p:sp>
       <p:cxnSp>
         <p:nvCxnSpPr>
-          <p:cNvPr id="309" name="row:Rust phylib:development"/>
+          <p:cNvPr id="318" name="row:Rust phylib:development"/>
           <p:cNvCxnSpPr/>
           <p:nvPr/>
         </p:nvCxnSpPr>
@@ -15252,7 +15581,7 @@
       </p:cxnSp>
       <p:sp>
         <p:nvSpPr>
-          <p:cNvPr id="310" name="row:Rust phylib:start"/>
+          <p:cNvPr id="319" name="row:Rust phylib:start"/>
           <p:cNvSpPr/>
           <p:nvPr/>
         </p:nvSpPr>
@@ -15296,7 +15625,7 @@
       </p:sp>
       <p:sp>
         <p:nvSpPr>
-          <p:cNvPr id="311" name="row:Rust phylib:release:6.8"/>
+          <p:cNvPr id="320" name="row:Rust phylib:release:6.8"/>
           <p:cNvSpPr/>
           <p:nvPr/>
         </p:nvSpPr>
@@ -15340,7 +15669,7 @@
       </p:sp>
       <p:sp>
         <p:nvSpPr>
-          <p:cNvPr id="312" name="row:Rust phylib:label"/>
+          <p:cNvPr id="321" name="row:Rust phylib:label"/>
           <p:cNvSpPr txBox="1"/>
           <p:nvPr/>
         </p:nvSpPr>
@@ -15374,7 +15703,7 @@
       </p:sp>
       <p:sp>
         <p:nvSpPr>
-          <p:cNvPr id="313" name="legend:title"/>
+          <p:cNvPr id="322" name="legend:title"/>
           <p:cNvSpPr txBox="1"/>
           <p:nvPr/>
         </p:nvSpPr>
@@ -15408,7 +15737,7 @@
       </p:sp>
       <p:sp>
         <p:nvSpPr>
-          <p:cNvPr id="314" name="legend:start"/>
+          <p:cNvPr id="323" name="legend:start"/>
           <p:cNvSpPr/>
           <p:nvPr/>
         </p:nvSpPr>
@@ -15452,7 +15781,7 @@
       </p:sp>
       <p:cxnSp>
         <p:nvCxnSpPr>
-          <p:cNvPr id="315" name="legend:dev"/>
+          <p:cNvPr id="324" name="legend:dev"/>
           <p:cNvCxnSpPr/>
           <p:nvPr/>
         </p:nvCxnSpPr>
@@ -15488,7 +15817,7 @@
       </p:cxnSp>
       <p:sp>
         <p:nvSpPr>
-          <p:cNvPr id="316" name="legend:release"/>
+          <p:cNvPr id="325" name="legend:release"/>
           <p:cNvSpPr/>
           <p:nvPr/>
         </p:nvSpPr>
@@ -15532,7 +15861,7 @@
       </p:sp>
       <p:sp>
         <p:nvSpPr>
-          <p:cNvPr id="317" name="legend:t1"/>
+          <p:cNvPr id="326" name="legend:t1"/>
           <p:cNvSpPr txBox="1"/>
           <p:nvPr/>
         </p:nvSpPr>
@@ -15566,7 +15895,7 @@
       </p:sp>
       <p:sp>
         <p:nvSpPr>
-          <p:cNvPr id="318" name="legend:m1"/>
+          <p:cNvPr id="327" name="legend:m1"/>
           <p:cNvSpPr/>
           <p:nvPr/>
         </p:nvSpPr>
@@ -15610,7 +15939,7 @@
       </p:sp>
       <p:cxnSp>
         <p:nvCxnSpPr>
-          <p:cNvPr id="319" name="legend:m-line"/>
+          <p:cNvPr id="328" name="legend:m-line"/>
           <p:cNvCxnSpPr/>
           <p:nvPr/>
         </p:nvCxnSpPr>
@@ -15645,7 +15974,7 @@
       </p:cxnSp>
       <p:sp>
         <p:nvSpPr>
-          <p:cNvPr id="320" name="legend:m2"/>
+          <p:cNvPr id="329" name="legend:m2"/>
           <p:cNvSpPr/>
           <p:nvPr/>
         </p:nvSpPr>
@@ -15689,7 +16018,7 @@
       </p:sp>
       <p:sp>
         <p:nvSpPr>
-          <p:cNvPr id="321" name="legend:t2"/>
+          <p:cNvPr id="330" name="legend:t2"/>
           <p:cNvSpPr txBox="1"/>
           <p:nvPr/>
         </p:nvSpPr>
@@ -15723,7 +16052,7 @@
       </p:sp>
       <p:sp>
         <p:nvSpPr>
-          <p:cNvPr id="322" name="legend:era"/>
+          <p:cNvPr id="331" name="legend:era"/>
           <p:cNvSpPr/>
           <p:nvPr/>
         </p:nvSpPr>
@@ -15767,7 +16096,7 @@
       </p:sp>
       <p:sp>
         <p:nvSpPr>
-          <p:cNvPr id="323" name="legend:t3"/>
+          <p:cNvPr id="332" name="legend:t3"/>
           <p:cNvSpPr txBox="1"/>
           <p:nvPr/>
         </p:nvSpPr>
@@ -15801,7 +16130,7 @@
       </p:sp>
       <p:cxnSp>
         <p:nvCxnSpPr>
-          <p:cNvPr id="324" name="legend:ga"/>
+          <p:cNvPr id="333" name="legend:ga"/>
           <p:cNvCxnSpPr/>
           <p:nvPr/>
         </p:nvCxnSpPr>
@@ -15837,7 +16166,7 @@
       </p:cxnSp>
       <p:sp>
         <p:nvSpPr>
-          <p:cNvPr id="325" name="legend:t4"/>
+          <p:cNvPr id="334" name="legend:t4"/>
           <p:cNvSpPr txBox="1"/>
           <p:nvPr/>
         </p:nvSpPr>
@@ -15869,9 +16198,190 @@
           </a:p>
         </p:txBody>
       </p:sp>
-      <p:sp>
-        <p:nvSpPr>
-          <p:cNvPr id="326" name="notes:left"/>
+      <p:cxnSp>
+        <p:nvCxnSpPr>
+          <p:cNvPr id="335" name="legend:lineage-down"/>
+          <p:cNvCxnSpPr/>
+          <p:nvPr/>
+        </p:nvCxnSpPr>
+        <p:spPr>
+          <a:xfrm>
+            <a:off x="7927848" y="7443216"/>
+            <a:ext cx="0" cy="64008"/>
+          </a:xfrm>
+          <a:prstGeom prst="line">
+            <a:avLst/>
+          </a:prstGeom>
+          <a:ln w="12700">
+            <a:solidFill>
+              <a:srgbClr val="475569"/>
+            </a:solidFill>
+          </a:ln>
+        </p:spPr>
+        <p:style>
+          <a:lnRef idx="2">
+            <a:schemeClr val="accent1"/>
+          </a:lnRef>
+          <a:fillRef idx="0">
+            <a:schemeClr val="accent1"/>
+          </a:fillRef>
+          <a:effectRef idx="1">
+            <a:schemeClr val="accent1"/>
+          </a:effectRef>
+          <a:fontRef idx="minor">
+            <a:schemeClr val="tx1"/>
+          </a:fontRef>
+        </p:style>
+      </p:cxnSp>
+      <p:cxnSp>
+        <p:nvCxnSpPr>
+          <p:cNvPr id="336" name="legend:lineage-across"/>
+          <p:cNvCxnSpPr/>
+          <p:nvPr/>
+        </p:nvCxnSpPr>
+        <p:spPr>
+          <a:xfrm>
+            <a:off x="7927848" y="7507224"/>
+            <a:ext cx="320040" cy="0"/>
+          </a:xfrm>
+          <a:prstGeom prst="line">
+            <a:avLst/>
+          </a:prstGeom>
+          <a:ln w="12700">
+            <a:solidFill>
+              <a:srgbClr val="475569"/>
+            </a:solidFill>
+            <a:tailEnd type="triangle" w="sm" len="sm"/>
+          </a:ln>
+        </p:spPr>
+        <p:style>
+          <a:lnRef idx="2">
+            <a:schemeClr val="accent1"/>
+          </a:lnRef>
+          <a:fillRef idx="0">
+            <a:schemeClr val="accent1"/>
+          </a:fillRef>
+          <a:effectRef idx="1">
+            <a:schemeClr val="accent1"/>
+          </a:effectRef>
+          <a:fontRef idx="minor">
+            <a:schemeClr val="tx1"/>
+          </a:fontRef>
+        </p:style>
+      </p:cxnSp>
+      <p:sp>
+        <p:nvSpPr>
+          <p:cNvPr id="337" name="legend:t5"/>
+          <p:cNvSpPr txBox="1"/>
+          <p:nvPr/>
+        </p:nvSpPr>
+        <p:spPr>
+          <a:xfrm>
+            <a:off x="8339327" y="7434072"/>
+            <a:ext cx="3108960" cy="146304"/>
+          </a:xfrm>
+          <a:prstGeom prst="rect">
+            <a:avLst/>
+          </a:prstGeom>
+          <a:noFill/>
+        </p:spPr>
+        <p:txBody>
+          <a:bodyPr wrap="square" anchor="ctr" lIns="0" rIns="0" tIns="0" bIns="0">
+            <a:noAutofit/>
+          </a:bodyPr>
+          <a:lstStyle/>
+          <a:p>
+            <a:pPr algn="l"/>
+            <a:r>
+              <a:rPr sz="800" b="0" i="0">
+                <a:solidFill>
+                  <a:srgbClr val="64748B"/>
+                </a:solidFill>
+              </a:rPr>
+              <a:t>lineage (MEMORY only): release that a later feature builds on</a:t>
+            </a:r>
+          </a:p>
+        </p:txBody>
+      </p:sp>
+      <p:sp>
+        <p:nvSpPr>
+          <p:cNvPr id="338" name="legend:offchart"/>
+          <p:cNvSpPr/>
+          <p:nvPr/>
+        </p:nvSpPr>
+        <p:spPr>
+          <a:xfrm rot="16200000">
+            <a:off x="11494008" y="7466076"/>
+            <a:ext cx="82296" cy="82296"/>
+          </a:xfrm>
+          <a:prstGeom prst="triangle">
+            <a:avLst/>
+          </a:prstGeom>
+          <a:solidFill>
+            <a:srgbClr val="64748B"/>
+          </a:solidFill>
+          <a:ln>
+            <a:noFill/>
+          </a:ln>
+          <a:effectLst/>
+        </p:spPr>
+        <p:style>
+          <a:lnRef idx="1">
+            <a:schemeClr val="accent1"/>
+          </a:lnRef>
+          <a:fillRef idx="3">
+            <a:schemeClr val="accent1"/>
+          </a:fillRef>
+          <a:effectRef idx="2">
+            <a:schemeClr val="accent1"/>
+          </a:effectRef>
+          <a:fontRef idx="minor">
+            <a:schemeClr val="lt1"/>
+          </a:fontRef>
+        </p:style>
+        <p:txBody>
+          <a:bodyPr rtlCol="0" anchor="ctr"/>
+          <a:lstStyle/>
+          <a:p/>
+        </p:txBody>
+      </p:sp>
+      <p:sp>
+        <p:nvSpPr>
+          <p:cNvPr id="339" name="legend:t6"/>
+          <p:cNvSpPr txBox="1"/>
+          <p:nvPr/>
+        </p:nvSpPr>
+        <p:spPr>
+          <a:xfrm>
+            <a:off x="11649456" y="7434072"/>
+            <a:ext cx="1828800" cy="146304"/>
+          </a:xfrm>
+          <a:prstGeom prst="rect">
+            <a:avLst/>
+          </a:prstGeom>
+          <a:noFill/>
+        </p:spPr>
+        <p:txBody>
+          <a:bodyPr wrap="square" anchor="ctr" lIns="0" rIns="0" tIns="0" bIns="0">
+            <a:noAutofit/>
+          </a:bodyPr>
+          <a:lstStyle/>
+          <a:p>
+            <a:pPr algn="l"/>
+            <a:r>
+              <a:rPr sz="800" b="0" i="0">
+                <a:solidFill>
+                  <a:srgbClr val="64748B"/>
+                </a:solidFill>
+              </a:rPr>
+              <a:t>development began before 2011</a:t>
+            </a:r>
+          </a:p>
+        </p:txBody>
+      </p:sp>
+      <p:sp>
+        <p:nvSpPr>
+          <p:cNvPr id="340" name="notes:left"/>
           <p:cNvSpPr txBox="1"/>
           <p:nvPr/>
         </p:nvSpPr>
@@ -15916,7 +16426,7 @@
       </p:sp>
       <p:sp>
         <p:nvSpPr>
-          <p:cNvPr id="327" name="notes:right"/>
+          <p:cNvPr id="341" name="notes:right"/>
           <p:cNvSpPr txBox="1"/>
           <p:nvPr/>
         </p:nvSpPr>

--- a/linux-networking-feature-evolution.pptx
+++ b/linux-networking-feature-evolution.pptx
@@ -537,7 +537,17 @@
           </a:p>
           <a:p>
             <a:r>
-              <a:t>- MEMORY rows are ordered by lineage. Lineage arrows run from a parent release (●) either to the start (○) of a feature that began afterwards, or straight down onto the dashed line of a feature already in development: page_pool → Device Memory TCP RX / io_uring ZCRX; Device Memory TCP RX → TX; io_uring ZCRX → large RX buffers; AF_XDP and XDP multi-buffer → AF_XDP multi-buffer. RX HW queue leasing interacts with AF_XDP / io_uring but is not drawn as a child.</a:t>
+              <a:t>- Rows inside each band are ordered by lineage rather than strictly by date. A lineage trunk drops from a parent release (●); a horizontal arrow runs to the start (○) of a feature that began afterwards, the trunk ends on the dashed line of a feature already in development, and a small dot marks a child the trunk passes through.</a:t>
+            </a:r>
+          </a:p>
+          <a:p>
+            <a:r>
+              <a:t>- Links: sch_fq / TCP pacing → SO_TXTIME / EDT / taprio; BIG TCP → BIG TCP extensions; eBPF foundation → TC BPF, XDP, cgroup / LWT BPF, SOCK_OPS / SOCKMAP; TC BPF → TCX → netkit (shared bpf_mprog attachment); BPF struct_ops → BPF qdisc; page_pool → Device Memory TCP RX → TX; page_pool → io_uring ZCRX → large RX buffers; AF_XDP and XDP multi-buffer → AF_XDP multi-buffer; per-netns RTNL → further RTNL breakup → RTNL-less FIB rules; structured drop reason → drop-reason expansion; switchdev → devlink → devlink health.</a:t>
+            </a:r>
+          </a:p>
+          <a:p>
+            <a:r>
+              <a:t>- Deliberately not linked: the queueing layers (BQL, TSQ, CoDel, fq; parallel, not derived), RX HW queue leasing (interacts with AF_XDP / io_uring), and links that cross bands.</a:t>
             </a:r>
           </a:p>
           <a:p>
@@ -5759,13 +5769,13 @@
       </p:cxnSp>
       <p:cxnSp>
         <p:nvCxnSpPr>
-          <p:cNvPr id="62" name="lineage:page_pool-&gt;Device Memory TCP RX:down"/>
+          <p:cNvPr id="62" name="lineage:sch_fq / TCP pacing:trunk"/>
           <p:cNvCxnSpPr/>
           <p:nvPr/>
         </p:nvCxnSpPr>
         <p:spPr>
           <a:xfrm>
-            <a:off x="8302070" y="3860863"/>
+            <a:off x="4987998" y="2037778"/>
             <a:ext cx="0" cy="63627"/>
           </a:xfrm>
           <a:prstGeom prst="line">
@@ -5794,14 +5804,14 @@
       </p:cxnSp>
       <p:cxnSp>
         <p:nvCxnSpPr>
-          <p:cNvPr id="63" name="lineage:page_pool-&gt;Device Memory TCP RX:across"/>
+          <p:cNvPr id="63" name="lineage:sch_fq / TCP pacing-&gt;SO_TXTIME / EDT / taprio:across"/>
           <p:cNvCxnSpPr/>
           <p:nvPr/>
         </p:nvCxnSpPr>
         <p:spPr>
           <a:xfrm>
-            <a:off x="8302070" y="3924490"/>
-            <a:ext cx="3062321" cy="0"/>
+            <a:off x="4987998" y="2101405"/>
+            <a:ext cx="2279596" cy="0"/>
           </a:xfrm>
           <a:prstGeom prst="line">
             <a:avLst/>
@@ -5830,14 +5840,14 @@
       </p:cxnSp>
       <p:cxnSp>
         <p:nvCxnSpPr>
-          <p:cNvPr id="64" name="lineage:page_pool-&gt;io_uring ZCRX:down"/>
+          <p:cNvPr id="64" name="lineage:BIG TCP:trunk"/>
           <p:cNvCxnSpPr/>
           <p:nvPr/>
         </p:nvCxnSpPr>
         <p:spPr>
           <a:xfrm>
-            <a:off x="8302070" y="3860863"/>
-            <a:ext cx="0" cy="282321"/>
+            <a:off x="11056747" y="2256472"/>
+            <a:ext cx="0" cy="63627"/>
           </a:xfrm>
           <a:prstGeom prst="line">
             <a:avLst/>
@@ -5865,14 +5875,92 @@
       </p:cxnSp>
       <p:cxnSp>
         <p:nvCxnSpPr>
-          <p:cNvPr id="65" name="lineage:page_pool-&gt;io_uring ZCRX:across"/>
+          <p:cNvPr id="65" name="lineage:BIG TCP-&gt;BIG TCP extensions:across"/>
           <p:cNvCxnSpPr/>
           <p:nvPr/>
         </p:nvCxnSpPr>
         <p:spPr>
           <a:xfrm>
-            <a:off x="8302070" y="4143184"/>
-            <a:ext cx="3270633" cy="0"/>
+            <a:off x="11056747" y="2320099"/>
+            <a:ext cx="460444" cy="0"/>
+          </a:xfrm>
+          <a:prstGeom prst="line">
+            <a:avLst/>
+          </a:prstGeom>
+          <a:ln w="12700">
+            <a:solidFill>
+              <a:srgbClr val="475569"/>
+            </a:solidFill>
+            <a:tailEnd type="triangle" w="sm" len="sm"/>
+          </a:ln>
+        </p:spPr>
+        <p:style>
+          <a:lnRef idx="2">
+            <a:schemeClr val="accent1"/>
+          </a:lnRef>
+          <a:fillRef idx="0">
+            <a:schemeClr val="accent1"/>
+          </a:fillRef>
+          <a:effectRef idx="1">
+            <a:schemeClr val="accent1"/>
+          </a:effectRef>
+          <a:fontRef idx="minor">
+            <a:schemeClr val="tx1"/>
+          </a:fontRef>
+        </p:style>
+      </p:cxnSp>
+      <p:sp>
+        <p:nvSpPr>
+          <p:cNvPr id="66" name="lineage:eBPF foundation-&gt;TC BPF:junction"/>
+          <p:cNvSpPr/>
+          <p:nvPr/>
+        </p:nvSpPr>
+        <p:spPr>
+          <a:xfrm>
+            <a:off x="5726890" y="2719463"/>
+            <a:ext cx="40233" cy="40233"/>
+          </a:xfrm>
+          <a:prstGeom prst="ellipse">
+            <a:avLst/>
+          </a:prstGeom>
+          <a:solidFill>
+            <a:srgbClr val="475569"/>
+          </a:solidFill>
+          <a:ln>
+            <a:noFill/>
+          </a:ln>
+          <a:effectLst/>
+        </p:spPr>
+        <p:style>
+          <a:lnRef idx="1">
+            <a:schemeClr val="accent1"/>
+          </a:lnRef>
+          <a:fillRef idx="3">
+            <a:schemeClr val="accent1"/>
+          </a:fillRef>
+          <a:effectRef idx="2">
+            <a:schemeClr val="accent1"/>
+          </a:effectRef>
+          <a:fontRef idx="minor">
+            <a:schemeClr val="lt1"/>
+          </a:fontRef>
+        </p:style>
+        <p:txBody>
+          <a:bodyPr rtlCol="0" anchor="ctr"/>
+          <a:lstStyle/>
+          <a:p/>
+        </p:txBody>
+      </p:sp>
+      <p:cxnSp>
+        <p:nvCxnSpPr>
+          <p:cNvPr id="67" name="lineage:eBPF foundation-&gt;XDP:across"/>
+          <p:cNvCxnSpPr/>
+          <p:nvPr/>
+        </p:nvCxnSpPr>
+        <p:spPr>
+          <a:xfrm>
+            <a:off x="5747007" y="3067621"/>
+            <a:ext cx="770664" cy="0"/>
           </a:xfrm>
           <a:prstGeom prst="line">
             <a:avLst/>
@@ -5901,14 +5989,14 @@
       </p:cxnSp>
       <p:cxnSp>
         <p:nvCxnSpPr>
-          <p:cNvPr id="66" name="lineage:Device Memory TCP RX-&gt;Device Memory TCP TX"/>
+          <p:cNvPr id="68" name="lineage:eBPF foundation-&gt;cgroup / LWT BPF:across"/>
           <p:cNvCxnSpPr/>
           <p:nvPr/>
         </p:nvCxnSpPr>
         <p:spPr>
           <a:xfrm>
-            <a:off x="12654611" y="3970210"/>
-            <a:ext cx="0" cy="54483"/>
+            <a:off x="5747007" y="3176968"/>
+            <a:ext cx="687340" cy="0"/>
           </a:xfrm>
           <a:prstGeom prst="line">
             <a:avLst/>
@@ -5937,14 +6025,14 @@
       </p:cxnSp>
       <p:cxnSp>
         <p:nvCxnSpPr>
-          <p:cNvPr id="67" name="lineage:io_uring ZCRX-&gt;large RX buffers (mem. providers)"/>
+          <p:cNvPr id="69" name="lineage:eBPF foundation:trunk"/>
           <p:cNvCxnSpPr/>
           <p:nvPr/>
         </p:nvCxnSpPr>
         <p:spPr>
           <a:xfrm>
-            <a:off x="13012491" y="4188904"/>
-            <a:ext cx="0" cy="54483"/>
+            <a:off x="5747007" y="2675953"/>
+            <a:ext cx="0" cy="610362"/>
           </a:xfrm>
           <a:prstGeom prst="line">
             <a:avLst/>
@@ -5953,7 +6041,6 @@
             <a:solidFill>
               <a:srgbClr val="475569"/>
             </a:solidFill>
-            <a:tailEnd type="triangle" w="sm" len="sm"/>
           </a:ln>
         </p:spPr>
         <p:style>
@@ -5973,14 +6060,14 @@
       </p:cxnSp>
       <p:cxnSp>
         <p:nvCxnSpPr>
-          <p:cNvPr id="68" name="lineage:AF_XDP-&gt;AF_XDP multi-buffer:down"/>
+          <p:cNvPr id="70" name="lineage:eBPF foundation-&gt;SOCK_OPS / SOCKMAP:across"/>
           <p:cNvCxnSpPr/>
           <p:nvPr/>
         </p:nvCxnSpPr>
         <p:spPr>
           <a:xfrm>
-            <a:off x="8302070" y="4407598"/>
-            <a:ext cx="0" cy="172974"/>
+            <a:off x="5747007" y="3286315"/>
+            <a:ext cx="1034526" cy="0"/>
           </a:xfrm>
           <a:prstGeom prst="line">
             <a:avLst/>
@@ -5989,6 +6076,7 @@
             <a:solidFill>
               <a:srgbClr val="475569"/>
             </a:solidFill>
+            <a:tailEnd type="triangle" w="sm" len="sm"/>
           </a:ln>
         </p:spPr>
         <p:style>
@@ -6008,14 +6096,14 @@
       </p:cxnSp>
       <p:cxnSp>
         <p:nvCxnSpPr>
-          <p:cNvPr id="69" name="lineage:AF_XDP-&gt;AF_XDP multi-buffer:across"/>
+          <p:cNvPr id="71" name="lineage:TC BPF:trunk"/>
           <p:cNvCxnSpPr/>
           <p:nvPr/>
         </p:nvCxnSpPr>
         <p:spPr>
           <a:xfrm>
-            <a:off x="8302070" y="4580572"/>
-            <a:ext cx="2298512" cy="0"/>
+            <a:off x="6120096" y="2785300"/>
+            <a:ext cx="0" cy="63627"/>
           </a:xfrm>
           <a:prstGeom prst="line">
             <a:avLst/>
@@ -6024,7 +6112,6 @@
             <a:solidFill>
               <a:srgbClr val="475569"/>
             </a:solidFill>
-            <a:tailEnd type="triangle" w="sm" len="sm"/>
           </a:ln>
         </p:spPr>
         <p:style>
@@ -6044,7 +6131,400 @@
       </p:cxnSp>
       <p:cxnSp>
         <p:nvCxnSpPr>
-          <p:cNvPr id="70" name="lineage:XDP multi-buffer-&gt;AF_XDP multi-buffer"/>
+          <p:cNvPr id="72" name="lineage:TC BPF-&gt;TCX:across"/>
+          <p:cNvCxnSpPr/>
+          <p:nvPr/>
+        </p:nvCxnSpPr>
+        <p:spPr>
+          <a:xfrm>
+            <a:off x="6120096" y="2848927"/>
+            <a:ext cx="4897109" cy="0"/>
+          </a:xfrm>
+          <a:prstGeom prst="line">
+            <a:avLst/>
+          </a:prstGeom>
+          <a:ln w="12700">
+            <a:solidFill>
+              <a:srgbClr val="475569"/>
+            </a:solidFill>
+            <a:tailEnd type="triangle" w="sm" len="sm"/>
+          </a:ln>
+        </p:spPr>
+        <p:style>
+          <a:lnRef idx="2">
+            <a:schemeClr val="accent1"/>
+          </a:lnRef>
+          <a:fillRef idx="0">
+            <a:schemeClr val="accent1"/>
+          </a:fillRef>
+          <a:effectRef idx="1">
+            <a:schemeClr val="accent1"/>
+          </a:effectRef>
+          <a:fontRef idx="minor">
+            <a:schemeClr val="tx1"/>
+          </a:fontRef>
+        </p:style>
+      </p:cxnSp>
+      <p:cxnSp>
+        <p:nvCxnSpPr>
+          <p:cNvPr id="73" name="lineage:TCX-&gt;netkit"/>
+          <p:cNvCxnSpPr/>
+          <p:nvPr/>
+        </p:nvCxnSpPr>
+        <p:spPr>
+          <a:xfrm>
+            <a:off x="11924118" y="2894647"/>
+            <a:ext cx="0" cy="54483"/>
+          </a:xfrm>
+          <a:prstGeom prst="line">
+            <a:avLst/>
+          </a:prstGeom>
+          <a:ln w="12700">
+            <a:solidFill>
+              <a:srgbClr val="475569"/>
+            </a:solidFill>
+            <a:tailEnd type="triangle" w="sm" len="sm"/>
+          </a:ln>
+        </p:spPr>
+        <p:style>
+          <a:lnRef idx="2">
+            <a:schemeClr val="accent1"/>
+          </a:lnRef>
+          <a:fillRef idx="0">
+            <a:schemeClr val="accent1"/>
+          </a:fillRef>
+          <a:effectRef idx="1">
+            <a:schemeClr val="accent1"/>
+          </a:effectRef>
+          <a:fontRef idx="minor">
+            <a:schemeClr val="tx1"/>
+          </a:fontRef>
+        </p:style>
+      </p:cxnSp>
+      <p:cxnSp>
+        <p:nvCxnSpPr>
+          <p:cNvPr id="74" name="lineage:BPF struct_ops:trunk"/>
+          <p:cNvCxnSpPr/>
+          <p:nvPr/>
+        </p:nvCxnSpPr>
+        <p:spPr>
+          <a:xfrm>
+            <a:off x="9434168" y="3441382"/>
+            <a:ext cx="0" cy="63627"/>
+          </a:xfrm>
+          <a:prstGeom prst="line">
+            <a:avLst/>
+          </a:prstGeom>
+          <a:ln w="12700">
+            <a:solidFill>
+              <a:srgbClr val="475569"/>
+            </a:solidFill>
+          </a:ln>
+        </p:spPr>
+        <p:style>
+          <a:lnRef idx="2">
+            <a:schemeClr val="accent1"/>
+          </a:lnRef>
+          <a:fillRef idx="0">
+            <a:schemeClr val="accent1"/>
+          </a:fillRef>
+          <a:effectRef idx="1">
+            <a:schemeClr val="accent1"/>
+          </a:effectRef>
+          <a:fontRef idx="minor">
+            <a:schemeClr val="tx1"/>
+          </a:fontRef>
+        </p:style>
+      </p:cxnSp>
+      <p:cxnSp>
+        <p:nvCxnSpPr>
+          <p:cNvPr id="75" name="lineage:BPF struct_ops-&gt;BPF qdisc:across"/>
+          <p:cNvCxnSpPr/>
+          <p:nvPr/>
+        </p:nvCxnSpPr>
+        <p:spPr>
+          <a:xfrm>
+            <a:off x="9434168" y="3505009"/>
+            <a:ext cx="2832908" cy="0"/>
+          </a:xfrm>
+          <a:prstGeom prst="line">
+            <a:avLst/>
+          </a:prstGeom>
+          <a:ln w="12700">
+            <a:solidFill>
+              <a:srgbClr val="475569"/>
+            </a:solidFill>
+            <a:tailEnd type="triangle" w="sm" len="sm"/>
+          </a:ln>
+        </p:spPr>
+        <p:style>
+          <a:lnRef idx="2">
+            <a:schemeClr val="accent1"/>
+          </a:lnRef>
+          <a:fillRef idx="0">
+            <a:schemeClr val="accent1"/>
+          </a:fillRef>
+          <a:effectRef idx="1">
+            <a:schemeClr val="accent1"/>
+          </a:effectRef>
+          <a:fontRef idx="minor">
+            <a:schemeClr val="tx1"/>
+          </a:fontRef>
+        </p:style>
+      </p:cxnSp>
+      <p:cxnSp>
+        <p:nvCxnSpPr>
+          <p:cNvPr id="76" name="lineage:page_pool-&gt;Device Memory TCP RX:across"/>
+          <p:cNvCxnSpPr/>
+          <p:nvPr/>
+        </p:nvCxnSpPr>
+        <p:spPr>
+          <a:xfrm>
+            <a:off x="8302070" y="3924490"/>
+            <a:ext cx="3062321" cy="0"/>
+          </a:xfrm>
+          <a:prstGeom prst="line">
+            <a:avLst/>
+          </a:prstGeom>
+          <a:ln w="12700">
+            <a:solidFill>
+              <a:srgbClr val="475569"/>
+            </a:solidFill>
+            <a:tailEnd type="triangle" w="sm" len="sm"/>
+          </a:ln>
+        </p:spPr>
+        <p:style>
+          <a:lnRef idx="2">
+            <a:schemeClr val="accent1"/>
+          </a:lnRef>
+          <a:fillRef idx="0">
+            <a:schemeClr val="accent1"/>
+          </a:fillRef>
+          <a:effectRef idx="1">
+            <a:schemeClr val="accent1"/>
+          </a:effectRef>
+          <a:fontRef idx="minor">
+            <a:schemeClr val="tx1"/>
+          </a:fontRef>
+        </p:style>
+      </p:cxnSp>
+      <p:cxnSp>
+        <p:nvCxnSpPr>
+          <p:cNvPr id="77" name="lineage:page_pool:trunk"/>
+          <p:cNvCxnSpPr/>
+          <p:nvPr/>
+        </p:nvCxnSpPr>
+        <p:spPr>
+          <a:xfrm>
+            <a:off x="8302070" y="3860863"/>
+            <a:ext cx="0" cy="282321"/>
+          </a:xfrm>
+          <a:prstGeom prst="line">
+            <a:avLst/>
+          </a:prstGeom>
+          <a:ln w="12700">
+            <a:solidFill>
+              <a:srgbClr val="475569"/>
+            </a:solidFill>
+          </a:ln>
+        </p:spPr>
+        <p:style>
+          <a:lnRef idx="2">
+            <a:schemeClr val="accent1"/>
+          </a:lnRef>
+          <a:fillRef idx="0">
+            <a:schemeClr val="accent1"/>
+          </a:fillRef>
+          <a:effectRef idx="1">
+            <a:schemeClr val="accent1"/>
+          </a:effectRef>
+          <a:fontRef idx="minor">
+            <a:schemeClr val="tx1"/>
+          </a:fontRef>
+        </p:style>
+      </p:cxnSp>
+      <p:cxnSp>
+        <p:nvCxnSpPr>
+          <p:cNvPr id="78" name="lineage:page_pool-&gt;io_uring ZCRX:across"/>
+          <p:cNvCxnSpPr/>
+          <p:nvPr/>
+        </p:nvCxnSpPr>
+        <p:spPr>
+          <a:xfrm>
+            <a:off x="8302070" y="4143184"/>
+            <a:ext cx="3270633" cy="0"/>
+          </a:xfrm>
+          <a:prstGeom prst="line">
+            <a:avLst/>
+          </a:prstGeom>
+          <a:ln w="12700">
+            <a:solidFill>
+              <a:srgbClr val="475569"/>
+            </a:solidFill>
+            <a:tailEnd type="triangle" w="sm" len="sm"/>
+          </a:ln>
+        </p:spPr>
+        <p:style>
+          <a:lnRef idx="2">
+            <a:schemeClr val="accent1"/>
+          </a:lnRef>
+          <a:fillRef idx="0">
+            <a:schemeClr val="accent1"/>
+          </a:fillRef>
+          <a:effectRef idx="1">
+            <a:schemeClr val="accent1"/>
+          </a:effectRef>
+          <a:fontRef idx="minor">
+            <a:schemeClr val="tx1"/>
+          </a:fontRef>
+        </p:style>
+      </p:cxnSp>
+      <p:cxnSp>
+        <p:nvCxnSpPr>
+          <p:cNvPr id="79" name="lineage:Device Memory TCP RX-&gt;Device Memory TCP TX"/>
+          <p:cNvCxnSpPr/>
+          <p:nvPr/>
+        </p:nvCxnSpPr>
+        <p:spPr>
+          <a:xfrm>
+            <a:off x="12654611" y="3970210"/>
+            <a:ext cx="0" cy="54483"/>
+          </a:xfrm>
+          <a:prstGeom prst="line">
+            <a:avLst/>
+          </a:prstGeom>
+          <a:ln w="12700">
+            <a:solidFill>
+              <a:srgbClr val="475569"/>
+            </a:solidFill>
+            <a:tailEnd type="triangle" w="sm" len="sm"/>
+          </a:ln>
+        </p:spPr>
+        <p:style>
+          <a:lnRef idx="2">
+            <a:schemeClr val="accent1"/>
+          </a:lnRef>
+          <a:fillRef idx="0">
+            <a:schemeClr val="accent1"/>
+          </a:fillRef>
+          <a:effectRef idx="1">
+            <a:schemeClr val="accent1"/>
+          </a:effectRef>
+          <a:fontRef idx="minor">
+            <a:schemeClr val="tx1"/>
+          </a:fontRef>
+        </p:style>
+      </p:cxnSp>
+      <p:cxnSp>
+        <p:nvCxnSpPr>
+          <p:cNvPr id="80" name="lineage:io_uring ZCRX-&gt;large RX buffers (mem. providers)"/>
+          <p:cNvCxnSpPr/>
+          <p:nvPr/>
+        </p:nvCxnSpPr>
+        <p:spPr>
+          <a:xfrm>
+            <a:off x="13012491" y="4188904"/>
+            <a:ext cx="0" cy="54483"/>
+          </a:xfrm>
+          <a:prstGeom prst="line">
+            <a:avLst/>
+          </a:prstGeom>
+          <a:ln w="12700">
+            <a:solidFill>
+              <a:srgbClr val="475569"/>
+            </a:solidFill>
+            <a:tailEnd type="triangle" w="sm" len="sm"/>
+          </a:ln>
+        </p:spPr>
+        <p:style>
+          <a:lnRef idx="2">
+            <a:schemeClr val="accent1"/>
+          </a:lnRef>
+          <a:fillRef idx="0">
+            <a:schemeClr val="accent1"/>
+          </a:fillRef>
+          <a:effectRef idx="1">
+            <a:schemeClr val="accent1"/>
+          </a:effectRef>
+          <a:fontRef idx="minor">
+            <a:schemeClr val="tx1"/>
+          </a:fontRef>
+        </p:style>
+      </p:cxnSp>
+      <p:cxnSp>
+        <p:nvCxnSpPr>
+          <p:cNvPr id="81" name="lineage:AF_XDP:trunk"/>
+          <p:cNvCxnSpPr/>
+          <p:nvPr/>
+        </p:nvCxnSpPr>
+        <p:spPr>
+          <a:xfrm>
+            <a:off x="8302070" y="4407598"/>
+            <a:ext cx="0" cy="172974"/>
+          </a:xfrm>
+          <a:prstGeom prst="line">
+            <a:avLst/>
+          </a:prstGeom>
+          <a:ln w="12700">
+            <a:solidFill>
+              <a:srgbClr val="475569"/>
+            </a:solidFill>
+          </a:ln>
+        </p:spPr>
+        <p:style>
+          <a:lnRef idx="2">
+            <a:schemeClr val="accent1"/>
+          </a:lnRef>
+          <a:fillRef idx="0">
+            <a:schemeClr val="accent1"/>
+          </a:fillRef>
+          <a:effectRef idx="1">
+            <a:schemeClr val="accent1"/>
+          </a:effectRef>
+          <a:fontRef idx="minor">
+            <a:schemeClr val="tx1"/>
+          </a:fontRef>
+        </p:style>
+      </p:cxnSp>
+      <p:cxnSp>
+        <p:nvCxnSpPr>
+          <p:cNvPr id="82" name="lineage:AF_XDP-&gt;AF_XDP multi-buffer:across"/>
+          <p:cNvCxnSpPr/>
+          <p:nvPr/>
+        </p:nvCxnSpPr>
+        <p:spPr>
+          <a:xfrm>
+            <a:off x="8302070" y="4580572"/>
+            <a:ext cx="2298512" cy="0"/>
+          </a:xfrm>
+          <a:prstGeom prst="line">
+            <a:avLst/>
+          </a:prstGeom>
+          <a:ln w="12700">
+            <a:solidFill>
+              <a:srgbClr val="475569"/>
+            </a:solidFill>
+            <a:tailEnd type="triangle" w="sm" len="sm"/>
+          </a:ln>
+        </p:spPr>
+        <p:style>
+          <a:lnRef idx="2">
+            <a:schemeClr val="accent1"/>
+          </a:lnRef>
+          <a:fillRef idx="0">
+            <a:schemeClr val="accent1"/>
+          </a:fillRef>
+          <a:effectRef idx="1">
+            <a:schemeClr val="accent1"/>
+          </a:effectRef>
+          <a:fontRef idx="minor">
+            <a:schemeClr val="tx1"/>
+          </a:fontRef>
+        </p:style>
+      </p:cxnSp>
+      <p:cxnSp>
+        <p:nvCxnSpPr>
+          <p:cNvPr id="83" name="lineage:XDP multi-buffer-&gt;AF_XDP multi-buffer"/>
           <p:cNvCxnSpPr/>
           <p:nvPr/>
         </p:nvCxnSpPr>
@@ -6078,9 +6558,224 @@
           </a:fontRef>
         </p:style>
       </p:cxnSp>
-      <p:sp>
-        <p:nvSpPr>
-          <p:cNvPr id="71" name="band-label:PERFORMANCE"/>
+      <p:cxnSp>
+        <p:nvCxnSpPr>
+          <p:cNvPr id="84" name="lineage:per-netns RTNL-&gt;further RTNL breakup"/>
+          <p:cNvCxnSpPr/>
+          <p:nvPr/>
+        </p:nvCxnSpPr>
+        <p:spPr>
+          <a:xfrm>
+            <a:off x="12772954" y="5264467"/>
+            <a:ext cx="0" cy="54483"/>
+          </a:xfrm>
+          <a:prstGeom prst="line">
+            <a:avLst/>
+          </a:prstGeom>
+          <a:ln w="12700">
+            <a:solidFill>
+              <a:srgbClr val="475569"/>
+            </a:solidFill>
+            <a:tailEnd type="triangle" w="sm" len="sm"/>
+          </a:ln>
+        </p:spPr>
+        <p:style>
+          <a:lnRef idx="2">
+            <a:schemeClr val="accent1"/>
+          </a:lnRef>
+          <a:fillRef idx="0">
+            <a:schemeClr val="accent1"/>
+          </a:fillRef>
+          <a:effectRef idx="1">
+            <a:schemeClr val="accent1"/>
+          </a:effectRef>
+          <a:fontRef idx="minor">
+            <a:schemeClr val="tx1"/>
+          </a:fontRef>
+        </p:style>
+      </p:cxnSp>
+      <p:cxnSp>
+        <p:nvCxnSpPr>
+          <p:cNvPr id="85" name="lineage:further RTNL breakup-&gt;RTNL-less FIB rules"/>
+          <p:cNvCxnSpPr/>
+          <p:nvPr/>
+        </p:nvCxnSpPr>
+        <p:spPr>
+          <a:xfrm>
+            <a:off x="13012491" y="5373814"/>
+            <a:ext cx="0" cy="54483"/>
+          </a:xfrm>
+          <a:prstGeom prst="line">
+            <a:avLst/>
+          </a:prstGeom>
+          <a:ln w="12700">
+            <a:solidFill>
+              <a:srgbClr val="475569"/>
+            </a:solidFill>
+            <a:tailEnd type="triangle" w="sm" len="sm"/>
+          </a:ln>
+        </p:spPr>
+        <p:style>
+          <a:lnRef idx="2">
+            <a:schemeClr val="accent1"/>
+          </a:lnRef>
+          <a:fillRef idx="0">
+            <a:schemeClr val="accent1"/>
+          </a:fillRef>
+          <a:effectRef idx="1">
+            <a:schemeClr val="accent1"/>
+          </a:effectRef>
+          <a:fontRef idx="minor">
+            <a:schemeClr val="tx1"/>
+          </a:fontRef>
+        </p:style>
+      </p:cxnSp>
+      <p:cxnSp>
+        <p:nvCxnSpPr>
+          <p:cNvPr id="86" name="lineage:structured drop reason-&gt;drop-reason expansion"/>
+          <p:cNvCxnSpPr/>
+          <p:nvPr/>
+        </p:nvCxnSpPr>
+        <p:spPr>
+          <a:xfrm>
+            <a:off x="10803902" y="5793295"/>
+            <a:ext cx="0" cy="54483"/>
+          </a:xfrm>
+          <a:prstGeom prst="line">
+            <a:avLst/>
+          </a:prstGeom>
+          <a:ln w="12700">
+            <a:solidFill>
+              <a:srgbClr val="475569"/>
+            </a:solidFill>
+            <a:tailEnd type="triangle" w="sm" len="sm"/>
+          </a:ln>
+        </p:spPr>
+        <p:style>
+          <a:lnRef idx="2">
+            <a:schemeClr val="accent1"/>
+          </a:lnRef>
+          <a:fillRef idx="0">
+            <a:schemeClr val="accent1"/>
+          </a:fillRef>
+          <a:effectRef idx="1">
+            <a:schemeClr val="accent1"/>
+          </a:effectRef>
+          <a:fontRef idx="minor">
+            <a:schemeClr val="tx1"/>
+          </a:fontRef>
+        </p:style>
+      </p:cxnSp>
+      <p:cxnSp>
+        <p:nvCxnSpPr>
+          <p:cNvPr id="87" name="lineage:switchdev-&gt;devlink"/>
+          <p:cNvCxnSpPr/>
+          <p:nvPr/>
+        </p:nvCxnSpPr>
+        <p:spPr>
+          <a:xfrm>
+            <a:off x="5867251" y="6322123"/>
+            <a:ext cx="0" cy="54483"/>
+          </a:xfrm>
+          <a:prstGeom prst="line">
+            <a:avLst/>
+          </a:prstGeom>
+          <a:ln w="12700">
+            <a:solidFill>
+              <a:srgbClr val="475569"/>
+            </a:solidFill>
+            <a:tailEnd type="triangle" w="sm" len="sm"/>
+          </a:ln>
+        </p:spPr>
+        <p:style>
+          <a:lnRef idx="2">
+            <a:schemeClr val="accent1"/>
+          </a:lnRef>
+          <a:fillRef idx="0">
+            <a:schemeClr val="accent1"/>
+          </a:fillRef>
+          <a:effectRef idx="1">
+            <a:schemeClr val="accent1"/>
+          </a:effectRef>
+          <a:fontRef idx="minor">
+            <a:schemeClr val="tx1"/>
+          </a:fontRef>
+        </p:style>
+      </p:cxnSp>
+      <p:cxnSp>
+        <p:nvCxnSpPr>
+          <p:cNvPr id="88" name="lineage:devlink:trunk"/>
+          <p:cNvCxnSpPr/>
+          <p:nvPr/>
+        </p:nvCxnSpPr>
+        <p:spPr>
+          <a:xfrm>
+            <a:off x="6746029" y="6431470"/>
+            <a:ext cx="0" cy="63627"/>
+          </a:xfrm>
+          <a:prstGeom prst="line">
+            <a:avLst/>
+          </a:prstGeom>
+          <a:ln w="12700">
+            <a:solidFill>
+              <a:srgbClr val="475569"/>
+            </a:solidFill>
+          </a:ln>
+        </p:spPr>
+        <p:style>
+          <a:lnRef idx="2">
+            <a:schemeClr val="accent1"/>
+          </a:lnRef>
+          <a:fillRef idx="0">
+            <a:schemeClr val="accent1"/>
+          </a:fillRef>
+          <a:effectRef idx="1">
+            <a:schemeClr val="accent1"/>
+          </a:effectRef>
+          <a:fontRef idx="minor">
+            <a:schemeClr val="tx1"/>
+          </a:fontRef>
+        </p:style>
+      </p:cxnSp>
+      <p:cxnSp>
+        <p:nvCxnSpPr>
+          <p:cNvPr id="89" name="lineage:devlink-&gt;devlink health:across"/>
+          <p:cNvCxnSpPr/>
+          <p:nvPr/>
+        </p:nvCxnSpPr>
+        <p:spPr>
+          <a:xfrm>
+            <a:off x="6746029" y="6495097"/>
+            <a:ext cx="1077063" cy="0"/>
+          </a:xfrm>
+          <a:prstGeom prst="line">
+            <a:avLst/>
+          </a:prstGeom>
+          <a:ln w="12700">
+            <a:solidFill>
+              <a:srgbClr val="475569"/>
+            </a:solidFill>
+            <a:tailEnd type="triangle" w="sm" len="sm"/>
+          </a:ln>
+        </p:spPr>
+        <p:style>
+          <a:lnRef idx="2">
+            <a:schemeClr val="accent1"/>
+          </a:lnRef>
+          <a:fillRef idx="0">
+            <a:schemeClr val="accent1"/>
+          </a:fillRef>
+          <a:effectRef idx="1">
+            <a:schemeClr val="accent1"/>
+          </a:effectRef>
+          <a:fontRef idx="minor">
+            <a:schemeClr val="tx1"/>
+          </a:fontRef>
+        </p:style>
+      </p:cxnSp>
+      <p:sp>
+        <p:nvSpPr>
+          <p:cNvPr id="90" name="band-label:PERFORMANCE"/>
           <p:cNvSpPr txBox="1"/>
           <p:nvPr/>
         </p:nvSpPr>
@@ -6114,7 +6809,7 @@
       </p:sp>
       <p:sp>
         <p:nvSpPr>
-          <p:cNvPr id="72" name="row:DQL / BQL:name"/>
+          <p:cNvPr id="91" name="row:DQL / BQL:name"/>
           <p:cNvSpPr txBox="1"/>
           <p:nvPr/>
         </p:nvSpPr>
@@ -6148,7 +6843,7 @@
       </p:sp>
       <p:cxnSp>
         <p:nvCxnSpPr>
-          <p:cNvPr id="73" name="row:DQL / BQL:development"/>
+          <p:cNvPr id="92" name="row:DQL / BQL:development"/>
           <p:cNvCxnSpPr/>
           <p:nvPr/>
         </p:nvCxnSpPr>
@@ -6184,7 +6879,7 @@
       </p:cxnSp>
       <p:sp>
         <p:nvSpPr>
-          <p:cNvPr id="74" name="row:DQL / BQL:start"/>
+          <p:cNvPr id="93" name="row:DQL / BQL:start"/>
           <p:cNvSpPr/>
           <p:nvPr/>
         </p:nvSpPr>
@@ -6228,7 +6923,7 @@
       </p:sp>
       <p:sp>
         <p:nvSpPr>
-          <p:cNvPr id="75" name="row:DQL / BQL:release:3.3"/>
+          <p:cNvPr id="94" name="row:DQL / BQL:release:3.3"/>
           <p:cNvSpPr/>
           <p:nvPr/>
         </p:nvSpPr>
@@ -6272,7 +6967,7 @@
       </p:sp>
       <p:sp>
         <p:nvSpPr>
-          <p:cNvPr id="76" name="row:DQL / BQL:label"/>
+          <p:cNvPr id="95" name="row:DQL / BQL:label"/>
           <p:cNvSpPr txBox="1"/>
           <p:nvPr/>
         </p:nvSpPr>
@@ -6306,7 +7001,7 @@
       </p:sp>
       <p:sp>
         <p:nvSpPr>
-          <p:cNvPr id="77" name="row:TSQ:name"/>
+          <p:cNvPr id="96" name="row:TSQ:name"/>
           <p:cNvSpPr txBox="1"/>
           <p:nvPr/>
         </p:nvSpPr>
@@ -6340,7 +7035,7 @@
       </p:sp>
       <p:cxnSp>
         <p:nvCxnSpPr>
-          <p:cNvPr id="78" name="row:TSQ:development"/>
+          <p:cNvPr id="97" name="row:TSQ:development"/>
           <p:cNvCxnSpPr/>
           <p:nvPr/>
         </p:nvCxnSpPr>
@@ -6376,7 +7071,7 @@
       </p:cxnSp>
       <p:sp>
         <p:nvSpPr>
-          <p:cNvPr id="79" name="row:TSQ:start"/>
+          <p:cNvPr id="98" name="row:TSQ:start"/>
           <p:cNvSpPr/>
           <p:nvPr/>
         </p:nvSpPr>
@@ -6420,7 +7115,7 @@
       </p:sp>
       <p:sp>
         <p:nvSpPr>
-          <p:cNvPr id="80" name="row:TSQ:release:3.6"/>
+          <p:cNvPr id="99" name="row:TSQ:release:3.6"/>
           <p:cNvSpPr/>
           <p:nvPr/>
         </p:nvSpPr>
@@ -6464,7 +7159,7 @@
       </p:sp>
       <p:sp>
         <p:nvSpPr>
-          <p:cNvPr id="81" name="row:TSQ:label"/>
+          <p:cNvPr id="100" name="row:TSQ:label"/>
           <p:cNvSpPr txBox="1"/>
           <p:nvPr/>
         </p:nvSpPr>
@@ -6498,13 +7193,205 @@
       </p:sp>
       <p:sp>
         <p:nvSpPr>
-          <p:cNvPr id="82" name="row:sch_fq / TCP pacing:name"/>
+          <p:cNvPr id="101" name="row:SO_BUSY_POLL:name"/>
           <p:cNvSpPr txBox="1"/>
           <p:nvPr/>
         </p:nvSpPr>
         <p:spPr>
           <a:xfrm>
             <a:off x="1325880" y="1772983"/>
+            <a:ext cx="1572768" cy="219456"/>
+          </a:xfrm>
+          <a:prstGeom prst="rect">
+            <a:avLst/>
+          </a:prstGeom>
+          <a:noFill/>
+        </p:spPr>
+        <p:txBody>
+          <a:bodyPr wrap="square" anchor="ctr" lIns="0" rIns="0" tIns="0" bIns="0">
+            <a:noAutofit/>
+          </a:bodyPr>
+          <a:lstStyle/>
+          <a:p>
+            <a:pPr algn="r"/>
+            <a:r>
+              <a:rPr sz="850" b="0" i="0">
+                <a:solidFill>
+                  <a:srgbClr val="1F2937"/>
+                </a:solidFill>
+              </a:rPr>
+              <a:t>SO_BUSY_POLL</a:t>
+            </a:r>
+          </a:p>
+        </p:txBody>
+      </p:sp>
+      <p:cxnSp>
+        <p:nvCxnSpPr>
+          <p:cNvPr id="102" name="row:SO_BUSY_POLL:development"/>
+          <p:cNvCxnSpPr/>
+          <p:nvPr/>
+        </p:nvCxnSpPr>
+        <p:spPr>
+          <a:xfrm>
+            <a:off x="4392377" y="1882711"/>
+            <a:ext cx="477753" cy="0"/>
+          </a:xfrm>
+          <a:prstGeom prst="line">
+            <a:avLst/>
+          </a:prstGeom>
+          <a:ln w="12700">
+            <a:solidFill>
+              <a:srgbClr val="2563EB"/>
+            </a:solidFill>
+            <a:prstDash val="dash"/>
+          </a:ln>
+        </p:spPr>
+        <p:style>
+          <a:lnRef idx="2">
+            <a:schemeClr val="accent1"/>
+          </a:lnRef>
+          <a:fillRef idx="0">
+            <a:schemeClr val="accent1"/>
+          </a:fillRef>
+          <a:effectRef idx="1">
+            <a:schemeClr val="accent1"/>
+          </a:effectRef>
+          <a:fontRef idx="minor">
+            <a:schemeClr val="tx1"/>
+          </a:fontRef>
+        </p:style>
+      </p:cxnSp>
+      <p:sp>
+        <p:nvSpPr>
+          <p:cNvPr id="103" name="row:SO_BUSY_POLL:start"/>
+          <p:cNvSpPr/>
+          <p:nvPr/>
+        </p:nvSpPr>
+        <p:spPr>
+          <a:xfrm>
+            <a:off x="4360373" y="1850707"/>
+            <a:ext cx="64008" cy="64008"/>
+          </a:xfrm>
+          <a:prstGeom prst="ellipse">
+            <a:avLst/>
+          </a:prstGeom>
+          <a:solidFill>
+            <a:srgbClr val="FFFFFF"/>
+          </a:solidFill>
+          <a:ln w="12700">
+            <a:solidFill>
+              <a:srgbClr val="2563EB"/>
+            </a:solidFill>
+          </a:ln>
+          <a:effectLst/>
+        </p:spPr>
+        <p:style>
+          <a:lnRef idx="1">
+            <a:schemeClr val="accent1"/>
+          </a:lnRef>
+          <a:fillRef idx="3">
+            <a:schemeClr val="accent1"/>
+          </a:fillRef>
+          <a:effectRef idx="2">
+            <a:schemeClr val="accent1"/>
+          </a:effectRef>
+          <a:fontRef idx="minor">
+            <a:schemeClr val="lt1"/>
+          </a:fontRef>
+        </p:style>
+        <p:txBody>
+          <a:bodyPr rtlCol="0" anchor="ctr"/>
+          <a:lstStyle/>
+          <a:p/>
+        </p:txBody>
+      </p:sp>
+      <p:sp>
+        <p:nvSpPr>
+          <p:cNvPr id="104" name="row:SO_BUSY_POLL:release:3.11"/>
+          <p:cNvSpPr/>
+          <p:nvPr/>
+        </p:nvSpPr>
+        <p:spPr>
+          <a:xfrm>
+            <a:off x="4826696" y="1839277"/>
+            <a:ext cx="86868" cy="86868"/>
+          </a:xfrm>
+          <a:prstGeom prst="ellipse">
+            <a:avLst/>
+          </a:prstGeom>
+          <a:solidFill>
+            <a:srgbClr val="2563EB"/>
+          </a:solidFill>
+          <a:ln w="12700">
+            <a:solidFill>
+              <a:srgbClr val="2563EB"/>
+            </a:solidFill>
+          </a:ln>
+          <a:effectLst/>
+        </p:spPr>
+        <p:style>
+          <a:lnRef idx="1">
+            <a:schemeClr val="accent1"/>
+          </a:lnRef>
+          <a:fillRef idx="3">
+            <a:schemeClr val="accent1"/>
+          </a:fillRef>
+          <a:effectRef idx="2">
+            <a:schemeClr val="accent1"/>
+          </a:effectRef>
+          <a:fontRef idx="minor">
+            <a:schemeClr val="lt1"/>
+          </a:fontRef>
+        </p:style>
+        <p:txBody>
+          <a:bodyPr rtlCol="0" anchor="ctr"/>
+          <a:lstStyle/>
+          <a:p/>
+        </p:txBody>
+      </p:sp>
+      <p:sp>
+        <p:nvSpPr>
+          <p:cNvPr id="105" name="row:SO_BUSY_POLL:label"/>
+          <p:cNvSpPr txBox="1"/>
+          <p:nvPr/>
+        </p:nvSpPr>
+        <p:spPr>
+          <a:xfrm>
+            <a:off x="4943282" y="1772983"/>
+            <a:ext cx="731520" cy="219456"/>
+          </a:xfrm>
+          <a:prstGeom prst="rect">
+            <a:avLst/>
+          </a:prstGeom>
+          <a:noFill/>
+        </p:spPr>
+        <p:txBody>
+          <a:bodyPr wrap="square" anchor="ctr" lIns="0" rIns="0" tIns="0" bIns="0">
+            <a:noAutofit/>
+          </a:bodyPr>
+          <a:lstStyle/>
+          <a:p>
+            <a:pPr algn="l"/>
+            <a:r>
+              <a:rPr sz="800" b="1" i="0">
+                <a:solidFill>
+                  <a:srgbClr val="1F2937"/>
+                </a:solidFill>
+              </a:rPr>
+              <a:t>3.11</a:t>
+            </a:r>
+          </a:p>
+        </p:txBody>
+      </p:sp>
+      <p:sp>
+        <p:nvSpPr>
+          <p:cNvPr id="106" name="row:sch_fq / TCP pacing:name"/>
+          <p:cNvSpPr txBox="1"/>
+          <p:nvPr/>
+        </p:nvSpPr>
+        <p:spPr>
+          <a:xfrm>
+            <a:off x="1325880" y="1882330"/>
             <a:ext cx="1572768" cy="219456"/>
           </a:xfrm>
           <a:prstGeom prst="rect">
@@ -6532,13 +7419,13 @@
       </p:sp>
       <p:cxnSp>
         <p:nvCxnSpPr>
-          <p:cNvPr id="83" name="row:sch_fq / TCP pacing:development"/>
+          <p:cNvPr id="107" name="row:sch_fq / TCP pacing:development"/>
           <p:cNvCxnSpPr/>
           <p:nvPr/>
         </p:nvCxnSpPr>
         <p:spPr>
           <a:xfrm>
-            <a:off x="4253503" y="1882711"/>
+            <a:off x="4253503" y="1992058"/>
             <a:ext cx="734495" cy="0"/>
           </a:xfrm>
           <a:prstGeom prst="line">
@@ -6568,13 +7455,13 @@
       </p:cxnSp>
       <p:sp>
         <p:nvSpPr>
-          <p:cNvPr id="84" name="row:sch_fq / TCP pacing:start"/>
+          <p:cNvPr id="108" name="row:sch_fq / TCP pacing:start"/>
           <p:cNvSpPr/>
           <p:nvPr/>
         </p:nvSpPr>
         <p:spPr>
           <a:xfrm>
-            <a:off x="4221499" y="1850707"/>
+            <a:off x="4221499" y="1960054"/>
             <a:ext cx="64008" cy="64008"/>
           </a:xfrm>
           <a:prstGeom prst="ellipse">
@@ -6612,13 +7499,13 @@
       </p:sp>
       <p:sp>
         <p:nvSpPr>
-          <p:cNvPr id="85" name="row:sch_fq / TCP pacing:release:3.12"/>
+          <p:cNvPr id="109" name="row:sch_fq / TCP pacing:release:3.12"/>
           <p:cNvSpPr/>
           <p:nvPr/>
         </p:nvSpPr>
         <p:spPr>
           <a:xfrm>
-            <a:off x="4944564" y="1839277"/>
+            <a:off x="4944564" y="1948624"/>
             <a:ext cx="86868" cy="86868"/>
           </a:xfrm>
           <a:prstGeom prst="ellipse">
@@ -6656,13 +7543,13 @@
       </p:sp>
       <p:sp>
         <p:nvSpPr>
-          <p:cNvPr id="86" name="row:sch_fq / TCP pacing:label"/>
+          <p:cNvPr id="110" name="row:sch_fq / TCP pacing:label"/>
           <p:cNvSpPr txBox="1"/>
           <p:nvPr/>
         </p:nvSpPr>
         <p:spPr>
           <a:xfrm>
-            <a:off x="5061150" y="1772983"/>
+            <a:off x="5061150" y="1882330"/>
             <a:ext cx="731520" cy="219456"/>
           </a:xfrm>
           <a:prstGeom prst="rect">
@@ -6690,199 +7577,7 @@
       </p:sp>
       <p:sp>
         <p:nvSpPr>
-          <p:cNvPr id="87" name="row:SO_BUSY_POLL:name"/>
-          <p:cNvSpPr txBox="1"/>
-          <p:nvPr/>
-        </p:nvSpPr>
-        <p:spPr>
-          <a:xfrm>
-            <a:off x="1325880" y="1882330"/>
-            <a:ext cx="1572768" cy="219456"/>
-          </a:xfrm>
-          <a:prstGeom prst="rect">
-            <a:avLst/>
-          </a:prstGeom>
-          <a:noFill/>
-        </p:spPr>
-        <p:txBody>
-          <a:bodyPr wrap="square" anchor="ctr" lIns="0" rIns="0" tIns="0" bIns="0">
-            <a:noAutofit/>
-          </a:bodyPr>
-          <a:lstStyle/>
-          <a:p>
-            <a:pPr algn="r"/>
-            <a:r>
-              <a:rPr sz="850" b="0" i="0">
-                <a:solidFill>
-                  <a:srgbClr val="1F2937"/>
-                </a:solidFill>
-              </a:rPr>
-              <a:t>SO_BUSY_POLL</a:t>
-            </a:r>
-          </a:p>
-        </p:txBody>
-      </p:sp>
-      <p:cxnSp>
-        <p:nvCxnSpPr>
-          <p:cNvPr id="88" name="row:SO_BUSY_POLL:development"/>
-          <p:cNvCxnSpPr/>
-          <p:nvPr/>
-        </p:nvCxnSpPr>
-        <p:spPr>
-          <a:xfrm>
-            <a:off x="4392377" y="1992058"/>
-            <a:ext cx="477753" cy="0"/>
-          </a:xfrm>
-          <a:prstGeom prst="line">
-            <a:avLst/>
-          </a:prstGeom>
-          <a:ln w="12700">
-            <a:solidFill>
-              <a:srgbClr val="2563EB"/>
-            </a:solidFill>
-            <a:prstDash val="dash"/>
-          </a:ln>
-        </p:spPr>
-        <p:style>
-          <a:lnRef idx="2">
-            <a:schemeClr val="accent1"/>
-          </a:lnRef>
-          <a:fillRef idx="0">
-            <a:schemeClr val="accent1"/>
-          </a:fillRef>
-          <a:effectRef idx="1">
-            <a:schemeClr val="accent1"/>
-          </a:effectRef>
-          <a:fontRef idx="minor">
-            <a:schemeClr val="tx1"/>
-          </a:fontRef>
-        </p:style>
-      </p:cxnSp>
-      <p:sp>
-        <p:nvSpPr>
-          <p:cNvPr id="89" name="row:SO_BUSY_POLL:start"/>
-          <p:cNvSpPr/>
-          <p:nvPr/>
-        </p:nvSpPr>
-        <p:spPr>
-          <a:xfrm>
-            <a:off x="4360373" y="1960054"/>
-            <a:ext cx="64008" cy="64008"/>
-          </a:xfrm>
-          <a:prstGeom prst="ellipse">
-            <a:avLst/>
-          </a:prstGeom>
-          <a:solidFill>
-            <a:srgbClr val="FFFFFF"/>
-          </a:solidFill>
-          <a:ln w="12700">
-            <a:solidFill>
-              <a:srgbClr val="2563EB"/>
-            </a:solidFill>
-          </a:ln>
-          <a:effectLst/>
-        </p:spPr>
-        <p:style>
-          <a:lnRef idx="1">
-            <a:schemeClr val="accent1"/>
-          </a:lnRef>
-          <a:fillRef idx="3">
-            <a:schemeClr val="accent1"/>
-          </a:fillRef>
-          <a:effectRef idx="2">
-            <a:schemeClr val="accent1"/>
-          </a:effectRef>
-          <a:fontRef idx="minor">
-            <a:schemeClr val="lt1"/>
-          </a:fontRef>
-        </p:style>
-        <p:txBody>
-          <a:bodyPr rtlCol="0" anchor="ctr"/>
-          <a:lstStyle/>
-          <a:p/>
-        </p:txBody>
-      </p:sp>
-      <p:sp>
-        <p:nvSpPr>
-          <p:cNvPr id="90" name="row:SO_BUSY_POLL:release:3.11"/>
-          <p:cNvSpPr/>
-          <p:nvPr/>
-        </p:nvSpPr>
-        <p:spPr>
-          <a:xfrm>
-            <a:off x="4826696" y="1948624"/>
-            <a:ext cx="86868" cy="86868"/>
-          </a:xfrm>
-          <a:prstGeom prst="ellipse">
-            <a:avLst/>
-          </a:prstGeom>
-          <a:solidFill>
-            <a:srgbClr val="2563EB"/>
-          </a:solidFill>
-          <a:ln w="12700">
-            <a:solidFill>
-              <a:srgbClr val="2563EB"/>
-            </a:solidFill>
-          </a:ln>
-          <a:effectLst/>
-        </p:spPr>
-        <p:style>
-          <a:lnRef idx="1">
-            <a:schemeClr val="accent1"/>
-          </a:lnRef>
-          <a:fillRef idx="3">
-            <a:schemeClr val="accent1"/>
-          </a:fillRef>
-          <a:effectRef idx="2">
-            <a:schemeClr val="accent1"/>
-          </a:effectRef>
-          <a:fontRef idx="minor">
-            <a:schemeClr val="lt1"/>
-          </a:fontRef>
-        </p:style>
-        <p:txBody>
-          <a:bodyPr rtlCol="0" anchor="ctr"/>
-          <a:lstStyle/>
-          <a:p/>
-        </p:txBody>
-      </p:sp>
-      <p:sp>
-        <p:nvSpPr>
-          <p:cNvPr id="91" name="row:SO_BUSY_POLL:label"/>
-          <p:cNvSpPr txBox="1"/>
-          <p:nvPr/>
-        </p:nvSpPr>
-        <p:spPr>
-          <a:xfrm>
-            <a:off x="4943282" y="1882330"/>
-            <a:ext cx="731520" cy="219456"/>
-          </a:xfrm>
-          <a:prstGeom prst="rect">
-            <a:avLst/>
-          </a:prstGeom>
-          <a:noFill/>
-        </p:spPr>
-        <p:txBody>
-          <a:bodyPr wrap="square" anchor="ctr" lIns="0" rIns="0" tIns="0" bIns="0">
-            <a:noAutofit/>
-          </a:bodyPr>
-          <a:lstStyle/>
-          <a:p>
-            <a:pPr algn="l"/>
-            <a:r>
-              <a:rPr sz="800" b="1" i="0">
-                <a:solidFill>
-                  <a:srgbClr val="1F2937"/>
-                </a:solidFill>
-              </a:rPr>
-              <a:t>3.11</a:t>
-            </a:r>
-          </a:p>
-        </p:txBody>
-      </p:sp>
-      <p:sp>
-        <p:nvSpPr>
-          <p:cNvPr id="92" name="row:SO_TXTIME / EDT / taprio:name"/>
+          <p:cNvPr id="111" name="row:SO_TXTIME / EDT / taprio:name"/>
           <p:cNvSpPr txBox="1"/>
           <p:nvPr/>
         </p:nvSpPr>
@@ -6916,7 +7611,7 @@
       </p:sp>
       <p:cxnSp>
         <p:nvCxnSpPr>
-          <p:cNvPr id="93" name="row:SO_TXTIME / EDT / taprio:development"/>
+          <p:cNvPr id="112" name="row:SO_TXTIME / EDT / taprio:development"/>
           <p:cNvCxnSpPr/>
           <p:nvPr/>
         </p:nvCxnSpPr>
@@ -6952,7 +7647,7 @@
       </p:cxnSp>
       <p:sp>
         <p:nvSpPr>
-          <p:cNvPr id="94" name="row:SO_TXTIME / EDT / taprio:start"/>
+          <p:cNvPr id="113" name="row:SO_TXTIME / EDT / taprio:start"/>
           <p:cNvSpPr/>
           <p:nvPr/>
         </p:nvSpPr>
@@ -6996,7 +7691,7 @@
       </p:sp>
       <p:cxnSp>
         <p:nvCxnSpPr>
-          <p:cNvPr id="95" name="row:SO_TXTIME / EDT / taprio:milestones"/>
+          <p:cNvPr id="114" name="row:SO_TXTIME / EDT / taprio:milestones"/>
           <p:cNvCxnSpPr/>
           <p:nvPr/>
         </p:nvCxnSpPr>
@@ -7031,7 +7726,7 @@
       </p:cxnSp>
       <p:sp>
         <p:nvSpPr>
-          <p:cNvPr id="96" name="row:SO_TXTIME / EDT / taprio:release:4.19"/>
+          <p:cNvPr id="115" name="row:SO_TXTIME / EDT / taprio:release:4.19"/>
           <p:cNvSpPr/>
           <p:nvPr/>
         </p:nvSpPr>
@@ -7075,7 +7770,7 @@
       </p:sp>
       <p:sp>
         <p:nvSpPr>
-          <p:cNvPr id="97" name="row:SO_TXTIME / EDT / taprio:release:4.20"/>
+          <p:cNvPr id="116" name="row:SO_TXTIME / EDT / taprio:release:4.20"/>
           <p:cNvSpPr/>
           <p:nvPr/>
         </p:nvSpPr>
@@ -7119,7 +7814,7 @@
       </p:sp>
       <p:sp>
         <p:nvSpPr>
-          <p:cNvPr id="98" name="row:SO_TXTIME / EDT / taprio:label"/>
+          <p:cNvPr id="117" name="row:SO_TXTIME / EDT / taprio:label"/>
           <p:cNvSpPr txBox="1"/>
           <p:nvPr/>
         </p:nvSpPr>
@@ -7153,7 +7848,7 @@
       </p:sp>
       <p:sp>
         <p:nvSpPr>
-          <p:cNvPr id="99" name="row:BIG TCP:name"/>
+          <p:cNvPr id="118" name="row:BIG TCP:name"/>
           <p:cNvSpPr txBox="1"/>
           <p:nvPr/>
         </p:nvSpPr>
@@ -7187,7 +7882,7 @@
       </p:sp>
       <p:cxnSp>
         <p:nvCxnSpPr>
-          <p:cNvPr id="100" name="row:BIG TCP:development"/>
+          <p:cNvPr id="119" name="row:BIG TCP:development"/>
           <p:cNvCxnSpPr/>
           <p:nvPr/>
         </p:nvCxnSpPr>
@@ -7223,7 +7918,7 @@
       </p:cxnSp>
       <p:sp>
         <p:nvSpPr>
-          <p:cNvPr id="101" name="row:BIG TCP:start"/>
+          <p:cNvPr id="120" name="row:BIG TCP:start"/>
           <p:cNvSpPr/>
           <p:nvPr/>
         </p:nvSpPr>
@@ -7267,7 +7962,7 @@
       </p:sp>
       <p:sp>
         <p:nvSpPr>
-          <p:cNvPr id="102" name="row:BIG TCP:release:5.19"/>
+          <p:cNvPr id="121" name="row:BIG TCP:release:5.19"/>
           <p:cNvSpPr/>
           <p:nvPr/>
         </p:nvSpPr>
@@ -7311,7 +8006,7 @@
       </p:sp>
       <p:sp>
         <p:nvSpPr>
-          <p:cNvPr id="103" name="row:BIG TCP:label"/>
+          <p:cNvPr id="122" name="row:BIG TCP:label"/>
           <p:cNvSpPr txBox="1"/>
           <p:nvPr/>
         </p:nvSpPr>
@@ -7345,7 +8040,7 @@
       </p:sp>
       <p:sp>
         <p:nvSpPr>
-          <p:cNvPr id="104" name="row:BIG TCP extensions:name"/>
+          <p:cNvPr id="123" name="row:BIG TCP extensions:name"/>
           <p:cNvSpPr txBox="1"/>
           <p:nvPr/>
         </p:nvSpPr>
@@ -7379,7 +8074,7 @@
       </p:sp>
       <p:cxnSp>
         <p:nvCxnSpPr>
-          <p:cNvPr id="105" name="row:BIG TCP extensions:milestones"/>
+          <p:cNvPr id="124" name="row:BIG TCP extensions:milestones"/>
           <p:cNvCxnSpPr/>
           <p:nvPr/>
         </p:nvCxnSpPr>
@@ -7414,7 +8109,7 @@
       </p:cxnSp>
       <p:sp>
         <p:nvSpPr>
-          <p:cNvPr id="106" name="row:BIG TCP extensions:release:6.3"/>
+          <p:cNvPr id="125" name="row:BIG TCP extensions:release:6.3"/>
           <p:cNvSpPr/>
           <p:nvPr/>
         </p:nvSpPr>
@@ -7458,7 +8153,7 @@
       </p:sp>
       <p:sp>
         <p:nvSpPr>
-          <p:cNvPr id="107" name="row:BIG TCP extensions:release:7.0"/>
+          <p:cNvPr id="126" name="row:BIG TCP extensions:release:7.0"/>
           <p:cNvSpPr/>
           <p:nvPr/>
         </p:nvSpPr>
@@ -7502,7 +8197,7 @@
       </p:sp>
       <p:sp>
         <p:nvSpPr>
-          <p:cNvPr id="108" name="row:BIG TCP extensions:release:7.3-rc"/>
+          <p:cNvPr id="127" name="row:BIG TCP extensions:release:7.3-rc"/>
           <p:cNvSpPr/>
           <p:nvPr/>
         </p:nvSpPr>
@@ -7546,13 +8241,13 @@
       </p:sp>
       <p:sp>
         <p:nvSpPr>
-          <p:cNvPr id="109" name="row:BIG TCP extensions:label"/>
+          <p:cNvPr id="128" name="row:BIG TCP extensions:label"/>
           <p:cNvSpPr txBox="1"/>
           <p:nvPr/>
         </p:nvSpPr>
         <p:spPr>
           <a:xfrm>
-            <a:off x="10301039" y="2210371"/>
+            <a:off x="9813163" y="2210371"/>
             <a:ext cx="1188720" cy="219456"/>
           </a:xfrm>
           <a:prstGeom prst="rect">
@@ -7580,7 +8275,7 @@
       </p:sp>
       <p:sp>
         <p:nvSpPr>
-          <p:cNvPr id="110" name="row:cake_mq:name"/>
+          <p:cNvPr id="129" name="row:cake_mq:name"/>
           <p:cNvSpPr txBox="1"/>
           <p:nvPr/>
         </p:nvSpPr>
@@ -7614,7 +8309,7 @@
       </p:sp>
       <p:cxnSp>
         <p:nvCxnSpPr>
-          <p:cNvPr id="111" name="row:cake_mq:development"/>
+          <p:cNvPr id="130" name="row:cake_mq:development"/>
           <p:cNvCxnSpPr/>
           <p:nvPr/>
         </p:nvCxnSpPr>
@@ -7650,7 +8345,7 @@
       </p:cxnSp>
       <p:sp>
         <p:nvSpPr>
-          <p:cNvPr id="112" name="row:cake_mq:start"/>
+          <p:cNvPr id="131" name="row:cake_mq:start"/>
           <p:cNvSpPr/>
           <p:nvPr/>
         </p:nvSpPr>
@@ -7694,7 +8389,7 @@
       </p:sp>
       <p:sp>
         <p:nvSpPr>
-          <p:cNvPr id="113" name="row:cake_mq:release:7.0"/>
+          <p:cNvPr id="132" name="row:cake_mq:release:7.0"/>
           <p:cNvSpPr/>
           <p:nvPr/>
         </p:nvSpPr>
@@ -7738,7 +8433,7 @@
       </p:sp>
       <p:sp>
         <p:nvSpPr>
-          <p:cNvPr id="114" name="row:cake_mq:label"/>
+          <p:cNvPr id="133" name="row:cake_mq:label"/>
           <p:cNvSpPr txBox="1"/>
           <p:nvPr/>
         </p:nvSpPr>
@@ -7772,7 +8467,7 @@
       </p:sp>
       <p:sp>
         <p:nvSpPr>
-          <p:cNvPr id="115" name="band-label:PROGRAMMABILITY"/>
+          <p:cNvPr id="134" name="band-label:PROGRAMMABILITY"/>
           <p:cNvSpPr txBox="1"/>
           <p:nvPr/>
         </p:nvSpPr>
@@ -7807,7 +8502,7 @@
       </p:sp>
       <p:sp>
         <p:nvSpPr>
-          <p:cNvPr id="116" name="row:eBPF foundation:name"/>
+          <p:cNvPr id="135" name="row:eBPF foundation:name"/>
           <p:cNvSpPr txBox="1"/>
           <p:nvPr/>
         </p:nvSpPr>
@@ -7841,7 +8536,7 @@
       </p:sp>
       <p:cxnSp>
         <p:nvCxnSpPr>
-          <p:cNvPr id="117" name="row:eBPF foundation:development"/>
+          <p:cNvPr id="136" name="row:eBPF foundation:development"/>
           <p:cNvCxnSpPr/>
           <p:nvPr/>
         </p:nvCxnSpPr>
@@ -7877,7 +8572,7 @@
       </p:cxnSp>
       <p:sp>
         <p:nvSpPr>
-          <p:cNvPr id="118" name="row:eBPF foundation:start"/>
+          <p:cNvPr id="137" name="row:eBPF foundation:start"/>
           <p:cNvSpPr/>
           <p:nvPr/>
         </p:nvSpPr>
@@ -7921,7 +8616,7 @@
       </p:sp>
       <p:sp>
         <p:nvSpPr>
-          <p:cNvPr id="119" name="row:eBPF foundation:release:3.18"/>
+          <p:cNvPr id="138" name="row:eBPF foundation:release:3.18"/>
           <p:cNvSpPr/>
           <p:nvPr/>
         </p:nvSpPr>
@@ -7965,7 +8660,7 @@
       </p:sp>
       <p:sp>
         <p:nvSpPr>
-          <p:cNvPr id="120" name="row:eBPF foundation:label"/>
+          <p:cNvPr id="139" name="row:eBPF foundation:label"/>
           <p:cNvSpPr txBox="1"/>
           <p:nvPr/>
         </p:nvSpPr>
@@ -7999,7 +8694,7 @@
       </p:sp>
       <p:sp>
         <p:nvSpPr>
-          <p:cNvPr id="121" name="row:TC BPF:name"/>
+          <p:cNvPr id="140" name="row:TC BPF:name"/>
           <p:cNvSpPr txBox="1"/>
           <p:nvPr/>
         </p:nvSpPr>
@@ -8033,7 +8728,7 @@
       </p:sp>
       <p:cxnSp>
         <p:nvCxnSpPr>
-          <p:cNvPr id="122" name="row:TC BPF:development"/>
+          <p:cNvPr id="141" name="row:TC BPF:development"/>
           <p:cNvCxnSpPr/>
           <p:nvPr/>
         </p:nvCxnSpPr>
@@ -8069,7 +8764,7 @@
       </p:cxnSp>
       <p:sp>
         <p:nvSpPr>
-          <p:cNvPr id="123" name="row:TC BPF:start"/>
+          <p:cNvPr id="142" name="row:TC BPF:start"/>
           <p:cNvSpPr/>
           <p:nvPr/>
         </p:nvSpPr>
@@ -8113,7 +8808,7 @@
       </p:sp>
       <p:sp>
         <p:nvSpPr>
-          <p:cNvPr id="124" name="row:TC BPF:release:4.1"/>
+          <p:cNvPr id="143" name="row:TC BPF:release:4.1"/>
           <p:cNvSpPr/>
           <p:nvPr/>
         </p:nvSpPr>
@@ -8157,7 +8852,7 @@
       </p:sp>
       <p:sp>
         <p:nvSpPr>
-          <p:cNvPr id="125" name="row:TC BPF:label"/>
+          <p:cNvPr id="144" name="row:TC BPF:label"/>
           <p:cNvSpPr txBox="1"/>
           <p:nvPr/>
         </p:nvSpPr>
@@ -8191,13 +8886,397 @@
       </p:sp>
       <p:sp>
         <p:nvSpPr>
-          <p:cNvPr id="126" name="row:XDP:name"/>
+          <p:cNvPr id="145" name="row:TCX:name"/>
           <p:cNvSpPr txBox="1"/>
           <p:nvPr/>
         </p:nvSpPr>
         <p:spPr>
           <a:xfrm>
             <a:off x="1325880" y="2739199"/>
+            <a:ext cx="1572768" cy="219456"/>
+          </a:xfrm>
+          <a:prstGeom prst="rect">
+            <a:avLst/>
+          </a:prstGeom>
+          <a:noFill/>
+        </p:spPr>
+        <p:txBody>
+          <a:bodyPr wrap="square" anchor="ctr" lIns="0" rIns="0" tIns="0" bIns="0">
+            <a:noAutofit/>
+          </a:bodyPr>
+          <a:lstStyle/>
+          <a:p>
+            <a:pPr algn="r"/>
+            <a:r>
+              <a:rPr sz="850" b="0" i="0">
+                <a:solidFill>
+                  <a:srgbClr val="1F2937"/>
+                </a:solidFill>
+              </a:rPr>
+              <a:t>TCX</a:t>
+            </a:r>
+          </a:p>
+        </p:txBody>
+      </p:sp>
+      <p:cxnSp>
+        <p:nvCxnSpPr>
+          <p:cNvPr id="146" name="row:TCX:development"/>
+          <p:cNvCxnSpPr/>
+          <p:nvPr/>
+        </p:nvCxnSpPr>
+        <p:spPr>
+          <a:xfrm>
+            <a:off x="11058353" y="2848927"/>
+            <a:ext cx="865765" cy="0"/>
+          </a:xfrm>
+          <a:prstGeom prst="line">
+            <a:avLst/>
+          </a:prstGeom>
+          <a:ln w="12700">
+            <a:solidFill>
+              <a:srgbClr val="EA580C"/>
+            </a:solidFill>
+            <a:prstDash val="dash"/>
+          </a:ln>
+        </p:spPr>
+        <p:style>
+          <a:lnRef idx="2">
+            <a:schemeClr val="accent1"/>
+          </a:lnRef>
+          <a:fillRef idx="0">
+            <a:schemeClr val="accent1"/>
+          </a:fillRef>
+          <a:effectRef idx="1">
+            <a:schemeClr val="accent1"/>
+          </a:effectRef>
+          <a:fontRef idx="minor">
+            <a:schemeClr val="tx1"/>
+          </a:fontRef>
+        </p:style>
+      </p:cxnSp>
+      <p:sp>
+        <p:nvSpPr>
+          <p:cNvPr id="147" name="row:TCX:start"/>
+          <p:cNvSpPr/>
+          <p:nvPr/>
+        </p:nvSpPr>
+        <p:spPr>
+          <a:xfrm>
+            <a:off x="11026349" y="2816923"/>
+            <a:ext cx="64008" cy="64008"/>
+          </a:xfrm>
+          <a:prstGeom prst="ellipse">
+            <a:avLst/>
+          </a:prstGeom>
+          <a:solidFill>
+            <a:srgbClr val="FFFFFF"/>
+          </a:solidFill>
+          <a:ln w="12700">
+            <a:solidFill>
+              <a:srgbClr val="EA580C"/>
+            </a:solidFill>
+          </a:ln>
+          <a:effectLst/>
+        </p:spPr>
+        <p:style>
+          <a:lnRef idx="1">
+            <a:schemeClr val="accent1"/>
+          </a:lnRef>
+          <a:fillRef idx="3">
+            <a:schemeClr val="accent1"/>
+          </a:fillRef>
+          <a:effectRef idx="2">
+            <a:schemeClr val="accent1"/>
+          </a:effectRef>
+          <a:fontRef idx="minor">
+            <a:schemeClr val="lt1"/>
+          </a:fontRef>
+        </p:style>
+        <p:txBody>
+          <a:bodyPr rtlCol="0" anchor="ctr"/>
+          <a:lstStyle/>
+          <a:p/>
+        </p:txBody>
+      </p:sp>
+      <p:sp>
+        <p:nvSpPr>
+          <p:cNvPr id="148" name="row:TCX:release:6.6"/>
+          <p:cNvSpPr/>
+          <p:nvPr/>
+        </p:nvSpPr>
+        <p:spPr>
+          <a:xfrm>
+            <a:off x="11880684" y="2805493"/>
+            <a:ext cx="86868" cy="86868"/>
+          </a:xfrm>
+          <a:prstGeom prst="ellipse">
+            <a:avLst/>
+          </a:prstGeom>
+          <a:solidFill>
+            <a:srgbClr val="EA580C"/>
+          </a:solidFill>
+          <a:ln w="12700">
+            <a:solidFill>
+              <a:srgbClr val="EA580C"/>
+            </a:solidFill>
+          </a:ln>
+          <a:effectLst/>
+        </p:spPr>
+        <p:style>
+          <a:lnRef idx="1">
+            <a:schemeClr val="accent1"/>
+          </a:lnRef>
+          <a:fillRef idx="3">
+            <a:schemeClr val="accent1"/>
+          </a:fillRef>
+          <a:effectRef idx="2">
+            <a:schemeClr val="accent1"/>
+          </a:effectRef>
+          <a:fontRef idx="minor">
+            <a:schemeClr val="lt1"/>
+          </a:fontRef>
+        </p:style>
+        <p:txBody>
+          <a:bodyPr rtlCol="0" anchor="ctr"/>
+          <a:lstStyle/>
+          <a:p/>
+        </p:txBody>
+      </p:sp>
+      <p:sp>
+        <p:nvSpPr>
+          <p:cNvPr id="149" name="row:TCX:label"/>
+          <p:cNvSpPr txBox="1"/>
+          <p:nvPr/>
+        </p:nvSpPr>
+        <p:spPr>
+          <a:xfrm>
+            <a:off x="11997270" y="2739199"/>
+            <a:ext cx="731520" cy="219456"/>
+          </a:xfrm>
+          <a:prstGeom prst="rect">
+            <a:avLst/>
+          </a:prstGeom>
+          <a:noFill/>
+        </p:spPr>
+        <p:txBody>
+          <a:bodyPr wrap="square" anchor="ctr" lIns="0" rIns="0" tIns="0" bIns="0">
+            <a:noAutofit/>
+          </a:bodyPr>
+          <a:lstStyle/>
+          <a:p>
+            <a:pPr algn="l"/>
+            <a:r>
+              <a:rPr sz="800" b="1" i="0">
+                <a:solidFill>
+                  <a:srgbClr val="1F2937"/>
+                </a:solidFill>
+              </a:rPr>
+              <a:t>6.6</a:t>
+            </a:r>
+          </a:p>
+        </p:txBody>
+      </p:sp>
+      <p:sp>
+        <p:nvSpPr>
+          <p:cNvPr id="150" name="row:netkit:name"/>
+          <p:cNvSpPr txBox="1"/>
+          <p:nvPr/>
+        </p:nvSpPr>
+        <p:spPr>
+          <a:xfrm>
+            <a:off x="1325880" y="2848546"/>
+            <a:ext cx="1572768" cy="219456"/>
+          </a:xfrm>
+          <a:prstGeom prst="rect">
+            <a:avLst/>
+          </a:prstGeom>
+          <a:noFill/>
+        </p:spPr>
+        <p:txBody>
+          <a:bodyPr wrap="square" anchor="ctr" lIns="0" rIns="0" tIns="0" bIns="0">
+            <a:noAutofit/>
+          </a:bodyPr>
+          <a:lstStyle/>
+          <a:p>
+            <a:pPr algn="r"/>
+            <a:r>
+              <a:rPr sz="850" b="0" i="0">
+                <a:solidFill>
+                  <a:srgbClr val="1F2937"/>
+                </a:solidFill>
+              </a:rPr>
+              <a:t>netkit</a:t>
+            </a:r>
+          </a:p>
+        </p:txBody>
+      </p:sp>
+      <p:cxnSp>
+        <p:nvCxnSpPr>
+          <p:cNvPr id="151" name="row:netkit:development"/>
+          <p:cNvCxnSpPr/>
+          <p:nvPr/>
+        </p:nvCxnSpPr>
+        <p:spPr>
+          <a:xfrm>
+            <a:off x="11197228" y="2958274"/>
+            <a:ext cx="858541" cy="0"/>
+          </a:xfrm>
+          <a:prstGeom prst="line">
+            <a:avLst/>
+          </a:prstGeom>
+          <a:ln w="12700">
+            <a:solidFill>
+              <a:srgbClr val="EA580C"/>
+            </a:solidFill>
+            <a:prstDash val="dash"/>
+          </a:ln>
+        </p:spPr>
+        <p:style>
+          <a:lnRef idx="2">
+            <a:schemeClr val="accent1"/>
+          </a:lnRef>
+          <a:fillRef idx="0">
+            <a:schemeClr val="accent1"/>
+          </a:fillRef>
+          <a:effectRef idx="1">
+            <a:schemeClr val="accent1"/>
+          </a:effectRef>
+          <a:fontRef idx="minor">
+            <a:schemeClr val="tx1"/>
+          </a:fontRef>
+        </p:style>
+      </p:cxnSp>
+      <p:sp>
+        <p:nvSpPr>
+          <p:cNvPr id="152" name="row:netkit:start"/>
+          <p:cNvSpPr/>
+          <p:nvPr/>
+        </p:nvSpPr>
+        <p:spPr>
+          <a:xfrm>
+            <a:off x="11165224" y="2926270"/>
+            <a:ext cx="64008" cy="64008"/>
+          </a:xfrm>
+          <a:prstGeom prst="ellipse">
+            <a:avLst/>
+          </a:prstGeom>
+          <a:solidFill>
+            <a:srgbClr val="FFFFFF"/>
+          </a:solidFill>
+          <a:ln w="12700">
+            <a:solidFill>
+              <a:srgbClr val="EA580C"/>
+            </a:solidFill>
+          </a:ln>
+          <a:effectLst/>
+        </p:spPr>
+        <p:style>
+          <a:lnRef idx="1">
+            <a:schemeClr val="accent1"/>
+          </a:lnRef>
+          <a:fillRef idx="3">
+            <a:schemeClr val="accent1"/>
+          </a:fillRef>
+          <a:effectRef idx="2">
+            <a:schemeClr val="accent1"/>
+          </a:effectRef>
+          <a:fontRef idx="minor">
+            <a:schemeClr val="lt1"/>
+          </a:fontRef>
+        </p:style>
+        <p:txBody>
+          <a:bodyPr rtlCol="0" anchor="ctr"/>
+          <a:lstStyle/>
+          <a:p/>
+        </p:txBody>
+      </p:sp>
+      <p:sp>
+        <p:nvSpPr>
+          <p:cNvPr id="153" name="row:netkit:release:6.7"/>
+          <p:cNvSpPr/>
+          <p:nvPr/>
+        </p:nvSpPr>
+        <p:spPr>
+          <a:xfrm>
+            <a:off x="12012335" y="2914840"/>
+            <a:ext cx="86868" cy="86868"/>
+          </a:xfrm>
+          <a:prstGeom prst="ellipse">
+            <a:avLst/>
+          </a:prstGeom>
+          <a:solidFill>
+            <a:srgbClr val="EA580C"/>
+          </a:solidFill>
+          <a:ln w="12700">
+            <a:solidFill>
+              <a:srgbClr val="EA580C"/>
+            </a:solidFill>
+          </a:ln>
+          <a:effectLst/>
+        </p:spPr>
+        <p:style>
+          <a:lnRef idx="1">
+            <a:schemeClr val="accent1"/>
+          </a:lnRef>
+          <a:fillRef idx="3">
+            <a:schemeClr val="accent1"/>
+          </a:fillRef>
+          <a:effectRef idx="2">
+            <a:schemeClr val="accent1"/>
+          </a:effectRef>
+          <a:fontRef idx="minor">
+            <a:schemeClr val="lt1"/>
+          </a:fontRef>
+        </p:style>
+        <p:txBody>
+          <a:bodyPr rtlCol="0" anchor="ctr"/>
+          <a:lstStyle/>
+          <a:p/>
+        </p:txBody>
+      </p:sp>
+      <p:sp>
+        <p:nvSpPr>
+          <p:cNvPr id="154" name="row:netkit:label"/>
+          <p:cNvSpPr txBox="1"/>
+          <p:nvPr/>
+        </p:nvSpPr>
+        <p:spPr>
+          <a:xfrm>
+            <a:off x="12128921" y="2848546"/>
+            <a:ext cx="731520" cy="219456"/>
+          </a:xfrm>
+          <a:prstGeom prst="rect">
+            <a:avLst/>
+          </a:prstGeom>
+          <a:noFill/>
+        </p:spPr>
+        <p:txBody>
+          <a:bodyPr wrap="square" anchor="ctr" lIns="0" rIns="0" tIns="0" bIns="0">
+            <a:noAutofit/>
+          </a:bodyPr>
+          <a:lstStyle/>
+          <a:p>
+            <a:pPr algn="l"/>
+            <a:r>
+              <a:rPr sz="800" b="1" i="0">
+                <a:solidFill>
+                  <a:srgbClr val="1F2937"/>
+                </a:solidFill>
+              </a:rPr>
+              <a:t>6.7</a:t>
+            </a:r>
+          </a:p>
+        </p:txBody>
+      </p:sp>
+      <p:sp>
+        <p:nvSpPr>
+          <p:cNvPr id="155" name="row:XDP:name"/>
+          <p:cNvSpPr txBox="1"/>
+          <p:nvPr/>
+        </p:nvSpPr>
+        <p:spPr>
+          <a:xfrm>
+            <a:off x="1325880" y="2957893"/>
             <a:ext cx="1572768" cy="219456"/>
           </a:xfrm>
           <a:prstGeom prst="rect">
@@ -8225,13 +9304,13 @@
       </p:sp>
       <p:cxnSp>
         <p:nvCxnSpPr>
-          <p:cNvPr id="127" name="row:XDP:development"/>
+          <p:cNvPr id="156" name="row:XDP:development"/>
           <p:cNvCxnSpPr/>
           <p:nvPr/>
         </p:nvCxnSpPr>
         <p:spPr>
           <a:xfrm>
-            <a:off x="6558819" y="2848927"/>
+            <a:off x="6558819" y="3067621"/>
             <a:ext cx="453362" cy="0"/>
           </a:xfrm>
           <a:prstGeom prst="line">
@@ -8261,13 +9340,13 @@
       </p:cxnSp>
       <p:sp>
         <p:nvSpPr>
-          <p:cNvPr id="128" name="row:XDP:start"/>
+          <p:cNvPr id="157" name="row:XDP:start"/>
           <p:cNvSpPr/>
           <p:nvPr/>
         </p:nvSpPr>
         <p:spPr>
           <a:xfrm>
-            <a:off x="6526815" y="2816923"/>
+            <a:off x="6526815" y="3035617"/>
             <a:ext cx="64008" cy="64008"/>
           </a:xfrm>
           <a:prstGeom prst="ellipse">
@@ -8305,13 +9384,13 @@
       </p:sp>
       <p:sp>
         <p:nvSpPr>
-          <p:cNvPr id="129" name="row:XDP:release:4.8"/>
+          <p:cNvPr id="158" name="row:XDP:release:4.8"/>
           <p:cNvSpPr/>
           <p:nvPr/>
         </p:nvSpPr>
         <p:spPr>
           <a:xfrm>
-            <a:off x="6968747" y="2805493"/>
+            <a:off x="6968747" y="3024187"/>
             <a:ext cx="86868" cy="86868"/>
           </a:xfrm>
           <a:prstGeom prst="ellipse">
@@ -8349,13 +9428,13 @@
       </p:sp>
       <p:sp>
         <p:nvSpPr>
-          <p:cNvPr id="130" name="row:XDP:label"/>
+          <p:cNvPr id="159" name="row:XDP:label"/>
           <p:cNvSpPr txBox="1"/>
           <p:nvPr/>
         </p:nvSpPr>
         <p:spPr>
           <a:xfrm>
-            <a:off x="7085333" y="2739199"/>
+            <a:off x="7085333" y="2957893"/>
             <a:ext cx="731520" cy="219456"/>
           </a:xfrm>
           <a:prstGeom prst="rect">
@@ -8383,13 +9462,13 @@
       </p:sp>
       <p:sp>
         <p:nvSpPr>
-          <p:cNvPr id="131" name="row:cgroup / LWT BPF:name"/>
+          <p:cNvPr id="160" name="row:cgroup / LWT BPF:name"/>
           <p:cNvSpPr txBox="1"/>
           <p:nvPr/>
         </p:nvSpPr>
         <p:spPr>
           <a:xfrm>
-            <a:off x="1325880" y="2848546"/>
+            <a:off x="1325880" y="3067240"/>
             <a:ext cx="1572768" cy="219456"/>
           </a:xfrm>
           <a:prstGeom prst="rect">
@@ -8417,13 +9496,13 @@
       </p:sp>
       <p:cxnSp>
         <p:nvCxnSpPr>
-          <p:cNvPr id="132" name="row:cgroup / LWT BPF:development"/>
+          <p:cNvPr id="161" name="row:cgroup / LWT BPF:development"/>
           <p:cNvCxnSpPr/>
           <p:nvPr/>
         </p:nvCxnSpPr>
         <p:spPr>
           <a:xfrm>
-            <a:off x="6475495" y="2958274"/>
+            <a:off x="6475495" y="3176968"/>
             <a:ext cx="801413" cy="0"/>
           </a:xfrm>
           <a:prstGeom prst="line">
@@ -8453,13 +9532,13 @@
       </p:cxnSp>
       <p:sp>
         <p:nvSpPr>
-          <p:cNvPr id="133" name="row:cgroup / LWT BPF:start"/>
+          <p:cNvPr id="162" name="row:cgroup / LWT BPF:start"/>
           <p:cNvSpPr/>
           <p:nvPr/>
         </p:nvSpPr>
         <p:spPr>
           <a:xfrm>
-            <a:off x="6443491" y="2926270"/>
+            <a:off x="6443491" y="3144964"/>
             <a:ext cx="64008" cy="64008"/>
           </a:xfrm>
           <a:prstGeom prst="ellipse">
@@ -8497,13 +9576,13 @@
       </p:sp>
       <p:sp>
         <p:nvSpPr>
-          <p:cNvPr id="134" name="row:cgroup / LWT BPF:release:4.10"/>
+          <p:cNvPr id="163" name="row:cgroup / LWT BPF:release:4.10"/>
           <p:cNvSpPr/>
           <p:nvPr/>
         </p:nvSpPr>
         <p:spPr>
           <a:xfrm>
-            <a:off x="7233474" y="2914840"/>
+            <a:off x="7233474" y="3133534"/>
             <a:ext cx="86868" cy="86868"/>
           </a:xfrm>
           <a:prstGeom prst="ellipse">
@@ -8541,13 +9620,13 @@
       </p:sp>
       <p:sp>
         <p:nvSpPr>
-          <p:cNvPr id="135" name="row:cgroup / LWT BPF:label"/>
+          <p:cNvPr id="164" name="row:cgroup / LWT BPF:label"/>
           <p:cNvSpPr txBox="1"/>
           <p:nvPr/>
         </p:nvSpPr>
         <p:spPr>
           <a:xfrm>
-            <a:off x="7350060" y="2848546"/>
+            <a:off x="7350060" y="3067240"/>
             <a:ext cx="731520" cy="219456"/>
           </a:xfrm>
           <a:prstGeom prst="rect">
@@ -8575,13 +9654,13 @@
       </p:sp>
       <p:sp>
         <p:nvSpPr>
-          <p:cNvPr id="136" name="row:SOCK_OPS / SOCKMAP:name"/>
+          <p:cNvPr id="165" name="row:SOCK_OPS / SOCKMAP:name"/>
           <p:cNvSpPr txBox="1"/>
           <p:nvPr/>
         </p:nvSpPr>
         <p:spPr>
           <a:xfrm>
-            <a:off x="1325880" y="2957893"/>
+            <a:off x="1325880" y="3176587"/>
             <a:ext cx="1572768" cy="219456"/>
           </a:xfrm>
           <a:prstGeom prst="rect">
@@ -8609,13 +9688,13 @@
       </p:sp>
       <p:cxnSp>
         <p:nvCxnSpPr>
-          <p:cNvPr id="137" name="row:SOCK_OPS / SOCKMAP:development"/>
+          <p:cNvPr id="166" name="row:SOCK_OPS / SOCKMAP:development"/>
           <p:cNvCxnSpPr/>
           <p:nvPr/>
         </p:nvCxnSpPr>
         <p:spPr>
           <a:xfrm>
-            <a:off x="6822681" y="3067621"/>
+            <a:off x="6822681" y="3286315"/>
             <a:ext cx="826840" cy="0"/>
           </a:xfrm>
           <a:prstGeom prst="line">
@@ -8645,13 +9724,13 @@
       </p:cxnSp>
       <p:sp>
         <p:nvSpPr>
-          <p:cNvPr id="138" name="row:SOCK_OPS / SOCKMAP:start"/>
+          <p:cNvPr id="167" name="row:SOCK_OPS / SOCKMAP:start"/>
           <p:cNvSpPr/>
           <p:nvPr/>
         </p:nvSpPr>
         <p:spPr>
           <a:xfrm>
-            <a:off x="6790677" y="3035617"/>
+            <a:off x="6790677" y="3254311"/>
             <a:ext cx="64008" cy="64008"/>
           </a:xfrm>
           <a:prstGeom prst="ellipse">
@@ -8689,13 +9768,13 @@
       </p:sp>
       <p:cxnSp>
         <p:nvCxnSpPr>
-          <p:cNvPr id="139" name="row:SOCK_OPS / SOCKMAP:milestones"/>
+          <p:cNvPr id="168" name="row:SOCK_OPS / SOCKMAP:milestones"/>
           <p:cNvCxnSpPr/>
           <p:nvPr/>
         </p:nvCxnSpPr>
         <p:spPr>
           <a:xfrm>
-            <a:off x="7649521" y="3067621"/>
+            <a:off x="7649521" y="3286315"/>
             <a:ext cx="133076" cy="0"/>
           </a:xfrm>
           <a:prstGeom prst="line">
@@ -8724,13 +9803,13 @@
       </p:cxnSp>
       <p:sp>
         <p:nvSpPr>
-          <p:cNvPr id="140" name="row:SOCK_OPS / SOCKMAP:release:4.13"/>
+          <p:cNvPr id="169" name="row:SOCK_OPS / SOCKMAP:release:4.13"/>
           <p:cNvSpPr/>
           <p:nvPr/>
         </p:nvSpPr>
         <p:spPr>
           <a:xfrm>
-            <a:off x="7606087" y="3024187"/>
+            <a:off x="7606087" y="3242881"/>
             <a:ext cx="86868" cy="86868"/>
           </a:xfrm>
           <a:prstGeom prst="ellipse">
@@ -8768,13 +9847,13 @@
       </p:sp>
       <p:sp>
         <p:nvSpPr>
-          <p:cNvPr id="141" name="row:SOCK_OPS / SOCKMAP:release:4.14"/>
+          <p:cNvPr id="170" name="row:SOCK_OPS / SOCKMAP:release:4.14"/>
           <p:cNvSpPr/>
           <p:nvPr/>
         </p:nvSpPr>
         <p:spPr>
           <a:xfrm>
-            <a:off x="7739163" y="3024187"/>
+            <a:off x="7739163" y="3242881"/>
             <a:ext cx="86868" cy="86868"/>
           </a:xfrm>
           <a:prstGeom prst="ellipse">
@@ -8812,13 +9891,13 @@
       </p:sp>
       <p:sp>
         <p:nvSpPr>
-          <p:cNvPr id="142" name="row:SOCK_OPS / SOCKMAP:label"/>
+          <p:cNvPr id="171" name="row:SOCK_OPS / SOCKMAP:label"/>
           <p:cNvSpPr txBox="1"/>
           <p:nvPr/>
         </p:nvSpPr>
         <p:spPr>
           <a:xfrm>
-            <a:off x="7855749" y="2957893"/>
+            <a:off x="7855749" y="3176587"/>
             <a:ext cx="731520" cy="219456"/>
           </a:xfrm>
           <a:prstGeom prst="rect">
@@ -8846,13 +9925,13 @@
       </p:sp>
       <p:sp>
         <p:nvSpPr>
-          <p:cNvPr id="143" name="row:BPF struct_ops:name"/>
+          <p:cNvPr id="172" name="row:BPF struct_ops:name"/>
           <p:cNvSpPr txBox="1"/>
           <p:nvPr/>
         </p:nvSpPr>
         <p:spPr>
           <a:xfrm>
-            <a:off x="1325880" y="3067240"/>
+            <a:off x="1325880" y="3285934"/>
             <a:ext cx="1572768" cy="219456"/>
           </a:xfrm>
           <a:prstGeom prst="rect">
@@ -8880,13 +9959,13 @@
       </p:sp>
       <p:cxnSp>
         <p:nvCxnSpPr>
-          <p:cNvPr id="144" name="row:BPF struct_ops:development"/>
+          <p:cNvPr id="173" name="row:BPF struct_ops:development"/>
           <p:cNvCxnSpPr/>
           <p:nvPr/>
         </p:nvCxnSpPr>
         <p:spPr>
           <a:xfrm>
-            <a:off x="8419738" y="3176968"/>
+            <a:off x="8419738" y="3395662"/>
             <a:ext cx="1014430" cy="0"/>
           </a:xfrm>
           <a:prstGeom prst="line">
@@ -8916,13 +9995,13 @@
       </p:cxnSp>
       <p:sp>
         <p:nvSpPr>
-          <p:cNvPr id="145" name="row:BPF struct_ops:start"/>
+          <p:cNvPr id="174" name="row:BPF struct_ops:start"/>
           <p:cNvSpPr/>
           <p:nvPr/>
         </p:nvSpPr>
         <p:spPr>
           <a:xfrm>
-            <a:off x="8387734" y="3144964"/>
+            <a:off x="8387734" y="3363658"/>
             <a:ext cx="64008" cy="64008"/>
           </a:xfrm>
           <a:prstGeom prst="ellipse">
@@ -8960,13 +10039,13 @@
       </p:sp>
       <p:sp>
         <p:nvSpPr>
-          <p:cNvPr id="146" name="row:BPF struct_ops:release:5.6"/>
+          <p:cNvPr id="175" name="row:BPF struct_ops:release:5.6"/>
           <p:cNvSpPr/>
           <p:nvPr/>
         </p:nvSpPr>
         <p:spPr>
           <a:xfrm>
-            <a:off x="9390734" y="3133534"/>
+            <a:off x="9390734" y="3352228"/>
             <a:ext cx="86868" cy="86868"/>
           </a:xfrm>
           <a:prstGeom prst="ellipse">
@@ -9004,13 +10083,13 @@
       </p:sp>
       <p:sp>
         <p:nvSpPr>
-          <p:cNvPr id="147" name="row:BPF struct_ops:label"/>
+          <p:cNvPr id="176" name="row:BPF struct_ops:label"/>
           <p:cNvSpPr txBox="1"/>
           <p:nvPr/>
         </p:nvSpPr>
         <p:spPr>
           <a:xfrm>
-            <a:off x="9507320" y="3067240"/>
+            <a:off x="9507320" y="3285934"/>
             <a:ext cx="731520" cy="219456"/>
           </a:xfrm>
           <a:prstGeom prst="rect">
@@ -9038,13 +10117,205 @@
       </p:sp>
       <p:sp>
         <p:nvSpPr>
-          <p:cNvPr id="148" name="row:SK_LOOKUP:name"/>
+          <p:cNvPr id="177" name="row:BPF qdisc:name"/>
           <p:cNvSpPr txBox="1"/>
           <p:nvPr/>
         </p:nvSpPr>
         <p:spPr>
           <a:xfrm>
-            <a:off x="1325880" y="3176587"/>
+            <a:off x="1325880" y="3395281"/>
+            <a:ext cx="1572768" cy="219456"/>
+          </a:xfrm>
+          <a:prstGeom prst="rect">
+            <a:avLst/>
+          </a:prstGeom>
+          <a:noFill/>
+        </p:spPr>
+        <p:txBody>
+          <a:bodyPr wrap="square" anchor="ctr" lIns="0" rIns="0" tIns="0" bIns="0">
+            <a:noAutofit/>
+          </a:bodyPr>
+          <a:lstStyle/>
+          <a:p>
+            <a:pPr algn="r"/>
+            <a:r>
+              <a:rPr sz="850" b="0" i="0">
+                <a:solidFill>
+                  <a:srgbClr val="1F2937"/>
+                </a:solidFill>
+              </a:rPr>
+              <a:t>BPF qdisc</a:t>
+            </a:r>
+          </a:p>
+        </p:txBody>
+      </p:sp>
+      <p:cxnSp>
+        <p:nvCxnSpPr>
+          <p:cNvPr id="178" name="row:BPF qdisc:development"/>
+          <p:cNvCxnSpPr/>
+          <p:nvPr/>
+        </p:nvCxnSpPr>
+        <p:spPr>
+          <a:xfrm>
+            <a:off x="12308224" y="3505009"/>
+            <a:ext cx="824036" cy="0"/>
+          </a:xfrm>
+          <a:prstGeom prst="line">
+            <a:avLst/>
+          </a:prstGeom>
+          <a:ln w="12700">
+            <a:solidFill>
+              <a:srgbClr val="EA580C"/>
+            </a:solidFill>
+            <a:prstDash val="dash"/>
+          </a:ln>
+        </p:spPr>
+        <p:style>
+          <a:lnRef idx="2">
+            <a:schemeClr val="accent1"/>
+          </a:lnRef>
+          <a:fillRef idx="0">
+            <a:schemeClr val="accent1"/>
+          </a:fillRef>
+          <a:effectRef idx="1">
+            <a:schemeClr val="accent1"/>
+          </a:effectRef>
+          <a:fontRef idx="minor">
+            <a:schemeClr val="tx1"/>
+          </a:fontRef>
+        </p:style>
+      </p:cxnSp>
+      <p:sp>
+        <p:nvSpPr>
+          <p:cNvPr id="179" name="row:BPF qdisc:start"/>
+          <p:cNvSpPr/>
+          <p:nvPr/>
+        </p:nvSpPr>
+        <p:spPr>
+          <a:xfrm>
+            <a:off x="12276220" y="3473005"/>
+            <a:ext cx="64008" cy="64008"/>
+          </a:xfrm>
+          <a:prstGeom prst="ellipse">
+            <a:avLst/>
+          </a:prstGeom>
+          <a:solidFill>
+            <a:srgbClr val="FFFFFF"/>
+          </a:solidFill>
+          <a:ln w="12700">
+            <a:solidFill>
+              <a:srgbClr val="EA580C"/>
+            </a:solidFill>
+          </a:ln>
+          <a:effectLst/>
+        </p:spPr>
+        <p:style>
+          <a:lnRef idx="1">
+            <a:schemeClr val="accent1"/>
+          </a:lnRef>
+          <a:fillRef idx="3">
+            <a:schemeClr val="accent1"/>
+          </a:fillRef>
+          <a:effectRef idx="2">
+            <a:schemeClr val="accent1"/>
+          </a:effectRef>
+          <a:fontRef idx="minor">
+            <a:schemeClr val="lt1"/>
+          </a:fontRef>
+        </p:style>
+        <p:txBody>
+          <a:bodyPr rtlCol="0" anchor="ctr"/>
+          <a:lstStyle/>
+          <a:p/>
+        </p:txBody>
+      </p:sp>
+      <p:sp>
+        <p:nvSpPr>
+          <p:cNvPr id="180" name="row:BPF qdisc:release:6.16"/>
+          <p:cNvSpPr/>
+          <p:nvPr/>
+        </p:nvSpPr>
+        <p:spPr>
+          <a:xfrm>
+            <a:off x="13088826" y="3461575"/>
+            <a:ext cx="86868" cy="86868"/>
+          </a:xfrm>
+          <a:prstGeom prst="ellipse">
+            <a:avLst/>
+          </a:prstGeom>
+          <a:solidFill>
+            <a:srgbClr val="EA580C"/>
+          </a:solidFill>
+          <a:ln w="12700">
+            <a:solidFill>
+              <a:srgbClr val="EA580C"/>
+            </a:solidFill>
+          </a:ln>
+          <a:effectLst/>
+        </p:spPr>
+        <p:style>
+          <a:lnRef idx="1">
+            <a:schemeClr val="accent1"/>
+          </a:lnRef>
+          <a:fillRef idx="3">
+            <a:schemeClr val="accent1"/>
+          </a:fillRef>
+          <a:effectRef idx="2">
+            <a:schemeClr val="accent1"/>
+          </a:effectRef>
+          <a:fontRef idx="minor">
+            <a:schemeClr val="lt1"/>
+          </a:fontRef>
+        </p:style>
+        <p:txBody>
+          <a:bodyPr rtlCol="0" anchor="ctr"/>
+          <a:lstStyle/>
+          <a:p/>
+        </p:txBody>
+      </p:sp>
+      <p:sp>
+        <p:nvSpPr>
+          <p:cNvPr id="181" name="row:BPF qdisc:label"/>
+          <p:cNvSpPr txBox="1"/>
+          <p:nvPr/>
+        </p:nvSpPr>
+        <p:spPr>
+          <a:xfrm>
+            <a:off x="13205412" y="3395281"/>
+            <a:ext cx="731520" cy="219456"/>
+          </a:xfrm>
+          <a:prstGeom prst="rect">
+            <a:avLst/>
+          </a:prstGeom>
+          <a:noFill/>
+        </p:spPr>
+        <p:txBody>
+          <a:bodyPr wrap="square" anchor="ctr" lIns="0" rIns="0" tIns="0" bIns="0">
+            <a:noAutofit/>
+          </a:bodyPr>
+          <a:lstStyle/>
+          <a:p>
+            <a:pPr algn="l"/>
+            <a:r>
+              <a:rPr sz="800" b="1" i="0">
+                <a:solidFill>
+                  <a:srgbClr val="1F2937"/>
+                </a:solidFill>
+              </a:rPr>
+              <a:t>6.16</a:t>
+            </a:r>
+          </a:p>
+        </p:txBody>
+      </p:sp>
+      <p:sp>
+        <p:nvSpPr>
+          <p:cNvPr id="182" name="row:SK_LOOKUP:name"/>
+          <p:cNvSpPr txBox="1"/>
+          <p:nvPr/>
+        </p:nvSpPr>
+        <p:spPr>
+          <a:xfrm>
+            <a:off x="1325880" y="3504628"/>
             <a:ext cx="1572768" cy="219456"/>
           </a:xfrm>
           <a:prstGeom prst="rect">
@@ -9072,13 +10343,13 @@
       </p:sp>
       <p:cxnSp>
         <p:nvCxnSpPr>
-          <p:cNvPr id="149" name="row:SK_LOOKUP:development"/>
+          <p:cNvPr id="183" name="row:SK_LOOKUP:development"/>
           <p:cNvCxnSpPr/>
           <p:nvPr/>
         </p:nvCxnSpPr>
         <p:spPr>
           <a:xfrm>
-            <a:off x="8905798" y="3286315"/>
+            <a:off x="8905798" y="3614356"/>
             <a:ext cx="900983" cy="0"/>
           </a:xfrm>
           <a:prstGeom prst="line">
@@ -9108,13 +10379,13 @@
       </p:cxnSp>
       <p:sp>
         <p:nvSpPr>
-          <p:cNvPr id="150" name="row:SK_LOOKUP:start"/>
+          <p:cNvPr id="184" name="row:SK_LOOKUP:start"/>
           <p:cNvSpPr/>
           <p:nvPr/>
         </p:nvSpPr>
         <p:spPr>
           <a:xfrm>
-            <a:off x="8873794" y="3254311"/>
+            <a:off x="8873794" y="3582352"/>
             <a:ext cx="64008" cy="64008"/>
           </a:xfrm>
           <a:prstGeom prst="ellipse">
@@ -9152,13 +10423,13 @@
       </p:sp>
       <p:sp>
         <p:nvSpPr>
-          <p:cNvPr id="151" name="row:SK_LOOKUP:release:5.9"/>
+          <p:cNvPr id="185" name="row:SK_LOOKUP:release:5.9"/>
           <p:cNvSpPr/>
           <p:nvPr/>
         </p:nvSpPr>
         <p:spPr>
           <a:xfrm>
-            <a:off x="9763347" y="3242881"/>
+            <a:off x="9763347" y="3570922"/>
             <a:ext cx="86868" cy="86868"/>
           </a:xfrm>
           <a:prstGeom prst="ellipse">
@@ -9196,13 +10467,13 @@
       </p:sp>
       <p:sp>
         <p:nvSpPr>
-          <p:cNvPr id="152" name="row:SK_LOOKUP:label"/>
+          <p:cNvPr id="186" name="row:SK_LOOKUP:label"/>
           <p:cNvSpPr txBox="1"/>
           <p:nvPr/>
         </p:nvSpPr>
         <p:spPr>
           <a:xfrm>
-            <a:off x="9879933" y="3176587"/>
+            <a:off x="9879933" y="3504628"/>
             <a:ext cx="731520" cy="219456"/>
           </a:xfrm>
           <a:prstGeom prst="rect">
@@ -9230,13 +10501,47 @@
       </p:sp>
       <p:sp>
         <p:nvSpPr>
-          <p:cNvPr id="153" name="row:TCX:name"/>
+          <p:cNvPr id="187" name="band-label:MEMORY"/>
           <p:cNvSpPr txBox="1"/>
           <p:nvPr/>
         </p:nvSpPr>
         <p:spPr>
           <a:xfrm>
-            <a:off x="1325880" y="3285934"/>
+            <a:off x="384048" y="3742182"/>
+            <a:ext cx="1051560" cy="1020699"/>
+          </a:xfrm>
+          <a:prstGeom prst="rect">
+            <a:avLst/>
+          </a:prstGeom>
+          <a:noFill/>
+        </p:spPr>
+        <p:txBody>
+          <a:bodyPr wrap="square" anchor="ctr" lIns="0" rIns="0" tIns="0" bIns="0">
+            <a:noAutofit/>
+          </a:bodyPr>
+          <a:lstStyle/>
+          <a:p>
+            <a:pPr algn="l"/>
+            <a:r>
+              <a:rPr sz="1000" b="1" i="0">
+                <a:solidFill>
+                  <a:srgbClr val="16A34A"/>
+                </a:solidFill>
+              </a:rPr>
+              <a:t>MEMORY</a:t>
+            </a:r>
+          </a:p>
+        </p:txBody>
+      </p:sp>
+      <p:sp>
+        <p:nvSpPr>
+          <p:cNvPr id="188" name="row:page_pool:name"/>
+          <p:cNvSpPr txBox="1"/>
+          <p:nvPr/>
+        </p:nvSpPr>
+        <p:spPr>
+          <a:xfrm>
+            <a:off x="1325880" y="3705415"/>
             <a:ext cx="1572768" cy="219456"/>
           </a:xfrm>
           <a:prstGeom prst="rect">
@@ -9257,28 +10562,28 @@
                   <a:srgbClr val="1F2937"/>
                 </a:solidFill>
               </a:rPr>
-              <a:t>TCX</a:t>
+              <a:t>page_pool</a:t>
             </a:r>
           </a:p>
         </p:txBody>
       </p:sp>
       <p:cxnSp>
         <p:nvCxnSpPr>
-          <p:cNvPr id="154" name="row:TCX:development"/>
+          <p:cNvPr id="189" name="row:page_pool:development"/>
           <p:cNvCxnSpPr/>
           <p:nvPr/>
         </p:nvCxnSpPr>
         <p:spPr>
           <a:xfrm>
-            <a:off x="11058353" y="3395662"/>
-            <a:ext cx="865765" cy="0"/>
+            <a:off x="6614369" y="3815143"/>
+            <a:ext cx="1687701" cy="0"/>
           </a:xfrm>
           <a:prstGeom prst="line">
             <a:avLst/>
           </a:prstGeom>
           <a:ln w="12700">
             <a:solidFill>
-              <a:srgbClr val="EA580C"/>
+              <a:srgbClr val="16A34A"/>
             </a:solidFill>
             <a:prstDash val="dash"/>
           </a:ln>
@@ -9300,13 +10605,13 @@
       </p:cxnSp>
       <p:sp>
         <p:nvSpPr>
-          <p:cNvPr id="155" name="row:TCX:start"/>
+          <p:cNvPr id="190" name="row:page_pool:start"/>
           <p:cNvSpPr/>
           <p:nvPr/>
         </p:nvSpPr>
         <p:spPr>
           <a:xfrm>
-            <a:off x="11026349" y="3363658"/>
+            <a:off x="6582365" y="3783139"/>
             <a:ext cx="64008" cy="64008"/>
           </a:xfrm>
           <a:prstGeom prst="ellipse">
@@ -9317,7 +10622,7 @@
           </a:solidFill>
           <a:ln w="12700">
             <a:solidFill>
-              <a:srgbClr val="EA580C"/>
+              <a:srgbClr val="16A34A"/>
             </a:solidFill>
           </a:ln>
           <a:effectLst/>
@@ -9344,24 +10649,24 @@
       </p:sp>
       <p:sp>
         <p:nvSpPr>
-          <p:cNvPr id="156" name="row:TCX:release:6.6"/>
+          <p:cNvPr id="191" name="row:page_pool:release:4.18"/>
           <p:cNvSpPr/>
           <p:nvPr/>
         </p:nvSpPr>
         <p:spPr>
           <a:xfrm>
-            <a:off x="11880684" y="3352228"/>
+            <a:off x="8258636" y="3771709"/>
             <a:ext cx="86868" cy="86868"/>
           </a:xfrm>
           <a:prstGeom prst="ellipse">
             <a:avLst/>
           </a:prstGeom>
           <a:solidFill>
-            <a:srgbClr val="EA580C"/>
+            <a:srgbClr val="16A34A"/>
           </a:solidFill>
           <a:ln w="12700">
             <a:solidFill>
-              <a:srgbClr val="EA580C"/>
+              <a:srgbClr val="16A34A"/>
             </a:solidFill>
           </a:ln>
           <a:effectLst/>
@@ -9388,13 +10693,1357 @@
       </p:sp>
       <p:sp>
         <p:nvSpPr>
-          <p:cNvPr id="157" name="row:TCX:label"/>
+          <p:cNvPr id="192" name="row:page_pool:label"/>
           <p:cNvSpPr txBox="1"/>
           <p:nvPr/>
         </p:nvSpPr>
         <p:spPr>
           <a:xfrm>
-            <a:off x="11997270" y="3285934"/>
+            <a:off x="8375222" y="3705415"/>
+            <a:ext cx="731520" cy="219456"/>
+          </a:xfrm>
+          <a:prstGeom prst="rect">
+            <a:avLst/>
+          </a:prstGeom>
+          <a:noFill/>
+        </p:spPr>
+        <p:txBody>
+          <a:bodyPr wrap="square" anchor="ctr" lIns="0" rIns="0" tIns="0" bIns="0">
+            <a:noAutofit/>
+          </a:bodyPr>
+          <a:lstStyle/>
+          <a:p>
+            <a:pPr algn="l"/>
+            <a:r>
+              <a:rPr sz="800" b="1" i="0">
+                <a:solidFill>
+                  <a:srgbClr val="1F2937"/>
+                </a:solidFill>
+              </a:rPr>
+              <a:t>4.18</a:t>
+            </a:r>
+          </a:p>
+        </p:txBody>
+      </p:sp>
+      <p:sp>
+        <p:nvSpPr>
+          <p:cNvPr id="193" name="row:Device Memory TCP RX:name"/>
+          <p:cNvSpPr txBox="1"/>
+          <p:nvPr/>
+        </p:nvSpPr>
+        <p:spPr>
+          <a:xfrm>
+            <a:off x="1325880" y="3814762"/>
+            <a:ext cx="1572768" cy="219456"/>
+          </a:xfrm>
+          <a:prstGeom prst="rect">
+            <a:avLst/>
+          </a:prstGeom>
+          <a:noFill/>
+        </p:spPr>
+        <p:txBody>
+          <a:bodyPr wrap="square" anchor="ctr" lIns="0" rIns="0" tIns="0" bIns="0">
+            <a:noAutofit/>
+          </a:bodyPr>
+          <a:lstStyle/>
+          <a:p>
+            <a:pPr algn="r"/>
+            <a:r>
+              <a:rPr sz="850" b="0" i="0">
+                <a:solidFill>
+                  <a:srgbClr val="1F2937"/>
+                </a:solidFill>
+              </a:rPr>
+              <a:t>Device Memory TCP RX</a:t>
+            </a:r>
+          </a:p>
+        </p:txBody>
+      </p:sp>
+      <p:cxnSp>
+        <p:nvCxnSpPr>
+          <p:cNvPr id="194" name="row:Device Memory TCP RX:development"/>
+          <p:cNvCxnSpPr/>
+          <p:nvPr/>
+        </p:nvCxnSpPr>
+        <p:spPr>
+          <a:xfrm>
+            <a:off x="11405539" y="3924490"/>
+            <a:ext cx="1249072" cy="0"/>
+          </a:xfrm>
+          <a:prstGeom prst="line">
+            <a:avLst/>
+          </a:prstGeom>
+          <a:ln w="12700">
+            <a:solidFill>
+              <a:srgbClr val="16A34A"/>
+            </a:solidFill>
+            <a:prstDash val="dash"/>
+          </a:ln>
+        </p:spPr>
+        <p:style>
+          <a:lnRef idx="2">
+            <a:schemeClr val="accent1"/>
+          </a:lnRef>
+          <a:fillRef idx="0">
+            <a:schemeClr val="accent1"/>
+          </a:fillRef>
+          <a:effectRef idx="1">
+            <a:schemeClr val="accent1"/>
+          </a:effectRef>
+          <a:fontRef idx="minor">
+            <a:schemeClr val="tx1"/>
+          </a:fontRef>
+        </p:style>
+      </p:cxnSp>
+      <p:sp>
+        <p:nvSpPr>
+          <p:cNvPr id="195" name="row:Device Memory TCP RX:start"/>
+          <p:cNvSpPr/>
+          <p:nvPr/>
+        </p:nvSpPr>
+        <p:spPr>
+          <a:xfrm>
+            <a:off x="11373535" y="3892486"/>
+            <a:ext cx="64008" cy="64008"/>
+          </a:xfrm>
+          <a:prstGeom prst="ellipse">
+            <a:avLst/>
+          </a:prstGeom>
+          <a:solidFill>
+            <a:srgbClr val="FFFFFF"/>
+          </a:solidFill>
+          <a:ln w="12700">
+            <a:solidFill>
+              <a:srgbClr val="16A34A"/>
+            </a:solidFill>
+          </a:ln>
+          <a:effectLst/>
+        </p:spPr>
+        <p:style>
+          <a:lnRef idx="1">
+            <a:schemeClr val="accent1"/>
+          </a:lnRef>
+          <a:fillRef idx="3">
+            <a:schemeClr val="accent1"/>
+          </a:fillRef>
+          <a:effectRef idx="2">
+            <a:schemeClr val="accent1"/>
+          </a:effectRef>
+          <a:fontRef idx="minor">
+            <a:schemeClr val="lt1"/>
+          </a:fontRef>
+        </p:style>
+        <p:txBody>
+          <a:bodyPr rtlCol="0" anchor="ctr"/>
+          <a:lstStyle/>
+          <a:p/>
+        </p:txBody>
+      </p:sp>
+      <p:sp>
+        <p:nvSpPr>
+          <p:cNvPr id="196" name="row:Device Memory TCP RX:release:6.12"/>
+          <p:cNvSpPr/>
+          <p:nvPr/>
+        </p:nvSpPr>
+        <p:spPr>
+          <a:xfrm>
+            <a:off x="12611177" y="3881056"/>
+            <a:ext cx="86868" cy="86868"/>
+          </a:xfrm>
+          <a:prstGeom prst="ellipse">
+            <a:avLst/>
+          </a:prstGeom>
+          <a:solidFill>
+            <a:srgbClr val="16A34A"/>
+          </a:solidFill>
+          <a:ln w="12700">
+            <a:solidFill>
+              <a:srgbClr val="16A34A"/>
+            </a:solidFill>
+          </a:ln>
+          <a:effectLst/>
+        </p:spPr>
+        <p:style>
+          <a:lnRef idx="1">
+            <a:schemeClr val="accent1"/>
+          </a:lnRef>
+          <a:fillRef idx="3">
+            <a:schemeClr val="accent1"/>
+          </a:fillRef>
+          <a:effectRef idx="2">
+            <a:schemeClr val="accent1"/>
+          </a:effectRef>
+          <a:fontRef idx="minor">
+            <a:schemeClr val="lt1"/>
+          </a:fontRef>
+        </p:style>
+        <p:txBody>
+          <a:bodyPr rtlCol="0" anchor="ctr"/>
+          <a:lstStyle/>
+          <a:p/>
+        </p:txBody>
+      </p:sp>
+      <p:sp>
+        <p:nvSpPr>
+          <p:cNvPr id="197" name="row:Device Memory TCP RX:label"/>
+          <p:cNvSpPr txBox="1"/>
+          <p:nvPr/>
+        </p:nvSpPr>
+        <p:spPr>
+          <a:xfrm>
+            <a:off x="12727763" y="3814762"/>
+            <a:ext cx="731520" cy="219456"/>
+          </a:xfrm>
+          <a:prstGeom prst="rect">
+            <a:avLst/>
+          </a:prstGeom>
+          <a:noFill/>
+        </p:spPr>
+        <p:txBody>
+          <a:bodyPr wrap="square" anchor="ctr" lIns="0" rIns="0" tIns="0" bIns="0">
+            <a:noAutofit/>
+          </a:bodyPr>
+          <a:lstStyle/>
+          <a:p>
+            <a:pPr algn="l"/>
+            <a:r>
+              <a:rPr sz="800" b="1" i="0">
+                <a:solidFill>
+                  <a:srgbClr val="1F2937"/>
+                </a:solidFill>
+              </a:rPr>
+              <a:t>6.12</a:t>
+            </a:r>
+          </a:p>
+        </p:txBody>
+      </p:sp>
+      <p:sp>
+        <p:nvSpPr>
+          <p:cNvPr id="198" name="row:Device Memory TCP TX:name"/>
+          <p:cNvSpPr txBox="1"/>
+          <p:nvPr/>
+        </p:nvSpPr>
+        <p:spPr>
+          <a:xfrm>
+            <a:off x="1325880" y="3924109"/>
+            <a:ext cx="1572768" cy="219456"/>
+          </a:xfrm>
+          <a:prstGeom prst="rect">
+            <a:avLst/>
+          </a:prstGeom>
+          <a:noFill/>
+        </p:spPr>
+        <p:txBody>
+          <a:bodyPr wrap="square" anchor="ctr" lIns="0" rIns="0" tIns="0" bIns="0">
+            <a:noAutofit/>
+          </a:bodyPr>
+          <a:lstStyle/>
+          <a:p>
+            <a:pPr algn="r"/>
+            <a:r>
+              <a:rPr sz="850" b="0" i="0">
+                <a:solidFill>
+                  <a:srgbClr val="1F2937"/>
+                </a:solidFill>
+              </a:rPr>
+              <a:t>Device Memory TCP TX</a:t>
+            </a:r>
+          </a:p>
+        </p:txBody>
+      </p:sp>
+      <p:cxnSp>
+        <p:nvCxnSpPr>
+          <p:cNvPr id="199" name="row:Device Memory TCP TX:development"/>
+          <p:cNvCxnSpPr/>
+          <p:nvPr/>
+        </p:nvCxnSpPr>
+        <p:spPr>
+          <a:xfrm>
+            <a:off x="12030475" y="4033837"/>
+            <a:ext cx="1101785" cy="0"/>
+          </a:xfrm>
+          <a:prstGeom prst="line">
+            <a:avLst/>
+          </a:prstGeom>
+          <a:ln w="12700">
+            <a:solidFill>
+              <a:srgbClr val="16A34A"/>
+            </a:solidFill>
+            <a:prstDash val="dash"/>
+          </a:ln>
+        </p:spPr>
+        <p:style>
+          <a:lnRef idx="2">
+            <a:schemeClr val="accent1"/>
+          </a:lnRef>
+          <a:fillRef idx="0">
+            <a:schemeClr val="accent1"/>
+          </a:fillRef>
+          <a:effectRef idx="1">
+            <a:schemeClr val="accent1"/>
+          </a:effectRef>
+          <a:fontRef idx="minor">
+            <a:schemeClr val="tx1"/>
+          </a:fontRef>
+        </p:style>
+      </p:cxnSp>
+      <p:sp>
+        <p:nvSpPr>
+          <p:cNvPr id="200" name="row:Device Memory TCP TX:start"/>
+          <p:cNvSpPr/>
+          <p:nvPr/>
+        </p:nvSpPr>
+        <p:spPr>
+          <a:xfrm>
+            <a:off x="11998471" y="4001833"/>
+            <a:ext cx="64008" cy="64008"/>
+          </a:xfrm>
+          <a:prstGeom prst="ellipse">
+            <a:avLst/>
+          </a:prstGeom>
+          <a:solidFill>
+            <a:srgbClr val="FFFFFF"/>
+          </a:solidFill>
+          <a:ln w="12700">
+            <a:solidFill>
+              <a:srgbClr val="16A34A"/>
+            </a:solidFill>
+          </a:ln>
+          <a:effectLst/>
+        </p:spPr>
+        <p:style>
+          <a:lnRef idx="1">
+            <a:schemeClr val="accent1"/>
+          </a:lnRef>
+          <a:fillRef idx="3">
+            <a:schemeClr val="accent1"/>
+          </a:fillRef>
+          <a:effectRef idx="2">
+            <a:schemeClr val="accent1"/>
+          </a:effectRef>
+          <a:fontRef idx="minor">
+            <a:schemeClr val="lt1"/>
+          </a:fontRef>
+        </p:style>
+        <p:txBody>
+          <a:bodyPr rtlCol="0" anchor="ctr"/>
+          <a:lstStyle/>
+          <a:p/>
+        </p:txBody>
+      </p:sp>
+      <p:sp>
+        <p:nvSpPr>
+          <p:cNvPr id="201" name="row:Device Memory TCP TX:release:6.16"/>
+          <p:cNvSpPr/>
+          <p:nvPr/>
+        </p:nvSpPr>
+        <p:spPr>
+          <a:xfrm>
+            <a:off x="13088826" y="3990403"/>
+            <a:ext cx="86868" cy="86868"/>
+          </a:xfrm>
+          <a:prstGeom prst="ellipse">
+            <a:avLst/>
+          </a:prstGeom>
+          <a:solidFill>
+            <a:srgbClr val="16A34A"/>
+          </a:solidFill>
+          <a:ln w="12700">
+            <a:solidFill>
+              <a:srgbClr val="16A34A"/>
+            </a:solidFill>
+          </a:ln>
+          <a:effectLst/>
+        </p:spPr>
+        <p:style>
+          <a:lnRef idx="1">
+            <a:schemeClr val="accent1"/>
+          </a:lnRef>
+          <a:fillRef idx="3">
+            <a:schemeClr val="accent1"/>
+          </a:fillRef>
+          <a:effectRef idx="2">
+            <a:schemeClr val="accent1"/>
+          </a:effectRef>
+          <a:fontRef idx="minor">
+            <a:schemeClr val="lt1"/>
+          </a:fontRef>
+        </p:style>
+        <p:txBody>
+          <a:bodyPr rtlCol="0" anchor="ctr"/>
+          <a:lstStyle/>
+          <a:p/>
+        </p:txBody>
+      </p:sp>
+      <p:sp>
+        <p:nvSpPr>
+          <p:cNvPr id="202" name="row:Device Memory TCP TX:label"/>
+          <p:cNvSpPr txBox="1"/>
+          <p:nvPr/>
+        </p:nvSpPr>
+        <p:spPr>
+          <a:xfrm>
+            <a:off x="13205412" y="3924109"/>
+            <a:ext cx="731520" cy="219456"/>
+          </a:xfrm>
+          <a:prstGeom prst="rect">
+            <a:avLst/>
+          </a:prstGeom>
+          <a:noFill/>
+        </p:spPr>
+        <p:txBody>
+          <a:bodyPr wrap="square" anchor="ctr" lIns="0" rIns="0" tIns="0" bIns="0">
+            <a:noAutofit/>
+          </a:bodyPr>
+          <a:lstStyle/>
+          <a:p>
+            <a:pPr algn="l"/>
+            <a:r>
+              <a:rPr sz="800" b="1" i="0">
+                <a:solidFill>
+                  <a:srgbClr val="1F2937"/>
+                </a:solidFill>
+              </a:rPr>
+              <a:t>6.16</a:t>
+            </a:r>
+          </a:p>
+        </p:txBody>
+      </p:sp>
+      <p:sp>
+        <p:nvSpPr>
+          <p:cNvPr id="203" name="row:io_uring ZCRX:name"/>
+          <p:cNvSpPr txBox="1"/>
+          <p:nvPr/>
+        </p:nvSpPr>
+        <p:spPr>
+          <a:xfrm>
+            <a:off x="1325880" y="4033456"/>
+            <a:ext cx="1572768" cy="219456"/>
+          </a:xfrm>
+          <a:prstGeom prst="rect">
+            <a:avLst/>
+          </a:prstGeom>
+          <a:noFill/>
+        </p:spPr>
+        <p:txBody>
+          <a:bodyPr wrap="square" anchor="ctr" lIns="0" rIns="0" tIns="0" bIns="0">
+            <a:noAutofit/>
+          </a:bodyPr>
+          <a:lstStyle/>
+          <a:p>
+            <a:pPr algn="r"/>
+            <a:r>
+              <a:rPr sz="850" b="0" i="0">
+                <a:solidFill>
+                  <a:srgbClr val="1F2937"/>
+                </a:solidFill>
+              </a:rPr>
+              <a:t>io_uring ZCRX</a:t>
+            </a:r>
+          </a:p>
+        </p:txBody>
+      </p:sp>
+      <p:cxnSp>
+        <p:nvCxnSpPr>
+          <p:cNvPr id="204" name="row:io_uring ZCRX:development"/>
+          <p:cNvCxnSpPr/>
+          <p:nvPr/>
+        </p:nvCxnSpPr>
+        <p:spPr>
+          <a:xfrm>
+            <a:off x="11613851" y="4143184"/>
+            <a:ext cx="1398640" cy="0"/>
+          </a:xfrm>
+          <a:prstGeom prst="line">
+            <a:avLst/>
+          </a:prstGeom>
+          <a:ln w="12700">
+            <a:solidFill>
+              <a:srgbClr val="16A34A"/>
+            </a:solidFill>
+            <a:prstDash val="dash"/>
+          </a:ln>
+        </p:spPr>
+        <p:style>
+          <a:lnRef idx="2">
+            <a:schemeClr val="accent1"/>
+          </a:lnRef>
+          <a:fillRef idx="0">
+            <a:schemeClr val="accent1"/>
+          </a:fillRef>
+          <a:effectRef idx="1">
+            <a:schemeClr val="accent1"/>
+          </a:effectRef>
+          <a:fontRef idx="minor">
+            <a:schemeClr val="tx1"/>
+          </a:fontRef>
+        </p:style>
+      </p:cxnSp>
+      <p:sp>
+        <p:nvSpPr>
+          <p:cNvPr id="205" name="row:io_uring ZCRX:start"/>
+          <p:cNvSpPr/>
+          <p:nvPr/>
+        </p:nvSpPr>
+        <p:spPr>
+          <a:xfrm>
+            <a:off x="11581847" y="4111180"/>
+            <a:ext cx="64008" cy="64008"/>
+          </a:xfrm>
+          <a:prstGeom prst="ellipse">
+            <a:avLst/>
+          </a:prstGeom>
+          <a:solidFill>
+            <a:srgbClr val="FFFFFF"/>
+          </a:solidFill>
+          <a:ln w="12700">
+            <a:solidFill>
+              <a:srgbClr val="16A34A"/>
+            </a:solidFill>
+          </a:ln>
+          <a:effectLst/>
+        </p:spPr>
+        <p:style>
+          <a:lnRef idx="1">
+            <a:schemeClr val="accent1"/>
+          </a:lnRef>
+          <a:fillRef idx="3">
+            <a:schemeClr val="accent1"/>
+          </a:fillRef>
+          <a:effectRef idx="2">
+            <a:schemeClr val="accent1"/>
+          </a:effectRef>
+          <a:fontRef idx="minor">
+            <a:schemeClr val="lt1"/>
+          </a:fontRef>
+        </p:style>
+        <p:txBody>
+          <a:bodyPr rtlCol="0" anchor="ctr"/>
+          <a:lstStyle/>
+          <a:p/>
+        </p:txBody>
+      </p:sp>
+      <p:sp>
+        <p:nvSpPr>
+          <p:cNvPr id="206" name="row:io_uring ZCRX:release:6.15"/>
+          <p:cNvSpPr/>
+          <p:nvPr/>
+        </p:nvSpPr>
+        <p:spPr>
+          <a:xfrm>
+            <a:off x="12969057" y="4099750"/>
+            <a:ext cx="86868" cy="86868"/>
+          </a:xfrm>
+          <a:prstGeom prst="ellipse">
+            <a:avLst/>
+          </a:prstGeom>
+          <a:solidFill>
+            <a:srgbClr val="16A34A"/>
+          </a:solidFill>
+          <a:ln w="12700">
+            <a:solidFill>
+              <a:srgbClr val="16A34A"/>
+            </a:solidFill>
+          </a:ln>
+          <a:effectLst/>
+        </p:spPr>
+        <p:style>
+          <a:lnRef idx="1">
+            <a:schemeClr val="accent1"/>
+          </a:lnRef>
+          <a:fillRef idx="3">
+            <a:schemeClr val="accent1"/>
+          </a:fillRef>
+          <a:effectRef idx="2">
+            <a:schemeClr val="accent1"/>
+          </a:effectRef>
+          <a:fontRef idx="minor">
+            <a:schemeClr val="lt1"/>
+          </a:fontRef>
+        </p:style>
+        <p:txBody>
+          <a:bodyPr rtlCol="0" anchor="ctr"/>
+          <a:lstStyle/>
+          <a:p/>
+        </p:txBody>
+      </p:sp>
+      <p:sp>
+        <p:nvSpPr>
+          <p:cNvPr id="207" name="row:io_uring ZCRX:label"/>
+          <p:cNvSpPr txBox="1"/>
+          <p:nvPr/>
+        </p:nvSpPr>
+        <p:spPr>
+          <a:xfrm>
+            <a:off x="13085643" y="4033456"/>
+            <a:ext cx="731520" cy="219456"/>
+          </a:xfrm>
+          <a:prstGeom prst="rect">
+            <a:avLst/>
+          </a:prstGeom>
+          <a:noFill/>
+        </p:spPr>
+        <p:txBody>
+          <a:bodyPr wrap="square" anchor="ctr" lIns="0" rIns="0" tIns="0" bIns="0">
+            <a:noAutofit/>
+          </a:bodyPr>
+          <a:lstStyle/>
+          <a:p>
+            <a:pPr algn="l"/>
+            <a:r>
+              <a:rPr sz="800" b="1" i="0">
+                <a:solidFill>
+                  <a:srgbClr val="1F2937"/>
+                </a:solidFill>
+              </a:rPr>
+              <a:t>6.15</a:t>
+            </a:r>
+          </a:p>
+        </p:txBody>
+      </p:sp>
+      <p:sp>
+        <p:nvSpPr>
+          <p:cNvPr id="208" name="row:large RX buffers (mem. providers):name"/>
+          <p:cNvSpPr txBox="1"/>
+          <p:nvPr/>
+        </p:nvSpPr>
+        <p:spPr>
+          <a:xfrm>
+            <a:off x="1325880" y="4142803"/>
+            <a:ext cx="1572768" cy="219456"/>
+          </a:xfrm>
+          <a:prstGeom prst="rect">
+            <a:avLst/>
+          </a:prstGeom>
+          <a:noFill/>
+        </p:spPr>
+        <p:txBody>
+          <a:bodyPr wrap="square" anchor="ctr" lIns="0" rIns="0" tIns="0" bIns="0">
+            <a:noAutofit/>
+          </a:bodyPr>
+          <a:lstStyle/>
+          <a:p>
+            <a:pPr algn="r"/>
+            <a:r>
+              <a:rPr sz="850" b="0" i="0">
+                <a:solidFill>
+                  <a:srgbClr val="1F2937"/>
+                </a:solidFill>
+              </a:rPr>
+              <a:t>large RX buffers (mem. providers)</a:t>
+            </a:r>
+          </a:p>
+        </p:txBody>
+      </p:sp>
+      <p:cxnSp>
+        <p:nvCxnSpPr>
+          <p:cNvPr id="209" name="row:large RX buffers (mem. providers):development"/>
+          <p:cNvCxnSpPr/>
+          <p:nvPr/>
+        </p:nvCxnSpPr>
+        <p:spPr>
+          <a:xfrm>
+            <a:off x="12724847" y="4252531"/>
+            <a:ext cx="900270" cy="0"/>
+          </a:xfrm>
+          <a:prstGeom prst="line">
+            <a:avLst/>
+          </a:prstGeom>
+          <a:ln w="12700">
+            <a:solidFill>
+              <a:srgbClr val="16A34A"/>
+            </a:solidFill>
+            <a:prstDash val="dash"/>
+          </a:ln>
+        </p:spPr>
+        <p:style>
+          <a:lnRef idx="2">
+            <a:schemeClr val="accent1"/>
+          </a:lnRef>
+          <a:fillRef idx="0">
+            <a:schemeClr val="accent1"/>
+          </a:fillRef>
+          <a:effectRef idx="1">
+            <a:schemeClr val="accent1"/>
+          </a:effectRef>
+          <a:fontRef idx="minor">
+            <a:schemeClr val="tx1"/>
+          </a:fontRef>
+        </p:style>
+      </p:cxnSp>
+      <p:sp>
+        <p:nvSpPr>
+          <p:cNvPr id="210" name="row:large RX buffers (mem. providers):start"/>
+          <p:cNvSpPr/>
+          <p:nvPr/>
+        </p:nvSpPr>
+        <p:spPr>
+          <a:xfrm>
+            <a:off x="12692843" y="4220527"/>
+            <a:ext cx="64008" cy="64008"/>
+          </a:xfrm>
+          <a:prstGeom prst="ellipse">
+            <a:avLst/>
+          </a:prstGeom>
+          <a:solidFill>
+            <a:srgbClr val="FFFFFF"/>
+          </a:solidFill>
+          <a:ln w="12700">
+            <a:solidFill>
+              <a:srgbClr val="16A34A"/>
+            </a:solidFill>
+          </a:ln>
+          <a:effectLst/>
+        </p:spPr>
+        <p:style>
+          <a:lnRef idx="1">
+            <a:schemeClr val="accent1"/>
+          </a:lnRef>
+          <a:fillRef idx="3">
+            <a:schemeClr val="accent1"/>
+          </a:fillRef>
+          <a:effectRef idx="2">
+            <a:schemeClr val="accent1"/>
+          </a:effectRef>
+          <a:fontRef idx="minor">
+            <a:schemeClr val="lt1"/>
+          </a:fontRef>
+        </p:style>
+        <p:txBody>
+          <a:bodyPr rtlCol="0" anchor="ctr"/>
+          <a:lstStyle/>
+          <a:p/>
+        </p:txBody>
+      </p:sp>
+      <p:sp>
+        <p:nvSpPr>
+          <p:cNvPr id="211" name="row:large RX buffers (mem. providers):release:7.0"/>
+          <p:cNvSpPr/>
+          <p:nvPr/>
+        </p:nvSpPr>
+        <p:spPr>
+          <a:xfrm>
+            <a:off x="13581683" y="4209097"/>
+            <a:ext cx="86868" cy="86868"/>
+          </a:xfrm>
+          <a:prstGeom prst="ellipse">
+            <a:avLst/>
+          </a:prstGeom>
+          <a:solidFill>
+            <a:srgbClr val="16A34A"/>
+          </a:solidFill>
+          <a:ln w="12700">
+            <a:solidFill>
+              <a:srgbClr val="16A34A"/>
+            </a:solidFill>
+          </a:ln>
+          <a:effectLst/>
+        </p:spPr>
+        <p:style>
+          <a:lnRef idx="1">
+            <a:schemeClr val="accent1"/>
+          </a:lnRef>
+          <a:fillRef idx="3">
+            <a:schemeClr val="accent1"/>
+          </a:fillRef>
+          <a:effectRef idx="2">
+            <a:schemeClr val="accent1"/>
+          </a:effectRef>
+          <a:fontRef idx="minor">
+            <a:schemeClr val="lt1"/>
+          </a:fontRef>
+        </p:style>
+        <p:txBody>
+          <a:bodyPr rtlCol="0" anchor="ctr"/>
+          <a:lstStyle/>
+          <a:p/>
+        </p:txBody>
+      </p:sp>
+      <p:sp>
+        <p:nvSpPr>
+          <p:cNvPr id="212" name="row:large RX buffers (mem. providers):label"/>
+          <p:cNvSpPr txBox="1"/>
+          <p:nvPr/>
+        </p:nvSpPr>
+        <p:spPr>
+          <a:xfrm>
+            <a:off x="13698269" y="4142803"/>
+            <a:ext cx="731520" cy="219456"/>
+          </a:xfrm>
+          <a:prstGeom prst="rect">
+            <a:avLst/>
+          </a:prstGeom>
+          <a:noFill/>
+        </p:spPr>
+        <p:txBody>
+          <a:bodyPr wrap="square" anchor="ctr" lIns="0" rIns="0" tIns="0" bIns="0">
+            <a:noAutofit/>
+          </a:bodyPr>
+          <a:lstStyle/>
+          <a:p>
+            <a:pPr algn="l"/>
+            <a:r>
+              <a:rPr sz="800" b="1" i="0">
+                <a:solidFill>
+                  <a:srgbClr val="1F2937"/>
+                </a:solidFill>
+              </a:rPr>
+              <a:t>7.0</a:t>
+            </a:r>
+          </a:p>
+        </p:txBody>
+      </p:sp>
+      <p:sp>
+        <p:nvSpPr>
+          <p:cNvPr id="213" name="row:AF_XDP:name"/>
+          <p:cNvSpPr txBox="1"/>
+          <p:nvPr/>
+        </p:nvSpPr>
+        <p:spPr>
+          <a:xfrm>
+            <a:off x="1325880" y="4252150"/>
+            <a:ext cx="1572768" cy="219456"/>
+          </a:xfrm>
+          <a:prstGeom prst="rect">
+            <a:avLst/>
+          </a:prstGeom>
+          <a:noFill/>
+        </p:spPr>
+        <p:txBody>
+          <a:bodyPr wrap="square" anchor="ctr" lIns="0" rIns="0" tIns="0" bIns="0">
+            <a:noAutofit/>
+          </a:bodyPr>
+          <a:lstStyle/>
+          <a:p>
+            <a:pPr algn="r"/>
+            <a:r>
+              <a:rPr sz="850" b="0" i="0">
+                <a:solidFill>
+                  <a:srgbClr val="1F2937"/>
+                </a:solidFill>
+              </a:rPr>
+              <a:t>AF_XDP</a:t>
+            </a:r>
+          </a:p>
+        </p:txBody>
+      </p:sp>
+      <p:cxnSp>
+        <p:nvCxnSpPr>
+          <p:cNvPr id="214" name="row:AF_XDP:development"/>
+          <p:cNvCxnSpPr/>
+          <p:nvPr/>
+        </p:nvCxnSpPr>
+        <p:spPr>
+          <a:xfrm>
+            <a:off x="7169867" y="4361878"/>
+            <a:ext cx="1132203" cy="0"/>
+          </a:xfrm>
+          <a:prstGeom prst="line">
+            <a:avLst/>
+          </a:prstGeom>
+          <a:ln w="12700">
+            <a:solidFill>
+              <a:srgbClr val="16A34A"/>
+            </a:solidFill>
+            <a:prstDash val="dash"/>
+          </a:ln>
+        </p:spPr>
+        <p:style>
+          <a:lnRef idx="2">
+            <a:schemeClr val="accent1"/>
+          </a:lnRef>
+          <a:fillRef idx="0">
+            <a:schemeClr val="accent1"/>
+          </a:fillRef>
+          <a:effectRef idx="1">
+            <a:schemeClr val="accent1"/>
+          </a:effectRef>
+          <a:fontRef idx="minor">
+            <a:schemeClr val="tx1"/>
+          </a:fontRef>
+        </p:style>
+      </p:cxnSp>
+      <p:sp>
+        <p:nvSpPr>
+          <p:cNvPr id="215" name="row:AF_XDP:start"/>
+          <p:cNvSpPr/>
+          <p:nvPr/>
+        </p:nvSpPr>
+        <p:spPr>
+          <a:xfrm>
+            <a:off x="7137863" y="4329874"/>
+            <a:ext cx="64008" cy="64008"/>
+          </a:xfrm>
+          <a:prstGeom prst="ellipse">
+            <a:avLst/>
+          </a:prstGeom>
+          <a:solidFill>
+            <a:srgbClr val="FFFFFF"/>
+          </a:solidFill>
+          <a:ln w="12700">
+            <a:solidFill>
+              <a:srgbClr val="16A34A"/>
+            </a:solidFill>
+          </a:ln>
+          <a:effectLst/>
+        </p:spPr>
+        <p:style>
+          <a:lnRef idx="1">
+            <a:schemeClr val="accent1"/>
+          </a:lnRef>
+          <a:fillRef idx="3">
+            <a:schemeClr val="accent1"/>
+          </a:fillRef>
+          <a:effectRef idx="2">
+            <a:schemeClr val="accent1"/>
+          </a:effectRef>
+          <a:fontRef idx="minor">
+            <a:schemeClr val="lt1"/>
+          </a:fontRef>
+        </p:style>
+        <p:txBody>
+          <a:bodyPr rtlCol="0" anchor="ctr"/>
+          <a:lstStyle/>
+          <a:p/>
+        </p:txBody>
+      </p:sp>
+      <p:sp>
+        <p:nvSpPr>
+          <p:cNvPr id="216" name="row:AF_XDP:release:4.18"/>
+          <p:cNvSpPr/>
+          <p:nvPr/>
+        </p:nvSpPr>
+        <p:spPr>
+          <a:xfrm>
+            <a:off x="8258636" y="4318444"/>
+            <a:ext cx="86868" cy="86868"/>
+          </a:xfrm>
+          <a:prstGeom prst="ellipse">
+            <a:avLst/>
+          </a:prstGeom>
+          <a:solidFill>
+            <a:srgbClr val="16A34A"/>
+          </a:solidFill>
+          <a:ln w="12700">
+            <a:solidFill>
+              <a:srgbClr val="16A34A"/>
+            </a:solidFill>
+          </a:ln>
+          <a:effectLst/>
+        </p:spPr>
+        <p:style>
+          <a:lnRef idx="1">
+            <a:schemeClr val="accent1"/>
+          </a:lnRef>
+          <a:fillRef idx="3">
+            <a:schemeClr val="accent1"/>
+          </a:fillRef>
+          <a:effectRef idx="2">
+            <a:schemeClr val="accent1"/>
+          </a:effectRef>
+          <a:fontRef idx="minor">
+            <a:schemeClr val="lt1"/>
+          </a:fontRef>
+        </p:style>
+        <p:txBody>
+          <a:bodyPr rtlCol="0" anchor="ctr"/>
+          <a:lstStyle/>
+          <a:p/>
+        </p:txBody>
+      </p:sp>
+      <p:sp>
+        <p:nvSpPr>
+          <p:cNvPr id="217" name="row:AF_XDP:label"/>
+          <p:cNvSpPr txBox="1"/>
+          <p:nvPr/>
+        </p:nvSpPr>
+        <p:spPr>
+          <a:xfrm>
+            <a:off x="8375222" y="4252150"/>
+            <a:ext cx="731520" cy="219456"/>
+          </a:xfrm>
+          <a:prstGeom prst="rect">
+            <a:avLst/>
+          </a:prstGeom>
+          <a:noFill/>
+        </p:spPr>
+        <p:txBody>
+          <a:bodyPr wrap="square" anchor="ctr" lIns="0" rIns="0" tIns="0" bIns="0">
+            <a:noAutofit/>
+          </a:bodyPr>
+          <a:lstStyle/>
+          <a:p>
+            <a:pPr algn="l"/>
+            <a:r>
+              <a:rPr sz="800" b="1" i="0">
+                <a:solidFill>
+                  <a:srgbClr val="1F2937"/>
+                </a:solidFill>
+              </a:rPr>
+              <a:t>4.18</a:t>
+            </a:r>
+          </a:p>
+        </p:txBody>
+      </p:sp>
+      <p:sp>
+        <p:nvSpPr>
+          <p:cNvPr id="218" name="row:XDP multi-buffer:name"/>
+          <p:cNvSpPr txBox="1"/>
+          <p:nvPr/>
+        </p:nvSpPr>
+        <p:spPr>
+          <a:xfrm>
+            <a:off x="1325880" y="4361497"/>
+            <a:ext cx="1572768" cy="219456"/>
+          </a:xfrm>
+          <a:prstGeom prst="rect">
+            <a:avLst/>
+          </a:prstGeom>
+          <a:noFill/>
+        </p:spPr>
+        <p:txBody>
+          <a:bodyPr wrap="square" anchor="ctr" lIns="0" rIns="0" tIns="0" bIns="0">
+            <a:noAutofit/>
+          </a:bodyPr>
+          <a:lstStyle/>
+          <a:p>
+            <a:pPr algn="r"/>
+            <a:r>
+              <a:rPr sz="850" b="0" i="0">
+                <a:solidFill>
+                  <a:srgbClr val="1F2937"/>
+                </a:solidFill>
+              </a:rPr>
+              <a:t>XDP multi-buffer</a:t>
+            </a:r>
+          </a:p>
+        </p:txBody>
+      </p:sp>
+      <p:cxnSp>
+        <p:nvCxnSpPr>
+          <p:cNvPr id="219" name="row:XDP multi-buffer:development"/>
+          <p:cNvCxnSpPr/>
+          <p:nvPr/>
+        </p:nvCxnSpPr>
+        <p:spPr>
+          <a:xfrm>
+            <a:off x="9947357" y="4471225"/>
+            <a:ext cx="976313" cy="0"/>
+          </a:xfrm>
+          <a:prstGeom prst="line">
+            <a:avLst/>
+          </a:prstGeom>
+          <a:ln w="12700">
+            <a:solidFill>
+              <a:srgbClr val="16A34A"/>
+            </a:solidFill>
+            <a:prstDash val="dash"/>
+          </a:ln>
+        </p:spPr>
+        <p:style>
+          <a:lnRef idx="2">
+            <a:schemeClr val="accent1"/>
+          </a:lnRef>
+          <a:fillRef idx="0">
+            <a:schemeClr val="accent1"/>
+          </a:fillRef>
+          <a:effectRef idx="1">
+            <a:schemeClr val="accent1"/>
+          </a:effectRef>
+          <a:fontRef idx="minor">
+            <a:schemeClr val="tx1"/>
+          </a:fontRef>
+        </p:style>
+      </p:cxnSp>
+      <p:sp>
+        <p:nvSpPr>
+          <p:cNvPr id="220" name="row:XDP multi-buffer:start"/>
+          <p:cNvSpPr/>
+          <p:nvPr/>
+        </p:nvSpPr>
+        <p:spPr>
+          <a:xfrm>
+            <a:off x="9915353" y="4439221"/>
+            <a:ext cx="64008" cy="64008"/>
+          </a:xfrm>
+          <a:prstGeom prst="ellipse">
+            <a:avLst/>
+          </a:prstGeom>
+          <a:solidFill>
+            <a:srgbClr val="FFFFFF"/>
+          </a:solidFill>
+          <a:ln w="12700">
+            <a:solidFill>
+              <a:srgbClr val="16A34A"/>
+            </a:solidFill>
+          </a:ln>
+          <a:effectLst/>
+        </p:spPr>
+        <p:style>
+          <a:lnRef idx="1">
+            <a:schemeClr val="accent1"/>
+          </a:lnRef>
+          <a:fillRef idx="3">
+            <a:schemeClr val="accent1"/>
+          </a:fillRef>
+          <a:effectRef idx="2">
+            <a:schemeClr val="accent1"/>
+          </a:effectRef>
+          <a:fontRef idx="minor">
+            <a:schemeClr val="lt1"/>
+          </a:fontRef>
+        </p:style>
+        <p:txBody>
+          <a:bodyPr rtlCol="0" anchor="ctr"/>
+          <a:lstStyle/>
+          <a:p/>
+        </p:txBody>
+      </p:sp>
+      <p:sp>
+        <p:nvSpPr>
+          <p:cNvPr id="221" name="row:XDP multi-buffer:release:5.18"/>
+          <p:cNvSpPr/>
+          <p:nvPr/>
+        </p:nvSpPr>
+        <p:spPr>
+          <a:xfrm>
+            <a:off x="10880236" y="4427791"/>
+            <a:ext cx="86868" cy="86868"/>
+          </a:xfrm>
+          <a:prstGeom prst="ellipse">
+            <a:avLst/>
+          </a:prstGeom>
+          <a:solidFill>
+            <a:srgbClr val="16A34A"/>
+          </a:solidFill>
+          <a:ln w="12700">
+            <a:solidFill>
+              <a:srgbClr val="16A34A"/>
+            </a:solidFill>
+          </a:ln>
+          <a:effectLst/>
+        </p:spPr>
+        <p:style>
+          <a:lnRef idx="1">
+            <a:schemeClr val="accent1"/>
+          </a:lnRef>
+          <a:fillRef idx="3">
+            <a:schemeClr val="accent1"/>
+          </a:fillRef>
+          <a:effectRef idx="2">
+            <a:schemeClr val="accent1"/>
+          </a:effectRef>
+          <a:fontRef idx="minor">
+            <a:schemeClr val="lt1"/>
+          </a:fontRef>
+        </p:style>
+        <p:txBody>
+          <a:bodyPr rtlCol="0" anchor="ctr"/>
+          <a:lstStyle/>
+          <a:p/>
+        </p:txBody>
+      </p:sp>
+      <p:sp>
+        <p:nvSpPr>
+          <p:cNvPr id="222" name="row:XDP multi-buffer:label"/>
+          <p:cNvSpPr txBox="1"/>
+          <p:nvPr/>
+        </p:nvSpPr>
+        <p:spPr>
+          <a:xfrm>
+            <a:off x="10996822" y="4361497"/>
+            <a:ext cx="731520" cy="219456"/>
+          </a:xfrm>
+          <a:prstGeom prst="rect">
+            <a:avLst/>
+          </a:prstGeom>
+          <a:noFill/>
+        </p:spPr>
+        <p:txBody>
+          <a:bodyPr wrap="square" anchor="ctr" lIns="0" rIns="0" tIns="0" bIns="0">
+            <a:noAutofit/>
+          </a:bodyPr>
+          <a:lstStyle/>
+          <a:p>
+            <a:pPr algn="l"/>
+            <a:r>
+              <a:rPr sz="800" b="1" i="0">
+                <a:solidFill>
+                  <a:srgbClr val="1F2937"/>
+                </a:solidFill>
+              </a:rPr>
+              <a:t>5.18</a:t>
+            </a:r>
+          </a:p>
+        </p:txBody>
+      </p:sp>
+      <p:sp>
+        <p:nvSpPr>
+          <p:cNvPr id="223" name="row:AF_XDP multi-buffer:name"/>
+          <p:cNvSpPr txBox="1"/>
+          <p:nvPr/>
+        </p:nvSpPr>
+        <p:spPr>
+          <a:xfrm>
+            <a:off x="1325880" y="4470844"/>
+            <a:ext cx="1572768" cy="219456"/>
+          </a:xfrm>
+          <a:prstGeom prst="rect">
+            <a:avLst/>
+          </a:prstGeom>
+          <a:noFill/>
+        </p:spPr>
+        <p:txBody>
+          <a:bodyPr wrap="square" anchor="ctr" lIns="0" rIns="0" tIns="0" bIns="0">
+            <a:noAutofit/>
+          </a:bodyPr>
+          <a:lstStyle/>
+          <a:p>
+            <a:pPr algn="r"/>
+            <a:r>
+              <a:rPr sz="850" b="0" i="0">
+                <a:solidFill>
+                  <a:srgbClr val="1F2937"/>
+                </a:solidFill>
+              </a:rPr>
+              <a:t>AF_XDP multi-buffer</a:t>
+            </a:r>
+          </a:p>
+        </p:txBody>
+      </p:sp>
+      <p:cxnSp>
+        <p:nvCxnSpPr>
+          <p:cNvPr id="224" name="row:AF_XDP multi-buffer:development"/>
+          <p:cNvCxnSpPr/>
+          <p:nvPr/>
+        </p:nvCxnSpPr>
+        <p:spPr>
+          <a:xfrm>
+            <a:off x="10641730" y="4580572"/>
+            <a:ext cx="1282388" cy="0"/>
+          </a:xfrm>
+          <a:prstGeom prst="line">
+            <a:avLst/>
+          </a:prstGeom>
+          <a:ln w="12700">
+            <a:solidFill>
+              <a:srgbClr val="16A34A"/>
+            </a:solidFill>
+            <a:prstDash val="dash"/>
+          </a:ln>
+        </p:spPr>
+        <p:style>
+          <a:lnRef idx="2">
+            <a:schemeClr val="accent1"/>
+          </a:lnRef>
+          <a:fillRef idx="0">
+            <a:schemeClr val="accent1"/>
+          </a:fillRef>
+          <a:effectRef idx="1">
+            <a:schemeClr val="accent1"/>
+          </a:effectRef>
+          <a:fontRef idx="minor">
+            <a:schemeClr val="tx1"/>
+          </a:fontRef>
+        </p:style>
+      </p:cxnSp>
+      <p:sp>
+        <p:nvSpPr>
+          <p:cNvPr id="225" name="row:AF_XDP multi-buffer:start"/>
+          <p:cNvSpPr/>
+          <p:nvPr/>
+        </p:nvSpPr>
+        <p:spPr>
+          <a:xfrm>
+            <a:off x="10609726" y="4548568"/>
+            <a:ext cx="64008" cy="64008"/>
+          </a:xfrm>
+          <a:prstGeom prst="ellipse">
+            <a:avLst/>
+          </a:prstGeom>
+          <a:solidFill>
+            <a:srgbClr val="FFFFFF"/>
+          </a:solidFill>
+          <a:ln w="12700">
+            <a:solidFill>
+              <a:srgbClr val="16A34A"/>
+            </a:solidFill>
+          </a:ln>
+          <a:effectLst/>
+        </p:spPr>
+        <p:style>
+          <a:lnRef idx="1">
+            <a:schemeClr val="accent1"/>
+          </a:lnRef>
+          <a:fillRef idx="3">
+            <a:schemeClr val="accent1"/>
+          </a:fillRef>
+          <a:effectRef idx="2">
+            <a:schemeClr val="accent1"/>
+          </a:effectRef>
+          <a:fontRef idx="minor">
+            <a:schemeClr val="lt1"/>
+          </a:fontRef>
+        </p:style>
+        <p:txBody>
+          <a:bodyPr rtlCol="0" anchor="ctr"/>
+          <a:lstStyle/>
+          <a:p/>
+        </p:txBody>
+      </p:sp>
+      <p:sp>
+        <p:nvSpPr>
+          <p:cNvPr id="226" name="row:AF_XDP multi-buffer:release:6.6"/>
+          <p:cNvSpPr/>
+          <p:nvPr/>
+        </p:nvSpPr>
+        <p:spPr>
+          <a:xfrm>
+            <a:off x="11880684" y="4537138"/>
+            <a:ext cx="86868" cy="86868"/>
+          </a:xfrm>
+          <a:prstGeom prst="ellipse">
+            <a:avLst/>
+          </a:prstGeom>
+          <a:solidFill>
+            <a:srgbClr val="16A34A"/>
+          </a:solidFill>
+          <a:ln w="12700">
+            <a:solidFill>
+              <a:srgbClr val="16A34A"/>
+            </a:solidFill>
+          </a:ln>
+          <a:effectLst/>
+        </p:spPr>
+        <p:style>
+          <a:lnRef idx="1">
+            <a:schemeClr val="accent1"/>
+          </a:lnRef>
+          <a:fillRef idx="3">
+            <a:schemeClr val="accent1"/>
+          </a:fillRef>
+          <a:effectRef idx="2">
+            <a:schemeClr val="accent1"/>
+          </a:effectRef>
+          <a:fontRef idx="minor">
+            <a:schemeClr val="lt1"/>
+          </a:fontRef>
+        </p:style>
+        <p:txBody>
+          <a:bodyPr rtlCol="0" anchor="ctr"/>
+          <a:lstStyle/>
+          <a:p/>
+        </p:txBody>
+      </p:sp>
+      <p:sp>
+        <p:nvSpPr>
+          <p:cNvPr id="227" name="row:AF_XDP multi-buffer:label"/>
+          <p:cNvSpPr txBox="1"/>
+          <p:nvPr/>
+        </p:nvSpPr>
+        <p:spPr>
+          <a:xfrm>
+            <a:off x="11997270" y="4470844"/>
             <a:ext cx="731520" cy="219456"/>
           </a:xfrm>
           <a:prstGeom prst="rect">
@@ -9422,1961 +12071,7 @@
       </p:sp>
       <p:sp>
         <p:nvSpPr>
-          <p:cNvPr id="158" name="row:netkit:name"/>
-          <p:cNvSpPr txBox="1"/>
-          <p:nvPr/>
-        </p:nvSpPr>
-        <p:spPr>
-          <a:xfrm>
-            <a:off x="1325880" y="3395281"/>
-            <a:ext cx="1572768" cy="219456"/>
-          </a:xfrm>
-          <a:prstGeom prst="rect">
-            <a:avLst/>
-          </a:prstGeom>
-          <a:noFill/>
-        </p:spPr>
-        <p:txBody>
-          <a:bodyPr wrap="square" anchor="ctr" lIns="0" rIns="0" tIns="0" bIns="0">
-            <a:noAutofit/>
-          </a:bodyPr>
-          <a:lstStyle/>
-          <a:p>
-            <a:pPr algn="r"/>
-            <a:r>
-              <a:rPr sz="850" b="0" i="0">
-                <a:solidFill>
-                  <a:srgbClr val="1F2937"/>
-                </a:solidFill>
-              </a:rPr>
-              <a:t>netkit</a:t>
-            </a:r>
-          </a:p>
-        </p:txBody>
-      </p:sp>
-      <p:cxnSp>
-        <p:nvCxnSpPr>
-          <p:cNvPr id="159" name="row:netkit:development"/>
-          <p:cNvCxnSpPr/>
-          <p:nvPr/>
-        </p:nvCxnSpPr>
-        <p:spPr>
-          <a:xfrm>
-            <a:off x="11197228" y="3505009"/>
-            <a:ext cx="858541" cy="0"/>
-          </a:xfrm>
-          <a:prstGeom prst="line">
-            <a:avLst/>
-          </a:prstGeom>
-          <a:ln w="12700">
-            <a:solidFill>
-              <a:srgbClr val="EA580C"/>
-            </a:solidFill>
-            <a:prstDash val="dash"/>
-          </a:ln>
-        </p:spPr>
-        <p:style>
-          <a:lnRef idx="2">
-            <a:schemeClr val="accent1"/>
-          </a:lnRef>
-          <a:fillRef idx="0">
-            <a:schemeClr val="accent1"/>
-          </a:fillRef>
-          <a:effectRef idx="1">
-            <a:schemeClr val="accent1"/>
-          </a:effectRef>
-          <a:fontRef idx="minor">
-            <a:schemeClr val="tx1"/>
-          </a:fontRef>
-        </p:style>
-      </p:cxnSp>
-      <p:sp>
-        <p:nvSpPr>
-          <p:cNvPr id="160" name="row:netkit:start"/>
-          <p:cNvSpPr/>
-          <p:nvPr/>
-        </p:nvSpPr>
-        <p:spPr>
-          <a:xfrm>
-            <a:off x="11165224" y="3473005"/>
-            <a:ext cx="64008" cy="64008"/>
-          </a:xfrm>
-          <a:prstGeom prst="ellipse">
-            <a:avLst/>
-          </a:prstGeom>
-          <a:solidFill>
-            <a:srgbClr val="FFFFFF"/>
-          </a:solidFill>
-          <a:ln w="12700">
-            <a:solidFill>
-              <a:srgbClr val="EA580C"/>
-            </a:solidFill>
-          </a:ln>
-          <a:effectLst/>
-        </p:spPr>
-        <p:style>
-          <a:lnRef idx="1">
-            <a:schemeClr val="accent1"/>
-          </a:lnRef>
-          <a:fillRef idx="3">
-            <a:schemeClr val="accent1"/>
-          </a:fillRef>
-          <a:effectRef idx="2">
-            <a:schemeClr val="accent1"/>
-          </a:effectRef>
-          <a:fontRef idx="minor">
-            <a:schemeClr val="lt1"/>
-          </a:fontRef>
-        </p:style>
-        <p:txBody>
-          <a:bodyPr rtlCol="0" anchor="ctr"/>
-          <a:lstStyle/>
-          <a:p/>
-        </p:txBody>
-      </p:sp>
-      <p:sp>
-        <p:nvSpPr>
-          <p:cNvPr id="161" name="row:netkit:release:6.7"/>
-          <p:cNvSpPr/>
-          <p:nvPr/>
-        </p:nvSpPr>
-        <p:spPr>
-          <a:xfrm>
-            <a:off x="12012335" y="3461575"/>
-            <a:ext cx="86868" cy="86868"/>
-          </a:xfrm>
-          <a:prstGeom prst="ellipse">
-            <a:avLst/>
-          </a:prstGeom>
-          <a:solidFill>
-            <a:srgbClr val="EA580C"/>
-          </a:solidFill>
-          <a:ln w="12700">
-            <a:solidFill>
-              <a:srgbClr val="EA580C"/>
-            </a:solidFill>
-          </a:ln>
-          <a:effectLst/>
-        </p:spPr>
-        <p:style>
-          <a:lnRef idx="1">
-            <a:schemeClr val="accent1"/>
-          </a:lnRef>
-          <a:fillRef idx="3">
-            <a:schemeClr val="accent1"/>
-          </a:fillRef>
-          <a:effectRef idx="2">
-            <a:schemeClr val="accent1"/>
-          </a:effectRef>
-          <a:fontRef idx="minor">
-            <a:schemeClr val="lt1"/>
-          </a:fontRef>
-        </p:style>
-        <p:txBody>
-          <a:bodyPr rtlCol="0" anchor="ctr"/>
-          <a:lstStyle/>
-          <a:p/>
-        </p:txBody>
-      </p:sp>
-      <p:sp>
-        <p:nvSpPr>
-          <p:cNvPr id="162" name="row:netkit:label"/>
-          <p:cNvSpPr txBox="1"/>
-          <p:nvPr/>
-        </p:nvSpPr>
-        <p:spPr>
-          <a:xfrm>
-            <a:off x="12128921" y="3395281"/>
-            <a:ext cx="731520" cy="219456"/>
-          </a:xfrm>
-          <a:prstGeom prst="rect">
-            <a:avLst/>
-          </a:prstGeom>
-          <a:noFill/>
-        </p:spPr>
-        <p:txBody>
-          <a:bodyPr wrap="square" anchor="ctr" lIns="0" rIns="0" tIns="0" bIns="0">
-            <a:noAutofit/>
-          </a:bodyPr>
-          <a:lstStyle/>
-          <a:p>
-            <a:pPr algn="l"/>
-            <a:r>
-              <a:rPr sz="800" b="1" i="0">
-                <a:solidFill>
-                  <a:srgbClr val="1F2937"/>
-                </a:solidFill>
-              </a:rPr>
-              <a:t>6.7</a:t>
-            </a:r>
-          </a:p>
-        </p:txBody>
-      </p:sp>
-      <p:sp>
-        <p:nvSpPr>
-          <p:cNvPr id="163" name="row:BPF qdisc:name"/>
-          <p:cNvSpPr txBox="1"/>
-          <p:nvPr/>
-        </p:nvSpPr>
-        <p:spPr>
-          <a:xfrm>
-            <a:off x="1325880" y="3504628"/>
-            <a:ext cx="1572768" cy="219456"/>
-          </a:xfrm>
-          <a:prstGeom prst="rect">
-            <a:avLst/>
-          </a:prstGeom>
-          <a:noFill/>
-        </p:spPr>
-        <p:txBody>
-          <a:bodyPr wrap="square" anchor="ctr" lIns="0" rIns="0" tIns="0" bIns="0">
-            <a:noAutofit/>
-          </a:bodyPr>
-          <a:lstStyle/>
-          <a:p>
-            <a:pPr algn="r"/>
-            <a:r>
-              <a:rPr sz="850" b="0" i="0">
-                <a:solidFill>
-                  <a:srgbClr val="1F2937"/>
-                </a:solidFill>
-              </a:rPr>
-              <a:t>BPF qdisc</a:t>
-            </a:r>
-          </a:p>
-        </p:txBody>
-      </p:sp>
-      <p:cxnSp>
-        <p:nvCxnSpPr>
-          <p:cNvPr id="164" name="row:BPF qdisc:development"/>
-          <p:cNvCxnSpPr/>
-          <p:nvPr/>
-        </p:nvCxnSpPr>
-        <p:spPr>
-          <a:xfrm>
-            <a:off x="12308224" y="3614356"/>
-            <a:ext cx="824036" cy="0"/>
-          </a:xfrm>
-          <a:prstGeom prst="line">
-            <a:avLst/>
-          </a:prstGeom>
-          <a:ln w="12700">
-            <a:solidFill>
-              <a:srgbClr val="EA580C"/>
-            </a:solidFill>
-            <a:prstDash val="dash"/>
-          </a:ln>
-        </p:spPr>
-        <p:style>
-          <a:lnRef idx="2">
-            <a:schemeClr val="accent1"/>
-          </a:lnRef>
-          <a:fillRef idx="0">
-            <a:schemeClr val="accent1"/>
-          </a:fillRef>
-          <a:effectRef idx="1">
-            <a:schemeClr val="accent1"/>
-          </a:effectRef>
-          <a:fontRef idx="minor">
-            <a:schemeClr val="tx1"/>
-          </a:fontRef>
-        </p:style>
-      </p:cxnSp>
-      <p:sp>
-        <p:nvSpPr>
-          <p:cNvPr id="165" name="row:BPF qdisc:start"/>
-          <p:cNvSpPr/>
-          <p:nvPr/>
-        </p:nvSpPr>
-        <p:spPr>
-          <a:xfrm>
-            <a:off x="12276220" y="3582352"/>
-            <a:ext cx="64008" cy="64008"/>
-          </a:xfrm>
-          <a:prstGeom prst="ellipse">
-            <a:avLst/>
-          </a:prstGeom>
-          <a:solidFill>
-            <a:srgbClr val="FFFFFF"/>
-          </a:solidFill>
-          <a:ln w="12700">
-            <a:solidFill>
-              <a:srgbClr val="EA580C"/>
-            </a:solidFill>
-          </a:ln>
-          <a:effectLst/>
-        </p:spPr>
-        <p:style>
-          <a:lnRef idx="1">
-            <a:schemeClr val="accent1"/>
-          </a:lnRef>
-          <a:fillRef idx="3">
-            <a:schemeClr val="accent1"/>
-          </a:fillRef>
-          <a:effectRef idx="2">
-            <a:schemeClr val="accent1"/>
-          </a:effectRef>
-          <a:fontRef idx="minor">
-            <a:schemeClr val="lt1"/>
-          </a:fontRef>
-        </p:style>
-        <p:txBody>
-          <a:bodyPr rtlCol="0" anchor="ctr"/>
-          <a:lstStyle/>
-          <a:p/>
-        </p:txBody>
-      </p:sp>
-      <p:sp>
-        <p:nvSpPr>
-          <p:cNvPr id="166" name="row:BPF qdisc:release:6.16"/>
-          <p:cNvSpPr/>
-          <p:nvPr/>
-        </p:nvSpPr>
-        <p:spPr>
-          <a:xfrm>
-            <a:off x="13088826" y="3570922"/>
-            <a:ext cx="86868" cy="86868"/>
-          </a:xfrm>
-          <a:prstGeom prst="ellipse">
-            <a:avLst/>
-          </a:prstGeom>
-          <a:solidFill>
-            <a:srgbClr val="EA580C"/>
-          </a:solidFill>
-          <a:ln w="12700">
-            <a:solidFill>
-              <a:srgbClr val="EA580C"/>
-            </a:solidFill>
-          </a:ln>
-          <a:effectLst/>
-        </p:spPr>
-        <p:style>
-          <a:lnRef idx="1">
-            <a:schemeClr val="accent1"/>
-          </a:lnRef>
-          <a:fillRef idx="3">
-            <a:schemeClr val="accent1"/>
-          </a:fillRef>
-          <a:effectRef idx="2">
-            <a:schemeClr val="accent1"/>
-          </a:effectRef>
-          <a:fontRef idx="minor">
-            <a:schemeClr val="lt1"/>
-          </a:fontRef>
-        </p:style>
-        <p:txBody>
-          <a:bodyPr rtlCol="0" anchor="ctr"/>
-          <a:lstStyle/>
-          <a:p/>
-        </p:txBody>
-      </p:sp>
-      <p:sp>
-        <p:nvSpPr>
-          <p:cNvPr id="167" name="row:BPF qdisc:label"/>
-          <p:cNvSpPr txBox="1"/>
-          <p:nvPr/>
-        </p:nvSpPr>
-        <p:spPr>
-          <a:xfrm>
-            <a:off x="13205412" y="3504628"/>
-            <a:ext cx="731520" cy="219456"/>
-          </a:xfrm>
-          <a:prstGeom prst="rect">
-            <a:avLst/>
-          </a:prstGeom>
-          <a:noFill/>
-        </p:spPr>
-        <p:txBody>
-          <a:bodyPr wrap="square" anchor="ctr" lIns="0" rIns="0" tIns="0" bIns="0">
-            <a:noAutofit/>
-          </a:bodyPr>
-          <a:lstStyle/>
-          <a:p>
-            <a:pPr algn="l"/>
-            <a:r>
-              <a:rPr sz="800" b="1" i="0">
-                <a:solidFill>
-                  <a:srgbClr val="1F2937"/>
-                </a:solidFill>
-              </a:rPr>
-              <a:t>6.16</a:t>
-            </a:r>
-          </a:p>
-        </p:txBody>
-      </p:sp>
-      <p:sp>
-        <p:nvSpPr>
-          <p:cNvPr id="168" name="band-label:MEMORY"/>
-          <p:cNvSpPr txBox="1"/>
-          <p:nvPr/>
-        </p:nvSpPr>
-        <p:spPr>
-          <a:xfrm>
-            <a:off x="384048" y="3742182"/>
-            <a:ext cx="1051560" cy="1020699"/>
-          </a:xfrm>
-          <a:prstGeom prst="rect">
-            <a:avLst/>
-          </a:prstGeom>
-          <a:noFill/>
-        </p:spPr>
-        <p:txBody>
-          <a:bodyPr wrap="square" anchor="ctr" lIns="0" rIns="0" tIns="0" bIns="0">
-            <a:noAutofit/>
-          </a:bodyPr>
-          <a:lstStyle/>
-          <a:p>
-            <a:pPr algn="l"/>
-            <a:r>
-              <a:rPr sz="1000" b="1" i="0">
-                <a:solidFill>
-                  <a:srgbClr val="16A34A"/>
-                </a:solidFill>
-              </a:rPr>
-              <a:t>MEMORY</a:t>
-            </a:r>
-          </a:p>
-        </p:txBody>
-      </p:sp>
-      <p:sp>
-        <p:nvSpPr>
-          <p:cNvPr id="169" name="row:page_pool:name"/>
-          <p:cNvSpPr txBox="1"/>
-          <p:nvPr/>
-        </p:nvSpPr>
-        <p:spPr>
-          <a:xfrm>
-            <a:off x="1325880" y="3705415"/>
-            <a:ext cx="1572768" cy="219456"/>
-          </a:xfrm>
-          <a:prstGeom prst="rect">
-            <a:avLst/>
-          </a:prstGeom>
-          <a:noFill/>
-        </p:spPr>
-        <p:txBody>
-          <a:bodyPr wrap="square" anchor="ctr" lIns="0" rIns="0" tIns="0" bIns="0">
-            <a:noAutofit/>
-          </a:bodyPr>
-          <a:lstStyle/>
-          <a:p>
-            <a:pPr algn="r"/>
-            <a:r>
-              <a:rPr sz="850" b="0" i="0">
-                <a:solidFill>
-                  <a:srgbClr val="1F2937"/>
-                </a:solidFill>
-              </a:rPr>
-              <a:t>page_pool</a:t>
-            </a:r>
-          </a:p>
-        </p:txBody>
-      </p:sp>
-      <p:cxnSp>
-        <p:nvCxnSpPr>
-          <p:cNvPr id="170" name="row:page_pool:development"/>
-          <p:cNvCxnSpPr/>
-          <p:nvPr/>
-        </p:nvCxnSpPr>
-        <p:spPr>
-          <a:xfrm>
-            <a:off x="6614369" y="3815143"/>
-            <a:ext cx="1687701" cy="0"/>
-          </a:xfrm>
-          <a:prstGeom prst="line">
-            <a:avLst/>
-          </a:prstGeom>
-          <a:ln w="12700">
-            <a:solidFill>
-              <a:srgbClr val="16A34A"/>
-            </a:solidFill>
-            <a:prstDash val="dash"/>
-          </a:ln>
-        </p:spPr>
-        <p:style>
-          <a:lnRef idx="2">
-            <a:schemeClr val="accent1"/>
-          </a:lnRef>
-          <a:fillRef idx="0">
-            <a:schemeClr val="accent1"/>
-          </a:fillRef>
-          <a:effectRef idx="1">
-            <a:schemeClr val="accent1"/>
-          </a:effectRef>
-          <a:fontRef idx="minor">
-            <a:schemeClr val="tx1"/>
-          </a:fontRef>
-        </p:style>
-      </p:cxnSp>
-      <p:sp>
-        <p:nvSpPr>
-          <p:cNvPr id="171" name="row:page_pool:start"/>
-          <p:cNvSpPr/>
-          <p:nvPr/>
-        </p:nvSpPr>
-        <p:spPr>
-          <a:xfrm>
-            <a:off x="6582365" y="3783139"/>
-            <a:ext cx="64008" cy="64008"/>
-          </a:xfrm>
-          <a:prstGeom prst="ellipse">
-            <a:avLst/>
-          </a:prstGeom>
-          <a:solidFill>
-            <a:srgbClr val="FFFFFF"/>
-          </a:solidFill>
-          <a:ln w="12700">
-            <a:solidFill>
-              <a:srgbClr val="16A34A"/>
-            </a:solidFill>
-          </a:ln>
-          <a:effectLst/>
-        </p:spPr>
-        <p:style>
-          <a:lnRef idx="1">
-            <a:schemeClr val="accent1"/>
-          </a:lnRef>
-          <a:fillRef idx="3">
-            <a:schemeClr val="accent1"/>
-          </a:fillRef>
-          <a:effectRef idx="2">
-            <a:schemeClr val="accent1"/>
-          </a:effectRef>
-          <a:fontRef idx="minor">
-            <a:schemeClr val="lt1"/>
-          </a:fontRef>
-        </p:style>
-        <p:txBody>
-          <a:bodyPr rtlCol="0" anchor="ctr"/>
-          <a:lstStyle/>
-          <a:p/>
-        </p:txBody>
-      </p:sp>
-      <p:sp>
-        <p:nvSpPr>
-          <p:cNvPr id="172" name="row:page_pool:release:4.18"/>
-          <p:cNvSpPr/>
-          <p:nvPr/>
-        </p:nvSpPr>
-        <p:spPr>
-          <a:xfrm>
-            <a:off x="8258636" y="3771709"/>
-            <a:ext cx="86868" cy="86868"/>
-          </a:xfrm>
-          <a:prstGeom prst="ellipse">
-            <a:avLst/>
-          </a:prstGeom>
-          <a:solidFill>
-            <a:srgbClr val="16A34A"/>
-          </a:solidFill>
-          <a:ln w="12700">
-            <a:solidFill>
-              <a:srgbClr val="16A34A"/>
-            </a:solidFill>
-          </a:ln>
-          <a:effectLst/>
-        </p:spPr>
-        <p:style>
-          <a:lnRef idx="1">
-            <a:schemeClr val="accent1"/>
-          </a:lnRef>
-          <a:fillRef idx="3">
-            <a:schemeClr val="accent1"/>
-          </a:fillRef>
-          <a:effectRef idx="2">
-            <a:schemeClr val="accent1"/>
-          </a:effectRef>
-          <a:fontRef idx="minor">
-            <a:schemeClr val="lt1"/>
-          </a:fontRef>
-        </p:style>
-        <p:txBody>
-          <a:bodyPr rtlCol="0" anchor="ctr"/>
-          <a:lstStyle/>
-          <a:p/>
-        </p:txBody>
-      </p:sp>
-      <p:sp>
-        <p:nvSpPr>
-          <p:cNvPr id="173" name="row:page_pool:label"/>
-          <p:cNvSpPr txBox="1"/>
-          <p:nvPr/>
-        </p:nvSpPr>
-        <p:spPr>
-          <a:xfrm>
-            <a:off x="8375222" y="3705415"/>
-            <a:ext cx="731520" cy="219456"/>
-          </a:xfrm>
-          <a:prstGeom prst="rect">
-            <a:avLst/>
-          </a:prstGeom>
-          <a:noFill/>
-        </p:spPr>
-        <p:txBody>
-          <a:bodyPr wrap="square" anchor="ctr" lIns="0" rIns="0" tIns="0" bIns="0">
-            <a:noAutofit/>
-          </a:bodyPr>
-          <a:lstStyle/>
-          <a:p>
-            <a:pPr algn="l"/>
-            <a:r>
-              <a:rPr sz="800" b="1" i="0">
-                <a:solidFill>
-                  <a:srgbClr val="1F2937"/>
-                </a:solidFill>
-              </a:rPr>
-              <a:t>4.18</a:t>
-            </a:r>
-          </a:p>
-        </p:txBody>
-      </p:sp>
-      <p:sp>
-        <p:nvSpPr>
-          <p:cNvPr id="174" name="row:Device Memory TCP RX:name"/>
-          <p:cNvSpPr txBox="1"/>
-          <p:nvPr/>
-        </p:nvSpPr>
-        <p:spPr>
-          <a:xfrm>
-            <a:off x="1325880" y="3814762"/>
-            <a:ext cx="1572768" cy="219456"/>
-          </a:xfrm>
-          <a:prstGeom prst="rect">
-            <a:avLst/>
-          </a:prstGeom>
-          <a:noFill/>
-        </p:spPr>
-        <p:txBody>
-          <a:bodyPr wrap="square" anchor="ctr" lIns="0" rIns="0" tIns="0" bIns="0">
-            <a:noAutofit/>
-          </a:bodyPr>
-          <a:lstStyle/>
-          <a:p>
-            <a:pPr algn="r"/>
-            <a:r>
-              <a:rPr sz="850" b="0" i="0">
-                <a:solidFill>
-                  <a:srgbClr val="1F2937"/>
-                </a:solidFill>
-              </a:rPr>
-              <a:t>Device Memory TCP RX</a:t>
-            </a:r>
-          </a:p>
-        </p:txBody>
-      </p:sp>
-      <p:cxnSp>
-        <p:nvCxnSpPr>
-          <p:cNvPr id="175" name="row:Device Memory TCP RX:development"/>
-          <p:cNvCxnSpPr/>
-          <p:nvPr/>
-        </p:nvCxnSpPr>
-        <p:spPr>
-          <a:xfrm>
-            <a:off x="11405539" y="3924490"/>
-            <a:ext cx="1249072" cy="0"/>
-          </a:xfrm>
-          <a:prstGeom prst="line">
-            <a:avLst/>
-          </a:prstGeom>
-          <a:ln w="12700">
-            <a:solidFill>
-              <a:srgbClr val="16A34A"/>
-            </a:solidFill>
-            <a:prstDash val="dash"/>
-          </a:ln>
-        </p:spPr>
-        <p:style>
-          <a:lnRef idx="2">
-            <a:schemeClr val="accent1"/>
-          </a:lnRef>
-          <a:fillRef idx="0">
-            <a:schemeClr val="accent1"/>
-          </a:fillRef>
-          <a:effectRef idx="1">
-            <a:schemeClr val="accent1"/>
-          </a:effectRef>
-          <a:fontRef idx="minor">
-            <a:schemeClr val="tx1"/>
-          </a:fontRef>
-        </p:style>
-      </p:cxnSp>
-      <p:sp>
-        <p:nvSpPr>
-          <p:cNvPr id="176" name="row:Device Memory TCP RX:start"/>
-          <p:cNvSpPr/>
-          <p:nvPr/>
-        </p:nvSpPr>
-        <p:spPr>
-          <a:xfrm>
-            <a:off x="11373535" y="3892486"/>
-            <a:ext cx="64008" cy="64008"/>
-          </a:xfrm>
-          <a:prstGeom prst="ellipse">
-            <a:avLst/>
-          </a:prstGeom>
-          <a:solidFill>
-            <a:srgbClr val="FFFFFF"/>
-          </a:solidFill>
-          <a:ln w="12700">
-            <a:solidFill>
-              <a:srgbClr val="16A34A"/>
-            </a:solidFill>
-          </a:ln>
-          <a:effectLst/>
-        </p:spPr>
-        <p:style>
-          <a:lnRef idx="1">
-            <a:schemeClr val="accent1"/>
-          </a:lnRef>
-          <a:fillRef idx="3">
-            <a:schemeClr val="accent1"/>
-          </a:fillRef>
-          <a:effectRef idx="2">
-            <a:schemeClr val="accent1"/>
-          </a:effectRef>
-          <a:fontRef idx="minor">
-            <a:schemeClr val="lt1"/>
-          </a:fontRef>
-        </p:style>
-        <p:txBody>
-          <a:bodyPr rtlCol="0" anchor="ctr"/>
-          <a:lstStyle/>
-          <a:p/>
-        </p:txBody>
-      </p:sp>
-      <p:sp>
-        <p:nvSpPr>
-          <p:cNvPr id="177" name="row:Device Memory TCP RX:release:6.12"/>
-          <p:cNvSpPr/>
-          <p:nvPr/>
-        </p:nvSpPr>
-        <p:spPr>
-          <a:xfrm>
-            <a:off x="12611177" y="3881056"/>
-            <a:ext cx="86868" cy="86868"/>
-          </a:xfrm>
-          <a:prstGeom prst="ellipse">
-            <a:avLst/>
-          </a:prstGeom>
-          <a:solidFill>
-            <a:srgbClr val="16A34A"/>
-          </a:solidFill>
-          <a:ln w="12700">
-            <a:solidFill>
-              <a:srgbClr val="16A34A"/>
-            </a:solidFill>
-          </a:ln>
-          <a:effectLst/>
-        </p:spPr>
-        <p:style>
-          <a:lnRef idx="1">
-            <a:schemeClr val="accent1"/>
-          </a:lnRef>
-          <a:fillRef idx="3">
-            <a:schemeClr val="accent1"/>
-          </a:fillRef>
-          <a:effectRef idx="2">
-            <a:schemeClr val="accent1"/>
-          </a:effectRef>
-          <a:fontRef idx="minor">
-            <a:schemeClr val="lt1"/>
-          </a:fontRef>
-        </p:style>
-        <p:txBody>
-          <a:bodyPr rtlCol="0" anchor="ctr"/>
-          <a:lstStyle/>
-          <a:p/>
-        </p:txBody>
-      </p:sp>
-      <p:sp>
-        <p:nvSpPr>
-          <p:cNvPr id="178" name="row:Device Memory TCP RX:label"/>
-          <p:cNvSpPr txBox="1"/>
-          <p:nvPr/>
-        </p:nvSpPr>
-        <p:spPr>
-          <a:xfrm>
-            <a:off x="12727763" y="3814762"/>
-            <a:ext cx="731520" cy="219456"/>
-          </a:xfrm>
-          <a:prstGeom prst="rect">
-            <a:avLst/>
-          </a:prstGeom>
-          <a:noFill/>
-        </p:spPr>
-        <p:txBody>
-          <a:bodyPr wrap="square" anchor="ctr" lIns="0" rIns="0" tIns="0" bIns="0">
-            <a:noAutofit/>
-          </a:bodyPr>
-          <a:lstStyle/>
-          <a:p>
-            <a:pPr algn="l"/>
-            <a:r>
-              <a:rPr sz="800" b="1" i="0">
-                <a:solidFill>
-                  <a:srgbClr val="1F2937"/>
-                </a:solidFill>
-              </a:rPr>
-              <a:t>6.12</a:t>
-            </a:r>
-          </a:p>
-        </p:txBody>
-      </p:sp>
-      <p:sp>
-        <p:nvSpPr>
-          <p:cNvPr id="179" name="row:Device Memory TCP TX:name"/>
-          <p:cNvSpPr txBox="1"/>
-          <p:nvPr/>
-        </p:nvSpPr>
-        <p:spPr>
-          <a:xfrm>
-            <a:off x="1325880" y="3924109"/>
-            <a:ext cx="1572768" cy="219456"/>
-          </a:xfrm>
-          <a:prstGeom prst="rect">
-            <a:avLst/>
-          </a:prstGeom>
-          <a:noFill/>
-        </p:spPr>
-        <p:txBody>
-          <a:bodyPr wrap="square" anchor="ctr" lIns="0" rIns="0" tIns="0" bIns="0">
-            <a:noAutofit/>
-          </a:bodyPr>
-          <a:lstStyle/>
-          <a:p>
-            <a:pPr algn="r"/>
-            <a:r>
-              <a:rPr sz="850" b="0" i="0">
-                <a:solidFill>
-                  <a:srgbClr val="1F2937"/>
-                </a:solidFill>
-              </a:rPr>
-              <a:t>Device Memory TCP TX</a:t>
-            </a:r>
-          </a:p>
-        </p:txBody>
-      </p:sp>
-      <p:cxnSp>
-        <p:nvCxnSpPr>
-          <p:cNvPr id="180" name="row:Device Memory TCP TX:development"/>
-          <p:cNvCxnSpPr/>
-          <p:nvPr/>
-        </p:nvCxnSpPr>
-        <p:spPr>
-          <a:xfrm>
-            <a:off x="12030475" y="4033837"/>
-            <a:ext cx="1101785" cy="0"/>
-          </a:xfrm>
-          <a:prstGeom prst="line">
-            <a:avLst/>
-          </a:prstGeom>
-          <a:ln w="12700">
-            <a:solidFill>
-              <a:srgbClr val="16A34A"/>
-            </a:solidFill>
-            <a:prstDash val="dash"/>
-          </a:ln>
-        </p:spPr>
-        <p:style>
-          <a:lnRef idx="2">
-            <a:schemeClr val="accent1"/>
-          </a:lnRef>
-          <a:fillRef idx="0">
-            <a:schemeClr val="accent1"/>
-          </a:fillRef>
-          <a:effectRef idx="1">
-            <a:schemeClr val="accent1"/>
-          </a:effectRef>
-          <a:fontRef idx="minor">
-            <a:schemeClr val="tx1"/>
-          </a:fontRef>
-        </p:style>
-      </p:cxnSp>
-      <p:sp>
-        <p:nvSpPr>
-          <p:cNvPr id="181" name="row:Device Memory TCP TX:start"/>
-          <p:cNvSpPr/>
-          <p:nvPr/>
-        </p:nvSpPr>
-        <p:spPr>
-          <a:xfrm>
-            <a:off x="11998471" y="4001833"/>
-            <a:ext cx="64008" cy="64008"/>
-          </a:xfrm>
-          <a:prstGeom prst="ellipse">
-            <a:avLst/>
-          </a:prstGeom>
-          <a:solidFill>
-            <a:srgbClr val="FFFFFF"/>
-          </a:solidFill>
-          <a:ln w="12700">
-            <a:solidFill>
-              <a:srgbClr val="16A34A"/>
-            </a:solidFill>
-          </a:ln>
-          <a:effectLst/>
-        </p:spPr>
-        <p:style>
-          <a:lnRef idx="1">
-            <a:schemeClr val="accent1"/>
-          </a:lnRef>
-          <a:fillRef idx="3">
-            <a:schemeClr val="accent1"/>
-          </a:fillRef>
-          <a:effectRef idx="2">
-            <a:schemeClr val="accent1"/>
-          </a:effectRef>
-          <a:fontRef idx="minor">
-            <a:schemeClr val="lt1"/>
-          </a:fontRef>
-        </p:style>
-        <p:txBody>
-          <a:bodyPr rtlCol="0" anchor="ctr"/>
-          <a:lstStyle/>
-          <a:p/>
-        </p:txBody>
-      </p:sp>
-      <p:sp>
-        <p:nvSpPr>
-          <p:cNvPr id="182" name="row:Device Memory TCP TX:release:6.16"/>
-          <p:cNvSpPr/>
-          <p:nvPr/>
-        </p:nvSpPr>
-        <p:spPr>
-          <a:xfrm>
-            <a:off x="13088826" y="3990403"/>
-            <a:ext cx="86868" cy="86868"/>
-          </a:xfrm>
-          <a:prstGeom prst="ellipse">
-            <a:avLst/>
-          </a:prstGeom>
-          <a:solidFill>
-            <a:srgbClr val="16A34A"/>
-          </a:solidFill>
-          <a:ln w="12700">
-            <a:solidFill>
-              <a:srgbClr val="16A34A"/>
-            </a:solidFill>
-          </a:ln>
-          <a:effectLst/>
-        </p:spPr>
-        <p:style>
-          <a:lnRef idx="1">
-            <a:schemeClr val="accent1"/>
-          </a:lnRef>
-          <a:fillRef idx="3">
-            <a:schemeClr val="accent1"/>
-          </a:fillRef>
-          <a:effectRef idx="2">
-            <a:schemeClr val="accent1"/>
-          </a:effectRef>
-          <a:fontRef idx="minor">
-            <a:schemeClr val="lt1"/>
-          </a:fontRef>
-        </p:style>
-        <p:txBody>
-          <a:bodyPr rtlCol="0" anchor="ctr"/>
-          <a:lstStyle/>
-          <a:p/>
-        </p:txBody>
-      </p:sp>
-      <p:sp>
-        <p:nvSpPr>
-          <p:cNvPr id="183" name="row:Device Memory TCP TX:label"/>
-          <p:cNvSpPr txBox="1"/>
-          <p:nvPr/>
-        </p:nvSpPr>
-        <p:spPr>
-          <a:xfrm>
-            <a:off x="13205412" y="3924109"/>
-            <a:ext cx="731520" cy="219456"/>
-          </a:xfrm>
-          <a:prstGeom prst="rect">
-            <a:avLst/>
-          </a:prstGeom>
-          <a:noFill/>
-        </p:spPr>
-        <p:txBody>
-          <a:bodyPr wrap="square" anchor="ctr" lIns="0" rIns="0" tIns="0" bIns="0">
-            <a:noAutofit/>
-          </a:bodyPr>
-          <a:lstStyle/>
-          <a:p>
-            <a:pPr algn="l"/>
-            <a:r>
-              <a:rPr sz="800" b="1" i="0">
-                <a:solidFill>
-                  <a:srgbClr val="1F2937"/>
-                </a:solidFill>
-              </a:rPr>
-              <a:t>6.16</a:t>
-            </a:r>
-          </a:p>
-        </p:txBody>
-      </p:sp>
-      <p:sp>
-        <p:nvSpPr>
-          <p:cNvPr id="184" name="row:io_uring ZCRX:name"/>
-          <p:cNvSpPr txBox="1"/>
-          <p:nvPr/>
-        </p:nvSpPr>
-        <p:spPr>
-          <a:xfrm>
-            <a:off x="1325880" y="4033456"/>
-            <a:ext cx="1572768" cy="219456"/>
-          </a:xfrm>
-          <a:prstGeom prst="rect">
-            <a:avLst/>
-          </a:prstGeom>
-          <a:noFill/>
-        </p:spPr>
-        <p:txBody>
-          <a:bodyPr wrap="square" anchor="ctr" lIns="0" rIns="0" tIns="0" bIns="0">
-            <a:noAutofit/>
-          </a:bodyPr>
-          <a:lstStyle/>
-          <a:p>
-            <a:pPr algn="r"/>
-            <a:r>
-              <a:rPr sz="850" b="0" i="0">
-                <a:solidFill>
-                  <a:srgbClr val="1F2937"/>
-                </a:solidFill>
-              </a:rPr>
-              <a:t>io_uring ZCRX</a:t>
-            </a:r>
-          </a:p>
-        </p:txBody>
-      </p:sp>
-      <p:cxnSp>
-        <p:nvCxnSpPr>
-          <p:cNvPr id="185" name="row:io_uring ZCRX:development"/>
-          <p:cNvCxnSpPr/>
-          <p:nvPr/>
-        </p:nvCxnSpPr>
-        <p:spPr>
-          <a:xfrm>
-            <a:off x="11613851" y="4143184"/>
-            <a:ext cx="1398640" cy="0"/>
-          </a:xfrm>
-          <a:prstGeom prst="line">
-            <a:avLst/>
-          </a:prstGeom>
-          <a:ln w="12700">
-            <a:solidFill>
-              <a:srgbClr val="16A34A"/>
-            </a:solidFill>
-            <a:prstDash val="dash"/>
-          </a:ln>
-        </p:spPr>
-        <p:style>
-          <a:lnRef idx="2">
-            <a:schemeClr val="accent1"/>
-          </a:lnRef>
-          <a:fillRef idx="0">
-            <a:schemeClr val="accent1"/>
-          </a:fillRef>
-          <a:effectRef idx="1">
-            <a:schemeClr val="accent1"/>
-          </a:effectRef>
-          <a:fontRef idx="minor">
-            <a:schemeClr val="tx1"/>
-          </a:fontRef>
-        </p:style>
-      </p:cxnSp>
-      <p:sp>
-        <p:nvSpPr>
-          <p:cNvPr id="186" name="row:io_uring ZCRX:start"/>
-          <p:cNvSpPr/>
-          <p:nvPr/>
-        </p:nvSpPr>
-        <p:spPr>
-          <a:xfrm>
-            <a:off x="11581847" y="4111180"/>
-            <a:ext cx="64008" cy="64008"/>
-          </a:xfrm>
-          <a:prstGeom prst="ellipse">
-            <a:avLst/>
-          </a:prstGeom>
-          <a:solidFill>
-            <a:srgbClr val="FFFFFF"/>
-          </a:solidFill>
-          <a:ln w="12700">
-            <a:solidFill>
-              <a:srgbClr val="16A34A"/>
-            </a:solidFill>
-          </a:ln>
-          <a:effectLst/>
-        </p:spPr>
-        <p:style>
-          <a:lnRef idx="1">
-            <a:schemeClr val="accent1"/>
-          </a:lnRef>
-          <a:fillRef idx="3">
-            <a:schemeClr val="accent1"/>
-          </a:fillRef>
-          <a:effectRef idx="2">
-            <a:schemeClr val="accent1"/>
-          </a:effectRef>
-          <a:fontRef idx="minor">
-            <a:schemeClr val="lt1"/>
-          </a:fontRef>
-        </p:style>
-        <p:txBody>
-          <a:bodyPr rtlCol="0" anchor="ctr"/>
-          <a:lstStyle/>
-          <a:p/>
-        </p:txBody>
-      </p:sp>
-      <p:sp>
-        <p:nvSpPr>
-          <p:cNvPr id="187" name="row:io_uring ZCRX:release:6.15"/>
-          <p:cNvSpPr/>
-          <p:nvPr/>
-        </p:nvSpPr>
-        <p:spPr>
-          <a:xfrm>
-            <a:off x="12969057" y="4099750"/>
-            <a:ext cx="86868" cy="86868"/>
-          </a:xfrm>
-          <a:prstGeom prst="ellipse">
-            <a:avLst/>
-          </a:prstGeom>
-          <a:solidFill>
-            <a:srgbClr val="16A34A"/>
-          </a:solidFill>
-          <a:ln w="12700">
-            <a:solidFill>
-              <a:srgbClr val="16A34A"/>
-            </a:solidFill>
-          </a:ln>
-          <a:effectLst/>
-        </p:spPr>
-        <p:style>
-          <a:lnRef idx="1">
-            <a:schemeClr val="accent1"/>
-          </a:lnRef>
-          <a:fillRef idx="3">
-            <a:schemeClr val="accent1"/>
-          </a:fillRef>
-          <a:effectRef idx="2">
-            <a:schemeClr val="accent1"/>
-          </a:effectRef>
-          <a:fontRef idx="minor">
-            <a:schemeClr val="lt1"/>
-          </a:fontRef>
-        </p:style>
-        <p:txBody>
-          <a:bodyPr rtlCol="0" anchor="ctr"/>
-          <a:lstStyle/>
-          <a:p/>
-        </p:txBody>
-      </p:sp>
-      <p:sp>
-        <p:nvSpPr>
-          <p:cNvPr id="188" name="row:io_uring ZCRX:label"/>
-          <p:cNvSpPr txBox="1"/>
-          <p:nvPr/>
-        </p:nvSpPr>
-        <p:spPr>
-          <a:xfrm>
-            <a:off x="13085643" y="4033456"/>
-            <a:ext cx="731520" cy="219456"/>
-          </a:xfrm>
-          <a:prstGeom prst="rect">
-            <a:avLst/>
-          </a:prstGeom>
-          <a:noFill/>
-        </p:spPr>
-        <p:txBody>
-          <a:bodyPr wrap="square" anchor="ctr" lIns="0" rIns="0" tIns="0" bIns="0">
-            <a:noAutofit/>
-          </a:bodyPr>
-          <a:lstStyle/>
-          <a:p>
-            <a:pPr algn="l"/>
-            <a:r>
-              <a:rPr sz="800" b="1" i="0">
-                <a:solidFill>
-                  <a:srgbClr val="1F2937"/>
-                </a:solidFill>
-              </a:rPr>
-              <a:t>6.15</a:t>
-            </a:r>
-          </a:p>
-        </p:txBody>
-      </p:sp>
-      <p:sp>
-        <p:nvSpPr>
-          <p:cNvPr id="189" name="row:large RX buffers (mem. providers):name"/>
-          <p:cNvSpPr txBox="1"/>
-          <p:nvPr/>
-        </p:nvSpPr>
-        <p:spPr>
-          <a:xfrm>
-            <a:off x="1325880" y="4142803"/>
-            <a:ext cx="1572768" cy="219456"/>
-          </a:xfrm>
-          <a:prstGeom prst="rect">
-            <a:avLst/>
-          </a:prstGeom>
-          <a:noFill/>
-        </p:spPr>
-        <p:txBody>
-          <a:bodyPr wrap="square" anchor="ctr" lIns="0" rIns="0" tIns="0" bIns="0">
-            <a:noAutofit/>
-          </a:bodyPr>
-          <a:lstStyle/>
-          <a:p>
-            <a:pPr algn="r"/>
-            <a:r>
-              <a:rPr sz="850" b="0" i="0">
-                <a:solidFill>
-                  <a:srgbClr val="1F2937"/>
-                </a:solidFill>
-              </a:rPr>
-              <a:t>large RX buffers (mem. providers)</a:t>
-            </a:r>
-          </a:p>
-        </p:txBody>
-      </p:sp>
-      <p:cxnSp>
-        <p:nvCxnSpPr>
-          <p:cNvPr id="190" name="row:large RX buffers (mem. providers):development"/>
-          <p:cNvCxnSpPr/>
-          <p:nvPr/>
-        </p:nvCxnSpPr>
-        <p:spPr>
-          <a:xfrm>
-            <a:off x="12724847" y="4252531"/>
-            <a:ext cx="900270" cy="0"/>
-          </a:xfrm>
-          <a:prstGeom prst="line">
-            <a:avLst/>
-          </a:prstGeom>
-          <a:ln w="12700">
-            <a:solidFill>
-              <a:srgbClr val="16A34A"/>
-            </a:solidFill>
-            <a:prstDash val="dash"/>
-          </a:ln>
-        </p:spPr>
-        <p:style>
-          <a:lnRef idx="2">
-            <a:schemeClr val="accent1"/>
-          </a:lnRef>
-          <a:fillRef idx="0">
-            <a:schemeClr val="accent1"/>
-          </a:fillRef>
-          <a:effectRef idx="1">
-            <a:schemeClr val="accent1"/>
-          </a:effectRef>
-          <a:fontRef idx="minor">
-            <a:schemeClr val="tx1"/>
-          </a:fontRef>
-        </p:style>
-      </p:cxnSp>
-      <p:sp>
-        <p:nvSpPr>
-          <p:cNvPr id="191" name="row:large RX buffers (mem. providers):start"/>
-          <p:cNvSpPr/>
-          <p:nvPr/>
-        </p:nvSpPr>
-        <p:spPr>
-          <a:xfrm>
-            <a:off x="12692843" y="4220527"/>
-            <a:ext cx="64008" cy="64008"/>
-          </a:xfrm>
-          <a:prstGeom prst="ellipse">
-            <a:avLst/>
-          </a:prstGeom>
-          <a:solidFill>
-            <a:srgbClr val="FFFFFF"/>
-          </a:solidFill>
-          <a:ln w="12700">
-            <a:solidFill>
-              <a:srgbClr val="16A34A"/>
-            </a:solidFill>
-          </a:ln>
-          <a:effectLst/>
-        </p:spPr>
-        <p:style>
-          <a:lnRef idx="1">
-            <a:schemeClr val="accent1"/>
-          </a:lnRef>
-          <a:fillRef idx="3">
-            <a:schemeClr val="accent1"/>
-          </a:fillRef>
-          <a:effectRef idx="2">
-            <a:schemeClr val="accent1"/>
-          </a:effectRef>
-          <a:fontRef idx="minor">
-            <a:schemeClr val="lt1"/>
-          </a:fontRef>
-        </p:style>
-        <p:txBody>
-          <a:bodyPr rtlCol="0" anchor="ctr"/>
-          <a:lstStyle/>
-          <a:p/>
-        </p:txBody>
-      </p:sp>
-      <p:sp>
-        <p:nvSpPr>
-          <p:cNvPr id="192" name="row:large RX buffers (mem. providers):release:7.0"/>
-          <p:cNvSpPr/>
-          <p:nvPr/>
-        </p:nvSpPr>
-        <p:spPr>
-          <a:xfrm>
-            <a:off x="13581683" y="4209097"/>
-            <a:ext cx="86868" cy="86868"/>
-          </a:xfrm>
-          <a:prstGeom prst="ellipse">
-            <a:avLst/>
-          </a:prstGeom>
-          <a:solidFill>
-            <a:srgbClr val="16A34A"/>
-          </a:solidFill>
-          <a:ln w="12700">
-            <a:solidFill>
-              <a:srgbClr val="16A34A"/>
-            </a:solidFill>
-          </a:ln>
-          <a:effectLst/>
-        </p:spPr>
-        <p:style>
-          <a:lnRef idx="1">
-            <a:schemeClr val="accent1"/>
-          </a:lnRef>
-          <a:fillRef idx="3">
-            <a:schemeClr val="accent1"/>
-          </a:fillRef>
-          <a:effectRef idx="2">
-            <a:schemeClr val="accent1"/>
-          </a:effectRef>
-          <a:fontRef idx="minor">
-            <a:schemeClr val="lt1"/>
-          </a:fontRef>
-        </p:style>
-        <p:txBody>
-          <a:bodyPr rtlCol="0" anchor="ctr"/>
-          <a:lstStyle/>
-          <a:p/>
-        </p:txBody>
-      </p:sp>
-      <p:sp>
-        <p:nvSpPr>
-          <p:cNvPr id="193" name="row:large RX buffers (mem. providers):label"/>
-          <p:cNvSpPr txBox="1"/>
-          <p:nvPr/>
-        </p:nvSpPr>
-        <p:spPr>
-          <a:xfrm>
-            <a:off x="13698269" y="4142803"/>
-            <a:ext cx="731520" cy="219456"/>
-          </a:xfrm>
-          <a:prstGeom prst="rect">
-            <a:avLst/>
-          </a:prstGeom>
-          <a:noFill/>
-        </p:spPr>
-        <p:txBody>
-          <a:bodyPr wrap="square" anchor="ctr" lIns="0" rIns="0" tIns="0" bIns="0">
-            <a:noAutofit/>
-          </a:bodyPr>
-          <a:lstStyle/>
-          <a:p>
-            <a:pPr algn="l"/>
-            <a:r>
-              <a:rPr sz="800" b="1" i="0">
-                <a:solidFill>
-                  <a:srgbClr val="1F2937"/>
-                </a:solidFill>
-              </a:rPr>
-              <a:t>7.0</a:t>
-            </a:r>
-          </a:p>
-        </p:txBody>
-      </p:sp>
-      <p:sp>
-        <p:nvSpPr>
-          <p:cNvPr id="194" name="row:AF_XDP:name"/>
-          <p:cNvSpPr txBox="1"/>
-          <p:nvPr/>
-        </p:nvSpPr>
-        <p:spPr>
-          <a:xfrm>
-            <a:off x="1325880" y="4252150"/>
-            <a:ext cx="1572768" cy="219456"/>
-          </a:xfrm>
-          <a:prstGeom prst="rect">
-            <a:avLst/>
-          </a:prstGeom>
-          <a:noFill/>
-        </p:spPr>
-        <p:txBody>
-          <a:bodyPr wrap="square" anchor="ctr" lIns="0" rIns="0" tIns="0" bIns="0">
-            <a:noAutofit/>
-          </a:bodyPr>
-          <a:lstStyle/>
-          <a:p>
-            <a:pPr algn="r"/>
-            <a:r>
-              <a:rPr sz="850" b="0" i="0">
-                <a:solidFill>
-                  <a:srgbClr val="1F2937"/>
-                </a:solidFill>
-              </a:rPr>
-              <a:t>AF_XDP</a:t>
-            </a:r>
-          </a:p>
-        </p:txBody>
-      </p:sp>
-      <p:cxnSp>
-        <p:nvCxnSpPr>
-          <p:cNvPr id="195" name="row:AF_XDP:development"/>
-          <p:cNvCxnSpPr/>
-          <p:nvPr/>
-        </p:nvCxnSpPr>
-        <p:spPr>
-          <a:xfrm>
-            <a:off x="7169867" y="4361878"/>
-            <a:ext cx="1132203" cy="0"/>
-          </a:xfrm>
-          <a:prstGeom prst="line">
-            <a:avLst/>
-          </a:prstGeom>
-          <a:ln w="12700">
-            <a:solidFill>
-              <a:srgbClr val="16A34A"/>
-            </a:solidFill>
-            <a:prstDash val="dash"/>
-          </a:ln>
-        </p:spPr>
-        <p:style>
-          <a:lnRef idx="2">
-            <a:schemeClr val="accent1"/>
-          </a:lnRef>
-          <a:fillRef idx="0">
-            <a:schemeClr val="accent1"/>
-          </a:fillRef>
-          <a:effectRef idx="1">
-            <a:schemeClr val="accent1"/>
-          </a:effectRef>
-          <a:fontRef idx="minor">
-            <a:schemeClr val="tx1"/>
-          </a:fontRef>
-        </p:style>
-      </p:cxnSp>
-      <p:sp>
-        <p:nvSpPr>
-          <p:cNvPr id="196" name="row:AF_XDP:start"/>
-          <p:cNvSpPr/>
-          <p:nvPr/>
-        </p:nvSpPr>
-        <p:spPr>
-          <a:xfrm>
-            <a:off x="7137863" y="4329874"/>
-            <a:ext cx="64008" cy="64008"/>
-          </a:xfrm>
-          <a:prstGeom prst="ellipse">
-            <a:avLst/>
-          </a:prstGeom>
-          <a:solidFill>
-            <a:srgbClr val="FFFFFF"/>
-          </a:solidFill>
-          <a:ln w="12700">
-            <a:solidFill>
-              <a:srgbClr val="16A34A"/>
-            </a:solidFill>
-          </a:ln>
-          <a:effectLst/>
-        </p:spPr>
-        <p:style>
-          <a:lnRef idx="1">
-            <a:schemeClr val="accent1"/>
-          </a:lnRef>
-          <a:fillRef idx="3">
-            <a:schemeClr val="accent1"/>
-          </a:fillRef>
-          <a:effectRef idx="2">
-            <a:schemeClr val="accent1"/>
-          </a:effectRef>
-          <a:fontRef idx="minor">
-            <a:schemeClr val="lt1"/>
-          </a:fontRef>
-        </p:style>
-        <p:txBody>
-          <a:bodyPr rtlCol="0" anchor="ctr"/>
-          <a:lstStyle/>
-          <a:p/>
-        </p:txBody>
-      </p:sp>
-      <p:sp>
-        <p:nvSpPr>
-          <p:cNvPr id="197" name="row:AF_XDP:release:4.18"/>
-          <p:cNvSpPr/>
-          <p:nvPr/>
-        </p:nvSpPr>
-        <p:spPr>
-          <a:xfrm>
-            <a:off x="8258636" y="4318444"/>
-            <a:ext cx="86868" cy="86868"/>
-          </a:xfrm>
-          <a:prstGeom prst="ellipse">
-            <a:avLst/>
-          </a:prstGeom>
-          <a:solidFill>
-            <a:srgbClr val="16A34A"/>
-          </a:solidFill>
-          <a:ln w="12700">
-            <a:solidFill>
-              <a:srgbClr val="16A34A"/>
-            </a:solidFill>
-          </a:ln>
-          <a:effectLst/>
-        </p:spPr>
-        <p:style>
-          <a:lnRef idx="1">
-            <a:schemeClr val="accent1"/>
-          </a:lnRef>
-          <a:fillRef idx="3">
-            <a:schemeClr val="accent1"/>
-          </a:fillRef>
-          <a:effectRef idx="2">
-            <a:schemeClr val="accent1"/>
-          </a:effectRef>
-          <a:fontRef idx="minor">
-            <a:schemeClr val="lt1"/>
-          </a:fontRef>
-        </p:style>
-        <p:txBody>
-          <a:bodyPr rtlCol="0" anchor="ctr"/>
-          <a:lstStyle/>
-          <a:p/>
-        </p:txBody>
-      </p:sp>
-      <p:sp>
-        <p:nvSpPr>
-          <p:cNvPr id="198" name="row:AF_XDP:label"/>
-          <p:cNvSpPr txBox="1"/>
-          <p:nvPr/>
-        </p:nvSpPr>
-        <p:spPr>
-          <a:xfrm>
-            <a:off x="8375222" y="4252150"/>
-            <a:ext cx="731520" cy="219456"/>
-          </a:xfrm>
-          <a:prstGeom prst="rect">
-            <a:avLst/>
-          </a:prstGeom>
-          <a:noFill/>
-        </p:spPr>
-        <p:txBody>
-          <a:bodyPr wrap="square" anchor="ctr" lIns="0" rIns="0" tIns="0" bIns="0">
-            <a:noAutofit/>
-          </a:bodyPr>
-          <a:lstStyle/>
-          <a:p>
-            <a:pPr algn="l"/>
-            <a:r>
-              <a:rPr sz="800" b="1" i="0">
-                <a:solidFill>
-                  <a:srgbClr val="1F2937"/>
-                </a:solidFill>
-              </a:rPr>
-              <a:t>4.18</a:t>
-            </a:r>
-          </a:p>
-        </p:txBody>
-      </p:sp>
-      <p:sp>
-        <p:nvSpPr>
-          <p:cNvPr id="199" name="row:XDP multi-buffer:name"/>
-          <p:cNvSpPr txBox="1"/>
-          <p:nvPr/>
-        </p:nvSpPr>
-        <p:spPr>
-          <a:xfrm>
-            <a:off x="1325880" y="4361497"/>
-            <a:ext cx="1572768" cy="219456"/>
-          </a:xfrm>
-          <a:prstGeom prst="rect">
-            <a:avLst/>
-          </a:prstGeom>
-          <a:noFill/>
-        </p:spPr>
-        <p:txBody>
-          <a:bodyPr wrap="square" anchor="ctr" lIns="0" rIns="0" tIns="0" bIns="0">
-            <a:noAutofit/>
-          </a:bodyPr>
-          <a:lstStyle/>
-          <a:p>
-            <a:pPr algn="r"/>
-            <a:r>
-              <a:rPr sz="850" b="0" i="0">
-                <a:solidFill>
-                  <a:srgbClr val="1F2937"/>
-                </a:solidFill>
-              </a:rPr>
-              <a:t>XDP multi-buffer</a:t>
-            </a:r>
-          </a:p>
-        </p:txBody>
-      </p:sp>
-      <p:cxnSp>
-        <p:nvCxnSpPr>
-          <p:cNvPr id="200" name="row:XDP multi-buffer:development"/>
-          <p:cNvCxnSpPr/>
-          <p:nvPr/>
-        </p:nvCxnSpPr>
-        <p:spPr>
-          <a:xfrm>
-            <a:off x="9947357" y="4471225"/>
-            <a:ext cx="976313" cy="0"/>
-          </a:xfrm>
-          <a:prstGeom prst="line">
-            <a:avLst/>
-          </a:prstGeom>
-          <a:ln w="12700">
-            <a:solidFill>
-              <a:srgbClr val="16A34A"/>
-            </a:solidFill>
-            <a:prstDash val="dash"/>
-          </a:ln>
-        </p:spPr>
-        <p:style>
-          <a:lnRef idx="2">
-            <a:schemeClr val="accent1"/>
-          </a:lnRef>
-          <a:fillRef idx="0">
-            <a:schemeClr val="accent1"/>
-          </a:fillRef>
-          <a:effectRef idx="1">
-            <a:schemeClr val="accent1"/>
-          </a:effectRef>
-          <a:fontRef idx="minor">
-            <a:schemeClr val="tx1"/>
-          </a:fontRef>
-        </p:style>
-      </p:cxnSp>
-      <p:sp>
-        <p:nvSpPr>
-          <p:cNvPr id="201" name="row:XDP multi-buffer:start"/>
-          <p:cNvSpPr/>
-          <p:nvPr/>
-        </p:nvSpPr>
-        <p:spPr>
-          <a:xfrm>
-            <a:off x="9915353" y="4439221"/>
-            <a:ext cx="64008" cy="64008"/>
-          </a:xfrm>
-          <a:prstGeom prst="ellipse">
-            <a:avLst/>
-          </a:prstGeom>
-          <a:solidFill>
-            <a:srgbClr val="FFFFFF"/>
-          </a:solidFill>
-          <a:ln w="12700">
-            <a:solidFill>
-              <a:srgbClr val="16A34A"/>
-            </a:solidFill>
-          </a:ln>
-          <a:effectLst/>
-        </p:spPr>
-        <p:style>
-          <a:lnRef idx="1">
-            <a:schemeClr val="accent1"/>
-          </a:lnRef>
-          <a:fillRef idx="3">
-            <a:schemeClr val="accent1"/>
-          </a:fillRef>
-          <a:effectRef idx="2">
-            <a:schemeClr val="accent1"/>
-          </a:effectRef>
-          <a:fontRef idx="minor">
-            <a:schemeClr val="lt1"/>
-          </a:fontRef>
-        </p:style>
-        <p:txBody>
-          <a:bodyPr rtlCol="0" anchor="ctr"/>
-          <a:lstStyle/>
-          <a:p/>
-        </p:txBody>
-      </p:sp>
-      <p:sp>
-        <p:nvSpPr>
-          <p:cNvPr id="202" name="row:XDP multi-buffer:release:5.18"/>
-          <p:cNvSpPr/>
-          <p:nvPr/>
-        </p:nvSpPr>
-        <p:spPr>
-          <a:xfrm>
-            <a:off x="10880236" y="4427791"/>
-            <a:ext cx="86868" cy="86868"/>
-          </a:xfrm>
-          <a:prstGeom prst="ellipse">
-            <a:avLst/>
-          </a:prstGeom>
-          <a:solidFill>
-            <a:srgbClr val="16A34A"/>
-          </a:solidFill>
-          <a:ln w="12700">
-            <a:solidFill>
-              <a:srgbClr val="16A34A"/>
-            </a:solidFill>
-          </a:ln>
-          <a:effectLst/>
-        </p:spPr>
-        <p:style>
-          <a:lnRef idx="1">
-            <a:schemeClr val="accent1"/>
-          </a:lnRef>
-          <a:fillRef idx="3">
-            <a:schemeClr val="accent1"/>
-          </a:fillRef>
-          <a:effectRef idx="2">
-            <a:schemeClr val="accent1"/>
-          </a:effectRef>
-          <a:fontRef idx="minor">
-            <a:schemeClr val="lt1"/>
-          </a:fontRef>
-        </p:style>
-        <p:txBody>
-          <a:bodyPr rtlCol="0" anchor="ctr"/>
-          <a:lstStyle/>
-          <a:p/>
-        </p:txBody>
-      </p:sp>
-      <p:sp>
-        <p:nvSpPr>
-          <p:cNvPr id="203" name="row:XDP multi-buffer:label"/>
-          <p:cNvSpPr txBox="1"/>
-          <p:nvPr/>
-        </p:nvSpPr>
-        <p:spPr>
-          <a:xfrm>
-            <a:off x="10996822" y="4361497"/>
-            <a:ext cx="731520" cy="219456"/>
-          </a:xfrm>
-          <a:prstGeom prst="rect">
-            <a:avLst/>
-          </a:prstGeom>
-          <a:noFill/>
-        </p:spPr>
-        <p:txBody>
-          <a:bodyPr wrap="square" anchor="ctr" lIns="0" rIns="0" tIns="0" bIns="0">
-            <a:noAutofit/>
-          </a:bodyPr>
-          <a:lstStyle/>
-          <a:p>
-            <a:pPr algn="l"/>
-            <a:r>
-              <a:rPr sz="800" b="1" i="0">
-                <a:solidFill>
-                  <a:srgbClr val="1F2937"/>
-                </a:solidFill>
-              </a:rPr>
-              <a:t>5.18</a:t>
-            </a:r>
-          </a:p>
-        </p:txBody>
-      </p:sp>
-      <p:sp>
-        <p:nvSpPr>
-          <p:cNvPr id="204" name="row:AF_XDP multi-buffer:name"/>
-          <p:cNvSpPr txBox="1"/>
-          <p:nvPr/>
-        </p:nvSpPr>
-        <p:spPr>
-          <a:xfrm>
-            <a:off x="1325880" y="4470844"/>
-            <a:ext cx="1572768" cy="219456"/>
-          </a:xfrm>
-          <a:prstGeom prst="rect">
-            <a:avLst/>
-          </a:prstGeom>
-          <a:noFill/>
-        </p:spPr>
-        <p:txBody>
-          <a:bodyPr wrap="square" anchor="ctr" lIns="0" rIns="0" tIns="0" bIns="0">
-            <a:noAutofit/>
-          </a:bodyPr>
-          <a:lstStyle/>
-          <a:p>
-            <a:pPr algn="r"/>
-            <a:r>
-              <a:rPr sz="850" b="0" i="0">
-                <a:solidFill>
-                  <a:srgbClr val="1F2937"/>
-                </a:solidFill>
-              </a:rPr>
-              <a:t>AF_XDP multi-buffer</a:t>
-            </a:r>
-          </a:p>
-        </p:txBody>
-      </p:sp>
-      <p:cxnSp>
-        <p:nvCxnSpPr>
-          <p:cNvPr id="205" name="row:AF_XDP multi-buffer:development"/>
-          <p:cNvCxnSpPr/>
-          <p:nvPr/>
-        </p:nvCxnSpPr>
-        <p:spPr>
-          <a:xfrm>
-            <a:off x="10641730" y="4580572"/>
-            <a:ext cx="1282388" cy="0"/>
-          </a:xfrm>
-          <a:prstGeom prst="line">
-            <a:avLst/>
-          </a:prstGeom>
-          <a:ln w="12700">
-            <a:solidFill>
-              <a:srgbClr val="16A34A"/>
-            </a:solidFill>
-            <a:prstDash val="dash"/>
-          </a:ln>
-        </p:spPr>
-        <p:style>
-          <a:lnRef idx="2">
-            <a:schemeClr val="accent1"/>
-          </a:lnRef>
-          <a:fillRef idx="0">
-            <a:schemeClr val="accent1"/>
-          </a:fillRef>
-          <a:effectRef idx="1">
-            <a:schemeClr val="accent1"/>
-          </a:effectRef>
-          <a:fontRef idx="minor">
-            <a:schemeClr val="tx1"/>
-          </a:fontRef>
-        </p:style>
-      </p:cxnSp>
-      <p:sp>
-        <p:nvSpPr>
-          <p:cNvPr id="206" name="row:AF_XDP multi-buffer:start"/>
-          <p:cNvSpPr/>
-          <p:nvPr/>
-        </p:nvSpPr>
-        <p:spPr>
-          <a:xfrm>
-            <a:off x="10609726" y="4548568"/>
-            <a:ext cx="64008" cy="64008"/>
-          </a:xfrm>
-          <a:prstGeom prst="ellipse">
-            <a:avLst/>
-          </a:prstGeom>
-          <a:solidFill>
-            <a:srgbClr val="FFFFFF"/>
-          </a:solidFill>
-          <a:ln w="12700">
-            <a:solidFill>
-              <a:srgbClr val="16A34A"/>
-            </a:solidFill>
-          </a:ln>
-          <a:effectLst/>
-        </p:spPr>
-        <p:style>
-          <a:lnRef idx="1">
-            <a:schemeClr val="accent1"/>
-          </a:lnRef>
-          <a:fillRef idx="3">
-            <a:schemeClr val="accent1"/>
-          </a:fillRef>
-          <a:effectRef idx="2">
-            <a:schemeClr val="accent1"/>
-          </a:effectRef>
-          <a:fontRef idx="minor">
-            <a:schemeClr val="lt1"/>
-          </a:fontRef>
-        </p:style>
-        <p:txBody>
-          <a:bodyPr rtlCol="0" anchor="ctr"/>
-          <a:lstStyle/>
-          <a:p/>
-        </p:txBody>
-      </p:sp>
-      <p:sp>
-        <p:nvSpPr>
-          <p:cNvPr id="207" name="row:AF_XDP multi-buffer:release:6.6"/>
-          <p:cNvSpPr/>
-          <p:nvPr/>
-        </p:nvSpPr>
-        <p:spPr>
-          <a:xfrm>
-            <a:off x="11880684" y="4537138"/>
-            <a:ext cx="86868" cy="86868"/>
-          </a:xfrm>
-          <a:prstGeom prst="ellipse">
-            <a:avLst/>
-          </a:prstGeom>
-          <a:solidFill>
-            <a:srgbClr val="16A34A"/>
-          </a:solidFill>
-          <a:ln w="12700">
-            <a:solidFill>
-              <a:srgbClr val="16A34A"/>
-            </a:solidFill>
-          </a:ln>
-          <a:effectLst/>
-        </p:spPr>
-        <p:style>
-          <a:lnRef idx="1">
-            <a:schemeClr val="accent1"/>
-          </a:lnRef>
-          <a:fillRef idx="3">
-            <a:schemeClr val="accent1"/>
-          </a:fillRef>
-          <a:effectRef idx="2">
-            <a:schemeClr val="accent1"/>
-          </a:effectRef>
-          <a:fontRef idx="minor">
-            <a:schemeClr val="lt1"/>
-          </a:fontRef>
-        </p:style>
-        <p:txBody>
-          <a:bodyPr rtlCol="0" anchor="ctr"/>
-          <a:lstStyle/>
-          <a:p/>
-        </p:txBody>
-      </p:sp>
-      <p:sp>
-        <p:nvSpPr>
-          <p:cNvPr id="208" name="row:AF_XDP multi-buffer:label"/>
-          <p:cNvSpPr txBox="1"/>
-          <p:nvPr/>
-        </p:nvSpPr>
-        <p:spPr>
-          <a:xfrm>
-            <a:off x="11997270" y="4470844"/>
-            <a:ext cx="731520" cy="219456"/>
-          </a:xfrm>
-          <a:prstGeom prst="rect">
-            <a:avLst/>
-          </a:prstGeom>
-          <a:noFill/>
-        </p:spPr>
-        <p:txBody>
-          <a:bodyPr wrap="square" anchor="ctr" lIns="0" rIns="0" tIns="0" bIns="0">
-            <a:noAutofit/>
-          </a:bodyPr>
-          <a:lstStyle/>
-          <a:p>
-            <a:pPr algn="l"/>
-            <a:r>
-              <a:rPr sz="800" b="1" i="0">
-                <a:solidFill>
-                  <a:srgbClr val="1F2937"/>
-                </a:solidFill>
-              </a:rPr>
-              <a:t>6.6</a:t>
-            </a:r>
-          </a:p>
-        </p:txBody>
-      </p:sp>
-      <p:sp>
-        <p:nvSpPr>
-          <p:cNvPr id="209" name="row:RX HW queue leasing:name"/>
+          <p:cNvPr id="228" name="row:RX HW queue leasing:name"/>
           <p:cNvSpPr txBox="1"/>
           <p:nvPr/>
         </p:nvSpPr>
@@ -11410,7 +12105,7 @@
       </p:sp>
       <p:cxnSp>
         <p:nvCxnSpPr>
-          <p:cNvPr id="210" name="row:RX HW queue leasing:development"/>
+          <p:cNvPr id="229" name="row:RX HW queue leasing:development"/>
           <p:cNvCxnSpPr/>
           <p:nvPr/>
         </p:nvCxnSpPr>
@@ -11446,7 +12141,7 @@
       </p:cxnSp>
       <p:sp>
         <p:nvSpPr>
-          <p:cNvPr id="211" name="row:RX HW queue leasing:start"/>
+          <p:cNvPr id="230" name="row:RX HW queue leasing:start"/>
           <p:cNvSpPr/>
           <p:nvPr/>
         </p:nvSpPr>
@@ -11490,7 +12185,7 @@
       </p:sp>
       <p:sp>
         <p:nvSpPr>
-          <p:cNvPr id="212" name="row:RX HW queue leasing:release:7.1"/>
+          <p:cNvPr id="231" name="row:RX HW queue leasing:release:7.1"/>
           <p:cNvSpPr/>
           <p:nvPr/>
         </p:nvSpPr>
@@ -11534,7 +12229,7 @@
       </p:sp>
       <p:sp>
         <p:nvSpPr>
-          <p:cNvPr id="213" name="row:RX HW queue leasing:label"/>
+          <p:cNvPr id="232" name="row:RX HW queue leasing:label"/>
           <p:cNvSpPr txBox="1"/>
           <p:nvPr/>
         </p:nvSpPr>
@@ -11568,7 +12263,7 @@
       </p:sp>
       <p:sp>
         <p:nvSpPr>
-          <p:cNvPr id="214" name="band-label:CONTROL PLANE"/>
+          <p:cNvPr id="233" name="band-label:CONTROL PLANE"/>
           <p:cNvSpPr txBox="1"/>
           <p:nvPr/>
         </p:nvSpPr>
@@ -11603,7 +12298,7 @@
       </p:sp>
       <p:sp>
         <p:nvSpPr>
-          <p:cNvPr id="215" name="row:nftables (dev. from 2008):name"/>
+          <p:cNvPr id="234" name="row:nftables (dev. from 2008):name"/>
           <p:cNvSpPr txBox="1"/>
           <p:nvPr/>
         </p:nvSpPr>
@@ -11637,7 +12332,7 @@
       </p:sp>
       <p:cxnSp>
         <p:nvCxnSpPr>
-          <p:cNvPr id="216" name="row:nftables (dev. from 2008):development"/>
+          <p:cNvPr id="235" name="row:nftables (dev. from 2008):development"/>
           <p:cNvCxnSpPr/>
           <p:nvPr/>
         </p:nvCxnSpPr>
@@ -11673,7 +12368,7 @@
       </p:cxnSp>
       <p:sp>
         <p:nvSpPr>
-          <p:cNvPr id="217" name="row:nftables (dev. from 2008):start-offchart"/>
+          <p:cNvPr id="236" name="row:nftables (dev. from 2008):start-offchart"/>
           <p:cNvSpPr/>
           <p:nvPr/>
         </p:nvSpPr>
@@ -11715,7 +12410,7 @@
       </p:sp>
       <p:sp>
         <p:nvSpPr>
-          <p:cNvPr id="218" name="row:nftables (dev. from 2008):release:3.13"/>
+          <p:cNvPr id="237" name="row:nftables (dev. from 2008):release:3.13"/>
           <p:cNvSpPr/>
           <p:nvPr/>
         </p:nvSpPr>
@@ -11759,7 +12454,7 @@
       </p:sp>
       <p:sp>
         <p:nvSpPr>
-          <p:cNvPr id="219" name="row:nftables (dev. from 2008):label"/>
+          <p:cNvPr id="238" name="row:nftables (dev. from 2008):label"/>
           <p:cNvSpPr txBox="1"/>
           <p:nvPr/>
         </p:nvSpPr>
@@ -11793,7 +12488,7 @@
       </p:sp>
       <p:sp>
         <p:nvSpPr>
-          <p:cNvPr id="220" name="row:nexthop objects:name"/>
+          <p:cNvPr id="239" name="row:nexthop objects:name"/>
           <p:cNvSpPr txBox="1"/>
           <p:nvPr/>
         </p:nvSpPr>
@@ -11827,7 +12522,7 @@
       </p:sp>
       <p:cxnSp>
         <p:nvCxnSpPr>
-          <p:cNvPr id="221" name="row:nexthop objects:development"/>
+          <p:cNvPr id="240" name="row:nexthop objects:development"/>
           <p:cNvCxnSpPr/>
           <p:nvPr/>
         </p:nvCxnSpPr>
@@ -11863,7 +12558,7 @@
       </p:cxnSp>
       <p:sp>
         <p:nvSpPr>
-          <p:cNvPr id="222" name="row:nexthop objects:start"/>
+          <p:cNvPr id="241" name="row:nexthop objects:start"/>
           <p:cNvSpPr/>
           <p:nvPr/>
         </p:nvSpPr>
@@ -11907,7 +12602,7 @@
       </p:sp>
       <p:sp>
         <p:nvSpPr>
-          <p:cNvPr id="223" name="row:nexthop objects:release:5.3"/>
+          <p:cNvPr id="242" name="row:nexthop objects:release:5.3"/>
           <p:cNvSpPr/>
           <p:nvPr/>
         </p:nvSpPr>
@@ -11951,7 +12646,7 @@
       </p:sp>
       <p:sp>
         <p:nvSpPr>
-          <p:cNvPr id="224" name="row:nexthop objects:label"/>
+          <p:cNvPr id="243" name="row:nexthop objects:label"/>
           <p:cNvSpPr txBox="1"/>
           <p:nvPr/>
         </p:nvSpPr>
@@ -11985,7 +12680,7 @@
       </p:sp>
       <p:sp>
         <p:nvSpPr>
-          <p:cNvPr id="225" name="row:YNL tooling:name"/>
+          <p:cNvPr id="244" name="row:YNL tooling:name"/>
           <p:cNvSpPr txBox="1"/>
           <p:nvPr/>
         </p:nvSpPr>
@@ -12019,7 +12714,7 @@
       </p:sp>
       <p:cxnSp>
         <p:nvCxnSpPr>
-          <p:cNvPr id="226" name="row:YNL tooling:development"/>
+          <p:cNvPr id="245" name="row:YNL tooling:development"/>
           <p:cNvCxnSpPr/>
           <p:nvPr/>
         </p:nvCxnSpPr>
@@ -12055,7 +12750,7 @@
       </p:cxnSp>
       <p:sp>
         <p:nvSpPr>
-          <p:cNvPr id="227" name="row:YNL tooling:start"/>
+          <p:cNvPr id="246" name="row:YNL tooling:start"/>
           <p:cNvSpPr/>
           <p:nvPr/>
         </p:nvSpPr>
@@ -12099,7 +12794,7 @@
       </p:sp>
       <p:sp>
         <p:nvSpPr>
-          <p:cNvPr id="228" name="row:YNL tooling:release:6.3"/>
+          <p:cNvPr id="247" name="row:YNL tooling:release:6.3"/>
           <p:cNvSpPr/>
           <p:nvPr/>
         </p:nvSpPr>
@@ -12143,7 +12838,7 @@
       </p:sp>
       <p:sp>
         <p:nvSpPr>
-          <p:cNvPr id="229" name="row:YNL tooling:label"/>
+          <p:cNvPr id="248" name="row:YNL tooling:label"/>
           <p:cNvSpPr txBox="1"/>
           <p:nvPr/>
         </p:nvSpPr>
@@ -12177,7 +12872,7 @@
       </p:sp>
       <p:sp>
         <p:nvSpPr>
-          <p:cNvPr id="230" name="row:per-netns RTNL:name"/>
+          <p:cNvPr id="249" name="row:per-netns RTNL:name"/>
           <p:cNvSpPr txBox="1"/>
           <p:nvPr/>
         </p:nvSpPr>
@@ -12211,7 +12906,7 @@
       </p:sp>
       <p:cxnSp>
         <p:nvCxnSpPr>
-          <p:cNvPr id="231" name="row:per-netns RTNL:development"/>
+          <p:cNvPr id="250" name="row:per-netns RTNL:development"/>
           <p:cNvCxnSpPr/>
           <p:nvPr/>
         </p:nvCxnSpPr>
@@ -12247,7 +12942,7 @@
       </p:cxnSp>
       <p:sp>
         <p:nvSpPr>
-          <p:cNvPr id="232" name="row:per-netns RTNL:start"/>
+          <p:cNvPr id="251" name="row:per-netns RTNL:start"/>
           <p:cNvSpPr/>
           <p:nvPr/>
         </p:nvSpPr>
@@ -12291,7 +12986,7 @@
       </p:sp>
       <p:sp>
         <p:nvSpPr>
-          <p:cNvPr id="233" name="row:per-netns RTNL:release:6.13"/>
+          <p:cNvPr id="252" name="row:per-netns RTNL:release:6.13"/>
           <p:cNvSpPr/>
           <p:nvPr/>
         </p:nvSpPr>
@@ -12335,7 +13030,7 @@
       </p:sp>
       <p:sp>
         <p:nvSpPr>
-          <p:cNvPr id="234" name="row:per-netns RTNL:label"/>
+          <p:cNvPr id="253" name="row:per-netns RTNL:label"/>
           <p:cNvSpPr txBox="1"/>
           <p:nvPr/>
         </p:nvSpPr>
@@ -12369,7 +13064,7 @@
       </p:sp>
       <p:sp>
         <p:nvSpPr>
-          <p:cNvPr id="235" name="row:further RTNL breakup:name"/>
+          <p:cNvPr id="254" name="row:further RTNL breakup:name"/>
           <p:cNvSpPr txBox="1"/>
           <p:nvPr/>
         </p:nvSpPr>
@@ -12403,7 +13098,7 @@
       </p:sp>
       <p:cxnSp>
         <p:nvCxnSpPr>
-          <p:cNvPr id="236" name="row:further RTNL breakup:development"/>
+          <p:cNvPr id="255" name="row:further RTNL breakup:development"/>
           <p:cNvCxnSpPr/>
           <p:nvPr/>
         </p:nvCxnSpPr>
@@ -12439,7 +13134,7 @@
       </p:cxnSp>
       <p:sp>
         <p:nvSpPr>
-          <p:cNvPr id="237" name="row:further RTNL breakup:start"/>
+          <p:cNvPr id="256" name="row:further RTNL breakup:start"/>
           <p:cNvSpPr/>
           <p:nvPr/>
         </p:nvSpPr>
@@ -12483,7 +13178,7 @@
       </p:sp>
       <p:sp>
         <p:nvSpPr>
-          <p:cNvPr id="238" name="row:further RTNL breakup:release:6.15"/>
+          <p:cNvPr id="257" name="row:further RTNL breakup:release:6.15"/>
           <p:cNvSpPr/>
           <p:nvPr/>
         </p:nvSpPr>
@@ -12527,7 +13222,7 @@
       </p:sp>
       <p:sp>
         <p:nvSpPr>
-          <p:cNvPr id="239" name="row:further RTNL breakup:label"/>
+          <p:cNvPr id="258" name="row:further RTNL breakup:label"/>
           <p:cNvSpPr txBox="1"/>
           <p:nvPr/>
         </p:nvSpPr>
@@ -12561,7 +13256,7 @@
       </p:sp>
       <p:sp>
         <p:nvSpPr>
-          <p:cNvPr id="240" name="row:RTNL-less FIB rules:name"/>
+          <p:cNvPr id="259" name="row:RTNL-less FIB rules:name"/>
           <p:cNvSpPr txBox="1"/>
           <p:nvPr/>
         </p:nvSpPr>
@@ -12595,7 +13290,7 @@
       </p:sp>
       <p:cxnSp>
         <p:nvCxnSpPr>
-          <p:cNvPr id="241" name="row:RTNL-less FIB rules:development"/>
+          <p:cNvPr id="260" name="row:RTNL-less FIB rules:development"/>
           <p:cNvCxnSpPr/>
           <p:nvPr/>
         </p:nvCxnSpPr>
@@ -12631,7 +13326,7 @@
       </p:cxnSp>
       <p:sp>
         <p:nvSpPr>
-          <p:cNvPr id="242" name="row:RTNL-less FIB rules:start"/>
+          <p:cNvPr id="261" name="row:RTNL-less FIB rules:start"/>
           <p:cNvSpPr/>
           <p:nvPr/>
         </p:nvSpPr>
@@ -12675,7 +13370,7 @@
       </p:sp>
       <p:sp>
         <p:nvSpPr>
-          <p:cNvPr id="243" name="row:RTNL-less FIB rules:release:7.3-rc"/>
+          <p:cNvPr id="262" name="row:RTNL-less FIB rules:release:7.3-rc"/>
           <p:cNvSpPr/>
           <p:nvPr/>
         </p:nvSpPr>
@@ -12719,7 +13414,7 @@
       </p:sp>
       <p:sp>
         <p:nvSpPr>
-          <p:cNvPr id="244" name="row:RTNL-less FIB rules:label"/>
+          <p:cNvPr id="263" name="row:RTNL-less FIB rules:label"/>
           <p:cNvSpPr txBox="1"/>
           <p:nvPr/>
         </p:nvSpPr>
@@ -12753,7 +13448,7 @@
       </p:sp>
       <p:sp>
         <p:nvSpPr>
-          <p:cNvPr id="245" name="band-label:OBSERVABILITY"/>
+          <p:cNvPr id="264" name="band-label:OBSERVABILITY"/>
           <p:cNvSpPr txBox="1"/>
           <p:nvPr/>
         </p:nvSpPr>
@@ -12788,7 +13483,7 @@
       </p:sp>
       <p:sp>
         <p:nvSpPr>
-          <p:cNvPr id="246" name="row:kprobe BPF:name"/>
+          <p:cNvPr id="265" name="row:kprobe BPF:name"/>
           <p:cNvSpPr txBox="1"/>
           <p:nvPr/>
         </p:nvSpPr>
@@ -12822,7 +13517,7 @@
       </p:sp>
       <p:cxnSp>
         <p:nvCxnSpPr>
-          <p:cNvPr id="247" name="row:kprobe BPF:development"/>
+          <p:cNvPr id="266" name="row:kprobe BPF:development"/>
           <p:cNvCxnSpPr/>
           <p:nvPr/>
         </p:nvCxnSpPr>
@@ -12858,7 +13553,7 @@
       </p:cxnSp>
       <p:sp>
         <p:nvSpPr>
-          <p:cNvPr id="248" name="row:kprobe BPF:start"/>
+          <p:cNvPr id="267" name="row:kprobe BPF:start"/>
           <p:cNvSpPr/>
           <p:nvPr/>
         </p:nvSpPr>
@@ -12902,7 +13597,7 @@
       </p:sp>
       <p:sp>
         <p:nvSpPr>
-          <p:cNvPr id="249" name="row:kprobe BPF:release:4.1"/>
+          <p:cNvPr id="268" name="row:kprobe BPF:release:4.1"/>
           <p:cNvSpPr/>
           <p:nvPr/>
         </p:nvSpPr>
@@ -12946,7 +13641,7 @@
       </p:sp>
       <p:sp>
         <p:nvSpPr>
-          <p:cNvPr id="250" name="row:kprobe BPF:label"/>
+          <p:cNvPr id="269" name="row:kprobe BPF:label"/>
           <p:cNvSpPr txBox="1"/>
           <p:nvPr/>
         </p:nvSpPr>
@@ -12980,7 +13675,7 @@
       </p:sp>
       <p:sp>
         <p:nvSpPr>
-          <p:cNvPr id="251" name="row:structured drop reason:name"/>
+          <p:cNvPr id="270" name="row:structured drop reason:name"/>
           <p:cNvSpPr txBox="1"/>
           <p:nvPr/>
         </p:nvSpPr>
@@ -13014,7 +13709,7 @@
       </p:sp>
       <p:cxnSp>
         <p:nvCxnSpPr>
-          <p:cNvPr id="252" name="row:structured drop reason:development"/>
+          <p:cNvPr id="271" name="row:structured drop reason:development"/>
           <p:cNvCxnSpPr/>
           <p:nvPr/>
         </p:nvCxnSpPr>
@@ -13050,7 +13745,7 @@
       </p:cxnSp>
       <p:sp>
         <p:nvSpPr>
-          <p:cNvPr id="253" name="row:structured drop reason:start"/>
+          <p:cNvPr id="272" name="row:structured drop reason:start"/>
           <p:cNvSpPr/>
           <p:nvPr/>
         </p:nvSpPr>
@@ -13094,7 +13789,7 @@
       </p:sp>
       <p:sp>
         <p:nvSpPr>
-          <p:cNvPr id="254" name="row:structured drop reason:release:5.17"/>
+          <p:cNvPr id="273" name="row:structured drop reason:release:5.17"/>
           <p:cNvSpPr/>
           <p:nvPr/>
         </p:nvSpPr>
@@ -13138,7 +13833,7 @@
       </p:sp>
       <p:sp>
         <p:nvSpPr>
-          <p:cNvPr id="255" name="row:structured drop reason:label"/>
+          <p:cNvPr id="274" name="row:structured drop reason:label"/>
           <p:cNvSpPr txBox="1"/>
           <p:nvPr/>
         </p:nvSpPr>
@@ -13172,7 +13867,7 @@
       </p:sp>
       <p:sp>
         <p:nvSpPr>
-          <p:cNvPr id="256" name="row:drop-reason expansion:name"/>
+          <p:cNvPr id="275" name="row:drop-reason expansion:name"/>
           <p:cNvSpPr txBox="1"/>
           <p:nvPr/>
         </p:nvSpPr>
@@ -13206,7 +13901,7 @@
       </p:sp>
       <p:cxnSp>
         <p:nvCxnSpPr>
-          <p:cNvPr id="257" name="row:drop-reason expansion:development"/>
+          <p:cNvPr id="276" name="row:drop-reason expansion:development"/>
           <p:cNvCxnSpPr/>
           <p:nvPr/>
         </p:nvCxnSpPr>
@@ -13242,7 +13937,7 @@
       </p:cxnSp>
       <p:sp>
         <p:nvSpPr>
-          <p:cNvPr id="258" name="row:drop-reason expansion:start"/>
+          <p:cNvPr id="277" name="row:drop-reason expansion:start"/>
           <p:cNvSpPr/>
           <p:nvPr/>
         </p:nvSpPr>
@@ -13286,7 +13981,7 @@
       </p:sp>
       <p:sp>
         <p:nvSpPr>
-          <p:cNvPr id="259" name="row:drop-reason expansion:release:5.19"/>
+          <p:cNvPr id="278" name="row:drop-reason expansion:release:5.19"/>
           <p:cNvSpPr/>
           <p:nvPr/>
         </p:nvSpPr>
@@ -13330,7 +14025,7 @@
       </p:sp>
       <p:sp>
         <p:nvSpPr>
-          <p:cNvPr id="260" name="row:drop-reason expansion:label"/>
+          <p:cNvPr id="279" name="row:drop-reason expansion:label"/>
           <p:cNvSpPr txBox="1"/>
           <p:nvPr/>
         </p:nvSpPr>
@@ -13364,7 +14059,7 @@
       </p:sp>
       <p:sp>
         <p:nvSpPr>
-          <p:cNvPr id="261" name="row:queue/NAPI netdev-genl:name"/>
+          <p:cNvPr id="280" name="row:queue/NAPI netdev-genl:name"/>
           <p:cNvSpPr txBox="1"/>
           <p:nvPr/>
         </p:nvSpPr>
@@ -13398,7 +14093,7 @@
       </p:sp>
       <p:cxnSp>
         <p:nvCxnSpPr>
-          <p:cNvPr id="262" name="row:queue/NAPI netdev-genl:development"/>
+          <p:cNvPr id="281" name="row:queue/NAPI netdev-genl:development"/>
           <p:cNvCxnSpPr/>
           <p:nvPr/>
         </p:nvCxnSpPr>
@@ -13434,7 +14129,7 @@
       </p:cxnSp>
       <p:sp>
         <p:nvSpPr>
-          <p:cNvPr id="263" name="row:queue/NAPI netdev-genl:start"/>
+          <p:cNvPr id="282" name="row:queue/NAPI netdev-genl:start"/>
           <p:cNvSpPr/>
           <p:nvPr/>
         </p:nvSpPr>
@@ -13478,7 +14173,7 @@
       </p:sp>
       <p:sp>
         <p:nvSpPr>
-          <p:cNvPr id="264" name="row:queue/NAPI netdev-genl:release:6.8"/>
+          <p:cNvPr id="283" name="row:queue/NAPI netdev-genl:release:6.8"/>
           <p:cNvSpPr/>
           <p:nvPr/>
         </p:nvSpPr>
@@ -13522,7 +14217,7 @@
       </p:sp>
       <p:sp>
         <p:nvSpPr>
-          <p:cNvPr id="265" name="row:queue/NAPI netdev-genl:label"/>
+          <p:cNvPr id="284" name="row:queue/NAPI netdev-genl:label"/>
           <p:cNvSpPr txBox="1"/>
           <p:nvPr/>
         </p:nvSpPr>
@@ -13556,7 +14251,7 @@
       </p:sp>
       <p:sp>
         <p:nvSpPr>
-          <p:cNvPr id="266" name="row:qdisc-drop tracepoint:name"/>
+          <p:cNvPr id="285" name="row:qdisc-drop tracepoint:name"/>
           <p:cNvSpPr txBox="1"/>
           <p:nvPr/>
         </p:nvSpPr>
@@ -13590,7 +14285,7 @@
       </p:sp>
       <p:cxnSp>
         <p:nvCxnSpPr>
-          <p:cNvPr id="267" name="row:qdisc-drop tracepoint:development"/>
+          <p:cNvPr id="286" name="row:qdisc-drop tracepoint:development"/>
           <p:cNvCxnSpPr/>
           <p:nvPr/>
         </p:nvCxnSpPr>
@@ -13626,7 +14321,7 @@
       </p:cxnSp>
       <p:sp>
         <p:nvSpPr>
-          <p:cNvPr id="268" name="row:qdisc-drop tracepoint:start"/>
+          <p:cNvPr id="287" name="row:qdisc-drop tracepoint:start"/>
           <p:cNvSpPr/>
           <p:nvPr/>
         </p:nvSpPr>
@@ -13670,7 +14365,7 @@
       </p:sp>
       <p:sp>
         <p:nvSpPr>
-          <p:cNvPr id="269" name="row:qdisc-drop tracepoint:release:7.1"/>
+          <p:cNvPr id="288" name="row:qdisc-drop tracepoint:release:7.1"/>
           <p:cNvSpPr/>
           <p:nvPr/>
         </p:nvSpPr>
@@ -13714,7 +14409,7 @@
       </p:sp>
       <p:sp>
         <p:nvSpPr>
-          <p:cNvPr id="270" name="row:qdisc-drop tracepoint:label"/>
+          <p:cNvPr id="289" name="row:qdisc-drop tracepoint:label"/>
           <p:cNvSpPr txBox="1"/>
           <p:nvPr/>
         </p:nvSpPr>
@@ -13748,7 +14443,7 @@
       </p:sp>
       <p:sp>
         <p:nvSpPr>
-          <p:cNvPr id="271" name="band-label:DRIVER FRAMEWORK"/>
+          <p:cNvPr id="290" name="band-label:DRIVER FRAMEWORK"/>
           <p:cNvSpPr txBox="1"/>
           <p:nvPr/>
         </p:nvSpPr>
@@ -13783,7 +14478,7 @@
       </p:sp>
       <p:sp>
         <p:nvSpPr>
-          <p:cNvPr id="272" name="row:switchdev:name"/>
+          <p:cNvPr id="291" name="row:switchdev:name"/>
           <p:cNvSpPr txBox="1"/>
           <p:nvPr/>
         </p:nvSpPr>
@@ -13817,7 +14512,7 @@
       </p:sp>
       <p:cxnSp>
         <p:nvCxnSpPr>
-          <p:cNvPr id="273" name="row:switchdev:development"/>
+          <p:cNvPr id="292" name="row:switchdev:development"/>
           <p:cNvCxnSpPr/>
           <p:nvPr/>
         </p:nvCxnSpPr>
@@ -13853,7 +14548,7 @@
       </p:cxnSp>
       <p:sp>
         <p:nvSpPr>
-          <p:cNvPr id="274" name="row:switchdev:start"/>
+          <p:cNvPr id="293" name="row:switchdev:start"/>
           <p:cNvSpPr/>
           <p:nvPr/>
         </p:nvSpPr>
@@ -13897,7 +14592,7 @@
       </p:sp>
       <p:sp>
         <p:nvSpPr>
-          <p:cNvPr id="275" name="row:switchdev:release:3.19"/>
+          <p:cNvPr id="294" name="row:switchdev:release:3.19"/>
           <p:cNvSpPr/>
           <p:nvPr/>
         </p:nvSpPr>
@@ -13941,7 +14636,7 @@
       </p:sp>
       <p:sp>
         <p:nvSpPr>
-          <p:cNvPr id="276" name="row:switchdev:label"/>
+          <p:cNvPr id="295" name="row:switchdev:label"/>
           <p:cNvSpPr txBox="1"/>
           <p:nvPr/>
         </p:nvSpPr>
@@ -13975,7 +14670,7 @@
       </p:sp>
       <p:sp>
         <p:nvSpPr>
-          <p:cNvPr id="277" name="row:devlink:name"/>
+          <p:cNvPr id="296" name="row:devlink:name"/>
           <p:cNvSpPr txBox="1"/>
           <p:nvPr/>
         </p:nvSpPr>
@@ -14009,7 +14704,7 @@
       </p:sp>
       <p:cxnSp>
         <p:nvCxnSpPr>
-          <p:cNvPr id="278" name="row:devlink:development"/>
+          <p:cNvPr id="297" name="row:devlink:development"/>
           <p:cNvCxnSpPr/>
           <p:nvPr/>
         </p:nvCxnSpPr>
@@ -14045,7 +14740,7 @@
       </p:cxnSp>
       <p:sp>
         <p:nvSpPr>
-          <p:cNvPr id="279" name="row:devlink:start"/>
+          <p:cNvPr id="298" name="row:devlink:start"/>
           <p:cNvSpPr/>
           <p:nvPr/>
         </p:nvSpPr>
@@ -14089,7 +14784,7 @@
       </p:sp>
       <p:sp>
         <p:nvSpPr>
-          <p:cNvPr id="280" name="row:devlink:release:4.6"/>
+          <p:cNvPr id="299" name="row:devlink:release:4.6"/>
           <p:cNvSpPr/>
           <p:nvPr/>
         </p:nvSpPr>
@@ -14133,7 +14828,7 @@
       </p:sp>
       <p:sp>
         <p:nvSpPr>
-          <p:cNvPr id="281" name="row:devlink:label"/>
+          <p:cNvPr id="300" name="row:devlink:label"/>
           <p:cNvSpPr txBox="1"/>
           <p:nvPr/>
         </p:nvSpPr>
@@ -14167,13 +14862,205 @@
       </p:sp>
       <p:sp>
         <p:nvSpPr>
-          <p:cNvPr id="282" name="row:phylink:name"/>
+          <p:cNvPr id="301" name="row:devlink health:name"/>
           <p:cNvSpPr txBox="1"/>
           <p:nvPr/>
         </p:nvSpPr>
         <p:spPr>
           <a:xfrm>
             <a:off x="1325880" y="6385369"/>
+            <a:ext cx="1572768" cy="219456"/>
+          </a:xfrm>
+          <a:prstGeom prst="rect">
+            <a:avLst/>
+          </a:prstGeom>
+          <a:noFill/>
+        </p:spPr>
+        <p:txBody>
+          <a:bodyPr wrap="square" anchor="ctr" lIns="0" rIns="0" tIns="0" bIns="0">
+            <a:noAutofit/>
+          </a:bodyPr>
+          <a:lstStyle/>
+          <a:p>
+            <a:pPr algn="r"/>
+            <a:r>
+              <a:rPr sz="850" b="0" i="0">
+                <a:solidFill>
+                  <a:srgbClr val="1F2937"/>
+                </a:solidFill>
+              </a:rPr>
+              <a:t>devlink health</a:t>
+            </a:r>
+          </a:p>
+        </p:txBody>
+      </p:sp>
+      <p:cxnSp>
+        <p:nvCxnSpPr>
+          <p:cNvPr id="302" name="row:devlink health:development"/>
+          <p:cNvCxnSpPr/>
+          <p:nvPr/>
+        </p:nvCxnSpPr>
+        <p:spPr>
+          <a:xfrm>
+            <a:off x="7864240" y="6495097"/>
+            <a:ext cx="943994" cy="0"/>
+          </a:xfrm>
+          <a:prstGeom prst="line">
+            <a:avLst/>
+          </a:prstGeom>
+          <a:ln w="12700">
+            <a:solidFill>
+              <a:srgbClr val="A16207"/>
+            </a:solidFill>
+            <a:prstDash val="dash"/>
+          </a:ln>
+        </p:spPr>
+        <p:style>
+          <a:lnRef idx="2">
+            <a:schemeClr val="accent1"/>
+          </a:lnRef>
+          <a:fillRef idx="0">
+            <a:schemeClr val="accent1"/>
+          </a:fillRef>
+          <a:effectRef idx="1">
+            <a:schemeClr val="accent1"/>
+          </a:effectRef>
+          <a:fontRef idx="minor">
+            <a:schemeClr val="tx1"/>
+          </a:fontRef>
+        </p:style>
+      </p:cxnSp>
+      <p:sp>
+        <p:nvSpPr>
+          <p:cNvPr id="303" name="row:devlink health:start"/>
+          <p:cNvSpPr/>
+          <p:nvPr/>
+        </p:nvSpPr>
+        <p:spPr>
+          <a:xfrm>
+            <a:off x="7832236" y="6463093"/>
+            <a:ext cx="64008" cy="64008"/>
+          </a:xfrm>
+          <a:prstGeom prst="ellipse">
+            <a:avLst/>
+          </a:prstGeom>
+          <a:solidFill>
+            <a:srgbClr val="FFFFFF"/>
+          </a:solidFill>
+          <a:ln w="12700">
+            <a:solidFill>
+              <a:srgbClr val="A16207"/>
+            </a:solidFill>
+          </a:ln>
+          <a:effectLst/>
+        </p:spPr>
+        <p:style>
+          <a:lnRef idx="1">
+            <a:schemeClr val="accent1"/>
+          </a:lnRef>
+          <a:fillRef idx="3">
+            <a:schemeClr val="accent1"/>
+          </a:fillRef>
+          <a:effectRef idx="2">
+            <a:schemeClr val="accent1"/>
+          </a:effectRef>
+          <a:fontRef idx="minor">
+            <a:schemeClr val="lt1"/>
+          </a:fontRef>
+        </p:style>
+        <p:txBody>
+          <a:bodyPr rtlCol="0" anchor="ctr"/>
+          <a:lstStyle/>
+          <a:p/>
+        </p:txBody>
+      </p:sp>
+      <p:sp>
+        <p:nvSpPr>
+          <p:cNvPr id="304" name="row:devlink health:release:5.1"/>
+          <p:cNvSpPr/>
+          <p:nvPr/>
+        </p:nvSpPr>
+        <p:spPr>
+          <a:xfrm>
+            <a:off x="8764800" y="6451663"/>
+            <a:ext cx="86868" cy="86868"/>
+          </a:xfrm>
+          <a:prstGeom prst="ellipse">
+            <a:avLst/>
+          </a:prstGeom>
+          <a:solidFill>
+            <a:srgbClr val="A16207"/>
+          </a:solidFill>
+          <a:ln w="12700">
+            <a:solidFill>
+              <a:srgbClr val="A16207"/>
+            </a:solidFill>
+          </a:ln>
+          <a:effectLst/>
+        </p:spPr>
+        <p:style>
+          <a:lnRef idx="1">
+            <a:schemeClr val="accent1"/>
+          </a:lnRef>
+          <a:fillRef idx="3">
+            <a:schemeClr val="accent1"/>
+          </a:fillRef>
+          <a:effectRef idx="2">
+            <a:schemeClr val="accent1"/>
+          </a:effectRef>
+          <a:fontRef idx="minor">
+            <a:schemeClr val="lt1"/>
+          </a:fontRef>
+        </p:style>
+        <p:txBody>
+          <a:bodyPr rtlCol="0" anchor="ctr"/>
+          <a:lstStyle/>
+          <a:p/>
+        </p:txBody>
+      </p:sp>
+      <p:sp>
+        <p:nvSpPr>
+          <p:cNvPr id="305" name="row:devlink health:label"/>
+          <p:cNvSpPr txBox="1"/>
+          <p:nvPr/>
+        </p:nvSpPr>
+        <p:spPr>
+          <a:xfrm>
+            <a:off x="8881386" y="6385369"/>
+            <a:ext cx="731520" cy="219456"/>
+          </a:xfrm>
+          <a:prstGeom prst="rect">
+            <a:avLst/>
+          </a:prstGeom>
+          <a:noFill/>
+        </p:spPr>
+        <p:txBody>
+          <a:bodyPr wrap="square" anchor="ctr" lIns="0" rIns="0" tIns="0" bIns="0">
+            <a:noAutofit/>
+          </a:bodyPr>
+          <a:lstStyle/>
+          <a:p>
+            <a:pPr algn="l"/>
+            <a:r>
+              <a:rPr sz="800" b="1" i="0">
+                <a:solidFill>
+                  <a:srgbClr val="1F2937"/>
+                </a:solidFill>
+              </a:rPr>
+              <a:t>5.1</a:t>
+            </a:r>
+          </a:p>
+        </p:txBody>
+      </p:sp>
+      <p:sp>
+        <p:nvSpPr>
+          <p:cNvPr id="306" name="row:phylink:name"/>
+          <p:cNvSpPr txBox="1"/>
+          <p:nvPr/>
+        </p:nvSpPr>
+        <p:spPr>
+          <a:xfrm>
+            <a:off x="1325880" y="6494716"/>
             <a:ext cx="1572768" cy="219456"/>
           </a:xfrm>
           <a:prstGeom prst="rect">
@@ -14201,13 +15088,13 @@
       </p:sp>
       <p:cxnSp>
         <p:nvCxnSpPr>
-          <p:cNvPr id="283" name="row:phylink:development"/>
+          <p:cNvPr id="307" name="row:phylink:development"/>
           <p:cNvCxnSpPr/>
           <p:nvPr/>
         </p:nvCxnSpPr>
         <p:spPr>
           <a:xfrm>
-            <a:off x="5919997" y="6495097"/>
+            <a:off x="5919997" y="6604444"/>
             <a:ext cx="1862600" cy="0"/>
           </a:xfrm>
           <a:prstGeom prst="line">
@@ -14237,13 +15124,13 @@
       </p:cxnSp>
       <p:sp>
         <p:nvSpPr>
-          <p:cNvPr id="284" name="row:phylink:start"/>
+          <p:cNvPr id="308" name="row:phylink:start"/>
           <p:cNvSpPr/>
           <p:nvPr/>
         </p:nvSpPr>
         <p:spPr>
           <a:xfrm>
-            <a:off x="5887993" y="6463093"/>
+            <a:off x="5887993" y="6572440"/>
             <a:ext cx="64008" cy="64008"/>
           </a:xfrm>
           <a:prstGeom prst="ellipse">
@@ -14281,13 +15168,13 @@
       </p:sp>
       <p:sp>
         <p:nvSpPr>
-          <p:cNvPr id="285" name="row:phylink:release:4.14"/>
+          <p:cNvPr id="309" name="row:phylink:release:4.14"/>
           <p:cNvSpPr/>
           <p:nvPr/>
         </p:nvSpPr>
         <p:spPr>
           <a:xfrm>
-            <a:off x="7739163" y="6451663"/>
+            <a:off x="7739163" y="6561010"/>
             <a:ext cx="86868" cy="86868"/>
           </a:xfrm>
           <a:prstGeom prst="ellipse">
@@ -14325,13 +15212,13 @@
       </p:sp>
       <p:sp>
         <p:nvSpPr>
-          <p:cNvPr id="286" name="row:phylink:label"/>
+          <p:cNvPr id="310" name="row:phylink:label"/>
           <p:cNvSpPr txBox="1"/>
           <p:nvPr/>
         </p:nvSpPr>
         <p:spPr>
           <a:xfrm>
-            <a:off x="7855749" y="6385369"/>
+            <a:off x="7855749" y="6494716"/>
             <a:ext cx="731520" cy="219456"/>
           </a:xfrm>
           <a:prstGeom prst="rect">
@@ -14359,13 +15246,13 @@
       </p:sp>
       <p:sp>
         <p:nvSpPr>
-          <p:cNvPr id="287" name="row:Net DIM:name"/>
+          <p:cNvPr id="311" name="row:Net DIM:name"/>
           <p:cNvSpPr txBox="1"/>
           <p:nvPr/>
         </p:nvSpPr>
         <p:spPr>
           <a:xfrm>
-            <a:off x="1325880" y="6494716"/>
+            <a:off x="1325880" y="6604063"/>
             <a:ext cx="1572768" cy="219456"/>
           </a:xfrm>
           <a:prstGeom prst="rect">
@@ -14393,13 +15280,13 @@
       </p:sp>
       <p:cxnSp>
         <p:nvCxnSpPr>
-          <p:cNvPr id="288" name="row:Net DIM:development"/>
+          <p:cNvPr id="312" name="row:Net DIM:development"/>
           <p:cNvCxnSpPr/>
           <p:nvPr/>
         </p:nvCxnSpPr>
         <p:spPr>
           <a:xfrm>
-            <a:off x="7169867" y="6604444"/>
+            <a:off x="7169867" y="6713791"/>
             <a:ext cx="879358" cy="0"/>
           </a:xfrm>
           <a:prstGeom prst="line">
@@ -14429,13 +15316,13 @@
       </p:cxnSp>
       <p:sp>
         <p:nvSpPr>
-          <p:cNvPr id="289" name="row:Net DIM:start"/>
+          <p:cNvPr id="313" name="row:Net DIM:start"/>
           <p:cNvSpPr/>
           <p:nvPr/>
         </p:nvSpPr>
         <p:spPr>
           <a:xfrm>
-            <a:off x="7137863" y="6572440"/>
+            <a:off x="7137863" y="6681787"/>
             <a:ext cx="64008" cy="64008"/>
           </a:xfrm>
           <a:prstGeom prst="ellipse">
@@ -14473,13 +15360,13 @@
       </p:sp>
       <p:sp>
         <p:nvSpPr>
-          <p:cNvPr id="290" name="row:Net DIM:release:4.16"/>
+          <p:cNvPr id="314" name="row:Net DIM:release:4.16"/>
           <p:cNvSpPr/>
           <p:nvPr/>
         </p:nvSpPr>
         <p:spPr>
           <a:xfrm>
-            <a:off x="8005791" y="6561010"/>
+            <a:off x="8005791" y="6670357"/>
             <a:ext cx="86868" cy="86868"/>
           </a:xfrm>
           <a:prstGeom prst="ellipse">
@@ -14517,13 +15404,13 @@
       </p:sp>
       <p:sp>
         <p:nvSpPr>
-          <p:cNvPr id="291" name="row:Net DIM:label"/>
+          <p:cNvPr id="315" name="row:Net DIM:label"/>
           <p:cNvSpPr txBox="1"/>
           <p:nvPr/>
         </p:nvSpPr>
         <p:spPr>
           <a:xfrm>
-            <a:off x="8122377" y="6494716"/>
+            <a:off x="8122377" y="6604063"/>
             <a:ext cx="731520" cy="219456"/>
           </a:xfrm>
           <a:prstGeom prst="rect">
@@ -14551,13 +15438,13 @@
       </p:sp>
       <p:sp>
         <p:nvSpPr>
-          <p:cNvPr id="292" name="row:netdevsim:name"/>
+          <p:cNvPr id="316" name="row:netdevsim:name"/>
           <p:cNvSpPr txBox="1"/>
           <p:nvPr/>
         </p:nvSpPr>
         <p:spPr>
           <a:xfrm>
-            <a:off x="1325880" y="6604063"/>
+            <a:off x="1325880" y="6713410"/>
             <a:ext cx="1572768" cy="219456"/>
           </a:xfrm>
           <a:prstGeom prst="rect">
@@ -14585,13 +15472,13 @@
       </p:sp>
       <p:cxnSp>
         <p:nvCxnSpPr>
-          <p:cNvPr id="293" name="row:netdevsim:development"/>
+          <p:cNvPr id="317" name="row:netdevsim:development"/>
           <p:cNvCxnSpPr/>
           <p:nvPr/>
         </p:nvCxnSpPr>
         <p:spPr>
           <a:xfrm>
-            <a:off x="7517053" y="6713791"/>
+            <a:off x="7517053" y="6823138"/>
             <a:ext cx="532172" cy="0"/>
           </a:xfrm>
           <a:prstGeom prst="line">
@@ -14621,13 +15508,13 @@
       </p:cxnSp>
       <p:sp>
         <p:nvSpPr>
-          <p:cNvPr id="294" name="row:netdevsim:start"/>
+          <p:cNvPr id="318" name="row:netdevsim:start"/>
           <p:cNvSpPr/>
           <p:nvPr/>
         </p:nvSpPr>
         <p:spPr>
           <a:xfrm>
-            <a:off x="7485049" y="6681787"/>
+            <a:off x="7485049" y="6791134"/>
             <a:ext cx="64008" cy="64008"/>
           </a:xfrm>
           <a:prstGeom prst="ellipse">
@@ -14665,13 +15552,13 @@
       </p:sp>
       <p:sp>
         <p:nvSpPr>
-          <p:cNvPr id="295" name="row:netdevsim:release:4.16"/>
+          <p:cNvPr id="319" name="row:netdevsim:release:4.16"/>
           <p:cNvSpPr/>
           <p:nvPr/>
         </p:nvSpPr>
         <p:spPr>
           <a:xfrm>
-            <a:off x="8005791" y="6670357"/>
+            <a:off x="8005791" y="6779704"/>
             <a:ext cx="86868" cy="86868"/>
           </a:xfrm>
           <a:prstGeom prst="ellipse">
@@ -14709,13 +15596,13 @@
       </p:sp>
       <p:sp>
         <p:nvSpPr>
-          <p:cNvPr id="296" name="row:netdevsim:label"/>
+          <p:cNvPr id="320" name="row:netdevsim:label"/>
           <p:cNvSpPr txBox="1"/>
           <p:nvPr/>
         </p:nvSpPr>
         <p:spPr>
           <a:xfrm>
-            <a:off x="8122377" y="6604063"/>
+            <a:off x="8122377" y="6713410"/>
             <a:ext cx="731520" cy="219456"/>
           </a:xfrm>
           <a:prstGeom prst="rect">
@@ -14743,199 +15630,7 @@
       </p:sp>
       <p:sp>
         <p:nvSpPr>
-          <p:cNvPr id="297" name="row:devlink health:name"/>
-          <p:cNvSpPr txBox="1"/>
-          <p:nvPr/>
-        </p:nvSpPr>
-        <p:spPr>
-          <a:xfrm>
-            <a:off x="1325880" y="6713410"/>
-            <a:ext cx="1572768" cy="219456"/>
-          </a:xfrm>
-          <a:prstGeom prst="rect">
-            <a:avLst/>
-          </a:prstGeom>
-          <a:noFill/>
-        </p:spPr>
-        <p:txBody>
-          <a:bodyPr wrap="square" anchor="ctr" lIns="0" rIns="0" tIns="0" bIns="0">
-            <a:noAutofit/>
-          </a:bodyPr>
-          <a:lstStyle/>
-          <a:p>
-            <a:pPr algn="r"/>
-            <a:r>
-              <a:rPr sz="850" b="0" i="0">
-                <a:solidFill>
-                  <a:srgbClr val="1F2937"/>
-                </a:solidFill>
-              </a:rPr>
-              <a:t>devlink health</a:t>
-            </a:r>
-          </a:p>
-        </p:txBody>
-      </p:sp>
-      <p:cxnSp>
-        <p:nvCxnSpPr>
-          <p:cNvPr id="298" name="row:devlink health:development"/>
-          <p:cNvCxnSpPr/>
-          <p:nvPr/>
-        </p:nvCxnSpPr>
-        <p:spPr>
-          <a:xfrm>
-            <a:off x="7864240" y="6823138"/>
-            <a:ext cx="943994" cy="0"/>
-          </a:xfrm>
-          <a:prstGeom prst="line">
-            <a:avLst/>
-          </a:prstGeom>
-          <a:ln w="12700">
-            <a:solidFill>
-              <a:srgbClr val="A16207"/>
-            </a:solidFill>
-            <a:prstDash val="dash"/>
-          </a:ln>
-        </p:spPr>
-        <p:style>
-          <a:lnRef idx="2">
-            <a:schemeClr val="accent1"/>
-          </a:lnRef>
-          <a:fillRef idx="0">
-            <a:schemeClr val="accent1"/>
-          </a:fillRef>
-          <a:effectRef idx="1">
-            <a:schemeClr val="accent1"/>
-          </a:effectRef>
-          <a:fontRef idx="minor">
-            <a:schemeClr val="tx1"/>
-          </a:fontRef>
-        </p:style>
-      </p:cxnSp>
-      <p:sp>
-        <p:nvSpPr>
-          <p:cNvPr id="299" name="row:devlink health:start"/>
-          <p:cNvSpPr/>
-          <p:nvPr/>
-        </p:nvSpPr>
-        <p:spPr>
-          <a:xfrm>
-            <a:off x="7832236" y="6791134"/>
-            <a:ext cx="64008" cy="64008"/>
-          </a:xfrm>
-          <a:prstGeom prst="ellipse">
-            <a:avLst/>
-          </a:prstGeom>
-          <a:solidFill>
-            <a:srgbClr val="FFFFFF"/>
-          </a:solidFill>
-          <a:ln w="12700">
-            <a:solidFill>
-              <a:srgbClr val="A16207"/>
-            </a:solidFill>
-          </a:ln>
-          <a:effectLst/>
-        </p:spPr>
-        <p:style>
-          <a:lnRef idx="1">
-            <a:schemeClr val="accent1"/>
-          </a:lnRef>
-          <a:fillRef idx="3">
-            <a:schemeClr val="accent1"/>
-          </a:fillRef>
-          <a:effectRef idx="2">
-            <a:schemeClr val="accent1"/>
-          </a:effectRef>
-          <a:fontRef idx="minor">
-            <a:schemeClr val="lt1"/>
-          </a:fontRef>
-        </p:style>
-        <p:txBody>
-          <a:bodyPr rtlCol="0" anchor="ctr"/>
-          <a:lstStyle/>
-          <a:p/>
-        </p:txBody>
-      </p:sp>
-      <p:sp>
-        <p:nvSpPr>
-          <p:cNvPr id="300" name="row:devlink health:release:5.1"/>
-          <p:cNvSpPr/>
-          <p:nvPr/>
-        </p:nvSpPr>
-        <p:spPr>
-          <a:xfrm>
-            <a:off x="8764800" y="6779704"/>
-            <a:ext cx="86868" cy="86868"/>
-          </a:xfrm>
-          <a:prstGeom prst="ellipse">
-            <a:avLst/>
-          </a:prstGeom>
-          <a:solidFill>
-            <a:srgbClr val="A16207"/>
-          </a:solidFill>
-          <a:ln w="12700">
-            <a:solidFill>
-              <a:srgbClr val="A16207"/>
-            </a:solidFill>
-          </a:ln>
-          <a:effectLst/>
-        </p:spPr>
-        <p:style>
-          <a:lnRef idx="1">
-            <a:schemeClr val="accent1"/>
-          </a:lnRef>
-          <a:fillRef idx="3">
-            <a:schemeClr val="accent1"/>
-          </a:fillRef>
-          <a:effectRef idx="2">
-            <a:schemeClr val="accent1"/>
-          </a:effectRef>
-          <a:fontRef idx="minor">
-            <a:schemeClr val="lt1"/>
-          </a:fontRef>
-        </p:style>
-        <p:txBody>
-          <a:bodyPr rtlCol="0" anchor="ctr"/>
-          <a:lstStyle/>
-          <a:p/>
-        </p:txBody>
-      </p:sp>
-      <p:sp>
-        <p:nvSpPr>
-          <p:cNvPr id="301" name="row:devlink health:label"/>
-          <p:cNvSpPr txBox="1"/>
-          <p:nvPr/>
-        </p:nvSpPr>
-        <p:spPr>
-          <a:xfrm>
-            <a:off x="8881386" y="6713410"/>
-            <a:ext cx="731520" cy="219456"/>
-          </a:xfrm>
-          <a:prstGeom prst="rect">
-            <a:avLst/>
-          </a:prstGeom>
-          <a:noFill/>
-        </p:spPr>
-        <p:txBody>
-          <a:bodyPr wrap="square" anchor="ctr" lIns="0" rIns="0" tIns="0" bIns="0">
-            <a:noAutofit/>
-          </a:bodyPr>
-          <a:lstStyle/>
-          <a:p>
-            <a:pPr algn="l"/>
-            <a:r>
-              <a:rPr sz="800" b="1" i="0">
-                <a:solidFill>
-                  <a:srgbClr val="1F2937"/>
-                </a:solidFill>
-              </a:rPr>
-              <a:t>5.1</a:t>
-            </a:r>
-          </a:p>
-        </p:txBody>
-      </p:sp>
-      <p:sp>
-        <p:nvSpPr>
-          <p:cNvPr id="302" name="row:ethtool netlink:name"/>
+          <p:cNvPr id="321" name="row:ethtool netlink:name"/>
           <p:cNvSpPr txBox="1"/>
           <p:nvPr/>
         </p:nvSpPr>
@@ -14969,7 +15664,7 @@
       </p:sp>
       <p:cxnSp>
         <p:nvCxnSpPr>
-          <p:cNvPr id="303" name="row:ethtool netlink:development"/>
+          <p:cNvPr id="322" name="row:ethtool netlink:development"/>
           <p:cNvCxnSpPr/>
           <p:nvPr/>
         </p:nvCxnSpPr>
@@ -15005,7 +15700,7 @@
       </p:cxnSp>
       <p:sp>
         <p:nvSpPr>
-          <p:cNvPr id="304" name="row:ethtool netlink:start"/>
+          <p:cNvPr id="323" name="row:ethtool netlink:start"/>
           <p:cNvSpPr/>
           <p:nvPr/>
         </p:nvSpPr>
@@ -15049,7 +15744,7 @@
       </p:sp>
       <p:sp>
         <p:nvSpPr>
-          <p:cNvPr id="305" name="row:ethtool netlink:release:5.6"/>
+          <p:cNvPr id="324" name="row:ethtool netlink:release:5.6"/>
           <p:cNvSpPr/>
           <p:nvPr/>
         </p:nvSpPr>
@@ -15093,7 +15788,7 @@
       </p:sp>
       <p:sp>
         <p:nvSpPr>
-          <p:cNvPr id="306" name="row:ethtool netlink:label"/>
+          <p:cNvPr id="325" name="row:ethtool netlink:label"/>
           <p:cNvSpPr txBox="1"/>
           <p:nvPr/>
         </p:nvSpPr>
@@ -15127,7 +15822,7 @@
       </p:sp>
       <p:sp>
         <p:nvSpPr>
-          <p:cNvPr id="307" name="row:auxiliary bus:name"/>
+          <p:cNvPr id="326" name="row:auxiliary bus:name"/>
           <p:cNvSpPr txBox="1"/>
           <p:nvPr/>
         </p:nvSpPr>
@@ -15161,7 +15856,7 @@
       </p:sp>
       <p:cxnSp>
         <p:nvCxnSpPr>
-          <p:cNvPr id="308" name="row:auxiliary bus:development"/>
+          <p:cNvPr id="327" name="row:auxiliary bus:development"/>
           <p:cNvCxnSpPr/>
           <p:nvPr/>
         </p:nvCxnSpPr>
@@ -15197,7 +15892,7 @@
       </p:cxnSp>
       <p:sp>
         <p:nvSpPr>
-          <p:cNvPr id="309" name="row:auxiliary bus:start"/>
+          <p:cNvPr id="328" name="row:auxiliary bus:start"/>
           <p:cNvSpPr/>
           <p:nvPr/>
         </p:nvSpPr>
@@ -15241,7 +15936,7 @@
       </p:sp>
       <p:sp>
         <p:nvSpPr>
-          <p:cNvPr id="310" name="row:auxiliary bus:release:5.11"/>
+          <p:cNvPr id="329" name="row:auxiliary bus:release:5.11"/>
           <p:cNvSpPr/>
           <p:nvPr/>
         </p:nvSpPr>
@@ -15285,7 +15980,7 @@
       </p:sp>
       <p:sp>
         <p:nvSpPr>
-          <p:cNvPr id="311" name="row:auxiliary bus:label"/>
+          <p:cNvPr id="330" name="row:auxiliary bus:label"/>
           <p:cNvSpPr txBox="1"/>
           <p:nvPr/>
         </p:nvSpPr>
@@ -15319,7 +16014,7 @@
       </p:sp>
       <p:sp>
         <p:nvSpPr>
-          <p:cNvPr id="312" name="row:threaded NAPI:name"/>
+          <p:cNvPr id="331" name="row:threaded NAPI:name"/>
           <p:cNvSpPr txBox="1"/>
           <p:nvPr/>
         </p:nvSpPr>
@@ -15353,7 +16048,7 @@
       </p:sp>
       <p:cxnSp>
         <p:nvCxnSpPr>
-          <p:cNvPr id="313" name="row:threaded NAPI:development"/>
+          <p:cNvPr id="332" name="row:threaded NAPI:development"/>
           <p:cNvCxnSpPr/>
           <p:nvPr/>
         </p:nvCxnSpPr>
@@ -15389,7 +16084,7 @@
       </p:cxnSp>
       <p:sp>
         <p:nvSpPr>
-          <p:cNvPr id="314" name="row:threaded NAPI:start"/>
+          <p:cNvPr id="333" name="row:threaded NAPI:start"/>
           <p:cNvSpPr/>
           <p:nvPr/>
         </p:nvSpPr>
@@ -15433,7 +16128,7 @@
       </p:sp>
       <p:sp>
         <p:nvSpPr>
-          <p:cNvPr id="315" name="row:threaded NAPI:release:5.12"/>
+          <p:cNvPr id="334" name="row:threaded NAPI:release:5.12"/>
           <p:cNvSpPr/>
           <p:nvPr/>
         </p:nvSpPr>
@@ -15477,7 +16172,7 @@
       </p:sp>
       <p:sp>
         <p:nvSpPr>
-          <p:cNvPr id="316" name="row:threaded NAPI:label"/>
+          <p:cNvPr id="335" name="row:threaded NAPI:label"/>
           <p:cNvSpPr txBox="1"/>
           <p:nvPr/>
         </p:nvSpPr>
@@ -15511,7 +16206,7 @@
       </p:sp>
       <p:sp>
         <p:nvSpPr>
-          <p:cNvPr id="317" name="row:Rust phylib:name"/>
+          <p:cNvPr id="336" name="row:Rust phylib:name"/>
           <p:cNvSpPr txBox="1"/>
           <p:nvPr/>
         </p:nvSpPr>
@@ -15545,7 +16240,7 @@
       </p:sp>
       <p:cxnSp>
         <p:nvCxnSpPr>
-          <p:cNvPr id="318" name="row:Rust phylib:development"/>
+          <p:cNvPr id="337" name="row:Rust phylib:development"/>
           <p:cNvCxnSpPr/>
           <p:nvPr/>
         </p:nvCxnSpPr>
@@ -15581,7 +16276,7 @@
       </p:cxnSp>
       <p:sp>
         <p:nvSpPr>
-          <p:cNvPr id="319" name="row:Rust phylib:start"/>
+          <p:cNvPr id="338" name="row:Rust phylib:start"/>
           <p:cNvSpPr/>
           <p:nvPr/>
         </p:nvSpPr>
@@ -15625,7 +16320,7 @@
       </p:sp>
       <p:sp>
         <p:nvSpPr>
-          <p:cNvPr id="320" name="row:Rust phylib:release:6.8"/>
+          <p:cNvPr id="339" name="row:Rust phylib:release:6.8"/>
           <p:cNvSpPr/>
           <p:nvPr/>
         </p:nvSpPr>
@@ -15669,7 +16364,7 @@
       </p:sp>
       <p:sp>
         <p:nvSpPr>
-          <p:cNvPr id="321" name="row:Rust phylib:label"/>
+          <p:cNvPr id="340" name="row:Rust phylib:label"/>
           <p:cNvSpPr txBox="1"/>
           <p:nvPr/>
         </p:nvSpPr>
@@ -15703,7 +16398,7 @@
       </p:sp>
       <p:sp>
         <p:nvSpPr>
-          <p:cNvPr id="322" name="legend:title"/>
+          <p:cNvPr id="341" name="legend:title"/>
           <p:cNvSpPr txBox="1"/>
           <p:nvPr/>
         </p:nvSpPr>
@@ -15737,7 +16432,7 @@
       </p:sp>
       <p:sp>
         <p:nvSpPr>
-          <p:cNvPr id="323" name="legend:start"/>
+          <p:cNvPr id="342" name="legend:start"/>
           <p:cNvSpPr/>
           <p:nvPr/>
         </p:nvSpPr>
@@ -15781,7 +16476,7 @@
       </p:sp>
       <p:cxnSp>
         <p:nvCxnSpPr>
-          <p:cNvPr id="324" name="legend:dev"/>
+          <p:cNvPr id="343" name="legend:dev"/>
           <p:cNvCxnSpPr/>
           <p:nvPr/>
         </p:nvCxnSpPr>
@@ -15817,7 +16512,7 @@
       </p:cxnSp>
       <p:sp>
         <p:nvSpPr>
-          <p:cNvPr id="325" name="legend:release"/>
+          <p:cNvPr id="344" name="legend:release"/>
           <p:cNvSpPr/>
           <p:nvPr/>
         </p:nvSpPr>
@@ -15861,7 +16556,7 @@
       </p:sp>
       <p:sp>
         <p:nvSpPr>
-          <p:cNvPr id="326" name="legend:t1"/>
+          <p:cNvPr id="345" name="legend:t1"/>
           <p:cNvSpPr txBox="1"/>
           <p:nvPr/>
         </p:nvSpPr>
@@ -15895,7 +16590,7 @@
       </p:sp>
       <p:sp>
         <p:nvSpPr>
-          <p:cNvPr id="327" name="legend:m1"/>
+          <p:cNvPr id="346" name="legend:m1"/>
           <p:cNvSpPr/>
           <p:nvPr/>
         </p:nvSpPr>
@@ -15939,7 +16634,7 @@
       </p:sp>
       <p:cxnSp>
         <p:nvCxnSpPr>
-          <p:cNvPr id="328" name="legend:m-line"/>
+          <p:cNvPr id="347" name="legend:m-line"/>
           <p:cNvCxnSpPr/>
           <p:nvPr/>
         </p:nvCxnSpPr>
@@ -15974,7 +16669,7 @@
       </p:cxnSp>
       <p:sp>
         <p:nvSpPr>
-          <p:cNvPr id="329" name="legend:m2"/>
+          <p:cNvPr id="348" name="legend:m2"/>
           <p:cNvSpPr/>
           <p:nvPr/>
         </p:nvSpPr>
@@ -16018,7 +16713,7 @@
       </p:sp>
       <p:sp>
         <p:nvSpPr>
-          <p:cNvPr id="330" name="legend:t2"/>
+          <p:cNvPr id="349" name="legend:t2"/>
           <p:cNvSpPr txBox="1"/>
           <p:nvPr/>
         </p:nvSpPr>
@@ -16052,7 +16747,7 @@
       </p:sp>
       <p:sp>
         <p:nvSpPr>
-          <p:cNvPr id="331" name="legend:era"/>
+          <p:cNvPr id="350" name="legend:era"/>
           <p:cNvSpPr/>
           <p:nvPr/>
         </p:nvSpPr>
@@ -16096,7 +16791,7 @@
       </p:sp>
       <p:sp>
         <p:nvSpPr>
-          <p:cNvPr id="332" name="legend:t3"/>
+          <p:cNvPr id="351" name="legend:t3"/>
           <p:cNvSpPr txBox="1"/>
           <p:nvPr/>
         </p:nvSpPr>
@@ -16130,7 +16825,7 @@
       </p:sp>
       <p:cxnSp>
         <p:nvCxnSpPr>
-          <p:cNvPr id="333" name="legend:ga"/>
+          <p:cNvPr id="352" name="legend:ga"/>
           <p:cNvCxnSpPr/>
           <p:nvPr/>
         </p:nvCxnSpPr>
@@ -16166,7 +16861,7 @@
       </p:cxnSp>
       <p:sp>
         <p:nvSpPr>
-          <p:cNvPr id="334" name="legend:t4"/>
+          <p:cNvPr id="353" name="legend:t4"/>
           <p:cNvSpPr txBox="1"/>
           <p:nvPr/>
         </p:nvSpPr>
@@ -16200,7 +16895,7 @@
       </p:sp>
       <p:cxnSp>
         <p:nvCxnSpPr>
-          <p:cNvPr id="335" name="legend:lineage-down"/>
+          <p:cNvPr id="354" name="legend:lineage-down"/>
           <p:cNvCxnSpPr/>
           <p:nvPr/>
         </p:nvCxnSpPr>
@@ -16235,7 +16930,7 @@
       </p:cxnSp>
       <p:cxnSp>
         <p:nvCxnSpPr>
-          <p:cNvPr id="336" name="legend:lineage-across"/>
+          <p:cNvPr id="355" name="legend:lineage-across"/>
           <p:cNvCxnSpPr/>
           <p:nvPr/>
         </p:nvCxnSpPr>
@@ -16271,7 +16966,7 @@
       </p:cxnSp>
       <p:sp>
         <p:nvSpPr>
-          <p:cNvPr id="337" name="legend:t5"/>
+          <p:cNvPr id="356" name="legend:t5"/>
           <p:cNvSpPr txBox="1"/>
           <p:nvPr/>
         </p:nvSpPr>
@@ -16298,14 +16993,14 @@
                   <a:srgbClr val="64748B"/>
                 </a:solidFill>
               </a:rPr>
-              <a:t>lineage (MEMORY only): release that a later feature builds on</a:t>
-            </a:r>
-          </a:p>
-        </p:txBody>
-      </p:sp>
-      <p:sp>
-        <p:nvSpPr>
-          <p:cNvPr id="338" name="legend:offchart"/>
+              <a:t>lineage: release that a later feature builds on</a:t>
+            </a:r>
+          </a:p>
+        </p:txBody>
+      </p:sp>
+      <p:sp>
+        <p:nvSpPr>
+          <p:cNvPr id="357" name="legend:offchart"/>
           <p:cNvSpPr/>
           <p:nvPr/>
         </p:nvSpPr>
@@ -16347,7 +17042,7 @@
       </p:sp>
       <p:sp>
         <p:nvSpPr>
-          <p:cNvPr id="339" name="legend:t6"/>
+          <p:cNvPr id="358" name="legend:t6"/>
           <p:cNvSpPr txBox="1"/>
           <p:nvPr/>
         </p:nvSpPr>
@@ -16381,7 +17076,7 @@
       </p:sp>
       <p:sp>
         <p:nvSpPr>
-          <p:cNvPr id="340" name="notes:left"/>
+          <p:cNvPr id="359" name="notes:left"/>
           <p:cNvSpPr txBox="1"/>
           <p:nvPr/>
         </p:nvSpPr>
@@ -16426,7 +17121,7 @@
       </p:sp>
       <p:sp>
         <p:nvSpPr>
-          <p:cNvPr id="341" name="notes:right"/>
+          <p:cNvPr id="360" name="notes:right"/>
           <p:cNvSpPr txBox="1"/>
           <p:nvPr/>
         </p:nvSpPr>

--- a/linux-networking-feature-evolution.pptx
+++ b/linux-networking-feature-evolution.pptx
@@ -547,7 +547,12 @@
           </a:p>
           <a:p>
             <a:r>
-              <a:t>- Deliberately not linked: the queueing layers (BQL, TSQ, CoDel, fq; parallel, not derived), RX HW queue leasing (interacts with AF_XDP / io_uring), and links that cross bands.</a:t>
+              <a:t>- Across bands: eBPF foundation → kprobe BPF; XDP → page_pool (XDP was one of the pressures behind it, not its only origin), XDP → XDP multi-buffer, XDP → AF_XDP; YNL tooling → queue/NAPI netdev-genl (the netdev family is YNL-specified).</a:t>
+            </a:r>
+          </a:p>
+          <a:p>
+            <a:r>
+              <a:t>- Deliberately not linked: the queueing layers (BQL, TSQ, CoDel, fq; parallel, not derived), RX HW queue leasing (interacts with AF_XDP / io_uring), and queue/NAPI netdev-genl → queue leasing / ZCRX (conceptual only).</a:t>
             </a:r>
           </a:p>
           <a:p>
@@ -5959,7 +5964,7 @@
         </p:nvCxnSpPr>
         <p:spPr>
           <a:xfrm>
-            <a:off x="5747007" y="3067621"/>
+            <a:off x="5747007" y="3614356"/>
             <a:ext cx="770664" cy="0"/>
           </a:xfrm>
           <a:prstGeom prst="line">
@@ -5995,7 +6000,7 @@
         </p:nvCxnSpPr>
         <p:spPr>
           <a:xfrm>
-            <a:off x="5747007" y="3176968"/>
+            <a:off x="5747007" y="3067621"/>
             <a:ext cx="687340" cy="0"/>
           </a:xfrm>
           <a:prstGeom prst="line">
@@ -6025,14 +6030,14 @@
       </p:cxnSp>
       <p:cxnSp>
         <p:nvCxnSpPr>
-          <p:cNvPr id="69" name="lineage:eBPF foundation:trunk"/>
+          <p:cNvPr id="69" name="lineage:eBPF foundation-&gt;SOCK_OPS / SOCKMAP:across"/>
           <p:cNvCxnSpPr/>
           <p:nvPr/>
         </p:nvCxnSpPr>
         <p:spPr>
           <a:xfrm>
-            <a:off x="5747007" y="2675953"/>
-            <a:ext cx="0" cy="610362"/>
+            <a:off x="5747007" y="3176968"/>
+            <a:ext cx="1034526" cy="0"/>
           </a:xfrm>
           <a:prstGeom prst="line">
             <a:avLst/>
@@ -6041,6 +6046,7 @@
             <a:solidFill>
               <a:srgbClr val="475569"/>
             </a:solidFill>
+            <a:tailEnd type="triangle" w="sm" len="sm"/>
           </a:ln>
         </p:spPr>
         <p:style>
@@ -6060,14 +6066,14 @@
       </p:cxnSp>
       <p:cxnSp>
         <p:nvCxnSpPr>
-          <p:cNvPr id="70" name="lineage:eBPF foundation-&gt;SOCK_OPS / SOCKMAP:across"/>
+          <p:cNvPr id="70" name="lineage:eBPF foundation-&gt;kprobe BPF"/>
           <p:cNvCxnSpPr/>
           <p:nvPr/>
         </p:nvCxnSpPr>
         <p:spPr>
           <a:xfrm>
-            <a:off x="5747007" y="3286315"/>
-            <a:ext cx="1034526" cy="0"/>
+            <a:off x="5747007" y="2675953"/>
+            <a:ext cx="0" cy="3062478"/>
           </a:xfrm>
           <a:prstGeom prst="line">
             <a:avLst/>
@@ -6209,7 +6215,7 @@
         </p:nvCxnSpPr>
         <p:spPr>
           <a:xfrm>
-            <a:off x="9434168" y="3441382"/>
+            <a:off x="9434168" y="3332035"/>
             <a:ext cx="0" cy="63627"/>
           </a:xfrm>
           <a:prstGeom prst="line">
@@ -6244,7 +6250,7 @@
         </p:nvCxnSpPr>
         <p:spPr>
           <a:xfrm>
-            <a:off x="9434168" y="3505009"/>
+            <a:off x="9434168" y="3395662"/>
             <a:ext cx="2832908" cy="0"/>
           </a:xfrm>
           <a:prstGeom prst="line">
@@ -6459,8 +6465,8 @@
         </p:nvCxnSpPr>
         <p:spPr>
           <a:xfrm>
-            <a:off x="8302070" y="4407598"/>
-            <a:ext cx="0" cy="172974"/>
+            <a:off x="8302070" y="4516945"/>
+            <a:ext cx="0" cy="63627"/>
           </a:xfrm>
           <a:prstGeom prst="line">
             <a:avLst/>
@@ -6530,8 +6536,8 @@
         </p:nvCxnSpPr>
         <p:spPr>
           <a:xfrm>
-            <a:off x="10923670" y="4516945"/>
-            <a:ext cx="0" cy="54483"/>
+            <a:off x="10923670" y="4407598"/>
+            <a:ext cx="0" cy="163830"/>
           </a:xfrm>
           <a:prstGeom prst="line">
             <a:avLst/>
@@ -6566,7 +6572,7 @@
         </p:nvCxnSpPr>
         <p:spPr>
           <a:xfrm>
-            <a:off x="12772954" y="5264467"/>
+            <a:off x="12772954" y="5155120"/>
             <a:ext cx="0" cy="54483"/>
           </a:xfrm>
           <a:prstGeom prst="line">
@@ -6602,7 +6608,7 @@
         </p:nvCxnSpPr>
         <p:spPr>
           <a:xfrm>
-            <a:off x="13012491" y="5373814"/>
+            <a:off x="13012491" y="5264467"/>
             <a:ext cx="0" cy="54483"/>
           </a:xfrm>
           <a:prstGeom prst="line">
@@ -6638,7 +6644,7 @@
         </p:nvCxnSpPr>
         <p:spPr>
           <a:xfrm>
-            <a:off x="10803902" y="5793295"/>
+            <a:off x="10803902" y="5902642"/>
             <a:ext cx="0" cy="54483"/>
           </a:xfrm>
           <a:prstGeom prst="line">
@@ -6775,7 +6781,192 @@
       </p:cxnSp>
       <p:sp>
         <p:nvSpPr>
-          <p:cNvPr id="90" name="band-label:PERFORMANCE"/>
+          <p:cNvPr id="90" name="lineage:XDP-&gt;page_pool:junction"/>
+          <p:cNvSpPr/>
+          <p:nvPr/>
+        </p:nvSpPr>
+        <p:spPr>
+          <a:xfrm>
+            <a:off x="6992064" y="3795026"/>
+            <a:ext cx="40233" cy="40233"/>
+          </a:xfrm>
+          <a:prstGeom prst="ellipse">
+            <a:avLst/>
+          </a:prstGeom>
+          <a:solidFill>
+            <a:srgbClr val="475569"/>
+          </a:solidFill>
+          <a:ln>
+            <a:noFill/>
+          </a:ln>
+          <a:effectLst/>
+        </p:spPr>
+        <p:style>
+          <a:lnRef idx="1">
+            <a:schemeClr val="accent1"/>
+          </a:lnRef>
+          <a:fillRef idx="3">
+            <a:schemeClr val="accent1"/>
+          </a:fillRef>
+          <a:effectRef idx="2">
+            <a:schemeClr val="accent1"/>
+          </a:effectRef>
+          <a:fontRef idx="minor">
+            <a:schemeClr val="lt1"/>
+          </a:fontRef>
+        </p:style>
+        <p:txBody>
+          <a:bodyPr rtlCol="0" anchor="ctr"/>
+          <a:lstStyle/>
+          <a:p/>
+        </p:txBody>
+      </p:sp>
+      <p:cxnSp>
+        <p:nvCxnSpPr>
+          <p:cNvPr id="91" name="lineage:XDP-&gt;XDP multi-buffer:across"/>
+          <p:cNvCxnSpPr/>
+          <p:nvPr/>
+        </p:nvCxnSpPr>
+        <p:spPr>
+          <a:xfrm>
+            <a:off x="7012181" y="4361878"/>
+            <a:ext cx="2894028" cy="0"/>
+          </a:xfrm>
+          <a:prstGeom prst="line">
+            <a:avLst/>
+          </a:prstGeom>
+          <a:ln w="12700">
+            <a:solidFill>
+              <a:srgbClr val="475569"/>
+            </a:solidFill>
+            <a:tailEnd type="triangle" w="sm" len="sm"/>
+          </a:ln>
+        </p:spPr>
+        <p:style>
+          <a:lnRef idx="2">
+            <a:schemeClr val="accent1"/>
+          </a:lnRef>
+          <a:fillRef idx="0">
+            <a:schemeClr val="accent1"/>
+          </a:fillRef>
+          <a:effectRef idx="1">
+            <a:schemeClr val="accent1"/>
+          </a:effectRef>
+          <a:fontRef idx="minor">
+            <a:schemeClr val="tx1"/>
+          </a:fontRef>
+        </p:style>
+      </p:cxnSp>
+      <p:cxnSp>
+        <p:nvCxnSpPr>
+          <p:cNvPr id="92" name="lineage:XDP:trunk"/>
+          <p:cNvCxnSpPr/>
+          <p:nvPr/>
+        </p:nvCxnSpPr>
+        <p:spPr>
+          <a:xfrm>
+            <a:off x="7012181" y="3660076"/>
+            <a:ext cx="0" cy="811149"/>
+          </a:xfrm>
+          <a:prstGeom prst="line">
+            <a:avLst/>
+          </a:prstGeom>
+          <a:ln w="12700">
+            <a:solidFill>
+              <a:srgbClr val="475569"/>
+            </a:solidFill>
+          </a:ln>
+        </p:spPr>
+        <p:style>
+          <a:lnRef idx="2">
+            <a:schemeClr val="accent1"/>
+          </a:lnRef>
+          <a:fillRef idx="0">
+            <a:schemeClr val="accent1"/>
+          </a:fillRef>
+          <a:effectRef idx="1">
+            <a:schemeClr val="accent1"/>
+          </a:effectRef>
+          <a:fontRef idx="minor">
+            <a:schemeClr val="tx1"/>
+          </a:fontRef>
+        </p:style>
+      </p:cxnSp>
+      <p:cxnSp>
+        <p:nvCxnSpPr>
+          <p:cNvPr id="93" name="lineage:XDP-&gt;AF_XDP:across"/>
+          <p:cNvCxnSpPr/>
+          <p:nvPr/>
+        </p:nvCxnSpPr>
+        <p:spPr>
+          <a:xfrm>
+            <a:off x="7012181" y="4471225"/>
+            <a:ext cx="116538" cy="0"/>
+          </a:xfrm>
+          <a:prstGeom prst="line">
+            <a:avLst/>
+          </a:prstGeom>
+          <a:ln w="12700">
+            <a:solidFill>
+              <a:srgbClr val="475569"/>
+            </a:solidFill>
+            <a:tailEnd type="triangle" w="sm" len="sm"/>
+          </a:ln>
+        </p:spPr>
+        <p:style>
+          <a:lnRef idx="2">
+            <a:schemeClr val="accent1"/>
+          </a:lnRef>
+          <a:fillRef idx="0">
+            <a:schemeClr val="accent1"/>
+          </a:fillRef>
+          <a:effectRef idx="1">
+            <a:schemeClr val="accent1"/>
+          </a:effectRef>
+          <a:fontRef idx="minor">
+            <a:schemeClr val="tx1"/>
+          </a:fontRef>
+        </p:style>
+      </p:cxnSp>
+      <p:cxnSp>
+        <p:nvCxnSpPr>
+          <p:cNvPr id="94" name="lineage:YNL tooling-&gt;queue/NAPI netdev-genl"/>
+          <p:cNvCxnSpPr/>
+          <p:nvPr/>
+        </p:nvCxnSpPr>
+        <p:spPr>
+          <a:xfrm>
+            <a:off x="11562911" y="5483161"/>
+            <a:ext cx="0" cy="145923"/>
+          </a:xfrm>
+          <a:prstGeom prst="line">
+            <a:avLst/>
+          </a:prstGeom>
+          <a:ln w="12700">
+            <a:solidFill>
+              <a:srgbClr val="475569"/>
+            </a:solidFill>
+            <a:tailEnd type="triangle" w="sm" len="sm"/>
+          </a:ln>
+        </p:spPr>
+        <p:style>
+          <a:lnRef idx="2">
+            <a:schemeClr val="accent1"/>
+          </a:lnRef>
+          <a:fillRef idx="0">
+            <a:schemeClr val="accent1"/>
+          </a:fillRef>
+          <a:effectRef idx="1">
+            <a:schemeClr val="accent1"/>
+          </a:effectRef>
+          <a:fontRef idx="minor">
+            <a:schemeClr val="tx1"/>
+          </a:fontRef>
+        </p:style>
+      </p:cxnSp>
+      <p:sp>
+        <p:nvSpPr>
+          <p:cNvPr id="95" name="band-label:PERFORMANCE"/>
           <p:cNvSpPr txBox="1"/>
           <p:nvPr/>
         </p:nvSpPr>
@@ -6809,7 +7000,7 @@
       </p:sp>
       <p:sp>
         <p:nvSpPr>
-          <p:cNvPr id="91" name="row:DQL / BQL:name"/>
+          <p:cNvPr id="96" name="row:DQL / BQL:name"/>
           <p:cNvSpPr txBox="1"/>
           <p:nvPr/>
         </p:nvSpPr>
@@ -6843,7 +7034,7 @@
       </p:sp>
       <p:cxnSp>
         <p:nvCxnSpPr>
-          <p:cNvPr id="92" name="row:DQL / BQL:development"/>
+          <p:cNvPr id="97" name="row:DQL / BQL:development"/>
           <p:cNvCxnSpPr/>
           <p:nvPr/>
         </p:nvCxnSpPr>
@@ -6879,7 +7070,7 @@
       </p:cxnSp>
       <p:sp>
         <p:nvSpPr>
-          <p:cNvPr id="93" name="row:DQL / BQL:start"/>
+          <p:cNvPr id="98" name="row:DQL / BQL:start"/>
           <p:cNvSpPr/>
           <p:nvPr/>
         </p:nvSpPr>
@@ -6923,7 +7114,7 @@
       </p:sp>
       <p:sp>
         <p:nvSpPr>
-          <p:cNvPr id="94" name="row:DQL / BQL:release:3.3"/>
+          <p:cNvPr id="99" name="row:DQL / BQL:release:3.3"/>
           <p:cNvSpPr/>
           <p:nvPr/>
         </p:nvSpPr>
@@ -6967,7 +7158,7 @@
       </p:sp>
       <p:sp>
         <p:nvSpPr>
-          <p:cNvPr id="95" name="row:DQL / BQL:label"/>
+          <p:cNvPr id="100" name="row:DQL / BQL:label"/>
           <p:cNvSpPr txBox="1"/>
           <p:nvPr/>
         </p:nvSpPr>
@@ -7001,7 +7192,7 @@
       </p:sp>
       <p:sp>
         <p:nvSpPr>
-          <p:cNvPr id="96" name="row:TSQ:name"/>
+          <p:cNvPr id="101" name="row:TSQ:name"/>
           <p:cNvSpPr txBox="1"/>
           <p:nvPr/>
         </p:nvSpPr>
@@ -7035,7 +7226,7 @@
       </p:sp>
       <p:cxnSp>
         <p:nvCxnSpPr>
-          <p:cNvPr id="97" name="row:TSQ:development"/>
+          <p:cNvPr id="102" name="row:TSQ:development"/>
           <p:cNvCxnSpPr/>
           <p:nvPr/>
         </p:nvCxnSpPr>
@@ -7071,7 +7262,7 @@
       </p:cxnSp>
       <p:sp>
         <p:nvSpPr>
-          <p:cNvPr id="98" name="row:TSQ:start"/>
+          <p:cNvPr id="103" name="row:TSQ:start"/>
           <p:cNvSpPr/>
           <p:nvPr/>
         </p:nvSpPr>
@@ -7115,7 +7306,7 @@
       </p:sp>
       <p:sp>
         <p:nvSpPr>
-          <p:cNvPr id="99" name="row:TSQ:release:3.6"/>
+          <p:cNvPr id="104" name="row:TSQ:release:3.6"/>
           <p:cNvSpPr/>
           <p:nvPr/>
         </p:nvSpPr>
@@ -7159,7 +7350,7 @@
       </p:sp>
       <p:sp>
         <p:nvSpPr>
-          <p:cNvPr id="100" name="row:TSQ:label"/>
+          <p:cNvPr id="105" name="row:TSQ:label"/>
           <p:cNvSpPr txBox="1"/>
           <p:nvPr/>
         </p:nvSpPr>
@@ -7193,7 +7384,7 @@
       </p:sp>
       <p:sp>
         <p:nvSpPr>
-          <p:cNvPr id="101" name="row:SO_BUSY_POLL:name"/>
+          <p:cNvPr id="106" name="row:SO_BUSY_POLL:name"/>
           <p:cNvSpPr txBox="1"/>
           <p:nvPr/>
         </p:nvSpPr>
@@ -7227,7 +7418,7 @@
       </p:sp>
       <p:cxnSp>
         <p:nvCxnSpPr>
-          <p:cNvPr id="102" name="row:SO_BUSY_POLL:development"/>
+          <p:cNvPr id="107" name="row:SO_BUSY_POLL:development"/>
           <p:cNvCxnSpPr/>
           <p:nvPr/>
         </p:nvCxnSpPr>
@@ -7263,7 +7454,7 @@
       </p:cxnSp>
       <p:sp>
         <p:nvSpPr>
-          <p:cNvPr id="103" name="row:SO_BUSY_POLL:start"/>
+          <p:cNvPr id="108" name="row:SO_BUSY_POLL:start"/>
           <p:cNvSpPr/>
           <p:nvPr/>
         </p:nvSpPr>
@@ -7307,7 +7498,7 @@
       </p:sp>
       <p:sp>
         <p:nvSpPr>
-          <p:cNvPr id="104" name="row:SO_BUSY_POLL:release:3.11"/>
+          <p:cNvPr id="109" name="row:SO_BUSY_POLL:release:3.11"/>
           <p:cNvSpPr/>
           <p:nvPr/>
         </p:nvSpPr>
@@ -7351,7 +7542,7 @@
       </p:sp>
       <p:sp>
         <p:nvSpPr>
-          <p:cNvPr id="105" name="row:SO_BUSY_POLL:label"/>
+          <p:cNvPr id="110" name="row:SO_BUSY_POLL:label"/>
           <p:cNvSpPr txBox="1"/>
           <p:nvPr/>
         </p:nvSpPr>
@@ -7385,7 +7576,7 @@
       </p:sp>
       <p:sp>
         <p:nvSpPr>
-          <p:cNvPr id="106" name="row:sch_fq / TCP pacing:name"/>
+          <p:cNvPr id="111" name="row:sch_fq / TCP pacing:name"/>
           <p:cNvSpPr txBox="1"/>
           <p:nvPr/>
         </p:nvSpPr>
@@ -7419,7 +7610,7 @@
       </p:sp>
       <p:cxnSp>
         <p:nvCxnSpPr>
-          <p:cNvPr id="107" name="row:sch_fq / TCP pacing:development"/>
+          <p:cNvPr id="112" name="row:sch_fq / TCP pacing:development"/>
           <p:cNvCxnSpPr/>
           <p:nvPr/>
         </p:nvCxnSpPr>
@@ -7455,7 +7646,7 @@
       </p:cxnSp>
       <p:sp>
         <p:nvSpPr>
-          <p:cNvPr id="108" name="row:sch_fq / TCP pacing:start"/>
+          <p:cNvPr id="113" name="row:sch_fq / TCP pacing:start"/>
           <p:cNvSpPr/>
           <p:nvPr/>
         </p:nvSpPr>
@@ -7499,7 +7690,7 @@
       </p:sp>
       <p:sp>
         <p:nvSpPr>
-          <p:cNvPr id="109" name="row:sch_fq / TCP pacing:release:3.12"/>
+          <p:cNvPr id="114" name="row:sch_fq / TCP pacing:release:3.12"/>
           <p:cNvSpPr/>
           <p:nvPr/>
         </p:nvSpPr>
@@ -7543,7 +7734,7 @@
       </p:sp>
       <p:sp>
         <p:nvSpPr>
-          <p:cNvPr id="110" name="row:sch_fq / TCP pacing:label"/>
+          <p:cNvPr id="115" name="row:sch_fq / TCP pacing:label"/>
           <p:cNvSpPr txBox="1"/>
           <p:nvPr/>
         </p:nvSpPr>
@@ -7577,7 +7768,7 @@
       </p:sp>
       <p:sp>
         <p:nvSpPr>
-          <p:cNvPr id="111" name="row:SO_TXTIME / EDT / taprio:name"/>
+          <p:cNvPr id="116" name="row:SO_TXTIME / EDT / taprio:name"/>
           <p:cNvSpPr txBox="1"/>
           <p:nvPr/>
         </p:nvSpPr>
@@ -7611,7 +7802,7 @@
       </p:sp>
       <p:cxnSp>
         <p:nvCxnSpPr>
-          <p:cNvPr id="112" name="row:SO_TXTIME / EDT / taprio:development"/>
+          <p:cNvPr id="117" name="row:SO_TXTIME / EDT / taprio:development"/>
           <p:cNvCxnSpPr/>
           <p:nvPr/>
         </p:nvCxnSpPr>
@@ -7647,7 +7838,7 @@
       </p:cxnSp>
       <p:sp>
         <p:nvSpPr>
-          <p:cNvPr id="113" name="row:SO_TXTIME / EDT / taprio:start"/>
+          <p:cNvPr id="118" name="row:SO_TXTIME / EDT / taprio:start"/>
           <p:cNvSpPr/>
           <p:nvPr/>
         </p:nvSpPr>
@@ -7691,7 +7882,7 @@
       </p:sp>
       <p:cxnSp>
         <p:nvCxnSpPr>
-          <p:cNvPr id="114" name="row:SO_TXTIME / EDT / taprio:milestones"/>
+          <p:cNvPr id="119" name="row:SO_TXTIME / EDT / taprio:milestones"/>
           <p:cNvCxnSpPr/>
           <p:nvPr/>
         </p:nvCxnSpPr>
@@ -7726,7 +7917,7 @@
       </p:cxnSp>
       <p:sp>
         <p:nvSpPr>
-          <p:cNvPr id="115" name="row:SO_TXTIME / EDT / taprio:release:4.19"/>
+          <p:cNvPr id="120" name="row:SO_TXTIME / EDT / taprio:release:4.19"/>
           <p:cNvSpPr/>
           <p:nvPr/>
         </p:nvSpPr>
@@ -7770,7 +7961,7 @@
       </p:sp>
       <p:sp>
         <p:nvSpPr>
-          <p:cNvPr id="116" name="row:SO_TXTIME / EDT / taprio:release:4.20"/>
+          <p:cNvPr id="121" name="row:SO_TXTIME / EDT / taprio:release:4.20"/>
           <p:cNvSpPr/>
           <p:nvPr/>
         </p:nvSpPr>
@@ -7814,7 +8005,7 @@
       </p:sp>
       <p:sp>
         <p:nvSpPr>
-          <p:cNvPr id="117" name="row:SO_TXTIME / EDT / taprio:label"/>
+          <p:cNvPr id="122" name="row:SO_TXTIME / EDT / taprio:label"/>
           <p:cNvSpPr txBox="1"/>
           <p:nvPr/>
         </p:nvSpPr>
@@ -7848,7 +8039,7 @@
       </p:sp>
       <p:sp>
         <p:nvSpPr>
-          <p:cNvPr id="118" name="row:BIG TCP:name"/>
+          <p:cNvPr id="123" name="row:BIG TCP:name"/>
           <p:cNvSpPr txBox="1"/>
           <p:nvPr/>
         </p:nvSpPr>
@@ -7882,7 +8073,7 @@
       </p:sp>
       <p:cxnSp>
         <p:nvCxnSpPr>
-          <p:cNvPr id="119" name="row:BIG TCP:development"/>
+          <p:cNvPr id="124" name="row:BIG TCP:development"/>
           <p:cNvCxnSpPr/>
           <p:nvPr/>
         </p:nvCxnSpPr>
@@ -7918,7 +8109,7 @@
       </p:cxnSp>
       <p:sp>
         <p:nvSpPr>
-          <p:cNvPr id="120" name="row:BIG TCP:start"/>
+          <p:cNvPr id="125" name="row:BIG TCP:start"/>
           <p:cNvSpPr/>
           <p:nvPr/>
         </p:nvSpPr>
@@ -7962,7 +8153,7 @@
       </p:sp>
       <p:sp>
         <p:nvSpPr>
-          <p:cNvPr id="121" name="row:BIG TCP:release:5.19"/>
+          <p:cNvPr id="126" name="row:BIG TCP:release:5.19"/>
           <p:cNvSpPr/>
           <p:nvPr/>
         </p:nvSpPr>
@@ -8006,7 +8197,7 @@
       </p:sp>
       <p:sp>
         <p:nvSpPr>
-          <p:cNvPr id="122" name="row:BIG TCP:label"/>
+          <p:cNvPr id="127" name="row:BIG TCP:label"/>
           <p:cNvSpPr txBox="1"/>
           <p:nvPr/>
         </p:nvSpPr>
@@ -8040,7 +8231,7 @@
       </p:sp>
       <p:sp>
         <p:nvSpPr>
-          <p:cNvPr id="123" name="row:BIG TCP extensions:name"/>
+          <p:cNvPr id="128" name="row:BIG TCP extensions:name"/>
           <p:cNvSpPr txBox="1"/>
           <p:nvPr/>
         </p:nvSpPr>
@@ -8074,7 +8265,7 @@
       </p:sp>
       <p:cxnSp>
         <p:nvCxnSpPr>
-          <p:cNvPr id="124" name="row:BIG TCP extensions:milestones"/>
+          <p:cNvPr id="129" name="row:BIG TCP extensions:milestones"/>
           <p:cNvCxnSpPr/>
           <p:nvPr/>
         </p:nvCxnSpPr>
@@ -8109,7 +8300,7 @@
       </p:cxnSp>
       <p:sp>
         <p:nvSpPr>
-          <p:cNvPr id="125" name="row:BIG TCP extensions:release:6.3"/>
+          <p:cNvPr id="130" name="row:BIG TCP extensions:release:6.3"/>
           <p:cNvSpPr/>
           <p:nvPr/>
         </p:nvSpPr>
@@ -8153,7 +8344,7 @@
       </p:sp>
       <p:sp>
         <p:nvSpPr>
-          <p:cNvPr id="126" name="row:BIG TCP extensions:release:7.0"/>
+          <p:cNvPr id="131" name="row:BIG TCP extensions:release:7.0"/>
           <p:cNvSpPr/>
           <p:nvPr/>
         </p:nvSpPr>
@@ -8197,7 +8388,7 @@
       </p:sp>
       <p:sp>
         <p:nvSpPr>
-          <p:cNvPr id="127" name="row:BIG TCP extensions:release:7.3-rc"/>
+          <p:cNvPr id="132" name="row:BIG TCP extensions:release:7.3-rc"/>
           <p:cNvSpPr/>
           <p:nvPr/>
         </p:nvSpPr>
@@ -8241,7 +8432,7 @@
       </p:sp>
       <p:sp>
         <p:nvSpPr>
-          <p:cNvPr id="128" name="row:BIG TCP extensions:label"/>
+          <p:cNvPr id="133" name="row:BIG TCP extensions:label"/>
           <p:cNvSpPr txBox="1"/>
           <p:nvPr/>
         </p:nvSpPr>
@@ -8275,7 +8466,7 @@
       </p:sp>
       <p:sp>
         <p:nvSpPr>
-          <p:cNvPr id="129" name="row:cake_mq:name"/>
+          <p:cNvPr id="134" name="row:cake_mq:name"/>
           <p:cNvSpPr txBox="1"/>
           <p:nvPr/>
         </p:nvSpPr>
@@ -8309,7 +8500,7 @@
       </p:sp>
       <p:cxnSp>
         <p:nvCxnSpPr>
-          <p:cNvPr id="130" name="row:cake_mq:development"/>
+          <p:cNvPr id="135" name="row:cake_mq:development"/>
           <p:cNvCxnSpPr/>
           <p:nvPr/>
         </p:nvCxnSpPr>
@@ -8345,7 +8536,7 @@
       </p:cxnSp>
       <p:sp>
         <p:nvSpPr>
-          <p:cNvPr id="131" name="row:cake_mq:start"/>
+          <p:cNvPr id="136" name="row:cake_mq:start"/>
           <p:cNvSpPr/>
           <p:nvPr/>
         </p:nvSpPr>
@@ -8389,7 +8580,7 @@
       </p:sp>
       <p:sp>
         <p:nvSpPr>
-          <p:cNvPr id="132" name="row:cake_mq:release:7.0"/>
+          <p:cNvPr id="137" name="row:cake_mq:release:7.0"/>
           <p:cNvSpPr/>
           <p:nvPr/>
         </p:nvSpPr>
@@ -8433,7 +8624,7 @@
       </p:sp>
       <p:sp>
         <p:nvSpPr>
-          <p:cNvPr id="133" name="row:cake_mq:label"/>
+          <p:cNvPr id="138" name="row:cake_mq:label"/>
           <p:cNvSpPr txBox="1"/>
           <p:nvPr/>
         </p:nvSpPr>
@@ -8467,7 +8658,7 @@
       </p:sp>
       <p:sp>
         <p:nvSpPr>
-          <p:cNvPr id="134" name="band-label:PROGRAMMABILITY"/>
+          <p:cNvPr id="139" name="band-label:PROGRAMMABILITY"/>
           <p:cNvSpPr txBox="1"/>
           <p:nvPr/>
         </p:nvSpPr>
@@ -8502,7 +8693,7 @@
       </p:sp>
       <p:sp>
         <p:nvSpPr>
-          <p:cNvPr id="135" name="row:eBPF foundation:name"/>
+          <p:cNvPr id="140" name="row:eBPF foundation:name"/>
           <p:cNvSpPr txBox="1"/>
           <p:nvPr/>
         </p:nvSpPr>
@@ -8536,7 +8727,7 @@
       </p:sp>
       <p:cxnSp>
         <p:nvCxnSpPr>
-          <p:cNvPr id="136" name="row:eBPF foundation:development"/>
+          <p:cNvPr id="141" name="row:eBPF foundation:development"/>
           <p:cNvCxnSpPr/>
           <p:nvPr/>
         </p:nvCxnSpPr>
@@ -8572,7 +8763,7 @@
       </p:cxnSp>
       <p:sp>
         <p:nvSpPr>
-          <p:cNvPr id="137" name="row:eBPF foundation:start"/>
+          <p:cNvPr id="142" name="row:eBPF foundation:start"/>
           <p:cNvSpPr/>
           <p:nvPr/>
         </p:nvSpPr>
@@ -8616,7 +8807,7 @@
       </p:sp>
       <p:sp>
         <p:nvSpPr>
-          <p:cNvPr id="138" name="row:eBPF foundation:release:3.18"/>
+          <p:cNvPr id="143" name="row:eBPF foundation:release:3.18"/>
           <p:cNvSpPr/>
           <p:nvPr/>
         </p:nvSpPr>
@@ -8660,7 +8851,7 @@
       </p:sp>
       <p:sp>
         <p:nvSpPr>
-          <p:cNvPr id="139" name="row:eBPF foundation:label"/>
+          <p:cNvPr id="144" name="row:eBPF foundation:label"/>
           <p:cNvSpPr txBox="1"/>
           <p:nvPr/>
         </p:nvSpPr>
@@ -8694,7 +8885,7 @@
       </p:sp>
       <p:sp>
         <p:nvSpPr>
-          <p:cNvPr id="140" name="row:TC BPF:name"/>
+          <p:cNvPr id="145" name="row:TC BPF:name"/>
           <p:cNvSpPr txBox="1"/>
           <p:nvPr/>
         </p:nvSpPr>
@@ -8728,7 +8919,7 @@
       </p:sp>
       <p:cxnSp>
         <p:nvCxnSpPr>
-          <p:cNvPr id="141" name="row:TC BPF:development"/>
+          <p:cNvPr id="146" name="row:TC BPF:development"/>
           <p:cNvCxnSpPr/>
           <p:nvPr/>
         </p:nvCxnSpPr>
@@ -8764,7 +8955,7 @@
       </p:cxnSp>
       <p:sp>
         <p:nvSpPr>
-          <p:cNvPr id="142" name="row:TC BPF:start"/>
+          <p:cNvPr id="147" name="row:TC BPF:start"/>
           <p:cNvSpPr/>
           <p:nvPr/>
         </p:nvSpPr>
@@ -8808,7 +8999,7 @@
       </p:sp>
       <p:sp>
         <p:nvSpPr>
-          <p:cNvPr id="143" name="row:TC BPF:release:4.1"/>
+          <p:cNvPr id="148" name="row:TC BPF:release:4.1"/>
           <p:cNvSpPr/>
           <p:nvPr/>
         </p:nvSpPr>
@@ -8852,7 +9043,7 @@
       </p:sp>
       <p:sp>
         <p:nvSpPr>
-          <p:cNvPr id="144" name="row:TC BPF:label"/>
+          <p:cNvPr id="149" name="row:TC BPF:label"/>
           <p:cNvSpPr txBox="1"/>
           <p:nvPr/>
         </p:nvSpPr>
@@ -8886,7 +9077,7 @@
       </p:sp>
       <p:sp>
         <p:nvSpPr>
-          <p:cNvPr id="145" name="row:TCX:name"/>
+          <p:cNvPr id="150" name="row:TCX:name"/>
           <p:cNvSpPr txBox="1"/>
           <p:nvPr/>
         </p:nvSpPr>
@@ -8920,7 +9111,7 @@
       </p:sp>
       <p:cxnSp>
         <p:nvCxnSpPr>
-          <p:cNvPr id="146" name="row:TCX:development"/>
+          <p:cNvPr id="151" name="row:TCX:development"/>
           <p:cNvCxnSpPr/>
           <p:nvPr/>
         </p:nvCxnSpPr>
@@ -8956,7 +9147,7 @@
       </p:cxnSp>
       <p:sp>
         <p:nvSpPr>
-          <p:cNvPr id="147" name="row:TCX:start"/>
+          <p:cNvPr id="152" name="row:TCX:start"/>
           <p:cNvSpPr/>
           <p:nvPr/>
         </p:nvSpPr>
@@ -9000,7 +9191,7 @@
       </p:sp>
       <p:sp>
         <p:nvSpPr>
-          <p:cNvPr id="148" name="row:TCX:release:6.6"/>
+          <p:cNvPr id="153" name="row:TCX:release:6.6"/>
           <p:cNvSpPr/>
           <p:nvPr/>
         </p:nvSpPr>
@@ -9044,7 +9235,7 @@
       </p:sp>
       <p:sp>
         <p:nvSpPr>
-          <p:cNvPr id="149" name="row:TCX:label"/>
+          <p:cNvPr id="154" name="row:TCX:label"/>
           <p:cNvSpPr txBox="1"/>
           <p:nvPr/>
         </p:nvSpPr>
@@ -9078,7 +9269,7 @@
       </p:sp>
       <p:sp>
         <p:nvSpPr>
-          <p:cNvPr id="150" name="row:netkit:name"/>
+          <p:cNvPr id="155" name="row:netkit:name"/>
           <p:cNvSpPr txBox="1"/>
           <p:nvPr/>
         </p:nvSpPr>
@@ -9112,7 +9303,7 @@
       </p:sp>
       <p:cxnSp>
         <p:nvCxnSpPr>
-          <p:cNvPr id="151" name="row:netkit:development"/>
+          <p:cNvPr id="156" name="row:netkit:development"/>
           <p:cNvCxnSpPr/>
           <p:nvPr/>
         </p:nvCxnSpPr>
@@ -9148,7 +9339,7 @@
       </p:cxnSp>
       <p:sp>
         <p:nvSpPr>
-          <p:cNvPr id="152" name="row:netkit:start"/>
+          <p:cNvPr id="157" name="row:netkit:start"/>
           <p:cNvSpPr/>
           <p:nvPr/>
         </p:nvSpPr>
@@ -9192,7 +9383,7 @@
       </p:sp>
       <p:sp>
         <p:nvSpPr>
-          <p:cNvPr id="153" name="row:netkit:release:6.7"/>
+          <p:cNvPr id="158" name="row:netkit:release:6.7"/>
           <p:cNvSpPr/>
           <p:nvPr/>
         </p:nvSpPr>
@@ -9236,7 +9427,7 @@
       </p:sp>
       <p:sp>
         <p:nvSpPr>
-          <p:cNvPr id="154" name="row:netkit:label"/>
+          <p:cNvPr id="159" name="row:netkit:label"/>
           <p:cNvSpPr txBox="1"/>
           <p:nvPr/>
         </p:nvSpPr>
@@ -9270,13 +9461,1052 @@
       </p:sp>
       <p:sp>
         <p:nvSpPr>
-          <p:cNvPr id="155" name="row:XDP:name"/>
+          <p:cNvPr id="160" name="row:cgroup / LWT BPF:name"/>
           <p:cNvSpPr txBox="1"/>
           <p:nvPr/>
         </p:nvSpPr>
         <p:spPr>
           <a:xfrm>
             <a:off x="1325880" y="2957893"/>
+            <a:ext cx="1572768" cy="219456"/>
+          </a:xfrm>
+          <a:prstGeom prst="rect">
+            <a:avLst/>
+          </a:prstGeom>
+          <a:noFill/>
+        </p:spPr>
+        <p:txBody>
+          <a:bodyPr wrap="square" anchor="ctr" lIns="0" rIns="0" tIns="0" bIns="0">
+            <a:noAutofit/>
+          </a:bodyPr>
+          <a:lstStyle/>
+          <a:p>
+            <a:pPr algn="r"/>
+            <a:r>
+              <a:rPr sz="850" b="0" i="0">
+                <a:solidFill>
+                  <a:srgbClr val="1F2937"/>
+                </a:solidFill>
+              </a:rPr>
+              <a:t>cgroup / LWT BPF</a:t>
+            </a:r>
+          </a:p>
+        </p:txBody>
+      </p:sp>
+      <p:cxnSp>
+        <p:nvCxnSpPr>
+          <p:cNvPr id="161" name="row:cgroup / LWT BPF:development"/>
+          <p:cNvCxnSpPr/>
+          <p:nvPr/>
+        </p:nvCxnSpPr>
+        <p:spPr>
+          <a:xfrm>
+            <a:off x="6475495" y="3067621"/>
+            <a:ext cx="801413" cy="0"/>
+          </a:xfrm>
+          <a:prstGeom prst="line">
+            <a:avLst/>
+          </a:prstGeom>
+          <a:ln w="12700">
+            <a:solidFill>
+              <a:srgbClr val="EA580C"/>
+            </a:solidFill>
+            <a:prstDash val="dash"/>
+          </a:ln>
+        </p:spPr>
+        <p:style>
+          <a:lnRef idx="2">
+            <a:schemeClr val="accent1"/>
+          </a:lnRef>
+          <a:fillRef idx="0">
+            <a:schemeClr val="accent1"/>
+          </a:fillRef>
+          <a:effectRef idx="1">
+            <a:schemeClr val="accent1"/>
+          </a:effectRef>
+          <a:fontRef idx="minor">
+            <a:schemeClr val="tx1"/>
+          </a:fontRef>
+        </p:style>
+      </p:cxnSp>
+      <p:sp>
+        <p:nvSpPr>
+          <p:cNvPr id="162" name="row:cgroup / LWT BPF:start"/>
+          <p:cNvSpPr/>
+          <p:nvPr/>
+        </p:nvSpPr>
+        <p:spPr>
+          <a:xfrm>
+            <a:off x="6443491" y="3035617"/>
+            <a:ext cx="64008" cy="64008"/>
+          </a:xfrm>
+          <a:prstGeom prst="ellipse">
+            <a:avLst/>
+          </a:prstGeom>
+          <a:solidFill>
+            <a:srgbClr val="FFFFFF"/>
+          </a:solidFill>
+          <a:ln w="12700">
+            <a:solidFill>
+              <a:srgbClr val="EA580C"/>
+            </a:solidFill>
+          </a:ln>
+          <a:effectLst/>
+        </p:spPr>
+        <p:style>
+          <a:lnRef idx="1">
+            <a:schemeClr val="accent1"/>
+          </a:lnRef>
+          <a:fillRef idx="3">
+            <a:schemeClr val="accent1"/>
+          </a:fillRef>
+          <a:effectRef idx="2">
+            <a:schemeClr val="accent1"/>
+          </a:effectRef>
+          <a:fontRef idx="minor">
+            <a:schemeClr val="lt1"/>
+          </a:fontRef>
+        </p:style>
+        <p:txBody>
+          <a:bodyPr rtlCol="0" anchor="ctr"/>
+          <a:lstStyle/>
+          <a:p/>
+        </p:txBody>
+      </p:sp>
+      <p:sp>
+        <p:nvSpPr>
+          <p:cNvPr id="163" name="row:cgroup / LWT BPF:release:4.10"/>
+          <p:cNvSpPr/>
+          <p:nvPr/>
+        </p:nvSpPr>
+        <p:spPr>
+          <a:xfrm>
+            <a:off x="7233474" y="3024187"/>
+            <a:ext cx="86868" cy="86868"/>
+          </a:xfrm>
+          <a:prstGeom prst="ellipse">
+            <a:avLst/>
+          </a:prstGeom>
+          <a:solidFill>
+            <a:srgbClr val="EA580C"/>
+          </a:solidFill>
+          <a:ln w="12700">
+            <a:solidFill>
+              <a:srgbClr val="EA580C"/>
+            </a:solidFill>
+          </a:ln>
+          <a:effectLst/>
+        </p:spPr>
+        <p:style>
+          <a:lnRef idx="1">
+            <a:schemeClr val="accent1"/>
+          </a:lnRef>
+          <a:fillRef idx="3">
+            <a:schemeClr val="accent1"/>
+          </a:fillRef>
+          <a:effectRef idx="2">
+            <a:schemeClr val="accent1"/>
+          </a:effectRef>
+          <a:fontRef idx="minor">
+            <a:schemeClr val="lt1"/>
+          </a:fontRef>
+        </p:style>
+        <p:txBody>
+          <a:bodyPr rtlCol="0" anchor="ctr"/>
+          <a:lstStyle/>
+          <a:p/>
+        </p:txBody>
+      </p:sp>
+      <p:sp>
+        <p:nvSpPr>
+          <p:cNvPr id="164" name="row:cgroup / LWT BPF:label"/>
+          <p:cNvSpPr txBox="1"/>
+          <p:nvPr/>
+        </p:nvSpPr>
+        <p:spPr>
+          <a:xfrm>
+            <a:off x="7350060" y="2957893"/>
+            <a:ext cx="731520" cy="219456"/>
+          </a:xfrm>
+          <a:prstGeom prst="rect">
+            <a:avLst/>
+          </a:prstGeom>
+          <a:noFill/>
+        </p:spPr>
+        <p:txBody>
+          <a:bodyPr wrap="square" anchor="ctr" lIns="0" rIns="0" tIns="0" bIns="0">
+            <a:noAutofit/>
+          </a:bodyPr>
+          <a:lstStyle/>
+          <a:p>
+            <a:pPr algn="l"/>
+            <a:r>
+              <a:rPr sz="800" b="1" i="0">
+                <a:solidFill>
+                  <a:srgbClr val="1F2937"/>
+                </a:solidFill>
+              </a:rPr>
+              <a:t>4.10</a:t>
+            </a:r>
+          </a:p>
+        </p:txBody>
+      </p:sp>
+      <p:sp>
+        <p:nvSpPr>
+          <p:cNvPr id="165" name="row:SOCK_OPS / SOCKMAP:name"/>
+          <p:cNvSpPr txBox="1"/>
+          <p:nvPr/>
+        </p:nvSpPr>
+        <p:spPr>
+          <a:xfrm>
+            <a:off x="1325880" y="3067240"/>
+            <a:ext cx="1572768" cy="219456"/>
+          </a:xfrm>
+          <a:prstGeom prst="rect">
+            <a:avLst/>
+          </a:prstGeom>
+          <a:noFill/>
+        </p:spPr>
+        <p:txBody>
+          <a:bodyPr wrap="square" anchor="ctr" lIns="0" rIns="0" tIns="0" bIns="0">
+            <a:noAutofit/>
+          </a:bodyPr>
+          <a:lstStyle/>
+          <a:p>
+            <a:pPr algn="r"/>
+            <a:r>
+              <a:rPr sz="850" b="0" i="0">
+                <a:solidFill>
+                  <a:srgbClr val="1F2937"/>
+                </a:solidFill>
+              </a:rPr>
+              <a:t>SOCK_OPS / SOCKMAP</a:t>
+            </a:r>
+          </a:p>
+        </p:txBody>
+      </p:sp>
+      <p:cxnSp>
+        <p:nvCxnSpPr>
+          <p:cNvPr id="166" name="row:SOCK_OPS / SOCKMAP:development"/>
+          <p:cNvCxnSpPr/>
+          <p:nvPr/>
+        </p:nvCxnSpPr>
+        <p:spPr>
+          <a:xfrm>
+            <a:off x="6822681" y="3176968"/>
+            <a:ext cx="826840" cy="0"/>
+          </a:xfrm>
+          <a:prstGeom prst="line">
+            <a:avLst/>
+          </a:prstGeom>
+          <a:ln w="12700">
+            <a:solidFill>
+              <a:srgbClr val="EA580C"/>
+            </a:solidFill>
+            <a:prstDash val="dash"/>
+          </a:ln>
+        </p:spPr>
+        <p:style>
+          <a:lnRef idx="2">
+            <a:schemeClr val="accent1"/>
+          </a:lnRef>
+          <a:fillRef idx="0">
+            <a:schemeClr val="accent1"/>
+          </a:fillRef>
+          <a:effectRef idx="1">
+            <a:schemeClr val="accent1"/>
+          </a:effectRef>
+          <a:fontRef idx="minor">
+            <a:schemeClr val="tx1"/>
+          </a:fontRef>
+        </p:style>
+      </p:cxnSp>
+      <p:sp>
+        <p:nvSpPr>
+          <p:cNvPr id="167" name="row:SOCK_OPS / SOCKMAP:start"/>
+          <p:cNvSpPr/>
+          <p:nvPr/>
+        </p:nvSpPr>
+        <p:spPr>
+          <a:xfrm>
+            <a:off x="6790677" y="3144964"/>
+            <a:ext cx="64008" cy="64008"/>
+          </a:xfrm>
+          <a:prstGeom prst="ellipse">
+            <a:avLst/>
+          </a:prstGeom>
+          <a:solidFill>
+            <a:srgbClr val="FFFFFF"/>
+          </a:solidFill>
+          <a:ln w="12700">
+            <a:solidFill>
+              <a:srgbClr val="EA580C"/>
+            </a:solidFill>
+          </a:ln>
+          <a:effectLst/>
+        </p:spPr>
+        <p:style>
+          <a:lnRef idx="1">
+            <a:schemeClr val="accent1"/>
+          </a:lnRef>
+          <a:fillRef idx="3">
+            <a:schemeClr val="accent1"/>
+          </a:fillRef>
+          <a:effectRef idx="2">
+            <a:schemeClr val="accent1"/>
+          </a:effectRef>
+          <a:fontRef idx="minor">
+            <a:schemeClr val="lt1"/>
+          </a:fontRef>
+        </p:style>
+        <p:txBody>
+          <a:bodyPr rtlCol="0" anchor="ctr"/>
+          <a:lstStyle/>
+          <a:p/>
+        </p:txBody>
+      </p:sp>
+      <p:cxnSp>
+        <p:nvCxnSpPr>
+          <p:cNvPr id="168" name="row:SOCK_OPS / SOCKMAP:milestones"/>
+          <p:cNvCxnSpPr/>
+          <p:nvPr/>
+        </p:nvCxnSpPr>
+        <p:spPr>
+          <a:xfrm>
+            <a:off x="7649521" y="3176968"/>
+            <a:ext cx="133076" cy="0"/>
+          </a:xfrm>
+          <a:prstGeom prst="line">
+            <a:avLst/>
+          </a:prstGeom>
+          <a:ln w="19050">
+            <a:solidFill>
+              <a:srgbClr val="EA580C"/>
+            </a:solidFill>
+          </a:ln>
+        </p:spPr>
+        <p:style>
+          <a:lnRef idx="2">
+            <a:schemeClr val="accent1"/>
+          </a:lnRef>
+          <a:fillRef idx="0">
+            <a:schemeClr val="accent1"/>
+          </a:fillRef>
+          <a:effectRef idx="1">
+            <a:schemeClr val="accent1"/>
+          </a:effectRef>
+          <a:fontRef idx="minor">
+            <a:schemeClr val="tx1"/>
+          </a:fontRef>
+        </p:style>
+      </p:cxnSp>
+      <p:sp>
+        <p:nvSpPr>
+          <p:cNvPr id="169" name="row:SOCK_OPS / SOCKMAP:release:4.13"/>
+          <p:cNvSpPr/>
+          <p:nvPr/>
+        </p:nvSpPr>
+        <p:spPr>
+          <a:xfrm>
+            <a:off x="7606087" y="3133534"/>
+            <a:ext cx="86868" cy="86868"/>
+          </a:xfrm>
+          <a:prstGeom prst="ellipse">
+            <a:avLst/>
+          </a:prstGeom>
+          <a:solidFill>
+            <a:srgbClr val="EA580C"/>
+          </a:solidFill>
+          <a:ln w="12700">
+            <a:solidFill>
+              <a:srgbClr val="EA580C"/>
+            </a:solidFill>
+          </a:ln>
+          <a:effectLst/>
+        </p:spPr>
+        <p:style>
+          <a:lnRef idx="1">
+            <a:schemeClr val="accent1"/>
+          </a:lnRef>
+          <a:fillRef idx="3">
+            <a:schemeClr val="accent1"/>
+          </a:fillRef>
+          <a:effectRef idx="2">
+            <a:schemeClr val="accent1"/>
+          </a:effectRef>
+          <a:fontRef idx="minor">
+            <a:schemeClr val="lt1"/>
+          </a:fontRef>
+        </p:style>
+        <p:txBody>
+          <a:bodyPr rtlCol="0" anchor="ctr"/>
+          <a:lstStyle/>
+          <a:p/>
+        </p:txBody>
+      </p:sp>
+      <p:sp>
+        <p:nvSpPr>
+          <p:cNvPr id="170" name="row:SOCK_OPS / SOCKMAP:release:4.14"/>
+          <p:cNvSpPr/>
+          <p:nvPr/>
+        </p:nvSpPr>
+        <p:spPr>
+          <a:xfrm>
+            <a:off x="7739163" y="3133534"/>
+            <a:ext cx="86868" cy="86868"/>
+          </a:xfrm>
+          <a:prstGeom prst="ellipse">
+            <a:avLst/>
+          </a:prstGeom>
+          <a:solidFill>
+            <a:srgbClr val="EA580C"/>
+          </a:solidFill>
+          <a:ln w="12700">
+            <a:solidFill>
+              <a:srgbClr val="EA580C"/>
+            </a:solidFill>
+          </a:ln>
+          <a:effectLst/>
+        </p:spPr>
+        <p:style>
+          <a:lnRef idx="1">
+            <a:schemeClr val="accent1"/>
+          </a:lnRef>
+          <a:fillRef idx="3">
+            <a:schemeClr val="accent1"/>
+          </a:fillRef>
+          <a:effectRef idx="2">
+            <a:schemeClr val="accent1"/>
+          </a:effectRef>
+          <a:fontRef idx="minor">
+            <a:schemeClr val="lt1"/>
+          </a:fontRef>
+        </p:style>
+        <p:txBody>
+          <a:bodyPr rtlCol="0" anchor="ctr"/>
+          <a:lstStyle/>
+          <a:p/>
+        </p:txBody>
+      </p:sp>
+      <p:sp>
+        <p:nvSpPr>
+          <p:cNvPr id="171" name="row:SOCK_OPS / SOCKMAP:label"/>
+          <p:cNvSpPr txBox="1"/>
+          <p:nvPr/>
+        </p:nvSpPr>
+        <p:spPr>
+          <a:xfrm>
+            <a:off x="7855749" y="3067240"/>
+            <a:ext cx="731520" cy="219456"/>
+          </a:xfrm>
+          <a:prstGeom prst="rect">
+            <a:avLst/>
+          </a:prstGeom>
+          <a:noFill/>
+        </p:spPr>
+        <p:txBody>
+          <a:bodyPr wrap="square" anchor="ctr" lIns="0" rIns="0" tIns="0" bIns="0">
+            <a:noAutofit/>
+          </a:bodyPr>
+          <a:lstStyle/>
+          <a:p>
+            <a:pPr algn="l"/>
+            <a:r>
+              <a:rPr sz="800" b="1" i="0">
+                <a:solidFill>
+                  <a:srgbClr val="1F2937"/>
+                </a:solidFill>
+              </a:rPr>
+              <a:t>4.13 / 4.14</a:t>
+            </a:r>
+          </a:p>
+        </p:txBody>
+      </p:sp>
+      <p:sp>
+        <p:nvSpPr>
+          <p:cNvPr id="172" name="row:BPF struct_ops:name"/>
+          <p:cNvSpPr txBox="1"/>
+          <p:nvPr/>
+        </p:nvSpPr>
+        <p:spPr>
+          <a:xfrm>
+            <a:off x="1325880" y="3176587"/>
+            <a:ext cx="1572768" cy="219456"/>
+          </a:xfrm>
+          <a:prstGeom prst="rect">
+            <a:avLst/>
+          </a:prstGeom>
+          <a:noFill/>
+        </p:spPr>
+        <p:txBody>
+          <a:bodyPr wrap="square" anchor="ctr" lIns="0" rIns="0" tIns="0" bIns="0">
+            <a:noAutofit/>
+          </a:bodyPr>
+          <a:lstStyle/>
+          <a:p>
+            <a:pPr algn="r"/>
+            <a:r>
+              <a:rPr sz="850" b="0" i="0">
+                <a:solidFill>
+                  <a:srgbClr val="1F2937"/>
+                </a:solidFill>
+              </a:rPr>
+              <a:t>BPF struct_ops</a:t>
+            </a:r>
+          </a:p>
+        </p:txBody>
+      </p:sp>
+      <p:cxnSp>
+        <p:nvCxnSpPr>
+          <p:cNvPr id="173" name="row:BPF struct_ops:development"/>
+          <p:cNvCxnSpPr/>
+          <p:nvPr/>
+        </p:nvCxnSpPr>
+        <p:spPr>
+          <a:xfrm>
+            <a:off x="8419738" y="3286315"/>
+            <a:ext cx="1014430" cy="0"/>
+          </a:xfrm>
+          <a:prstGeom prst="line">
+            <a:avLst/>
+          </a:prstGeom>
+          <a:ln w="12700">
+            <a:solidFill>
+              <a:srgbClr val="EA580C"/>
+            </a:solidFill>
+            <a:prstDash val="dash"/>
+          </a:ln>
+        </p:spPr>
+        <p:style>
+          <a:lnRef idx="2">
+            <a:schemeClr val="accent1"/>
+          </a:lnRef>
+          <a:fillRef idx="0">
+            <a:schemeClr val="accent1"/>
+          </a:fillRef>
+          <a:effectRef idx="1">
+            <a:schemeClr val="accent1"/>
+          </a:effectRef>
+          <a:fontRef idx="minor">
+            <a:schemeClr val="tx1"/>
+          </a:fontRef>
+        </p:style>
+      </p:cxnSp>
+      <p:sp>
+        <p:nvSpPr>
+          <p:cNvPr id="174" name="row:BPF struct_ops:start"/>
+          <p:cNvSpPr/>
+          <p:nvPr/>
+        </p:nvSpPr>
+        <p:spPr>
+          <a:xfrm>
+            <a:off x="8387734" y="3254311"/>
+            <a:ext cx="64008" cy="64008"/>
+          </a:xfrm>
+          <a:prstGeom prst="ellipse">
+            <a:avLst/>
+          </a:prstGeom>
+          <a:solidFill>
+            <a:srgbClr val="FFFFFF"/>
+          </a:solidFill>
+          <a:ln w="12700">
+            <a:solidFill>
+              <a:srgbClr val="EA580C"/>
+            </a:solidFill>
+          </a:ln>
+          <a:effectLst/>
+        </p:spPr>
+        <p:style>
+          <a:lnRef idx="1">
+            <a:schemeClr val="accent1"/>
+          </a:lnRef>
+          <a:fillRef idx="3">
+            <a:schemeClr val="accent1"/>
+          </a:fillRef>
+          <a:effectRef idx="2">
+            <a:schemeClr val="accent1"/>
+          </a:effectRef>
+          <a:fontRef idx="minor">
+            <a:schemeClr val="lt1"/>
+          </a:fontRef>
+        </p:style>
+        <p:txBody>
+          <a:bodyPr rtlCol="0" anchor="ctr"/>
+          <a:lstStyle/>
+          <a:p/>
+        </p:txBody>
+      </p:sp>
+      <p:sp>
+        <p:nvSpPr>
+          <p:cNvPr id="175" name="row:BPF struct_ops:release:5.6"/>
+          <p:cNvSpPr/>
+          <p:nvPr/>
+        </p:nvSpPr>
+        <p:spPr>
+          <a:xfrm>
+            <a:off x="9390734" y="3242881"/>
+            <a:ext cx="86868" cy="86868"/>
+          </a:xfrm>
+          <a:prstGeom prst="ellipse">
+            <a:avLst/>
+          </a:prstGeom>
+          <a:solidFill>
+            <a:srgbClr val="EA580C"/>
+          </a:solidFill>
+          <a:ln w="12700">
+            <a:solidFill>
+              <a:srgbClr val="EA580C"/>
+            </a:solidFill>
+          </a:ln>
+          <a:effectLst/>
+        </p:spPr>
+        <p:style>
+          <a:lnRef idx="1">
+            <a:schemeClr val="accent1"/>
+          </a:lnRef>
+          <a:fillRef idx="3">
+            <a:schemeClr val="accent1"/>
+          </a:fillRef>
+          <a:effectRef idx="2">
+            <a:schemeClr val="accent1"/>
+          </a:effectRef>
+          <a:fontRef idx="minor">
+            <a:schemeClr val="lt1"/>
+          </a:fontRef>
+        </p:style>
+        <p:txBody>
+          <a:bodyPr rtlCol="0" anchor="ctr"/>
+          <a:lstStyle/>
+          <a:p/>
+        </p:txBody>
+      </p:sp>
+      <p:sp>
+        <p:nvSpPr>
+          <p:cNvPr id="176" name="row:BPF struct_ops:label"/>
+          <p:cNvSpPr txBox="1"/>
+          <p:nvPr/>
+        </p:nvSpPr>
+        <p:spPr>
+          <a:xfrm>
+            <a:off x="9507320" y="3176587"/>
+            <a:ext cx="731520" cy="219456"/>
+          </a:xfrm>
+          <a:prstGeom prst="rect">
+            <a:avLst/>
+          </a:prstGeom>
+          <a:noFill/>
+        </p:spPr>
+        <p:txBody>
+          <a:bodyPr wrap="square" anchor="ctr" lIns="0" rIns="0" tIns="0" bIns="0">
+            <a:noAutofit/>
+          </a:bodyPr>
+          <a:lstStyle/>
+          <a:p>
+            <a:pPr algn="l"/>
+            <a:r>
+              <a:rPr sz="800" b="1" i="0">
+                <a:solidFill>
+                  <a:srgbClr val="1F2937"/>
+                </a:solidFill>
+              </a:rPr>
+              <a:t>5.6</a:t>
+            </a:r>
+          </a:p>
+        </p:txBody>
+      </p:sp>
+      <p:sp>
+        <p:nvSpPr>
+          <p:cNvPr id="177" name="row:BPF qdisc:name"/>
+          <p:cNvSpPr txBox="1"/>
+          <p:nvPr/>
+        </p:nvSpPr>
+        <p:spPr>
+          <a:xfrm>
+            <a:off x="1325880" y="3285934"/>
+            <a:ext cx="1572768" cy="219456"/>
+          </a:xfrm>
+          <a:prstGeom prst="rect">
+            <a:avLst/>
+          </a:prstGeom>
+          <a:noFill/>
+        </p:spPr>
+        <p:txBody>
+          <a:bodyPr wrap="square" anchor="ctr" lIns="0" rIns="0" tIns="0" bIns="0">
+            <a:noAutofit/>
+          </a:bodyPr>
+          <a:lstStyle/>
+          <a:p>
+            <a:pPr algn="r"/>
+            <a:r>
+              <a:rPr sz="850" b="0" i="0">
+                <a:solidFill>
+                  <a:srgbClr val="1F2937"/>
+                </a:solidFill>
+              </a:rPr>
+              <a:t>BPF qdisc</a:t>
+            </a:r>
+          </a:p>
+        </p:txBody>
+      </p:sp>
+      <p:cxnSp>
+        <p:nvCxnSpPr>
+          <p:cNvPr id="178" name="row:BPF qdisc:development"/>
+          <p:cNvCxnSpPr/>
+          <p:nvPr/>
+        </p:nvCxnSpPr>
+        <p:spPr>
+          <a:xfrm>
+            <a:off x="12308224" y="3395662"/>
+            <a:ext cx="824036" cy="0"/>
+          </a:xfrm>
+          <a:prstGeom prst="line">
+            <a:avLst/>
+          </a:prstGeom>
+          <a:ln w="12700">
+            <a:solidFill>
+              <a:srgbClr val="EA580C"/>
+            </a:solidFill>
+            <a:prstDash val="dash"/>
+          </a:ln>
+        </p:spPr>
+        <p:style>
+          <a:lnRef idx="2">
+            <a:schemeClr val="accent1"/>
+          </a:lnRef>
+          <a:fillRef idx="0">
+            <a:schemeClr val="accent1"/>
+          </a:fillRef>
+          <a:effectRef idx="1">
+            <a:schemeClr val="accent1"/>
+          </a:effectRef>
+          <a:fontRef idx="minor">
+            <a:schemeClr val="tx1"/>
+          </a:fontRef>
+        </p:style>
+      </p:cxnSp>
+      <p:sp>
+        <p:nvSpPr>
+          <p:cNvPr id="179" name="row:BPF qdisc:start"/>
+          <p:cNvSpPr/>
+          <p:nvPr/>
+        </p:nvSpPr>
+        <p:spPr>
+          <a:xfrm>
+            <a:off x="12276220" y="3363658"/>
+            <a:ext cx="64008" cy="64008"/>
+          </a:xfrm>
+          <a:prstGeom prst="ellipse">
+            <a:avLst/>
+          </a:prstGeom>
+          <a:solidFill>
+            <a:srgbClr val="FFFFFF"/>
+          </a:solidFill>
+          <a:ln w="12700">
+            <a:solidFill>
+              <a:srgbClr val="EA580C"/>
+            </a:solidFill>
+          </a:ln>
+          <a:effectLst/>
+        </p:spPr>
+        <p:style>
+          <a:lnRef idx="1">
+            <a:schemeClr val="accent1"/>
+          </a:lnRef>
+          <a:fillRef idx="3">
+            <a:schemeClr val="accent1"/>
+          </a:fillRef>
+          <a:effectRef idx="2">
+            <a:schemeClr val="accent1"/>
+          </a:effectRef>
+          <a:fontRef idx="minor">
+            <a:schemeClr val="lt1"/>
+          </a:fontRef>
+        </p:style>
+        <p:txBody>
+          <a:bodyPr rtlCol="0" anchor="ctr"/>
+          <a:lstStyle/>
+          <a:p/>
+        </p:txBody>
+      </p:sp>
+      <p:sp>
+        <p:nvSpPr>
+          <p:cNvPr id="180" name="row:BPF qdisc:release:6.16"/>
+          <p:cNvSpPr/>
+          <p:nvPr/>
+        </p:nvSpPr>
+        <p:spPr>
+          <a:xfrm>
+            <a:off x="13088826" y="3352228"/>
+            <a:ext cx="86868" cy="86868"/>
+          </a:xfrm>
+          <a:prstGeom prst="ellipse">
+            <a:avLst/>
+          </a:prstGeom>
+          <a:solidFill>
+            <a:srgbClr val="EA580C"/>
+          </a:solidFill>
+          <a:ln w="12700">
+            <a:solidFill>
+              <a:srgbClr val="EA580C"/>
+            </a:solidFill>
+          </a:ln>
+          <a:effectLst/>
+        </p:spPr>
+        <p:style>
+          <a:lnRef idx="1">
+            <a:schemeClr val="accent1"/>
+          </a:lnRef>
+          <a:fillRef idx="3">
+            <a:schemeClr val="accent1"/>
+          </a:fillRef>
+          <a:effectRef idx="2">
+            <a:schemeClr val="accent1"/>
+          </a:effectRef>
+          <a:fontRef idx="minor">
+            <a:schemeClr val="lt1"/>
+          </a:fontRef>
+        </p:style>
+        <p:txBody>
+          <a:bodyPr rtlCol="0" anchor="ctr"/>
+          <a:lstStyle/>
+          <a:p/>
+        </p:txBody>
+      </p:sp>
+      <p:sp>
+        <p:nvSpPr>
+          <p:cNvPr id="181" name="row:BPF qdisc:label"/>
+          <p:cNvSpPr txBox="1"/>
+          <p:nvPr/>
+        </p:nvSpPr>
+        <p:spPr>
+          <a:xfrm>
+            <a:off x="13205412" y="3285934"/>
+            <a:ext cx="731520" cy="219456"/>
+          </a:xfrm>
+          <a:prstGeom prst="rect">
+            <a:avLst/>
+          </a:prstGeom>
+          <a:noFill/>
+        </p:spPr>
+        <p:txBody>
+          <a:bodyPr wrap="square" anchor="ctr" lIns="0" rIns="0" tIns="0" bIns="0">
+            <a:noAutofit/>
+          </a:bodyPr>
+          <a:lstStyle/>
+          <a:p>
+            <a:pPr algn="l"/>
+            <a:r>
+              <a:rPr sz="800" b="1" i="0">
+                <a:solidFill>
+                  <a:srgbClr val="1F2937"/>
+                </a:solidFill>
+              </a:rPr>
+              <a:t>6.16</a:t>
+            </a:r>
+          </a:p>
+        </p:txBody>
+      </p:sp>
+      <p:sp>
+        <p:nvSpPr>
+          <p:cNvPr id="182" name="row:SK_LOOKUP:name"/>
+          <p:cNvSpPr txBox="1"/>
+          <p:nvPr/>
+        </p:nvSpPr>
+        <p:spPr>
+          <a:xfrm>
+            <a:off x="1325880" y="3395281"/>
+            <a:ext cx="1572768" cy="219456"/>
+          </a:xfrm>
+          <a:prstGeom prst="rect">
+            <a:avLst/>
+          </a:prstGeom>
+          <a:noFill/>
+        </p:spPr>
+        <p:txBody>
+          <a:bodyPr wrap="square" anchor="ctr" lIns="0" rIns="0" tIns="0" bIns="0">
+            <a:noAutofit/>
+          </a:bodyPr>
+          <a:lstStyle/>
+          <a:p>
+            <a:pPr algn="r"/>
+            <a:r>
+              <a:rPr sz="850" b="0" i="0">
+                <a:solidFill>
+                  <a:srgbClr val="1F2937"/>
+                </a:solidFill>
+              </a:rPr>
+              <a:t>SK_LOOKUP</a:t>
+            </a:r>
+          </a:p>
+        </p:txBody>
+      </p:sp>
+      <p:cxnSp>
+        <p:nvCxnSpPr>
+          <p:cNvPr id="183" name="row:SK_LOOKUP:development"/>
+          <p:cNvCxnSpPr/>
+          <p:nvPr/>
+        </p:nvCxnSpPr>
+        <p:spPr>
+          <a:xfrm>
+            <a:off x="8905798" y="3505009"/>
+            <a:ext cx="900983" cy="0"/>
+          </a:xfrm>
+          <a:prstGeom prst="line">
+            <a:avLst/>
+          </a:prstGeom>
+          <a:ln w="12700">
+            <a:solidFill>
+              <a:srgbClr val="EA580C"/>
+            </a:solidFill>
+            <a:prstDash val="dash"/>
+          </a:ln>
+        </p:spPr>
+        <p:style>
+          <a:lnRef idx="2">
+            <a:schemeClr val="accent1"/>
+          </a:lnRef>
+          <a:fillRef idx="0">
+            <a:schemeClr val="accent1"/>
+          </a:fillRef>
+          <a:effectRef idx="1">
+            <a:schemeClr val="accent1"/>
+          </a:effectRef>
+          <a:fontRef idx="minor">
+            <a:schemeClr val="tx1"/>
+          </a:fontRef>
+        </p:style>
+      </p:cxnSp>
+      <p:sp>
+        <p:nvSpPr>
+          <p:cNvPr id="184" name="row:SK_LOOKUP:start"/>
+          <p:cNvSpPr/>
+          <p:nvPr/>
+        </p:nvSpPr>
+        <p:spPr>
+          <a:xfrm>
+            <a:off x="8873794" y="3473005"/>
+            <a:ext cx="64008" cy="64008"/>
+          </a:xfrm>
+          <a:prstGeom prst="ellipse">
+            <a:avLst/>
+          </a:prstGeom>
+          <a:solidFill>
+            <a:srgbClr val="FFFFFF"/>
+          </a:solidFill>
+          <a:ln w="12700">
+            <a:solidFill>
+              <a:srgbClr val="EA580C"/>
+            </a:solidFill>
+          </a:ln>
+          <a:effectLst/>
+        </p:spPr>
+        <p:style>
+          <a:lnRef idx="1">
+            <a:schemeClr val="accent1"/>
+          </a:lnRef>
+          <a:fillRef idx="3">
+            <a:schemeClr val="accent1"/>
+          </a:fillRef>
+          <a:effectRef idx="2">
+            <a:schemeClr val="accent1"/>
+          </a:effectRef>
+          <a:fontRef idx="minor">
+            <a:schemeClr val="lt1"/>
+          </a:fontRef>
+        </p:style>
+        <p:txBody>
+          <a:bodyPr rtlCol="0" anchor="ctr"/>
+          <a:lstStyle/>
+          <a:p/>
+        </p:txBody>
+      </p:sp>
+      <p:sp>
+        <p:nvSpPr>
+          <p:cNvPr id="185" name="row:SK_LOOKUP:release:5.9"/>
+          <p:cNvSpPr/>
+          <p:nvPr/>
+        </p:nvSpPr>
+        <p:spPr>
+          <a:xfrm>
+            <a:off x="9763347" y="3461575"/>
+            <a:ext cx="86868" cy="86868"/>
+          </a:xfrm>
+          <a:prstGeom prst="ellipse">
+            <a:avLst/>
+          </a:prstGeom>
+          <a:solidFill>
+            <a:srgbClr val="EA580C"/>
+          </a:solidFill>
+          <a:ln w="12700">
+            <a:solidFill>
+              <a:srgbClr val="EA580C"/>
+            </a:solidFill>
+          </a:ln>
+          <a:effectLst/>
+        </p:spPr>
+        <p:style>
+          <a:lnRef idx="1">
+            <a:schemeClr val="accent1"/>
+          </a:lnRef>
+          <a:fillRef idx="3">
+            <a:schemeClr val="accent1"/>
+          </a:fillRef>
+          <a:effectRef idx="2">
+            <a:schemeClr val="accent1"/>
+          </a:effectRef>
+          <a:fontRef idx="minor">
+            <a:schemeClr val="lt1"/>
+          </a:fontRef>
+        </p:style>
+        <p:txBody>
+          <a:bodyPr rtlCol="0" anchor="ctr"/>
+          <a:lstStyle/>
+          <a:p/>
+        </p:txBody>
+      </p:sp>
+      <p:sp>
+        <p:nvSpPr>
+          <p:cNvPr id="186" name="row:SK_LOOKUP:label"/>
+          <p:cNvSpPr txBox="1"/>
+          <p:nvPr/>
+        </p:nvSpPr>
+        <p:spPr>
+          <a:xfrm>
+            <a:off x="9879933" y="3395281"/>
+            <a:ext cx="731520" cy="219456"/>
+          </a:xfrm>
+          <a:prstGeom prst="rect">
+            <a:avLst/>
+          </a:prstGeom>
+          <a:noFill/>
+        </p:spPr>
+        <p:txBody>
+          <a:bodyPr wrap="square" anchor="ctr" lIns="0" rIns="0" tIns="0" bIns="0">
+            <a:noAutofit/>
+          </a:bodyPr>
+          <a:lstStyle/>
+          <a:p>
+            <a:pPr algn="l"/>
+            <a:r>
+              <a:rPr sz="800" b="1" i="0">
+                <a:solidFill>
+                  <a:srgbClr val="1F2937"/>
+                </a:solidFill>
+              </a:rPr>
+              <a:t>5.9</a:t>
+            </a:r>
+          </a:p>
+        </p:txBody>
+      </p:sp>
+      <p:sp>
+        <p:nvSpPr>
+          <p:cNvPr id="187" name="row:XDP:name"/>
+          <p:cNvSpPr txBox="1"/>
+          <p:nvPr/>
+        </p:nvSpPr>
+        <p:spPr>
+          <a:xfrm>
+            <a:off x="1325880" y="3504628"/>
             <a:ext cx="1572768" cy="219456"/>
           </a:xfrm>
           <a:prstGeom prst="rect">
@@ -9304,13 +10534,13 @@
       </p:sp>
       <p:cxnSp>
         <p:nvCxnSpPr>
-          <p:cNvPr id="156" name="row:XDP:development"/>
+          <p:cNvPr id="188" name="row:XDP:development"/>
           <p:cNvCxnSpPr/>
           <p:nvPr/>
         </p:nvCxnSpPr>
         <p:spPr>
           <a:xfrm>
-            <a:off x="6558819" y="3067621"/>
+            <a:off x="6558819" y="3614356"/>
             <a:ext cx="453362" cy="0"/>
           </a:xfrm>
           <a:prstGeom prst="line">
@@ -9340,13 +10570,13 @@
       </p:cxnSp>
       <p:sp>
         <p:nvSpPr>
-          <p:cNvPr id="157" name="row:XDP:start"/>
+          <p:cNvPr id="189" name="row:XDP:start"/>
           <p:cNvSpPr/>
           <p:nvPr/>
         </p:nvSpPr>
         <p:spPr>
           <a:xfrm>
-            <a:off x="6526815" y="3035617"/>
+            <a:off x="6526815" y="3582352"/>
             <a:ext cx="64008" cy="64008"/>
           </a:xfrm>
           <a:prstGeom prst="ellipse">
@@ -9384,13 +10614,13 @@
       </p:sp>
       <p:sp>
         <p:nvSpPr>
-          <p:cNvPr id="158" name="row:XDP:release:4.8"/>
+          <p:cNvPr id="190" name="row:XDP:release:4.8"/>
           <p:cNvSpPr/>
           <p:nvPr/>
         </p:nvSpPr>
         <p:spPr>
           <a:xfrm>
-            <a:off x="6968747" y="3024187"/>
+            <a:off x="6968747" y="3570922"/>
             <a:ext cx="86868" cy="86868"/>
           </a:xfrm>
           <a:prstGeom prst="ellipse">
@@ -9428,13 +10658,13 @@
       </p:sp>
       <p:sp>
         <p:nvSpPr>
-          <p:cNvPr id="159" name="row:XDP:label"/>
+          <p:cNvPr id="191" name="row:XDP:label"/>
           <p:cNvSpPr txBox="1"/>
           <p:nvPr/>
         </p:nvSpPr>
         <p:spPr>
           <a:xfrm>
-            <a:off x="7085333" y="2957893"/>
+            <a:off x="7085333" y="3504628"/>
             <a:ext cx="731520" cy="219456"/>
           </a:xfrm>
           <a:prstGeom prst="rect">
@@ -9462,13 +10692,47 @@
       </p:sp>
       <p:sp>
         <p:nvSpPr>
-          <p:cNvPr id="160" name="row:cgroup / LWT BPF:name"/>
+          <p:cNvPr id="192" name="band-label:MEMORY"/>
           <p:cNvSpPr txBox="1"/>
           <p:nvPr/>
         </p:nvSpPr>
         <p:spPr>
           <a:xfrm>
-            <a:off x="1325880" y="3067240"/>
+            <a:off x="384048" y="3742182"/>
+            <a:ext cx="1051560" cy="1020699"/>
+          </a:xfrm>
+          <a:prstGeom prst="rect">
+            <a:avLst/>
+          </a:prstGeom>
+          <a:noFill/>
+        </p:spPr>
+        <p:txBody>
+          <a:bodyPr wrap="square" anchor="ctr" lIns="0" rIns="0" tIns="0" bIns="0">
+            <a:noAutofit/>
+          </a:bodyPr>
+          <a:lstStyle/>
+          <a:p>
+            <a:pPr algn="l"/>
+            <a:r>
+              <a:rPr sz="1000" b="1" i="0">
+                <a:solidFill>
+                  <a:srgbClr val="16A34A"/>
+                </a:solidFill>
+              </a:rPr>
+              <a:t>MEMORY</a:t>
+            </a:r>
+          </a:p>
+        </p:txBody>
+      </p:sp>
+      <p:sp>
+        <p:nvSpPr>
+          <p:cNvPr id="193" name="row:page_pool:name"/>
+          <p:cNvSpPr txBox="1"/>
+          <p:nvPr/>
+        </p:nvSpPr>
+        <p:spPr>
+          <a:xfrm>
+            <a:off x="1325880" y="3705415"/>
             <a:ext cx="1572768" cy="219456"/>
           </a:xfrm>
           <a:prstGeom prst="rect">
@@ -9489,28 +10753,28 @@
                   <a:srgbClr val="1F2937"/>
                 </a:solidFill>
               </a:rPr>
-              <a:t>cgroup / LWT BPF</a:t>
+              <a:t>page_pool</a:t>
             </a:r>
           </a:p>
         </p:txBody>
       </p:sp>
       <p:cxnSp>
         <p:nvCxnSpPr>
-          <p:cNvPr id="161" name="row:cgroup / LWT BPF:development"/>
+          <p:cNvPr id="194" name="row:page_pool:development"/>
           <p:cNvCxnSpPr/>
           <p:nvPr/>
         </p:nvCxnSpPr>
         <p:spPr>
           <a:xfrm>
-            <a:off x="6475495" y="3176968"/>
-            <a:ext cx="801413" cy="0"/>
+            <a:off x="6614369" y="3815143"/>
+            <a:ext cx="1687701" cy="0"/>
           </a:xfrm>
           <a:prstGeom prst="line">
             <a:avLst/>
           </a:prstGeom>
           <a:ln w="12700">
             <a:solidFill>
-              <a:srgbClr val="EA580C"/>
+              <a:srgbClr val="16A34A"/>
             </a:solidFill>
             <a:prstDash val="dash"/>
           </a:ln>
@@ -9532,13 +10796,13 @@
       </p:cxnSp>
       <p:sp>
         <p:nvSpPr>
-          <p:cNvPr id="162" name="row:cgroup / LWT BPF:start"/>
+          <p:cNvPr id="195" name="row:page_pool:start"/>
           <p:cNvSpPr/>
           <p:nvPr/>
         </p:nvSpPr>
         <p:spPr>
           <a:xfrm>
-            <a:off x="6443491" y="3144964"/>
+            <a:off x="6582365" y="3783139"/>
             <a:ext cx="64008" cy="64008"/>
           </a:xfrm>
           <a:prstGeom prst="ellipse">
@@ -9549,7 +10813,7 @@
           </a:solidFill>
           <a:ln w="12700">
             <a:solidFill>
-              <a:srgbClr val="EA580C"/>
+              <a:srgbClr val="16A34A"/>
             </a:solidFill>
           </a:ln>
           <a:effectLst/>
@@ -9576,24 +10840,24 @@
       </p:sp>
       <p:sp>
         <p:nvSpPr>
-          <p:cNvPr id="163" name="row:cgroup / LWT BPF:release:4.10"/>
+          <p:cNvPr id="196" name="row:page_pool:release:4.18"/>
           <p:cNvSpPr/>
           <p:nvPr/>
         </p:nvSpPr>
         <p:spPr>
           <a:xfrm>
-            <a:off x="7233474" y="3133534"/>
+            <a:off x="8258636" y="3771709"/>
             <a:ext cx="86868" cy="86868"/>
           </a:xfrm>
           <a:prstGeom prst="ellipse">
             <a:avLst/>
           </a:prstGeom>
           <a:solidFill>
-            <a:srgbClr val="EA580C"/>
+            <a:srgbClr val="16A34A"/>
           </a:solidFill>
           <a:ln w="12700">
             <a:solidFill>
-              <a:srgbClr val="EA580C"/>
+              <a:srgbClr val="16A34A"/>
             </a:solidFill>
           </a:ln>
           <a:effectLst/>
@@ -9620,13 +10884,13 @@
       </p:sp>
       <p:sp>
         <p:nvSpPr>
-          <p:cNvPr id="164" name="row:cgroup / LWT BPF:label"/>
+          <p:cNvPr id="197" name="row:page_pool:label"/>
           <p:cNvSpPr txBox="1"/>
           <p:nvPr/>
         </p:nvSpPr>
         <p:spPr>
           <a:xfrm>
-            <a:off x="7350060" y="3067240"/>
+            <a:off x="8375222" y="3705415"/>
             <a:ext cx="731520" cy="219456"/>
           </a:xfrm>
           <a:prstGeom prst="rect">
@@ -9647,20 +10911,20 @@
                   <a:srgbClr val="1F2937"/>
                 </a:solidFill>
               </a:rPr>
-              <a:t>4.10</a:t>
-            </a:r>
-          </a:p>
-        </p:txBody>
-      </p:sp>
-      <p:sp>
-        <p:nvSpPr>
-          <p:cNvPr id="165" name="row:SOCK_OPS / SOCKMAP:name"/>
+              <a:t>4.18</a:t>
+            </a:r>
+          </a:p>
+        </p:txBody>
+      </p:sp>
+      <p:sp>
+        <p:nvSpPr>
+          <p:cNvPr id="198" name="row:Device Memory TCP RX:name"/>
           <p:cNvSpPr txBox="1"/>
           <p:nvPr/>
         </p:nvSpPr>
         <p:spPr>
           <a:xfrm>
-            <a:off x="1325880" y="3176587"/>
+            <a:off x="1325880" y="3814762"/>
             <a:ext cx="1572768" cy="219456"/>
           </a:xfrm>
           <a:prstGeom prst="rect">
@@ -9681,28 +10945,28 @@
                   <a:srgbClr val="1F2937"/>
                 </a:solidFill>
               </a:rPr>
-              <a:t>SOCK_OPS / SOCKMAP</a:t>
+              <a:t>Device Memory TCP RX</a:t>
             </a:r>
           </a:p>
         </p:txBody>
       </p:sp>
       <p:cxnSp>
         <p:nvCxnSpPr>
-          <p:cNvPr id="166" name="row:SOCK_OPS / SOCKMAP:development"/>
+          <p:cNvPr id="199" name="row:Device Memory TCP RX:development"/>
           <p:cNvCxnSpPr/>
           <p:nvPr/>
         </p:nvCxnSpPr>
         <p:spPr>
           <a:xfrm>
-            <a:off x="6822681" y="3286315"/>
-            <a:ext cx="826840" cy="0"/>
+            <a:off x="11405539" y="3924490"/>
+            <a:ext cx="1249072" cy="0"/>
           </a:xfrm>
           <a:prstGeom prst="line">
             <a:avLst/>
           </a:prstGeom>
           <a:ln w="12700">
             <a:solidFill>
-              <a:srgbClr val="EA580C"/>
+              <a:srgbClr val="16A34A"/>
             </a:solidFill>
             <a:prstDash val="dash"/>
           </a:ln>
@@ -9724,13 +10988,13 @@
       </p:cxnSp>
       <p:sp>
         <p:nvSpPr>
-          <p:cNvPr id="167" name="row:SOCK_OPS / SOCKMAP:start"/>
+          <p:cNvPr id="200" name="row:Device Memory TCP RX:start"/>
           <p:cNvSpPr/>
           <p:nvPr/>
         </p:nvSpPr>
         <p:spPr>
           <a:xfrm>
-            <a:off x="6790677" y="3254311"/>
+            <a:off x="11373535" y="3892486"/>
             <a:ext cx="64008" cy="64008"/>
           </a:xfrm>
           <a:prstGeom prst="ellipse">
@@ -9741,7 +11005,7 @@
           </a:solidFill>
           <a:ln w="12700">
             <a:solidFill>
-              <a:srgbClr val="EA580C"/>
+              <a:srgbClr val="16A34A"/>
             </a:solidFill>
           </a:ln>
           <a:effectLst/>
@@ -9766,61 +11030,26 @@
           <a:p/>
         </p:txBody>
       </p:sp>
-      <p:cxnSp>
-        <p:nvCxnSpPr>
-          <p:cNvPr id="168" name="row:SOCK_OPS / SOCKMAP:milestones"/>
-          <p:cNvCxnSpPr/>
-          <p:nvPr/>
-        </p:nvCxnSpPr>
-        <p:spPr>
-          <a:xfrm>
-            <a:off x="7649521" y="3286315"/>
-            <a:ext cx="133076" cy="0"/>
-          </a:xfrm>
-          <a:prstGeom prst="line">
-            <a:avLst/>
-          </a:prstGeom>
-          <a:ln w="19050">
-            <a:solidFill>
-              <a:srgbClr val="EA580C"/>
-            </a:solidFill>
-          </a:ln>
-        </p:spPr>
-        <p:style>
-          <a:lnRef idx="2">
-            <a:schemeClr val="accent1"/>
-          </a:lnRef>
-          <a:fillRef idx="0">
-            <a:schemeClr val="accent1"/>
-          </a:fillRef>
-          <a:effectRef idx="1">
-            <a:schemeClr val="accent1"/>
-          </a:effectRef>
-          <a:fontRef idx="minor">
-            <a:schemeClr val="tx1"/>
-          </a:fontRef>
-        </p:style>
-      </p:cxnSp>
-      <p:sp>
-        <p:nvSpPr>
-          <p:cNvPr id="169" name="row:SOCK_OPS / SOCKMAP:release:4.13"/>
+      <p:sp>
+        <p:nvSpPr>
+          <p:cNvPr id="201" name="row:Device Memory TCP RX:release:6.12"/>
           <p:cNvSpPr/>
           <p:nvPr/>
         </p:nvSpPr>
         <p:spPr>
           <a:xfrm>
-            <a:off x="7606087" y="3242881"/>
+            <a:off x="12611177" y="3881056"/>
             <a:ext cx="86868" cy="86868"/>
           </a:xfrm>
           <a:prstGeom prst="ellipse">
             <a:avLst/>
           </a:prstGeom>
           <a:solidFill>
-            <a:srgbClr val="EA580C"/>
+            <a:srgbClr val="16A34A"/>
           </a:solidFill>
           <a:ln w="12700">
             <a:solidFill>
-              <a:srgbClr val="EA580C"/>
+              <a:srgbClr val="16A34A"/>
             </a:solidFill>
           </a:ln>
           <a:effectLst/>
@@ -9847,57 +11076,13 @@
       </p:sp>
       <p:sp>
         <p:nvSpPr>
-          <p:cNvPr id="170" name="row:SOCK_OPS / SOCKMAP:release:4.14"/>
-          <p:cNvSpPr/>
-          <p:nvPr/>
-        </p:nvSpPr>
-        <p:spPr>
-          <a:xfrm>
-            <a:off x="7739163" y="3242881"/>
-            <a:ext cx="86868" cy="86868"/>
-          </a:xfrm>
-          <a:prstGeom prst="ellipse">
-            <a:avLst/>
-          </a:prstGeom>
-          <a:solidFill>
-            <a:srgbClr val="EA580C"/>
-          </a:solidFill>
-          <a:ln w="12700">
-            <a:solidFill>
-              <a:srgbClr val="EA580C"/>
-            </a:solidFill>
-          </a:ln>
-          <a:effectLst/>
-        </p:spPr>
-        <p:style>
-          <a:lnRef idx="1">
-            <a:schemeClr val="accent1"/>
-          </a:lnRef>
-          <a:fillRef idx="3">
-            <a:schemeClr val="accent1"/>
-          </a:fillRef>
-          <a:effectRef idx="2">
-            <a:schemeClr val="accent1"/>
-          </a:effectRef>
-          <a:fontRef idx="minor">
-            <a:schemeClr val="lt1"/>
-          </a:fontRef>
-        </p:style>
-        <p:txBody>
-          <a:bodyPr rtlCol="0" anchor="ctr"/>
-          <a:lstStyle/>
-          <a:p/>
-        </p:txBody>
-      </p:sp>
-      <p:sp>
-        <p:nvSpPr>
-          <p:cNvPr id="171" name="row:SOCK_OPS / SOCKMAP:label"/>
+          <p:cNvPr id="202" name="row:Device Memory TCP RX:label"/>
           <p:cNvSpPr txBox="1"/>
           <p:nvPr/>
         </p:nvSpPr>
         <p:spPr>
           <a:xfrm>
-            <a:off x="7855749" y="3176587"/>
+            <a:off x="12727763" y="3814762"/>
             <a:ext cx="731520" cy="219456"/>
           </a:xfrm>
           <a:prstGeom prst="rect">
@@ -9918,20 +11103,20 @@
                   <a:srgbClr val="1F2937"/>
                 </a:solidFill>
               </a:rPr>
-              <a:t>4.13 / 4.14</a:t>
-            </a:r>
-          </a:p>
-        </p:txBody>
-      </p:sp>
-      <p:sp>
-        <p:nvSpPr>
-          <p:cNvPr id="172" name="row:BPF struct_ops:name"/>
+              <a:t>6.12</a:t>
+            </a:r>
+          </a:p>
+        </p:txBody>
+      </p:sp>
+      <p:sp>
+        <p:nvSpPr>
+          <p:cNvPr id="203" name="row:Device Memory TCP TX:name"/>
           <p:cNvSpPr txBox="1"/>
           <p:nvPr/>
         </p:nvSpPr>
         <p:spPr>
           <a:xfrm>
-            <a:off x="1325880" y="3285934"/>
+            <a:off x="1325880" y="3924109"/>
             <a:ext cx="1572768" cy="219456"/>
           </a:xfrm>
           <a:prstGeom prst="rect">
@@ -9952,28 +11137,28 @@
                   <a:srgbClr val="1F2937"/>
                 </a:solidFill>
               </a:rPr>
-              <a:t>BPF struct_ops</a:t>
+              <a:t>Device Memory TCP TX</a:t>
             </a:r>
           </a:p>
         </p:txBody>
       </p:sp>
       <p:cxnSp>
         <p:nvCxnSpPr>
-          <p:cNvPr id="173" name="row:BPF struct_ops:development"/>
+          <p:cNvPr id="204" name="row:Device Memory TCP TX:development"/>
           <p:cNvCxnSpPr/>
           <p:nvPr/>
         </p:nvCxnSpPr>
         <p:spPr>
           <a:xfrm>
-            <a:off x="8419738" y="3395662"/>
-            <a:ext cx="1014430" cy="0"/>
+            <a:off x="12030475" y="4033837"/>
+            <a:ext cx="1101785" cy="0"/>
           </a:xfrm>
           <a:prstGeom prst="line">
             <a:avLst/>
           </a:prstGeom>
           <a:ln w="12700">
             <a:solidFill>
-              <a:srgbClr val="EA580C"/>
+              <a:srgbClr val="16A34A"/>
             </a:solidFill>
             <a:prstDash val="dash"/>
           </a:ln>
@@ -9995,13 +11180,13 @@
       </p:cxnSp>
       <p:sp>
         <p:nvSpPr>
-          <p:cNvPr id="174" name="row:BPF struct_ops:start"/>
+          <p:cNvPr id="205" name="row:Device Memory TCP TX:start"/>
           <p:cNvSpPr/>
           <p:nvPr/>
         </p:nvSpPr>
         <p:spPr>
           <a:xfrm>
-            <a:off x="8387734" y="3363658"/>
+            <a:off x="11998471" y="4001833"/>
             <a:ext cx="64008" cy="64008"/>
           </a:xfrm>
           <a:prstGeom prst="ellipse">
@@ -10012,7 +11197,7 @@
           </a:solidFill>
           <a:ln w="12700">
             <a:solidFill>
-              <a:srgbClr val="EA580C"/>
+              <a:srgbClr val="16A34A"/>
             </a:solidFill>
           </a:ln>
           <a:effectLst/>
@@ -10039,24 +11224,24 @@
       </p:sp>
       <p:sp>
         <p:nvSpPr>
-          <p:cNvPr id="175" name="row:BPF struct_ops:release:5.6"/>
+          <p:cNvPr id="206" name="row:Device Memory TCP TX:release:6.16"/>
           <p:cNvSpPr/>
           <p:nvPr/>
         </p:nvSpPr>
         <p:spPr>
           <a:xfrm>
-            <a:off x="9390734" y="3352228"/>
+            <a:off x="13088826" y="3990403"/>
             <a:ext cx="86868" cy="86868"/>
           </a:xfrm>
           <a:prstGeom prst="ellipse">
             <a:avLst/>
           </a:prstGeom>
           <a:solidFill>
-            <a:srgbClr val="EA580C"/>
+            <a:srgbClr val="16A34A"/>
           </a:solidFill>
           <a:ln w="12700">
             <a:solidFill>
-              <a:srgbClr val="EA580C"/>
+              <a:srgbClr val="16A34A"/>
             </a:solidFill>
           </a:ln>
           <a:effectLst/>
@@ -10083,205 +11268,13 @@
       </p:sp>
       <p:sp>
         <p:nvSpPr>
-          <p:cNvPr id="176" name="row:BPF struct_ops:label"/>
+          <p:cNvPr id="207" name="row:Device Memory TCP TX:label"/>
           <p:cNvSpPr txBox="1"/>
           <p:nvPr/>
         </p:nvSpPr>
         <p:spPr>
           <a:xfrm>
-            <a:off x="9507320" y="3285934"/>
-            <a:ext cx="731520" cy="219456"/>
-          </a:xfrm>
-          <a:prstGeom prst="rect">
-            <a:avLst/>
-          </a:prstGeom>
-          <a:noFill/>
-        </p:spPr>
-        <p:txBody>
-          <a:bodyPr wrap="square" anchor="ctr" lIns="0" rIns="0" tIns="0" bIns="0">
-            <a:noAutofit/>
-          </a:bodyPr>
-          <a:lstStyle/>
-          <a:p>
-            <a:pPr algn="l"/>
-            <a:r>
-              <a:rPr sz="800" b="1" i="0">
-                <a:solidFill>
-                  <a:srgbClr val="1F2937"/>
-                </a:solidFill>
-              </a:rPr>
-              <a:t>5.6</a:t>
-            </a:r>
-          </a:p>
-        </p:txBody>
-      </p:sp>
-      <p:sp>
-        <p:nvSpPr>
-          <p:cNvPr id="177" name="row:BPF qdisc:name"/>
-          <p:cNvSpPr txBox="1"/>
-          <p:nvPr/>
-        </p:nvSpPr>
-        <p:spPr>
-          <a:xfrm>
-            <a:off x="1325880" y="3395281"/>
-            <a:ext cx="1572768" cy="219456"/>
-          </a:xfrm>
-          <a:prstGeom prst="rect">
-            <a:avLst/>
-          </a:prstGeom>
-          <a:noFill/>
-        </p:spPr>
-        <p:txBody>
-          <a:bodyPr wrap="square" anchor="ctr" lIns="0" rIns="0" tIns="0" bIns="0">
-            <a:noAutofit/>
-          </a:bodyPr>
-          <a:lstStyle/>
-          <a:p>
-            <a:pPr algn="r"/>
-            <a:r>
-              <a:rPr sz="850" b="0" i="0">
-                <a:solidFill>
-                  <a:srgbClr val="1F2937"/>
-                </a:solidFill>
-              </a:rPr>
-              <a:t>BPF qdisc</a:t>
-            </a:r>
-          </a:p>
-        </p:txBody>
-      </p:sp>
-      <p:cxnSp>
-        <p:nvCxnSpPr>
-          <p:cNvPr id="178" name="row:BPF qdisc:development"/>
-          <p:cNvCxnSpPr/>
-          <p:nvPr/>
-        </p:nvCxnSpPr>
-        <p:spPr>
-          <a:xfrm>
-            <a:off x="12308224" y="3505009"/>
-            <a:ext cx="824036" cy="0"/>
-          </a:xfrm>
-          <a:prstGeom prst="line">
-            <a:avLst/>
-          </a:prstGeom>
-          <a:ln w="12700">
-            <a:solidFill>
-              <a:srgbClr val="EA580C"/>
-            </a:solidFill>
-            <a:prstDash val="dash"/>
-          </a:ln>
-        </p:spPr>
-        <p:style>
-          <a:lnRef idx="2">
-            <a:schemeClr val="accent1"/>
-          </a:lnRef>
-          <a:fillRef idx="0">
-            <a:schemeClr val="accent1"/>
-          </a:fillRef>
-          <a:effectRef idx="1">
-            <a:schemeClr val="accent1"/>
-          </a:effectRef>
-          <a:fontRef idx="minor">
-            <a:schemeClr val="tx1"/>
-          </a:fontRef>
-        </p:style>
-      </p:cxnSp>
-      <p:sp>
-        <p:nvSpPr>
-          <p:cNvPr id="179" name="row:BPF qdisc:start"/>
-          <p:cNvSpPr/>
-          <p:nvPr/>
-        </p:nvSpPr>
-        <p:spPr>
-          <a:xfrm>
-            <a:off x="12276220" y="3473005"/>
-            <a:ext cx="64008" cy="64008"/>
-          </a:xfrm>
-          <a:prstGeom prst="ellipse">
-            <a:avLst/>
-          </a:prstGeom>
-          <a:solidFill>
-            <a:srgbClr val="FFFFFF"/>
-          </a:solidFill>
-          <a:ln w="12700">
-            <a:solidFill>
-              <a:srgbClr val="EA580C"/>
-            </a:solidFill>
-          </a:ln>
-          <a:effectLst/>
-        </p:spPr>
-        <p:style>
-          <a:lnRef idx="1">
-            <a:schemeClr val="accent1"/>
-          </a:lnRef>
-          <a:fillRef idx="3">
-            <a:schemeClr val="accent1"/>
-          </a:fillRef>
-          <a:effectRef idx="2">
-            <a:schemeClr val="accent1"/>
-          </a:effectRef>
-          <a:fontRef idx="minor">
-            <a:schemeClr val="lt1"/>
-          </a:fontRef>
-        </p:style>
-        <p:txBody>
-          <a:bodyPr rtlCol="0" anchor="ctr"/>
-          <a:lstStyle/>
-          <a:p/>
-        </p:txBody>
-      </p:sp>
-      <p:sp>
-        <p:nvSpPr>
-          <p:cNvPr id="180" name="row:BPF qdisc:release:6.16"/>
-          <p:cNvSpPr/>
-          <p:nvPr/>
-        </p:nvSpPr>
-        <p:spPr>
-          <a:xfrm>
-            <a:off x="13088826" y="3461575"/>
-            <a:ext cx="86868" cy="86868"/>
-          </a:xfrm>
-          <a:prstGeom prst="ellipse">
-            <a:avLst/>
-          </a:prstGeom>
-          <a:solidFill>
-            <a:srgbClr val="EA580C"/>
-          </a:solidFill>
-          <a:ln w="12700">
-            <a:solidFill>
-              <a:srgbClr val="EA580C"/>
-            </a:solidFill>
-          </a:ln>
-          <a:effectLst/>
-        </p:spPr>
-        <p:style>
-          <a:lnRef idx="1">
-            <a:schemeClr val="accent1"/>
-          </a:lnRef>
-          <a:fillRef idx="3">
-            <a:schemeClr val="accent1"/>
-          </a:fillRef>
-          <a:effectRef idx="2">
-            <a:schemeClr val="accent1"/>
-          </a:effectRef>
-          <a:fontRef idx="minor">
-            <a:schemeClr val="lt1"/>
-          </a:fontRef>
-        </p:style>
-        <p:txBody>
-          <a:bodyPr rtlCol="0" anchor="ctr"/>
-          <a:lstStyle/>
-          <a:p/>
-        </p:txBody>
-      </p:sp>
-      <p:sp>
-        <p:nvSpPr>
-          <p:cNvPr id="181" name="row:BPF qdisc:label"/>
-          <p:cNvSpPr txBox="1"/>
-          <p:nvPr/>
-        </p:nvSpPr>
-        <p:spPr>
-          <a:xfrm>
-            <a:off x="13205412" y="3395281"/>
+            <a:off x="13205412" y="3924109"/>
             <a:ext cx="731520" cy="219456"/>
           </a:xfrm>
           <a:prstGeom prst="rect">
@@ -10309,13 +11302,13 @@
       </p:sp>
       <p:sp>
         <p:nvSpPr>
-          <p:cNvPr id="182" name="row:SK_LOOKUP:name"/>
+          <p:cNvPr id="208" name="row:io_uring ZCRX:name"/>
           <p:cNvSpPr txBox="1"/>
           <p:nvPr/>
         </p:nvSpPr>
         <p:spPr>
           <a:xfrm>
-            <a:off x="1325880" y="3504628"/>
+            <a:off x="1325880" y="4033456"/>
             <a:ext cx="1572768" cy="219456"/>
           </a:xfrm>
           <a:prstGeom prst="rect">
@@ -10336,28 +11329,28 @@
                   <a:srgbClr val="1F2937"/>
                 </a:solidFill>
               </a:rPr>
-              <a:t>SK_LOOKUP</a:t>
+              <a:t>io_uring ZCRX</a:t>
             </a:r>
           </a:p>
         </p:txBody>
       </p:sp>
       <p:cxnSp>
         <p:nvCxnSpPr>
-          <p:cNvPr id="183" name="row:SK_LOOKUP:development"/>
+          <p:cNvPr id="209" name="row:io_uring ZCRX:development"/>
           <p:cNvCxnSpPr/>
           <p:nvPr/>
         </p:nvCxnSpPr>
         <p:spPr>
           <a:xfrm>
-            <a:off x="8905798" y="3614356"/>
-            <a:ext cx="900983" cy="0"/>
+            <a:off x="11613851" y="4143184"/>
+            <a:ext cx="1398640" cy="0"/>
           </a:xfrm>
           <a:prstGeom prst="line">
             <a:avLst/>
           </a:prstGeom>
           <a:ln w="12700">
             <a:solidFill>
-              <a:srgbClr val="EA580C"/>
+              <a:srgbClr val="16A34A"/>
             </a:solidFill>
             <a:prstDash val="dash"/>
           </a:ln>
@@ -10379,13 +11372,13 @@
       </p:cxnSp>
       <p:sp>
         <p:nvSpPr>
-          <p:cNvPr id="184" name="row:SK_LOOKUP:start"/>
+          <p:cNvPr id="210" name="row:io_uring ZCRX:start"/>
           <p:cNvSpPr/>
           <p:nvPr/>
         </p:nvSpPr>
         <p:spPr>
           <a:xfrm>
-            <a:off x="8873794" y="3582352"/>
+            <a:off x="11581847" y="4111180"/>
             <a:ext cx="64008" cy="64008"/>
           </a:xfrm>
           <a:prstGeom prst="ellipse">
@@ -10396,7 +11389,7 @@
           </a:solidFill>
           <a:ln w="12700">
             <a:solidFill>
-              <a:srgbClr val="EA580C"/>
+              <a:srgbClr val="16A34A"/>
             </a:solidFill>
           </a:ln>
           <a:effectLst/>
@@ -10423,24 +11416,24 @@
       </p:sp>
       <p:sp>
         <p:nvSpPr>
-          <p:cNvPr id="185" name="row:SK_LOOKUP:release:5.9"/>
+          <p:cNvPr id="211" name="row:io_uring ZCRX:release:6.15"/>
           <p:cNvSpPr/>
           <p:nvPr/>
         </p:nvSpPr>
         <p:spPr>
           <a:xfrm>
-            <a:off x="9763347" y="3570922"/>
+            <a:off x="12969057" y="4099750"/>
             <a:ext cx="86868" cy="86868"/>
           </a:xfrm>
           <a:prstGeom prst="ellipse">
             <a:avLst/>
           </a:prstGeom>
           <a:solidFill>
-            <a:srgbClr val="EA580C"/>
+            <a:srgbClr val="16A34A"/>
           </a:solidFill>
           <a:ln w="12700">
             <a:solidFill>
-              <a:srgbClr val="EA580C"/>
+              <a:srgbClr val="16A34A"/>
             </a:solidFill>
           </a:ln>
           <a:effectLst/>
@@ -10467,13 +11460,13 @@
       </p:sp>
       <p:sp>
         <p:nvSpPr>
-          <p:cNvPr id="186" name="row:SK_LOOKUP:label"/>
+          <p:cNvPr id="212" name="row:io_uring ZCRX:label"/>
           <p:cNvSpPr txBox="1"/>
           <p:nvPr/>
         </p:nvSpPr>
         <p:spPr>
           <a:xfrm>
-            <a:off x="9879933" y="3504628"/>
+            <a:off x="13085643" y="4033456"/>
             <a:ext cx="731520" cy="219456"/>
           </a:xfrm>
           <a:prstGeom prst="rect">
@@ -10494,54 +11487,20 @@
                   <a:srgbClr val="1F2937"/>
                 </a:solidFill>
               </a:rPr>
-              <a:t>5.9</a:t>
-            </a:r>
-          </a:p>
-        </p:txBody>
-      </p:sp>
-      <p:sp>
-        <p:nvSpPr>
-          <p:cNvPr id="187" name="band-label:MEMORY"/>
+              <a:t>6.15</a:t>
+            </a:r>
+          </a:p>
+        </p:txBody>
+      </p:sp>
+      <p:sp>
+        <p:nvSpPr>
+          <p:cNvPr id="213" name="row:large RX buffers (mem. providers):name"/>
           <p:cNvSpPr txBox="1"/>
           <p:nvPr/>
         </p:nvSpPr>
         <p:spPr>
           <a:xfrm>
-            <a:off x="384048" y="3742182"/>
-            <a:ext cx="1051560" cy="1020699"/>
-          </a:xfrm>
-          <a:prstGeom prst="rect">
-            <a:avLst/>
-          </a:prstGeom>
-          <a:noFill/>
-        </p:spPr>
-        <p:txBody>
-          <a:bodyPr wrap="square" anchor="ctr" lIns="0" rIns="0" tIns="0" bIns="0">
-            <a:noAutofit/>
-          </a:bodyPr>
-          <a:lstStyle/>
-          <a:p>
-            <a:pPr algn="l"/>
-            <a:r>
-              <a:rPr sz="1000" b="1" i="0">
-                <a:solidFill>
-                  <a:srgbClr val="16A34A"/>
-                </a:solidFill>
-              </a:rPr>
-              <a:t>MEMORY</a:t>
-            </a:r>
-          </a:p>
-        </p:txBody>
-      </p:sp>
-      <p:sp>
-        <p:nvSpPr>
-          <p:cNvPr id="188" name="row:page_pool:name"/>
-          <p:cNvSpPr txBox="1"/>
-          <p:nvPr/>
-        </p:nvSpPr>
-        <p:spPr>
-          <a:xfrm>
-            <a:off x="1325880" y="3705415"/>
+            <a:off x="1325880" y="4142803"/>
             <a:ext cx="1572768" cy="219456"/>
           </a:xfrm>
           <a:prstGeom prst="rect">
@@ -10562,21 +11521,21 @@
                   <a:srgbClr val="1F2937"/>
                 </a:solidFill>
               </a:rPr>
-              <a:t>page_pool</a:t>
+              <a:t>large RX buffers (mem. providers)</a:t>
             </a:r>
           </a:p>
         </p:txBody>
       </p:sp>
       <p:cxnSp>
         <p:nvCxnSpPr>
-          <p:cNvPr id="189" name="row:page_pool:development"/>
+          <p:cNvPr id="214" name="row:large RX buffers (mem. providers):development"/>
           <p:cNvCxnSpPr/>
           <p:nvPr/>
         </p:nvCxnSpPr>
         <p:spPr>
           <a:xfrm>
-            <a:off x="6614369" y="3815143"/>
-            <a:ext cx="1687701" cy="0"/>
+            <a:off x="12724847" y="4252531"/>
+            <a:ext cx="900270" cy="0"/>
           </a:xfrm>
           <a:prstGeom prst="line">
             <a:avLst/>
@@ -10605,13 +11564,13 @@
       </p:cxnSp>
       <p:sp>
         <p:nvSpPr>
-          <p:cNvPr id="190" name="row:page_pool:start"/>
+          <p:cNvPr id="215" name="row:large RX buffers (mem. providers):start"/>
           <p:cNvSpPr/>
           <p:nvPr/>
         </p:nvSpPr>
         <p:spPr>
           <a:xfrm>
-            <a:off x="6582365" y="3783139"/>
+            <a:off x="12692843" y="4220527"/>
             <a:ext cx="64008" cy="64008"/>
           </a:xfrm>
           <a:prstGeom prst="ellipse">
@@ -10649,13 +11608,13 @@
       </p:sp>
       <p:sp>
         <p:nvSpPr>
-          <p:cNvPr id="191" name="row:page_pool:release:4.18"/>
+          <p:cNvPr id="216" name="row:large RX buffers (mem. providers):release:7.0"/>
           <p:cNvSpPr/>
           <p:nvPr/>
         </p:nvSpPr>
         <p:spPr>
           <a:xfrm>
-            <a:off x="8258636" y="3771709"/>
+            <a:off x="13581683" y="4209097"/>
             <a:ext cx="86868" cy="86868"/>
           </a:xfrm>
           <a:prstGeom prst="ellipse">
@@ -10693,13 +11652,397 @@
       </p:sp>
       <p:sp>
         <p:nvSpPr>
-          <p:cNvPr id="192" name="row:page_pool:label"/>
+          <p:cNvPr id="217" name="row:large RX buffers (mem. providers):label"/>
           <p:cNvSpPr txBox="1"/>
           <p:nvPr/>
         </p:nvSpPr>
         <p:spPr>
           <a:xfrm>
-            <a:off x="8375222" y="3705415"/>
+            <a:off x="13698269" y="4142803"/>
+            <a:ext cx="731520" cy="219456"/>
+          </a:xfrm>
+          <a:prstGeom prst="rect">
+            <a:avLst/>
+          </a:prstGeom>
+          <a:noFill/>
+        </p:spPr>
+        <p:txBody>
+          <a:bodyPr wrap="square" anchor="ctr" lIns="0" rIns="0" tIns="0" bIns="0">
+            <a:noAutofit/>
+          </a:bodyPr>
+          <a:lstStyle/>
+          <a:p>
+            <a:pPr algn="l"/>
+            <a:r>
+              <a:rPr sz="800" b="1" i="0">
+                <a:solidFill>
+                  <a:srgbClr val="1F2937"/>
+                </a:solidFill>
+              </a:rPr>
+              <a:t>7.0</a:t>
+            </a:r>
+          </a:p>
+        </p:txBody>
+      </p:sp>
+      <p:sp>
+        <p:nvSpPr>
+          <p:cNvPr id="218" name="row:XDP multi-buffer:name"/>
+          <p:cNvSpPr txBox="1"/>
+          <p:nvPr/>
+        </p:nvSpPr>
+        <p:spPr>
+          <a:xfrm>
+            <a:off x="1325880" y="4252150"/>
+            <a:ext cx="1572768" cy="219456"/>
+          </a:xfrm>
+          <a:prstGeom prst="rect">
+            <a:avLst/>
+          </a:prstGeom>
+          <a:noFill/>
+        </p:spPr>
+        <p:txBody>
+          <a:bodyPr wrap="square" anchor="ctr" lIns="0" rIns="0" tIns="0" bIns="0">
+            <a:noAutofit/>
+          </a:bodyPr>
+          <a:lstStyle/>
+          <a:p>
+            <a:pPr algn="r"/>
+            <a:r>
+              <a:rPr sz="850" b="0" i="0">
+                <a:solidFill>
+                  <a:srgbClr val="1F2937"/>
+                </a:solidFill>
+              </a:rPr>
+              <a:t>XDP multi-buffer</a:t>
+            </a:r>
+          </a:p>
+        </p:txBody>
+      </p:sp>
+      <p:cxnSp>
+        <p:nvCxnSpPr>
+          <p:cNvPr id="219" name="row:XDP multi-buffer:development"/>
+          <p:cNvCxnSpPr/>
+          <p:nvPr/>
+        </p:nvCxnSpPr>
+        <p:spPr>
+          <a:xfrm>
+            <a:off x="9947357" y="4361878"/>
+            <a:ext cx="976313" cy="0"/>
+          </a:xfrm>
+          <a:prstGeom prst="line">
+            <a:avLst/>
+          </a:prstGeom>
+          <a:ln w="12700">
+            <a:solidFill>
+              <a:srgbClr val="16A34A"/>
+            </a:solidFill>
+            <a:prstDash val="dash"/>
+          </a:ln>
+        </p:spPr>
+        <p:style>
+          <a:lnRef idx="2">
+            <a:schemeClr val="accent1"/>
+          </a:lnRef>
+          <a:fillRef idx="0">
+            <a:schemeClr val="accent1"/>
+          </a:fillRef>
+          <a:effectRef idx="1">
+            <a:schemeClr val="accent1"/>
+          </a:effectRef>
+          <a:fontRef idx="minor">
+            <a:schemeClr val="tx1"/>
+          </a:fontRef>
+        </p:style>
+      </p:cxnSp>
+      <p:sp>
+        <p:nvSpPr>
+          <p:cNvPr id="220" name="row:XDP multi-buffer:start"/>
+          <p:cNvSpPr/>
+          <p:nvPr/>
+        </p:nvSpPr>
+        <p:spPr>
+          <a:xfrm>
+            <a:off x="9915353" y="4329874"/>
+            <a:ext cx="64008" cy="64008"/>
+          </a:xfrm>
+          <a:prstGeom prst="ellipse">
+            <a:avLst/>
+          </a:prstGeom>
+          <a:solidFill>
+            <a:srgbClr val="FFFFFF"/>
+          </a:solidFill>
+          <a:ln w="12700">
+            <a:solidFill>
+              <a:srgbClr val="16A34A"/>
+            </a:solidFill>
+          </a:ln>
+          <a:effectLst/>
+        </p:spPr>
+        <p:style>
+          <a:lnRef idx="1">
+            <a:schemeClr val="accent1"/>
+          </a:lnRef>
+          <a:fillRef idx="3">
+            <a:schemeClr val="accent1"/>
+          </a:fillRef>
+          <a:effectRef idx="2">
+            <a:schemeClr val="accent1"/>
+          </a:effectRef>
+          <a:fontRef idx="minor">
+            <a:schemeClr val="lt1"/>
+          </a:fontRef>
+        </p:style>
+        <p:txBody>
+          <a:bodyPr rtlCol="0" anchor="ctr"/>
+          <a:lstStyle/>
+          <a:p/>
+        </p:txBody>
+      </p:sp>
+      <p:sp>
+        <p:nvSpPr>
+          <p:cNvPr id="221" name="row:XDP multi-buffer:release:5.18"/>
+          <p:cNvSpPr/>
+          <p:nvPr/>
+        </p:nvSpPr>
+        <p:spPr>
+          <a:xfrm>
+            <a:off x="10880236" y="4318444"/>
+            <a:ext cx="86868" cy="86868"/>
+          </a:xfrm>
+          <a:prstGeom prst="ellipse">
+            <a:avLst/>
+          </a:prstGeom>
+          <a:solidFill>
+            <a:srgbClr val="16A34A"/>
+          </a:solidFill>
+          <a:ln w="12700">
+            <a:solidFill>
+              <a:srgbClr val="16A34A"/>
+            </a:solidFill>
+          </a:ln>
+          <a:effectLst/>
+        </p:spPr>
+        <p:style>
+          <a:lnRef idx="1">
+            <a:schemeClr val="accent1"/>
+          </a:lnRef>
+          <a:fillRef idx="3">
+            <a:schemeClr val="accent1"/>
+          </a:fillRef>
+          <a:effectRef idx="2">
+            <a:schemeClr val="accent1"/>
+          </a:effectRef>
+          <a:fontRef idx="minor">
+            <a:schemeClr val="lt1"/>
+          </a:fontRef>
+        </p:style>
+        <p:txBody>
+          <a:bodyPr rtlCol="0" anchor="ctr"/>
+          <a:lstStyle/>
+          <a:p/>
+        </p:txBody>
+      </p:sp>
+      <p:sp>
+        <p:nvSpPr>
+          <p:cNvPr id="222" name="row:XDP multi-buffer:label"/>
+          <p:cNvSpPr txBox="1"/>
+          <p:nvPr/>
+        </p:nvSpPr>
+        <p:spPr>
+          <a:xfrm>
+            <a:off x="10996822" y="4252150"/>
+            <a:ext cx="731520" cy="219456"/>
+          </a:xfrm>
+          <a:prstGeom prst="rect">
+            <a:avLst/>
+          </a:prstGeom>
+          <a:noFill/>
+        </p:spPr>
+        <p:txBody>
+          <a:bodyPr wrap="square" anchor="ctr" lIns="0" rIns="0" tIns="0" bIns="0">
+            <a:noAutofit/>
+          </a:bodyPr>
+          <a:lstStyle/>
+          <a:p>
+            <a:pPr algn="l"/>
+            <a:r>
+              <a:rPr sz="800" b="1" i="0">
+                <a:solidFill>
+                  <a:srgbClr val="1F2937"/>
+                </a:solidFill>
+              </a:rPr>
+              <a:t>5.18</a:t>
+            </a:r>
+          </a:p>
+        </p:txBody>
+      </p:sp>
+      <p:sp>
+        <p:nvSpPr>
+          <p:cNvPr id="223" name="row:AF_XDP:name"/>
+          <p:cNvSpPr txBox="1"/>
+          <p:nvPr/>
+        </p:nvSpPr>
+        <p:spPr>
+          <a:xfrm>
+            <a:off x="1325880" y="4361497"/>
+            <a:ext cx="1572768" cy="219456"/>
+          </a:xfrm>
+          <a:prstGeom prst="rect">
+            <a:avLst/>
+          </a:prstGeom>
+          <a:noFill/>
+        </p:spPr>
+        <p:txBody>
+          <a:bodyPr wrap="square" anchor="ctr" lIns="0" rIns="0" tIns="0" bIns="0">
+            <a:noAutofit/>
+          </a:bodyPr>
+          <a:lstStyle/>
+          <a:p>
+            <a:pPr algn="r"/>
+            <a:r>
+              <a:rPr sz="850" b="0" i="0">
+                <a:solidFill>
+                  <a:srgbClr val="1F2937"/>
+                </a:solidFill>
+              </a:rPr>
+              <a:t>AF_XDP</a:t>
+            </a:r>
+          </a:p>
+        </p:txBody>
+      </p:sp>
+      <p:cxnSp>
+        <p:nvCxnSpPr>
+          <p:cNvPr id="224" name="row:AF_XDP:development"/>
+          <p:cNvCxnSpPr/>
+          <p:nvPr/>
+        </p:nvCxnSpPr>
+        <p:spPr>
+          <a:xfrm>
+            <a:off x="7169867" y="4471225"/>
+            <a:ext cx="1132203" cy="0"/>
+          </a:xfrm>
+          <a:prstGeom prst="line">
+            <a:avLst/>
+          </a:prstGeom>
+          <a:ln w="12700">
+            <a:solidFill>
+              <a:srgbClr val="16A34A"/>
+            </a:solidFill>
+            <a:prstDash val="dash"/>
+          </a:ln>
+        </p:spPr>
+        <p:style>
+          <a:lnRef idx="2">
+            <a:schemeClr val="accent1"/>
+          </a:lnRef>
+          <a:fillRef idx="0">
+            <a:schemeClr val="accent1"/>
+          </a:fillRef>
+          <a:effectRef idx="1">
+            <a:schemeClr val="accent1"/>
+          </a:effectRef>
+          <a:fontRef idx="minor">
+            <a:schemeClr val="tx1"/>
+          </a:fontRef>
+        </p:style>
+      </p:cxnSp>
+      <p:sp>
+        <p:nvSpPr>
+          <p:cNvPr id="225" name="row:AF_XDP:start"/>
+          <p:cNvSpPr/>
+          <p:nvPr/>
+        </p:nvSpPr>
+        <p:spPr>
+          <a:xfrm>
+            <a:off x="7137863" y="4439221"/>
+            <a:ext cx="64008" cy="64008"/>
+          </a:xfrm>
+          <a:prstGeom prst="ellipse">
+            <a:avLst/>
+          </a:prstGeom>
+          <a:solidFill>
+            <a:srgbClr val="FFFFFF"/>
+          </a:solidFill>
+          <a:ln w="12700">
+            <a:solidFill>
+              <a:srgbClr val="16A34A"/>
+            </a:solidFill>
+          </a:ln>
+          <a:effectLst/>
+        </p:spPr>
+        <p:style>
+          <a:lnRef idx="1">
+            <a:schemeClr val="accent1"/>
+          </a:lnRef>
+          <a:fillRef idx="3">
+            <a:schemeClr val="accent1"/>
+          </a:fillRef>
+          <a:effectRef idx="2">
+            <a:schemeClr val="accent1"/>
+          </a:effectRef>
+          <a:fontRef idx="minor">
+            <a:schemeClr val="lt1"/>
+          </a:fontRef>
+        </p:style>
+        <p:txBody>
+          <a:bodyPr rtlCol="0" anchor="ctr"/>
+          <a:lstStyle/>
+          <a:p/>
+        </p:txBody>
+      </p:sp>
+      <p:sp>
+        <p:nvSpPr>
+          <p:cNvPr id="226" name="row:AF_XDP:release:4.18"/>
+          <p:cNvSpPr/>
+          <p:nvPr/>
+        </p:nvSpPr>
+        <p:spPr>
+          <a:xfrm>
+            <a:off x="8258636" y="4427791"/>
+            <a:ext cx="86868" cy="86868"/>
+          </a:xfrm>
+          <a:prstGeom prst="ellipse">
+            <a:avLst/>
+          </a:prstGeom>
+          <a:solidFill>
+            <a:srgbClr val="16A34A"/>
+          </a:solidFill>
+          <a:ln w="12700">
+            <a:solidFill>
+              <a:srgbClr val="16A34A"/>
+            </a:solidFill>
+          </a:ln>
+          <a:effectLst/>
+        </p:spPr>
+        <p:style>
+          <a:lnRef idx="1">
+            <a:schemeClr val="accent1"/>
+          </a:lnRef>
+          <a:fillRef idx="3">
+            <a:schemeClr val="accent1"/>
+          </a:fillRef>
+          <a:effectRef idx="2">
+            <a:schemeClr val="accent1"/>
+          </a:effectRef>
+          <a:fontRef idx="minor">
+            <a:schemeClr val="lt1"/>
+          </a:fontRef>
+        </p:style>
+        <p:txBody>
+          <a:bodyPr rtlCol="0" anchor="ctr"/>
+          <a:lstStyle/>
+          <a:p/>
+        </p:txBody>
+      </p:sp>
+      <p:sp>
+        <p:nvSpPr>
+          <p:cNvPr id="227" name="row:AF_XDP:label"/>
+          <p:cNvSpPr txBox="1"/>
+          <p:nvPr/>
+        </p:nvSpPr>
+        <p:spPr>
+          <a:xfrm>
+            <a:off x="8375222" y="4361497"/>
             <a:ext cx="731520" cy="219456"/>
           </a:xfrm>
           <a:prstGeom prst="rect">
@@ -10727,1159 +12070,7 @@
       </p:sp>
       <p:sp>
         <p:nvSpPr>
-          <p:cNvPr id="193" name="row:Device Memory TCP RX:name"/>
-          <p:cNvSpPr txBox="1"/>
-          <p:nvPr/>
-        </p:nvSpPr>
-        <p:spPr>
-          <a:xfrm>
-            <a:off x="1325880" y="3814762"/>
-            <a:ext cx="1572768" cy="219456"/>
-          </a:xfrm>
-          <a:prstGeom prst="rect">
-            <a:avLst/>
-          </a:prstGeom>
-          <a:noFill/>
-        </p:spPr>
-        <p:txBody>
-          <a:bodyPr wrap="square" anchor="ctr" lIns="0" rIns="0" tIns="0" bIns="0">
-            <a:noAutofit/>
-          </a:bodyPr>
-          <a:lstStyle/>
-          <a:p>
-            <a:pPr algn="r"/>
-            <a:r>
-              <a:rPr sz="850" b="0" i="0">
-                <a:solidFill>
-                  <a:srgbClr val="1F2937"/>
-                </a:solidFill>
-              </a:rPr>
-              <a:t>Device Memory TCP RX</a:t>
-            </a:r>
-          </a:p>
-        </p:txBody>
-      </p:sp>
-      <p:cxnSp>
-        <p:nvCxnSpPr>
-          <p:cNvPr id="194" name="row:Device Memory TCP RX:development"/>
-          <p:cNvCxnSpPr/>
-          <p:nvPr/>
-        </p:nvCxnSpPr>
-        <p:spPr>
-          <a:xfrm>
-            <a:off x="11405539" y="3924490"/>
-            <a:ext cx="1249072" cy="0"/>
-          </a:xfrm>
-          <a:prstGeom prst="line">
-            <a:avLst/>
-          </a:prstGeom>
-          <a:ln w="12700">
-            <a:solidFill>
-              <a:srgbClr val="16A34A"/>
-            </a:solidFill>
-            <a:prstDash val="dash"/>
-          </a:ln>
-        </p:spPr>
-        <p:style>
-          <a:lnRef idx="2">
-            <a:schemeClr val="accent1"/>
-          </a:lnRef>
-          <a:fillRef idx="0">
-            <a:schemeClr val="accent1"/>
-          </a:fillRef>
-          <a:effectRef idx="1">
-            <a:schemeClr val="accent1"/>
-          </a:effectRef>
-          <a:fontRef idx="minor">
-            <a:schemeClr val="tx1"/>
-          </a:fontRef>
-        </p:style>
-      </p:cxnSp>
-      <p:sp>
-        <p:nvSpPr>
-          <p:cNvPr id="195" name="row:Device Memory TCP RX:start"/>
-          <p:cNvSpPr/>
-          <p:nvPr/>
-        </p:nvSpPr>
-        <p:spPr>
-          <a:xfrm>
-            <a:off x="11373535" y="3892486"/>
-            <a:ext cx="64008" cy="64008"/>
-          </a:xfrm>
-          <a:prstGeom prst="ellipse">
-            <a:avLst/>
-          </a:prstGeom>
-          <a:solidFill>
-            <a:srgbClr val="FFFFFF"/>
-          </a:solidFill>
-          <a:ln w="12700">
-            <a:solidFill>
-              <a:srgbClr val="16A34A"/>
-            </a:solidFill>
-          </a:ln>
-          <a:effectLst/>
-        </p:spPr>
-        <p:style>
-          <a:lnRef idx="1">
-            <a:schemeClr val="accent1"/>
-          </a:lnRef>
-          <a:fillRef idx="3">
-            <a:schemeClr val="accent1"/>
-          </a:fillRef>
-          <a:effectRef idx="2">
-            <a:schemeClr val="accent1"/>
-          </a:effectRef>
-          <a:fontRef idx="minor">
-            <a:schemeClr val="lt1"/>
-          </a:fontRef>
-        </p:style>
-        <p:txBody>
-          <a:bodyPr rtlCol="0" anchor="ctr"/>
-          <a:lstStyle/>
-          <a:p/>
-        </p:txBody>
-      </p:sp>
-      <p:sp>
-        <p:nvSpPr>
-          <p:cNvPr id="196" name="row:Device Memory TCP RX:release:6.12"/>
-          <p:cNvSpPr/>
-          <p:nvPr/>
-        </p:nvSpPr>
-        <p:spPr>
-          <a:xfrm>
-            <a:off x="12611177" y="3881056"/>
-            <a:ext cx="86868" cy="86868"/>
-          </a:xfrm>
-          <a:prstGeom prst="ellipse">
-            <a:avLst/>
-          </a:prstGeom>
-          <a:solidFill>
-            <a:srgbClr val="16A34A"/>
-          </a:solidFill>
-          <a:ln w="12700">
-            <a:solidFill>
-              <a:srgbClr val="16A34A"/>
-            </a:solidFill>
-          </a:ln>
-          <a:effectLst/>
-        </p:spPr>
-        <p:style>
-          <a:lnRef idx="1">
-            <a:schemeClr val="accent1"/>
-          </a:lnRef>
-          <a:fillRef idx="3">
-            <a:schemeClr val="accent1"/>
-          </a:fillRef>
-          <a:effectRef idx="2">
-            <a:schemeClr val="accent1"/>
-          </a:effectRef>
-          <a:fontRef idx="minor">
-            <a:schemeClr val="lt1"/>
-          </a:fontRef>
-        </p:style>
-        <p:txBody>
-          <a:bodyPr rtlCol="0" anchor="ctr"/>
-          <a:lstStyle/>
-          <a:p/>
-        </p:txBody>
-      </p:sp>
-      <p:sp>
-        <p:nvSpPr>
-          <p:cNvPr id="197" name="row:Device Memory TCP RX:label"/>
-          <p:cNvSpPr txBox="1"/>
-          <p:nvPr/>
-        </p:nvSpPr>
-        <p:spPr>
-          <a:xfrm>
-            <a:off x="12727763" y="3814762"/>
-            <a:ext cx="731520" cy="219456"/>
-          </a:xfrm>
-          <a:prstGeom prst="rect">
-            <a:avLst/>
-          </a:prstGeom>
-          <a:noFill/>
-        </p:spPr>
-        <p:txBody>
-          <a:bodyPr wrap="square" anchor="ctr" lIns="0" rIns="0" tIns="0" bIns="0">
-            <a:noAutofit/>
-          </a:bodyPr>
-          <a:lstStyle/>
-          <a:p>
-            <a:pPr algn="l"/>
-            <a:r>
-              <a:rPr sz="800" b="1" i="0">
-                <a:solidFill>
-                  <a:srgbClr val="1F2937"/>
-                </a:solidFill>
-              </a:rPr>
-              <a:t>6.12</a:t>
-            </a:r>
-          </a:p>
-        </p:txBody>
-      </p:sp>
-      <p:sp>
-        <p:nvSpPr>
-          <p:cNvPr id="198" name="row:Device Memory TCP TX:name"/>
-          <p:cNvSpPr txBox="1"/>
-          <p:nvPr/>
-        </p:nvSpPr>
-        <p:spPr>
-          <a:xfrm>
-            <a:off x="1325880" y="3924109"/>
-            <a:ext cx="1572768" cy="219456"/>
-          </a:xfrm>
-          <a:prstGeom prst="rect">
-            <a:avLst/>
-          </a:prstGeom>
-          <a:noFill/>
-        </p:spPr>
-        <p:txBody>
-          <a:bodyPr wrap="square" anchor="ctr" lIns="0" rIns="0" tIns="0" bIns="0">
-            <a:noAutofit/>
-          </a:bodyPr>
-          <a:lstStyle/>
-          <a:p>
-            <a:pPr algn="r"/>
-            <a:r>
-              <a:rPr sz="850" b="0" i="0">
-                <a:solidFill>
-                  <a:srgbClr val="1F2937"/>
-                </a:solidFill>
-              </a:rPr>
-              <a:t>Device Memory TCP TX</a:t>
-            </a:r>
-          </a:p>
-        </p:txBody>
-      </p:sp>
-      <p:cxnSp>
-        <p:nvCxnSpPr>
-          <p:cNvPr id="199" name="row:Device Memory TCP TX:development"/>
-          <p:cNvCxnSpPr/>
-          <p:nvPr/>
-        </p:nvCxnSpPr>
-        <p:spPr>
-          <a:xfrm>
-            <a:off x="12030475" y="4033837"/>
-            <a:ext cx="1101785" cy="0"/>
-          </a:xfrm>
-          <a:prstGeom prst="line">
-            <a:avLst/>
-          </a:prstGeom>
-          <a:ln w="12700">
-            <a:solidFill>
-              <a:srgbClr val="16A34A"/>
-            </a:solidFill>
-            <a:prstDash val="dash"/>
-          </a:ln>
-        </p:spPr>
-        <p:style>
-          <a:lnRef idx="2">
-            <a:schemeClr val="accent1"/>
-          </a:lnRef>
-          <a:fillRef idx="0">
-            <a:schemeClr val="accent1"/>
-          </a:fillRef>
-          <a:effectRef idx="1">
-            <a:schemeClr val="accent1"/>
-          </a:effectRef>
-          <a:fontRef idx="minor">
-            <a:schemeClr val="tx1"/>
-          </a:fontRef>
-        </p:style>
-      </p:cxnSp>
-      <p:sp>
-        <p:nvSpPr>
-          <p:cNvPr id="200" name="row:Device Memory TCP TX:start"/>
-          <p:cNvSpPr/>
-          <p:nvPr/>
-        </p:nvSpPr>
-        <p:spPr>
-          <a:xfrm>
-            <a:off x="11998471" y="4001833"/>
-            <a:ext cx="64008" cy="64008"/>
-          </a:xfrm>
-          <a:prstGeom prst="ellipse">
-            <a:avLst/>
-          </a:prstGeom>
-          <a:solidFill>
-            <a:srgbClr val="FFFFFF"/>
-          </a:solidFill>
-          <a:ln w="12700">
-            <a:solidFill>
-              <a:srgbClr val="16A34A"/>
-            </a:solidFill>
-          </a:ln>
-          <a:effectLst/>
-        </p:spPr>
-        <p:style>
-          <a:lnRef idx="1">
-            <a:schemeClr val="accent1"/>
-          </a:lnRef>
-          <a:fillRef idx="3">
-            <a:schemeClr val="accent1"/>
-          </a:fillRef>
-          <a:effectRef idx="2">
-            <a:schemeClr val="accent1"/>
-          </a:effectRef>
-          <a:fontRef idx="minor">
-            <a:schemeClr val="lt1"/>
-          </a:fontRef>
-        </p:style>
-        <p:txBody>
-          <a:bodyPr rtlCol="0" anchor="ctr"/>
-          <a:lstStyle/>
-          <a:p/>
-        </p:txBody>
-      </p:sp>
-      <p:sp>
-        <p:nvSpPr>
-          <p:cNvPr id="201" name="row:Device Memory TCP TX:release:6.16"/>
-          <p:cNvSpPr/>
-          <p:nvPr/>
-        </p:nvSpPr>
-        <p:spPr>
-          <a:xfrm>
-            <a:off x="13088826" y="3990403"/>
-            <a:ext cx="86868" cy="86868"/>
-          </a:xfrm>
-          <a:prstGeom prst="ellipse">
-            <a:avLst/>
-          </a:prstGeom>
-          <a:solidFill>
-            <a:srgbClr val="16A34A"/>
-          </a:solidFill>
-          <a:ln w="12700">
-            <a:solidFill>
-              <a:srgbClr val="16A34A"/>
-            </a:solidFill>
-          </a:ln>
-          <a:effectLst/>
-        </p:spPr>
-        <p:style>
-          <a:lnRef idx="1">
-            <a:schemeClr val="accent1"/>
-          </a:lnRef>
-          <a:fillRef idx="3">
-            <a:schemeClr val="accent1"/>
-          </a:fillRef>
-          <a:effectRef idx="2">
-            <a:schemeClr val="accent1"/>
-          </a:effectRef>
-          <a:fontRef idx="minor">
-            <a:schemeClr val="lt1"/>
-          </a:fontRef>
-        </p:style>
-        <p:txBody>
-          <a:bodyPr rtlCol="0" anchor="ctr"/>
-          <a:lstStyle/>
-          <a:p/>
-        </p:txBody>
-      </p:sp>
-      <p:sp>
-        <p:nvSpPr>
-          <p:cNvPr id="202" name="row:Device Memory TCP TX:label"/>
-          <p:cNvSpPr txBox="1"/>
-          <p:nvPr/>
-        </p:nvSpPr>
-        <p:spPr>
-          <a:xfrm>
-            <a:off x="13205412" y="3924109"/>
-            <a:ext cx="731520" cy="219456"/>
-          </a:xfrm>
-          <a:prstGeom prst="rect">
-            <a:avLst/>
-          </a:prstGeom>
-          <a:noFill/>
-        </p:spPr>
-        <p:txBody>
-          <a:bodyPr wrap="square" anchor="ctr" lIns="0" rIns="0" tIns="0" bIns="0">
-            <a:noAutofit/>
-          </a:bodyPr>
-          <a:lstStyle/>
-          <a:p>
-            <a:pPr algn="l"/>
-            <a:r>
-              <a:rPr sz="800" b="1" i="0">
-                <a:solidFill>
-                  <a:srgbClr val="1F2937"/>
-                </a:solidFill>
-              </a:rPr>
-              <a:t>6.16</a:t>
-            </a:r>
-          </a:p>
-        </p:txBody>
-      </p:sp>
-      <p:sp>
-        <p:nvSpPr>
-          <p:cNvPr id="203" name="row:io_uring ZCRX:name"/>
-          <p:cNvSpPr txBox="1"/>
-          <p:nvPr/>
-        </p:nvSpPr>
-        <p:spPr>
-          <a:xfrm>
-            <a:off x="1325880" y="4033456"/>
-            <a:ext cx="1572768" cy="219456"/>
-          </a:xfrm>
-          <a:prstGeom prst="rect">
-            <a:avLst/>
-          </a:prstGeom>
-          <a:noFill/>
-        </p:spPr>
-        <p:txBody>
-          <a:bodyPr wrap="square" anchor="ctr" lIns="0" rIns="0" tIns="0" bIns="0">
-            <a:noAutofit/>
-          </a:bodyPr>
-          <a:lstStyle/>
-          <a:p>
-            <a:pPr algn="r"/>
-            <a:r>
-              <a:rPr sz="850" b="0" i="0">
-                <a:solidFill>
-                  <a:srgbClr val="1F2937"/>
-                </a:solidFill>
-              </a:rPr>
-              <a:t>io_uring ZCRX</a:t>
-            </a:r>
-          </a:p>
-        </p:txBody>
-      </p:sp>
-      <p:cxnSp>
-        <p:nvCxnSpPr>
-          <p:cNvPr id="204" name="row:io_uring ZCRX:development"/>
-          <p:cNvCxnSpPr/>
-          <p:nvPr/>
-        </p:nvCxnSpPr>
-        <p:spPr>
-          <a:xfrm>
-            <a:off x="11613851" y="4143184"/>
-            <a:ext cx="1398640" cy="0"/>
-          </a:xfrm>
-          <a:prstGeom prst="line">
-            <a:avLst/>
-          </a:prstGeom>
-          <a:ln w="12700">
-            <a:solidFill>
-              <a:srgbClr val="16A34A"/>
-            </a:solidFill>
-            <a:prstDash val="dash"/>
-          </a:ln>
-        </p:spPr>
-        <p:style>
-          <a:lnRef idx="2">
-            <a:schemeClr val="accent1"/>
-          </a:lnRef>
-          <a:fillRef idx="0">
-            <a:schemeClr val="accent1"/>
-          </a:fillRef>
-          <a:effectRef idx="1">
-            <a:schemeClr val="accent1"/>
-          </a:effectRef>
-          <a:fontRef idx="minor">
-            <a:schemeClr val="tx1"/>
-          </a:fontRef>
-        </p:style>
-      </p:cxnSp>
-      <p:sp>
-        <p:nvSpPr>
-          <p:cNvPr id="205" name="row:io_uring ZCRX:start"/>
-          <p:cNvSpPr/>
-          <p:nvPr/>
-        </p:nvSpPr>
-        <p:spPr>
-          <a:xfrm>
-            <a:off x="11581847" y="4111180"/>
-            <a:ext cx="64008" cy="64008"/>
-          </a:xfrm>
-          <a:prstGeom prst="ellipse">
-            <a:avLst/>
-          </a:prstGeom>
-          <a:solidFill>
-            <a:srgbClr val="FFFFFF"/>
-          </a:solidFill>
-          <a:ln w="12700">
-            <a:solidFill>
-              <a:srgbClr val="16A34A"/>
-            </a:solidFill>
-          </a:ln>
-          <a:effectLst/>
-        </p:spPr>
-        <p:style>
-          <a:lnRef idx="1">
-            <a:schemeClr val="accent1"/>
-          </a:lnRef>
-          <a:fillRef idx="3">
-            <a:schemeClr val="accent1"/>
-          </a:fillRef>
-          <a:effectRef idx="2">
-            <a:schemeClr val="accent1"/>
-          </a:effectRef>
-          <a:fontRef idx="minor">
-            <a:schemeClr val="lt1"/>
-          </a:fontRef>
-        </p:style>
-        <p:txBody>
-          <a:bodyPr rtlCol="0" anchor="ctr"/>
-          <a:lstStyle/>
-          <a:p/>
-        </p:txBody>
-      </p:sp>
-      <p:sp>
-        <p:nvSpPr>
-          <p:cNvPr id="206" name="row:io_uring ZCRX:release:6.15"/>
-          <p:cNvSpPr/>
-          <p:nvPr/>
-        </p:nvSpPr>
-        <p:spPr>
-          <a:xfrm>
-            <a:off x="12969057" y="4099750"/>
-            <a:ext cx="86868" cy="86868"/>
-          </a:xfrm>
-          <a:prstGeom prst="ellipse">
-            <a:avLst/>
-          </a:prstGeom>
-          <a:solidFill>
-            <a:srgbClr val="16A34A"/>
-          </a:solidFill>
-          <a:ln w="12700">
-            <a:solidFill>
-              <a:srgbClr val="16A34A"/>
-            </a:solidFill>
-          </a:ln>
-          <a:effectLst/>
-        </p:spPr>
-        <p:style>
-          <a:lnRef idx="1">
-            <a:schemeClr val="accent1"/>
-          </a:lnRef>
-          <a:fillRef idx="3">
-            <a:schemeClr val="accent1"/>
-          </a:fillRef>
-          <a:effectRef idx="2">
-            <a:schemeClr val="accent1"/>
-          </a:effectRef>
-          <a:fontRef idx="minor">
-            <a:schemeClr val="lt1"/>
-          </a:fontRef>
-        </p:style>
-        <p:txBody>
-          <a:bodyPr rtlCol="0" anchor="ctr"/>
-          <a:lstStyle/>
-          <a:p/>
-        </p:txBody>
-      </p:sp>
-      <p:sp>
-        <p:nvSpPr>
-          <p:cNvPr id="207" name="row:io_uring ZCRX:label"/>
-          <p:cNvSpPr txBox="1"/>
-          <p:nvPr/>
-        </p:nvSpPr>
-        <p:spPr>
-          <a:xfrm>
-            <a:off x="13085643" y="4033456"/>
-            <a:ext cx="731520" cy="219456"/>
-          </a:xfrm>
-          <a:prstGeom prst="rect">
-            <a:avLst/>
-          </a:prstGeom>
-          <a:noFill/>
-        </p:spPr>
-        <p:txBody>
-          <a:bodyPr wrap="square" anchor="ctr" lIns="0" rIns="0" tIns="0" bIns="0">
-            <a:noAutofit/>
-          </a:bodyPr>
-          <a:lstStyle/>
-          <a:p>
-            <a:pPr algn="l"/>
-            <a:r>
-              <a:rPr sz="800" b="1" i="0">
-                <a:solidFill>
-                  <a:srgbClr val="1F2937"/>
-                </a:solidFill>
-              </a:rPr>
-              <a:t>6.15</a:t>
-            </a:r>
-          </a:p>
-        </p:txBody>
-      </p:sp>
-      <p:sp>
-        <p:nvSpPr>
-          <p:cNvPr id="208" name="row:large RX buffers (mem. providers):name"/>
-          <p:cNvSpPr txBox="1"/>
-          <p:nvPr/>
-        </p:nvSpPr>
-        <p:spPr>
-          <a:xfrm>
-            <a:off x="1325880" y="4142803"/>
-            <a:ext cx="1572768" cy="219456"/>
-          </a:xfrm>
-          <a:prstGeom prst="rect">
-            <a:avLst/>
-          </a:prstGeom>
-          <a:noFill/>
-        </p:spPr>
-        <p:txBody>
-          <a:bodyPr wrap="square" anchor="ctr" lIns="0" rIns="0" tIns="0" bIns="0">
-            <a:noAutofit/>
-          </a:bodyPr>
-          <a:lstStyle/>
-          <a:p>
-            <a:pPr algn="r"/>
-            <a:r>
-              <a:rPr sz="850" b="0" i="0">
-                <a:solidFill>
-                  <a:srgbClr val="1F2937"/>
-                </a:solidFill>
-              </a:rPr>
-              <a:t>large RX buffers (mem. providers)</a:t>
-            </a:r>
-          </a:p>
-        </p:txBody>
-      </p:sp>
-      <p:cxnSp>
-        <p:nvCxnSpPr>
-          <p:cNvPr id="209" name="row:large RX buffers (mem. providers):development"/>
-          <p:cNvCxnSpPr/>
-          <p:nvPr/>
-        </p:nvCxnSpPr>
-        <p:spPr>
-          <a:xfrm>
-            <a:off x="12724847" y="4252531"/>
-            <a:ext cx="900270" cy="0"/>
-          </a:xfrm>
-          <a:prstGeom prst="line">
-            <a:avLst/>
-          </a:prstGeom>
-          <a:ln w="12700">
-            <a:solidFill>
-              <a:srgbClr val="16A34A"/>
-            </a:solidFill>
-            <a:prstDash val="dash"/>
-          </a:ln>
-        </p:spPr>
-        <p:style>
-          <a:lnRef idx="2">
-            <a:schemeClr val="accent1"/>
-          </a:lnRef>
-          <a:fillRef idx="0">
-            <a:schemeClr val="accent1"/>
-          </a:fillRef>
-          <a:effectRef idx="1">
-            <a:schemeClr val="accent1"/>
-          </a:effectRef>
-          <a:fontRef idx="minor">
-            <a:schemeClr val="tx1"/>
-          </a:fontRef>
-        </p:style>
-      </p:cxnSp>
-      <p:sp>
-        <p:nvSpPr>
-          <p:cNvPr id="210" name="row:large RX buffers (mem. providers):start"/>
-          <p:cNvSpPr/>
-          <p:nvPr/>
-        </p:nvSpPr>
-        <p:spPr>
-          <a:xfrm>
-            <a:off x="12692843" y="4220527"/>
-            <a:ext cx="64008" cy="64008"/>
-          </a:xfrm>
-          <a:prstGeom prst="ellipse">
-            <a:avLst/>
-          </a:prstGeom>
-          <a:solidFill>
-            <a:srgbClr val="FFFFFF"/>
-          </a:solidFill>
-          <a:ln w="12700">
-            <a:solidFill>
-              <a:srgbClr val="16A34A"/>
-            </a:solidFill>
-          </a:ln>
-          <a:effectLst/>
-        </p:spPr>
-        <p:style>
-          <a:lnRef idx="1">
-            <a:schemeClr val="accent1"/>
-          </a:lnRef>
-          <a:fillRef idx="3">
-            <a:schemeClr val="accent1"/>
-          </a:fillRef>
-          <a:effectRef idx="2">
-            <a:schemeClr val="accent1"/>
-          </a:effectRef>
-          <a:fontRef idx="minor">
-            <a:schemeClr val="lt1"/>
-          </a:fontRef>
-        </p:style>
-        <p:txBody>
-          <a:bodyPr rtlCol="0" anchor="ctr"/>
-          <a:lstStyle/>
-          <a:p/>
-        </p:txBody>
-      </p:sp>
-      <p:sp>
-        <p:nvSpPr>
-          <p:cNvPr id="211" name="row:large RX buffers (mem. providers):release:7.0"/>
-          <p:cNvSpPr/>
-          <p:nvPr/>
-        </p:nvSpPr>
-        <p:spPr>
-          <a:xfrm>
-            <a:off x="13581683" y="4209097"/>
-            <a:ext cx="86868" cy="86868"/>
-          </a:xfrm>
-          <a:prstGeom prst="ellipse">
-            <a:avLst/>
-          </a:prstGeom>
-          <a:solidFill>
-            <a:srgbClr val="16A34A"/>
-          </a:solidFill>
-          <a:ln w="12700">
-            <a:solidFill>
-              <a:srgbClr val="16A34A"/>
-            </a:solidFill>
-          </a:ln>
-          <a:effectLst/>
-        </p:spPr>
-        <p:style>
-          <a:lnRef idx="1">
-            <a:schemeClr val="accent1"/>
-          </a:lnRef>
-          <a:fillRef idx="3">
-            <a:schemeClr val="accent1"/>
-          </a:fillRef>
-          <a:effectRef idx="2">
-            <a:schemeClr val="accent1"/>
-          </a:effectRef>
-          <a:fontRef idx="minor">
-            <a:schemeClr val="lt1"/>
-          </a:fontRef>
-        </p:style>
-        <p:txBody>
-          <a:bodyPr rtlCol="0" anchor="ctr"/>
-          <a:lstStyle/>
-          <a:p/>
-        </p:txBody>
-      </p:sp>
-      <p:sp>
-        <p:nvSpPr>
-          <p:cNvPr id="212" name="row:large RX buffers (mem. providers):label"/>
-          <p:cNvSpPr txBox="1"/>
-          <p:nvPr/>
-        </p:nvSpPr>
-        <p:spPr>
-          <a:xfrm>
-            <a:off x="13698269" y="4142803"/>
-            <a:ext cx="731520" cy="219456"/>
-          </a:xfrm>
-          <a:prstGeom prst="rect">
-            <a:avLst/>
-          </a:prstGeom>
-          <a:noFill/>
-        </p:spPr>
-        <p:txBody>
-          <a:bodyPr wrap="square" anchor="ctr" lIns="0" rIns="0" tIns="0" bIns="0">
-            <a:noAutofit/>
-          </a:bodyPr>
-          <a:lstStyle/>
-          <a:p>
-            <a:pPr algn="l"/>
-            <a:r>
-              <a:rPr sz="800" b="1" i="0">
-                <a:solidFill>
-                  <a:srgbClr val="1F2937"/>
-                </a:solidFill>
-              </a:rPr>
-              <a:t>7.0</a:t>
-            </a:r>
-          </a:p>
-        </p:txBody>
-      </p:sp>
-      <p:sp>
-        <p:nvSpPr>
-          <p:cNvPr id="213" name="row:AF_XDP:name"/>
-          <p:cNvSpPr txBox="1"/>
-          <p:nvPr/>
-        </p:nvSpPr>
-        <p:spPr>
-          <a:xfrm>
-            <a:off x="1325880" y="4252150"/>
-            <a:ext cx="1572768" cy="219456"/>
-          </a:xfrm>
-          <a:prstGeom prst="rect">
-            <a:avLst/>
-          </a:prstGeom>
-          <a:noFill/>
-        </p:spPr>
-        <p:txBody>
-          <a:bodyPr wrap="square" anchor="ctr" lIns="0" rIns="0" tIns="0" bIns="0">
-            <a:noAutofit/>
-          </a:bodyPr>
-          <a:lstStyle/>
-          <a:p>
-            <a:pPr algn="r"/>
-            <a:r>
-              <a:rPr sz="850" b="0" i="0">
-                <a:solidFill>
-                  <a:srgbClr val="1F2937"/>
-                </a:solidFill>
-              </a:rPr>
-              <a:t>AF_XDP</a:t>
-            </a:r>
-          </a:p>
-        </p:txBody>
-      </p:sp>
-      <p:cxnSp>
-        <p:nvCxnSpPr>
-          <p:cNvPr id="214" name="row:AF_XDP:development"/>
-          <p:cNvCxnSpPr/>
-          <p:nvPr/>
-        </p:nvCxnSpPr>
-        <p:spPr>
-          <a:xfrm>
-            <a:off x="7169867" y="4361878"/>
-            <a:ext cx="1132203" cy="0"/>
-          </a:xfrm>
-          <a:prstGeom prst="line">
-            <a:avLst/>
-          </a:prstGeom>
-          <a:ln w="12700">
-            <a:solidFill>
-              <a:srgbClr val="16A34A"/>
-            </a:solidFill>
-            <a:prstDash val="dash"/>
-          </a:ln>
-        </p:spPr>
-        <p:style>
-          <a:lnRef idx="2">
-            <a:schemeClr val="accent1"/>
-          </a:lnRef>
-          <a:fillRef idx="0">
-            <a:schemeClr val="accent1"/>
-          </a:fillRef>
-          <a:effectRef idx="1">
-            <a:schemeClr val="accent1"/>
-          </a:effectRef>
-          <a:fontRef idx="minor">
-            <a:schemeClr val="tx1"/>
-          </a:fontRef>
-        </p:style>
-      </p:cxnSp>
-      <p:sp>
-        <p:nvSpPr>
-          <p:cNvPr id="215" name="row:AF_XDP:start"/>
-          <p:cNvSpPr/>
-          <p:nvPr/>
-        </p:nvSpPr>
-        <p:spPr>
-          <a:xfrm>
-            <a:off x="7137863" y="4329874"/>
-            <a:ext cx="64008" cy="64008"/>
-          </a:xfrm>
-          <a:prstGeom prst="ellipse">
-            <a:avLst/>
-          </a:prstGeom>
-          <a:solidFill>
-            <a:srgbClr val="FFFFFF"/>
-          </a:solidFill>
-          <a:ln w="12700">
-            <a:solidFill>
-              <a:srgbClr val="16A34A"/>
-            </a:solidFill>
-          </a:ln>
-          <a:effectLst/>
-        </p:spPr>
-        <p:style>
-          <a:lnRef idx="1">
-            <a:schemeClr val="accent1"/>
-          </a:lnRef>
-          <a:fillRef idx="3">
-            <a:schemeClr val="accent1"/>
-          </a:fillRef>
-          <a:effectRef idx="2">
-            <a:schemeClr val="accent1"/>
-          </a:effectRef>
-          <a:fontRef idx="minor">
-            <a:schemeClr val="lt1"/>
-          </a:fontRef>
-        </p:style>
-        <p:txBody>
-          <a:bodyPr rtlCol="0" anchor="ctr"/>
-          <a:lstStyle/>
-          <a:p/>
-        </p:txBody>
-      </p:sp>
-      <p:sp>
-        <p:nvSpPr>
-          <p:cNvPr id="216" name="row:AF_XDP:release:4.18"/>
-          <p:cNvSpPr/>
-          <p:nvPr/>
-        </p:nvSpPr>
-        <p:spPr>
-          <a:xfrm>
-            <a:off x="8258636" y="4318444"/>
-            <a:ext cx="86868" cy="86868"/>
-          </a:xfrm>
-          <a:prstGeom prst="ellipse">
-            <a:avLst/>
-          </a:prstGeom>
-          <a:solidFill>
-            <a:srgbClr val="16A34A"/>
-          </a:solidFill>
-          <a:ln w="12700">
-            <a:solidFill>
-              <a:srgbClr val="16A34A"/>
-            </a:solidFill>
-          </a:ln>
-          <a:effectLst/>
-        </p:spPr>
-        <p:style>
-          <a:lnRef idx="1">
-            <a:schemeClr val="accent1"/>
-          </a:lnRef>
-          <a:fillRef idx="3">
-            <a:schemeClr val="accent1"/>
-          </a:fillRef>
-          <a:effectRef idx="2">
-            <a:schemeClr val="accent1"/>
-          </a:effectRef>
-          <a:fontRef idx="minor">
-            <a:schemeClr val="lt1"/>
-          </a:fontRef>
-        </p:style>
-        <p:txBody>
-          <a:bodyPr rtlCol="0" anchor="ctr"/>
-          <a:lstStyle/>
-          <a:p/>
-        </p:txBody>
-      </p:sp>
-      <p:sp>
-        <p:nvSpPr>
-          <p:cNvPr id="217" name="row:AF_XDP:label"/>
-          <p:cNvSpPr txBox="1"/>
-          <p:nvPr/>
-        </p:nvSpPr>
-        <p:spPr>
-          <a:xfrm>
-            <a:off x="8375222" y="4252150"/>
-            <a:ext cx="731520" cy="219456"/>
-          </a:xfrm>
-          <a:prstGeom prst="rect">
-            <a:avLst/>
-          </a:prstGeom>
-          <a:noFill/>
-        </p:spPr>
-        <p:txBody>
-          <a:bodyPr wrap="square" anchor="ctr" lIns="0" rIns="0" tIns="0" bIns="0">
-            <a:noAutofit/>
-          </a:bodyPr>
-          <a:lstStyle/>
-          <a:p>
-            <a:pPr algn="l"/>
-            <a:r>
-              <a:rPr sz="800" b="1" i="0">
-                <a:solidFill>
-                  <a:srgbClr val="1F2937"/>
-                </a:solidFill>
-              </a:rPr>
-              <a:t>4.18</a:t>
-            </a:r>
-          </a:p>
-        </p:txBody>
-      </p:sp>
-      <p:sp>
-        <p:nvSpPr>
-          <p:cNvPr id="218" name="row:XDP multi-buffer:name"/>
-          <p:cNvSpPr txBox="1"/>
-          <p:nvPr/>
-        </p:nvSpPr>
-        <p:spPr>
-          <a:xfrm>
-            <a:off x="1325880" y="4361497"/>
-            <a:ext cx="1572768" cy="219456"/>
-          </a:xfrm>
-          <a:prstGeom prst="rect">
-            <a:avLst/>
-          </a:prstGeom>
-          <a:noFill/>
-        </p:spPr>
-        <p:txBody>
-          <a:bodyPr wrap="square" anchor="ctr" lIns="0" rIns="0" tIns="0" bIns="0">
-            <a:noAutofit/>
-          </a:bodyPr>
-          <a:lstStyle/>
-          <a:p>
-            <a:pPr algn="r"/>
-            <a:r>
-              <a:rPr sz="850" b="0" i="0">
-                <a:solidFill>
-                  <a:srgbClr val="1F2937"/>
-                </a:solidFill>
-              </a:rPr>
-              <a:t>XDP multi-buffer</a:t>
-            </a:r>
-          </a:p>
-        </p:txBody>
-      </p:sp>
-      <p:cxnSp>
-        <p:nvCxnSpPr>
-          <p:cNvPr id="219" name="row:XDP multi-buffer:development"/>
-          <p:cNvCxnSpPr/>
-          <p:nvPr/>
-        </p:nvCxnSpPr>
-        <p:spPr>
-          <a:xfrm>
-            <a:off x="9947357" y="4471225"/>
-            <a:ext cx="976313" cy="0"/>
-          </a:xfrm>
-          <a:prstGeom prst="line">
-            <a:avLst/>
-          </a:prstGeom>
-          <a:ln w="12700">
-            <a:solidFill>
-              <a:srgbClr val="16A34A"/>
-            </a:solidFill>
-            <a:prstDash val="dash"/>
-          </a:ln>
-        </p:spPr>
-        <p:style>
-          <a:lnRef idx="2">
-            <a:schemeClr val="accent1"/>
-          </a:lnRef>
-          <a:fillRef idx="0">
-            <a:schemeClr val="accent1"/>
-          </a:fillRef>
-          <a:effectRef idx="1">
-            <a:schemeClr val="accent1"/>
-          </a:effectRef>
-          <a:fontRef idx="minor">
-            <a:schemeClr val="tx1"/>
-          </a:fontRef>
-        </p:style>
-      </p:cxnSp>
-      <p:sp>
-        <p:nvSpPr>
-          <p:cNvPr id="220" name="row:XDP multi-buffer:start"/>
-          <p:cNvSpPr/>
-          <p:nvPr/>
-        </p:nvSpPr>
-        <p:spPr>
-          <a:xfrm>
-            <a:off x="9915353" y="4439221"/>
-            <a:ext cx="64008" cy="64008"/>
-          </a:xfrm>
-          <a:prstGeom prst="ellipse">
-            <a:avLst/>
-          </a:prstGeom>
-          <a:solidFill>
-            <a:srgbClr val="FFFFFF"/>
-          </a:solidFill>
-          <a:ln w="12700">
-            <a:solidFill>
-              <a:srgbClr val="16A34A"/>
-            </a:solidFill>
-          </a:ln>
-          <a:effectLst/>
-        </p:spPr>
-        <p:style>
-          <a:lnRef idx="1">
-            <a:schemeClr val="accent1"/>
-          </a:lnRef>
-          <a:fillRef idx="3">
-            <a:schemeClr val="accent1"/>
-          </a:fillRef>
-          <a:effectRef idx="2">
-            <a:schemeClr val="accent1"/>
-          </a:effectRef>
-          <a:fontRef idx="minor">
-            <a:schemeClr val="lt1"/>
-          </a:fontRef>
-        </p:style>
-        <p:txBody>
-          <a:bodyPr rtlCol="0" anchor="ctr"/>
-          <a:lstStyle/>
-          <a:p/>
-        </p:txBody>
-      </p:sp>
-      <p:sp>
-        <p:nvSpPr>
-          <p:cNvPr id="221" name="row:XDP multi-buffer:release:5.18"/>
-          <p:cNvSpPr/>
-          <p:nvPr/>
-        </p:nvSpPr>
-        <p:spPr>
-          <a:xfrm>
-            <a:off x="10880236" y="4427791"/>
-            <a:ext cx="86868" cy="86868"/>
-          </a:xfrm>
-          <a:prstGeom prst="ellipse">
-            <a:avLst/>
-          </a:prstGeom>
-          <a:solidFill>
-            <a:srgbClr val="16A34A"/>
-          </a:solidFill>
-          <a:ln w="12700">
-            <a:solidFill>
-              <a:srgbClr val="16A34A"/>
-            </a:solidFill>
-          </a:ln>
-          <a:effectLst/>
-        </p:spPr>
-        <p:style>
-          <a:lnRef idx="1">
-            <a:schemeClr val="accent1"/>
-          </a:lnRef>
-          <a:fillRef idx="3">
-            <a:schemeClr val="accent1"/>
-          </a:fillRef>
-          <a:effectRef idx="2">
-            <a:schemeClr val="accent1"/>
-          </a:effectRef>
-          <a:fontRef idx="minor">
-            <a:schemeClr val="lt1"/>
-          </a:fontRef>
-        </p:style>
-        <p:txBody>
-          <a:bodyPr rtlCol="0" anchor="ctr"/>
-          <a:lstStyle/>
-          <a:p/>
-        </p:txBody>
-      </p:sp>
-      <p:sp>
-        <p:nvSpPr>
-          <p:cNvPr id="222" name="row:XDP multi-buffer:label"/>
-          <p:cNvSpPr txBox="1"/>
-          <p:nvPr/>
-        </p:nvSpPr>
-        <p:spPr>
-          <a:xfrm>
-            <a:off x="10996822" y="4361497"/>
-            <a:ext cx="731520" cy="219456"/>
-          </a:xfrm>
-          <a:prstGeom prst="rect">
-            <a:avLst/>
-          </a:prstGeom>
-          <a:noFill/>
-        </p:spPr>
-        <p:txBody>
-          <a:bodyPr wrap="square" anchor="ctr" lIns="0" rIns="0" tIns="0" bIns="0">
-            <a:noAutofit/>
-          </a:bodyPr>
-          <a:lstStyle/>
-          <a:p>
-            <a:pPr algn="l"/>
-            <a:r>
-              <a:rPr sz="800" b="1" i="0">
-                <a:solidFill>
-                  <a:srgbClr val="1F2937"/>
-                </a:solidFill>
-              </a:rPr>
-              <a:t>5.18</a:t>
-            </a:r>
-          </a:p>
-        </p:txBody>
-      </p:sp>
-      <p:sp>
-        <p:nvSpPr>
-          <p:cNvPr id="223" name="row:AF_XDP multi-buffer:name"/>
+          <p:cNvPr id="228" name="row:AF_XDP multi-buffer:name"/>
           <p:cNvSpPr txBox="1"/>
           <p:nvPr/>
         </p:nvSpPr>
@@ -11913,7 +12104,7 @@
       </p:sp>
       <p:cxnSp>
         <p:nvCxnSpPr>
-          <p:cNvPr id="224" name="row:AF_XDP multi-buffer:development"/>
+          <p:cNvPr id="229" name="row:AF_XDP multi-buffer:development"/>
           <p:cNvCxnSpPr/>
           <p:nvPr/>
         </p:nvCxnSpPr>
@@ -11949,7 +12140,7 @@
       </p:cxnSp>
       <p:sp>
         <p:nvSpPr>
-          <p:cNvPr id="225" name="row:AF_XDP multi-buffer:start"/>
+          <p:cNvPr id="230" name="row:AF_XDP multi-buffer:start"/>
           <p:cNvSpPr/>
           <p:nvPr/>
         </p:nvSpPr>
@@ -11993,7 +12184,7 @@
       </p:sp>
       <p:sp>
         <p:nvSpPr>
-          <p:cNvPr id="226" name="row:AF_XDP multi-buffer:release:6.6"/>
+          <p:cNvPr id="231" name="row:AF_XDP multi-buffer:release:6.6"/>
           <p:cNvSpPr/>
           <p:nvPr/>
         </p:nvSpPr>
@@ -12037,7 +12228,7 @@
       </p:sp>
       <p:sp>
         <p:nvSpPr>
-          <p:cNvPr id="227" name="row:AF_XDP multi-buffer:label"/>
+          <p:cNvPr id="232" name="row:AF_XDP multi-buffer:label"/>
           <p:cNvSpPr txBox="1"/>
           <p:nvPr/>
         </p:nvSpPr>
@@ -12071,7 +12262,7 @@
       </p:sp>
       <p:sp>
         <p:nvSpPr>
-          <p:cNvPr id="228" name="row:RX HW queue leasing:name"/>
+          <p:cNvPr id="233" name="row:RX HW queue leasing:name"/>
           <p:cNvSpPr txBox="1"/>
           <p:nvPr/>
         </p:nvSpPr>
@@ -12105,7 +12296,7 @@
       </p:sp>
       <p:cxnSp>
         <p:nvCxnSpPr>
-          <p:cNvPr id="229" name="row:RX HW queue leasing:development"/>
+          <p:cNvPr id="234" name="row:RX HW queue leasing:development"/>
           <p:cNvCxnSpPr/>
           <p:nvPr/>
         </p:nvCxnSpPr>
@@ -12141,7 +12332,7 @@
       </p:cxnSp>
       <p:sp>
         <p:nvSpPr>
-          <p:cNvPr id="230" name="row:RX HW queue leasing:start"/>
+          <p:cNvPr id="235" name="row:RX HW queue leasing:start"/>
           <p:cNvSpPr/>
           <p:nvPr/>
         </p:nvSpPr>
@@ -12185,7 +12376,7 @@
       </p:sp>
       <p:sp>
         <p:nvSpPr>
-          <p:cNvPr id="231" name="row:RX HW queue leasing:release:7.1"/>
+          <p:cNvPr id="236" name="row:RX HW queue leasing:release:7.1"/>
           <p:cNvSpPr/>
           <p:nvPr/>
         </p:nvSpPr>
@@ -12229,7 +12420,7 @@
       </p:sp>
       <p:sp>
         <p:nvSpPr>
-          <p:cNvPr id="232" name="row:RX HW queue leasing:label"/>
+          <p:cNvPr id="237" name="row:RX HW queue leasing:label"/>
           <p:cNvSpPr txBox="1"/>
           <p:nvPr/>
         </p:nvSpPr>
@@ -12263,7 +12454,7 @@
       </p:sp>
       <p:sp>
         <p:nvSpPr>
-          <p:cNvPr id="233" name="band-label:CONTROL PLANE"/>
+          <p:cNvPr id="238" name="band-label:CONTROL PLANE"/>
           <p:cNvSpPr txBox="1"/>
           <p:nvPr/>
         </p:nvSpPr>
@@ -12298,7 +12489,7 @@
       </p:sp>
       <p:sp>
         <p:nvSpPr>
-          <p:cNvPr id="234" name="row:nftables (dev. from 2008):name"/>
+          <p:cNvPr id="239" name="row:nftables (dev. from 2008):name"/>
           <p:cNvSpPr txBox="1"/>
           <p:nvPr/>
         </p:nvSpPr>
@@ -12332,7 +12523,7 @@
       </p:sp>
       <p:cxnSp>
         <p:nvCxnSpPr>
-          <p:cNvPr id="235" name="row:nftables (dev. from 2008):development"/>
+          <p:cNvPr id="240" name="row:nftables (dev. from 2008):development"/>
           <p:cNvCxnSpPr/>
           <p:nvPr/>
         </p:nvCxnSpPr>
@@ -12368,7 +12559,7 @@
       </p:cxnSp>
       <p:sp>
         <p:nvSpPr>
-          <p:cNvPr id="236" name="row:nftables (dev. from 2008):start-offchart"/>
+          <p:cNvPr id="241" name="row:nftables (dev. from 2008):start-offchart"/>
           <p:cNvSpPr/>
           <p:nvPr/>
         </p:nvSpPr>
@@ -12410,7 +12601,7 @@
       </p:sp>
       <p:sp>
         <p:nvSpPr>
-          <p:cNvPr id="237" name="row:nftables (dev. from 2008):release:3.13"/>
+          <p:cNvPr id="242" name="row:nftables (dev. from 2008):release:3.13"/>
           <p:cNvSpPr/>
           <p:nvPr/>
         </p:nvSpPr>
@@ -12454,7 +12645,7 @@
       </p:sp>
       <p:sp>
         <p:nvSpPr>
-          <p:cNvPr id="238" name="row:nftables (dev. from 2008):label"/>
+          <p:cNvPr id="243" name="row:nftables (dev. from 2008):label"/>
           <p:cNvSpPr txBox="1"/>
           <p:nvPr/>
         </p:nvSpPr>
@@ -12488,7 +12679,7 @@
       </p:sp>
       <p:sp>
         <p:nvSpPr>
-          <p:cNvPr id="239" name="row:nexthop objects:name"/>
+          <p:cNvPr id="244" name="row:nexthop objects:name"/>
           <p:cNvSpPr txBox="1"/>
           <p:nvPr/>
         </p:nvSpPr>
@@ -12522,7 +12713,7 @@
       </p:sp>
       <p:cxnSp>
         <p:nvCxnSpPr>
-          <p:cNvPr id="240" name="row:nexthop objects:development"/>
+          <p:cNvPr id="245" name="row:nexthop objects:development"/>
           <p:cNvCxnSpPr/>
           <p:nvPr/>
         </p:nvCxnSpPr>
@@ -12558,7 +12749,7 @@
       </p:cxnSp>
       <p:sp>
         <p:nvSpPr>
-          <p:cNvPr id="241" name="row:nexthop objects:start"/>
+          <p:cNvPr id="246" name="row:nexthop objects:start"/>
           <p:cNvSpPr/>
           <p:nvPr/>
         </p:nvSpPr>
@@ -12602,7 +12793,7 @@
       </p:sp>
       <p:sp>
         <p:nvSpPr>
-          <p:cNvPr id="242" name="row:nexthop objects:release:5.3"/>
+          <p:cNvPr id="247" name="row:nexthop objects:release:5.3"/>
           <p:cNvSpPr/>
           <p:nvPr/>
         </p:nvSpPr>
@@ -12646,7 +12837,7 @@
       </p:sp>
       <p:sp>
         <p:nvSpPr>
-          <p:cNvPr id="243" name="row:nexthop objects:label"/>
+          <p:cNvPr id="248" name="row:nexthop objects:label"/>
           <p:cNvSpPr txBox="1"/>
           <p:nvPr/>
         </p:nvSpPr>
@@ -12680,13 +12871,589 @@
       </p:sp>
       <p:sp>
         <p:nvSpPr>
-          <p:cNvPr id="244" name="row:YNL tooling:name"/>
+          <p:cNvPr id="249" name="row:per-netns RTNL:name"/>
           <p:cNvSpPr txBox="1"/>
           <p:nvPr/>
         </p:nvSpPr>
         <p:spPr>
           <a:xfrm>
             <a:off x="1325880" y="4999672"/>
+            <a:ext cx="1572768" cy="219456"/>
+          </a:xfrm>
+          <a:prstGeom prst="rect">
+            <a:avLst/>
+          </a:prstGeom>
+          <a:noFill/>
+        </p:spPr>
+        <p:txBody>
+          <a:bodyPr wrap="square" anchor="ctr" lIns="0" rIns="0" tIns="0" bIns="0">
+            <a:noAutofit/>
+          </a:bodyPr>
+          <a:lstStyle/>
+          <a:p>
+            <a:pPr algn="r"/>
+            <a:r>
+              <a:rPr sz="850" b="0" i="0">
+                <a:solidFill>
+                  <a:srgbClr val="1F2937"/>
+                </a:solidFill>
+              </a:rPr>
+              <a:t>per-netns RTNL</a:t>
+            </a:r>
+          </a:p>
+        </p:txBody>
+      </p:sp>
+      <p:cxnSp>
+        <p:nvCxnSpPr>
+          <p:cNvPr id="250" name="row:per-netns RTNL:development"/>
+          <p:cNvCxnSpPr/>
+          <p:nvPr/>
+        </p:nvCxnSpPr>
+        <p:spPr>
+          <a:xfrm>
+            <a:off x="11336102" y="5109400"/>
+            <a:ext cx="1436852" cy="0"/>
+          </a:xfrm>
+          <a:prstGeom prst="line">
+            <a:avLst/>
+          </a:prstGeom>
+          <a:ln w="12700">
+            <a:solidFill>
+              <a:srgbClr val="DC2626"/>
+            </a:solidFill>
+            <a:prstDash val="dash"/>
+          </a:ln>
+        </p:spPr>
+        <p:style>
+          <a:lnRef idx="2">
+            <a:schemeClr val="accent1"/>
+          </a:lnRef>
+          <a:fillRef idx="0">
+            <a:schemeClr val="accent1"/>
+          </a:fillRef>
+          <a:effectRef idx="1">
+            <a:schemeClr val="accent1"/>
+          </a:effectRef>
+          <a:fontRef idx="minor">
+            <a:schemeClr val="tx1"/>
+          </a:fontRef>
+        </p:style>
+      </p:cxnSp>
+      <p:sp>
+        <p:nvSpPr>
+          <p:cNvPr id="251" name="row:per-netns RTNL:start"/>
+          <p:cNvSpPr/>
+          <p:nvPr/>
+        </p:nvSpPr>
+        <p:spPr>
+          <a:xfrm>
+            <a:off x="11304098" y="5077396"/>
+            <a:ext cx="64008" cy="64008"/>
+          </a:xfrm>
+          <a:prstGeom prst="ellipse">
+            <a:avLst/>
+          </a:prstGeom>
+          <a:solidFill>
+            <a:srgbClr val="FFFFFF"/>
+          </a:solidFill>
+          <a:ln w="12700">
+            <a:solidFill>
+              <a:srgbClr val="DC2626"/>
+            </a:solidFill>
+          </a:ln>
+          <a:effectLst/>
+        </p:spPr>
+        <p:style>
+          <a:lnRef idx="1">
+            <a:schemeClr val="accent1"/>
+          </a:lnRef>
+          <a:fillRef idx="3">
+            <a:schemeClr val="accent1"/>
+          </a:fillRef>
+          <a:effectRef idx="2">
+            <a:schemeClr val="accent1"/>
+          </a:effectRef>
+          <a:fontRef idx="minor">
+            <a:schemeClr val="lt1"/>
+          </a:fontRef>
+        </p:style>
+        <p:txBody>
+          <a:bodyPr rtlCol="0" anchor="ctr"/>
+          <a:lstStyle/>
+          <a:p/>
+        </p:txBody>
+      </p:sp>
+      <p:sp>
+        <p:nvSpPr>
+          <p:cNvPr id="252" name="row:per-netns RTNL:release:6.13"/>
+          <p:cNvSpPr/>
+          <p:nvPr/>
+        </p:nvSpPr>
+        <p:spPr>
+          <a:xfrm>
+            <a:off x="12729520" y="5065966"/>
+            <a:ext cx="86868" cy="86868"/>
+          </a:xfrm>
+          <a:prstGeom prst="ellipse">
+            <a:avLst/>
+          </a:prstGeom>
+          <a:solidFill>
+            <a:srgbClr val="DC2626"/>
+          </a:solidFill>
+          <a:ln w="12700">
+            <a:solidFill>
+              <a:srgbClr val="DC2626"/>
+            </a:solidFill>
+          </a:ln>
+          <a:effectLst/>
+        </p:spPr>
+        <p:style>
+          <a:lnRef idx="1">
+            <a:schemeClr val="accent1"/>
+          </a:lnRef>
+          <a:fillRef idx="3">
+            <a:schemeClr val="accent1"/>
+          </a:fillRef>
+          <a:effectRef idx="2">
+            <a:schemeClr val="accent1"/>
+          </a:effectRef>
+          <a:fontRef idx="minor">
+            <a:schemeClr val="lt1"/>
+          </a:fontRef>
+        </p:style>
+        <p:txBody>
+          <a:bodyPr rtlCol="0" anchor="ctr"/>
+          <a:lstStyle/>
+          <a:p/>
+        </p:txBody>
+      </p:sp>
+      <p:sp>
+        <p:nvSpPr>
+          <p:cNvPr id="253" name="row:per-netns RTNL:label"/>
+          <p:cNvSpPr txBox="1"/>
+          <p:nvPr/>
+        </p:nvSpPr>
+        <p:spPr>
+          <a:xfrm>
+            <a:off x="12846106" y="4999672"/>
+            <a:ext cx="731520" cy="219456"/>
+          </a:xfrm>
+          <a:prstGeom prst="rect">
+            <a:avLst/>
+          </a:prstGeom>
+          <a:noFill/>
+        </p:spPr>
+        <p:txBody>
+          <a:bodyPr wrap="square" anchor="ctr" lIns="0" rIns="0" tIns="0" bIns="0">
+            <a:noAutofit/>
+          </a:bodyPr>
+          <a:lstStyle/>
+          <a:p>
+            <a:pPr algn="l"/>
+            <a:r>
+              <a:rPr sz="800" b="1" i="0">
+                <a:solidFill>
+                  <a:srgbClr val="1F2937"/>
+                </a:solidFill>
+              </a:rPr>
+              <a:t>6.13</a:t>
+            </a:r>
+          </a:p>
+        </p:txBody>
+      </p:sp>
+      <p:sp>
+        <p:nvSpPr>
+          <p:cNvPr id="254" name="row:further RTNL breakup:name"/>
+          <p:cNvSpPr txBox="1"/>
+          <p:nvPr/>
+        </p:nvSpPr>
+        <p:spPr>
+          <a:xfrm>
+            <a:off x="1325880" y="5109019"/>
+            <a:ext cx="1572768" cy="219456"/>
+          </a:xfrm>
+          <a:prstGeom prst="rect">
+            <a:avLst/>
+          </a:prstGeom>
+          <a:noFill/>
+        </p:spPr>
+        <p:txBody>
+          <a:bodyPr wrap="square" anchor="ctr" lIns="0" rIns="0" tIns="0" bIns="0">
+            <a:noAutofit/>
+          </a:bodyPr>
+          <a:lstStyle/>
+          <a:p>
+            <a:pPr algn="r"/>
+            <a:r>
+              <a:rPr sz="850" b="0" i="0">
+                <a:solidFill>
+                  <a:srgbClr val="1F2937"/>
+                </a:solidFill>
+              </a:rPr>
+              <a:t>further RTNL breakup</a:t>
+            </a:r>
+          </a:p>
+        </p:txBody>
+      </p:sp>
+      <p:cxnSp>
+        <p:nvCxnSpPr>
+          <p:cNvPr id="255" name="row:further RTNL breakup:development"/>
+          <p:cNvCxnSpPr/>
+          <p:nvPr/>
+        </p:nvCxnSpPr>
+        <p:spPr>
+          <a:xfrm>
+            <a:off x="12030475" y="5218747"/>
+            <a:ext cx="982016" cy="0"/>
+          </a:xfrm>
+          <a:prstGeom prst="line">
+            <a:avLst/>
+          </a:prstGeom>
+          <a:ln w="12700">
+            <a:solidFill>
+              <a:srgbClr val="DC2626"/>
+            </a:solidFill>
+            <a:prstDash val="dash"/>
+          </a:ln>
+        </p:spPr>
+        <p:style>
+          <a:lnRef idx="2">
+            <a:schemeClr val="accent1"/>
+          </a:lnRef>
+          <a:fillRef idx="0">
+            <a:schemeClr val="accent1"/>
+          </a:fillRef>
+          <a:effectRef idx="1">
+            <a:schemeClr val="accent1"/>
+          </a:effectRef>
+          <a:fontRef idx="minor">
+            <a:schemeClr val="tx1"/>
+          </a:fontRef>
+        </p:style>
+      </p:cxnSp>
+      <p:sp>
+        <p:nvSpPr>
+          <p:cNvPr id="256" name="row:further RTNL breakup:start"/>
+          <p:cNvSpPr/>
+          <p:nvPr/>
+        </p:nvSpPr>
+        <p:spPr>
+          <a:xfrm>
+            <a:off x="11998471" y="5186743"/>
+            <a:ext cx="64008" cy="64008"/>
+          </a:xfrm>
+          <a:prstGeom prst="ellipse">
+            <a:avLst/>
+          </a:prstGeom>
+          <a:solidFill>
+            <a:srgbClr val="FFFFFF"/>
+          </a:solidFill>
+          <a:ln w="12700">
+            <a:solidFill>
+              <a:srgbClr val="DC2626"/>
+            </a:solidFill>
+          </a:ln>
+          <a:effectLst/>
+        </p:spPr>
+        <p:style>
+          <a:lnRef idx="1">
+            <a:schemeClr val="accent1"/>
+          </a:lnRef>
+          <a:fillRef idx="3">
+            <a:schemeClr val="accent1"/>
+          </a:fillRef>
+          <a:effectRef idx="2">
+            <a:schemeClr val="accent1"/>
+          </a:effectRef>
+          <a:fontRef idx="minor">
+            <a:schemeClr val="lt1"/>
+          </a:fontRef>
+        </p:style>
+        <p:txBody>
+          <a:bodyPr rtlCol="0" anchor="ctr"/>
+          <a:lstStyle/>
+          <a:p/>
+        </p:txBody>
+      </p:sp>
+      <p:sp>
+        <p:nvSpPr>
+          <p:cNvPr id="257" name="row:further RTNL breakup:release:6.15"/>
+          <p:cNvSpPr/>
+          <p:nvPr/>
+        </p:nvSpPr>
+        <p:spPr>
+          <a:xfrm>
+            <a:off x="12969057" y="5175313"/>
+            <a:ext cx="86868" cy="86868"/>
+          </a:xfrm>
+          <a:prstGeom prst="ellipse">
+            <a:avLst/>
+          </a:prstGeom>
+          <a:solidFill>
+            <a:srgbClr val="DC2626"/>
+          </a:solidFill>
+          <a:ln w="12700">
+            <a:solidFill>
+              <a:srgbClr val="DC2626"/>
+            </a:solidFill>
+          </a:ln>
+          <a:effectLst/>
+        </p:spPr>
+        <p:style>
+          <a:lnRef idx="1">
+            <a:schemeClr val="accent1"/>
+          </a:lnRef>
+          <a:fillRef idx="3">
+            <a:schemeClr val="accent1"/>
+          </a:fillRef>
+          <a:effectRef idx="2">
+            <a:schemeClr val="accent1"/>
+          </a:effectRef>
+          <a:fontRef idx="minor">
+            <a:schemeClr val="lt1"/>
+          </a:fontRef>
+        </p:style>
+        <p:txBody>
+          <a:bodyPr rtlCol="0" anchor="ctr"/>
+          <a:lstStyle/>
+          <a:p/>
+        </p:txBody>
+      </p:sp>
+      <p:sp>
+        <p:nvSpPr>
+          <p:cNvPr id="258" name="row:further RTNL breakup:label"/>
+          <p:cNvSpPr txBox="1"/>
+          <p:nvPr/>
+        </p:nvSpPr>
+        <p:spPr>
+          <a:xfrm>
+            <a:off x="13085643" y="5109019"/>
+            <a:ext cx="731520" cy="219456"/>
+          </a:xfrm>
+          <a:prstGeom prst="rect">
+            <a:avLst/>
+          </a:prstGeom>
+          <a:noFill/>
+        </p:spPr>
+        <p:txBody>
+          <a:bodyPr wrap="square" anchor="ctr" lIns="0" rIns="0" tIns="0" bIns="0">
+            <a:noAutofit/>
+          </a:bodyPr>
+          <a:lstStyle/>
+          <a:p>
+            <a:pPr algn="l"/>
+            <a:r>
+              <a:rPr sz="800" b="1" i="0">
+                <a:solidFill>
+                  <a:srgbClr val="1F2937"/>
+                </a:solidFill>
+              </a:rPr>
+              <a:t>6.15</a:t>
+            </a:r>
+          </a:p>
+        </p:txBody>
+      </p:sp>
+      <p:sp>
+        <p:nvSpPr>
+          <p:cNvPr id="259" name="row:RTNL-less FIB rules:name"/>
+          <p:cNvSpPr txBox="1"/>
+          <p:nvPr/>
+        </p:nvSpPr>
+        <p:spPr>
+          <a:xfrm>
+            <a:off x="1325880" y="5218366"/>
+            <a:ext cx="1572768" cy="219456"/>
+          </a:xfrm>
+          <a:prstGeom prst="rect">
+            <a:avLst/>
+          </a:prstGeom>
+          <a:noFill/>
+        </p:spPr>
+        <p:txBody>
+          <a:bodyPr wrap="square" anchor="ctr" lIns="0" rIns="0" tIns="0" bIns="0">
+            <a:noAutofit/>
+          </a:bodyPr>
+          <a:lstStyle/>
+          <a:p>
+            <a:pPr algn="r"/>
+            <a:r>
+              <a:rPr sz="850" b="0" i="0">
+                <a:solidFill>
+                  <a:srgbClr val="1F2937"/>
+                </a:solidFill>
+              </a:rPr>
+              <a:t>RTNL-less FIB rules</a:t>
+            </a:r>
+          </a:p>
+        </p:txBody>
+      </p:sp>
+      <p:cxnSp>
+        <p:nvCxnSpPr>
+          <p:cNvPr id="260" name="row:RTNL-less FIB rules:development"/>
+          <p:cNvCxnSpPr/>
+          <p:nvPr/>
+        </p:nvCxnSpPr>
+        <p:spPr>
+          <a:xfrm>
+            <a:off x="12724847" y="5328094"/>
+            <a:ext cx="1147411" cy="0"/>
+          </a:xfrm>
+          <a:prstGeom prst="line">
+            <a:avLst/>
+          </a:prstGeom>
+          <a:ln w="12700">
+            <a:solidFill>
+              <a:srgbClr val="DC2626"/>
+            </a:solidFill>
+            <a:prstDash val="dash"/>
+          </a:ln>
+        </p:spPr>
+        <p:style>
+          <a:lnRef idx="2">
+            <a:schemeClr val="accent1"/>
+          </a:lnRef>
+          <a:fillRef idx="0">
+            <a:schemeClr val="accent1"/>
+          </a:fillRef>
+          <a:effectRef idx="1">
+            <a:schemeClr val="accent1"/>
+          </a:effectRef>
+          <a:fontRef idx="minor">
+            <a:schemeClr val="tx1"/>
+          </a:fontRef>
+        </p:style>
+      </p:cxnSp>
+      <p:sp>
+        <p:nvSpPr>
+          <p:cNvPr id="261" name="row:RTNL-less FIB rules:start"/>
+          <p:cNvSpPr/>
+          <p:nvPr/>
+        </p:nvSpPr>
+        <p:spPr>
+          <a:xfrm>
+            <a:off x="12692843" y="5296090"/>
+            <a:ext cx="64008" cy="64008"/>
+          </a:xfrm>
+          <a:prstGeom prst="ellipse">
+            <a:avLst/>
+          </a:prstGeom>
+          <a:solidFill>
+            <a:srgbClr val="FFFFFF"/>
+          </a:solidFill>
+          <a:ln w="12700">
+            <a:solidFill>
+              <a:srgbClr val="DC2626"/>
+            </a:solidFill>
+          </a:ln>
+          <a:effectLst/>
+        </p:spPr>
+        <p:style>
+          <a:lnRef idx="1">
+            <a:schemeClr val="accent1"/>
+          </a:lnRef>
+          <a:fillRef idx="3">
+            <a:schemeClr val="accent1"/>
+          </a:fillRef>
+          <a:effectRef idx="2">
+            <a:schemeClr val="accent1"/>
+          </a:effectRef>
+          <a:fontRef idx="minor">
+            <a:schemeClr val="lt1"/>
+          </a:fontRef>
+        </p:style>
+        <p:txBody>
+          <a:bodyPr rtlCol="0" anchor="ctr"/>
+          <a:lstStyle/>
+          <a:p/>
+        </p:txBody>
+      </p:sp>
+      <p:sp>
+        <p:nvSpPr>
+          <p:cNvPr id="262" name="row:RTNL-less FIB rules:release:7.3-rc"/>
+          <p:cNvSpPr/>
+          <p:nvPr/>
+        </p:nvSpPr>
+        <p:spPr>
+          <a:xfrm>
+            <a:off x="13828824" y="5284660"/>
+            <a:ext cx="86868" cy="86868"/>
+          </a:xfrm>
+          <a:prstGeom prst="ellipse">
+            <a:avLst/>
+          </a:prstGeom>
+          <a:solidFill>
+            <a:srgbClr val="DC2626"/>
+          </a:solidFill>
+          <a:ln w="12700">
+            <a:solidFill>
+              <a:srgbClr val="DC2626"/>
+            </a:solidFill>
+          </a:ln>
+          <a:effectLst/>
+        </p:spPr>
+        <p:style>
+          <a:lnRef idx="1">
+            <a:schemeClr val="accent1"/>
+          </a:lnRef>
+          <a:fillRef idx="3">
+            <a:schemeClr val="accent1"/>
+          </a:fillRef>
+          <a:effectRef idx="2">
+            <a:schemeClr val="accent1"/>
+          </a:effectRef>
+          <a:fontRef idx="minor">
+            <a:schemeClr val="lt1"/>
+          </a:fontRef>
+        </p:style>
+        <p:txBody>
+          <a:bodyPr rtlCol="0" anchor="ctr"/>
+          <a:lstStyle/>
+          <a:p/>
+        </p:txBody>
+      </p:sp>
+      <p:sp>
+        <p:nvSpPr>
+          <p:cNvPr id="263" name="row:RTNL-less FIB rules:label"/>
+          <p:cNvSpPr txBox="1"/>
+          <p:nvPr/>
+        </p:nvSpPr>
+        <p:spPr>
+          <a:xfrm>
+            <a:off x="13945410" y="5218366"/>
+            <a:ext cx="731520" cy="219456"/>
+          </a:xfrm>
+          <a:prstGeom prst="rect">
+            <a:avLst/>
+          </a:prstGeom>
+          <a:noFill/>
+        </p:spPr>
+        <p:txBody>
+          <a:bodyPr wrap="square" anchor="ctr" lIns="0" rIns="0" tIns="0" bIns="0">
+            <a:noAutofit/>
+          </a:bodyPr>
+          <a:lstStyle/>
+          <a:p>
+            <a:pPr algn="l"/>
+            <a:r>
+              <a:rPr sz="800" b="1" i="0">
+                <a:solidFill>
+                  <a:srgbClr val="1F2937"/>
+                </a:solidFill>
+              </a:rPr>
+              <a:t>7.3-rc</a:t>
+            </a:r>
+          </a:p>
+        </p:txBody>
+      </p:sp>
+      <p:sp>
+        <p:nvSpPr>
+          <p:cNvPr id="264" name="row:YNL tooling:name"/>
+          <p:cNvSpPr txBox="1"/>
+          <p:nvPr/>
+        </p:nvSpPr>
+        <p:spPr>
+          <a:xfrm>
+            <a:off x="1325880" y="5327713"/>
             <a:ext cx="1572768" cy="219456"/>
           </a:xfrm>
           <a:prstGeom prst="rect">
@@ -12714,13 +13481,13 @@
       </p:sp>
       <p:cxnSp>
         <p:nvCxnSpPr>
-          <p:cNvPr id="245" name="row:YNL tooling:development"/>
+          <p:cNvPr id="265" name="row:YNL tooling:development"/>
           <p:cNvCxnSpPr/>
           <p:nvPr/>
         </p:nvCxnSpPr>
         <p:spPr>
           <a:xfrm>
-            <a:off x="10294543" y="5109400"/>
+            <a:off x="10294543" y="5437441"/>
             <a:ext cx="1268368" cy="0"/>
           </a:xfrm>
           <a:prstGeom prst="line">
@@ -12750,13 +13517,13 @@
       </p:cxnSp>
       <p:sp>
         <p:nvSpPr>
-          <p:cNvPr id="246" name="row:YNL tooling:start"/>
+          <p:cNvPr id="266" name="row:YNL tooling:start"/>
           <p:cNvSpPr/>
           <p:nvPr/>
         </p:nvSpPr>
         <p:spPr>
           <a:xfrm>
-            <a:off x="10262539" y="5077396"/>
+            <a:off x="10262539" y="5405437"/>
             <a:ext cx="64008" cy="64008"/>
           </a:xfrm>
           <a:prstGeom prst="ellipse">
@@ -12794,13 +13561,13 @@
       </p:sp>
       <p:sp>
         <p:nvSpPr>
-          <p:cNvPr id="247" name="row:YNL tooling:release:6.3"/>
+          <p:cNvPr id="267" name="row:YNL tooling:release:6.3"/>
           <p:cNvSpPr/>
           <p:nvPr/>
         </p:nvSpPr>
         <p:spPr>
           <a:xfrm>
-            <a:off x="11519477" y="5065966"/>
+            <a:off x="11519477" y="5394007"/>
             <a:ext cx="86868" cy="86868"/>
           </a:xfrm>
           <a:prstGeom prst="ellipse">
@@ -12838,13 +13605,13 @@
       </p:sp>
       <p:sp>
         <p:nvSpPr>
-          <p:cNvPr id="248" name="row:YNL tooling:label"/>
+          <p:cNvPr id="268" name="row:YNL tooling:label"/>
           <p:cNvSpPr txBox="1"/>
           <p:nvPr/>
         </p:nvSpPr>
         <p:spPr>
           <a:xfrm>
-            <a:off x="11636063" y="4999672"/>
+            <a:off x="11636063" y="5327713"/>
             <a:ext cx="731520" cy="219456"/>
           </a:xfrm>
           <a:prstGeom prst="rect">
@@ -12872,583 +13639,7 @@
       </p:sp>
       <p:sp>
         <p:nvSpPr>
-          <p:cNvPr id="249" name="row:per-netns RTNL:name"/>
-          <p:cNvSpPr txBox="1"/>
-          <p:nvPr/>
-        </p:nvSpPr>
-        <p:spPr>
-          <a:xfrm>
-            <a:off x="1325880" y="5109019"/>
-            <a:ext cx="1572768" cy="219456"/>
-          </a:xfrm>
-          <a:prstGeom prst="rect">
-            <a:avLst/>
-          </a:prstGeom>
-          <a:noFill/>
-        </p:spPr>
-        <p:txBody>
-          <a:bodyPr wrap="square" anchor="ctr" lIns="0" rIns="0" tIns="0" bIns="0">
-            <a:noAutofit/>
-          </a:bodyPr>
-          <a:lstStyle/>
-          <a:p>
-            <a:pPr algn="r"/>
-            <a:r>
-              <a:rPr sz="850" b="0" i="0">
-                <a:solidFill>
-                  <a:srgbClr val="1F2937"/>
-                </a:solidFill>
-              </a:rPr>
-              <a:t>per-netns RTNL</a:t>
-            </a:r>
-          </a:p>
-        </p:txBody>
-      </p:sp>
-      <p:cxnSp>
-        <p:nvCxnSpPr>
-          <p:cNvPr id="250" name="row:per-netns RTNL:development"/>
-          <p:cNvCxnSpPr/>
-          <p:nvPr/>
-        </p:nvCxnSpPr>
-        <p:spPr>
-          <a:xfrm>
-            <a:off x="11336102" y="5218747"/>
-            <a:ext cx="1436852" cy="0"/>
-          </a:xfrm>
-          <a:prstGeom prst="line">
-            <a:avLst/>
-          </a:prstGeom>
-          <a:ln w="12700">
-            <a:solidFill>
-              <a:srgbClr val="DC2626"/>
-            </a:solidFill>
-            <a:prstDash val="dash"/>
-          </a:ln>
-        </p:spPr>
-        <p:style>
-          <a:lnRef idx="2">
-            <a:schemeClr val="accent1"/>
-          </a:lnRef>
-          <a:fillRef idx="0">
-            <a:schemeClr val="accent1"/>
-          </a:fillRef>
-          <a:effectRef idx="1">
-            <a:schemeClr val="accent1"/>
-          </a:effectRef>
-          <a:fontRef idx="minor">
-            <a:schemeClr val="tx1"/>
-          </a:fontRef>
-        </p:style>
-      </p:cxnSp>
-      <p:sp>
-        <p:nvSpPr>
-          <p:cNvPr id="251" name="row:per-netns RTNL:start"/>
-          <p:cNvSpPr/>
-          <p:nvPr/>
-        </p:nvSpPr>
-        <p:spPr>
-          <a:xfrm>
-            <a:off x="11304098" y="5186743"/>
-            <a:ext cx="64008" cy="64008"/>
-          </a:xfrm>
-          <a:prstGeom prst="ellipse">
-            <a:avLst/>
-          </a:prstGeom>
-          <a:solidFill>
-            <a:srgbClr val="FFFFFF"/>
-          </a:solidFill>
-          <a:ln w="12700">
-            <a:solidFill>
-              <a:srgbClr val="DC2626"/>
-            </a:solidFill>
-          </a:ln>
-          <a:effectLst/>
-        </p:spPr>
-        <p:style>
-          <a:lnRef idx="1">
-            <a:schemeClr val="accent1"/>
-          </a:lnRef>
-          <a:fillRef idx="3">
-            <a:schemeClr val="accent1"/>
-          </a:fillRef>
-          <a:effectRef idx="2">
-            <a:schemeClr val="accent1"/>
-          </a:effectRef>
-          <a:fontRef idx="minor">
-            <a:schemeClr val="lt1"/>
-          </a:fontRef>
-        </p:style>
-        <p:txBody>
-          <a:bodyPr rtlCol="0" anchor="ctr"/>
-          <a:lstStyle/>
-          <a:p/>
-        </p:txBody>
-      </p:sp>
-      <p:sp>
-        <p:nvSpPr>
-          <p:cNvPr id="252" name="row:per-netns RTNL:release:6.13"/>
-          <p:cNvSpPr/>
-          <p:nvPr/>
-        </p:nvSpPr>
-        <p:spPr>
-          <a:xfrm>
-            <a:off x="12729520" y="5175313"/>
-            <a:ext cx="86868" cy="86868"/>
-          </a:xfrm>
-          <a:prstGeom prst="ellipse">
-            <a:avLst/>
-          </a:prstGeom>
-          <a:solidFill>
-            <a:srgbClr val="DC2626"/>
-          </a:solidFill>
-          <a:ln w="12700">
-            <a:solidFill>
-              <a:srgbClr val="DC2626"/>
-            </a:solidFill>
-          </a:ln>
-          <a:effectLst/>
-        </p:spPr>
-        <p:style>
-          <a:lnRef idx="1">
-            <a:schemeClr val="accent1"/>
-          </a:lnRef>
-          <a:fillRef idx="3">
-            <a:schemeClr val="accent1"/>
-          </a:fillRef>
-          <a:effectRef idx="2">
-            <a:schemeClr val="accent1"/>
-          </a:effectRef>
-          <a:fontRef idx="minor">
-            <a:schemeClr val="lt1"/>
-          </a:fontRef>
-        </p:style>
-        <p:txBody>
-          <a:bodyPr rtlCol="0" anchor="ctr"/>
-          <a:lstStyle/>
-          <a:p/>
-        </p:txBody>
-      </p:sp>
-      <p:sp>
-        <p:nvSpPr>
-          <p:cNvPr id="253" name="row:per-netns RTNL:label"/>
-          <p:cNvSpPr txBox="1"/>
-          <p:nvPr/>
-        </p:nvSpPr>
-        <p:spPr>
-          <a:xfrm>
-            <a:off x="12846106" y="5109019"/>
-            <a:ext cx="731520" cy="219456"/>
-          </a:xfrm>
-          <a:prstGeom prst="rect">
-            <a:avLst/>
-          </a:prstGeom>
-          <a:noFill/>
-        </p:spPr>
-        <p:txBody>
-          <a:bodyPr wrap="square" anchor="ctr" lIns="0" rIns="0" tIns="0" bIns="0">
-            <a:noAutofit/>
-          </a:bodyPr>
-          <a:lstStyle/>
-          <a:p>
-            <a:pPr algn="l"/>
-            <a:r>
-              <a:rPr sz="800" b="1" i="0">
-                <a:solidFill>
-                  <a:srgbClr val="1F2937"/>
-                </a:solidFill>
-              </a:rPr>
-              <a:t>6.13</a:t>
-            </a:r>
-          </a:p>
-        </p:txBody>
-      </p:sp>
-      <p:sp>
-        <p:nvSpPr>
-          <p:cNvPr id="254" name="row:further RTNL breakup:name"/>
-          <p:cNvSpPr txBox="1"/>
-          <p:nvPr/>
-        </p:nvSpPr>
-        <p:spPr>
-          <a:xfrm>
-            <a:off x="1325880" y="5218366"/>
-            <a:ext cx="1572768" cy="219456"/>
-          </a:xfrm>
-          <a:prstGeom prst="rect">
-            <a:avLst/>
-          </a:prstGeom>
-          <a:noFill/>
-        </p:spPr>
-        <p:txBody>
-          <a:bodyPr wrap="square" anchor="ctr" lIns="0" rIns="0" tIns="0" bIns="0">
-            <a:noAutofit/>
-          </a:bodyPr>
-          <a:lstStyle/>
-          <a:p>
-            <a:pPr algn="r"/>
-            <a:r>
-              <a:rPr sz="850" b="0" i="0">
-                <a:solidFill>
-                  <a:srgbClr val="1F2937"/>
-                </a:solidFill>
-              </a:rPr>
-              <a:t>further RTNL breakup</a:t>
-            </a:r>
-          </a:p>
-        </p:txBody>
-      </p:sp>
-      <p:cxnSp>
-        <p:nvCxnSpPr>
-          <p:cNvPr id="255" name="row:further RTNL breakup:development"/>
-          <p:cNvCxnSpPr/>
-          <p:nvPr/>
-        </p:nvCxnSpPr>
-        <p:spPr>
-          <a:xfrm>
-            <a:off x="12030475" y="5328094"/>
-            <a:ext cx="982016" cy="0"/>
-          </a:xfrm>
-          <a:prstGeom prst="line">
-            <a:avLst/>
-          </a:prstGeom>
-          <a:ln w="12700">
-            <a:solidFill>
-              <a:srgbClr val="DC2626"/>
-            </a:solidFill>
-            <a:prstDash val="dash"/>
-          </a:ln>
-        </p:spPr>
-        <p:style>
-          <a:lnRef idx="2">
-            <a:schemeClr val="accent1"/>
-          </a:lnRef>
-          <a:fillRef idx="0">
-            <a:schemeClr val="accent1"/>
-          </a:fillRef>
-          <a:effectRef idx="1">
-            <a:schemeClr val="accent1"/>
-          </a:effectRef>
-          <a:fontRef idx="minor">
-            <a:schemeClr val="tx1"/>
-          </a:fontRef>
-        </p:style>
-      </p:cxnSp>
-      <p:sp>
-        <p:nvSpPr>
-          <p:cNvPr id="256" name="row:further RTNL breakup:start"/>
-          <p:cNvSpPr/>
-          <p:nvPr/>
-        </p:nvSpPr>
-        <p:spPr>
-          <a:xfrm>
-            <a:off x="11998471" y="5296090"/>
-            <a:ext cx="64008" cy="64008"/>
-          </a:xfrm>
-          <a:prstGeom prst="ellipse">
-            <a:avLst/>
-          </a:prstGeom>
-          <a:solidFill>
-            <a:srgbClr val="FFFFFF"/>
-          </a:solidFill>
-          <a:ln w="12700">
-            <a:solidFill>
-              <a:srgbClr val="DC2626"/>
-            </a:solidFill>
-          </a:ln>
-          <a:effectLst/>
-        </p:spPr>
-        <p:style>
-          <a:lnRef idx="1">
-            <a:schemeClr val="accent1"/>
-          </a:lnRef>
-          <a:fillRef idx="3">
-            <a:schemeClr val="accent1"/>
-          </a:fillRef>
-          <a:effectRef idx="2">
-            <a:schemeClr val="accent1"/>
-          </a:effectRef>
-          <a:fontRef idx="minor">
-            <a:schemeClr val="lt1"/>
-          </a:fontRef>
-        </p:style>
-        <p:txBody>
-          <a:bodyPr rtlCol="0" anchor="ctr"/>
-          <a:lstStyle/>
-          <a:p/>
-        </p:txBody>
-      </p:sp>
-      <p:sp>
-        <p:nvSpPr>
-          <p:cNvPr id="257" name="row:further RTNL breakup:release:6.15"/>
-          <p:cNvSpPr/>
-          <p:nvPr/>
-        </p:nvSpPr>
-        <p:spPr>
-          <a:xfrm>
-            <a:off x="12969057" y="5284660"/>
-            <a:ext cx="86868" cy="86868"/>
-          </a:xfrm>
-          <a:prstGeom prst="ellipse">
-            <a:avLst/>
-          </a:prstGeom>
-          <a:solidFill>
-            <a:srgbClr val="DC2626"/>
-          </a:solidFill>
-          <a:ln w="12700">
-            <a:solidFill>
-              <a:srgbClr val="DC2626"/>
-            </a:solidFill>
-          </a:ln>
-          <a:effectLst/>
-        </p:spPr>
-        <p:style>
-          <a:lnRef idx="1">
-            <a:schemeClr val="accent1"/>
-          </a:lnRef>
-          <a:fillRef idx="3">
-            <a:schemeClr val="accent1"/>
-          </a:fillRef>
-          <a:effectRef idx="2">
-            <a:schemeClr val="accent1"/>
-          </a:effectRef>
-          <a:fontRef idx="minor">
-            <a:schemeClr val="lt1"/>
-          </a:fontRef>
-        </p:style>
-        <p:txBody>
-          <a:bodyPr rtlCol="0" anchor="ctr"/>
-          <a:lstStyle/>
-          <a:p/>
-        </p:txBody>
-      </p:sp>
-      <p:sp>
-        <p:nvSpPr>
-          <p:cNvPr id="258" name="row:further RTNL breakup:label"/>
-          <p:cNvSpPr txBox="1"/>
-          <p:nvPr/>
-        </p:nvSpPr>
-        <p:spPr>
-          <a:xfrm>
-            <a:off x="13085643" y="5218366"/>
-            <a:ext cx="731520" cy="219456"/>
-          </a:xfrm>
-          <a:prstGeom prst="rect">
-            <a:avLst/>
-          </a:prstGeom>
-          <a:noFill/>
-        </p:spPr>
-        <p:txBody>
-          <a:bodyPr wrap="square" anchor="ctr" lIns="0" rIns="0" tIns="0" bIns="0">
-            <a:noAutofit/>
-          </a:bodyPr>
-          <a:lstStyle/>
-          <a:p>
-            <a:pPr algn="l"/>
-            <a:r>
-              <a:rPr sz="800" b="1" i="0">
-                <a:solidFill>
-                  <a:srgbClr val="1F2937"/>
-                </a:solidFill>
-              </a:rPr>
-              <a:t>6.15</a:t>
-            </a:r>
-          </a:p>
-        </p:txBody>
-      </p:sp>
-      <p:sp>
-        <p:nvSpPr>
-          <p:cNvPr id="259" name="row:RTNL-less FIB rules:name"/>
-          <p:cNvSpPr txBox="1"/>
-          <p:nvPr/>
-        </p:nvSpPr>
-        <p:spPr>
-          <a:xfrm>
-            <a:off x="1325880" y="5327713"/>
-            <a:ext cx="1572768" cy="219456"/>
-          </a:xfrm>
-          <a:prstGeom prst="rect">
-            <a:avLst/>
-          </a:prstGeom>
-          <a:noFill/>
-        </p:spPr>
-        <p:txBody>
-          <a:bodyPr wrap="square" anchor="ctr" lIns="0" rIns="0" tIns="0" bIns="0">
-            <a:noAutofit/>
-          </a:bodyPr>
-          <a:lstStyle/>
-          <a:p>
-            <a:pPr algn="r"/>
-            <a:r>
-              <a:rPr sz="850" b="0" i="0">
-                <a:solidFill>
-                  <a:srgbClr val="1F2937"/>
-                </a:solidFill>
-              </a:rPr>
-              <a:t>RTNL-less FIB rules</a:t>
-            </a:r>
-          </a:p>
-        </p:txBody>
-      </p:sp>
-      <p:cxnSp>
-        <p:nvCxnSpPr>
-          <p:cNvPr id="260" name="row:RTNL-less FIB rules:development"/>
-          <p:cNvCxnSpPr/>
-          <p:nvPr/>
-        </p:nvCxnSpPr>
-        <p:spPr>
-          <a:xfrm>
-            <a:off x="12724847" y="5437441"/>
-            <a:ext cx="1147411" cy="0"/>
-          </a:xfrm>
-          <a:prstGeom prst="line">
-            <a:avLst/>
-          </a:prstGeom>
-          <a:ln w="12700">
-            <a:solidFill>
-              <a:srgbClr val="DC2626"/>
-            </a:solidFill>
-            <a:prstDash val="dash"/>
-          </a:ln>
-        </p:spPr>
-        <p:style>
-          <a:lnRef idx="2">
-            <a:schemeClr val="accent1"/>
-          </a:lnRef>
-          <a:fillRef idx="0">
-            <a:schemeClr val="accent1"/>
-          </a:fillRef>
-          <a:effectRef idx="1">
-            <a:schemeClr val="accent1"/>
-          </a:effectRef>
-          <a:fontRef idx="minor">
-            <a:schemeClr val="tx1"/>
-          </a:fontRef>
-        </p:style>
-      </p:cxnSp>
-      <p:sp>
-        <p:nvSpPr>
-          <p:cNvPr id="261" name="row:RTNL-less FIB rules:start"/>
-          <p:cNvSpPr/>
-          <p:nvPr/>
-        </p:nvSpPr>
-        <p:spPr>
-          <a:xfrm>
-            <a:off x="12692843" y="5405437"/>
-            <a:ext cx="64008" cy="64008"/>
-          </a:xfrm>
-          <a:prstGeom prst="ellipse">
-            <a:avLst/>
-          </a:prstGeom>
-          <a:solidFill>
-            <a:srgbClr val="FFFFFF"/>
-          </a:solidFill>
-          <a:ln w="12700">
-            <a:solidFill>
-              <a:srgbClr val="DC2626"/>
-            </a:solidFill>
-          </a:ln>
-          <a:effectLst/>
-        </p:spPr>
-        <p:style>
-          <a:lnRef idx="1">
-            <a:schemeClr val="accent1"/>
-          </a:lnRef>
-          <a:fillRef idx="3">
-            <a:schemeClr val="accent1"/>
-          </a:fillRef>
-          <a:effectRef idx="2">
-            <a:schemeClr val="accent1"/>
-          </a:effectRef>
-          <a:fontRef idx="minor">
-            <a:schemeClr val="lt1"/>
-          </a:fontRef>
-        </p:style>
-        <p:txBody>
-          <a:bodyPr rtlCol="0" anchor="ctr"/>
-          <a:lstStyle/>
-          <a:p/>
-        </p:txBody>
-      </p:sp>
-      <p:sp>
-        <p:nvSpPr>
-          <p:cNvPr id="262" name="row:RTNL-less FIB rules:release:7.3-rc"/>
-          <p:cNvSpPr/>
-          <p:nvPr/>
-        </p:nvSpPr>
-        <p:spPr>
-          <a:xfrm>
-            <a:off x="13828824" y="5394007"/>
-            <a:ext cx="86868" cy="86868"/>
-          </a:xfrm>
-          <a:prstGeom prst="ellipse">
-            <a:avLst/>
-          </a:prstGeom>
-          <a:solidFill>
-            <a:srgbClr val="DC2626"/>
-          </a:solidFill>
-          <a:ln w="12700">
-            <a:solidFill>
-              <a:srgbClr val="DC2626"/>
-            </a:solidFill>
-          </a:ln>
-          <a:effectLst/>
-        </p:spPr>
-        <p:style>
-          <a:lnRef idx="1">
-            <a:schemeClr val="accent1"/>
-          </a:lnRef>
-          <a:fillRef idx="3">
-            <a:schemeClr val="accent1"/>
-          </a:fillRef>
-          <a:effectRef idx="2">
-            <a:schemeClr val="accent1"/>
-          </a:effectRef>
-          <a:fontRef idx="minor">
-            <a:schemeClr val="lt1"/>
-          </a:fontRef>
-        </p:style>
-        <p:txBody>
-          <a:bodyPr rtlCol="0" anchor="ctr"/>
-          <a:lstStyle/>
-          <a:p/>
-        </p:txBody>
-      </p:sp>
-      <p:sp>
-        <p:nvSpPr>
-          <p:cNvPr id="263" name="row:RTNL-less FIB rules:label"/>
-          <p:cNvSpPr txBox="1"/>
-          <p:nvPr/>
-        </p:nvSpPr>
-        <p:spPr>
-          <a:xfrm>
-            <a:off x="13945410" y="5327713"/>
-            <a:ext cx="731520" cy="219456"/>
-          </a:xfrm>
-          <a:prstGeom prst="rect">
-            <a:avLst/>
-          </a:prstGeom>
-          <a:noFill/>
-        </p:spPr>
-        <p:txBody>
-          <a:bodyPr wrap="square" anchor="ctr" lIns="0" rIns="0" tIns="0" bIns="0">
-            <a:noAutofit/>
-          </a:bodyPr>
-          <a:lstStyle/>
-          <a:p>
-            <a:pPr algn="l"/>
-            <a:r>
-              <a:rPr sz="800" b="1" i="0">
-                <a:solidFill>
-                  <a:srgbClr val="1F2937"/>
-                </a:solidFill>
-              </a:rPr>
-              <a:t>7.3-rc</a:t>
-            </a:r>
-          </a:p>
-        </p:txBody>
-      </p:sp>
-      <p:sp>
-        <p:nvSpPr>
-          <p:cNvPr id="264" name="band-label:OBSERVABILITY"/>
+          <p:cNvPr id="269" name="band-label:OBSERVABILITY"/>
           <p:cNvSpPr txBox="1"/>
           <p:nvPr/>
         </p:nvSpPr>
@@ -13483,13 +13674,205 @@
       </p:sp>
       <p:sp>
         <p:nvSpPr>
-          <p:cNvPr id="265" name="row:kprobe BPF:name"/>
+          <p:cNvPr id="270" name="row:queue/NAPI netdev-genl:name"/>
           <p:cNvSpPr txBox="1"/>
           <p:nvPr/>
         </p:nvSpPr>
         <p:spPr>
           <a:xfrm>
             <a:off x="1325880" y="5528500"/>
+            <a:ext cx="1572768" cy="219456"/>
+          </a:xfrm>
+          <a:prstGeom prst="rect">
+            <a:avLst/>
+          </a:prstGeom>
+          <a:noFill/>
+        </p:spPr>
+        <p:txBody>
+          <a:bodyPr wrap="square" anchor="ctr" lIns="0" rIns="0" tIns="0" bIns="0">
+            <a:noAutofit/>
+          </a:bodyPr>
+          <a:lstStyle/>
+          <a:p>
+            <a:pPr algn="r"/>
+            <a:r>
+              <a:rPr sz="850" b="0" i="0">
+                <a:solidFill>
+                  <a:srgbClr val="1F2937"/>
+                </a:solidFill>
+              </a:rPr>
+              <a:t>queue/NAPI netdev-genl</a:t>
+            </a:r>
+          </a:p>
+        </p:txBody>
+      </p:sp>
+      <p:cxnSp>
+        <p:nvCxnSpPr>
+          <p:cNvPr id="271" name="row:queue/NAPI netdev-genl:development"/>
+          <p:cNvCxnSpPr/>
+          <p:nvPr/>
+        </p:nvCxnSpPr>
+        <p:spPr>
+          <a:xfrm>
+            <a:off x="11336102" y="5638228"/>
+            <a:ext cx="839435" cy="0"/>
+          </a:xfrm>
+          <a:prstGeom prst="line">
+            <a:avLst/>
+          </a:prstGeom>
+          <a:ln w="12700">
+            <a:solidFill>
+              <a:srgbClr val="7C3AED"/>
+            </a:solidFill>
+            <a:prstDash val="dash"/>
+          </a:ln>
+        </p:spPr>
+        <p:style>
+          <a:lnRef idx="2">
+            <a:schemeClr val="accent1"/>
+          </a:lnRef>
+          <a:fillRef idx="0">
+            <a:schemeClr val="accent1"/>
+          </a:fillRef>
+          <a:effectRef idx="1">
+            <a:schemeClr val="accent1"/>
+          </a:effectRef>
+          <a:fontRef idx="minor">
+            <a:schemeClr val="tx1"/>
+          </a:fontRef>
+        </p:style>
+      </p:cxnSp>
+      <p:sp>
+        <p:nvSpPr>
+          <p:cNvPr id="272" name="row:queue/NAPI netdev-genl:start"/>
+          <p:cNvSpPr/>
+          <p:nvPr/>
+        </p:nvSpPr>
+        <p:spPr>
+          <a:xfrm>
+            <a:off x="11304098" y="5606224"/>
+            <a:ext cx="64008" cy="64008"/>
+          </a:xfrm>
+          <a:prstGeom prst="ellipse">
+            <a:avLst/>
+          </a:prstGeom>
+          <a:solidFill>
+            <a:srgbClr val="FFFFFF"/>
+          </a:solidFill>
+          <a:ln w="12700">
+            <a:solidFill>
+              <a:srgbClr val="7C3AED"/>
+            </a:solidFill>
+          </a:ln>
+          <a:effectLst/>
+        </p:spPr>
+        <p:style>
+          <a:lnRef idx="1">
+            <a:schemeClr val="accent1"/>
+          </a:lnRef>
+          <a:fillRef idx="3">
+            <a:schemeClr val="accent1"/>
+          </a:fillRef>
+          <a:effectRef idx="2">
+            <a:schemeClr val="accent1"/>
+          </a:effectRef>
+          <a:fontRef idx="minor">
+            <a:schemeClr val="lt1"/>
+          </a:fontRef>
+        </p:style>
+        <p:txBody>
+          <a:bodyPr rtlCol="0" anchor="ctr"/>
+          <a:lstStyle/>
+          <a:p/>
+        </p:txBody>
+      </p:sp>
+      <p:sp>
+        <p:nvSpPr>
+          <p:cNvPr id="273" name="row:queue/NAPI netdev-genl:release:6.8"/>
+          <p:cNvSpPr/>
+          <p:nvPr/>
+        </p:nvSpPr>
+        <p:spPr>
+          <a:xfrm>
+            <a:off x="12132103" y="5594794"/>
+            <a:ext cx="86868" cy="86868"/>
+          </a:xfrm>
+          <a:prstGeom prst="ellipse">
+            <a:avLst/>
+          </a:prstGeom>
+          <a:solidFill>
+            <a:srgbClr val="7C3AED"/>
+          </a:solidFill>
+          <a:ln w="12700">
+            <a:solidFill>
+              <a:srgbClr val="7C3AED"/>
+            </a:solidFill>
+          </a:ln>
+          <a:effectLst/>
+        </p:spPr>
+        <p:style>
+          <a:lnRef idx="1">
+            <a:schemeClr val="accent1"/>
+          </a:lnRef>
+          <a:fillRef idx="3">
+            <a:schemeClr val="accent1"/>
+          </a:fillRef>
+          <a:effectRef idx="2">
+            <a:schemeClr val="accent1"/>
+          </a:effectRef>
+          <a:fontRef idx="minor">
+            <a:schemeClr val="lt1"/>
+          </a:fontRef>
+        </p:style>
+        <p:txBody>
+          <a:bodyPr rtlCol="0" anchor="ctr"/>
+          <a:lstStyle/>
+          <a:p/>
+        </p:txBody>
+      </p:sp>
+      <p:sp>
+        <p:nvSpPr>
+          <p:cNvPr id="274" name="row:queue/NAPI netdev-genl:label"/>
+          <p:cNvSpPr txBox="1"/>
+          <p:nvPr/>
+        </p:nvSpPr>
+        <p:spPr>
+          <a:xfrm>
+            <a:off x="12248689" y="5528500"/>
+            <a:ext cx="731520" cy="219456"/>
+          </a:xfrm>
+          <a:prstGeom prst="rect">
+            <a:avLst/>
+          </a:prstGeom>
+          <a:noFill/>
+        </p:spPr>
+        <p:txBody>
+          <a:bodyPr wrap="square" anchor="ctr" lIns="0" rIns="0" tIns="0" bIns="0">
+            <a:noAutofit/>
+          </a:bodyPr>
+          <a:lstStyle/>
+          <a:p>
+            <a:pPr algn="l"/>
+            <a:r>
+              <a:rPr sz="800" b="1" i="0">
+                <a:solidFill>
+                  <a:srgbClr val="1F2937"/>
+                </a:solidFill>
+              </a:rPr>
+              <a:t>6.8</a:t>
+            </a:r>
+          </a:p>
+        </p:txBody>
+      </p:sp>
+      <p:sp>
+        <p:nvSpPr>
+          <p:cNvPr id="275" name="row:kprobe BPF:name"/>
+          <p:cNvSpPr txBox="1"/>
+          <p:nvPr/>
+        </p:nvSpPr>
+        <p:spPr>
+          <a:xfrm>
+            <a:off x="1325880" y="5637847"/>
             <a:ext cx="1572768" cy="219456"/>
           </a:xfrm>
           <a:prstGeom prst="rect">
@@ -13517,13 +13900,13 @@
       </p:sp>
       <p:cxnSp>
         <p:nvCxnSpPr>
-          <p:cNvPr id="266" name="row:kprobe BPF:development"/>
+          <p:cNvPr id="276" name="row:kprobe BPF:development"/>
           <p:cNvCxnSpPr/>
           <p:nvPr/>
         </p:nvCxnSpPr>
         <p:spPr>
           <a:xfrm>
-            <a:off x="5225624" y="5638228"/>
+            <a:off x="5225624" y="5747575"/>
             <a:ext cx="894472" cy="0"/>
           </a:xfrm>
           <a:prstGeom prst="line">
@@ -13553,13 +13936,13 @@
       </p:cxnSp>
       <p:sp>
         <p:nvSpPr>
-          <p:cNvPr id="267" name="row:kprobe BPF:start"/>
+          <p:cNvPr id="277" name="row:kprobe BPF:start"/>
           <p:cNvSpPr/>
           <p:nvPr/>
         </p:nvSpPr>
         <p:spPr>
           <a:xfrm>
-            <a:off x="5193620" y="5606224"/>
+            <a:off x="5193620" y="5715571"/>
             <a:ext cx="64008" cy="64008"/>
           </a:xfrm>
           <a:prstGeom prst="ellipse">
@@ -13597,13 +13980,13 @@
       </p:sp>
       <p:sp>
         <p:nvSpPr>
-          <p:cNvPr id="268" name="row:kprobe BPF:release:4.1"/>
+          <p:cNvPr id="278" name="row:kprobe BPF:release:4.1"/>
           <p:cNvSpPr/>
           <p:nvPr/>
         </p:nvSpPr>
         <p:spPr>
           <a:xfrm>
-            <a:off x="6076662" y="5594794"/>
+            <a:off x="6076662" y="5704141"/>
             <a:ext cx="86868" cy="86868"/>
           </a:xfrm>
           <a:prstGeom prst="ellipse">
@@ -13641,13 +14024,13 @@
       </p:sp>
       <p:sp>
         <p:nvSpPr>
-          <p:cNvPr id="269" name="row:kprobe BPF:label"/>
+          <p:cNvPr id="279" name="row:kprobe BPF:label"/>
           <p:cNvSpPr txBox="1"/>
           <p:nvPr/>
         </p:nvSpPr>
         <p:spPr>
           <a:xfrm>
-            <a:off x="6193248" y="5528500"/>
+            <a:off x="6193248" y="5637847"/>
             <a:ext cx="731520" cy="219456"/>
           </a:xfrm>
           <a:prstGeom prst="rect">
@@ -13675,13 +14058,13 @@
       </p:sp>
       <p:sp>
         <p:nvSpPr>
-          <p:cNvPr id="270" name="row:structured drop reason:name"/>
+          <p:cNvPr id="280" name="row:structured drop reason:name"/>
           <p:cNvSpPr txBox="1"/>
           <p:nvPr/>
         </p:nvSpPr>
         <p:spPr>
           <a:xfrm>
-            <a:off x="1325880" y="5637847"/>
+            <a:off x="1325880" y="5747194"/>
             <a:ext cx="1572768" cy="219456"/>
           </a:xfrm>
           <a:prstGeom prst="rect">
@@ -13709,13 +14092,13 @@
       </p:sp>
       <p:cxnSp>
         <p:nvCxnSpPr>
-          <p:cNvPr id="271" name="row:structured drop reason:development"/>
+          <p:cNvPr id="281" name="row:structured drop reason:development"/>
           <p:cNvCxnSpPr/>
           <p:nvPr/>
         </p:nvCxnSpPr>
         <p:spPr>
           <a:xfrm>
-            <a:off x="9947357" y="5747575"/>
+            <a:off x="9947357" y="5856922"/>
             <a:ext cx="856545" cy="0"/>
           </a:xfrm>
           <a:prstGeom prst="line">
@@ -13745,13 +14128,13 @@
       </p:cxnSp>
       <p:sp>
         <p:nvSpPr>
-          <p:cNvPr id="272" name="row:structured drop reason:start"/>
+          <p:cNvPr id="282" name="row:structured drop reason:start"/>
           <p:cNvSpPr/>
           <p:nvPr/>
         </p:nvSpPr>
         <p:spPr>
           <a:xfrm>
-            <a:off x="9915353" y="5715571"/>
+            <a:off x="9915353" y="5824918"/>
             <a:ext cx="64008" cy="64008"/>
           </a:xfrm>
           <a:prstGeom prst="ellipse">
@@ -13789,13 +14172,13 @@
       </p:sp>
       <p:sp>
         <p:nvSpPr>
-          <p:cNvPr id="273" name="row:structured drop reason:release:5.17"/>
+          <p:cNvPr id="283" name="row:structured drop reason:release:5.17"/>
           <p:cNvSpPr/>
           <p:nvPr/>
         </p:nvSpPr>
         <p:spPr>
           <a:xfrm>
-            <a:off x="10760468" y="5704141"/>
+            <a:off x="10760468" y="5813488"/>
             <a:ext cx="86868" cy="86868"/>
           </a:xfrm>
           <a:prstGeom prst="ellipse">
@@ -13833,13 +14216,13 @@
       </p:sp>
       <p:sp>
         <p:nvSpPr>
-          <p:cNvPr id="274" name="row:structured drop reason:label"/>
+          <p:cNvPr id="284" name="row:structured drop reason:label"/>
           <p:cNvSpPr txBox="1"/>
           <p:nvPr/>
         </p:nvSpPr>
         <p:spPr>
           <a:xfrm>
-            <a:off x="10877054" y="5637847"/>
+            <a:off x="10877054" y="5747194"/>
             <a:ext cx="731520" cy="219456"/>
           </a:xfrm>
           <a:prstGeom prst="rect">
@@ -13867,13 +14250,13 @@
       </p:sp>
       <p:sp>
         <p:nvSpPr>
-          <p:cNvPr id="275" name="row:drop-reason expansion:name"/>
+          <p:cNvPr id="285" name="row:drop-reason expansion:name"/>
           <p:cNvSpPr txBox="1"/>
           <p:nvPr/>
         </p:nvSpPr>
         <p:spPr>
           <a:xfrm>
-            <a:off x="1325880" y="5747194"/>
+            <a:off x="1325880" y="5856541"/>
             <a:ext cx="1572768" cy="219456"/>
           </a:xfrm>
           <a:prstGeom prst="rect">
@@ -13901,13 +14284,13 @@
       </p:sp>
       <p:cxnSp>
         <p:nvCxnSpPr>
-          <p:cNvPr id="276" name="row:drop-reason expansion:development"/>
+          <p:cNvPr id="286" name="row:drop-reason expansion:development"/>
           <p:cNvCxnSpPr/>
           <p:nvPr/>
         </p:nvCxnSpPr>
         <p:spPr>
           <a:xfrm>
-            <a:off x="10780604" y="5856922"/>
+            <a:off x="10780604" y="5966269"/>
             <a:ext cx="276143" cy="0"/>
           </a:xfrm>
           <a:prstGeom prst="line">
@@ -13937,13 +14320,13 @@
       </p:cxnSp>
       <p:sp>
         <p:nvSpPr>
-          <p:cNvPr id="277" name="row:drop-reason expansion:start"/>
+          <p:cNvPr id="287" name="row:drop-reason expansion:start"/>
           <p:cNvSpPr/>
           <p:nvPr/>
         </p:nvSpPr>
         <p:spPr>
           <a:xfrm>
-            <a:off x="10748600" y="5824918"/>
+            <a:off x="10748600" y="5934265"/>
             <a:ext cx="64008" cy="64008"/>
           </a:xfrm>
           <a:prstGeom prst="ellipse">
@@ -13981,13 +14364,13 @@
       </p:sp>
       <p:sp>
         <p:nvSpPr>
-          <p:cNvPr id="278" name="row:drop-reason expansion:release:5.19"/>
+          <p:cNvPr id="288" name="row:drop-reason expansion:release:5.19"/>
           <p:cNvSpPr/>
           <p:nvPr/>
         </p:nvSpPr>
         <p:spPr>
           <a:xfrm>
-            <a:off x="11013313" y="5813488"/>
+            <a:off x="11013313" y="5922835"/>
             <a:ext cx="86868" cy="86868"/>
           </a:xfrm>
           <a:prstGeom prst="ellipse">
@@ -14025,13 +14408,13 @@
       </p:sp>
       <p:sp>
         <p:nvSpPr>
-          <p:cNvPr id="279" name="row:drop-reason expansion:label"/>
+          <p:cNvPr id="289" name="row:drop-reason expansion:label"/>
           <p:cNvSpPr txBox="1"/>
           <p:nvPr/>
         </p:nvSpPr>
         <p:spPr>
           <a:xfrm>
-            <a:off x="11129899" y="5747194"/>
+            <a:off x="11129899" y="5856541"/>
             <a:ext cx="731520" cy="219456"/>
           </a:xfrm>
           <a:prstGeom prst="rect">
@@ -14059,199 +14442,7 @@
       </p:sp>
       <p:sp>
         <p:nvSpPr>
-          <p:cNvPr id="280" name="row:queue/NAPI netdev-genl:name"/>
-          <p:cNvSpPr txBox="1"/>
-          <p:nvPr/>
-        </p:nvSpPr>
-        <p:spPr>
-          <a:xfrm>
-            <a:off x="1325880" y="5856541"/>
-            <a:ext cx="1572768" cy="219456"/>
-          </a:xfrm>
-          <a:prstGeom prst="rect">
-            <a:avLst/>
-          </a:prstGeom>
-          <a:noFill/>
-        </p:spPr>
-        <p:txBody>
-          <a:bodyPr wrap="square" anchor="ctr" lIns="0" rIns="0" tIns="0" bIns="0">
-            <a:noAutofit/>
-          </a:bodyPr>
-          <a:lstStyle/>
-          <a:p>
-            <a:pPr algn="r"/>
-            <a:r>
-              <a:rPr sz="850" b="0" i="0">
-                <a:solidFill>
-                  <a:srgbClr val="1F2937"/>
-                </a:solidFill>
-              </a:rPr>
-              <a:t>queue/NAPI netdev-genl</a:t>
-            </a:r>
-          </a:p>
-        </p:txBody>
-      </p:sp>
-      <p:cxnSp>
-        <p:nvCxnSpPr>
-          <p:cNvPr id="281" name="row:queue/NAPI netdev-genl:development"/>
-          <p:cNvCxnSpPr/>
-          <p:nvPr/>
-        </p:nvCxnSpPr>
-        <p:spPr>
-          <a:xfrm>
-            <a:off x="11336102" y="5966269"/>
-            <a:ext cx="839435" cy="0"/>
-          </a:xfrm>
-          <a:prstGeom prst="line">
-            <a:avLst/>
-          </a:prstGeom>
-          <a:ln w="12700">
-            <a:solidFill>
-              <a:srgbClr val="7C3AED"/>
-            </a:solidFill>
-            <a:prstDash val="dash"/>
-          </a:ln>
-        </p:spPr>
-        <p:style>
-          <a:lnRef idx="2">
-            <a:schemeClr val="accent1"/>
-          </a:lnRef>
-          <a:fillRef idx="0">
-            <a:schemeClr val="accent1"/>
-          </a:fillRef>
-          <a:effectRef idx="1">
-            <a:schemeClr val="accent1"/>
-          </a:effectRef>
-          <a:fontRef idx="minor">
-            <a:schemeClr val="tx1"/>
-          </a:fontRef>
-        </p:style>
-      </p:cxnSp>
-      <p:sp>
-        <p:nvSpPr>
-          <p:cNvPr id="282" name="row:queue/NAPI netdev-genl:start"/>
-          <p:cNvSpPr/>
-          <p:nvPr/>
-        </p:nvSpPr>
-        <p:spPr>
-          <a:xfrm>
-            <a:off x="11304098" y="5934265"/>
-            <a:ext cx="64008" cy="64008"/>
-          </a:xfrm>
-          <a:prstGeom prst="ellipse">
-            <a:avLst/>
-          </a:prstGeom>
-          <a:solidFill>
-            <a:srgbClr val="FFFFFF"/>
-          </a:solidFill>
-          <a:ln w="12700">
-            <a:solidFill>
-              <a:srgbClr val="7C3AED"/>
-            </a:solidFill>
-          </a:ln>
-          <a:effectLst/>
-        </p:spPr>
-        <p:style>
-          <a:lnRef idx="1">
-            <a:schemeClr val="accent1"/>
-          </a:lnRef>
-          <a:fillRef idx="3">
-            <a:schemeClr val="accent1"/>
-          </a:fillRef>
-          <a:effectRef idx="2">
-            <a:schemeClr val="accent1"/>
-          </a:effectRef>
-          <a:fontRef idx="minor">
-            <a:schemeClr val="lt1"/>
-          </a:fontRef>
-        </p:style>
-        <p:txBody>
-          <a:bodyPr rtlCol="0" anchor="ctr"/>
-          <a:lstStyle/>
-          <a:p/>
-        </p:txBody>
-      </p:sp>
-      <p:sp>
-        <p:nvSpPr>
-          <p:cNvPr id="283" name="row:queue/NAPI netdev-genl:release:6.8"/>
-          <p:cNvSpPr/>
-          <p:nvPr/>
-        </p:nvSpPr>
-        <p:spPr>
-          <a:xfrm>
-            <a:off x="12132103" y="5922835"/>
-            <a:ext cx="86868" cy="86868"/>
-          </a:xfrm>
-          <a:prstGeom prst="ellipse">
-            <a:avLst/>
-          </a:prstGeom>
-          <a:solidFill>
-            <a:srgbClr val="7C3AED"/>
-          </a:solidFill>
-          <a:ln w="12700">
-            <a:solidFill>
-              <a:srgbClr val="7C3AED"/>
-            </a:solidFill>
-          </a:ln>
-          <a:effectLst/>
-        </p:spPr>
-        <p:style>
-          <a:lnRef idx="1">
-            <a:schemeClr val="accent1"/>
-          </a:lnRef>
-          <a:fillRef idx="3">
-            <a:schemeClr val="accent1"/>
-          </a:fillRef>
-          <a:effectRef idx="2">
-            <a:schemeClr val="accent1"/>
-          </a:effectRef>
-          <a:fontRef idx="minor">
-            <a:schemeClr val="lt1"/>
-          </a:fontRef>
-        </p:style>
-        <p:txBody>
-          <a:bodyPr rtlCol="0" anchor="ctr"/>
-          <a:lstStyle/>
-          <a:p/>
-        </p:txBody>
-      </p:sp>
-      <p:sp>
-        <p:nvSpPr>
-          <p:cNvPr id="284" name="row:queue/NAPI netdev-genl:label"/>
-          <p:cNvSpPr txBox="1"/>
-          <p:nvPr/>
-        </p:nvSpPr>
-        <p:spPr>
-          <a:xfrm>
-            <a:off x="12248689" y="5856541"/>
-            <a:ext cx="731520" cy="219456"/>
-          </a:xfrm>
-          <a:prstGeom prst="rect">
-            <a:avLst/>
-          </a:prstGeom>
-          <a:noFill/>
-        </p:spPr>
-        <p:txBody>
-          <a:bodyPr wrap="square" anchor="ctr" lIns="0" rIns="0" tIns="0" bIns="0">
-            <a:noAutofit/>
-          </a:bodyPr>
-          <a:lstStyle/>
-          <a:p>
-            <a:pPr algn="l"/>
-            <a:r>
-              <a:rPr sz="800" b="1" i="0">
-                <a:solidFill>
-                  <a:srgbClr val="1F2937"/>
-                </a:solidFill>
-              </a:rPr>
-              <a:t>6.8</a:t>
-            </a:r>
-          </a:p>
-        </p:txBody>
-      </p:sp>
-      <p:sp>
-        <p:nvSpPr>
-          <p:cNvPr id="285" name="row:qdisc-drop tracepoint:name"/>
+          <p:cNvPr id="290" name="row:qdisc-drop tracepoint:name"/>
           <p:cNvSpPr txBox="1"/>
           <p:nvPr/>
         </p:nvSpPr>
@@ -14285,7 +14476,7 @@
       </p:sp>
       <p:cxnSp>
         <p:nvCxnSpPr>
-          <p:cNvPr id="286" name="row:qdisc-drop tracepoint:development"/>
+          <p:cNvPr id="291" name="row:qdisc-drop tracepoint:development"/>
           <p:cNvCxnSpPr/>
           <p:nvPr/>
         </p:nvCxnSpPr>
@@ -14321,7 +14512,7 @@
       </p:cxnSp>
       <p:sp>
         <p:nvSpPr>
-          <p:cNvPr id="287" name="row:qdisc-drop tracepoint:start"/>
+          <p:cNvPr id="292" name="row:qdisc-drop tracepoint:start"/>
           <p:cNvSpPr/>
           <p:nvPr/>
         </p:nvSpPr>
@@ -14365,7 +14556,7 @@
       </p:sp>
       <p:sp>
         <p:nvSpPr>
-          <p:cNvPr id="288" name="row:qdisc-drop tracepoint:release:7.1"/>
+          <p:cNvPr id="293" name="row:qdisc-drop tracepoint:release:7.1"/>
           <p:cNvSpPr/>
           <p:nvPr/>
         </p:nvSpPr>
@@ -14409,7 +14600,7 @@
       </p:sp>
       <p:sp>
         <p:nvSpPr>
-          <p:cNvPr id="289" name="row:qdisc-drop tracepoint:label"/>
+          <p:cNvPr id="294" name="row:qdisc-drop tracepoint:label"/>
           <p:cNvSpPr txBox="1"/>
           <p:nvPr/>
         </p:nvSpPr>
@@ -14443,7 +14634,7 @@
       </p:sp>
       <p:sp>
         <p:nvSpPr>
-          <p:cNvPr id="290" name="band-label:DRIVER FRAMEWORK"/>
+          <p:cNvPr id="295" name="band-label:DRIVER FRAMEWORK"/>
           <p:cNvSpPr txBox="1"/>
           <p:nvPr/>
         </p:nvSpPr>
@@ -14478,7 +14669,7 @@
       </p:sp>
       <p:sp>
         <p:nvSpPr>
-          <p:cNvPr id="291" name="row:switchdev:name"/>
+          <p:cNvPr id="296" name="row:switchdev:name"/>
           <p:cNvSpPr txBox="1"/>
           <p:nvPr/>
         </p:nvSpPr>
@@ -14512,7 +14703,7 @@
       </p:sp>
       <p:cxnSp>
         <p:nvCxnSpPr>
-          <p:cNvPr id="292" name="row:switchdev:development"/>
+          <p:cNvPr id="297" name="row:switchdev:development"/>
           <p:cNvCxnSpPr/>
           <p:nvPr/>
         </p:nvCxnSpPr>
@@ -14548,7 +14739,7 @@
       </p:cxnSp>
       <p:sp>
         <p:nvSpPr>
-          <p:cNvPr id="293" name="row:switchdev:start"/>
+          <p:cNvPr id="298" name="row:switchdev:start"/>
           <p:cNvSpPr/>
           <p:nvPr/>
         </p:nvSpPr>
@@ -14592,7 +14783,7 @@
       </p:sp>
       <p:sp>
         <p:nvSpPr>
-          <p:cNvPr id="294" name="row:switchdev:release:3.19"/>
+          <p:cNvPr id="299" name="row:switchdev:release:3.19"/>
           <p:cNvSpPr/>
           <p:nvPr/>
         </p:nvSpPr>
@@ -14636,7 +14827,7 @@
       </p:sp>
       <p:sp>
         <p:nvSpPr>
-          <p:cNvPr id="295" name="row:switchdev:label"/>
+          <p:cNvPr id="300" name="row:switchdev:label"/>
           <p:cNvSpPr txBox="1"/>
           <p:nvPr/>
         </p:nvSpPr>
@@ -14670,7 +14861,7 @@
       </p:sp>
       <p:sp>
         <p:nvSpPr>
-          <p:cNvPr id="296" name="row:devlink:name"/>
+          <p:cNvPr id="301" name="row:devlink:name"/>
           <p:cNvSpPr txBox="1"/>
           <p:nvPr/>
         </p:nvSpPr>
@@ -14704,7 +14895,7 @@
       </p:sp>
       <p:cxnSp>
         <p:nvCxnSpPr>
-          <p:cNvPr id="297" name="row:devlink:development"/>
+          <p:cNvPr id="302" name="row:devlink:development"/>
           <p:cNvCxnSpPr/>
           <p:nvPr/>
         </p:nvCxnSpPr>
@@ -14740,7 +14931,7 @@
       </p:cxnSp>
       <p:sp>
         <p:nvSpPr>
-          <p:cNvPr id="298" name="row:devlink:start"/>
+          <p:cNvPr id="303" name="row:devlink:start"/>
           <p:cNvSpPr/>
           <p:nvPr/>
         </p:nvSpPr>
@@ -14784,7 +14975,7 @@
       </p:sp>
       <p:sp>
         <p:nvSpPr>
-          <p:cNvPr id="299" name="row:devlink:release:4.6"/>
+          <p:cNvPr id="304" name="row:devlink:release:4.6"/>
           <p:cNvSpPr/>
           <p:nvPr/>
         </p:nvSpPr>
@@ -14828,7 +15019,7 @@
       </p:sp>
       <p:sp>
         <p:nvSpPr>
-          <p:cNvPr id="300" name="row:devlink:label"/>
+          <p:cNvPr id="305" name="row:devlink:label"/>
           <p:cNvSpPr txBox="1"/>
           <p:nvPr/>
         </p:nvSpPr>
@@ -14862,7 +15053,7 @@
       </p:sp>
       <p:sp>
         <p:nvSpPr>
-          <p:cNvPr id="301" name="row:devlink health:name"/>
+          <p:cNvPr id="306" name="row:devlink health:name"/>
           <p:cNvSpPr txBox="1"/>
           <p:nvPr/>
         </p:nvSpPr>
@@ -14896,7 +15087,7 @@
       </p:sp>
       <p:cxnSp>
         <p:nvCxnSpPr>
-          <p:cNvPr id="302" name="row:devlink health:development"/>
+          <p:cNvPr id="307" name="row:devlink health:development"/>
           <p:cNvCxnSpPr/>
           <p:nvPr/>
         </p:nvCxnSpPr>
@@ -14932,7 +15123,7 @@
       </p:cxnSp>
       <p:sp>
         <p:nvSpPr>
-          <p:cNvPr id="303" name="row:devlink health:start"/>
+          <p:cNvPr id="308" name="row:devlink health:start"/>
           <p:cNvSpPr/>
           <p:nvPr/>
         </p:nvSpPr>
@@ -14976,7 +15167,7 @@
       </p:sp>
       <p:sp>
         <p:nvSpPr>
-          <p:cNvPr id="304" name="row:devlink health:release:5.1"/>
+          <p:cNvPr id="309" name="row:devlink health:release:5.1"/>
           <p:cNvSpPr/>
           <p:nvPr/>
         </p:nvSpPr>
@@ -15020,7 +15211,7 @@
       </p:sp>
       <p:sp>
         <p:nvSpPr>
-          <p:cNvPr id="305" name="row:devlink health:label"/>
+          <p:cNvPr id="310" name="row:devlink health:label"/>
           <p:cNvSpPr txBox="1"/>
           <p:nvPr/>
         </p:nvSpPr>
@@ -15054,7 +15245,7 @@
       </p:sp>
       <p:sp>
         <p:nvSpPr>
-          <p:cNvPr id="306" name="row:phylink:name"/>
+          <p:cNvPr id="311" name="row:phylink:name"/>
           <p:cNvSpPr txBox="1"/>
           <p:nvPr/>
         </p:nvSpPr>
@@ -15088,7 +15279,7 @@
       </p:sp>
       <p:cxnSp>
         <p:nvCxnSpPr>
-          <p:cNvPr id="307" name="row:phylink:development"/>
+          <p:cNvPr id="312" name="row:phylink:development"/>
           <p:cNvCxnSpPr/>
           <p:nvPr/>
         </p:nvCxnSpPr>
@@ -15124,7 +15315,7 @@
       </p:cxnSp>
       <p:sp>
         <p:nvSpPr>
-          <p:cNvPr id="308" name="row:phylink:start"/>
+          <p:cNvPr id="313" name="row:phylink:start"/>
           <p:cNvSpPr/>
           <p:nvPr/>
         </p:nvSpPr>
@@ -15168,7 +15359,7 @@
       </p:sp>
       <p:sp>
         <p:nvSpPr>
-          <p:cNvPr id="309" name="row:phylink:release:4.14"/>
+          <p:cNvPr id="314" name="row:phylink:release:4.14"/>
           <p:cNvSpPr/>
           <p:nvPr/>
         </p:nvSpPr>
@@ -15212,7 +15403,7 @@
       </p:sp>
       <p:sp>
         <p:nvSpPr>
-          <p:cNvPr id="310" name="row:phylink:label"/>
+          <p:cNvPr id="315" name="row:phylink:label"/>
           <p:cNvSpPr txBox="1"/>
           <p:nvPr/>
         </p:nvSpPr>
@@ -15246,7 +15437,7 @@
       </p:sp>
       <p:sp>
         <p:nvSpPr>
-          <p:cNvPr id="311" name="row:Net DIM:name"/>
+          <p:cNvPr id="316" name="row:Net DIM:name"/>
           <p:cNvSpPr txBox="1"/>
           <p:nvPr/>
         </p:nvSpPr>
@@ -15280,7 +15471,7 @@
       </p:sp>
       <p:cxnSp>
         <p:nvCxnSpPr>
-          <p:cNvPr id="312" name="row:Net DIM:development"/>
+          <p:cNvPr id="317" name="row:Net DIM:development"/>
           <p:cNvCxnSpPr/>
           <p:nvPr/>
         </p:nvCxnSpPr>
@@ -15316,7 +15507,7 @@
       </p:cxnSp>
       <p:sp>
         <p:nvSpPr>
-          <p:cNvPr id="313" name="row:Net DIM:start"/>
+          <p:cNvPr id="318" name="row:Net DIM:start"/>
           <p:cNvSpPr/>
           <p:nvPr/>
         </p:nvSpPr>
@@ -15360,7 +15551,7 @@
       </p:sp>
       <p:sp>
         <p:nvSpPr>
-          <p:cNvPr id="314" name="row:Net DIM:release:4.16"/>
+          <p:cNvPr id="319" name="row:Net DIM:release:4.16"/>
           <p:cNvSpPr/>
           <p:nvPr/>
         </p:nvSpPr>
@@ -15404,7 +15595,7 @@
       </p:sp>
       <p:sp>
         <p:nvSpPr>
-          <p:cNvPr id="315" name="row:Net DIM:label"/>
+          <p:cNvPr id="320" name="row:Net DIM:label"/>
           <p:cNvSpPr txBox="1"/>
           <p:nvPr/>
         </p:nvSpPr>
@@ -15438,7 +15629,7 @@
       </p:sp>
       <p:sp>
         <p:nvSpPr>
-          <p:cNvPr id="316" name="row:netdevsim:name"/>
+          <p:cNvPr id="321" name="row:netdevsim:name"/>
           <p:cNvSpPr txBox="1"/>
           <p:nvPr/>
         </p:nvSpPr>
@@ -15472,7 +15663,7 @@
       </p:sp>
       <p:cxnSp>
         <p:nvCxnSpPr>
-          <p:cNvPr id="317" name="row:netdevsim:development"/>
+          <p:cNvPr id="322" name="row:netdevsim:development"/>
           <p:cNvCxnSpPr/>
           <p:nvPr/>
         </p:nvCxnSpPr>
@@ -15508,7 +15699,7 @@
       </p:cxnSp>
       <p:sp>
         <p:nvSpPr>
-          <p:cNvPr id="318" name="row:netdevsim:start"/>
+          <p:cNvPr id="323" name="row:netdevsim:start"/>
           <p:cNvSpPr/>
           <p:nvPr/>
         </p:nvSpPr>
@@ -15552,7 +15743,7 @@
       </p:sp>
       <p:sp>
         <p:nvSpPr>
-          <p:cNvPr id="319" name="row:netdevsim:release:4.16"/>
+          <p:cNvPr id="324" name="row:netdevsim:release:4.16"/>
           <p:cNvSpPr/>
           <p:nvPr/>
         </p:nvSpPr>
@@ -15596,7 +15787,7 @@
       </p:sp>
       <p:sp>
         <p:nvSpPr>
-          <p:cNvPr id="320" name="row:netdevsim:label"/>
+          <p:cNvPr id="325" name="row:netdevsim:label"/>
           <p:cNvSpPr txBox="1"/>
           <p:nvPr/>
         </p:nvSpPr>
@@ -15630,7 +15821,7 @@
       </p:sp>
       <p:sp>
         <p:nvSpPr>
-          <p:cNvPr id="321" name="row:ethtool netlink:name"/>
+          <p:cNvPr id="326" name="row:ethtool netlink:name"/>
           <p:cNvSpPr txBox="1"/>
           <p:nvPr/>
         </p:nvSpPr>
@@ -15664,7 +15855,7 @@
       </p:sp>
       <p:cxnSp>
         <p:nvCxnSpPr>
-          <p:cNvPr id="322" name="row:ethtool netlink:development"/>
+          <p:cNvPr id="327" name="row:ethtool netlink:development"/>
           <p:cNvCxnSpPr/>
           <p:nvPr/>
         </p:nvCxnSpPr>
@@ -15700,7 +15891,7 @@
       </p:cxnSp>
       <p:sp>
         <p:nvSpPr>
-          <p:cNvPr id="323" name="row:ethtool netlink:start"/>
+          <p:cNvPr id="328" name="row:ethtool netlink:start"/>
           <p:cNvSpPr/>
           <p:nvPr/>
         </p:nvSpPr>
@@ -15744,7 +15935,7 @@
       </p:sp>
       <p:sp>
         <p:nvSpPr>
-          <p:cNvPr id="324" name="row:ethtool netlink:release:5.6"/>
+          <p:cNvPr id="329" name="row:ethtool netlink:release:5.6"/>
           <p:cNvSpPr/>
           <p:nvPr/>
         </p:nvSpPr>
@@ -15788,7 +15979,7 @@
       </p:sp>
       <p:sp>
         <p:nvSpPr>
-          <p:cNvPr id="325" name="row:ethtool netlink:label"/>
+          <p:cNvPr id="330" name="row:ethtool netlink:label"/>
           <p:cNvSpPr txBox="1"/>
           <p:nvPr/>
         </p:nvSpPr>
@@ -15822,7 +16013,7 @@
       </p:sp>
       <p:sp>
         <p:nvSpPr>
-          <p:cNvPr id="326" name="row:auxiliary bus:name"/>
+          <p:cNvPr id="331" name="row:auxiliary bus:name"/>
           <p:cNvSpPr txBox="1"/>
           <p:nvPr/>
         </p:nvSpPr>
@@ -15856,7 +16047,7 @@
       </p:sp>
       <p:cxnSp>
         <p:nvCxnSpPr>
-          <p:cNvPr id="327" name="row:auxiliary bus:development"/>
+          <p:cNvPr id="332" name="row:auxiliary bus:development"/>
           <p:cNvCxnSpPr/>
           <p:nvPr/>
         </p:nvCxnSpPr>
@@ -15892,7 +16083,7 @@
       </p:cxnSp>
       <p:sp>
         <p:nvSpPr>
-          <p:cNvPr id="328" name="row:auxiliary bus:start"/>
+          <p:cNvPr id="333" name="row:auxiliary bus:start"/>
           <p:cNvSpPr/>
           <p:nvPr/>
         </p:nvSpPr>
@@ -15936,7 +16127,7 @@
       </p:sp>
       <p:sp>
         <p:nvSpPr>
-          <p:cNvPr id="329" name="row:auxiliary bus:release:5.11"/>
+          <p:cNvPr id="334" name="row:auxiliary bus:release:5.11"/>
           <p:cNvSpPr/>
           <p:nvPr/>
         </p:nvSpPr>
@@ -15980,7 +16171,7 @@
       </p:sp>
       <p:sp>
         <p:nvSpPr>
-          <p:cNvPr id="330" name="row:auxiliary bus:label"/>
+          <p:cNvPr id="335" name="row:auxiliary bus:label"/>
           <p:cNvSpPr txBox="1"/>
           <p:nvPr/>
         </p:nvSpPr>
@@ -16014,7 +16205,7 @@
       </p:sp>
       <p:sp>
         <p:nvSpPr>
-          <p:cNvPr id="331" name="row:threaded NAPI:name"/>
+          <p:cNvPr id="336" name="row:threaded NAPI:name"/>
           <p:cNvSpPr txBox="1"/>
           <p:nvPr/>
         </p:nvSpPr>
@@ -16048,7 +16239,7 @@
       </p:sp>
       <p:cxnSp>
         <p:nvCxnSpPr>
-          <p:cNvPr id="332" name="row:threaded NAPI:development"/>
+          <p:cNvPr id="337" name="row:threaded NAPI:development"/>
           <p:cNvCxnSpPr/>
           <p:nvPr/>
         </p:nvCxnSpPr>
@@ -16084,7 +16275,7 @@
       </p:cxnSp>
       <p:sp>
         <p:nvSpPr>
-          <p:cNvPr id="333" name="row:threaded NAPI:start"/>
+          <p:cNvPr id="338" name="row:threaded NAPI:start"/>
           <p:cNvSpPr/>
           <p:nvPr/>
         </p:nvSpPr>
@@ -16128,7 +16319,7 @@
       </p:sp>
       <p:sp>
         <p:nvSpPr>
-          <p:cNvPr id="334" name="row:threaded NAPI:release:5.12"/>
+          <p:cNvPr id="339" name="row:threaded NAPI:release:5.12"/>
           <p:cNvSpPr/>
           <p:nvPr/>
         </p:nvSpPr>
@@ -16172,7 +16363,7 @@
       </p:sp>
       <p:sp>
         <p:nvSpPr>
-          <p:cNvPr id="335" name="row:threaded NAPI:label"/>
+          <p:cNvPr id="340" name="row:threaded NAPI:label"/>
           <p:cNvSpPr txBox="1"/>
           <p:nvPr/>
         </p:nvSpPr>
@@ -16206,7 +16397,7 @@
       </p:sp>
       <p:sp>
         <p:nvSpPr>
-          <p:cNvPr id="336" name="row:Rust phylib:name"/>
+          <p:cNvPr id="341" name="row:Rust phylib:name"/>
           <p:cNvSpPr txBox="1"/>
           <p:nvPr/>
         </p:nvSpPr>
@@ -16240,7 +16431,7 @@
       </p:sp>
       <p:cxnSp>
         <p:nvCxnSpPr>
-          <p:cNvPr id="337" name="row:Rust phylib:development"/>
+          <p:cNvPr id="342" name="row:Rust phylib:development"/>
           <p:cNvCxnSpPr/>
           <p:nvPr/>
         </p:nvCxnSpPr>
@@ -16276,7 +16467,7 @@
       </p:cxnSp>
       <p:sp>
         <p:nvSpPr>
-          <p:cNvPr id="338" name="row:Rust phylib:start"/>
+          <p:cNvPr id="343" name="row:Rust phylib:start"/>
           <p:cNvSpPr/>
           <p:nvPr/>
         </p:nvSpPr>
@@ -16320,7 +16511,7 @@
       </p:sp>
       <p:sp>
         <p:nvSpPr>
-          <p:cNvPr id="339" name="row:Rust phylib:release:6.8"/>
+          <p:cNvPr id="344" name="row:Rust phylib:release:6.8"/>
           <p:cNvSpPr/>
           <p:nvPr/>
         </p:nvSpPr>
@@ -16364,7 +16555,7 @@
       </p:sp>
       <p:sp>
         <p:nvSpPr>
-          <p:cNvPr id="340" name="row:Rust phylib:label"/>
+          <p:cNvPr id="345" name="row:Rust phylib:label"/>
           <p:cNvSpPr txBox="1"/>
           <p:nvPr/>
         </p:nvSpPr>
@@ -16398,7 +16589,7 @@
       </p:sp>
       <p:sp>
         <p:nvSpPr>
-          <p:cNvPr id="341" name="legend:title"/>
+          <p:cNvPr id="346" name="legend:title"/>
           <p:cNvSpPr txBox="1"/>
           <p:nvPr/>
         </p:nvSpPr>
@@ -16432,7 +16623,7 @@
       </p:sp>
       <p:sp>
         <p:nvSpPr>
-          <p:cNvPr id="342" name="legend:start"/>
+          <p:cNvPr id="347" name="legend:start"/>
           <p:cNvSpPr/>
           <p:nvPr/>
         </p:nvSpPr>
@@ -16476,7 +16667,7 @@
       </p:sp>
       <p:cxnSp>
         <p:nvCxnSpPr>
-          <p:cNvPr id="343" name="legend:dev"/>
+          <p:cNvPr id="348" name="legend:dev"/>
           <p:cNvCxnSpPr/>
           <p:nvPr/>
         </p:nvCxnSpPr>
@@ -16512,7 +16703,7 @@
       </p:cxnSp>
       <p:sp>
         <p:nvSpPr>
-          <p:cNvPr id="344" name="legend:release"/>
+          <p:cNvPr id="349" name="legend:release"/>
           <p:cNvSpPr/>
           <p:nvPr/>
         </p:nvSpPr>
@@ -16556,7 +16747,7 @@
       </p:sp>
       <p:sp>
         <p:nvSpPr>
-          <p:cNvPr id="345" name="legend:t1"/>
+          <p:cNvPr id="350" name="legend:t1"/>
           <p:cNvSpPr txBox="1"/>
           <p:nvPr/>
         </p:nvSpPr>
@@ -16590,7 +16781,7 @@
       </p:sp>
       <p:sp>
         <p:nvSpPr>
-          <p:cNvPr id="346" name="legend:m1"/>
+          <p:cNvPr id="351" name="legend:m1"/>
           <p:cNvSpPr/>
           <p:nvPr/>
         </p:nvSpPr>
@@ -16634,7 +16825,7 @@
       </p:sp>
       <p:cxnSp>
         <p:nvCxnSpPr>
-          <p:cNvPr id="347" name="legend:m-line"/>
+          <p:cNvPr id="352" name="legend:m-line"/>
           <p:cNvCxnSpPr/>
           <p:nvPr/>
         </p:nvCxnSpPr>
@@ -16669,7 +16860,7 @@
       </p:cxnSp>
       <p:sp>
         <p:nvSpPr>
-          <p:cNvPr id="348" name="legend:m2"/>
+          <p:cNvPr id="353" name="legend:m2"/>
           <p:cNvSpPr/>
           <p:nvPr/>
         </p:nvSpPr>
@@ -16713,7 +16904,7 @@
       </p:sp>
       <p:sp>
         <p:nvSpPr>
-          <p:cNvPr id="349" name="legend:t2"/>
+          <p:cNvPr id="354" name="legend:t2"/>
           <p:cNvSpPr txBox="1"/>
           <p:nvPr/>
         </p:nvSpPr>
@@ -16747,7 +16938,7 @@
       </p:sp>
       <p:sp>
         <p:nvSpPr>
-          <p:cNvPr id="350" name="legend:era"/>
+          <p:cNvPr id="355" name="legend:era"/>
           <p:cNvSpPr/>
           <p:nvPr/>
         </p:nvSpPr>
@@ -16791,7 +16982,7 @@
       </p:sp>
       <p:sp>
         <p:nvSpPr>
-          <p:cNvPr id="351" name="legend:t3"/>
+          <p:cNvPr id="356" name="legend:t3"/>
           <p:cNvSpPr txBox="1"/>
           <p:nvPr/>
         </p:nvSpPr>
@@ -16825,7 +17016,7 @@
       </p:sp>
       <p:cxnSp>
         <p:nvCxnSpPr>
-          <p:cNvPr id="352" name="legend:ga"/>
+          <p:cNvPr id="357" name="legend:ga"/>
           <p:cNvCxnSpPr/>
           <p:nvPr/>
         </p:nvCxnSpPr>
@@ -16861,7 +17052,7 @@
       </p:cxnSp>
       <p:sp>
         <p:nvSpPr>
-          <p:cNvPr id="353" name="legend:t4"/>
+          <p:cNvPr id="358" name="legend:t4"/>
           <p:cNvSpPr txBox="1"/>
           <p:nvPr/>
         </p:nvSpPr>
@@ -16895,7 +17086,7 @@
       </p:sp>
       <p:cxnSp>
         <p:nvCxnSpPr>
-          <p:cNvPr id="354" name="legend:lineage-down"/>
+          <p:cNvPr id="359" name="legend:lineage-down"/>
           <p:cNvCxnSpPr/>
           <p:nvPr/>
         </p:nvCxnSpPr>
@@ -16930,7 +17121,7 @@
       </p:cxnSp>
       <p:cxnSp>
         <p:nvCxnSpPr>
-          <p:cNvPr id="355" name="legend:lineage-across"/>
+          <p:cNvPr id="360" name="legend:lineage-across"/>
           <p:cNvCxnSpPr/>
           <p:nvPr/>
         </p:nvCxnSpPr>
@@ -16966,7 +17157,7 @@
       </p:cxnSp>
       <p:sp>
         <p:nvSpPr>
-          <p:cNvPr id="356" name="legend:t5"/>
+          <p:cNvPr id="361" name="legend:t5"/>
           <p:cNvSpPr txBox="1"/>
           <p:nvPr/>
         </p:nvSpPr>
@@ -17000,7 +17191,7 @@
       </p:sp>
       <p:sp>
         <p:nvSpPr>
-          <p:cNvPr id="357" name="legend:offchart"/>
+          <p:cNvPr id="362" name="legend:offchart"/>
           <p:cNvSpPr/>
           <p:nvPr/>
         </p:nvSpPr>
@@ -17042,7 +17233,7 @@
       </p:sp>
       <p:sp>
         <p:nvSpPr>
-          <p:cNvPr id="358" name="legend:t6"/>
+          <p:cNvPr id="363" name="legend:t6"/>
           <p:cNvSpPr txBox="1"/>
           <p:nvPr/>
         </p:nvSpPr>
@@ -17076,7 +17267,7 @@
       </p:sp>
       <p:sp>
         <p:nvSpPr>
-          <p:cNvPr id="359" name="notes:left"/>
+          <p:cNvPr id="364" name="notes:left"/>
           <p:cNvSpPr txBox="1"/>
           <p:nvPr/>
         </p:nvSpPr>
@@ -17121,7 +17312,7 @@
       </p:sp>
       <p:sp>
         <p:nvSpPr>
-          <p:cNvPr id="360" name="notes:right"/>
+          <p:cNvPr id="365" name="notes:right"/>
           <p:cNvSpPr txBox="1"/>
           <p:nvPr/>
         </p:nvSpPr>

--- a/linux-networking-feature-evolution.pptx
+++ b/linux-networking-feature-evolution.pptx
@@ -3733,8 +3733,8 @@
         </p:nvSpPr>
         <p:spPr>
           <a:xfrm>
-            <a:off x="228600" y="2557272"/>
-            <a:ext cx="14173200" cy="1130046"/>
+            <a:off x="228600" y="2514600"/>
+            <a:ext cx="14173200" cy="1225296"/>
           </a:xfrm>
           <a:prstGeom prst="roundRect">
             <a:avLst>
@@ -4005,7 +4005,7 @@
             <a:avLst/>
           </a:prstGeom>
           <a:solidFill>
-            <a:srgbClr val="334155">
+            <a:srgbClr val="E8EEF5">
               <a:alpha val="7000"/>
             </a:srgbClr>
           </a:solidFill>
@@ -4139,7 +4139,7 @@
             <a:avLst/>
           </a:prstGeom>
           <a:solidFill>
-            <a:srgbClr val="334155">
+            <a:srgbClr val="E8EEF5">
               <a:alpha val="7000"/>
             </a:srgbClr>
           </a:solidFill>
@@ -8664,8 +8664,8 @@
         </p:nvSpPr>
         <p:spPr>
           <a:xfrm>
-            <a:off x="384048" y="2557272"/>
-            <a:ext cx="1051560" cy="1130046"/>
+            <a:off x="384048" y="2514600"/>
+            <a:ext cx="1051560" cy="1225296"/>
           </a:xfrm>
           <a:prstGeom prst="rect">
             <a:avLst/>
@@ -16769,12 +16769,12 @@
           <a:p>
             <a:pPr algn="l"/>
             <a:r>
-              <a:rPr sz="800" b="0" i="0">
-                <a:solidFill>
-                  <a:srgbClr val="64748B"/>
+              <a:rPr sz="650">
+                <a:solidFill>
+                  <a:srgbClr val="475569"/>
                 </a:solidFill>
               </a:rPr>
-              <a:t>approx. development start → first canonical release</a:t>
+              <a:t>~X.Y  ○  approx. development start → ● first canonical release</a:t>
             </a:r>
           </a:p>
         </p:txBody>
@@ -17351,6 +17351,1616 @@
                 </a:solidFill>
               </a:rPr>
               <a:t>· Rows are grouped by architecture axis. Cross-cutting domains (e.g. BBR, MPTCP, kTLS) and netmem / memory providers (provenance still open) have no row.</a:t>
+            </a:r>
+          </a:p>
+        </p:txBody>
+      </p:sp>
+      <p:sp>
+        <p:nvSpPr>
+          <p:cNvPr id="366" name="row:DQL / BQL:start-label"/>
+          <p:cNvSpPr txBox="1"/>
+          <p:nvPr/>
+        </p:nvSpPr>
+        <p:spPr>
+          <a:xfrm>
+            <a:off x="3026664" y="1581721"/>
+            <a:ext cx="347472" cy="164592"/>
+          </a:xfrm>
+          <a:prstGeom prst="rect">
+            <a:avLst/>
+          </a:prstGeom>
+          <a:noFill/>
+        </p:spPr>
+        <p:txBody>
+          <a:bodyPr wrap="none" lIns="0" rIns="0" tIns="0" bIns="0">
+            <a:spAutoFit/>
+          </a:bodyPr>
+          <a:lstStyle/>
+          <a:p>
+            <a:pPr algn="r">
+              <a:defRPr sz="530" i="1">
+                <a:solidFill>
+                  <a:srgbClr val="475569"/>
+                </a:solidFill>
+              </a:defRPr>
+            </a:pPr>
+            <a:r>
+              <a:t>~pre-3.0</a:t>
+            </a:r>
+          </a:p>
+        </p:txBody>
+      </p:sp>
+      <p:sp>
+        <p:nvSpPr>
+          <p:cNvPr id="367" name="row:TSQ:start-label"/>
+          <p:cNvSpPr txBox="1"/>
+          <p:nvPr/>
+        </p:nvSpPr>
+        <p:spPr>
+          <a:xfrm>
+            <a:off x="3272809" y="1691068"/>
+            <a:ext cx="347472" cy="164592"/>
+          </a:xfrm>
+          <a:prstGeom prst="rect">
+            <a:avLst/>
+          </a:prstGeom>
+          <a:noFill/>
+        </p:spPr>
+        <p:txBody>
+          <a:bodyPr wrap="none" lIns="0" rIns="0" tIns="0" bIns="0">
+            <a:spAutoFit/>
+          </a:bodyPr>
+          <a:lstStyle/>
+          <a:p>
+            <a:pPr algn="r">
+              <a:defRPr sz="530" i="1">
+                <a:solidFill>
+                  <a:srgbClr val="475569"/>
+                </a:solidFill>
+              </a:defRPr>
+            </a:pPr>
+            <a:r>
+              <a:t>~3.1</a:t>
+            </a:r>
+          </a:p>
+        </p:txBody>
+      </p:sp>
+      <p:sp>
+        <p:nvSpPr>
+          <p:cNvPr id="368" name="row:SO_BUSY_POLL:start-label"/>
+          <p:cNvSpPr txBox="1"/>
+          <p:nvPr/>
+        </p:nvSpPr>
+        <p:spPr>
+          <a:xfrm>
+            <a:off x="3967181" y="1800415"/>
+            <a:ext cx="347472" cy="164592"/>
+          </a:xfrm>
+          <a:prstGeom prst="rect">
+            <a:avLst/>
+          </a:prstGeom>
+          <a:noFill/>
+        </p:spPr>
+        <p:txBody>
+          <a:bodyPr wrap="none" lIns="0" rIns="0" tIns="0" bIns="0">
+            <a:spAutoFit/>
+          </a:bodyPr>
+          <a:lstStyle/>
+          <a:p>
+            <a:pPr algn="r">
+              <a:defRPr sz="530" i="1">
+                <a:solidFill>
+                  <a:srgbClr val="475569"/>
+                </a:solidFill>
+              </a:defRPr>
+            </a:pPr>
+            <a:r>
+              <a:t>~3.7</a:t>
+            </a:r>
+          </a:p>
+        </p:txBody>
+      </p:sp>
+      <p:sp>
+        <p:nvSpPr>
+          <p:cNvPr id="369" name="row:sch_fq / TCP pacing:start-label"/>
+          <p:cNvSpPr txBox="1"/>
+          <p:nvPr/>
+        </p:nvSpPr>
+        <p:spPr>
+          <a:xfrm>
+            <a:off x="3828307" y="1909761"/>
+            <a:ext cx="347472" cy="164592"/>
+          </a:xfrm>
+          <a:prstGeom prst="rect">
+            <a:avLst/>
+          </a:prstGeom>
+          <a:noFill/>
+        </p:spPr>
+        <p:txBody>
+          <a:bodyPr wrap="none" lIns="0" rIns="0" tIns="0" bIns="0">
+            <a:spAutoFit/>
+          </a:bodyPr>
+          <a:lstStyle/>
+          <a:p>
+            <a:pPr algn="r">
+              <a:defRPr sz="530" i="1">
+                <a:solidFill>
+                  <a:srgbClr val="475569"/>
+                </a:solidFill>
+              </a:defRPr>
+            </a:pPr>
+            <a:r>
+              <a:t>~3.6</a:t>
+            </a:r>
+          </a:p>
+        </p:txBody>
+      </p:sp>
+      <p:sp>
+        <p:nvSpPr>
+          <p:cNvPr id="370" name="row:SO_TXTIME / EDT / taprio:start-label"/>
+          <p:cNvSpPr txBox="1"/>
+          <p:nvPr/>
+        </p:nvSpPr>
+        <p:spPr>
+          <a:xfrm>
+            <a:off x="6883546" y="2019108"/>
+            <a:ext cx="347472" cy="164592"/>
+          </a:xfrm>
+          <a:prstGeom prst="rect">
+            <a:avLst/>
+          </a:prstGeom>
+          <a:noFill/>
+        </p:spPr>
+        <p:txBody>
+          <a:bodyPr wrap="none" lIns="0" rIns="0" tIns="0" bIns="0">
+            <a:spAutoFit/>
+          </a:bodyPr>
+          <a:lstStyle/>
+          <a:p>
+            <a:pPr algn="r">
+              <a:defRPr sz="530" i="1">
+                <a:solidFill>
+                  <a:srgbClr val="475569"/>
+                </a:solidFill>
+              </a:defRPr>
+            </a:pPr>
+            <a:r>
+              <a:t>~4.10</a:t>
+            </a:r>
+          </a:p>
+        </p:txBody>
+      </p:sp>
+      <p:sp>
+        <p:nvSpPr>
+          <p:cNvPr id="371" name="row:BIG TCP:start-label"/>
+          <p:cNvSpPr txBox="1"/>
+          <p:nvPr/>
+        </p:nvSpPr>
+        <p:spPr>
+          <a:xfrm>
+            <a:off x="9661036" y="2128456"/>
+            <a:ext cx="347472" cy="164592"/>
+          </a:xfrm>
+          <a:prstGeom prst="rect">
+            <a:avLst/>
+          </a:prstGeom>
+          <a:noFill/>
+        </p:spPr>
+        <p:txBody>
+          <a:bodyPr wrap="none" lIns="0" rIns="0" tIns="0" bIns="0">
+            <a:spAutoFit/>
+          </a:bodyPr>
+          <a:lstStyle/>
+          <a:p>
+            <a:pPr algn="r">
+              <a:defRPr sz="530" i="1">
+                <a:solidFill>
+                  <a:srgbClr val="475569"/>
+                </a:solidFill>
+              </a:defRPr>
+            </a:pPr>
+            <a:r>
+              <a:t>~5.12</a:t>
+            </a:r>
+          </a:p>
+        </p:txBody>
+      </p:sp>
+      <p:sp>
+        <p:nvSpPr>
+          <p:cNvPr id="372" name="row:cake_mq:start-label"/>
+          <p:cNvSpPr txBox="1"/>
+          <p:nvPr/>
+        </p:nvSpPr>
+        <p:spPr>
+          <a:xfrm>
+            <a:off x="12299651" y="2347150"/>
+            <a:ext cx="347472" cy="164592"/>
+          </a:xfrm>
+          <a:prstGeom prst="rect">
+            <a:avLst/>
+          </a:prstGeom>
+          <a:noFill/>
+        </p:spPr>
+        <p:txBody>
+          <a:bodyPr wrap="none" lIns="0" rIns="0" tIns="0" bIns="0">
+            <a:spAutoFit/>
+          </a:bodyPr>
+          <a:lstStyle/>
+          <a:p>
+            <a:pPr algn="r">
+              <a:defRPr sz="530" i="1">
+                <a:solidFill>
+                  <a:srgbClr val="475569"/>
+                </a:solidFill>
+              </a:defRPr>
+            </a:pPr>
+            <a:r>
+              <a:t>~6.13</a:t>
+            </a:r>
+          </a:p>
+        </p:txBody>
+      </p:sp>
+      <p:sp>
+        <p:nvSpPr>
+          <p:cNvPr id="373" name="row:eBPF foundation:start-label"/>
+          <p:cNvSpPr txBox="1"/>
+          <p:nvPr/>
+        </p:nvSpPr>
+        <p:spPr>
+          <a:xfrm>
+            <a:off x="4314367" y="2547937"/>
+            <a:ext cx="347472" cy="164592"/>
+          </a:xfrm>
+          <a:prstGeom prst="rect">
+            <a:avLst/>
+          </a:prstGeom>
+          <a:noFill/>
+        </p:spPr>
+        <p:txBody>
+          <a:bodyPr wrap="none" lIns="0" rIns="0" tIns="0" bIns="0">
+            <a:spAutoFit/>
+          </a:bodyPr>
+          <a:lstStyle/>
+          <a:p>
+            <a:pPr algn="r">
+              <a:defRPr sz="530" i="1">
+                <a:solidFill>
+                  <a:srgbClr val="475569"/>
+                </a:solidFill>
+              </a:defRPr>
+            </a:pPr>
+            <a:r>
+              <a:t>~3.10</a:t>
+            </a:r>
+          </a:p>
+        </p:txBody>
+      </p:sp>
+      <p:sp>
+        <p:nvSpPr>
+          <p:cNvPr id="374" name="row:TC BPF:start-label"/>
+          <p:cNvSpPr txBox="1"/>
+          <p:nvPr/>
+        </p:nvSpPr>
+        <p:spPr>
+          <a:xfrm>
+            <a:off x="5217052" y="2657283"/>
+            <a:ext cx="347472" cy="164592"/>
+          </a:xfrm>
+          <a:prstGeom prst="rect">
+            <a:avLst/>
+          </a:prstGeom>
+          <a:noFill/>
+        </p:spPr>
+        <p:txBody>
+          <a:bodyPr wrap="none" lIns="0" rIns="0" tIns="0" bIns="0">
+            <a:spAutoFit/>
+          </a:bodyPr>
+          <a:lstStyle/>
+          <a:p>
+            <a:pPr algn="r">
+              <a:defRPr sz="530" i="1">
+                <a:solidFill>
+                  <a:srgbClr val="475569"/>
+                </a:solidFill>
+              </a:defRPr>
+            </a:pPr>
+            <a:r>
+              <a:t>~3.17</a:t>
+            </a:r>
+          </a:p>
+        </p:txBody>
+      </p:sp>
+      <p:sp>
+        <p:nvSpPr>
+          <p:cNvPr id="375" name="row:TCX:start-label"/>
+          <p:cNvSpPr txBox="1"/>
+          <p:nvPr/>
+        </p:nvSpPr>
+        <p:spPr>
+          <a:xfrm>
+            <a:off x="10633157" y="2766630"/>
+            <a:ext cx="347472" cy="164592"/>
+          </a:xfrm>
+          <a:prstGeom prst="rect">
+            <a:avLst/>
+          </a:prstGeom>
+          <a:noFill/>
+        </p:spPr>
+        <p:txBody>
+          <a:bodyPr wrap="none" lIns="0" rIns="0" tIns="0" bIns="0">
+            <a:spAutoFit/>
+          </a:bodyPr>
+          <a:lstStyle/>
+          <a:p>
+            <a:pPr algn="r">
+              <a:defRPr sz="530" i="1">
+                <a:solidFill>
+                  <a:srgbClr val="475569"/>
+                </a:solidFill>
+              </a:defRPr>
+            </a:pPr>
+            <a:r>
+              <a:t>~6.0</a:t>
+            </a:r>
+          </a:p>
+        </p:txBody>
+      </p:sp>
+      <p:sp>
+        <p:nvSpPr>
+          <p:cNvPr id="376" name="row:netkit:start-label"/>
+          <p:cNvSpPr txBox="1"/>
+          <p:nvPr/>
+        </p:nvSpPr>
+        <p:spPr>
+          <a:xfrm>
+            <a:off x="10772032" y="2875977"/>
+            <a:ext cx="347472" cy="164592"/>
+          </a:xfrm>
+          <a:prstGeom prst="rect">
+            <a:avLst/>
+          </a:prstGeom>
+          <a:noFill/>
+        </p:spPr>
+        <p:txBody>
+          <a:bodyPr wrap="none" lIns="0" rIns="0" tIns="0" bIns="0">
+            <a:spAutoFit/>
+          </a:bodyPr>
+          <a:lstStyle/>
+          <a:p>
+            <a:pPr algn="r">
+              <a:defRPr sz="530" i="1">
+                <a:solidFill>
+                  <a:srgbClr val="475569"/>
+                </a:solidFill>
+              </a:defRPr>
+            </a:pPr>
+            <a:r>
+              <a:t>~6.1</a:t>
+            </a:r>
+          </a:p>
+        </p:txBody>
+      </p:sp>
+      <p:sp>
+        <p:nvSpPr>
+          <p:cNvPr id="377" name="row:cgroup / LWT BPF:start-label"/>
+          <p:cNvSpPr txBox="1"/>
+          <p:nvPr/>
+        </p:nvSpPr>
+        <p:spPr>
+          <a:xfrm>
+            <a:off x="6050299" y="2985325"/>
+            <a:ext cx="347472" cy="164592"/>
+          </a:xfrm>
+          <a:prstGeom prst="rect">
+            <a:avLst/>
+          </a:prstGeom>
+          <a:noFill/>
+        </p:spPr>
+        <p:txBody>
+          <a:bodyPr wrap="none" lIns="0" rIns="0" tIns="0" bIns="0">
+            <a:spAutoFit/>
+          </a:bodyPr>
+          <a:lstStyle/>
+          <a:p>
+            <a:pPr algn="r">
+              <a:defRPr sz="530" i="1">
+                <a:solidFill>
+                  <a:srgbClr val="475569"/>
+                </a:solidFill>
+              </a:defRPr>
+            </a:pPr>
+            <a:r>
+              <a:t>~4.4</a:t>
+            </a:r>
+          </a:p>
+        </p:txBody>
+      </p:sp>
+      <p:sp>
+        <p:nvSpPr>
+          <p:cNvPr id="378" name="row:SOCK_OPS / SOCKMAP:start-label"/>
+          <p:cNvSpPr txBox="1"/>
+          <p:nvPr/>
+        </p:nvSpPr>
+        <p:spPr>
+          <a:xfrm>
+            <a:off x="6397485" y="3094672"/>
+            <a:ext cx="347472" cy="164592"/>
+          </a:xfrm>
+          <a:prstGeom prst="rect">
+            <a:avLst/>
+          </a:prstGeom>
+          <a:noFill/>
+        </p:spPr>
+        <p:txBody>
+          <a:bodyPr wrap="none" lIns="0" rIns="0" tIns="0" bIns="0">
+            <a:spAutoFit/>
+          </a:bodyPr>
+          <a:lstStyle/>
+          <a:p>
+            <a:pPr algn="r">
+              <a:defRPr sz="530" i="1">
+                <a:solidFill>
+                  <a:srgbClr val="475569"/>
+                </a:solidFill>
+              </a:defRPr>
+            </a:pPr>
+            <a:r>
+              <a:t>~4.7</a:t>
+            </a:r>
+          </a:p>
+        </p:txBody>
+      </p:sp>
+      <p:sp>
+        <p:nvSpPr>
+          <p:cNvPr id="379" name="row:BPF struct_ops:start-label"/>
+          <p:cNvSpPr txBox="1"/>
+          <p:nvPr/>
+        </p:nvSpPr>
+        <p:spPr>
+          <a:xfrm>
+            <a:off x="7994542" y="3204019"/>
+            <a:ext cx="347472" cy="164592"/>
+          </a:xfrm>
+          <a:prstGeom prst="rect">
+            <a:avLst/>
+          </a:prstGeom>
+          <a:noFill/>
+        </p:spPr>
+        <p:txBody>
+          <a:bodyPr wrap="none" lIns="0" rIns="0" tIns="0" bIns="0">
+            <a:spAutoFit/>
+          </a:bodyPr>
+          <a:lstStyle/>
+          <a:p>
+            <a:pPr algn="r">
+              <a:defRPr sz="530" i="1">
+                <a:solidFill>
+                  <a:srgbClr val="475569"/>
+                </a:solidFill>
+              </a:defRPr>
+            </a:pPr>
+            <a:r>
+              <a:t>~4.19</a:t>
+            </a:r>
+          </a:p>
+        </p:txBody>
+      </p:sp>
+      <p:sp>
+        <p:nvSpPr>
+          <p:cNvPr id="380" name="row:BPF qdisc:start-label"/>
+          <p:cNvSpPr txBox="1"/>
+          <p:nvPr/>
+        </p:nvSpPr>
+        <p:spPr>
+          <a:xfrm>
+            <a:off x="11883028" y="3313366"/>
+            <a:ext cx="347472" cy="164592"/>
+          </a:xfrm>
+          <a:prstGeom prst="rect">
+            <a:avLst/>
+          </a:prstGeom>
+          <a:noFill/>
+        </p:spPr>
+        <p:txBody>
+          <a:bodyPr wrap="none" lIns="0" rIns="0" tIns="0" bIns="0">
+            <a:spAutoFit/>
+          </a:bodyPr>
+          <a:lstStyle/>
+          <a:p>
+            <a:pPr algn="r">
+              <a:defRPr sz="530" i="1">
+                <a:solidFill>
+                  <a:srgbClr val="475569"/>
+                </a:solidFill>
+              </a:defRPr>
+            </a:pPr>
+            <a:r>
+              <a:t>~6.10</a:t>
+            </a:r>
+          </a:p>
+        </p:txBody>
+      </p:sp>
+      <p:sp>
+        <p:nvSpPr>
+          <p:cNvPr id="381" name="row:SK_LOOKUP:start-label"/>
+          <p:cNvSpPr txBox="1"/>
+          <p:nvPr/>
+        </p:nvSpPr>
+        <p:spPr>
+          <a:xfrm>
+            <a:off x="8480602" y="3422713"/>
+            <a:ext cx="347472" cy="164592"/>
+          </a:xfrm>
+          <a:prstGeom prst="rect">
+            <a:avLst/>
+          </a:prstGeom>
+          <a:noFill/>
+        </p:spPr>
+        <p:txBody>
+          <a:bodyPr wrap="none" lIns="0" rIns="0" tIns="0" bIns="0">
+            <a:spAutoFit/>
+          </a:bodyPr>
+          <a:lstStyle/>
+          <a:p>
+            <a:pPr algn="r">
+              <a:defRPr sz="530" i="1">
+                <a:solidFill>
+                  <a:srgbClr val="475569"/>
+                </a:solidFill>
+              </a:defRPr>
+            </a:pPr>
+            <a:r>
+              <a:t>~5.2</a:t>
+            </a:r>
+          </a:p>
+        </p:txBody>
+      </p:sp>
+      <p:sp>
+        <p:nvSpPr>
+          <p:cNvPr id="382" name="row:XDP:start-label"/>
+          <p:cNvSpPr txBox="1"/>
+          <p:nvPr/>
+        </p:nvSpPr>
+        <p:spPr>
+          <a:xfrm>
+            <a:off x="6133623" y="3532060"/>
+            <a:ext cx="347472" cy="164592"/>
+          </a:xfrm>
+          <a:prstGeom prst="rect">
+            <a:avLst/>
+          </a:prstGeom>
+          <a:noFill/>
+        </p:spPr>
+        <p:txBody>
+          <a:bodyPr wrap="none" lIns="0" rIns="0" tIns="0" bIns="0">
+            <a:spAutoFit/>
+          </a:bodyPr>
+          <a:lstStyle/>
+          <a:p>
+            <a:pPr algn="r">
+              <a:defRPr sz="530" i="1">
+                <a:solidFill>
+                  <a:srgbClr val="475569"/>
+                </a:solidFill>
+              </a:defRPr>
+            </a:pPr>
+            <a:r>
+              <a:t>~4.4</a:t>
+            </a:r>
+          </a:p>
+        </p:txBody>
+      </p:sp>
+      <p:sp>
+        <p:nvSpPr>
+          <p:cNvPr id="383" name="row:page_pool:start-label"/>
+          <p:cNvSpPr txBox="1"/>
+          <p:nvPr/>
+        </p:nvSpPr>
+        <p:spPr>
+          <a:xfrm>
+            <a:off x="6189173" y="3732847"/>
+            <a:ext cx="347472" cy="164592"/>
+          </a:xfrm>
+          <a:prstGeom prst="rect">
+            <a:avLst/>
+          </a:prstGeom>
+          <a:noFill/>
+        </p:spPr>
+        <p:txBody>
+          <a:bodyPr wrap="none" lIns="0" rIns="0" tIns="0" bIns="0">
+            <a:spAutoFit/>
+          </a:bodyPr>
+          <a:lstStyle/>
+          <a:p>
+            <a:pPr algn="r">
+              <a:defRPr sz="530" i="1">
+                <a:solidFill>
+                  <a:srgbClr val="475569"/>
+                </a:solidFill>
+              </a:defRPr>
+            </a:pPr>
+            <a:r>
+              <a:t>~4.5</a:t>
+            </a:r>
+          </a:p>
+        </p:txBody>
+      </p:sp>
+      <p:sp>
+        <p:nvSpPr>
+          <p:cNvPr id="384" name="row:Device Memory TCP RX:start-label"/>
+          <p:cNvSpPr txBox="1"/>
+          <p:nvPr/>
+        </p:nvSpPr>
+        <p:spPr>
+          <a:xfrm>
+            <a:off x="10980343" y="3842194"/>
+            <a:ext cx="347472" cy="164592"/>
+          </a:xfrm>
+          <a:prstGeom prst="rect">
+            <a:avLst/>
+          </a:prstGeom>
+          <a:noFill/>
+        </p:spPr>
+        <p:txBody>
+          <a:bodyPr wrap="none" lIns="0" rIns="0" tIns="0" bIns="0">
+            <a:spAutoFit/>
+          </a:bodyPr>
+          <a:lstStyle/>
+          <a:p>
+            <a:pPr algn="r">
+              <a:defRPr sz="530" i="1">
+                <a:solidFill>
+                  <a:srgbClr val="475569"/>
+                </a:solidFill>
+              </a:defRPr>
+            </a:pPr>
+            <a:r>
+              <a:t>~6.2</a:t>
+            </a:r>
+          </a:p>
+        </p:txBody>
+      </p:sp>
+      <p:sp>
+        <p:nvSpPr>
+          <p:cNvPr id="385" name="row:Device Memory TCP TX:start-label"/>
+          <p:cNvSpPr txBox="1"/>
+          <p:nvPr/>
+        </p:nvSpPr>
+        <p:spPr>
+          <a:xfrm>
+            <a:off x="11605279" y="3951541"/>
+            <a:ext cx="347472" cy="164592"/>
+          </a:xfrm>
+          <a:prstGeom prst="rect">
+            <a:avLst/>
+          </a:prstGeom>
+          <a:noFill/>
+        </p:spPr>
+        <p:txBody>
+          <a:bodyPr wrap="none" lIns="0" rIns="0" tIns="0" bIns="0">
+            <a:spAutoFit/>
+          </a:bodyPr>
+          <a:lstStyle/>
+          <a:p>
+            <a:pPr algn="r">
+              <a:defRPr sz="530" i="1">
+                <a:solidFill>
+                  <a:srgbClr val="475569"/>
+                </a:solidFill>
+              </a:defRPr>
+            </a:pPr>
+            <a:r>
+              <a:t>~6.8</a:t>
+            </a:r>
+          </a:p>
+        </p:txBody>
+      </p:sp>
+      <p:sp>
+        <p:nvSpPr>
+          <p:cNvPr id="386" name="row:io_uring ZCRX:start-label"/>
+          <p:cNvSpPr txBox="1"/>
+          <p:nvPr/>
+        </p:nvSpPr>
+        <p:spPr>
+          <a:xfrm>
+            <a:off x="11188655" y="4060888"/>
+            <a:ext cx="347472" cy="164592"/>
+          </a:xfrm>
+          <a:prstGeom prst="rect">
+            <a:avLst/>
+          </a:prstGeom>
+          <a:noFill/>
+        </p:spPr>
+        <p:txBody>
+          <a:bodyPr wrap="none" lIns="0" rIns="0" tIns="0" bIns="0">
+            <a:spAutoFit/>
+          </a:bodyPr>
+          <a:lstStyle/>
+          <a:p>
+            <a:pPr algn="r">
+              <a:defRPr sz="530" i="1">
+                <a:solidFill>
+                  <a:srgbClr val="475569"/>
+                </a:solidFill>
+              </a:defRPr>
+            </a:pPr>
+            <a:r>
+              <a:t>~6.4</a:t>
+            </a:r>
+          </a:p>
+        </p:txBody>
+      </p:sp>
+      <p:sp>
+        <p:nvSpPr>
+          <p:cNvPr id="387" name="row:large RX buffers (mem. providers):start-label"/>
+          <p:cNvSpPr txBox="1"/>
+          <p:nvPr/>
+        </p:nvSpPr>
+        <p:spPr>
+          <a:xfrm>
+            <a:off x="12299651" y="4170235"/>
+            <a:ext cx="347472" cy="164592"/>
+          </a:xfrm>
+          <a:prstGeom prst="rect">
+            <a:avLst/>
+          </a:prstGeom>
+          <a:noFill/>
+        </p:spPr>
+        <p:txBody>
+          <a:bodyPr wrap="none" lIns="0" rIns="0" tIns="0" bIns="0">
+            <a:spAutoFit/>
+          </a:bodyPr>
+          <a:lstStyle/>
+          <a:p>
+            <a:pPr algn="r">
+              <a:defRPr sz="530" i="1">
+                <a:solidFill>
+                  <a:srgbClr val="475569"/>
+                </a:solidFill>
+              </a:defRPr>
+            </a:pPr>
+            <a:r>
+              <a:t>~6.13</a:t>
+            </a:r>
+          </a:p>
+        </p:txBody>
+      </p:sp>
+      <p:sp>
+        <p:nvSpPr>
+          <p:cNvPr id="388" name="row:XDP multi-buffer:start-label"/>
+          <p:cNvSpPr txBox="1"/>
+          <p:nvPr/>
+        </p:nvSpPr>
+        <p:spPr>
+          <a:xfrm>
+            <a:off x="9522161" y="4279582"/>
+            <a:ext cx="347472" cy="164592"/>
+          </a:xfrm>
+          <a:prstGeom prst="rect">
+            <a:avLst/>
+          </a:prstGeom>
+          <a:noFill/>
+        </p:spPr>
+        <p:txBody>
+          <a:bodyPr wrap="none" lIns="0" rIns="0" tIns="0" bIns="0">
+            <a:spAutoFit/>
+          </a:bodyPr>
+          <a:lstStyle/>
+          <a:p>
+            <a:pPr algn="r">
+              <a:defRPr sz="530" i="1">
+                <a:solidFill>
+                  <a:srgbClr val="475569"/>
+                </a:solidFill>
+              </a:defRPr>
+            </a:pPr>
+            <a:r>
+              <a:t>~5.11</a:t>
+            </a:r>
+          </a:p>
+        </p:txBody>
+      </p:sp>
+      <p:sp>
+        <p:nvSpPr>
+          <p:cNvPr id="389" name="row:AF_XDP:start-label"/>
+          <p:cNvSpPr txBox="1"/>
+          <p:nvPr/>
+        </p:nvSpPr>
+        <p:spPr>
+          <a:xfrm>
+            <a:off x="6744671" y="4388929"/>
+            <a:ext cx="347472" cy="164592"/>
+          </a:xfrm>
+          <a:prstGeom prst="rect">
+            <a:avLst/>
+          </a:prstGeom>
+          <a:noFill/>
+        </p:spPr>
+        <p:txBody>
+          <a:bodyPr wrap="none" lIns="0" rIns="0" tIns="0" bIns="0">
+            <a:spAutoFit/>
+          </a:bodyPr>
+          <a:lstStyle/>
+          <a:p>
+            <a:pPr algn="r">
+              <a:defRPr sz="530" i="1">
+                <a:solidFill>
+                  <a:srgbClr val="475569"/>
+                </a:solidFill>
+              </a:defRPr>
+            </a:pPr>
+            <a:r>
+              <a:t>~4.9</a:t>
+            </a:r>
+          </a:p>
+        </p:txBody>
+      </p:sp>
+      <p:sp>
+        <p:nvSpPr>
+          <p:cNvPr id="390" name="row:AF_XDP multi-buffer:start-label"/>
+          <p:cNvSpPr txBox="1"/>
+          <p:nvPr/>
+        </p:nvSpPr>
+        <p:spPr>
+          <a:xfrm>
+            <a:off x="10216534" y="4498276"/>
+            <a:ext cx="347472" cy="164592"/>
+          </a:xfrm>
+          <a:prstGeom prst="rect">
+            <a:avLst/>
+          </a:prstGeom>
+          <a:noFill/>
+        </p:spPr>
+        <p:txBody>
+          <a:bodyPr wrap="none" lIns="0" rIns="0" tIns="0" bIns="0">
+            <a:spAutoFit/>
+          </a:bodyPr>
+          <a:lstStyle/>
+          <a:p>
+            <a:pPr algn="r">
+              <a:defRPr sz="530" i="1">
+                <a:solidFill>
+                  <a:srgbClr val="475569"/>
+                </a:solidFill>
+              </a:defRPr>
+            </a:pPr>
+            <a:r>
+              <a:t>~5.16</a:t>
+            </a:r>
+          </a:p>
+        </p:txBody>
+      </p:sp>
+      <p:sp>
+        <p:nvSpPr>
+          <p:cNvPr id="391" name="row:RX HW queue leasing:start-label"/>
+          <p:cNvSpPr txBox="1"/>
+          <p:nvPr/>
+        </p:nvSpPr>
+        <p:spPr>
+          <a:xfrm>
+            <a:off x="11952465" y="4607623"/>
+            <a:ext cx="347472" cy="164592"/>
+          </a:xfrm>
+          <a:prstGeom prst="rect">
+            <a:avLst/>
+          </a:prstGeom>
+          <a:noFill/>
+        </p:spPr>
+        <p:txBody>
+          <a:bodyPr wrap="none" lIns="0" rIns="0" tIns="0" bIns="0">
+            <a:spAutoFit/>
+          </a:bodyPr>
+          <a:lstStyle/>
+          <a:p>
+            <a:pPr algn="r">
+              <a:defRPr sz="530" i="1">
+                <a:solidFill>
+                  <a:srgbClr val="475569"/>
+                </a:solidFill>
+              </a:defRPr>
+            </a:pPr>
+            <a:r>
+              <a:t>~6.11</a:t>
+            </a:r>
+          </a:p>
+        </p:txBody>
+      </p:sp>
+      <p:sp>
+        <p:nvSpPr>
+          <p:cNvPr id="392" name="row:nexthop objects:start-label"/>
+          <p:cNvSpPr txBox="1"/>
+          <p:nvPr/>
+        </p:nvSpPr>
+        <p:spPr>
+          <a:xfrm>
+            <a:off x="7439044" y="4917757"/>
+            <a:ext cx="347472" cy="164592"/>
+          </a:xfrm>
+          <a:prstGeom prst="rect">
+            <a:avLst/>
+          </a:prstGeom>
+          <a:noFill/>
+        </p:spPr>
+        <p:txBody>
+          <a:bodyPr wrap="none" lIns="0" rIns="0" tIns="0" bIns="0">
+            <a:spAutoFit/>
+          </a:bodyPr>
+          <a:lstStyle/>
+          <a:p>
+            <a:pPr algn="r">
+              <a:defRPr sz="530" i="1">
+                <a:solidFill>
+                  <a:srgbClr val="475569"/>
+                </a:solidFill>
+              </a:defRPr>
+            </a:pPr>
+            <a:r>
+              <a:t>~4.15</a:t>
+            </a:r>
+          </a:p>
+        </p:txBody>
+      </p:sp>
+      <p:sp>
+        <p:nvSpPr>
+          <p:cNvPr id="393" name="row:per-netns RTNL:start-label"/>
+          <p:cNvSpPr txBox="1"/>
+          <p:nvPr/>
+        </p:nvSpPr>
+        <p:spPr>
+          <a:xfrm>
+            <a:off x="10910906" y="5027104"/>
+            <a:ext cx="347472" cy="164592"/>
+          </a:xfrm>
+          <a:prstGeom prst="rect">
+            <a:avLst/>
+          </a:prstGeom>
+          <a:noFill/>
+        </p:spPr>
+        <p:txBody>
+          <a:bodyPr wrap="none" lIns="0" rIns="0" tIns="0" bIns="0">
+            <a:spAutoFit/>
+          </a:bodyPr>
+          <a:lstStyle/>
+          <a:p>
+            <a:pPr algn="r">
+              <a:defRPr sz="530" i="1">
+                <a:solidFill>
+                  <a:srgbClr val="475569"/>
+                </a:solidFill>
+              </a:defRPr>
+            </a:pPr>
+            <a:r>
+              <a:t>~6.2</a:t>
+            </a:r>
+          </a:p>
+        </p:txBody>
+      </p:sp>
+      <p:sp>
+        <p:nvSpPr>
+          <p:cNvPr id="394" name="row:further RTNL breakup:start-label"/>
+          <p:cNvSpPr txBox="1"/>
+          <p:nvPr/>
+        </p:nvSpPr>
+        <p:spPr>
+          <a:xfrm>
+            <a:off x="11605279" y="5136451"/>
+            <a:ext cx="347472" cy="164592"/>
+          </a:xfrm>
+          <a:prstGeom prst="rect">
+            <a:avLst/>
+          </a:prstGeom>
+          <a:noFill/>
+        </p:spPr>
+        <p:txBody>
+          <a:bodyPr wrap="none" lIns="0" rIns="0" tIns="0" bIns="0">
+            <a:spAutoFit/>
+          </a:bodyPr>
+          <a:lstStyle/>
+          <a:p>
+            <a:pPr algn="r">
+              <a:defRPr sz="530" i="1">
+                <a:solidFill>
+                  <a:srgbClr val="475569"/>
+                </a:solidFill>
+              </a:defRPr>
+            </a:pPr>
+            <a:r>
+              <a:t>~6.8</a:t>
+            </a:r>
+          </a:p>
+        </p:txBody>
+      </p:sp>
+      <p:sp>
+        <p:nvSpPr>
+          <p:cNvPr id="395" name="row:RTNL-less FIB rules:start-label"/>
+          <p:cNvSpPr txBox="1"/>
+          <p:nvPr/>
+        </p:nvSpPr>
+        <p:spPr>
+          <a:xfrm>
+            <a:off x="12299651" y="5245798"/>
+            <a:ext cx="347472" cy="164592"/>
+          </a:xfrm>
+          <a:prstGeom prst="rect">
+            <a:avLst/>
+          </a:prstGeom>
+          <a:noFill/>
+        </p:spPr>
+        <p:txBody>
+          <a:bodyPr wrap="none" lIns="0" rIns="0" tIns="0" bIns="0">
+            <a:spAutoFit/>
+          </a:bodyPr>
+          <a:lstStyle/>
+          <a:p>
+            <a:pPr algn="r">
+              <a:defRPr sz="530" i="1">
+                <a:solidFill>
+                  <a:srgbClr val="475569"/>
+                </a:solidFill>
+              </a:defRPr>
+            </a:pPr>
+            <a:r>
+              <a:t>~6.13</a:t>
+            </a:r>
+          </a:p>
+        </p:txBody>
+      </p:sp>
+      <p:sp>
+        <p:nvSpPr>
+          <p:cNvPr id="396" name="row:YNL tooling:start-label"/>
+          <p:cNvSpPr txBox="1"/>
+          <p:nvPr/>
+        </p:nvSpPr>
+        <p:spPr>
+          <a:xfrm>
+            <a:off x="9869347" y="5355145"/>
+            <a:ext cx="347472" cy="164592"/>
+          </a:xfrm>
+          <a:prstGeom prst="rect">
+            <a:avLst/>
+          </a:prstGeom>
+          <a:noFill/>
+        </p:spPr>
+        <p:txBody>
+          <a:bodyPr wrap="none" lIns="0" rIns="0" tIns="0" bIns="0">
+            <a:spAutoFit/>
+          </a:bodyPr>
+          <a:lstStyle/>
+          <a:p>
+            <a:pPr algn="r">
+              <a:defRPr sz="530" i="1">
+                <a:solidFill>
+                  <a:srgbClr val="475569"/>
+                </a:solidFill>
+              </a:defRPr>
+            </a:pPr>
+            <a:r>
+              <a:t>~5.13</a:t>
+            </a:r>
+          </a:p>
+        </p:txBody>
+      </p:sp>
+      <p:sp>
+        <p:nvSpPr>
+          <p:cNvPr id="397" name="row:queue/NAPI netdev-genl:start-label"/>
+          <p:cNvSpPr txBox="1"/>
+          <p:nvPr/>
+        </p:nvSpPr>
+        <p:spPr>
+          <a:xfrm>
+            <a:off x="10910906" y="5555932"/>
+            <a:ext cx="347472" cy="164592"/>
+          </a:xfrm>
+          <a:prstGeom prst="rect">
+            <a:avLst/>
+          </a:prstGeom>
+          <a:noFill/>
+        </p:spPr>
+        <p:txBody>
+          <a:bodyPr wrap="none" lIns="0" rIns="0" tIns="0" bIns="0">
+            <a:spAutoFit/>
+          </a:bodyPr>
+          <a:lstStyle/>
+          <a:p>
+            <a:pPr algn="r">
+              <a:defRPr sz="530" i="1">
+                <a:solidFill>
+                  <a:srgbClr val="475569"/>
+                </a:solidFill>
+              </a:defRPr>
+            </a:pPr>
+            <a:r>
+              <a:t>~6.2</a:t>
+            </a:r>
+          </a:p>
+        </p:txBody>
+      </p:sp>
+      <p:sp>
+        <p:nvSpPr>
+          <p:cNvPr id="398" name="row:kprobe BPF:start-label"/>
+          <p:cNvSpPr txBox="1"/>
+          <p:nvPr/>
+        </p:nvSpPr>
+        <p:spPr>
+          <a:xfrm>
+            <a:off x="4800428" y="5665279"/>
+            <a:ext cx="347472" cy="164592"/>
+          </a:xfrm>
+          <a:prstGeom prst="rect">
+            <a:avLst/>
+          </a:prstGeom>
+          <a:noFill/>
+        </p:spPr>
+        <p:txBody>
+          <a:bodyPr wrap="none" lIns="0" rIns="0" tIns="0" bIns="0">
+            <a:spAutoFit/>
+          </a:bodyPr>
+          <a:lstStyle/>
+          <a:p>
+            <a:pPr algn="r">
+              <a:defRPr sz="530" i="1">
+                <a:solidFill>
+                  <a:srgbClr val="475569"/>
+                </a:solidFill>
+              </a:defRPr>
+            </a:pPr>
+            <a:r>
+              <a:t>~3.13</a:t>
+            </a:r>
+          </a:p>
+        </p:txBody>
+      </p:sp>
+      <p:sp>
+        <p:nvSpPr>
+          <p:cNvPr id="399" name="row:structured drop reason:start-label"/>
+          <p:cNvSpPr txBox="1"/>
+          <p:nvPr/>
+        </p:nvSpPr>
+        <p:spPr>
+          <a:xfrm>
+            <a:off x="9522161" y="5774626"/>
+            <a:ext cx="347472" cy="164592"/>
+          </a:xfrm>
+          <a:prstGeom prst="rect">
+            <a:avLst/>
+          </a:prstGeom>
+          <a:noFill/>
+        </p:spPr>
+        <p:txBody>
+          <a:bodyPr wrap="none" lIns="0" rIns="0" tIns="0" bIns="0">
+            <a:spAutoFit/>
+          </a:bodyPr>
+          <a:lstStyle/>
+          <a:p>
+            <a:pPr algn="r">
+              <a:defRPr sz="530" i="1">
+                <a:solidFill>
+                  <a:srgbClr val="475569"/>
+                </a:solidFill>
+              </a:defRPr>
+            </a:pPr>
+            <a:r>
+              <a:t>~5.11</a:t>
+            </a:r>
+          </a:p>
+        </p:txBody>
+      </p:sp>
+      <p:sp>
+        <p:nvSpPr>
+          <p:cNvPr id="400" name="row:drop-reason expansion:start-label"/>
+          <p:cNvSpPr txBox="1"/>
+          <p:nvPr/>
+        </p:nvSpPr>
+        <p:spPr>
+          <a:xfrm>
+            <a:off x="10355408" y="5883973"/>
+            <a:ext cx="347472" cy="164592"/>
+          </a:xfrm>
+          <a:prstGeom prst="rect">
+            <a:avLst/>
+          </a:prstGeom>
+          <a:noFill/>
+        </p:spPr>
+        <p:txBody>
+          <a:bodyPr wrap="none" lIns="0" rIns="0" tIns="0" bIns="0">
+            <a:spAutoFit/>
+          </a:bodyPr>
+          <a:lstStyle/>
+          <a:p>
+            <a:pPr algn="r">
+              <a:defRPr sz="530" i="1">
+                <a:solidFill>
+                  <a:srgbClr val="475569"/>
+                </a:solidFill>
+              </a:defRPr>
+            </a:pPr>
+            <a:r>
+              <a:t>~5.17</a:t>
+            </a:r>
+          </a:p>
+        </p:txBody>
+      </p:sp>
+      <p:sp>
+        <p:nvSpPr>
+          <p:cNvPr id="401" name="row:qdisc-drop tracepoint:start-label"/>
+          <p:cNvSpPr txBox="1"/>
+          <p:nvPr/>
+        </p:nvSpPr>
+        <p:spPr>
+          <a:xfrm>
+            <a:off x="12299651" y="5993320"/>
+            <a:ext cx="347472" cy="164592"/>
+          </a:xfrm>
+          <a:prstGeom prst="rect">
+            <a:avLst/>
+          </a:prstGeom>
+          <a:noFill/>
+        </p:spPr>
+        <p:txBody>
+          <a:bodyPr wrap="none" lIns="0" rIns="0" tIns="0" bIns="0">
+            <a:spAutoFit/>
+          </a:bodyPr>
+          <a:lstStyle/>
+          <a:p>
+            <a:pPr algn="r">
+              <a:defRPr sz="530" i="1">
+                <a:solidFill>
+                  <a:srgbClr val="475569"/>
+                </a:solidFill>
+              </a:defRPr>
+            </a:pPr>
+            <a:r>
+              <a:t>~6.13</a:t>
+            </a:r>
+          </a:p>
+        </p:txBody>
+      </p:sp>
+      <p:sp>
+        <p:nvSpPr>
+          <p:cNvPr id="402" name="row:switchdev:start-label"/>
+          <p:cNvSpPr txBox="1"/>
+          <p:nvPr/>
+        </p:nvSpPr>
+        <p:spPr>
+          <a:xfrm>
+            <a:off x="4661554" y="6194107"/>
+            <a:ext cx="347472" cy="164592"/>
+          </a:xfrm>
+          <a:prstGeom prst="rect">
+            <a:avLst/>
+          </a:prstGeom>
+          <a:noFill/>
+        </p:spPr>
+        <p:txBody>
+          <a:bodyPr wrap="none" lIns="0" rIns="0" tIns="0" bIns="0">
+            <a:spAutoFit/>
+          </a:bodyPr>
+          <a:lstStyle/>
+          <a:p>
+            <a:pPr algn="r">
+              <a:defRPr sz="530" i="1">
+                <a:solidFill>
+                  <a:srgbClr val="475569"/>
+                </a:solidFill>
+              </a:defRPr>
+            </a:pPr>
+            <a:r>
+              <a:t>~3.12</a:t>
+            </a:r>
+          </a:p>
+        </p:txBody>
+      </p:sp>
+      <p:sp>
+        <p:nvSpPr>
+          <p:cNvPr id="403" name="row:devlink:start-label"/>
+          <p:cNvSpPr txBox="1"/>
+          <p:nvPr/>
+        </p:nvSpPr>
+        <p:spPr>
+          <a:xfrm>
+            <a:off x="5355926" y="6303454"/>
+            <a:ext cx="347472" cy="164592"/>
+          </a:xfrm>
+          <a:prstGeom prst="rect">
+            <a:avLst/>
+          </a:prstGeom>
+          <a:noFill/>
+        </p:spPr>
+        <p:txBody>
+          <a:bodyPr wrap="none" lIns="0" rIns="0" tIns="0" bIns="0">
+            <a:spAutoFit/>
+          </a:bodyPr>
+          <a:lstStyle/>
+          <a:p>
+            <a:pPr algn="r">
+              <a:defRPr sz="530" i="1">
+                <a:solidFill>
+                  <a:srgbClr val="475569"/>
+                </a:solidFill>
+              </a:defRPr>
+            </a:pPr>
+            <a:r>
+              <a:t>~3.18</a:t>
+            </a:r>
+          </a:p>
+        </p:txBody>
+      </p:sp>
+      <p:sp>
+        <p:nvSpPr>
+          <p:cNvPr id="404" name="row:devlink health:start-label"/>
+          <p:cNvSpPr txBox="1"/>
+          <p:nvPr/>
+        </p:nvSpPr>
+        <p:spPr>
+          <a:xfrm>
+            <a:off x="7439044" y="6412801"/>
+            <a:ext cx="347472" cy="164592"/>
+          </a:xfrm>
+          <a:prstGeom prst="rect">
+            <a:avLst/>
+          </a:prstGeom>
+          <a:noFill/>
+        </p:spPr>
+        <p:txBody>
+          <a:bodyPr wrap="none" lIns="0" rIns="0" tIns="0" bIns="0">
+            <a:spAutoFit/>
+          </a:bodyPr>
+          <a:lstStyle/>
+          <a:p>
+            <a:pPr algn="r">
+              <a:defRPr sz="530" i="1">
+                <a:solidFill>
+                  <a:srgbClr val="475569"/>
+                </a:solidFill>
+              </a:defRPr>
+            </a:pPr>
+            <a:r>
+              <a:t>~4.15</a:t>
+            </a:r>
+          </a:p>
+        </p:txBody>
+      </p:sp>
+      <p:sp>
+        <p:nvSpPr>
+          <p:cNvPr id="405" name="row:phylink:start-label"/>
+          <p:cNvSpPr txBox="1"/>
+          <p:nvPr/>
+        </p:nvSpPr>
+        <p:spPr>
+          <a:xfrm>
+            <a:off x="5494801" y="6522148"/>
+            <a:ext cx="347472" cy="164592"/>
+          </a:xfrm>
+          <a:prstGeom prst="rect">
+            <a:avLst/>
+          </a:prstGeom>
+          <a:noFill/>
+        </p:spPr>
+        <p:txBody>
+          <a:bodyPr wrap="none" lIns="0" rIns="0" tIns="0" bIns="0">
+            <a:spAutoFit/>
+          </a:bodyPr>
+          <a:lstStyle/>
+          <a:p>
+            <a:pPr algn="r">
+              <a:defRPr sz="530" i="1">
+                <a:solidFill>
+                  <a:srgbClr val="475569"/>
+                </a:solidFill>
+              </a:defRPr>
+            </a:pPr>
+            <a:r>
+              <a:t>~3.19</a:t>
+            </a:r>
+          </a:p>
+        </p:txBody>
+      </p:sp>
+      <p:sp>
+        <p:nvSpPr>
+          <p:cNvPr id="406" name="row:Net DIM:start-label"/>
+          <p:cNvSpPr txBox="1"/>
+          <p:nvPr/>
+        </p:nvSpPr>
+        <p:spPr>
+          <a:xfrm>
+            <a:off x="6744671" y="6631495"/>
+            <a:ext cx="347472" cy="164592"/>
+          </a:xfrm>
+          <a:prstGeom prst="rect">
+            <a:avLst/>
+          </a:prstGeom>
+          <a:noFill/>
+        </p:spPr>
+        <p:txBody>
+          <a:bodyPr wrap="none" lIns="0" rIns="0" tIns="0" bIns="0">
+            <a:spAutoFit/>
+          </a:bodyPr>
+          <a:lstStyle/>
+          <a:p>
+            <a:pPr algn="r">
+              <a:defRPr sz="530" i="1">
+                <a:solidFill>
+                  <a:srgbClr val="475569"/>
+                </a:solidFill>
+              </a:defRPr>
+            </a:pPr>
+            <a:r>
+              <a:t>~4.9</a:t>
+            </a:r>
+          </a:p>
+        </p:txBody>
+      </p:sp>
+      <p:sp>
+        <p:nvSpPr>
+          <p:cNvPr id="407" name="row:netdevsim:start-label"/>
+          <p:cNvSpPr txBox="1"/>
+          <p:nvPr/>
+        </p:nvSpPr>
+        <p:spPr>
+          <a:xfrm>
+            <a:off x="7091857" y="6740842"/>
+            <a:ext cx="347472" cy="164592"/>
+          </a:xfrm>
+          <a:prstGeom prst="rect">
+            <a:avLst/>
+          </a:prstGeom>
+          <a:noFill/>
+        </p:spPr>
+        <p:txBody>
+          <a:bodyPr wrap="none" lIns="0" rIns="0" tIns="0" bIns="0">
+            <a:spAutoFit/>
+          </a:bodyPr>
+          <a:lstStyle/>
+          <a:p>
+            <a:pPr algn="r">
+              <a:defRPr sz="530" i="1">
+                <a:solidFill>
+                  <a:srgbClr val="475569"/>
+                </a:solidFill>
+              </a:defRPr>
+            </a:pPr>
+            <a:r>
+              <a:t>~4.12</a:t>
+            </a:r>
+          </a:p>
+        </p:txBody>
+      </p:sp>
+      <p:sp>
+        <p:nvSpPr>
+          <p:cNvPr id="408" name="row:ethtool netlink:start-label"/>
+          <p:cNvSpPr txBox="1"/>
+          <p:nvPr/>
+        </p:nvSpPr>
+        <p:spPr>
+          <a:xfrm>
+            <a:off x="7439044" y="6850189"/>
+            <a:ext cx="347472" cy="164592"/>
+          </a:xfrm>
+          <a:prstGeom prst="rect">
+            <a:avLst/>
+          </a:prstGeom>
+          <a:noFill/>
+        </p:spPr>
+        <p:txBody>
+          <a:bodyPr wrap="none" lIns="0" rIns="0" tIns="0" bIns="0">
+            <a:spAutoFit/>
+          </a:bodyPr>
+          <a:lstStyle/>
+          <a:p>
+            <a:pPr algn="r">
+              <a:defRPr sz="530" i="1">
+                <a:solidFill>
+                  <a:srgbClr val="475569"/>
+                </a:solidFill>
+              </a:defRPr>
+            </a:pPr>
+            <a:r>
+              <a:t>~4.15</a:t>
+            </a:r>
+          </a:p>
+        </p:txBody>
+      </p:sp>
+      <p:sp>
+        <p:nvSpPr>
+          <p:cNvPr id="409" name="row:auxiliary bus:start-label"/>
+          <p:cNvSpPr txBox="1"/>
+          <p:nvPr/>
+        </p:nvSpPr>
+        <p:spPr>
+          <a:xfrm>
+            <a:off x="8827789" y="6959536"/>
+            <a:ext cx="347472" cy="164592"/>
+          </a:xfrm>
+          <a:prstGeom prst="rect">
+            <a:avLst/>
+          </a:prstGeom>
+          <a:noFill/>
+        </p:spPr>
+        <p:txBody>
+          <a:bodyPr wrap="none" lIns="0" rIns="0" tIns="0" bIns="0">
+            <a:spAutoFit/>
+          </a:bodyPr>
+          <a:lstStyle/>
+          <a:p>
+            <a:pPr algn="r">
+              <a:defRPr sz="530" i="1">
+                <a:solidFill>
+                  <a:srgbClr val="475569"/>
+                </a:solidFill>
+              </a:defRPr>
+            </a:pPr>
+            <a:r>
+              <a:t>~5.5</a:t>
+            </a:r>
+          </a:p>
+        </p:txBody>
+      </p:sp>
+      <p:sp>
+        <p:nvSpPr>
+          <p:cNvPr id="410" name="row:threaded NAPI:start-label"/>
+          <p:cNvSpPr txBox="1"/>
+          <p:nvPr/>
+        </p:nvSpPr>
+        <p:spPr>
+          <a:xfrm>
+            <a:off x="9036100" y="7068883"/>
+            <a:ext cx="347472" cy="164592"/>
+          </a:xfrm>
+          <a:prstGeom prst="rect">
+            <a:avLst/>
+          </a:prstGeom>
+          <a:noFill/>
+        </p:spPr>
+        <p:txBody>
+          <a:bodyPr wrap="none" lIns="0" rIns="0" tIns="0" bIns="0">
+            <a:spAutoFit/>
+          </a:bodyPr>
+          <a:lstStyle/>
+          <a:p>
+            <a:pPr algn="r">
+              <a:defRPr sz="530" i="1">
+                <a:solidFill>
+                  <a:srgbClr val="475569"/>
+                </a:solidFill>
+              </a:defRPr>
+            </a:pPr>
+            <a:r>
+              <a:t>~5.7</a:t>
+            </a:r>
+          </a:p>
+        </p:txBody>
+      </p:sp>
+      <p:sp>
+        <p:nvSpPr>
+          <p:cNvPr id="411" name="row:Rust phylib:start-label"/>
+          <p:cNvSpPr txBox="1"/>
+          <p:nvPr/>
+        </p:nvSpPr>
+        <p:spPr>
+          <a:xfrm>
+            <a:off x="10910906" y="7178230"/>
+            <a:ext cx="347472" cy="164592"/>
+          </a:xfrm>
+          <a:prstGeom prst="rect">
+            <a:avLst/>
+          </a:prstGeom>
+          <a:noFill/>
+        </p:spPr>
+        <p:txBody>
+          <a:bodyPr wrap="none" lIns="0" rIns="0" tIns="0" bIns="0">
+            <a:spAutoFit/>
+          </a:bodyPr>
+          <a:lstStyle/>
+          <a:p>
+            <a:pPr algn="r">
+              <a:defRPr sz="530" i="1">
+                <a:solidFill>
+                  <a:srgbClr val="475569"/>
+                </a:solidFill>
+              </a:defRPr>
+            </a:pPr>
+            <a:r>
+              <a:t>~6.2</a:t>
             </a:r>
           </a:p>
         </p:txBody>

--- a/linux-networking-feature-evolution.pptx
+++ b/linux-networking-feature-evolution.pptx
@@ -4,10 +4,13 @@
   <p:sldMasterIdLst>
     <p:sldMasterId id="2147483648" r:id="rId1"/>
   </p:sldMasterIdLst>
+  <p:notesMasterIdLst>
+    <p:notesMasterId r:id="rId3"/>
+  </p:notesMasterIdLst>
   <p:sldIdLst>
-    <p:sldId id="256" r:id="rId7"/>
+    <p:sldId id="256" r:id="rId2"/>
   </p:sldIdLst>
-  <p:sldSz cx="14630400" cy="8229600" type="screen4x3"/>
+  <p:sldSz cx="14630400" cy="8229600"/>
   <p:notesSz cx="6858000" cy="9144000"/>
   <p:defaultTextStyle>
     <a:defPPr>
@@ -104,11 +107,27 @@
       </a:defRPr>
     </a:lvl9pPr>
   </p:defaultTextStyle>
+  <p:extLst>
+    <p:ext uri="{EFAFB233-063F-42B5-8137-9DF3F51BA10A}">
+      <p15:sldGuideLst xmlns:p15="http://schemas.microsoft.com/office/powerpoint/2012/main">
+        <p15:guide id="1" orient="horz" pos="2160">
+          <p15:clr>
+            <a:srgbClr val="A4A3A4"/>
+          </p15:clr>
+        </p15:guide>
+        <p15:guide id="2" pos="2880">
+          <p15:clr>
+            <a:srgbClr val="A4A3A4"/>
+          </p15:clr>
+        </p15:guide>
+      </p15:sldGuideLst>
+    </p:ext>
+  </p:extLst>
 </p:presentation>
 </file>
 
 <file path=ppt/notesMasters/notesMaster1.xml><?xml version="1.0" encoding="utf-8"?>
-<p:notesMaster xmlns:a="http://schemas.openxmlformats.org/drawingml/2006/main" xmlns:p="http://schemas.openxmlformats.org/presentationml/2006/main" xmlns:r="http://schemas.openxmlformats.org/officeDocument/2006/relationships">
+<p:notesMaster xmlns:a="http://schemas.openxmlformats.org/drawingml/2006/main" xmlns:r="http://schemas.openxmlformats.org/officeDocument/2006/relationships" xmlns:p="http://schemas.openxmlformats.org/presentationml/2006/main">
   <p:cSld>
     <p:bg>
       <p:bgRef idx="1001">
@@ -129,242 +148,17 @@
           <a:chExt cx="0" cy="0"/>
         </a:xfrm>
       </p:grpSpPr>
-      <p:sp>
-        <p:nvSpPr>
-          <p:cNvPr id="2" name="Header Placeholder 1"/>
-          <p:cNvSpPr>
-            <a:spLocks noGrp="1"/>
-          </p:cNvSpPr>
-          <p:nvPr>
-            <p:ph type="hdr" sz="quarter"/>
-          </p:nvPr>
-        </p:nvSpPr>
-        <p:spPr>
-          <a:xfrm>
-            <a:off x="0" y="0"/>
-            <a:ext cx="2971800" cy="457200"/>
-          </a:xfrm>
-          <a:prstGeom prst="rect">
-            <a:avLst/>
-          </a:prstGeom>
-        </p:spPr>
-        <p:txBody>
-          <a:bodyPr vert="horz" lIns="91440" tIns="45720" rIns="91440" bIns="45720" rtlCol="0"/>
-          <a:lstStyle>
-            <a:lvl1pPr algn="l">
-              <a:defRPr sz="1200"/>
-            </a:lvl1pPr>
-          </a:lstStyle>
-          <a:p>
-            <a:endParaRPr lang="en-US"/>
-          </a:p>
-        </p:txBody>
-      </p:sp>
-      <p:sp>
-        <p:nvSpPr>
-          <p:cNvPr id="3" name="Date Placeholder 2"/>
-          <p:cNvSpPr>
-            <a:spLocks noGrp="1"/>
-          </p:cNvSpPr>
-          <p:nvPr>
-            <p:ph type="dt" idx="1"/>
-          </p:nvPr>
-        </p:nvSpPr>
-        <p:spPr>
-          <a:xfrm>
-            <a:off x="3884613" y="0"/>
-            <a:ext cx="2971800" cy="457200"/>
-          </a:xfrm>
-          <a:prstGeom prst="rect">
-            <a:avLst/>
-          </a:prstGeom>
-        </p:spPr>
-        <p:txBody>
-          <a:bodyPr vert="horz" lIns="91440" tIns="45720" rIns="91440" bIns="45720" rtlCol="0"/>
-          <a:lstStyle>
-            <a:lvl1pPr algn="r">
-              <a:defRPr sz="1200"/>
-            </a:lvl1pPr>
-          </a:lstStyle>
-          <a:p>
-            <a:fld id="{0F89C1C7-3DCD-1040-A9CF-14679D8B5DDD}" type="datetimeFigureOut">
-              <a:rPr lang="en-US" smtClean="0"/>
-              <a:t>10/17/16</a:t>
-            </a:fld>
-            <a:endParaRPr lang="en-US"/>
-          </a:p>
-        </p:txBody>
-      </p:sp>
-      <p:sp>
-        <p:nvSpPr>
-          <p:cNvPr id="4" name="Slide Image Placeholder 3"/>
-          <p:cNvSpPr>
-            <a:spLocks noGrp="1" noRot="1" noChangeAspect="1"/>
-          </p:cNvSpPr>
-          <p:nvPr>
-            <p:ph type="sldImg" idx="2"/>
-          </p:nvPr>
-        </p:nvSpPr>
-        <p:spPr>
-          <a:xfrm>
-            <a:off x="1143000" y="685800"/>
-            <a:ext cx="4572000" cy="3429000"/>
-          </a:xfrm>
-          <a:prstGeom prst="rect">
-            <a:avLst/>
-          </a:prstGeom>
-          <a:noFill/>
-          <a:ln w="12700">
-            <a:solidFill>
-              <a:prstClr val="black"/>
-            </a:solidFill>
-          </a:ln>
-        </p:spPr>
-        <p:txBody>
-          <a:bodyPr vert="horz" lIns="91440" tIns="45720" rIns="91440" bIns="45720" rtlCol="0" anchor="ctr"/>
-          <a:lstStyle/>
-          <a:p>
-            <a:endParaRPr lang="en-US"/>
-          </a:p>
-        </p:txBody>
-      </p:sp>
-      <p:sp>
-        <p:nvSpPr>
-          <p:cNvPr id="5" name="Notes Placeholder 4"/>
-          <p:cNvSpPr>
-            <a:spLocks noGrp="1"/>
-          </p:cNvSpPr>
-          <p:nvPr>
-            <p:ph type="body" sz="quarter" idx="3"/>
-          </p:nvPr>
-        </p:nvSpPr>
-        <p:spPr>
-          <a:xfrm>
-            <a:off x="685800" y="4343400"/>
-            <a:ext cx="5486400" cy="4114800"/>
-          </a:xfrm>
-          <a:prstGeom prst="rect">
-            <a:avLst/>
-          </a:prstGeom>
-        </p:spPr>
-        <p:txBody>
-          <a:bodyPr vert="horz" lIns="91440" tIns="45720" rIns="91440" bIns="45720" rtlCol="0"/>
-          <a:lstStyle/>
-          <a:p>
-            <a:pPr lvl="0"/>
-            <a:r>
-              <a:rPr lang="en-US" smtClean="0"/>
-              <a:t>Click to edit Master text styles</a:t>
-            </a:r>
-          </a:p>
-          <a:p>
-            <a:pPr lvl="1"/>
-            <a:r>
-              <a:rPr lang="en-US" smtClean="0"/>
-              <a:t>Second level</a:t>
-            </a:r>
-          </a:p>
-          <a:p>
-            <a:pPr lvl="2"/>
-            <a:r>
-              <a:rPr lang="en-US" smtClean="0"/>
-              <a:t>Third level</a:t>
-            </a:r>
-          </a:p>
-          <a:p>
-            <a:pPr lvl="3"/>
-            <a:r>
-              <a:rPr lang="en-US" smtClean="0"/>
-              <a:t>Fourth level</a:t>
-            </a:r>
-          </a:p>
-          <a:p>
-            <a:pPr lvl="4"/>
-            <a:r>
-              <a:rPr lang="en-US" smtClean="0"/>
-              <a:t>Fifth level</a:t>
-            </a:r>
-            <a:endParaRPr lang="en-US"/>
-          </a:p>
-        </p:txBody>
-      </p:sp>
-      <p:sp>
-        <p:nvSpPr>
-          <p:cNvPr id="6" name="Footer Placeholder 5"/>
-          <p:cNvSpPr>
-            <a:spLocks noGrp="1"/>
-          </p:cNvSpPr>
-          <p:nvPr>
-            <p:ph type="ftr" sz="quarter" idx="4"/>
-          </p:nvPr>
-        </p:nvSpPr>
-        <p:spPr>
-          <a:xfrm>
-            <a:off x="0" y="8685213"/>
-            <a:ext cx="2971800" cy="457200"/>
-          </a:xfrm>
-          <a:prstGeom prst="rect">
-            <a:avLst/>
-          </a:prstGeom>
-        </p:spPr>
-        <p:txBody>
-          <a:bodyPr vert="horz" lIns="91440" tIns="45720" rIns="91440" bIns="45720" rtlCol="0" anchor="b"/>
-          <a:lstStyle>
-            <a:lvl1pPr algn="l">
-              <a:defRPr sz="1200"/>
-            </a:lvl1pPr>
-          </a:lstStyle>
-          <a:p>
-            <a:endParaRPr lang="en-US"/>
-          </a:p>
-        </p:txBody>
-      </p:sp>
-      <p:sp>
-        <p:nvSpPr>
-          <p:cNvPr id="7" name="Slide Number Placeholder 6"/>
-          <p:cNvSpPr>
-            <a:spLocks noGrp="1"/>
-          </p:cNvSpPr>
-          <p:nvPr>
-            <p:ph type="sldNum" sz="quarter" idx="5"/>
-          </p:nvPr>
-        </p:nvSpPr>
-        <p:spPr>
-          <a:xfrm>
-            <a:off x="3884613" y="8685213"/>
-            <a:ext cx="2971800" cy="457200"/>
-          </a:xfrm>
-          <a:prstGeom prst="rect">
-            <a:avLst/>
-          </a:prstGeom>
-        </p:spPr>
-        <p:txBody>
-          <a:bodyPr vert="horz" lIns="91440" tIns="45720" rIns="91440" bIns="45720" rtlCol="0" anchor="b"/>
-          <a:lstStyle>
-            <a:lvl1pPr algn="r">
-              <a:defRPr sz="1200"/>
-            </a:lvl1pPr>
-          </a:lstStyle>
-          <a:p>
-            <a:fld id="{BB5E49A5-4136-284D-997B-48E1D791AD67}" type="slidenum">
-              <a:rPr lang="en-US" smtClean="0"/>
-              <a:t>‹#›</a:t>
-            </a:fld>
-            <a:endParaRPr lang="en-US"/>
-          </a:p>
-        </p:txBody>
-      </p:sp>
     </p:spTree>
     <p:extLst>
       <p:ext uri="{BB962C8B-B14F-4D97-AF65-F5344CB8AC3E}">
-        <p14:creationId xmlns:p14="http://schemas.microsoft.com/office/powerpoint/2010/main" val="2623252185"/>
+        <p14:creationId xmlns:p14="http://schemas.microsoft.com/office/powerpoint/2010/main" val="3205068240"/>
       </p:ext>
     </p:extLst>
   </p:cSld>
   <p:clrMap bg1="lt1" tx1="dk1" bg2="lt2" tx2="dk2" accent1="accent1" accent2="accent2" accent3="accent3" accent4="accent4" accent5="accent5" accent6="accent6" hlink="hlink" folHlink="folHlink"/>
   <p:notesStyle>
-    <a:lvl1pPr marL="0" algn="l" defTabSz="457200" rtl="0" eaLnBrk="1" latinLnBrk="0" hangingPunct="1">
-      <a:defRPr sz="1200" kern="1200">
+    <a:lvl1pPr marL="0" algn="l" defTabSz="914400" rtl="0" eaLnBrk="1" latinLnBrk="0" hangingPunct="1">
+      <a:defRPr kumimoji="1" sz="1200" kern="1200">
         <a:solidFill>
           <a:schemeClr val="tx1"/>
         </a:solidFill>
@@ -373,8 +167,8 @@
         <a:cs typeface="+mn-cs"/>
       </a:defRPr>
     </a:lvl1pPr>
-    <a:lvl2pPr marL="457200" algn="l" defTabSz="457200" rtl="0" eaLnBrk="1" latinLnBrk="0" hangingPunct="1">
-      <a:defRPr sz="1200" kern="1200">
+    <a:lvl2pPr marL="457200" algn="l" defTabSz="914400" rtl="0" eaLnBrk="1" latinLnBrk="0" hangingPunct="1">
+      <a:defRPr kumimoji="1" sz="1200" kern="1200">
         <a:solidFill>
           <a:schemeClr val="tx1"/>
         </a:solidFill>
@@ -383,8 +177,8 @@
         <a:cs typeface="+mn-cs"/>
       </a:defRPr>
     </a:lvl2pPr>
-    <a:lvl3pPr marL="914400" algn="l" defTabSz="457200" rtl="0" eaLnBrk="1" latinLnBrk="0" hangingPunct="1">
-      <a:defRPr sz="1200" kern="1200">
+    <a:lvl3pPr marL="914400" algn="l" defTabSz="914400" rtl="0" eaLnBrk="1" latinLnBrk="0" hangingPunct="1">
+      <a:defRPr kumimoji="1" sz="1200" kern="1200">
         <a:solidFill>
           <a:schemeClr val="tx1"/>
         </a:solidFill>
@@ -393,8 +187,8 @@
         <a:cs typeface="+mn-cs"/>
       </a:defRPr>
     </a:lvl3pPr>
-    <a:lvl4pPr marL="1371600" algn="l" defTabSz="457200" rtl="0" eaLnBrk="1" latinLnBrk="0" hangingPunct="1">
-      <a:defRPr sz="1200" kern="1200">
+    <a:lvl4pPr marL="1371600" algn="l" defTabSz="914400" rtl="0" eaLnBrk="1" latinLnBrk="0" hangingPunct="1">
+      <a:defRPr kumimoji="1" sz="1200" kern="1200">
         <a:solidFill>
           <a:schemeClr val="tx1"/>
         </a:solidFill>
@@ -403,8 +197,8 @@
         <a:cs typeface="+mn-cs"/>
       </a:defRPr>
     </a:lvl4pPr>
-    <a:lvl5pPr marL="1828800" algn="l" defTabSz="457200" rtl="0" eaLnBrk="1" latinLnBrk="0" hangingPunct="1">
-      <a:defRPr sz="1200" kern="1200">
+    <a:lvl5pPr marL="1828800" algn="l" defTabSz="914400" rtl="0" eaLnBrk="1" latinLnBrk="0" hangingPunct="1">
+      <a:defRPr kumimoji="1" sz="1200" kern="1200">
         <a:solidFill>
           <a:schemeClr val="tx1"/>
         </a:solidFill>
@@ -413,8 +207,8 @@
         <a:cs typeface="+mn-cs"/>
       </a:defRPr>
     </a:lvl5pPr>
-    <a:lvl6pPr marL="2286000" algn="l" defTabSz="457200" rtl="0" eaLnBrk="1" latinLnBrk="0" hangingPunct="1">
-      <a:defRPr sz="1200" kern="1200">
+    <a:lvl6pPr marL="2286000" algn="l" defTabSz="914400" rtl="0" eaLnBrk="1" latinLnBrk="0" hangingPunct="1">
+      <a:defRPr kumimoji="1" sz="1200" kern="1200">
         <a:solidFill>
           <a:schemeClr val="tx1"/>
         </a:solidFill>
@@ -423,8 +217,8 @@
         <a:cs typeface="+mn-cs"/>
       </a:defRPr>
     </a:lvl6pPr>
-    <a:lvl7pPr marL="2743200" algn="l" defTabSz="457200" rtl="0" eaLnBrk="1" latinLnBrk="0" hangingPunct="1">
-      <a:defRPr sz="1200" kern="1200">
+    <a:lvl7pPr marL="2743200" algn="l" defTabSz="914400" rtl="0" eaLnBrk="1" latinLnBrk="0" hangingPunct="1">
+      <a:defRPr kumimoji="1" sz="1200" kern="1200">
         <a:solidFill>
           <a:schemeClr val="tx1"/>
         </a:solidFill>
@@ -433,8 +227,8 @@
         <a:cs typeface="+mn-cs"/>
       </a:defRPr>
     </a:lvl7pPr>
-    <a:lvl8pPr marL="3200400" algn="l" defTabSz="457200" rtl="0" eaLnBrk="1" latinLnBrk="0" hangingPunct="1">
-      <a:defRPr sz="1200" kern="1200">
+    <a:lvl8pPr marL="3200400" algn="l" defTabSz="914400" rtl="0" eaLnBrk="1" latinLnBrk="0" hangingPunct="1">
+      <a:defRPr kumimoji="1" sz="1200" kern="1200">
         <a:solidFill>
           <a:schemeClr val="tx1"/>
         </a:solidFill>
@@ -443,8 +237,8 @@
         <a:cs typeface="+mn-cs"/>
       </a:defRPr>
     </a:lvl8pPr>
-    <a:lvl9pPr marL="3657600" algn="l" defTabSz="457200" rtl="0" eaLnBrk="1" latinLnBrk="0" hangingPunct="1">
-      <a:defRPr sz="1200" kern="1200">
+    <a:lvl9pPr marL="3657600" algn="l" defTabSz="914400" rtl="0" eaLnBrk="1" latinLnBrk="0" hangingPunct="1">
+      <a:defRPr kumimoji="1" sz="1200" kern="1200">
         <a:solidFill>
           <a:schemeClr val="tx1"/>
         </a:solidFill>
@@ -458,7 +252,7 @@
 </file>
 
 <file path=ppt/notesSlides/notesSlide1.xml><?xml version="1.0" encoding="utf-8"?>
-<p:notes xmlns:a="http://schemas.openxmlformats.org/drawingml/2006/main" xmlns:p="http://schemas.openxmlformats.org/presentationml/2006/main" xmlns:r="http://schemas.openxmlformats.org/officeDocument/2006/relationships">
+<p:notes xmlns:a="http://schemas.openxmlformats.org/drawingml/2006/main" xmlns:r="http://schemas.openxmlformats.org/officeDocument/2006/relationships" xmlns:p="http://schemas.openxmlformats.org/presentationml/2006/main">
   <p:cSld>
     <p:spTree>
       <p:nvGrpSpPr>
@@ -478,7 +272,7 @@
         <p:nvSpPr>
           <p:cNvPr id="2" name="Slide Image Placeholder 1"/>
           <p:cNvSpPr>
-            <a:spLocks noGrp="1"/>
+            <a:spLocks noGrp="1" noRot="1" noChangeAspect="1"/>
           </p:cNvSpPr>
           <p:nvPr>
             <p:ph type="sldImg" idx="2"/>
@@ -493,7 +287,7 @@
             <a:spLocks noGrp="1"/>
           </p:cNvSpPr>
           <p:nvPr>
-            <p:ph type="body" idx="3" sz="quarter"/>
+            <p:ph type="body" sz="quarter" idx="3"/>
           </p:nvPr>
         </p:nvSpPr>
         <p:spPr/>
@@ -569,7 +363,7 @@
             <a:spLocks noGrp="1"/>
           </p:cNvSpPr>
           <p:nvPr>
-            <p:ph type="sldNum" idx="5" sz="quarter"/>
+            <p:ph type="sldNum" sz="quarter" idx="5"/>
           </p:nvPr>
         </p:nvSpPr>
         <p:spPr/>
@@ -620,10 +414,9 @@
           <a:lstStyle/>
           <a:p>
             <a:r>
-              <a:rPr lang="en-US" smtClean="0"/>
+              <a:rPr lang="en-US"/>
               <a:t>Click to edit Master title style</a:t>
             </a:r>
-            <a:endParaRPr lang="en-US"/>
           </a:p>
         </p:txBody>
       </p:sp>
@@ -739,10 +532,9 @@
           </a:lstStyle>
           <a:p>
             <a:r>
-              <a:rPr lang="en-US" smtClean="0"/>
+              <a:rPr lang="en-US"/>
               <a:t>Click to edit Master subtitle style</a:t>
             </a:r>
-            <a:endParaRPr lang="en-US"/>
           </a:p>
         </p:txBody>
       </p:sp>
@@ -763,7 +555,7 @@
           <a:p>
             <a:fld id="{5BCAD085-E8A6-8845-BD4E-CB4CCA059FC4}" type="datetimeFigureOut">
               <a:rPr lang="en-US" smtClean="0"/>
-              <a:t>1/27/13</a:t>
+              <a:t>10/4/26</a:t>
             </a:fld>
             <a:endParaRPr lang="en-US"/>
           </a:p>
@@ -857,10 +649,9 @@
           <a:lstStyle/>
           <a:p>
             <a:r>
-              <a:rPr lang="en-US" smtClean="0"/>
+              <a:rPr lang="en-US"/>
               <a:t>Click to edit Master title style</a:t>
             </a:r>
-            <a:endParaRPr lang="en-US"/>
           </a:p>
         </p:txBody>
       </p:sp>
@@ -881,38 +672,37 @@
           <a:p>
             <a:pPr lvl="0"/>
             <a:r>
-              <a:rPr lang="en-US" smtClean="0"/>
+              <a:rPr lang="en-US"/>
               <a:t>Click to edit Master text styles</a:t>
             </a:r>
           </a:p>
           <a:p>
             <a:pPr lvl="1"/>
             <a:r>
-              <a:rPr lang="en-US" smtClean="0"/>
+              <a:rPr lang="en-US"/>
               <a:t>Second level</a:t>
             </a:r>
           </a:p>
           <a:p>
             <a:pPr lvl="2"/>
             <a:r>
-              <a:rPr lang="en-US" smtClean="0"/>
+              <a:rPr lang="en-US"/>
               <a:t>Third level</a:t>
             </a:r>
           </a:p>
           <a:p>
             <a:pPr lvl="3"/>
             <a:r>
-              <a:rPr lang="en-US" smtClean="0"/>
+              <a:rPr lang="en-US"/>
               <a:t>Fourth level</a:t>
             </a:r>
           </a:p>
           <a:p>
             <a:pPr lvl="4"/>
             <a:r>
-              <a:rPr lang="en-US" smtClean="0"/>
+              <a:rPr lang="en-US"/>
               <a:t>Fifth level</a:t>
             </a:r>
-            <a:endParaRPr lang="en-US"/>
           </a:p>
         </p:txBody>
       </p:sp>
@@ -933,7 +723,7 @@
           <a:p>
             <a:fld id="{5BCAD085-E8A6-8845-BD4E-CB4CCA059FC4}" type="datetimeFigureOut">
               <a:rPr lang="en-US" smtClean="0"/>
-              <a:t>1/27/13</a:t>
+              <a:t>10/4/26</a:t>
             </a:fld>
             <a:endParaRPr lang="en-US"/>
           </a:p>
@@ -1032,10 +822,9 @@
           <a:lstStyle/>
           <a:p>
             <a:r>
-              <a:rPr lang="en-US" smtClean="0"/>
+              <a:rPr lang="en-US"/>
               <a:t>Click to edit Master title style</a:t>
             </a:r>
-            <a:endParaRPr lang="en-US"/>
           </a:p>
         </p:txBody>
       </p:sp>
@@ -1061,38 +850,37 @@
           <a:p>
             <a:pPr lvl="0"/>
             <a:r>
-              <a:rPr lang="en-US" smtClean="0"/>
+              <a:rPr lang="en-US"/>
               <a:t>Click to edit Master text styles</a:t>
             </a:r>
           </a:p>
           <a:p>
             <a:pPr lvl="1"/>
             <a:r>
-              <a:rPr lang="en-US" smtClean="0"/>
+              <a:rPr lang="en-US"/>
               <a:t>Second level</a:t>
             </a:r>
           </a:p>
           <a:p>
             <a:pPr lvl="2"/>
             <a:r>
-              <a:rPr lang="en-US" smtClean="0"/>
+              <a:rPr lang="en-US"/>
               <a:t>Third level</a:t>
             </a:r>
           </a:p>
           <a:p>
             <a:pPr lvl="3"/>
             <a:r>
-              <a:rPr lang="en-US" smtClean="0"/>
+              <a:rPr lang="en-US"/>
               <a:t>Fourth level</a:t>
             </a:r>
           </a:p>
           <a:p>
             <a:pPr lvl="4"/>
             <a:r>
-              <a:rPr lang="en-US" smtClean="0"/>
+              <a:rPr lang="en-US"/>
               <a:t>Fifth level</a:t>
             </a:r>
-            <a:endParaRPr lang="en-US"/>
           </a:p>
         </p:txBody>
       </p:sp>
@@ -1113,7 +901,7 @@
           <a:p>
             <a:fld id="{5BCAD085-E8A6-8845-BD4E-CB4CCA059FC4}" type="datetimeFigureOut">
               <a:rPr lang="en-US" smtClean="0"/>
-              <a:t>1/27/13</a:t>
+              <a:t>10/4/26</a:t>
             </a:fld>
             <a:endParaRPr lang="en-US"/>
           </a:p>
@@ -1207,10 +995,9 @@
           <a:lstStyle/>
           <a:p>
             <a:r>
-              <a:rPr lang="en-US" smtClean="0"/>
+              <a:rPr lang="en-US"/>
               <a:t>Click to edit Master title style</a:t>
             </a:r>
-            <a:endParaRPr lang="en-US"/>
           </a:p>
         </p:txBody>
       </p:sp>
@@ -1231,38 +1018,37 @@
           <a:p>
             <a:pPr lvl="0"/>
             <a:r>
-              <a:rPr lang="en-US" smtClean="0"/>
+              <a:rPr lang="en-US"/>
               <a:t>Click to edit Master text styles</a:t>
             </a:r>
           </a:p>
           <a:p>
             <a:pPr lvl="1"/>
             <a:r>
-              <a:rPr lang="en-US" smtClean="0"/>
+              <a:rPr lang="en-US"/>
               <a:t>Second level</a:t>
             </a:r>
           </a:p>
           <a:p>
             <a:pPr lvl="2"/>
             <a:r>
-              <a:rPr lang="en-US" smtClean="0"/>
+              <a:rPr lang="en-US"/>
               <a:t>Third level</a:t>
             </a:r>
           </a:p>
           <a:p>
             <a:pPr lvl="3"/>
             <a:r>
-              <a:rPr lang="en-US" smtClean="0"/>
+              <a:rPr lang="en-US"/>
               <a:t>Fourth level</a:t>
             </a:r>
           </a:p>
           <a:p>
             <a:pPr lvl="4"/>
             <a:r>
-              <a:rPr lang="en-US" smtClean="0"/>
+              <a:rPr lang="en-US"/>
               <a:t>Fifth level</a:t>
             </a:r>
-            <a:endParaRPr lang="en-US"/>
           </a:p>
         </p:txBody>
       </p:sp>
@@ -1283,7 +1069,7 @@
           <a:p>
             <a:fld id="{5BCAD085-E8A6-8845-BD4E-CB4CCA059FC4}" type="datetimeFigureOut">
               <a:rPr lang="en-US" smtClean="0"/>
-              <a:t>1/27/13</a:t>
+              <a:t>10/4/26</a:t>
             </a:fld>
             <a:endParaRPr lang="en-US"/>
           </a:p>
@@ -1386,10 +1172,9 @@
           </a:lstStyle>
           <a:p>
             <a:r>
-              <a:rPr lang="en-US" smtClean="0"/>
+              <a:rPr lang="en-US"/>
               <a:t>Click to edit Master title style</a:t>
             </a:r>
-            <a:endParaRPr lang="en-US"/>
           </a:p>
         </p:txBody>
       </p:sp>
@@ -1506,7 +1291,7 @@
           <a:p>
             <a:pPr lvl="0"/>
             <a:r>
-              <a:rPr lang="en-US" smtClean="0"/>
+              <a:rPr lang="en-US"/>
               <a:t>Click to edit Master text styles</a:t>
             </a:r>
           </a:p>
@@ -1529,7 +1314,7 @@
           <a:p>
             <a:fld id="{5BCAD085-E8A6-8845-BD4E-CB4CCA059FC4}" type="datetimeFigureOut">
               <a:rPr lang="en-US" smtClean="0"/>
-              <a:t>1/27/13</a:t>
+              <a:t>10/4/26</a:t>
             </a:fld>
             <a:endParaRPr lang="en-US"/>
           </a:p>
@@ -1623,10 +1408,9 @@
           <a:lstStyle/>
           <a:p>
             <a:r>
-              <a:rPr lang="en-US" smtClean="0"/>
+              <a:rPr lang="en-US"/>
               <a:t>Click to edit Master title style</a:t>
             </a:r>
-            <a:endParaRPr lang="en-US"/>
           </a:p>
         </p:txBody>
       </p:sp>
@@ -1680,38 +1464,37 @@
           <a:p>
             <a:pPr lvl="0"/>
             <a:r>
-              <a:rPr lang="en-US" smtClean="0"/>
+              <a:rPr lang="en-US"/>
               <a:t>Click to edit Master text styles</a:t>
             </a:r>
           </a:p>
           <a:p>
             <a:pPr lvl="1"/>
             <a:r>
-              <a:rPr lang="en-US" smtClean="0"/>
+              <a:rPr lang="en-US"/>
               <a:t>Second level</a:t>
             </a:r>
           </a:p>
           <a:p>
             <a:pPr lvl="2"/>
             <a:r>
-              <a:rPr lang="en-US" smtClean="0"/>
+              <a:rPr lang="en-US"/>
               <a:t>Third level</a:t>
             </a:r>
           </a:p>
           <a:p>
             <a:pPr lvl="3"/>
             <a:r>
-              <a:rPr lang="en-US" smtClean="0"/>
+              <a:rPr lang="en-US"/>
               <a:t>Fourth level</a:t>
             </a:r>
           </a:p>
           <a:p>
             <a:pPr lvl="4"/>
             <a:r>
-              <a:rPr lang="en-US" smtClean="0"/>
+              <a:rPr lang="en-US"/>
               <a:t>Fifth level</a:t>
             </a:r>
-            <a:endParaRPr lang="en-US"/>
           </a:p>
         </p:txBody>
       </p:sp>
@@ -1765,38 +1548,37 @@
           <a:p>
             <a:pPr lvl="0"/>
             <a:r>
-              <a:rPr lang="en-US" smtClean="0"/>
+              <a:rPr lang="en-US"/>
               <a:t>Click to edit Master text styles</a:t>
             </a:r>
           </a:p>
           <a:p>
             <a:pPr lvl="1"/>
             <a:r>
-              <a:rPr lang="en-US" smtClean="0"/>
+              <a:rPr lang="en-US"/>
               <a:t>Second level</a:t>
             </a:r>
           </a:p>
           <a:p>
             <a:pPr lvl="2"/>
             <a:r>
-              <a:rPr lang="en-US" smtClean="0"/>
+              <a:rPr lang="en-US"/>
               <a:t>Third level</a:t>
             </a:r>
           </a:p>
           <a:p>
             <a:pPr lvl="3"/>
             <a:r>
-              <a:rPr lang="en-US" smtClean="0"/>
+              <a:rPr lang="en-US"/>
               <a:t>Fourth level</a:t>
             </a:r>
           </a:p>
           <a:p>
             <a:pPr lvl="4"/>
             <a:r>
-              <a:rPr lang="en-US" smtClean="0"/>
+              <a:rPr lang="en-US"/>
               <a:t>Fifth level</a:t>
             </a:r>
-            <a:endParaRPr lang="en-US"/>
           </a:p>
         </p:txBody>
       </p:sp>
@@ -1817,7 +1599,7 @@
           <a:p>
             <a:fld id="{5BCAD085-E8A6-8845-BD4E-CB4CCA059FC4}" type="datetimeFigureOut">
               <a:rPr lang="en-US" smtClean="0"/>
-              <a:t>1/27/13</a:t>
+              <a:t>10/4/26</a:t>
             </a:fld>
             <a:endParaRPr lang="en-US"/>
           </a:p>
@@ -1915,10 +1697,9 @@
           </a:lstStyle>
           <a:p>
             <a:r>
-              <a:rPr lang="en-US" smtClean="0"/>
+              <a:rPr lang="en-US"/>
               <a:t>Click to edit Master title style</a:t>
             </a:r>
-            <a:endParaRPr lang="en-US"/>
           </a:p>
         </p:txBody>
       </p:sp>
@@ -1981,7 +1762,7 @@
           <a:p>
             <a:pPr lvl="0"/>
             <a:r>
-              <a:rPr lang="en-US" smtClean="0"/>
+              <a:rPr lang="en-US"/>
               <a:t>Click to edit Master text styles</a:t>
             </a:r>
           </a:p>
@@ -2037,38 +1818,37 @@
           <a:p>
             <a:pPr lvl="0"/>
             <a:r>
-              <a:rPr lang="en-US" smtClean="0"/>
+              <a:rPr lang="en-US"/>
               <a:t>Click to edit Master text styles</a:t>
             </a:r>
           </a:p>
           <a:p>
             <a:pPr lvl="1"/>
             <a:r>
-              <a:rPr lang="en-US" smtClean="0"/>
+              <a:rPr lang="en-US"/>
               <a:t>Second level</a:t>
             </a:r>
           </a:p>
           <a:p>
             <a:pPr lvl="2"/>
             <a:r>
-              <a:rPr lang="en-US" smtClean="0"/>
+              <a:rPr lang="en-US"/>
               <a:t>Third level</a:t>
             </a:r>
           </a:p>
           <a:p>
             <a:pPr lvl="3"/>
             <a:r>
-              <a:rPr lang="en-US" smtClean="0"/>
+              <a:rPr lang="en-US"/>
               <a:t>Fourth level</a:t>
             </a:r>
           </a:p>
           <a:p>
             <a:pPr lvl="4"/>
             <a:r>
-              <a:rPr lang="en-US" smtClean="0"/>
+              <a:rPr lang="en-US"/>
               <a:t>Fifth level</a:t>
             </a:r>
-            <a:endParaRPr lang="en-US"/>
           </a:p>
         </p:txBody>
       </p:sp>
@@ -2131,7 +1911,7 @@
           <a:p>
             <a:pPr lvl="0"/>
             <a:r>
-              <a:rPr lang="en-US" smtClean="0"/>
+              <a:rPr lang="en-US"/>
               <a:t>Click to edit Master text styles</a:t>
             </a:r>
           </a:p>
@@ -2187,38 +1967,37 @@
           <a:p>
             <a:pPr lvl="0"/>
             <a:r>
-              <a:rPr lang="en-US" smtClean="0"/>
+              <a:rPr lang="en-US"/>
               <a:t>Click to edit Master text styles</a:t>
             </a:r>
           </a:p>
           <a:p>
             <a:pPr lvl="1"/>
             <a:r>
-              <a:rPr lang="en-US" smtClean="0"/>
+              <a:rPr lang="en-US"/>
               <a:t>Second level</a:t>
             </a:r>
           </a:p>
           <a:p>
             <a:pPr lvl="2"/>
             <a:r>
-              <a:rPr lang="en-US" smtClean="0"/>
+              <a:rPr lang="en-US"/>
               <a:t>Third level</a:t>
             </a:r>
           </a:p>
           <a:p>
             <a:pPr lvl="3"/>
             <a:r>
-              <a:rPr lang="en-US" smtClean="0"/>
+              <a:rPr lang="en-US"/>
               <a:t>Fourth level</a:t>
             </a:r>
           </a:p>
           <a:p>
             <a:pPr lvl="4"/>
             <a:r>
-              <a:rPr lang="en-US" smtClean="0"/>
+              <a:rPr lang="en-US"/>
               <a:t>Fifth level</a:t>
             </a:r>
-            <a:endParaRPr lang="en-US"/>
           </a:p>
         </p:txBody>
       </p:sp>
@@ -2239,7 +2018,7 @@
           <a:p>
             <a:fld id="{5BCAD085-E8A6-8845-BD4E-CB4CCA059FC4}" type="datetimeFigureOut">
               <a:rPr lang="en-US" smtClean="0"/>
-              <a:t>1/27/13</a:t>
+              <a:t>10/4/26</a:t>
             </a:fld>
             <a:endParaRPr lang="en-US"/>
           </a:p>
@@ -2333,10 +2112,9 @@
           <a:lstStyle/>
           <a:p>
             <a:r>
-              <a:rPr lang="en-US" smtClean="0"/>
+              <a:rPr lang="en-US"/>
               <a:t>Click to edit Master title style</a:t>
             </a:r>
-            <a:endParaRPr lang="en-US"/>
           </a:p>
         </p:txBody>
       </p:sp>
@@ -2357,7 +2135,7 @@
           <a:p>
             <a:fld id="{5BCAD085-E8A6-8845-BD4E-CB4CCA059FC4}" type="datetimeFigureOut">
               <a:rPr lang="en-US" smtClean="0"/>
-              <a:t>1/27/13</a:t>
+              <a:t>10/4/26</a:t>
             </a:fld>
             <a:endParaRPr lang="en-US"/>
           </a:p>
@@ -2452,7 +2230,7 @@
           <a:p>
             <a:fld id="{5BCAD085-E8A6-8845-BD4E-CB4CCA059FC4}" type="datetimeFigureOut">
               <a:rPr lang="en-US" smtClean="0"/>
-              <a:t>1/27/13</a:t>
+              <a:t>10/4/26</a:t>
             </a:fld>
             <a:endParaRPr lang="en-US"/>
           </a:p>
@@ -2555,10 +2333,9 @@
           </a:lstStyle>
           <a:p>
             <a:r>
-              <a:rPr lang="en-US" smtClean="0"/>
+              <a:rPr lang="en-US"/>
               <a:t>Click to edit Master title style</a:t>
             </a:r>
-            <a:endParaRPr lang="en-US"/>
           </a:p>
         </p:txBody>
       </p:sp>
@@ -2612,38 +2389,37 @@
           <a:p>
             <a:pPr lvl="0"/>
             <a:r>
-              <a:rPr lang="en-US" smtClean="0"/>
+              <a:rPr lang="en-US"/>
               <a:t>Click to edit Master text styles</a:t>
             </a:r>
           </a:p>
           <a:p>
             <a:pPr lvl="1"/>
             <a:r>
-              <a:rPr lang="en-US" smtClean="0"/>
+              <a:rPr lang="en-US"/>
               <a:t>Second level</a:t>
             </a:r>
           </a:p>
           <a:p>
             <a:pPr lvl="2"/>
             <a:r>
-              <a:rPr lang="en-US" smtClean="0"/>
+              <a:rPr lang="en-US"/>
               <a:t>Third level</a:t>
             </a:r>
           </a:p>
           <a:p>
             <a:pPr lvl="3"/>
             <a:r>
-              <a:rPr lang="en-US" smtClean="0"/>
+              <a:rPr lang="en-US"/>
               <a:t>Fourth level</a:t>
             </a:r>
           </a:p>
           <a:p>
             <a:pPr lvl="4"/>
             <a:r>
-              <a:rPr lang="en-US" smtClean="0"/>
+              <a:rPr lang="en-US"/>
               <a:t>Fifth level</a:t>
             </a:r>
-            <a:endParaRPr lang="en-US"/>
           </a:p>
         </p:txBody>
       </p:sp>
@@ -2706,7 +2482,7 @@
           <a:p>
             <a:pPr lvl="0"/>
             <a:r>
-              <a:rPr lang="en-US" smtClean="0"/>
+              <a:rPr lang="en-US"/>
               <a:t>Click to edit Master text styles</a:t>
             </a:r>
           </a:p>
@@ -2729,7 +2505,7 @@
           <a:p>
             <a:fld id="{5BCAD085-E8A6-8845-BD4E-CB4CCA059FC4}" type="datetimeFigureOut">
               <a:rPr lang="en-US" smtClean="0"/>
-              <a:t>1/27/13</a:t>
+              <a:t>10/4/26</a:t>
             </a:fld>
             <a:endParaRPr lang="en-US"/>
           </a:p>
@@ -2832,10 +2608,9 @@
           </a:lstStyle>
           <a:p>
             <a:r>
-              <a:rPr lang="en-US" smtClean="0"/>
+              <a:rPr lang="en-US"/>
               <a:t>Click to edit Master title style</a:t>
             </a:r>
-            <a:endParaRPr lang="en-US"/>
           </a:p>
         </p:txBody>
       </p:sp>
@@ -2959,7 +2734,7 @@
           <a:p>
             <a:pPr lvl="0"/>
             <a:r>
-              <a:rPr lang="en-US" smtClean="0"/>
+              <a:rPr lang="en-US"/>
               <a:t>Click to edit Master text styles</a:t>
             </a:r>
           </a:p>
@@ -2982,7 +2757,7 @@
           <a:p>
             <a:fld id="{5BCAD085-E8A6-8845-BD4E-CB4CCA059FC4}" type="datetimeFigureOut">
               <a:rPr lang="en-US" smtClean="0"/>
-              <a:t>1/27/13</a:t>
+              <a:t>10/4/26</a:t>
             </a:fld>
             <a:endParaRPr lang="en-US"/>
           </a:p>
@@ -3091,10 +2866,9 @@
           <a:lstStyle/>
           <a:p>
             <a:r>
-              <a:rPr lang="en-US" smtClean="0"/>
+              <a:rPr lang="en-US"/>
               <a:t>Click to edit Master title style</a:t>
             </a:r>
-            <a:endParaRPr lang="en-US"/>
           </a:p>
         </p:txBody>
       </p:sp>
@@ -3125,38 +2899,37 @@
           <a:p>
             <a:pPr lvl="0"/>
             <a:r>
-              <a:rPr lang="en-US" smtClean="0"/>
+              <a:rPr lang="en-US"/>
               <a:t>Click to edit Master text styles</a:t>
             </a:r>
           </a:p>
           <a:p>
             <a:pPr lvl="1"/>
             <a:r>
-              <a:rPr lang="en-US" smtClean="0"/>
+              <a:rPr lang="en-US"/>
               <a:t>Second level</a:t>
             </a:r>
           </a:p>
           <a:p>
             <a:pPr lvl="2"/>
             <a:r>
-              <a:rPr lang="en-US" smtClean="0"/>
+              <a:rPr lang="en-US"/>
               <a:t>Third level</a:t>
             </a:r>
           </a:p>
           <a:p>
             <a:pPr lvl="3"/>
             <a:r>
-              <a:rPr lang="en-US" smtClean="0"/>
+              <a:rPr lang="en-US"/>
               <a:t>Fourth level</a:t>
             </a:r>
           </a:p>
           <a:p>
             <a:pPr lvl="4"/>
             <a:r>
-              <a:rPr lang="en-US" smtClean="0"/>
+              <a:rPr lang="en-US"/>
               <a:t>Fifth level</a:t>
             </a:r>
-            <a:endParaRPr lang="en-US"/>
           </a:p>
         </p:txBody>
       </p:sp>
@@ -3195,7 +2968,7 @@
           <a:p>
             <a:fld id="{5BCAD085-E8A6-8845-BD4E-CB4CCA059FC4}" type="datetimeFigureOut">
               <a:rPr lang="en-US" smtClean="0"/>
-              <a:t>1/27/13</a:t>
+              <a:t>10/4/26</a:t>
             </a:fld>
             <a:endParaRPr lang="en-US"/>
           </a:p>
@@ -3554,7 +3327,7 @@
 </file>
 
 <file path=ppt/slides/slide1.xml><?xml version="1.0" encoding="utf-8"?>
-<p:sld xmlns:a="http://schemas.openxmlformats.org/drawingml/2006/main" xmlns:p="http://schemas.openxmlformats.org/presentationml/2006/main" xmlns:r="http://schemas.openxmlformats.org/officeDocument/2006/relationships">
+<p:sld xmlns:a="http://schemas.openxmlformats.org/drawingml/2006/main" xmlns:r="http://schemas.openxmlformats.org/officeDocument/2006/relationships" xmlns:p="http://schemas.openxmlformats.org/presentationml/2006/main">
   <p:cSld>
     <p:bg>
       <p:bgPr>
@@ -3570,7 +3343,14 @@
         <p:cNvGrpSpPr/>
         <p:nvPr/>
       </p:nvGrpSpPr>
-      <p:grpSpPr/>
+      <p:grpSpPr>
+        <a:xfrm>
+          <a:off x="0" y="0"/>
+          <a:ext cx="0" cy="0"/>
+          <a:chOff x="0" y="0"/>
+          <a:chExt cx="0" cy="0"/>
+        </a:xfrm>
+      </p:grpSpPr>
       <p:sp>
         <p:nvSpPr>
           <p:cNvPr id="2" name="background"/>
@@ -3579,7 +3359,7 @@
         </p:nvSpPr>
         <p:spPr>
           <a:xfrm>
-            <a:off x="0" y="0"/>
+            <a:off x="0" y="368300"/>
             <a:ext cx="14630400" cy="8229600"/>
           </a:xfrm>
           <a:prstGeom prst="rect">
@@ -3610,7 +3390,9 @@
         <p:txBody>
           <a:bodyPr rtlCol="0" anchor="ctr"/>
           <a:lstStyle/>
-          <a:p/>
+          <a:p>
+            <a:endParaRPr/>
+          </a:p>
         </p:txBody>
       </p:sp>
       <p:sp>
@@ -3630,7 +3412,7 @@
           <a:noFill/>
         </p:spPr>
         <p:txBody>
-          <a:bodyPr wrap="square" anchor="ctr" lIns="0" rIns="0" tIns="0" bIns="0">
+          <a:bodyPr wrap="square" lIns="0" tIns="0" rIns="0" bIns="0" anchor="ctr">
             <a:noAutofit/>
           </a:bodyPr>
           <a:lstStyle/>
@@ -3664,7 +3446,7 @@
           <a:noFill/>
         </p:spPr>
         <p:txBody>
-          <a:bodyPr wrap="square" anchor="ctr" lIns="0" rIns="0" tIns="0" bIns="0">
+          <a:bodyPr wrap="square" lIns="0" tIns="0" rIns="0" bIns="0" anchor="ctr">
             <a:noAutofit/>
           </a:bodyPr>
           <a:lstStyle/>
@@ -3722,7 +3504,9 @@
         <p:txBody>
           <a:bodyPr rtlCol="0" anchor="ctr"/>
           <a:lstStyle/>
-          <a:p/>
+          <a:p>
+            <a:endParaRPr/>
+          </a:p>
         </p:txBody>
       </p:sp>
       <p:sp>
@@ -3766,7 +3550,9 @@
         <p:txBody>
           <a:bodyPr rtlCol="0" anchor="ctr"/>
           <a:lstStyle/>
-          <a:p/>
+          <a:p>
+            <a:endParaRPr/>
+          </a:p>
         </p:txBody>
       </p:sp>
       <p:sp>
@@ -3810,7 +3596,9 @@
         <p:txBody>
           <a:bodyPr rtlCol="0" anchor="ctr"/>
           <a:lstStyle/>
-          <a:p/>
+          <a:p>
+            <a:endParaRPr/>
+          </a:p>
         </p:txBody>
       </p:sp>
       <p:sp>
@@ -3854,7 +3642,9 @@
         <p:txBody>
           <a:bodyPr rtlCol="0" anchor="ctr"/>
           <a:lstStyle/>
-          <a:p/>
+          <a:p>
+            <a:endParaRPr/>
+          </a:p>
         </p:txBody>
       </p:sp>
       <p:sp>
@@ -3898,7 +3688,9 @@
         <p:txBody>
           <a:bodyPr rtlCol="0" anchor="ctr"/>
           <a:lstStyle/>
-          <a:p/>
+          <a:p>
+            <a:endParaRPr/>
+          </a:p>
         </p:txBody>
       </p:sp>
       <p:sp>
@@ -3942,51 +3734,8 @@
         <p:txBody>
           <a:bodyPr rtlCol="0" anchor="ctr"/>
           <a:lstStyle/>
-          <a:p/>
-        </p:txBody>
-      </p:sp>
-      <p:sp>
-        <p:nvSpPr>
-          <p:cNvPr id="11" name="era-label:1"/>
-          <p:cNvSpPr txBox="1"/>
-          <p:nvPr/>
-        </p:nvSpPr>
-        <p:spPr>
-          <a:xfrm>
-            <a:off x="3054096" y="896112"/>
-            <a:ext cx="2704337" cy="347472"/>
-          </a:xfrm>
-          <a:prstGeom prst="rect">
-            <a:avLst/>
-          </a:prstGeom>
-          <a:noFill/>
-        </p:spPr>
-        <p:txBody>
-          <a:bodyPr wrap="square" anchor="t" lIns="0" rIns="0" tIns="0" bIns="0">
-            <a:noAutofit/>
-          </a:bodyPr>
-          <a:lstStyle/>
-          <a:p>
-            <a:pPr algn="ctr"/>
-            <a:r>
-              <a:rPr sz="950" b="1" i="0">
-                <a:solidFill>
-                  <a:srgbClr val="1F2937"/>
-                </a:solidFill>
-              </a:rPr>
-              <a:t>Era 1  (~2014)</a:t>
-            </a:r>
-          </a:p>
-          <a:p>
-            <a:pPr algn="ctr"/>
-            <a:r>
-              <a:rPr sz="850" b="0" i="0">
-                <a:solidFill>
-                  <a:srgbClr val="64748B"/>
-                </a:solidFill>
-              </a:rPr>
-              <a:t>Queue &amp; scalability foundation</a:t>
-            </a:r>
+          <a:p>
+            <a:endParaRPr/>
           </a:p>
         </p:txBody>
       </p:sp>
@@ -4031,96 +3780,8 @@
         <p:txBody>
           <a:bodyPr rtlCol="0" anchor="ctr"/>
           <a:lstStyle/>
-          <a:p/>
-        </p:txBody>
-      </p:sp>
-      <p:sp>
-        <p:nvSpPr>
-          <p:cNvPr id="13" name="era-label:2"/>
-          <p:cNvSpPr txBox="1"/>
-          <p:nvPr/>
-        </p:nvSpPr>
-        <p:spPr>
-          <a:xfrm>
-            <a:off x="5831586" y="896112"/>
-            <a:ext cx="2704338" cy="347472"/>
-          </a:xfrm>
-          <a:prstGeom prst="rect">
-            <a:avLst/>
-          </a:prstGeom>
-          <a:noFill/>
-        </p:spPr>
-        <p:txBody>
-          <a:bodyPr wrap="square" anchor="t" lIns="0" rIns="0" tIns="0" bIns="0">
-            <a:noAutofit/>
-          </a:bodyPr>
-          <a:lstStyle/>
-          <a:p>
-            <a:pPr algn="ctr"/>
-            <a:r>
-              <a:rPr sz="950" b="1" i="0">
-                <a:solidFill>
-                  <a:srgbClr val="1F2937"/>
-                </a:solidFill>
-              </a:rPr>
-              <a:t>Era 2  (2015–2018)</a:t>
-            </a:r>
-          </a:p>
-          <a:p>
-            <a:pPr algn="ctr"/>
-            <a:r>
-              <a:rPr sz="850" b="0" i="0">
-                <a:solidFill>
-                  <a:srgbClr val="64748B"/>
-                </a:solidFill>
-              </a:rPr>
-              <a:t>Programmable datapath</a:t>
-            </a:r>
-          </a:p>
-        </p:txBody>
-      </p:sp>
-      <p:sp>
-        <p:nvSpPr>
-          <p:cNvPr id="14" name="era-label:3"/>
-          <p:cNvSpPr txBox="1"/>
-          <p:nvPr/>
-        </p:nvSpPr>
-        <p:spPr>
-          <a:xfrm>
-            <a:off x="8609076" y="896112"/>
-            <a:ext cx="2704337" cy="347472"/>
-          </a:xfrm>
-          <a:prstGeom prst="rect">
-            <a:avLst/>
-          </a:prstGeom>
-          <a:noFill/>
-        </p:spPr>
-        <p:txBody>
-          <a:bodyPr wrap="square" anchor="t" lIns="0" rIns="0" tIns="0" bIns="0">
-            <a:noAutofit/>
-          </a:bodyPr>
-          <a:lstStyle/>
-          <a:p>
-            <a:pPr algn="ctr"/>
-            <a:r>
-              <a:rPr sz="950" b="1" i="0">
-                <a:solidFill>
-                  <a:srgbClr val="1F2937"/>
-                </a:solidFill>
-              </a:rPr>
-              <a:t>Era 3  (2019–2022)</a:t>
-            </a:r>
-          </a:p>
-          <a:p>
-            <a:pPr algn="ctr"/>
-            <a:r>
-              <a:rPr sz="850" b="0" i="0">
-                <a:solidFill>
-                  <a:srgbClr val="64748B"/>
-                </a:solidFill>
-              </a:rPr>
-              <a:t>Programmability becomes infrastructure</a:t>
-            </a:r>
+          <a:p>
+            <a:endParaRPr/>
           </a:p>
         </p:txBody>
       </p:sp>
@@ -4165,51 +3826,8 @@
         <p:txBody>
           <a:bodyPr rtlCol="0" anchor="ctr"/>
           <a:lstStyle/>
-          <a:p/>
-        </p:txBody>
-      </p:sp>
-      <p:sp>
-        <p:nvSpPr>
-          <p:cNvPr id="16" name="era-label:4"/>
-          <p:cNvSpPr txBox="1"/>
-          <p:nvPr/>
-        </p:nvSpPr>
-        <p:spPr>
-          <a:xfrm>
-            <a:off x="11386565" y="896112"/>
-            <a:ext cx="2704338" cy="347472"/>
-          </a:xfrm>
-          <a:prstGeom prst="rect">
-            <a:avLst/>
-          </a:prstGeom>
-          <a:noFill/>
-        </p:spPr>
-        <p:txBody>
-          <a:bodyPr wrap="square" anchor="t" lIns="0" rIns="0" tIns="0" bIns="0">
-            <a:noAutofit/>
-          </a:bodyPr>
-          <a:lstStyle/>
-          <a:p>
-            <a:pPr algn="ctr"/>
-            <a:r>
-              <a:rPr sz="950" b="1" i="0">
-                <a:solidFill>
-                  <a:srgbClr val="1F2937"/>
-                </a:solidFill>
-              </a:rPr>
-              <a:t>Era 4  (2023~)</a:t>
-            </a:r>
-          </a:p>
-          <a:p>
-            <a:pPr algn="ctr"/>
-            <a:r>
-              <a:rPr sz="850" b="0" i="0">
-                <a:solidFill>
-                  <a:srgbClr val="64748B"/>
-                </a:solidFill>
-              </a:rPr>
-              <a:t>Explicit resource / control contracts</a:t>
-            </a:r>
+          <a:p>
+            <a:endParaRPr/>
           </a:p>
         </p:txBody>
       </p:sp>
@@ -4335,7 +3953,7 @@
           <a:noFill/>
         </p:spPr>
         <p:txBody>
-          <a:bodyPr wrap="square" anchor="ctr" lIns="0" rIns="0" tIns="0" bIns="0">
+          <a:bodyPr wrap="square" lIns="0" tIns="0" rIns="0" bIns="0" anchor="ctr">
             <a:noAutofit/>
           </a:bodyPr>
           <a:lstStyle/>
@@ -4366,11 +3984,13 @@
           <a:prstGeom prst="line">
             <a:avLst/>
           </a:prstGeom>
-          <a:ln w="9525">
-            <a:solidFill>
-              <a:srgbClr val="94A3B8"/>
-            </a:solidFill>
-            <a:prstDash val="sysDot"/>
+          <a:ln w="6350">
+            <a:solidFill>
+              <a:schemeClr val="bg1">
+                <a:lumMod val="95000"/>
+              </a:schemeClr>
+            </a:solidFill>
+            <a:prstDash val="sysDash"/>
           </a:ln>
         </p:spPr>
         <p:style>
@@ -4405,7 +4025,7 @@
           <a:noFill/>
         </p:spPr>
         <p:txBody>
-          <a:bodyPr wrap="square" anchor="ctr" lIns="0" rIns="0" tIns="0" bIns="0">
+          <a:bodyPr wrap="square" lIns="0" tIns="0" rIns="0" bIns="0" anchor="ctr">
             <a:noAutofit/>
           </a:bodyPr>
           <a:lstStyle/>
@@ -4436,11 +4056,13 @@
           <a:prstGeom prst="line">
             <a:avLst/>
           </a:prstGeom>
-          <a:ln w="9525">
-            <a:solidFill>
-              <a:srgbClr val="94A3B8"/>
-            </a:solidFill>
-            <a:prstDash val="sysDot"/>
+          <a:ln w="6350">
+            <a:solidFill>
+              <a:schemeClr val="bg1">
+                <a:lumMod val="95000"/>
+              </a:schemeClr>
+            </a:solidFill>
+            <a:prstDash val="sysDash"/>
           </a:ln>
         </p:spPr>
         <p:style>
@@ -4475,7 +4097,7 @@
           <a:noFill/>
         </p:spPr>
         <p:txBody>
-          <a:bodyPr wrap="square" anchor="ctr" lIns="0" rIns="0" tIns="0" bIns="0">
+          <a:bodyPr wrap="square" lIns="0" tIns="0" rIns="0" bIns="0" anchor="ctr">
             <a:noAutofit/>
           </a:bodyPr>
           <a:lstStyle/>
@@ -4506,11 +4128,13 @@
           <a:prstGeom prst="line">
             <a:avLst/>
           </a:prstGeom>
-          <a:ln w="9525">
-            <a:solidFill>
-              <a:srgbClr val="94A3B8"/>
-            </a:solidFill>
-            <a:prstDash val="sysDot"/>
+          <a:ln w="6350">
+            <a:solidFill>
+              <a:schemeClr val="bg1">
+                <a:lumMod val="95000"/>
+              </a:schemeClr>
+            </a:solidFill>
+            <a:prstDash val="sysDash"/>
           </a:ln>
         </p:spPr>
         <p:style>
@@ -4545,7 +4169,7 @@
           <a:noFill/>
         </p:spPr>
         <p:txBody>
-          <a:bodyPr wrap="square" anchor="ctr" lIns="0" rIns="0" tIns="0" bIns="0">
+          <a:bodyPr wrap="square" lIns="0" tIns="0" rIns="0" bIns="0" anchor="ctr">
             <a:noAutofit/>
           </a:bodyPr>
           <a:lstStyle/>
@@ -4576,11 +4200,13 @@
           <a:prstGeom prst="line">
             <a:avLst/>
           </a:prstGeom>
-          <a:ln w="9525">
-            <a:solidFill>
-              <a:srgbClr val="94A3B8"/>
-            </a:solidFill>
-            <a:prstDash val="sysDot"/>
+          <a:ln w="6350">
+            <a:solidFill>
+              <a:schemeClr val="bg1">
+                <a:lumMod val="95000"/>
+              </a:schemeClr>
+            </a:solidFill>
+            <a:prstDash val="sysDash"/>
           </a:ln>
         </p:spPr>
         <p:style>
@@ -4615,7 +4241,7 @@
           <a:noFill/>
         </p:spPr>
         <p:txBody>
-          <a:bodyPr wrap="square" anchor="ctr" lIns="0" rIns="0" tIns="0" bIns="0">
+          <a:bodyPr wrap="square" lIns="0" tIns="0" rIns="0" bIns="0" anchor="ctr">
             <a:noAutofit/>
           </a:bodyPr>
           <a:lstStyle/>
@@ -4646,11 +4272,13 @@
           <a:prstGeom prst="line">
             <a:avLst/>
           </a:prstGeom>
-          <a:ln w="9525">
-            <a:solidFill>
-              <a:srgbClr val="94A3B8"/>
-            </a:solidFill>
-            <a:prstDash val="sysDot"/>
+          <a:ln w="6350">
+            <a:solidFill>
+              <a:schemeClr val="bg1">
+                <a:lumMod val="95000"/>
+              </a:schemeClr>
+            </a:solidFill>
+            <a:prstDash val="sysDash"/>
           </a:ln>
         </p:spPr>
         <p:style>
@@ -4685,7 +4313,7 @@
           <a:noFill/>
         </p:spPr>
         <p:txBody>
-          <a:bodyPr wrap="square" anchor="ctr" lIns="0" rIns="0" tIns="0" bIns="0">
+          <a:bodyPr wrap="square" lIns="0" tIns="0" rIns="0" bIns="0" anchor="ctr">
             <a:noAutofit/>
           </a:bodyPr>
           <a:lstStyle/>
@@ -4754,7 +4382,7 @@
           <a:noFill/>
         </p:spPr>
         <p:txBody>
-          <a:bodyPr wrap="square" anchor="ctr" lIns="0" rIns="0" tIns="0" bIns="0">
+          <a:bodyPr wrap="square" lIns="0" tIns="0" rIns="0" bIns="0" anchor="ctr">
             <a:noAutofit/>
           </a:bodyPr>
           <a:lstStyle/>
@@ -4823,7 +4451,7 @@
           <a:noFill/>
         </p:spPr>
         <p:txBody>
-          <a:bodyPr wrap="square" anchor="ctr" lIns="0" rIns="0" tIns="0" bIns="0">
+          <a:bodyPr wrap="square" lIns="0" tIns="0" rIns="0" bIns="0" anchor="ctr">
             <a:noAutofit/>
           </a:bodyPr>
           <a:lstStyle/>
@@ -4892,7 +4520,7 @@
           <a:noFill/>
         </p:spPr>
         <p:txBody>
-          <a:bodyPr wrap="square" anchor="ctr" lIns="0" rIns="0" tIns="0" bIns="0">
+          <a:bodyPr wrap="square" lIns="0" tIns="0" rIns="0" bIns="0" anchor="ctr">
             <a:noAutofit/>
           </a:bodyPr>
           <a:lstStyle/>
@@ -4961,7 +4589,7 @@
           <a:noFill/>
         </p:spPr>
         <p:txBody>
-          <a:bodyPr wrap="square" anchor="ctr" lIns="0" rIns="0" tIns="0" bIns="0">
+          <a:bodyPr wrap="square" lIns="0" tIns="0" rIns="0" bIns="0" anchor="ctr">
             <a:noAutofit/>
           </a:bodyPr>
           <a:lstStyle/>
@@ -5030,7 +4658,7 @@
           <a:noFill/>
         </p:spPr>
         <p:txBody>
-          <a:bodyPr wrap="square" anchor="ctr" lIns="0" rIns="0" tIns="0" bIns="0">
+          <a:bodyPr wrap="square" lIns="0" tIns="0" rIns="0" bIns="0" anchor="ctr">
             <a:noAutofit/>
           </a:bodyPr>
           <a:lstStyle/>
@@ -5099,7 +4727,7 @@
           <a:noFill/>
         </p:spPr>
         <p:txBody>
-          <a:bodyPr wrap="square" anchor="ctr" lIns="0" rIns="0" tIns="0" bIns="0">
+          <a:bodyPr wrap="square" lIns="0" tIns="0" rIns="0" bIns="0" anchor="ctr">
             <a:noAutofit/>
           </a:bodyPr>
           <a:lstStyle/>
@@ -5168,7 +4796,7 @@
           <a:noFill/>
         </p:spPr>
         <p:txBody>
-          <a:bodyPr wrap="square" anchor="ctr" lIns="0" rIns="0" tIns="0" bIns="0">
+          <a:bodyPr wrap="square" lIns="0" tIns="0" rIns="0" bIns="0" anchor="ctr">
             <a:noAutofit/>
           </a:bodyPr>
           <a:lstStyle/>
@@ -5237,7 +4865,7 @@
           <a:noFill/>
         </p:spPr>
         <p:txBody>
-          <a:bodyPr wrap="square" anchor="ctr" lIns="0" rIns="0" tIns="0" bIns="0">
+          <a:bodyPr wrap="square" lIns="0" tIns="0" rIns="0" bIns="0" anchor="ctr">
             <a:noAutofit/>
           </a:bodyPr>
           <a:lstStyle/>
@@ -5306,7 +4934,7 @@
           <a:noFill/>
         </p:spPr>
         <p:txBody>
-          <a:bodyPr wrap="square" anchor="ctr" lIns="0" rIns="0" tIns="0" bIns="0">
+          <a:bodyPr wrap="square" lIns="0" tIns="0" rIns="0" bIns="0" anchor="ctr">
             <a:noAutofit/>
           </a:bodyPr>
           <a:lstStyle/>
@@ -5375,7 +5003,7 @@
           <a:noFill/>
         </p:spPr>
         <p:txBody>
-          <a:bodyPr wrap="square" anchor="ctr" lIns="0" rIns="0" tIns="0" bIns="0">
+          <a:bodyPr wrap="square" lIns="0" tIns="0" rIns="0" bIns="0" anchor="ctr">
             <a:noAutofit/>
           </a:bodyPr>
           <a:lstStyle/>
@@ -5444,7 +5072,7 @@
           <a:noFill/>
         </p:spPr>
         <p:txBody>
-          <a:bodyPr wrap="square" anchor="ctr" lIns="0" rIns="0" tIns="0" bIns="0">
+          <a:bodyPr wrap="square" lIns="0" tIns="0" rIns="0" bIns="0" anchor="ctr">
             <a:noAutofit/>
           </a:bodyPr>
           <a:lstStyle/>
@@ -5513,7 +5141,7 @@
           <a:noFill/>
         </p:spPr>
         <p:txBody>
-          <a:bodyPr wrap="square" anchor="ctr" lIns="0" rIns="0" tIns="0" bIns="0">
+          <a:bodyPr wrap="square" lIns="0" tIns="0" rIns="0" bIns="0" anchor="ctr">
             <a:noAutofit/>
           </a:bodyPr>
           <a:lstStyle/>
@@ -5582,7 +5210,7 @@
           <a:noFill/>
         </p:spPr>
         <p:txBody>
-          <a:bodyPr wrap="square" anchor="ctr" lIns="0" rIns="0" tIns="0" bIns="0">
+          <a:bodyPr wrap="square" lIns="0" tIns="0" rIns="0" bIns="0" anchor="ctr">
             <a:noAutofit/>
           </a:bodyPr>
           <a:lstStyle/>
@@ -5651,7 +5279,7 @@
           <a:noFill/>
         </p:spPr>
         <p:txBody>
-          <a:bodyPr wrap="square" anchor="ctr" lIns="0" rIns="0" tIns="0" bIns="0">
+          <a:bodyPr wrap="square" lIns="0" tIns="0" rIns="0" bIns="0" anchor="ctr">
             <a:noAutofit/>
           </a:bodyPr>
           <a:lstStyle/>
@@ -5720,7 +5348,7 @@
           <a:noFill/>
         </p:spPr>
         <p:txBody>
-          <a:bodyPr wrap="square" anchor="ctr" lIns="0" rIns="0" tIns="0" bIns="0">
+          <a:bodyPr wrap="square" lIns="0" tIns="0" rIns="0" bIns="0" anchor="ctr">
             <a:noAutofit/>
           </a:bodyPr>
           <a:lstStyle/>
@@ -5953,7 +5581,9 @@
         <p:txBody>
           <a:bodyPr rtlCol="0" anchor="ctr"/>
           <a:lstStyle/>
-          <a:p/>
+          <a:p>
+            <a:endParaRPr/>
+          </a:p>
         </p:txBody>
       </p:sp>
       <p:cxnSp>
@@ -6818,7 +6448,9 @@
         <p:txBody>
           <a:bodyPr rtlCol="0" anchor="ctr"/>
           <a:lstStyle/>
-          <a:p/>
+          <a:p>
+            <a:endParaRPr/>
+          </a:p>
         </p:txBody>
       </p:sp>
       <p:cxnSp>
@@ -6981,7 +6613,7 @@
           <a:noFill/>
         </p:spPr>
         <p:txBody>
-          <a:bodyPr wrap="square" anchor="ctr" lIns="0" rIns="0" tIns="0" bIns="0">
+          <a:bodyPr wrap="square" lIns="0" tIns="0" rIns="0" bIns="0" anchor="ctr">
             <a:noAutofit/>
           </a:bodyPr>
           <a:lstStyle/>
@@ -7015,7 +6647,7 @@
           <a:noFill/>
         </p:spPr>
         <p:txBody>
-          <a:bodyPr wrap="square" anchor="ctr" lIns="0" rIns="0" tIns="0" bIns="0">
+          <a:bodyPr wrap="square" lIns="0" tIns="0" rIns="0" bIns="0" anchor="ctr">
             <a:noAutofit/>
           </a:bodyPr>
           <a:lstStyle/>
@@ -7109,7 +6741,9 @@
         <p:txBody>
           <a:bodyPr rtlCol="0" anchor="ctr"/>
           <a:lstStyle/>
-          <a:p/>
+          <a:p>
+            <a:endParaRPr/>
+          </a:p>
         </p:txBody>
       </p:sp>
       <p:sp>
@@ -7153,7 +6787,9 @@
         <p:txBody>
           <a:bodyPr rtlCol="0" anchor="ctr"/>
           <a:lstStyle/>
-          <a:p/>
+          <a:p>
+            <a:endParaRPr/>
+          </a:p>
         </p:txBody>
       </p:sp>
       <p:sp>
@@ -7173,7 +6809,7 @@
           <a:noFill/>
         </p:spPr>
         <p:txBody>
-          <a:bodyPr wrap="square" anchor="ctr" lIns="0" rIns="0" tIns="0" bIns="0">
+          <a:bodyPr wrap="square" lIns="0" tIns="0" rIns="0" bIns="0" anchor="ctr">
             <a:noAutofit/>
           </a:bodyPr>
           <a:lstStyle/>
@@ -7207,7 +6843,7 @@
           <a:noFill/>
         </p:spPr>
         <p:txBody>
-          <a:bodyPr wrap="square" anchor="ctr" lIns="0" rIns="0" tIns="0" bIns="0">
+          <a:bodyPr wrap="square" lIns="0" tIns="0" rIns="0" bIns="0" anchor="ctr">
             <a:noAutofit/>
           </a:bodyPr>
           <a:lstStyle/>
@@ -7301,7 +6937,9 @@
         <p:txBody>
           <a:bodyPr rtlCol="0" anchor="ctr"/>
           <a:lstStyle/>
-          <a:p/>
+          <a:p>
+            <a:endParaRPr/>
+          </a:p>
         </p:txBody>
       </p:sp>
       <p:sp>
@@ -7345,7 +6983,9 @@
         <p:txBody>
           <a:bodyPr rtlCol="0" anchor="ctr"/>
           <a:lstStyle/>
-          <a:p/>
+          <a:p>
+            <a:endParaRPr/>
+          </a:p>
         </p:txBody>
       </p:sp>
       <p:sp>
@@ -7365,7 +7005,7 @@
           <a:noFill/>
         </p:spPr>
         <p:txBody>
-          <a:bodyPr wrap="square" anchor="ctr" lIns="0" rIns="0" tIns="0" bIns="0">
+          <a:bodyPr wrap="square" lIns="0" tIns="0" rIns="0" bIns="0" anchor="ctr">
             <a:noAutofit/>
           </a:bodyPr>
           <a:lstStyle/>
@@ -7399,7 +7039,7 @@
           <a:noFill/>
         </p:spPr>
         <p:txBody>
-          <a:bodyPr wrap="square" anchor="ctr" lIns="0" rIns="0" tIns="0" bIns="0">
+          <a:bodyPr wrap="square" lIns="0" tIns="0" rIns="0" bIns="0" anchor="ctr">
             <a:noAutofit/>
           </a:bodyPr>
           <a:lstStyle/>
@@ -7493,7 +7133,9 @@
         <p:txBody>
           <a:bodyPr rtlCol="0" anchor="ctr"/>
           <a:lstStyle/>
-          <a:p/>
+          <a:p>
+            <a:endParaRPr/>
+          </a:p>
         </p:txBody>
       </p:sp>
       <p:sp>
@@ -7537,7 +7179,9 @@
         <p:txBody>
           <a:bodyPr rtlCol="0" anchor="ctr"/>
           <a:lstStyle/>
-          <a:p/>
+          <a:p>
+            <a:endParaRPr/>
+          </a:p>
         </p:txBody>
       </p:sp>
       <p:sp>
@@ -7557,7 +7201,7 @@
           <a:noFill/>
         </p:spPr>
         <p:txBody>
-          <a:bodyPr wrap="square" anchor="ctr" lIns="0" rIns="0" tIns="0" bIns="0">
+          <a:bodyPr wrap="square" lIns="0" tIns="0" rIns="0" bIns="0" anchor="ctr">
             <a:noAutofit/>
           </a:bodyPr>
           <a:lstStyle/>
@@ -7591,7 +7235,7 @@
           <a:noFill/>
         </p:spPr>
         <p:txBody>
-          <a:bodyPr wrap="square" anchor="ctr" lIns="0" rIns="0" tIns="0" bIns="0">
+          <a:bodyPr wrap="square" lIns="0" tIns="0" rIns="0" bIns="0" anchor="ctr">
             <a:noAutofit/>
           </a:bodyPr>
           <a:lstStyle/>
@@ -7685,7 +7329,9 @@
         <p:txBody>
           <a:bodyPr rtlCol="0" anchor="ctr"/>
           <a:lstStyle/>
-          <a:p/>
+          <a:p>
+            <a:endParaRPr/>
+          </a:p>
         </p:txBody>
       </p:sp>
       <p:sp>
@@ -7729,7 +7375,9 @@
         <p:txBody>
           <a:bodyPr rtlCol="0" anchor="ctr"/>
           <a:lstStyle/>
-          <a:p/>
+          <a:p>
+            <a:endParaRPr/>
+          </a:p>
         </p:txBody>
       </p:sp>
       <p:sp>
@@ -7749,7 +7397,7 @@
           <a:noFill/>
         </p:spPr>
         <p:txBody>
-          <a:bodyPr wrap="square" anchor="ctr" lIns="0" rIns="0" tIns="0" bIns="0">
+          <a:bodyPr wrap="square" lIns="0" tIns="0" rIns="0" bIns="0" anchor="ctr">
             <a:noAutofit/>
           </a:bodyPr>
           <a:lstStyle/>
@@ -7783,7 +7431,7 @@
           <a:noFill/>
         </p:spPr>
         <p:txBody>
-          <a:bodyPr wrap="square" anchor="ctr" lIns="0" rIns="0" tIns="0" bIns="0">
+          <a:bodyPr wrap="square" lIns="0" tIns="0" rIns="0" bIns="0" anchor="ctr">
             <a:noAutofit/>
           </a:bodyPr>
           <a:lstStyle/>
@@ -7877,7 +7525,9 @@
         <p:txBody>
           <a:bodyPr rtlCol="0" anchor="ctr"/>
           <a:lstStyle/>
-          <a:p/>
+          <a:p>
+            <a:endParaRPr/>
+          </a:p>
         </p:txBody>
       </p:sp>
       <p:cxnSp>
@@ -7956,7 +7606,9 @@
         <p:txBody>
           <a:bodyPr rtlCol="0" anchor="ctr"/>
           <a:lstStyle/>
-          <a:p/>
+          <a:p>
+            <a:endParaRPr/>
+          </a:p>
         </p:txBody>
       </p:sp>
       <p:sp>
@@ -8000,7 +7652,9 @@
         <p:txBody>
           <a:bodyPr rtlCol="0" anchor="ctr"/>
           <a:lstStyle/>
-          <a:p/>
+          <a:p>
+            <a:endParaRPr/>
+          </a:p>
         </p:txBody>
       </p:sp>
       <p:sp>
@@ -8020,7 +7674,7 @@
           <a:noFill/>
         </p:spPr>
         <p:txBody>
-          <a:bodyPr wrap="square" anchor="ctr" lIns="0" rIns="0" tIns="0" bIns="0">
+          <a:bodyPr wrap="square" lIns="0" tIns="0" rIns="0" bIns="0" anchor="ctr">
             <a:noAutofit/>
           </a:bodyPr>
           <a:lstStyle/>
@@ -8054,7 +7708,7 @@
           <a:noFill/>
         </p:spPr>
         <p:txBody>
-          <a:bodyPr wrap="square" anchor="ctr" lIns="0" rIns="0" tIns="0" bIns="0">
+          <a:bodyPr wrap="square" lIns="0" tIns="0" rIns="0" bIns="0" anchor="ctr">
             <a:noAutofit/>
           </a:bodyPr>
           <a:lstStyle/>
@@ -8148,7 +7802,9 @@
         <p:txBody>
           <a:bodyPr rtlCol="0" anchor="ctr"/>
           <a:lstStyle/>
-          <a:p/>
+          <a:p>
+            <a:endParaRPr/>
+          </a:p>
         </p:txBody>
       </p:sp>
       <p:sp>
@@ -8192,7 +7848,9 @@
         <p:txBody>
           <a:bodyPr rtlCol="0" anchor="ctr"/>
           <a:lstStyle/>
-          <a:p/>
+          <a:p>
+            <a:endParaRPr/>
+          </a:p>
         </p:txBody>
       </p:sp>
       <p:sp>
@@ -8212,7 +7870,7 @@
           <a:noFill/>
         </p:spPr>
         <p:txBody>
-          <a:bodyPr wrap="square" anchor="ctr" lIns="0" rIns="0" tIns="0" bIns="0">
+          <a:bodyPr wrap="square" lIns="0" tIns="0" rIns="0" bIns="0" anchor="ctr">
             <a:noAutofit/>
           </a:bodyPr>
           <a:lstStyle/>
@@ -8246,7 +7904,7 @@
           <a:noFill/>
         </p:spPr>
         <p:txBody>
-          <a:bodyPr wrap="square" anchor="ctr" lIns="0" rIns="0" tIns="0" bIns="0">
+          <a:bodyPr wrap="square" lIns="0" tIns="0" rIns="0" bIns="0" anchor="ctr">
             <a:noAutofit/>
           </a:bodyPr>
           <a:lstStyle/>
@@ -8339,7 +7997,9 @@
         <p:txBody>
           <a:bodyPr rtlCol="0" anchor="ctr"/>
           <a:lstStyle/>
-          <a:p/>
+          <a:p>
+            <a:endParaRPr/>
+          </a:p>
         </p:txBody>
       </p:sp>
       <p:sp>
@@ -8383,7 +8043,9 @@
         <p:txBody>
           <a:bodyPr rtlCol="0" anchor="ctr"/>
           <a:lstStyle/>
-          <a:p/>
+          <a:p>
+            <a:endParaRPr/>
+          </a:p>
         </p:txBody>
       </p:sp>
       <p:sp>
@@ -8427,7 +8089,9 @@
         <p:txBody>
           <a:bodyPr rtlCol="0" anchor="ctr"/>
           <a:lstStyle/>
-          <a:p/>
+          <a:p>
+            <a:endParaRPr/>
+          </a:p>
         </p:txBody>
       </p:sp>
       <p:sp>
@@ -8447,7 +8111,7 @@
           <a:noFill/>
         </p:spPr>
         <p:txBody>
-          <a:bodyPr wrap="square" anchor="ctr" lIns="0" rIns="0" tIns="0" bIns="0">
+          <a:bodyPr wrap="square" lIns="0" tIns="0" rIns="0" bIns="0" anchor="ctr">
             <a:noAutofit/>
           </a:bodyPr>
           <a:lstStyle/>
@@ -8481,7 +8145,7 @@
           <a:noFill/>
         </p:spPr>
         <p:txBody>
-          <a:bodyPr wrap="square" anchor="ctr" lIns="0" rIns="0" tIns="0" bIns="0">
+          <a:bodyPr wrap="square" lIns="0" tIns="0" rIns="0" bIns="0" anchor="ctr">
             <a:noAutofit/>
           </a:bodyPr>
           <a:lstStyle/>
@@ -8575,7 +8239,9 @@
         <p:txBody>
           <a:bodyPr rtlCol="0" anchor="ctr"/>
           <a:lstStyle/>
-          <a:p/>
+          <a:p>
+            <a:endParaRPr/>
+          </a:p>
         </p:txBody>
       </p:sp>
       <p:sp>
@@ -8619,7 +8285,9 @@
         <p:txBody>
           <a:bodyPr rtlCol="0" anchor="ctr"/>
           <a:lstStyle/>
-          <a:p/>
+          <a:p>
+            <a:endParaRPr/>
+          </a:p>
         </p:txBody>
       </p:sp>
       <p:sp>
@@ -8639,7 +8307,7 @@
           <a:noFill/>
         </p:spPr>
         <p:txBody>
-          <a:bodyPr wrap="square" anchor="ctr" lIns="0" rIns="0" tIns="0" bIns="0">
+          <a:bodyPr wrap="square" lIns="0" tIns="0" rIns="0" bIns="0" anchor="ctr">
             <a:noAutofit/>
           </a:bodyPr>
           <a:lstStyle/>
@@ -8673,7 +8341,7 @@
           <a:noFill/>
         </p:spPr>
         <p:txBody>
-          <a:bodyPr wrap="square" anchor="ctr" lIns="0" rIns="0" tIns="0" bIns="0">
+          <a:bodyPr wrap="square" lIns="0" tIns="0" rIns="0" bIns="0" anchor="ctr">
             <a:noAutofit/>
           </a:bodyPr>
           <a:lstStyle/>
@@ -8708,7 +8376,7 @@
           <a:noFill/>
         </p:spPr>
         <p:txBody>
-          <a:bodyPr wrap="square" anchor="ctr" lIns="0" rIns="0" tIns="0" bIns="0">
+          <a:bodyPr wrap="square" lIns="0" tIns="0" rIns="0" bIns="0" anchor="ctr">
             <a:noAutofit/>
           </a:bodyPr>
           <a:lstStyle/>
@@ -8802,7 +8470,9 @@
         <p:txBody>
           <a:bodyPr rtlCol="0" anchor="ctr"/>
           <a:lstStyle/>
-          <a:p/>
+          <a:p>
+            <a:endParaRPr/>
+          </a:p>
         </p:txBody>
       </p:sp>
       <p:sp>
@@ -8846,7 +8516,9 @@
         <p:txBody>
           <a:bodyPr rtlCol="0" anchor="ctr"/>
           <a:lstStyle/>
-          <a:p/>
+          <a:p>
+            <a:endParaRPr/>
+          </a:p>
         </p:txBody>
       </p:sp>
       <p:sp>
@@ -8866,7 +8538,7 @@
           <a:noFill/>
         </p:spPr>
         <p:txBody>
-          <a:bodyPr wrap="square" anchor="ctr" lIns="0" rIns="0" tIns="0" bIns="0">
+          <a:bodyPr wrap="square" lIns="0" tIns="0" rIns="0" bIns="0" anchor="ctr">
             <a:noAutofit/>
           </a:bodyPr>
           <a:lstStyle/>
@@ -8900,7 +8572,7 @@
           <a:noFill/>
         </p:spPr>
         <p:txBody>
-          <a:bodyPr wrap="square" anchor="ctr" lIns="0" rIns="0" tIns="0" bIns="0">
+          <a:bodyPr wrap="square" lIns="0" tIns="0" rIns="0" bIns="0" anchor="ctr">
             <a:noAutofit/>
           </a:bodyPr>
           <a:lstStyle/>
@@ -8994,7 +8666,9 @@
         <p:txBody>
           <a:bodyPr rtlCol="0" anchor="ctr"/>
           <a:lstStyle/>
-          <a:p/>
+          <a:p>
+            <a:endParaRPr/>
+          </a:p>
         </p:txBody>
       </p:sp>
       <p:sp>
@@ -9038,7 +8712,9 @@
         <p:txBody>
           <a:bodyPr rtlCol="0" anchor="ctr"/>
           <a:lstStyle/>
-          <a:p/>
+          <a:p>
+            <a:endParaRPr/>
+          </a:p>
         </p:txBody>
       </p:sp>
       <p:sp>
@@ -9058,7 +8734,7 @@
           <a:noFill/>
         </p:spPr>
         <p:txBody>
-          <a:bodyPr wrap="square" anchor="ctr" lIns="0" rIns="0" tIns="0" bIns="0">
+          <a:bodyPr wrap="square" lIns="0" tIns="0" rIns="0" bIns="0" anchor="ctr">
             <a:noAutofit/>
           </a:bodyPr>
           <a:lstStyle/>
@@ -9092,7 +8768,7 @@
           <a:noFill/>
         </p:spPr>
         <p:txBody>
-          <a:bodyPr wrap="square" anchor="ctr" lIns="0" rIns="0" tIns="0" bIns="0">
+          <a:bodyPr wrap="square" lIns="0" tIns="0" rIns="0" bIns="0" anchor="ctr">
             <a:noAutofit/>
           </a:bodyPr>
           <a:lstStyle/>
@@ -9186,7 +8862,9 @@
         <p:txBody>
           <a:bodyPr rtlCol="0" anchor="ctr"/>
           <a:lstStyle/>
-          <a:p/>
+          <a:p>
+            <a:endParaRPr/>
+          </a:p>
         </p:txBody>
       </p:sp>
       <p:sp>
@@ -9230,7 +8908,9 @@
         <p:txBody>
           <a:bodyPr rtlCol="0" anchor="ctr"/>
           <a:lstStyle/>
-          <a:p/>
+          <a:p>
+            <a:endParaRPr/>
+          </a:p>
         </p:txBody>
       </p:sp>
       <p:sp>
@@ -9250,7 +8930,7 @@
           <a:noFill/>
         </p:spPr>
         <p:txBody>
-          <a:bodyPr wrap="square" anchor="ctr" lIns="0" rIns="0" tIns="0" bIns="0">
+          <a:bodyPr wrap="square" lIns="0" tIns="0" rIns="0" bIns="0" anchor="ctr">
             <a:noAutofit/>
           </a:bodyPr>
           <a:lstStyle/>
@@ -9284,7 +8964,7 @@
           <a:noFill/>
         </p:spPr>
         <p:txBody>
-          <a:bodyPr wrap="square" anchor="ctr" lIns="0" rIns="0" tIns="0" bIns="0">
+          <a:bodyPr wrap="square" lIns="0" tIns="0" rIns="0" bIns="0" anchor="ctr">
             <a:noAutofit/>
           </a:bodyPr>
           <a:lstStyle/>
@@ -9378,7 +9058,9 @@
         <p:txBody>
           <a:bodyPr rtlCol="0" anchor="ctr"/>
           <a:lstStyle/>
-          <a:p/>
+          <a:p>
+            <a:endParaRPr/>
+          </a:p>
         </p:txBody>
       </p:sp>
       <p:sp>
@@ -9422,7 +9104,9 @@
         <p:txBody>
           <a:bodyPr rtlCol="0" anchor="ctr"/>
           <a:lstStyle/>
-          <a:p/>
+          <a:p>
+            <a:endParaRPr/>
+          </a:p>
         </p:txBody>
       </p:sp>
       <p:sp>
@@ -9442,7 +9126,7 @@
           <a:noFill/>
         </p:spPr>
         <p:txBody>
-          <a:bodyPr wrap="square" anchor="ctr" lIns="0" rIns="0" tIns="0" bIns="0">
+          <a:bodyPr wrap="square" lIns="0" tIns="0" rIns="0" bIns="0" anchor="ctr">
             <a:noAutofit/>
           </a:bodyPr>
           <a:lstStyle/>
@@ -9476,7 +9160,7 @@
           <a:noFill/>
         </p:spPr>
         <p:txBody>
-          <a:bodyPr wrap="square" anchor="ctr" lIns="0" rIns="0" tIns="0" bIns="0">
+          <a:bodyPr wrap="square" lIns="0" tIns="0" rIns="0" bIns="0" anchor="ctr">
             <a:noAutofit/>
           </a:bodyPr>
           <a:lstStyle/>
@@ -9570,7 +9254,9 @@
         <p:txBody>
           <a:bodyPr rtlCol="0" anchor="ctr"/>
           <a:lstStyle/>
-          <a:p/>
+          <a:p>
+            <a:endParaRPr/>
+          </a:p>
         </p:txBody>
       </p:sp>
       <p:sp>
@@ -9614,7 +9300,9 @@
         <p:txBody>
           <a:bodyPr rtlCol="0" anchor="ctr"/>
           <a:lstStyle/>
-          <a:p/>
+          <a:p>
+            <a:endParaRPr/>
+          </a:p>
         </p:txBody>
       </p:sp>
       <p:sp>
@@ -9634,7 +9322,7 @@
           <a:noFill/>
         </p:spPr>
         <p:txBody>
-          <a:bodyPr wrap="square" anchor="ctr" lIns="0" rIns="0" tIns="0" bIns="0">
+          <a:bodyPr wrap="square" lIns="0" tIns="0" rIns="0" bIns="0" anchor="ctr">
             <a:noAutofit/>
           </a:bodyPr>
           <a:lstStyle/>
@@ -9668,7 +9356,7 @@
           <a:noFill/>
         </p:spPr>
         <p:txBody>
-          <a:bodyPr wrap="square" anchor="ctr" lIns="0" rIns="0" tIns="0" bIns="0">
+          <a:bodyPr wrap="square" lIns="0" tIns="0" rIns="0" bIns="0" anchor="ctr">
             <a:noAutofit/>
           </a:bodyPr>
           <a:lstStyle/>
@@ -9762,7 +9450,9 @@
         <p:txBody>
           <a:bodyPr rtlCol="0" anchor="ctr"/>
           <a:lstStyle/>
-          <a:p/>
+          <a:p>
+            <a:endParaRPr/>
+          </a:p>
         </p:txBody>
       </p:sp>
       <p:cxnSp>
@@ -9841,7 +9531,9 @@
         <p:txBody>
           <a:bodyPr rtlCol="0" anchor="ctr"/>
           <a:lstStyle/>
-          <a:p/>
+          <a:p>
+            <a:endParaRPr/>
+          </a:p>
         </p:txBody>
       </p:sp>
       <p:sp>
@@ -9885,7 +9577,9 @@
         <p:txBody>
           <a:bodyPr rtlCol="0" anchor="ctr"/>
           <a:lstStyle/>
-          <a:p/>
+          <a:p>
+            <a:endParaRPr/>
+          </a:p>
         </p:txBody>
       </p:sp>
       <p:sp>
@@ -9905,7 +9599,7 @@
           <a:noFill/>
         </p:spPr>
         <p:txBody>
-          <a:bodyPr wrap="square" anchor="ctr" lIns="0" rIns="0" tIns="0" bIns="0">
+          <a:bodyPr wrap="square" lIns="0" tIns="0" rIns="0" bIns="0" anchor="ctr">
             <a:noAutofit/>
           </a:bodyPr>
           <a:lstStyle/>
@@ -9939,7 +9633,7 @@
           <a:noFill/>
         </p:spPr>
         <p:txBody>
-          <a:bodyPr wrap="square" anchor="ctr" lIns="0" rIns="0" tIns="0" bIns="0">
+          <a:bodyPr wrap="square" lIns="0" tIns="0" rIns="0" bIns="0" anchor="ctr">
             <a:noAutofit/>
           </a:bodyPr>
           <a:lstStyle/>
@@ -10033,7 +9727,9 @@
         <p:txBody>
           <a:bodyPr rtlCol="0" anchor="ctr"/>
           <a:lstStyle/>
-          <a:p/>
+          <a:p>
+            <a:endParaRPr/>
+          </a:p>
         </p:txBody>
       </p:sp>
       <p:sp>
@@ -10077,7 +9773,9 @@
         <p:txBody>
           <a:bodyPr rtlCol="0" anchor="ctr"/>
           <a:lstStyle/>
-          <a:p/>
+          <a:p>
+            <a:endParaRPr/>
+          </a:p>
         </p:txBody>
       </p:sp>
       <p:sp>
@@ -10097,7 +9795,7 @@
           <a:noFill/>
         </p:spPr>
         <p:txBody>
-          <a:bodyPr wrap="square" anchor="ctr" lIns="0" rIns="0" tIns="0" bIns="0">
+          <a:bodyPr wrap="square" lIns="0" tIns="0" rIns="0" bIns="0" anchor="ctr">
             <a:noAutofit/>
           </a:bodyPr>
           <a:lstStyle/>
@@ -10131,7 +9829,7 @@
           <a:noFill/>
         </p:spPr>
         <p:txBody>
-          <a:bodyPr wrap="square" anchor="ctr" lIns="0" rIns="0" tIns="0" bIns="0">
+          <a:bodyPr wrap="square" lIns="0" tIns="0" rIns="0" bIns="0" anchor="ctr">
             <a:noAutofit/>
           </a:bodyPr>
           <a:lstStyle/>
@@ -10225,7 +9923,9 @@
         <p:txBody>
           <a:bodyPr rtlCol="0" anchor="ctr"/>
           <a:lstStyle/>
-          <a:p/>
+          <a:p>
+            <a:endParaRPr/>
+          </a:p>
         </p:txBody>
       </p:sp>
       <p:sp>
@@ -10269,7 +9969,9 @@
         <p:txBody>
           <a:bodyPr rtlCol="0" anchor="ctr"/>
           <a:lstStyle/>
-          <a:p/>
+          <a:p>
+            <a:endParaRPr/>
+          </a:p>
         </p:txBody>
       </p:sp>
       <p:sp>
@@ -10289,7 +9991,7 @@
           <a:noFill/>
         </p:spPr>
         <p:txBody>
-          <a:bodyPr wrap="square" anchor="ctr" lIns="0" rIns="0" tIns="0" bIns="0">
+          <a:bodyPr wrap="square" lIns="0" tIns="0" rIns="0" bIns="0" anchor="ctr">
             <a:noAutofit/>
           </a:bodyPr>
           <a:lstStyle/>
@@ -10323,7 +10025,7 @@
           <a:noFill/>
         </p:spPr>
         <p:txBody>
-          <a:bodyPr wrap="square" anchor="ctr" lIns="0" rIns="0" tIns="0" bIns="0">
+          <a:bodyPr wrap="square" lIns="0" tIns="0" rIns="0" bIns="0" anchor="ctr">
             <a:noAutofit/>
           </a:bodyPr>
           <a:lstStyle/>
@@ -10417,7 +10119,9 @@
         <p:txBody>
           <a:bodyPr rtlCol="0" anchor="ctr"/>
           <a:lstStyle/>
-          <a:p/>
+          <a:p>
+            <a:endParaRPr/>
+          </a:p>
         </p:txBody>
       </p:sp>
       <p:sp>
@@ -10461,7 +10165,9 @@
         <p:txBody>
           <a:bodyPr rtlCol="0" anchor="ctr"/>
           <a:lstStyle/>
-          <a:p/>
+          <a:p>
+            <a:endParaRPr/>
+          </a:p>
         </p:txBody>
       </p:sp>
       <p:sp>
@@ -10481,7 +10187,7 @@
           <a:noFill/>
         </p:spPr>
         <p:txBody>
-          <a:bodyPr wrap="square" anchor="ctr" lIns="0" rIns="0" tIns="0" bIns="0">
+          <a:bodyPr wrap="square" lIns="0" tIns="0" rIns="0" bIns="0" anchor="ctr">
             <a:noAutofit/>
           </a:bodyPr>
           <a:lstStyle/>
@@ -10515,7 +10221,7 @@
           <a:noFill/>
         </p:spPr>
         <p:txBody>
-          <a:bodyPr wrap="square" anchor="ctr" lIns="0" rIns="0" tIns="0" bIns="0">
+          <a:bodyPr wrap="square" lIns="0" tIns="0" rIns="0" bIns="0" anchor="ctr">
             <a:noAutofit/>
           </a:bodyPr>
           <a:lstStyle/>
@@ -10609,7 +10315,9 @@
         <p:txBody>
           <a:bodyPr rtlCol="0" anchor="ctr"/>
           <a:lstStyle/>
-          <a:p/>
+          <a:p>
+            <a:endParaRPr/>
+          </a:p>
         </p:txBody>
       </p:sp>
       <p:sp>
@@ -10653,7 +10361,9 @@
         <p:txBody>
           <a:bodyPr rtlCol="0" anchor="ctr"/>
           <a:lstStyle/>
-          <a:p/>
+          <a:p>
+            <a:endParaRPr/>
+          </a:p>
         </p:txBody>
       </p:sp>
       <p:sp>
@@ -10673,7 +10383,7 @@
           <a:noFill/>
         </p:spPr>
         <p:txBody>
-          <a:bodyPr wrap="square" anchor="ctr" lIns="0" rIns="0" tIns="0" bIns="0">
+          <a:bodyPr wrap="square" lIns="0" tIns="0" rIns="0" bIns="0" anchor="ctr">
             <a:noAutofit/>
           </a:bodyPr>
           <a:lstStyle/>
@@ -10707,7 +10417,7 @@
           <a:noFill/>
         </p:spPr>
         <p:txBody>
-          <a:bodyPr wrap="square" anchor="ctr" lIns="0" rIns="0" tIns="0" bIns="0">
+          <a:bodyPr wrap="square" lIns="0" tIns="0" rIns="0" bIns="0" anchor="ctr">
             <a:noAutofit/>
           </a:bodyPr>
           <a:lstStyle/>
@@ -10741,7 +10451,7 @@
           <a:noFill/>
         </p:spPr>
         <p:txBody>
-          <a:bodyPr wrap="square" anchor="ctr" lIns="0" rIns="0" tIns="0" bIns="0">
+          <a:bodyPr wrap="square" lIns="0" tIns="0" rIns="0" bIns="0" anchor="ctr">
             <a:noAutofit/>
           </a:bodyPr>
           <a:lstStyle/>
@@ -10835,7 +10545,9 @@
         <p:txBody>
           <a:bodyPr rtlCol="0" anchor="ctr"/>
           <a:lstStyle/>
-          <a:p/>
+          <a:p>
+            <a:endParaRPr/>
+          </a:p>
         </p:txBody>
       </p:sp>
       <p:sp>
@@ -10879,7 +10591,9 @@
         <p:txBody>
           <a:bodyPr rtlCol="0" anchor="ctr"/>
           <a:lstStyle/>
-          <a:p/>
+          <a:p>
+            <a:endParaRPr/>
+          </a:p>
         </p:txBody>
       </p:sp>
       <p:sp>
@@ -10899,7 +10613,7 @@
           <a:noFill/>
         </p:spPr>
         <p:txBody>
-          <a:bodyPr wrap="square" anchor="ctr" lIns="0" rIns="0" tIns="0" bIns="0">
+          <a:bodyPr wrap="square" lIns="0" tIns="0" rIns="0" bIns="0" anchor="ctr">
             <a:noAutofit/>
           </a:bodyPr>
           <a:lstStyle/>
@@ -10933,7 +10647,7 @@
           <a:noFill/>
         </p:spPr>
         <p:txBody>
-          <a:bodyPr wrap="square" anchor="ctr" lIns="0" rIns="0" tIns="0" bIns="0">
+          <a:bodyPr wrap="square" lIns="0" tIns="0" rIns="0" bIns="0" anchor="ctr">
             <a:noAutofit/>
           </a:bodyPr>
           <a:lstStyle/>
@@ -11027,7 +10741,9 @@
         <p:txBody>
           <a:bodyPr rtlCol="0" anchor="ctr"/>
           <a:lstStyle/>
-          <a:p/>
+          <a:p>
+            <a:endParaRPr/>
+          </a:p>
         </p:txBody>
       </p:sp>
       <p:sp>
@@ -11071,7 +10787,9 @@
         <p:txBody>
           <a:bodyPr rtlCol="0" anchor="ctr"/>
           <a:lstStyle/>
-          <a:p/>
+          <a:p>
+            <a:endParaRPr/>
+          </a:p>
         </p:txBody>
       </p:sp>
       <p:sp>
@@ -11091,7 +10809,7 @@
           <a:noFill/>
         </p:spPr>
         <p:txBody>
-          <a:bodyPr wrap="square" anchor="ctr" lIns="0" rIns="0" tIns="0" bIns="0">
+          <a:bodyPr wrap="square" lIns="0" tIns="0" rIns="0" bIns="0" anchor="ctr">
             <a:noAutofit/>
           </a:bodyPr>
           <a:lstStyle/>
@@ -11125,7 +10843,7 @@
           <a:noFill/>
         </p:spPr>
         <p:txBody>
-          <a:bodyPr wrap="square" anchor="ctr" lIns="0" rIns="0" tIns="0" bIns="0">
+          <a:bodyPr wrap="square" lIns="0" tIns="0" rIns="0" bIns="0" anchor="ctr">
             <a:noAutofit/>
           </a:bodyPr>
           <a:lstStyle/>
@@ -11219,7 +10937,9 @@
         <p:txBody>
           <a:bodyPr rtlCol="0" anchor="ctr"/>
           <a:lstStyle/>
-          <a:p/>
+          <a:p>
+            <a:endParaRPr/>
+          </a:p>
         </p:txBody>
       </p:sp>
       <p:sp>
@@ -11263,7 +10983,9 @@
         <p:txBody>
           <a:bodyPr rtlCol="0" anchor="ctr"/>
           <a:lstStyle/>
-          <a:p/>
+          <a:p>
+            <a:endParaRPr/>
+          </a:p>
         </p:txBody>
       </p:sp>
       <p:sp>
@@ -11283,7 +11005,7 @@
           <a:noFill/>
         </p:spPr>
         <p:txBody>
-          <a:bodyPr wrap="square" anchor="ctr" lIns="0" rIns="0" tIns="0" bIns="0">
+          <a:bodyPr wrap="square" lIns="0" tIns="0" rIns="0" bIns="0" anchor="ctr">
             <a:noAutofit/>
           </a:bodyPr>
           <a:lstStyle/>
@@ -11317,7 +11039,7 @@
           <a:noFill/>
         </p:spPr>
         <p:txBody>
-          <a:bodyPr wrap="square" anchor="ctr" lIns="0" rIns="0" tIns="0" bIns="0">
+          <a:bodyPr wrap="square" lIns="0" tIns="0" rIns="0" bIns="0" anchor="ctr">
             <a:noAutofit/>
           </a:bodyPr>
           <a:lstStyle/>
@@ -11411,7 +11133,9 @@
         <p:txBody>
           <a:bodyPr rtlCol="0" anchor="ctr"/>
           <a:lstStyle/>
-          <a:p/>
+          <a:p>
+            <a:endParaRPr/>
+          </a:p>
         </p:txBody>
       </p:sp>
       <p:sp>
@@ -11455,7 +11179,9 @@
         <p:txBody>
           <a:bodyPr rtlCol="0" anchor="ctr"/>
           <a:lstStyle/>
-          <a:p/>
+          <a:p>
+            <a:endParaRPr/>
+          </a:p>
         </p:txBody>
       </p:sp>
       <p:sp>
@@ -11475,7 +11201,7 @@
           <a:noFill/>
         </p:spPr>
         <p:txBody>
-          <a:bodyPr wrap="square" anchor="ctr" lIns="0" rIns="0" tIns="0" bIns="0">
+          <a:bodyPr wrap="square" lIns="0" tIns="0" rIns="0" bIns="0" anchor="ctr">
             <a:noAutofit/>
           </a:bodyPr>
           <a:lstStyle/>
@@ -11509,7 +11235,7 @@
           <a:noFill/>
         </p:spPr>
         <p:txBody>
-          <a:bodyPr wrap="square" anchor="ctr" lIns="0" rIns="0" tIns="0" bIns="0">
+          <a:bodyPr wrap="square" lIns="0" tIns="0" rIns="0" bIns="0" anchor="ctr">
             <a:noAutofit/>
           </a:bodyPr>
           <a:lstStyle/>
@@ -11603,7 +11329,9 @@
         <p:txBody>
           <a:bodyPr rtlCol="0" anchor="ctr"/>
           <a:lstStyle/>
-          <a:p/>
+          <a:p>
+            <a:endParaRPr/>
+          </a:p>
         </p:txBody>
       </p:sp>
       <p:sp>
@@ -11647,7 +11375,9 @@
         <p:txBody>
           <a:bodyPr rtlCol="0" anchor="ctr"/>
           <a:lstStyle/>
-          <a:p/>
+          <a:p>
+            <a:endParaRPr/>
+          </a:p>
         </p:txBody>
       </p:sp>
       <p:sp>
@@ -11667,7 +11397,7 @@
           <a:noFill/>
         </p:spPr>
         <p:txBody>
-          <a:bodyPr wrap="square" anchor="ctr" lIns="0" rIns="0" tIns="0" bIns="0">
+          <a:bodyPr wrap="square" lIns="0" tIns="0" rIns="0" bIns="0" anchor="ctr">
             <a:noAutofit/>
           </a:bodyPr>
           <a:lstStyle/>
@@ -11701,7 +11431,7 @@
           <a:noFill/>
         </p:spPr>
         <p:txBody>
-          <a:bodyPr wrap="square" anchor="ctr" lIns="0" rIns="0" tIns="0" bIns="0">
+          <a:bodyPr wrap="square" lIns="0" tIns="0" rIns="0" bIns="0" anchor="ctr">
             <a:noAutofit/>
           </a:bodyPr>
           <a:lstStyle/>
@@ -11795,7 +11525,9 @@
         <p:txBody>
           <a:bodyPr rtlCol="0" anchor="ctr"/>
           <a:lstStyle/>
-          <a:p/>
+          <a:p>
+            <a:endParaRPr/>
+          </a:p>
         </p:txBody>
       </p:sp>
       <p:sp>
@@ -11839,7 +11571,9 @@
         <p:txBody>
           <a:bodyPr rtlCol="0" anchor="ctr"/>
           <a:lstStyle/>
-          <a:p/>
+          <a:p>
+            <a:endParaRPr/>
+          </a:p>
         </p:txBody>
       </p:sp>
       <p:sp>
@@ -11859,7 +11593,7 @@
           <a:noFill/>
         </p:spPr>
         <p:txBody>
-          <a:bodyPr wrap="square" anchor="ctr" lIns="0" rIns="0" tIns="0" bIns="0">
+          <a:bodyPr wrap="square" lIns="0" tIns="0" rIns="0" bIns="0" anchor="ctr">
             <a:noAutofit/>
           </a:bodyPr>
           <a:lstStyle/>
@@ -11893,7 +11627,7 @@
           <a:noFill/>
         </p:spPr>
         <p:txBody>
-          <a:bodyPr wrap="square" anchor="ctr" lIns="0" rIns="0" tIns="0" bIns="0">
+          <a:bodyPr wrap="square" lIns="0" tIns="0" rIns="0" bIns="0" anchor="ctr">
             <a:noAutofit/>
           </a:bodyPr>
           <a:lstStyle/>
@@ -11987,7 +11721,9 @@
         <p:txBody>
           <a:bodyPr rtlCol="0" anchor="ctr"/>
           <a:lstStyle/>
-          <a:p/>
+          <a:p>
+            <a:endParaRPr/>
+          </a:p>
         </p:txBody>
       </p:sp>
       <p:sp>
@@ -12031,7 +11767,9 @@
         <p:txBody>
           <a:bodyPr rtlCol="0" anchor="ctr"/>
           <a:lstStyle/>
-          <a:p/>
+          <a:p>
+            <a:endParaRPr/>
+          </a:p>
         </p:txBody>
       </p:sp>
       <p:sp>
@@ -12051,7 +11789,7 @@
           <a:noFill/>
         </p:spPr>
         <p:txBody>
-          <a:bodyPr wrap="square" anchor="ctr" lIns="0" rIns="0" tIns="0" bIns="0">
+          <a:bodyPr wrap="square" lIns="0" tIns="0" rIns="0" bIns="0" anchor="ctr">
             <a:noAutofit/>
           </a:bodyPr>
           <a:lstStyle/>
@@ -12085,7 +11823,7 @@
           <a:noFill/>
         </p:spPr>
         <p:txBody>
-          <a:bodyPr wrap="square" anchor="ctr" lIns="0" rIns="0" tIns="0" bIns="0">
+          <a:bodyPr wrap="square" lIns="0" tIns="0" rIns="0" bIns="0" anchor="ctr">
             <a:noAutofit/>
           </a:bodyPr>
           <a:lstStyle/>
@@ -12179,7 +11917,9 @@
         <p:txBody>
           <a:bodyPr rtlCol="0" anchor="ctr"/>
           <a:lstStyle/>
-          <a:p/>
+          <a:p>
+            <a:endParaRPr/>
+          </a:p>
         </p:txBody>
       </p:sp>
       <p:sp>
@@ -12223,7 +11963,9 @@
         <p:txBody>
           <a:bodyPr rtlCol="0" anchor="ctr"/>
           <a:lstStyle/>
-          <a:p/>
+          <a:p>
+            <a:endParaRPr/>
+          </a:p>
         </p:txBody>
       </p:sp>
       <p:sp>
@@ -12243,7 +11985,7 @@
           <a:noFill/>
         </p:spPr>
         <p:txBody>
-          <a:bodyPr wrap="square" anchor="ctr" lIns="0" rIns="0" tIns="0" bIns="0">
+          <a:bodyPr wrap="square" lIns="0" tIns="0" rIns="0" bIns="0" anchor="ctr">
             <a:noAutofit/>
           </a:bodyPr>
           <a:lstStyle/>
@@ -12277,7 +12019,7 @@
           <a:noFill/>
         </p:spPr>
         <p:txBody>
-          <a:bodyPr wrap="square" anchor="ctr" lIns="0" rIns="0" tIns="0" bIns="0">
+          <a:bodyPr wrap="square" lIns="0" tIns="0" rIns="0" bIns="0" anchor="ctr">
             <a:noAutofit/>
           </a:bodyPr>
           <a:lstStyle/>
@@ -12371,7 +12113,9 @@
         <p:txBody>
           <a:bodyPr rtlCol="0" anchor="ctr"/>
           <a:lstStyle/>
-          <a:p/>
+          <a:p>
+            <a:endParaRPr/>
+          </a:p>
         </p:txBody>
       </p:sp>
       <p:sp>
@@ -12415,7 +12159,9 @@
         <p:txBody>
           <a:bodyPr rtlCol="0" anchor="ctr"/>
           <a:lstStyle/>
-          <a:p/>
+          <a:p>
+            <a:endParaRPr/>
+          </a:p>
         </p:txBody>
       </p:sp>
       <p:sp>
@@ -12435,7 +12181,7 @@
           <a:noFill/>
         </p:spPr>
         <p:txBody>
-          <a:bodyPr wrap="square" anchor="ctr" lIns="0" rIns="0" tIns="0" bIns="0">
+          <a:bodyPr wrap="square" lIns="0" tIns="0" rIns="0" bIns="0" anchor="ctr">
             <a:noAutofit/>
           </a:bodyPr>
           <a:lstStyle/>
@@ -12469,7 +12215,7 @@
           <a:noFill/>
         </p:spPr>
         <p:txBody>
-          <a:bodyPr wrap="square" anchor="ctr" lIns="0" rIns="0" tIns="0" bIns="0">
+          <a:bodyPr wrap="square" lIns="0" tIns="0" rIns="0" bIns="0" anchor="ctr">
             <a:noAutofit/>
           </a:bodyPr>
           <a:lstStyle/>
@@ -12504,7 +12250,7 @@
           <a:noFill/>
         </p:spPr>
         <p:txBody>
-          <a:bodyPr wrap="square" anchor="ctr" lIns="0" rIns="0" tIns="0" bIns="0">
+          <a:bodyPr wrap="square" lIns="0" tIns="0" rIns="0" bIns="0" anchor="ctr">
             <a:noAutofit/>
           </a:bodyPr>
           <a:lstStyle/>
@@ -12596,7 +12342,9 @@
         <p:txBody>
           <a:bodyPr rtlCol="0" anchor="ctr"/>
           <a:lstStyle/>
-          <a:p/>
+          <a:p>
+            <a:endParaRPr/>
+          </a:p>
         </p:txBody>
       </p:sp>
       <p:sp>
@@ -12640,7 +12388,9 @@
         <p:txBody>
           <a:bodyPr rtlCol="0" anchor="ctr"/>
           <a:lstStyle/>
-          <a:p/>
+          <a:p>
+            <a:endParaRPr/>
+          </a:p>
         </p:txBody>
       </p:sp>
       <p:sp>
@@ -12660,7 +12410,7 @@
           <a:noFill/>
         </p:spPr>
         <p:txBody>
-          <a:bodyPr wrap="square" anchor="ctr" lIns="0" rIns="0" tIns="0" bIns="0">
+          <a:bodyPr wrap="square" lIns="0" tIns="0" rIns="0" bIns="0" anchor="ctr">
             <a:noAutofit/>
           </a:bodyPr>
           <a:lstStyle/>
@@ -12694,7 +12444,7 @@
           <a:noFill/>
         </p:spPr>
         <p:txBody>
-          <a:bodyPr wrap="square" anchor="ctr" lIns="0" rIns="0" tIns="0" bIns="0">
+          <a:bodyPr wrap="square" lIns="0" tIns="0" rIns="0" bIns="0" anchor="ctr">
             <a:noAutofit/>
           </a:bodyPr>
           <a:lstStyle/>
@@ -12788,7 +12538,9 @@
         <p:txBody>
           <a:bodyPr rtlCol="0" anchor="ctr"/>
           <a:lstStyle/>
-          <a:p/>
+          <a:p>
+            <a:endParaRPr/>
+          </a:p>
         </p:txBody>
       </p:sp>
       <p:sp>
@@ -12832,7 +12584,9 @@
         <p:txBody>
           <a:bodyPr rtlCol="0" anchor="ctr"/>
           <a:lstStyle/>
-          <a:p/>
+          <a:p>
+            <a:endParaRPr/>
+          </a:p>
         </p:txBody>
       </p:sp>
       <p:sp>
@@ -12852,7 +12606,7 @@
           <a:noFill/>
         </p:spPr>
         <p:txBody>
-          <a:bodyPr wrap="square" anchor="ctr" lIns="0" rIns="0" tIns="0" bIns="0">
+          <a:bodyPr wrap="square" lIns="0" tIns="0" rIns="0" bIns="0" anchor="ctr">
             <a:noAutofit/>
           </a:bodyPr>
           <a:lstStyle/>
@@ -12886,7 +12640,7 @@
           <a:noFill/>
         </p:spPr>
         <p:txBody>
-          <a:bodyPr wrap="square" anchor="ctr" lIns="0" rIns="0" tIns="0" bIns="0">
+          <a:bodyPr wrap="square" lIns="0" tIns="0" rIns="0" bIns="0" anchor="ctr">
             <a:noAutofit/>
           </a:bodyPr>
           <a:lstStyle/>
@@ -12980,7 +12734,9 @@
         <p:txBody>
           <a:bodyPr rtlCol="0" anchor="ctr"/>
           <a:lstStyle/>
-          <a:p/>
+          <a:p>
+            <a:endParaRPr/>
+          </a:p>
         </p:txBody>
       </p:sp>
       <p:sp>
@@ -13024,7 +12780,9 @@
         <p:txBody>
           <a:bodyPr rtlCol="0" anchor="ctr"/>
           <a:lstStyle/>
-          <a:p/>
+          <a:p>
+            <a:endParaRPr/>
+          </a:p>
         </p:txBody>
       </p:sp>
       <p:sp>
@@ -13044,7 +12802,7 @@
           <a:noFill/>
         </p:spPr>
         <p:txBody>
-          <a:bodyPr wrap="square" anchor="ctr" lIns="0" rIns="0" tIns="0" bIns="0">
+          <a:bodyPr wrap="square" lIns="0" tIns="0" rIns="0" bIns="0" anchor="ctr">
             <a:noAutofit/>
           </a:bodyPr>
           <a:lstStyle/>
@@ -13078,7 +12836,7 @@
           <a:noFill/>
         </p:spPr>
         <p:txBody>
-          <a:bodyPr wrap="square" anchor="ctr" lIns="0" rIns="0" tIns="0" bIns="0">
+          <a:bodyPr wrap="square" lIns="0" tIns="0" rIns="0" bIns="0" anchor="ctr">
             <a:noAutofit/>
           </a:bodyPr>
           <a:lstStyle/>
@@ -13172,7 +12930,9 @@
         <p:txBody>
           <a:bodyPr rtlCol="0" anchor="ctr"/>
           <a:lstStyle/>
-          <a:p/>
+          <a:p>
+            <a:endParaRPr/>
+          </a:p>
         </p:txBody>
       </p:sp>
       <p:sp>
@@ -13216,7 +12976,9 @@
         <p:txBody>
           <a:bodyPr rtlCol="0" anchor="ctr"/>
           <a:lstStyle/>
-          <a:p/>
+          <a:p>
+            <a:endParaRPr/>
+          </a:p>
         </p:txBody>
       </p:sp>
       <p:sp>
@@ -13236,7 +12998,7 @@
           <a:noFill/>
         </p:spPr>
         <p:txBody>
-          <a:bodyPr wrap="square" anchor="ctr" lIns="0" rIns="0" tIns="0" bIns="0">
+          <a:bodyPr wrap="square" lIns="0" tIns="0" rIns="0" bIns="0" anchor="ctr">
             <a:noAutofit/>
           </a:bodyPr>
           <a:lstStyle/>
@@ -13270,7 +13032,7 @@
           <a:noFill/>
         </p:spPr>
         <p:txBody>
-          <a:bodyPr wrap="square" anchor="ctr" lIns="0" rIns="0" tIns="0" bIns="0">
+          <a:bodyPr wrap="square" lIns="0" tIns="0" rIns="0" bIns="0" anchor="ctr">
             <a:noAutofit/>
           </a:bodyPr>
           <a:lstStyle/>
@@ -13364,7 +13126,9 @@
         <p:txBody>
           <a:bodyPr rtlCol="0" anchor="ctr"/>
           <a:lstStyle/>
-          <a:p/>
+          <a:p>
+            <a:endParaRPr/>
+          </a:p>
         </p:txBody>
       </p:sp>
       <p:sp>
@@ -13408,7 +13172,9 @@
         <p:txBody>
           <a:bodyPr rtlCol="0" anchor="ctr"/>
           <a:lstStyle/>
-          <a:p/>
+          <a:p>
+            <a:endParaRPr/>
+          </a:p>
         </p:txBody>
       </p:sp>
       <p:sp>
@@ -13428,7 +13194,7 @@
           <a:noFill/>
         </p:spPr>
         <p:txBody>
-          <a:bodyPr wrap="square" anchor="ctr" lIns="0" rIns="0" tIns="0" bIns="0">
+          <a:bodyPr wrap="square" lIns="0" tIns="0" rIns="0" bIns="0" anchor="ctr">
             <a:noAutofit/>
           </a:bodyPr>
           <a:lstStyle/>
@@ -13462,7 +13228,7 @@
           <a:noFill/>
         </p:spPr>
         <p:txBody>
-          <a:bodyPr wrap="square" anchor="ctr" lIns="0" rIns="0" tIns="0" bIns="0">
+          <a:bodyPr wrap="square" lIns="0" tIns="0" rIns="0" bIns="0" anchor="ctr">
             <a:noAutofit/>
           </a:bodyPr>
           <a:lstStyle/>
@@ -13556,7 +13322,9 @@
         <p:txBody>
           <a:bodyPr rtlCol="0" anchor="ctr"/>
           <a:lstStyle/>
-          <a:p/>
+          <a:p>
+            <a:endParaRPr/>
+          </a:p>
         </p:txBody>
       </p:sp>
       <p:sp>
@@ -13600,7 +13368,9 @@
         <p:txBody>
           <a:bodyPr rtlCol="0" anchor="ctr"/>
           <a:lstStyle/>
-          <a:p/>
+          <a:p>
+            <a:endParaRPr/>
+          </a:p>
         </p:txBody>
       </p:sp>
       <p:sp>
@@ -13620,7 +13390,7 @@
           <a:noFill/>
         </p:spPr>
         <p:txBody>
-          <a:bodyPr wrap="square" anchor="ctr" lIns="0" rIns="0" tIns="0" bIns="0">
+          <a:bodyPr wrap="square" lIns="0" tIns="0" rIns="0" bIns="0" anchor="ctr">
             <a:noAutofit/>
           </a:bodyPr>
           <a:lstStyle/>
@@ -13654,7 +13424,7 @@
           <a:noFill/>
         </p:spPr>
         <p:txBody>
-          <a:bodyPr wrap="square" anchor="ctr" lIns="0" rIns="0" tIns="0" bIns="0">
+          <a:bodyPr wrap="square" lIns="0" tIns="0" rIns="0" bIns="0" anchor="ctr">
             <a:noAutofit/>
           </a:bodyPr>
           <a:lstStyle/>
@@ -13689,7 +13459,7 @@
           <a:noFill/>
         </p:spPr>
         <p:txBody>
-          <a:bodyPr wrap="square" anchor="ctr" lIns="0" rIns="0" tIns="0" bIns="0">
+          <a:bodyPr wrap="square" lIns="0" tIns="0" rIns="0" bIns="0" anchor="ctr">
             <a:noAutofit/>
           </a:bodyPr>
           <a:lstStyle/>
@@ -13783,7 +13553,9 @@
         <p:txBody>
           <a:bodyPr rtlCol="0" anchor="ctr"/>
           <a:lstStyle/>
-          <a:p/>
+          <a:p>
+            <a:endParaRPr/>
+          </a:p>
         </p:txBody>
       </p:sp>
       <p:sp>
@@ -13827,7 +13599,9 @@
         <p:txBody>
           <a:bodyPr rtlCol="0" anchor="ctr"/>
           <a:lstStyle/>
-          <a:p/>
+          <a:p>
+            <a:endParaRPr/>
+          </a:p>
         </p:txBody>
       </p:sp>
       <p:sp>
@@ -13847,7 +13621,7 @@
           <a:noFill/>
         </p:spPr>
         <p:txBody>
-          <a:bodyPr wrap="square" anchor="ctr" lIns="0" rIns="0" tIns="0" bIns="0">
+          <a:bodyPr wrap="square" lIns="0" tIns="0" rIns="0" bIns="0" anchor="ctr">
             <a:noAutofit/>
           </a:bodyPr>
           <a:lstStyle/>
@@ -13881,7 +13655,7 @@
           <a:noFill/>
         </p:spPr>
         <p:txBody>
-          <a:bodyPr wrap="square" anchor="ctr" lIns="0" rIns="0" tIns="0" bIns="0">
+          <a:bodyPr wrap="square" lIns="0" tIns="0" rIns="0" bIns="0" anchor="ctr">
             <a:noAutofit/>
           </a:bodyPr>
           <a:lstStyle/>
@@ -13975,7 +13749,9 @@
         <p:txBody>
           <a:bodyPr rtlCol="0" anchor="ctr"/>
           <a:lstStyle/>
-          <a:p/>
+          <a:p>
+            <a:endParaRPr/>
+          </a:p>
         </p:txBody>
       </p:sp>
       <p:sp>
@@ -14019,7 +13795,9 @@
         <p:txBody>
           <a:bodyPr rtlCol="0" anchor="ctr"/>
           <a:lstStyle/>
-          <a:p/>
+          <a:p>
+            <a:endParaRPr/>
+          </a:p>
         </p:txBody>
       </p:sp>
       <p:sp>
@@ -14039,7 +13817,7 @@
           <a:noFill/>
         </p:spPr>
         <p:txBody>
-          <a:bodyPr wrap="square" anchor="ctr" lIns="0" rIns="0" tIns="0" bIns="0">
+          <a:bodyPr wrap="square" lIns="0" tIns="0" rIns="0" bIns="0" anchor="ctr">
             <a:noAutofit/>
           </a:bodyPr>
           <a:lstStyle/>
@@ -14073,7 +13851,7 @@
           <a:noFill/>
         </p:spPr>
         <p:txBody>
-          <a:bodyPr wrap="square" anchor="ctr" lIns="0" rIns="0" tIns="0" bIns="0">
+          <a:bodyPr wrap="square" lIns="0" tIns="0" rIns="0" bIns="0" anchor="ctr">
             <a:noAutofit/>
           </a:bodyPr>
           <a:lstStyle/>
@@ -14167,7 +13945,9 @@
         <p:txBody>
           <a:bodyPr rtlCol="0" anchor="ctr"/>
           <a:lstStyle/>
-          <a:p/>
+          <a:p>
+            <a:endParaRPr/>
+          </a:p>
         </p:txBody>
       </p:sp>
       <p:sp>
@@ -14211,7 +13991,9 @@
         <p:txBody>
           <a:bodyPr rtlCol="0" anchor="ctr"/>
           <a:lstStyle/>
-          <a:p/>
+          <a:p>
+            <a:endParaRPr/>
+          </a:p>
         </p:txBody>
       </p:sp>
       <p:sp>
@@ -14231,7 +14013,7 @@
           <a:noFill/>
         </p:spPr>
         <p:txBody>
-          <a:bodyPr wrap="square" anchor="ctr" lIns="0" rIns="0" tIns="0" bIns="0">
+          <a:bodyPr wrap="square" lIns="0" tIns="0" rIns="0" bIns="0" anchor="ctr">
             <a:noAutofit/>
           </a:bodyPr>
           <a:lstStyle/>
@@ -14265,7 +14047,7 @@
           <a:noFill/>
         </p:spPr>
         <p:txBody>
-          <a:bodyPr wrap="square" anchor="ctr" lIns="0" rIns="0" tIns="0" bIns="0">
+          <a:bodyPr wrap="square" lIns="0" tIns="0" rIns="0" bIns="0" anchor="ctr">
             <a:noAutofit/>
           </a:bodyPr>
           <a:lstStyle/>
@@ -14359,7 +14141,9 @@
         <p:txBody>
           <a:bodyPr rtlCol="0" anchor="ctr"/>
           <a:lstStyle/>
-          <a:p/>
+          <a:p>
+            <a:endParaRPr/>
+          </a:p>
         </p:txBody>
       </p:sp>
       <p:sp>
@@ -14403,7 +14187,9 @@
         <p:txBody>
           <a:bodyPr rtlCol="0" anchor="ctr"/>
           <a:lstStyle/>
-          <a:p/>
+          <a:p>
+            <a:endParaRPr/>
+          </a:p>
         </p:txBody>
       </p:sp>
       <p:sp>
@@ -14423,7 +14209,7 @@
           <a:noFill/>
         </p:spPr>
         <p:txBody>
-          <a:bodyPr wrap="square" anchor="ctr" lIns="0" rIns="0" tIns="0" bIns="0">
+          <a:bodyPr wrap="square" lIns="0" tIns="0" rIns="0" bIns="0" anchor="ctr">
             <a:noAutofit/>
           </a:bodyPr>
           <a:lstStyle/>
@@ -14457,7 +14243,7 @@
           <a:noFill/>
         </p:spPr>
         <p:txBody>
-          <a:bodyPr wrap="square" anchor="ctr" lIns="0" rIns="0" tIns="0" bIns="0">
+          <a:bodyPr wrap="square" lIns="0" tIns="0" rIns="0" bIns="0" anchor="ctr">
             <a:noAutofit/>
           </a:bodyPr>
           <a:lstStyle/>
@@ -14551,7 +14337,9 @@
         <p:txBody>
           <a:bodyPr rtlCol="0" anchor="ctr"/>
           <a:lstStyle/>
-          <a:p/>
+          <a:p>
+            <a:endParaRPr/>
+          </a:p>
         </p:txBody>
       </p:sp>
       <p:sp>
@@ -14595,7 +14383,9 @@
         <p:txBody>
           <a:bodyPr rtlCol="0" anchor="ctr"/>
           <a:lstStyle/>
-          <a:p/>
+          <a:p>
+            <a:endParaRPr/>
+          </a:p>
         </p:txBody>
       </p:sp>
       <p:sp>
@@ -14615,7 +14405,7 @@
           <a:noFill/>
         </p:spPr>
         <p:txBody>
-          <a:bodyPr wrap="square" anchor="ctr" lIns="0" rIns="0" tIns="0" bIns="0">
+          <a:bodyPr wrap="square" lIns="0" tIns="0" rIns="0" bIns="0" anchor="ctr">
             <a:noAutofit/>
           </a:bodyPr>
           <a:lstStyle/>
@@ -14649,7 +14439,7 @@
           <a:noFill/>
         </p:spPr>
         <p:txBody>
-          <a:bodyPr wrap="square" anchor="ctr" lIns="0" rIns="0" tIns="0" bIns="0">
+          <a:bodyPr wrap="square" lIns="0" tIns="0" rIns="0" bIns="0" anchor="ctr">
             <a:noAutofit/>
           </a:bodyPr>
           <a:lstStyle/>
@@ -14684,7 +14474,7 @@
           <a:noFill/>
         </p:spPr>
         <p:txBody>
-          <a:bodyPr wrap="square" anchor="ctr" lIns="0" rIns="0" tIns="0" bIns="0">
+          <a:bodyPr wrap="square" lIns="0" tIns="0" rIns="0" bIns="0" anchor="ctr">
             <a:noAutofit/>
           </a:bodyPr>
           <a:lstStyle/>
@@ -14778,7 +14568,9 @@
         <p:txBody>
           <a:bodyPr rtlCol="0" anchor="ctr"/>
           <a:lstStyle/>
-          <a:p/>
+          <a:p>
+            <a:endParaRPr/>
+          </a:p>
         </p:txBody>
       </p:sp>
       <p:sp>
@@ -14822,7 +14614,9 @@
         <p:txBody>
           <a:bodyPr rtlCol="0" anchor="ctr"/>
           <a:lstStyle/>
-          <a:p/>
+          <a:p>
+            <a:endParaRPr/>
+          </a:p>
         </p:txBody>
       </p:sp>
       <p:sp>
@@ -14842,7 +14636,7 @@
           <a:noFill/>
         </p:spPr>
         <p:txBody>
-          <a:bodyPr wrap="square" anchor="ctr" lIns="0" rIns="0" tIns="0" bIns="0">
+          <a:bodyPr wrap="square" lIns="0" tIns="0" rIns="0" bIns="0" anchor="ctr">
             <a:noAutofit/>
           </a:bodyPr>
           <a:lstStyle/>
@@ -14876,7 +14670,7 @@
           <a:noFill/>
         </p:spPr>
         <p:txBody>
-          <a:bodyPr wrap="square" anchor="ctr" lIns="0" rIns="0" tIns="0" bIns="0">
+          <a:bodyPr wrap="square" lIns="0" tIns="0" rIns="0" bIns="0" anchor="ctr">
             <a:noAutofit/>
           </a:bodyPr>
           <a:lstStyle/>
@@ -14970,7 +14764,9 @@
         <p:txBody>
           <a:bodyPr rtlCol="0" anchor="ctr"/>
           <a:lstStyle/>
-          <a:p/>
+          <a:p>
+            <a:endParaRPr/>
+          </a:p>
         </p:txBody>
       </p:sp>
       <p:sp>
@@ -15014,7 +14810,9 @@
         <p:txBody>
           <a:bodyPr rtlCol="0" anchor="ctr"/>
           <a:lstStyle/>
-          <a:p/>
+          <a:p>
+            <a:endParaRPr/>
+          </a:p>
         </p:txBody>
       </p:sp>
       <p:sp>
@@ -15034,7 +14832,7 @@
           <a:noFill/>
         </p:spPr>
         <p:txBody>
-          <a:bodyPr wrap="square" anchor="ctr" lIns="0" rIns="0" tIns="0" bIns="0">
+          <a:bodyPr wrap="square" lIns="0" tIns="0" rIns="0" bIns="0" anchor="ctr">
             <a:noAutofit/>
           </a:bodyPr>
           <a:lstStyle/>
@@ -15068,7 +14866,7 @@
           <a:noFill/>
         </p:spPr>
         <p:txBody>
-          <a:bodyPr wrap="square" anchor="ctr" lIns="0" rIns="0" tIns="0" bIns="0">
+          <a:bodyPr wrap="square" lIns="0" tIns="0" rIns="0" bIns="0" anchor="ctr">
             <a:noAutofit/>
           </a:bodyPr>
           <a:lstStyle/>
@@ -15162,7 +14960,9 @@
         <p:txBody>
           <a:bodyPr rtlCol="0" anchor="ctr"/>
           <a:lstStyle/>
-          <a:p/>
+          <a:p>
+            <a:endParaRPr/>
+          </a:p>
         </p:txBody>
       </p:sp>
       <p:sp>
@@ -15206,7 +15006,9 @@
         <p:txBody>
           <a:bodyPr rtlCol="0" anchor="ctr"/>
           <a:lstStyle/>
-          <a:p/>
+          <a:p>
+            <a:endParaRPr/>
+          </a:p>
         </p:txBody>
       </p:sp>
       <p:sp>
@@ -15226,7 +15028,7 @@
           <a:noFill/>
         </p:spPr>
         <p:txBody>
-          <a:bodyPr wrap="square" anchor="ctr" lIns="0" rIns="0" tIns="0" bIns="0">
+          <a:bodyPr wrap="square" lIns="0" tIns="0" rIns="0" bIns="0" anchor="ctr">
             <a:noAutofit/>
           </a:bodyPr>
           <a:lstStyle/>
@@ -15260,7 +15062,7 @@
           <a:noFill/>
         </p:spPr>
         <p:txBody>
-          <a:bodyPr wrap="square" anchor="ctr" lIns="0" rIns="0" tIns="0" bIns="0">
+          <a:bodyPr wrap="square" lIns="0" tIns="0" rIns="0" bIns="0" anchor="ctr">
             <a:noAutofit/>
           </a:bodyPr>
           <a:lstStyle/>
@@ -15354,7 +15156,9 @@
         <p:txBody>
           <a:bodyPr rtlCol="0" anchor="ctr"/>
           <a:lstStyle/>
-          <a:p/>
+          <a:p>
+            <a:endParaRPr/>
+          </a:p>
         </p:txBody>
       </p:sp>
       <p:sp>
@@ -15398,7 +15202,9 @@
         <p:txBody>
           <a:bodyPr rtlCol="0" anchor="ctr"/>
           <a:lstStyle/>
-          <a:p/>
+          <a:p>
+            <a:endParaRPr/>
+          </a:p>
         </p:txBody>
       </p:sp>
       <p:sp>
@@ -15418,7 +15224,7 @@
           <a:noFill/>
         </p:spPr>
         <p:txBody>
-          <a:bodyPr wrap="square" anchor="ctr" lIns="0" rIns="0" tIns="0" bIns="0">
+          <a:bodyPr wrap="square" lIns="0" tIns="0" rIns="0" bIns="0" anchor="ctr">
             <a:noAutofit/>
           </a:bodyPr>
           <a:lstStyle/>
@@ -15452,7 +15258,7 @@
           <a:noFill/>
         </p:spPr>
         <p:txBody>
-          <a:bodyPr wrap="square" anchor="ctr" lIns="0" rIns="0" tIns="0" bIns="0">
+          <a:bodyPr wrap="square" lIns="0" tIns="0" rIns="0" bIns="0" anchor="ctr">
             <a:noAutofit/>
           </a:bodyPr>
           <a:lstStyle/>
@@ -15546,7 +15352,9 @@
         <p:txBody>
           <a:bodyPr rtlCol="0" anchor="ctr"/>
           <a:lstStyle/>
-          <a:p/>
+          <a:p>
+            <a:endParaRPr/>
+          </a:p>
         </p:txBody>
       </p:sp>
       <p:sp>
@@ -15590,7 +15398,9 @@
         <p:txBody>
           <a:bodyPr rtlCol="0" anchor="ctr"/>
           <a:lstStyle/>
-          <a:p/>
+          <a:p>
+            <a:endParaRPr/>
+          </a:p>
         </p:txBody>
       </p:sp>
       <p:sp>
@@ -15610,7 +15420,7 @@
           <a:noFill/>
         </p:spPr>
         <p:txBody>
-          <a:bodyPr wrap="square" anchor="ctr" lIns="0" rIns="0" tIns="0" bIns="0">
+          <a:bodyPr wrap="square" lIns="0" tIns="0" rIns="0" bIns="0" anchor="ctr">
             <a:noAutofit/>
           </a:bodyPr>
           <a:lstStyle/>
@@ -15644,7 +15454,7 @@
           <a:noFill/>
         </p:spPr>
         <p:txBody>
-          <a:bodyPr wrap="square" anchor="ctr" lIns="0" rIns="0" tIns="0" bIns="0">
+          <a:bodyPr wrap="square" lIns="0" tIns="0" rIns="0" bIns="0" anchor="ctr">
             <a:noAutofit/>
           </a:bodyPr>
           <a:lstStyle/>
@@ -15738,7 +15548,9 @@
         <p:txBody>
           <a:bodyPr rtlCol="0" anchor="ctr"/>
           <a:lstStyle/>
-          <a:p/>
+          <a:p>
+            <a:endParaRPr/>
+          </a:p>
         </p:txBody>
       </p:sp>
       <p:sp>
@@ -15782,7 +15594,9 @@
         <p:txBody>
           <a:bodyPr rtlCol="0" anchor="ctr"/>
           <a:lstStyle/>
-          <a:p/>
+          <a:p>
+            <a:endParaRPr/>
+          </a:p>
         </p:txBody>
       </p:sp>
       <p:sp>
@@ -15802,7 +15616,7 @@
           <a:noFill/>
         </p:spPr>
         <p:txBody>
-          <a:bodyPr wrap="square" anchor="ctr" lIns="0" rIns="0" tIns="0" bIns="0">
+          <a:bodyPr wrap="square" lIns="0" tIns="0" rIns="0" bIns="0" anchor="ctr">
             <a:noAutofit/>
           </a:bodyPr>
           <a:lstStyle/>
@@ -15836,7 +15650,7 @@
           <a:noFill/>
         </p:spPr>
         <p:txBody>
-          <a:bodyPr wrap="square" anchor="ctr" lIns="0" rIns="0" tIns="0" bIns="0">
+          <a:bodyPr wrap="square" lIns="0" tIns="0" rIns="0" bIns="0" anchor="ctr">
             <a:noAutofit/>
           </a:bodyPr>
           <a:lstStyle/>
@@ -15930,7 +15744,9 @@
         <p:txBody>
           <a:bodyPr rtlCol="0" anchor="ctr"/>
           <a:lstStyle/>
-          <a:p/>
+          <a:p>
+            <a:endParaRPr/>
+          </a:p>
         </p:txBody>
       </p:sp>
       <p:sp>
@@ -15974,7 +15790,9 @@
         <p:txBody>
           <a:bodyPr rtlCol="0" anchor="ctr"/>
           <a:lstStyle/>
-          <a:p/>
+          <a:p>
+            <a:endParaRPr/>
+          </a:p>
         </p:txBody>
       </p:sp>
       <p:sp>
@@ -15994,7 +15812,7 @@
           <a:noFill/>
         </p:spPr>
         <p:txBody>
-          <a:bodyPr wrap="square" anchor="ctr" lIns="0" rIns="0" tIns="0" bIns="0">
+          <a:bodyPr wrap="square" lIns="0" tIns="0" rIns="0" bIns="0" anchor="ctr">
             <a:noAutofit/>
           </a:bodyPr>
           <a:lstStyle/>
@@ -16028,7 +15846,7 @@
           <a:noFill/>
         </p:spPr>
         <p:txBody>
-          <a:bodyPr wrap="square" anchor="ctr" lIns="0" rIns="0" tIns="0" bIns="0">
+          <a:bodyPr wrap="square" lIns="0" tIns="0" rIns="0" bIns="0" anchor="ctr">
             <a:noAutofit/>
           </a:bodyPr>
           <a:lstStyle/>
@@ -16122,7 +15940,9 @@
         <p:txBody>
           <a:bodyPr rtlCol="0" anchor="ctr"/>
           <a:lstStyle/>
-          <a:p/>
+          <a:p>
+            <a:endParaRPr/>
+          </a:p>
         </p:txBody>
       </p:sp>
       <p:sp>
@@ -16166,7 +15986,9 @@
         <p:txBody>
           <a:bodyPr rtlCol="0" anchor="ctr"/>
           <a:lstStyle/>
-          <a:p/>
+          <a:p>
+            <a:endParaRPr/>
+          </a:p>
         </p:txBody>
       </p:sp>
       <p:sp>
@@ -16186,7 +16008,7 @@
           <a:noFill/>
         </p:spPr>
         <p:txBody>
-          <a:bodyPr wrap="square" anchor="ctr" lIns="0" rIns="0" tIns="0" bIns="0">
+          <a:bodyPr wrap="square" lIns="0" tIns="0" rIns="0" bIns="0" anchor="ctr">
             <a:noAutofit/>
           </a:bodyPr>
           <a:lstStyle/>
@@ -16220,7 +16042,7 @@
           <a:noFill/>
         </p:spPr>
         <p:txBody>
-          <a:bodyPr wrap="square" anchor="ctr" lIns="0" rIns="0" tIns="0" bIns="0">
+          <a:bodyPr wrap="square" lIns="0" tIns="0" rIns="0" bIns="0" anchor="ctr">
             <a:noAutofit/>
           </a:bodyPr>
           <a:lstStyle/>
@@ -16314,7 +16136,9 @@
         <p:txBody>
           <a:bodyPr rtlCol="0" anchor="ctr"/>
           <a:lstStyle/>
-          <a:p/>
+          <a:p>
+            <a:endParaRPr/>
+          </a:p>
         </p:txBody>
       </p:sp>
       <p:sp>
@@ -16358,7 +16182,9 @@
         <p:txBody>
           <a:bodyPr rtlCol="0" anchor="ctr"/>
           <a:lstStyle/>
-          <a:p/>
+          <a:p>
+            <a:endParaRPr/>
+          </a:p>
         </p:txBody>
       </p:sp>
       <p:sp>
@@ -16378,7 +16204,7 @@
           <a:noFill/>
         </p:spPr>
         <p:txBody>
-          <a:bodyPr wrap="square" anchor="ctr" lIns="0" rIns="0" tIns="0" bIns="0">
+          <a:bodyPr wrap="square" lIns="0" tIns="0" rIns="0" bIns="0" anchor="ctr">
             <a:noAutofit/>
           </a:bodyPr>
           <a:lstStyle/>
@@ -16412,7 +16238,7 @@
           <a:noFill/>
         </p:spPr>
         <p:txBody>
-          <a:bodyPr wrap="square" anchor="ctr" lIns="0" rIns="0" tIns="0" bIns="0">
+          <a:bodyPr wrap="square" lIns="0" tIns="0" rIns="0" bIns="0" anchor="ctr">
             <a:noAutofit/>
           </a:bodyPr>
           <a:lstStyle/>
@@ -16506,7 +16332,9 @@
         <p:txBody>
           <a:bodyPr rtlCol="0" anchor="ctr"/>
           <a:lstStyle/>
-          <a:p/>
+          <a:p>
+            <a:endParaRPr/>
+          </a:p>
         </p:txBody>
       </p:sp>
       <p:sp>
@@ -16550,7 +16378,9 @@
         <p:txBody>
           <a:bodyPr rtlCol="0" anchor="ctr"/>
           <a:lstStyle/>
-          <a:p/>
+          <a:p>
+            <a:endParaRPr/>
+          </a:p>
         </p:txBody>
       </p:sp>
       <p:sp>
@@ -16570,7 +16400,7 @@
           <a:noFill/>
         </p:spPr>
         <p:txBody>
-          <a:bodyPr wrap="square" anchor="ctr" lIns="0" rIns="0" tIns="0" bIns="0">
+          <a:bodyPr wrap="square" lIns="0" tIns="0" rIns="0" bIns="0" anchor="ctr">
             <a:noAutofit/>
           </a:bodyPr>
           <a:lstStyle/>
@@ -16604,7 +16434,7 @@
           <a:noFill/>
         </p:spPr>
         <p:txBody>
-          <a:bodyPr wrap="square" anchor="ctr" lIns="0" rIns="0" tIns="0" bIns="0">
+          <a:bodyPr wrap="square" lIns="0" tIns="0" rIns="0" bIns="0" anchor="ctr">
             <a:noAutofit/>
           </a:bodyPr>
           <a:lstStyle/>
@@ -16662,7 +16492,9 @@
         <p:txBody>
           <a:bodyPr rtlCol="0" anchor="ctr"/>
           <a:lstStyle/>
-          <a:p/>
+          <a:p>
+            <a:endParaRPr/>
+          </a:p>
         </p:txBody>
       </p:sp>
       <p:cxnSp>
@@ -16742,7 +16574,9 @@
         <p:txBody>
           <a:bodyPr rtlCol="0" anchor="ctr"/>
           <a:lstStyle/>
-          <a:p/>
+          <a:p>
+            <a:endParaRPr/>
+          </a:p>
         </p:txBody>
       </p:sp>
       <p:sp>
@@ -16762,7 +16596,7 @@
           <a:noFill/>
         </p:spPr>
         <p:txBody>
-          <a:bodyPr wrap="square" anchor="ctr" lIns="0" rIns="0" tIns="0" bIns="0">
+          <a:bodyPr wrap="square" lIns="0" tIns="0" rIns="0" bIns="0" anchor="ctr">
             <a:noAutofit/>
           </a:bodyPr>
           <a:lstStyle/>
@@ -16820,7 +16654,9 @@
         <p:txBody>
           <a:bodyPr rtlCol="0" anchor="ctr"/>
           <a:lstStyle/>
-          <a:p/>
+          <a:p>
+            <a:endParaRPr/>
+          </a:p>
         </p:txBody>
       </p:sp>
       <p:cxnSp>
@@ -16899,7 +16735,9 @@
         <p:txBody>
           <a:bodyPr rtlCol="0" anchor="ctr"/>
           <a:lstStyle/>
-          <a:p/>
+          <a:p>
+            <a:endParaRPr/>
+          </a:p>
         </p:txBody>
       </p:sp>
       <p:sp>
@@ -16919,7 +16757,7 @@
           <a:noFill/>
         </p:spPr>
         <p:txBody>
-          <a:bodyPr wrap="square" anchor="ctr" lIns="0" rIns="0" tIns="0" bIns="0">
+          <a:bodyPr wrap="square" lIns="0" tIns="0" rIns="0" bIns="0" anchor="ctr">
             <a:noAutofit/>
           </a:bodyPr>
           <a:lstStyle/>
@@ -16977,7 +16815,9 @@
         <p:txBody>
           <a:bodyPr rtlCol="0" anchor="ctr"/>
           <a:lstStyle/>
-          <a:p/>
+          <a:p>
+            <a:endParaRPr/>
+          </a:p>
         </p:txBody>
       </p:sp>
       <p:sp>
@@ -16997,7 +16837,7 @@
           <a:noFill/>
         </p:spPr>
         <p:txBody>
-          <a:bodyPr wrap="square" anchor="ctr" lIns="0" rIns="0" tIns="0" bIns="0">
+          <a:bodyPr wrap="square" lIns="0" tIns="0" rIns="0" bIns="0" anchor="ctr">
             <a:noAutofit/>
           </a:bodyPr>
           <a:lstStyle/>
@@ -17067,7 +16907,7 @@
           <a:noFill/>
         </p:spPr>
         <p:txBody>
-          <a:bodyPr wrap="square" anchor="ctr" lIns="0" rIns="0" tIns="0" bIns="0">
+          <a:bodyPr wrap="square" lIns="0" tIns="0" rIns="0" bIns="0" anchor="ctr">
             <a:noAutofit/>
           </a:bodyPr>
           <a:lstStyle/>
@@ -17172,7 +17012,7 @@
           <a:noFill/>
         </p:spPr>
         <p:txBody>
-          <a:bodyPr wrap="square" anchor="ctr" lIns="0" rIns="0" tIns="0" bIns="0">
+          <a:bodyPr wrap="square" lIns="0" tIns="0" rIns="0" bIns="0" anchor="ctr">
             <a:noAutofit/>
           </a:bodyPr>
           <a:lstStyle/>
@@ -17228,7 +17068,9 @@
         <p:txBody>
           <a:bodyPr rtlCol="0" anchor="ctr"/>
           <a:lstStyle/>
-          <a:p/>
+          <a:p>
+            <a:endParaRPr/>
+          </a:p>
         </p:txBody>
       </p:sp>
       <p:sp>
@@ -17248,7 +17090,7 @@
           <a:noFill/>
         </p:spPr>
         <p:txBody>
-          <a:bodyPr wrap="square" anchor="ctr" lIns="0" rIns="0" tIns="0" bIns="0">
+          <a:bodyPr wrap="square" lIns="0" tIns="0" rIns="0" bIns="0" anchor="ctr">
             <a:noAutofit/>
           </a:bodyPr>
           <a:lstStyle/>
@@ -17282,7 +17124,7 @@
           <a:noFill/>
         </p:spPr>
         <p:txBody>
-          <a:bodyPr wrap="square" anchor="t" lIns="0" rIns="0" tIns="0" bIns="0">
+          <a:bodyPr wrap="square" lIns="0" tIns="0" rIns="0" bIns="0" anchor="t">
             <a:noAutofit/>
           </a:bodyPr>
           <a:lstStyle/>
@@ -17327,7 +17169,7 @@
           <a:noFill/>
         </p:spPr>
         <p:txBody>
-          <a:bodyPr wrap="square" anchor="t" lIns="0" rIns="0" tIns="0" bIns="0">
+          <a:bodyPr wrap="square" lIns="0" tIns="0" rIns="0" bIns="0" anchor="t">
             <a:noAutofit/>
           </a:bodyPr>
           <a:lstStyle/>
@@ -17372,7 +17214,7 @@
           <a:noFill/>
         </p:spPr>
         <p:txBody>
-          <a:bodyPr wrap="none" lIns="0" rIns="0" tIns="0" bIns="0">
+          <a:bodyPr wrap="none" lIns="0" tIns="0" rIns="0" bIns="0">
             <a:spAutoFit/>
           </a:bodyPr>
           <a:lstStyle/>
@@ -17407,7 +17249,7 @@
           <a:noFill/>
         </p:spPr>
         <p:txBody>
-          <a:bodyPr wrap="none" lIns="0" rIns="0" tIns="0" bIns="0">
+          <a:bodyPr wrap="none" lIns="0" tIns="0" rIns="0" bIns="0">
             <a:spAutoFit/>
           </a:bodyPr>
           <a:lstStyle/>
@@ -17442,7 +17284,7 @@
           <a:noFill/>
         </p:spPr>
         <p:txBody>
-          <a:bodyPr wrap="none" lIns="0" rIns="0" tIns="0" bIns="0">
+          <a:bodyPr wrap="none" lIns="0" tIns="0" rIns="0" bIns="0">
             <a:spAutoFit/>
           </a:bodyPr>
           <a:lstStyle/>
@@ -17477,7 +17319,7 @@
           <a:noFill/>
         </p:spPr>
         <p:txBody>
-          <a:bodyPr wrap="none" lIns="0" rIns="0" tIns="0" bIns="0">
+          <a:bodyPr wrap="none" lIns="0" tIns="0" rIns="0" bIns="0">
             <a:spAutoFit/>
           </a:bodyPr>
           <a:lstStyle/>
@@ -17512,7 +17354,7 @@
           <a:noFill/>
         </p:spPr>
         <p:txBody>
-          <a:bodyPr wrap="none" lIns="0" rIns="0" tIns="0" bIns="0">
+          <a:bodyPr wrap="none" lIns="0" tIns="0" rIns="0" bIns="0">
             <a:spAutoFit/>
           </a:bodyPr>
           <a:lstStyle/>
@@ -17547,7 +17389,7 @@
           <a:noFill/>
         </p:spPr>
         <p:txBody>
-          <a:bodyPr wrap="none" lIns="0" rIns="0" tIns="0" bIns="0">
+          <a:bodyPr wrap="none" lIns="0" tIns="0" rIns="0" bIns="0">
             <a:spAutoFit/>
           </a:bodyPr>
           <a:lstStyle/>
@@ -17582,7 +17424,7 @@
           <a:noFill/>
         </p:spPr>
         <p:txBody>
-          <a:bodyPr wrap="none" lIns="0" rIns="0" tIns="0" bIns="0">
+          <a:bodyPr wrap="none" lIns="0" tIns="0" rIns="0" bIns="0">
             <a:spAutoFit/>
           </a:bodyPr>
           <a:lstStyle/>
@@ -17617,7 +17459,7 @@
           <a:noFill/>
         </p:spPr>
         <p:txBody>
-          <a:bodyPr wrap="none" lIns="0" rIns="0" tIns="0" bIns="0">
+          <a:bodyPr wrap="none" lIns="0" tIns="0" rIns="0" bIns="0">
             <a:spAutoFit/>
           </a:bodyPr>
           <a:lstStyle/>
@@ -17652,7 +17494,7 @@
           <a:noFill/>
         </p:spPr>
         <p:txBody>
-          <a:bodyPr wrap="none" lIns="0" rIns="0" tIns="0" bIns="0">
+          <a:bodyPr wrap="none" lIns="0" tIns="0" rIns="0" bIns="0">
             <a:spAutoFit/>
           </a:bodyPr>
           <a:lstStyle/>
@@ -17687,7 +17529,7 @@
           <a:noFill/>
         </p:spPr>
         <p:txBody>
-          <a:bodyPr wrap="none" lIns="0" rIns="0" tIns="0" bIns="0">
+          <a:bodyPr wrap="none" lIns="0" tIns="0" rIns="0" bIns="0">
             <a:spAutoFit/>
           </a:bodyPr>
           <a:lstStyle/>
@@ -17722,7 +17564,7 @@
           <a:noFill/>
         </p:spPr>
         <p:txBody>
-          <a:bodyPr wrap="none" lIns="0" rIns="0" tIns="0" bIns="0">
+          <a:bodyPr wrap="none" lIns="0" tIns="0" rIns="0" bIns="0">
             <a:spAutoFit/>
           </a:bodyPr>
           <a:lstStyle/>
@@ -17757,7 +17599,7 @@
           <a:noFill/>
         </p:spPr>
         <p:txBody>
-          <a:bodyPr wrap="none" lIns="0" rIns="0" tIns="0" bIns="0">
+          <a:bodyPr wrap="none" lIns="0" tIns="0" rIns="0" bIns="0">
             <a:spAutoFit/>
           </a:bodyPr>
           <a:lstStyle/>
@@ -17792,7 +17634,7 @@
           <a:noFill/>
         </p:spPr>
         <p:txBody>
-          <a:bodyPr wrap="none" lIns="0" rIns="0" tIns="0" bIns="0">
+          <a:bodyPr wrap="none" lIns="0" tIns="0" rIns="0" bIns="0">
             <a:spAutoFit/>
           </a:bodyPr>
           <a:lstStyle/>
@@ -17827,7 +17669,7 @@
           <a:noFill/>
         </p:spPr>
         <p:txBody>
-          <a:bodyPr wrap="none" lIns="0" rIns="0" tIns="0" bIns="0">
+          <a:bodyPr wrap="none" lIns="0" tIns="0" rIns="0" bIns="0">
             <a:spAutoFit/>
           </a:bodyPr>
           <a:lstStyle/>
@@ -17862,7 +17704,7 @@
           <a:noFill/>
         </p:spPr>
         <p:txBody>
-          <a:bodyPr wrap="none" lIns="0" rIns="0" tIns="0" bIns="0">
+          <a:bodyPr wrap="none" lIns="0" tIns="0" rIns="0" bIns="0">
             <a:spAutoFit/>
           </a:bodyPr>
           <a:lstStyle/>
@@ -17897,7 +17739,7 @@
           <a:noFill/>
         </p:spPr>
         <p:txBody>
-          <a:bodyPr wrap="none" lIns="0" rIns="0" tIns="0" bIns="0">
+          <a:bodyPr wrap="none" lIns="0" tIns="0" rIns="0" bIns="0">
             <a:spAutoFit/>
           </a:bodyPr>
           <a:lstStyle/>
@@ -17932,7 +17774,7 @@
           <a:noFill/>
         </p:spPr>
         <p:txBody>
-          <a:bodyPr wrap="none" lIns="0" rIns="0" tIns="0" bIns="0">
+          <a:bodyPr wrap="none" lIns="0" tIns="0" rIns="0" bIns="0">
             <a:spAutoFit/>
           </a:bodyPr>
           <a:lstStyle/>
@@ -17967,7 +17809,7 @@
           <a:noFill/>
         </p:spPr>
         <p:txBody>
-          <a:bodyPr wrap="none" lIns="0" rIns="0" tIns="0" bIns="0">
+          <a:bodyPr wrap="none" lIns="0" tIns="0" rIns="0" bIns="0">
             <a:spAutoFit/>
           </a:bodyPr>
           <a:lstStyle/>
@@ -18002,7 +17844,7 @@
           <a:noFill/>
         </p:spPr>
         <p:txBody>
-          <a:bodyPr wrap="none" lIns="0" rIns="0" tIns="0" bIns="0">
+          <a:bodyPr wrap="none" lIns="0" tIns="0" rIns="0" bIns="0">
             <a:spAutoFit/>
           </a:bodyPr>
           <a:lstStyle/>
@@ -18037,7 +17879,7 @@
           <a:noFill/>
         </p:spPr>
         <p:txBody>
-          <a:bodyPr wrap="none" lIns="0" rIns="0" tIns="0" bIns="0">
+          <a:bodyPr wrap="none" lIns="0" tIns="0" rIns="0" bIns="0">
             <a:spAutoFit/>
           </a:bodyPr>
           <a:lstStyle/>
@@ -18072,7 +17914,7 @@
           <a:noFill/>
         </p:spPr>
         <p:txBody>
-          <a:bodyPr wrap="none" lIns="0" rIns="0" tIns="0" bIns="0">
+          <a:bodyPr wrap="none" lIns="0" tIns="0" rIns="0" bIns="0">
             <a:spAutoFit/>
           </a:bodyPr>
           <a:lstStyle/>
@@ -18107,7 +17949,7 @@
           <a:noFill/>
         </p:spPr>
         <p:txBody>
-          <a:bodyPr wrap="none" lIns="0" rIns="0" tIns="0" bIns="0">
+          <a:bodyPr wrap="none" lIns="0" tIns="0" rIns="0" bIns="0">
             <a:spAutoFit/>
           </a:bodyPr>
           <a:lstStyle/>
@@ -18142,7 +17984,7 @@
           <a:noFill/>
         </p:spPr>
         <p:txBody>
-          <a:bodyPr wrap="none" lIns="0" rIns="0" tIns="0" bIns="0">
+          <a:bodyPr wrap="none" lIns="0" tIns="0" rIns="0" bIns="0">
             <a:spAutoFit/>
           </a:bodyPr>
           <a:lstStyle/>
@@ -18177,7 +18019,7 @@
           <a:noFill/>
         </p:spPr>
         <p:txBody>
-          <a:bodyPr wrap="none" lIns="0" rIns="0" tIns="0" bIns="0">
+          <a:bodyPr wrap="none" lIns="0" tIns="0" rIns="0" bIns="0">
             <a:spAutoFit/>
           </a:bodyPr>
           <a:lstStyle/>
@@ -18212,7 +18054,7 @@
           <a:noFill/>
         </p:spPr>
         <p:txBody>
-          <a:bodyPr wrap="none" lIns="0" rIns="0" tIns="0" bIns="0">
+          <a:bodyPr wrap="none" lIns="0" tIns="0" rIns="0" bIns="0">
             <a:spAutoFit/>
           </a:bodyPr>
           <a:lstStyle/>
@@ -18247,7 +18089,7 @@
           <a:noFill/>
         </p:spPr>
         <p:txBody>
-          <a:bodyPr wrap="none" lIns="0" rIns="0" tIns="0" bIns="0">
+          <a:bodyPr wrap="none" lIns="0" tIns="0" rIns="0" bIns="0">
             <a:spAutoFit/>
           </a:bodyPr>
           <a:lstStyle/>
@@ -18282,7 +18124,7 @@
           <a:noFill/>
         </p:spPr>
         <p:txBody>
-          <a:bodyPr wrap="none" lIns="0" rIns="0" tIns="0" bIns="0">
+          <a:bodyPr wrap="none" lIns="0" tIns="0" rIns="0" bIns="0">
             <a:spAutoFit/>
           </a:bodyPr>
           <a:lstStyle/>
@@ -18317,7 +18159,7 @@
           <a:noFill/>
         </p:spPr>
         <p:txBody>
-          <a:bodyPr wrap="none" lIns="0" rIns="0" tIns="0" bIns="0">
+          <a:bodyPr wrap="none" lIns="0" tIns="0" rIns="0" bIns="0">
             <a:spAutoFit/>
           </a:bodyPr>
           <a:lstStyle/>
@@ -18352,7 +18194,7 @@
           <a:noFill/>
         </p:spPr>
         <p:txBody>
-          <a:bodyPr wrap="none" lIns="0" rIns="0" tIns="0" bIns="0">
+          <a:bodyPr wrap="none" lIns="0" tIns="0" rIns="0" bIns="0">
             <a:spAutoFit/>
           </a:bodyPr>
           <a:lstStyle/>
@@ -18387,7 +18229,7 @@
           <a:noFill/>
         </p:spPr>
         <p:txBody>
-          <a:bodyPr wrap="none" lIns="0" rIns="0" tIns="0" bIns="0">
+          <a:bodyPr wrap="none" lIns="0" tIns="0" rIns="0" bIns="0">
             <a:spAutoFit/>
           </a:bodyPr>
           <a:lstStyle/>
@@ -18422,7 +18264,7 @@
           <a:noFill/>
         </p:spPr>
         <p:txBody>
-          <a:bodyPr wrap="none" lIns="0" rIns="0" tIns="0" bIns="0">
+          <a:bodyPr wrap="none" lIns="0" tIns="0" rIns="0" bIns="0">
             <a:spAutoFit/>
           </a:bodyPr>
           <a:lstStyle/>
@@ -18457,7 +18299,7 @@
           <a:noFill/>
         </p:spPr>
         <p:txBody>
-          <a:bodyPr wrap="none" lIns="0" rIns="0" tIns="0" bIns="0">
+          <a:bodyPr wrap="none" lIns="0" tIns="0" rIns="0" bIns="0">
             <a:spAutoFit/>
           </a:bodyPr>
           <a:lstStyle/>
@@ -18492,7 +18334,7 @@
           <a:noFill/>
         </p:spPr>
         <p:txBody>
-          <a:bodyPr wrap="none" lIns="0" rIns="0" tIns="0" bIns="0">
+          <a:bodyPr wrap="none" lIns="0" tIns="0" rIns="0" bIns="0">
             <a:spAutoFit/>
           </a:bodyPr>
           <a:lstStyle/>
@@ -18527,7 +18369,7 @@
           <a:noFill/>
         </p:spPr>
         <p:txBody>
-          <a:bodyPr wrap="none" lIns="0" rIns="0" tIns="0" bIns="0">
+          <a:bodyPr wrap="none" lIns="0" tIns="0" rIns="0" bIns="0">
             <a:spAutoFit/>
           </a:bodyPr>
           <a:lstStyle/>
@@ -18562,7 +18404,7 @@
           <a:noFill/>
         </p:spPr>
         <p:txBody>
-          <a:bodyPr wrap="none" lIns="0" rIns="0" tIns="0" bIns="0">
+          <a:bodyPr wrap="none" lIns="0" tIns="0" rIns="0" bIns="0">
             <a:spAutoFit/>
           </a:bodyPr>
           <a:lstStyle/>
@@ -18597,7 +18439,7 @@
           <a:noFill/>
         </p:spPr>
         <p:txBody>
-          <a:bodyPr wrap="none" lIns="0" rIns="0" tIns="0" bIns="0">
+          <a:bodyPr wrap="none" lIns="0" tIns="0" rIns="0" bIns="0">
             <a:spAutoFit/>
           </a:bodyPr>
           <a:lstStyle/>
@@ -18632,7 +18474,7 @@
           <a:noFill/>
         </p:spPr>
         <p:txBody>
-          <a:bodyPr wrap="none" lIns="0" rIns="0" tIns="0" bIns="0">
+          <a:bodyPr wrap="none" lIns="0" tIns="0" rIns="0" bIns="0">
             <a:spAutoFit/>
           </a:bodyPr>
           <a:lstStyle/>
@@ -18667,7 +18509,7 @@
           <a:noFill/>
         </p:spPr>
         <p:txBody>
-          <a:bodyPr wrap="none" lIns="0" rIns="0" tIns="0" bIns="0">
+          <a:bodyPr wrap="none" lIns="0" tIns="0" rIns="0" bIns="0">
             <a:spAutoFit/>
           </a:bodyPr>
           <a:lstStyle/>
@@ -18702,7 +18544,7 @@
           <a:noFill/>
         </p:spPr>
         <p:txBody>
-          <a:bodyPr wrap="none" lIns="0" rIns="0" tIns="0" bIns="0">
+          <a:bodyPr wrap="none" lIns="0" tIns="0" rIns="0" bIns="0">
             <a:spAutoFit/>
           </a:bodyPr>
           <a:lstStyle/>
@@ -18737,7 +18579,7 @@
           <a:noFill/>
         </p:spPr>
         <p:txBody>
-          <a:bodyPr wrap="none" lIns="0" rIns="0" tIns="0" bIns="0">
+          <a:bodyPr wrap="none" lIns="0" tIns="0" rIns="0" bIns="0">
             <a:spAutoFit/>
           </a:bodyPr>
           <a:lstStyle/>
@@ -18772,7 +18614,7 @@
           <a:noFill/>
         </p:spPr>
         <p:txBody>
-          <a:bodyPr wrap="none" lIns="0" rIns="0" tIns="0" bIns="0">
+          <a:bodyPr wrap="none" lIns="0" tIns="0" rIns="0" bIns="0">
             <a:spAutoFit/>
           </a:bodyPr>
           <a:lstStyle/>
@@ -18807,7 +18649,7 @@
           <a:noFill/>
         </p:spPr>
         <p:txBody>
-          <a:bodyPr wrap="none" lIns="0" rIns="0" tIns="0" bIns="0">
+          <a:bodyPr wrap="none" lIns="0" tIns="0" rIns="0" bIns="0">
             <a:spAutoFit/>
           </a:bodyPr>
           <a:lstStyle/>
@@ -18842,7 +18684,7 @@
           <a:noFill/>
         </p:spPr>
         <p:txBody>
-          <a:bodyPr wrap="none" lIns="0" rIns="0" tIns="0" bIns="0">
+          <a:bodyPr wrap="none" lIns="0" tIns="0" rIns="0" bIns="0">
             <a:spAutoFit/>
           </a:bodyPr>
           <a:lstStyle/>
@@ -18877,7 +18719,7 @@
           <a:noFill/>
         </p:spPr>
         <p:txBody>
-          <a:bodyPr wrap="none" lIns="0" rIns="0" tIns="0" bIns="0">
+          <a:bodyPr wrap="none" lIns="0" tIns="0" rIns="0" bIns="0">
             <a:spAutoFit/>
           </a:bodyPr>
           <a:lstStyle/>
@@ -18912,7 +18754,7 @@
           <a:noFill/>
         </p:spPr>
         <p:txBody>
-          <a:bodyPr wrap="none" lIns="0" rIns="0" tIns="0" bIns="0">
+          <a:bodyPr wrap="none" lIns="0" tIns="0" rIns="0" bIns="0">
             <a:spAutoFit/>
           </a:bodyPr>
           <a:lstStyle/>
@@ -18947,7 +18789,7 @@
           <a:noFill/>
         </p:spPr>
         <p:txBody>
-          <a:bodyPr wrap="none" lIns="0" rIns="0" tIns="0" bIns="0">
+          <a:bodyPr wrap="none" lIns="0" tIns="0" rIns="0" bIns="0">
             <a:spAutoFit/>
           </a:bodyPr>
           <a:lstStyle/>
@@ -18961,6 +18803,366 @@
             </a:pPr>
             <a:r>
               <a:t>~6.2</a:t>
+            </a:r>
+          </a:p>
+        </p:txBody>
+      </p:sp>
+      <p:cxnSp>
+        <p:nvCxnSpPr>
+          <p:cNvPr id="412" name="era-boundary:2019">
+            <a:extLst>
+              <a:ext uri="{FF2B5EF4-FFF2-40B4-BE49-F238E27FC236}">
+                <a16:creationId xmlns:a16="http://schemas.microsoft.com/office/drawing/2014/main" id="{DF7A39ED-3A49-5311-FF5C-DA7E3429D443}"/>
+              </a:ext>
+            </a:extLst>
+          </p:cNvPr>
+          <p:cNvCxnSpPr>
+            <a:cxnSpLocks/>
+          </p:cNvCxnSpPr>
+          <p:nvPr/>
+        </p:nvCxnSpPr>
+        <p:spPr>
+          <a:xfrm flipH="1">
+            <a:off x="5909309" y="962787"/>
+            <a:ext cx="2588657" cy="0"/>
+          </a:xfrm>
+          <a:prstGeom prst="line">
+            <a:avLst/>
+          </a:prstGeom>
+          <a:ln w="6350">
+            <a:solidFill>
+              <a:srgbClr val="CBD5E1"/>
+            </a:solidFill>
+            <a:headEnd type="arrow" w="med" len="med"/>
+            <a:tailEnd type="arrow" w="med" len="med"/>
+          </a:ln>
+        </p:spPr>
+        <p:style>
+          <a:lnRef idx="2">
+            <a:schemeClr val="accent1"/>
+          </a:lnRef>
+          <a:fillRef idx="0">
+            <a:schemeClr val="accent1"/>
+          </a:fillRef>
+          <a:effectRef idx="1">
+            <a:schemeClr val="accent1"/>
+          </a:effectRef>
+          <a:fontRef idx="minor">
+            <a:schemeClr val="tx1"/>
+          </a:fontRef>
+        </p:style>
+      </p:cxnSp>
+      <p:cxnSp>
+        <p:nvCxnSpPr>
+          <p:cNvPr id="415" name="era-boundary:2019">
+            <a:extLst>
+              <a:ext uri="{FF2B5EF4-FFF2-40B4-BE49-F238E27FC236}">
+                <a16:creationId xmlns:a16="http://schemas.microsoft.com/office/drawing/2014/main" id="{70AAB47D-69B6-14C3-DB45-C2B750608594}"/>
+              </a:ext>
+            </a:extLst>
+          </p:cNvPr>
+          <p:cNvCxnSpPr>
+            <a:cxnSpLocks/>
+          </p:cNvCxnSpPr>
+          <p:nvPr/>
+        </p:nvCxnSpPr>
+        <p:spPr>
+          <a:xfrm flipH="1">
+            <a:off x="8643057" y="962787"/>
+            <a:ext cx="2588657" cy="0"/>
+          </a:xfrm>
+          <a:prstGeom prst="line">
+            <a:avLst/>
+          </a:prstGeom>
+          <a:ln w="6350">
+            <a:solidFill>
+              <a:srgbClr val="CBD5E1"/>
+            </a:solidFill>
+            <a:headEnd type="arrow" w="med" len="med"/>
+            <a:tailEnd type="arrow" w="med" len="med"/>
+          </a:ln>
+        </p:spPr>
+        <p:style>
+          <a:lnRef idx="2">
+            <a:schemeClr val="accent1"/>
+          </a:lnRef>
+          <a:fillRef idx="0">
+            <a:schemeClr val="accent1"/>
+          </a:fillRef>
+          <a:effectRef idx="1">
+            <a:schemeClr val="accent1"/>
+          </a:effectRef>
+          <a:fontRef idx="minor">
+            <a:schemeClr val="tx1"/>
+          </a:fontRef>
+        </p:style>
+      </p:cxnSp>
+      <p:cxnSp>
+        <p:nvCxnSpPr>
+          <p:cNvPr id="416" name="era-boundary:2019">
+            <a:extLst>
+              <a:ext uri="{FF2B5EF4-FFF2-40B4-BE49-F238E27FC236}">
+                <a16:creationId xmlns:a16="http://schemas.microsoft.com/office/drawing/2014/main" id="{F87C672E-5B0D-39A1-1528-9A0364835DB0}"/>
+              </a:ext>
+            </a:extLst>
+          </p:cNvPr>
+          <p:cNvCxnSpPr>
+            <a:cxnSpLocks/>
+          </p:cNvCxnSpPr>
+          <p:nvPr/>
+        </p:nvCxnSpPr>
+        <p:spPr>
+          <a:xfrm flipH="1">
+            <a:off x="11444405" y="962787"/>
+            <a:ext cx="2588657" cy="0"/>
+          </a:xfrm>
+          <a:prstGeom prst="line">
+            <a:avLst/>
+          </a:prstGeom>
+          <a:ln w="6350">
+            <a:solidFill>
+              <a:srgbClr val="CBD5E1"/>
+            </a:solidFill>
+            <a:headEnd type="arrow" w="med" len="med"/>
+            <a:tailEnd type="arrow" w="med" len="med"/>
+          </a:ln>
+        </p:spPr>
+        <p:style>
+          <a:lnRef idx="2">
+            <a:schemeClr val="accent1"/>
+          </a:lnRef>
+          <a:fillRef idx="0">
+            <a:schemeClr val="accent1"/>
+          </a:fillRef>
+          <a:effectRef idx="1">
+            <a:schemeClr val="accent1"/>
+          </a:effectRef>
+          <a:fontRef idx="minor">
+            <a:schemeClr val="tx1"/>
+          </a:fontRef>
+        </p:style>
+      </p:cxnSp>
+      <p:cxnSp>
+        <p:nvCxnSpPr>
+          <p:cNvPr id="418" name="era-boundary:2019">
+            <a:extLst>
+              <a:ext uri="{FF2B5EF4-FFF2-40B4-BE49-F238E27FC236}">
+                <a16:creationId xmlns:a16="http://schemas.microsoft.com/office/drawing/2014/main" id="{04030F15-784C-BE6E-0609-7428D8AC20A9}"/>
+              </a:ext>
+            </a:extLst>
+          </p:cNvPr>
+          <p:cNvCxnSpPr>
+            <a:cxnSpLocks/>
+          </p:cNvCxnSpPr>
+          <p:nvPr/>
+        </p:nvCxnSpPr>
+        <p:spPr>
+          <a:xfrm flipH="1">
+            <a:off x="3111935" y="962787"/>
+            <a:ext cx="2588657" cy="0"/>
+          </a:xfrm>
+          <a:prstGeom prst="line">
+            <a:avLst/>
+          </a:prstGeom>
+          <a:ln w="6350">
+            <a:solidFill>
+              <a:srgbClr val="CBD5E1"/>
+            </a:solidFill>
+            <a:headEnd type="arrow" w="med" len="med"/>
+            <a:tailEnd type="arrow" w="med" len="med"/>
+          </a:ln>
+        </p:spPr>
+        <p:style>
+          <a:lnRef idx="2">
+            <a:schemeClr val="accent1"/>
+          </a:lnRef>
+          <a:fillRef idx="0">
+            <a:schemeClr val="accent1"/>
+          </a:fillRef>
+          <a:effectRef idx="1">
+            <a:schemeClr val="accent1"/>
+          </a:effectRef>
+          <a:fontRef idx="minor">
+            <a:schemeClr val="tx1"/>
+          </a:fontRef>
+        </p:style>
+      </p:cxnSp>
+      <p:sp>
+        <p:nvSpPr>
+          <p:cNvPr id="11" name="era-label:1"/>
+          <p:cNvSpPr txBox="1"/>
+          <p:nvPr/>
+        </p:nvSpPr>
+        <p:spPr>
+          <a:xfrm>
+            <a:off x="3054096" y="896112"/>
+            <a:ext cx="2704337" cy="347472"/>
+          </a:xfrm>
+          <a:prstGeom prst="rect">
+            <a:avLst/>
+          </a:prstGeom>
+          <a:noFill/>
+        </p:spPr>
+        <p:txBody>
+          <a:bodyPr wrap="square" lIns="0" tIns="0" rIns="0" bIns="0" anchor="t">
+            <a:noAutofit/>
+          </a:bodyPr>
+          <a:lstStyle/>
+          <a:p>
+            <a:pPr algn="ctr"/>
+            <a:r>
+              <a:rPr sz="950" b="1" i="0" dirty="0">
+                <a:solidFill>
+                  <a:srgbClr val="1F2937"/>
+                </a:solidFill>
+              </a:rPr>
+              <a:t>Era 1  (~2014)</a:t>
+            </a:r>
+          </a:p>
+          <a:p>
+            <a:pPr algn="ctr"/>
+            <a:r>
+              <a:rPr sz="850" b="0" i="0" dirty="0">
+                <a:solidFill>
+                  <a:srgbClr val="64748B"/>
+                </a:solidFill>
+              </a:rPr>
+              <a:t>Queue &amp; scalability foundation</a:t>
+            </a:r>
+          </a:p>
+        </p:txBody>
+      </p:sp>
+      <p:sp>
+        <p:nvSpPr>
+          <p:cNvPr id="13" name="era-label:2"/>
+          <p:cNvSpPr txBox="1"/>
+          <p:nvPr/>
+        </p:nvSpPr>
+        <p:spPr>
+          <a:xfrm>
+            <a:off x="5831586" y="896112"/>
+            <a:ext cx="2704338" cy="347472"/>
+          </a:xfrm>
+          <a:prstGeom prst="rect">
+            <a:avLst/>
+          </a:prstGeom>
+          <a:noFill/>
+        </p:spPr>
+        <p:txBody>
+          <a:bodyPr wrap="square" lIns="0" tIns="0" rIns="0" bIns="0" anchor="t">
+            <a:noAutofit/>
+          </a:bodyPr>
+          <a:lstStyle/>
+          <a:p>
+            <a:pPr algn="ctr"/>
+            <a:r>
+              <a:rPr sz="950" b="1" i="0">
+                <a:solidFill>
+                  <a:srgbClr val="1F2937"/>
+                </a:solidFill>
+              </a:rPr>
+              <a:t>Era 2  (2015–2018)</a:t>
+            </a:r>
+          </a:p>
+          <a:p>
+            <a:pPr algn="ctr"/>
+            <a:r>
+              <a:rPr sz="850" b="0" i="0">
+                <a:solidFill>
+                  <a:srgbClr val="64748B"/>
+                </a:solidFill>
+              </a:rPr>
+              <a:t>Programmable datapath</a:t>
+            </a:r>
+          </a:p>
+        </p:txBody>
+      </p:sp>
+      <p:sp>
+        <p:nvSpPr>
+          <p:cNvPr id="14" name="era-label:3"/>
+          <p:cNvSpPr txBox="1"/>
+          <p:nvPr/>
+        </p:nvSpPr>
+        <p:spPr>
+          <a:xfrm>
+            <a:off x="8609076" y="896112"/>
+            <a:ext cx="2704337" cy="347472"/>
+          </a:xfrm>
+          <a:prstGeom prst="rect">
+            <a:avLst/>
+          </a:prstGeom>
+          <a:noFill/>
+        </p:spPr>
+        <p:txBody>
+          <a:bodyPr wrap="square" lIns="0" tIns="0" rIns="0" bIns="0" anchor="t">
+            <a:noAutofit/>
+          </a:bodyPr>
+          <a:lstStyle/>
+          <a:p>
+            <a:pPr algn="ctr"/>
+            <a:r>
+              <a:rPr sz="950" b="1" i="0">
+                <a:solidFill>
+                  <a:srgbClr val="1F2937"/>
+                </a:solidFill>
+              </a:rPr>
+              <a:t>Era 3  (2019–2022)</a:t>
+            </a:r>
+          </a:p>
+          <a:p>
+            <a:pPr algn="ctr"/>
+            <a:r>
+              <a:rPr sz="850" b="0" i="0">
+                <a:solidFill>
+                  <a:srgbClr val="64748B"/>
+                </a:solidFill>
+              </a:rPr>
+              <a:t>Programmability becomes infrastructure</a:t>
+            </a:r>
+          </a:p>
+        </p:txBody>
+      </p:sp>
+      <p:sp>
+        <p:nvSpPr>
+          <p:cNvPr id="16" name="era-label:4"/>
+          <p:cNvSpPr txBox="1"/>
+          <p:nvPr/>
+        </p:nvSpPr>
+        <p:spPr>
+          <a:xfrm>
+            <a:off x="11386565" y="896112"/>
+            <a:ext cx="2704338" cy="347472"/>
+          </a:xfrm>
+          <a:prstGeom prst="rect">
+            <a:avLst/>
+          </a:prstGeom>
+          <a:noFill/>
+        </p:spPr>
+        <p:txBody>
+          <a:bodyPr wrap="square" lIns="0" tIns="0" rIns="0" bIns="0" anchor="t">
+            <a:noAutofit/>
+          </a:bodyPr>
+          <a:lstStyle/>
+          <a:p>
+            <a:pPr algn="ctr"/>
+            <a:r>
+              <a:rPr sz="950" b="1" i="0">
+                <a:solidFill>
+                  <a:srgbClr val="1F2937"/>
+                </a:solidFill>
+              </a:rPr>
+              <a:t>Era 4  (2023~)</a:t>
+            </a:r>
+          </a:p>
+          <a:p>
+            <a:pPr algn="ctr"/>
+            <a:r>
+              <a:rPr sz="850" b="0" i="0">
+                <a:solidFill>
+                  <a:srgbClr val="64748B"/>
+                </a:solidFill>
+              </a:rPr>
+              <a:t>Explicit resource / control contracts</a:t>
             </a:r>
           </a:p>
         </p:txBody>
@@ -19294,7 +19496,7 @@
 </file>
 
 <file path=ppt/theme/theme2.xml><?xml version="1.0" encoding="utf-8"?>
-<a:theme xmlns:a="http://schemas.openxmlformats.org/drawingml/2006/main" name="Office Theme">
+<a:theme xmlns:a="http://schemas.openxmlformats.org/drawingml/2006/main" name="Office テーマ">
   <a:themeElements>
     <a:clrScheme name="Office">
       <a:dk1>
@@ -19304,44 +19506,44 @@
         <a:sysClr val="window" lastClr="FFFFFF"/>
       </a:lt1>
       <a:dk2>
-        <a:srgbClr val="1F497D"/>
+        <a:srgbClr val="0E2841"/>
       </a:dk2>
       <a:lt2>
-        <a:srgbClr val="EEECE1"/>
+        <a:srgbClr val="E8E8E8"/>
       </a:lt2>
       <a:accent1>
-        <a:srgbClr val="4F81BD"/>
+        <a:srgbClr val="156082"/>
       </a:accent1>
       <a:accent2>
-        <a:srgbClr val="C0504D"/>
+        <a:srgbClr val="E97132"/>
       </a:accent2>
       <a:accent3>
-        <a:srgbClr val="9BBB59"/>
+        <a:srgbClr val="196B24"/>
       </a:accent3>
       <a:accent4>
-        <a:srgbClr val="8064A2"/>
+        <a:srgbClr val="0F9ED5"/>
       </a:accent4>
       <a:accent5>
-        <a:srgbClr val="4BACC6"/>
+        <a:srgbClr val="A02B93"/>
       </a:accent5>
       <a:accent6>
-        <a:srgbClr val="F79646"/>
+        <a:srgbClr val="4EA72E"/>
       </a:accent6>
       <a:hlink>
-        <a:srgbClr val="0000FF"/>
+        <a:srgbClr val="467886"/>
       </a:hlink>
       <a:folHlink>
-        <a:srgbClr val="800080"/>
+        <a:srgbClr val="96607D"/>
       </a:folHlink>
     </a:clrScheme>
     <a:fontScheme name="Office">
       <a:majorFont>
-        <a:latin typeface="Calibri"/>
+        <a:latin typeface="游ゴシック Light" panose="02110004020202020204"/>
         <a:ea typeface=""/>
         <a:cs typeface=""/>
-        <a:font script="Jpan" typeface="ＭＳ Ｐゴシック"/>
+        <a:font script="Jpan" typeface="游ゴシック Light"/>
         <a:font script="Hang" typeface="맑은 고딕"/>
-        <a:font script="Hans" typeface="宋体"/>
+        <a:font script="Hans" typeface="等线 Light"/>
         <a:font script="Hant" typeface="新細明體"/>
         <a:font script="Arab" typeface="Times New Roman"/>
         <a:font script="Hebr" typeface="Times New Roman"/>
@@ -19369,14 +19571,31 @@
         <a:font script="Viet" typeface="Times New Roman"/>
         <a:font script="Uigh" typeface="Microsoft Uighur"/>
         <a:font script="Geor" typeface="Sylfaen"/>
+        <a:font script="Armn" typeface="Arial"/>
+        <a:font script="Bugi" typeface="Leelawadee UI"/>
+        <a:font script="Bopo" typeface="Microsoft JhengHei"/>
+        <a:font script="Java" typeface="Javanese Text"/>
+        <a:font script="Lisu" typeface="Segoe UI"/>
+        <a:font script="Mymr" typeface="Myanmar Text"/>
+        <a:font script="Nkoo" typeface="Ebrima"/>
+        <a:font script="Olck" typeface="Nirmala UI"/>
+        <a:font script="Osma" typeface="Ebrima"/>
+        <a:font script="Phag" typeface="Phagspa"/>
+        <a:font script="Syrn" typeface="Estrangelo Edessa"/>
+        <a:font script="Syrj" typeface="Estrangelo Edessa"/>
+        <a:font script="Syre" typeface="Estrangelo Edessa"/>
+        <a:font script="Sora" typeface="Nirmala UI"/>
+        <a:font script="Tale" typeface="Microsoft Tai Le"/>
+        <a:font script="Talu" typeface="Microsoft New Tai Lue"/>
+        <a:font script="Tfng" typeface="Ebrima"/>
       </a:majorFont>
       <a:minorFont>
-        <a:latin typeface="Calibri"/>
+        <a:latin typeface="游ゴシック" panose="02110004020202020204"/>
         <a:ea typeface=""/>
         <a:cs typeface=""/>
-        <a:font script="Jpan" typeface="ＭＳ Ｐゴシック"/>
+        <a:font script="Jpan" typeface="游ゴシック"/>
         <a:font script="Hang" typeface="맑은 고딕"/>
-        <a:font script="Hans" typeface="宋体"/>
+        <a:font script="Hans" typeface="等线"/>
         <a:font script="Hant" typeface="新細明體"/>
         <a:font script="Arab" typeface="Arial"/>
         <a:font script="Hebr" typeface="Arial"/>
@@ -19404,6 +19623,23 @@
         <a:font script="Viet" typeface="Arial"/>
         <a:font script="Uigh" typeface="Microsoft Uighur"/>
         <a:font script="Geor" typeface="Sylfaen"/>
+        <a:font script="Armn" typeface="Arial"/>
+        <a:font script="Bugi" typeface="Leelawadee UI"/>
+        <a:font script="Bopo" typeface="Microsoft JhengHei"/>
+        <a:font script="Java" typeface="Javanese Text"/>
+        <a:font script="Lisu" typeface="Segoe UI"/>
+        <a:font script="Mymr" typeface="Myanmar Text"/>
+        <a:font script="Nkoo" typeface="Ebrima"/>
+        <a:font script="Olck" typeface="Nirmala UI"/>
+        <a:font script="Osma" typeface="Ebrima"/>
+        <a:font script="Phag" typeface="Phagspa"/>
+        <a:font script="Syrn" typeface="Estrangelo Edessa"/>
+        <a:font script="Syrj" typeface="Estrangelo Edessa"/>
+        <a:font script="Syre" typeface="Estrangelo Edessa"/>
+        <a:font script="Sora" typeface="Nirmala UI"/>
+        <a:font script="Tale" typeface="Microsoft Tai Le"/>
+        <a:font script="Talu" typeface="Microsoft New Tai Lue"/>
+        <a:font script="Tfng" typeface="Ebrima"/>
       </a:minorFont>
     </a:fontScheme>
     <a:fmtScheme name="Office">
@@ -19415,180 +19651,136 @@
           <a:gsLst>
             <a:gs pos="0">
               <a:schemeClr val="phClr">
-                <a:tint val="50000"/>
-                <a:satMod val="300000"/>
+                <a:lumMod val="110000"/>
+                <a:satMod val="105000"/>
+                <a:tint val="67000"/>
               </a:schemeClr>
             </a:gs>
-            <a:gs pos="35000">
+            <a:gs pos="50000">
               <a:schemeClr val="phClr">
-                <a:tint val="37000"/>
-                <a:satMod val="300000"/>
+                <a:lumMod val="105000"/>
+                <a:satMod val="103000"/>
+                <a:tint val="73000"/>
               </a:schemeClr>
             </a:gs>
             <a:gs pos="100000">
               <a:schemeClr val="phClr">
-                <a:tint val="15000"/>
-                <a:satMod val="350000"/>
+                <a:lumMod val="105000"/>
+                <a:satMod val="109000"/>
+                <a:tint val="81000"/>
               </a:schemeClr>
             </a:gs>
           </a:gsLst>
-          <a:lin ang="16200000" scaled="1"/>
+          <a:lin ang="5400000" scaled="0"/>
         </a:gradFill>
         <a:gradFill rotWithShape="1">
           <a:gsLst>
             <a:gs pos="0">
               <a:schemeClr val="phClr">
-                <a:tint val="100000"/>
+                <a:satMod val="103000"/>
+                <a:lumMod val="102000"/>
+                <a:tint val="94000"/>
+              </a:schemeClr>
+            </a:gs>
+            <a:gs pos="50000">
+              <a:schemeClr val="phClr">
+                <a:satMod val="110000"/>
+                <a:lumMod val="100000"/>
                 <a:shade val="100000"/>
-                <a:satMod val="130000"/>
               </a:schemeClr>
             </a:gs>
             <a:gs pos="100000">
               <a:schemeClr val="phClr">
-                <a:tint val="50000"/>
-                <a:shade val="100000"/>
-                <a:satMod val="350000"/>
+                <a:lumMod val="99000"/>
+                <a:satMod val="120000"/>
+                <a:shade val="78000"/>
               </a:schemeClr>
             </a:gs>
           </a:gsLst>
-          <a:lin ang="16200000" scaled="0"/>
+          <a:lin ang="5400000" scaled="0"/>
         </a:gradFill>
       </a:fillStyleLst>
       <a:lnStyleLst>
-        <a:ln w="9525" cap="flat" cmpd="sng" algn="ctr">
+        <a:ln w="12700" cap="flat" cmpd="sng" algn="ctr">
           <a:solidFill>
-            <a:schemeClr val="phClr">
-              <a:shade val="95000"/>
-              <a:satMod val="105000"/>
-            </a:schemeClr>
+            <a:schemeClr val="phClr"/>
           </a:solidFill>
           <a:prstDash val="solid"/>
+          <a:miter lim="800000"/>
+        </a:ln>
+        <a:ln w="19050" cap="flat" cmpd="sng" algn="ctr">
+          <a:solidFill>
+            <a:schemeClr val="phClr"/>
+          </a:solidFill>
+          <a:prstDash val="solid"/>
+          <a:miter lim="800000"/>
         </a:ln>
         <a:ln w="25400" cap="flat" cmpd="sng" algn="ctr">
           <a:solidFill>
             <a:schemeClr val="phClr"/>
           </a:solidFill>
           <a:prstDash val="solid"/>
-        </a:ln>
-        <a:ln w="38100" cap="flat" cmpd="sng" algn="ctr">
-          <a:solidFill>
-            <a:schemeClr val="phClr"/>
-          </a:solidFill>
-          <a:prstDash val="solid"/>
+          <a:miter lim="800000"/>
         </a:ln>
       </a:lnStyleLst>
       <a:effectStyleLst>
         <a:effectStyle>
+          <a:effectLst/>
+        </a:effectStyle>
+        <a:effectStyle>
+          <a:effectLst/>
+        </a:effectStyle>
+        <a:effectStyle>
           <a:effectLst>
-            <a:outerShdw blurRad="40000" dist="20000" dir="5400000" rotWithShape="0">
+            <a:outerShdw blurRad="57150" dist="19050" dir="5400000" algn="ctr" rotWithShape="0">
               <a:srgbClr val="000000">
-                <a:alpha val="38000"/>
+                <a:alpha val="63000"/>
               </a:srgbClr>
             </a:outerShdw>
           </a:effectLst>
-        </a:effectStyle>
-        <a:effectStyle>
-          <a:effectLst>
-            <a:outerShdw blurRad="40000" dist="23000" dir="5400000" rotWithShape="0">
-              <a:srgbClr val="000000">
-                <a:alpha val="35000"/>
-              </a:srgbClr>
-            </a:outerShdw>
-          </a:effectLst>
-        </a:effectStyle>
-        <a:effectStyle>
-          <a:effectLst>
-            <a:outerShdw blurRad="40000" dist="23000" dir="5400000" rotWithShape="0">
-              <a:srgbClr val="000000">
-                <a:alpha val="35000"/>
-              </a:srgbClr>
-            </a:outerShdw>
-          </a:effectLst>
-          <a:scene3d>
-            <a:camera prst="orthographicFront">
-              <a:rot lat="0" lon="0" rev="0"/>
-            </a:camera>
-            <a:lightRig rig="threePt" dir="t">
-              <a:rot lat="0" lon="0" rev="1200000"/>
-            </a:lightRig>
-          </a:scene3d>
-          <a:sp3d>
-            <a:bevelT w="63500" h="25400"/>
-          </a:sp3d>
         </a:effectStyle>
       </a:effectStyleLst>
       <a:bgFillStyleLst>
         <a:solidFill>
           <a:schemeClr val="phClr"/>
         </a:solidFill>
+        <a:solidFill>
+          <a:schemeClr val="phClr">
+            <a:tint val="95000"/>
+            <a:satMod val="170000"/>
+          </a:schemeClr>
+        </a:solidFill>
         <a:gradFill rotWithShape="1">
           <a:gsLst>
             <a:gs pos="0">
               <a:schemeClr val="phClr">
-                <a:tint val="40000"/>
-                <a:satMod val="350000"/>
+                <a:tint val="93000"/>
+                <a:satMod val="150000"/>
+                <a:shade val="98000"/>
+                <a:lumMod val="102000"/>
               </a:schemeClr>
             </a:gs>
-            <a:gs pos="40000">
+            <a:gs pos="50000">
               <a:schemeClr val="phClr">
-                <a:tint val="45000"/>
-                <a:shade val="99000"/>
-                <a:satMod val="350000"/>
+                <a:tint val="98000"/>
+                <a:satMod val="130000"/>
+                <a:shade val="90000"/>
+                <a:lumMod val="103000"/>
               </a:schemeClr>
             </a:gs>
             <a:gs pos="100000">
               <a:schemeClr val="phClr">
-                <a:shade val="20000"/>
-                <a:satMod val="255000"/>
+                <a:shade val="63000"/>
+                <a:satMod val="120000"/>
               </a:schemeClr>
             </a:gs>
           </a:gsLst>
-          <a:path path="circle">
-            <a:fillToRect l="50000" t="-80000" r="50000" b="180000"/>
-          </a:path>
-        </a:gradFill>
-        <a:gradFill rotWithShape="1">
-          <a:gsLst>
-            <a:gs pos="0">
-              <a:schemeClr val="phClr">
-                <a:tint val="80000"/>
-                <a:satMod val="300000"/>
-              </a:schemeClr>
-            </a:gs>
-            <a:gs pos="100000">
-              <a:schemeClr val="phClr">
-                <a:shade val="30000"/>
-                <a:satMod val="200000"/>
-              </a:schemeClr>
-            </a:gs>
-          </a:gsLst>
-          <a:path path="circle">
-            <a:fillToRect l="50000" t="50000" r="50000" b="50000"/>
-          </a:path>
+          <a:lin ang="5400000" scaled="0"/>
         </a:gradFill>
       </a:bgFillStyleLst>
     </a:fmtScheme>
   </a:themeElements>
   <a:objectDefaults>
-    <a:spDef>
-      <a:spPr/>
-      <a:bodyPr/>
-      <a:lstStyle/>
-      <a:style>
-        <a:lnRef idx="1">
-          <a:schemeClr val="accent1"/>
-        </a:lnRef>
-        <a:fillRef idx="3">
-          <a:schemeClr val="accent1"/>
-        </a:fillRef>
-        <a:effectRef idx="2">
-          <a:schemeClr val="accent1"/>
-        </a:effectRef>
-        <a:fontRef idx="minor">
-          <a:schemeClr val="lt1"/>
-        </a:fontRef>
-      </a:style>
-    </a:spDef>
     <a:lnDef>
       <a:spPr/>
       <a:bodyPr/>
@@ -19610,5 +19802,10 @@
     </a:lnDef>
   </a:objectDefaults>
   <a:extraClrSchemeLst/>
+  <a:extLst>
+    <a:ext uri="{05A4C25C-085E-4340-85A3-A5531E510DB2}">
+      <thm15:themeFamily xmlns:thm15="http://schemas.microsoft.com/office/thememl/2012/main" name="Office Theme" id="{2E142A2C-CD16-42D6-873A-C26D2A0506FA}" vid="{1BDDFF52-6CD6-40A5-AB3C-68EB2F1E4D0A}"/>
+    </a:ext>
+  </a:extLst>
 </a:theme>
 </file>
--- a/linux-networking-feature-evolution.pptx
+++ b/linux-networking-feature-evolution.pptx
@@ -17310,7 +17310,7 @@
         </p:nvSpPr>
         <p:spPr>
           <a:xfrm>
-            <a:off x="3828307" y="1909761"/>
+            <a:off x="3828307" y="1909762"/>
             <a:ext cx="347472" cy="164592"/>
           </a:xfrm>
           <a:prstGeom prst="rect">
@@ -17345,7 +17345,7 @@
         </p:nvSpPr>
         <p:spPr>
           <a:xfrm>
-            <a:off x="6883546" y="2019108"/>
+            <a:off x="6883546" y="2019109"/>
             <a:ext cx="347472" cy="164592"/>
           </a:xfrm>
           <a:prstGeom prst="rect">
@@ -17485,7 +17485,7 @@
         </p:nvSpPr>
         <p:spPr>
           <a:xfrm>
-            <a:off x="5217052" y="2657283"/>
+            <a:off x="5217052" y="2657284"/>
             <a:ext cx="347472" cy="164592"/>
           </a:xfrm>
           <a:prstGeom prst="rect">
@@ -17520,7 +17520,7 @@
         </p:nvSpPr>
         <p:spPr>
           <a:xfrm>
-            <a:off x="10633157" y="2766630"/>
+            <a:off x="10633157" y="2766631"/>
             <a:ext cx="347472" cy="164592"/>
           </a:xfrm>
           <a:prstGeom prst="rect">
@@ -17555,7 +17555,7 @@
         </p:nvSpPr>
         <p:spPr>
           <a:xfrm>
-            <a:off x="10772032" y="2875977"/>
+            <a:off x="10772032" y="2875978"/>
             <a:ext cx="347472" cy="164592"/>
           </a:xfrm>
           <a:prstGeom prst="rect">

--- a/linux-networking-feature-evolution.pptx
+++ b/linux-networking-feature-evolution.pptx
@@ -17214,7 +17214,7 @@
           <a:noFill/>
         </p:spPr>
         <p:txBody>
-          <a:bodyPr wrap="none" lIns="0" tIns="0" rIns="0" bIns="0">
+          <a:bodyPr wrap="none" lIns="0" tIns="0" rIns="0" bIns="0" anchor="ctr">
             <a:spAutoFit/>
           </a:bodyPr>
           <a:lstStyle/>
@@ -17249,7 +17249,7 @@
           <a:noFill/>
         </p:spPr>
         <p:txBody>
-          <a:bodyPr wrap="none" lIns="0" tIns="0" rIns="0" bIns="0">
+          <a:bodyPr wrap="none" lIns="0" tIns="0" rIns="0" bIns="0" anchor="ctr">
             <a:spAutoFit/>
           </a:bodyPr>
           <a:lstStyle/>
@@ -17284,7 +17284,7 @@
           <a:noFill/>
         </p:spPr>
         <p:txBody>
-          <a:bodyPr wrap="none" lIns="0" tIns="0" rIns="0" bIns="0">
+          <a:bodyPr wrap="none" lIns="0" tIns="0" rIns="0" bIns="0" anchor="ctr">
             <a:spAutoFit/>
           </a:bodyPr>
           <a:lstStyle/>
@@ -17319,7 +17319,7 @@
           <a:noFill/>
         </p:spPr>
         <p:txBody>
-          <a:bodyPr wrap="none" lIns="0" tIns="0" rIns="0" bIns="0">
+          <a:bodyPr wrap="none" lIns="0" tIns="0" rIns="0" bIns="0" anchor="ctr">
             <a:spAutoFit/>
           </a:bodyPr>
           <a:lstStyle/>
@@ -17354,7 +17354,7 @@
           <a:noFill/>
         </p:spPr>
         <p:txBody>
-          <a:bodyPr wrap="none" lIns="0" tIns="0" rIns="0" bIns="0">
+          <a:bodyPr wrap="none" lIns="0" tIns="0" rIns="0" bIns="0" anchor="ctr">
             <a:spAutoFit/>
           </a:bodyPr>
           <a:lstStyle/>
@@ -17389,7 +17389,7 @@
           <a:noFill/>
         </p:spPr>
         <p:txBody>
-          <a:bodyPr wrap="none" lIns="0" tIns="0" rIns="0" bIns="0">
+          <a:bodyPr wrap="none" lIns="0" tIns="0" rIns="0" bIns="0" anchor="ctr">
             <a:spAutoFit/>
           </a:bodyPr>
           <a:lstStyle/>
@@ -17424,7 +17424,7 @@
           <a:noFill/>
         </p:spPr>
         <p:txBody>
-          <a:bodyPr wrap="none" lIns="0" tIns="0" rIns="0" bIns="0">
+          <a:bodyPr wrap="none" lIns="0" tIns="0" rIns="0" bIns="0" anchor="ctr">
             <a:spAutoFit/>
           </a:bodyPr>
           <a:lstStyle/>
@@ -17459,7 +17459,7 @@
           <a:noFill/>
         </p:spPr>
         <p:txBody>
-          <a:bodyPr wrap="none" lIns="0" tIns="0" rIns="0" bIns="0">
+          <a:bodyPr wrap="none" lIns="0" tIns="0" rIns="0" bIns="0" anchor="ctr">
             <a:spAutoFit/>
           </a:bodyPr>
           <a:lstStyle/>
@@ -17494,7 +17494,7 @@
           <a:noFill/>
         </p:spPr>
         <p:txBody>
-          <a:bodyPr wrap="none" lIns="0" tIns="0" rIns="0" bIns="0">
+          <a:bodyPr wrap="none" lIns="0" tIns="0" rIns="0" bIns="0" anchor="ctr">
             <a:spAutoFit/>
           </a:bodyPr>
           <a:lstStyle/>
@@ -17529,7 +17529,7 @@
           <a:noFill/>
         </p:spPr>
         <p:txBody>
-          <a:bodyPr wrap="none" lIns="0" tIns="0" rIns="0" bIns="0">
+          <a:bodyPr wrap="none" lIns="0" tIns="0" rIns="0" bIns="0" anchor="ctr">
             <a:spAutoFit/>
           </a:bodyPr>
           <a:lstStyle/>
@@ -17564,7 +17564,7 @@
           <a:noFill/>
         </p:spPr>
         <p:txBody>
-          <a:bodyPr wrap="none" lIns="0" tIns="0" rIns="0" bIns="0">
+          <a:bodyPr wrap="none" lIns="0" tIns="0" rIns="0" bIns="0" anchor="ctr">
             <a:spAutoFit/>
           </a:bodyPr>
           <a:lstStyle/>
@@ -17599,7 +17599,7 @@
           <a:noFill/>
         </p:spPr>
         <p:txBody>
-          <a:bodyPr wrap="none" lIns="0" tIns="0" rIns="0" bIns="0">
+          <a:bodyPr wrap="none" lIns="0" tIns="0" rIns="0" bIns="0" anchor="ctr">
             <a:spAutoFit/>
           </a:bodyPr>
           <a:lstStyle/>
@@ -17634,7 +17634,7 @@
           <a:noFill/>
         </p:spPr>
         <p:txBody>
-          <a:bodyPr wrap="none" lIns="0" tIns="0" rIns="0" bIns="0">
+          <a:bodyPr wrap="none" lIns="0" tIns="0" rIns="0" bIns="0" anchor="ctr">
             <a:spAutoFit/>
           </a:bodyPr>
           <a:lstStyle/>
@@ -17669,7 +17669,7 @@
           <a:noFill/>
         </p:spPr>
         <p:txBody>
-          <a:bodyPr wrap="none" lIns="0" tIns="0" rIns="0" bIns="0">
+          <a:bodyPr wrap="none" lIns="0" tIns="0" rIns="0" bIns="0" anchor="ctr">
             <a:spAutoFit/>
           </a:bodyPr>
           <a:lstStyle/>
@@ -17704,7 +17704,7 @@
           <a:noFill/>
         </p:spPr>
         <p:txBody>
-          <a:bodyPr wrap="none" lIns="0" tIns="0" rIns="0" bIns="0">
+          <a:bodyPr wrap="none" lIns="0" tIns="0" rIns="0" bIns="0" anchor="ctr">
             <a:spAutoFit/>
           </a:bodyPr>
           <a:lstStyle/>
@@ -17739,7 +17739,7 @@
           <a:noFill/>
         </p:spPr>
         <p:txBody>
-          <a:bodyPr wrap="none" lIns="0" tIns="0" rIns="0" bIns="0">
+          <a:bodyPr wrap="none" lIns="0" tIns="0" rIns="0" bIns="0" anchor="ctr">
             <a:spAutoFit/>
           </a:bodyPr>
           <a:lstStyle/>
@@ -17774,7 +17774,7 @@
           <a:noFill/>
         </p:spPr>
         <p:txBody>
-          <a:bodyPr wrap="none" lIns="0" tIns="0" rIns="0" bIns="0">
+          <a:bodyPr wrap="none" lIns="0" tIns="0" rIns="0" bIns="0" anchor="ctr">
             <a:spAutoFit/>
           </a:bodyPr>
           <a:lstStyle/>
@@ -17809,7 +17809,7 @@
           <a:noFill/>
         </p:spPr>
         <p:txBody>
-          <a:bodyPr wrap="none" lIns="0" tIns="0" rIns="0" bIns="0">
+          <a:bodyPr wrap="none" lIns="0" tIns="0" rIns="0" bIns="0" anchor="ctr">
             <a:spAutoFit/>
           </a:bodyPr>
           <a:lstStyle/>
@@ -17844,7 +17844,7 @@
           <a:noFill/>
         </p:spPr>
         <p:txBody>
-          <a:bodyPr wrap="none" lIns="0" tIns="0" rIns="0" bIns="0">
+          <a:bodyPr wrap="none" lIns="0" tIns="0" rIns="0" bIns="0" anchor="ctr">
             <a:spAutoFit/>
           </a:bodyPr>
           <a:lstStyle/>
@@ -17879,7 +17879,7 @@
           <a:noFill/>
         </p:spPr>
         <p:txBody>
-          <a:bodyPr wrap="none" lIns="0" tIns="0" rIns="0" bIns="0">
+          <a:bodyPr wrap="none" lIns="0" tIns="0" rIns="0" bIns="0" anchor="ctr">
             <a:spAutoFit/>
           </a:bodyPr>
           <a:lstStyle/>
@@ -17914,7 +17914,7 @@
           <a:noFill/>
         </p:spPr>
         <p:txBody>
-          <a:bodyPr wrap="none" lIns="0" tIns="0" rIns="0" bIns="0">
+          <a:bodyPr wrap="none" lIns="0" tIns="0" rIns="0" bIns="0" anchor="ctr">
             <a:spAutoFit/>
           </a:bodyPr>
           <a:lstStyle/>
@@ -17949,7 +17949,7 @@
           <a:noFill/>
         </p:spPr>
         <p:txBody>
-          <a:bodyPr wrap="none" lIns="0" tIns="0" rIns="0" bIns="0">
+          <a:bodyPr wrap="none" lIns="0" tIns="0" rIns="0" bIns="0" anchor="ctr">
             <a:spAutoFit/>
           </a:bodyPr>
           <a:lstStyle/>
@@ -17984,7 +17984,7 @@
           <a:noFill/>
         </p:spPr>
         <p:txBody>
-          <a:bodyPr wrap="none" lIns="0" tIns="0" rIns="0" bIns="0">
+          <a:bodyPr wrap="none" lIns="0" tIns="0" rIns="0" bIns="0" anchor="ctr">
             <a:spAutoFit/>
           </a:bodyPr>
           <a:lstStyle/>
@@ -18019,7 +18019,7 @@
           <a:noFill/>
         </p:spPr>
         <p:txBody>
-          <a:bodyPr wrap="none" lIns="0" tIns="0" rIns="0" bIns="0">
+          <a:bodyPr wrap="none" lIns="0" tIns="0" rIns="0" bIns="0" anchor="ctr">
             <a:spAutoFit/>
           </a:bodyPr>
           <a:lstStyle/>
@@ -18054,7 +18054,7 @@
           <a:noFill/>
         </p:spPr>
         <p:txBody>
-          <a:bodyPr wrap="none" lIns="0" tIns="0" rIns="0" bIns="0">
+          <a:bodyPr wrap="none" lIns="0" tIns="0" rIns="0" bIns="0" anchor="ctr">
             <a:spAutoFit/>
           </a:bodyPr>
           <a:lstStyle/>
@@ -18089,7 +18089,7 @@
           <a:noFill/>
         </p:spPr>
         <p:txBody>
-          <a:bodyPr wrap="none" lIns="0" tIns="0" rIns="0" bIns="0">
+          <a:bodyPr wrap="none" lIns="0" tIns="0" rIns="0" bIns="0" anchor="ctr">
             <a:spAutoFit/>
           </a:bodyPr>
           <a:lstStyle/>
@@ -18124,7 +18124,7 @@
           <a:noFill/>
         </p:spPr>
         <p:txBody>
-          <a:bodyPr wrap="none" lIns="0" tIns="0" rIns="0" bIns="0">
+          <a:bodyPr wrap="none" lIns="0" tIns="0" rIns="0" bIns="0" anchor="ctr">
             <a:spAutoFit/>
           </a:bodyPr>
           <a:lstStyle/>
@@ -18159,7 +18159,7 @@
           <a:noFill/>
         </p:spPr>
         <p:txBody>
-          <a:bodyPr wrap="none" lIns="0" tIns="0" rIns="0" bIns="0">
+          <a:bodyPr wrap="none" lIns="0" tIns="0" rIns="0" bIns="0" anchor="ctr">
             <a:spAutoFit/>
           </a:bodyPr>
           <a:lstStyle/>
@@ -18194,7 +18194,7 @@
           <a:noFill/>
         </p:spPr>
         <p:txBody>
-          <a:bodyPr wrap="none" lIns="0" tIns="0" rIns="0" bIns="0">
+          <a:bodyPr wrap="none" lIns="0" tIns="0" rIns="0" bIns="0" anchor="ctr">
             <a:spAutoFit/>
           </a:bodyPr>
           <a:lstStyle/>
@@ -18229,7 +18229,7 @@
           <a:noFill/>
         </p:spPr>
         <p:txBody>
-          <a:bodyPr wrap="none" lIns="0" tIns="0" rIns="0" bIns="0">
+          <a:bodyPr wrap="none" lIns="0" tIns="0" rIns="0" bIns="0" anchor="ctr">
             <a:spAutoFit/>
           </a:bodyPr>
           <a:lstStyle/>
@@ -18264,7 +18264,7 @@
           <a:noFill/>
         </p:spPr>
         <p:txBody>
-          <a:bodyPr wrap="none" lIns="0" tIns="0" rIns="0" bIns="0">
+          <a:bodyPr wrap="none" lIns="0" tIns="0" rIns="0" bIns="0" anchor="ctr">
             <a:spAutoFit/>
           </a:bodyPr>
           <a:lstStyle/>
@@ -18299,7 +18299,7 @@
           <a:noFill/>
         </p:spPr>
         <p:txBody>
-          <a:bodyPr wrap="none" lIns="0" tIns="0" rIns="0" bIns="0">
+          <a:bodyPr wrap="none" lIns="0" tIns="0" rIns="0" bIns="0" anchor="ctr">
             <a:spAutoFit/>
           </a:bodyPr>
           <a:lstStyle/>
@@ -18334,7 +18334,7 @@
           <a:noFill/>
         </p:spPr>
         <p:txBody>
-          <a:bodyPr wrap="none" lIns="0" tIns="0" rIns="0" bIns="0">
+          <a:bodyPr wrap="none" lIns="0" tIns="0" rIns="0" bIns="0" anchor="ctr">
             <a:spAutoFit/>
           </a:bodyPr>
           <a:lstStyle/>
@@ -18369,7 +18369,7 @@
           <a:noFill/>
         </p:spPr>
         <p:txBody>
-          <a:bodyPr wrap="none" lIns="0" tIns="0" rIns="0" bIns="0">
+          <a:bodyPr wrap="none" lIns="0" tIns="0" rIns="0" bIns="0" anchor="ctr">
             <a:spAutoFit/>
           </a:bodyPr>
           <a:lstStyle/>
@@ -18404,7 +18404,7 @@
           <a:noFill/>
         </p:spPr>
         <p:txBody>
-          <a:bodyPr wrap="none" lIns="0" tIns="0" rIns="0" bIns="0">
+          <a:bodyPr wrap="none" lIns="0" tIns="0" rIns="0" bIns="0" anchor="ctr">
             <a:spAutoFit/>
           </a:bodyPr>
           <a:lstStyle/>
@@ -18439,7 +18439,7 @@
           <a:noFill/>
         </p:spPr>
         <p:txBody>
-          <a:bodyPr wrap="none" lIns="0" tIns="0" rIns="0" bIns="0">
+          <a:bodyPr wrap="none" lIns="0" tIns="0" rIns="0" bIns="0" anchor="ctr">
             <a:spAutoFit/>
           </a:bodyPr>
           <a:lstStyle/>
@@ -18474,7 +18474,7 @@
           <a:noFill/>
         </p:spPr>
         <p:txBody>
-          <a:bodyPr wrap="none" lIns="0" tIns="0" rIns="0" bIns="0">
+          <a:bodyPr wrap="none" lIns="0" tIns="0" rIns="0" bIns="0" anchor="ctr">
             <a:spAutoFit/>
           </a:bodyPr>
           <a:lstStyle/>
@@ -18509,7 +18509,7 @@
           <a:noFill/>
         </p:spPr>
         <p:txBody>
-          <a:bodyPr wrap="none" lIns="0" tIns="0" rIns="0" bIns="0">
+          <a:bodyPr wrap="none" lIns="0" tIns="0" rIns="0" bIns="0" anchor="ctr">
             <a:spAutoFit/>
           </a:bodyPr>
           <a:lstStyle/>
@@ -18544,7 +18544,7 @@
           <a:noFill/>
         </p:spPr>
         <p:txBody>
-          <a:bodyPr wrap="none" lIns="0" tIns="0" rIns="0" bIns="0">
+          <a:bodyPr wrap="none" lIns="0" tIns="0" rIns="0" bIns="0" anchor="ctr">
             <a:spAutoFit/>
           </a:bodyPr>
           <a:lstStyle/>
@@ -18579,7 +18579,7 @@
           <a:noFill/>
         </p:spPr>
         <p:txBody>
-          <a:bodyPr wrap="none" lIns="0" tIns="0" rIns="0" bIns="0">
+          <a:bodyPr wrap="none" lIns="0" tIns="0" rIns="0" bIns="0" anchor="ctr">
             <a:spAutoFit/>
           </a:bodyPr>
           <a:lstStyle/>
@@ -18614,7 +18614,7 @@
           <a:noFill/>
         </p:spPr>
         <p:txBody>
-          <a:bodyPr wrap="none" lIns="0" tIns="0" rIns="0" bIns="0">
+          <a:bodyPr wrap="none" lIns="0" tIns="0" rIns="0" bIns="0" anchor="ctr">
             <a:spAutoFit/>
           </a:bodyPr>
           <a:lstStyle/>
@@ -18649,7 +18649,7 @@
           <a:noFill/>
         </p:spPr>
         <p:txBody>
-          <a:bodyPr wrap="none" lIns="0" tIns="0" rIns="0" bIns="0">
+          <a:bodyPr wrap="none" lIns="0" tIns="0" rIns="0" bIns="0" anchor="ctr">
             <a:spAutoFit/>
           </a:bodyPr>
           <a:lstStyle/>
@@ -18684,7 +18684,7 @@
           <a:noFill/>
         </p:spPr>
         <p:txBody>
-          <a:bodyPr wrap="none" lIns="0" tIns="0" rIns="0" bIns="0">
+          <a:bodyPr wrap="none" lIns="0" tIns="0" rIns="0" bIns="0" anchor="ctr">
             <a:spAutoFit/>
           </a:bodyPr>
           <a:lstStyle/>
@@ -18719,7 +18719,7 @@
           <a:noFill/>
         </p:spPr>
         <p:txBody>
-          <a:bodyPr wrap="none" lIns="0" tIns="0" rIns="0" bIns="0">
+          <a:bodyPr wrap="none" lIns="0" tIns="0" rIns="0" bIns="0" anchor="ctr">
             <a:spAutoFit/>
           </a:bodyPr>
           <a:lstStyle/>
@@ -18754,7 +18754,7 @@
           <a:noFill/>
         </p:spPr>
         <p:txBody>
-          <a:bodyPr wrap="none" lIns="0" tIns="0" rIns="0" bIns="0">
+          <a:bodyPr wrap="none" lIns="0" tIns="0" rIns="0" bIns="0" anchor="ctr">
             <a:spAutoFit/>
           </a:bodyPr>
           <a:lstStyle/>
@@ -18789,7 +18789,7 @@
           <a:noFill/>
         </p:spPr>
         <p:txBody>
-          <a:bodyPr wrap="none" lIns="0" tIns="0" rIns="0" bIns="0">
+          <a:bodyPr wrap="none" lIns="0" tIns="0" rIns="0" bIns="0" anchor="ctr">
             <a:spAutoFit/>
           </a:bodyPr>
           <a:lstStyle/>

--- a/linux-networking-feature-evolution.pptx
+++ b/linux-networking-feature-evolution.pptx
@@ -352,6 +352,16 @@
           <a:p>
             <a:r>
               <a:t>- Development starts revised from memory (not audited): nftables ~2008 (shown as off-chart), XDP ~early 2016.</a:t>
+            </a:r>
+          </a:p>
+          <a:p>
+            <a:r>
+              <a:t>- Start labels (~X.Y) give the version under development at the plotted start date, i.e. the first kernel released after that date. Where a lineage arrow runs into a start label, its shaft is broken around the label (…:across:before-label + …:across).</a:t>
+            </a:r>
+          </a:p>
+          <a:p>
+            <a:r>
+              <a:t>- Era span arrows: era-span:&lt;n&gt;:left / :right.</a:t>
             </a:r>
           </a:p>
         </p:txBody>
@@ -3359,7 +3369,7 @@
         </p:nvSpPr>
         <p:spPr>
           <a:xfrm>
-            <a:off x="0" y="368300"/>
+            <a:off x="0" y="0"/>
             <a:ext cx="14630400" cy="8229600"/>
           </a:xfrm>
           <a:prstGeom prst="rect">
@@ -3517,8 +3527,8 @@
         </p:nvSpPr>
         <p:spPr>
           <a:xfrm>
-            <a:off x="228600" y="2514600"/>
-            <a:ext cx="14173200" cy="1225296"/>
+            <a:off x="228600" y="2557272"/>
+            <a:ext cx="14173200" cy="1130046"/>
           </a:xfrm>
           <a:prstGeom prst="roundRect">
             <a:avLst>
@@ -3754,8 +3764,8 @@
             <a:avLst/>
           </a:prstGeom>
           <a:solidFill>
-            <a:srgbClr val="E8EEF5">
-              <a:alpha val="7000"/>
+            <a:srgbClr val="475569">
+              <a:alpha val="8000"/>
             </a:srgbClr>
           </a:solidFill>
           <a:ln>
@@ -3800,8 +3810,8 @@
             <a:avLst/>
           </a:prstGeom>
           <a:solidFill>
-            <a:srgbClr val="E8EEF5">
-              <a:alpha val="7000"/>
+            <a:srgbClr val="475569">
+              <a:alpha val="8000"/>
             </a:srgbClr>
           </a:solidFill>
           <a:ln>
@@ -3984,11 +3994,9 @@
           <a:prstGeom prst="line">
             <a:avLst/>
           </a:prstGeom>
-          <a:ln w="6350">
-            <a:solidFill>
-              <a:schemeClr val="bg1">
-                <a:lumMod val="95000"/>
-              </a:schemeClr>
+          <a:ln w="9525">
+            <a:solidFill>
+              <a:srgbClr val="94A3B8"/>
             </a:solidFill>
             <a:prstDash val="sysDash"/>
           </a:ln>
@@ -4056,11 +4064,9 @@
           <a:prstGeom prst="line">
             <a:avLst/>
           </a:prstGeom>
-          <a:ln w="6350">
-            <a:solidFill>
-              <a:schemeClr val="bg1">
-                <a:lumMod val="95000"/>
-              </a:schemeClr>
+          <a:ln w="9525">
+            <a:solidFill>
+              <a:srgbClr val="94A3B8"/>
             </a:solidFill>
             <a:prstDash val="sysDash"/>
           </a:ln>
@@ -4128,11 +4134,9 @@
           <a:prstGeom prst="line">
             <a:avLst/>
           </a:prstGeom>
-          <a:ln w="6350">
-            <a:solidFill>
-              <a:schemeClr val="bg1">
-                <a:lumMod val="95000"/>
-              </a:schemeClr>
+          <a:ln w="9525">
+            <a:solidFill>
+              <a:srgbClr val="94A3B8"/>
             </a:solidFill>
             <a:prstDash val="sysDash"/>
           </a:ln>
@@ -4200,11 +4204,9 @@
           <a:prstGeom prst="line">
             <a:avLst/>
           </a:prstGeom>
-          <a:ln w="6350">
-            <a:solidFill>
-              <a:schemeClr val="bg1">
-                <a:lumMod val="95000"/>
-              </a:schemeClr>
+          <a:ln w="9525">
+            <a:solidFill>
+              <a:srgbClr val="94A3B8"/>
             </a:solidFill>
             <a:prstDash val="sysDash"/>
           </a:ln>
@@ -4272,11 +4274,9 @@
           <a:prstGeom prst="line">
             <a:avLst/>
           </a:prstGeom>
-          <a:ln w="6350">
-            <a:solidFill>
-              <a:schemeClr val="bg1">
-                <a:lumMod val="95000"/>
-              </a:schemeClr>
+          <a:ln w="9525">
+            <a:solidFill>
+              <a:srgbClr val="94A3B8"/>
             </a:solidFill>
             <a:prstDash val="sysDash"/>
           </a:ln>
@@ -5437,14 +5437,49 @@
       </p:cxnSp>
       <p:cxnSp>
         <p:nvCxnSpPr>
+          <p:cNvPr id="427" name="lineage:sch_fq / TCP pacing-&gt;SO_TXTIME / EDT / taprio:across:before-label"/>
+          <p:cNvCxnSpPr/>
+          <p:nvPr/>
+        </p:nvCxnSpPr>
+        <p:spPr>
+          <a:xfrm>
+            <a:off x="4987998" y="2101405"/>
+            <a:ext cx="1906469" cy="0"/>
+          </a:xfrm>
+          <a:prstGeom prst="line">
+            <a:avLst/>
+          </a:prstGeom>
+          <a:ln w="12700">
+            <a:solidFill>
+              <a:srgbClr val="475569"/>
+            </a:solidFill>
+          </a:ln>
+        </p:spPr>
+        <p:style>
+          <a:lnRef idx="2">
+            <a:schemeClr val="accent1"/>
+          </a:lnRef>
+          <a:fillRef idx="0">
+            <a:schemeClr val="accent1"/>
+          </a:fillRef>
+          <a:effectRef idx="1">
+            <a:schemeClr val="accent1"/>
+          </a:effectRef>
+          <a:fontRef idx="minor">
+            <a:schemeClr val="tx1"/>
+          </a:fontRef>
+        </p:style>
+      </p:cxnSp>
+      <p:cxnSp>
+        <p:nvCxnSpPr>
           <p:cNvPr id="63" name="lineage:sch_fq / TCP pacing-&gt;SO_TXTIME / EDT / taprio:across"/>
           <p:cNvCxnSpPr/>
           <p:nvPr/>
         </p:nvCxnSpPr>
         <p:spPr>
           <a:xfrm>
-            <a:off x="4987998" y="2101405"/>
-            <a:ext cx="2279596" cy="0"/>
+            <a:off x="7180725" y="2101405"/>
+            <a:ext cx="86868" cy="0"/>
           </a:xfrm>
           <a:prstGeom prst="line">
             <a:avLst/>
@@ -5588,14 +5623,49 @@
       </p:sp>
       <p:cxnSp>
         <p:nvCxnSpPr>
+          <p:cNvPr id="428" name="lineage:eBPF foundation-&gt;XDP:across:before-label"/>
+          <p:cNvCxnSpPr/>
+          <p:nvPr/>
+        </p:nvCxnSpPr>
+        <p:spPr>
+          <a:xfrm>
+            <a:off x="5747007" y="3614356"/>
+            <a:ext cx="441988" cy="0"/>
+          </a:xfrm>
+          <a:prstGeom prst="line">
+            <a:avLst/>
+          </a:prstGeom>
+          <a:ln w="12700">
+            <a:solidFill>
+              <a:srgbClr val="475569"/>
+            </a:solidFill>
+          </a:ln>
+        </p:spPr>
+        <p:style>
+          <a:lnRef idx="2">
+            <a:schemeClr val="accent1"/>
+          </a:lnRef>
+          <a:fillRef idx="0">
+            <a:schemeClr val="accent1"/>
+          </a:fillRef>
+          <a:effectRef idx="1">
+            <a:schemeClr val="accent1"/>
+          </a:effectRef>
+          <a:fontRef idx="minor">
+            <a:schemeClr val="tx1"/>
+          </a:fontRef>
+        </p:style>
+      </p:cxnSp>
+      <p:cxnSp>
+        <p:nvCxnSpPr>
           <p:cNvPr id="67" name="lineage:eBPF foundation-&gt;XDP:across"/>
           <p:cNvCxnSpPr/>
           <p:nvPr/>
         </p:nvCxnSpPr>
         <p:spPr>
           <a:xfrm>
-            <a:off x="5747007" y="3614356"/>
-            <a:ext cx="770664" cy="0"/>
+            <a:off x="6430803" y="3614356"/>
+            <a:ext cx="86868" cy="0"/>
           </a:xfrm>
           <a:prstGeom prst="line">
             <a:avLst/>
@@ -5605,6 +5675,41 @@
               <a:srgbClr val="475569"/>
             </a:solidFill>
             <a:tailEnd type="triangle" w="sm" len="sm"/>
+          </a:ln>
+        </p:spPr>
+        <p:style>
+          <a:lnRef idx="2">
+            <a:schemeClr val="accent1"/>
+          </a:lnRef>
+          <a:fillRef idx="0">
+            <a:schemeClr val="accent1"/>
+          </a:fillRef>
+          <a:effectRef idx="1">
+            <a:schemeClr val="accent1"/>
+          </a:effectRef>
+          <a:fontRef idx="minor">
+            <a:schemeClr val="tx1"/>
+          </a:fontRef>
+        </p:style>
+      </p:cxnSp>
+      <p:cxnSp>
+        <p:nvCxnSpPr>
+          <p:cNvPr id="429" name="lineage:eBPF foundation-&gt;cgroup / LWT BPF:across:before-label"/>
+          <p:cNvCxnSpPr/>
+          <p:nvPr/>
+        </p:nvCxnSpPr>
+        <p:spPr>
+          <a:xfrm>
+            <a:off x="5747007" y="3067621"/>
+            <a:ext cx="358663" cy="0"/>
+          </a:xfrm>
+          <a:prstGeom prst="line">
+            <a:avLst/>
+          </a:prstGeom>
+          <a:ln w="12700">
+            <a:solidFill>
+              <a:srgbClr val="475569"/>
+            </a:solidFill>
           </a:ln>
         </p:spPr>
         <p:style>
@@ -5630,8 +5735,8 @@
         </p:nvCxnSpPr>
         <p:spPr>
           <a:xfrm>
-            <a:off x="5747007" y="3067621"/>
-            <a:ext cx="687340" cy="0"/>
+            <a:off x="6347478" y="3067621"/>
+            <a:ext cx="86868" cy="0"/>
           </a:xfrm>
           <a:prstGeom prst="line">
             <a:avLst/>
@@ -5641,6 +5746,41 @@
               <a:srgbClr val="475569"/>
             </a:solidFill>
             <a:tailEnd type="triangle" w="sm" len="sm"/>
+          </a:ln>
+        </p:spPr>
+        <p:style>
+          <a:lnRef idx="2">
+            <a:schemeClr val="accent1"/>
+          </a:lnRef>
+          <a:fillRef idx="0">
+            <a:schemeClr val="accent1"/>
+          </a:fillRef>
+          <a:effectRef idx="1">
+            <a:schemeClr val="accent1"/>
+          </a:effectRef>
+          <a:fontRef idx="minor">
+            <a:schemeClr val="tx1"/>
+          </a:fontRef>
+        </p:style>
+      </p:cxnSp>
+      <p:cxnSp>
+        <p:nvCxnSpPr>
+          <p:cNvPr id="430" name="lineage:eBPF foundation-&gt;SOCK_OPS / SOCKMAP:across:before-label"/>
+          <p:cNvCxnSpPr/>
+          <p:nvPr/>
+        </p:nvCxnSpPr>
+        <p:spPr>
+          <a:xfrm>
+            <a:off x="5747007" y="3176968"/>
+            <a:ext cx="705849" cy="0"/>
+          </a:xfrm>
+          <a:prstGeom prst="line">
+            <a:avLst/>
+          </a:prstGeom>
+          <a:ln w="12700">
+            <a:solidFill>
+              <a:srgbClr val="475569"/>
+            </a:solidFill>
           </a:ln>
         </p:spPr>
         <p:style>
@@ -5666,8 +5806,8 @@
         </p:nvCxnSpPr>
         <p:spPr>
           <a:xfrm>
-            <a:off x="5747007" y="3176968"/>
-            <a:ext cx="1034526" cy="0"/>
+            <a:off x="6694664" y="3176968"/>
+            <a:ext cx="86868" cy="0"/>
           </a:xfrm>
           <a:prstGeom prst="line">
             <a:avLst/>
@@ -5767,14 +5907,49 @@
       </p:cxnSp>
       <p:cxnSp>
         <p:nvCxnSpPr>
+          <p:cNvPr id="431" name="lineage:TC BPF-&gt;TCX:across:before-label"/>
+          <p:cNvCxnSpPr/>
+          <p:nvPr/>
+        </p:nvCxnSpPr>
+        <p:spPr>
+          <a:xfrm>
+            <a:off x="6120096" y="2848927"/>
+            <a:ext cx="4568433" cy="0"/>
+          </a:xfrm>
+          <a:prstGeom prst="line">
+            <a:avLst/>
+          </a:prstGeom>
+          <a:ln w="12700">
+            <a:solidFill>
+              <a:srgbClr val="475569"/>
+            </a:solidFill>
+          </a:ln>
+        </p:spPr>
+        <p:style>
+          <a:lnRef idx="2">
+            <a:schemeClr val="accent1"/>
+          </a:lnRef>
+          <a:fillRef idx="0">
+            <a:schemeClr val="accent1"/>
+          </a:fillRef>
+          <a:effectRef idx="1">
+            <a:schemeClr val="accent1"/>
+          </a:effectRef>
+          <a:fontRef idx="minor">
+            <a:schemeClr val="tx1"/>
+          </a:fontRef>
+        </p:style>
+      </p:cxnSp>
+      <p:cxnSp>
+        <p:nvCxnSpPr>
           <p:cNvPr id="72" name="lineage:TC BPF-&gt;TCX:across"/>
           <p:cNvCxnSpPr/>
           <p:nvPr/>
         </p:nvCxnSpPr>
         <p:spPr>
           <a:xfrm>
-            <a:off x="6120096" y="2848927"/>
-            <a:ext cx="4897109" cy="0"/>
+            <a:off x="10930337" y="2848927"/>
+            <a:ext cx="86868" cy="0"/>
           </a:xfrm>
           <a:prstGeom prst="line">
             <a:avLst/>
@@ -5874,14 +6049,49 @@
       </p:cxnSp>
       <p:cxnSp>
         <p:nvCxnSpPr>
+          <p:cNvPr id="432" name="lineage:BPF struct_ops-&gt;BPF qdisc:across:before-label"/>
+          <p:cNvCxnSpPr/>
+          <p:nvPr/>
+        </p:nvCxnSpPr>
+        <p:spPr>
+          <a:xfrm>
+            <a:off x="9434168" y="3395662"/>
+            <a:ext cx="2459782" cy="0"/>
+          </a:xfrm>
+          <a:prstGeom prst="line">
+            <a:avLst/>
+          </a:prstGeom>
+          <a:ln w="12700">
+            <a:solidFill>
+              <a:srgbClr val="475569"/>
+            </a:solidFill>
+          </a:ln>
+        </p:spPr>
+        <p:style>
+          <a:lnRef idx="2">
+            <a:schemeClr val="accent1"/>
+          </a:lnRef>
+          <a:fillRef idx="0">
+            <a:schemeClr val="accent1"/>
+          </a:fillRef>
+          <a:effectRef idx="1">
+            <a:schemeClr val="accent1"/>
+          </a:effectRef>
+          <a:fontRef idx="minor">
+            <a:schemeClr val="tx1"/>
+          </a:fontRef>
+        </p:style>
+      </p:cxnSp>
+      <p:cxnSp>
+        <p:nvCxnSpPr>
           <p:cNvPr id="75" name="lineage:BPF struct_ops-&gt;BPF qdisc:across"/>
           <p:cNvCxnSpPr/>
           <p:nvPr/>
         </p:nvCxnSpPr>
         <p:spPr>
           <a:xfrm>
-            <a:off x="9434168" y="3395662"/>
-            <a:ext cx="2832908" cy="0"/>
+            <a:off x="12180208" y="3395662"/>
+            <a:ext cx="86868" cy="0"/>
           </a:xfrm>
           <a:prstGeom prst="line">
             <a:avLst/>
@@ -5891,6 +6101,41 @@
               <a:srgbClr val="475569"/>
             </a:solidFill>
             <a:tailEnd type="triangle" w="sm" len="sm"/>
+          </a:ln>
+        </p:spPr>
+        <p:style>
+          <a:lnRef idx="2">
+            <a:schemeClr val="accent1"/>
+          </a:lnRef>
+          <a:fillRef idx="0">
+            <a:schemeClr val="accent1"/>
+          </a:fillRef>
+          <a:effectRef idx="1">
+            <a:schemeClr val="accent1"/>
+          </a:effectRef>
+          <a:fontRef idx="minor">
+            <a:schemeClr val="tx1"/>
+          </a:fontRef>
+        </p:style>
+      </p:cxnSp>
+      <p:cxnSp>
+        <p:nvCxnSpPr>
+          <p:cNvPr id="433" name="lineage:page_pool-&gt;Device Memory TCP RX:across:before-label"/>
+          <p:cNvCxnSpPr/>
+          <p:nvPr/>
+        </p:nvCxnSpPr>
+        <p:spPr>
+          <a:xfrm>
+            <a:off x="8302069" y="3924490"/>
+            <a:ext cx="2733646" cy="0"/>
+          </a:xfrm>
+          <a:prstGeom prst="line">
+            <a:avLst/>
+          </a:prstGeom>
+          <a:ln w="12700">
+            <a:solidFill>
+              <a:srgbClr val="475569"/>
+            </a:solidFill>
           </a:ln>
         </p:spPr>
         <p:style>
@@ -5916,8 +6161,8 @@
         </p:nvCxnSpPr>
         <p:spPr>
           <a:xfrm>
-            <a:off x="8302070" y="3924490"/>
-            <a:ext cx="3062321" cy="0"/>
+            <a:off x="11277523" y="3924490"/>
+            <a:ext cx="86868" cy="0"/>
           </a:xfrm>
           <a:prstGeom prst="line">
             <a:avLst/>
@@ -5981,14 +6226,49 @@
       </p:cxnSp>
       <p:cxnSp>
         <p:nvCxnSpPr>
+          <p:cNvPr id="434" name="lineage:page_pool-&gt;io_uring ZCRX:across:before-label"/>
+          <p:cNvCxnSpPr/>
+          <p:nvPr/>
+        </p:nvCxnSpPr>
+        <p:spPr>
+          <a:xfrm>
+            <a:off x="8302069" y="4143183"/>
+            <a:ext cx="2941958" cy="0"/>
+          </a:xfrm>
+          <a:prstGeom prst="line">
+            <a:avLst/>
+          </a:prstGeom>
+          <a:ln w="12700">
+            <a:solidFill>
+              <a:srgbClr val="475569"/>
+            </a:solidFill>
+          </a:ln>
+        </p:spPr>
+        <p:style>
+          <a:lnRef idx="2">
+            <a:schemeClr val="accent1"/>
+          </a:lnRef>
+          <a:fillRef idx="0">
+            <a:schemeClr val="accent1"/>
+          </a:fillRef>
+          <a:effectRef idx="1">
+            <a:schemeClr val="accent1"/>
+          </a:effectRef>
+          <a:fontRef idx="minor">
+            <a:schemeClr val="tx1"/>
+          </a:fontRef>
+        </p:style>
+      </p:cxnSp>
+      <p:cxnSp>
+        <p:nvCxnSpPr>
           <p:cNvPr id="78" name="lineage:page_pool-&gt;io_uring ZCRX:across"/>
           <p:cNvCxnSpPr/>
           <p:nvPr/>
         </p:nvCxnSpPr>
         <p:spPr>
           <a:xfrm>
-            <a:off x="8302070" y="4143184"/>
-            <a:ext cx="3270633" cy="0"/>
+            <a:off x="11485835" y="4143184"/>
+            <a:ext cx="86868" cy="0"/>
           </a:xfrm>
           <a:prstGeom prst="line">
             <a:avLst/>
@@ -6124,14 +6404,49 @@
       </p:cxnSp>
       <p:cxnSp>
         <p:nvCxnSpPr>
+          <p:cNvPr id="435" name="lineage:AF_XDP-&gt;AF_XDP multi-buffer:across:before-label"/>
+          <p:cNvCxnSpPr/>
+          <p:nvPr/>
+        </p:nvCxnSpPr>
+        <p:spPr>
+          <a:xfrm>
+            <a:off x="8302069" y="4580572"/>
+            <a:ext cx="1925387" cy="0"/>
+          </a:xfrm>
+          <a:prstGeom prst="line">
+            <a:avLst/>
+          </a:prstGeom>
+          <a:ln w="12700">
+            <a:solidFill>
+              <a:srgbClr val="475569"/>
+            </a:solidFill>
+          </a:ln>
+        </p:spPr>
+        <p:style>
+          <a:lnRef idx="2">
+            <a:schemeClr val="accent1"/>
+          </a:lnRef>
+          <a:fillRef idx="0">
+            <a:schemeClr val="accent1"/>
+          </a:fillRef>
+          <a:effectRef idx="1">
+            <a:schemeClr val="accent1"/>
+          </a:effectRef>
+          <a:fontRef idx="minor">
+            <a:schemeClr val="tx1"/>
+          </a:fontRef>
+        </p:style>
+      </p:cxnSp>
+      <p:cxnSp>
+        <p:nvCxnSpPr>
           <p:cNvPr id="82" name="lineage:AF_XDP-&gt;AF_XDP multi-buffer:across"/>
           <p:cNvCxnSpPr/>
           <p:nvPr/>
         </p:nvCxnSpPr>
         <p:spPr>
           <a:xfrm>
-            <a:off x="8302070" y="4580572"/>
-            <a:ext cx="2298512" cy="0"/>
+            <a:off x="10513713" y="4580572"/>
+            <a:ext cx="86868" cy="0"/>
           </a:xfrm>
           <a:prstGeom prst="line">
             <a:avLst/>
@@ -6375,14 +6690,49 @@
       </p:cxnSp>
       <p:cxnSp>
         <p:nvCxnSpPr>
+          <p:cNvPr id="436" name="lineage:devlink-&gt;devlink health:across:before-label"/>
+          <p:cNvCxnSpPr/>
+          <p:nvPr/>
+        </p:nvCxnSpPr>
+        <p:spPr>
+          <a:xfrm>
+            <a:off x="6746029" y="6495097"/>
+            <a:ext cx="703937" cy="0"/>
+          </a:xfrm>
+          <a:prstGeom prst="line">
+            <a:avLst/>
+          </a:prstGeom>
+          <a:ln w="12700">
+            <a:solidFill>
+              <a:srgbClr val="475569"/>
+            </a:solidFill>
+          </a:ln>
+        </p:spPr>
+        <p:style>
+          <a:lnRef idx="2">
+            <a:schemeClr val="accent1"/>
+          </a:lnRef>
+          <a:fillRef idx="0">
+            <a:schemeClr val="accent1"/>
+          </a:fillRef>
+          <a:effectRef idx="1">
+            <a:schemeClr val="accent1"/>
+          </a:effectRef>
+          <a:fontRef idx="minor">
+            <a:schemeClr val="tx1"/>
+          </a:fontRef>
+        </p:style>
+      </p:cxnSp>
+      <p:cxnSp>
+        <p:nvCxnSpPr>
           <p:cNvPr id="89" name="lineage:devlink-&gt;devlink health:across"/>
           <p:cNvCxnSpPr/>
           <p:nvPr/>
         </p:nvCxnSpPr>
         <p:spPr>
           <a:xfrm>
-            <a:off x="6746029" y="6495097"/>
-            <a:ext cx="1077063" cy="0"/>
+            <a:off x="7736223" y="6495097"/>
+            <a:ext cx="86868" cy="0"/>
           </a:xfrm>
           <a:prstGeom prst="line">
             <a:avLst/>
@@ -6455,14 +6805,49 @@
       </p:sp>
       <p:cxnSp>
         <p:nvCxnSpPr>
+          <p:cNvPr id="437" name="lineage:XDP-&gt;XDP multi-buffer:across:before-label"/>
+          <p:cNvCxnSpPr/>
+          <p:nvPr/>
+        </p:nvCxnSpPr>
+        <p:spPr>
+          <a:xfrm>
+            <a:off x="7012181" y="4361878"/>
+            <a:ext cx="2520902" cy="0"/>
+          </a:xfrm>
+          <a:prstGeom prst="line">
+            <a:avLst/>
+          </a:prstGeom>
+          <a:ln w="12700">
+            <a:solidFill>
+              <a:srgbClr val="475569"/>
+            </a:solidFill>
+          </a:ln>
+        </p:spPr>
+        <p:style>
+          <a:lnRef idx="2">
+            <a:schemeClr val="accent1"/>
+          </a:lnRef>
+          <a:fillRef idx="0">
+            <a:schemeClr val="accent1"/>
+          </a:fillRef>
+          <a:effectRef idx="1">
+            <a:schemeClr val="accent1"/>
+          </a:effectRef>
+          <a:fontRef idx="minor">
+            <a:schemeClr val="tx1"/>
+          </a:fontRef>
+        </p:style>
+      </p:cxnSp>
+      <p:cxnSp>
+        <p:nvCxnSpPr>
           <p:cNvPr id="91" name="lineage:XDP-&gt;XDP multi-buffer:across"/>
           <p:cNvCxnSpPr/>
           <p:nvPr/>
         </p:nvCxnSpPr>
         <p:spPr>
           <a:xfrm>
-            <a:off x="7012181" y="4361878"/>
-            <a:ext cx="2894028" cy="0"/>
+            <a:off x="9819341" y="4361878"/>
+            <a:ext cx="86868" cy="0"/>
           </a:xfrm>
           <a:prstGeom prst="line">
             <a:avLst/>
@@ -6532,8 +6917,8 @@
         </p:nvCxnSpPr>
         <p:spPr>
           <a:xfrm>
-            <a:off x="7012181" y="4471225"/>
-            <a:ext cx="116538" cy="0"/>
+            <a:off x="7041851" y="4471225"/>
+            <a:ext cx="86867" cy="0"/>
           </a:xfrm>
           <a:prstGeom prst="line">
             <a:avLst/>
@@ -8332,8 +8717,8 @@
         </p:nvSpPr>
         <p:spPr>
           <a:xfrm>
-            <a:off x="384048" y="2514600"/>
-            <a:ext cx="1051560" cy="1225296"/>
+            <a:off x="384048" y="2557272"/>
+            <a:ext cx="1051560" cy="1130046"/>
           </a:xfrm>
           <a:prstGeom prst="rect">
             <a:avLst/>
@@ -16603,12 +16988,12 @@
           <a:p>
             <a:pPr algn="l"/>
             <a:r>
-              <a:rPr sz="650">
-                <a:solidFill>
-                  <a:srgbClr val="475569"/>
+              <a:rPr sz="800">
+                <a:solidFill>
+                  <a:srgbClr val="64748B"/>
                 </a:solidFill>
               </a:rPr>
-              <a:t>~X.Y  ○  approx. development start → ● first canonical release</a:t>
+              <a:t>approx. development start → first canonical release</a:t>
             </a:r>
           </a:p>
         </p:txBody>
@@ -16789,12 +17174,14 @@
             <a:avLst/>
           </a:prstGeom>
           <a:solidFill>
-            <a:srgbClr val="334155">
-              <a:alpha val="12000"/>
+            <a:srgbClr val="475569">
+              <a:alpha val="8000"/>
             </a:srgbClr>
           </a:solidFill>
-          <a:ln>
-            <a:noFill/>
+          <a:ln w="6350">
+            <a:solidFill>
+              <a:srgbClr val="CBD5E1"/>
+            </a:solidFill>
           </a:ln>
           <a:effectLst/>
         </p:spPr>
@@ -16872,7 +17259,7 @@
             <a:solidFill>
               <a:srgbClr val="94A3B8"/>
             </a:solidFill>
-            <a:prstDash val="sysDot"/>
+            <a:prstDash val="sysDash"/>
           </a:ln>
         </p:spPr>
         <p:style>
@@ -17147,7 +17534,7 @@
                   <a:srgbClr val="64748B"/>
                 </a:solidFill>
               </a:rPr>
-              <a:t>· ○ and dashed line: approximate start of visible development (RFC / patch series). Not audited.</a:t>
+              <a:t>· ○ and dashed line: approximate start of visible development (RFC / patch series), labelled ~X.Y = kernel version then in development. Not audited.</a:t>
             </a:r>
           </a:p>
         </p:txBody>
@@ -17205,17 +17592,59 @@
         </p:nvSpPr>
         <p:spPr>
           <a:xfrm>
-            <a:off x="3026664" y="1581721"/>
-            <a:ext cx="347472" cy="164592"/>
+            <a:off x="3266808" y="1595437"/>
+            <a:ext cx="338582" cy="137160"/>
           </a:xfrm>
           <a:prstGeom prst="rect">
             <a:avLst/>
           </a:prstGeom>
+          <a:solidFill>
+            <a:srgbClr val="EEF4FF"/>
+          </a:solidFill>
+        </p:spPr>
+        <p:txBody>
+          <a:bodyPr wrap="square" lIns="0" tIns="0" rIns="0" bIns="0" anchor="ctr">
+            <a:noAutofit/>
+          </a:bodyPr>
+          <a:lstStyle/>
+          <a:p>
+            <a:pPr algn="l">
+              <a:defRPr sz="530" i="1">
+                <a:solidFill>
+                  <a:srgbClr val="475569"/>
+                </a:solidFill>
+              </a:defRPr>
+            </a:pPr>
+            <a:r>
+              <a:rPr sz="700" i="1">
+                <a:solidFill>
+                  <a:srgbClr val="475569"/>
+                </a:solidFill>
+              </a:rPr>
+              <a:t>~2.6.39</a:t>
+            </a:r>
+          </a:p>
+        </p:txBody>
+      </p:sp>
+      <p:sp>
+        <p:nvSpPr>
+          <p:cNvPr id="367" name="row:TSQ:start-label"/>
+          <p:cNvSpPr txBox="1"/>
+          <p:nvPr/>
+        </p:nvSpPr>
+        <p:spPr>
+          <a:xfrm>
+            <a:off x="3451625" y="1704784"/>
+            <a:ext cx="205232" cy="137160"/>
+          </a:xfrm>
+          <a:prstGeom prst="rect">
+            <a:avLst/>
+          </a:prstGeom>
           <a:noFill/>
         </p:spPr>
         <p:txBody>
-          <a:bodyPr wrap="none" lIns="0" tIns="0" rIns="0" bIns="0" anchor="ctr">
-            <a:spAutoFit/>
+          <a:bodyPr wrap="square" lIns="0" tIns="0" rIns="0" bIns="0" anchor="ctr">
+            <a:noAutofit/>
           </a:bodyPr>
           <a:lstStyle/>
           <a:p>
@@ -17227,21 +17656,26 @@
               </a:defRPr>
             </a:pPr>
             <a:r>
-              <a:t>~pre-3.0</a:t>
-            </a:r>
-          </a:p>
-        </p:txBody>
-      </p:sp>
-      <p:sp>
-        <p:nvSpPr>
-          <p:cNvPr id="367" name="row:TSQ:start-label"/>
+              <a:rPr sz="700" i="1">
+                <a:solidFill>
+                  <a:srgbClr val="475569"/>
+                </a:solidFill>
+              </a:rPr>
+              <a:t>~3.2</a:t>
+            </a:r>
+          </a:p>
+        </p:txBody>
+      </p:sp>
+      <p:sp>
+        <p:nvSpPr>
+          <p:cNvPr id="368" name="row:SO_BUSY_POLL:start-label"/>
           <p:cNvSpPr txBox="1"/>
           <p:nvPr/>
         </p:nvSpPr>
         <p:spPr>
           <a:xfrm>
-            <a:off x="3272809" y="1691068"/>
-            <a:ext cx="347472" cy="164592"/>
+            <a:off x="4145996" y="1814131"/>
+            <a:ext cx="205232" cy="137160"/>
           </a:xfrm>
           <a:prstGeom prst="rect">
             <a:avLst/>
@@ -17249,8 +17683,8 @@
           <a:noFill/>
         </p:spPr>
         <p:txBody>
-          <a:bodyPr wrap="none" lIns="0" tIns="0" rIns="0" bIns="0" anchor="ctr">
-            <a:spAutoFit/>
+          <a:bodyPr wrap="square" lIns="0" tIns="0" rIns="0" bIns="0" anchor="ctr">
+            <a:noAutofit/>
           </a:bodyPr>
           <a:lstStyle/>
           <a:p>
@@ -17262,21 +17696,26 @@
               </a:defRPr>
             </a:pPr>
             <a:r>
-              <a:t>~3.1</a:t>
-            </a:r>
-          </a:p>
-        </p:txBody>
-      </p:sp>
-      <p:sp>
-        <p:nvSpPr>
-          <p:cNvPr id="368" name="row:SO_BUSY_POLL:start-label"/>
+              <a:rPr sz="700" i="1">
+                <a:solidFill>
+                  <a:srgbClr val="475569"/>
+                </a:solidFill>
+              </a:rPr>
+              <a:t>~3.8</a:t>
+            </a:r>
+          </a:p>
+        </p:txBody>
+      </p:sp>
+      <p:sp>
+        <p:nvSpPr>
+          <p:cNvPr id="369" name="row:sch_fq / TCP pacing:start-label"/>
           <p:cNvSpPr txBox="1"/>
           <p:nvPr/>
         </p:nvSpPr>
         <p:spPr>
           <a:xfrm>
-            <a:off x="3967181" y="1800415"/>
-            <a:ext cx="347472" cy="164592"/>
+            <a:off x="4007122" y="1923477"/>
+            <a:ext cx="205232" cy="137160"/>
           </a:xfrm>
           <a:prstGeom prst="rect">
             <a:avLst/>
@@ -17284,8 +17723,8 @@
           <a:noFill/>
         </p:spPr>
         <p:txBody>
-          <a:bodyPr wrap="none" lIns="0" tIns="0" rIns="0" bIns="0" anchor="ctr">
-            <a:spAutoFit/>
+          <a:bodyPr wrap="square" lIns="0" tIns="0" rIns="0" bIns="0" anchor="ctr">
+            <a:noAutofit/>
           </a:bodyPr>
           <a:lstStyle/>
           <a:p>
@@ -17297,6 +17736,11 @@
               </a:defRPr>
             </a:pPr>
             <a:r>
+              <a:rPr sz="700" i="1">
+                <a:solidFill>
+                  <a:srgbClr val="475569"/>
+                </a:solidFill>
+              </a:rPr>
               <a:t>~3.7</a:t>
             </a:r>
           </a:p>
@@ -17304,14 +17748,14 @@
       </p:sp>
       <p:sp>
         <p:nvSpPr>
-          <p:cNvPr id="369" name="row:sch_fq / TCP pacing:start-label"/>
+          <p:cNvPr id="370" name="row:SO_TXTIME / EDT / taprio:start-label"/>
           <p:cNvSpPr txBox="1"/>
           <p:nvPr/>
         </p:nvSpPr>
         <p:spPr>
           <a:xfrm>
-            <a:off x="3828307" y="1909762"/>
-            <a:ext cx="347472" cy="164592"/>
+            <a:off x="6921899" y="2032825"/>
+            <a:ext cx="249682" cy="137160"/>
           </a:xfrm>
           <a:prstGeom prst="rect">
             <a:avLst/>
@@ -17319,8 +17763,8 @@
           <a:noFill/>
         </p:spPr>
         <p:txBody>
-          <a:bodyPr wrap="none" lIns="0" tIns="0" rIns="0" bIns="0" anchor="ctr">
-            <a:spAutoFit/>
+          <a:bodyPr wrap="square" lIns="0" tIns="0" rIns="0" bIns="0" anchor="ctr">
+            <a:noAutofit/>
           </a:bodyPr>
           <a:lstStyle/>
           <a:p>
@@ -17332,21 +17776,26 @@
               </a:defRPr>
             </a:pPr>
             <a:r>
-              <a:t>~3.6</a:t>
-            </a:r>
-          </a:p>
-        </p:txBody>
-      </p:sp>
-      <p:sp>
-        <p:nvSpPr>
-          <p:cNvPr id="370" name="row:SO_TXTIME / EDT / taprio:start-label"/>
+              <a:rPr sz="700" i="1">
+                <a:solidFill>
+                  <a:srgbClr val="475569"/>
+                </a:solidFill>
+              </a:rPr>
+              <a:t>~4.11</a:t>
+            </a:r>
+          </a:p>
+        </p:txBody>
+      </p:sp>
+      <p:sp>
+        <p:nvSpPr>
+          <p:cNvPr id="371" name="row:BIG TCP:start-label"/>
           <p:cNvSpPr txBox="1"/>
           <p:nvPr/>
         </p:nvSpPr>
         <p:spPr>
           <a:xfrm>
-            <a:off x="6883546" y="2019109"/>
-            <a:ext cx="347472" cy="164592"/>
+            <a:off x="9795402" y="2142172"/>
+            <a:ext cx="249682" cy="137160"/>
           </a:xfrm>
           <a:prstGeom prst="rect">
             <a:avLst/>
@@ -17354,8 +17803,8 @@
           <a:noFill/>
         </p:spPr>
         <p:txBody>
-          <a:bodyPr wrap="none" lIns="0" tIns="0" rIns="0" bIns="0" anchor="ctr">
-            <a:spAutoFit/>
+          <a:bodyPr wrap="square" lIns="0" tIns="0" rIns="0" bIns="0" anchor="ctr">
+            <a:noAutofit/>
           </a:bodyPr>
           <a:lstStyle/>
           <a:p>
@@ -17367,21 +17816,26 @@
               </a:defRPr>
             </a:pPr>
             <a:r>
-              <a:t>~4.10</a:t>
-            </a:r>
-          </a:p>
-        </p:txBody>
-      </p:sp>
-      <p:sp>
-        <p:nvSpPr>
-          <p:cNvPr id="371" name="row:BIG TCP:start-label"/>
+              <a:rPr sz="700" i="1">
+                <a:solidFill>
+                  <a:srgbClr val="475569"/>
+                </a:solidFill>
+              </a:rPr>
+              <a:t>~5.12</a:t>
+            </a:r>
+          </a:p>
+        </p:txBody>
+      </p:sp>
+      <p:sp>
+        <p:nvSpPr>
+          <p:cNvPr id="372" name="row:cake_mq:start-label"/>
           <p:cNvSpPr txBox="1"/>
           <p:nvPr/>
         </p:nvSpPr>
         <p:spPr>
           <a:xfrm>
-            <a:off x="9661036" y="2128456"/>
-            <a:ext cx="347472" cy="164592"/>
+            <a:off x="12434017" y="2360866"/>
+            <a:ext cx="249682" cy="137160"/>
           </a:xfrm>
           <a:prstGeom prst="rect">
             <a:avLst/>
@@ -17389,8 +17843,8 @@
           <a:noFill/>
         </p:spPr>
         <p:txBody>
-          <a:bodyPr wrap="none" lIns="0" tIns="0" rIns="0" bIns="0" anchor="ctr">
-            <a:spAutoFit/>
+          <a:bodyPr wrap="square" lIns="0" tIns="0" rIns="0" bIns="0" anchor="ctr">
+            <a:noAutofit/>
           </a:bodyPr>
           <a:lstStyle/>
           <a:p>
@@ -17402,21 +17856,26 @@
               </a:defRPr>
             </a:pPr>
             <a:r>
-              <a:t>~5.12</a:t>
-            </a:r>
-          </a:p>
-        </p:txBody>
-      </p:sp>
-      <p:sp>
-        <p:nvSpPr>
-          <p:cNvPr id="372" name="row:cake_mq:start-label"/>
+              <a:rPr sz="700" i="1">
+                <a:solidFill>
+                  <a:srgbClr val="475569"/>
+                </a:solidFill>
+              </a:rPr>
+              <a:t>~6.13</a:t>
+            </a:r>
+          </a:p>
+        </p:txBody>
+      </p:sp>
+      <p:sp>
+        <p:nvSpPr>
+          <p:cNvPr id="373" name="row:eBPF foundation:start-label"/>
           <p:cNvSpPr txBox="1"/>
           <p:nvPr/>
         </p:nvSpPr>
         <p:spPr>
           <a:xfrm>
-            <a:off x="12299651" y="2347150"/>
-            <a:ext cx="347472" cy="164592"/>
+            <a:off x="4448733" y="2561652"/>
+            <a:ext cx="249682" cy="137160"/>
           </a:xfrm>
           <a:prstGeom prst="rect">
             <a:avLst/>
@@ -17424,8 +17883,8 @@
           <a:noFill/>
         </p:spPr>
         <p:txBody>
-          <a:bodyPr wrap="none" lIns="0" tIns="0" rIns="0" bIns="0" anchor="ctr">
-            <a:spAutoFit/>
+          <a:bodyPr wrap="square" lIns="0" tIns="0" rIns="0" bIns="0" anchor="ctr">
+            <a:noAutofit/>
           </a:bodyPr>
           <a:lstStyle/>
           <a:p>
@@ -17437,21 +17896,26 @@
               </a:defRPr>
             </a:pPr>
             <a:r>
-              <a:t>~6.13</a:t>
-            </a:r>
-          </a:p>
-        </p:txBody>
-      </p:sp>
-      <p:sp>
-        <p:nvSpPr>
-          <p:cNvPr id="373" name="row:eBPF foundation:start-label"/>
+              <a:rPr sz="700" i="1">
+                <a:solidFill>
+                  <a:srgbClr val="475569"/>
+                </a:solidFill>
+              </a:rPr>
+              <a:t>~3.10</a:t>
+            </a:r>
+          </a:p>
+        </p:txBody>
+      </p:sp>
+      <p:sp>
+        <p:nvSpPr>
+          <p:cNvPr id="374" name="row:TC BPF:start-label"/>
           <p:cNvSpPr txBox="1"/>
           <p:nvPr/>
         </p:nvSpPr>
         <p:spPr>
           <a:xfrm>
-            <a:off x="4314367" y="2547937"/>
-            <a:ext cx="347472" cy="164592"/>
+            <a:off x="5351418" y="2671000"/>
+            <a:ext cx="249682" cy="137160"/>
           </a:xfrm>
           <a:prstGeom prst="rect">
             <a:avLst/>
@@ -17459,8 +17923,8 @@
           <a:noFill/>
         </p:spPr>
         <p:txBody>
-          <a:bodyPr wrap="none" lIns="0" tIns="0" rIns="0" bIns="0" anchor="ctr">
-            <a:spAutoFit/>
+          <a:bodyPr wrap="square" lIns="0" tIns="0" rIns="0" bIns="0" anchor="ctr">
+            <a:noAutofit/>
           </a:bodyPr>
           <a:lstStyle/>
           <a:p>
@@ -17472,21 +17936,26 @@
               </a:defRPr>
             </a:pPr>
             <a:r>
-              <a:t>~3.10</a:t>
-            </a:r>
-          </a:p>
-        </p:txBody>
-      </p:sp>
-      <p:sp>
-        <p:nvSpPr>
-          <p:cNvPr id="374" name="row:TC BPF:start-label"/>
+              <a:rPr sz="700" i="1">
+                <a:solidFill>
+                  <a:srgbClr val="475569"/>
+                </a:solidFill>
+              </a:rPr>
+              <a:t>~3.18</a:t>
+            </a:r>
+          </a:p>
+        </p:txBody>
+      </p:sp>
+      <p:sp>
+        <p:nvSpPr>
+          <p:cNvPr id="375" name="row:TCX:start-label"/>
           <p:cNvSpPr txBox="1"/>
           <p:nvPr/>
         </p:nvSpPr>
         <p:spPr>
           <a:xfrm>
-            <a:off x="5217052" y="2657284"/>
-            <a:ext cx="347472" cy="164592"/>
+            <a:off x="10715961" y="2780347"/>
+            <a:ext cx="205232" cy="137160"/>
           </a:xfrm>
           <a:prstGeom prst="rect">
             <a:avLst/>
@@ -17494,8 +17963,8 @@
           <a:noFill/>
         </p:spPr>
         <p:txBody>
-          <a:bodyPr wrap="none" lIns="0" tIns="0" rIns="0" bIns="0" anchor="ctr">
-            <a:spAutoFit/>
+          <a:bodyPr wrap="square" lIns="0" tIns="0" rIns="0" bIns="0" anchor="ctr">
+            <a:noAutofit/>
           </a:bodyPr>
           <a:lstStyle/>
           <a:p>
@@ -17507,21 +17976,26 @@
               </a:defRPr>
             </a:pPr>
             <a:r>
-              <a:t>~3.17</a:t>
-            </a:r>
-          </a:p>
-        </p:txBody>
-      </p:sp>
-      <p:sp>
-        <p:nvSpPr>
-          <p:cNvPr id="375" name="row:TCX:start-label"/>
+              <a:rPr sz="700" i="1">
+                <a:solidFill>
+                  <a:srgbClr val="475569"/>
+                </a:solidFill>
+              </a:rPr>
+              <a:t>~6.0</a:t>
+            </a:r>
+          </a:p>
+        </p:txBody>
+      </p:sp>
+      <p:sp>
+        <p:nvSpPr>
+          <p:cNvPr id="376" name="row:netkit:start-label"/>
           <p:cNvSpPr txBox="1"/>
           <p:nvPr/>
         </p:nvSpPr>
         <p:spPr>
           <a:xfrm>
-            <a:off x="10633157" y="2766631"/>
-            <a:ext cx="347472" cy="164592"/>
+            <a:off x="10950848" y="2889694"/>
+            <a:ext cx="205232" cy="137160"/>
           </a:xfrm>
           <a:prstGeom prst="rect">
             <a:avLst/>
@@ -17529,8 +18003,8 @@
           <a:noFill/>
         </p:spPr>
         <p:txBody>
-          <a:bodyPr wrap="none" lIns="0" tIns="0" rIns="0" bIns="0" anchor="ctr">
-            <a:spAutoFit/>
+          <a:bodyPr wrap="square" lIns="0" tIns="0" rIns="0" bIns="0" anchor="ctr">
+            <a:noAutofit/>
           </a:bodyPr>
           <a:lstStyle/>
           <a:p>
@@ -17542,21 +18016,26 @@
               </a:defRPr>
             </a:pPr>
             <a:r>
-              <a:t>~6.0</a:t>
-            </a:r>
-          </a:p>
-        </p:txBody>
-      </p:sp>
-      <p:sp>
-        <p:nvSpPr>
-          <p:cNvPr id="376" name="row:netkit:start-label"/>
+              <a:rPr sz="700" i="1">
+                <a:solidFill>
+                  <a:srgbClr val="475569"/>
+                </a:solidFill>
+              </a:rPr>
+              <a:t>~6.1</a:t>
+            </a:r>
+          </a:p>
+        </p:txBody>
+      </p:sp>
+      <p:sp>
+        <p:nvSpPr>
+          <p:cNvPr id="377" name="row:cgroup / LWT BPF:start-label"/>
           <p:cNvSpPr txBox="1"/>
           <p:nvPr/>
         </p:nvSpPr>
         <p:spPr>
           <a:xfrm>
-            <a:off x="10772032" y="2875978"/>
-            <a:ext cx="347472" cy="164592"/>
+            <a:off x="6133102" y="2999041"/>
+            <a:ext cx="205232" cy="137160"/>
           </a:xfrm>
           <a:prstGeom prst="rect">
             <a:avLst/>
@@ -17564,8 +18043,8 @@
           <a:noFill/>
         </p:spPr>
         <p:txBody>
-          <a:bodyPr wrap="none" lIns="0" tIns="0" rIns="0" bIns="0" anchor="ctr">
-            <a:spAutoFit/>
+          <a:bodyPr wrap="square" lIns="0" tIns="0" rIns="0" bIns="0" anchor="ctr">
+            <a:noAutofit/>
           </a:bodyPr>
           <a:lstStyle/>
           <a:p>
@@ -17577,21 +18056,26 @@
               </a:defRPr>
             </a:pPr>
             <a:r>
-              <a:t>~6.1</a:t>
-            </a:r>
-          </a:p>
-        </p:txBody>
-      </p:sp>
-      <p:sp>
-        <p:nvSpPr>
-          <p:cNvPr id="377" name="row:cgroup / LWT BPF:start-label"/>
+              <a:rPr sz="700" i="1">
+                <a:solidFill>
+                  <a:srgbClr val="475569"/>
+                </a:solidFill>
+              </a:rPr>
+              <a:t>~4.4</a:t>
+            </a:r>
+          </a:p>
+        </p:txBody>
+      </p:sp>
+      <p:sp>
+        <p:nvSpPr>
+          <p:cNvPr id="378" name="row:SOCK_OPS / SOCKMAP:start-label"/>
           <p:cNvSpPr txBox="1"/>
           <p:nvPr/>
         </p:nvSpPr>
         <p:spPr>
           <a:xfrm>
-            <a:off x="6050299" y="2985325"/>
-            <a:ext cx="347472" cy="164592"/>
+            <a:off x="6480289" y="3108388"/>
+            <a:ext cx="205232" cy="137160"/>
           </a:xfrm>
           <a:prstGeom prst="rect">
             <a:avLst/>
@@ -17599,8 +18083,8 @@
           <a:noFill/>
         </p:spPr>
         <p:txBody>
-          <a:bodyPr wrap="none" lIns="0" tIns="0" rIns="0" bIns="0" anchor="ctr">
-            <a:spAutoFit/>
+          <a:bodyPr wrap="square" lIns="0" tIns="0" rIns="0" bIns="0" anchor="ctr">
+            <a:noAutofit/>
           </a:bodyPr>
           <a:lstStyle/>
           <a:p>
@@ -17612,21 +18096,26 @@
               </a:defRPr>
             </a:pPr>
             <a:r>
-              <a:t>~4.4</a:t>
-            </a:r>
-          </a:p>
-        </p:txBody>
-      </p:sp>
-      <p:sp>
-        <p:nvSpPr>
-          <p:cNvPr id="378" name="row:SOCK_OPS / SOCKMAP:start-label"/>
+              <a:rPr sz="700" i="1">
+                <a:solidFill>
+                  <a:srgbClr val="475569"/>
+                </a:solidFill>
+              </a:rPr>
+              <a:t>~4.7</a:t>
+            </a:r>
+          </a:p>
+        </p:txBody>
+      </p:sp>
+      <p:sp>
+        <p:nvSpPr>
+          <p:cNvPr id="379" name="row:BPF struct_ops:start-label"/>
           <p:cNvSpPr txBox="1"/>
           <p:nvPr/>
         </p:nvSpPr>
         <p:spPr>
           <a:xfrm>
-            <a:off x="6397485" y="3094672"/>
-            <a:ext cx="347472" cy="164592"/>
+            <a:off x="8128908" y="3217735"/>
+            <a:ext cx="249682" cy="137160"/>
           </a:xfrm>
           <a:prstGeom prst="rect">
             <a:avLst/>
@@ -17634,8 +18123,8 @@
           <a:noFill/>
         </p:spPr>
         <p:txBody>
-          <a:bodyPr wrap="none" lIns="0" tIns="0" rIns="0" bIns="0" anchor="ctr">
-            <a:spAutoFit/>
+          <a:bodyPr wrap="square" lIns="0" tIns="0" rIns="0" bIns="0" anchor="ctr">
+            <a:noAutofit/>
           </a:bodyPr>
           <a:lstStyle/>
           <a:p>
@@ -17647,21 +18136,26 @@
               </a:defRPr>
             </a:pPr>
             <a:r>
-              <a:t>~4.7</a:t>
-            </a:r>
-          </a:p>
-        </p:txBody>
-      </p:sp>
-      <p:sp>
-        <p:nvSpPr>
-          <p:cNvPr id="379" name="row:BPF struct_ops:start-label"/>
+              <a:rPr sz="700" i="1">
+                <a:solidFill>
+                  <a:srgbClr val="475569"/>
+                </a:solidFill>
+              </a:rPr>
+              <a:t>~4.19</a:t>
+            </a:r>
+          </a:p>
+        </p:txBody>
+      </p:sp>
+      <p:sp>
+        <p:nvSpPr>
+          <p:cNvPr id="380" name="row:BPF qdisc:start-label"/>
           <p:cNvSpPr txBox="1"/>
           <p:nvPr/>
         </p:nvSpPr>
         <p:spPr>
           <a:xfrm>
-            <a:off x="7994542" y="3204019"/>
-            <a:ext cx="347472" cy="164592"/>
+            <a:off x="11921382" y="3327082"/>
+            <a:ext cx="249682" cy="137160"/>
           </a:xfrm>
           <a:prstGeom prst="rect">
             <a:avLst/>
@@ -17669,8 +18163,8 @@
           <a:noFill/>
         </p:spPr>
         <p:txBody>
-          <a:bodyPr wrap="none" lIns="0" tIns="0" rIns="0" bIns="0" anchor="ctr">
-            <a:spAutoFit/>
+          <a:bodyPr wrap="square" lIns="0" tIns="0" rIns="0" bIns="0" anchor="ctr">
+            <a:noAutofit/>
           </a:bodyPr>
           <a:lstStyle/>
           <a:p>
@@ -17682,21 +18176,26 @@
               </a:defRPr>
             </a:pPr>
             <a:r>
-              <a:t>~4.19</a:t>
-            </a:r>
-          </a:p>
-        </p:txBody>
-      </p:sp>
-      <p:sp>
-        <p:nvSpPr>
-          <p:cNvPr id="380" name="row:BPF qdisc:start-label"/>
+              <a:rPr sz="700" i="1">
+                <a:solidFill>
+                  <a:srgbClr val="475569"/>
+                </a:solidFill>
+              </a:rPr>
+              <a:t>~6.10</a:t>
+            </a:r>
+          </a:p>
+        </p:txBody>
+      </p:sp>
+      <p:sp>
+        <p:nvSpPr>
+          <p:cNvPr id="381" name="row:SK_LOOKUP:start-label"/>
           <p:cNvSpPr txBox="1"/>
           <p:nvPr/>
         </p:nvSpPr>
         <p:spPr>
           <a:xfrm>
-            <a:off x="11883028" y="3313366"/>
-            <a:ext cx="347472" cy="164592"/>
+            <a:off x="8659418" y="3436429"/>
+            <a:ext cx="205232" cy="137160"/>
           </a:xfrm>
           <a:prstGeom prst="rect">
             <a:avLst/>
@@ -17704,8 +18203,8 @@
           <a:noFill/>
         </p:spPr>
         <p:txBody>
-          <a:bodyPr wrap="none" lIns="0" tIns="0" rIns="0" bIns="0" anchor="ctr">
-            <a:spAutoFit/>
+          <a:bodyPr wrap="square" lIns="0" tIns="0" rIns="0" bIns="0" anchor="ctr">
+            <a:noAutofit/>
           </a:bodyPr>
           <a:lstStyle/>
           <a:p>
@@ -17717,21 +18216,26 @@
               </a:defRPr>
             </a:pPr>
             <a:r>
-              <a:t>~6.10</a:t>
-            </a:r>
-          </a:p>
-        </p:txBody>
-      </p:sp>
-      <p:sp>
-        <p:nvSpPr>
-          <p:cNvPr id="381" name="row:SK_LOOKUP:start-label"/>
+              <a:rPr sz="700" i="1">
+                <a:solidFill>
+                  <a:srgbClr val="475569"/>
+                </a:solidFill>
+              </a:rPr>
+              <a:t>~5.2</a:t>
+            </a:r>
+          </a:p>
+        </p:txBody>
+      </p:sp>
+      <p:sp>
+        <p:nvSpPr>
+          <p:cNvPr id="382" name="row:XDP:start-label"/>
           <p:cNvSpPr txBox="1"/>
           <p:nvPr/>
         </p:nvSpPr>
         <p:spPr>
           <a:xfrm>
-            <a:off x="8480602" y="3422713"/>
-            <a:ext cx="347472" cy="164592"/>
+            <a:off x="6216427" y="3545775"/>
+            <a:ext cx="205232" cy="137160"/>
           </a:xfrm>
           <a:prstGeom prst="rect">
             <a:avLst/>
@@ -17739,8 +18243,8 @@
           <a:noFill/>
         </p:spPr>
         <p:txBody>
-          <a:bodyPr wrap="none" lIns="0" tIns="0" rIns="0" bIns="0" anchor="ctr">
-            <a:spAutoFit/>
+          <a:bodyPr wrap="square" lIns="0" tIns="0" rIns="0" bIns="0" anchor="ctr">
+            <a:noAutofit/>
           </a:bodyPr>
           <a:lstStyle/>
           <a:p>
@@ -17752,21 +18256,26 @@
               </a:defRPr>
             </a:pPr>
             <a:r>
-              <a:t>~5.2</a:t>
-            </a:r>
-          </a:p>
-        </p:txBody>
-      </p:sp>
-      <p:sp>
-        <p:nvSpPr>
-          <p:cNvPr id="382" name="row:XDP:start-label"/>
+              <a:rPr sz="700" i="1">
+                <a:solidFill>
+                  <a:srgbClr val="475569"/>
+                </a:solidFill>
+              </a:rPr>
+              <a:t>~4.5</a:t>
+            </a:r>
+          </a:p>
+        </p:txBody>
+      </p:sp>
+      <p:sp>
+        <p:nvSpPr>
+          <p:cNvPr id="383" name="row:page_pool:start-label"/>
           <p:cNvSpPr txBox="1"/>
           <p:nvPr/>
         </p:nvSpPr>
         <p:spPr>
           <a:xfrm>
-            <a:off x="6133623" y="3532060"/>
-            <a:ext cx="347472" cy="164592"/>
+            <a:off x="6367988" y="3746563"/>
+            <a:ext cx="205232" cy="137160"/>
           </a:xfrm>
           <a:prstGeom prst="rect">
             <a:avLst/>
@@ -17774,8 +18283,8 @@
           <a:noFill/>
         </p:spPr>
         <p:txBody>
-          <a:bodyPr wrap="none" lIns="0" tIns="0" rIns="0" bIns="0" anchor="ctr">
-            <a:spAutoFit/>
+          <a:bodyPr wrap="square" lIns="0" tIns="0" rIns="0" bIns="0" anchor="ctr">
+            <a:noAutofit/>
           </a:bodyPr>
           <a:lstStyle/>
           <a:p>
@@ -17787,21 +18296,26 @@
               </a:defRPr>
             </a:pPr>
             <a:r>
-              <a:t>~4.4</a:t>
-            </a:r>
-          </a:p>
-        </p:txBody>
-      </p:sp>
-      <p:sp>
-        <p:nvSpPr>
-          <p:cNvPr id="383" name="row:page_pool:start-label"/>
+              <a:rPr sz="700" i="1">
+                <a:solidFill>
+                  <a:srgbClr val="475569"/>
+                </a:solidFill>
+              </a:rPr>
+              <a:t>~4.5</a:t>
+            </a:r>
+          </a:p>
+        </p:txBody>
+      </p:sp>
+      <p:sp>
+        <p:nvSpPr>
+          <p:cNvPr id="384" name="row:Device Memory TCP RX:start-label"/>
           <p:cNvSpPr txBox="1"/>
           <p:nvPr/>
         </p:nvSpPr>
         <p:spPr>
           <a:xfrm>
-            <a:off x="6189173" y="3732847"/>
-            <a:ext cx="347472" cy="164592"/>
+            <a:off x="11063147" y="3855910"/>
+            <a:ext cx="205232" cy="137160"/>
           </a:xfrm>
           <a:prstGeom prst="rect">
             <a:avLst/>
@@ -17809,8 +18323,8 @@
           <a:noFill/>
         </p:spPr>
         <p:txBody>
-          <a:bodyPr wrap="none" lIns="0" tIns="0" rIns="0" bIns="0" anchor="ctr">
-            <a:spAutoFit/>
+          <a:bodyPr wrap="square" lIns="0" tIns="0" rIns="0" bIns="0" anchor="ctr">
+            <a:noAutofit/>
           </a:bodyPr>
           <a:lstStyle/>
           <a:p>
@@ -17822,21 +18336,26 @@
               </a:defRPr>
             </a:pPr>
             <a:r>
-              <a:t>~4.5</a:t>
-            </a:r>
-          </a:p>
-        </p:txBody>
-      </p:sp>
-      <p:sp>
-        <p:nvSpPr>
-          <p:cNvPr id="384" name="row:Device Memory TCP RX:start-label"/>
+              <a:rPr sz="700" i="1">
+                <a:solidFill>
+                  <a:srgbClr val="475569"/>
+                </a:solidFill>
+              </a:rPr>
+              <a:t>~6.2</a:t>
+            </a:r>
+          </a:p>
+        </p:txBody>
+      </p:sp>
+      <p:sp>
+        <p:nvSpPr>
+          <p:cNvPr id="385" name="row:Device Memory TCP TX:start-label"/>
           <p:cNvSpPr txBox="1"/>
           <p:nvPr/>
         </p:nvSpPr>
         <p:spPr>
           <a:xfrm>
-            <a:off x="10980343" y="3842194"/>
-            <a:ext cx="347472" cy="164592"/>
+            <a:off x="11784095" y="3965257"/>
+            <a:ext cx="205232" cy="137160"/>
           </a:xfrm>
           <a:prstGeom prst="rect">
             <a:avLst/>
@@ -17844,8 +18363,8 @@
           <a:noFill/>
         </p:spPr>
         <p:txBody>
-          <a:bodyPr wrap="none" lIns="0" tIns="0" rIns="0" bIns="0" anchor="ctr">
-            <a:spAutoFit/>
+          <a:bodyPr wrap="square" lIns="0" tIns="0" rIns="0" bIns="0" anchor="ctr">
+            <a:noAutofit/>
           </a:bodyPr>
           <a:lstStyle/>
           <a:p>
@@ -17857,21 +18376,26 @@
               </a:defRPr>
             </a:pPr>
             <a:r>
-              <a:t>~6.2</a:t>
-            </a:r>
-          </a:p>
-        </p:txBody>
-      </p:sp>
-      <p:sp>
-        <p:nvSpPr>
-          <p:cNvPr id="385" name="row:Device Memory TCP TX:start-label"/>
+              <a:rPr sz="700" i="1">
+                <a:solidFill>
+                  <a:srgbClr val="475569"/>
+                </a:solidFill>
+              </a:rPr>
+              <a:t>~6.7</a:t>
+            </a:r>
+          </a:p>
+        </p:txBody>
+      </p:sp>
+      <p:sp>
+        <p:nvSpPr>
+          <p:cNvPr id="386" name="row:io_uring ZCRX:start-label"/>
           <p:cNvSpPr txBox="1"/>
           <p:nvPr/>
         </p:nvSpPr>
         <p:spPr>
           <a:xfrm>
-            <a:off x="11605279" y="3951541"/>
-            <a:ext cx="347472" cy="164592"/>
+            <a:off x="11271459" y="4074603"/>
+            <a:ext cx="205232" cy="137160"/>
           </a:xfrm>
           <a:prstGeom prst="rect">
             <a:avLst/>
@@ -17879,8 +18403,8 @@
           <a:noFill/>
         </p:spPr>
         <p:txBody>
-          <a:bodyPr wrap="none" lIns="0" tIns="0" rIns="0" bIns="0" anchor="ctr">
-            <a:spAutoFit/>
+          <a:bodyPr wrap="square" lIns="0" tIns="0" rIns="0" bIns="0" anchor="ctr">
+            <a:noAutofit/>
           </a:bodyPr>
           <a:lstStyle/>
           <a:p>
@@ -17892,21 +18416,26 @@
               </a:defRPr>
             </a:pPr>
             <a:r>
-              <a:t>~6.8</a:t>
-            </a:r>
-          </a:p>
-        </p:txBody>
-      </p:sp>
-      <p:sp>
-        <p:nvSpPr>
-          <p:cNvPr id="386" name="row:io_uring ZCRX:start-label"/>
+              <a:rPr sz="700" i="1">
+                <a:solidFill>
+                  <a:srgbClr val="475569"/>
+                </a:solidFill>
+              </a:rPr>
+              <a:t>~6.4</a:t>
+            </a:r>
+          </a:p>
+        </p:txBody>
+      </p:sp>
+      <p:sp>
+        <p:nvSpPr>
+          <p:cNvPr id="387" name="row:large RX buffers (mem. providers):start-label"/>
           <p:cNvSpPr txBox="1"/>
           <p:nvPr/>
         </p:nvSpPr>
         <p:spPr>
           <a:xfrm>
-            <a:off x="11188655" y="4060888"/>
-            <a:ext cx="347472" cy="164592"/>
+            <a:off x="12434017" y="4183951"/>
+            <a:ext cx="249682" cy="137160"/>
           </a:xfrm>
           <a:prstGeom prst="rect">
             <a:avLst/>
@@ -17914,8 +18443,8 @@
           <a:noFill/>
         </p:spPr>
         <p:txBody>
-          <a:bodyPr wrap="none" lIns="0" tIns="0" rIns="0" bIns="0" anchor="ctr">
-            <a:spAutoFit/>
+          <a:bodyPr wrap="square" lIns="0" tIns="0" rIns="0" bIns="0" anchor="ctr">
+            <a:noAutofit/>
           </a:bodyPr>
           <a:lstStyle/>
           <a:p>
@@ -17927,21 +18456,26 @@
               </a:defRPr>
             </a:pPr>
             <a:r>
-              <a:t>~6.4</a:t>
-            </a:r>
-          </a:p>
-        </p:txBody>
-      </p:sp>
-      <p:sp>
-        <p:nvSpPr>
-          <p:cNvPr id="387" name="row:large RX buffers (mem. providers):start-label"/>
+              <a:rPr sz="700" i="1">
+                <a:solidFill>
+                  <a:srgbClr val="475569"/>
+                </a:solidFill>
+              </a:rPr>
+              <a:t>~6.13</a:t>
+            </a:r>
+          </a:p>
+        </p:txBody>
+      </p:sp>
+      <p:sp>
+        <p:nvSpPr>
+          <p:cNvPr id="388" name="row:XDP multi-buffer:start-label"/>
           <p:cNvSpPr txBox="1"/>
           <p:nvPr/>
         </p:nvSpPr>
         <p:spPr>
           <a:xfrm>
-            <a:off x="12299651" y="4170235"/>
-            <a:ext cx="347472" cy="164592"/>
+            <a:off x="9560515" y="4293298"/>
+            <a:ext cx="249682" cy="137160"/>
           </a:xfrm>
           <a:prstGeom prst="rect">
             <a:avLst/>
@@ -17949,8 +18483,8 @@
           <a:noFill/>
         </p:spPr>
         <p:txBody>
-          <a:bodyPr wrap="none" lIns="0" tIns="0" rIns="0" bIns="0" anchor="ctr">
-            <a:spAutoFit/>
+          <a:bodyPr wrap="square" lIns="0" tIns="0" rIns="0" bIns="0" anchor="ctr">
+            <a:noAutofit/>
           </a:bodyPr>
           <a:lstStyle/>
           <a:p>
@@ -17962,21 +18496,26 @@
               </a:defRPr>
             </a:pPr>
             <a:r>
-              <a:t>~6.13</a:t>
-            </a:r>
-          </a:p>
-        </p:txBody>
-      </p:sp>
-      <p:sp>
-        <p:nvSpPr>
-          <p:cNvPr id="388" name="row:XDP multi-buffer:start-label"/>
+              <a:rPr sz="700" i="1">
+                <a:solidFill>
+                  <a:srgbClr val="475569"/>
+                </a:solidFill>
+              </a:rPr>
+              <a:t>~5.11</a:t>
+            </a:r>
+          </a:p>
+        </p:txBody>
+      </p:sp>
+      <p:sp>
+        <p:nvSpPr>
+          <p:cNvPr id="389" name="row:AF_XDP:start-label"/>
           <p:cNvSpPr txBox="1"/>
           <p:nvPr/>
         </p:nvSpPr>
         <p:spPr>
           <a:xfrm>
-            <a:off x="9522161" y="4279582"/>
-            <a:ext cx="347472" cy="164592"/>
+            <a:off x="6783025" y="4402645"/>
+            <a:ext cx="249682" cy="137160"/>
           </a:xfrm>
           <a:prstGeom prst="rect">
             <a:avLst/>
@@ -17984,8 +18523,8 @@
           <a:noFill/>
         </p:spPr>
         <p:txBody>
-          <a:bodyPr wrap="none" lIns="0" tIns="0" rIns="0" bIns="0" anchor="ctr">
-            <a:spAutoFit/>
+          <a:bodyPr wrap="square" lIns="0" tIns="0" rIns="0" bIns="0" anchor="ctr">
+            <a:noAutofit/>
           </a:bodyPr>
           <a:lstStyle/>
           <a:p>
@@ -17997,21 +18536,26 @@
               </a:defRPr>
             </a:pPr>
             <a:r>
-              <a:t>~5.11</a:t>
-            </a:r>
-          </a:p>
-        </p:txBody>
-      </p:sp>
-      <p:sp>
-        <p:nvSpPr>
-          <p:cNvPr id="389" name="row:AF_XDP:start-label"/>
+              <a:rPr sz="700" i="1">
+                <a:solidFill>
+                  <a:srgbClr val="475569"/>
+                </a:solidFill>
+              </a:rPr>
+              <a:t>~4.10</a:t>
+            </a:r>
+          </a:p>
+        </p:txBody>
+      </p:sp>
+      <p:sp>
+        <p:nvSpPr>
+          <p:cNvPr id="390" name="row:AF_XDP multi-buffer:start-label"/>
           <p:cNvSpPr txBox="1"/>
           <p:nvPr/>
         </p:nvSpPr>
         <p:spPr>
           <a:xfrm>
-            <a:off x="6744671" y="4388929"/>
-            <a:ext cx="347472" cy="164592"/>
+            <a:off x="10254888" y="4511992"/>
+            <a:ext cx="249682" cy="137160"/>
           </a:xfrm>
           <a:prstGeom prst="rect">
             <a:avLst/>
@@ -18019,8 +18563,8 @@
           <a:noFill/>
         </p:spPr>
         <p:txBody>
-          <a:bodyPr wrap="none" lIns="0" tIns="0" rIns="0" bIns="0" anchor="ctr">
-            <a:spAutoFit/>
+          <a:bodyPr wrap="square" lIns="0" tIns="0" rIns="0" bIns="0" anchor="ctr">
+            <a:noAutofit/>
           </a:bodyPr>
           <a:lstStyle/>
           <a:p>
@@ -18032,21 +18576,26 @@
               </a:defRPr>
             </a:pPr>
             <a:r>
-              <a:t>~4.9</a:t>
-            </a:r>
-          </a:p>
-        </p:txBody>
-      </p:sp>
-      <p:sp>
-        <p:nvSpPr>
-          <p:cNvPr id="390" name="row:AF_XDP multi-buffer:start-label"/>
+              <a:rPr sz="700" i="1">
+                <a:solidFill>
+                  <a:srgbClr val="475569"/>
+                </a:solidFill>
+              </a:rPr>
+              <a:t>~5.16</a:t>
+            </a:r>
+          </a:p>
+        </p:txBody>
+      </p:sp>
+      <p:sp>
+        <p:nvSpPr>
+          <p:cNvPr id="391" name="row:RX HW queue leasing:start-label"/>
           <p:cNvSpPr txBox="1"/>
           <p:nvPr/>
         </p:nvSpPr>
         <p:spPr>
           <a:xfrm>
-            <a:off x="10216534" y="4498276"/>
-            <a:ext cx="347472" cy="164592"/>
+            <a:off x="12086831" y="4621339"/>
+            <a:ext cx="249682" cy="137160"/>
           </a:xfrm>
           <a:prstGeom prst="rect">
             <a:avLst/>
@@ -18054,8 +18603,8 @@
           <a:noFill/>
         </p:spPr>
         <p:txBody>
-          <a:bodyPr wrap="none" lIns="0" tIns="0" rIns="0" bIns="0" anchor="ctr">
-            <a:spAutoFit/>
+          <a:bodyPr wrap="square" lIns="0" tIns="0" rIns="0" bIns="0" anchor="ctr">
+            <a:noAutofit/>
           </a:bodyPr>
           <a:lstStyle/>
           <a:p>
@@ -18067,21 +18616,26 @@
               </a:defRPr>
             </a:pPr>
             <a:r>
-              <a:t>~5.16</a:t>
-            </a:r>
-          </a:p>
-        </p:txBody>
-      </p:sp>
-      <p:sp>
-        <p:nvSpPr>
-          <p:cNvPr id="391" name="row:RX HW queue leasing:start-label"/>
+              <a:rPr sz="700" i="1">
+                <a:solidFill>
+                  <a:srgbClr val="475569"/>
+                </a:solidFill>
+              </a:rPr>
+              <a:t>~6.10</a:t>
+            </a:r>
+          </a:p>
+        </p:txBody>
+      </p:sp>
+      <p:sp>
+        <p:nvSpPr>
+          <p:cNvPr id="392" name="row:nexthop objects:start-label"/>
           <p:cNvSpPr txBox="1"/>
           <p:nvPr/>
         </p:nvSpPr>
         <p:spPr>
           <a:xfrm>
-            <a:off x="11952465" y="4607623"/>
-            <a:ext cx="347472" cy="164592"/>
+            <a:off x="7573410" y="4931473"/>
+            <a:ext cx="249682" cy="137160"/>
           </a:xfrm>
           <a:prstGeom prst="rect">
             <a:avLst/>
@@ -18089,8 +18643,8 @@
           <a:noFill/>
         </p:spPr>
         <p:txBody>
-          <a:bodyPr wrap="none" lIns="0" tIns="0" rIns="0" bIns="0" anchor="ctr">
-            <a:spAutoFit/>
+          <a:bodyPr wrap="square" lIns="0" tIns="0" rIns="0" bIns="0" anchor="ctr">
+            <a:noAutofit/>
           </a:bodyPr>
           <a:lstStyle/>
           <a:p>
@@ -18102,21 +18656,26 @@
               </a:defRPr>
             </a:pPr>
             <a:r>
-              <a:t>~6.11</a:t>
-            </a:r>
-          </a:p>
-        </p:txBody>
-      </p:sp>
-      <p:sp>
-        <p:nvSpPr>
-          <p:cNvPr id="392" name="row:nexthop objects:start-label"/>
+              <a:rPr sz="700" i="1">
+                <a:solidFill>
+                  <a:srgbClr val="475569"/>
+                </a:solidFill>
+              </a:rPr>
+              <a:t>~4.15</a:t>
+            </a:r>
+          </a:p>
+        </p:txBody>
+      </p:sp>
+      <p:sp>
+        <p:nvSpPr>
+          <p:cNvPr id="393" name="row:per-netns RTNL:start-label"/>
           <p:cNvSpPr txBox="1"/>
           <p:nvPr/>
         </p:nvSpPr>
         <p:spPr>
           <a:xfrm>
-            <a:off x="7439044" y="4917757"/>
-            <a:ext cx="347472" cy="164592"/>
+            <a:off x="11089722" y="5040819"/>
+            <a:ext cx="205232" cy="137160"/>
           </a:xfrm>
           <a:prstGeom prst="rect">
             <a:avLst/>
@@ -18124,8 +18683,8 @@
           <a:noFill/>
         </p:spPr>
         <p:txBody>
-          <a:bodyPr wrap="none" lIns="0" tIns="0" rIns="0" bIns="0" anchor="ctr">
-            <a:spAutoFit/>
+          <a:bodyPr wrap="square" lIns="0" tIns="0" rIns="0" bIns="0" anchor="ctr">
+            <a:noAutofit/>
           </a:bodyPr>
           <a:lstStyle/>
           <a:p>
@@ -18137,21 +18696,26 @@
               </a:defRPr>
             </a:pPr>
             <a:r>
-              <a:t>~4.15</a:t>
-            </a:r>
-          </a:p>
-        </p:txBody>
-      </p:sp>
-      <p:sp>
-        <p:nvSpPr>
-          <p:cNvPr id="393" name="row:per-netns RTNL:start-label"/>
+              <a:rPr sz="700" i="1">
+                <a:solidFill>
+                  <a:srgbClr val="475569"/>
+                </a:solidFill>
+              </a:rPr>
+              <a:t>~6.2</a:t>
+            </a:r>
+          </a:p>
+        </p:txBody>
+      </p:sp>
+      <p:sp>
+        <p:nvSpPr>
+          <p:cNvPr id="394" name="row:further RTNL breakup:start-label"/>
           <p:cNvSpPr txBox="1"/>
           <p:nvPr/>
         </p:nvSpPr>
         <p:spPr>
           <a:xfrm>
-            <a:off x="10910906" y="5027104"/>
-            <a:ext cx="347472" cy="164592"/>
+            <a:off x="11784095" y="5150167"/>
+            <a:ext cx="205232" cy="137160"/>
           </a:xfrm>
           <a:prstGeom prst="rect">
             <a:avLst/>
@@ -18159,8 +18723,8 @@
           <a:noFill/>
         </p:spPr>
         <p:txBody>
-          <a:bodyPr wrap="none" lIns="0" tIns="0" rIns="0" bIns="0" anchor="ctr">
-            <a:spAutoFit/>
+          <a:bodyPr wrap="square" lIns="0" tIns="0" rIns="0" bIns="0" anchor="ctr">
+            <a:noAutofit/>
           </a:bodyPr>
           <a:lstStyle/>
           <a:p>
@@ -18172,21 +18736,26 @@
               </a:defRPr>
             </a:pPr>
             <a:r>
-              <a:t>~6.2</a:t>
-            </a:r>
-          </a:p>
-        </p:txBody>
-      </p:sp>
-      <p:sp>
-        <p:nvSpPr>
-          <p:cNvPr id="394" name="row:further RTNL breakup:start-label"/>
+              <a:rPr sz="700" i="1">
+                <a:solidFill>
+                  <a:srgbClr val="475569"/>
+                </a:solidFill>
+              </a:rPr>
+              <a:t>~6.7</a:t>
+            </a:r>
+          </a:p>
+        </p:txBody>
+      </p:sp>
+      <p:sp>
+        <p:nvSpPr>
+          <p:cNvPr id="395" name="row:RTNL-less FIB rules:start-label"/>
           <p:cNvSpPr txBox="1"/>
           <p:nvPr/>
         </p:nvSpPr>
         <p:spPr>
           <a:xfrm>
-            <a:off x="11605279" y="5136451"/>
-            <a:ext cx="347472" cy="164592"/>
+            <a:off x="12434017" y="5259514"/>
+            <a:ext cx="249682" cy="137160"/>
           </a:xfrm>
           <a:prstGeom prst="rect">
             <a:avLst/>
@@ -18194,8 +18763,8 @@
           <a:noFill/>
         </p:spPr>
         <p:txBody>
-          <a:bodyPr wrap="none" lIns="0" tIns="0" rIns="0" bIns="0" anchor="ctr">
-            <a:spAutoFit/>
+          <a:bodyPr wrap="square" lIns="0" tIns="0" rIns="0" bIns="0" anchor="ctr">
+            <a:noAutofit/>
           </a:bodyPr>
           <a:lstStyle/>
           <a:p>
@@ -18207,21 +18776,26 @@
               </a:defRPr>
             </a:pPr>
             <a:r>
-              <a:t>~6.8</a:t>
-            </a:r>
-          </a:p>
-        </p:txBody>
-      </p:sp>
-      <p:sp>
-        <p:nvSpPr>
-          <p:cNvPr id="395" name="row:RTNL-less FIB rules:start-label"/>
+              <a:rPr sz="700" i="1">
+                <a:solidFill>
+                  <a:srgbClr val="475569"/>
+                </a:solidFill>
+              </a:rPr>
+              <a:t>~6.13</a:t>
+            </a:r>
+          </a:p>
+        </p:txBody>
+      </p:sp>
+      <p:sp>
+        <p:nvSpPr>
+          <p:cNvPr id="396" name="row:YNL tooling:start-label"/>
           <p:cNvSpPr txBox="1"/>
           <p:nvPr/>
         </p:nvSpPr>
         <p:spPr>
           <a:xfrm>
-            <a:off x="12299651" y="5245798"/>
-            <a:ext cx="347472" cy="164592"/>
+            <a:off x="10003713" y="5368861"/>
+            <a:ext cx="249682" cy="137160"/>
           </a:xfrm>
           <a:prstGeom prst="rect">
             <a:avLst/>
@@ -18229,8 +18803,8 @@
           <a:noFill/>
         </p:spPr>
         <p:txBody>
-          <a:bodyPr wrap="none" lIns="0" tIns="0" rIns="0" bIns="0" anchor="ctr">
-            <a:spAutoFit/>
+          <a:bodyPr wrap="square" lIns="0" tIns="0" rIns="0" bIns="0" anchor="ctr">
+            <a:noAutofit/>
           </a:bodyPr>
           <a:lstStyle/>
           <a:p>
@@ -18242,21 +18816,26 @@
               </a:defRPr>
             </a:pPr>
             <a:r>
-              <a:t>~6.13</a:t>
-            </a:r>
-          </a:p>
-        </p:txBody>
-      </p:sp>
-      <p:sp>
-        <p:nvSpPr>
-          <p:cNvPr id="396" name="row:YNL tooling:start-label"/>
+              <a:rPr sz="700" i="1">
+                <a:solidFill>
+                  <a:srgbClr val="475569"/>
+                </a:solidFill>
+              </a:rPr>
+              <a:t>~5.13</a:t>
+            </a:r>
+          </a:p>
+        </p:txBody>
+      </p:sp>
+      <p:sp>
+        <p:nvSpPr>
+          <p:cNvPr id="397" name="row:queue/NAPI netdev-genl:start-label"/>
           <p:cNvSpPr txBox="1"/>
           <p:nvPr/>
         </p:nvSpPr>
         <p:spPr>
           <a:xfrm>
-            <a:off x="9869347" y="5355145"/>
-            <a:ext cx="347472" cy="164592"/>
+            <a:off x="11089722" y="5569648"/>
+            <a:ext cx="205232" cy="137160"/>
           </a:xfrm>
           <a:prstGeom prst="rect">
             <a:avLst/>
@@ -18264,8 +18843,8 @@
           <a:noFill/>
         </p:spPr>
         <p:txBody>
-          <a:bodyPr wrap="none" lIns="0" tIns="0" rIns="0" bIns="0" anchor="ctr">
-            <a:spAutoFit/>
+          <a:bodyPr wrap="square" lIns="0" tIns="0" rIns="0" bIns="0" anchor="ctr">
+            <a:noAutofit/>
           </a:bodyPr>
           <a:lstStyle/>
           <a:p>
@@ -18277,21 +18856,26 @@
               </a:defRPr>
             </a:pPr>
             <a:r>
-              <a:t>~5.13</a:t>
-            </a:r>
-          </a:p>
-        </p:txBody>
-      </p:sp>
-      <p:sp>
-        <p:nvSpPr>
-          <p:cNvPr id="397" name="row:queue/NAPI netdev-genl:start-label"/>
+              <a:rPr sz="700" i="1">
+                <a:solidFill>
+                  <a:srgbClr val="475569"/>
+                </a:solidFill>
+              </a:rPr>
+              <a:t>~6.2</a:t>
+            </a:r>
+          </a:p>
+        </p:txBody>
+      </p:sp>
+      <p:sp>
+        <p:nvSpPr>
+          <p:cNvPr id="398" name="row:kprobe BPF:start-label"/>
           <p:cNvSpPr txBox="1"/>
           <p:nvPr/>
         </p:nvSpPr>
         <p:spPr>
           <a:xfrm>
-            <a:off x="10910906" y="5555932"/>
-            <a:ext cx="347472" cy="164592"/>
+            <a:off x="4934794" y="5678995"/>
+            <a:ext cx="249682" cy="137160"/>
           </a:xfrm>
           <a:prstGeom prst="rect">
             <a:avLst/>
@@ -18299,8 +18883,8 @@
           <a:noFill/>
         </p:spPr>
         <p:txBody>
-          <a:bodyPr wrap="none" lIns="0" tIns="0" rIns="0" bIns="0" anchor="ctr">
-            <a:spAutoFit/>
+          <a:bodyPr wrap="square" lIns="0" tIns="0" rIns="0" bIns="0" anchor="ctr">
+            <a:noAutofit/>
           </a:bodyPr>
           <a:lstStyle/>
           <a:p>
@@ -18312,21 +18896,26 @@
               </a:defRPr>
             </a:pPr>
             <a:r>
-              <a:t>~6.2</a:t>
-            </a:r>
-          </a:p>
-        </p:txBody>
-      </p:sp>
-      <p:sp>
-        <p:nvSpPr>
-          <p:cNvPr id="398" name="row:kprobe BPF:start-label"/>
+              <a:rPr sz="700" i="1">
+                <a:solidFill>
+                  <a:srgbClr val="475569"/>
+                </a:solidFill>
+              </a:rPr>
+              <a:t>~3.14</a:t>
+            </a:r>
+          </a:p>
+        </p:txBody>
+      </p:sp>
+      <p:sp>
+        <p:nvSpPr>
+          <p:cNvPr id="399" name="row:structured drop reason:start-label"/>
           <p:cNvSpPr txBox="1"/>
           <p:nvPr/>
         </p:nvSpPr>
         <p:spPr>
           <a:xfrm>
-            <a:off x="4800428" y="5665279"/>
-            <a:ext cx="347472" cy="164592"/>
+            <a:off x="9656527" y="5788342"/>
+            <a:ext cx="249682" cy="137160"/>
           </a:xfrm>
           <a:prstGeom prst="rect">
             <a:avLst/>
@@ -18334,8 +18923,8 @@
           <a:noFill/>
         </p:spPr>
         <p:txBody>
-          <a:bodyPr wrap="none" lIns="0" tIns="0" rIns="0" bIns="0" anchor="ctr">
-            <a:spAutoFit/>
+          <a:bodyPr wrap="square" lIns="0" tIns="0" rIns="0" bIns="0" anchor="ctr">
+            <a:noAutofit/>
           </a:bodyPr>
           <a:lstStyle/>
           <a:p>
@@ -18347,21 +18936,26 @@
               </a:defRPr>
             </a:pPr>
             <a:r>
-              <a:t>~3.13</a:t>
-            </a:r>
-          </a:p>
-        </p:txBody>
-      </p:sp>
-      <p:sp>
-        <p:nvSpPr>
-          <p:cNvPr id="399" name="row:structured drop reason:start-label"/>
+              <a:rPr sz="700" i="1">
+                <a:solidFill>
+                  <a:srgbClr val="475569"/>
+                </a:solidFill>
+              </a:rPr>
+              <a:t>~5.11</a:t>
+            </a:r>
+          </a:p>
+        </p:txBody>
+      </p:sp>
+      <p:sp>
+        <p:nvSpPr>
+          <p:cNvPr id="400" name="row:drop-reason expansion:start-label"/>
           <p:cNvSpPr txBox="1"/>
           <p:nvPr/>
         </p:nvSpPr>
         <p:spPr>
           <a:xfrm>
-            <a:off x="9522161" y="5774626"/>
-            <a:ext cx="347472" cy="164592"/>
+            <a:off x="10489774" y="5897689"/>
+            <a:ext cx="249682" cy="137160"/>
           </a:xfrm>
           <a:prstGeom prst="rect">
             <a:avLst/>
@@ -18369,8 +18963,8 @@
           <a:noFill/>
         </p:spPr>
         <p:txBody>
-          <a:bodyPr wrap="none" lIns="0" tIns="0" rIns="0" bIns="0" anchor="ctr">
-            <a:spAutoFit/>
+          <a:bodyPr wrap="square" lIns="0" tIns="0" rIns="0" bIns="0" anchor="ctr">
+            <a:noAutofit/>
           </a:bodyPr>
           <a:lstStyle/>
           <a:p>
@@ -18382,21 +18976,26 @@
               </a:defRPr>
             </a:pPr>
             <a:r>
-              <a:t>~5.11</a:t>
-            </a:r>
-          </a:p>
-        </p:txBody>
-      </p:sp>
-      <p:sp>
-        <p:nvSpPr>
-          <p:cNvPr id="400" name="row:drop-reason expansion:start-label"/>
+              <a:rPr sz="700" i="1">
+                <a:solidFill>
+                  <a:srgbClr val="475569"/>
+                </a:solidFill>
+              </a:rPr>
+              <a:t>~5.17</a:t>
+            </a:r>
+          </a:p>
+        </p:txBody>
+      </p:sp>
+      <p:sp>
+        <p:nvSpPr>
+          <p:cNvPr id="401" name="row:qdisc-drop tracepoint:start-label"/>
           <p:cNvSpPr txBox="1"/>
           <p:nvPr/>
         </p:nvSpPr>
         <p:spPr>
           <a:xfrm>
-            <a:off x="10355408" y="5883973"/>
-            <a:ext cx="347472" cy="164592"/>
+            <a:off x="12434017" y="6007035"/>
+            <a:ext cx="249682" cy="137160"/>
           </a:xfrm>
           <a:prstGeom prst="rect">
             <a:avLst/>
@@ -18404,8 +19003,8 @@
           <a:noFill/>
         </p:spPr>
         <p:txBody>
-          <a:bodyPr wrap="none" lIns="0" tIns="0" rIns="0" bIns="0" anchor="ctr">
-            <a:spAutoFit/>
+          <a:bodyPr wrap="square" lIns="0" tIns="0" rIns="0" bIns="0" anchor="ctr">
+            <a:noAutofit/>
           </a:bodyPr>
           <a:lstStyle/>
           <a:p>
@@ -18417,21 +19016,26 @@
               </a:defRPr>
             </a:pPr>
             <a:r>
-              <a:t>~5.17</a:t>
-            </a:r>
-          </a:p>
-        </p:txBody>
-      </p:sp>
-      <p:sp>
-        <p:nvSpPr>
-          <p:cNvPr id="401" name="row:qdisc-drop tracepoint:start-label"/>
+              <a:rPr sz="700" i="1">
+                <a:solidFill>
+                  <a:srgbClr val="475569"/>
+                </a:solidFill>
+              </a:rPr>
+              <a:t>~6.13</a:t>
+            </a:r>
+          </a:p>
+        </p:txBody>
+      </p:sp>
+      <p:sp>
+        <p:nvSpPr>
+          <p:cNvPr id="402" name="row:switchdev:start-label"/>
           <p:cNvSpPr txBox="1"/>
           <p:nvPr/>
         </p:nvSpPr>
         <p:spPr>
           <a:xfrm>
-            <a:off x="12299651" y="5993320"/>
-            <a:ext cx="347472" cy="164592"/>
+            <a:off x="4795920" y="6207823"/>
+            <a:ext cx="249682" cy="137160"/>
           </a:xfrm>
           <a:prstGeom prst="rect">
             <a:avLst/>
@@ -18439,8 +19043,8 @@
           <a:noFill/>
         </p:spPr>
         <p:txBody>
-          <a:bodyPr wrap="none" lIns="0" tIns="0" rIns="0" bIns="0" anchor="ctr">
-            <a:spAutoFit/>
+          <a:bodyPr wrap="square" lIns="0" tIns="0" rIns="0" bIns="0" anchor="ctr">
+            <a:noAutofit/>
           </a:bodyPr>
           <a:lstStyle/>
           <a:p>
@@ -18452,21 +19056,26 @@
               </a:defRPr>
             </a:pPr>
             <a:r>
-              <a:t>~6.13</a:t>
-            </a:r>
-          </a:p>
-        </p:txBody>
-      </p:sp>
-      <p:sp>
-        <p:nvSpPr>
-          <p:cNvPr id="402" name="row:switchdev:start-label"/>
+              <a:rPr sz="700" i="1">
+                <a:solidFill>
+                  <a:srgbClr val="475569"/>
+                </a:solidFill>
+              </a:rPr>
+              <a:t>~3.13</a:t>
+            </a:r>
+          </a:p>
+        </p:txBody>
+      </p:sp>
+      <p:sp>
+        <p:nvSpPr>
+          <p:cNvPr id="403" name="row:devlink:start-label"/>
           <p:cNvSpPr txBox="1"/>
           <p:nvPr/>
         </p:nvSpPr>
         <p:spPr>
           <a:xfrm>
-            <a:off x="4661554" y="6194107"/>
-            <a:ext cx="347472" cy="164592"/>
+            <a:off x="5490292" y="6317170"/>
+            <a:ext cx="249682" cy="137160"/>
           </a:xfrm>
           <a:prstGeom prst="rect">
             <a:avLst/>
@@ -18474,8 +19083,8 @@
           <a:noFill/>
         </p:spPr>
         <p:txBody>
-          <a:bodyPr wrap="none" lIns="0" tIns="0" rIns="0" bIns="0" anchor="ctr">
-            <a:spAutoFit/>
+          <a:bodyPr wrap="square" lIns="0" tIns="0" rIns="0" bIns="0" anchor="ctr">
+            <a:noAutofit/>
           </a:bodyPr>
           <a:lstStyle/>
           <a:p>
@@ -18487,21 +19096,26 @@
               </a:defRPr>
             </a:pPr>
             <a:r>
-              <a:t>~3.12</a:t>
-            </a:r>
-          </a:p>
-        </p:txBody>
-      </p:sp>
-      <p:sp>
-        <p:nvSpPr>
-          <p:cNvPr id="403" name="row:devlink:start-label"/>
+              <a:rPr sz="700" i="1">
+                <a:solidFill>
+                  <a:srgbClr val="475569"/>
+                </a:solidFill>
+              </a:rPr>
+              <a:t>~3.19</a:t>
+            </a:r>
+          </a:p>
+        </p:txBody>
+      </p:sp>
+      <p:sp>
+        <p:nvSpPr>
+          <p:cNvPr id="404" name="row:devlink health:start-label"/>
           <p:cNvSpPr txBox="1"/>
           <p:nvPr/>
         </p:nvSpPr>
         <p:spPr>
           <a:xfrm>
-            <a:off x="5355926" y="6303454"/>
-            <a:ext cx="347472" cy="164592"/>
+            <a:off x="7477398" y="6426517"/>
+            <a:ext cx="249682" cy="137160"/>
           </a:xfrm>
           <a:prstGeom prst="rect">
             <a:avLst/>
@@ -18509,8 +19123,8 @@
           <a:noFill/>
         </p:spPr>
         <p:txBody>
-          <a:bodyPr wrap="none" lIns="0" tIns="0" rIns="0" bIns="0" anchor="ctr">
-            <a:spAutoFit/>
+          <a:bodyPr wrap="square" lIns="0" tIns="0" rIns="0" bIns="0" anchor="ctr">
+            <a:noAutofit/>
           </a:bodyPr>
           <a:lstStyle/>
           <a:p>
@@ -18522,21 +19136,26 @@
               </a:defRPr>
             </a:pPr>
             <a:r>
-              <a:t>~3.18</a:t>
-            </a:r>
-          </a:p>
-        </p:txBody>
-      </p:sp>
-      <p:sp>
-        <p:nvSpPr>
-          <p:cNvPr id="404" name="row:devlink health:start-label"/>
+              <a:rPr sz="700" i="1">
+                <a:solidFill>
+                  <a:srgbClr val="475569"/>
+                </a:solidFill>
+              </a:rPr>
+              <a:t>~4.15</a:t>
+            </a:r>
+          </a:p>
+        </p:txBody>
+      </p:sp>
+      <p:sp>
+        <p:nvSpPr>
+          <p:cNvPr id="405" name="row:phylink:start-label"/>
           <p:cNvSpPr txBox="1"/>
           <p:nvPr/>
         </p:nvSpPr>
         <p:spPr>
           <a:xfrm>
-            <a:off x="7439044" y="6412801"/>
-            <a:ext cx="347472" cy="164592"/>
+            <a:off x="5673616" y="6535864"/>
+            <a:ext cx="205232" cy="137160"/>
           </a:xfrm>
           <a:prstGeom prst="rect">
             <a:avLst/>
@@ -18544,8 +19163,8 @@
           <a:noFill/>
         </p:spPr>
         <p:txBody>
-          <a:bodyPr wrap="none" lIns="0" tIns="0" rIns="0" bIns="0" anchor="ctr">
-            <a:spAutoFit/>
+          <a:bodyPr wrap="square" lIns="0" tIns="0" rIns="0" bIns="0" anchor="ctr">
+            <a:noAutofit/>
           </a:bodyPr>
           <a:lstStyle/>
           <a:p>
@@ -18557,21 +19176,26 @@
               </a:defRPr>
             </a:pPr>
             <a:r>
-              <a:t>~4.15</a:t>
-            </a:r>
-          </a:p>
-        </p:txBody>
-      </p:sp>
-      <p:sp>
-        <p:nvSpPr>
-          <p:cNvPr id="405" name="row:phylink:start-label"/>
+              <a:rPr sz="700" i="1">
+                <a:solidFill>
+                  <a:srgbClr val="475569"/>
+                </a:solidFill>
+              </a:rPr>
+              <a:t>~4.0</a:t>
+            </a:r>
+          </a:p>
+        </p:txBody>
+      </p:sp>
+      <p:sp>
+        <p:nvSpPr>
+          <p:cNvPr id="406" name="row:Net DIM:start-label"/>
           <p:cNvSpPr txBox="1"/>
           <p:nvPr/>
         </p:nvSpPr>
         <p:spPr>
           <a:xfrm>
-            <a:off x="5494801" y="6522148"/>
-            <a:ext cx="347472" cy="164592"/>
+            <a:off x="6879037" y="6645211"/>
+            <a:ext cx="249682" cy="137160"/>
           </a:xfrm>
           <a:prstGeom prst="rect">
             <a:avLst/>
@@ -18579,8 +19203,8 @@
           <a:noFill/>
         </p:spPr>
         <p:txBody>
-          <a:bodyPr wrap="none" lIns="0" tIns="0" rIns="0" bIns="0" anchor="ctr">
-            <a:spAutoFit/>
+          <a:bodyPr wrap="square" lIns="0" tIns="0" rIns="0" bIns="0" anchor="ctr">
+            <a:noAutofit/>
           </a:bodyPr>
           <a:lstStyle/>
           <a:p>
@@ -18592,21 +19216,26 @@
               </a:defRPr>
             </a:pPr>
             <a:r>
-              <a:t>~3.19</a:t>
-            </a:r>
-          </a:p>
-        </p:txBody>
-      </p:sp>
-      <p:sp>
-        <p:nvSpPr>
-          <p:cNvPr id="406" name="row:Net DIM:start-label"/>
+              <a:rPr sz="700" i="1">
+                <a:solidFill>
+                  <a:srgbClr val="475569"/>
+                </a:solidFill>
+              </a:rPr>
+              <a:t>~4.10</a:t>
+            </a:r>
+          </a:p>
+        </p:txBody>
+      </p:sp>
+      <p:sp>
+        <p:nvSpPr>
+          <p:cNvPr id="407" name="row:netdevsim:start-label"/>
           <p:cNvSpPr txBox="1"/>
           <p:nvPr/>
         </p:nvSpPr>
         <p:spPr>
           <a:xfrm>
-            <a:off x="6744671" y="6631495"/>
-            <a:ext cx="347472" cy="164592"/>
+            <a:off x="7226222" y="6754558"/>
+            <a:ext cx="249682" cy="137160"/>
           </a:xfrm>
           <a:prstGeom prst="rect">
             <a:avLst/>
@@ -18614,8 +19243,8 @@
           <a:noFill/>
         </p:spPr>
         <p:txBody>
-          <a:bodyPr wrap="none" lIns="0" tIns="0" rIns="0" bIns="0" anchor="ctr">
-            <a:spAutoFit/>
+          <a:bodyPr wrap="square" lIns="0" tIns="0" rIns="0" bIns="0" anchor="ctr">
+            <a:noAutofit/>
           </a:bodyPr>
           <a:lstStyle/>
           <a:p>
@@ -18627,21 +19256,26 @@
               </a:defRPr>
             </a:pPr>
             <a:r>
-              <a:t>~4.9</a:t>
-            </a:r>
-          </a:p>
-        </p:txBody>
-      </p:sp>
-      <p:sp>
-        <p:nvSpPr>
-          <p:cNvPr id="407" name="row:netdevsim:start-label"/>
+              <a:rPr sz="700" i="1">
+                <a:solidFill>
+                  <a:srgbClr val="475569"/>
+                </a:solidFill>
+              </a:rPr>
+              <a:t>~4.12</a:t>
+            </a:r>
+          </a:p>
+        </p:txBody>
+      </p:sp>
+      <p:sp>
+        <p:nvSpPr>
+          <p:cNvPr id="408" name="row:ethtool netlink:start-label"/>
           <p:cNvSpPr txBox="1"/>
           <p:nvPr/>
         </p:nvSpPr>
         <p:spPr>
           <a:xfrm>
-            <a:off x="7091857" y="6740842"/>
-            <a:ext cx="347472" cy="164592"/>
+            <a:off x="7573410" y="6863905"/>
+            <a:ext cx="249682" cy="137160"/>
           </a:xfrm>
           <a:prstGeom prst="rect">
             <a:avLst/>
@@ -18649,8 +19283,8 @@
           <a:noFill/>
         </p:spPr>
         <p:txBody>
-          <a:bodyPr wrap="none" lIns="0" tIns="0" rIns="0" bIns="0" anchor="ctr">
-            <a:spAutoFit/>
+          <a:bodyPr wrap="square" lIns="0" tIns="0" rIns="0" bIns="0" anchor="ctr">
+            <a:noAutofit/>
           </a:bodyPr>
           <a:lstStyle/>
           <a:p>
@@ -18662,21 +19296,26 @@
               </a:defRPr>
             </a:pPr>
             <a:r>
-              <a:t>~4.12</a:t>
-            </a:r>
-          </a:p>
-        </p:txBody>
-      </p:sp>
-      <p:sp>
-        <p:nvSpPr>
-          <p:cNvPr id="408" name="row:ethtool netlink:start-label"/>
+              <a:rPr sz="700" i="1">
+                <a:solidFill>
+                  <a:srgbClr val="475569"/>
+                </a:solidFill>
+              </a:rPr>
+              <a:t>~4.15</a:t>
+            </a:r>
+          </a:p>
+        </p:txBody>
+      </p:sp>
+      <p:sp>
+        <p:nvSpPr>
+          <p:cNvPr id="409" name="row:auxiliary bus:start-label"/>
           <p:cNvSpPr txBox="1"/>
           <p:nvPr/>
         </p:nvSpPr>
         <p:spPr>
           <a:xfrm>
-            <a:off x="7439044" y="6850189"/>
-            <a:ext cx="347472" cy="164592"/>
+            <a:off x="9006605" y="6973252"/>
+            <a:ext cx="205232" cy="137160"/>
           </a:xfrm>
           <a:prstGeom prst="rect">
             <a:avLst/>
@@ -18684,8 +19323,8 @@
           <a:noFill/>
         </p:spPr>
         <p:txBody>
-          <a:bodyPr wrap="none" lIns="0" tIns="0" rIns="0" bIns="0" anchor="ctr">
-            <a:spAutoFit/>
+          <a:bodyPr wrap="square" lIns="0" tIns="0" rIns="0" bIns="0" anchor="ctr">
+            <a:noAutofit/>
           </a:bodyPr>
           <a:lstStyle/>
           <a:p>
@@ -18697,21 +19336,26 @@
               </a:defRPr>
             </a:pPr>
             <a:r>
-              <a:t>~4.15</a:t>
-            </a:r>
-          </a:p>
-        </p:txBody>
-      </p:sp>
-      <p:sp>
-        <p:nvSpPr>
-          <p:cNvPr id="409" name="row:auxiliary bus:start-label"/>
+              <a:rPr sz="700" i="1">
+                <a:solidFill>
+                  <a:srgbClr val="475569"/>
+                </a:solidFill>
+              </a:rPr>
+              <a:t>~5.5</a:t>
+            </a:r>
+          </a:p>
+        </p:txBody>
+      </p:sp>
+      <p:sp>
+        <p:nvSpPr>
+          <p:cNvPr id="410" name="row:threaded NAPI:start-label"/>
           <p:cNvSpPr txBox="1"/>
           <p:nvPr/>
         </p:nvSpPr>
         <p:spPr>
           <a:xfrm>
-            <a:off x="8827789" y="6959536"/>
-            <a:ext cx="347472" cy="164592"/>
+            <a:off x="9214916" y="7082599"/>
+            <a:ext cx="205232" cy="137160"/>
           </a:xfrm>
           <a:prstGeom prst="rect">
             <a:avLst/>
@@ -18719,8 +19363,8 @@
           <a:noFill/>
         </p:spPr>
         <p:txBody>
-          <a:bodyPr wrap="none" lIns="0" tIns="0" rIns="0" bIns="0" anchor="ctr">
-            <a:spAutoFit/>
+          <a:bodyPr wrap="square" lIns="0" tIns="0" rIns="0" bIns="0" anchor="ctr">
+            <a:noAutofit/>
           </a:bodyPr>
           <a:lstStyle/>
           <a:p>
@@ -18732,21 +19376,26 @@
               </a:defRPr>
             </a:pPr>
             <a:r>
-              <a:t>~5.5</a:t>
-            </a:r>
-          </a:p>
-        </p:txBody>
-      </p:sp>
-      <p:sp>
-        <p:nvSpPr>
-          <p:cNvPr id="410" name="row:threaded NAPI:start-label"/>
+              <a:rPr sz="700" i="1">
+                <a:solidFill>
+                  <a:srgbClr val="475569"/>
+                </a:solidFill>
+              </a:rPr>
+              <a:t>~5.7</a:t>
+            </a:r>
+          </a:p>
+        </p:txBody>
+      </p:sp>
+      <p:sp>
+        <p:nvSpPr>
+          <p:cNvPr id="411" name="row:Rust phylib:start-label"/>
           <p:cNvSpPr txBox="1"/>
           <p:nvPr/>
         </p:nvSpPr>
         <p:spPr>
           <a:xfrm>
-            <a:off x="9036100" y="7068883"/>
-            <a:ext cx="347472" cy="164592"/>
+            <a:off x="11089722" y="7191945"/>
+            <a:ext cx="205232" cy="137160"/>
           </a:xfrm>
           <a:prstGeom prst="rect">
             <a:avLst/>
@@ -18754,8 +19403,8 @@
           <a:noFill/>
         </p:spPr>
         <p:txBody>
-          <a:bodyPr wrap="none" lIns="0" tIns="0" rIns="0" bIns="0" anchor="ctr">
-            <a:spAutoFit/>
+          <a:bodyPr wrap="square" lIns="0" tIns="0" rIns="0" bIns="0" anchor="ctr">
+            <a:noAutofit/>
           </a:bodyPr>
           <a:lstStyle/>
           <a:p>
@@ -18767,41 +19416,11 @@
               </a:defRPr>
             </a:pPr>
             <a:r>
-              <a:t>~5.7</a:t>
-            </a:r>
-          </a:p>
-        </p:txBody>
-      </p:sp>
-      <p:sp>
-        <p:nvSpPr>
-          <p:cNvPr id="411" name="row:Rust phylib:start-label"/>
-          <p:cNvSpPr txBox="1"/>
-          <p:nvPr/>
-        </p:nvSpPr>
-        <p:spPr>
-          <a:xfrm>
-            <a:off x="10910906" y="7178230"/>
-            <a:ext cx="347472" cy="164592"/>
-          </a:xfrm>
-          <a:prstGeom prst="rect">
-            <a:avLst/>
-          </a:prstGeom>
-          <a:noFill/>
-        </p:spPr>
-        <p:txBody>
-          <a:bodyPr wrap="none" lIns="0" tIns="0" rIns="0" bIns="0" anchor="ctr">
-            <a:spAutoFit/>
-          </a:bodyPr>
-          <a:lstStyle/>
-          <a:p>
-            <a:pPr algn="r">
-              <a:defRPr sz="530" i="1">
+              <a:rPr sz="700" i="1">
                 <a:solidFill>
                   <a:srgbClr val="475569"/>
                 </a:solidFill>
-              </a:defRPr>
-            </a:pPr>
-            <a:r>
+              </a:rPr>
               <a:t>~6.2</a:t>
             </a:r>
           </a:p>
@@ -18809,22 +19428,14 @@
       </p:sp>
       <p:cxnSp>
         <p:nvCxnSpPr>
-          <p:cNvPr id="412" name="era-boundary:2019">
-            <a:extLst>
-              <a:ext uri="{FF2B5EF4-FFF2-40B4-BE49-F238E27FC236}">
-                <a16:creationId xmlns:a16="http://schemas.microsoft.com/office/drawing/2014/main" id="{DF7A39ED-3A49-5311-FF5C-DA7E3429D443}"/>
-              </a:ext>
-            </a:extLst>
-          </p:cNvPr>
-          <p:cNvCxnSpPr>
-            <a:cxnSpLocks/>
-          </p:cNvCxnSpPr>
+          <p:cNvPr id="421" name="era-span:2:left"/>
+          <p:cNvCxnSpPr/>
           <p:nvPr/>
         </p:nvCxnSpPr>
         <p:spPr>
-          <a:xfrm flipH="1">
+          <a:xfrm>
             <a:off x="5909309" y="962787"/>
-            <a:ext cx="2588657" cy="0"/>
+            <a:ext cx="600076" cy="0"/>
           </a:xfrm>
           <a:prstGeom prst="line">
             <a:avLst/>
@@ -18834,7 +19445,6 @@
               <a:srgbClr val="CBD5E1"/>
             </a:solidFill>
             <a:headEnd type="arrow" w="med" len="med"/>
-            <a:tailEnd type="arrow" w="med" len="med"/>
           </a:ln>
         </p:spPr>
         <p:style>
@@ -18854,22 +19464,14 @@
       </p:cxnSp>
       <p:cxnSp>
         <p:nvCxnSpPr>
-          <p:cNvPr id="415" name="era-boundary:2019">
-            <a:extLst>
-              <a:ext uri="{FF2B5EF4-FFF2-40B4-BE49-F238E27FC236}">
-                <a16:creationId xmlns:a16="http://schemas.microsoft.com/office/drawing/2014/main" id="{70AAB47D-69B6-14C3-DB45-C2B750608594}"/>
-              </a:ext>
-            </a:extLst>
-          </p:cNvPr>
-          <p:cNvCxnSpPr>
-            <a:cxnSpLocks/>
-          </p:cNvCxnSpPr>
+          <p:cNvPr id="422" name="era-span:2:right"/>
+          <p:cNvCxnSpPr/>
           <p:nvPr/>
         </p:nvCxnSpPr>
         <p:spPr>
-          <a:xfrm flipH="1">
-            <a:off x="8643057" y="962787"/>
-            <a:ext cx="2588657" cy="0"/>
+          <a:xfrm>
+            <a:off x="7858125" y="962787"/>
+            <a:ext cx="639841" cy="0"/>
           </a:xfrm>
           <a:prstGeom prst="line">
             <a:avLst/>
@@ -18878,7 +19480,6 @@
             <a:solidFill>
               <a:srgbClr val="CBD5E1"/>
             </a:solidFill>
-            <a:headEnd type="arrow" w="med" len="med"/>
             <a:tailEnd type="arrow" w="med" len="med"/>
           </a:ln>
         </p:spPr>
@@ -18899,22 +19500,14 @@
       </p:cxnSp>
       <p:cxnSp>
         <p:nvCxnSpPr>
-          <p:cNvPr id="416" name="era-boundary:2019">
-            <a:extLst>
-              <a:ext uri="{FF2B5EF4-FFF2-40B4-BE49-F238E27FC236}">
-                <a16:creationId xmlns:a16="http://schemas.microsoft.com/office/drawing/2014/main" id="{F87C672E-5B0D-39A1-1528-9A0364835DB0}"/>
-              </a:ext>
-            </a:extLst>
-          </p:cNvPr>
-          <p:cNvCxnSpPr>
-            <a:cxnSpLocks/>
-          </p:cNvCxnSpPr>
+          <p:cNvPr id="423" name="era-span:3:left"/>
+          <p:cNvCxnSpPr/>
           <p:nvPr/>
         </p:nvCxnSpPr>
         <p:spPr>
-          <a:xfrm flipH="1">
-            <a:off x="11444405" y="962787"/>
-            <a:ext cx="2588657" cy="0"/>
+          <a:xfrm>
+            <a:off x="8643057" y="962787"/>
+            <a:ext cx="643817" cy="0"/>
           </a:xfrm>
           <a:prstGeom prst="line">
             <a:avLst/>
@@ -18924,7 +19517,6 @@
               <a:srgbClr val="CBD5E1"/>
             </a:solidFill>
             <a:headEnd type="arrow" w="med" len="med"/>
-            <a:tailEnd type="arrow" w="med" len="med"/>
           </a:ln>
         </p:spPr>
         <p:style>
@@ -18944,22 +19536,122 @@
       </p:cxnSp>
       <p:cxnSp>
         <p:nvCxnSpPr>
-          <p:cNvPr id="418" name="era-boundary:2019">
-            <a:extLst>
-              <a:ext uri="{FF2B5EF4-FFF2-40B4-BE49-F238E27FC236}">
-                <a16:creationId xmlns:a16="http://schemas.microsoft.com/office/drawing/2014/main" id="{04030F15-784C-BE6E-0609-7428D8AC20A9}"/>
-              </a:ext>
-            </a:extLst>
-          </p:cNvPr>
-          <p:cNvCxnSpPr>
-            <a:cxnSpLocks/>
-          </p:cNvCxnSpPr>
+          <p:cNvPr id="424" name="era-span:3:right"/>
+          <p:cNvCxnSpPr/>
           <p:nvPr/>
         </p:nvCxnSpPr>
         <p:spPr>
-          <a:xfrm flipH="1">
+          <a:xfrm>
+            <a:off x="10635614" y="962787"/>
+            <a:ext cx="596100" cy="0"/>
+          </a:xfrm>
+          <a:prstGeom prst="line">
+            <a:avLst/>
+          </a:prstGeom>
+          <a:ln w="6350">
+            <a:solidFill>
+              <a:srgbClr val="CBD5E1"/>
+            </a:solidFill>
+            <a:tailEnd type="arrow" w="med" len="med"/>
+          </a:ln>
+        </p:spPr>
+        <p:style>
+          <a:lnRef idx="2">
+            <a:schemeClr val="accent1"/>
+          </a:lnRef>
+          <a:fillRef idx="0">
+            <a:schemeClr val="accent1"/>
+          </a:fillRef>
+          <a:effectRef idx="1">
+            <a:schemeClr val="accent1"/>
+          </a:effectRef>
+          <a:fontRef idx="minor">
+            <a:schemeClr val="tx1"/>
+          </a:fontRef>
+        </p:style>
+      </p:cxnSp>
+      <p:cxnSp>
+        <p:nvCxnSpPr>
+          <p:cNvPr id="425" name="era-span:4:left"/>
+          <p:cNvCxnSpPr/>
+          <p:nvPr/>
+        </p:nvCxnSpPr>
+        <p:spPr>
+          <a:xfrm>
+            <a:off x="11444405" y="962787"/>
+            <a:ext cx="745434" cy="0"/>
+          </a:xfrm>
+          <a:prstGeom prst="line">
+            <a:avLst/>
+          </a:prstGeom>
+          <a:ln w="6350">
+            <a:solidFill>
+              <a:srgbClr val="CBD5E1"/>
+            </a:solidFill>
+            <a:headEnd type="arrow" w="med" len="med"/>
+          </a:ln>
+        </p:spPr>
+        <p:style>
+          <a:lnRef idx="2">
+            <a:schemeClr val="accent1"/>
+          </a:lnRef>
+          <a:fillRef idx="0">
+            <a:schemeClr val="accent1"/>
+          </a:fillRef>
+          <a:effectRef idx="1">
+            <a:schemeClr val="accent1"/>
+          </a:effectRef>
+          <a:fontRef idx="minor">
+            <a:schemeClr val="tx1"/>
+          </a:fontRef>
+        </p:style>
+      </p:cxnSp>
+      <p:cxnSp>
+        <p:nvCxnSpPr>
+          <p:cNvPr id="426" name="era-span:4:right"/>
+          <p:cNvCxnSpPr/>
+          <p:nvPr/>
+        </p:nvCxnSpPr>
+        <p:spPr>
+          <a:xfrm>
+            <a:off x="13287628" y="962787"/>
+            <a:ext cx="745434" cy="0"/>
+          </a:xfrm>
+          <a:prstGeom prst="line">
+            <a:avLst/>
+          </a:prstGeom>
+          <a:ln w="6350">
+            <a:solidFill>
+              <a:srgbClr val="CBD5E1"/>
+            </a:solidFill>
+            <a:tailEnd type="arrow" w="med" len="med"/>
+          </a:ln>
+        </p:spPr>
+        <p:style>
+          <a:lnRef idx="2">
+            <a:schemeClr val="accent1"/>
+          </a:lnRef>
+          <a:fillRef idx="0">
+            <a:schemeClr val="accent1"/>
+          </a:fillRef>
+          <a:effectRef idx="1">
+            <a:schemeClr val="accent1"/>
+          </a:effectRef>
+          <a:fontRef idx="minor">
+            <a:schemeClr val="tx1"/>
+          </a:fontRef>
+        </p:style>
+      </p:cxnSp>
+      <p:cxnSp>
+        <p:nvCxnSpPr>
+          <p:cNvPr id="419" name="era-span:1:left"/>
+          <p:cNvCxnSpPr/>
+          <p:nvPr/>
+        </p:nvCxnSpPr>
+        <p:spPr>
+          <a:xfrm>
             <a:off x="3111935" y="962787"/>
-            <a:ext cx="2588657" cy="0"/>
+            <a:ext cx="745435" cy="0"/>
           </a:xfrm>
           <a:prstGeom prst="line">
             <a:avLst/>
@@ -18969,6 +19661,41 @@
               <a:srgbClr val="CBD5E1"/>
             </a:solidFill>
             <a:headEnd type="arrow" w="med" len="med"/>
+          </a:ln>
+        </p:spPr>
+        <p:style>
+          <a:lnRef idx="2">
+            <a:schemeClr val="accent1"/>
+          </a:lnRef>
+          <a:fillRef idx="0">
+            <a:schemeClr val="accent1"/>
+          </a:fillRef>
+          <a:effectRef idx="1">
+            <a:schemeClr val="accent1"/>
+          </a:effectRef>
+          <a:fontRef idx="minor">
+            <a:schemeClr val="tx1"/>
+          </a:fontRef>
+        </p:style>
+      </p:cxnSp>
+      <p:cxnSp>
+        <p:nvCxnSpPr>
+          <p:cNvPr id="420" name="era-span:1:right"/>
+          <p:cNvCxnSpPr/>
+          <p:nvPr/>
+        </p:nvCxnSpPr>
+        <p:spPr>
+          <a:xfrm>
+            <a:off x="4955158" y="962787"/>
+            <a:ext cx="745434" cy="0"/>
+          </a:xfrm>
+          <a:prstGeom prst="line">
+            <a:avLst/>
+          </a:prstGeom>
+          <a:ln w="6350">
+            <a:solidFill>
+              <a:srgbClr val="CBD5E1"/>
+            </a:solidFill>
             <a:tailEnd type="arrow" w="med" len="med"/>
           </a:ln>
         </p:spPr>

--- a/linux-networking-feature-evolution.pptx
+++ b/linux-networking-feature-evolution.pptx
@@ -296,7 +296,7 @@
           <a:lstStyle/>
           <a:p>
             <a:r>
-              <a:t>Editing notes (figure synced to canonical edition r50)</a:t>
+              <a:t>Editing notes (figure synced to canonical edition r52)</a:t>
             </a:r>
           </a:p>
           <a:p>
@@ -311,27 +311,37 @@
           </a:p>
           <a:p>
             <a:r>
-              <a:t>- Bundled rows show one marker per release: SO_TXTIME / EDT / taprio (4.19, 4.20); SOCK_OPS / SOCKMAP (4.13, 4.14); XDP devmap / cpumap (4.14, 4.15). One marker stands for two Part VI rows of the same release in CoDel / fq_codel (3.5), cgroup / LWT BPF (4.10), io_uring SEND_ZC / multishot recv (6.0), io_uring ZCRX / memory-provider hooks (6.15) and queue/NAPI/page_pool netdev-genl (6.8).</a:t>
-            </a:r>
-          </a:p>
-          <a:p>
-            <a:r>
-              <a:t>- Successive milestones on one row (solid line, label a · b): eBPF foundation = internal BPF ISA rework (3.15) and bpf() / maps / verifier (3.18); BIG TCP extensions = IPv4 BIG TCP (6.3), IPv6 BIG TCP without HBH (7.0), tunnel BIG TCP (7.3-rc); Net DIM = initial generation (4.16) and common-library integration (5.3); threaded NAPI = origin (5.12) and kthread busy-poll extension (6.19).</a:t>
-            </a:r>
-          </a:p>
-          <a:p>
-            <a:r>
-              <a:t>- Changes against r24-v8: Era 4 renamed to "Explicit placement &amp; scoped control"; title restated as the r50 central thesis; rows added for CoDel / fq_codel, io_uring SEND_ZC / multishot recv, dev_queue_xmit() llist, XDP devmap / cpumap, netmem, devmem buffers &gt; PAGE_SIZE, namespace FD / setns(), per-netns netdev unregistration and BTF; XDP multi-buffer moved from MEMORY to PROGRAMMABILITY (its Part VI axis); memory providers are no longer "provenance open" (Part VII anchors for netmem 6.9 and the 6.15 provider hooks).</a:t>
-            </a:r>
-          </a:p>
-          <a:p>
-            <a:r>
-              <a:t>- netmem (6.9) is drawn from its Part VII anchor: r50 Part VI has no netmem row.</a:t>
-            </a:r>
-          </a:p>
-          <a:p>
-            <a:r>
-              <a:t>- Row selection: every row is a Part VI milestone. Not drawn: milestones whose subject is a cross-cutting domain (TRANSPORT, VIRTUAL / OVERLAY, SECURITY) and secondary Part VI milestones (e.g. SO_REUSEPORT, MSG_ZEROCOPY, TCP_ZEROCOPY_RECEIVE, CAKE, UDP GRO, mac80211 airtime / AQL, Flower, TC ct, SK_MSG, flow dissector, nftables ingress / egress / flowtable, conntrack and bpfilter rows, route-cache removal).</a:t>
+              <a:t>- Row selection: rows are representative architecture milestones selected from Part VI and grouped by its axis; the figure is an overview, not a reduced Part VI. Not drawn: milestones whose subject is a cross-cutting domain (TRANSPORT, VIRTUAL / OVERLAY, SECURITY) and further Part VI milestones such as SO_REUSEPORT, MSG_ZEROCOPY, TCP_ZEROCOPY_RECEIVE, CAKE, UDP GRO, mac80211 airtime / AQL, Flower, TC ct, SK_MSG, flow dissector, nftables flowtable and route-cache removal. A full-milestone version would need two slides (Performance / Programmability / Memory and Control / Observability / Driver).</a:t>
+            </a:r>
+          </a:p>
+          <a:p>
+            <a:r>
+              <a:t>- Bundled rows show one marker per release: SO_TXTIME / EDT / taprio (4.19, 4.20); SOCK_OPS / SOCKMAP (4.13, 4.14); XDP devmap / cpumap (4.14, 4.15). One marker stands for two Part VI rows of the same release in CoDel / fq_codel (3.5), cgroup / LWT BPF (4.10), io_uring SEND_ZC / multishot recv (6.0) and queue/NAPI/page_pool netdev-genl (6.8).</a:t>
+            </a:r>
+          </a:p>
+          <a:p>
+            <a:r>
+              <a:t>- Successive milestones on one row (solid line, label a · b): eBPF foundation = internal BPF ISA rework (3.15) and bpf() / maps / verifier (3.18); BIG TCP extensions = IPv4 BIG TCP (6.3), IPv6 BIG TCP without HBH (7.0), tunnel BIG TCP (7.3-rc); Device Memory TCP = RX (6.12) and TX (6.16); Net DIM = initial generation (4.16) and common-library integration (5.3); threaded NAPI = origin (5.12) and kthread busy-poll extension (6.19).</a:t>
+            </a:r>
+          </a:p>
+          <a:p>
+            <a:r>
+              <a:t>- io_uring ZCRX and page_pool memory-provider hooks are separate rows although both are 6.15: they are two Part VI rows with separate Part VII anchors, not one feature.</a:t>
+            </a:r>
+          </a:p>
+          <a:p>
+            <a:r>
+              <a:t>- MEMORY lineage is a tree, not a chain: page_pool → netmem → Device Memory TCP RX. From the RX release (6.12) the trunk branches to devmem RX buffers &gt; PAGE_SIZE (7.3-rc, the devmem binding side) and to page_pool memory-provider hooks (6.15). r52 states this order explicitly: the consumer-specific devmem path came first, the generic provider API followed. The hooks then branch to large RX buffers for providers / ZCRX (7.0, the provider side) and to io_uring ZCRX, which landed on them in the same release (arrow ends on its ●).</a:t>
+            </a:r>
+          </a:p>
+          <a:p>
+            <a:r>
+              <a:t>- namespace FD / setns(): first release 3.0 (Part VI status "release"; setns(2): "Linux 3.0"). The off-chart triangle only says that visible development began before 2011.</a:t>
+            </a:r>
+          </a:p>
+          <a:p>
+            <a:r>
+              <a:t>- BTF sits in OBSERVABILITY (Part VI axis PROGRAMMABILITY / OBSERVABILITY) because Part V builds its observability story on it; XDP multi-buffer sits in PROGRAMMABILITY, its Part VI axis.</a:t>
             </a:r>
           </a:p>
           <a:p>
@@ -351,7 +361,7 @@
           </a:p>
           <a:p>
             <a:r>
-              <a:t>- Links: sch_fq / TCP pacing → SO_TXTIME / EDT / taprio; BIG TCP → BIG TCP extensions; eBPF foundation → TC BPF, cgroup / LWT BPF, SOCK_OPS / SOCKMAP, XDP; TC BPF → TCX → netkit (shared bpf_mprog attachment); BPF struct_ops → BPF qdisc; XDP → XDP devmap / cpumap, XDP multi-buffer; AF_XDP → AF_XDP multi-buffer; page_pool → netmem → Device Memory TCP RX → Device Memory TCP TX and io_uring ZCRX / memory-provider hooks → large RX buffers (r50: consumer-specific devmem path first, generic provider hooks in 6.15); per-netns RTNL → further RTNL breakup → RTNL-less FIB rules and per-netns netdev unregistration; structured drop reason → drop-reason expansion; switchdev → devlink → devlink health.</a:t>
+              <a:t>- Other links: sch_fq / TCP pacing → SO_TXTIME / EDT / taprio; BIG TCP → BIG TCP extensions; eBPF foundation → TC BPF, cgroup / LWT BPF, SOCK_OPS / SOCKMAP, XDP; TC BPF → TCX → netkit (shared bpf_mprog attachment); BPF struct_ops → BPF qdisc; XDP → XDP devmap / cpumap, XDP multi-buffer; AF_XDP → AF_XDP multi-buffer; per-netns RTNL → further RTNL breakup → RTNL-less FIB rules and per-netns netdev unregistration; structured drop reason → drop-reason expansion; switchdev → devlink → devlink health.</a:t>
             </a:r>
           </a:p>
           <a:p>
@@ -361,12 +371,12 @@
           </a:p>
           <a:p>
             <a:r>
-              <a:t>- Deliberately not linked: the queueing layers (BQL, CoDel / fq_codel, TSQ, fq; parallel, not derived), dev_queue_xmit() llist (implementation scalability, not a contract), io_uring SEND_ZC (precedes ZCRX but is a different API), BTF (a parallel observability primitive in Part V), devmem buffers &gt; PAGE_SIZE, RX HW queue leasing (interacts with AF_XDP / io_uring), and netdev-genl → queue leasing / ZCRX (conceptual only).</a:t>
-            </a:r>
-          </a:p>
-          <a:p>
-            <a:r>
-              <a:t>- Development starts are from memory, not audited: nftables ~2008 and namespace FD / setns() before 2011 (off-chart), XDP ~early 2016; added in this revision: CoDel / fq_codel ~May 2012, XDP devmap / cpumap ~mid 2017, BTF ~March 2018, io_uring SEND_ZC ~Dec 2021, netmem ~Dec 2023, dev_queue_xmit() llist ~Oct 2025. Rows without ○ (devmem buffers &gt; PAGE_SIZE, per-netns netdev unregistration) have no estimate.</a:t>
+              <a:t>- Deliberately not linked: the queueing layers (BQL, CoDel / fq_codel, TSQ, fq; parallel, not derived), dev_queue_xmit() llist (implementation scalability, not a contract), io_uring SEND_ZC (precedes ZCRX but is a different API), BTF and kprobe BPF (parallel observability primitives in Part V), RX HW queue leasing (interacts with AF_XDP / io_uring), and netdev-genl → queue leasing / ZCRX (conceptual only).</a:t>
+            </a:r>
+          </a:p>
+          <a:p>
+            <a:r>
+              <a:t>- Development starts are from memory, not audited: nftables ~2008 and namespace FD / setns() before 2011 (off-chart), XDP ~early 2016, CoDel / fq_codel ~May 2012, XDP devmap / cpumap ~mid 2017, BTF ~March 2018, io_uring SEND_ZC ~Dec 2021, netmem ~Dec 2023, dev_queue_xmit() llist ~Oct 2025. Rows without ○ (devmem RX buffers &gt; PAGE_SIZE, page_pool memory-provider hooks, per-netns netdev unregistration) have no estimate.</a:t>
             </a:r>
           </a:p>
           <a:p>
@@ -3483,7 +3493,7 @@
                   <a:srgbClr val="64748B"/>
                 </a:solidFill>
               </a:rPr>
-              <a:t>Linux networking milestones by architecture axis, set against the four architecture eras and X.0 releases · canonical edition r50</a:t>
+              <a:t>Linux networking milestones by architecture axis, set against the four architecture eras and X.0 releases · canonical edition r52</a:t>
             </a:r>
           </a:p>
         </p:txBody>
@@ -5417,7 +5427,7 @@
       </p:cxnSp>
       <p:cxnSp>
         <p:nvCxnSpPr>
-          <p:cNvPr id="784" name="lineage:sch_fq / TCP pacing:trunk"/>
+          <p:cNvPr id="783" name="lineage:sch_fq / TCP pacing:trunk"/>
           <p:cNvCxnSpPr/>
           <p:nvPr/>
         </p:nvCxnSpPr>
@@ -5452,7 +5462,7 @@
       </p:cxnSp>
       <p:cxnSp>
         <p:nvCxnSpPr>
-          <p:cNvPr id="785" name="lineage:sch_fq / TCP pacing-&gt;SO_TXTIME / EDT / taprio:across:before-label"/>
+          <p:cNvPr id="784" name="lineage:sch_fq / TCP pacing-&gt;SO_TXTIME / EDT / taprio:across:before-label"/>
           <p:cNvCxnSpPr/>
           <p:nvPr/>
         </p:nvCxnSpPr>
@@ -5487,7 +5497,7 @@
       </p:cxnSp>
       <p:cxnSp>
         <p:nvCxnSpPr>
-          <p:cNvPr id="786" name="lineage:sch_fq / TCP pacing-&gt;SO_TXTIME / EDT / taprio:across"/>
+          <p:cNvPr id="785" name="lineage:sch_fq / TCP pacing-&gt;SO_TXTIME / EDT / taprio:across"/>
           <p:cNvCxnSpPr/>
           <p:nvPr/>
         </p:nvCxnSpPr>
@@ -5523,7 +5533,7 @@
       </p:cxnSp>
       <p:cxnSp>
         <p:nvCxnSpPr>
-          <p:cNvPr id="787" name="lineage:BIG TCP:trunk"/>
+          <p:cNvPr id="786" name="lineage:BIG TCP:trunk"/>
           <p:cNvCxnSpPr/>
           <p:nvPr/>
         </p:nvCxnSpPr>
@@ -5558,7 +5568,7 @@
       </p:cxnSp>
       <p:cxnSp>
         <p:nvCxnSpPr>
-          <p:cNvPr id="788" name="lineage:BIG TCP-&gt;BIG TCP extensions:across"/>
+          <p:cNvPr id="787" name="lineage:BIG TCP-&gt;BIG TCP extensions:across"/>
           <p:cNvCxnSpPr/>
           <p:nvPr/>
         </p:nvCxnSpPr>
@@ -5594,7 +5604,7 @@
       </p:cxnSp>
       <p:cxnSp>
         <p:nvCxnSpPr>
-          <p:cNvPr id="789" name="lineage:eBPF foundation:trunk"/>
+          <p:cNvPr id="788" name="lineage:eBPF foundation:trunk"/>
           <p:cNvCxnSpPr/>
           <p:nvPr/>
         </p:nvCxnSpPr>
@@ -5630,7 +5640,7 @@
       </p:cxnSp>
       <p:sp>
         <p:nvSpPr>
-          <p:cNvPr id="790" name="lineage:eBPF foundation-&gt;TC BPF:junction"/>
+          <p:cNvPr id="789" name="lineage:eBPF foundation-&gt;TC BPF:junction"/>
           <p:cNvSpPr/>
           <p:nvPr/>
         </p:nvSpPr>
@@ -5674,7 +5684,7 @@
       </p:sp>
       <p:cxnSp>
         <p:nvCxnSpPr>
-          <p:cNvPr id="791" name="lineage:eBPF foundation-&gt;cgroup / LWT BPF:across:before-label"/>
+          <p:cNvPr id="790" name="lineage:eBPF foundation-&gt;cgroup / LWT BPF:across:before-label"/>
           <p:cNvCxnSpPr/>
           <p:nvPr/>
         </p:nvCxnSpPr>
@@ -5709,7 +5719,7 @@
       </p:cxnSp>
       <p:cxnSp>
         <p:nvCxnSpPr>
-          <p:cNvPr id="792" name="lineage:eBPF foundation-&gt;cgroup / LWT BPF:across"/>
+          <p:cNvPr id="791" name="lineage:eBPF foundation-&gt;cgroup / LWT BPF:across"/>
           <p:cNvCxnSpPr/>
           <p:nvPr/>
         </p:nvCxnSpPr>
@@ -5745,7 +5755,7 @@
       </p:cxnSp>
       <p:cxnSp>
         <p:nvCxnSpPr>
-          <p:cNvPr id="793" name="lineage:eBPF foundation-&gt;SOCK_OPS / SOCKMAP:across:before-label"/>
+          <p:cNvPr id="792" name="lineage:eBPF foundation-&gt;SOCK_OPS / SOCKMAP:across:before-label"/>
           <p:cNvCxnSpPr/>
           <p:nvPr/>
         </p:nvCxnSpPr>
@@ -5780,7 +5790,7 @@
       </p:cxnSp>
       <p:cxnSp>
         <p:nvCxnSpPr>
-          <p:cNvPr id="794" name="lineage:eBPF foundation-&gt;SOCK_OPS / SOCKMAP:across"/>
+          <p:cNvPr id="793" name="lineage:eBPF foundation-&gt;SOCK_OPS / SOCKMAP:across"/>
           <p:cNvCxnSpPr/>
           <p:nvPr/>
         </p:nvCxnSpPr>
@@ -5816,7 +5826,7 @@
       </p:cxnSp>
       <p:cxnSp>
         <p:nvCxnSpPr>
-          <p:cNvPr id="795" name="lineage:eBPF foundation-&gt;XDP:across:before-label"/>
+          <p:cNvPr id="794" name="lineage:eBPF foundation-&gt;XDP:across:before-label"/>
           <p:cNvCxnSpPr/>
           <p:nvPr/>
         </p:nvCxnSpPr>
@@ -5851,7 +5861,7 @@
       </p:cxnSp>
       <p:cxnSp>
         <p:nvCxnSpPr>
-          <p:cNvPr id="796" name="lineage:eBPF foundation-&gt;XDP:across"/>
+          <p:cNvPr id="795" name="lineage:eBPF foundation-&gt;XDP:across"/>
           <p:cNvCxnSpPr/>
           <p:nvPr/>
         </p:nvCxnSpPr>
@@ -5887,7 +5897,7 @@
       </p:cxnSp>
       <p:cxnSp>
         <p:nvCxnSpPr>
-          <p:cNvPr id="797" name="lineage:TC BPF:trunk"/>
+          <p:cNvPr id="796" name="lineage:TC BPF:trunk"/>
           <p:cNvCxnSpPr/>
           <p:nvPr/>
         </p:nvCxnSpPr>
@@ -5922,7 +5932,7 @@
       </p:cxnSp>
       <p:cxnSp>
         <p:nvCxnSpPr>
-          <p:cNvPr id="798" name="lineage:TC BPF-&gt;TCX:across:before-label"/>
+          <p:cNvPr id="797" name="lineage:TC BPF-&gt;TCX:across:before-label"/>
           <p:cNvCxnSpPr/>
           <p:nvPr/>
         </p:nvCxnSpPr>
@@ -5957,7 +5967,7 @@
       </p:cxnSp>
       <p:cxnSp>
         <p:nvCxnSpPr>
-          <p:cNvPr id="799" name="lineage:TC BPF-&gt;TCX:across"/>
+          <p:cNvPr id="798" name="lineage:TC BPF-&gt;TCX:across"/>
           <p:cNvCxnSpPr/>
           <p:nvPr/>
         </p:nvCxnSpPr>
@@ -5993,7 +6003,7 @@
       </p:cxnSp>
       <p:cxnSp>
         <p:nvCxnSpPr>
-          <p:cNvPr id="800" name="lineage:TCX-&gt;netkit"/>
+          <p:cNvPr id="799" name="lineage:TCX-&gt;netkit"/>
           <p:cNvCxnSpPr/>
           <p:nvPr/>
         </p:nvCxnSpPr>
@@ -6029,7 +6039,7 @@
       </p:cxnSp>
       <p:cxnSp>
         <p:nvCxnSpPr>
-          <p:cNvPr id="801" name="lineage:BPF struct_ops:trunk"/>
+          <p:cNvPr id="800" name="lineage:BPF struct_ops:trunk"/>
           <p:cNvCxnSpPr/>
           <p:nvPr/>
         </p:nvCxnSpPr>
@@ -6064,7 +6074,7 @@
       </p:cxnSp>
       <p:cxnSp>
         <p:nvCxnSpPr>
-          <p:cNvPr id="802" name="lineage:BPF struct_ops-&gt;BPF qdisc:across:before-label"/>
+          <p:cNvPr id="801" name="lineage:BPF struct_ops-&gt;BPF qdisc:across:before-label"/>
           <p:cNvCxnSpPr/>
           <p:nvPr/>
         </p:nvCxnSpPr>
@@ -6099,7 +6109,7 @@
       </p:cxnSp>
       <p:cxnSp>
         <p:nvCxnSpPr>
-          <p:cNvPr id="803" name="lineage:BPF struct_ops-&gt;BPF qdisc:across"/>
+          <p:cNvPr id="802" name="lineage:BPF struct_ops-&gt;BPF qdisc:across"/>
           <p:cNvCxnSpPr/>
           <p:nvPr/>
         </p:nvCxnSpPr>
@@ -6135,7 +6145,7 @@
       </p:cxnSp>
       <p:cxnSp>
         <p:nvCxnSpPr>
-          <p:cNvPr id="804" name="lineage:XDP:trunk"/>
+          <p:cNvPr id="803" name="lineage:XDP:trunk"/>
           <p:cNvCxnSpPr/>
           <p:nvPr/>
         </p:nvCxnSpPr>
@@ -6171,7 +6181,7 @@
       </p:cxnSp>
       <p:cxnSp>
         <p:nvCxnSpPr>
-          <p:cNvPr id="805" name="lineage:XDP-&gt;XDP devmap / cpumap:across"/>
+          <p:cNvPr id="804" name="lineage:XDP-&gt;XDP devmap / cpumap:across"/>
           <p:cNvCxnSpPr/>
           <p:nvPr/>
         </p:nvCxnSpPr>
@@ -6207,7 +6217,7 @@
       </p:cxnSp>
       <p:cxnSp>
         <p:nvCxnSpPr>
-          <p:cNvPr id="806" name="lineage:XDP-&gt;XDP multi-buffer:across:before-label"/>
+          <p:cNvPr id="805" name="lineage:XDP-&gt;XDP multi-buffer:across:before-label"/>
           <p:cNvCxnSpPr/>
           <p:nvPr/>
         </p:nvCxnSpPr>
@@ -6242,7 +6252,7 @@
       </p:cxnSp>
       <p:cxnSp>
         <p:nvCxnSpPr>
-          <p:cNvPr id="807" name="lineage:XDP-&gt;XDP multi-buffer:across"/>
+          <p:cNvPr id="806" name="lineage:XDP-&gt;XDP multi-buffer:across"/>
           <p:cNvCxnSpPr/>
           <p:nvPr/>
         </p:nvCxnSpPr>
@@ -6278,7 +6288,7 @@
       </p:cxnSp>
       <p:cxnSp>
         <p:nvCxnSpPr>
-          <p:cNvPr id="808" name="lineage:XDP-&gt;AF_XDP:across"/>
+          <p:cNvPr id="807" name="lineage:XDP-&gt;AF_XDP:across"/>
           <p:cNvCxnSpPr/>
           <p:nvPr/>
         </p:nvCxnSpPr>
@@ -6314,7 +6324,7 @@
       </p:cxnSp>
       <p:cxnSp>
         <p:nvCxnSpPr>
-          <p:cNvPr id="809" name="lineage:XDP multi-buffer-&gt;AF_XDP multi-buffer"/>
+          <p:cNvPr id="808" name="lineage:XDP multi-buffer-&gt;AF_XDP multi-buffer"/>
           <p:cNvCxnSpPr/>
           <p:nvPr/>
         </p:nvCxnSpPr>
@@ -6350,7 +6360,7 @@
       </p:cxnSp>
       <p:cxnSp>
         <p:nvCxnSpPr>
-          <p:cNvPr id="810" name="lineage:AF_XDP:trunk"/>
+          <p:cNvPr id="809" name="lineage:AF_XDP:trunk"/>
           <p:cNvCxnSpPr/>
           <p:nvPr/>
         </p:nvCxnSpPr>
@@ -6385,7 +6395,7 @@
       </p:cxnSp>
       <p:cxnSp>
         <p:nvCxnSpPr>
-          <p:cNvPr id="811" name="lineage:AF_XDP-&gt;AF_XDP multi-buffer:across:before-label"/>
+          <p:cNvPr id="810" name="lineage:AF_XDP-&gt;AF_XDP multi-buffer:across:before-label"/>
           <p:cNvCxnSpPr/>
           <p:nvPr/>
         </p:nvCxnSpPr>
@@ -6420,7 +6430,7 @@
       </p:cxnSp>
       <p:cxnSp>
         <p:nvCxnSpPr>
-          <p:cNvPr id="812" name="lineage:AF_XDP-&gt;AF_XDP multi-buffer:across"/>
+          <p:cNvPr id="811" name="lineage:AF_XDP-&gt;AF_XDP multi-buffer:across"/>
           <p:cNvCxnSpPr/>
           <p:nvPr/>
         </p:nvCxnSpPr>
@@ -6456,7 +6466,7 @@
       </p:cxnSp>
       <p:cxnSp>
         <p:nvCxnSpPr>
-          <p:cNvPr id="813" name="lineage:page_pool:trunk"/>
+          <p:cNvPr id="812" name="lineage:page_pool:trunk"/>
           <p:cNvCxnSpPr/>
           <p:nvPr/>
         </p:nvCxnSpPr>
@@ -6491,7 +6501,7 @@
       </p:cxnSp>
       <p:cxnSp>
         <p:nvCxnSpPr>
-          <p:cNvPr id="814" name="lineage:page_pool-&gt;netmem:across:before-label"/>
+          <p:cNvPr id="813" name="lineage:page_pool-&gt;netmem:across:before-label"/>
           <p:cNvCxnSpPr/>
           <p:nvPr/>
         </p:nvCxnSpPr>
@@ -6526,7 +6536,7 @@
       </p:cxnSp>
       <p:cxnSp>
         <p:nvCxnSpPr>
-          <p:cNvPr id="815" name="lineage:page_pool-&gt;netmem:across"/>
+          <p:cNvPr id="814" name="lineage:page_pool-&gt;netmem:across"/>
           <p:cNvCxnSpPr/>
           <p:nvPr/>
         </p:nvCxnSpPr>
@@ -6562,7 +6572,7 @@
       </p:cxnSp>
       <p:cxnSp>
         <p:nvCxnSpPr>
-          <p:cNvPr id="816" name="lineage:netmem-&gt;Device Memory TCP RX"/>
+          <p:cNvPr id="815" name="lineage:netmem-&gt;Device Memory TCP RX · TX"/>
           <p:cNvCxnSpPr/>
           <p:nvPr/>
         </p:nvCxnSpPr>
@@ -6598,14 +6608,14 @@
       </p:cxnSp>
       <p:cxnSp>
         <p:nvCxnSpPr>
-          <p:cNvPr id="817" name="lineage:Device Memory TCP RX:trunk"/>
+          <p:cNvPr id="816" name="lineage:Device Memory TCP RX · TX:trunk"/>
           <p:cNvCxnSpPr/>
           <p:nvPr/>
         </p:nvCxnSpPr>
         <p:spPr>
           <a:xfrm>
             <a:off x="12654611" y="4426117"/>
-            <a:ext cx="0" cy="139352"/>
+            <a:ext cx="0" cy="148496"/>
           </a:xfrm>
           <a:prstGeom prst="line">
             <a:avLst/>
@@ -6614,6 +6624,41 @@
             <a:solidFill>
               <a:srgbClr val="475569"/>
             </a:solidFill>
+          </a:ln>
+        </p:spPr>
+        <p:style>
+          <a:lnRef idx="2">
+            <a:schemeClr val="accent1"/>
+          </a:lnRef>
+          <a:fillRef idx="0">
+            <a:schemeClr val="accent1"/>
+          </a:fillRef>
+          <a:effectRef idx="1">
+            <a:schemeClr val="accent1"/>
+          </a:effectRef>
+          <a:fontRef idx="minor">
+            <a:schemeClr val="tx1"/>
+          </a:fontRef>
+        </p:style>
+      </p:cxnSp>
+      <p:cxnSp>
+        <p:nvCxnSpPr>
+          <p:cNvPr id="817" name="lineage:Device Memory TCP RX · TX-&gt;devmem RX buffers &gt; PAGE_SIZE:across"/>
+          <p:cNvCxnSpPr/>
+          <p:nvPr/>
+        </p:nvCxnSpPr>
+        <p:spPr>
+          <a:xfrm>
+            <a:off x="12654611" y="4477505"/>
+            <a:ext cx="1171927" cy="0"/>
+          </a:xfrm>
+          <a:prstGeom prst="line">
+            <a:avLst/>
+          </a:prstGeom>
+          <a:ln w="12700">
+            <a:solidFill>
+              <a:srgbClr val="475569"/>
+            </a:solidFill>
             <a:tailEnd type="triangle" w="sm" len="sm"/>
           </a:ln>
         </p:spPr>
@@ -6632,15 +6677,87 @@
           </a:fontRef>
         </p:style>
       </p:cxnSp>
-      <p:sp>
-        <p:nvSpPr>
-          <p:cNvPr id="818" name="lineage:Device Memory TCP RX-&gt;Device Memory TCP TX:junction"/>
+      <p:cxnSp>
+        <p:nvCxnSpPr>
+          <p:cNvPr id="818" name="lineage:Device Memory TCP RX · TX-&gt;page_pool memory-provider hooks:across"/>
+          <p:cNvCxnSpPr/>
+          <p:nvPr/>
+        </p:nvCxnSpPr>
+        <p:spPr>
+          <a:xfrm>
+            <a:off x="12654611" y="4574613"/>
+            <a:ext cx="312160" cy="0"/>
+          </a:xfrm>
+          <a:prstGeom prst="line">
+            <a:avLst/>
+          </a:prstGeom>
+          <a:ln w="12700">
+            <a:solidFill>
+              <a:srgbClr val="475569"/>
+            </a:solidFill>
+            <a:tailEnd type="triangle" w="sm" len="sm"/>
+          </a:ln>
+        </p:spPr>
+        <p:style>
+          <a:lnRef idx="2">
+            <a:schemeClr val="accent1"/>
+          </a:lnRef>
+          <a:fillRef idx="0">
+            <a:schemeClr val="accent1"/>
+          </a:fillRef>
+          <a:effectRef idx="1">
+            <a:schemeClr val="accent1"/>
+          </a:effectRef>
+          <a:fontRef idx="minor">
+            <a:schemeClr val="tx1"/>
+          </a:fontRef>
+        </p:style>
+      </p:cxnSp>
+      <p:cxnSp>
+        <p:nvCxnSpPr>
+          <p:cNvPr id="819" name="lineage:page_pool memory-provider hooks:trunk"/>
+          <p:cNvCxnSpPr/>
+          <p:nvPr/>
+        </p:nvCxnSpPr>
+        <p:spPr>
+          <a:xfrm>
+            <a:off x="13012491" y="4620333"/>
+            <a:ext cx="0" cy="100490"/>
+          </a:xfrm>
+          <a:prstGeom prst="line">
+            <a:avLst/>
+          </a:prstGeom>
+          <a:ln w="12700">
+            <a:solidFill>
+              <a:srgbClr val="475569"/>
+            </a:solidFill>
+            <a:tailEnd type="triangle" w="sm" len="sm"/>
+          </a:ln>
+        </p:spPr>
+        <p:style>
+          <a:lnRef idx="2">
+            <a:schemeClr val="accent1"/>
+          </a:lnRef>
+          <a:fillRef idx="0">
+            <a:schemeClr val="accent1"/>
+          </a:fillRef>
+          <a:effectRef idx="1">
+            <a:schemeClr val="accent1"/>
+          </a:effectRef>
+          <a:fontRef idx="minor">
+            <a:schemeClr val="tx1"/>
+          </a:fontRef>
+        </p:style>
+      </p:cxnSp>
+      <p:sp>
+        <p:nvSpPr>
+          <p:cNvPr id="820" name="lineage:page_pool memory-provider hooks-&gt;large RX buffers (providers / ZCRX):junction"/>
           <p:cNvSpPr/>
           <p:nvPr/>
         </p:nvSpPr>
         <p:spPr>
           <a:xfrm>
-            <a:off x="12634494" y="4457388"/>
+            <a:off x="12992374" y="4651604"/>
             <a:ext cx="40233" cy="40233"/>
           </a:xfrm>
           <a:prstGeom prst="ellipse">
@@ -6678,13 +6795,13 @@
       </p:sp>
       <p:cxnSp>
         <p:nvCxnSpPr>
-          <p:cNvPr id="819" name="lineage:io_uring ZCRX / memory-provider hooks-&gt;large RX buffers (mem. providers)"/>
+          <p:cNvPr id="821" name="lineage:per-netns RTNL-&gt;further RTNL breakup"/>
           <p:cNvCxnSpPr/>
           <p:nvPr/>
         </p:nvCxnSpPr>
         <p:spPr>
           <a:xfrm>
-            <a:off x="13012491" y="4620333"/>
+            <a:off x="12772954" y="5391529"/>
             <a:ext cx="0" cy="42244"/>
           </a:xfrm>
           <a:prstGeom prst="line">
@@ -6714,43 +6831,7 @@
       </p:cxnSp>
       <p:cxnSp>
         <p:nvCxnSpPr>
-          <p:cNvPr id="820" name="lineage:per-netns RTNL-&gt;further RTNL breakup"/>
-          <p:cNvCxnSpPr/>
-          <p:nvPr/>
-        </p:nvCxnSpPr>
-        <p:spPr>
-          <a:xfrm>
-            <a:off x="12772954" y="5391529"/>
-            <a:ext cx="0" cy="42244"/>
-          </a:xfrm>
-          <a:prstGeom prst="line">
-            <a:avLst/>
-          </a:prstGeom>
-          <a:ln w="12700">
-            <a:solidFill>
-              <a:srgbClr val="475569"/>
-            </a:solidFill>
-            <a:tailEnd type="triangle" w="sm" len="sm"/>
-          </a:ln>
-        </p:spPr>
-        <p:style>
-          <a:lnRef idx="2">
-            <a:schemeClr val="accent1"/>
-          </a:lnRef>
-          <a:fillRef idx="0">
-            <a:schemeClr val="accent1"/>
-          </a:fillRef>
-          <a:effectRef idx="1">
-            <a:schemeClr val="accent1"/>
-          </a:effectRef>
-          <a:fontRef idx="minor">
-            <a:schemeClr val="tx1"/>
-          </a:fontRef>
-        </p:style>
-      </p:cxnSp>
-      <p:cxnSp>
-        <p:nvCxnSpPr>
-          <p:cNvPr id="821" name="lineage:further RTNL breakup:trunk"/>
+          <p:cNvPr id="822" name="lineage:further RTNL breakup:trunk"/>
           <p:cNvCxnSpPr/>
           <p:nvPr/>
         </p:nvCxnSpPr>
@@ -6785,7 +6866,7 @@
       </p:cxnSp>
       <p:sp>
         <p:nvSpPr>
-          <p:cNvPr id="822" name="lineage:further RTNL breakup-&gt;RTNL-less FIB rules:junction"/>
+          <p:cNvPr id="823" name="lineage:further RTNL breakup-&gt;RTNL-less FIB rules:junction"/>
           <p:cNvSpPr/>
           <p:nvPr/>
         </p:nvSpPr>
@@ -6829,7 +6910,7 @@
       </p:sp>
       <p:cxnSp>
         <p:nvCxnSpPr>
-          <p:cNvPr id="823" name="lineage:further RTNL breakup-&gt;per-netns netdev unregistration:across"/>
+          <p:cNvPr id="824" name="lineage:further RTNL breakup-&gt;per-netns netdev unregistration:across"/>
           <p:cNvCxnSpPr/>
           <p:nvPr/>
         </p:nvCxnSpPr>
@@ -6865,7 +6946,7 @@
       </p:cxnSp>
       <p:cxnSp>
         <p:nvCxnSpPr>
-          <p:cNvPr id="824" name="lineage:structured drop reason-&gt;drop-reason expansion"/>
+          <p:cNvPr id="825" name="lineage:structured drop reason-&gt;drop-reason expansion"/>
           <p:cNvCxnSpPr/>
           <p:nvPr/>
         </p:nvCxnSpPr>
@@ -6901,7 +6982,7 @@
       </p:cxnSp>
       <p:cxnSp>
         <p:nvCxnSpPr>
-          <p:cNvPr id="825" name="lineage:switchdev-&gt;devlink"/>
+          <p:cNvPr id="826" name="lineage:switchdev-&gt;devlink"/>
           <p:cNvCxnSpPr/>
           <p:nvPr/>
         </p:nvCxnSpPr>
@@ -6937,7 +7018,7 @@
       </p:cxnSp>
       <p:cxnSp>
         <p:nvCxnSpPr>
-          <p:cNvPr id="826" name="lineage:devlink:trunk"/>
+          <p:cNvPr id="827" name="lineage:devlink:trunk"/>
           <p:cNvCxnSpPr/>
           <p:nvPr/>
         </p:nvCxnSpPr>
@@ -6972,7 +7053,7 @@
       </p:cxnSp>
       <p:cxnSp>
         <p:nvCxnSpPr>
-          <p:cNvPr id="827" name="lineage:devlink-&gt;devlink health:across:before-label"/>
+          <p:cNvPr id="828" name="lineage:devlink-&gt;devlink health:across:before-label"/>
           <p:cNvCxnSpPr/>
           <p:nvPr/>
         </p:nvCxnSpPr>
@@ -7007,7 +7088,7 @@
       </p:cxnSp>
       <p:cxnSp>
         <p:nvCxnSpPr>
-          <p:cNvPr id="828" name="lineage:devlink-&gt;devlink health:across"/>
+          <p:cNvPr id="829" name="lineage:devlink-&gt;devlink health:across"/>
           <p:cNvCxnSpPr/>
           <p:nvPr/>
         </p:nvCxnSpPr>
@@ -7043,7 +7124,7 @@
       </p:cxnSp>
       <p:cxnSp>
         <p:nvCxnSpPr>
-          <p:cNvPr id="829" name="lineage:YNL tooling-&gt;queue/NAPI/page_pool netdev-genl"/>
+          <p:cNvPr id="830" name="lineage:YNL tooling-&gt;queue/NAPI/page_pool netdev-genl"/>
           <p:cNvCxnSpPr/>
           <p:nvPr/>
         </p:nvCxnSpPr>
@@ -12843,7 +12924,7 @@
       </p:sp>
       <p:sp>
         <p:nvSpPr>
-          <p:cNvPr id="608" name="row:Device Memory TCP RX:name"/>
+          <p:cNvPr id="608" name="row:Device Memory TCP RX · TX:name"/>
           <p:cNvSpPr txBox="1"/>
           <p:nvPr/>
         </p:nvSpPr>
@@ -12870,14 +12951,14 @@
                   <a:srgbClr val="1F2937"/>
                 </a:solidFill>
               </a:rPr>
-              <a:t>Device Memory TCP RX</a:t>
+              <a:t>Device Memory TCP RX · TX</a:t>
             </a:r>
           </a:p>
         </p:txBody>
       </p:sp>
       <p:cxnSp>
         <p:nvCxnSpPr>
-          <p:cNvPr id="609" name="row:Device Memory TCP RX:development"/>
+          <p:cNvPr id="609" name="row:Device Memory TCP RX · TX:development"/>
           <p:cNvCxnSpPr/>
           <p:nvPr/>
         </p:nvCxnSpPr>
@@ -12913,7 +12994,7 @@
       </p:cxnSp>
       <p:sp>
         <p:nvSpPr>
-          <p:cNvPr id="610" name="row:Device Memory TCP RX:start"/>
+          <p:cNvPr id="610" name="row:Device Memory TCP RX · TX:start"/>
           <p:cNvSpPr/>
           <p:nvPr/>
         </p:nvSpPr>
@@ -12957,9 +13038,44 @@
           </a:p>
         </p:txBody>
       </p:sp>
-      <p:sp>
-        <p:nvSpPr>
-          <p:cNvPr id="611" name="row:Device Memory TCP RX:release:6.12"/>
+      <p:cxnSp>
+        <p:nvCxnSpPr>
+          <p:cNvPr id="611" name="row:Device Memory TCP RX · TX:milestones"/>
+          <p:cNvCxnSpPr/>
+          <p:nvPr/>
+        </p:nvCxnSpPr>
+        <p:spPr>
+          <a:xfrm>
+            <a:off x="12654611" y="4380397"/>
+            <a:ext cx="477649" cy="0"/>
+          </a:xfrm>
+          <a:prstGeom prst="line">
+            <a:avLst/>
+          </a:prstGeom>
+          <a:ln w="19050">
+            <a:solidFill>
+              <a:srgbClr val="16A34A"/>
+            </a:solidFill>
+          </a:ln>
+        </p:spPr>
+        <p:style>
+          <a:lnRef idx="2">
+            <a:schemeClr val="accent1"/>
+          </a:lnRef>
+          <a:fillRef idx="0">
+            <a:schemeClr val="accent1"/>
+          </a:fillRef>
+          <a:effectRef idx="1">
+            <a:schemeClr val="accent1"/>
+          </a:effectRef>
+          <a:fontRef idx="minor">
+            <a:schemeClr val="tx1"/>
+          </a:fontRef>
+        </p:style>
+      </p:cxnSp>
+      <p:sp>
+        <p:nvSpPr>
+          <p:cNvPr id="612" name="row:Device Memory TCP RX · TX:release:6.12"/>
           <p:cNvSpPr/>
           <p:nvPr/>
         </p:nvSpPr>
@@ -13005,13 +13121,59 @@
       </p:sp>
       <p:sp>
         <p:nvSpPr>
-          <p:cNvPr id="612" name="row:Device Memory TCP RX:label"/>
+          <p:cNvPr id="613" name="row:Device Memory TCP RX · TX:release:6.16"/>
+          <p:cNvSpPr/>
+          <p:nvPr/>
+        </p:nvSpPr>
+        <p:spPr>
+          <a:xfrm>
+            <a:off x="13088826" y="4336963"/>
+            <a:ext cx="86868" cy="86868"/>
+          </a:xfrm>
+          <a:prstGeom prst="ellipse">
+            <a:avLst/>
+          </a:prstGeom>
+          <a:solidFill>
+            <a:srgbClr val="16A34A"/>
+          </a:solidFill>
+          <a:ln w="12700">
+            <a:solidFill>
+              <a:srgbClr val="16A34A"/>
+            </a:solidFill>
+          </a:ln>
+          <a:effectLst/>
+        </p:spPr>
+        <p:style>
+          <a:lnRef idx="1">
+            <a:schemeClr val="accent1"/>
+          </a:lnRef>
+          <a:fillRef idx="3">
+            <a:schemeClr val="accent1"/>
+          </a:fillRef>
+          <a:effectRef idx="2">
+            <a:schemeClr val="accent1"/>
+          </a:effectRef>
+          <a:fontRef idx="minor">
+            <a:schemeClr val="lt1"/>
+          </a:fontRef>
+        </p:style>
+        <p:txBody>
+          <a:bodyPr rtlCol="0" anchor="ctr"/>
+          <a:lstStyle/>
+          <a:p>
+            <a:endParaRPr/>
+          </a:p>
+        </p:txBody>
+      </p:sp>
+      <p:sp>
+        <p:nvSpPr>
+          <p:cNvPr id="614" name="row:Device Memory TCP RX · TX:label"/>
           <p:cNvSpPr txBox="1"/>
           <p:nvPr/>
         </p:nvSpPr>
         <p:spPr>
           <a:xfrm>
-            <a:off x="12727763" y="4270669"/>
+            <a:off x="13205412" y="4270669"/>
             <a:ext cx="1005840" cy="219456"/>
           </a:xfrm>
           <a:prstGeom prst="rect">
@@ -13032,14 +13194,14 @@
                   <a:srgbClr val="1F2937"/>
                 </a:solidFill>
               </a:rPr>
-              <a:t>6.12</a:t>
-            </a:r>
-          </a:p>
-        </p:txBody>
-      </p:sp>
-      <p:sp>
-        <p:nvSpPr>
-          <p:cNvPr id="614" name="row:Device Memory TCP TX:name"/>
+              <a:t>6.12 · 6.16</a:t>
+            </a:r>
+          </a:p>
+        </p:txBody>
+      </p:sp>
+      <p:sp>
+        <p:nvSpPr>
+          <p:cNvPr id="616" name="row:devmem RX buffers &gt; PAGE_SIZE:name"/>
           <p:cNvSpPr txBox="1"/>
           <p:nvPr/>
         </p:nvSpPr>
@@ -13066,21 +13228,249 @@
                   <a:srgbClr val="1F2937"/>
                 </a:solidFill>
               </a:rPr>
-              <a:t>Device Memory TCP TX</a:t>
+              <a:t>devmem RX buffers &gt; PAGE_SIZE</a:t>
+            </a:r>
+          </a:p>
+        </p:txBody>
+      </p:sp>
+      <p:sp>
+        <p:nvSpPr>
+          <p:cNvPr id="617" name="row:devmem RX buffers &gt; PAGE_SIZE:release:7.3-rc"/>
+          <p:cNvSpPr/>
+          <p:nvPr/>
+        </p:nvSpPr>
+        <p:spPr>
+          <a:xfrm>
+            <a:off x="13828824" y="4434071"/>
+            <a:ext cx="86868" cy="86868"/>
+          </a:xfrm>
+          <a:prstGeom prst="ellipse">
+            <a:avLst/>
+          </a:prstGeom>
+          <a:solidFill>
+            <a:srgbClr val="16A34A"/>
+          </a:solidFill>
+          <a:ln w="12700">
+            <a:solidFill>
+              <a:srgbClr val="16A34A"/>
+            </a:solidFill>
+          </a:ln>
+          <a:effectLst/>
+        </p:spPr>
+        <p:style>
+          <a:lnRef idx="1">
+            <a:schemeClr val="accent1"/>
+          </a:lnRef>
+          <a:fillRef idx="3">
+            <a:schemeClr val="accent1"/>
+          </a:fillRef>
+          <a:effectRef idx="2">
+            <a:schemeClr val="accent1"/>
+          </a:effectRef>
+          <a:fontRef idx="minor">
+            <a:schemeClr val="lt1"/>
+          </a:fontRef>
+        </p:style>
+        <p:txBody>
+          <a:bodyPr rtlCol="0" anchor="ctr"/>
+          <a:lstStyle/>
+          <a:p>
+            <a:endParaRPr/>
+          </a:p>
+        </p:txBody>
+      </p:sp>
+      <p:sp>
+        <p:nvSpPr>
+          <p:cNvPr id="618" name="row:devmem RX buffers &gt; PAGE_SIZE:label"/>
+          <p:cNvSpPr txBox="1"/>
+          <p:nvPr/>
+        </p:nvSpPr>
+        <p:spPr>
+          <a:xfrm>
+            <a:off x="13945410" y="4367777"/>
+            <a:ext cx="1005840" cy="219456"/>
+          </a:xfrm>
+          <a:prstGeom prst="rect">
+            <a:avLst/>
+          </a:prstGeom>
+          <a:noFill/>
+        </p:spPr>
+        <p:txBody>
+          <a:bodyPr wrap="square" lIns="0" tIns="0" rIns="0" bIns="0" anchor="ctr">
+            <a:noAutofit/>
+          </a:bodyPr>
+          <a:lstStyle/>
+          <a:p>
+            <a:pPr algn="l"/>
+            <a:r>
+              <a:rPr sz="725" b="1" i="0">
+                <a:solidFill>
+                  <a:srgbClr val="1F2937"/>
+                </a:solidFill>
+              </a:rPr>
+              <a:t>7.3-rc</a:t>
+            </a:r>
+          </a:p>
+        </p:txBody>
+      </p:sp>
+      <p:sp>
+        <p:nvSpPr>
+          <p:cNvPr id="619" name="row:page_pool memory-provider hooks:name"/>
+          <p:cNvSpPr txBox="1"/>
+          <p:nvPr/>
+        </p:nvSpPr>
+        <p:spPr>
+          <a:xfrm>
+            <a:off x="1325880" y="4464885"/>
+            <a:ext cx="1572768" cy="219456"/>
+          </a:xfrm>
+          <a:prstGeom prst="rect">
+            <a:avLst/>
+          </a:prstGeom>
+          <a:noFill/>
+        </p:spPr>
+        <p:txBody>
+          <a:bodyPr wrap="square" lIns="0" tIns="0" rIns="0" bIns="0" anchor="ctr">
+            <a:noAutofit/>
+          </a:bodyPr>
+          <a:lstStyle/>
+          <a:p>
+            <a:pPr algn="r"/>
+            <a:r>
+              <a:rPr sz="750" b="0" i="0">
+                <a:solidFill>
+                  <a:srgbClr val="1F2937"/>
+                </a:solidFill>
+              </a:rPr>
+              <a:t>page_pool memory-provider hooks</a:t>
+            </a:r>
+          </a:p>
+        </p:txBody>
+      </p:sp>
+      <p:sp>
+        <p:nvSpPr>
+          <p:cNvPr id="620" name="row:page_pool memory-provider hooks:release:6.15"/>
+          <p:cNvSpPr/>
+          <p:nvPr/>
+        </p:nvSpPr>
+        <p:spPr>
+          <a:xfrm>
+            <a:off x="12969057" y="4531179"/>
+            <a:ext cx="86868" cy="86868"/>
+          </a:xfrm>
+          <a:prstGeom prst="ellipse">
+            <a:avLst/>
+          </a:prstGeom>
+          <a:solidFill>
+            <a:srgbClr val="16A34A"/>
+          </a:solidFill>
+          <a:ln w="12700">
+            <a:solidFill>
+              <a:srgbClr val="16A34A"/>
+            </a:solidFill>
+          </a:ln>
+          <a:effectLst/>
+        </p:spPr>
+        <p:style>
+          <a:lnRef idx="1">
+            <a:schemeClr val="accent1"/>
+          </a:lnRef>
+          <a:fillRef idx="3">
+            <a:schemeClr val="accent1"/>
+          </a:fillRef>
+          <a:effectRef idx="2">
+            <a:schemeClr val="accent1"/>
+          </a:effectRef>
+          <a:fontRef idx="minor">
+            <a:schemeClr val="lt1"/>
+          </a:fontRef>
+        </p:style>
+        <p:txBody>
+          <a:bodyPr rtlCol="0" anchor="ctr"/>
+          <a:lstStyle/>
+          <a:p>
+            <a:endParaRPr/>
+          </a:p>
+        </p:txBody>
+      </p:sp>
+      <p:sp>
+        <p:nvSpPr>
+          <p:cNvPr id="621" name="row:page_pool memory-provider hooks:label"/>
+          <p:cNvSpPr txBox="1"/>
+          <p:nvPr/>
+        </p:nvSpPr>
+        <p:spPr>
+          <a:xfrm>
+            <a:off x="13085643" y="4464885"/>
+            <a:ext cx="1005840" cy="219456"/>
+          </a:xfrm>
+          <a:prstGeom prst="rect">
+            <a:avLst/>
+          </a:prstGeom>
+          <a:noFill/>
+        </p:spPr>
+        <p:txBody>
+          <a:bodyPr wrap="square" lIns="0" tIns="0" rIns="0" bIns="0" anchor="ctr">
+            <a:noAutofit/>
+          </a:bodyPr>
+          <a:lstStyle/>
+          <a:p>
+            <a:pPr algn="l"/>
+            <a:r>
+              <a:rPr sz="725" b="1" i="0">
+                <a:solidFill>
+                  <a:srgbClr val="1F2937"/>
+                </a:solidFill>
+              </a:rPr>
+              <a:t>6.15</a:t>
+            </a:r>
+          </a:p>
+        </p:txBody>
+      </p:sp>
+      <p:sp>
+        <p:nvSpPr>
+          <p:cNvPr id="622" name="row:large RX buffers (providers / ZCRX):name"/>
+          <p:cNvSpPr txBox="1"/>
+          <p:nvPr/>
+        </p:nvSpPr>
+        <p:spPr>
+          <a:xfrm>
+            <a:off x="1325880" y="4561993"/>
+            <a:ext cx="1572768" cy="219456"/>
+          </a:xfrm>
+          <a:prstGeom prst="rect">
+            <a:avLst/>
+          </a:prstGeom>
+          <a:noFill/>
+        </p:spPr>
+        <p:txBody>
+          <a:bodyPr wrap="square" lIns="0" tIns="0" rIns="0" bIns="0" anchor="ctr">
+            <a:noAutofit/>
+          </a:bodyPr>
+          <a:lstStyle/>
+          <a:p>
+            <a:pPr algn="r"/>
+            <a:r>
+              <a:rPr sz="750" b="0" i="0">
+                <a:solidFill>
+                  <a:srgbClr val="1F2937"/>
+                </a:solidFill>
+              </a:rPr>
+              <a:t>large RX buffers (providers / ZCRX)</a:t>
             </a:r>
           </a:p>
         </p:txBody>
       </p:sp>
       <p:cxnSp>
         <p:nvCxnSpPr>
-          <p:cNvPr id="615" name="row:Device Memory TCP TX:development"/>
+          <p:cNvPr id="623" name="row:large RX buffers (providers / ZCRX):development"/>
           <p:cNvCxnSpPr/>
           <p:nvPr/>
         </p:nvCxnSpPr>
         <p:spPr>
           <a:xfrm>
-            <a:off x="12030475" y="4477505"/>
-            <a:ext cx="1101785" cy="0"/>
+            <a:off x="12724847" y="4671721"/>
+            <a:ext cx="900270" cy="0"/>
           </a:xfrm>
           <a:prstGeom prst="line">
             <a:avLst/>
@@ -13109,13 +13499,13 @@
       </p:cxnSp>
       <p:sp>
         <p:nvSpPr>
-          <p:cNvPr id="616" name="row:Device Memory TCP TX:start"/>
+          <p:cNvPr id="624" name="row:large RX buffers (providers / ZCRX):start"/>
           <p:cNvSpPr/>
           <p:nvPr/>
         </p:nvSpPr>
         <p:spPr>
           <a:xfrm>
-            <a:off x="11998471" y="4445501"/>
+            <a:off x="12692843" y="4639717"/>
             <a:ext cx="64008" cy="64008"/>
           </a:xfrm>
           <a:prstGeom prst="ellipse">
@@ -13155,13 +13545,13 @@
       </p:sp>
       <p:sp>
         <p:nvSpPr>
-          <p:cNvPr id="617" name="row:Device Memory TCP TX:release:6.16"/>
+          <p:cNvPr id="625" name="row:large RX buffers (providers / ZCRX):release:7.0"/>
           <p:cNvSpPr/>
           <p:nvPr/>
         </p:nvSpPr>
         <p:spPr>
           <a:xfrm>
-            <a:off x="13088826" y="4434071"/>
+            <a:off x="13581683" y="4628287"/>
             <a:ext cx="86868" cy="86868"/>
           </a:xfrm>
           <a:prstGeom prst="ellipse">
@@ -13201,13 +13591,13 @@
       </p:sp>
       <p:sp>
         <p:nvSpPr>
-          <p:cNvPr id="618" name="row:Device Memory TCP TX:label"/>
+          <p:cNvPr id="626" name="row:large RX buffers (providers / ZCRX):label"/>
           <p:cNvSpPr txBox="1"/>
           <p:nvPr/>
         </p:nvSpPr>
         <p:spPr>
           <a:xfrm>
-            <a:off x="13205412" y="4367777"/>
+            <a:off x="13698269" y="4561993"/>
             <a:ext cx="1005840" cy="219456"/>
           </a:xfrm>
           <a:prstGeom prst="rect">
@@ -13228,20 +13618,20 @@
                   <a:srgbClr val="1F2937"/>
                 </a:solidFill>
               </a:rPr>
-              <a:t>6.16</a:t>
-            </a:r>
-          </a:p>
-        </p:txBody>
-      </p:sp>
-      <p:sp>
-        <p:nvSpPr>
-          <p:cNvPr id="620" name="row:io_uring ZCRX / memory-provider hooks:name"/>
+              <a:t>7.0</a:t>
+            </a:r>
+          </a:p>
+        </p:txBody>
+      </p:sp>
+      <p:sp>
+        <p:nvSpPr>
+          <p:cNvPr id="628" name="row:io_uring ZCRX:name"/>
           <p:cNvSpPr txBox="1"/>
           <p:nvPr/>
         </p:nvSpPr>
         <p:spPr>
           <a:xfrm>
-            <a:off x="1325880" y="4464885"/>
+            <a:off x="1325880" y="4659101"/>
             <a:ext cx="1572768" cy="219456"/>
           </a:xfrm>
           <a:prstGeom prst="rect">
@@ -13262,20 +13652,20 @@
                   <a:srgbClr val="1F2937"/>
                 </a:solidFill>
               </a:rPr>
-              <a:t>io_uring ZCRX / memory-provider hooks</a:t>
+              <a:t>io_uring ZCRX</a:t>
             </a:r>
           </a:p>
         </p:txBody>
       </p:sp>
       <p:cxnSp>
         <p:nvCxnSpPr>
-          <p:cNvPr id="621" name="row:io_uring ZCRX / memory-provider hooks:development"/>
+          <p:cNvPr id="629" name="row:io_uring ZCRX:development"/>
           <p:cNvCxnSpPr/>
           <p:nvPr/>
         </p:nvCxnSpPr>
         <p:spPr>
           <a:xfrm>
-            <a:off x="11613851" y="4574613"/>
+            <a:off x="11613851" y="4768829"/>
             <a:ext cx="1398640" cy="0"/>
           </a:xfrm>
           <a:prstGeom prst="line">
@@ -13305,13 +13695,13 @@
       </p:cxnSp>
       <p:sp>
         <p:nvSpPr>
-          <p:cNvPr id="622" name="row:io_uring ZCRX / memory-provider hooks:start"/>
+          <p:cNvPr id="630" name="row:io_uring ZCRX:start"/>
           <p:cNvSpPr/>
           <p:nvPr/>
         </p:nvSpPr>
         <p:spPr>
           <a:xfrm>
-            <a:off x="11581847" y="4542609"/>
+            <a:off x="11581847" y="4736825"/>
             <a:ext cx="64008" cy="64008"/>
           </a:xfrm>
           <a:prstGeom prst="ellipse">
@@ -13351,13 +13741,13 @@
       </p:sp>
       <p:sp>
         <p:nvSpPr>
-          <p:cNvPr id="623" name="row:io_uring ZCRX / memory-provider hooks:release:6.15"/>
+          <p:cNvPr id="631" name="row:io_uring ZCRX:release:6.15"/>
           <p:cNvSpPr/>
           <p:nvPr/>
         </p:nvSpPr>
         <p:spPr>
           <a:xfrm>
-            <a:off x="12969057" y="4531179"/>
+            <a:off x="12969057" y="4725395"/>
             <a:ext cx="86868" cy="86868"/>
           </a:xfrm>
           <a:prstGeom prst="ellipse">
@@ -13397,13 +13787,13 @@
       </p:sp>
       <p:sp>
         <p:nvSpPr>
-          <p:cNvPr id="624" name="row:io_uring ZCRX / memory-provider hooks:label"/>
+          <p:cNvPr id="632" name="row:io_uring ZCRX:label"/>
           <p:cNvSpPr txBox="1"/>
           <p:nvPr/>
         </p:nvSpPr>
         <p:spPr>
           <a:xfrm>
-            <a:off x="13085643" y="4464885"/>
+            <a:off x="13085643" y="4659101"/>
             <a:ext cx="1005840" cy="219456"/>
           </a:xfrm>
           <a:prstGeom prst="rect">
@@ -13431,13 +13821,13 @@
       </p:sp>
       <p:sp>
         <p:nvSpPr>
-          <p:cNvPr id="626" name="row:large RX buffers (mem. providers):name"/>
+          <p:cNvPr id="634" name="row:RX HW queue leasing:name"/>
           <p:cNvSpPr txBox="1"/>
           <p:nvPr/>
         </p:nvSpPr>
         <p:spPr>
           <a:xfrm>
-            <a:off x="1325880" y="4561993"/>
+            <a:off x="1325880" y="4756209"/>
             <a:ext cx="1572768" cy="219456"/>
           </a:xfrm>
           <a:prstGeom prst="rect">
@@ -13458,21 +13848,21 @@
                   <a:srgbClr val="1F2937"/>
                 </a:solidFill>
               </a:rPr>
-              <a:t>large RX buffers (mem. providers)</a:t>
+              <a:t>RX HW queue leasing</a:t>
             </a:r>
           </a:p>
         </p:txBody>
       </p:sp>
       <p:cxnSp>
         <p:nvCxnSpPr>
-          <p:cNvPr id="627" name="row:large RX buffers (mem. providers):development"/>
+          <p:cNvPr id="635" name="row:RX HW queue leasing:development"/>
           <p:cNvCxnSpPr/>
           <p:nvPr/>
         </p:nvCxnSpPr>
         <p:spPr>
           <a:xfrm>
-            <a:off x="12724847" y="4671721"/>
-            <a:ext cx="900270" cy="0"/>
+            <a:off x="12377661" y="4865937"/>
+            <a:ext cx="1367224" cy="0"/>
           </a:xfrm>
           <a:prstGeom prst="line">
             <a:avLst/>
@@ -13501,13 +13891,13 @@
       </p:cxnSp>
       <p:sp>
         <p:nvSpPr>
-          <p:cNvPr id="628" name="row:large RX buffers (mem. providers):start"/>
+          <p:cNvPr id="636" name="row:RX HW queue leasing:start"/>
           <p:cNvSpPr/>
           <p:nvPr/>
         </p:nvSpPr>
         <p:spPr>
           <a:xfrm>
-            <a:off x="12692843" y="4639717"/>
+            <a:off x="12345657" y="4833933"/>
             <a:ext cx="64008" cy="64008"/>
           </a:xfrm>
           <a:prstGeom prst="ellipse">
@@ -13547,13 +13937,13 @@
       </p:sp>
       <p:sp>
         <p:nvSpPr>
-          <p:cNvPr id="629" name="row:large RX buffers (mem. providers):release:7.0"/>
+          <p:cNvPr id="637" name="row:RX HW queue leasing:release:7.1"/>
           <p:cNvSpPr/>
           <p:nvPr/>
         </p:nvSpPr>
         <p:spPr>
           <a:xfrm>
-            <a:off x="13581683" y="4628287"/>
+            <a:off x="13701451" y="4822503"/>
             <a:ext cx="86868" cy="86868"/>
           </a:xfrm>
           <a:prstGeom prst="ellipse">
@@ -13593,13 +13983,13 @@
       </p:sp>
       <p:sp>
         <p:nvSpPr>
-          <p:cNvPr id="630" name="row:large RX buffers (mem. providers):label"/>
+          <p:cNvPr id="638" name="row:RX HW queue leasing:label"/>
           <p:cNvSpPr txBox="1"/>
           <p:nvPr/>
         </p:nvSpPr>
         <p:spPr>
           <a:xfrm>
-            <a:off x="13698269" y="4561993"/>
+            <a:off x="13818037" y="4756209"/>
             <a:ext cx="1005840" cy="219456"/>
           </a:xfrm>
           <a:prstGeom prst="rect">
@@ -13620,21 +14010,21 @@
                   <a:srgbClr val="1F2937"/>
                 </a:solidFill>
               </a:rPr>
-              <a:t>7.0</a:t>
-            </a:r>
-          </a:p>
-        </p:txBody>
-      </p:sp>
-      <p:sp>
-        <p:nvSpPr>
-          <p:cNvPr id="632" name="row:devmem buffers &gt; PAGE_SIZE:name"/>
+              <a:t>7.1</a:t>
+            </a:r>
+          </a:p>
+        </p:txBody>
+      </p:sp>
+      <p:sp>
+        <p:nvSpPr>
+          <p:cNvPr id="238" name="band-label:CONTROL PLANE"/>
           <p:cNvSpPr txBox="1"/>
           <p:nvPr/>
         </p:nvSpPr>
         <p:spPr>
           <a:xfrm>
-            <a:off x="1325880" y="4659101"/>
-            <a:ext cx="1572768" cy="219456"/>
+            <a:off x="384048" y="4987644"/>
+            <a:ext cx="1051560" cy="813439"/>
           </a:xfrm>
           <a:prstGeom prst="rect">
             <a:avLst/>
@@ -13647,74 +14037,29 @@
           </a:bodyPr>
           <a:lstStyle/>
           <a:p>
-            <a:pPr algn="r"/>
-            <a:r>
-              <a:rPr sz="750" b="0" i="0">
-                <a:solidFill>
-                  <a:srgbClr val="1F2937"/>
+            <a:pPr algn="l"/>
+            <a:r>
+              <a:rPr sz="1000" b="1" i="0">
+                <a:solidFill>
+                  <a:srgbClr val="DC2626"/>
                 </a:solidFill>
               </a:rPr>
-              <a:t>devmem buffers &gt; PAGE_SIZE</a:t>
-            </a:r>
-          </a:p>
-        </p:txBody>
-      </p:sp>
-      <p:sp>
-        <p:nvSpPr>
-          <p:cNvPr id="633" name="row:devmem buffers &gt; PAGE_SIZE:release:7.3-rc"/>
-          <p:cNvSpPr/>
-          <p:nvPr/>
-        </p:nvSpPr>
-        <p:spPr>
-          <a:xfrm>
-            <a:off x="13828824" y="4725395"/>
-            <a:ext cx="86868" cy="86868"/>
-          </a:xfrm>
-          <a:prstGeom prst="ellipse">
-            <a:avLst/>
-          </a:prstGeom>
-          <a:solidFill>
-            <a:srgbClr val="16A34A"/>
-          </a:solidFill>
-          <a:ln w="12700">
-            <a:solidFill>
-              <a:srgbClr val="16A34A"/>
-            </a:solidFill>
-          </a:ln>
-          <a:effectLst/>
-        </p:spPr>
-        <p:style>
-          <a:lnRef idx="1">
-            <a:schemeClr val="accent1"/>
-          </a:lnRef>
-          <a:fillRef idx="3">
-            <a:schemeClr val="accent1"/>
-          </a:fillRef>
-          <a:effectRef idx="2">
-            <a:schemeClr val="accent1"/>
-          </a:effectRef>
-          <a:fontRef idx="minor">
-            <a:schemeClr val="lt1"/>
-          </a:fontRef>
-        </p:style>
-        <p:txBody>
-          <a:bodyPr rtlCol="0" anchor="ctr"/>
-          <a:lstStyle/>
-          <a:p>
-            <a:endParaRPr/>
-          </a:p>
-        </p:txBody>
-      </p:sp>
-      <p:sp>
-        <p:nvSpPr>
-          <p:cNvPr id="634" name="row:devmem buffers &gt; PAGE_SIZE:label"/>
+              <a:t>CONTROL
+PLANE</a:t>
+            </a:r>
+          </a:p>
+        </p:txBody>
+      </p:sp>
+      <p:sp>
+        <p:nvSpPr>
+          <p:cNvPr id="640" name="row:namespace FD / setns():name"/>
           <p:cNvSpPr txBox="1"/>
           <p:nvPr/>
         </p:nvSpPr>
         <p:spPr>
           <a:xfrm>
-            <a:off x="13945410" y="4659101"/>
-            <a:ext cx="1005840" cy="219456"/>
+            <a:off x="1325880" y="4944757"/>
+            <a:ext cx="1572768" cy="219456"/>
           </a:xfrm>
           <a:prstGeom prst="rect">
             <a:avLst/>
@@ -13727,286 +14072,21 @@
           </a:bodyPr>
           <a:lstStyle/>
           <a:p>
-            <a:pPr algn="l"/>
-            <a:r>
-              <a:rPr sz="725" b="1" i="0">
+            <a:pPr algn="r"/>
+            <a:r>
+              <a:rPr sz="750" b="0" i="0">
                 <a:solidFill>
                   <a:srgbClr val="1F2937"/>
                 </a:solidFill>
               </a:rPr>
-              <a:t>7.3-rc</a:t>
-            </a:r>
-          </a:p>
-        </p:txBody>
-      </p:sp>
-      <p:sp>
-        <p:nvSpPr>
-          <p:cNvPr id="635" name="row:RX HW queue leasing:name"/>
-          <p:cNvSpPr txBox="1"/>
-          <p:nvPr/>
-        </p:nvSpPr>
-        <p:spPr>
-          <a:xfrm>
-            <a:off x="1325880" y="4756209"/>
-            <a:ext cx="1572768" cy="219456"/>
-          </a:xfrm>
-          <a:prstGeom prst="rect">
-            <a:avLst/>
-          </a:prstGeom>
-          <a:noFill/>
-        </p:spPr>
-        <p:txBody>
-          <a:bodyPr wrap="square" lIns="0" tIns="0" rIns="0" bIns="0" anchor="ctr">
-            <a:noAutofit/>
-          </a:bodyPr>
-          <a:lstStyle/>
-          <a:p>
-            <a:pPr algn="r"/>
-            <a:r>
-              <a:rPr sz="750" b="0" i="0">
-                <a:solidFill>
-                  <a:srgbClr val="1F2937"/>
-                </a:solidFill>
-              </a:rPr>
-              <a:t>RX HW queue leasing</a:t>
+              <a:t>namespace FD / setns()</a:t>
             </a:r>
           </a:p>
         </p:txBody>
       </p:sp>
       <p:cxnSp>
         <p:nvCxnSpPr>
-          <p:cNvPr id="636" name="row:RX HW queue leasing:development"/>
-          <p:cNvCxnSpPr/>
-          <p:nvPr/>
-        </p:nvCxnSpPr>
-        <p:spPr>
-          <a:xfrm>
-            <a:off x="12377661" y="4865937"/>
-            <a:ext cx="1367224" cy="0"/>
-          </a:xfrm>
-          <a:prstGeom prst="line">
-            <a:avLst/>
-          </a:prstGeom>
-          <a:ln w="12700">
-            <a:solidFill>
-              <a:srgbClr val="16A34A"/>
-            </a:solidFill>
-            <a:prstDash val="dash"/>
-          </a:ln>
-        </p:spPr>
-        <p:style>
-          <a:lnRef idx="2">
-            <a:schemeClr val="accent1"/>
-          </a:lnRef>
-          <a:fillRef idx="0">
-            <a:schemeClr val="accent1"/>
-          </a:fillRef>
-          <a:effectRef idx="1">
-            <a:schemeClr val="accent1"/>
-          </a:effectRef>
-          <a:fontRef idx="minor">
-            <a:schemeClr val="tx1"/>
-          </a:fontRef>
-        </p:style>
-      </p:cxnSp>
-      <p:sp>
-        <p:nvSpPr>
-          <p:cNvPr id="637" name="row:RX HW queue leasing:start"/>
-          <p:cNvSpPr/>
-          <p:nvPr/>
-        </p:nvSpPr>
-        <p:spPr>
-          <a:xfrm>
-            <a:off x="12345657" y="4833933"/>
-            <a:ext cx="64008" cy="64008"/>
-          </a:xfrm>
-          <a:prstGeom prst="ellipse">
-            <a:avLst/>
-          </a:prstGeom>
-          <a:solidFill>
-            <a:srgbClr val="FFFFFF"/>
-          </a:solidFill>
-          <a:ln w="12700">
-            <a:solidFill>
-              <a:srgbClr val="16A34A"/>
-            </a:solidFill>
-          </a:ln>
-          <a:effectLst/>
-        </p:spPr>
-        <p:style>
-          <a:lnRef idx="1">
-            <a:schemeClr val="accent1"/>
-          </a:lnRef>
-          <a:fillRef idx="3">
-            <a:schemeClr val="accent1"/>
-          </a:fillRef>
-          <a:effectRef idx="2">
-            <a:schemeClr val="accent1"/>
-          </a:effectRef>
-          <a:fontRef idx="minor">
-            <a:schemeClr val="lt1"/>
-          </a:fontRef>
-        </p:style>
-        <p:txBody>
-          <a:bodyPr rtlCol="0" anchor="ctr"/>
-          <a:lstStyle/>
-          <a:p>
-            <a:endParaRPr/>
-          </a:p>
-        </p:txBody>
-      </p:sp>
-      <p:sp>
-        <p:nvSpPr>
-          <p:cNvPr id="638" name="row:RX HW queue leasing:release:7.1"/>
-          <p:cNvSpPr/>
-          <p:nvPr/>
-        </p:nvSpPr>
-        <p:spPr>
-          <a:xfrm>
-            <a:off x="13701451" y="4822503"/>
-            <a:ext cx="86868" cy="86868"/>
-          </a:xfrm>
-          <a:prstGeom prst="ellipse">
-            <a:avLst/>
-          </a:prstGeom>
-          <a:solidFill>
-            <a:srgbClr val="16A34A"/>
-          </a:solidFill>
-          <a:ln w="12700">
-            <a:solidFill>
-              <a:srgbClr val="16A34A"/>
-            </a:solidFill>
-          </a:ln>
-          <a:effectLst/>
-        </p:spPr>
-        <p:style>
-          <a:lnRef idx="1">
-            <a:schemeClr val="accent1"/>
-          </a:lnRef>
-          <a:fillRef idx="3">
-            <a:schemeClr val="accent1"/>
-          </a:fillRef>
-          <a:effectRef idx="2">
-            <a:schemeClr val="accent1"/>
-          </a:effectRef>
-          <a:fontRef idx="minor">
-            <a:schemeClr val="lt1"/>
-          </a:fontRef>
-        </p:style>
-        <p:txBody>
-          <a:bodyPr rtlCol="0" anchor="ctr"/>
-          <a:lstStyle/>
-          <a:p>
-            <a:endParaRPr/>
-          </a:p>
-        </p:txBody>
-      </p:sp>
-      <p:sp>
-        <p:nvSpPr>
-          <p:cNvPr id="639" name="row:RX HW queue leasing:label"/>
-          <p:cNvSpPr txBox="1"/>
-          <p:nvPr/>
-        </p:nvSpPr>
-        <p:spPr>
-          <a:xfrm>
-            <a:off x="13818037" y="4756209"/>
-            <a:ext cx="1005840" cy="219456"/>
-          </a:xfrm>
-          <a:prstGeom prst="rect">
-            <a:avLst/>
-          </a:prstGeom>
-          <a:noFill/>
-        </p:spPr>
-        <p:txBody>
-          <a:bodyPr wrap="square" lIns="0" tIns="0" rIns="0" bIns="0" anchor="ctr">
-            <a:noAutofit/>
-          </a:bodyPr>
-          <a:lstStyle/>
-          <a:p>
-            <a:pPr algn="l"/>
-            <a:r>
-              <a:rPr sz="725" b="1" i="0">
-                <a:solidFill>
-                  <a:srgbClr val="1F2937"/>
-                </a:solidFill>
-              </a:rPr>
-              <a:t>7.1</a:t>
-            </a:r>
-          </a:p>
-        </p:txBody>
-      </p:sp>
-      <p:sp>
-        <p:nvSpPr>
-          <p:cNvPr id="238" name="band-label:CONTROL PLANE"/>
-          <p:cNvSpPr txBox="1"/>
-          <p:nvPr/>
-        </p:nvSpPr>
-        <p:spPr>
-          <a:xfrm>
-            <a:off x="384048" y="4987644"/>
-            <a:ext cx="1051560" cy="813439"/>
-          </a:xfrm>
-          <a:prstGeom prst="rect">
-            <a:avLst/>
-          </a:prstGeom>
-          <a:noFill/>
-        </p:spPr>
-        <p:txBody>
-          <a:bodyPr wrap="square" lIns="0" tIns="0" rIns="0" bIns="0" anchor="ctr">
-            <a:noAutofit/>
-          </a:bodyPr>
-          <a:lstStyle/>
-          <a:p>
-            <a:pPr algn="l"/>
-            <a:r>
-              <a:rPr sz="1000" b="1" i="0">
-                <a:solidFill>
-                  <a:srgbClr val="DC2626"/>
-                </a:solidFill>
-              </a:rPr>
-              <a:t>CONTROL
-PLANE</a:t>
-            </a:r>
-          </a:p>
-        </p:txBody>
-      </p:sp>
-      <p:sp>
-        <p:nvSpPr>
-          <p:cNvPr id="641" name="row:namespace FD / setns():name"/>
-          <p:cNvSpPr txBox="1"/>
-          <p:nvPr/>
-        </p:nvSpPr>
-        <p:spPr>
-          <a:xfrm>
-            <a:off x="1325880" y="4944757"/>
-            <a:ext cx="1572768" cy="219456"/>
-          </a:xfrm>
-          <a:prstGeom prst="rect">
-            <a:avLst/>
-          </a:prstGeom>
-          <a:noFill/>
-        </p:spPr>
-        <p:txBody>
-          <a:bodyPr wrap="square" lIns="0" tIns="0" rIns="0" bIns="0" anchor="ctr">
-            <a:noAutofit/>
-          </a:bodyPr>
-          <a:lstStyle/>
-          <a:p>
-            <a:pPr algn="r"/>
-            <a:r>
-              <a:rPr sz="750" b="0" i="0">
-                <a:solidFill>
-                  <a:srgbClr val="1F2937"/>
-                </a:solidFill>
-              </a:rPr>
-              <a:t>namespace FD / setns()</a:t>
-            </a:r>
-          </a:p>
-        </p:txBody>
-      </p:sp>
-      <p:cxnSp>
-        <p:nvCxnSpPr>
-          <p:cNvPr id="643" name="row:namespace FD / setns():development"/>
+          <p:cNvPr id="642" name="row:namespace FD / setns():development"/>
           <p:cNvCxnSpPr/>
           <p:nvPr/>
         </p:nvCxnSpPr>
@@ -14042,7 +14122,7 @@
       </p:cxnSp>
       <p:sp>
         <p:nvSpPr>
-          <p:cNvPr id="642" name="row:namespace FD / setns():start-offchart"/>
+          <p:cNvPr id="641" name="row:namespace FD / setns():start-offchart"/>
           <p:cNvSpPr/>
           <p:nvPr/>
         </p:nvSpPr>
@@ -14086,7 +14166,7 @@
       </p:sp>
       <p:sp>
         <p:nvSpPr>
-          <p:cNvPr id="644" name="row:namespace FD / setns():release:3.0"/>
+          <p:cNvPr id="643" name="row:namespace FD / setns():release:3.0"/>
           <p:cNvSpPr/>
           <p:nvPr/>
         </p:nvSpPr>
@@ -14132,7 +14212,7 @@
       </p:sp>
       <p:sp>
         <p:nvSpPr>
-          <p:cNvPr id="645" name="row:namespace FD / setns():label"/>
+          <p:cNvPr id="644" name="row:namespace FD / setns():label"/>
           <p:cNvSpPr txBox="1"/>
           <p:nvPr/>
         </p:nvSpPr>
@@ -14166,7 +14246,7 @@
       </p:sp>
       <p:sp>
         <p:nvSpPr>
-          <p:cNvPr id="646" name="row:nftables (dev. from 2008):name"/>
+          <p:cNvPr id="645" name="row:nftables (dev. from 2008):name"/>
           <p:cNvSpPr txBox="1"/>
           <p:nvPr/>
         </p:nvSpPr>
@@ -14200,7 +14280,7 @@
       </p:sp>
       <p:cxnSp>
         <p:nvCxnSpPr>
-          <p:cNvPr id="648" name="row:nftables (dev. from 2008):development"/>
+          <p:cNvPr id="647" name="row:nftables (dev. from 2008):development"/>
           <p:cNvCxnSpPr/>
           <p:nvPr/>
         </p:nvCxnSpPr>
@@ -14236,7 +14316,7 @@
       </p:cxnSp>
       <p:sp>
         <p:nvSpPr>
-          <p:cNvPr id="647" name="row:nftables (dev. from 2008):start-offchart"/>
+          <p:cNvPr id="646" name="row:nftables (dev. from 2008):start-offchart"/>
           <p:cNvSpPr/>
           <p:nvPr/>
         </p:nvSpPr>
@@ -14280,7 +14360,7 @@
       </p:sp>
       <p:sp>
         <p:nvSpPr>
-          <p:cNvPr id="649" name="row:nftables (dev. from 2008):release:3.13"/>
+          <p:cNvPr id="648" name="row:nftables (dev. from 2008):release:3.13"/>
           <p:cNvSpPr/>
           <p:nvPr/>
         </p:nvSpPr>
@@ -14326,7 +14406,7 @@
       </p:sp>
       <p:sp>
         <p:nvSpPr>
-          <p:cNvPr id="650" name="row:nftables (dev. from 2008):label"/>
+          <p:cNvPr id="649" name="row:nftables (dev. from 2008):label"/>
           <p:cNvSpPr txBox="1"/>
           <p:nvPr/>
         </p:nvSpPr>
@@ -14360,7 +14440,7 @@
       </p:sp>
       <p:sp>
         <p:nvSpPr>
-          <p:cNvPr id="651" name="row:nexthop objects:name"/>
+          <p:cNvPr id="650" name="row:nexthop objects:name"/>
           <p:cNvSpPr txBox="1"/>
           <p:nvPr/>
         </p:nvSpPr>
@@ -14394,7 +14474,7 @@
       </p:sp>
       <p:cxnSp>
         <p:nvCxnSpPr>
-          <p:cNvPr id="652" name="row:nexthop objects:development"/>
+          <p:cNvPr id="651" name="row:nexthop objects:development"/>
           <p:cNvCxnSpPr/>
           <p:nvPr/>
         </p:nvCxnSpPr>
@@ -14430,7 +14510,7 @@
       </p:cxnSp>
       <p:sp>
         <p:nvSpPr>
-          <p:cNvPr id="653" name="row:nexthop objects:start"/>
+          <p:cNvPr id="652" name="row:nexthop objects:start"/>
           <p:cNvSpPr/>
           <p:nvPr/>
         </p:nvSpPr>
@@ -14476,7 +14556,7 @@
       </p:sp>
       <p:sp>
         <p:nvSpPr>
-          <p:cNvPr id="654" name="row:nexthop objects:release:5.3"/>
+          <p:cNvPr id="653" name="row:nexthop objects:release:5.3"/>
           <p:cNvSpPr/>
           <p:nvPr/>
         </p:nvSpPr>
@@ -14522,7 +14602,7 @@
       </p:sp>
       <p:sp>
         <p:nvSpPr>
-          <p:cNvPr id="655" name="row:nexthop objects:label"/>
+          <p:cNvPr id="654" name="row:nexthop objects:label"/>
           <p:cNvSpPr txBox="1"/>
           <p:nvPr/>
         </p:nvSpPr>
@@ -14556,7 +14636,7 @@
       </p:sp>
       <p:sp>
         <p:nvSpPr>
-          <p:cNvPr id="657" name="row:per-netns RTNL:name"/>
+          <p:cNvPr id="656" name="row:per-netns RTNL:name"/>
           <p:cNvSpPr txBox="1"/>
           <p:nvPr/>
         </p:nvSpPr>
@@ -14590,7 +14670,7 @@
       </p:sp>
       <p:cxnSp>
         <p:nvCxnSpPr>
-          <p:cNvPr id="658" name="row:per-netns RTNL:development"/>
+          <p:cNvPr id="657" name="row:per-netns RTNL:development"/>
           <p:cNvCxnSpPr/>
           <p:nvPr/>
         </p:nvCxnSpPr>
@@ -14626,7 +14706,7 @@
       </p:cxnSp>
       <p:sp>
         <p:nvSpPr>
-          <p:cNvPr id="659" name="row:per-netns RTNL:start"/>
+          <p:cNvPr id="658" name="row:per-netns RTNL:start"/>
           <p:cNvSpPr/>
           <p:nvPr/>
         </p:nvSpPr>
@@ -14672,7 +14752,7 @@
       </p:sp>
       <p:sp>
         <p:nvSpPr>
-          <p:cNvPr id="660" name="row:per-netns RTNL:release:6.13"/>
+          <p:cNvPr id="659" name="row:per-netns RTNL:release:6.13"/>
           <p:cNvSpPr/>
           <p:nvPr/>
         </p:nvSpPr>
@@ -14718,7 +14798,7 @@
       </p:sp>
       <p:sp>
         <p:nvSpPr>
-          <p:cNvPr id="661" name="row:per-netns RTNL:label"/>
+          <p:cNvPr id="660" name="row:per-netns RTNL:label"/>
           <p:cNvSpPr txBox="1"/>
           <p:nvPr/>
         </p:nvSpPr>
@@ -14752,7 +14832,7 @@
       </p:sp>
       <p:sp>
         <p:nvSpPr>
-          <p:cNvPr id="663" name="row:further RTNL breakup:name"/>
+          <p:cNvPr id="662" name="row:further RTNL breakup:name"/>
           <p:cNvSpPr txBox="1"/>
           <p:nvPr/>
         </p:nvSpPr>
@@ -14786,7 +14866,7 @@
       </p:sp>
       <p:cxnSp>
         <p:nvCxnSpPr>
-          <p:cNvPr id="664" name="row:further RTNL breakup:development"/>
+          <p:cNvPr id="663" name="row:further RTNL breakup:development"/>
           <p:cNvCxnSpPr/>
           <p:nvPr/>
         </p:nvCxnSpPr>
@@ -14822,7 +14902,7 @@
       </p:cxnSp>
       <p:sp>
         <p:nvSpPr>
-          <p:cNvPr id="665" name="row:further RTNL breakup:start"/>
+          <p:cNvPr id="664" name="row:further RTNL breakup:start"/>
           <p:cNvSpPr/>
           <p:nvPr/>
         </p:nvSpPr>
@@ -14868,7 +14948,7 @@
       </p:sp>
       <p:sp>
         <p:nvSpPr>
-          <p:cNvPr id="666" name="row:further RTNL breakup:release:6.15"/>
+          <p:cNvPr id="665" name="row:further RTNL breakup:release:6.15"/>
           <p:cNvSpPr/>
           <p:nvPr/>
         </p:nvSpPr>
@@ -14914,7 +14994,7 @@
       </p:sp>
       <p:sp>
         <p:nvSpPr>
-          <p:cNvPr id="667" name="row:further RTNL breakup:label"/>
+          <p:cNvPr id="666" name="row:further RTNL breakup:label"/>
           <p:cNvSpPr txBox="1"/>
           <p:nvPr/>
         </p:nvSpPr>
@@ -14948,7 +15028,7 @@
       </p:sp>
       <p:sp>
         <p:nvSpPr>
-          <p:cNvPr id="669" name="row:RTNL-less FIB rules:name"/>
+          <p:cNvPr id="668" name="row:RTNL-less FIB rules:name"/>
           <p:cNvSpPr txBox="1"/>
           <p:nvPr/>
         </p:nvSpPr>
@@ -14982,7 +15062,7 @@
       </p:sp>
       <p:cxnSp>
         <p:nvCxnSpPr>
-          <p:cNvPr id="670" name="row:RTNL-less FIB rules:development"/>
+          <p:cNvPr id="669" name="row:RTNL-less FIB rules:development"/>
           <p:cNvCxnSpPr/>
           <p:nvPr/>
         </p:nvCxnSpPr>
@@ -15018,7 +15098,7 @@
       </p:cxnSp>
       <p:sp>
         <p:nvSpPr>
-          <p:cNvPr id="671" name="row:RTNL-less FIB rules:start"/>
+          <p:cNvPr id="670" name="row:RTNL-less FIB rules:start"/>
           <p:cNvSpPr/>
           <p:nvPr/>
         </p:nvSpPr>
@@ -15064,7 +15144,7 @@
       </p:sp>
       <p:sp>
         <p:nvSpPr>
-          <p:cNvPr id="672" name="row:RTNL-less FIB rules:release:7.3-rc"/>
+          <p:cNvPr id="671" name="row:RTNL-less FIB rules:release:7.3-rc"/>
           <p:cNvSpPr/>
           <p:nvPr/>
         </p:nvSpPr>
@@ -15110,7 +15190,7 @@
       </p:sp>
       <p:sp>
         <p:nvSpPr>
-          <p:cNvPr id="673" name="row:RTNL-less FIB rules:label"/>
+          <p:cNvPr id="672" name="row:RTNL-less FIB rules:label"/>
           <p:cNvSpPr txBox="1"/>
           <p:nvPr/>
         </p:nvSpPr>
@@ -15144,7 +15224,7 @@
       </p:sp>
       <p:sp>
         <p:nvSpPr>
-          <p:cNvPr id="675" name="row:per-netns netdev unregistration:name"/>
+          <p:cNvPr id="674" name="row:per-netns netdev unregistration:name"/>
           <p:cNvSpPr txBox="1"/>
           <p:nvPr/>
         </p:nvSpPr>
@@ -15178,7 +15258,7 @@
       </p:sp>
       <p:sp>
         <p:nvSpPr>
-          <p:cNvPr id="676" name="row:per-netns netdev unregistration:release:7.3-rc"/>
+          <p:cNvPr id="675" name="row:per-netns netdev unregistration:release:7.3-rc"/>
           <p:cNvSpPr/>
           <p:nvPr/>
         </p:nvSpPr>
@@ -15224,7 +15304,7 @@
       </p:sp>
       <p:sp>
         <p:nvSpPr>
-          <p:cNvPr id="677" name="row:per-netns netdev unregistration:label"/>
+          <p:cNvPr id="676" name="row:per-netns netdev unregistration:label"/>
           <p:cNvSpPr txBox="1"/>
           <p:nvPr/>
         </p:nvSpPr>
@@ -15258,7 +15338,7 @@
       </p:sp>
       <p:sp>
         <p:nvSpPr>
-          <p:cNvPr id="678" name="row:YNL tooling:name"/>
+          <p:cNvPr id="677" name="row:YNL tooling:name"/>
           <p:cNvSpPr txBox="1"/>
           <p:nvPr/>
         </p:nvSpPr>
@@ -15292,7 +15372,7 @@
       </p:sp>
       <p:cxnSp>
         <p:nvCxnSpPr>
-          <p:cNvPr id="679" name="row:YNL tooling:development"/>
+          <p:cNvPr id="678" name="row:YNL tooling:development"/>
           <p:cNvCxnSpPr/>
           <p:nvPr/>
         </p:nvCxnSpPr>
@@ -15328,7 +15408,7 @@
       </p:cxnSp>
       <p:sp>
         <p:nvSpPr>
-          <p:cNvPr id="680" name="row:YNL tooling:start"/>
+          <p:cNvPr id="679" name="row:YNL tooling:start"/>
           <p:cNvSpPr/>
           <p:nvPr/>
         </p:nvSpPr>
@@ -15374,7 +15454,7 @@
       </p:sp>
       <p:sp>
         <p:nvSpPr>
-          <p:cNvPr id="681" name="row:YNL tooling:release:6.3"/>
+          <p:cNvPr id="680" name="row:YNL tooling:release:6.3"/>
           <p:cNvSpPr/>
           <p:nvPr/>
         </p:nvSpPr>
@@ -15420,7 +15500,7 @@
       </p:sp>
       <p:sp>
         <p:nvSpPr>
-          <p:cNvPr id="682" name="row:YNL tooling:label"/>
+          <p:cNvPr id="681" name="row:YNL tooling:label"/>
           <p:cNvSpPr txBox="1"/>
           <p:nvPr/>
         </p:nvSpPr>
@@ -15489,7 +15569,7 @@
       </p:sp>
       <p:sp>
         <p:nvSpPr>
-          <p:cNvPr id="684" name="row:queue/NAPI/page_pool netdev-genl:name"/>
+          <p:cNvPr id="683" name="row:queue/NAPI/page_pool netdev-genl:name"/>
           <p:cNvSpPr txBox="1"/>
           <p:nvPr/>
         </p:nvSpPr>
@@ -15523,7 +15603,7 @@
       </p:sp>
       <p:cxnSp>
         <p:nvCxnSpPr>
-          <p:cNvPr id="685" name="row:queue/NAPI/page_pool netdev-genl:development"/>
+          <p:cNvPr id="684" name="row:queue/NAPI/page_pool netdev-genl:development"/>
           <p:cNvCxnSpPr/>
           <p:nvPr/>
         </p:nvCxnSpPr>
@@ -15559,7 +15639,7 @@
       </p:cxnSp>
       <p:sp>
         <p:nvSpPr>
-          <p:cNvPr id="686" name="row:queue/NAPI/page_pool netdev-genl:start"/>
+          <p:cNvPr id="685" name="row:queue/NAPI/page_pool netdev-genl:start"/>
           <p:cNvSpPr/>
           <p:nvPr/>
         </p:nvSpPr>
@@ -15605,7 +15685,7 @@
       </p:sp>
       <p:sp>
         <p:nvSpPr>
-          <p:cNvPr id="687" name="row:queue/NAPI/page_pool netdev-genl:release:6.8"/>
+          <p:cNvPr id="686" name="row:queue/NAPI/page_pool netdev-genl:release:6.8"/>
           <p:cNvSpPr/>
           <p:nvPr/>
         </p:nvSpPr>
@@ -15651,7 +15731,7 @@
       </p:sp>
       <p:sp>
         <p:nvSpPr>
-          <p:cNvPr id="688" name="row:queue/NAPI/page_pool netdev-genl:label"/>
+          <p:cNvPr id="687" name="row:queue/NAPI/page_pool netdev-genl:label"/>
           <p:cNvSpPr txBox="1"/>
           <p:nvPr/>
         </p:nvSpPr>
@@ -15685,7 +15765,7 @@
       </p:sp>
       <p:sp>
         <p:nvSpPr>
-          <p:cNvPr id="690" name="row:kprobe BPF:name"/>
+          <p:cNvPr id="689" name="row:kprobe BPF:name"/>
           <p:cNvSpPr txBox="1"/>
           <p:nvPr/>
         </p:nvSpPr>
@@ -15719,7 +15799,7 @@
       </p:sp>
       <p:cxnSp>
         <p:nvCxnSpPr>
-          <p:cNvPr id="691" name="row:kprobe BPF:development"/>
+          <p:cNvPr id="690" name="row:kprobe BPF:development"/>
           <p:cNvCxnSpPr/>
           <p:nvPr/>
         </p:nvCxnSpPr>
@@ -15755,7 +15835,7 @@
       </p:cxnSp>
       <p:sp>
         <p:nvSpPr>
-          <p:cNvPr id="692" name="row:kprobe BPF:start"/>
+          <p:cNvPr id="691" name="row:kprobe BPF:start"/>
           <p:cNvSpPr/>
           <p:nvPr/>
         </p:nvSpPr>
@@ -15801,7 +15881,7 @@
       </p:sp>
       <p:sp>
         <p:nvSpPr>
-          <p:cNvPr id="693" name="row:kprobe BPF:release:4.1"/>
+          <p:cNvPr id="692" name="row:kprobe BPF:release:4.1"/>
           <p:cNvSpPr/>
           <p:nvPr/>
         </p:nvSpPr>
@@ -15847,7 +15927,7 @@
       </p:sp>
       <p:sp>
         <p:nvSpPr>
-          <p:cNvPr id="694" name="row:kprobe BPF:label"/>
+          <p:cNvPr id="693" name="row:kprobe BPF:label"/>
           <p:cNvSpPr txBox="1"/>
           <p:nvPr/>
         </p:nvSpPr>
@@ -15881,7 +15961,7 @@
       </p:sp>
       <p:sp>
         <p:nvSpPr>
-          <p:cNvPr id="696" name="row:BTF:name"/>
+          <p:cNvPr id="695" name="row:BTF:name"/>
           <p:cNvSpPr txBox="1"/>
           <p:nvPr/>
         </p:nvSpPr>
@@ -15915,7 +15995,7 @@
       </p:sp>
       <p:cxnSp>
         <p:nvCxnSpPr>
-          <p:cNvPr id="697" name="row:BTF:development"/>
+          <p:cNvPr id="696" name="row:BTF:development"/>
           <p:cNvCxnSpPr/>
           <p:nvPr/>
         </p:nvCxnSpPr>
@@ -15951,7 +16031,7 @@
       </p:cxnSp>
       <p:sp>
         <p:nvSpPr>
-          <p:cNvPr id="698" name="row:BTF:start"/>
+          <p:cNvPr id="697" name="row:BTF:start"/>
           <p:cNvSpPr/>
           <p:nvPr/>
         </p:nvSpPr>
@@ -15997,7 +16077,7 @@
       </p:sp>
       <p:sp>
         <p:nvSpPr>
-          <p:cNvPr id="699" name="row:BTF:release:4.18"/>
+          <p:cNvPr id="698" name="row:BTF:release:4.18"/>
           <p:cNvSpPr/>
           <p:nvPr/>
         </p:nvSpPr>
@@ -16043,7 +16123,7 @@
       </p:sp>
       <p:sp>
         <p:nvSpPr>
-          <p:cNvPr id="700" name="row:BTF:label"/>
+          <p:cNvPr id="699" name="row:BTF:label"/>
           <p:cNvSpPr txBox="1"/>
           <p:nvPr/>
         </p:nvSpPr>
@@ -16077,7 +16157,7 @@
       </p:sp>
       <p:sp>
         <p:nvSpPr>
-          <p:cNvPr id="702" name="row:structured drop reason:name"/>
+          <p:cNvPr id="701" name="row:structured drop reason:name"/>
           <p:cNvSpPr txBox="1"/>
           <p:nvPr/>
         </p:nvSpPr>
@@ -16111,7 +16191,7 @@
       </p:sp>
       <p:cxnSp>
         <p:nvCxnSpPr>
-          <p:cNvPr id="703" name="row:structured drop reason:development"/>
+          <p:cNvPr id="702" name="row:structured drop reason:development"/>
           <p:cNvCxnSpPr/>
           <p:nvPr/>
         </p:nvCxnSpPr>
@@ -16147,7 +16227,7 @@
       </p:cxnSp>
       <p:sp>
         <p:nvSpPr>
-          <p:cNvPr id="704" name="row:structured drop reason:start"/>
+          <p:cNvPr id="703" name="row:structured drop reason:start"/>
           <p:cNvSpPr/>
           <p:nvPr/>
         </p:nvSpPr>
@@ -16193,7 +16273,7 @@
       </p:sp>
       <p:sp>
         <p:nvSpPr>
-          <p:cNvPr id="705" name="row:structured drop reason:release:5.17"/>
+          <p:cNvPr id="704" name="row:structured drop reason:release:5.17"/>
           <p:cNvSpPr/>
           <p:nvPr/>
         </p:nvSpPr>
@@ -16239,7 +16319,7 @@
       </p:sp>
       <p:sp>
         <p:nvSpPr>
-          <p:cNvPr id="706" name="row:structured drop reason:label"/>
+          <p:cNvPr id="705" name="row:structured drop reason:label"/>
           <p:cNvSpPr txBox="1"/>
           <p:nvPr/>
         </p:nvSpPr>
@@ -16273,7 +16353,7 @@
       </p:sp>
       <p:sp>
         <p:nvSpPr>
-          <p:cNvPr id="708" name="row:drop-reason expansion:name"/>
+          <p:cNvPr id="707" name="row:drop-reason expansion:name"/>
           <p:cNvSpPr txBox="1"/>
           <p:nvPr/>
         </p:nvSpPr>
@@ -16307,7 +16387,7 @@
       </p:sp>
       <p:cxnSp>
         <p:nvCxnSpPr>
-          <p:cNvPr id="709" name="row:drop-reason expansion:development"/>
+          <p:cNvPr id="708" name="row:drop-reason expansion:development"/>
           <p:cNvCxnSpPr/>
           <p:nvPr/>
         </p:nvCxnSpPr>
@@ -16343,7 +16423,7 @@
       </p:cxnSp>
       <p:sp>
         <p:nvSpPr>
-          <p:cNvPr id="710" name="row:drop-reason expansion:start"/>
+          <p:cNvPr id="709" name="row:drop-reason expansion:start"/>
           <p:cNvSpPr/>
           <p:nvPr/>
         </p:nvSpPr>
@@ -16389,7 +16469,7 @@
       </p:sp>
       <p:sp>
         <p:nvSpPr>
-          <p:cNvPr id="711" name="row:drop-reason expansion:release:5.19"/>
+          <p:cNvPr id="710" name="row:drop-reason expansion:release:5.19"/>
           <p:cNvSpPr/>
           <p:nvPr/>
         </p:nvSpPr>
@@ -16435,7 +16515,7 @@
       </p:sp>
       <p:sp>
         <p:nvSpPr>
-          <p:cNvPr id="712" name="row:drop-reason expansion:label"/>
+          <p:cNvPr id="711" name="row:drop-reason expansion:label"/>
           <p:cNvSpPr txBox="1"/>
           <p:nvPr/>
         </p:nvSpPr>
@@ -16469,7 +16549,7 @@
       </p:sp>
       <p:sp>
         <p:nvSpPr>
-          <p:cNvPr id="714" name="row:qdisc-drop tracepoint:name"/>
+          <p:cNvPr id="713" name="row:qdisc-drop tracepoint:name"/>
           <p:cNvSpPr txBox="1"/>
           <p:nvPr/>
         </p:nvSpPr>
@@ -16503,7 +16583,7 @@
       </p:sp>
       <p:cxnSp>
         <p:nvCxnSpPr>
-          <p:cNvPr id="715" name="row:qdisc-drop tracepoint:development"/>
+          <p:cNvPr id="714" name="row:qdisc-drop tracepoint:development"/>
           <p:cNvCxnSpPr/>
           <p:nvPr/>
         </p:nvCxnSpPr>
@@ -16539,7 +16619,7 @@
       </p:cxnSp>
       <p:sp>
         <p:nvSpPr>
-          <p:cNvPr id="716" name="row:qdisc-drop tracepoint:start"/>
+          <p:cNvPr id="715" name="row:qdisc-drop tracepoint:start"/>
           <p:cNvSpPr/>
           <p:nvPr/>
         </p:nvSpPr>
@@ -16585,7 +16665,7 @@
       </p:sp>
       <p:sp>
         <p:nvSpPr>
-          <p:cNvPr id="717" name="row:qdisc-drop tracepoint:release:7.1"/>
+          <p:cNvPr id="716" name="row:qdisc-drop tracepoint:release:7.1"/>
           <p:cNvSpPr/>
           <p:nvPr/>
         </p:nvSpPr>
@@ -16631,7 +16711,7 @@
       </p:sp>
       <p:sp>
         <p:nvSpPr>
-          <p:cNvPr id="718" name="row:qdisc-drop tracepoint:label"/>
+          <p:cNvPr id="717" name="row:qdisc-drop tracepoint:label"/>
           <p:cNvSpPr txBox="1"/>
           <p:nvPr/>
         </p:nvSpPr>
@@ -16700,7 +16780,7 @@
       </p:sp>
       <p:sp>
         <p:nvSpPr>
-          <p:cNvPr id="720" name="row:switchdev:name"/>
+          <p:cNvPr id="719" name="row:switchdev:name"/>
           <p:cNvSpPr txBox="1"/>
           <p:nvPr/>
         </p:nvSpPr>
@@ -16734,7 +16814,7 @@
       </p:sp>
       <p:cxnSp>
         <p:nvCxnSpPr>
-          <p:cNvPr id="721" name="row:switchdev:development"/>
+          <p:cNvPr id="720" name="row:switchdev:development"/>
           <p:cNvCxnSpPr/>
           <p:nvPr/>
         </p:nvCxnSpPr>
@@ -16770,7 +16850,7 @@
       </p:cxnSp>
       <p:sp>
         <p:nvSpPr>
-          <p:cNvPr id="722" name="row:switchdev:start"/>
+          <p:cNvPr id="721" name="row:switchdev:start"/>
           <p:cNvSpPr/>
           <p:nvPr/>
         </p:nvSpPr>
@@ -16816,7 +16896,7 @@
       </p:sp>
       <p:sp>
         <p:nvSpPr>
-          <p:cNvPr id="723" name="row:switchdev:release:3.19"/>
+          <p:cNvPr id="722" name="row:switchdev:release:3.19"/>
           <p:cNvSpPr/>
           <p:nvPr/>
         </p:nvSpPr>
@@ -16862,7 +16942,7 @@
       </p:sp>
       <p:sp>
         <p:nvSpPr>
-          <p:cNvPr id="724" name="row:switchdev:label"/>
+          <p:cNvPr id="723" name="row:switchdev:label"/>
           <p:cNvSpPr txBox="1"/>
           <p:nvPr/>
         </p:nvSpPr>
@@ -16896,7 +16976,7 @@
       </p:sp>
       <p:sp>
         <p:nvSpPr>
-          <p:cNvPr id="726" name="row:devlink:name"/>
+          <p:cNvPr id="725" name="row:devlink:name"/>
           <p:cNvSpPr txBox="1"/>
           <p:nvPr/>
         </p:nvSpPr>
@@ -16930,7 +17010,7 @@
       </p:sp>
       <p:cxnSp>
         <p:nvCxnSpPr>
-          <p:cNvPr id="727" name="row:devlink:development"/>
+          <p:cNvPr id="726" name="row:devlink:development"/>
           <p:cNvCxnSpPr/>
           <p:nvPr/>
         </p:nvCxnSpPr>
@@ -16966,7 +17046,7 @@
       </p:cxnSp>
       <p:sp>
         <p:nvSpPr>
-          <p:cNvPr id="728" name="row:devlink:start"/>
+          <p:cNvPr id="727" name="row:devlink:start"/>
           <p:cNvSpPr/>
           <p:nvPr/>
         </p:nvSpPr>
@@ -17012,7 +17092,7 @@
       </p:sp>
       <p:sp>
         <p:nvSpPr>
-          <p:cNvPr id="729" name="row:devlink:release:4.6"/>
+          <p:cNvPr id="728" name="row:devlink:release:4.6"/>
           <p:cNvSpPr/>
           <p:nvPr/>
         </p:nvSpPr>
@@ -17058,7 +17138,7 @@
       </p:sp>
       <p:sp>
         <p:nvSpPr>
-          <p:cNvPr id="730" name="row:devlink:label"/>
+          <p:cNvPr id="729" name="row:devlink:label"/>
           <p:cNvSpPr txBox="1"/>
           <p:nvPr/>
         </p:nvSpPr>
@@ -17092,7 +17172,7 @@
       </p:sp>
       <p:sp>
         <p:nvSpPr>
-          <p:cNvPr id="732" name="row:devlink health:name"/>
+          <p:cNvPr id="731" name="row:devlink health:name"/>
           <p:cNvSpPr txBox="1"/>
           <p:nvPr/>
         </p:nvSpPr>
@@ -17126,7 +17206,7 @@
       </p:sp>
       <p:cxnSp>
         <p:nvCxnSpPr>
-          <p:cNvPr id="733" name="row:devlink health:development"/>
+          <p:cNvPr id="732" name="row:devlink health:development"/>
           <p:cNvCxnSpPr/>
           <p:nvPr/>
         </p:nvCxnSpPr>
@@ -17162,7 +17242,7 @@
       </p:cxnSp>
       <p:sp>
         <p:nvSpPr>
-          <p:cNvPr id="734" name="row:devlink health:start"/>
+          <p:cNvPr id="733" name="row:devlink health:start"/>
           <p:cNvSpPr/>
           <p:nvPr/>
         </p:nvSpPr>
@@ -17208,7 +17288,7 @@
       </p:sp>
       <p:sp>
         <p:nvSpPr>
-          <p:cNvPr id="735" name="row:devlink health:release:5.1"/>
+          <p:cNvPr id="734" name="row:devlink health:release:5.1"/>
           <p:cNvSpPr/>
           <p:nvPr/>
         </p:nvSpPr>
@@ -17254,7 +17334,7 @@
       </p:sp>
       <p:sp>
         <p:nvSpPr>
-          <p:cNvPr id="736" name="row:devlink health:label"/>
+          <p:cNvPr id="735" name="row:devlink health:label"/>
           <p:cNvSpPr txBox="1"/>
           <p:nvPr/>
         </p:nvSpPr>
@@ -17288,7 +17368,7 @@
       </p:sp>
       <p:sp>
         <p:nvSpPr>
-          <p:cNvPr id="738" name="row:phylink:name"/>
+          <p:cNvPr id="737" name="row:phylink:name"/>
           <p:cNvSpPr txBox="1"/>
           <p:nvPr/>
         </p:nvSpPr>
@@ -17322,7 +17402,7 @@
       </p:sp>
       <p:cxnSp>
         <p:nvCxnSpPr>
-          <p:cNvPr id="739" name="row:phylink:development"/>
+          <p:cNvPr id="738" name="row:phylink:development"/>
           <p:cNvCxnSpPr/>
           <p:nvPr/>
         </p:nvCxnSpPr>
@@ -17358,7 +17438,7 @@
       </p:cxnSp>
       <p:sp>
         <p:nvSpPr>
-          <p:cNvPr id="740" name="row:phylink:start"/>
+          <p:cNvPr id="739" name="row:phylink:start"/>
           <p:cNvSpPr/>
           <p:nvPr/>
         </p:nvSpPr>
@@ -17404,7 +17484,7 @@
       </p:sp>
       <p:sp>
         <p:nvSpPr>
-          <p:cNvPr id="741" name="row:phylink:release:4.14"/>
+          <p:cNvPr id="740" name="row:phylink:release:4.14"/>
           <p:cNvSpPr/>
           <p:nvPr/>
         </p:nvSpPr>
@@ -17450,7 +17530,7 @@
       </p:sp>
       <p:sp>
         <p:nvSpPr>
-          <p:cNvPr id="742" name="row:phylink:label"/>
+          <p:cNvPr id="741" name="row:phylink:label"/>
           <p:cNvSpPr txBox="1"/>
           <p:nvPr/>
         </p:nvSpPr>
@@ -17484,7 +17564,7 @@
       </p:sp>
       <p:sp>
         <p:nvSpPr>
-          <p:cNvPr id="744" name="row:Net DIM:name"/>
+          <p:cNvPr id="743" name="row:Net DIM:name"/>
           <p:cNvSpPr txBox="1"/>
           <p:nvPr/>
         </p:nvSpPr>
@@ -17518,7 +17598,7 @@
       </p:sp>
       <p:cxnSp>
         <p:nvCxnSpPr>
-          <p:cNvPr id="745" name="row:Net DIM:development"/>
+          <p:cNvPr id="744" name="row:Net DIM:development"/>
           <p:cNvCxnSpPr/>
           <p:nvPr/>
         </p:nvCxnSpPr>
@@ -17554,7 +17634,7 @@
       </p:cxnSp>
       <p:sp>
         <p:nvSpPr>
-          <p:cNvPr id="746" name="row:Net DIM:start"/>
+          <p:cNvPr id="745" name="row:Net DIM:start"/>
           <p:cNvSpPr/>
           <p:nvPr/>
         </p:nvSpPr>
@@ -17600,7 +17680,7 @@
       </p:sp>
       <p:cxnSp>
         <p:nvCxnSpPr>
-          <p:cNvPr id="747" name="row:Net DIM:milestones"/>
+          <p:cNvPr id="746" name="row:Net DIM:milestones"/>
           <p:cNvCxnSpPr/>
           <p:nvPr/>
         </p:nvCxnSpPr>
@@ -17635,7 +17715,7 @@
       </p:cxnSp>
       <p:sp>
         <p:nvSpPr>
-          <p:cNvPr id="748" name="row:Net DIM:release:4.16"/>
+          <p:cNvPr id="747" name="row:Net DIM:release:4.16"/>
           <p:cNvSpPr/>
           <p:nvPr/>
         </p:nvSpPr>
@@ -17681,7 +17761,7 @@
       </p:sp>
       <p:sp>
         <p:nvSpPr>
-          <p:cNvPr id="749" name="row:Net DIM:release:5.3"/>
+          <p:cNvPr id="748" name="row:Net DIM:release:5.3"/>
           <p:cNvSpPr/>
           <p:nvPr/>
         </p:nvSpPr>
@@ -17727,7 +17807,7 @@
       </p:sp>
       <p:sp>
         <p:nvSpPr>
-          <p:cNvPr id="750" name="row:Net DIM:label"/>
+          <p:cNvPr id="749" name="row:Net DIM:label"/>
           <p:cNvSpPr txBox="1"/>
           <p:nvPr/>
         </p:nvSpPr>
@@ -17761,7 +17841,7 @@
       </p:sp>
       <p:sp>
         <p:nvSpPr>
-          <p:cNvPr id="752" name="row:netdevsim:name"/>
+          <p:cNvPr id="751" name="row:netdevsim:name"/>
           <p:cNvSpPr txBox="1"/>
           <p:nvPr/>
         </p:nvSpPr>
@@ -17795,7 +17875,7 @@
       </p:sp>
       <p:cxnSp>
         <p:nvCxnSpPr>
-          <p:cNvPr id="753" name="row:netdevsim:development"/>
+          <p:cNvPr id="752" name="row:netdevsim:development"/>
           <p:cNvCxnSpPr/>
           <p:nvPr/>
         </p:nvCxnSpPr>
@@ -17831,7 +17911,7 @@
       </p:cxnSp>
       <p:sp>
         <p:nvSpPr>
-          <p:cNvPr id="754" name="row:netdevsim:start"/>
+          <p:cNvPr id="753" name="row:netdevsim:start"/>
           <p:cNvSpPr/>
           <p:nvPr/>
         </p:nvSpPr>
@@ -17877,7 +17957,7 @@
       </p:sp>
       <p:sp>
         <p:nvSpPr>
-          <p:cNvPr id="755" name="row:netdevsim:release:4.16"/>
+          <p:cNvPr id="754" name="row:netdevsim:release:4.16"/>
           <p:cNvSpPr/>
           <p:nvPr/>
         </p:nvSpPr>
@@ -17923,7 +18003,7 @@
       </p:sp>
       <p:sp>
         <p:nvSpPr>
-          <p:cNvPr id="756" name="row:netdevsim:label"/>
+          <p:cNvPr id="755" name="row:netdevsim:label"/>
           <p:cNvSpPr txBox="1"/>
           <p:nvPr/>
         </p:nvSpPr>
@@ -17957,7 +18037,7 @@
       </p:sp>
       <p:sp>
         <p:nvSpPr>
-          <p:cNvPr id="758" name="row:ethtool netlink:name"/>
+          <p:cNvPr id="757" name="row:ethtool netlink:name"/>
           <p:cNvSpPr txBox="1"/>
           <p:nvPr/>
         </p:nvSpPr>
@@ -17991,7 +18071,7 @@
       </p:sp>
       <p:cxnSp>
         <p:nvCxnSpPr>
-          <p:cNvPr id="759" name="row:ethtool netlink:development"/>
+          <p:cNvPr id="758" name="row:ethtool netlink:development"/>
           <p:cNvCxnSpPr/>
           <p:nvPr/>
         </p:nvCxnSpPr>
@@ -18027,7 +18107,7 @@
       </p:cxnSp>
       <p:sp>
         <p:nvSpPr>
-          <p:cNvPr id="760" name="row:ethtool netlink:start"/>
+          <p:cNvPr id="759" name="row:ethtool netlink:start"/>
           <p:cNvSpPr/>
           <p:nvPr/>
         </p:nvSpPr>
@@ -18073,7 +18153,7 @@
       </p:sp>
       <p:sp>
         <p:nvSpPr>
-          <p:cNvPr id="761" name="row:ethtool netlink:release:5.6"/>
+          <p:cNvPr id="760" name="row:ethtool netlink:release:5.6"/>
           <p:cNvSpPr/>
           <p:nvPr/>
         </p:nvSpPr>
@@ -18119,7 +18199,7 @@
       </p:sp>
       <p:sp>
         <p:nvSpPr>
-          <p:cNvPr id="762" name="row:ethtool netlink:label"/>
+          <p:cNvPr id="761" name="row:ethtool netlink:label"/>
           <p:cNvSpPr txBox="1"/>
           <p:nvPr/>
         </p:nvSpPr>
@@ -18153,7 +18233,7 @@
       </p:sp>
       <p:sp>
         <p:nvSpPr>
-          <p:cNvPr id="764" name="row:auxiliary bus:name"/>
+          <p:cNvPr id="763" name="row:auxiliary bus:name"/>
           <p:cNvSpPr txBox="1"/>
           <p:nvPr/>
         </p:nvSpPr>
@@ -18187,7 +18267,7 @@
       </p:sp>
       <p:cxnSp>
         <p:nvCxnSpPr>
-          <p:cNvPr id="765" name="row:auxiliary bus:development"/>
+          <p:cNvPr id="764" name="row:auxiliary bus:development"/>
           <p:cNvCxnSpPr/>
           <p:nvPr/>
         </p:nvCxnSpPr>
@@ -18223,7 +18303,7 @@
       </p:cxnSp>
       <p:sp>
         <p:nvSpPr>
-          <p:cNvPr id="766" name="row:auxiliary bus:start"/>
+          <p:cNvPr id="765" name="row:auxiliary bus:start"/>
           <p:cNvSpPr/>
           <p:nvPr/>
         </p:nvSpPr>
@@ -18269,7 +18349,7 @@
       </p:sp>
       <p:sp>
         <p:nvSpPr>
-          <p:cNvPr id="767" name="row:auxiliary bus:release:5.11"/>
+          <p:cNvPr id="766" name="row:auxiliary bus:release:5.11"/>
           <p:cNvSpPr/>
           <p:nvPr/>
         </p:nvSpPr>
@@ -18315,7 +18395,7 @@
       </p:sp>
       <p:sp>
         <p:nvSpPr>
-          <p:cNvPr id="768" name="row:auxiliary bus:label"/>
+          <p:cNvPr id="767" name="row:auxiliary bus:label"/>
           <p:cNvSpPr txBox="1"/>
           <p:nvPr/>
         </p:nvSpPr>
@@ -18349,7 +18429,7 @@
       </p:sp>
       <p:sp>
         <p:nvSpPr>
-          <p:cNvPr id="770" name="row:threaded NAPI:name"/>
+          <p:cNvPr id="769" name="row:threaded NAPI:name"/>
           <p:cNvSpPr txBox="1"/>
           <p:nvPr/>
         </p:nvSpPr>
@@ -18383,7 +18463,7 @@
       </p:sp>
       <p:cxnSp>
         <p:nvCxnSpPr>
-          <p:cNvPr id="771" name="row:threaded NAPI:development"/>
+          <p:cNvPr id="770" name="row:threaded NAPI:development"/>
           <p:cNvCxnSpPr/>
           <p:nvPr/>
         </p:nvCxnSpPr>
@@ -18419,7 +18499,7 @@
       </p:cxnSp>
       <p:sp>
         <p:nvSpPr>
-          <p:cNvPr id="772" name="row:threaded NAPI:start"/>
+          <p:cNvPr id="771" name="row:threaded NAPI:start"/>
           <p:cNvSpPr/>
           <p:nvPr/>
         </p:nvSpPr>
@@ -18465,7 +18545,7 @@
       </p:sp>
       <p:cxnSp>
         <p:nvCxnSpPr>
-          <p:cNvPr id="773" name="row:threaded NAPI:milestones"/>
+          <p:cNvPr id="772" name="row:threaded NAPI:milestones"/>
           <p:cNvCxnSpPr/>
           <p:nvPr/>
         </p:nvCxnSpPr>
@@ -18500,7 +18580,7 @@
       </p:cxnSp>
       <p:sp>
         <p:nvSpPr>
-          <p:cNvPr id="774" name="row:threaded NAPI:release:5.12"/>
+          <p:cNvPr id="773" name="row:threaded NAPI:release:5.12"/>
           <p:cNvSpPr/>
           <p:nvPr/>
         </p:nvSpPr>
@@ -18546,7 +18626,7 @@
       </p:sp>
       <p:sp>
         <p:nvSpPr>
-          <p:cNvPr id="775" name="row:threaded NAPI:release:6.19"/>
+          <p:cNvPr id="774" name="row:threaded NAPI:release:6.19"/>
           <p:cNvSpPr/>
           <p:nvPr/>
         </p:nvSpPr>
@@ -18592,7 +18672,7 @@
       </p:sp>
       <p:sp>
         <p:nvSpPr>
-          <p:cNvPr id="776" name="row:threaded NAPI:label"/>
+          <p:cNvPr id="775" name="row:threaded NAPI:label"/>
           <p:cNvSpPr txBox="1"/>
           <p:nvPr/>
         </p:nvSpPr>
@@ -18626,7 +18706,7 @@
       </p:sp>
       <p:sp>
         <p:nvSpPr>
-          <p:cNvPr id="778" name="row:Rust phylib:name"/>
+          <p:cNvPr id="777" name="row:Rust phylib:name"/>
           <p:cNvSpPr txBox="1"/>
           <p:nvPr/>
         </p:nvSpPr>
@@ -18660,7 +18740,7 @@
       </p:sp>
       <p:cxnSp>
         <p:nvCxnSpPr>
-          <p:cNvPr id="779" name="row:Rust phylib:development"/>
+          <p:cNvPr id="778" name="row:Rust phylib:development"/>
           <p:cNvCxnSpPr/>
           <p:nvPr/>
         </p:nvCxnSpPr>
@@ -18696,7 +18776,7 @@
       </p:cxnSp>
       <p:sp>
         <p:nvSpPr>
-          <p:cNvPr id="780" name="row:Rust phylib:start"/>
+          <p:cNvPr id="779" name="row:Rust phylib:start"/>
           <p:cNvSpPr/>
           <p:nvPr/>
         </p:nvSpPr>
@@ -18742,7 +18822,7 @@
       </p:sp>
       <p:sp>
         <p:nvSpPr>
-          <p:cNvPr id="781" name="row:Rust phylib:release:6.8"/>
+          <p:cNvPr id="780" name="row:Rust phylib:release:6.8"/>
           <p:cNvSpPr/>
           <p:nvPr/>
         </p:nvSpPr>
@@ -18788,7 +18868,7 @@
       </p:sp>
       <p:sp>
         <p:nvSpPr>
-          <p:cNvPr id="782" name="row:Rust phylib:label"/>
+          <p:cNvPr id="781" name="row:Rust phylib:label"/>
           <p:cNvSpPr txBox="1"/>
           <p:nvPr/>
         </p:nvSpPr>
@@ -19541,7 +19621,7 @@
                   <a:srgbClr val="64748B"/>
                 </a:solidFill>
               </a:rPr>
-              <a:t>· ● First canonical release per Part VI (netmem 6.9: Part VII anchor); a feature keeps evolving after it. 7.3-rc = merged to mainline on 2026-08-20, final 7.3 pending.</a:t>
+              <a:t>· ● First canonical release per Part VI; a feature keeps evolving after it. 7.3-rc = merged to mainline on 2026-08-20, final 7.3 pending.</a:t>
             </a:r>
           </a:p>
           <a:p>
@@ -19597,7 +19677,7 @@
                   <a:srgbClr val="64748B"/>
                 </a:solidFill>
               </a:rPr>
-              <a:t>· Rows are grouped by Part VI axis. Cross-cutting-domain milestones (e.g. BBR, MPTCP, VXLAN, kTLS, WireGuard) and secondary Part VI milestones have no row.</a:t>
+              <a:t>· Rows: representative milestones selected from Part VI, grouped by axis. Cross-cutting-domain milestones (e.g. BBR, MPTCP, VXLAN, kTLS) have no row.</a:t>
             </a:r>
           </a:p>
         </p:txBody>
@@ -20646,7 +20726,7 @@
       </p:sp>
       <p:sp>
         <p:nvSpPr>
-          <p:cNvPr id="613" name="row:Device Memory TCP RX:start-label"/>
+          <p:cNvPr id="615" name="row:Device Memory TCP RX · TX:start-label"/>
           <p:cNvSpPr txBox="1"/>
           <p:nvPr/>
         </p:nvSpPr>
@@ -20686,14 +20766,14 @@
       </p:sp>
       <p:sp>
         <p:nvSpPr>
-          <p:cNvPr id="619" name="row:Device Memory TCP TX:start-label"/>
+          <p:cNvPr id="627" name="row:large RX buffers (providers / ZCRX):start-label"/>
           <p:cNvSpPr txBox="1"/>
           <p:nvPr/>
         </p:nvSpPr>
         <p:spPr>
           <a:xfrm>
-            <a:off x="11784095" y="4408925"/>
-            <a:ext cx="205232" cy="137160"/>
+            <a:off x="12434017" y="4603141"/>
+            <a:ext cx="249682" cy="137160"/>
           </a:xfrm>
           <a:prstGeom prst="rect">
             <a:avLst/>
@@ -20719,20 +20799,20 @@
                   <a:srgbClr val="475569"/>
                 </a:solidFill>
               </a:rPr>
-              <a:t>~6.7</a:t>
-            </a:r>
-          </a:p>
-        </p:txBody>
-      </p:sp>
-      <p:sp>
-        <p:nvSpPr>
-          <p:cNvPr id="625" name="row:io_uring ZCRX / memory-provider hooks:start-label"/>
+              <a:t>~6.13</a:t>
+            </a:r>
+          </a:p>
+        </p:txBody>
+      </p:sp>
+      <p:sp>
+        <p:nvSpPr>
+          <p:cNvPr id="633" name="row:io_uring ZCRX:start-label"/>
           <p:cNvSpPr txBox="1"/>
           <p:nvPr/>
         </p:nvSpPr>
         <p:spPr>
           <a:xfrm>
-            <a:off x="11367471" y="4506033"/>
+            <a:off x="11367471" y="4700249"/>
             <a:ext cx="205232" cy="137160"/>
           </a:xfrm>
           <a:prstGeom prst="rect">
@@ -20766,13 +20846,13 @@
       </p:sp>
       <p:sp>
         <p:nvSpPr>
-          <p:cNvPr id="631" name="row:large RX buffers (mem. providers):start-label"/>
+          <p:cNvPr id="639" name="row:RX HW queue leasing:start-label"/>
           <p:cNvSpPr txBox="1"/>
           <p:nvPr/>
         </p:nvSpPr>
         <p:spPr>
           <a:xfrm>
-            <a:off x="12434017" y="4603141"/>
+            <a:off x="12086831" y="4797357"/>
             <a:ext cx="249682" cy="137160"/>
           </a:xfrm>
           <a:prstGeom prst="rect">
@@ -20799,20 +20879,20 @@
                   <a:srgbClr val="475569"/>
                 </a:solidFill>
               </a:rPr>
-              <a:t>~6.13</a:t>
-            </a:r>
-          </a:p>
-        </p:txBody>
-      </p:sp>
-      <p:sp>
-        <p:nvSpPr>
-          <p:cNvPr id="640" name="row:RX HW queue leasing:start-label"/>
+              <a:t>~6.10</a:t>
+            </a:r>
+          </a:p>
+        </p:txBody>
+      </p:sp>
+      <p:sp>
+        <p:nvSpPr>
+          <p:cNvPr id="655" name="row:nexthop objects:start-label"/>
           <p:cNvSpPr txBox="1"/>
           <p:nvPr/>
         </p:nvSpPr>
         <p:spPr>
           <a:xfrm>
-            <a:off x="12086831" y="4797357"/>
+            <a:off x="7573410" y="5180121"/>
             <a:ext cx="249682" cy="137160"/>
           </a:xfrm>
           <a:prstGeom prst="rect">
@@ -20839,21 +20919,21 @@
                   <a:srgbClr val="475569"/>
                 </a:solidFill>
               </a:rPr>
-              <a:t>~6.10</a:t>
-            </a:r>
-          </a:p>
-        </p:txBody>
-      </p:sp>
-      <p:sp>
-        <p:nvSpPr>
-          <p:cNvPr id="656" name="row:nexthop objects:start-label"/>
+              <a:t>~4.15</a:t>
+            </a:r>
+          </a:p>
+        </p:txBody>
+      </p:sp>
+      <p:sp>
+        <p:nvSpPr>
+          <p:cNvPr id="661" name="row:per-netns RTNL:start-label"/>
           <p:cNvSpPr txBox="1"/>
           <p:nvPr/>
         </p:nvSpPr>
         <p:spPr>
           <a:xfrm>
-            <a:off x="7573410" y="5180121"/>
-            <a:ext cx="249682" cy="137160"/>
+            <a:off x="11089722" y="5277229"/>
+            <a:ext cx="205232" cy="137160"/>
           </a:xfrm>
           <a:prstGeom prst="rect">
             <a:avLst/>
@@ -20879,20 +20959,20 @@
                   <a:srgbClr val="475569"/>
                 </a:solidFill>
               </a:rPr>
-              <a:t>~4.15</a:t>
-            </a:r>
-          </a:p>
-        </p:txBody>
-      </p:sp>
-      <p:sp>
-        <p:nvSpPr>
-          <p:cNvPr id="662" name="row:per-netns RTNL:start-label"/>
+              <a:t>~6.2</a:t>
+            </a:r>
+          </a:p>
+        </p:txBody>
+      </p:sp>
+      <p:sp>
+        <p:nvSpPr>
+          <p:cNvPr id="667" name="row:further RTNL breakup:start-label"/>
           <p:cNvSpPr txBox="1"/>
           <p:nvPr/>
         </p:nvSpPr>
         <p:spPr>
           <a:xfrm>
-            <a:off x="11089722" y="5277229"/>
+            <a:off x="11784095" y="5374337"/>
             <a:ext cx="205232" cy="137160"/>
           </a:xfrm>
           <a:prstGeom prst="rect">
@@ -20919,21 +20999,21 @@
                   <a:srgbClr val="475569"/>
                 </a:solidFill>
               </a:rPr>
-              <a:t>~6.2</a:t>
-            </a:r>
-          </a:p>
-        </p:txBody>
-      </p:sp>
-      <p:sp>
-        <p:nvSpPr>
-          <p:cNvPr id="668" name="row:further RTNL breakup:start-label"/>
+              <a:t>~6.7</a:t>
+            </a:r>
+          </a:p>
+        </p:txBody>
+      </p:sp>
+      <p:sp>
+        <p:nvSpPr>
+          <p:cNvPr id="673" name="row:RTNL-less FIB rules:start-label"/>
           <p:cNvSpPr txBox="1"/>
           <p:nvPr/>
         </p:nvSpPr>
         <p:spPr>
           <a:xfrm>
-            <a:off x="11784095" y="5374337"/>
-            <a:ext cx="205232" cy="137160"/>
+            <a:off x="12434017" y="5471445"/>
+            <a:ext cx="249682" cy="137160"/>
           </a:xfrm>
           <a:prstGeom prst="rect">
             <a:avLst/>
@@ -20959,20 +21039,20 @@
                   <a:srgbClr val="475569"/>
                 </a:solidFill>
               </a:rPr>
-              <a:t>~6.7</a:t>
-            </a:r>
-          </a:p>
-        </p:txBody>
-      </p:sp>
-      <p:sp>
-        <p:nvSpPr>
-          <p:cNvPr id="674" name="row:RTNL-less FIB rules:start-label"/>
+              <a:t>~6.13</a:t>
+            </a:r>
+          </a:p>
+        </p:txBody>
+      </p:sp>
+      <p:sp>
+        <p:nvSpPr>
+          <p:cNvPr id="682" name="row:YNL tooling:start-label"/>
           <p:cNvSpPr txBox="1"/>
           <p:nvPr/>
         </p:nvSpPr>
         <p:spPr>
           <a:xfrm>
-            <a:off x="12434017" y="5471445"/>
+            <a:off x="10003713" y="5665661"/>
             <a:ext cx="249682" cy="137160"/>
           </a:xfrm>
           <a:prstGeom prst="rect">
@@ -20999,21 +21079,21 @@
                   <a:srgbClr val="475569"/>
                 </a:solidFill>
               </a:rPr>
-              <a:t>~6.13</a:t>
-            </a:r>
-          </a:p>
-        </p:txBody>
-      </p:sp>
-      <p:sp>
-        <p:nvSpPr>
-          <p:cNvPr id="683" name="row:YNL tooling:start-label"/>
+              <a:t>~5.13</a:t>
+            </a:r>
+          </a:p>
+        </p:txBody>
+      </p:sp>
+      <p:sp>
+        <p:nvSpPr>
+          <p:cNvPr id="688" name="row:queue/NAPI/page_pool netdev-genl:start-label"/>
           <p:cNvSpPr txBox="1"/>
           <p:nvPr/>
         </p:nvSpPr>
         <p:spPr>
           <a:xfrm>
-            <a:off x="10003713" y="5665661"/>
-            <a:ext cx="249682" cy="137160"/>
+            <a:off x="11089722" y="5854209"/>
+            <a:ext cx="205232" cy="137160"/>
           </a:xfrm>
           <a:prstGeom prst="rect">
             <a:avLst/>
@@ -21039,21 +21119,21 @@
                   <a:srgbClr val="475569"/>
                 </a:solidFill>
               </a:rPr>
-              <a:t>~5.13</a:t>
-            </a:r>
-          </a:p>
-        </p:txBody>
-      </p:sp>
-      <p:sp>
-        <p:nvSpPr>
-          <p:cNvPr id="689" name="row:queue/NAPI/page_pool netdev-genl:start-label"/>
+              <a:t>~6.2</a:t>
+            </a:r>
+          </a:p>
+        </p:txBody>
+      </p:sp>
+      <p:sp>
+        <p:nvSpPr>
+          <p:cNvPr id="694" name="row:kprobe BPF:start-label"/>
           <p:cNvSpPr txBox="1"/>
           <p:nvPr/>
         </p:nvSpPr>
         <p:spPr>
           <a:xfrm>
-            <a:off x="11089722" y="5854209"/>
-            <a:ext cx="205232" cy="137160"/>
+            <a:off x="4934794" y="5951317"/>
+            <a:ext cx="249682" cy="137160"/>
           </a:xfrm>
           <a:prstGeom prst="rect">
             <a:avLst/>
@@ -21079,20 +21159,20 @@
                   <a:srgbClr val="475569"/>
                 </a:solidFill>
               </a:rPr>
-              <a:t>~6.2</a:t>
-            </a:r>
-          </a:p>
-        </p:txBody>
-      </p:sp>
-      <p:sp>
-        <p:nvSpPr>
-          <p:cNvPr id="695" name="row:kprobe BPF:start-label"/>
+              <a:t>~3.14</a:t>
+            </a:r>
+          </a:p>
+        </p:txBody>
+      </p:sp>
+      <p:sp>
+        <p:nvSpPr>
+          <p:cNvPr id="700" name="row:BTF:start-label"/>
           <p:cNvSpPr txBox="1"/>
           <p:nvPr/>
         </p:nvSpPr>
         <p:spPr>
           <a:xfrm>
-            <a:off x="4934794" y="5951317"/>
+            <a:off x="7726552" y="6048425"/>
             <a:ext cx="249682" cy="137160"/>
           </a:xfrm>
           <a:prstGeom prst="rect">
@@ -21119,20 +21199,20 @@
                   <a:srgbClr val="475569"/>
                 </a:solidFill>
               </a:rPr>
-              <a:t>~3.14</a:t>
-            </a:r>
-          </a:p>
-        </p:txBody>
-      </p:sp>
-      <p:sp>
-        <p:nvSpPr>
-          <p:cNvPr id="701" name="row:BTF:start-label"/>
+              <a:t>~4.16</a:t>
+            </a:r>
+          </a:p>
+        </p:txBody>
+      </p:sp>
+      <p:sp>
+        <p:nvSpPr>
+          <p:cNvPr id="706" name="row:structured drop reason:start-label"/>
           <p:cNvSpPr txBox="1"/>
           <p:nvPr/>
         </p:nvSpPr>
         <p:spPr>
           <a:xfrm>
-            <a:off x="7726552" y="6048425"/>
+            <a:off x="9656527" y="6145533"/>
             <a:ext cx="249682" cy="137160"/>
           </a:xfrm>
           <a:prstGeom prst="rect">
@@ -21159,20 +21239,20 @@
                   <a:srgbClr val="475569"/>
                 </a:solidFill>
               </a:rPr>
-              <a:t>~4.16</a:t>
-            </a:r>
-          </a:p>
-        </p:txBody>
-      </p:sp>
-      <p:sp>
-        <p:nvSpPr>
-          <p:cNvPr id="707" name="row:structured drop reason:start-label"/>
+              <a:t>~5.11</a:t>
+            </a:r>
+          </a:p>
+        </p:txBody>
+      </p:sp>
+      <p:sp>
+        <p:nvSpPr>
+          <p:cNvPr id="712" name="row:drop-reason expansion:start-label"/>
           <p:cNvSpPr txBox="1"/>
           <p:nvPr/>
         </p:nvSpPr>
         <p:spPr>
           <a:xfrm>
-            <a:off x="9656527" y="6145533"/>
+            <a:off x="10489774" y="6242641"/>
             <a:ext cx="249682" cy="137160"/>
           </a:xfrm>
           <a:prstGeom prst="rect">
@@ -21199,20 +21279,20 @@
                   <a:srgbClr val="475569"/>
                 </a:solidFill>
               </a:rPr>
-              <a:t>~5.11</a:t>
-            </a:r>
-          </a:p>
-        </p:txBody>
-      </p:sp>
-      <p:sp>
-        <p:nvSpPr>
-          <p:cNvPr id="713" name="row:drop-reason expansion:start-label"/>
+              <a:t>~5.17</a:t>
+            </a:r>
+          </a:p>
+        </p:txBody>
+      </p:sp>
+      <p:sp>
+        <p:nvSpPr>
+          <p:cNvPr id="718" name="row:qdisc-drop tracepoint:start-label"/>
           <p:cNvSpPr txBox="1"/>
           <p:nvPr/>
         </p:nvSpPr>
         <p:spPr>
           <a:xfrm>
-            <a:off x="10489774" y="6242641"/>
+            <a:off x="12434017" y="6339749"/>
             <a:ext cx="249682" cy="137160"/>
           </a:xfrm>
           <a:prstGeom prst="rect">
@@ -21239,20 +21319,20 @@
                   <a:srgbClr val="475569"/>
                 </a:solidFill>
               </a:rPr>
-              <a:t>~5.17</a:t>
-            </a:r>
-          </a:p>
-        </p:txBody>
-      </p:sp>
-      <p:sp>
-        <p:nvSpPr>
-          <p:cNvPr id="719" name="row:qdisc-drop tracepoint:start-label"/>
+              <a:t>~6.13</a:t>
+            </a:r>
+          </a:p>
+        </p:txBody>
+      </p:sp>
+      <p:sp>
+        <p:nvSpPr>
+          <p:cNvPr id="724" name="row:switchdev:start-label"/>
           <p:cNvSpPr txBox="1"/>
           <p:nvPr/>
         </p:nvSpPr>
         <p:spPr>
           <a:xfrm>
-            <a:off x="12434017" y="6339749"/>
+            <a:off x="4795920" y="6528297"/>
             <a:ext cx="249682" cy="137160"/>
           </a:xfrm>
           <a:prstGeom prst="rect">
@@ -21279,20 +21359,20 @@
                   <a:srgbClr val="475569"/>
                 </a:solidFill>
               </a:rPr>
-              <a:t>~6.13</a:t>
-            </a:r>
-          </a:p>
-        </p:txBody>
-      </p:sp>
-      <p:sp>
-        <p:nvSpPr>
-          <p:cNvPr id="725" name="row:switchdev:start-label"/>
+              <a:t>~3.13</a:t>
+            </a:r>
+          </a:p>
+        </p:txBody>
+      </p:sp>
+      <p:sp>
+        <p:nvSpPr>
+          <p:cNvPr id="730" name="row:devlink:start-label"/>
           <p:cNvSpPr txBox="1"/>
           <p:nvPr/>
         </p:nvSpPr>
         <p:spPr>
           <a:xfrm>
-            <a:off x="4795920" y="6528297"/>
+            <a:off x="5490292" y="6625405"/>
             <a:ext cx="249682" cy="137160"/>
           </a:xfrm>
           <a:prstGeom prst="rect">
@@ -21319,20 +21399,20 @@
                   <a:srgbClr val="475569"/>
                 </a:solidFill>
               </a:rPr>
-              <a:t>~3.13</a:t>
-            </a:r>
-          </a:p>
-        </p:txBody>
-      </p:sp>
-      <p:sp>
-        <p:nvSpPr>
-          <p:cNvPr id="731" name="row:devlink:start-label"/>
+              <a:t>~3.19</a:t>
+            </a:r>
+          </a:p>
+        </p:txBody>
+      </p:sp>
+      <p:sp>
+        <p:nvSpPr>
+          <p:cNvPr id="736" name="row:devlink health:start-label"/>
           <p:cNvSpPr txBox="1"/>
           <p:nvPr/>
         </p:nvSpPr>
         <p:spPr>
           <a:xfrm>
-            <a:off x="5490292" y="6625405"/>
+            <a:off x="7477398" y="6722513"/>
             <a:ext cx="249682" cy="137160"/>
           </a:xfrm>
           <a:prstGeom prst="rect">
@@ -21359,21 +21439,21 @@
                   <a:srgbClr val="475569"/>
                 </a:solidFill>
               </a:rPr>
-              <a:t>~3.19</a:t>
-            </a:r>
-          </a:p>
-        </p:txBody>
-      </p:sp>
-      <p:sp>
-        <p:nvSpPr>
-          <p:cNvPr id="737" name="row:devlink health:start-label"/>
+              <a:t>~4.15</a:t>
+            </a:r>
+          </a:p>
+        </p:txBody>
+      </p:sp>
+      <p:sp>
+        <p:nvSpPr>
+          <p:cNvPr id="742" name="row:phylink:start-label"/>
           <p:cNvSpPr txBox="1"/>
           <p:nvPr/>
         </p:nvSpPr>
         <p:spPr>
           <a:xfrm>
-            <a:off x="7477398" y="6722513"/>
-            <a:ext cx="249682" cy="137160"/>
+            <a:off x="5673617" y="6819621"/>
+            <a:ext cx="205232" cy="137160"/>
           </a:xfrm>
           <a:prstGeom prst="rect">
             <a:avLst/>
@@ -21399,21 +21479,21 @@
                   <a:srgbClr val="475569"/>
                 </a:solidFill>
               </a:rPr>
-              <a:t>~4.15</a:t>
-            </a:r>
-          </a:p>
-        </p:txBody>
-      </p:sp>
-      <p:sp>
-        <p:nvSpPr>
-          <p:cNvPr id="743" name="row:phylink:start-label"/>
+              <a:t>~4.0</a:t>
+            </a:r>
+          </a:p>
+        </p:txBody>
+      </p:sp>
+      <p:sp>
+        <p:nvSpPr>
+          <p:cNvPr id="750" name="row:Net DIM:start-label"/>
           <p:cNvSpPr txBox="1"/>
           <p:nvPr/>
         </p:nvSpPr>
         <p:spPr>
           <a:xfrm>
-            <a:off x="5673617" y="6819621"/>
-            <a:ext cx="205232" cy="137160"/>
+            <a:off x="6879037" y="6916729"/>
+            <a:ext cx="249682" cy="137160"/>
           </a:xfrm>
           <a:prstGeom prst="rect">
             <a:avLst/>
@@ -21439,20 +21519,20 @@
                   <a:srgbClr val="475569"/>
                 </a:solidFill>
               </a:rPr>
-              <a:t>~4.0</a:t>
-            </a:r>
-          </a:p>
-        </p:txBody>
-      </p:sp>
-      <p:sp>
-        <p:nvSpPr>
-          <p:cNvPr id="751" name="row:Net DIM:start-label"/>
+              <a:t>~4.10</a:t>
+            </a:r>
+          </a:p>
+        </p:txBody>
+      </p:sp>
+      <p:sp>
+        <p:nvSpPr>
+          <p:cNvPr id="756" name="row:netdevsim:start-label"/>
           <p:cNvSpPr txBox="1"/>
           <p:nvPr/>
         </p:nvSpPr>
         <p:spPr>
           <a:xfrm>
-            <a:off x="6879037" y="6916729"/>
+            <a:off x="7226223" y="7013837"/>
             <a:ext cx="249682" cy="137160"/>
           </a:xfrm>
           <a:prstGeom prst="rect">
@@ -21479,20 +21559,20 @@
                   <a:srgbClr val="475569"/>
                 </a:solidFill>
               </a:rPr>
-              <a:t>~4.10</a:t>
-            </a:r>
-          </a:p>
-        </p:txBody>
-      </p:sp>
-      <p:sp>
-        <p:nvSpPr>
-          <p:cNvPr id="757" name="row:netdevsim:start-label"/>
+              <a:t>~4.12</a:t>
+            </a:r>
+          </a:p>
+        </p:txBody>
+      </p:sp>
+      <p:sp>
+        <p:nvSpPr>
+          <p:cNvPr id="762" name="row:ethtool netlink:start-label"/>
           <p:cNvSpPr txBox="1"/>
           <p:nvPr/>
         </p:nvSpPr>
         <p:spPr>
           <a:xfrm>
-            <a:off x="7226223" y="7013837"/>
+            <a:off x="7573410" y="7110945"/>
             <a:ext cx="249682" cy="137160"/>
           </a:xfrm>
           <a:prstGeom prst="rect">
@@ -21519,21 +21599,21 @@
                   <a:srgbClr val="475569"/>
                 </a:solidFill>
               </a:rPr>
-              <a:t>~4.12</a:t>
-            </a:r>
-          </a:p>
-        </p:txBody>
-      </p:sp>
-      <p:sp>
-        <p:nvSpPr>
-          <p:cNvPr id="763" name="row:ethtool netlink:start-label"/>
+              <a:t>~4.15</a:t>
+            </a:r>
+          </a:p>
+        </p:txBody>
+      </p:sp>
+      <p:sp>
+        <p:nvSpPr>
+          <p:cNvPr id="768" name="row:auxiliary bus:start-label"/>
           <p:cNvSpPr txBox="1"/>
           <p:nvPr/>
         </p:nvSpPr>
         <p:spPr>
           <a:xfrm>
-            <a:off x="7573410" y="7110945"/>
-            <a:ext cx="249682" cy="137160"/>
+            <a:off x="9006605" y="7208053"/>
+            <a:ext cx="205232" cy="137160"/>
           </a:xfrm>
           <a:prstGeom prst="rect">
             <a:avLst/>
@@ -21559,20 +21639,20 @@
                   <a:srgbClr val="475569"/>
                 </a:solidFill>
               </a:rPr>
-              <a:t>~4.15</a:t>
-            </a:r>
-          </a:p>
-        </p:txBody>
-      </p:sp>
-      <p:sp>
-        <p:nvSpPr>
-          <p:cNvPr id="769" name="row:auxiliary bus:start-label"/>
+              <a:t>~5.5</a:t>
+            </a:r>
+          </a:p>
+        </p:txBody>
+      </p:sp>
+      <p:sp>
+        <p:nvSpPr>
+          <p:cNvPr id="776" name="row:threaded NAPI:start-label"/>
           <p:cNvSpPr txBox="1"/>
           <p:nvPr/>
         </p:nvSpPr>
         <p:spPr>
           <a:xfrm>
-            <a:off x="9006605" y="7208053"/>
+            <a:off x="9214916" y="7305161"/>
             <a:ext cx="205232" cy="137160"/>
           </a:xfrm>
           <a:prstGeom prst="rect">
@@ -21599,46 +21679,6 @@
                   <a:srgbClr val="475569"/>
                 </a:solidFill>
               </a:rPr>
-              <a:t>~5.5</a:t>
-            </a:r>
-          </a:p>
-        </p:txBody>
-      </p:sp>
-      <p:sp>
-        <p:nvSpPr>
-          <p:cNvPr id="777" name="row:threaded NAPI:start-label"/>
-          <p:cNvSpPr txBox="1"/>
-          <p:nvPr/>
-        </p:nvSpPr>
-        <p:spPr>
-          <a:xfrm>
-            <a:off x="9214916" y="7305161"/>
-            <a:ext cx="205232" cy="137160"/>
-          </a:xfrm>
-          <a:prstGeom prst="rect">
-            <a:avLst/>
-          </a:prstGeom>
-          <a:noFill/>
-        </p:spPr>
-        <p:txBody>
-          <a:bodyPr wrap="square" lIns="0" tIns="0" rIns="0" bIns="0" anchor="ctr">
-            <a:noAutofit/>
-          </a:bodyPr>
-          <a:lstStyle/>
-          <a:p>
-            <a:pPr algn="r">
-              <a:defRPr sz="530" i="1">
-                <a:solidFill>
-                  <a:srgbClr val="475569"/>
-                </a:solidFill>
-              </a:defRPr>
-            </a:pPr>
-            <a:r>
-              <a:rPr sz="650" i="1">
-                <a:solidFill>
-                  <a:srgbClr val="475569"/>
-                </a:solidFill>
-              </a:rPr>
               <a:t>~5.7</a:t>
             </a:r>
           </a:p>
@@ -21646,7 +21686,7 @@
       </p:sp>
       <p:sp>
         <p:nvSpPr>
-          <p:cNvPr id="783" name="row:Rust phylib:start-label"/>
+          <p:cNvPr id="782" name="row:Rust phylib:start-label"/>
           <p:cNvSpPr txBox="1"/>
           <p:nvPr/>
         </p:nvSpPr>

--- a/linux-networking-feature-evolution.pptx
+++ b/linux-networking-feature-evolution.pptx
@@ -297,6 +297,11 @@
           <a:p>
             <a:r>
               <a:t>Editing notes (figure synced to canonical edition r52)</a:t>
+            </a:r>
+          </a:p>
+          <a:p>
+            <a:r>
+              <a:t>- Trial in this version: every row repeats its feature name as a caption next to its marks (row:&lt;feature&gt;:caption, grey, regular weight), to the right of the release label or, where that would leave the band or cross a lineage line, to the left of the start label. The name column on the left is unchanged. To go back, delete the :caption objects or use r52-v1.</a:t>
             </a:r>
           </a:p>
           <a:p>
@@ -21720,6 +21725,1946 @@
                 </a:solidFill>
               </a:rPr>
               <a:t>~6.2</a:t>
+            </a:r>
+          </a:p>
+        </p:txBody>
+      </p:sp>
+      <p:sp>
+        <p:nvSpPr>
+          <p:cNvPr id="831" name="row:DQL / BQL:caption"/>
+          <p:cNvSpPr txBox="1"/>
+          <p:nvPr/>
+        </p:nvSpPr>
+        <p:spPr>
+          <a:xfrm>
+            <a:off x="4090511" y="1465873"/>
+            <a:ext cx="390265" cy="219456"/>
+          </a:xfrm>
+          <a:prstGeom prst="rect">
+            <a:avLst/>
+          </a:prstGeom>
+          <a:noFill/>
+        </p:spPr>
+        <p:txBody>
+          <a:bodyPr wrap="square" lIns="0" tIns="0" rIns="0" bIns="0" anchor="ctr">
+            <a:noAutofit/>
+          </a:bodyPr>
+          <a:lstStyle/>
+          <a:p>
+            <a:pPr algn="l"/>
+            <a:r>
+              <a:rPr sz="700" b="0" i="0">
+                <a:solidFill>
+                  <a:srgbClr val="334155"/>
+                </a:solidFill>
+              </a:rPr>
+              <a:t>DQL / BQL</a:t>
+            </a:r>
+          </a:p>
+        </p:txBody>
+      </p:sp>
+      <p:sp>
+        <p:nvSpPr>
+          <p:cNvPr id="832" name="row:CoDel / fq_codel:caption"/>
+          <p:cNvSpPr txBox="1"/>
+          <p:nvPr/>
+        </p:nvSpPr>
+        <p:spPr>
+          <a:xfrm>
+            <a:off x="4327672" y="1562981"/>
+            <a:ext cx="617342" cy="219456"/>
+          </a:xfrm>
+          <a:prstGeom prst="rect">
+            <a:avLst/>
+          </a:prstGeom>
+          <a:noFill/>
+        </p:spPr>
+        <p:txBody>
+          <a:bodyPr wrap="square" lIns="0" tIns="0" rIns="0" bIns="0" anchor="ctr">
+            <a:noAutofit/>
+          </a:bodyPr>
+          <a:lstStyle/>
+          <a:p>
+            <a:pPr algn="l"/>
+            <a:r>
+              <a:rPr sz="700" b="0" i="0">
+                <a:solidFill>
+                  <a:srgbClr val="334155"/>
+                </a:solidFill>
+              </a:rPr>
+              <a:t>CoDel / fq_codel</a:t>
+            </a:r>
+          </a:p>
+        </p:txBody>
+      </p:sp>
+      <p:sp>
+        <p:nvSpPr>
+          <p:cNvPr id="833" name="row:TSQ:caption"/>
+          <p:cNvSpPr txBox="1"/>
+          <p:nvPr/>
+        </p:nvSpPr>
+        <p:spPr>
+          <a:xfrm>
+            <a:off x="4463124" y="1660089"/>
+            <a:ext cx="161848" cy="219456"/>
+          </a:xfrm>
+          <a:prstGeom prst="rect">
+            <a:avLst/>
+          </a:prstGeom>
+          <a:noFill/>
+        </p:spPr>
+        <p:txBody>
+          <a:bodyPr wrap="square" lIns="0" tIns="0" rIns="0" bIns="0" anchor="ctr">
+            <a:noAutofit/>
+          </a:bodyPr>
+          <a:lstStyle/>
+          <a:p>
+            <a:pPr algn="l"/>
+            <a:r>
+              <a:rPr sz="700" b="0" i="0">
+                <a:solidFill>
+                  <a:srgbClr val="334155"/>
+                </a:solidFill>
+              </a:rPr>
+              <a:t>TSQ</a:t>
+            </a:r>
+          </a:p>
+        </p:txBody>
+      </p:sp>
+      <p:sp>
+        <p:nvSpPr>
+          <p:cNvPr id="834" name="row:SO_BUSY_POLL:caption"/>
+          <p:cNvSpPr txBox="1"/>
+          <p:nvPr/>
+        </p:nvSpPr>
+        <p:spPr>
+          <a:xfrm>
+            <a:off x="5149036" y="1757197"/>
+            <a:ext cx="574788" cy="219456"/>
+          </a:xfrm>
+          <a:prstGeom prst="rect">
+            <a:avLst/>
+          </a:prstGeom>
+          <a:noFill/>
+        </p:spPr>
+        <p:txBody>
+          <a:bodyPr wrap="square" lIns="0" tIns="0" rIns="0" bIns="0" anchor="ctr">
+            <a:noAutofit/>
+          </a:bodyPr>
+          <a:lstStyle/>
+          <a:p>
+            <a:pPr algn="l"/>
+            <a:r>
+              <a:rPr sz="700" b="0" i="0">
+                <a:solidFill>
+                  <a:srgbClr val="334155"/>
+                </a:solidFill>
+              </a:rPr>
+              <a:t>SO_BUSY_POLL</a:t>
+            </a:r>
+          </a:p>
+        </p:txBody>
+      </p:sp>
+      <p:sp>
+        <p:nvSpPr>
+          <p:cNvPr id="835" name="row:sch_fq / TCP pacing:caption"/>
+          <p:cNvSpPr txBox="1"/>
+          <p:nvPr/>
+        </p:nvSpPr>
+        <p:spPr>
+          <a:xfrm>
+            <a:off x="5266904" y="1854305"/>
+            <a:ext cx="718487" cy="219456"/>
+          </a:xfrm>
+          <a:prstGeom prst="rect">
+            <a:avLst/>
+          </a:prstGeom>
+          <a:noFill/>
+        </p:spPr>
+        <p:txBody>
+          <a:bodyPr wrap="square" lIns="0" tIns="0" rIns="0" bIns="0" anchor="ctr">
+            <a:noAutofit/>
+          </a:bodyPr>
+          <a:lstStyle/>
+          <a:p>
+            <a:pPr algn="l"/>
+            <a:r>
+              <a:rPr sz="700" b="0" i="0">
+                <a:solidFill>
+                  <a:srgbClr val="334155"/>
+                </a:solidFill>
+              </a:rPr>
+              <a:t>sch_fq / TCP pacing</a:t>
+            </a:r>
+          </a:p>
+        </p:txBody>
+      </p:sp>
+      <p:sp>
+        <p:nvSpPr>
+          <p:cNvPr id="836" name="row:SO_TXTIME / EDT / taprio:caption"/>
+          <p:cNvSpPr txBox="1"/>
+          <p:nvPr/>
+        </p:nvSpPr>
+        <p:spPr>
+          <a:xfrm>
+            <a:off x="9079624" y="1951413"/>
+            <a:ext cx="942654" cy="219456"/>
+          </a:xfrm>
+          <a:prstGeom prst="rect">
+            <a:avLst/>
+          </a:prstGeom>
+          <a:noFill/>
+        </p:spPr>
+        <p:txBody>
+          <a:bodyPr wrap="square" lIns="0" tIns="0" rIns="0" bIns="0" anchor="ctr">
+            <a:noAutofit/>
+          </a:bodyPr>
+          <a:lstStyle/>
+          <a:p>
+            <a:pPr algn="l"/>
+            <a:r>
+              <a:rPr sz="700" b="0" i="0">
+                <a:solidFill>
+                  <a:srgbClr val="334155"/>
+                </a:solidFill>
+              </a:rPr>
+              <a:t>SO_TXTIME / EDT / taprio</a:t>
+            </a:r>
+          </a:p>
+        </p:txBody>
+      </p:sp>
+      <p:sp>
+        <p:nvSpPr>
+          <p:cNvPr id="837" name="row:BIG TCP:caption"/>
+          <p:cNvSpPr txBox="1"/>
+          <p:nvPr/>
+        </p:nvSpPr>
+        <p:spPr>
+          <a:xfrm>
+            <a:off x="11335653" y="2048521"/>
+            <a:ext cx="300066" cy="219456"/>
+          </a:xfrm>
+          <a:prstGeom prst="rect">
+            <a:avLst/>
+          </a:prstGeom>
+          <a:noFill/>
+        </p:spPr>
+        <p:txBody>
+          <a:bodyPr wrap="square" lIns="0" tIns="0" rIns="0" bIns="0" anchor="ctr">
+            <a:noAutofit/>
+          </a:bodyPr>
+          <a:lstStyle/>
+          <a:p>
+            <a:pPr algn="l"/>
+            <a:r>
+              <a:rPr sz="700" b="0" i="0">
+                <a:solidFill>
+                  <a:srgbClr val="334155"/>
+                </a:solidFill>
+              </a:rPr>
+              <a:t>BIG TCP</a:t>
+            </a:r>
+          </a:p>
+        </p:txBody>
+      </p:sp>
+      <p:sp>
+        <p:nvSpPr>
+          <p:cNvPr id="838" name="row:BIG TCP extensions:caption"/>
+          <p:cNvSpPr txBox="1"/>
+          <p:nvPr/>
+        </p:nvSpPr>
+        <p:spPr>
+          <a:xfrm>
+            <a:off x="9671115" y="2145629"/>
+            <a:ext cx="705124" cy="219456"/>
+          </a:xfrm>
+          <a:prstGeom prst="rect">
+            <a:avLst/>
+          </a:prstGeom>
+          <a:noFill/>
+        </p:spPr>
+        <p:txBody>
+          <a:bodyPr wrap="square" lIns="0" tIns="0" rIns="0" bIns="0" anchor="ctr">
+            <a:noAutofit/>
+          </a:bodyPr>
+          <a:lstStyle/>
+          <a:p>
+            <a:pPr algn="r"/>
+            <a:r>
+              <a:rPr sz="700" b="0" i="0">
+                <a:solidFill>
+                  <a:srgbClr val="334155"/>
+                </a:solidFill>
+              </a:rPr>
+              <a:t>BIG TCP extensions</a:t>
+            </a:r>
+          </a:p>
+        </p:txBody>
+      </p:sp>
+      <p:sp>
+        <p:nvSpPr>
+          <p:cNvPr id="839" name="row:io_uring SEND_ZC / multishot recv:caption"/>
+          <p:cNvSpPr txBox="1"/>
+          <p:nvPr/>
+        </p:nvSpPr>
+        <p:spPr>
+          <a:xfrm>
+            <a:off x="11408750" y="2242737"/>
+            <a:ext cx="1257408" cy="219456"/>
+          </a:xfrm>
+          <a:prstGeom prst="rect">
+            <a:avLst/>
+          </a:prstGeom>
+          <a:noFill/>
+        </p:spPr>
+        <p:txBody>
+          <a:bodyPr wrap="square" lIns="0" tIns="0" rIns="0" bIns="0" anchor="ctr">
+            <a:noAutofit/>
+          </a:bodyPr>
+          <a:lstStyle/>
+          <a:p>
+            <a:pPr algn="l"/>
+            <a:r>
+              <a:rPr sz="700" b="0" i="0">
+                <a:solidFill>
+                  <a:srgbClr val="334155"/>
+                </a:solidFill>
+              </a:rPr>
+              <a:t>io_uring SEND_ZC / multishot recv</a:t>
+            </a:r>
+          </a:p>
+        </p:txBody>
+      </p:sp>
+      <p:sp>
+        <p:nvSpPr>
+          <p:cNvPr id="840" name="row:dev_queue_xmit() llist:caption"/>
+          <p:cNvSpPr txBox="1"/>
+          <p:nvPr/>
+        </p:nvSpPr>
+        <p:spPr>
+          <a:xfrm>
+            <a:off x="12190585" y="2339845"/>
+            <a:ext cx="824576" cy="219456"/>
+          </a:xfrm>
+          <a:prstGeom prst="rect">
+            <a:avLst/>
+          </a:prstGeom>
+          <a:noFill/>
+        </p:spPr>
+        <p:txBody>
+          <a:bodyPr wrap="square" lIns="0" tIns="0" rIns="0" bIns="0" anchor="ctr">
+            <a:noAutofit/>
+          </a:bodyPr>
+          <a:lstStyle/>
+          <a:p>
+            <a:pPr algn="r"/>
+            <a:r>
+              <a:rPr sz="700" b="0" i="0">
+                <a:solidFill>
+                  <a:srgbClr val="334155"/>
+                </a:solidFill>
+              </a:rPr>
+              <a:t>dev_queue_xmit() llist</a:t>
+            </a:r>
+          </a:p>
+        </p:txBody>
+      </p:sp>
+      <p:sp>
+        <p:nvSpPr>
+          <p:cNvPr id="841" name="row:cake_mq:caption"/>
+          <p:cNvSpPr txBox="1"/>
+          <p:nvPr/>
+        </p:nvSpPr>
+        <p:spPr>
+          <a:xfrm>
+            <a:off x="13857352" y="2436953"/>
+            <a:ext cx="341516" cy="219456"/>
+          </a:xfrm>
+          <a:prstGeom prst="rect">
+            <a:avLst/>
+          </a:prstGeom>
+          <a:noFill/>
+        </p:spPr>
+        <p:txBody>
+          <a:bodyPr wrap="square" lIns="0" tIns="0" rIns="0" bIns="0" anchor="ctr">
+            <a:noAutofit/>
+          </a:bodyPr>
+          <a:lstStyle/>
+          <a:p>
+            <a:pPr algn="l"/>
+            <a:r>
+              <a:rPr sz="700" b="0" i="0">
+                <a:solidFill>
+                  <a:srgbClr val="334155"/>
+                </a:solidFill>
+              </a:rPr>
+              <a:t>cake_mq</a:t>
+            </a:r>
+          </a:p>
+        </p:txBody>
+      </p:sp>
+      <p:sp>
+        <p:nvSpPr>
+          <p:cNvPr id="842" name="row:eBPF foundation:caption"/>
+          <p:cNvSpPr txBox="1"/>
+          <p:nvPr/>
+        </p:nvSpPr>
+        <p:spPr>
+          <a:xfrm>
+            <a:off x="6256791" y="2625501"/>
+            <a:ext cx="614890" cy="219456"/>
+          </a:xfrm>
+          <a:prstGeom prst="rect">
+            <a:avLst/>
+          </a:prstGeom>
+          <a:noFill/>
+        </p:spPr>
+        <p:txBody>
+          <a:bodyPr wrap="square" lIns="0" tIns="0" rIns="0" bIns="0" anchor="ctr">
+            <a:noAutofit/>
+          </a:bodyPr>
+          <a:lstStyle/>
+          <a:p>
+            <a:pPr algn="l"/>
+            <a:r>
+              <a:rPr sz="700" b="0" i="0">
+                <a:solidFill>
+                  <a:srgbClr val="334155"/>
+                </a:solidFill>
+              </a:rPr>
+              <a:t>eBPF foundation</a:t>
+            </a:r>
+          </a:p>
+        </p:txBody>
+      </p:sp>
+      <p:sp>
+        <p:nvSpPr>
+          <p:cNvPr id="843" name="row:TC BPF:caption"/>
+          <p:cNvSpPr txBox="1"/>
+          <p:nvPr/>
+        </p:nvSpPr>
+        <p:spPr>
+          <a:xfrm>
+            <a:off x="6352331" y="2722609"/>
+            <a:ext cx="262430" cy="219456"/>
+          </a:xfrm>
+          <a:prstGeom prst="rect">
+            <a:avLst/>
+          </a:prstGeom>
+          <a:noFill/>
+        </p:spPr>
+        <p:txBody>
+          <a:bodyPr wrap="square" lIns="0" tIns="0" rIns="0" bIns="0" anchor="ctr">
+            <a:noAutofit/>
+          </a:bodyPr>
+          <a:lstStyle/>
+          <a:p>
+            <a:pPr algn="l"/>
+            <a:r>
+              <a:rPr sz="700" b="0" i="0">
+                <a:solidFill>
+                  <a:srgbClr val="334155"/>
+                </a:solidFill>
+              </a:rPr>
+              <a:t>TC BPF</a:t>
+            </a:r>
+          </a:p>
+        </p:txBody>
+      </p:sp>
+      <p:sp>
+        <p:nvSpPr>
+          <p:cNvPr id="844" name="row:TCX:caption"/>
+          <p:cNvSpPr txBox="1"/>
+          <p:nvPr/>
+        </p:nvSpPr>
+        <p:spPr>
+          <a:xfrm>
+            <a:off x="12156353" y="2819717"/>
+            <a:ext cx="153340" cy="219456"/>
+          </a:xfrm>
+          <a:prstGeom prst="rect">
+            <a:avLst/>
+          </a:prstGeom>
+          <a:noFill/>
+        </p:spPr>
+        <p:txBody>
+          <a:bodyPr wrap="square" lIns="0" tIns="0" rIns="0" bIns="0" anchor="ctr">
+            <a:noAutofit/>
+          </a:bodyPr>
+          <a:lstStyle/>
+          <a:p>
+            <a:pPr algn="l"/>
+            <a:r>
+              <a:rPr sz="700" b="0" i="0">
+                <a:solidFill>
+                  <a:srgbClr val="334155"/>
+                </a:solidFill>
+              </a:rPr>
+              <a:t>TCX</a:t>
+            </a:r>
+          </a:p>
+        </p:txBody>
+      </p:sp>
+      <p:sp>
+        <p:nvSpPr>
+          <p:cNvPr id="845" name="row:netkit:caption"/>
+          <p:cNvSpPr txBox="1"/>
+          <p:nvPr/>
+        </p:nvSpPr>
+        <p:spPr>
+          <a:xfrm>
+            <a:off x="12288004" y="2916825"/>
+            <a:ext cx="229134" cy="219456"/>
+          </a:xfrm>
+          <a:prstGeom prst="rect">
+            <a:avLst/>
+          </a:prstGeom>
+          <a:noFill/>
+        </p:spPr>
+        <p:txBody>
+          <a:bodyPr wrap="square" lIns="0" tIns="0" rIns="0" bIns="0" anchor="ctr">
+            <a:noAutofit/>
+          </a:bodyPr>
+          <a:lstStyle/>
+          <a:p>
+            <a:pPr algn="l"/>
+            <a:r>
+              <a:rPr sz="700" b="0" i="0">
+                <a:solidFill>
+                  <a:srgbClr val="334155"/>
+                </a:solidFill>
+              </a:rPr>
+              <a:t>netkit</a:t>
+            </a:r>
+          </a:p>
+        </p:txBody>
+      </p:sp>
+      <p:sp>
+        <p:nvSpPr>
+          <p:cNvPr id="846" name="row:cgroup / LWT BPF:caption"/>
+          <p:cNvSpPr txBox="1"/>
+          <p:nvPr/>
+        </p:nvSpPr>
+        <p:spPr>
+          <a:xfrm>
+            <a:off x="7555814" y="3013933"/>
+            <a:ext cx="652034" cy="219456"/>
+          </a:xfrm>
+          <a:prstGeom prst="rect">
+            <a:avLst/>
+          </a:prstGeom>
+          <a:noFill/>
+        </p:spPr>
+        <p:txBody>
+          <a:bodyPr wrap="square" lIns="0" tIns="0" rIns="0" bIns="0" anchor="ctr">
+            <a:noAutofit/>
+          </a:bodyPr>
+          <a:lstStyle/>
+          <a:p>
+            <a:pPr algn="l"/>
+            <a:r>
+              <a:rPr sz="700" b="0" i="0">
+                <a:solidFill>
+                  <a:srgbClr val="334155"/>
+                </a:solidFill>
+              </a:rPr>
+              <a:t>cgroup / LWT BPF</a:t>
+            </a:r>
+          </a:p>
+        </p:txBody>
+      </p:sp>
+      <p:sp>
+        <p:nvSpPr>
+          <p:cNvPr id="847" name="row:SOCK_OPS / SOCKMAP:caption"/>
+          <p:cNvSpPr txBox="1"/>
+          <p:nvPr/>
+        </p:nvSpPr>
+        <p:spPr>
+          <a:xfrm>
+            <a:off x="8307307" y="3111041"/>
+            <a:ext cx="842704" cy="219456"/>
+          </a:xfrm>
+          <a:prstGeom prst="rect">
+            <a:avLst/>
+          </a:prstGeom>
+          <a:noFill/>
+        </p:spPr>
+        <p:txBody>
+          <a:bodyPr wrap="square" lIns="0" tIns="0" rIns="0" bIns="0" anchor="ctr">
+            <a:noAutofit/>
+          </a:bodyPr>
+          <a:lstStyle/>
+          <a:p>
+            <a:pPr algn="l"/>
+            <a:r>
+              <a:rPr sz="700" b="0" i="0">
+                <a:solidFill>
+                  <a:srgbClr val="334155"/>
+                </a:solidFill>
+              </a:rPr>
+              <a:t>SOCK_OPS / SOCKMAP</a:t>
+            </a:r>
+          </a:p>
+        </p:txBody>
+      </p:sp>
+      <p:sp>
+        <p:nvSpPr>
+          <p:cNvPr id="848" name="row:BPF struct_ops:caption"/>
+          <p:cNvSpPr txBox="1"/>
+          <p:nvPr/>
+        </p:nvSpPr>
+        <p:spPr>
+          <a:xfrm>
+            <a:off x="9666403" y="3208149"/>
+            <a:ext cx="554355" cy="219456"/>
+          </a:xfrm>
+          <a:prstGeom prst="rect">
+            <a:avLst/>
+          </a:prstGeom>
+          <a:noFill/>
+        </p:spPr>
+        <p:txBody>
+          <a:bodyPr wrap="square" lIns="0" tIns="0" rIns="0" bIns="0" anchor="ctr">
+            <a:noAutofit/>
+          </a:bodyPr>
+          <a:lstStyle/>
+          <a:p>
+            <a:pPr algn="l"/>
+            <a:r>
+              <a:rPr sz="700" b="0" i="0">
+                <a:solidFill>
+                  <a:srgbClr val="334155"/>
+                </a:solidFill>
+              </a:rPr>
+              <a:t>BPF struct_ops</a:t>
+            </a:r>
+          </a:p>
+        </p:txBody>
+      </p:sp>
+      <p:sp>
+        <p:nvSpPr>
+          <p:cNvPr id="849" name="row:BPF qdisc:caption"/>
+          <p:cNvSpPr txBox="1"/>
+          <p:nvPr/>
+        </p:nvSpPr>
+        <p:spPr>
+          <a:xfrm>
+            <a:off x="13411166" y="3305257"/>
+            <a:ext cx="359706" cy="219456"/>
+          </a:xfrm>
+          <a:prstGeom prst="rect">
+            <a:avLst/>
+          </a:prstGeom>
+          <a:noFill/>
+        </p:spPr>
+        <p:txBody>
+          <a:bodyPr wrap="square" lIns="0" tIns="0" rIns="0" bIns="0" anchor="ctr">
+            <a:noAutofit/>
+          </a:bodyPr>
+          <a:lstStyle/>
+          <a:p>
+            <a:pPr algn="l"/>
+            <a:r>
+              <a:rPr sz="700" b="0" i="0">
+                <a:solidFill>
+                  <a:srgbClr val="334155"/>
+                </a:solidFill>
+              </a:rPr>
+              <a:t>BPF qdisc</a:t>
+            </a:r>
+          </a:p>
+        </p:txBody>
+      </p:sp>
+      <p:sp>
+        <p:nvSpPr>
+          <p:cNvPr id="850" name="row:SK_LOOKUP:caption"/>
+          <p:cNvSpPr txBox="1"/>
+          <p:nvPr/>
+        </p:nvSpPr>
+        <p:spPr>
+          <a:xfrm>
+            <a:off x="10039016" y="3402365"/>
+            <a:ext cx="450641" cy="219456"/>
+          </a:xfrm>
+          <a:prstGeom prst="rect">
+            <a:avLst/>
+          </a:prstGeom>
+          <a:noFill/>
+        </p:spPr>
+        <p:txBody>
+          <a:bodyPr wrap="square" lIns="0" tIns="0" rIns="0" bIns="0" anchor="ctr">
+            <a:noAutofit/>
+          </a:bodyPr>
+          <a:lstStyle/>
+          <a:p>
+            <a:pPr algn="l"/>
+            <a:r>
+              <a:rPr sz="700" b="0" i="0">
+                <a:solidFill>
+                  <a:srgbClr val="334155"/>
+                </a:solidFill>
+              </a:rPr>
+              <a:t>SK_LOOKUP</a:t>
+            </a:r>
+          </a:p>
+        </p:txBody>
+      </p:sp>
+      <p:sp>
+        <p:nvSpPr>
+          <p:cNvPr id="851" name="row:XDP:caption"/>
+          <p:cNvSpPr txBox="1"/>
+          <p:nvPr/>
+        </p:nvSpPr>
+        <p:spPr>
+          <a:xfrm>
+            <a:off x="7244416" y="3499473"/>
+            <a:ext cx="165056" cy="219456"/>
+          </a:xfrm>
+          <a:prstGeom prst="rect">
+            <a:avLst/>
+          </a:prstGeom>
+          <a:noFill/>
+        </p:spPr>
+        <p:txBody>
+          <a:bodyPr wrap="square" lIns="0" tIns="0" rIns="0" bIns="0" anchor="ctr">
+            <a:noAutofit/>
+          </a:bodyPr>
+          <a:lstStyle/>
+          <a:p>
+            <a:pPr algn="l"/>
+            <a:r>
+              <a:rPr sz="700" b="0" i="0">
+                <a:solidFill>
+                  <a:srgbClr val="334155"/>
+                </a:solidFill>
+              </a:rPr>
+              <a:t>XDP</a:t>
+            </a:r>
+          </a:p>
+        </p:txBody>
+      </p:sp>
+      <p:sp>
+        <p:nvSpPr>
+          <p:cNvPr id="852" name="row:XDP devmap / cpumap:caption"/>
+          <p:cNvSpPr txBox="1"/>
+          <p:nvPr/>
+        </p:nvSpPr>
+        <p:spPr>
+          <a:xfrm>
+            <a:off x="8454642" y="3596581"/>
+            <a:ext cx="841974" cy="219456"/>
+          </a:xfrm>
+          <a:prstGeom prst="rect">
+            <a:avLst/>
+          </a:prstGeom>
+          <a:noFill/>
+        </p:spPr>
+        <p:txBody>
+          <a:bodyPr wrap="square" lIns="0" tIns="0" rIns="0" bIns="0" anchor="ctr">
+            <a:noAutofit/>
+          </a:bodyPr>
+          <a:lstStyle/>
+          <a:p>
+            <a:pPr algn="l"/>
+            <a:r>
+              <a:rPr sz="700" b="0" i="0">
+                <a:solidFill>
+                  <a:srgbClr val="334155"/>
+                </a:solidFill>
+              </a:rPr>
+              <a:t>XDP devmap / cpumap</a:t>
+            </a:r>
+          </a:p>
+        </p:txBody>
+      </p:sp>
+      <p:sp>
+        <p:nvSpPr>
+          <p:cNvPr id="853" name="row:XDP multi-buffer:caption"/>
+          <p:cNvSpPr txBox="1"/>
+          <p:nvPr/>
+        </p:nvSpPr>
+        <p:spPr>
+          <a:xfrm>
+            <a:off x="11202576" y="3693689"/>
+            <a:ext cx="618335" cy="219456"/>
+          </a:xfrm>
+          <a:prstGeom prst="rect">
+            <a:avLst/>
+          </a:prstGeom>
+          <a:noFill/>
+        </p:spPr>
+        <p:txBody>
+          <a:bodyPr wrap="square" lIns="0" tIns="0" rIns="0" bIns="0" anchor="ctr">
+            <a:noAutofit/>
+          </a:bodyPr>
+          <a:lstStyle/>
+          <a:p>
+            <a:pPr algn="l"/>
+            <a:r>
+              <a:rPr sz="700" b="0" i="0">
+                <a:solidFill>
+                  <a:srgbClr val="334155"/>
+                </a:solidFill>
+              </a:rPr>
+              <a:t>XDP multi-buffer</a:t>
+            </a:r>
+          </a:p>
+        </p:txBody>
+      </p:sp>
+      <p:sp>
+        <p:nvSpPr>
+          <p:cNvPr id="854" name="row:AF_XDP:caption"/>
+          <p:cNvSpPr txBox="1"/>
+          <p:nvPr/>
+        </p:nvSpPr>
+        <p:spPr>
+          <a:xfrm>
+            <a:off x="8580976" y="3882237"/>
+            <a:ext cx="301615" cy="219456"/>
+          </a:xfrm>
+          <a:prstGeom prst="rect">
+            <a:avLst/>
+          </a:prstGeom>
+          <a:noFill/>
+        </p:spPr>
+        <p:txBody>
+          <a:bodyPr wrap="square" lIns="0" tIns="0" rIns="0" bIns="0" anchor="ctr">
+            <a:noAutofit/>
+          </a:bodyPr>
+          <a:lstStyle/>
+          <a:p>
+            <a:pPr algn="l"/>
+            <a:r>
+              <a:rPr sz="700" b="0" i="0">
+                <a:solidFill>
+                  <a:srgbClr val="334155"/>
+                </a:solidFill>
+              </a:rPr>
+              <a:t>AF_XDP</a:t>
+            </a:r>
+          </a:p>
+        </p:txBody>
+      </p:sp>
+      <p:sp>
+        <p:nvSpPr>
+          <p:cNvPr id="855" name="row:AF_XDP multi-buffer:caption"/>
+          <p:cNvSpPr txBox="1"/>
+          <p:nvPr/>
+        </p:nvSpPr>
+        <p:spPr>
+          <a:xfrm>
+            <a:off x="12156353" y="3979345"/>
+            <a:ext cx="754894" cy="219456"/>
+          </a:xfrm>
+          <a:prstGeom prst="rect">
+            <a:avLst/>
+          </a:prstGeom>
+          <a:noFill/>
+        </p:spPr>
+        <p:txBody>
+          <a:bodyPr wrap="square" lIns="0" tIns="0" rIns="0" bIns="0" anchor="ctr">
+            <a:noAutofit/>
+          </a:bodyPr>
+          <a:lstStyle/>
+          <a:p>
+            <a:pPr algn="l"/>
+            <a:r>
+              <a:rPr sz="700" b="0" i="0">
+                <a:solidFill>
+                  <a:srgbClr val="334155"/>
+                </a:solidFill>
+              </a:rPr>
+              <a:t>AF_XDP multi-buffer</a:t>
+            </a:r>
+          </a:p>
+        </p:txBody>
+      </p:sp>
+      <p:sp>
+        <p:nvSpPr>
+          <p:cNvPr id="856" name="row:page_pool:caption"/>
+          <p:cNvSpPr txBox="1"/>
+          <p:nvPr/>
+        </p:nvSpPr>
+        <p:spPr>
+          <a:xfrm>
+            <a:off x="8580976" y="4076453"/>
+            <a:ext cx="398072" cy="219456"/>
+          </a:xfrm>
+          <a:prstGeom prst="rect">
+            <a:avLst/>
+          </a:prstGeom>
+          <a:noFill/>
+        </p:spPr>
+        <p:txBody>
+          <a:bodyPr wrap="square" lIns="0" tIns="0" rIns="0" bIns="0" anchor="ctr">
+            <a:noAutofit/>
+          </a:bodyPr>
+          <a:lstStyle/>
+          <a:p>
+            <a:pPr algn="l"/>
+            <a:r>
+              <a:rPr sz="700" b="0" i="0">
+                <a:solidFill>
+                  <a:srgbClr val="334155"/>
+                </a:solidFill>
+              </a:rPr>
+              <a:t>page_pool</a:t>
+            </a:r>
+          </a:p>
+        </p:txBody>
+      </p:sp>
+      <p:sp>
+        <p:nvSpPr>
+          <p:cNvPr id="857" name="row:netmem:caption"/>
+          <p:cNvSpPr txBox="1"/>
+          <p:nvPr/>
+        </p:nvSpPr>
+        <p:spPr>
+          <a:xfrm>
+            <a:off x="12527066" y="4173561"/>
+            <a:ext cx="324799" cy="219456"/>
+          </a:xfrm>
+          <a:prstGeom prst="rect">
+            <a:avLst/>
+          </a:prstGeom>
+          <a:noFill/>
+        </p:spPr>
+        <p:txBody>
+          <a:bodyPr wrap="square" lIns="0" tIns="0" rIns="0" bIns="0" anchor="ctr">
+            <a:noAutofit/>
+          </a:bodyPr>
+          <a:lstStyle/>
+          <a:p>
+            <a:pPr algn="l"/>
+            <a:r>
+              <a:rPr sz="700" b="0" i="0">
+                <a:solidFill>
+                  <a:srgbClr val="334155"/>
+                </a:solidFill>
+              </a:rPr>
+              <a:t>netmem</a:t>
+            </a:r>
+          </a:p>
+        </p:txBody>
+      </p:sp>
+      <p:sp>
+        <p:nvSpPr>
+          <p:cNvPr id="858" name="row:Device Memory TCP RX · TX:caption"/>
+          <p:cNvSpPr txBox="1"/>
+          <p:nvPr/>
+        </p:nvSpPr>
+        <p:spPr>
+          <a:xfrm>
+            <a:off x="10176103" y="4270669"/>
+            <a:ext cx="1010648" cy="219456"/>
+          </a:xfrm>
+          <a:prstGeom prst="rect">
+            <a:avLst/>
+          </a:prstGeom>
+          <a:noFill/>
+        </p:spPr>
+        <p:txBody>
+          <a:bodyPr wrap="square" lIns="0" tIns="0" rIns="0" bIns="0" anchor="ctr">
+            <a:noAutofit/>
+          </a:bodyPr>
+          <a:lstStyle/>
+          <a:p>
+            <a:pPr algn="r"/>
+            <a:r>
+              <a:rPr sz="700" b="0" i="0">
+                <a:solidFill>
+                  <a:srgbClr val="334155"/>
+                </a:solidFill>
+              </a:rPr>
+              <a:t>Device Memory TCP RX · TX</a:t>
+            </a:r>
+          </a:p>
+        </p:txBody>
+      </p:sp>
+      <p:sp>
+        <p:nvSpPr>
+          <p:cNvPr id="859" name="row:devmem RX buffers &gt; PAGE_SIZE:caption"/>
+          <p:cNvSpPr txBox="1"/>
+          <p:nvPr/>
+        </p:nvSpPr>
+        <p:spPr>
+          <a:xfrm>
+            <a:off x="11420825" y="4367777"/>
+            <a:ext cx="1188066" cy="219456"/>
+          </a:xfrm>
+          <a:prstGeom prst="rect">
+            <a:avLst/>
+          </a:prstGeom>
+          <a:noFill/>
+        </p:spPr>
+        <p:txBody>
+          <a:bodyPr wrap="square" lIns="0" tIns="0" rIns="0" bIns="0" anchor="ctr">
+            <a:noAutofit/>
+          </a:bodyPr>
+          <a:lstStyle/>
+          <a:p>
+            <a:pPr algn="r"/>
+            <a:r>
+              <a:rPr sz="700" b="0" i="0">
+                <a:solidFill>
+                  <a:srgbClr val="334155"/>
+                </a:solidFill>
+              </a:rPr>
+              <a:t>devmem RX buffers &gt; PAGE_SIZE</a:t>
+            </a:r>
+          </a:p>
+        </p:txBody>
+      </p:sp>
+      <p:sp>
+        <p:nvSpPr>
+          <p:cNvPr id="860" name="row:page_pool memory-provider hooks:caption"/>
+          <p:cNvSpPr txBox="1"/>
+          <p:nvPr/>
+        </p:nvSpPr>
+        <p:spPr>
+          <a:xfrm>
+            <a:off x="11320444" y="4464885"/>
+            <a:ext cx="1288447" cy="219456"/>
+          </a:xfrm>
+          <a:prstGeom prst="rect">
+            <a:avLst/>
+          </a:prstGeom>
+          <a:noFill/>
+        </p:spPr>
+        <p:txBody>
+          <a:bodyPr wrap="square" lIns="0" tIns="0" rIns="0" bIns="0" anchor="ctr">
+            <a:noAutofit/>
+          </a:bodyPr>
+          <a:lstStyle/>
+          <a:p>
+            <a:pPr algn="r"/>
+            <a:r>
+              <a:rPr sz="700" b="0" i="0">
+                <a:solidFill>
+                  <a:srgbClr val="334155"/>
+                </a:solidFill>
+              </a:rPr>
+              <a:t>page_pool memory-provider hooks</a:t>
+            </a:r>
+          </a:p>
+        </p:txBody>
+      </p:sp>
+      <p:sp>
+        <p:nvSpPr>
+          <p:cNvPr id="861" name="row:large RX buffers (providers / ZCRX):caption"/>
+          <p:cNvSpPr txBox="1"/>
+          <p:nvPr/>
+        </p:nvSpPr>
+        <p:spPr>
+          <a:xfrm>
+            <a:off x="11212232" y="4561993"/>
+            <a:ext cx="1251984" cy="219456"/>
+          </a:xfrm>
+          <a:prstGeom prst="rect">
+            <a:avLst/>
+          </a:prstGeom>
+          <a:noFill/>
+        </p:spPr>
+        <p:txBody>
+          <a:bodyPr wrap="square" lIns="0" tIns="0" rIns="0" bIns="0" anchor="ctr">
+            <a:noAutofit/>
+          </a:bodyPr>
+          <a:lstStyle/>
+          <a:p>
+            <a:pPr algn="r"/>
+            <a:r>
+              <a:rPr sz="700" b="0" i="0">
+                <a:solidFill>
+                  <a:srgbClr val="334155"/>
+                </a:solidFill>
+              </a:rPr>
+              <a:t>large RX buffers (providers / ZCRX)</a:t>
+            </a:r>
+          </a:p>
+        </p:txBody>
+      </p:sp>
+      <p:sp>
+        <p:nvSpPr>
+          <p:cNvPr id="862" name="row:io_uring ZCRX:caption"/>
+          <p:cNvSpPr txBox="1"/>
+          <p:nvPr/>
+        </p:nvSpPr>
+        <p:spPr>
+          <a:xfrm>
+            <a:off x="13291397" y="4659101"/>
+            <a:ext cx="518976" cy="219456"/>
+          </a:xfrm>
+          <a:prstGeom prst="rect">
+            <a:avLst/>
+          </a:prstGeom>
+          <a:noFill/>
+        </p:spPr>
+        <p:txBody>
+          <a:bodyPr wrap="square" lIns="0" tIns="0" rIns="0" bIns="0" anchor="ctr">
+            <a:noAutofit/>
+          </a:bodyPr>
+          <a:lstStyle/>
+          <a:p>
+            <a:pPr algn="l"/>
+            <a:r>
+              <a:rPr sz="700" b="0" i="0">
+                <a:solidFill>
+                  <a:srgbClr val="334155"/>
+                </a:solidFill>
+              </a:rPr>
+              <a:t>io_uring ZCRX</a:t>
+            </a:r>
+          </a:p>
+        </p:txBody>
+      </p:sp>
+      <p:sp>
+        <p:nvSpPr>
+          <p:cNvPr id="863" name="row:RX HW queue leasing:caption"/>
+          <p:cNvSpPr txBox="1"/>
+          <p:nvPr/>
+        </p:nvSpPr>
+        <p:spPr>
+          <a:xfrm>
+            <a:off x="11330007" y="4756209"/>
+            <a:ext cx="787023" cy="219456"/>
+          </a:xfrm>
+          <a:prstGeom prst="rect">
+            <a:avLst/>
+          </a:prstGeom>
+          <a:noFill/>
+        </p:spPr>
+        <p:txBody>
+          <a:bodyPr wrap="square" lIns="0" tIns="0" rIns="0" bIns="0" anchor="ctr">
+            <a:noAutofit/>
+          </a:bodyPr>
+          <a:lstStyle/>
+          <a:p>
+            <a:pPr algn="r"/>
+            <a:r>
+              <a:rPr sz="700" b="0" i="0">
+                <a:solidFill>
+                  <a:srgbClr val="334155"/>
+                </a:solidFill>
+              </a:rPr>
+              <a:t>RX HW queue leasing</a:t>
+            </a:r>
+          </a:p>
+        </p:txBody>
+      </p:sp>
+      <p:sp>
+        <p:nvSpPr>
+          <p:cNvPr id="864" name="row:namespace FD / setns():caption"/>
+          <p:cNvSpPr txBox="1"/>
+          <p:nvPr/>
+        </p:nvSpPr>
+        <p:spPr>
+          <a:xfrm>
+            <a:off x="3633774" y="4944757"/>
+            <a:ext cx="862581" cy="219456"/>
+          </a:xfrm>
+          <a:prstGeom prst="rect">
+            <a:avLst/>
+          </a:prstGeom>
+          <a:noFill/>
+        </p:spPr>
+        <p:txBody>
+          <a:bodyPr wrap="square" lIns="0" tIns="0" rIns="0" bIns="0" anchor="ctr">
+            <a:noAutofit/>
+          </a:bodyPr>
+          <a:lstStyle/>
+          <a:p>
+            <a:pPr algn="l"/>
+            <a:r>
+              <a:rPr sz="700" b="0" i="0">
+                <a:solidFill>
+                  <a:srgbClr val="334155"/>
+                </a:solidFill>
+              </a:rPr>
+              <a:t>namespace FD / setns()</a:t>
+            </a:r>
+          </a:p>
+        </p:txBody>
+      </p:sp>
+      <p:sp>
+        <p:nvSpPr>
+          <p:cNvPr id="865" name="row:nftables (dev. from 2008):caption"/>
+          <p:cNvSpPr txBox="1"/>
+          <p:nvPr/>
+        </p:nvSpPr>
+        <p:spPr>
+          <a:xfrm>
+            <a:off x="4078304" y="5092157"/>
+            <a:ext cx="976543" cy="118872"/>
+          </a:xfrm>
+          <a:prstGeom prst="rect">
+            <a:avLst/>
+          </a:prstGeom>
+          <a:solidFill>
+            <a:srgbClr val="FEF0F0"/>
+          </a:solidFill>
+        </p:spPr>
+        <p:txBody>
+          <a:bodyPr wrap="square" lIns="0" tIns="0" rIns="0" bIns="0" anchor="ctr">
+            <a:noAutofit/>
+          </a:bodyPr>
+          <a:lstStyle/>
+          <a:p>
+            <a:pPr algn="ctr"/>
+            <a:r>
+              <a:rPr sz="700" b="0" i="0">
+                <a:solidFill>
+                  <a:srgbClr val="334155"/>
+                </a:solidFill>
+              </a:rPr>
+              <a:t>nftables (dev. from 2008)</a:t>
+            </a:r>
+          </a:p>
+        </p:txBody>
+      </p:sp>
+      <p:sp>
+        <p:nvSpPr>
+          <p:cNvPr id="866" name="row:nexthop objects:caption"/>
+          <p:cNvSpPr txBox="1"/>
+          <p:nvPr/>
+        </p:nvSpPr>
+        <p:spPr>
+          <a:xfrm>
+            <a:off x="9293314" y="5138973"/>
+            <a:ext cx="598069" cy="219456"/>
+          </a:xfrm>
+          <a:prstGeom prst="rect">
+            <a:avLst/>
+          </a:prstGeom>
+          <a:noFill/>
+        </p:spPr>
+        <p:txBody>
+          <a:bodyPr wrap="square" lIns="0" tIns="0" rIns="0" bIns="0" anchor="ctr">
+            <a:noAutofit/>
+          </a:bodyPr>
+          <a:lstStyle/>
+          <a:p>
+            <a:pPr algn="l"/>
+            <a:r>
+              <a:rPr sz="700" b="0" i="0">
+                <a:solidFill>
+                  <a:srgbClr val="334155"/>
+                </a:solidFill>
+              </a:rPr>
+              <a:t>nexthop objects</a:t>
+            </a:r>
+          </a:p>
+        </p:txBody>
+      </p:sp>
+      <p:sp>
+        <p:nvSpPr>
+          <p:cNvPr id="867" name="row:per-netns RTNL:caption"/>
+          <p:cNvSpPr txBox="1"/>
+          <p:nvPr/>
+        </p:nvSpPr>
+        <p:spPr>
+          <a:xfrm>
+            <a:off x="13051860" y="5236081"/>
+            <a:ext cx="572149" cy="219456"/>
+          </a:xfrm>
+          <a:prstGeom prst="rect">
+            <a:avLst/>
+          </a:prstGeom>
+          <a:noFill/>
+        </p:spPr>
+        <p:txBody>
+          <a:bodyPr wrap="square" lIns="0" tIns="0" rIns="0" bIns="0" anchor="ctr">
+            <a:noAutofit/>
+          </a:bodyPr>
+          <a:lstStyle/>
+          <a:p>
+            <a:pPr algn="l"/>
+            <a:r>
+              <a:rPr sz="700" b="0" i="0">
+                <a:solidFill>
+                  <a:srgbClr val="334155"/>
+                </a:solidFill>
+              </a:rPr>
+              <a:t>per-netns RTNL</a:t>
+            </a:r>
+          </a:p>
+        </p:txBody>
+      </p:sp>
+      <p:sp>
+        <p:nvSpPr>
+          <p:cNvPr id="868" name="row:further RTNL breakup:caption"/>
+          <p:cNvSpPr txBox="1"/>
+          <p:nvPr/>
+        </p:nvSpPr>
+        <p:spPr>
+          <a:xfrm>
+            <a:off x="13291397" y="5333189"/>
+            <a:ext cx="796580" cy="219456"/>
+          </a:xfrm>
+          <a:prstGeom prst="rect">
+            <a:avLst/>
+          </a:prstGeom>
+          <a:noFill/>
+        </p:spPr>
+        <p:txBody>
+          <a:bodyPr wrap="square" lIns="0" tIns="0" rIns="0" bIns="0" anchor="ctr">
+            <a:noAutofit/>
+          </a:bodyPr>
+          <a:lstStyle/>
+          <a:p>
+            <a:pPr algn="l"/>
+            <a:r>
+              <a:rPr sz="700" b="0" i="0">
+                <a:solidFill>
+                  <a:srgbClr val="334155"/>
+                </a:solidFill>
+              </a:rPr>
+              <a:t>further RTNL breakup</a:t>
+            </a:r>
+          </a:p>
+        </p:txBody>
+      </p:sp>
+      <p:sp>
+        <p:nvSpPr>
+          <p:cNvPr id="869" name="row:RTNL-less FIB rules:caption"/>
+          <p:cNvSpPr txBox="1"/>
+          <p:nvPr/>
+        </p:nvSpPr>
+        <p:spPr>
+          <a:xfrm>
+            <a:off x="11770128" y="5430297"/>
+            <a:ext cx="694088" cy="219456"/>
+          </a:xfrm>
+          <a:prstGeom prst="rect">
+            <a:avLst/>
+          </a:prstGeom>
+          <a:noFill/>
+        </p:spPr>
+        <p:txBody>
+          <a:bodyPr wrap="square" lIns="0" tIns="0" rIns="0" bIns="0" anchor="ctr">
+            <a:noAutofit/>
+          </a:bodyPr>
+          <a:lstStyle/>
+          <a:p>
+            <a:pPr algn="r"/>
+            <a:r>
+              <a:rPr sz="700" b="0" i="0">
+                <a:solidFill>
+                  <a:srgbClr val="334155"/>
+                </a:solidFill>
+              </a:rPr>
+              <a:t>RTNL-less FIB rules</a:t>
+            </a:r>
+          </a:p>
+        </p:txBody>
+      </p:sp>
+      <p:sp>
+        <p:nvSpPr>
+          <p:cNvPr id="870" name="row:per-netns netdev unregistration:caption"/>
+          <p:cNvSpPr txBox="1"/>
+          <p:nvPr/>
+        </p:nvSpPr>
+        <p:spPr>
+          <a:xfrm>
+            <a:off x="11802784" y="5527405"/>
+            <a:ext cx="1163987" cy="219456"/>
+          </a:xfrm>
+          <a:prstGeom prst="rect">
+            <a:avLst/>
+          </a:prstGeom>
+          <a:noFill/>
+        </p:spPr>
+        <p:txBody>
+          <a:bodyPr wrap="square" lIns="0" tIns="0" rIns="0" bIns="0" anchor="ctr">
+            <a:noAutofit/>
+          </a:bodyPr>
+          <a:lstStyle/>
+          <a:p>
+            <a:pPr algn="r"/>
+            <a:r>
+              <a:rPr sz="700" b="0" i="0">
+                <a:solidFill>
+                  <a:srgbClr val="334155"/>
+                </a:solidFill>
+              </a:rPr>
+              <a:t>per-netns netdev unregistration</a:t>
+            </a:r>
+          </a:p>
+        </p:txBody>
+      </p:sp>
+      <p:sp>
+        <p:nvSpPr>
+          <p:cNvPr id="871" name="row:YNL tooling:caption"/>
+          <p:cNvSpPr txBox="1"/>
+          <p:nvPr/>
+        </p:nvSpPr>
+        <p:spPr>
+          <a:xfrm>
+            <a:off x="11795146" y="5624513"/>
+            <a:ext cx="428513" cy="219456"/>
+          </a:xfrm>
+          <a:prstGeom prst="rect">
+            <a:avLst/>
+          </a:prstGeom>
+          <a:noFill/>
+        </p:spPr>
+        <p:txBody>
+          <a:bodyPr wrap="square" lIns="0" tIns="0" rIns="0" bIns="0" anchor="ctr">
+            <a:noAutofit/>
+          </a:bodyPr>
+          <a:lstStyle/>
+          <a:p>
+            <a:pPr algn="l"/>
+            <a:r>
+              <a:rPr sz="700" b="0" i="0">
+                <a:solidFill>
+                  <a:srgbClr val="334155"/>
+                </a:solidFill>
+              </a:rPr>
+              <a:t>YNL tooling</a:t>
+            </a:r>
+          </a:p>
+        </p:txBody>
+      </p:sp>
+      <p:sp>
+        <p:nvSpPr>
+          <p:cNvPr id="872" name="row:queue/NAPI/page_pool netdev-genl:caption"/>
+          <p:cNvSpPr txBox="1"/>
+          <p:nvPr/>
+        </p:nvSpPr>
+        <p:spPr>
+          <a:xfrm>
+            <a:off x="12407772" y="5813061"/>
+            <a:ext cx="1320131" cy="219456"/>
+          </a:xfrm>
+          <a:prstGeom prst="rect">
+            <a:avLst/>
+          </a:prstGeom>
+          <a:noFill/>
+        </p:spPr>
+        <p:txBody>
+          <a:bodyPr wrap="square" lIns="0" tIns="0" rIns="0" bIns="0" anchor="ctr">
+            <a:noAutofit/>
+          </a:bodyPr>
+          <a:lstStyle/>
+          <a:p>
+            <a:pPr algn="l"/>
+            <a:r>
+              <a:rPr sz="700" b="0" i="0">
+                <a:solidFill>
+                  <a:srgbClr val="334155"/>
+                </a:solidFill>
+              </a:rPr>
+              <a:t>queue/NAPI/page_pool netdev-genl</a:t>
+            </a:r>
+          </a:p>
+        </p:txBody>
+      </p:sp>
+      <p:sp>
+        <p:nvSpPr>
+          <p:cNvPr id="873" name="row:kprobe BPF:caption"/>
+          <p:cNvSpPr txBox="1"/>
+          <p:nvPr/>
+        </p:nvSpPr>
+        <p:spPr>
+          <a:xfrm>
+            <a:off x="6352331" y="5910169"/>
+            <a:ext cx="428034" cy="219456"/>
+          </a:xfrm>
+          <a:prstGeom prst="rect">
+            <a:avLst/>
+          </a:prstGeom>
+          <a:noFill/>
+        </p:spPr>
+        <p:txBody>
+          <a:bodyPr wrap="square" lIns="0" tIns="0" rIns="0" bIns="0" anchor="ctr">
+            <a:noAutofit/>
+          </a:bodyPr>
+          <a:lstStyle/>
+          <a:p>
+            <a:pPr algn="l"/>
+            <a:r>
+              <a:rPr sz="700" b="0" i="0">
+                <a:solidFill>
+                  <a:srgbClr val="334155"/>
+                </a:solidFill>
+              </a:rPr>
+              <a:t>kprobe BPF</a:t>
+            </a:r>
+          </a:p>
+        </p:txBody>
+      </p:sp>
+      <p:sp>
+        <p:nvSpPr>
+          <p:cNvPr id="874" name="row:BTF:caption"/>
+          <p:cNvSpPr txBox="1"/>
+          <p:nvPr/>
+        </p:nvSpPr>
+        <p:spPr>
+          <a:xfrm>
+            <a:off x="8580976" y="6007277"/>
+            <a:ext cx="148735" cy="219456"/>
+          </a:xfrm>
+          <a:prstGeom prst="rect">
+            <a:avLst/>
+          </a:prstGeom>
+          <a:noFill/>
+        </p:spPr>
+        <p:txBody>
+          <a:bodyPr wrap="square" lIns="0" tIns="0" rIns="0" bIns="0" anchor="ctr">
+            <a:noAutofit/>
+          </a:bodyPr>
+          <a:lstStyle/>
+          <a:p>
+            <a:pPr algn="l"/>
+            <a:r>
+              <a:rPr sz="700" b="0" i="0">
+                <a:solidFill>
+                  <a:srgbClr val="334155"/>
+                </a:solidFill>
+              </a:rPr>
+              <a:t>BTF</a:t>
+            </a:r>
+          </a:p>
+        </p:txBody>
+      </p:sp>
+      <p:sp>
+        <p:nvSpPr>
+          <p:cNvPr id="875" name="row:structured drop reason:caption"/>
+          <p:cNvSpPr txBox="1"/>
+          <p:nvPr/>
+        </p:nvSpPr>
+        <p:spPr>
+          <a:xfrm>
+            <a:off x="11082808" y="6104385"/>
+            <a:ext cx="849447" cy="219456"/>
+          </a:xfrm>
+          <a:prstGeom prst="rect">
+            <a:avLst/>
+          </a:prstGeom>
+          <a:noFill/>
+        </p:spPr>
+        <p:txBody>
+          <a:bodyPr wrap="square" lIns="0" tIns="0" rIns="0" bIns="0" anchor="ctr">
+            <a:noAutofit/>
+          </a:bodyPr>
+          <a:lstStyle/>
+          <a:p>
+            <a:pPr algn="l"/>
+            <a:r>
+              <a:rPr sz="700" b="0" i="0">
+                <a:solidFill>
+                  <a:srgbClr val="334155"/>
+                </a:solidFill>
+              </a:rPr>
+              <a:t>structured drop reason</a:t>
+            </a:r>
+          </a:p>
+        </p:txBody>
+      </p:sp>
+      <p:sp>
+        <p:nvSpPr>
+          <p:cNvPr id="876" name="row:drop-reason expansion:caption"/>
+          <p:cNvSpPr txBox="1"/>
+          <p:nvPr/>
+        </p:nvSpPr>
+        <p:spPr>
+          <a:xfrm>
+            <a:off x="11335653" y="6201493"/>
+            <a:ext cx="846614" cy="219456"/>
+          </a:xfrm>
+          <a:prstGeom prst="rect">
+            <a:avLst/>
+          </a:prstGeom>
+          <a:noFill/>
+        </p:spPr>
+        <p:txBody>
+          <a:bodyPr wrap="square" lIns="0" tIns="0" rIns="0" bIns="0" anchor="ctr">
+            <a:noAutofit/>
+          </a:bodyPr>
+          <a:lstStyle/>
+          <a:p>
+            <a:pPr algn="l"/>
+            <a:r>
+              <a:rPr sz="700" b="0" i="0">
+                <a:solidFill>
+                  <a:srgbClr val="334155"/>
+                </a:solidFill>
+              </a:rPr>
+              <a:t>drop-reason expansion</a:t>
+            </a:r>
+          </a:p>
+        </p:txBody>
+      </p:sp>
+      <p:sp>
+        <p:nvSpPr>
+          <p:cNvPr id="877" name="row:qdisc-drop tracepoint:caption"/>
+          <p:cNvSpPr txBox="1"/>
+          <p:nvPr/>
+        </p:nvSpPr>
+        <p:spPr>
+          <a:xfrm>
+            <a:off x="11669540" y="6298601"/>
+            <a:ext cx="794677" cy="219456"/>
+          </a:xfrm>
+          <a:prstGeom prst="rect">
+            <a:avLst/>
+          </a:prstGeom>
+          <a:noFill/>
+        </p:spPr>
+        <p:txBody>
+          <a:bodyPr wrap="square" lIns="0" tIns="0" rIns="0" bIns="0" anchor="ctr">
+            <a:noAutofit/>
+          </a:bodyPr>
+          <a:lstStyle/>
+          <a:p>
+            <a:pPr algn="r"/>
+            <a:r>
+              <a:rPr sz="700" b="0" i="0">
+                <a:solidFill>
+                  <a:srgbClr val="334155"/>
+                </a:solidFill>
+              </a:rPr>
+              <a:t>qdisc-drop tracepoint</a:t>
+            </a:r>
+          </a:p>
+        </p:txBody>
+      </p:sp>
+      <p:sp>
+        <p:nvSpPr>
+          <p:cNvPr id="878" name="row:switchdev:caption"/>
+          <p:cNvSpPr txBox="1"/>
+          <p:nvPr/>
+        </p:nvSpPr>
+        <p:spPr>
+          <a:xfrm>
+            <a:off x="6146157" y="6487149"/>
+            <a:ext cx="380243" cy="219456"/>
+          </a:xfrm>
+          <a:prstGeom prst="rect">
+            <a:avLst/>
+          </a:prstGeom>
+          <a:noFill/>
+        </p:spPr>
+        <p:txBody>
+          <a:bodyPr wrap="square" lIns="0" tIns="0" rIns="0" bIns="0" anchor="ctr">
+            <a:noAutofit/>
+          </a:bodyPr>
+          <a:lstStyle/>
+          <a:p>
+            <a:pPr algn="l"/>
+            <a:r>
+              <a:rPr sz="700" b="0" i="0">
+                <a:solidFill>
+                  <a:srgbClr val="334155"/>
+                </a:solidFill>
+              </a:rPr>
+              <a:t>switchdev</a:t>
+            </a:r>
+          </a:p>
+        </p:txBody>
+      </p:sp>
+      <p:sp>
+        <p:nvSpPr>
+          <p:cNvPr id="879" name="row:devlink:caption"/>
+          <p:cNvSpPr txBox="1"/>
+          <p:nvPr/>
+        </p:nvSpPr>
+        <p:spPr>
+          <a:xfrm>
+            <a:off x="6978264" y="6584257"/>
+            <a:ext cx="276883" cy="219456"/>
+          </a:xfrm>
+          <a:prstGeom prst="rect">
+            <a:avLst/>
+          </a:prstGeom>
+          <a:noFill/>
+        </p:spPr>
+        <p:txBody>
+          <a:bodyPr wrap="square" lIns="0" tIns="0" rIns="0" bIns="0" anchor="ctr">
+            <a:noAutofit/>
+          </a:bodyPr>
+          <a:lstStyle/>
+          <a:p>
+            <a:pPr algn="l"/>
+            <a:r>
+              <a:rPr sz="700" b="0" i="0">
+                <a:solidFill>
+                  <a:srgbClr val="334155"/>
+                </a:solidFill>
+              </a:rPr>
+              <a:t>devlink</a:t>
+            </a:r>
+          </a:p>
+        </p:txBody>
+      </p:sp>
+      <p:sp>
+        <p:nvSpPr>
+          <p:cNvPr id="880" name="row:devlink health:caption"/>
+          <p:cNvSpPr txBox="1"/>
+          <p:nvPr/>
+        </p:nvSpPr>
+        <p:spPr>
+          <a:xfrm>
+            <a:off x="9040469" y="6681365"/>
+            <a:ext cx="527400" cy="219456"/>
+          </a:xfrm>
+          <a:prstGeom prst="rect">
+            <a:avLst/>
+          </a:prstGeom>
+          <a:noFill/>
+        </p:spPr>
+        <p:txBody>
+          <a:bodyPr wrap="square" lIns="0" tIns="0" rIns="0" bIns="0" anchor="ctr">
+            <a:noAutofit/>
+          </a:bodyPr>
+          <a:lstStyle/>
+          <a:p>
+            <a:pPr algn="l"/>
+            <a:r>
+              <a:rPr sz="700" b="0" i="0">
+                <a:solidFill>
+                  <a:srgbClr val="334155"/>
+                </a:solidFill>
+              </a:rPr>
+              <a:t>devlink health</a:t>
+            </a:r>
+          </a:p>
+        </p:txBody>
+      </p:sp>
+      <p:sp>
+        <p:nvSpPr>
+          <p:cNvPr id="881" name="row:phylink:caption"/>
+          <p:cNvSpPr txBox="1"/>
+          <p:nvPr/>
+        </p:nvSpPr>
+        <p:spPr>
+          <a:xfrm>
+            <a:off x="8061503" y="6778473"/>
+            <a:ext cx="278230" cy="219456"/>
+          </a:xfrm>
+          <a:prstGeom prst="rect">
+            <a:avLst/>
+          </a:prstGeom>
+          <a:noFill/>
+        </p:spPr>
+        <p:txBody>
+          <a:bodyPr wrap="square" lIns="0" tIns="0" rIns="0" bIns="0" anchor="ctr">
+            <a:noAutofit/>
+          </a:bodyPr>
+          <a:lstStyle/>
+          <a:p>
+            <a:pPr algn="l"/>
+            <a:r>
+              <a:rPr sz="700" b="0" i="0">
+                <a:solidFill>
+                  <a:srgbClr val="334155"/>
+                </a:solidFill>
+              </a:rPr>
+              <a:t>phylink</a:t>
+            </a:r>
+          </a:p>
+        </p:txBody>
+      </p:sp>
+      <p:sp>
+        <p:nvSpPr>
+          <p:cNvPr id="882" name="row:Net DIM:caption"/>
+          <p:cNvSpPr txBox="1"/>
+          <p:nvPr/>
+        </p:nvSpPr>
+        <p:spPr>
+          <a:xfrm>
+            <a:off x="9524192" y="6875581"/>
+            <a:ext cx="322416" cy="219456"/>
+          </a:xfrm>
+          <a:prstGeom prst="rect">
+            <a:avLst/>
+          </a:prstGeom>
+          <a:noFill/>
+        </p:spPr>
+        <p:txBody>
+          <a:bodyPr wrap="square" lIns="0" tIns="0" rIns="0" bIns="0" anchor="ctr">
+            <a:noAutofit/>
+          </a:bodyPr>
+          <a:lstStyle/>
+          <a:p>
+            <a:pPr algn="l"/>
+            <a:r>
+              <a:rPr sz="700" b="0" i="0">
+                <a:solidFill>
+                  <a:srgbClr val="334155"/>
+                </a:solidFill>
+              </a:rPr>
+              <a:t>Net DIM</a:t>
+            </a:r>
+          </a:p>
+        </p:txBody>
+      </p:sp>
+      <p:sp>
+        <p:nvSpPr>
+          <p:cNvPr id="883" name="row:netdevsim:caption"/>
+          <p:cNvSpPr txBox="1"/>
+          <p:nvPr/>
+        </p:nvSpPr>
+        <p:spPr>
+          <a:xfrm>
+            <a:off x="8328131" y="6972689"/>
+            <a:ext cx="393995" cy="219456"/>
+          </a:xfrm>
+          <a:prstGeom prst="rect">
+            <a:avLst/>
+          </a:prstGeom>
+          <a:noFill/>
+        </p:spPr>
+        <p:txBody>
+          <a:bodyPr wrap="square" lIns="0" tIns="0" rIns="0" bIns="0" anchor="ctr">
+            <a:noAutofit/>
+          </a:bodyPr>
+          <a:lstStyle/>
+          <a:p>
+            <a:pPr algn="l"/>
+            <a:r>
+              <a:rPr sz="700" b="0" i="0">
+                <a:solidFill>
+                  <a:srgbClr val="334155"/>
+                </a:solidFill>
+              </a:rPr>
+              <a:t>netdevsim</a:t>
+            </a:r>
+          </a:p>
+        </p:txBody>
+      </p:sp>
+      <p:sp>
+        <p:nvSpPr>
+          <p:cNvPr id="884" name="row:ethtool netlink:caption"/>
+          <p:cNvSpPr txBox="1"/>
+          <p:nvPr/>
+        </p:nvSpPr>
+        <p:spPr>
+          <a:xfrm>
+            <a:off x="9666403" y="7069797"/>
+            <a:ext cx="549063" cy="219456"/>
+          </a:xfrm>
+          <a:prstGeom prst="rect">
+            <a:avLst/>
+          </a:prstGeom>
+          <a:noFill/>
+        </p:spPr>
+        <p:txBody>
+          <a:bodyPr wrap="square" lIns="0" tIns="0" rIns="0" bIns="0" anchor="ctr">
+            <a:noAutofit/>
+          </a:bodyPr>
+          <a:lstStyle/>
+          <a:p>
+            <a:pPr algn="l"/>
+            <a:r>
+              <a:rPr sz="700" b="0" i="0">
+                <a:solidFill>
+                  <a:srgbClr val="334155"/>
+                </a:solidFill>
+              </a:rPr>
+              <a:t>ethtool netlink</a:t>
+            </a:r>
+          </a:p>
+        </p:txBody>
+      </p:sp>
+      <p:sp>
+        <p:nvSpPr>
+          <p:cNvPr id="885" name="row:auxiliary bus:caption"/>
+          <p:cNvSpPr txBox="1"/>
+          <p:nvPr/>
+        </p:nvSpPr>
+        <p:spPr>
+          <a:xfrm>
+            <a:off x="10323798" y="7166905"/>
+            <a:ext cx="469837" cy="219456"/>
+          </a:xfrm>
+          <a:prstGeom prst="rect">
+            <a:avLst/>
+          </a:prstGeom>
+          <a:noFill/>
+        </p:spPr>
+        <p:txBody>
+          <a:bodyPr wrap="square" lIns="0" tIns="0" rIns="0" bIns="0" anchor="ctr">
+            <a:noAutofit/>
+          </a:bodyPr>
+          <a:lstStyle/>
+          <a:p>
+            <a:pPr algn="l"/>
+            <a:r>
+              <a:rPr sz="700" b="0" i="0">
+                <a:solidFill>
+                  <a:srgbClr val="334155"/>
+                </a:solidFill>
+              </a:rPr>
+              <a:t>auxiliary bus</a:t>
+            </a:r>
+          </a:p>
+        </p:txBody>
+      </p:sp>
+      <p:sp>
+        <p:nvSpPr>
+          <p:cNvPr id="886" name="row:threaded NAPI:caption"/>
+          <p:cNvSpPr txBox="1"/>
+          <p:nvPr/>
+        </p:nvSpPr>
+        <p:spPr>
+          <a:xfrm>
+            <a:off x="8696188" y="7264013"/>
+            <a:ext cx="546319" cy="219456"/>
+          </a:xfrm>
+          <a:prstGeom prst="rect">
+            <a:avLst/>
+          </a:prstGeom>
+          <a:noFill/>
+        </p:spPr>
+        <p:txBody>
+          <a:bodyPr wrap="square" lIns="0" tIns="0" rIns="0" bIns="0" anchor="ctr">
+            <a:noAutofit/>
+          </a:bodyPr>
+          <a:lstStyle/>
+          <a:p>
+            <a:pPr algn="r"/>
+            <a:r>
+              <a:rPr sz="700" b="0" i="0">
+                <a:solidFill>
+                  <a:srgbClr val="334155"/>
+                </a:solidFill>
+              </a:rPr>
+              <a:t>threaded NAPI</a:t>
+            </a:r>
+          </a:p>
+        </p:txBody>
+      </p:sp>
+      <p:sp>
+        <p:nvSpPr>
+          <p:cNvPr id="887" name="row:Rust phylib:caption"/>
+          <p:cNvSpPr txBox="1"/>
+          <p:nvPr/>
+        </p:nvSpPr>
+        <p:spPr>
+          <a:xfrm>
+            <a:off x="12407772" y="7361121"/>
+            <a:ext cx="416442" cy="219456"/>
+          </a:xfrm>
+          <a:prstGeom prst="rect">
+            <a:avLst/>
+          </a:prstGeom>
+          <a:noFill/>
+        </p:spPr>
+        <p:txBody>
+          <a:bodyPr wrap="square" lIns="0" tIns="0" rIns="0" bIns="0" anchor="ctr">
+            <a:noAutofit/>
+          </a:bodyPr>
+          <a:lstStyle/>
+          <a:p>
+            <a:pPr algn="l"/>
+            <a:r>
+              <a:rPr sz="700" b="0" i="0">
+                <a:solidFill>
+                  <a:srgbClr val="334155"/>
+                </a:solidFill>
+              </a:rPr>
+              <a:t>Rust phylib</a:t>
             </a:r>
           </a:p>
         </p:txBody>

--- a/linux-networking-feature-evolution.pptx
+++ b/linux-networking-feature-evolution.pptx
@@ -386,7 +386,7 @@
           </a:p>
           <a:p>
             <a:r>
-              <a:t>- Start labels (~X.Y) give the version under development at the plotted start date, i.e. the first kernel released after that date. Where a lineage arrow runs into a start label, its shaft is broken around the label (…:across:before-label + …:across).</a:t>
+              <a:t>- Start labels (~X.Y) give the version under development at the plotted start date, i.e. the first kernel released after that date. A start label sits left of its ○ by default. Where a lineage arrow arrives at the ○ from the left, or a lineage line would touch the label, the label sits right of the ○ and the dashed development line starts after it, so no label touches a black lineage line.</a:t>
             </a:r>
           </a:p>
           <a:p>
@@ -5432,7 +5432,7 @@
       </p:cxnSp>
       <p:cxnSp>
         <p:nvCxnSpPr>
-          <p:cNvPr id="783" name="lineage:sch_fq / TCP pacing:trunk"/>
+          <p:cNvPr id="438" name="lineage:sch_fq / TCP pacing:trunk"/>
           <p:cNvCxnSpPr/>
           <p:nvPr/>
         </p:nvCxnSpPr>
@@ -5467,14 +5467,14 @@
       </p:cxnSp>
       <p:cxnSp>
         <p:nvCxnSpPr>
-          <p:cNvPr id="784" name="lineage:sch_fq / TCP pacing-&gt;SO_TXTIME / EDT / taprio:across:before-label"/>
+          <p:cNvPr id="439" name="lineage:sch_fq / TCP pacing-&gt;SO_TXTIME / EDT / taprio:across"/>
           <p:cNvCxnSpPr/>
           <p:nvPr/>
         </p:nvCxnSpPr>
         <p:spPr>
           <a:xfrm>
             <a:off x="4987998" y="2061141"/>
-            <a:ext cx="1906470" cy="0"/>
+            <a:ext cx="2279596" cy="0"/>
           </a:xfrm>
           <a:prstGeom prst="line">
             <a:avLst/>
@@ -5483,6 +5483,7 @@
             <a:solidFill>
               <a:srgbClr val="475569"/>
             </a:solidFill>
+            <a:tailEnd type="triangle" w="sm" len="sm"/>
           </a:ln>
         </p:spPr>
         <p:style>
@@ -5502,14 +5503,14 @@
       </p:cxnSp>
       <p:cxnSp>
         <p:nvCxnSpPr>
-          <p:cNvPr id="785" name="lineage:sch_fq / TCP pacing-&gt;SO_TXTIME / EDT / taprio:across"/>
+          <p:cNvPr id="440" name="lineage:BIG TCP:trunk"/>
           <p:cNvCxnSpPr/>
           <p:nvPr/>
         </p:nvCxnSpPr>
         <p:spPr>
           <a:xfrm>
-            <a:off x="7180726" y="2061141"/>
-            <a:ext cx="86868" cy="0"/>
+            <a:off x="11056747" y="2203969"/>
+            <a:ext cx="0" cy="51388"/>
           </a:xfrm>
           <a:prstGeom prst="line">
             <a:avLst/>
@@ -5518,7 +5519,6 @@
             <a:solidFill>
               <a:srgbClr val="475569"/>
             </a:solidFill>
-            <a:tailEnd type="triangle" w="sm" len="sm"/>
           </a:ln>
         </p:spPr>
         <p:style>
@@ -5538,14 +5538,14 @@
       </p:cxnSp>
       <p:cxnSp>
         <p:nvCxnSpPr>
-          <p:cNvPr id="786" name="lineage:BIG TCP:trunk"/>
+          <p:cNvPr id="441" name="lineage:BIG TCP-&gt;BIG TCP extensions:across"/>
           <p:cNvCxnSpPr/>
           <p:nvPr/>
         </p:nvCxnSpPr>
         <p:spPr>
           <a:xfrm>
-            <a:off x="11056747" y="2203969"/>
-            <a:ext cx="0" cy="51388"/>
+            <a:off x="11056747" y="2255357"/>
+            <a:ext cx="460444" cy="0"/>
           </a:xfrm>
           <a:prstGeom prst="line">
             <a:avLst/>
@@ -5554,6 +5554,7 @@
             <a:solidFill>
               <a:srgbClr val="475569"/>
             </a:solidFill>
+            <a:tailEnd type="triangle" w="sm" len="sm"/>
           </a:ln>
         </p:spPr>
         <p:style>
@@ -5573,43 +5574,7 @@
       </p:cxnSp>
       <p:cxnSp>
         <p:nvCxnSpPr>
-          <p:cNvPr id="787" name="lineage:BIG TCP-&gt;BIG TCP extensions:across"/>
-          <p:cNvCxnSpPr/>
-          <p:nvPr/>
-        </p:nvCxnSpPr>
-        <p:spPr>
-          <a:xfrm>
-            <a:off x="11056747" y="2255357"/>
-            <a:ext cx="460444" cy="0"/>
-          </a:xfrm>
-          <a:prstGeom prst="line">
-            <a:avLst/>
-          </a:prstGeom>
-          <a:ln w="12700">
-            <a:solidFill>
-              <a:srgbClr val="475569"/>
-            </a:solidFill>
-            <a:tailEnd type="triangle" w="sm" len="sm"/>
-          </a:ln>
-        </p:spPr>
-        <p:style>
-          <a:lnRef idx="2">
-            <a:schemeClr val="accent1"/>
-          </a:lnRef>
-          <a:fillRef idx="0">
-            <a:schemeClr val="accent1"/>
-          </a:fillRef>
-          <a:effectRef idx="1">
-            <a:schemeClr val="accent1"/>
-          </a:effectRef>
-          <a:fontRef idx="minor">
-            <a:schemeClr val="tx1"/>
-          </a:fontRef>
-        </p:style>
-      </p:cxnSp>
-      <p:cxnSp>
-        <p:nvCxnSpPr>
-          <p:cNvPr id="788" name="lineage:eBPF foundation:trunk"/>
+          <p:cNvPr id="442" name="lineage:eBPF foundation:trunk"/>
           <p:cNvCxnSpPr/>
           <p:nvPr/>
         </p:nvCxnSpPr>
@@ -5645,7 +5610,7 @@
       </p:cxnSp>
       <p:sp>
         <p:nvSpPr>
-          <p:cNvPr id="789" name="lineage:eBPF foundation-&gt;TC BPF:junction"/>
+          <p:cNvPr id="443" name="lineage:eBPF foundation-&gt;TC BPF:junction"/>
           <p:cNvSpPr/>
           <p:nvPr/>
         </p:nvSpPr>
@@ -5689,14 +5654,14 @@
       </p:sp>
       <p:cxnSp>
         <p:nvCxnSpPr>
-          <p:cNvPr id="790" name="lineage:eBPF foundation-&gt;cgroup / LWT BPF:across:before-label"/>
+          <p:cNvPr id="444" name="lineage:eBPF foundation-&gt;cgroup / LWT BPF:across"/>
           <p:cNvCxnSpPr/>
           <p:nvPr/>
         </p:nvCxnSpPr>
         <p:spPr>
           <a:xfrm>
             <a:off x="5747007" y="3123661"/>
-            <a:ext cx="358664" cy="0"/>
+            <a:ext cx="687340" cy="0"/>
           </a:xfrm>
           <a:prstGeom prst="line">
             <a:avLst/>
@@ -5705,6 +5670,7 @@
             <a:solidFill>
               <a:srgbClr val="475569"/>
             </a:solidFill>
+            <a:tailEnd type="triangle" w="sm" len="sm"/>
           </a:ln>
         </p:spPr>
         <p:style>
@@ -5724,14 +5690,14 @@
       </p:cxnSp>
       <p:cxnSp>
         <p:nvCxnSpPr>
-          <p:cNvPr id="791" name="lineage:eBPF foundation-&gt;cgroup / LWT BPF:across"/>
+          <p:cNvPr id="445" name="lineage:eBPF foundation-&gt;SOCK_OPS / SOCKMAP:across"/>
           <p:cNvCxnSpPr/>
           <p:nvPr/>
         </p:nvCxnSpPr>
         <p:spPr>
           <a:xfrm>
-            <a:off x="6347479" y="3123661"/>
-            <a:ext cx="86868" cy="0"/>
+            <a:off x="5747007" y="3220769"/>
+            <a:ext cx="1034526" cy="0"/>
           </a:xfrm>
           <a:prstGeom prst="line">
             <a:avLst/>
@@ -5760,14 +5726,14 @@
       </p:cxnSp>
       <p:cxnSp>
         <p:nvCxnSpPr>
-          <p:cNvPr id="792" name="lineage:eBPF foundation-&gt;SOCK_OPS / SOCKMAP:across:before-label"/>
+          <p:cNvPr id="446" name="lineage:eBPF foundation-&gt;XDP:across"/>
           <p:cNvCxnSpPr/>
           <p:nvPr/>
         </p:nvCxnSpPr>
         <p:spPr>
           <a:xfrm>
-            <a:off x="5747007" y="3220769"/>
-            <a:ext cx="705850" cy="0"/>
+            <a:off x="5747007" y="3609201"/>
+            <a:ext cx="770664" cy="0"/>
           </a:xfrm>
           <a:prstGeom prst="line">
             <a:avLst/>
@@ -5776,6 +5742,7 @@
             <a:solidFill>
               <a:srgbClr val="475569"/>
             </a:solidFill>
+            <a:tailEnd type="triangle" w="sm" len="sm"/>
           </a:ln>
         </p:spPr>
         <p:style>
@@ -5795,14 +5762,14 @@
       </p:cxnSp>
       <p:cxnSp>
         <p:nvCxnSpPr>
-          <p:cNvPr id="793" name="lineage:eBPF foundation-&gt;SOCK_OPS / SOCKMAP:across"/>
+          <p:cNvPr id="447" name="lineage:TC BPF:trunk"/>
           <p:cNvCxnSpPr/>
           <p:nvPr/>
         </p:nvCxnSpPr>
         <p:spPr>
           <a:xfrm>
-            <a:off x="6694665" y="3220769"/>
-            <a:ext cx="86868" cy="0"/>
+            <a:off x="6120096" y="2878057"/>
+            <a:ext cx="0" cy="51388"/>
           </a:xfrm>
           <a:prstGeom prst="line">
             <a:avLst/>
@@ -5811,7 +5778,6 @@
             <a:solidFill>
               <a:srgbClr val="475569"/>
             </a:solidFill>
-            <a:tailEnd type="triangle" w="sm" len="sm"/>
           </a:ln>
         </p:spPr>
         <p:style>
@@ -5831,14 +5797,14 @@
       </p:cxnSp>
       <p:cxnSp>
         <p:nvCxnSpPr>
-          <p:cNvPr id="794" name="lineage:eBPF foundation-&gt;XDP:across:before-label"/>
+          <p:cNvPr id="448" name="lineage:TC BPF-&gt;TCX:across"/>
           <p:cNvCxnSpPr/>
           <p:nvPr/>
         </p:nvCxnSpPr>
         <p:spPr>
           <a:xfrm>
-            <a:off x="5747007" y="3609201"/>
-            <a:ext cx="441988" cy="0"/>
+            <a:off x="6120096" y="2929445"/>
+            <a:ext cx="4897109" cy="0"/>
           </a:xfrm>
           <a:prstGeom prst="line">
             <a:avLst/>
@@ -5847,6 +5813,7 @@
             <a:solidFill>
               <a:srgbClr val="475569"/>
             </a:solidFill>
+            <a:tailEnd type="triangle" w="sm" len="sm"/>
           </a:ln>
         </p:spPr>
         <p:style>
@@ -5866,14 +5833,14 @@
       </p:cxnSp>
       <p:cxnSp>
         <p:nvCxnSpPr>
-          <p:cNvPr id="795" name="lineage:eBPF foundation-&gt;XDP:across"/>
+          <p:cNvPr id="449" name="lineage:TCX-&gt;netkit"/>
           <p:cNvCxnSpPr/>
           <p:nvPr/>
         </p:nvCxnSpPr>
         <p:spPr>
           <a:xfrm>
-            <a:off x="6430803" y="3609201"/>
-            <a:ext cx="86868" cy="0"/>
+            <a:off x="11924118" y="2975165"/>
+            <a:ext cx="0" cy="42244"/>
           </a:xfrm>
           <a:prstGeom prst="line">
             <a:avLst/>
@@ -5902,13 +5869,13 @@
       </p:cxnSp>
       <p:cxnSp>
         <p:nvCxnSpPr>
-          <p:cNvPr id="796" name="lineage:TC BPF:trunk"/>
+          <p:cNvPr id="450" name="lineage:BPF struct_ops:trunk"/>
           <p:cNvCxnSpPr/>
           <p:nvPr/>
         </p:nvCxnSpPr>
         <p:spPr>
           <a:xfrm>
-            <a:off x="6120096" y="2878057"/>
+            <a:off x="9434168" y="3363597"/>
             <a:ext cx="0" cy="51388"/>
           </a:xfrm>
           <a:prstGeom prst="line">
@@ -5937,14 +5904,14 @@
       </p:cxnSp>
       <p:cxnSp>
         <p:nvCxnSpPr>
-          <p:cNvPr id="797" name="lineage:TC BPF-&gt;TCX:across:before-label"/>
+          <p:cNvPr id="451" name="lineage:BPF struct_ops-&gt;BPF qdisc:across"/>
           <p:cNvCxnSpPr/>
           <p:nvPr/>
         </p:nvCxnSpPr>
         <p:spPr>
           <a:xfrm>
-            <a:off x="6120096" y="2929445"/>
-            <a:ext cx="4568433" cy="0"/>
+            <a:off x="9434168" y="3414985"/>
+            <a:ext cx="2832908" cy="0"/>
           </a:xfrm>
           <a:prstGeom prst="line">
             <a:avLst/>
@@ -5953,6 +5920,7 @@
             <a:solidFill>
               <a:srgbClr val="475569"/>
             </a:solidFill>
+            <a:tailEnd type="triangle" w="sm" len="sm"/>
           </a:ln>
         </p:spPr>
         <p:style>
@@ -5972,14 +5940,14 @@
       </p:cxnSp>
       <p:cxnSp>
         <p:nvCxnSpPr>
-          <p:cNvPr id="798" name="lineage:TC BPF-&gt;TCX:across"/>
+          <p:cNvPr id="452" name="lineage:XDP:trunk"/>
           <p:cNvCxnSpPr/>
           <p:nvPr/>
         </p:nvCxnSpPr>
         <p:spPr>
           <a:xfrm>
-            <a:off x="10930337" y="2929445"/>
-            <a:ext cx="86868" cy="0"/>
+            <a:off x="7012181" y="3654921"/>
+            <a:ext cx="0" cy="522116"/>
           </a:xfrm>
           <a:prstGeom prst="line">
             <a:avLst/>
@@ -6008,14 +5976,14 @@
       </p:cxnSp>
       <p:cxnSp>
         <p:nvCxnSpPr>
-          <p:cNvPr id="799" name="lineage:TCX-&gt;netkit"/>
+          <p:cNvPr id="453" name="lineage:XDP-&gt;XDP devmap / cpumap:across"/>
           <p:cNvCxnSpPr/>
           <p:nvPr/>
         </p:nvCxnSpPr>
         <p:spPr>
           <a:xfrm>
-            <a:off x="11924118" y="2975165"/>
-            <a:ext cx="0" cy="42244"/>
+            <a:off x="7012181" y="3706309"/>
+            <a:ext cx="386122" cy="0"/>
           </a:xfrm>
           <a:prstGeom prst="line">
             <a:avLst/>
@@ -6044,14 +6012,14 @@
       </p:cxnSp>
       <p:cxnSp>
         <p:nvCxnSpPr>
-          <p:cNvPr id="800" name="lineage:BPF struct_ops:trunk"/>
+          <p:cNvPr id="454" name="lineage:XDP-&gt;XDP multi-buffer:across"/>
           <p:cNvCxnSpPr/>
           <p:nvPr/>
         </p:nvCxnSpPr>
         <p:spPr>
           <a:xfrm>
-            <a:off x="9434168" y="3363597"/>
-            <a:ext cx="0" cy="51388"/>
+            <a:off x="7012181" y="3803417"/>
+            <a:ext cx="2894028" cy="0"/>
           </a:xfrm>
           <a:prstGeom prst="line">
             <a:avLst/>
@@ -6060,6 +6028,7 @@
             <a:solidFill>
               <a:srgbClr val="475569"/>
             </a:solidFill>
+            <a:tailEnd type="triangle" w="sm" len="sm"/>
           </a:ln>
         </p:spPr>
         <p:style>
@@ -6079,14 +6048,14 @@
       </p:cxnSp>
       <p:cxnSp>
         <p:nvCxnSpPr>
-          <p:cNvPr id="801" name="lineage:BPF struct_ops-&gt;BPF qdisc:across:before-label"/>
+          <p:cNvPr id="455" name="lineage:XDP-&gt;AF_XDP:across"/>
           <p:cNvCxnSpPr/>
           <p:nvPr/>
         </p:nvCxnSpPr>
         <p:spPr>
           <a:xfrm>
-            <a:off x="9434168" y="3414985"/>
-            <a:ext cx="2459782" cy="0"/>
+            <a:off x="7012181" y="3991965"/>
+            <a:ext cx="116538" cy="0"/>
           </a:xfrm>
           <a:prstGeom prst="line">
             <a:avLst/>
@@ -6095,6 +6064,7 @@
             <a:solidFill>
               <a:srgbClr val="475569"/>
             </a:solidFill>
+            <a:tailEnd type="triangle" w="sm" len="sm"/>
           </a:ln>
         </p:spPr>
         <p:style>
@@ -6114,14 +6084,14 @@
       </p:cxnSp>
       <p:cxnSp>
         <p:nvCxnSpPr>
-          <p:cNvPr id="802" name="lineage:BPF struct_ops-&gt;BPF qdisc:across"/>
+          <p:cNvPr id="456" name="lineage:XDP multi-buffer-&gt;AF_XDP multi-buffer"/>
           <p:cNvCxnSpPr/>
           <p:nvPr/>
         </p:nvCxnSpPr>
         <p:spPr>
           <a:xfrm>
-            <a:off x="12180208" y="3414985"/>
-            <a:ext cx="86868" cy="0"/>
+            <a:off x="10923670" y="3849137"/>
+            <a:ext cx="0" cy="230792"/>
           </a:xfrm>
           <a:prstGeom prst="line">
             <a:avLst/>
@@ -6150,14 +6120,14 @@
       </p:cxnSp>
       <p:cxnSp>
         <p:nvCxnSpPr>
-          <p:cNvPr id="803" name="lineage:XDP:trunk"/>
+          <p:cNvPr id="457" name="lineage:AF_XDP:trunk"/>
           <p:cNvCxnSpPr/>
           <p:nvPr/>
         </p:nvCxnSpPr>
         <p:spPr>
           <a:xfrm>
-            <a:off x="7012181" y="3654921"/>
-            <a:ext cx="0" cy="522116"/>
+            <a:off x="8302070" y="4037685"/>
+            <a:ext cx="0" cy="51388"/>
           </a:xfrm>
           <a:prstGeom prst="line">
             <a:avLst/>
@@ -6166,7 +6136,6 @@
             <a:solidFill>
               <a:srgbClr val="475569"/>
             </a:solidFill>
-            <a:tailEnd type="triangle" w="sm" len="sm"/>
           </a:ln>
         </p:spPr>
         <p:style>
@@ -6186,14 +6155,14 @@
       </p:cxnSp>
       <p:cxnSp>
         <p:nvCxnSpPr>
-          <p:cNvPr id="804" name="lineage:XDP-&gt;XDP devmap / cpumap:across"/>
+          <p:cNvPr id="458" name="lineage:AF_XDP-&gt;AF_XDP multi-buffer:across"/>
           <p:cNvCxnSpPr/>
           <p:nvPr/>
         </p:nvCxnSpPr>
         <p:spPr>
           <a:xfrm>
-            <a:off x="7012181" y="3706309"/>
-            <a:ext cx="386122" cy="0"/>
+            <a:off x="8302070" y="4089073"/>
+            <a:ext cx="2298512" cy="0"/>
           </a:xfrm>
           <a:prstGeom prst="line">
             <a:avLst/>
@@ -6222,14 +6191,14 @@
       </p:cxnSp>
       <p:cxnSp>
         <p:nvCxnSpPr>
-          <p:cNvPr id="805" name="lineage:XDP-&gt;XDP multi-buffer:across:before-label"/>
+          <p:cNvPr id="459" name="lineage:page_pool:trunk"/>
           <p:cNvCxnSpPr/>
           <p:nvPr/>
         </p:nvCxnSpPr>
         <p:spPr>
           <a:xfrm>
-            <a:off x="7012181" y="3803417"/>
-            <a:ext cx="2520902" cy="0"/>
+            <a:off x="8302070" y="4231901"/>
+            <a:ext cx="0" cy="51388"/>
           </a:xfrm>
           <a:prstGeom prst="line">
             <a:avLst/>
@@ -6257,14 +6226,14 @@
       </p:cxnSp>
       <p:cxnSp>
         <p:nvCxnSpPr>
-          <p:cNvPr id="806" name="lineage:XDP-&gt;XDP multi-buffer:across"/>
+          <p:cNvPr id="460" name="lineage:page_pool-&gt;netmem:across"/>
           <p:cNvCxnSpPr/>
           <p:nvPr/>
         </p:nvCxnSpPr>
         <p:spPr>
           <a:xfrm>
-            <a:off x="9819341" y="3803417"/>
-            <a:ext cx="86868" cy="0"/>
+            <a:off x="8302070" y="4283289"/>
+            <a:ext cx="3658845" cy="0"/>
           </a:xfrm>
           <a:prstGeom prst="line">
             <a:avLst/>
@@ -6293,14 +6262,14 @@
       </p:cxnSp>
       <p:cxnSp>
         <p:nvCxnSpPr>
-          <p:cNvPr id="807" name="lineage:XDP-&gt;AF_XDP:across"/>
+          <p:cNvPr id="461" name="lineage:netmem-&gt;Device Memory TCP RX · TX"/>
           <p:cNvCxnSpPr/>
           <p:nvPr/>
         </p:nvCxnSpPr>
         <p:spPr>
           <a:xfrm>
-            <a:off x="7012181" y="3991965"/>
-            <a:ext cx="116538" cy="0"/>
+            <a:off x="12294831" y="4329009"/>
+            <a:ext cx="0" cy="42244"/>
           </a:xfrm>
           <a:prstGeom prst="line">
             <a:avLst/>
@@ -6329,14 +6298,14 @@
       </p:cxnSp>
       <p:cxnSp>
         <p:nvCxnSpPr>
-          <p:cNvPr id="808" name="lineage:XDP multi-buffer-&gt;AF_XDP multi-buffer"/>
+          <p:cNvPr id="462" name="lineage:Device Memory TCP RX · TX:trunk"/>
           <p:cNvCxnSpPr/>
           <p:nvPr/>
         </p:nvCxnSpPr>
         <p:spPr>
           <a:xfrm>
-            <a:off x="10923670" y="3849137"/>
-            <a:ext cx="0" cy="230792"/>
+            <a:off x="12654611" y="4426117"/>
+            <a:ext cx="0" cy="148496"/>
           </a:xfrm>
           <a:prstGeom prst="line">
             <a:avLst/>
@@ -6345,7 +6314,6 @@
             <a:solidFill>
               <a:srgbClr val="475569"/>
             </a:solidFill>
-            <a:tailEnd type="triangle" w="sm" len="sm"/>
           </a:ln>
         </p:spPr>
         <p:style>
@@ -6365,14 +6333,14 @@
       </p:cxnSp>
       <p:cxnSp>
         <p:nvCxnSpPr>
-          <p:cNvPr id="809" name="lineage:AF_XDP:trunk"/>
+          <p:cNvPr id="463" name="lineage:Device Memory TCP RX · TX-&gt;devmem RX buffers &gt; PAGE_SIZE:across"/>
           <p:cNvCxnSpPr/>
           <p:nvPr/>
         </p:nvCxnSpPr>
         <p:spPr>
           <a:xfrm>
-            <a:off x="8302070" y="4037685"/>
-            <a:ext cx="0" cy="51388"/>
+            <a:off x="12654611" y="4477505"/>
+            <a:ext cx="1171927" cy="0"/>
           </a:xfrm>
           <a:prstGeom prst="line">
             <a:avLst/>
@@ -6381,6 +6349,7 @@
             <a:solidFill>
               <a:srgbClr val="475569"/>
             </a:solidFill>
+            <a:tailEnd type="triangle" w="sm" len="sm"/>
           </a:ln>
         </p:spPr>
         <p:style>
@@ -6400,14 +6369,14 @@
       </p:cxnSp>
       <p:cxnSp>
         <p:nvCxnSpPr>
-          <p:cNvPr id="810" name="lineage:AF_XDP-&gt;AF_XDP multi-buffer:across:before-label"/>
+          <p:cNvPr id="464" name="lineage:Device Memory TCP RX · TX-&gt;page_pool memory-provider hooks:across"/>
           <p:cNvCxnSpPr/>
           <p:nvPr/>
         </p:nvCxnSpPr>
         <p:spPr>
           <a:xfrm>
-            <a:off x="8302070" y="4089073"/>
-            <a:ext cx="1925386" cy="0"/>
+            <a:off x="12654611" y="4574613"/>
+            <a:ext cx="312160" cy="0"/>
           </a:xfrm>
           <a:prstGeom prst="line">
             <a:avLst/>
@@ -6416,6 +6385,7 @@
             <a:solidFill>
               <a:srgbClr val="475569"/>
             </a:solidFill>
+            <a:tailEnd type="triangle" w="sm" len="sm"/>
           </a:ln>
         </p:spPr>
         <p:style>
@@ -6435,292 +6405,7 @@
       </p:cxnSp>
       <p:cxnSp>
         <p:nvCxnSpPr>
-          <p:cNvPr id="811" name="lineage:AF_XDP-&gt;AF_XDP multi-buffer:across"/>
-          <p:cNvCxnSpPr/>
-          <p:nvPr/>
-        </p:nvCxnSpPr>
-        <p:spPr>
-          <a:xfrm>
-            <a:off x="10513714" y="4089073"/>
-            <a:ext cx="86868" cy="0"/>
-          </a:xfrm>
-          <a:prstGeom prst="line">
-            <a:avLst/>
-          </a:prstGeom>
-          <a:ln w="12700">
-            <a:solidFill>
-              <a:srgbClr val="475569"/>
-            </a:solidFill>
-            <a:tailEnd type="triangle" w="sm" len="sm"/>
-          </a:ln>
-        </p:spPr>
-        <p:style>
-          <a:lnRef idx="2">
-            <a:schemeClr val="accent1"/>
-          </a:lnRef>
-          <a:fillRef idx="0">
-            <a:schemeClr val="accent1"/>
-          </a:fillRef>
-          <a:effectRef idx="1">
-            <a:schemeClr val="accent1"/>
-          </a:effectRef>
-          <a:fontRef idx="minor">
-            <a:schemeClr val="tx1"/>
-          </a:fontRef>
-        </p:style>
-      </p:cxnSp>
-      <p:cxnSp>
-        <p:nvCxnSpPr>
-          <p:cNvPr id="812" name="lineage:page_pool:trunk"/>
-          <p:cNvCxnSpPr/>
-          <p:nvPr/>
-        </p:nvCxnSpPr>
-        <p:spPr>
-          <a:xfrm>
-            <a:off x="8302070" y="4231901"/>
-            <a:ext cx="0" cy="51388"/>
-          </a:xfrm>
-          <a:prstGeom prst="line">
-            <a:avLst/>
-          </a:prstGeom>
-          <a:ln w="12700">
-            <a:solidFill>
-              <a:srgbClr val="475569"/>
-            </a:solidFill>
-          </a:ln>
-        </p:spPr>
-        <p:style>
-          <a:lnRef idx="2">
-            <a:schemeClr val="accent1"/>
-          </a:lnRef>
-          <a:fillRef idx="0">
-            <a:schemeClr val="accent1"/>
-          </a:fillRef>
-          <a:effectRef idx="1">
-            <a:schemeClr val="accent1"/>
-          </a:effectRef>
-          <a:fontRef idx="minor">
-            <a:schemeClr val="tx1"/>
-          </a:fontRef>
-        </p:style>
-      </p:cxnSp>
-      <p:cxnSp>
-        <p:nvCxnSpPr>
-          <p:cNvPr id="813" name="lineage:page_pool-&gt;netmem:across:before-label"/>
-          <p:cNvCxnSpPr/>
-          <p:nvPr/>
-        </p:nvCxnSpPr>
-        <p:spPr>
-          <a:xfrm>
-            <a:off x="8302070" y="4283289"/>
-            <a:ext cx="3330169" cy="0"/>
-          </a:xfrm>
-          <a:prstGeom prst="line">
-            <a:avLst/>
-          </a:prstGeom>
-          <a:ln w="12700">
-            <a:solidFill>
-              <a:srgbClr val="475569"/>
-            </a:solidFill>
-          </a:ln>
-        </p:spPr>
-        <p:style>
-          <a:lnRef idx="2">
-            <a:schemeClr val="accent1"/>
-          </a:lnRef>
-          <a:fillRef idx="0">
-            <a:schemeClr val="accent1"/>
-          </a:fillRef>
-          <a:effectRef idx="1">
-            <a:schemeClr val="accent1"/>
-          </a:effectRef>
-          <a:fontRef idx="minor">
-            <a:schemeClr val="tx1"/>
-          </a:fontRef>
-        </p:style>
-      </p:cxnSp>
-      <p:cxnSp>
-        <p:nvCxnSpPr>
-          <p:cNvPr id="814" name="lineage:page_pool-&gt;netmem:across"/>
-          <p:cNvCxnSpPr/>
-          <p:nvPr/>
-        </p:nvCxnSpPr>
-        <p:spPr>
-          <a:xfrm>
-            <a:off x="11874047" y="4283289"/>
-            <a:ext cx="86868" cy="0"/>
-          </a:xfrm>
-          <a:prstGeom prst="line">
-            <a:avLst/>
-          </a:prstGeom>
-          <a:ln w="12700">
-            <a:solidFill>
-              <a:srgbClr val="475569"/>
-            </a:solidFill>
-            <a:tailEnd type="triangle" w="sm" len="sm"/>
-          </a:ln>
-        </p:spPr>
-        <p:style>
-          <a:lnRef idx="2">
-            <a:schemeClr val="accent1"/>
-          </a:lnRef>
-          <a:fillRef idx="0">
-            <a:schemeClr val="accent1"/>
-          </a:fillRef>
-          <a:effectRef idx="1">
-            <a:schemeClr val="accent1"/>
-          </a:effectRef>
-          <a:fontRef idx="minor">
-            <a:schemeClr val="tx1"/>
-          </a:fontRef>
-        </p:style>
-      </p:cxnSp>
-      <p:cxnSp>
-        <p:nvCxnSpPr>
-          <p:cNvPr id="815" name="lineage:netmem-&gt;Device Memory TCP RX · TX"/>
-          <p:cNvCxnSpPr/>
-          <p:nvPr/>
-        </p:nvCxnSpPr>
-        <p:spPr>
-          <a:xfrm>
-            <a:off x="12294831" y="4329009"/>
-            <a:ext cx="0" cy="42244"/>
-          </a:xfrm>
-          <a:prstGeom prst="line">
-            <a:avLst/>
-          </a:prstGeom>
-          <a:ln w="12700">
-            <a:solidFill>
-              <a:srgbClr val="475569"/>
-            </a:solidFill>
-            <a:tailEnd type="triangle" w="sm" len="sm"/>
-          </a:ln>
-        </p:spPr>
-        <p:style>
-          <a:lnRef idx="2">
-            <a:schemeClr val="accent1"/>
-          </a:lnRef>
-          <a:fillRef idx="0">
-            <a:schemeClr val="accent1"/>
-          </a:fillRef>
-          <a:effectRef idx="1">
-            <a:schemeClr val="accent1"/>
-          </a:effectRef>
-          <a:fontRef idx="minor">
-            <a:schemeClr val="tx1"/>
-          </a:fontRef>
-        </p:style>
-      </p:cxnSp>
-      <p:cxnSp>
-        <p:nvCxnSpPr>
-          <p:cNvPr id="816" name="lineage:Device Memory TCP RX · TX:trunk"/>
-          <p:cNvCxnSpPr/>
-          <p:nvPr/>
-        </p:nvCxnSpPr>
-        <p:spPr>
-          <a:xfrm>
-            <a:off x="12654611" y="4426117"/>
-            <a:ext cx="0" cy="148496"/>
-          </a:xfrm>
-          <a:prstGeom prst="line">
-            <a:avLst/>
-          </a:prstGeom>
-          <a:ln w="12700">
-            <a:solidFill>
-              <a:srgbClr val="475569"/>
-            </a:solidFill>
-          </a:ln>
-        </p:spPr>
-        <p:style>
-          <a:lnRef idx="2">
-            <a:schemeClr val="accent1"/>
-          </a:lnRef>
-          <a:fillRef idx="0">
-            <a:schemeClr val="accent1"/>
-          </a:fillRef>
-          <a:effectRef idx="1">
-            <a:schemeClr val="accent1"/>
-          </a:effectRef>
-          <a:fontRef idx="minor">
-            <a:schemeClr val="tx1"/>
-          </a:fontRef>
-        </p:style>
-      </p:cxnSp>
-      <p:cxnSp>
-        <p:nvCxnSpPr>
-          <p:cNvPr id="817" name="lineage:Device Memory TCP RX · TX-&gt;devmem RX buffers &gt; PAGE_SIZE:across"/>
-          <p:cNvCxnSpPr/>
-          <p:nvPr/>
-        </p:nvCxnSpPr>
-        <p:spPr>
-          <a:xfrm>
-            <a:off x="12654611" y="4477505"/>
-            <a:ext cx="1171927" cy="0"/>
-          </a:xfrm>
-          <a:prstGeom prst="line">
-            <a:avLst/>
-          </a:prstGeom>
-          <a:ln w="12700">
-            <a:solidFill>
-              <a:srgbClr val="475569"/>
-            </a:solidFill>
-            <a:tailEnd type="triangle" w="sm" len="sm"/>
-          </a:ln>
-        </p:spPr>
-        <p:style>
-          <a:lnRef idx="2">
-            <a:schemeClr val="accent1"/>
-          </a:lnRef>
-          <a:fillRef idx="0">
-            <a:schemeClr val="accent1"/>
-          </a:fillRef>
-          <a:effectRef idx="1">
-            <a:schemeClr val="accent1"/>
-          </a:effectRef>
-          <a:fontRef idx="minor">
-            <a:schemeClr val="tx1"/>
-          </a:fontRef>
-        </p:style>
-      </p:cxnSp>
-      <p:cxnSp>
-        <p:nvCxnSpPr>
-          <p:cNvPr id="818" name="lineage:Device Memory TCP RX · TX-&gt;page_pool memory-provider hooks:across"/>
-          <p:cNvCxnSpPr/>
-          <p:nvPr/>
-        </p:nvCxnSpPr>
-        <p:spPr>
-          <a:xfrm>
-            <a:off x="12654611" y="4574613"/>
-            <a:ext cx="312160" cy="0"/>
-          </a:xfrm>
-          <a:prstGeom prst="line">
-            <a:avLst/>
-          </a:prstGeom>
-          <a:ln w="12700">
-            <a:solidFill>
-              <a:srgbClr val="475569"/>
-            </a:solidFill>
-            <a:tailEnd type="triangle" w="sm" len="sm"/>
-          </a:ln>
-        </p:spPr>
-        <p:style>
-          <a:lnRef idx="2">
-            <a:schemeClr val="accent1"/>
-          </a:lnRef>
-          <a:fillRef idx="0">
-            <a:schemeClr val="accent1"/>
-          </a:fillRef>
-          <a:effectRef idx="1">
-            <a:schemeClr val="accent1"/>
-          </a:effectRef>
-          <a:fontRef idx="minor">
-            <a:schemeClr val="tx1"/>
-          </a:fontRef>
-        </p:style>
-      </p:cxnSp>
-      <p:cxnSp>
-        <p:nvCxnSpPr>
-          <p:cNvPr id="819" name="lineage:page_pool memory-provider hooks:trunk"/>
+          <p:cNvPr id="465" name="lineage:page_pool memory-provider hooks:trunk"/>
           <p:cNvCxnSpPr/>
           <p:nvPr/>
         </p:nvCxnSpPr>
@@ -6756,7 +6441,7 @@
       </p:cxnSp>
       <p:sp>
         <p:nvSpPr>
-          <p:cNvPr id="820" name="lineage:page_pool memory-provider hooks-&gt;large RX buffers (providers / ZCRX):junction"/>
+          <p:cNvPr id="466" name="lineage:page_pool memory-provider hooks-&gt;large RX buffers (providers / ZCRX):junction"/>
           <p:cNvSpPr/>
           <p:nvPr/>
         </p:nvSpPr>
@@ -6800,7 +6485,7 @@
       </p:sp>
       <p:cxnSp>
         <p:nvCxnSpPr>
-          <p:cNvPr id="821" name="lineage:per-netns RTNL-&gt;further RTNL breakup"/>
+          <p:cNvPr id="467" name="lineage:per-netns RTNL-&gt;further RTNL breakup"/>
           <p:cNvCxnSpPr/>
           <p:nvPr/>
         </p:nvCxnSpPr>
@@ -6836,7 +6521,7 @@
       </p:cxnSp>
       <p:cxnSp>
         <p:nvCxnSpPr>
-          <p:cNvPr id="822" name="lineage:further RTNL breakup:trunk"/>
+          <p:cNvPr id="468" name="lineage:further RTNL breakup:trunk"/>
           <p:cNvCxnSpPr/>
           <p:nvPr/>
         </p:nvCxnSpPr>
@@ -6871,7 +6556,7 @@
       </p:cxnSp>
       <p:sp>
         <p:nvSpPr>
-          <p:cNvPr id="823" name="lineage:further RTNL breakup-&gt;RTNL-less FIB rules:junction"/>
+          <p:cNvPr id="469" name="lineage:further RTNL breakup-&gt;RTNL-less FIB rules:junction"/>
           <p:cNvSpPr/>
           <p:nvPr/>
         </p:nvSpPr>
@@ -6915,7 +6600,7 @@
       </p:sp>
       <p:cxnSp>
         <p:nvCxnSpPr>
-          <p:cNvPr id="824" name="lineage:further RTNL breakup-&gt;per-netns netdev unregistration:across"/>
+          <p:cNvPr id="470" name="lineage:further RTNL breakup-&gt;per-netns netdev unregistration:across"/>
           <p:cNvCxnSpPr/>
           <p:nvPr/>
         </p:nvCxnSpPr>
@@ -6951,7 +6636,7 @@
       </p:cxnSp>
       <p:cxnSp>
         <p:nvCxnSpPr>
-          <p:cNvPr id="825" name="lineage:structured drop reason-&gt;drop-reason expansion"/>
+          <p:cNvPr id="471" name="lineage:structured drop reason-&gt;drop-reason expansion"/>
           <p:cNvCxnSpPr/>
           <p:nvPr/>
         </p:nvCxnSpPr>
@@ -6987,7 +6672,7 @@
       </p:cxnSp>
       <p:cxnSp>
         <p:nvCxnSpPr>
-          <p:cNvPr id="826" name="lineage:switchdev-&gt;devlink"/>
+          <p:cNvPr id="472" name="lineage:switchdev-&gt;devlink"/>
           <p:cNvCxnSpPr/>
           <p:nvPr/>
         </p:nvCxnSpPr>
@@ -7023,7 +6708,7 @@
       </p:cxnSp>
       <p:cxnSp>
         <p:nvCxnSpPr>
-          <p:cNvPr id="827" name="lineage:devlink:trunk"/>
+          <p:cNvPr id="473" name="lineage:devlink:trunk"/>
           <p:cNvCxnSpPr/>
           <p:nvPr/>
         </p:nvCxnSpPr>
@@ -7058,14 +6743,14 @@
       </p:cxnSp>
       <p:cxnSp>
         <p:nvCxnSpPr>
-          <p:cNvPr id="828" name="lineage:devlink-&gt;devlink health:across:before-label"/>
+          <p:cNvPr id="474" name="lineage:devlink-&gt;devlink health:across"/>
           <p:cNvCxnSpPr/>
           <p:nvPr/>
         </p:nvCxnSpPr>
         <p:spPr>
           <a:xfrm>
             <a:off x="6746029" y="6791093"/>
-            <a:ext cx="703937" cy="0"/>
+            <a:ext cx="1077063" cy="0"/>
           </a:xfrm>
           <a:prstGeom prst="line">
             <a:avLst/>
@@ -7074,6 +6759,7 @@
             <a:solidFill>
               <a:srgbClr val="475569"/>
             </a:solidFill>
+            <a:tailEnd type="triangle" w="sm" len="sm"/>
           </a:ln>
         </p:spPr>
         <p:style>
@@ -7093,14 +6779,14 @@
       </p:cxnSp>
       <p:cxnSp>
         <p:nvCxnSpPr>
-          <p:cNvPr id="829" name="lineage:devlink-&gt;devlink health:across"/>
+          <p:cNvPr id="475" name="lineage:YNL tooling-&gt;queue/NAPI/page_pool netdev-genl"/>
           <p:cNvCxnSpPr/>
           <p:nvPr/>
         </p:nvCxnSpPr>
         <p:spPr>
           <a:xfrm>
-            <a:off x="7736224" y="6791093"/>
-            <a:ext cx="86868" cy="0"/>
+            <a:off x="11562911" y="5779961"/>
+            <a:ext cx="0" cy="133684"/>
           </a:xfrm>
           <a:prstGeom prst="line">
             <a:avLst/>
@@ -7127,25 +6813,93 @@
           </a:fontRef>
         </p:style>
       </p:cxnSp>
+      <p:sp>
+        <p:nvSpPr>
+          <p:cNvPr id="95" name="band-label:PERFORMANCE"/>
+          <p:cNvSpPr txBox="1"/>
+          <p:nvPr/>
+        </p:nvSpPr>
+        <p:spPr>
+          <a:xfrm>
+            <a:off x="384048" y="1508760"/>
+            <a:ext cx="1051560" cy="1104763"/>
+          </a:xfrm>
+          <a:prstGeom prst="rect">
+            <a:avLst/>
+          </a:prstGeom>
+          <a:noFill/>
+        </p:spPr>
+        <p:txBody>
+          <a:bodyPr wrap="square" lIns="0" tIns="0" rIns="0" bIns="0" anchor="ctr">
+            <a:noAutofit/>
+          </a:bodyPr>
+          <a:lstStyle/>
+          <a:p>
+            <a:pPr algn="l"/>
+            <a:r>
+              <a:rPr sz="1000" b="1" i="0">
+                <a:solidFill>
+                  <a:srgbClr val="2563EB"/>
+                </a:solidFill>
+              </a:rPr>
+              <a:t>PERFORMANCE</a:t>
+            </a:r>
+          </a:p>
+        </p:txBody>
+      </p:sp>
+      <p:sp>
+        <p:nvSpPr>
+          <p:cNvPr id="476" name="row:DQL / BQL:name"/>
+          <p:cNvSpPr txBox="1"/>
+          <p:nvPr/>
+        </p:nvSpPr>
+        <p:spPr>
+          <a:xfrm>
+            <a:off x="1325880" y="1465873"/>
+            <a:ext cx="1572768" cy="219456"/>
+          </a:xfrm>
+          <a:prstGeom prst="rect">
+            <a:avLst/>
+          </a:prstGeom>
+          <a:noFill/>
+        </p:spPr>
+        <p:txBody>
+          <a:bodyPr wrap="square" lIns="0" tIns="0" rIns="0" bIns="0" anchor="ctr">
+            <a:noAutofit/>
+          </a:bodyPr>
+          <a:lstStyle/>
+          <a:p>
+            <a:pPr algn="r"/>
+            <a:r>
+              <a:rPr sz="750" b="0" i="0">
+                <a:solidFill>
+                  <a:srgbClr val="1F2937"/>
+                </a:solidFill>
+              </a:rPr>
+              <a:t>DQL / BQL</a:t>
+            </a:r>
+          </a:p>
+        </p:txBody>
+      </p:sp>
       <p:cxnSp>
         <p:nvCxnSpPr>
-          <p:cNvPr id="830" name="lineage:YNL tooling-&gt;queue/NAPI/page_pool netdev-genl"/>
+          <p:cNvPr id="478" name="row:DQL / BQL:development"/>
           <p:cNvCxnSpPr/>
           <p:nvPr/>
         </p:nvCxnSpPr>
         <p:spPr>
           <a:xfrm>
-            <a:off x="11562911" y="5779961"/>
-            <a:ext cx="0" cy="133684"/>
+            <a:off x="3535255" y="1575601"/>
+            <a:ext cx="323021" cy="0"/>
           </a:xfrm>
           <a:prstGeom prst="line">
             <a:avLst/>
           </a:prstGeom>
           <a:ln w="12700">
             <a:solidFill>
-              <a:srgbClr val="475569"/>
-            </a:solidFill>
-            <a:tailEnd type="triangle" w="sm" len="sm"/>
+              <a:srgbClr val="2563EB"/>
+            </a:solidFill>
+            <a:prstDash val="dash"/>
           </a:ln>
         </p:spPr>
         <p:style>
@@ -7165,111 +6919,7 @@
       </p:cxnSp>
       <p:sp>
         <p:nvSpPr>
-          <p:cNvPr id="95" name="band-label:PERFORMANCE"/>
-          <p:cNvSpPr txBox="1"/>
-          <p:nvPr/>
-        </p:nvSpPr>
-        <p:spPr>
-          <a:xfrm>
-            <a:off x="384048" y="1508760"/>
-            <a:ext cx="1051560" cy="1104763"/>
-          </a:xfrm>
-          <a:prstGeom prst="rect">
-            <a:avLst/>
-          </a:prstGeom>
-          <a:noFill/>
-        </p:spPr>
-        <p:txBody>
-          <a:bodyPr wrap="square" lIns="0" tIns="0" rIns="0" bIns="0" anchor="ctr">
-            <a:noAutofit/>
-          </a:bodyPr>
-          <a:lstStyle/>
-          <a:p>
-            <a:pPr algn="l"/>
-            <a:r>
-              <a:rPr sz="1000" b="1" i="0">
-                <a:solidFill>
-                  <a:srgbClr val="2563EB"/>
-                </a:solidFill>
-              </a:rPr>
-              <a:t>PERFORMANCE</a:t>
-            </a:r>
-          </a:p>
-        </p:txBody>
-      </p:sp>
-      <p:sp>
-        <p:nvSpPr>
-          <p:cNvPr id="438" name="row:DQL / BQL:name"/>
-          <p:cNvSpPr txBox="1"/>
-          <p:nvPr/>
-        </p:nvSpPr>
-        <p:spPr>
-          <a:xfrm>
-            <a:off x="1325880" y="1465873"/>
-            <a:ext cx="1572768" cy="219456"/>
-          </a:xfrm>
-          <a:prstGeom prst="rect">
-            <a:avLst/>
-          </a:prstGeom>
-          <a:noFill/>
-        </p:spPr>
-        <p:txBody>
-          <a:bodyPr wrap="square" lIns="0" tIns="0" rIns="0" bIns="0" anchor="ctr">
-            <a:noAutofit/>
-          </a:bodyPr>
-          <a:lstStyle/>
-          <a:p>
-            <a:pPr algn="r"/>
-            <a:r>
-              <a:rPr sz="750" b="0" i="0">
-                <a:solidFill>
-                  <a:srgbClr val="1F2937"/>
-                </a:solidFill>
-              </a:rPr>
-              <a:t>DQL / BQL</a:t>
-            </a:r>
-          </a:p>
-        </p:txBody>
-      </p:sp>
-      <p:cxnSp>
-        <p:nvCxnSpPr>
-          <p:cNvPr id="439" name="row:DQL / BQL:development"/>
-          <p:cNvCxnSpPr/>
-          <p:nvPr/>
-        </p:nvCxnSpPr>
-        <p:spPr>
-          <a:xfrm>
-            <a:off x="3211944" y="1575601"/>
-            <a:ext cx="646332" cy="0"/>
-          </a:xfrm>
-          <a:prstGeom prst="line">
-            <a:avLst/>
-          </a:prstGeom>
-          <a:ln w="12700">
-            <a:solidFill>
-              <a:srgbClr val="2563EB"/>
-            </a:solidFill>
-            <a:prstDash val="dash"/>
-          </a:ln>
-        </p:spPr>
-        <p:style>
-          <a:lnRef idx="2">
-            <a:schemeClr val="accent1"/>
-          </a:lnRef>
-          <a:fillRef idx="0">
-            <a:schemeClr val="accent1"/>
-          </a:fillRef>
-          <a:effectRef idx="1">
-            <a:schemeClr val="accent1"/>
-          </a:effectRef>
-          <a:fontRef idx="minor">
-            <a:schemeClr val="tx1"/>
-          </a:fontRef>
-        </p:style>
-      </p:cxnSp>
-      <p:sp>
-        <p:nvSpPr>
-          <p:cNvPr id="440" name="row:DQL / BQL:start"/>
+          <p:cNvPr id="479" name="row:DQL / BQL:start"/>
           <p:cNvSpPr/>
           <p:nvPr/>
         </p:nvSpPr>
@@ -7315,7 +6965,7 @@
       </p:sp>
       <p:sp>
         <p:nvSpPr>
-          <p:cNvPr id="441" name="row:DQL / BQL:release:3.3"/>
+          <p:cNvPr id="480" name="row:DQL / BQL:release:3.3"/>
           <p:cNvSpPr/>
           <p:nvPr/>
         </p:nvSpPr>
@@ -7361,7 +7011,7 @@
       </p:sp>
       <p:sp>
         <p:nvSpPr>
-          <p:cNvPr id="442" name="row:DQL / BQL:label"/>
+          <p:cNvPr id="481" name="row:DQL / BQL:label"/>
           <p:cNvSpPr txBox="1"/>
           <p:nvPr/>
         </p:nvSpPr>
@@ -7395,7 +7045,7 @@
       </p:sp>
       <p:sp>
         <p:nvSpPr>
-          <p:cNvPr id="444" name="row:CoDel / fq_codel:name"/>
+          <p:cNvPr id="482" name="row:CoDel / fq_codel:name"/>
           <p:cNvSpPr txBox="1"/>
           <p:nvPr/>
         </p:nvSpPr>
@@ -7429,7 +7079,7 @@
       </p:sp>
       <p:cxnSp>
         <p:nvCxnSpPr>
-          <p:cNvPr id="445" name="row:CoDel / fq_codel:development"/>
+          <p:cNvPr id="484" name="row:CoDel / fq_codel:development"/>
           <p:cNvCxnSpPr/>
           <p:nvPr/>
         </p:nvCxnSpPr>
@@ -7465,7 +7115,7 @@
       </p:cxnSp>
       <p:sp>
         <p:nvSpPr>
-          <p:cNvPr id="446" name="row:CoDel / fq_codel:start"/>
+          <p:cNvPr id="485" name="row:CoDel / fq_codel:start"/>
           <p:cNvSpPr/>
           <p:nvPr/>
         </p:nvSpPr>
@@ -7511,7 +7161,7 @@
       </p:sp>
       <p:sp>
         <p:nvSpPr>
-          <p:cNvPr id="447" name="row:CoDel / fq_codel:release:3.5"/>
+          <p:cNvPr id="486" name="row:CoDel / fq_codel:release:3.5"/>
           <p:cNvSpPr/>
           <p:nvPr/>
         </p:nvSpPr>
@@ -7557,7 +7207,7 @@
       </p:sp>
       <p:sp>
         <p:nvSpPr>
-          <p:cNvPr id="448" name="row:CoDel / fq_codel:label"/>
+          <p:cNvPr id="487" name="row:CoDel / fq_codel:label"/>
           <p:cNvSpPr txBox="1"/>
           <p:nvPr/>
         </p:nvSpPr>
@@ -7591,7 +7241,7 @@
       </p:sp>
       <p:sp>
         <p:nvSpPr>
-          <p:cNvPr id="450" name="row:TSQ:name"/>
+          <p:cNvPr id="488" name="row:TSQ:name"/>
           <p:cNvSpPr txBox="1"/>
           <p:nvPr/>
         </p:nvSpPr>
@@ -7625,7 +7275,7 @@
       </p:sp>
       <p:cxnSp>
         <p:nvCxnSpPr>
-          <p:cNvPr id="451" name="row:TSQ:development"/>
+          <p:cNvPr id="490" name="row:TSQ:development"/>
           <p:cNvCxnSpPr/>
           <p:nvPr/>
         </p:nvCxnSpPr>
@@ -7661,7 +7311,7 @@
       </p:cxnSp>
       <p:sp>
         <p:nvSpPr>
-          <p:cNvPr id="452" name="row:TSQ:start"/>
+          <p:cNvPr id="491" name="row:TSQ:start"/>
           <p:cNvSpPr/>
           <p:nvPr/>
         </p:nvSpPr>
@@ -7707,7 +7357,7 @@
       </p:sp>
       <p:sp>
         <p:nvSpPr>
-          <p:cNvPr id="453" name="row:TSQ:release:3.6"/>
+          <p:cNvPr id="492" name="row:TSQ:release:3.6"/>
           <p:cNvSpPr/>
           <p:nvPr/>
         </p:nvSpPr>
@@ -7753,7 +7403,7 @@
       </p:sp>
       <p:sp>
         <p:nvSpPr>
-          <p:cNvPr id="454" name="row:TSQ:label"/>
+          <p:cNvPr id="493" name="row:TSQ:label"/>
           <p:cNvSpPr txBox="1"/>
           <p:nvPr/>
         </p:nvSpPr>
@@ -7787,7 +7437,7 @@
       </p:sp>
       <p:sp>
         <p:nvSpPr>
-          <p:cNvPr id="456" name="row:SO_BUSY_POLL:name"/>
+          <p:cNvPr id="494" name="row:SO_BUSY_POLL:name"/>
           <p:cNvSpPr txBox="1"/>
           <p:nvPr/>
         </p:nvSpPr>
@@ -7821,7 +7471,7 @@
       </p:sp>
       <p:cxnSp>
         <p:nvCxnSpPr>
-          <p:cNvPr id="457" name="row:SO_BUSY_POLL:development"/>
+          <p:cNvPr id="496" name="row:SO_BUSY_POLL:development"/>
           <p:cNvCxnSpPr/>
           <p:nvPr/>
         </p:nvCxnSpPr>
@@ -7857,7 +7507,7 @@
       </p:cxnSp>
       <p:sp>
         <p:nvSpPr>
-          <p:cNvPr id="458" name="row:SO_BUSY_POLL:start"/>
+          <p:cNvPr id="497" name="row:SO_BUSY_POLL:start"/>
           <p:cNvSpPr/>
           <p:nvPr/>
         </p:nvSpPr>
@@ -7903,7 +7553,7 @@
       </p:sp>
       <p:sp>
         <p:nvSpPr>
-          <p:cNvPr id="459" name="row:SO_BUSY_POLL:release:3.11"/>
+          <p:cNvPr id="498" name="row:SO_BUSY_POLL:release:3.11"/>
           <p:cNvSpPr/>
           <p:nvPr/>
         </p:nvSpPr>
@@ -7949,7 +7599,7 @@
       </p:sp>
       <p:sp>
         <p:nvSpPr>
-          <p:cNvPr id="460" name="row:SO_BUSY_POLL:label"/>
+          <p:cNvPr id="499" name="row:SO_BUSY_POLL:label"/>
           <p:cNvSpPr txBox="1"/>
           <p:nvPr/>
         </p:nvSpPr>
@@ -7983,7 +7633,7 @@
       </p:sp>
       <p:sp>
         <p:nvSpPr>
-          <p:cNvPr id="462" name="row:sch_fq / TCP pacing:name"/>
+          <p:cNvPr id="500" name="row:sch_fq / TCP pacing:name"/>
           <p:cNvSpPr txBox="1"/>
           <p:nvPr/>
         </p:nvSpPr>
@@ -8017,7 +7667,7 @@
       </p:sp>
       <p:cxnSp>
         <p:nvCxnSpPr>
-          <p:cNvPr id="463" name="row:sch_fq / TCP pacing:development"/>
+          <p:cNvPr id="502" name="row:sch_fq / TCP pacing:development"/>
           <p:cNvCxnSpPr/>
           <p:nvPr/>
         </p:nvCxnSpPr>
@@ -8053,7 +7703,7 @@
       </p:cxnSp>
       <p:sp>
         <p:nvSpPr>
-          <p:cNvPr id="464" name="row:sch_fq / TCP pacing:start"/>
+          <p:cNvPr id="503" name="row:sch_fq / TCP pacing:start"/>
           <p:cNvSpPr/>
           <p:nvPr/>
         </p:nvSpPr>
@@ -8099,7 +7749,7 @@
       </p:sp>
       <p:sp>
         <p:nvSpPr>
-          <p:cNvPr id="465" name="row:sch_fq / TCP pacing:release:3.12"/>
+          <p:cNvPr id="504" name="row:sch_fq / TCP pacing:release:3.12"/>
           <p:cNvSpPr/>
           <p:nvPr/>
         </p:nvSpPr>
@@ -8145,7 +7795,7 @@
       </p:sp>
       <p:sp>
         <p:nvSpPr>
-          <p:cNvPr id="466" name="row:sch_fq / TCP pacing:label"/>
+          <p:cNvPr id="505" name="row:sch_fq / TCP pacing:label"/>
           <p:cNvSpPr txBox="1"/>
           <p:nvPr/>
         </p:nvSpPr>
@@ -8179,7 +7829,7 @@
       </p:sp>
       <p:sp>
         <p:nvSpPr>
-          <p:cNvPr id="468" name="row:SO_TXTIME / EDT / taprio:name"/>
+          <p:cNvPr id="506" name="row:SO_TXTIME / EDT / taprio:name"/>
           <p:cNvSpPr txBox="1"/>
           <p:nvPr/>
         </p:nvSpPr>
@@ -8213,14 +7863,14 @@
       </p:sp>
       <p:cxnSp>
         <p:nvCxnSpPr>
-          <p:cNvPr id="469" name="row:SO_TXTIME / EDT / taprio:development"/>
+          <p:cNvPr id="508" name="row:SO_TXTIME / EDT / taprio:development"/>
           <p:cNvCxnSpPr/>
           <p:nvPr/>
         </p:nvCxnSpPr>
         <p:spPr>
           <a:xfrm>
-            <a:off x="7308742" y="2061141"/>
-            <a:ext cx="1128305" cy="0"/>
+            <a:off x="7569373" y="2061141"/>
+            <a:ext cx="867674" cy="0"/>
           </a:xfrm>
           <a:prstGeom prst="line">
             <a:avLst/>
@@ -8249,7 +7899,7 @@
       </p:cxnSp>
       <p:sp>
         <p:nvSpPr>
-          <p:cNvPr id="470" name="row:SO_TXTIME / EDT / taprio:start"/>
+          <p:cNvPr id="509" name="row:SO_TXTIME / EDT / taprio:start"/>
           <p:cNvSpPr/>
           <p:nvPr/>
         </p:nvSpPr>
@@ -8295,7 +7945,7 @@
       </p:sp>
       <p:cxnSp>
         <p:nvCxnSpPr>
-          <p:cNvPr id="471" name="row:SO_TXTIME / EDT / taprio:milestones"/>
+          <p:cNvPr id="510" name="row:SO_TXTIME / EDT / taprio:milestones"/>
           <p:cNvCxnSpPr/>
           <p:nvPr/>
         </p:nvCxnSpPr>
@@ -8330,7 +7980,7 @@
       </p:cxnSp>
       <p:sp>
         <p:nvSpPr>
-          <p:cNvPr id="472" name="row:SO_TXTIME / EDT / taprio:release:4.19"/>
+          <p:cNvPr id="511" name="row:SO_TXTIME / EDT / taprio:release:4.19"/>
           <p:cNvSpPr/>
           <p:nvPr/>
         </p:nvSpPr>
@@ -8376,7 +8026,7 @@
       </p:sp>
       <p:sp>
         <p:nvSpPr>
-          <p:cNvPr id="473" name="row:SO_TXTIME / EDT / taprio:release:4.20"/>
+          <p:cNvPr id="512" name="row:SO_TXTIME / EDT / taprio:release:4.20"/>
           <p:cNvSpPr/>
           <p:nvPr/>
         </p:nvSpPr>
@@ -8422,7 +8072,7 @@
       </p:sp>
       <p:sp>
         <p:nvSpPr>
-          <p:cNvPr id="474" name="row:SO_TXTIME / EDT / taprio:label"/>
+          <p:cNvPr id="513" name="row:SO_TXTIME / EDT / taprio:label"/>
           <p:cNvSpPr txBox="1"/>
           <p:nvPr/>
         </p:nvSpPr>
@@ -8456,7 +8106,7 @@
       </p:sp>
       <p:sp>
         <p:nvSpPr>
-          <p:cNvPr id="476" name="row:BIG TCP:name"/>
+          <p:cNvPr id="514" name="row:BIG TCP:name"/>
           <p:cNvSpPr txBox="1"/>
           <p:nvPr/>
         </p:nvSpPr>
@@ -8490,7 +8140,7 @@
       </p:sp>
       <p:cxnSp>
         <p:nvCxnSpPr>
-          <p:cNvPr id="477" name="row:BIG TCP:development"/>
+          <p:cNvPr id="516" name="row:BIG TCP:development"/>
           <p:cNvCxnSpPr/>
           <p:nvPr/>
         </p:nvCxnSpPr>
@@ -8526,7 +8176,7 @@
       </p:cxnSp>
       <p:sp>
         <p:nvSpPr>
-          <p:cNvPr id="478" name="row:BIG TCP:start"/>
+          <p:cNvPr id="517" name="row:BIG TCP:start"/>
           <p:cNvSpPr/>
           <p:nvPr/>
         </p:nvSpPr>
@@ -8572,7 +8222,7 @@
       </p:sp>
       <p:sp>
         <p:nvSpPr>
-          <p:cNvPr id="479" name="row:BIG TCP:release:5.19"/>
+          <p:cNvPr id="518" name="row:BIG TCP:release:5.19"/>
           <p:cNvSpPr/>
           <p:nvPr/>
         </p:nvSpPr>
@@ -8618,7 +8268,7 @@
       </p:sp>
       <p:sp>
         <p:nvSpPr>
-          <p:cNvPr id="480" name="row:BIG TCP:label"/>
+          <p:cNvPr id="519" name="row:BIG TCP:label"/>
           <p:cNvSpPr txBox="1"/>
           <p:nvPr/>
         </p:nvSpPr>
@@ -8652,7 +8302,7 @@
       </p:sp>
       <p:sp>
         <p:nvSpPr>
-          <p:cNvPr id="482" name="row:BIG TCP extensions:name"/>
+          <p:cNvPr id="520" name="row:BIG TCP extensions:name"/>
           <p:cNvSpPr txBox="1"/>
           <p:nvPr/>
         </p:nvSpPr>
@@ -8686,7 +8336,7 @@
       </p:sp>
       <p:cxnSp>
         <p:nvCxnSpPr>
-          <p:cNvPr id="483" name="row:BIG TCP extensions:milestones"/>
+          <p:cNvPr id="521" name="row:BIG TCP extensions:milestones"/>
           <p:cNvCxnSpPr/>
           <p:nvPr/>
         </p:nvCxnSpPr>
@@ -8721,7 +8371,7 @@
       </p:cxnSp>
       <p:sp>
         <p:nvSpPr>
-          <p:cNvPr id="484" name="row:BIG TCP extensions:release:6.3"/>
+          <p:cNvPr id="522" name="row:BIG TCP extensions:release:6.3"/>
           <p:cNvSpPr/>
           <p:nvPr/>
         </p:nvSpPr>
@@ -8767,7 +8417,7 @@
       </p:sp>
       <p:sp>
         <p:nvSpPr>
-          <p:cNvPr id="485" name="row:BIG TCP extensions:release:7.0"/>
+          <p:cNvPr id="523" name="row:BIG TCP extensions:release:7.0"/>
           <p:cNvSpPr/>
           <p:nvPr/>
         </p:nvSpPr>
@@ -8813,7 +8463,7 @@
       </p:sp>
       <p:sp>
         <p:nvSpPr>
-          <p:cNvPr id="486" name="row:BIG TCP extensions:release:7.3-rc"/>
+          <p:cNvPr id="524" name="row:BIG TCP extensions:release:7.3-rc"/>
           <p:cNvSpPr/>
           <p:nvPr/>
         </p:nvSpPr>
@@ -8859,7 +8509,7 @@
       </p:sp>
       <p:sp>
         <p:nvSpPr>
-          <p:cNvPr id="487" name="row:BIG TCP extensions:label"/>
+          <p:cNvPr id="525" name="row:BIG TCP extensions:label"/>
           <p:cNvSpPr txBox="1"/>
           <p:nvPr/>
         </p:nvSpPr>
@@ -8893,7 +8543,7 @@
       </p:sp>
       <p:sp>
         <p:nvSpPr>
-          <p:cNvPr id="488" name="row:io_uring SEND_ZC / multishot recv:name"/>
+          <p:cNvPr id="526" name="row:io_uring SEND_ZC / multishot recv:name"/>
           <p:cNvSpPr txBox="1"/>
           <p:nvPr/>
         </p:nvSpPr>
@@ -8927,7 +8577,7 @@
       </p:sp>
       <p:cxnSp>
         <p:nvCxnSpPr>
-          <p:cNvPr id="489" name="row:io_uring SEND_ZC / multishot recv:development"/>
+          <p:cNvPr id="528" name="row:io_uring SEND_ZC / multishot recv:development"/>
           <p:cNvCxnSpPr/>
           <p:nvPr/>
         </p:nvCxnSpPr>
@@ -8963,7 +8613,7 @@
       </p:cxnSp>
       <p:sp>
         <p:nvSpPr>
-          <p:cNvPr id="490" name="row:io_uring SEND_ZC / multishot recv:start"/>
+          <p:cNvPr id="529" name="row:io_uring SEND_ZC / multishot recv:start"/>
           <p:cNvSpPr/>
           <p:nvPr/>
         </p:nvSpPr>
@@ -9009,7 +8659,7 @@
       </p:sp>
       <p:sp>
         <p:nvSpPr>
-          <p:cNvPr id="491" name="row:io_uring SEND_ZC / multishot recv:release:6.0"/>
+          <p:cNvPr id="530" name="row:io_uring SEND_ZC / multishot recv:release:6.0"/>
           <p:cNvSpPr/>
           <p:nvPr/>
         </p:nvSpPr>
@@ -9055,7 +8705,7 @@
       </p:sp>
       <p:sp>
         <p:nvSpPr>
-          <p:cNvPr id="492" name="row:io_uring SEND_ZC / multishot recv:label"/>
+          <p:cNvPr id="531" name="row:io_uring SEND_ZC / multishot recv:label"/>
           <p:cNvSpPr txBox="1"/>
           <p:nvPr/>
         </p:nvSpPr>
@@ -9089,7 +8739,7 @@
       </p:sp>
       <p:sp>
         <p:nvSpPr>
-          <p:cNvPr id="494" name="row:dev_queue_xmit() llist:name"/>
+          <p:cNvPr id="532" name="row:dev_queue_xmit() llist:name"/>
           <p:cNvSpPr txBox="1"/>
           <p:nvPr/>
         </p:nvSpPr>
@@ -9123,7 +8773,7 @@
       </p:sp>
       <p:cxnSp>
         <p:nvCxnSpPr>
-          <p:cNvPr id="495" name="row:dev_queue_xmit() llist:development"/>
+          <p:cNvPr id="534" name="row:dev_queue_xmit() llist:development"/>
           <p:cNvCxnSpPr/>
           <p:nvPr/>
         </p:nvCxnSpPr>
@@ -9159,7 +8809,7 @@
       </p:cxnSp>
       <p:sp>
         <p:nvSpPr>
-          <p:cNvPr id="496" name="row:dev_queue_xmit() llist:start"/>
+          <p:cNvPr id="535" name="row:dev_queue_xmit() llist:start"/>
           <p:cNvSpPr/>
           <p:nvPr/>
         </p:nvSpPr>
@@ -9205,7 +8855,7 @@
       </p:sp>
       <p:sp>
         <p:nvSpPr>
-          <p:cNvPr id="497" name="row:dev_queue_xmit() llist:release:6.19"/>
+          <p:cNvPr id="536" name="row:dev_queue_xmit() llist:release:6.19"/>
           <p:cNvSpPr/>
           <p:nvPr/>
         </p:nvSpPr>
@@ -9251,7 +8901,7 @@
       </p:sp>
       <p:sp>
         <p:nvSpPr>
-          <p:cNvPr id="498" name="row:dev_queue_xmit() llist:label"/>
+          <p:cNvPr id="537" name="row:dev_queue_xmit() llist:label"/>
           <p:cNvSpPr txBox="1"/>
           <p:nvPr/>
         </p:nvSpPr>
@@ -9285,7 +8935,7 @@
       </p:sp>
       <p:sp>
         <p:nvSpPr>
-          <p:cNvPr id="500" name="row:cake_mq:name"/>
+          <p:cNvPr id="538" name="row:cake_mq:name"/>
           <p:cNvSpPr txBox="1"/>
           <p:nvPr/>
         </p:nvSpPr>
@@ -9319,7 +8969,7 @@
       </p:sp>
       <p:cxnSp>
         <p:nvCxnSpPr>
-          <p:cNvPr id="501" name="row:cake_mq:development"/>
+          <p:cNvPr id="540" name="row:cake_mq:development"/>
           <p:cNvCxnSpPr/>
           <p:nvPr/>
         </p:nvCxnSpPr>
@@ -9355,7 +9005,7 @@
       </p:cxnSp>
       <p:sp>
         <p:nvSpPr>
-          <p:cNvPr id="502" name="row:cake_mq:start"/>
+          <p:cNvPr id="541" name="row:cake_mq:start"/>
           <p:cNvSpPr/>
           <p:nvPr/>
         </p:nvSpPr>
@@ -9401,7 +9051,7 @@
       </p:sp>
       <p:sp>
         <p:nvSpPr>
-          <p:cNvPr id="503" name="row:cake_mq:release:7.0"/>
+          <p:cNvPr id="542" name="row:cake_mq:release:7.0"/>
           <p:cNvSpPr/>
           <p:nvPr/>
         </p:nvSpPr>
@@ -9447,7 +9097,7 @@
       </p:sp>
       <p:sp>
         <p:nvSpPr>
-          <p:cNvPr id="504" name="row:cake_mq:label"/>
+          <p:cNvPr id="543" name="row:cake_mq:label"/>
           <p:cNvSpPr txBox="1"/>
           <p:nvPr/>
         </p:nvSpPr>
@@ -9516,7 +9166,7 @@
       </p:sp>
       <p:sp>
         <p:nvSpPr>
-          <p:cNvPr id="506" name="row:eBPF foundation:name"/>
+          <p:cNvPr id="544" name="row:eBPF foundation:name"/>
           <p:cNvSpPr txBox="1"/>
           <p:nvPr/>
         </p:nvSpPr>
@@ -9550,7 +9200,7 @@
       </p:sp>
       <p:cxnSp>
         <p:nvCxnSpPr>
-          <p:cNvPr id="507" name="row:eBPF foundation:development"/>
+          <p:cNvPr id="546" name="row:eBPF foundation:development"/>
           <p:cNvCxnSpPr/>
           <p:nvPr/>
         </p:nvCxnSpPr>
@@ -9586,7 +9236,7 @@
       </p:cxnSp>
       <p:sp>
         <p:nvSpPr>
-          <p:cNvPr id="508" name="row:eBPF foundation:start"/>
+          <p:cNvPr id="547" name="row:eBPF foundation:start"/>
           <p:cNvSpPr/>
           <p:nvPr/>
         </p:nvSpPr>
@@ -9632,7 +9282,7 @@
       </p:sp>
       <p:cxnSp>
         <p:nvCxnSpPr>
-          <p:cNvPr id="509" name="row:eBPF foundation:milestones"/>
+          <p:cNvPr id="548" name="row:eBPF foundation:milestones"/>
           <p:cNvCxnSpPr/>
           <p:nvPr/>
         </p:nvCxnSpPr>
@@ -9667,7 +9317,7 @@
       </p:cxnSp>
       <p:sp>
         <p:nvSpPr>
-          <p:cNvPr id="510" name="row:eBPF foundation:release:3.15"/>
+          <p:cNvPr id="549" name="row:eBPF foundation:release:3.15"/>
           <p:cNvSpPr/>
           <p:nvPr/>
         </p:nvSpPr>
@@ -9713,7 +9363,7 @@
       </p:sp>
       <p:sp>
         <p:nvSpPr>
-          <p:cNvPr id="511" name="row:eBPF foundation:release:3.18"/>
+          <p:cNvPr id="550" name="row:eBPF foundation:release:3.18"/>
           <p:cNvSpPr/>
           <p:nvPr/>
         </p:nvSpPr>
@@ -9759,7 +9409,7 @@
       </p:sp>
       <p:sp>
         <p:nvSpPr>
-          <p:cNvPr id="512" name="row:eBPF foundation:label"/>
+          <p:cNvPr id="551" name="row:eBPF foundation:label"/>
           <p:cNvSpPr txBox="1"/>
           <p:nvPr/>
         </p:nvSpPr>
@@ -9793,7 +9443,7 @@
       </p:sp>
       <p:sp>
         <p:nvSpPr>
-          <p:cNvPr id="514" name="row:TC BPF:name"/>
+          <p:cNvPr id="552" name="row:TC BPF:name"/>
           <p:cNvSpPr txBox="1"/>
           <p:nvPr/>
         </p:nvSpPr>
@@ -9827,7 +9477,7 @@
       </p:sp>
       <p:cxnSp>
         <p:nvCxnSpPr>
-          <p:cNvPr id="515" name="row:TC BPF:development"/>
+          <p:cNvPr id="554" name="row:TC BPF:development"/>
           <p:cNvCxnSpPr/>
           <p:nvPr/>
         </p:nvCxnSpPr>
@@ -9863,7 +9513,7 @@
       </p:cxnSp>
       <p:sp>
         <p:nvSpPr>
-          <p:cNvPr id="516" name="row:TC BPF:start"/>
+          <p:cNvPr id="555" name="row:TC BPF:start"/>
           <p:cNvSpPr/>
           <p:nvPr/>
         </p:nvSpPr>
@@ -9909,7 +9559,7 @@
       </p:sp>
       <p:sp>
         <p:nvSpPr>
-          <p:cNvPr id="517" name="row:TC BPF:release:4.1"/>
+          <p:cNvPr id="556" name="row:TC BPF:release:4.1"/>
           <p:cNvSpPr/>
           <p:nvPr/>
         </p:nvSpPr>
@@ -9955,7 +9605,7 @@
       </p:sp>
       <p:sp>
         <p:nvSpPr>
-          <p:cNvPr id="518" name="row:TC BPF:label"/>
+          <p:cNvPr id="557" name="row:TC BPF:label"/>
           <p:cNvSpPr txBox="1"/>
           <p:nvPr/>
         </p:nvSpPr>
@@ -9989,7 +9639,7 @@
       </p:sp>
       <p:sp>
         <p:nvSpPr>
-          <p:cNvPr id="520" name="row:TCX:name"/>
+          <p:cNvPr id="558" name="row:TCX:name"/>
           <p:cNvSpPr txBox="1"/>
           <p:nvPr/>
         </p:nvSpPr>
@@ -10023,14 +9673,14 @@
       </p:sp>
       <p:cxnSp>
         <p:nvCxnSpPr>
-          <p:cNvPr id="521" name="row:TCX:development"/>
+          <p:cNvPr id="560" name="row:TCX:development"/>
           <p:cNvCxnSpPr/>
           <p:nvPr/>
         </p:nvCxnSpPr>
         <p:spPr>
           <a:xfrm>
-            <a:off x="11058353" y="2929445"/>
-            <a:ext cx="865765" cy="0"/>
+            <a:off x="11277141" y="2929445"/>
+            <a:ext cx="646977" cy="0"/>
           </a:xfrm>
           <a:prstGeom prst="line">
             <a:avLst/>
@@ -10059,7 +9709,7 @@
       </p:cxnSp>
       <p:sp>
         <p:nvSpPr>
-          <p:cNvPr id="522" name="row:TCX:start"/>
+          <p:cNvPr id="561" name="row:TCX:start"/>
           <p:cNvSpPr/>
           <p:nvPr/>
         </p:nvSpPr>
@@ -10105,7 +9755,7 @@
       </p:sp>
       <p:sp>
         <p:nvSpPr>
-          <p:cNvPr id="523" name="row:TCX:release:6.6"/>
+          <p:cNvPr id="562" name="row:TCX:release:6.6"/>
           <p:cNvSpPr/>
           <p:nvPr/>
         </p:nvSpPr>
@@ -10151,7 +9801,7 @@
       </p:sp>
       <p:sp>
         <p:nvSpPr>
-          <p:cNvPr id="524" name="row:TCX:label"/>
+          <p:cNvPr id="563" name="row:TCX:label"/>
           <p:cNvSpPr txBox="1"/>
           <p:nvPr/>
         </p:nvSpPr>
@@ -10185,7 +9835,7 @@
       </p:sp>
       <p:sp>
         <p:nvSpPr>
-          <p:cNvPr id="526" name="row:netkit:name"/>
+          <p:cNvPr id="564" name="row:netkit:name"/>
           <p:cNvSpPr txBox="1"/>
           <p:nvPr/>
         </p:nvSpPr>
@@ -10219,7 +9869,7 @@
       </p:sp>
       <p:cxnSp>
         <p:nvCxnSpPr>
-          <p:cNvPr id="527" name="row:netkit:development"/>
+          <p:cNvPr id="566" name="row:netkit:development"/>
           <p:cNvCxnSpPr/>
           <p:nvPr/>
         </p:nvCxnSpPr>
@@ -10255,7 +9905,7 @@
       </p:cxnSp>
       <p:sp>
         <p:nvSpPr>
-          <p:cNvPr id="528" name="row:netkit:start"/>
+          <p:cNvPr id="567" name="row:netkit:start"/>
           <p:cNvSpPr/>
           <p:nvPr/>
         </p:nvSpPr>
@@ -10301,7 +9951,7 @@
       </p:sp>
       <p:sp>
         <p:nvSpPr>
-          <p:cNvPr id="529" name="row:netkit:release:6.7"/>
+          <p:cNvPr id="568" name="row:netkit:release:6.7"/>
           <p:cNvSpPr/>
           <p:nvPr/>
         </p:nvSpPr>
@@ -10347,7 +9997,7 @@
       </p:sp>
       <p:sp>
         <p:nvSpPr>
-          <p:cNvPr id="530" name="row:netkit:label"/>
+          <p:cNvPr id="569" name="row:netkit:label"/>
           <p:cNvSpPr txBox="1"/>
           <p:nvPr/>
         </p:nvSpPr>
@@ -10381,7 +10031,7 @@
       </p:sp>
       <p:sp>
         <p:nvSpPr>
-          <p:cNvPr id="532" name="row:cgroup / LWT BPF:name"/>
+          <p:cNvPr id="570" name="row:cgroup / LWT BPF:name"/>
           <p:cNvSpPr txBox="1"/>
           <p:nvPr/>
         </p:nvSpPr>
@@ -10415,14 +10065,14 @@
       </p:sp>
       <p:cxnSp>
         <p:nvCxnSpPr>
-          <p:cNvPr id="533" name="row:cgroup / LWT BPF:development"/>
+          <p:cNvPr id="572" name="row:cgroup / LWT BPF:development"/>
           <p:cNvCxnSpPr/>
           <p:nvPr/>
         </p:nvCxnSpPr>
         <p:spPr>
           <a:xfrm>
-            <a:off x="6475495" y="3123661"/>
-            <a:ext cx="801413" cy="0"/>
+            <a:off x="6694283" y="3123661"/>
+            <a:ext cx="582625" cy="0"/>
           </a:xfrm>
           <a:prstGeom prst="line">
             <a:avLst/>
@@ -10451,7 +10101,7 @@
       </p:cxnSp>
       <p:sp>
         <p:nvSpPr>
-          <p:cNvPr id="534" name="row:cgroup / LWT BPF:start"/>
+          <p:cNvPr id="573" name="row:cgroup / LWT BPF:start"/>
           <p:cNvSpPr/>
           <p:nvPr/>
         </p:nvSpPr>
@@ -10497,7 +10147,7 @@
       </p:sp>
       <p:sp>
         <p:nvSpPr>
-          <p:cNvPr id="535" name="row:cgroup / LWT BPF:release:4.10"/>
+          <p:cNvPr id="574" name="row:cgroup / LWT BPF:release:4.10"/>
           <p:cNvSpPr/>
           <p:nvPr/>
         </p:nvSpPr>
@@ -10543,7 +10193,7 @@
       </p:sp>
       <p:sp>
         <p:nvSpPr>
-          <p:cNvPr id="536" name="row:cgroup / LWT BPF:label"/>
+          <p:cNvPr id="575" name="row:cgroup / LWT BPF:label"/>
           <p:cNvSpPr txBox="1"/>
           <p:nvPr/>
         </p:nvSpPr>
@@ -10577,7 +10227,7 @@
       </p:sp>
       <p:sp>
         <p:nvSpPr>
-          <p:cNvPr id="538" name="row:SOCK_OPS / SOCKMAP:name"/>
+          <p:cNvPr id="576" name="row:SOCK_OPS / SOCKMAP:name"/>
           <p:cNvSpPr txBox="1"/>
           <p:nvPr/>
         </p:nvSpPr>
@@ -10611,14 +10261,14 @@
       </p:sp>
       <p:cxnSp>
         <p:nvCxnSpPr>
-          <p:cNvPr id="539" name="row:SOCK_OPS / SOCKMAP:development"/>
+          <p:cNvPr id="578" name="row:SOCK_OPS / SOCKMAP:development"/>
           <p:cNvCxnSpPr/>
           <p:nvPr/>
         </p:nvCxnSpPr>
         <p:spPr>
           <a:xfrm>
-            <a:off x="6822681" y="3220769"/>
-            <a:ext cx="826840" cy="0"/>
+            <a:off x="7041469" y="3220769"/>
+            <a:ext cx="608052" cy="0"/>
           </a:xfrm>
           <a:prstGeom prst="line">
             <a:avLst/>
@@ -10647,7 +10297,7 @@
       </p:cxnSp>
       <p:sp>
         <p:nvSpPr>
-          <p:cNvPr id="540" name="row:SOCK_OPS / SOCKMAP:start"/>
+          <p:cNvPr id="579" name="row:SOCK_OPS / SOCKMAP:start"/>
           <p:cNvSpPr/>
           <p:nvPr/>
         </p:nvSpPr>
@@ -10693,7 +10343,7 @@
       </p:sp>
       <p:cxnSp>
         <p:nvCxnSpPr>
-          <p:cNvPr id="541" name="row:SOCK_OPS / SOCKMAP:milestones"/>
+          <p:cNvPr id="580" name="row:SOCK_OPS / SOCKMAP:milestones"/>
           <p:cNvCxnSpPr/>
           <p:nvPr/>
         </p:nvCxnSpPr>
@@ -10728,7 +10378,7 @@
       </p:cxnSp>
       <p:sp>
         <p:nvSpPr>
-          <p:cNvPr id="542" name="row:SOCK_OPS / SOCKMAP:release:4.13"/>
+          <p:cNvPr id="581" name="row:SOCK_OPS / SOCKMAP:release:4.13"/>
           <p:cNvSpPr/>
           <p:nvPr/>
         </p:nvSpPr>
@@ -10774,7 +10424,7 @@
       </p:sp>
       <p:sp>
         <p:nvSpPr>
-          <p:cNvPr id="543" name="row:SOCK_OPS / SOCKMAP:release:4.14"/>
+          <p:cNvPr id="582" name="row:SOCK_OPS / SOCKMAP:release:4.14"/>
           <p:cNvSpPr/>
           <p:nvPr/>
         </p:nvSpPr>
@@ -10820,7 +10470,7 @@
       </p:sp>
       <p:sp>
         <p:nvSpPr>
-          <p:cNvPr id="544" name="row:SOCK_OPS / SOCKMAP:label"/>
+          <p:cNvPr id="583" name="row:SOCK_OPS / SOCKMAP:label"/>
           <p:cNvSpPr txBox="1"/>
           <p:nvPr/>
         </p:nvSpPr>
@@ -10854,7 +10504,7 @@
       </p:sp>
       <p:sp>
         <p:nvSpPr>
-          <p:cNvPr id="546" name="row:BPF struct_ops:name"/>
+          <p:cNvPr id="584" name="row:BPF struct_ops:name"/>
           <p:cNvSpPr txBox="1"/>
           <p:nvPr/>
         </p:nvSpPr>
@@ -10888,7 +10538,7 @@
       </p:sp>
       <p:cxnSp>
         <p:nvCxnSpPr>
-          <p:cNvPr id="547" name="row:BPF struct_ops:development"/>
+          <p:cNvPr id="586" name="row:BPF struct_ops:development"/>
           <p:cNvCxnSpPr/>
           <p:nvPr/>
         </p:nvCxnSpPr>
@@ -10924,7 +10574,7 @@
       </p:cxnSp>
       <p:sp>
         <p:nvSpPr>
-          <p:cNvPr id="548" name="row:BPF struct_ops:start"/>
+          <p:cNvPr id="587" name="row:BPF struct_ops:start"/>
           <p:cNvSpPr/>
           <p:nvPr/>
         </p:nvSpPr>
@@ -10970,7 +10620,7 @@
       </p:sp>
       <p:sp>
         <p:nvSpPr>
-          <p:cNvPr id="549" name="row:BPF struct_ops:release:5.6"/>
+          <p:cNvPr id="588" name="row:BPF struct_ops:release:5.6"/>
           <p:cNvSpPr/>
           <p:nvPr/>
         </p:nvSpPr>
@@ -11016,7 +10666,7 @@
       </p:sp>
       <p:sp>
         <p:nvSpPr>
-          <p:cNvPr id="550" name="row:BPF struct_ops:label"/>
+          <p:cNvPr id="589" name="row:BPF struct_ops:label"/>
           <p:cNvSpPr txBox="1"/>
           <p:nvPr/>
         </p:nvSpPr>
@@ -11050,7 +10700,7 @@
       </p:sp>
       <p:sp>
         <p:nvSpPr>
-          <p:cNvPr id="552" name="row:BPF qdisc:name"/>
+          <p:cNvPr id="590" name="row:BPF qdisc:name"/>
           <p:cNvSpPr txBox="1"/>
           <p:nvPr/>
         </p:nvSpPr>
@@ -11084,14 +10734,14 @@
       </p:sp>
       <p:cxnSp>
         <p:nvCxnSpPr>
-          <p:cNvPr id="553" name="row:BPF qdisc:development"/>
+          <p:cNvPr id="592" name="row:BPF qdisc:development"/>
           <p:cNvCxnSpPr/>
           <p:nvPr/>
         </p:nvCxnSpPr>
         <p:spPr>
           <a:xfrm>
-            <a:off x="12308224" y="3414985"/>
-            <a:ext cx="824036" cy="0"/>
+            <a:off x="12568855" y="3414985"/>
+            <a:ext cx="563405" cy="0"/>
           </a:xfrm>
           <a:prstGeom prst="line">
             <a:avLst/>
@@ -11120,7 +10770,7 @@
       </p:cxnSp>
       <p:sp>
         <p:nvSpPr>
-          <p:cNvPr id="554" name="row:BPF qdisc:start"/>
+          <p:cNvPr id="593" name="row:BPF qdisc:start"/>
           <p:cNvSpPr/>
           <p:nvPr/>
         </p:nvSpPr>
@@ -11166,7 +10816,7 @@
       </p:sp>
       <p:sp>
         <p:nvSpPr>
-          <p:cNvPr id="555" name="row:BPF qdisc:release:6.16"/>
+          <p:cNvPr id="594" name="row:BPF qdisc:release:6.16"/>
           <p:cNvSpPr/>
           <p:nvPr/>
         </p:nvSpPr>
@@ -11212,7 +10862,7 @@
       </p:sp>
       <p:sp>
         <p:nvSpPr>
-          <p:cNvPr id="556" name="row:BPF qdisc:label"/>
+          <p:cNvPr id="595" name="row:BPF qdisc:label"/>
           <p:cNvSpPr txBox="1"/>
           <p:nvPr/>
         </p:nvSpPr>
@@ -11246,7 +10896,7 @@
       </p:sp>
       <p:sp>
         <p:nvSpPr>
-          <p:cNvPr id="558" name="row:SK_LOOKUP:name"/>
+          <p:cNvPr id="596" name="row:SK_LOOKUP:name"/>
           <p:cNvSpPr txBox="1"/>
           <p:nvPr/>
         </p:nvSpPr>
@@ -11280,7 +10930,7 @@
       </p:sp>
       <p:cxnSp>
         <p:nvCxnSpPr>
-          <p:cNvPr id="559" name="row:SK_LOOKUP:development"/>
+          <p:cNvPr id="598" name="row:SK_LOOKUP:development"/>
           <p:cNvCxnSpPr/>
           <p:nvPr/>
         </p:nvCxnSpPr>
@@ -11316,7 +10966,7 @@
       </p:cxnSp>
       <p:sp>
         <p:nvSpPr>
-          <p:cNvPr id="560" name="row:SK_LOOKUP:start"/>
+          <p:cNvPr id="599" name="row:SK_LOOKUP:start"/>
           <p:cNvSpPr/>
           <p:nvPr/>
         </p:nvSpPr>
@@ -11362,7 +11012,7 @@
       </p:sp>
       <p:sp>
         <p:nvSpPr>
-          <p:cNvPr id="561" name="row:SK_LOOKUP:release:5.9"/>
+          <p:cNvPr id="600" name="row:SK_LOOKUP:release:5.9"/>
           <p:cNvSpPr/>
           <p:nvPr/>
         </p:nvSpPr>
@@ -11408,7 +11058,7 @@
       </p:sp>
       <p:sp>
         <p:nvSpPr>
-          <p:cNvPr id="562" name="row:SK_LOOKUP:label"/>
+          <p:cNvPr id="601" name="row:SK_LOOKUP:label"/>
           <p:cNvSpPr txBox="1"/>
           <p:nvPr/>
         </p:nvSpPr>
@@ -11442,7 +11092,7 @@
       </p:sp>
       <p:sp>
         <p:nvSpPr>
-          <p:cNvPr id="564" name="row:XDP:name"/>
+          <p:cNvPr id="602" name="row:XDP:name"/>
           <p:cNvSpPr txBox="1"/>
           <p:nvPr/>
         </p:nvSpPr>
@@ -11476,14 +11126,14 @@
       </p:sp>
       <p:cxnSp>
         <p:nvCxnSpPr>
-          <p:cNvPr id="565" name="row:XDP:development"/>
+          <p:cNvPr id="604" name="row:XDP:development"/>
           <p:cNvCxnSpPr/>
           <p:nvPr/>
         </p:nvCxnSpPr>
         <p:spPr>
           <a:xfrm>
-            <a:off x="6558819" y="3609201"/>
-            <a:ext cx="453362" cy="0"/>
+            <a:off x="6777607" y="3609201"/>
+            <a:ext cx="234574" cy="0"/>
           </a:xfrm>
           <a:prstGeom prst="line">
             <a:avLst/>
@@ -11512,7 +11162,7 @@
       </p:cxnSp>
       <p:sp>
         <p:nvSpPr>
-          <p:cNvPr id="566" name="row:XDP:start"/>
+          <p:cNvPr id="605" name="row:XDP:start"/>
           <p:cNvSpPr/>
           <p:nvPr/>
         </p:nvSpPr>
@@ -11558,7 +11208,7 @@
       </p:sp>
       <p:sp>
         <p:nvSpPr>
-          <p:cNvPr id="567" name="row:XDP:release:4.8"/>
+          <p:cNvPr id="606" name="row:XDP:release:4.8"/>
           <p:cNvSpPr/>
           <p:nvPr/>
         </p:nvSpPr>
@@ -11604,7 +11254,7 @@
       </p:sp>
       <p:sp>
         <p:nvSpPr>
-          <p:cNvPr id="568" name="row:XDP:label"/>
+          <p:cNvPr id="607" name="row:XDP:label"/>
           <p:cNvSpPr txBox="1"/>
           <p:nvPr/>
         </p:nvSpPr>
@@ -11638,7 +11288,7 @@
       </p:sp>
       <p:sp>
         <p:nvSpPr>
-          <p:cNvPr id="570" name="row:XDP devmap / cpumap:name"/>
+          <p:cNvPr id="608" name="row:XDP devmap / cpumap:name"/>
           <p:cNvSpPr txBox="1"/>
           <p:nvPr/>
         </p:nvSpPr>
@@ -11672,14 +11322,14 @@
       </p:sp>
       <p:cxnSp>
         <p:nvCxnSpPr>
-          <p:cNvPr id="571" name="row:XDP devmap / cpumap:development"/>
+          <p:cNvPr id="610" name="row:XDP devmap / cpumap:development"/>
           <p:cNvCxnSpPr/>
           <p:nvPr/>
         </p:nvCxnSpPr>
         <p:spPr>
           <a:xfrm>
-            <a:off x="7439451" y="3706309"/>
-            <a:ext cx="343146" cy="0"/>
+            <a:off x="7700082" y="3706309"/>
+            <a:ext cx="82515" cy="0"/>
           </a:xfrm>
           <a:prstGeom prst="line">
             <a:avLst/>
@@ -11708,7 +11358,7 @@
       </p:cxnSp>
       <p:sp>
         <p:nvSpPr>
-          <p:cNvPr id="572" name="row:XDP devmap / cpumap:start"/>
+          <p:cNvPr id="611" name="row:XDP devmap / cpumap:start"/>
           <p:cNvSpPr/>
           <p:nvPr/>
         </p:nvSpPr>
@@ -11754,7 +11404,7 @@
       </p:sp>
       <p:cxnSp>
         <p:nvCxnSpPr>
-          <p:cNvPr id="573" name="row:XDP devmap / cpumap:milestones"/>
+          <p:cNvPr id="612" name="row:XDP devmap / cpumap:milestones"/>
           <p:cNvCxnSpPr/>
           <p:nvPr/>
         </p:nvCxnSpPr>
@@ -11789,7 +11439,7 @@
       </p:cxnSp>
       <p:sp>
         <p:nvSpPr>
-          <p:cNvPr id="574" name="row:XDP devmap / cpumap:release:4.14"/>
+          <p:cNvPr id="613" name="row:XDP devmap / cpumap:release:4.14"/>
           <p:cNvSpPr/>
           <p:nvPr/>
         </p:nvSpPr>
@@ -11835,7 +11485,7 @@
       </p:sp>
       <p:sp>
         <p:nvSpPr>
-          <p:cNvPr id="575" name="row:XDP devmap / cpumap:release:4.15"/>
+          <p:cNvPr id="614" name="row:XDP devmap / cpumap:release:4.15"/>
           <p:cNvSpPr/>
           <p:nvPr/>
         </p:nvSpPr>
@@ -11881,7 +11531,7 @@
       </p:sp>
       <p:sp>
         <p:nvSpPr>
-          <p:cNvPr id="576" name="row:XDP devmap / cpumap:label"/>
+          <p:cNvPr id="615" name="row:XDP devmap / cpumap:label"/>
           <p:cNvSpPr txBox="1"/>
           <p:nvPr/>
         </p:nvSpPr>
@@ -11915,7 +11565,7 @@
       </p:sp>
       <p:sp>
         <p:nvSpPr>
-          <p:cNvPr id="578" name="row:XDP multi-buffer:name"/>
+          <p:cNvPr id="616" name="row:XDP multi-buffer:name"/>
           <p:cNvSpPr txBox="1"/>
           <p:nvPr/>
         </p:nvSpPr>
@@ -11949,14 +11599,14 @@
       </p:sp>
       <p:cxnSp>
         <p:nvCxnSpPr>
-          <p:cNvPr id="579" name="row:XDP multi-buffer:development"/>
+          <p:cNvPr id="618" name="row:XDP multi-buffer:development"/>
           <p:cNvCxnSpPr/>
           <p:nvPr/>
         </p:nvCxnSpPr>
         <p:spPr>
           <a:xfrm>
-            <a:off x="9947357" y="3803417"/>
-            <a:ext cx="976313" cy="0"/>
+            <a:off x="10207988" y="3803417"/>
+            <a:ext cx="715682" cy="0"/>
           </a:xfrm>
           <a:prstGeom prst="line">
             <a:avLst/>
@@ -11985,7 +11635,7 @@
       </p:cxnSp>
       <p:sp>
         <p:nvSpPr>
-          <p:cNvPr id="580" name="row:XDP multi-buffer:start"/>
+          <p:cNvPr id="619" name="row:XDP multi-buffer:start"/>
           <p:cNvSpPr/>
           <p:nvPr/>
         </p:nvSpPr>
@@ -12031,7 +11681,7 @@
       </p:sp>
       <p:sp>
         <p:nvSpPr>
-          <p:cNvPr id="581" name="row:XDP multi-buffer:release:5.18"/>
+          <p:cNvPr id="620" name="row:XDP multi-buffer:release:5.18"/>
           <p:cNvSpPr/>
           <p:nvPr/>
         </p:nvSpPr>
@@ -12077,7 +11727,7 @@
       </p:sp>
       <p:sp>
         <p:nvSpPr>
-          <p:cNvPr id="582" name="row:XDP multi-buffer:label"/>
+          <p:cNvPr id="621" name="row:XDP multi-buffer:label"/>
           <p:cNvSpPr txBox="1"/>
           <p:nvPr/>
         </p:nvSpPr>
@@ -12145,7 +11795,7 @@
       </p:sp>
       <p:sp>
         <p:nvSpPr>
-          <p:cNvPr id="584" name="row:AF_XDP:name"/>
+          <p:cNvPr id="622" name="row:AF_XDP:name"/>
           <p:cNvSpPr txBox="1"/>
           <p:nvPr/>
         </p:nvSpPr>
@@ -12179,14 +11829,14 @@
       </p:sp>
       <p:cxnSp>
         <p:nvCxnSpPr>
-          <p:cNvPr id="585" name="row:AF_XDP:development"/>
+          <p:cNvPr id="624" name="row:AF_XDP:development"/>
           <p:cNvCxnSpPr/>
           <p:nvPr/>
         </p:nvCxnSpPr>
         <p:spPr>
           <a:xfrm>
-            <a:off x="7169867" y="3991965"/>
-            <a:ext cx="1132203" cy="0"/>
+            <a:off x="7430498" y="3991965"/>
+            <a:ext cx="871572" cy="0"/>
           </a:xfrm>
           <a:prstGeom prst="line">
             <a:avLst/>
@@ -12215,7 +11865,7 @@
       </p:cxnSp>
       <p:sp>
         <p:nvSpPr>
-          <p:cNvPr id="586" name="row:AF_XDP:start"/>
+          <p:cNvPr id="625" name="row:AF_XDP:start"/>
           <p:cNvSpPr/>
           <p:nvPr/>
         </p:nvSpPr>
@@ -12261,7 +11911,7 @@
       </p:sp>
       <p:sp>
         <p:nvSpPr>
-          <p:cNvPr id="587" name="row:AF_XDP:release:4.18"/>
+          <p:cNvPr id="626" name="row:AF_XDP:release:4.18"/>
           <p:cNvSpPr/>
           <p:nvPr/>
         </p:nvSpPr>
@@ -12307,7 +11957,7 @@
       </p:sp>
       <p:sp>
         <p:nvSpPr>
-          <p:cNvPr id="588" name="row:AF_XDP:label"/>
+          <p:cNvPr id="627" name="row:AF_XDP:label"/>
           <p:cNvSpPr txBox="1"/>
           <p:nvPr/>
         </p:nvSpPr>
@@ -12341,7 +11991,7 @@
       </p:sp>
       <p:sp>
         <p:nvSpPr>
-          <p:cNvPr id="590" name="row:AF_XDP multi-buffer:name"/>
+          <p:cNvPr id="628" name="row:AF_XDP multi-buffer:name"/>
           <p:cNvSpPr txBox="1"/>
           <p:nvPr/>
         </p:nvSpPr>
@@ -12375,14 +12025,14 @@
       </p:sp>
       <p:cxnSp>
         <p:nvCxnSpPr>
-          <p:cNvPr id="591" name="row:AF_XDP multi-buffer:development"/>
+          <p:cNvPr id="630" name="row:AF_XDP multi-buffer:development"/>
           <p:cNvCxnSpPr/>
           <p:nvPr/>
         </p:nvCxnSpPr>
         <p:spPr>
           <a:xfrm>
-            <a:off x="10641730" y="4089073"/>
-            <a:ext cx="1282388" cy="0"/>
+            <a:off x="10902361" y="4089073"/>
+            <a:ext cx="1021757" cy="0"/>
           </a:xfrm>
           <a:prstGeom prst="line">
             <a:avLst/>
@@ -12411,7 +12061,7 @@
       </p:cxnSp>
       <p:sp>
         <p:nvSpPr>
-          <p:cNvPr id="592" name="row:AF_XDP multi-buffer:start"/>
+          <p:cNvPr id="631" name="row:AF_XDP multi-buffer:start"/>
           <p:cNvSpPr/>
           <p:nvPr/>
         </p:nvSpPr>
@@ -12457,7 +12107,7 @@
       </p:sp>
       <p:sp>
         <p:nvSpPr>
-          <p:cNvPr id="593" name="row:AF_XDP multi-buffer:release:6.6"/>
+          <p:cNvPr id="632" name="row:AF_XDP multi-buffer:release:6.6"/>
           <p:cNvSpPr/>
           <p:nvPr/>
         </p:nvSpPr>
@@ -12503,7 +12153,7 @@
       </p:sp>
       <p:sp>
         <p:nvSpPr>
-          <p:cNvPr id="594" name="row:AF_XDP multi-buffer:label"/>
+          <p:cNvPr id="633" name="row:AF_XDP multi-buffer:label"/>
           <p:cNvSpPr txBox="1"/>
           <p:nvPr/>
         </p:nvSpPr>
@@ -12537,7 +12187,7 @@
       </p:sp>
       <p:sp>
         <p:nvSpPr>
-          <p:cNvPr id="596" name="row:page_pool:name"/>
+          <p:cNvPr id="634" name="row:page_pool:name"/>
           <p:cNvSpPr txBox="1"/>
           <p:nvPr/>
         </p:nvSpPr>
@@ -12571,7 +12221,7 @@
       </p:sp>
       <p:cxnSp>
         <p:nvCxnSpPr>
-          <p:cNvPr id="597" name="row:page_pool:development"/>
+          <p:cNvPr id="636" name="row:page_pool:development"/>
           <p:cNvCxnSpPr/>
           <p:nvPr/>
         </p:nvCxnSpPr>
@@ -12607,7 +12257,7 @@
       </p:cxnSp>
       <p:sp>
         <p:nvSpPr>
-          <p:cNvPr id="598" name="row:page_pool:start"/>
+          <p:cNvPr id="637" name="row:page_pool:start"/>
           <p:cNvSpPr/>
           <p:nvPr/>
         </p:nvSpPr>
@@ -12653,7 +12303,7 @@
       </p:sp>
       <p:sp>
         <p:nvSpPr>
-          <p:cNvPr id="599" name="row:page_pool:release:4.18"/>
+          <p:cNvPr id="638" name="row:page_pool:release:4.18"/>
           <p:cNvSpPr/>
           <p:nvPr/>
         </p:nvSpPr>
@@ -12699,7 +12349,7 @@
       </p:sp>
       <p:sp>
         <p:nvSpPr>
-          <p:cNvPr id="600" name="row:page_pool:label"/>
+          <p:cNvPr id="639" name="row:page_pool:label"/>
           <p:cNvSpPr txBox="1"/>
           <p:nvPr/>
         </p:nvSpPr>
@@ -12733,7 +12383,7 @@
       </p:sp>
       <p:sp>
         <p:nvSpPr>
-          <p:cNvPr id="602" name="row:netmem:name"/>
+          <p:cNvPr id="640" name="row:netmem:name"/>
           <p:cNvSpPr txBox="1"/>
           <p:nvPr/>
         </p:nvSpPr>
@@ -12767,14 +12417,14 @@
       </p:sp>
       <p:cxnSp>
         <p:nvCxnSpPr>
-          <p:cNvPr id="603" name="row:netmem:development"/>
+          <p:cNvPr id="642" name="row:netmem:development"/>
           <p:cNvCxnSpPr/>
           <p:nvPr/>
         </p:nvCxnSpPr>
         <p:spPr>
           <a:xfrm>
-            <a:off x="12002063" y="4283289"/>
-            <a:ext cx="292768" cy="0"/>
+            <a:off x="12220852" y="4283289"/>
+            <a:ext cx="73979" cy="0"/>
           </a:xfrm>
           <a:prstGeom prst="line">
             <a:avLst/>
@@ -12803,7 +12453,7 @@
       </p:cxnSp>
       <p:sp>
         <p:nvSpPr>
-          <p:cNvPr id="604" name="row:netmem:start"/>
+          <p:cNvPr id="643" name="row:netmem:start"/>
           <p:cNvSpPr/>
           <p:nvPr/>
         </p:nvSpPr>
@@ -12849,7 +12499,7 @@
       </p:sp>
       <p:sp>
         <p:nvSpPr>
-          <p:cNvPr id="605" name="row:netmem:release:6.9"/>
+          <p:cNvPr id="644" name="row:netmem:release:6.9"/>
           <p:cNvSpPr/>
           <p:nvPr/>
         </p:nvSpPr>
@@ -12895,7 +12545,7 @@
       </p:sp>
       <p:sp>
         <p:nvSpPr>
-          <p:cNvPr id="606" name="row:netmem:label"/>
+          <p:cNvPr id="645" name="row:netmem:label"/>
           <p:cNvSpPr txBox="1"/>
           <p:nvPr/>
         </p:nvSpPr>
@@ -12929,7 +12579,7 @@
       </p:sp>
       <p:sp>
         <p:nvSpPr>
-          <p:cNvPr id="608" name="row:Device Memory TCP RX · TX:name"/>
+          <p:cNvPr id="646" name="row:Device Memory TCP RX · TX:name"/>
           <p:cNvSpPr txBox="1"/>
           <p:nvPr/>
         </p:nvSpPr>
@@ -12963,7 +12613,7 @@
       </p:sp>
       <p:cxnSp>
         <p:nvCxnSpPr>
-          <p:cNvPr id="609" name="row:Device Memory TCP RX · TX:development"/>
+          <p:cNvPr id="648" name="row:Device Memory TCP RX · TX:development"/>
           <p:cNvCxnSpPr/>
           <p:nvPr/>
         </p:nvCxnSpPr>
@@ -12999,7 +12649,7 @@
       </p:cxnSp>
       <p:sp>
         <p:nvSpPr>
-          <p:cNvPr id="610" name="row:Device Memory TCP RX · TX:start"/>
+          <p:cNvPr id="649" name="row:Device Memory TCP RX · TX:start"/>
           <p:cNvSpPr/>
           <p:nvPr/>
         </p:nvSpPr>
@@ -13045,7 +12695,7 @@
       </p:sp>
       <p:cxnSp>
         <p:nvCxnSpPr>
-          <p:cNvPr id="611" name="row:Device Memory TCP RX · TX:milestones"/>
+          <p:cNvPr id="650" name="row:Device Memory TCP RX · TX:milestones"/>
           <p:cNvCxnSpPr/>
           <p:nvPr/>
         </p:nvCxnSpPr>
@@ -13080,7 +12730,7 @@
       </p:cxnSp>
       <p:sp>
         <p:nvSpPr>
-          <p:cNvPr id="612" name="row:Device Memory TCP RX · TX:release:6.12"/>
+          <p:cNvPr id="651" name="row:Device Memory TCP RX · TX:release:6.12"/>
           <p:cNvSpPr/>
           <p:nvPr/>
         </p:nvSpPr>
@@ -13126,7 +12776,7 @@
       </p:sp>
       <p:sp>
         <p:nvSpPr>
-          <p:cNvPr id="613" name="row:Device Memory TCP RX · TX:release:6.16"/>
+          <p:cNvPr id="652" name="row:Device Memory TCP RX · TX:release:6.16"/>
           <p:cNvSpPr/>
           <p:nvPr/>
         </p:nvSpPr>
@@ -13172,7 +12822,7 @@
       </p:sp>
       <p:sp>
         <p:nvSpPr>
-          <p:cNvPr id="614" name="row:Device Memory TCP RX · TX:label"/>
+          <p:cNvPr id="653" name="row:Device Memory TCP RX · TX:label"/>
           <p:cNvSpPr txBox="1"/>
           <p:nvPr/>
         </p:nvSpPr>
@@ -13206,7 +12856,7 @@
       </p:sp>
       <p:sp>
         <p:nvSpPr>
-          <p:cNvPr id="616" name="row:devmem RX buffers &gt; PAGE_SIZE:name"/>
+          <p:cNvPr id="654" name="row:devmem RX buffers &gt; PAGE_SIZE:name"/>
           <p:cNvSpPr txBox="1"/>
           <p:nvPr/>
         </p:nvSpPr>
@@ -13240,7 +12890,7 @@
       </p:sp>
       <p:sp>
         <p:nvSpPr>
-          <p:cNvPr id="617" name="row:devmem RX buffers &gt; PAGE_SIZE:release:7.3-rc"/>
+          <p:cNvPr id="655" name="row:devmem RX buffers &gt; PAGE_SIZE:release:7.3-rc"/>
           <p:cNvSpPr/>
           <p:nvPr/>
         </p:nvSpPr>
@@ -13286,7 +12936,7 @@
       </p:sp>
       <p:sp>
         <p:nvSpPr>
-          <p:cNvPr id="618" name="row:devmem RX buffers &gt; PAGE_SIZE:label"/>
+          <p:cNvPr id="656" name="row:devmem RX buffers &gt; PAGE_SIZE:label"/>
           <p:cNvSpPr txBox="1"/>
           <p:nvPr/>
         </p:nvSpPr>
@@ -13320,7 +12970,7 @@
       </p:sp>
       <p:sp>
         <p:nvSpPr>
-          <p:cNvPr id="619" name="row:page_pool memory-provider hooks:name"/>
+          <p:cNvPr id="657" name="row:page_pool memory-provider hooks:name"/>
           <p:cNvSpPr txBox="1"/>
           <p:nvPr/>
         </p:nvSpPr>
@@ -13354,7 +13004,7 @@
       </p:sp>
       <p:sp>
         <p:nvSpPr>
-          <p:cNvPr id="620" name="row:page_pool memory-provider hooks:release:6.15"/>
+          <p:cNvPr id="658" name="row:page_pool memory-provider hooks:release:6.15"/>
           <p:cNvSpPr/>
           <p:nvPr/>
         </p:nvSpPr>
@@ -13400,7 +13050,7 @@
       </p:sp>
       <p:sp>
         <p:nvSpPr>
-          <p:cNvPr id="621" name="row:page_pool memory-provider hooks:label"/>
+          <p:cNvPr id="659" name="row:page_pool memory-provider hooks:label"/>
           <p:cNvSpPr txBox="1"/>
           <p:nvPr/>
         </p:nvSpPr>
@@ -13434,7 +13084,7 @@
       </p:sp>
       <p:sp>
         <p:nvSpPr>
-          <p:cNvPr id="622" name="row:large RX buffers (providers / ZCRX):name"/>
+          <p:cNvPr id="660" name="row:large RX buffers (providers / ZCRX):name"/>
           <p:cNvSpPr txBox="1"/>
           <p:nvPr/>
         </p:nvSpPr>
@@ -13468,7 +13118,7 @@
       </p:sp>
       <p:cxnSp>
         <p:nvCxnSpPr>
-          <p:cNvPr id="623" name="row:large RX buffers (providers / ZCRX):development"/>
+          <p:cNvPr id="662" name="row:large RX buffers (providers / ZCRX):development"/>
           <p:cNvCxnSpPr/>
           <p:nvPr/>
         </p:nvCxnSpPr>
@@ -13504,7 +13154,7 @@
       </p:cxnSp>
       <p:sp>
         <p:nvSpPr>
-          <p:cNvPr id="624" name="row:large RX buffers (providers / ZCRX):start"/>
+          <p:cNvPr id="663" name="row:large RX buffers (providers / ZCRX):start"/>
           <p:cNvSpPr/>
           <p:nvPr/>
         </p:nvSpPr>
@@ -13550,7 +13200,7 @@
       </p:sp>
       <p:sp>
         <p:nvSpPr>
-          <p:cNvPr id="625" name="row:large RX buffers (providers / ZCRX):release:7.0"/>
+          <p:cNvPr id="664" name="row:large RX buffers (providers / ZCRX):release:7.0"/>
           <p:cNvSpPr/>
           <p:nvPr/>
         </p:nvSpPr>
@@ -13596,7 +13246,7 @@
       </p:sp>
       <p:sp>
         <p:nvSpPr>
-          <p:cNvPr id="626" name="row:large RX buffers (providers / ZCRX):label"/>
+          <p:cNvPr id="665" name="row:large RX buffers (providers / ZCRX):label"/>
           <p:cNvSpPr txBox="1"/>
           <p:nvPr/>
         </p:nvSpPr>
@@ -13630,7 +13280,7 @@
       </p:sp>
       <p:sp>
         <p:nvSpPr>
-          <p:cNvPr id="628" name="row:io_uring ZCRX:name"/>
+          <p:cNvPr id="666" name="row:io_uring ZCRX:name"/>
           <p:cNvSpPr txBox="1"/>
           <p:nvPr/>
         </p:nvSpPr>
@@ -13664,7 +13314,7 @@
       </p:sp>
       <p:cxnSp>
         <p:nvCxnSpPr>
-          <p:cNvPr id="629" name="row:io_uring ZCRX:development"/>
+          <p:cNvPr id="668" name="row:io_uring ZCRX:development"/>
           <p:cNvCxnSpPr/>
           <p:nvPr/>
         </p:nvCxnSpPr>
@@ -13700,7 +13350,7 @@
       </p:cxnSp>
       <p:sp>
         <p:nvSpPr>
-          <p:cNvPr id="630" name="row:io_uring ZCRX:start"/>
+          <p:cNvPr id="669" name="row:io_uring ZCRX:start"/>
           <p:cNvSpPr/>
           <p:nvPr/>
         </p:nvSpPr>
@@ -13746,7 +13396,7 @@
       </p:sp>
       <p:sp>
         <p:nvSpPr>
-          <p:cNvPr id="631" name="row:io_uring ZCRX:release:6.15"/>
+          <p:cNvPr id="670" name="row:io_uring ZCRX:release:6.15"/>
           <p:cNvSpPr/>
           <p:nvPr/>
         </p:nvSpPr>
@@ -13792,7 +13442,7 @@
       </p:sp>
       <p:sp>
         <p:nvSpPr>
-          <p:cNvPr id="632" name="row:io_uring ZCRX:label"/>
+          <p:cNvPr id="671" name="row:io_uring ZCRX:label"/>
           <p:cNvSpPr txBox="1"/>
           <p:nvPr/>
         </p:nvSpPr>
@@ -13826,7 +13476,7 @@
       </p:sp>
       <p:sp>
         <p:nvSpPr>
-          <p:cNvPr id="634" name="row:RX HW queue leasing:name"/>
+          <p:cNvPr id="672" name="row:RX HW queue leasing:name"/>
           <p:cNvSpPr txBox="1"/>
           <p:nvPr/>
         </p:nvSpPr>
@@ -13860,7 +13510,7 @@
       </p:sp>
       <p:cxnSp>
         <p:nvCxnSpPr>
-          <p:cNvPr id="635" name="row:RX HW queue leasing:development"/>
+          <p:cNvPr id="674" name="row:RX HW queue leasing:development"/>
           <p:cNvCxnSpPr/>
           <p:nvPr/>
         </p:nvCxnSpPr>
@@ -13896,7 +13546,7 @@
       </p:cxnSp>
       <p:sp>
         <p:nvSpPr>
-          <p:cNvPr id="636" name="row:RX HW queue leasing:start"/>
+          <p:cNvPr id="675" name="row:RX HW queue leasing:start"/>
           <p:cNvSpPr/>
           <p:nvPr/>
         </p:nvSpPr>
@@ -13942,7 +13592,7 @@
       </p:sp>
       <p:sp>
         <p:nvSpPr>
-          <p:cNvPr id="637" name="row:RX HW queue leasing:release:7.1"/>
+          <p:cNvPr id="676" name="row:RX HW queue leasing:release:7.1"/>
           <p:cNvSpPr/>
           <p:nvPr/>
         </p:nvSpPr>
@@ -13988,7 +13638,7 @@
       </p:sp>
       <p:sp>
         <p:nvSpPr>
-          <p:cNvPr id="638" name="row:RX HW queue leasing:label"/>
+          <p:cNvPr id="677" name="row:RX HW queue leasing:label"/>
           <p:cNvSpPr txBox="1"/>
           <p:nvPr/>
         </p:nvSpPr>
@@ -14057,7 +13707,7 @@
       </p:sp>
       <p:sp>
         <p:nvSpPr>
-          <p:cNvPr id="640" name="row:namespace FD / setns():name"/>
+          <p:cNvPr id="678" name="row:namespace FD / setns():name"/>
           <p:cNvSpPr txBox="1"/>
           <p:nvPr/>
         </p:nvSpPr>
@@ -14091,7 +13741,7 @@
       </p:sp>
       <p:cxnSp>
         <p:nvCxnSpPr>
-          <p:cNvPr id="642" name="row:namespace FD / setns():development"/>
+          <p:cNvPr id="680" name="row:namespace FD / setns():development"/>
           <p:cNvCxnSpPr/>
           <p:nvPr/>
         </p:nvCxnSpPr>
@@ -14127,7 +13777,7 @@
       </p:cxnSp>
       <p:sp>
         <p:nvSpPr>
-          <p:cNvPr id="641" name="row:namespace FD / setns():start-offchart"/>
+          <p:cNvPr id="679" name="row:namespace FD / setns():start-offchart"/>
           <p:cNvSpPr/>
           <p:nvPr/>
         </p:nvSpPr>
@@ -14171,7 +13821,7 @@
       </p:sp>
       <p:sp>
         <p:nvSpPr>
-          <p:cNvPr id="643" name="row:namespace FD / setns():release:3.0"/>
+          <p:cNvPr id="681" name="row:namespace FD / setns():release:3.0"/>
           <p:cNvSpPr/>
           <p:nvPr/>
         </p:nvSpPr>
@@ -14217,7 +13867,7 @@
       </p:sp>
       <p:sp>
         <p:nvSpPr>
-          <p:cNvPr id="644" name="row:namespace FD / setns():label"/>
+          <p:cNvPr id="682" name="row:namespace FD / setns():label"/>
           <p:cNvSpPr txBox="1"/>
           <p:nvPr/>
         </p:nvSpPr>
@@ -14251,7 +13901,7 @@
       </p:sp>
       <p:sp>
         <p:nvSpPr>
-          <p:cNvPr id="645" name="row:nftables (dev. from 2008):name"/>
+          <p:cNvPr id="683" name="row:nftables (dev. from 2008):name"/>
           <p:cNvSpPr txBox="1"/>
           <p:nvPr/>
         </p:nvSpPr>
@@ -14285,7 +13935,7 @@
       </p:sp>
       <p:cxnSp>
         <p:nvCxnSpPr>
-          <p:cNvPr id="647" name="row:nftables (dev. from 2008):development"/>
+          <p:cNvPr id="685" name="row:nftables (dev. from 2008):development"/>
           <p:cNvCxnSpPr/>
           <p:nvPr/>
         </p:nvCxnSpPr>
@@ -14321,7 +13971,7 @@
       </p:cxnSp>
       <p:sp>
         <p:nvSpPr>
-          <p:cNvPr id="646" name="row:nftables (dev. from 2008):start-offchart"/>
+          <p:cNvPr id="684" name="row:nftables (dev. from 2008):start-offchart"/>
           <p:cNvSpPr/>
           <p:nvPr/>
         </p:nvSpPr>
@@ -14365,7 +14015,7 @@
       </p:sp>
       <p:sp>
         <p:nvSpPr>
-          <p:cNvPr id="648" name="row:nftables (dev. from 2008):release:3.13"/>
+          <p:cNvPr id="686" name="row:nftables (dev. from 2008):release:3.13"/>
           <p:cNvSpPr/>
           <p:nvPr/>
         </p:nvSpPr>
@@ -14411,7 +14061,7 @@
       </p:sp>
       <p:sp>
         <p:nvSpPr>
-          <p:cNvPr id="649" name="row:nftables (dev. from 2008):label"/>
+          <p:cNvPr id="687" name="row:nftables (dev. from 2008):label"/>
           <p:cNvSpPr txBox="1"/>
           <p:nvPr/>
         </p:nvSpPr>
@@ -14445,7 +14095,7 @@
       </p:sp>
       <p:sp>
         <p:nvSpPr>
-          <p:cNvPr id="650" name="row:nexthop objects:name"/>
+          <p:cNvPr id="688" name="row:nexthop objects:name"/>
           <p:cNvSpPr txBox="1"/>
           <p:nvPr/>
         </p:nvSpPr>
@@ -14479,7 +14129,7 @@
       </p:sp>
       <p:cxnSp>
         <p:nvCxnSpPr>
-          <p:cNvPr id="651" name="row:nexthop objects:development"/>
+          <p:cNvPr id="690" name="row:nexthop objects:development"/>
           <p:cNvCxnSpPr/>
           <p:nvPr/>
         </p:nvCxnSpPr>
@@ -14515,7 +14165,7 @@
       </p:cxnSp>
       <p:sp>
         <p:nvSpPr>
-          <p:cNvPr id="652" name="row:nexthop objects:start"/>
+          <p:cNvPr id="691" name="row:nexthop objects:start"/>
           <p:cNvSpPr/>
           <p:nvPr/>
         </p:nvSpPr>
@@ -14561,7 +14211,7 @@
       </p:sp>
       <p:sp>
         <p:nvSpPr>
-          <p:cNvPr id="653" name="row:nexthop objects:release:5.3"/>
+          <p:cNvPr id="692" name="row:nexthop objects:release:5.3"/>
           <p:cNvSpPr/>
           <p:nvPr/>
         </p:nvSpPr>
@@ -14607,7 +14257,7 @@
       </p:sp>
       <p:sp>
         <p:nvSpPr>
-          <p:cNvPr id="654" name="row:nexthop objects:label"/>
+          <p:cNvPr id="693" name="row:nexthop objects:label"/>
           <p:cNvSpPr txBox="1"/>
           <p:nvPr/>
         </p:nvSpPr>
@@ -14641,7 +14291,7 @@
       </p:sp>
       <p:sp>
         <p:nvSpPr>
-          <p:cNvPr id="656" name="row:per-netns RTNL:name"/>
+          <p:cNvPr id="694" name="row:per-netns RTNL:name"/>
           <p:cNvSpPr txBox="1"/>
           <p:nvPr/>
         </p:nvSpPr>
@@ -14675,7 +14325,7 @@
       </p:sp>
       <p:cxnSp>
         <p:nvCxnSpPr>
-          <p:cNvPr id="657" name="row:per-netns RTNL:development"/>
+          <p:cNvPr id="696" name="row:per-netns RTNL:development"/>
           <p:cNvCxnSpPr/>
           <p:nvPr/>
         </p:nvCxnSpPr>
@@ -14711,7 +14361,7 @@
       </p:cxnSp>
       <p:sp>
         <p:nvSpPr>
-          <p:cNvPr id="658" name="row:per-netns RTNL:start"/>
+          <p:cNvPr id="697" name="row:per-netns RTNL:start"/>
           <p:cNvSpPr/>
           <p:nvPr/>
         </p:nvSpPr>
@@ -14757,7 +14407,7 @@
       </p:sp>
       <p:sp>
         <p:nvSpPr>
-          <p:cNvPr id="659" name="row:per-netns RTNL:release:6.13"/>
+          <p:cNvPr id="698" name="row:per-netns RTNL:release:6.13"/>
           <p:cNvSpPr/>
           <p:nvPr/>
         </p:nvSpPr>
@@ -14803,7 +14453,7 @@
       </p:sp>
       <p:sp>
         <p:nvSpPr>
-          <p:cNvPr id="660" name="row:per-netns RTNL:label"/>
+          <p:cNvPr id="699" name="row:per-netns RTNL:label"/>
           <p:cNvSpPr txBox="1"/>
           <p:nvPr/>
         </p:nvSpPr>
@@ -14837,7 +14487,7 @@
       </p:sp>
       <p:sp>
         <p:nvSpPr>
-          <p:cNvPr id="662" name="row:further RTNL breakup:name"/>
+          <p:cNvPr id="700" name="row:further RTNL breakup:name"/>
           <p:cNvSpPr txBox="1"/>
           <p:nvPr/>
         </p:nvSpPr>
@@ -14871,7 +14521,7 @@
       </p:sp>
       <p:cxnSp>
         <p:nvCxnSpPr>
-          <p:cNvPr id="663" name="row:further RTNL breakup:development"/>
+          <p:cNvPr id="702" name="row:further RTNL breakup:development"/>
           <p:cNvCxnSpPr/>
           <p:nvPr/>
         </p:nvCxnSpPr>
@@ -14907,7 +14557,7 @@
       </p:cxnSp>
       <p:sp>
         <p:nvSpPr>
-          <p:cNvPr id="664" name="row:further RTNL breakup:start"/>
+          <p:cNvPr id="703" name="row:further RTNL breakup:start"/>
           <p:cNvSpPr/>
           <p:nvPr/>
         </p:nvSpPr>
@@ -14953,7 +14603,7 @@
       </p:sp>
       <p:sp>
         <p:nvSpPr>
-          <p:cNvPr id="665" name="row:further RTNL breakup:release:6.15"/>
+          <p:cNvPr id="704" name="row:further RTNL breakup:release:6.15"/>
           <p:cNvSpPr/>
           <p:nvPr/>
         </p:nvSpPr>
@@ -14999,7 +14649,7 @@
       </p:sp>
       <p:sp>
         <p:nvSpPr>
-          <p:cNvPr id="666" name="row:further RTNL breakup:label"/>
+          <p:cNvPr id="705" name="row:further RTNL breakup:label"/>
           <p:cNvSpPr txBox="1"/>
           <p:nvPr/>
         </p:nvSpPr>
@@ -15033,7 +14683,7 @@
       </p:sp>
       <p:sp>
         <p:nvSpPr>
-          <p:cNvPr id="668" name="row:RTNL-less FIB rules:name"/>
+          <p:cNvPr id="706" name="row:RTNL-less FIB rules:name"/>
           <p:cNvSpPr txBox="1"/>
           <p:nvPr/>
         </p:nvSpPr>
@@ -15067,7 +14717,7 @@
       </p:sp>
       <p:cxnSp>
         <p:nvCxnSpPr>
-          <p:cNvPr id="669" name="row:RTNL-less FIB rules:development"/>
+          <p:cNvPr id="708" name="row:RTNL-less FIB rules:development"/>
           <p:cNvCxnSpPr/>
           <p:nvPr/>
         </p:nvCxnSpPr>
@@ -15103,7 +14753,7 @@
       </p:cxnSp>
       <p:sp>
         <p:nvSpPr>
-          <p:cNvPr id="670" name="row:RTNL-less FIB rules:start"/>
+          <p:cNvPr id="709" name="row:RTNL-less FIB rules:start"/>
           <p:cNvSpPr/>
           <p:nvPr/>
         </p:nvSpPr>
@@ -15149,7 +14799,7 @@
       </p:sp>
       <p:sp>
         <p:nvSpPr>
-          <p:cNvPr id="671" name="row:RTNL-less FIB rules:release:7.3-rc"/>
+          <p:cNvPr id="710" name="row:RTNL-less FIB rules:release:7.3-rc"/>
           <p:cNvSpPr/>
           <p:nvPr/>
         </p:nvSpPr>
@@ -15195,7 +14845,7 @@
       </p:sp>
       <p:sp>
         <p:nvSpPr>
-          <p:cNvPr id="672" name="row:RTNL-less FIB rules:label"/>
+          <p:cNvPr id="711" name="row:RTNL-less FIB rules:label"/>
           <p:cNvSpPr txBox="1"/>
           <p:nvPr/>
         </p:nvSpPr>
@@ -15229,7 +14879,7 @@
       </p:sp>
       <p:sp>
         <p:nvSpPr>
-          <p:cNvPr id="674" name="row:per-netns netdev unregistration:name"/>
+          <p:cNvPr id="712" name="row:per-netns netdev unregistration:name"/>
           <p:cNvSpPr txBox="1"/>
           <p:nvPr/>
         </p:nvSpPr>
@@ -15263,7 +14913,7 @@
       </p:sp>
       <p:sp>
         <p:nvSpPr>
-          <p:cNvPr id="675" name="row:per-netns netdev unregistration:release:7.3-rc"/>
+          <p:cNvPr id="713" name="row:per-netns netdev unregistration:release:7.3-rc"/>
           <p:cNvSpPr/>
           <p:nvPr/>
         </p:nvSpPr>
@@ -15309,7 +14959,7 @@
       </p:sp>
       <p:sp>
         <p:nvSpPr>
-          <p:cNvPr id="676" name="row:per-netns netdev unregistration:label"/>
+          <p:cNvPr id="714" name="row:per-netns netdev unregistration:label"/>
           <p:cNvSpPr txBox="1"/>
           <p:nvPr/>
         </p:nvSpPr>
@@ -15343,7 +14993,7 @@
       </p:sp>
       <p:sp>
         <p:nvSpPr>
-          <p:cNvPr id="677" name="row:YNL tooling:name"/>
+          <p:cNvPr id="715" name="row:YNL tooling:name"/>
           <p:cNvSpPr txBox="1"/>
           <p:nvPr/>
         </p:nvSpPr>
@@ -15377,7 +15027,7 @@
       </p:sp>
       <p:cxnSp>
         <p:nvCxnSpPr>
-          <p:cNvPr id="678" name="row:YNL tooling:development"/>
+          <p:cNvPr id="717" name="row:YNL tooling:development"/>
           <p:cNvCxnSpPr/>
           <p:nvPr/>
         </p:nvCxnSpPr>
@@ -15413,7 +15063,7 @@
       </p:cxnSp>
       <p:sp>
         <p:nvSpPr>
-          <p:cNvPr id="679" name="row:YNL tooling:start"/>
+          <p:cNvPr id="718" name="row:YNL tooling:start"/>
           <p:cNvSpPr/>
           <p:nvPr/>
         </p:nvSpPr>
@@ -15459,7 +15109,7 @@
       </p:sp>
       <p:sp>
         <p:nvSpPr>
-          <p:cNvPr id="680" name="row:YNL tooling:release:6.3"/>
+          <p:cNvPr id="719" name="row:YNL tooling:release:6.3"/>
           <p:cNvSpPr/>
           <p:nvPr/>
         </p:nvSpPr>
@@ -15505,7 +15155,7 @@
       </p:sp>
       <p:sp>
         <p:nvSpPr>
-          <p:cNvPr id="681" name="row:YNL tooling:label"/>
+          <p:cNvPr id="720" name="row:YNL tooling:label"/>
           <p:cNvSpPr txBox="1"/>
           <p:nvPr/>
         </p:nvSpPr>
@@ -15574,7 +15224,7 @@
       </p:sp>
       <p:sp>
         <p:nvSpPr>
-          <p:cNvPr id="683" name="row:queue/NAPI/page_pool netdev-genl:name"/>
+          <p:cNvPr id="721" name="row:queue/NAPI/page_pool netdev-genl:name"/>
           <p:cNvSpPr txBox="1"/>
           <p:nvPr/>
         </p:nvSpPr>
@@ -15608,7 +15258,7 @@
       </p:sp>
       <p:cxnSp>
         <p:nvCxnSpPr>
-          <p:cNvPr id="684" name="row:queue/NAPI/page_pool netdev-genl:development"/>
+          <p:cNvPr id="723" name="row:queue/NAPI/page_pool netdev-genl:development"/>
           <p:cNvCxnSpPr/>
           <p:nvPr/>
         </p:nvCxnSpPr>
@@ -15644,7 +15294,7 @@
       </p:cxnSp>
       <p:sp>
         <p:nvSpPr>
-          <p:cNvPr id="685" name="row:queue/NAPI/page_pool netdev-genl:start"/>
+          <p:cNvPr id="724" name="row:queue/NAPI/page_pool netdev-genl:start"/>
           <p:cNvSpPr/>
           <p:nvPr/>
         </p:nvSpPr>
@@ -15690,7 +15340,7 @@
       </p:sp>
       <p:sp>
         <p:nvSpPr>
-          <p:cNvPr id="686" name="row:queue/NAPI/page_pool netdev-genl:release:6.8"/>
+          <p:cNvPr id="725" name="row:queue/NAPI/page_pool netdev-genl:release:6.8"/>
           <p:cNvSpPr/>
           <p:nvPr/>
         </p:nvSpPr>
@@ -15736,7 +15386,7 @@
       </p:sp>
       <p:sp>
         <p:nvSpPr>
-          <p:cNvPr id="687" name="row:queue/NAPI/page_pool netdev-genl:label"/>
+          <p:cNvPr id="726" name="row:queue/NAPI/page_pool netdev-genl:label"/>
           <p:cNvSpPr txBox="1"/>
           <p:nvPr/>
         </p:nvSpPr>
@@ -15770,7 +15420,7 @@
       </p:sp>
       <p:sp>
         <p:nvSpPr>
-          <p:cNvPr id="689" name="row:kprobe BPF:name"/>
+          <p:cNvPr id="727" name="row:kprobe BPF:name"/>
           <p:cNvSpPr txBox="1"/>
           <p:nvPr/>
         </p:nvSpPr>
@@ -15804,7 +15454,7 @@
       </p:sp>
       <p:cxnSp>
         <p:nvCxnSpPr>
-          <p:cNvPr id="690" name="row:kprobe BPF:development"/>
+          <p:cNvPr id="729" name="row:kprobe BPF:development"/>
           <p:cNvCxnSpPr/>
           <p:nvPr/>
         </p:nvCxnSpPr>
@@ -15840,7 +15490,7 @@
       </p:cxnSp>
       <p:sp>
         <p:nvSpPr>
-          <p:cNvPr id="691" name="row:kprobe BPF:start"/>
+          <p:cNvPr id="730" name="row:kprobe BPF:start"/>
           <p:cNvSpPr/>
           <p:nvPr/>
         </p:nvSpPr>
@@ -15886,7 +15536,7 @@
       </p:sp>
       <p:sp>
         <p:nvSpPr>
-          <p:cNvPr id="692" name="row:kprobe BPF:release:4.1"/>
+          <p:cNvPr id="731" name="row:kprobe BPF:release:4.1"/>
           <p:cNvSpPr/>
           <p:nvPr/>
         </p:nvSpPr>
@@ -15932,7 +15582,7 @@
       </p:sp>
       <p:sp>
         <p:nvSpPr>
-          <p:cNvPr id="693" name="row:kprobe BPF:label"/>
+          <p:cNvPr id="732" name="row:kprobe BPF:label"/>
           <p:cNvSpPr txBox="1"/>
           <p:nvPr/>
         </p:nvSpPr>
@@ -15966,7 +15616,7 @@
       </p:sp>
       <p:sp>
         <p:nvSpPr>
-          <p:cNvPr id="695" name="row:BTF:name"/>
+          <p:cNvPr id="733" name="row:BTF:name"/>
           <p:cNvSpPr txBox="1"/>
           <p:nvPr/>
         </p:nvSpPr>
@@ -16000,7 +15650,7 @@
       </p:sp>
       <p:cxnSp>
         <p:nvCxnSpPr>
-          <p:cNvPr id="696" name="row:BTF:development"/>
+          <p:cNvPr id="735" name="row:BTF:development"/>
           <p:cNvCxnSpPr/>
           <p:nvPr/>
         </p:nvCxnSpPr>
@@ -16036,7 +15686,7 @@
       </p:cxnSp>
       <p:sp>
         <p:nvSpPr>
-          <p:cNvPr id="697" name="row:BTF:start"/>
+          <p:cNvPr id="736" name="row:BTF:start"/>
           <p:cNvSpPr/>
           <p:nvPr/>
         </p:nvSpPr>
@@ -16082,7 +15732,7 @@
       </p:sp>
       <p:sp>
         <p:nvSpPr>
-          <p:cNvPr id="698" name="row:BTF:release:4.18"/>
+          <p:cNvPr id="737" name="row:BTF:release:4.18"/>
           <p:cNvSpPr/>
           <p:nvPr/>
         </p:nvSpPr>
@@ -16128,7 +15778,7 @@
       </p:sp>
       <p:sp>
         <p:nvSpPr>
-          <p:cNvPr id="699" name="row:BTF:label"/>
+          <p:cNvPr id="738" name="row:BTF:label"/>
           <p:cNvSpPr txBox="1"/>
           <p:nvPr/>
         </p:nvSpPr>
@@ -16162,7 +15812,7 @@
       </p:sp>
       <p:sp>
         <p:nvSpPr>
-          <p:cNvPr id="701" name="row:structured drop reason:name"/>
+          <p:cNvPr id="739" name="row:structured drop reason:name"/>
           <p:cNvSpPr txBox="1"/>
           <p:nvPr/>
         </p:nvSpPr>
@@ -16196,7 +15846,7 @@
       </p:sp>
       <p:cxnSp>
         <p:nvCxnSpPr>
-          <p:cNvPr id="702" name="row:structured drop reason:development"/>
+          <p:cNvPr id="741" name="row:structured drop reason:development"/>
           <p:cNvCxnSpPr/>
           <p:nvPr/>
         </p:nvCxnSpPr>
@@ -16232,7 +15882,7 @@
       </p:cxnSp>
       <p:sp>
         <p:nvSpPr>
-          <p:cNvPr id="703" name="row:structured drop reason:start"/>
+          <p:cNvPr id="742" name="row:structured drop reason:start"/>
           <p:cNvSpPr/>
           <p:nvPr/>
         </p:nvSpPr>
@@ -16278,7 +15928,7 @@
       </p:sp>
       <p:sp>
         <p:nvSpPr>
-          <p:cNvPr id="704" name="row:structured drop reason:release:5.17"/>
+          <p:cNvPr id="743" name="row:structured drop reason:release:5.17"/>
           <p:cNvSpPr/>
           <p:nvPr/>
         </p:nvSpPr>
@@ -16324,7 +15974,7 @@
       </p:sp>
       <p:sp>
         <p:nvSpPr>
-          <p:cNvPr id="705" name="row:structured drop reason:label"/>
+          <p:cNvPr id="744" name="row:structured drop reason:label"/>
           <p:cNvSpPr txBox="1"/>
           <p:nvPr/>
         </p:nvSpPr>
@@ -16358,7 +16008,7 @@
       </p:sp>
       <p:sp>
         <p:nvSpPr>
-          <p:cNvPr id="707" name="row:drop-reason expansion:name"/>
+          <p:cNvPr id="745" name="row:drop-reason expansion:name"/>
           <p:cNvSpPr txBox="1"/>
           <p:nvPr/>
         </p:nvSpPr>
@@ -16392,7 +16042,7 @@
       </p:sp>
       <p:cxnSp>
         <p:nvCxnSpPr>
-          <p:cNvPr id="708" name="row:drop-reason expansion:development"/>
+          <p:cNvPr id="747" name="row:drop-reason expansion:development"/>
           <p:cNvCxnSpPr/>
           <p:nvPr/>
         </p:nvCxnSpPr>
@@ -16428,7 +16078,7 @@
       </p:cxnSp>
       <p:sp>
         <p:nvSpPr>
-          <p:cNvPr id="709" name="row:drop-reason expansion:start"/>
+          <p:cNvPr id="748" name="row:drop-reason expansion:start"/>
           <p:cNvSpPr/>
           <p:nvPr/>
         </p:nvSpPr>
@@ -16474,7 +16124,7 @@
       </p:sp>
       <p:sp>
         <p:nvSpPr>
-          <p:cNvPr id="710" name="row:drop-reason expansion:release:5.19"/>
+          <p:cNvPr id="749" name="row:drop-reason expansion:release:5.19"/>
           <p:cNvSpPr/>
           <p:nvPr/>
         </p:nvSpPr>
@@ -16520,7 +16170,7 @@
       </p:sp>
       <p:sp>
         <p:nvSpPr>
-          <p:cNvPr id="711" name="row:drop-reason expansion:label"/>
+          <p:cNvPr id="750" name="row:drop-reason expansion:label"/>
           <p:cNvSpPr txBox="1"/>
           <p:nvPr/>
         </p:nvSpPr>
@@ -16554,7 +16204,7 @@
       </p:sp>
       <p:sp>
         <p:nvSpPr>
-          <p:cNvPr id="713" name="row:qdisc-drop tracepoint:name"/>
+          <p:cNvPr id="751" name="row:qdisc-drop tracepoint:name"/>
           <p:cNvSpPr txBox="1"/>
           <p:nvPr/>
         </p:nvSpPr>
@@ -16588,7 +16238,7 @@
       </p:sp>
       <p:cxnSp>
         <p:nvCxnSpPr>
-          <p:cNvPr id="714" name="row:qdisc-drop tracepoint:development"/>
+          <p:cNvPr id="753" name="row:qdisc-drop tracepoint:development"/>
           <p:cNvCxnSpPr/>
           <p:nvPr/>
         </p:nvCxnSpPr>
@@ -16624,7 +16274,7 @@
       </p:cxnSp>
       <p:sp>
         <p:nvSpPr>
-          <p:cNvPr id="715" name="row:qdisc-drop tracepoint:start"/>
+          <p:cNvPr id="754" name="row:qdisc-drop tracepoint:start"/>
           <p:cNvSpPr/>
           <p:nvPr/>
         </p:nvSpPr>
@@ -16670,7 +16320,7 @@
       </p:sp>
       <p:sp>
         <p:nvSpPr>
-          <p:cNvPr id="716" name="row:qdisc-drop tracepoint:release:7.1"/>
+          <p:cNvPr id="755" name="row:qdisc-drop tracepoint:release:7.1"/>
           <p:cNvSpPr/>
           <p:nvPr/>
         </p:nvSpPr>
@@ -16716,7 +16366,7 @@
       </p:sp>
       <p:sp>
         <p:nvSpPr>
-          <p:cNvPr id="717" name="row:qdisc-drop tracepoint:label"/>
+          <p:cNvPr id="756" name="row:qdisc-drop tracepoint:label"/>
           <p:cNvSpPr txBox="1"/>
           <p:nvPr/>
         </p:nvSpPr>
@@ -16785,7 +16435,7 @@
       </p:sp>
       <p:sp>
         <p:nvSpPr>
-          <p:cNvPr id="719" name="row:switchdev:name"/>
+          <p:cNvPr id="757" name="row:switchdev:name"/>
           <p:cNvSpPr txBox="1"/>
           <p:nvPr/>
         </p:nvSpPr>
@@ -16819,7 +16469,7 @@
       </p:sp>
       <p:cxnSp>
         <p:nvCxnSpPr>
-          <p:cNvPr id="720" name="row:switchdev:development"/>
+          <p:cNvPr id="759" name="row:switchdev:development"/>
           <p:cNvCxnSpPr/>
           <p:nvPr/>
         </p:nvCxnSpPr>
@@ -16855,7 +16505,7 @@
       </p:cxnSp>
       <p:sp>
         <p:nvSpPr>
-          <p:cNvPr id="721" name="row:switchdev:start"/>
+          <p:cNvPr id="760" name="row:switchdev:start"/>
           <p:cNvSpPr/>
           <p:nvPr/>
         </p:nvSpPr>
@@ -16901,7 +16551,7 @@
       </p:sp>
       <p:sp>
         <p:nvSpPr>
-          <p:cNvPr id="722" name="row:switchdev:release:3.19"/>
+          <p:cNvPr id="761" name="row:switchdev:release:3.19"/>
           <p:cNvSpPr/>
           <p:nvPr/>
         </p:nvSpPr>
@@ -16947,7 +16597,7 @@
       </p:sp>
       <p:sp>
         <p:nvSpPr>
-          <p:cNvPr id="723" name="row:switchdev:label"/>
+          <p:cNvPr id="762" name="row:switchdev:label"/>
           <p:cNvSpPr txBox="1"/>
           <p:nvPr/>
         </p:nvSpPr>
@@ -16981,7 +16631,7 @@
       </p:sp>
       <p:sp>
         <p:nvSpPr>
-          <p:cNvPr id="725" name="row:devlink:name"/>
+          <p:cNvPr id="763" name="row:devlink:name"/>
           <p:cNvSpPr txBox="1"/>
           <p:nvPr/>
         </p:nvSpPr>
@@ -17015,7 +16665,7 @@
       </p:sp>
       <p:cxnSp>
         <p:nvCxnSpPr>
-          <p:cNvPr id="726" name="row:devlink:development"/>
+          <p:cNvPr id="765" name="row:devlink:development"/>
           <p:cNvCxnSpPr/>
           <p:nvPr/>
         </p:nvCxnSpPr>
@@ -17051,7 +16701,7 @@
       </p:cxnSp>
       <p:sp>
         <p:nvSpPr>
-          <p:cNvPr id="727" name="row:devlink:start"/>
+          <p:cNvPr id="766" name="row:devlink:start"/>
           <p:cNvSpPr/>
           <p:nvPr/>
         </p:nvSpPr>
@@ -17097,7 +16747,7 @@
       </p:sp>
       <p:sp>
         <p:nvSpPr>
-          <p:cNvPr id="728" name="row:devlink:release:4.6"/>
+          <p:cNvPr id="767" name="row:devlink:release:4.6"/>
           <p:cNvSpPr/>
           <p:nvPr/>
         </p:nvSpPr>
@@ -17143,7 +16793,7 @@
       </p:sp>
       <p:sp>
         <p:nvSpPr>
-          <p:cNvPr id="729" name="row:devlink:label"/>
+          <p:cNvPr id="768" name="row:devlink:label"/>
           <p:cNvSpPr txBox="1"/>
           <p:nvPr/>
         </p:nvSpPr>
@@ -17177,7 +16827,7 @@
       </p:sp>
       <p:sp>
         <p:nvSpPr>
-          <p:cNvPr id="731" name="row:devlink health:name"/>
+          <p:cNvPr id="769" name="row:devlink health:name"/>
           <p:cNvSpPr txBox="1"/>
           <p:nvPr/>
         </p:nvSpPr>
@@ -17211,14 +16861,14 @@
       </p:sp>
       <p:cxnSp>
         <p:nvCxnSpPr>
-          <p:cNvPr id="732" name="row:devlink health:development"/>
+          <p:cNvPr id="771" name="row:devlink health:development"/>
           <p:cNvCxnSpPr/>
           <p:nvPr/>
         </p:nvCxnSpPr>
         <p:spPr>
           <a:xfrm>
-            <a:off x="7864240" y="6791093"/>
-            <a:ext cx="943994" cy="0"/>
+            <a:off x="8124871" y="6791093"/>
+            <a:ext cx="683363" cy="0"/>
           </a:xfrm>
           <a:prstGeom prst="line">
             <a:avLst/>
@@ -17247,7 +16897,7 @@
       </p:cxnSp>
       <p:sp>
         <p:nvSpPr>
-          <p:cNvPr id="733" name="row:devlink health:start"/>
+          <p:cNvPr id="772" name="row:devlink health:start"/>
           <p:cNvSpPr/>
           <p:nvPr/>
         </p:nvSpPr>
@@ -17293,7 +16943,7 @@
       </p:sp>
       <p:sp>
         <p:nvSpPr>
-          <p:cNvPr id="734" name="row:devlink health:release:5.1"/>
+          <p:cNvPr id="773" name="row:devlink health:release:5.1"/>
           <p:cNvSpPr/>
           <p:nvPr/>
         </p:nvSpPr>
@@ -17339,7 +16989,7 @@
       </p:sp>
       <p:sp>
         <p:nvSpPr>
-          <p:cNvPr id="735" name="row:devlink health:label"/>
+          <p:cNvPr id="774" name="row:devlink health:label"/>
           <p:cNvSpPr txBox="1"/>
           <p:nvPr/>
         </p:nvSpPr>
@@ -17373,7 +17023,7 @@
       </p:sp>
       <p:sp>
         <p:nvSpPr>
-          <p:cNvPr id="737" name="row:phylink:name"/>
+          <p:cNvPr id="775" name="row:phylink:name"/>
           <p:cNvSpPr txBox="1"/>
           <p:nvPr/>
         </p:nvSpPr>
@@ -17407,7 +17057,7 @@
       </p:sp>
       <p:cxnSp>
         <p:nvCxnSpPr>
-          <p:cNvPr id="738" name="row:phylink:development"/>
+          <p:cNvPr id="777" name="row:phylink:development"/>
           <p:cNvCxnSpPr/>
           <p:nvPr/>
         </p:nvCxnSpPr>
@@ -17443,7 +17093,7 @@
       </p:cxnSp>
       <p:sp>
         <p:nvSpPr>
-          <p:cNvPr id="739" name="row:phylink:start"/>
+          <p:cNvPr id="778" name="row:phylink:start"/>
           <p:cNvSpPr/>
           <p:nvPr/>
         </p:nvSpPr>
@@ -17489,7 +17139,7 @@
       </p:sp>
       <p:sp>
         <p:nvSpPr>
-          <p:cNvPr id="740" name="row:phylink:release:4.14"/>
+          <p:cNvPr id="779" name="row:phylink:release:4.14"/>
           <p:cNvSpPr/>
           <p:nvPr/>
         </p:nvSpPr>
@@ -17535,7 +17185,7 @@
       </p:sp>
       <p:sp>
         <p:nvSpPr>
-          <p:cNvPr id="741" name="row:phylink:label"/>
+          <p:cNvPr id="780" name="row:phylink:label"/>
           <p:cNvSpPr txBox="1"/>
           <p:nvPr/>
         </p:nvSpPr>
@@ -17569,7 +17219,7 @@
       </p:sp>
       <p:sp>
         <p:nvSpPr>
-          <p:cNvPr id="743" name="row:Net DIM:name"/>
+          <p:cNvPr id="781" name="row:Net DIM:name"/>
           <p:cNvSpPr txBox="1"/>
           <p:nvPr/>
         </p:nvSpPr>
@@ -17603,7 +17253,7 @@
       </p:sp>
       <p:cxnSp>
         <p:nvCxnSpPr>
-          <p:cNvPr id="744" name="row:Net DIM:development"/>
+          <p:cNvPr id="783" name="row:Net DIM:development"/>
           <p:cNvCxnSpPr/>
           <p:nvPr/>
         </p:nvCxnSpPr>
@@ -17639,7 +17289,7 @@
       </p:cxnSp>
       <p:sp>
         <p:nvSpPr>
-          <p:cNvPr id="745" name="row:Net DIM:start"/>
+          <p:cNvPr id="784" name="row:Net DIM:start"/>
           <p:cNvSpPr/>
           <p:nvPr/>
         </p:nvSpPr>
@@ -17685,7 +17335,7 @@
       </p:sp>
       <p:cxnSp>
         <p:nvCxnSpPr>
-          <p:cNvPr id="746" name="row:Net DIM:milestones"/>
+          <p:cNvPr id="785" name="row:Net DIM:milestones"/>
           <p:cNvCxnSpPr/>
           <p:nvPr/>
         </p:nvCxnSpPr>
@@ -17720,7 +17370,7 @@
       </p:cxnSp>
       <p:sp>
         <p:nvSpPr>
-          <p:cNvPr id="747" name="row:Net DIM:release:4.16"/>
+          <p:cNvPr id="786" name="row:Net DIM:release:4.16"/>
           <p:cNvSpPr/>
           <p:nvPr/>
         </p:nvSpPr>
@@ -17766,7 +17416,7 @@
       </p:sp>
       <p:sp>
         <p:nvSpPr>
-          <p:cNvPr id="748" name="row:Net DIM:release:5.3"/>
+          <p:cNvPr id="787" name="row:Net DIM:release:5.3"/>
           <p:cNvSpPr/>
           <p:nvPr/>
         </p:nvSpPr>
@@ -17812,7 +17462,7 @@
       </p:sp>
       <p:sp>
         <p:nvSpPr>
-          <p:cNvPr id="749" name="row:Net DIM:label"/>
+          <p:cNvPr id="788" name="row:Net DIM:label"/>
           <p:cNvSpPr txBox="1"/>
           <p:nvPr/>
         </p:nvSpPr>
@@ -17846,7 +17496,7 @@
       </p:sp>
       <p:sp>
         <p:nvSpPr>
-          <p:cNvPr id="751" name="row:netdevsim:name"/>
+          <p:cNvPr id="789" name="row:netdevsim:name"/>
           <p:cNvSpPr txBox="1"/>
           <p:nvPr/>
         </p:nvSpPr>
@@ -17880,7 +17530,7 @@
       </p:sp>
       <p:cxnSp>
         <p:nvCxnSpPr>
-          <p:cNvPr id="752" name="row:netdevsim:development"/>
+          <p:cNvPr id="791" name="row:netdevsim:development"/>
           <p:cNvCxnSpPr/>
           <p:nvPr/>
         </p:nvCxnSpPr>
@@ -17916,7 +17566,7 @@
       </p:cxnSp>
       <p:sp>
         <p:nvSpPr>
-          <p:cNvPr id="753" name="row:netdevsim:start"/>
+          <p:cNvPr id="792" name="row:netdevsim:start"/>
           <p:cNvSpPr/>
           <p:nvPr/>
         </p:nvSpPr>
@@ -17962,7 +17612,7 @@
       </p:sp>
       <p:sp>
         <p:nvSpPr>
-          <p:cNvPr id="754" name="row:netdevsim:release:4.16"/>
+          <p:cNvPr id="793" name="row:netdevsim:release:4.16"/>
           <p:cNvSpPr/>
           <p:nvPr/>
         </p:nvSpPr>
@@ -18008,7 +17658,7 @@
       </p:sp>
       <p:sp>
         <p:nvSpPr>
-          <p:cNvPr id="755" name="row:netdevsim:label"/>
+          <p:cNvPr id="794" name="row:netdevsim:label"/>
           <p:cNvSpPr txBox="1"/>
           <p:nvPr/>
         </p:nvSpPr>
@@ -18042,7 +17692,7 @@
       </p:sp>
       <p:sp>
         <p:nvSpPr>
-          <p:cNvPr id="757" name="row:ethtool netlink:name"/>
+          <p:cNvPr id="795" name="row:ethtool netlink:name"/>
           <p:cNvSpPr txBox="1"/>
           <p:nvPr/>
         </p:nvSpPr>
@@ -18076,7 +17726,7 @@
       </p:sp>
       <p:cxnSp>
         <p:nvCxnSpPr>
-          <p:cNvPr id="758" name="row:ethtool netlink:development"/>
+          <p:cNvPr id="797" name="row:ethtool netlink:development"/>
           <p:cNvCxnSpPr/>
           <p:nvPr/>
         </p:nvCxnSpPr>
@@ -18112,7 +17762,7 @@
       </p:cxnSp>
       <p:sp>
         <p:nvSpPr>
-          <p:cNvPr id="759" name="row:ethtool netlink:start"/>
+          <p:cNvPr id="798" name="row:ethtool netlink:start"/>
           <p:cNvSpPr/>
           <p:nvPr/>
         </p:nvSpPr>
@@ -18158,7 +17808,7 @@
       </p:sp>
       <p:sp>
         <p:nvSpPr>
-          <p:cNvPr id="760" name="row:ethtool netlink:release:5.6"/>
+          <p:cNvPr id="799" name="row:ethtool netlink:release:5.6"/>
           <p:cNvSpPr/>
           <p:nvPr/>
         </p:nvSpPr>
@@ -18204,7 +17854,7 @@
       </p:sp>
       <p:sp>
         <p:nvSpPr>
-          <p:cNvPr id="761" name="row:ethtool netlink:label"/>
+          <p:cNvPr id="800" name="row:ethtool netlink:label"/>
           <p:cNvSpPr txBox="1"/>
           <p:nvPr/>
         </p:nvSpPr>
@@ -18238,7 +17888,7 @@
       </p:sp>
       <p:sp>
         <p:nvSpPr>
-          <p:cNvPr id="763" name="row:auxiliary bus:name"/>
+          <p:cNvPr id="801" name="row:auxiliary bus:name"/>
           <p:cNvSpPr txBox="1"/>
           <p:nvPr/>
         </p:nvSpPr>
@@ -18272,7 +17922,7 @@
       </p:sp>
       <p:cxnSp>
         <p:nvCxnSpPr>
-          <p:cNvPr id="764" name="row:auxiliary bus:development"/>
+          <p:cNvPr id="803" name="row:auxiliary bus:development"/>
           <p:cNvCxnSpPr/>
           <p:nvPr/>
         </p:nvCxnSpPr>
@@ -18308,7 +17958,7 @@
       </p:cxnSp>
       <p:sp>
         <p:nvSpPr>
-          <p:cNvPr id="765" name="row:auxiliary bus:start"/>
+          <p:cNvPr id="804" name="row:auxiliary bus:start"/>
           <p:cNvSpPr/>
           <p:nvPr/>
         </p:nvSpPr>
@@ -18354,7 +18004,7 @@
       </p:sp>
       <p:sp>
         <p:nvSpPr>
-          <p:cNvPr id="766" name="row:auxiliary bus:release:5.11"/>
+          <p:cNvPr id="805" name="row:auxiliary bus:release:5.11"/>
           <p:cNvSpPr/>
           <p:nvPr/>
         </p:nvSpPr>
@@ -18400,7 +18050,7 @@
       </p:sp>
       <p:sp>
         <p:nvSpPr>
-          <p:cNvPr id="767" name="row:auxiliary bus:label"/>
+          <p:cNvPr id="806" name="row:auxiliary bus:label"/>
           <p:cNvSpPr txBox="1"/>
           <p:nvPr/>
         </p:nvSpPr>
@@ -18434,7 +18084,7 @@
       </p:sp>
       <p:sp>
         <p:nvSpPr>
-          <p:cNvPr id="769" name="row:threaded NAPI:name"/>
+          <p:cNvPr id="807" name="row:threaded NAPI:name"/>
           <p:cNvSpPr txBox="1"/>
           <p:nvPr/>
         </p:nvSpPr>
@@ -18468,7 +18118,7 @@
       </p:sp>
       <p:cxnSp>
         <p:nvCxnSpPr>
-          <p:cNvPr id="770" name="row:threaded NAPI:development"/>
+          <p:cNvPr id="809" name="row:threaded NAPI:development"/>
           <p:cNvCxnSpPr/>
           <p:nvPr/>
         </p:nvCxnSpPr>
@@ -18504,7 +18154,7 @@
       </p:cxnSp>
       <p:sp>
         <p:nvSpPr>
-          <p:cNvPr id="771" name="row:threaded NAPI:start"/>
+          <p:cNvPr id="810" name="row:threaded NAPI:start"/>
           <p:cNvSpPr/>
           <p:nvPr/>
         </p:nvSpPr>
@@ -18550,7 +18200,7 @@
       </p:sp>
       <p:cxnSp>
         <p:nvCxnSpPr>
-          <p:cNvPr id="772" name="row:threaded NAPI:milestones"/>
+          <p:cNvPr id="811" name="row:threaded NAPI:milestones"/>
           <p:cNvCxnSpPr/>
           <p:nvPr/>
         </p:nvCxnSpPr>
@@ -18585,7 +18235,7 @@
       </p:cxnSp>
       <p:sp>
         <p:nvSpPr>
-          <p:cNvPr id="773" name="row:threaded NAPI:release:5.12"/>
+          <p:cNvPr id="812" name="row:threaded NAPI:release:5.12"/>
           <p:cNvSpPr/>
           <p:nvPr/>
         </p:nvSpPr>
@@ -18631,7 +18281,7 @@
       </p:sp>
       <p:sp>
         <p:nvSpPr>
-          <p:cNvPr id="774" name="row:threaded NAPI:release:6.19"/>
+          <p:cNvPr id="813" name="row:threaded NAPI:release:6.19"/>
           <p:cNvSpPr/>
           <p:nvPr/>
         </p:nvSpPr>
@@ -18677,7 +18327,7 @@
       </p:sp>
       <p:sp>
         <p:nvSpPr>
-          <p:cNvPr id="775" name="row:threaded NAPI:label"/>
+          <p:cNvPr id="814" name="row:threaded NAPI:label"/>
           <p:cNvSpPr txBox="1"/>
           <p:nvPr/>
         </p:nvSpPr>
@@ -18711,7 +18361,7 @@
       </p:sp>
       <p:sp>
         <p:nvSpPr>
-          <p:cNvPr id="777" name="row:Rust phylib:name"/>
+          <p:cNvPr id="815" name="row:Rust phylib:name"/>
           <p:cNvSpPr txBox="1"/>
           <p:nvPr/>
         </p:nvSpPr>
@@ -18745,7 +18395,7 @@
       </p:sp>
       <p:cxnSp>
         <p:nvCxnSpPr>
-          <p:cNvPr id="778" name="row:Rust phylib:development"/>
+          <p:cNvPr id="817" name="row:Rust phylib:development"/>
           <p:cNvCxnSpPr/>
           <p:nvPr/>
         </p:nvCxnSpPr>
@@ -18781,7 +18431,7 @@
       </p:cxnSp>
       <p:sp>
         <p:nvSpPr>
-          <p:cNvPr id="779" name="row:Rust phylib:start"/>
+          <p:cNvPr id="818" name="row:Rust phylib:start"/>
           <p:cNvSpPr/>
           <p:nvPr/>
         </p:nvSpPr>
@@ -18827,7 +18477,7 @@
       </p:sp>
       <p:sp>
         <p:nvSpPr>
-          <p:cNvPr id="780" name="row:Rust phylib:release:6.8"/>
+          <p:cNvPr id="819" name="row:Rust phylib:release:6.8"/>
           <p:cNvSpPr/>
           <p:nvPr/>
         </p:nvSpPr>
@@ -18873,7 +18523,7 @@
       </p:sp>
       <p:sp>
         <p:nvSpPr>
-          <p:cNvPr id="781" name="row:Rust phylib:label"/>
+          <p:cNvPr id="820" name="row:Rust phylib:label"/>
           <p:cNvSpPr txBox="1"/>
           <p:nvPr/>
         </p:nvSpPr>
@@ -19689,29 +19339,27 @@
       </p:sp>
       <p:sp>
         <p:nvSpPr>
-          <p:cNvPr id="443" name="row:DQL / BQL:start-label"/>
-          <p:cNvSpPr txBox="1"/>
-          <p:nvPr/>
-        </p:nvSpPr>
-        <p:spPr>
-          <a:xfrm>
-            <a:off x="3257664" y="1507021"/>
-            <a:ext cx="274320" cy="137160"/>
-          </a:xfrm>
-          <a:prstGeom prst="rect">
-            <a:avLst/>
-          </a:prstGeom>
-          <a:solidFill>
-            <a:srgbClr val="EEF4FF"/>
-          </a:solidFill>
-        </p:spPr>
-        <p:txBody>
-          <a:bodyPr wrap="square" lIns="0" tIns="0" rIns="0" bIns="0" anchor="ctr">
-            <a:noAutofit/>
-          </a:bodyPr>
-          <a:lstStyle/>
-          <a:p>
-            <a:pPr algn="ctr">
+          <p:cNvPr id="477" name="row:DQL / BQL:start-label"/>
+          <p:cNvSpPr txBox="1"/>
+          <p:nvPr/>
+        </p:nvSpPr>
+        <p:spPr>
+          <a:xfrm>
+            <a:off x="3262236" y="1507021"/>
+            <a:ext cx="259303" cy="137160"/>
+          </a:xfrm>
+          <a:prstGeom prst="rect">
+            <a:avLst/>
+          </a:prstGeom>
+          <a:noFill/>
+        </p:spPr>
+        <p:txBody>
+          <a:bodyPr wrap="square" lIns="0" tIns="0" rIns="0" bIns="0" anchor="ctr">
+            <a:noAutofit/>
+          </a:bodyPr>
+          <a:lstStyle/>
+          <a:p>
+            <a:pPr algn="l">
               <a:defRPr sz="530" i="1">
                 <a:solidFill>
                   <a:srgbClr val="475569"/>
@@ -19731,7 +19379,7 @@
       </p:sp>
       <p:sp>
         <p:nvSpPr>
-          <p:cNvPr id="449" name="row:CoDel / fq_codel:start-label"/>
+          <p:cNvPr id="483" name="row:CoDel / fq_codel:start-label"/>
           <p:cNvSpPr txBox="1"/>
           <p:nvPr/>
         </p:nvSpPr>
@@ -19771,7 +19419,7 @@
       </p:sp>
       <p:sp>
         <p:nvSpPr>
-          <p:cNvPr id="455" name="row:TSQ:start-label"/>
+          <p:cNvPr id="489" name="row:TSQ:start-label"/>
           <p:cNvSpPr txBox="1"/>
           <p:nvPr/>
         </p:nvSpPr>
@@ -19811,7 +19459,7 @@
       </p:sp>
       <p:sp>
         <p:nvSpPr>
-          <p:cNvPr id="461" name="row:SO_BUSY_POLL:start-label"/>
+          <p:cNvPr id="495" name="row:SO_BUSY_POLL:start-label"/>
           <p:cNvSpPr txBox="1"/>
           <p:nvPr/>
         </p:nvSpPr>
@@ -19851,7 +19499,7 @@
       </p:sp>
       <p:sp>
         <p:nvSpPr>
-          <p:cNvPr id="467" name="row:sch_fq / TCP pacing:start-label"/>
+          <p:cNvPr id="501" name="row:sch_fq / TCP pacing:start-label"/>
           <p:cNvSpPr txBox="1"/>
           <p:nvPr/>
         </p:nvSpPr>
@@ -19891,13 +19539,53 @@
       </p:sp>
       <p:sp>
         <p:nvSpPr>
-          <p:cNvPr id="475" name="row:SO_TXTIME / EDT / taprio:start-label"/>
-          <p:cNvSpPr txBox="1"/>
-          <p:nvPr/>
-        </p:nvSpPr>
-        <p:spPr>
-          <a:xfrm>
-            <a:off x="6921900" y="1992561"/>
+          <p:cNvPr id="507" name="row:SO_TXTIME / EDT / taprio:start-label"/>
+          <p:cNvSpPr txBox="1"/>
+          <p:nvPr/>
+        </p:nvSpPr>
+        <p:spPr>
+          <a:xfrm>
+            <a:off x="7359034" y="1992561"/>
+            <a:ext cx="196623" cy="137160"/>
+          </a:xfrm>
+          <a:prstGeom prst="rect">
+            <a:avLst/>
+          </a:prstGeom>
+          <a:noFill/>
+        </p:spPr>
+        <p:txBody>
+          <a:bodyPr wrap="square" lIns="0" tIns="0" rIns="0" bIns="0" anchor="ctr">
+            <a:noAutofit/>
+          </a:bodyPr>
+          <a:lstStyle/>
+          <a:p>
+            <a:pPr algn="l">
+              <a:defRPr sz="530" i="1">
+                <a:solidFill>
+                  <a:srgbClr val="475569"/>
+                </a:solidFill>
+              </a:defRPr>
+            </a:pPr>
+            <a:r>
+              <a:rPr sz="650" i="1">
+                <a:solidFill>
+                  <a:srgbClr val="475569"/>
+                </a:solidFill>
+              </a:rPr>
+              <a:t>~4.11</a:t>
+            </a:r>
+          </a:p>
+        </p:txBody>
+      </p:sp>
+      <p:sp>
+        <p:nvSpPr>
+          <p:cNvPr id="515" name="row:BIG TCP:start-label"/>
+          <p:cNvSpPr txBox="1"/>
+          <p:nvPr/>
+        </p:nvSpPr>
+        <p:spPr>
+          <a:xfrm>
+            <a:off x="9795402" y="2089669"/>
             <a:ext cx="249682" cy="137160"/>
           </a:xfrm>
           <a:prstGeom prst="rect">
@@ -19924,20 +19612,20 @@
                   <a:srgbClr val="475569"/>
                 </a:solidFill>
               </a:rPr>
-              <a:t>~4.11</a:t>
-            </a:r>
-          </a:p>
-        </p:txBody>
-      </p:sp>
-      <p:sp>
-        <p:nvSpPr>
-          <p:cNvPr id="481" name="row:BIG TCP:start-label"/>
-          <p:cNvSpPr txBox="1"/>
-          <p:nvPr/>
-        </p:nvSpPr>
-        <p:spPr>
-          <a:xfrm>
-            <a:off x="9795402" y="2089669"/>
+              <a:t>~5.12</a:t>
+            </a:r>
+          </a:p>
+        </p:txBody>
+      </p:sp>
+      <p:sp>
+        <p:nvSpPr>
+          <p:cNvPr id="527" name="row:io_uring SEND_ZC / multishot recv:start-label"/>
+          <p:cNvSpPr txBox="1"/>
+          <p:nvPr/>
+        </p:nvSpPr>
+        <p:spPr>
+          <a:xfrm>
+            <a:off x="10306329" y="2283885"/>
             <a:ext cx="249682" cy="137160"/>
           </a:xfrm>
           <a:prstGeom prst="rect">
@@ -19964,20 +19652,20 @@
                   <a:srgbClr val="475569"/>
                 </a:solidFill>
               </a:rPr>
-              <a:t>~5.12</a:t>
-            </a:r>
-          </a:p>
-        </p:txBody>
-      </p:sp>
-      <p:sp>
-        <p:nvSpPr>
-          <p:cNvPr id="493" name="row:io_uring SEND_ZC / multishot recv:start-label"/>
-          <p:cNvSpPr txBox="1"/>
-          <p:nvPr/>
-        </p:nvSpPr>
-        <p:spPr>
-          <a:xfrm>
-            <a:off x="10306329" y="2283885"/>
+              <a:t>~5.16</a:t>
+            </a:r>
+          </a:p>
+        </p:txBody>
+      </p:sp>
+      <p:sp>
+        <p:nvSpPr>
+          <p:cNvPr id="533" name="row:dev_queue_xmit() llist:start-label"/>
+          <p:cNvSpPr txBox="1"/>
+          <p:nvPr/>
+        </p:nvSpPr>
+        <p:spPr>
+          <a:xfrm>
+            <a:off x="12984962" y="2380993"/>
             <a:ext cx="249682" cy="137160"/>
           </a:xfrm>
           <a:prstGeom prst="rect">
@@ -20004,20 +19692,20 @@
                   <a:srgbClr val="475569"/>
                 </a:solidFill>
               </a:rPr>
-              <a:t>~5.16</a:t>
-            </a:r>
-          </a:p>
-        </p:txBody>
-      </p:sp>
-      <p:sp>
-        <p:nvSpPr>
-          <p:cNvPr id="499" name="row:dev_queue_xmit() llist:start-label"/>
-          <p:cNvSpPr txBox="1"/>
-          <p:nvPr/>
-        </p:nvSpPr>
-        <p:spPr>
-          <a:xfrm>
-            <a:off x="12984962" y="2380993"/>
+              <a:t>~6.18</a:t>
+            </a:r>
+          </a:p>
+        </p:txBody>
+      </p:sp>
+      <p:sp>
+        <p:nvSpPr>
+          <p:cNvPr id="539" name="row:cake_mq:start-label"/>
+          <p:cNvSpPr txBox="1"/>
+          <p:nvPr/>
+        </p:nvSpPr>
+        <p:spPr>
+          <a:xfrm>
+            <a:off x="12434017" y="2478101"/>
             <a:ext cx="249682" cy="137160"/>
           </a:xfrm>
           <a:prstGeom prst="rect">
@@ -20044,20 +19732,20 @@
                   <a:srgbClr val="475569"/>
                 </a:solidFill>
               </a:rPr>
-              <a:t>~6.18</a:t>
-            </a:r>
-          </a:p>
-        </p:txBody>
-      </p:sp>
-      <p:sp>
-        <p:nvSpPr>
-          <p:cNvPr id="505" name="row:cake_mq:start-label"/>
-          <p:cNvSpPr txBox="1"/>
-          <p:nvPr/>
-        </p:nvSpPr>
-        <p:spPr>
-          <a:xfrm>
-            <a:off x="12434017" y="2478101"/>
+              <a:t>~6.13</a:t>
+            </a:r>
+          </a:p>
+        </p:txBody>
+      </p:sp>
+      <p:sp>
+        <p:nvSpPr>
+          <p:cNvPr id="545" name="row:eBPF foundation:start-label"/>
+          <p:cNvSpPr txBox="1"/>
+          <p:nvPr/>
+        </p:nvSpPr>
+        <p:spPr>
+          <a:xfrm>
+            <a:off x="4448733" y="2666649"/>
             <a:ext cx="249682" cy="137160"/>
           </a:xfrm>
           <a:prstGeom prst="rect">
@@ -20084,20 +19772,20 @@
                   <a:srgbClr val="475569"/>
                 </a:solidFill>
               </a:rPr>
-              <a:t>~6.13</a:t>
-            </a:r>
-          </a:p>
-        </p:txBody>
-      </p:sp>
-      <p:sp>
-        <p:nvSpPr>
-          <p:cNvPr id="513" name="row:eBPF foundation:start-label"/>
-          <p:cNvSpPr txBox="1"/>
-          <p:nvPr/>
-        </p:nvSpPr>
-        <p:spPr>
-          <a:xfrm>
-            <a:off x="4448733" y="2666649"/>
+              <a:t>~3.10</a:t>
+            </a:r>
+          </a:p>
+        </p:txBody>
+      </p:sp>
+      <p:sp>
+        <p:nvSpPr>
+          <p:cNvPr id="553" name="row:TC BPF:start-label"/>
+          <p:cNvSpPr txBox="1"/>
+          <p:nvPr/>
+        </p:nvSpPr>
+        <p:spPr>
+          <a:xfrm>
+            <a:off x="5351418" y="2763757"/>
             <a:ext cx="249682" cy="137160"/>
           </a:xfrm>
           <a:prstGeom prst="rect">
@@ -20124,21 +19812,61 @@
                   <a:srgbClr val="475569"/>
                 </a:solidFill>
               </a:rPr>
-              <a:t>~3.10</a:t>
-            </a:r>
-          </a:p>
-        </p:txBody>
-      </p:sp>
-      <p:sp>
-        <p:nvSpPr>
-          <p:cNvPr id="519" name="row:TC BPF:start-label"/>
-          <p:cNvSpPr txBox="1"/>
-          <p:nvPr/>
-        </p:nvSpPr>
-        <p:spPr>
-          <a:xfrm>
-            <a:off x="5351418" y="2763757"/>
-            <a:ext cx="249682" cy="137160"/>
+              <a:t>~3.18</a:t>
+            </a:r>
+          </a:p>
+        </p:txBody>
+      </p:sp>
+      <p:sp>
+        <p:nvSpPr>
+          <p:cNvPr id="559" name="row:TCX:start-label"/>
+          <p:cNvSpPr txBox="1"/>
+          <p:nvPr/>
+        </p:nvSpPr>
+        <p:spPr>
+          <a:xfrm>
+            <a:off x="11108645" y="2860865"/>
+            <a:ext cx="154780" cy="137160"/>
+          </a:xfrm>
+          <a:prstGeom prst="rect">
+            <a:avLst/>
+          </a:prstGeom>
+          <a:noFill/>
+        </p:spPr>
+        <p:txBody>
+          <a:bodyPr wrap="square" lIns="0" tIns="0" rIns="0" bIns="0" anchor="ctr">
+            <a:noAutofit/>
+          </a:bodyPr>
+          <a:lstStyle/>
+          <a:p>
+            <a:pPr algn="l">
+              <a:defRPr sz="530" i="1">
+                <a:solidFill>
+                  <a:srgbClr val="475569"/>
+                </a:solidFill>
+              </a:defRPr>
+            </a:pPr>
+            <a:r>
+              <a:rPr sz="650" i="1">
+                <a:solidFill>
+                  <a:srgbClr val="475569"/>
+                </a:solidFill>
+              </a:rPr>
+              <a:t>~6.0</a:t>
+            </a:r>
+          </a:p>
+        </p:txBody>
+      </p:sp>
+      <p:sp>
+        <p:nvSpPr>
+          <p:cNvPr id="565" name="row:netkit:start-label"/>
+          <p:cNvSpPr txBox="1"/>
+          <p:nvPr/>
+        </p:nvSpPr>
+        <p:spPr>
+          <a:xfrm>
+            <a:off x="10950848" y="2957973"/>
+            <a:ext cx="205232" cy="137160"/>
           </a:xfrm>
           <a:prstGeom prst="rect">
             <a:avLst/>
@@ -20164,21 +19892,101 @@
                   <a:srgbClr val="475569"/>
                 </a:solidFill>
               </a:rPr>
-              <a:t>~3.18</a:t>
-            </a:r>
-          </a:p>
-        </p:txBody>
-      </p:sp>
-      <p:sp>
-        <p:nvSpPr>
-          <p:cNvPr id="525" name="row:TCX:start-label"/>
-          <p:cNvSpPr txBox="1"/>
-          <p:nvPr/>
-        </p:nvSpPr>
-        <p:spPr>
-          <a:xfrm>
-            <a:off x="10715961" y="2860865"/>
-            <a:ext cx="205232" cy="137160"/>
+              <a:t>~6.1</a:t>
+            </a:r>
+          </a:p>
+        </p:txBody>
+      </p:sp>
+      <p:sp>
+        <p:nvSpPr>
+          <p:cNvPr id="571" name="row:cgroup / LWT BPF:start-label"/>
+          <p:cNvSpPr txBox="1"/>
+          <p:nvPr/>
+        </p:nvSpPr>
+        <p:spPr>
+          <a:xfrm>
+            <a:off x="6525787" y="3055081"/>
+            <a:ext cx="154780" cy="137160"/>
+          </a:xfrm>
+          <a:prstGeom prst="rect">
+            <a:avLst/>
+          </a:prstGeom>
+          <a:noFill/>
+        </p:spPr>
+        <p:txBody>
+          <a:bodyPr wrap="square" lIns="0" tIns="0" rIns="0" bIns="0" anchor="ctr">
+            <a:noAutofit/>
+          </a:bodyPr>
+          <a:lstStyle/>
+          <a:p>
+            <a:pPr algn="l">
+              <a:defRPr sz="530" i="1">
+                <a:solidFill>
+                  <a:srgbClr val="475569"/>
+                </a:solidFill>
+              </a:defRPr>
+            </a:pPr>
+            <a:r>
+              <a:rPr sz="650" i="1">
+                <a:solidFill>
+                  <a:srgbClr val="475569"/>
+                </a:solidFill>
+              </a:rPr>
+              <a:t>~4.4</a:t>
+            </a:r>
+          </a:p>
+        </p:txBody>
+      </p:sp>
+      <p:sp>
+        <p:nvSpPr>
+          <p:cNvPr id="577" name="row:SOCK_OPS / SOCKMAP:start-label"/>
+          <p:cNvSpPr txBox="1"/>
+          <p:nvPr/>
+        </p:nvSpPr>
+        <p:spPr>
+          <a:xfrm>
+            <a:off x="6872973" y="3152189"/>
+            <a:ext cx="154780" cy="137160"/>
+          </a:xfrm>
+          <a:prstGeom prst="rect">
+            <a:avLst/>
+          </a:prstGeom>
+          <a:noFill/>
+        </p:spPr>
+        <p:txBody>
+          <a:bodyPr wrap="square" lIns="0" tIns="0" rIns="0" bIns="0" anchor="ctr">
+            <a:noAutofit/>
+          </a:bodyPr>
+          <a:lstStyle/>
+          <a:p>
+            <a:pPr algn="l">
+              <a:defRPr sz="530" i="1">
+                <a:solidFill>
+                  <a:srgbClr val="475569"/>
+                </a:solidFill>
+              </a:defRPr>
+            </a:pPr>
+            <a:r>
+              <a:rPr sz="650" i="1">
+                <a:solidFill>
+                  <a:srgbClr val="475569"/>
+                </a:solidFill>
+              </a:rPr>
+              <a:t>~4.7</a:t>
+            </a:r>
+          </a:p>
+        </p:txBody>
+      </p:sp>
+      <p:sp>
+        <p:nvSpPr>
+          <p:cNvPr id="585" name="row:BPF struct_ops:start-label"/>
+          <p:cNvSpPr txBox="1"/>
+          <p:nvPr/>
+        </p:nvSpPr>
+        <p:spPr>
+          <a:xfrm>
+            <a:off x="8128908" y="3249297"/>
+            <a:ext cx="249682" cy="137160"/>
           </a:xfrm>
           <a:prstGeom prst="rect">
             <a:avLst/>
@@ -20204,20 +20012,60 @@
                   <a:srgbClr val="475569"/>
                 </a:solidFill>
               </a:rPr>
-              <a:t>~6.0</a:t>
-            </a:r>
-          </a:p>
-        </p:txBody>
-      </p:sp>
-      <p:sp>
-        <p:nvSpPr>
-          <p:cNvPr id="531" name="row:netkit:start-label"/>
-          <p:cNvSpPr txBox="1"/>
-          <p:nvPr/>
-        </p:nvSpPr>
-        <p:spPr>
-          <a:xfrm>
-            <a:off x="10950848" y="2957973"/>
+              <a:t>~4.19</a:t>
+            </a:r>
+          </a:p>
+        </p:txBody>
+      </p:sp>
+      <p:sp>
+        <p:nvSpPr>
+          <p:cNvPr id="591" name="row:BPF qdisc:start-label"/>
+          <p:cNvSpPr txBox="1"/>
+          <p:nvPr/>
+        </p:nvSpPr>
+        <p:spPr>
+          <a:xfrm>
+            <a:off x="12358516" y="3346405"/>
+            <a:ext cx="196623" cy="137160"/>
+          </a:xfrm>
+          <a:prstGeom prst="rect">
+            <a:avLst/>
+          </a:prstGeom>
+          <a:noFill/>
+        </p:spPr>
+        <p:txBody>
+          <a:bodyPr wrap="square" lIns="0" tIns="0" rIns="0" bIns="0" anchor="ctr">
+            <a:noAutofit/>
+          </a:bodyPr>
+          <a:lstStyle/>
+          <a:p>
+            <a:pPr algn="l">
+              <a:defRPr sz="530" i="1">
+                <a:solidFill>
+                  <a:srgbClr val="475569"/>
+                </a:solidFill>
+              </a:defRPr>
+            </a:pPr>
+            <a:r>
+              <a:rPr sz="650" i="1">
+                <a:solidFill>
+                  <a:srgbClr val="475569"/>
+                </a:solidFill>
+              </a:rPr>
+              <a:t>~6.10</a:t>
+            </a:r>
+          </a:p>
+        </p:txBody>
+      </p:sp>
+      <p:sp>
+        <p:nvSpPr>
+          <p:cNvPr id="597" name="row:SK_LOOKUP:start-label"/>
+          <p:cNvSpPr txBox="1"/>
+          <p:nvPr/>
+        </p:nvSpPr>
+        <p:spPr>
+          <a:xfrm>
+            <a:off x="8659418" y="3443513"/>
             <a:ext cx="205232" cy="137160"/>
           </a:xfrm>
           <a:prstGeom prst="rect">
@@ -20244,20 +20092,220 @@
                   <a:srgbClr val="475569"/>
                 </a:solidFill>
               </a:rPr>
-              <a:t>~6.1</a:t>
-            </a:r>
-          </a:p>
-        </p:txBody>
-      </p:sp>
-      <p:sp>
-        <p:nvSpPr>
-          <p:cNvPr id="537" name="row:cgroup / LWT BPF:start-label"/>
-          <p:cNvSpPr txBox="1"/>
-          <p:nvPr/>
-        </p:nvSpPr>
-        <p:spPr>
-          <a:xfrm>
-            <a:off x="6133103" y="3055081"/>
+              <a:t>~5.2</a:t>
+            </a:r>
+          </a:p>
+        </p:txBody>
+      </p:sp>
+      <p:sp>
+        <p:nvSpPr>
+          <p:cNvPr id="603" name="row:XDP:start-label"/>
+          <p:cNvSpPr txBox="1"/>
+          <p:nvPr/>
+        </p:nvSpPr>
+        <p:spPr>
+          <a:xfrm>
+            <a:off x="6609111" y="3540621"/>
+            <a:ext cx="154780" cy="137160"/>
+          </a:xfrm>
+          <a:prstGeom prst="rect">
+            <a:avLst/>
+          </a:prstGeom>
+          <a:noFill/>
+        </p:spPr>
+        <p:txBody>
+          <a:bodyPr wrap="square" lIns="0" tIns="0" rIns="0" bIns="0" anchor="ctr">
+            <a:noAutofit/>
+          </a:bodyPr>
+          <a:lstStyle/>
+          <a:p>
+            <a:pPr algn="l">
+              <a:defRPr sz="530" i="1">
+                <a:solidFill>
+                  <a:srgbClr val="475569"/>
+                </a:solidFill>
+              </a:defRPr>
+            </a:pPr>
+            <a:r>
+              <a:rPr sz="650" i="1">
+                <a:solidFill>
+                  <a:srgbClr val="475569"/>
+                </a:solidFill>
+              </a:rPr>
+              <a:t>~4.5</a:t>
+            </a:r>
+          </a:p>
+        </p:txBody>
+      </p:sp>
+      <p:sp>
+        <p:nvSpPr>
+          <p:cNvPr id="609" name="row:XDP devmap / cpumap:start-label"/>
+          <p:cNvSpPr txBox="1"/>
+          <p:nvPr/>
+        </p:nvSpPr>
+        <p:spPr>
+          <a:xfrm>
+            <a:off x="7489743" y="3637729"/>
+            <a:ext cx="196623" cy="137160"/>
+          </a:xfrm>
+          <a:prstGeom prst="rect">
+            <a:avLst/>
+          </a:prstGeom>
+          <a:noFill/>
+        </p:spPr>
+        <p:txBody>
+          <a:bodyPr wrap="square" lIns="0" tIns="0" rIns="0" bIns="0" anchor="ctr">
+            <a:noAutofit/>
+          </a:bodyPr>
+          <a:lstStyle/>
+          <a:p>
+            <a:pPr algn="l">
+              <a:defRPr sz="530" i="1">
+                <a:solidFill>
+                  <a:srgbClr val="475569"/>
+                </a:solidFill>
+              </a:defRPr>
+            </a:pPr>
+            <a:r>
+              <a:rPr sz="650" i="1">
+                <a:solidFill>
+                  <a:srgbClr val="475569"/>
+                </a:solidFill>
+              </a:rPr>
+              <a:t>~4.12</a:t>
+            </a:r>
+          </a:p>
+        </p:txBody>
+      </p:sp>
+      <p:sp>
+        <p:nvSpPr>
+          <p:cNvPr id="617" name="row:XDP multi-buffer:start-label"/>
+          <p:cNvSpPr txBox="1"/>
+          <p:nvPr/>
+        </p:nvSpPr>
+        <p:spPr>
+          <a:xfrm>
+            <a:off x="9997649" y="3734837"/>
+            <a:ext cx="196623" cy="137160"/>
+          </a:xfrm>
+          <a:prstGeom prst="rect">
+            <a:avLst/>
+          </a:prstGeom>
+          <a:noFill/>
+        </p:spPr>
+        <p:txBody>
+          <a:bodyPr wrap="square" lIns="0" tIns="0" rIns="0" bIns="0" anchor="ctr">
+            <a:noAutofit/>
+          </a:bodyPr>
+          <a:lstStyle/>
+          <a:p>
+            <a:pPr algn="l">
+              <a:defRPr sz="530" i="1">
+                <a:solidFill>
+                  <a:srgbClr val="475569"/>
+                </a:solidFill>
+              </a:defRPr>
+            </a:pPr>
+            <a:r>
+              <a:rPr sz="650" i="1">
+                <a:solidFill>
+                  <a:srgbClr val="475569"/>
+                </a:solidFill>
+              </a:rPr>
+              <a:t>~5.11</a:t>
+            </a:r>
+          </a:p>
+        </p:txBody>
+      </p:sp>
+      <p:sp>
+        <p:nvSpPr>
+          <p:cNvPr id="623" name="row:AF_XDP:start-label"/>
+          <p:cNvSpPr txBox="1"/>
+          <p:nvPr/>
+        </p:nvSpPr>
+        <p:spPr>
+          <a:xfrm>
+            <a:off x="7220159" y="3923385"/>
+            <a:ext cx="196623" cy="137160"/>
+          </a:xfrm>
+          <a:prstGeom prst="rect">
+            <a:avLst/>
+          </a:prstGeom>
+          <a:noFill/>
+        </p:spPr>
+        <p:txBody>
+          <a:bodyPr wrap="square" lIns="0" tIns="0" rIns="0" bIns="0" anchor="ctr">
+            <a:noAutofit/>
+          </a:bodyPr>
+          <a:lstStyle/>
+          <a:p>
+            <a:pPr algn="l">
+              <a:defRPr sz="530" i="1">
+                <a:solidFill>
+                  <a:srgbClr val="475569"/>
+                </a:solidFill>
+              </a:defRPr>
+            </a:pPr>
+            <a:r>
+              <a:rPr sz="650" i="1">
+                <a:solidFill>
+                  <a:srgbClr val="475569"/>
+                </a:solidFill>
+              </a:rPr>
+              <a:t>~4.10</a:t>
+            </a:r>
+          </a:p>
+        </p:txBody>
+      </p:sp>
+      <p:sp>
+        <p:nvSpPr>
+          <p:cNvPr id="629" name="row:AF_XDP multi-buffer:start-label"/>
+          <p:cNvSpPr txBox="1"/>
+          <p:nvPr/>
+        </p:nvSpPr>
+        <p:spPr>
+          <a:xfrm>
+            <a:off x="10692022" y="4020493"/>
+            <a:ext cx="196623" cy="137160"/>
+          </a:xfrm>
+          <a:prstGeom prst="rect">
+            <a:avLst/>
+          </a:prstGeom>
+          <a:noFill/>
+        </p:spPr>
+        <p:txBody>
+          <a:bodyPr wrap="square" lIns="0" tIns="0" rIns="0" bIns="0" anchor="ctr">
+            <a:noAutofit/>
+          </a:bodyPr>
+          <a:lstStyle/>
+          <a:p>
+            <a:pPr algn="l">
+              <a:defRPr sz="530" i="1">
+                <a:solidFill>
+                  <a:srgbClr val="475569"/>
+                </a:solidFill>
+              </a:defRPr>
+            </a:pPr>
+            <a:r>
+              <a:rPr sz="650" i="1">
+                <a:solidFill>
+                  <a:srgbClr val="475569"/>
+                </a:solidFill>
+              </a:rPr>
+              <a:t>~5.16</a:t>
+            </a:r>
+          </a:p>
+        </p:txBody>
+      </p:sp>
+      <p:sp>
+        <p:nvSpPr>
+          <p:cNvPr id="635" name="row:page_pool:start-label"/>
+          <p:cNvSpPr txBox="1"/>
+          <p:nvPr/>
+        </p:nvSpPr>
+        <p:spPr>
+          <a:xfrm>
+            <a:off x="6367989" y="4117601"/>
             <a:ext cx="205232" cy="137160"/>
           </a:xfrm>
           <a:prstGeom prst="rect">
@@ -20284,20 +20332,60 @@
                   <a:srgbClr val="475569"/>
                 </a:solidFill>
               </a:rPr>
-              <a:t>~4.4</a:t>
-            </a:r>
-          </a:p>
-        </p:txBody>
-      </p:sp>
-      <p:sp>
-        <p:nvSpPr>
-          <p:cNvPr id="545" name="row:SOCK_OPS / SOCKMAP:start-label"/>
-          <p:cNvSpPr txBox="1"/>
-          <p:nvPr/>
-        </p:nvSpPr>
-        <p:spPr>
-          <a:xfrm>
-            <a:off x="6480289" y="3152189"/>
+              <a:t>~4.5</a:t>
+            </a:r>
+          </a:p>
+        </p:txBody>
+      </p:sp>
+      <p:sp>
+        <p:nvSpPr>
+          <p:cNvPr id="641" name="row:netmem:start-label"/>
+          <p:cNvSpPr txBox="1"/>
+          <p:nvPr/>
+        </p:nvSpPr>
+        <p:spPr>
+          <a:xfrm>
+            <a:off x="12052355" y="4214709"/>
+            <a:ext cx="154780" cy="137160"/>
+          </a:xfrm>
+          <a:prstGeom prst="rect">
+            <a:avLst/>
+          </a:prstGeom>
+          <a:noFill/>
+        </p:spPr>
+        <p:txBody>
+          <a:bodyPr wrap="square" lIns="0" tIns="0" rIns="0" bIns="0" anchor="ctr">
+            <a:noAutofit/>
+          </a:bodyPr>
+          <a:lstStyle/>
+          <a:p>
+            <a:pPr algn="l">
+              <a:defRPr sz="530" i="1">
+                <a:solidFill>
+                  <a:srgbClr val="475569"/>
+                </a:solidFill>
+              </a:defRPr>
+            </a:pPr>
+            <a:r>
+              <a:rPr sz="650" i="1">
+                <a:solidFill>
+                  <a:srgbClr val="475569"/>
+                </a:solidFill>
+              </a:rPr>
+              <a:t>~6.7</a:t>
+            </a:r>
+          </a:p>
+        </p:txBody>
+      </p:sp>
+      <p:sp>
+        <p:nvSpPr>
+          <p:cNvPr id="647" name="row:Device Memory TCP RX · TX:start-label"/>
+          <p:cNvSpPr txBox="1"/>
+          <p:nvPr/>
+        </p:nvSpPr>
+        <p:spPr>
+          <a:xfrm>
+            <a:off x="11159159" y="4311817"/>
             <a:ext cx="205232" cy="137160"/>
           </a:xfrm>
           <a:prstGeom prst="rect">
@@ -20324,20 +20412,20 @@
                   <a:srgbClr val="475569"/>
                 </a:solidFill>
               </a:rPr>
-              <a:t>~4.7</a:t>
-            </a:r>
-          </a:p>
-        </p:txBody>
-      </p:sp>
-      <p:sp>
-        <p:nvSpPr>
-          <p:cNvPr id="551" name="row:BPF struct_ops:start-label"/>
-          <p:cNvSpPr txBox="1"/>
-          <p:nvPr/>
-        </p:nvSpPr>
-        <p:spPr>
-          <a:xfrm>
-            <a:off x="8128908" y="3249297"/>
+              <a:t>~6.2</a:t>
+            </a:r>
+          </a:p>
+        </p:txBody>
+      </p:sp>
+      <p:sp>
+        <p:nvSpPr>
+          <p:cNvPr id="661" name="row:large RX buffers (providers / ZCRX):start-label"/>
+          <p:cNvSpPr txBox="1"/>
+          <p:nvPr/>
+        </p:nvSpPr>
+        <p:spPr>
+          <a:xfrm>
+            <a:off x="12434017" y="4603141"/>
             <a:ext cx="249682" cy="137160"/>
           </a:xfrm>
           <a:prstGeom prst="rect">
@@ -20364,21 +20452,21 @@
                   <a:srgbClr val="475569"/>
                 </a:solidFill>
               </a:rPr>
-              <a:t>~4.19</a:t>
-            </a:r>
-          </a:p>
-        </p:txBody>
-      </p:sp>
-      <p:sp>
-        <p:nvSpPr>
-          <p:cNvPr id="557" name="row:BPF qdisc:start-label"/>
-          <p:cNvSpPr txBox="1"/>
-          <p:nvPr/>
-        </p:nvSpPr>
-        <p:spPr>
-          <a:xfrm>
-            <a:off x="11921382" y="3346405"/>
-            <a:ext cx="249682" cy="137160"/>
+              <a:t>~6.13</a:t>
+            </a:r>
+          </a:p>
+        </p:txBody>
+      </p:sp>
+      <p:sp>
+        <p:nvSpPr>
+          <p:cNvPr id="667" name="row:io_uring ZCRX:start-label"/>
+          <p:cNvSpPr txBox="1"/>
+          <p:nvPr/>
+        </p:nvSpPr>
+        <p:spPr>
+          <a:xfrm>
+            <a:off x="11367471" y="4700249"/>
+            <a:ext cx="205232" cy="137160"/>
           </a:xfrm>
           <a:prstGeom prst="rect">
             <a:avLst/>
@@ -20404,21 +20492,21 @@
                   <a:srgbClr val="475569"/>
                 </a:solidFill>
               </a:rPr>
-              <a:t>~6.10</a:t>
-            </a:r>
-          </a:p>
-        </p:txBody>
-      </p:sp>
-      <p:sp>
-        <p:nvSpPr>
-          <p:cNvPr id="563" name="row:SK_LOOKUP:start-label"/>
-          <p:cNvSpPr txBox="1"/>
-          <p:nvPr/>
-        </p:nvSpPr>
-        <p:spPr>
-          <a:xfrm>
-            <a:off x="8659418" y="3443513"/>
-            <a:ext cx="205232" cy="137160"/>
+              <a:t>~6.4</a:t>
+            </a:r>
+          </a:p>
+        </p:txBody>
+      </p:sp>
+      <p:sp>
+        <p:nvSpPr>
+          <p:cNvPr id="673" name="row:RX HW queue leasing:start-label"/>
+          <p:cNvSpPr txBox="1"/>
+          <p:nvPr/>
+        </p:nvSpPr>
+        <p:spPr>
+          <a:xfrm>
+            <a:off x="12086831" y="4797357"/>
+            <a:ext cx="249682" cy="137160"/>
           </a:xfrm>
           <a:prstGeom prst="rect">
             <a:avLst/>
@@ -20444,21 +20532,21 @@
                   <a:srgbClr val="475569"/>
                 </a:solidFill>
               </a:rPr>
-              <a:t>~5.2</a:t>
-            </a:r>
-          </a:p>
-        </p:txBody>
-      </p:sp>
-      <p:sp>
-        <p:nvSpPr>
-          <p:cNvPr id="569" name="row:XDP:start-label"/>
-          <p:cNvSpPr txBox="1"/>
-          <p:nvPr/>
-        </p:nvSpPr>
-        <p:spPr>
-          <a:xfrm>
-            <a:off x="6216427" y="3540621"/>
-            <a:ext cx="205232" cy="137160"/>
+              <a:t>~6.10</a:t>
+            </a:r>
+          </a:p>
+        </p:txBody>
+      </p:sp>
+      <p:sp>
+        <p:nvSpPr>
+          <p:cNvPr id="689" name="row:nexthop objects:start-label"/>
+          <p:cNvSpPr txBox="1"/>
+          <p:nvPr/>
+        </p:nvSpPr>
+        <p:spPr>
+          <a:xfrm>
+            <a:off x="7573410" y="5180121"/>
+            <a:ext cx="249682" cy="137160"/>
           </a:xfrm>
           <a:prstGeom prst="rect">
             <a:avLst/>
@@ -20484,21 +20572,21 @@
                   <a:srgbClr val="475569"/>
                 </a:solidFill>
               </a:rPr>
-              <a:t>~4.5</a:t>
-            </a:r>
-          </a:p>
-        </p:txBody>
-      </p:sp>
-      <p:sp>
-        <p:nvSpPr>
-          <p:cNvPr id="577" name="row:XDP devmap / cpumap:start-label"/>
-          <p:cNvSpPr txBox="1"/>
-          <p:nvPr/>
-        </p:nvSpPr>
-        <p:spPr>
-          <a:xfrm>
-            <a:off x="6744211" y="3637729"/>
-            <a:ext cx="249682" cy="137160"/>
+              <a:t>~4.15</a:t>
+            </a:r>
+          </a:p>
+        </p:txBody>
+      </p:sp>
+      <p:sp>
+        <p:nvSpPr>
+          <p:cNvPr id="695" name="row:per-netns RTNL:start-label"/>
+          <p:cNvSpPr txBox="1"/>
+          <p:nvPr/>
+        </p:nvSpPr>
+        <p:spPr>
+          <a:xfrm>
+            <a:off x="11089722" y="5277229"/>
+            <a:ext cx="205232" cy="137160"/>
           </a:xfrm>
           <a:prstGeom prst="rect">
             <a:avLst/>
@@ -20524,21 +20612,21 @@
                   <a:srgbClr val="475569"/>
                 </a:solidFill>
               </a:rPr>
-              <a:t>~4.12</a:t>
-            </a:r>
-          </a:p>
-        </p:txBody>
-      </p:sp>
-      <p:sp>
-        <p:nvSpPr>
-          <p:cNvPr id="583" name="row:XDP multi-buffer:start-label"/>
-          <p:cNvSpPr txBox="1"/>
-          <p:nvPr/>
-        </p:nvSpPr>
-        <p:spPr>
-          <a:xfrm>
-            <a:off x="9560515" y="3734837"/>
-            <a:ext cx="249682" cy="137160"/>
+              <a:t>~6.2</a:t>
+            </a:r>
+          </a:p>
+        </p:txBody>
+      </p:sp>
+      <p:sp>
+        <p:nvSpPr>
+          <p:cNvPr id="701" name="row:further RTNL breakup:start-label"/>
+          <p:cNvSpPr txBox="1"/>
+          <p:nvPr/>
+        </p:nvSpPr>
+        <p:spPr>
+          <a:xfrm>
+            <a:off x="11784095" y="5374337"/>
+            <a:ext cx="205232" cy="137160"/>
           </a:xfrm>
           <a:prstGeom prst="rect">
             <a:avLst/>
@@ -20564,20 +20652,20 @@
                   <a:srgbClr val="475569"/>
                 </a:solidFill>
               </a:rPr>
-              <a:t>~5.11</a:t>
-            </a:r>
-          </a:p>
-        </p:txBody>
-      </p:sp>
-      <p:sp>
-        <p:nvSpPr>
-          <p:cNvPr id="589" name="row:AF_XDP:start-label"/>
-          <p:cNvSpPr txBox="1"/>
-          <p:nvPr/>
-        </p:nvSpPr>
-        <p:spPr>
-          <a:xfrm>
-            <a:off x="6744211" y="3923385"/>
+              <a:t>~6.7</a:t>
+            </a:r>
+          </a:p>
+        </p:txBody>
+      </p:sp>
+      <p:sp>
+        <p:nvSpPr>
+          <p:cNvPr id="707" name="row:RTNL-less FIB rules:start-label"/>
+          <p:cNvSpPr txBox="1"/>
+          <p:nvPr/>
+        </p:nvSpPr>
+        <p:spPr>
+          <a:xfrm>
+            <a:off x="12434017" y="5471445"/>
             <a:ext cx="249682" cy="137160"/>
           </a:xfrm>
           <a:prstGeom prst="rect">
@@ -20604,20 +20692,20 @@
                   <a:srgbClr val="475569"/>
                 </a:solidFill>
               </a:rPr>
-              <a:t>~4.10</a:t>
-            </a:r>
-          </a:p>
-        </p:txBody>
-      </p:sp>
-      <p:sp>
-        <p:nvSpPr>
-          <p:cNvPr id="595" name="row:AF_XDP multi-buffer:start-label"/>
-          <p:cNvSpPr txBox="1"/>
-          <p:nvPr/>
-        </p:nvSpPr>
-        <p:spPr>
-          <a:xfrm>
-            <a:off x="10254888" y="4020493"/>
+              <a:t>~6.13</a:t>
+            </a:r>
+          </a:p>
+        </p:txBody>
+      </p:sp>
+      <p:sp>
+        <p:nvSpPr>
+          <p:cNvPr id="716" name="row:YNL tooling:start-label"/>
+          <p:cNvSpPr txBox="1"/>
+          <p:nvPr/>
+        </p:nvSpPr>
+        <p:spPr>
+          <a:xfrm>
+            <a:off x="10003713" y="5665661"/>
             <a:ext cx="249682" cy="137160"/>
           </a:xfrm>
           <a:prstGeom prst="rect">
@@ -20644,20 +20732,20 @@
                   <a:srgbClr val="475569"/>
                 </a:solidFill>
               </a:rPr>
-              <a:t>~5.16</a:t>
-            </a:r>
-          </a:p>
-        </p:txBody>
-      </p:sp>
-      <p:sp>
-        <p:nvSpPr>
-          <p:cNvPr id="601" name="row:page_pool:start-label"/>
-          <p:cNvSpPr txBox="1"/>
-          <p:nvPr/>
-        </p:nvSpPr>
-        <p:spPr>
-          <a:xfrm>
-            <a:off x="6367989" y="4117601"/>
+              <a:t>~5.13</a:t>
+            </a:r>
+          </a:p>
+        </p:txBody>
+      </p:sp>
+      <p:sp>
+        <p:nvSpPr>
+          <p:cNvPr id="722" name="row:queue/NAPI/page_pool netdev-genl:start-label"/>
+          <p:cNvSpPr txBox="1"/>
+          <p:nvPr/>
+        </p:nvSpPr>
+        <p:spPr>
+          <a:xfrm>
+            <a:off x="11089722" y="5854209"/>
             <a:ext cx="205232" cy="137160"/>
           </a:xfrm>
           <a:prstGeom prst="rect">
@@ -20684,21 +20772,21 @@
                   <a:srgbClr val="475569"/>
                 </a:solidFill>
               </a:rPr>
-              <a:t>~4.5</a:t>
-            </a:r>
-          </a:p>
-        </p:txBody>
-      </p:sp>
-      <p:sp>
-        <p:nvSpPr>
-          <p:cNvPr id="607" name="row:netmem:start-label"/>
-          <p:cNvSpPr txBox="1"/>
-          <p:nvPr/>
-        </p:nvSpPr>
-        <p:spPr>
-          <a:xfrm>
-            <a:off x="11659671" y="4214709"/>
-            <a:ext cx="205232" cy="137160"/>
+              <a:t>~6.2</a:t>
+            </a:r>
+          </a:p>
+        </p:txBody>
+      </p:sp>
+      <p:sp>
+        <p:nvSpPr>
+          <p:cNvPr id="728" name="row:kprobe BPF:start-label"/>
+          <p:cNvSpPr txBox="1"/>
+          <p:nvPr/>
+        </p:nvSpPr>
+        <p:spPr>
+          <a:xfrm>
+            <a:off x="4934794" y="5951317"/>
+            <a:ext cx="249682" cy="137160"/>
           </a:xfrm>
           <a:prstGeom prst="rect">
             <a:avLst/>
@@ -20724,21 +20812,21 @@
                   <a:srgbClr val="475569"/>
                 </a:solidFill>
               </a:rPr>
-              <a:t>~6.7</a:t>
-            </a:r>
-          </a:p>
-        </p:txBody>
-      </p:sp>
-      <p:sp>
-        <p:nvSpPr>
-          <p:cNvPr id="615" name="row:Device Memory TCP RX · TX:start-label"/>
-          <p:cNvSpPr txBox="1"/>
-          <p:nvPr/>
-        </p:nvSpPr>
-        <p:spPr>
-          <a:xfrm>
-            <a:off x="11159159" y="4311817"/>
-            <a:ext cx="205232" cy="137160"/>
+              <a:t>~3.14</a:t>
+            </a:r>
+          </a:p>
+        </p:txBody>
+      </p:sp>
+      <p:sp>
+        <p:nvSpPr>
+          <p:cNvPr id="734" name="row:BTF:start-label"/>
+          <p:cNvSpPr txBox="1"/>
+          <p:nvPr/>
+        </p:nvSpPr>
+        <p:spPr>
+          <a:xfrm>
+            <a:off x="7726552" y="6048425"/>
+            <a:ext cx="249682" cy="137160"/>
           </a:xfrm>
           <a:prstGeom prst="rect">
             <a:avLst/>
@@ -20764,20 +20852,20 @@
                   <a:srgbClr val="475569"/>
                 </a:solidFill>
               </a:rPr>
-              <a:t>~6.2</a:t>
-            </a:r>
-          </a:p>
-        </p:txBody>
-      </p:sp>
-      <p:sp>
-        <p:nvSpPr>
-          <p:cNvPr id="627" name="row:large RX buffers (providers / ZCRX):start-label"/>
-          <p:cNvSpPr txBox="1"/>
-          <p:nvPr/>
-        </p:nvSpPr>
-        <p:spPr>
-          <a:xfrm>
-            <a:off x="12434017" y="4603141"/>
+              <a:t>~4.16</a:t>
+            </a:r>
+          </a:p>
+        </p:txBody>
+      </p:sp>
+      <p:sp>
+        <p:nvSpPr>
+          <p:cNvPr id="740" name="row:structured drop reason:start-label"/>
+          <p:cNvSpPr txBox="1"/>
+          <p:nvPr/>
+        </p:nvSpPr>
+        <p:spPr>
+          <a:xfrm>
+            <a:off x="9656527" y="6145533"/>
             <a:ext cx="249682" cy="137160"/>
           </a:xfrm>
           <a:prstGeom prst="rect">
@@ -20804,21 +20892,21 @@
                   <a:srgbClr val="475569"/>
                 </a:solidFill>
               </a:rPr>
-              <a:t>~6.13</a:t>
-            </a:r>
-          </a:p>
-        </p:txBody>
-      </p:sp>
-      <p:sp>
-        <p:nvSpPr>
-          <p:cNvPr id="633" name="row:io_uring ZCRX:start-label"/>
-          <p:cNvSpPr txBox="1"/>
-          <p:nvPr/>
-        </p:nvSpPr>
-        <p:spPr>
-          <a:xfrm>
-            <a:off x="11367471" y="4700249"/>
-            <a:ext cx="205232" cy="137160"/>
+              <a:t>~5.11</a:t>
+            </a:r>
+          </a:p>
+        </p:txBody>
+      </p:sp>
+      <p:sp>
+        <p:nvSpPr>
+          <p:cNvPr id="746" name="row:drop-reason expansion:start-label"/>
+          <p:cNvSpPr txBox="1"/>
+          <p:nvPr/>
+        </p:nvSpPr>
+        <p:spPr>
+          <a:xfrm>
+            <a:off x="10489774" y="6242641"/>
+            <a:ext cx="249682" cy="137160"/>
           </a:xfrm>
           <a:prstGeom prst="rect">
             <a:avLst/>
@@ -20844,20 +20932,20 @@
                   <a:srgbClr val="475569"/>
                 </a:solidFill>
               </a:rPr>
-              <a:t>~6.4</a:t>
-            </a:r>
-          </a:p>
-        </p:txBody>
-      </p:sp>
-      <p:sp>
-        <p:nvSpPr>
-          <p:cNvPr id="639" name="row:RX HW queue leasing:start-label"/>
-          <p:cNvSpPr txBox="1"/>
-          <p:nvPr/>
-        </p:nvSpPr>
-        <p:spPr>
-          <a:xfrm>
-            <a:off x="12086831" y="4797357"/>
+              <a:t>~5.17</a:t>
+            </a:r>
+          </a:p>
+        </p:txBody>
+      </p:sp>
+      <p:sp>
+        <p:nvSpPr>
+          <p:cNvPr id="752" name="row:qdisc-drop tracepoint:start-label"/>
+          <p:cNvSpPr txBox="1"/>
+          <p:nvPr/>
+        </p:nvSpPr>
+        <p:spPr>
+          <a:xfrm>
+            <a:off x="12434017" y="6339749"/>
             <a:ext cx="249682" cy="137160"/>
           </a:xfrm>
           <a:prstGeom prst="rect">
@@ -20884,20 +20972,20 @@
                   <a:srgbClr val="475569"/>
                 </a:solidFill>
               </a:rPr>
-              <a:t>~6.10</a:t>
-            </a:r>
-          </a:p>
-        </p:txBody>
-      </p:sp>
-      <p:sp>
-        <p:nvSpPr>
-          <p:cNvPr id="655" name="row:nexthop objects:start-label"/>
-          <p:cNvSpPr txBox="1"/>
-          <p:nvPr/>
-        </p:nvSpPr>
-        <p:spPr>
-          <a:xfrm>
-            <a:off x="7573410" y="5180121"/>
+              <a:t>~6.13</a:t>
+            </a:r>
+          </a:p>
+        </p:txBody>
+      </p:sp>
+      <p:sp>
+        <p:nvSpPr>
+          <p:cNvPr id="758" name="row:switchdev:start-label"/>
+          <p:cNvSpPr txBox="1"/>
+          <p:nvPr/>
+        </p:nvSpPr>
+        <p:spPr>
+          <a:xfrm>
+            <a:off x="4795920" y="6528297"/>
             <a:ext cx="249682" cy="137160"/>
           </a:xfrm>
           <a:prstGeom prst="rect">
@@ -20924,21 +21012,21 @@
                   <a:srgbClr val="475569"/>
                 </a:solidFill>
               </a:rPr>
-              <a:t>~4.15</a:t>
-            </a:r>
-          </a:p>
-        </p:txBody>
-      </p:sp>
-      <p:sp>
-        <p:nvSpPr>
-          <p:cNvPr id="661" name="row:per-netns RTNL:start-label"/>
-          <p:cNvSpPr txBox="1"/>
-          <p:nvPr/>
-        </p:nvSpPr>
-        <p:spPr>
-          <a:xfrm>
-            <a:off x="11089722" y="5277229"/>
-            <a:ext cx="205232" cy="137160"/>
+              <a:t>~3.13</a:t>
+            </a:r>
+          </a:p>
+        </p:txBody>
+      </p:sp>
+      <p:sp>
+        <p:nvSpPr>
+          <p:cNvPr id="764" name="row:devlink:start-label"/>
+          <p:cNvSpPr txBox="1"/>
+          <p:nvPr/>
+        </p:nvSpPr>
+        <p:spPr>
+          <a:xfrm>
+            <a:off x="5490292" y="6625405"/>
+            <a:ext cx="249682" cy="137160"/>
           </a:xfrm>
           <a:prstGeom prst="rect">
             <a:avLst/>
@@ -20964,20 +21052,60 @@
                   <a:srgbClr val="475569"/>
                 </a:solidFill>
               </a:rPr>
-              <a:t>~6.2</a:t>
-            </a:r>
-          </a:p>
-        </p:txBody>
-      </p:sp>
-      <p:sp>
-        <p:nvSpPr>
-          <p:cNvPr id="667" name="row:further RTNL breakup:start-label"/>
-          <p:cNvSpPr txBox="1"/>
-          <p:nvPr/>
-        </p:nvSpPr>
-        <p:spPr>
-          <a:xfrm>
-            <a:off x="11784095" y="5374337"/>
+              <a:t>~3.19</a:t>
+            </a:r>
+          </a:p>
+        </p:txBody>
+      </p:sp>
+      <p:sp>
+        <p:nvSpPr>
+          <p:cNvPr id="770" name="row:devlink health:start-label"/>
+          <p:cNvSpPr txBox="1"/>
+          <p:nvPr/>
+        </p:nvSpPr>
+        <p:spPr>
+          <a:xfrm>
+            <a:off x="7914532" y="6722513"/>
+            <a:ext cx="196623" cy="137160"/>
+          </a:xfrm>
+          <a:prstGeom prst="rect">
+            <a:avLst/>
+          </a:prstGeom>
+          <a:noFill/>
+        </p:spPr>
+        <p:txBody>
+          <a:bodyPr wrap="square" lIns="0" tIns="0" rIns="0" bIns="0" anchor="ctr">
+            <a:noAutofit/>
+          </a:bodyPr>
+          <a:lstStyle/>
+          <a:p>
+            <a:pPr algn="l">
+              <a:defRPr sz="530" i="1">
+                <a:solidFill>
+                  <a:srgbClr val="475569"/>
+                </a:solidFill>
+              </a:defRPr>
+            </a:pPr>
+            <a:r>
+              <a:rPr sz="650" i="1">
+                <a:solidFill>
+                  <a:srgbClr val="475569"/>
+                </a:solidFill>
+              </a:rPr>
+              <a:t>~4.15</a:t>
+            </a:r>
+          </a:p>
+        </p:txBody>
+      </p:sp>
+      <p:sp>
+        <p:nvSpPr>
+          <p:cNvPr id="776" name="row:phylink:start-label"/>
+          <p:cNvSpPr txBox="1"/>
+          <p:nvPr/>
+        </p:nvSpPr>
+        <p:spPr>
+          <a:xfrm>
+            <a:off x="5673617" y="6819621"/>
             <a:ext cx="205232" cy="137160"/>
           </a:xfrm>
           <a:prstGeom prst="rect">
@@ -21004,20 +21132,20 @@
                   <a:srgbClr val="475569"/>
                 </a:solidFill>
               </a:rPr>
-              <a:t>~6.7</a:t>
-            </a:r>
-          </a:p>
-        </p:txBody>
-      </p:sp>
-      <p:sp>
-        <p:nvSpPr>
-          <p:cNvPr id="673" name="row:RTNL-less FIB rules:start-label"/>
-          <p:cNvSpPr txBox="1"/>
-          <p:nvPr/>
-        </p:nvSpPr>
-        <p:spPr>
-          <a:xfrm>
-            <a:off x="12434017" y="5471445"/>
+              <a:t>~4.0</a:t>
+            </a:r>
+          </a:p>
+        </p:txBody>
+      </p:sp>
+      <p:sp>
+        <p:nvSpPr>
+          <p:cNvPr id="782" name="row:Net DIM:start-label"/>
+          <p:cNvSpPr txBox="1"/>
+          <p:nvPr/>
+        </p:nvSpPr>
+        <p:spPr>
+          <a:xfrm>
+            <a:off x="6879037" y="6916729"/>
             <a:ext cx="249682" cy="137160"/>
           </a:xfrm>
           <a:prstGeom prst="rect">
@@ -21044,20 +21172,20 @@
                   <a:srgbClr val="475569"/>
                 </a:solidFill>
               </a:rPr>
-              <a:t>~6.13</a:t>
-            </a:r>
-          </a:p>
-        </p:txBody>
-      </p:sp>
-      <p:sp>
-        <p:nvSpPr>
-          <p:cNvPr id="682" name="row:YNL tooling:start-label"/>
-          <p:cNvSpPr txBox="1"/>
-          <p:nvPr/>
-        </p:nvSpPr>
-        <p:spPr>
-          <a:xfrm>
-            <a:off x="10003713" y="5665661"/>
+              <a:t>~4.10</a:t>
+            </a:r>
+          </a:p>
+        </p:txBody>
+      </p:sp>
+      <p:sp>
+        <p:nvSpPr>
+          <p:cNvPr id="790" name="row:netdevsim:start-label"/>
+          <p:cNvSpPr txBox="1"/>
+          <p:nvPr/>
+        </p:nvSpPr>
+        <p:spPr>
+          <a:xfrm>
+            <a:off x="7226223" y="7013837"/>
             <a:ext cx="249682" cy="137160"/>
           </a:xfrm>
           <a:prstGeom prst="rect">
@@ -21084,21 +21212,21 @@
                   <a:srgbClr val="475569"/>
                 </a:solidFill>
               </a:rPr>
-              <a:t>~5.13</a:t>
-            </a:r>
-          </a:p>
-        </p:txBody>
-      </p:sp>
-      <p:sp>
-        <p:nvSpPr>
-          <p:cNvPr id="688" name="row:queue/NAPI/page_pool netdev-genl:start-label"/>
-          <p:cNvSpPr txBox="1"/>
-          <p:nvPr/>
-        </p:nvSpPr>
-        <p:spPr>
-          <a:xfrm>
-            <a:off x="11089722" y="5854209"/>
-            <a:ext cx="205232" cy="137160"/>
+              <a:t>~4.12</a:t>
+            </a:r>
+          </a:p>
+        </p:txBody>
+      </p:sp>
+      <p:sp>
+        <p:nvSpPr>
+          <p:cNvPr id="796" name="row:ethtool netlink:start-label"/>
+          <p:cNvSpPr txBox="1"/>
+          <p:nvPr/>
+        </p:nvSpPr>
+        <p:spPr>
+          <a:xfrm>
+            <a:off x="7573410" y="7110945"/>
+            <a:ext cx="249682" cy="137160"/>
           </a:xfrm>
           <a:prstGeom prst="rect">
             <a:avLst/>
@@ -21124,21 +21252,21 @@
                   <a:srgbClr val="475569"/>
                 </a:solidFill>
               </a:rPr>
-              <a:t>~6.2</a:t>
-            </a:r>
-          </a:p>
-        </p:txBody>
-      </p:sp>
-      <p:sp>
-        <p:nvSpPr>
-          <p:cNvPr id="694" name="row:kprobe BPF:start-label"/>
-          <p:cNvSpPr txBox="1"/>
-          <p:nvPr/>
-        </p:nvSpPr>
-        <p:spPr>
-          <a:xfrm>
-            <a:off x="4934794" y="5951317"/>
-            <a:ext cx="249682" cy="137160"/>
+              <a:t>~4.15</a:t>
+            </a:r>
+          </a:p>
+        </p:txBody>
+      </p:sp>
+      <p:sp>
+        <p:nvSpPr>
+          <p:cNvPr id="802" name="row:auxiliary bus:start-label"/>
+          <p:cNvSpPr txBox="1"/>
+          <p:nvPr/>
+        </p:nvSpPr>
+        <p:spPr>
+          <a:xfrm>
+            <a:off x="9006605" y="7208053"/>
+            <a:ext cx="205232" cy="137160"/>
           </a:xfrm>
           <a:prstGeom prst="rect">
             <a:avLst/>
@@ -21164,21 +21292,21 @@
                   <a:srgbClr val="475569"/>
                 </a:solidFill>
               </a:rPr>
-              <a:t>~3.14</a:t>
-            </a:r>
-          </a:p>
-        </p:txBody>
-      </p:sp>
-      <p:sp>
-        <p:nvSpPr>
-          <p:cNvPr id="700" name="row:BTF:start-label"/>
-          <p:cNvSpPr txBox="1"/>
-          <p:nvPr/>
-        </p:nvSpPr>
-        <p:spPr>
-          <a:xfrm>
-            <a:off x="7726552" y="6048425"/>
-            <a:ext cx="249682" cy="137160"/>
+              <a:t>~5.5</a:t>
+            </a:r>
+          </a:p>
+        </p:txBody>
+      </p:sp>
+      <p:sp>
+        <p:nvSpPr>
+          <p:cNvPr id="808" name="row:threaded NAPI:start-label"/>
+          <p:cNvSpPr txBox="1"/>
+          <p:nvPr/>
+        </p:nvSpPr>
+        <p:spPr>
+          <a:xfrm>
+            <a:off x="9214916" y="7305161"/>
+            <a:ext cx="205232" cy="137160"/>
           </a:xfrm>
           <a:prstGeom prst="rect">
             <a:avLst/>
@@ -21204,21 +21332,21 @@
                   <a:srgbClr val="475569"/>
                 </a:solidFill>
               </a:rPr>
-              <a:t>~4.16</a:t>
-            </a:r>
-          </a:p>
-        </p:txBody>
-      </p:sp>
-      <p:sp>
-        <p:nvSpPr>
-          <p:cNvPr id="706" name="row:structured drop reason:start-label"/>
-          <p:cNvSpPr txBox="1"/>
-          <p:nvPr/>
-        </p:nvSpPr>
-        <p:spPr>
-          <a:xfrm>
-            <a:off x="9656527" y="6145533"/>
-            <a:ext cx="249682" cy="137160"/>
+              <a:t>~5.7</a:t>
+            </a:r>
+          </a:p>
+        </p:txBody>
+      </p:sp>
+      <p:sp>
+        <p:nvSpPr>
+          <p:cNvPr id="816" name="row:Rust phylib:start-label"/>
+          <p:cNvSpPr txBox="1"/>
+          <p:nvPr/>
+        </p:nvSpPr>
+        <p:spPr>
+          <a:xfrm>
+            <a:off x="11089722" y="7402269"/>
+            <a:ext cx="205232" cy="137160"/>
           </a:xfrm>
           <a:prstGeom prst="rect">
             <a:avLst/>
@@ -21244,486 +21372,6 @@
                   <a:srgbClr val="475569"/>
                 </a:solidFill>
               </a:rPr>
-              <a:t>~5.11</a:t>
-            </a:r>
-          </a:p>
-        </p:txBody>
-      </p:sp>
-      <p:sp>
-        <p:nvSpPr>
-          <p:cNvPr id="712" name="row:drop-reason expansion:start-label"/>
-          <p:cNvSpPr txBox="1"/>
-          <p:nvPr/>
-        </p:nvSpPr>
-        <p:spPr>
-          <a:xfrm>
-            <a:off x="10489774" y="6242641"/>
-            <a:ext cx="249682" cy="137160"/>
-          </a:xfrm>
-          <a:prstGeom prst="rect">
-            <a:avLst/>
-          </a:prstGeom>
-          <a:noFill/>
-        </p:spPr>
-        <p:txBody>
-          <a:bodyPr wrap="square" lIns="0" tIns="0" rIns="0" bIns="0" anchor="ctr">
-            <a:noAutofit/>
-          </a:bodyPr>
-          <a:lstStyle/>
-          <a:p>
-            <a:pPr algn="r">
-              <a:defRPr sz="530" i="1">
-                <a:solidFill>
-                  <a:srgbClr val="475569"/>
-                </a:solidFill>
-              </a:defRPr>
-            </a:pPr>
-            <a:r>
-              <a:rPr sz="650" i="1">
-                <a:solidFill>
-                  <a:srgbClr val="475569"/>
-                </a:solidFill>
-              </a:rPr>
-              <a:t>~5.17</a:t>
-            </a:r>
-          </a:p>
-        </p:txBody>
-      </p:sp>
-      <p:sp>
-        <p:nvSpPr>
-          <p:cNvPr id="718" name="row:qdisc-drop tracepoint:start-label"/>
-          <p:cNvSpPr txBox="1"/>
-          <p:nvPr/>
-        </p:nvSpPr>
-        <p:spPr>
-          <a:xfrm>
-            <a:off x="12434017" y="6339749"/>
-            <a:ext cx="249682" cy="137160"/>
-          </a:xfrm>
-          <a:prstGeom prst="rect">
-            <a:avLst/>
-          </a:prstGeom>
-          <a:noFill/>
-        </p:spPr>
-        <p:txBody>
-          <a:bodyPr wrap="square" lIns="0" tIns="0" rIns="0" bIns="0" anchor="ctr">
-            <a:noAutofit/>
-          </a:bodyPr>
-          <a:lstStyle/>
-          <a:p>
-            <a:pPr algn="r">
-              <a:defRPr sz="530" i="1">
-                <a:solidFill>
-                  <a:srgbClr val="475569"/>
-                </a:solidFill>
-              </a:defRPr>
-            </a:pPr>
-            <a:r>
-              <a:rPr sz="650" i="1">
-                <a:solidFill>
-                  <a:srgbClr val="475569"/>
-                </a:solidFill>
-              </a:rPr>
-              <a:t>~6.13</a:t>
-            </a:r>
-          </a:p>
-        </p:txBody>
-      </p:sp>
-      <p:sp>
-        <p:nvSpPr>
-          <p:cNvPr id="724" name="row:switchdev:start-label"/>
-          <p:cNvSpPr txBox="1"/>
-          <p:nvPr/>
-        </p:nvSpPr>
-        <p:spPr>
-          <a:xfrm>
-            <a:off x="4795920" y="6528297"/>
-            <a:ext cx="249682" cy="137160"/>
-          </a:xfrm>
-          <a:prstGeom prst="rect">
-            <a:avLst/>
-          </a:prstGeom>
-          <a:noFill/>
-        </p:spPr>
-        <p:txBody>
-          <a:bodyPr wrap="square" lIns="0" tIns="0" rIns="0" bIns="0" anchor="ctr">
-            <a:noAutofit/>
-          </a:bodyPr>
-          <a:lstStyle/>
-          <a:p>
-            <a:pPr algn="r">
-              <a:defRPr sz="530" i="1">
-                <a:solidFill>
-                  <a:srgbClr val="475569"/>
-                </a:solidFill>
-              </a:defRPr>
-            </a:pPr>
-            <a:r>
-              <a:rPr sz="650" i="1">
-                <a:solidFill>
-                  <a:srgbClr val="475569"/>
-                </a:solidFill>
-              </a:rPr>
-              <a:t>~3.13</a:t>
-            </a:r>
-          </a:p>
-        </p:txBody>
-      </p:sp>
-      <p:sp>
-        <p:nvSpPr>
-          <p:cNvPr id="730" name="row:devlink:start-label"/>
-          <p:cNvSpPr txBox="1"/>
-          <p:nvPr/>
-        </p:nvSpPr>
-        <p:spPr>
-          <a:xfrm>
-            <a:off x="5490292" y="6625405"/>
-            <a:ext cx="249682" cy="137160"/>
-          </a:xfrm>
-          <a:prstGeom prst="rect">
-            <a:avLst/>
-          </a:prstGeom>
-          <a:noFill/>
-        </p:spPr>
-        <p:txBody>
-          <a:bodyPr wrap="square" lIns="0" tIns="0" rIns="0" bIns="0" anchor="ctr">
-            <a:noAutofit/>
-          </a:bodyPr>
-          <a:lstStyle/>
-          <a:p>
-            <a:pPr algn="r">
-              <a:defRPr sz="530" i="1">
-                <a:solidFill>
-                  <a:srgbClr val="475569"/>
-                </a:solidFill>
-              </a:defRPr>
-            </a:pPr>
-            <a:r>
-              <a:rPr sz="650" i="1">
-                <a:solidFill>
-                  <a:srgbClr val="475569"/>
-                </a:solidFill>
-              </a:rPr>
-              <a:t>~3.19</a:t>
-            </a:r>
-          </a:p>
-        </p:txBody>
-      </p:sp>
-      <p:sp>
-        <p:nvSpPr>
-          <p:cNvPr id="736" name="row:devlink health:start-label"/>
-          <p:cNvSpPr txBox="1"/>
-          <p:nvPr/>
-        </p:nvSpPr>
-        <p:spPr>
-          <a:xfrm>
-            <a:off x="7477398" y="6722513"/>
-            <a:ext cx="249682" cy="137160"/>
-          </a:xfrm>
-          <a:prstGeom prst="rect">
-            <a:avLst/>
-          </a:prstGeom>
-          <a:noFill/>
-        </p:spPr>
-        <p:txBody>
-          <a:bodyPr wrap="square" lIns="0" tIns="0" rIns="0" bIns="0" anchor="ctr">
-            <a:noAutofit/>
-          </a:bodyPr>
-          <a:lstStyle/>
-          <a:p>
-            <a:pPr algn="r">
-              <a:defRPr sz="530" i="1">
-                <a:solidFill>
-                  <a:srgbClr val="475569"/>
-                </a:solidFill>
-              </a:defRPr>
-            </a:pPr>
-            <a:r>
-              <a:rPr sz="650" i="1">
-                <a:solidFill>
-                  <a:srgbClr val="475569"/>
-                </a:solidFill>
-              </a:rPr>
-              <a:t>~4.15</a:t>
-            </a:r>
-          </a:p>
-        </p:txBody>
-      </p:sp>
-      <p:sp>
-        <p:nvSpPr>
-          <p:cNvPr id="742" name="row:phylink:start-label"/>
-          <p:cNvSpPr txBox="1"/>
-          <p:nvPr/>
-        </p:nvSpPr>
-        <p:spPr>
-          <a:xfrm>
-            <a:off x="5673617" y="6819621"/>
-            <a:ext cx="205232" cy="137160"/>
-          </a:xfrm>
-          <a:prstGeom prst="rect">
-            <a:avLst/>
-          </a:prstGeom>
-          <a:noFill/>
-        </p:spPr>
-        <p:txBody>
-          <a:bodyPr wrap="square" lIns="0" tIns="0" rIns="0" bIns="0" anchor="ctr">
-            <a:noAutofit/>
-          </a:bodyPr>
-          <a:lstStyle/>
-          <a:p>
-            <a:pPr algn="r">
-              <a:defRPr sz="530" i="1">
-                <a:solidFill>
-                  <a:srgbClr val="475569"/>
-                </a:solidFill>
-              </a:defRPr>
-            </a:pPr>
-            <a:r>
-              <a:rPr sz="650" i="1">
-                <a:solidFill>
-                  <a:srgbClr val="475569"/>
-                </a:solidFill>
-              </a:rPr>
-              <a:t>~4.0</a:t>
-            </a:r>
-          </a:p>
-        </p:txBody>
-      </p:sp>
-      <p:sp>
-        <p:nvSpPr>
-          <p:cNvPr id="750" name="row:Net DIM:start-label"/>
-          <p:cNvSpPr txBox="1"/>
-          <p:nvPr/>
-        </p:nvSpPr>
-        <p:spPr>
-          <a:xfrm>
-            <a:off x="6879037" y="6916729"/>
-            <a:ext cx="249682" cy="137160"/>
-          </a:xfrm>
-          <a:prstGeom prst="rect">
-            <a:avLst/>
-          </a:prstGeom>
-          <a:noFill/>
-        </p:spPr>
-        <p:txBody>
-          <a:bodyPr wrap="square" lIns="0" tIns="0" rIns="0" bIns="0" anchor="ctr">
-            <a:noAutofit/>
-          </a:bodyPr>
-          <a:lstStyle/>
-          <a:p>
-            <a:pPr algn="r">
-              <a:defRPr sz="530" i="1">
-                <a:solidFill>
-                  <a:srgbClr val="475569"/>
-                </a:solidFill>
-              </a:defRPr>
-            </a:pPr>
-            <a:r>
-              <a:rPr sz="650" i="1">
-                <a:solidFill>
-                  <a:srgbClr val="475569"/>
-                </a:solidFill>
-              </a:rPr>
-              <a:t>~4.10</a:t>
-            </a:r>
-          </a:p>
-        </p:txBody>
-      </p:sp>
-      <p:sp>
-        <p:nvSpPr>
-          <p:cNvPr id="756" name="row:netdevsim:start-label"/>
-          <p:cNvSpPr txBox="1"/>
-          <p:nvPr/>
-        </p:nvSpPr>
-        <p:spPr>
-          <a:xfrm>
-            <a:off x="7226223" y="7013837"/>
-            <a:ext cx="249682" cy="137160"/>
-          </a:xfrm>
-          <a:prstGeom prst="rect">
-            <a:avLst/>
-          </a:prstGeom>
-          <a:noFill/>
-        </p:spPr>
-        <p:txBody>
-          <a:bodyPr wrap="square" lIns="0" tIns="0" rIns="0" bIns="0" anchor="ctr">
-            <a:noAutofit/>
-          </a:bodyPr>
-          <a:lstStyle/>
-          <a:p>
-            <a:pPr algn="r">
-              <a:defRPr sz="530" i="1">
-                <a:solidFill>
-                  <a:srgbClr val="475569"/>
-                </a:solidFill>
-              </a:defRPr>
-            </a:pPr>
-            <a:r>
-              <a:rPr sz="650" i="1">
-                <a:solidFill>
-                  <a:srgbClr val="475569"/>
-                </a:solidFill>
-              </a:rPr>
-              <a:t>~4.12</a:t>
-            </a:r>
-          </a:p>
-        </p:txBody>
-      </p:sp>
-      <p:sp>
-        <p:nvSpPr>
-          <p:cNvPr id="762" name="row:ethtool netlink:start-label"/>
-          <p:cNvSpPr txBox="1"/>
-          <p:nvPr/>
-        </p:nvSpPr>
-        <p:spPr>
-          <a:xfrm>
-            <a:off x="7573410" y="7110945"/>
-            <a:ext cx="249682" cy="137160"/>
-          </a:xfrm>
-          <a:prstGeom prst="rect">
-            <a:avLst/>
-          </a:prstGeom>
-          <a:noFill/>
-        </p:spPr>
-        <p:txBody>
-          <a:bodyPr wrap="square" lIns="0" tIns="0" rIns="0" bIns="0" anchor="ctr">
-            <a:noAutofit/>
-          </a:bodyPr>
-          <a:lstStyle/>
-          <a:p>
-            <a:pPr algn="r">
-              <a:defRPr sz="530" i="1">
-                <a:solidFill>
-                  <a:srgbClr val="475569"/>
-                </a:solidFill>
-              </a:defRPr>
-            </a:pPr>
-            <a:r>
-              <a:rPr sz="650" i="1">
-                <a:solidFill>
-                  <a:srgbClr val="475569"/>
-                </a:solidFill>
-              </a:rPr>
-              <a:t>~4.15</a:t>
-            </a:r>
-          </a:p>
-        </p:txBody>
-      </p:sp>
-      <p:sp>
-        <p:nvSpPr>
-          <p:cNvPr id="768" name="row:auxiliary bus:start-label"/>
-          <p:cNvSpPr txBox="1"/>
-          <p:nvPr/>
-        </p:nvSpPr>
-        <p:spPr>
-          <a:xfrm>
-            <a:off x="9006605" y="7208053"/>
-            <a:ext cx="205232" cy="137160"/>
-          </a:xfrm>
-          <a:prstGeom prst="rect">
-            <a:avLst/>
-          </a:prstGeom>
-          <a:noFill/>
-        </p:spPr>
-        <p:txBody>
-          <a:bodyPr wrap="square" lIns="0" tIns="0" rIns="0" bIns="0" anchor="ctr">
-            <a:noAutofit/>
-          </a:bodyPr>
-          <a:lstStyle/>
-          <a:p>
-            <a:pPr algn="r">
-              <a:defRPr sz="530" i="1">
-                <a:solidFill>
-                  <a:srgbClr val="475569"/>
-                </a:solidFill>
-              </a:defRPr>
-            </a:pPr>
-            <a:r>
-              <a:rPr sz="650" i="1">
-                <a:solidFill>
-                  <a:srgbClr val="475569"/>
-                </a:solidFill>
-              </a:rPr>
-              <a:t>~5.5</a:t>
-            </a:r>
-          </a:p>
-        </p:txBody>
-      </p:sp>
-      <p:sp>
-        <p:nvSpPr>
-          <p:cNvPr id="776" name="row:threaded NAPI:start-label"/>
-          <p:cNvSpPr txBox="1"/>
-          <p:nvPr/>
-        </p:nvSpPr>
-        <p:spPr>
-          <a:xfrm>
-            <a:off x="9214916" y="7305161"/>
-            <a:ext cx="205232" cy="137160"/>
-          </a:xfrm>
-          <a:prstGeom prst="rect">
-            <a:avLst/>
-          </a:prstGeom>
-          <a:noFill/>
-        </p:spPr>
-        <p:txBody>
-          <a:bodyPr wrap="square" lIns="0" tIns="0" rIns="0" bIns="0" anchor="ctr">
-            <a:noAutofit/>
-          </a:bodyPr>
-          <a:lstStyle/>
-          <a:p>
-            <a:pPr algn="r">
-              <a:defRPr sz="530" i="1">
-                <a:solidFill>
-                  <a:srgbClr val="475569"/>
-                </a:solidFill>
-              </a:defRPr>
-            </a:pPr>
-            <a:r>
-              <a:rPr sz="650" i="1">
-                <a:solidFill>
-                  <a:srgbClr val="475569"/>
-                </a:solidFill>
-              </a:rPr>
-              <a:t>~5.7</a:t>
-            </a:r>
-          </a:p>
-        </p:txBody>
-      </p:sp>
-      <p:sp>
-        <p:nvSpPr>
-          <p:cNvPr id="782" name="row:Rust phylib:start-label"/>
-          <p:cNvSpPr txBox="1"/>
-          <p:nvPr/>
-        </p:nvSpPr>
-        <p:spPr>
-          <a:xfrm>
-            <a:off x="11089722" y="7402269"/>
-            <a:ext cx="205232" cy="137160"/>
-          </a:xfrm>
-          <a:prstGeom prst="rect">
-            <a:avLst/>
-          </a:prstGeom>
-          <a:noFill/>
-        </p:spPr>
-        <p:txBody>
-          <a:bodyPr wrap="square" lIns="0" tIns="0" rIns="0" bIns="0" anchor="ctr">
-            <a:noAutofit/>
-          </a:bodyPr>
-          <a:lstStyle/>
-          <a:p>
-            <a:pPr algn="r">
-              <a:defRPr sz="530" i="1">
-                <a:solidFill>
-                  <a:srgbClr val="475569"/>
-                </a:solidFill>
-              </a:defRPr>
-            </a:pPr>
-            <a:r>
-              <a:rPr sz="650" i="1">
-                <a:solidFill>
-                  <a:srgbClr val="475569"/>
-                </a:solidFill>
-              </a:rPr>
               <a:t>~6.2</a:t>
             </a:r>
           </a:p>
@@ -21731,7 +21379,7 @@
       </p:sp>
       <p:sp>
         <p:nvSpPr>
-          <p:cNvPr id="831" name="row:DQL / BQL:caption"/>
+          <p:cNvPr id="821" name="row:DQL / BQL:caption"/>
           <p:cNvSpPr txBox="1"/>
           <p:nvPr/>
         </p:nvSpPr>
@@ -21765,7 +21413,7 @@
       </p:sp>
       <p:sp>
         <p:nvSpPr>
-          <p:cNvPr id="832" name="row:CoDel / fq_codel:caption"/>
+          <p:cNvPr id="822" name="row:CoDel / fq_codel:caption"/>
           <p:cNvSpPr txBox="1"/>
           <p:nvPr/>
         </p:nvSpPr>
@@ -21799,7 +21447,7 @@
       </p:sp>
       <p:sp>
         <p:nvSpPr>
-          <p:cNvPr id="833" name="row:TSQ:caption"/>
+          <p:cNvPr id="823" name="row:TSQ:caption"/>
           <p:cNvSpPr txBox="1"/>
           <p:nvPr/>
         </p:nvSpPr>
@@ -21833,7 +21481,7 @@
       </p:sp>
       <p:sp>
         <p:nvSpPr>
-          <p:cNvPr id="834" name="row:SO_BUSY_POLL:caption"/>
+          <p:cNvPr id="824" name="row:SO_BUSY_POLL:caption"/>
           <p:cNvSpPr txBox="1"/>
           <p:nvPr/>
         </p:nvSpPr>
@@ -21867,7 +21515,7 @@
       </p:sp>
       <p:sp>
         <p:nvSpPr>
-          <p:cNvPr id="835" name="row:sch_fq / TCP pacing:caption"/>
+          <p:cNvPr id="825" name="row:sch_fq / TCP pacing:caption"/>
           <p:cNvSpPr txBox="1"/>
           <p:nvPr/>
         </p:nvSpPr>
@@ -21901,7 +21549,7 @@
       </p:sp>
       <p:sp>
         <p:nvSpPr>
-          <p:cNvPr id="836" name="row:SO_TXTIME / EDT / taprio:caption"/>
+          <p:cNvPr id="826" name="row:SO_TXTIME / EDT / taprio:caption"/>
           <p:cNvSpPr txBox="1"/>
           <p:nvPr/>
         </p:nvSpPr>
@@ -21935,7 +21583,7 @@
       </p:sp>
       <p:sp>
         <p:nvSpPr>
-          <p:cNvPr id="837" name="row:BIG TCP:caption"/>
+          <p:cNvPr id="827" name="row:BIG TCP:caption"/>
           <p:cNvSpPr txBox="1"/>
           <p:nvPr/>
         </p:nvSpPr>
@@ -21969,7 +21617,7 @@
       </p:sp>
       <p:sp>
         <p:nvSpPr>
-          <p:cNvPr id="838" name="row:BIG TCP extensions:caption"/>
+          <p:cNvPr id="828" name="row:BIG TCP extensions:caption"/>
           <p:cNvSpPr txBox="1"/>
           <p:nvPr/>
         </p:nvSpPr>
@@ -22003,7 +21651,7 @@
       </p:sp>
       <p:sp>
         <p:nvSpPr>
-          <p:cNvPr id="839" name="row:io_uring SEND_ZC / multishot recv:caption"/>
+          <p:cNvPr id="829" name="row:io_uring SEND_ZC / multishot recv:caption"/>
           <p:cNvSpPr txBox="1"/>
           <p:nvPr/>
         </p:nvSpPr>
@@ -22037,7 +21685,7 @@
       </p:sp>
       <p:sp>
         <p:nvSpPr>
-          <p:cNvPr id="840" name="row:dev_queue_xmit() llist:caption"/>
+          <p:cNvPr id="830" name="row:dev_queue_xmit() llist:caption"/>
           <p:cNvSpPr txBox="1"/>
           <p:nvPr/>
         </p:nvSpPr>
@@ -22071,7 +21719,7 @@
       </p:sp>
       <p:sp>
         <p:nvSpPr>
-          <p:cNvPr id="841" name="row:cake_mq:caption"/>
+          <p:cNvPr id="831" name="row:cake_mq:caption"/>
           <p:cNvSpPr txBox="1"/>
           <p:nvPr/>
         </p:nvSpPr>
@@ -22105,7 +21753,7 @@
       </p:sp>
       <p:sp>
         <p:nvSpPr>
-          <p:cNvPr id="842" name="row:eBPF foundation:caption"/>
+          <p:cNvPr id="832" name="row:eBPF foundation:caption"/>
           <p:cNvSpPr txBox="1"/>
           <p:nvPr/>
         </p:nvSpPr>
@@ -22139,7 +21787,7 @@
       </p:sp>
       <p:sp>
         <p:nvSpPr>
-          <p:cNvPr id="843" name="row:TC BPF:caption"/>
+          <p:cNvPr id="833" name="row:TC BPF:caption"/>
           <p:cNvSpPr txBox="1"/>
           <p:nvPr/>
         </p:nvSpPr>
@@ -22173,7 +21821,7 @@
       </p:sp>
       <p:sp>
         <p:nvSpPr>
-          <p:cNvPr id="844" name="row:TCX:caption"/>
+          <p:cNvPr id="834" name="row:TCX:caption"/>
           <p:cNvSpPr txBox="1"/>
           <p:nvPr/>
         </p:nvSpPr>
@@ -22207,7 +21855,7 @@
       </p:sp>
       <p:sp>
         <p:nvSpPr>
-          <p:cNvPr id="845" name="row:netkit:caption"/>
+          <p:cNvPr id="835" name="row:netkit:caption"/>
           <p:cNvSpPr txBox="1"/>
           <p:nvPr/>
         </p:nvSpPr>
@@ -22241,7 +21889,7 @@
       </p:sp>
       <p:sp>
         <p:nvSpPr>
-          <p:cNvPr id="846" name="row:cgroup / LWT BPF:caption"/>
+          <p:cNvPr id="836" name="row:cgroup / LWT BPF:caption"/>
           <p:cNvSpPr txBox="1"/>
           <p:nvPr/>
         </p:nvSpPr>
@@ -22275,7 +21923,7 @@
       </p:sp>
       <p:sp>
         <p:nvSpPr>
-          <p:cNvPr id="847" name="row:SOCK_OPS / SOCKMAP:caption"/>
+          <p:cNvPr id="837" name="row:SOCK_OPS / SOCKMAP:caption"/>
           <p:cNvSpPr txBox="1"/>
           <p:nvPr/>
         </p:nvSpPr>
@@ -22309,7 +21957,7 @@
       </p:sp>
       <p:sp>
         <p:nvSpPr>
-          <p:cNvPr id="848" name="row:BPF struct_ops:caption"/>
+          <p:cNvPr id="838" name="row:BPF struct_ops:caption"/>
           <p:cNvSpPr txBox="1"/>
           <p:nvPr/>
         </p:nvSpPr>
@@ -22343,7 +21991,7 @@
       </p:sp>
       <p:sp>
         <p:nvSpPr>
-          <p:cNvPr id="849" name="row:BPF qdisc:caption"/>
+          <p:cNvPr id="839" name="row:BPF qdisc:caption"/>
           <p:cNvSpPr txBox="1"/>
           <p:nvPr/>
         </p:nvSpPr>
@@ -22377,7 +22025,7 @@
       </p:sp>
       <p:sp>
         <p:nvSpPr>
-          <p:cNvPr id="850" name="row:SK_LOOKUP:caption"/>
+          <p:cNvPr id="840" name="row:SK_LOOKUP:caption"/>
           <p:cNvSpPr txBox="1"/>
           <p:nvPr/>
         </p:nvSpPr>
@@ -22411,7 +22059,7 @@
       </p:sp>
       <p:sp>
         <p:nvSpPr>
-          <p:cNvPr id="851" name="row:XDP:caption"/>
+          <p:cNvPr id="841" name="row:XDP:caption"/>
           <p:cNvSpPr txBox="1"/>
           <p:nvPr/>
         </p:nvSpPr>
@@ -22445,7 +22093,7 @@
       </p:sp>
       <p:sp>
         <p:nvSpPr>
-          <p:cNvPr id="852" name="row:XDP devmap / cpumap:caption"/>
+          <p:cNvPr id="842" name="row:XDP devmap / cpumap:caption"/>
           <p:cNvSpPr txBox="1"/>
           <p:nvPr/>
         </p:nvSpPr>
@@ -22479,7 +22127,7 @@
       </p:sp>
       <p:sp>
         <p:nvSpPr>
-          <p:cNvPr id="853" name="row:XDP multi-buffer:caption"/>
+          <p:cNvPr id="843" name="row:XDP multi-buffer:caption"/>
           <p:cNvSpPr txBox="1"/>
           <p:nvPr/>
         </p:nvSpPr>
@@ -22513,7 +22161,7 @@
       </p:sp>
       <p:sp>
         <p:nvSpPr>
-          <p:cNvPr id="854" name="row:AF_XDP:caption"/>
+          <p:cNvPr id="844" name="row:AF_XDP:caption"/>
           <p:cNvSpPr txBox="1"/>
           <p:nvPr/>
         </p:nvSpPr>
@@ -22547,7 +22195,7 @@
       </p:sp>
       <p:sp>
         <p:nvSpPr>
-          <p:cNvPr id="855" name="row:AF_XDP multi-buffer:caption"/>
+          <p:cNvPr id="845" name="row:AF_XDP multi-buffer:caption"/>
           <p:cNvSpPr txBox="1"/>
           <p:nvPr/>
         </p:nvSpPr>
@@ -22581,7 +22229,7 @@
       </p:sp>
       <p:sp>
         <p:nvSpPr>
-          <p:cNvPr id="856" name="row:page_pool:caption"/>
+          <p:cNvPr id="846" name="row:page_pool:caption"/>
           <p:cNvSpPr txBox="1"/>
           <p:nvPr/>
         </p:nvSpPr>
@@ -22615,7 +22263,7 @@
       </p:sp>
       <p:sp>
         <p:nvSpPr>
-          <p:cNvPr id="857" name="row:netmem:caption"/>
+          <p:cNvPr id="847" name="row:netmem:caption"/>
           <p:cNvSpPr txBox="1"/>
           <p:nvPr/>
         </p:nvSpPr>
@@ -22649,7 +22297,7 @@
       </p:sp>
       <p:sp>
         <p:nvSpPr>
-          <p:cNvPr id="858" name="row:Device Memory TCP RX · TX:caption"/>
+          <p:cNvPr id="848" name="row:Device Memory TCP RX · TX:caption"/>
           <p:cNvSpPr txBox="1"/>
           <p:nvPr/>
         </p:nvSpPr>
@@ -22683,7 +22331,7 @@
       </p:sp>
       <p:sp>
         <p:nvSpPr>
-          <p:cNvPr id="859" name="row:devmem RX buffers &gt; PAGE_SIZE:caption"/>
+          <p:cNvPr id="849" name="row:devmem RX buffers &gt; PAGE_SIZE:caption"/>
           <p:cNvSpPr txBox="1"/>
           <p:nvPr/>
         </p:nvSpPr>
@@ -22717,7 +22365,7 @@
       </p:sp>
       <p:sp>
         <p:nvSpPr>
-          <p:cNvPr id="860" name="row:page_pool memory-provider hooks:caption"/>
+          <p:cNvPr id="850" name="row:page_pool memory-provider hooks:caption"/>
           <p:cNvSpPr txBox="1"/>
           <p:nvPr/>
         </p:nvSpPr>
@@ -22751,7 +22399,7 @@
       </p:sp>
       <p:sp>
         <p:nvSpPr>
-          <p:cNvPr id="861" name="row:large RX buffers (providers / ZCRX):caption"/>
+          <p:cNvPr id="851" name="row:large RX buffers (providers / ZCRX):caption"/>
           <p:cNvSpPr txBox="1"/>
           <p:nvPr/>
         </p:nvSpPr>
@@ -22785,7 +22433,7 @@
       </p:sp>
       <p:sp>
         <p:nvSpPr>
-          <p:cNvPr id="862" name="row:io_uring ZCRX:caption"/>
+          <p:cNvPr id="852" name="row:io_uring ZCRX:caption"/>
           <p:cNvSpPr txBox="1"/>
           <p:nvPr/>
         </p:nvSpPr>
@@ -22819,7 +22467,7 @@
       </p:sp>
       <p:sp>
         <p:nvSpPr>
-          <p:cNvPr id="863" name="row:RX HW queue leasing:caption"/>
+          <p:cNvPr id="853" name="row:RX HW queue leasing:caption"/>
           <p:cNvSpPr txBox="1"/>
           <p:nvPr/>
         </p:nvSpPr>
@@ -22853,7 +22501,7 @@
       </p:sp>
       <p:sp>
         <p:nvSpPr>
-          <p:cNvPr id="864" name="row:namespace FD / setns():caption"/>
+          <p:cNvPr id="854" name="row:namespace FD / setns():caption"/>
           <p:cNvSpPr txBox="1"/>
           <p:nvPr/>
         </p:nvSpPr>
@@ -22887,7 +22535,7 @@
       </p:sp>
       <p:sp>
         <p:nvSpPr>
-          <p:cNvPr id="865" name="row:nftables (dev. from 2008):caption"/>
+          <p:cNvPr id="855" name="row:nftables (dev. from 2008):caption"/>
           <p:cNvSpPr txBox="1"/>
           <p:nvPr/>
         </p:nvSpPr>
@@ -22923,7 +22571,7 @@
       </p:sp>
       <p:sp>
         <p:nvSpPr>
-          <p:cNvPr id="866" name="row:nexthop objects:caption"/>
+          <p:cNvPr id="856" name="row:nexthop objects:caption"/>
           <p:cNvSpPr txBox="1"/>
           <p:nvPr/>
         </p:nvSpPr>
@@ -22957,7 +22605,7 @@
       </p:sp>
       <p:sp>
         <p:nvSpPr>
-          <p:cNvPr id="867" name="row:per-netns RTNL:caption"/>
+          <p:cNvPr id="857" name="row:per-netns RTNL:caption"/>
           <p:cNvSpPr txBox="1"/>
           <p:nvPr/>
         </p:nvSpPr>
@@ -22991,7 +22639,7 @@
       </p:sp>
       <p:sp>
         <p:nvSpPr>
-          <p:cNvPr id="868" name="row:further RTNL breakup:caption"/>
+          <p:cNvPr id="858" name="row:further RTNL breakup:caption"/>
           <p:cNvSpPr txBox="1"/>
           <p:nvPr/>
         </p:nvSpPr>
@@ -23025,7 +22673,7 @@
       </p:sp>
       <p:sp>
         <p:nvSpPr>
-          <p:cNvPr id="869" name="row:RTNL-less FIB rules:caption"/>
+          <p:cNvPr id="859" name="row:RTNL-less FIB rules:caption"/>
           <p:cNvSpPr txBox="1"/>
           <p:nvPr/>
         </p:nvSpPr>
@@ -23059,7 +22707,7 @@
       </p:sp>
       <p:sp>
         <p:nvSpPr>
-          <p:cNvPr id="870" name="row:per-netns netdev unregistration:caption"/>
+          <p:cNvPr id="860" name="row:per-netns netdev unregistration:caption"/>
           <p:cNvSpPr txBox="1"/>
           <p:nvPr/>
         </p:nvSpPr>
@@ -23093,7 +22741,7 @@
       </p:sp>
       <p:sp>
         <p:nvSpPr>
-          <p:cNvPr id="871" name="row:YNL tooling:caption"/>
+          <p:cNvPr id="861" name="row:YNL tooling:caption"/>
           <p:cNvSpPr txBox="1"/>
           <p:nvPr/>
         </p:nvSpPr>
@@ -23127,7 +22775,7 @@
       </p:sp>
       <p:sp>
         <p:nvSpPr>
-          <p:cNvPr id="872" name="row:queue/NAPI/page_pool netdev-genl:caption"/>
+          <p:cNvPr id="862" name="row:queue/NAPI/page_pool netdev-genl:caption"/>
           <p:cNvSpPr txBox="1"/>
           <p:nvPr/>
         </p:nvSpPr>
@@ -23161,7 +22809,7 @@
       </p:sp>
       <p:sp>
         <p:nvSpPr>
-          <p:cNvPr id="873" name="row:kprobe BPF:caption"/>
+          <p:cNvPr id="863" name="row:kprobe BPF:caption"/>
           <p:cNvSpPr txBox="1"/>
           <p:nvPr/>
         </p:nvSpPr>
@@ -23195,7 +22843,7 @@
       </p:sp>
       <p:sp>
         <p:nvSpPr>
-          <p:cNvPr id="874" name="row:BTF:caption"/>
+          <p:cNvPr id="864" name="row:BTF:caption"/>
           <p:cNvSpPr txBox="1"/>
           <p:nvPr/>
         </p:nvSpPr>
@@ -23229,7 +22877,7 @@
       </p:sp>
       <p:sp>
         <p:nvSpPr>
-          <p:cNvPr id="875" name="row:structured drop reason:caption"/>
+          <p:cNvPr id="865" name="row:structured drop reason:caption"/>
           <p:cNvSpPr txBox="1"/>
           <p:nvPr/>
         </p:nvSpPr>
@@ -23263,7 +22911,7 @@
       </p:sp>
       <p:sp>
         <p:nvSpPr>
-          <p:cNvPr id="876" name="row:drop-reason expansion:caption"/>
+          <p:cNvPr id="866" name="row:drop-reason expansion:caption"/>
           <p:cNvSpPr txBox="1"/>
           <p:nvPr/>
         </p:nvSpPr>
@@ -23297,7 +22945,7 @@
       </p:sp>
       <p:sp>
         <p:nvSpPr>
-          <p:cNvPr id="877" name="row:qdisc-drop tracepoint:caption"/>
+          <p:cNvPr id="867" name="row:qdisc-drop tracepoint:caption"/>
           <p:cNvSpPr txBox="1"/>
           <p:nvPr/>
         </p:nvSpPr>
@@ -23331,7 +22979,7 @@
       </p:sp>
       <p:sp>
         <p:nvSpPr>
-          <p:cNvPr id="878" name="row:switchdev:caption"/>
+          <p:cNvPr id="868" name="row:switchdev:caption"/>
           <p:cNvSpPr txBox="1"/>
           <p:nvPr/>
         </p:nvSpPr>
@@ -23365,7 +23013,7 @@
       </p:sp>
       <p:sp>
         <p:nvSpPr>
-          <p:cNvPr id="879" name="row:devlink:caption"/>
+          <p:cNvPr id="869" name="row:devlink:caption"/>
           <p:cNvSpPr txBox="1"/>
           <p:nvPr/>
         </p:nvSpPr>
@@ -23399,7 +23047,7 @@
       </p:sp>
       <p:sp>
         <p:nvSpPr>
-          <p:cNvPr id="880" name="row:devlink health:caption"/>
+          <p:cNvPr id="870" name="row:devlink health:caption"/>
           <p:cNvSpPr txBox="1"/>
           <p:nvPr/>
         </p:nvSpPr>
@@ -23433,7 +23081,7 @@
       </p:sp>
       <p:sp>
         <p:nvSpPr>
-          <p:cNvPr id="881" name="row:phylink:caption"/>
+          <p:cNvPr id="871" name="row:phylink:caption"/>
           <p:cNvSpPr txBox="1"/>
           <p:nvPr/>
         </p:nvSpPr>
@@ -23467,7 +23115,7 @@
       </p:sp>
       <p:sp>
         <p:nvSpPr>
-          <p:cNvPr id="882" name="row:Net DIM:caption"/>
+          <p:cNvPr id="872" name="row:Net DIM:caption"/>
           <p:cNvSpPr txBox="1"/>
           <p:nvPr/>
         </p:nvSpPr>
@@ -23501,7 +23149,7 @@
       </p:sp>
       <p:sp>
         <p:nvSpPr>
-          <p:cNvPr id="883" name="row:netdevsim:caption"/>
+          <p:cNvPr id="873" name="row:netdevsim:caption"/>
           <p:cNvSpPr txBox="1"/>
           <p:nvPr/>
         </p:nvSpPr>
@@ -23535,7 +23183,7 @@
       </p:sp>
       <p:sp>
         <p:nvSpPr>
-          <p:cNvPr id="884" name="row:ethtool netlink:caption"/>
+          <p:cNvPr id="874" name="row:ethtool netlink:caption"/>
           <p:cNvSpPr txBox="1"/>
           <p:nvPr/>
         </p:nvSpPr>
@@ -23569,7 +23217,7 @@
       </p:sp>
       <p:sp>
         <p:nvSpPr>
-          <p:cNvPr id="885" name="row:auxiliary bus:caption"/>
+          <p:cNvPr id="875" name="row:auxiliary bus:caption"/>
           <p:cNvSpPr txBox="1"/>
           <p:nvPr/>
         </p:nvSpPr>
@@ -23603,7 +23251,7 @@
       </p:sp>
       <p:sp>
         <p:nvSpPr>
-          <p:cNvPr id="886" name="row:threaded NAPI:caption"/>
+          <p:cNvPr id="876" name="row:threaded NAPI:caption"/>
           <p:cNvSpPr txBox="1"/>
           <p:nvPr/>
         </p:nvSpPr>
@@ -23637,7 +23285,7 @@
       </p:sp>
       <p:sp>
         <p:nvSpPr>
-          <p:cNvPr id="887" name="row:Rust phylib:caption"/>
+          <p:cNvPr id="877" name="row:Rust phylib:caption"/>
           <p:cNvSpPr txBox="1"/>
           <p:nvPr/>
         </p:nvSpPr>

--- a/linux-networking-feature-evolution.pptx
+++ b/linux-networking-feature-evolution.pptx
@@ -301,17 +301,7 @@
           </a:p>
           <a:p>
             <a:r>
-              <a:t>- Trial in this version: every row repeats its feature name as a caption next to its marks (row:&lt;feature&gt;:caption, grey, regular weight), to the right of the release label or, where that would leave the band or cross a lineage line, to the left of the start label. The name column on the left is unchanged. To go back, delete the :caption objects or use r52-v1.</a:t>
-            </a:r>
-          </a:p>
-          <a:p>
-            <a:r>
-              <a:t>- Every band, label, marker and line is a native, named PowerPoint object (row:&lt;feature&gt;:name / :start / :development / :release:&lt;ver&gt; / :milestones / :label / :start-label).</a:t>
-            </a:r>
-          </a:p>
-          <a:p>
-            <a:r>
-              <a:t>- Release markers sit on the kernel release date of the canonical version; 7.3-rc sits on the net-next-7.3 mainline merge date.</a:t>
+              <a:t>- Captions: every row repeats its feature name next to its marks (row:&lt;feature&gt;:caption, grey, regular weight), to the right of the release label or, where that would leave the band or cross a lineage line, to the left of the start label. The name column on the left stays as the index.</a:t>
             </a:r>
           </a:p>
           <a:p>
@@ -386,7 +376,7 @@
           </a:p>
           <a:p>
             <a:r>
-              <a:t>- Start labels (~X.Y) give the version under development at the plotted start date, i.e. the first kernel released after that date. A start label sits left of its ○ by default. Where a lineage arrow arrives at the ○ from the left, or a lineage line would touch the label, the label sits right of the ○ and the dashed development line starts after it, so no label touches a black lineage line.</a:t>
+              <a:t>- Start labels (~X.Y) give the version under development at the plotted start date, i.e. the first kernel released after that date. A start label sits left of its ○ by default. Where a lineage arrow arrives at the ○ from the left, or a lineage line would touch the label, the label sits right of the ○ and the dashed development line starts after it, so no label touches a black lineage line. Where the development period is too short for that (XDP devmap / cpumap, netmem), the label is lifted above the dashed line instead.</a:t>
             </a:r>
           </a:p>
           <a:p>
@@ -11328,8 +11318,8 @@
         </p:nvCxnSpPr>
         <p:spPr>
           <a:xfrm>
-            <a:off x="7700082" y="3706309"/>
-            <a:ext cx="82515" cy="0"/>
+            <a:off x="7439451" y="3706309"/>
+            <a:ext cx="343146" cy="0"/>
           </a:xfrm>
           <a:prstGeom prst="line">
             <a:avLst/>
@@ -12423,8 +12413,8 @@
         </p:nvCxnSpPr>
         <p:spPr>
           <a:xfrm>
-            <a:off x="12220852" y="4283289"/>
-            <a:ext cx="73979" cy="0"/>
+            <a:off x="12002063" y="4283289"/>
+            <a:ext cx="292768" cy="0"/>
           </a:xfrm>
           <a:prstGeom prst="line">
             <a:avLst/>
@@ -20145,7 +20135,47 @@
         </p:nvSpPr>
         <p:spPr>
           <a:xfrm>
-            <a:off x="7489743" y="3637729"/>
+            <a:off x="7512713" y="3579729"/>
+            <a:ext cx="196623" cy="137160"/>
+          </a:xfrm>
+          <a:prstGeom prst="rect">
+            <a:avLst/>
+          </a:prstGeom>
+          <a:noFill/>
+        </p:spPr>
+        <p:txBody>
+          <a:bodyPr wrap="square" lIns="0" tIns="0" rIns="0" bIns="0" anchor="ctr">
+            <a:noAutofit/>
+          </a:bodyPr>
+          <a:lstStyle/>
+          <a:p>
+            <a:pPr algn="ctr">
+              <a:defRPr sz="530" i="1">
+                <a:solidFill>
+                  <a:srgbClr val="475569"/>
+                </a:solidFill>
+              </a:defRPr>
+            </a:pPr>
+            <a:r>
+              <a:rPr sz="650" i="1">
+                <a:solidFill>
+                  <a:srgbClr val="475569"/>
+                </a:solidFill>
+              </a:rPr>
+              <a:t>~4.12</a:t>
+            </a:r>
+          </a:p>
+        </p:txBody>
+      </p:sp>
+      <p:sp>
+        <p:nvSpPr>
+          <p:cNvPr id="617" name="row:XDP multi-buffer:start-label"/>
+          <p:cNvSpPr txBox="1"/>
+          <p:nvPr/>
+        </p:nvSpPr>
+        <p:spPr>
+          <a:xfrm>
+            <a:off x="9997649" y="3734837"/>
             <a:ext cx="196623" cy="137160"/>
           </a:xfrm>
           <a:prstGeom prst="rect">
@@ -20172,20 +20202,20 @@
                   <a:srgbClr val="475569"/>
                 </a:solidFill>
               </a:rPr>
-              <a:t>~4.12</a:t>
-            </a:r>
-          </a:p>
-        </p:txBody>
-      </p:sp>
-      <p:sp>
-        <p:nvSpPr>
-          <p:cNvPr id="617" name="row:XDP multi-buffer:start-label"/>
-          <p:cNvSpPr txBox="1"/>
-          <p:nvPr/>
-        </p:nvSpPr>
-        <p:spPr>
-          <a:xfrm>
-            <a:off x="9997649" y="3734837"/>
+              <a:t>~5.11</a:t>
+            </a:r>
+          </a:p>
+        </p:txBody>
+      </p:sp>
+      <p:sp>
+        <p:nvSpPr>
+          <p:cNvPr id="623" name="row:AF_XDP:start-label"/>
+          <p:cNvSpPr txBox="1"/>
+          <p:nvPr/>
+        </p:nvSpPr>
+        <p:spPr>
+          <a:xfrm>
+            <a:off x="7220159" y="3923385"/>
             <a:ext cx="196623" cy="137160"/>
           </a:xfrm>
           <a:prstGeom prst="rect">
@@ -20212,20 +20242,20 @@
                   <a:srgbClr val="475569"/>
                 </a:solidFill>
               </a:rPr>
-              <a:t>~5.11</a:t>
-            </a:r>
-          </a:p>
-        </p:txBody>
-      </p:sp>
-      <p:sp>
-        <p:nvSpPr>
-          <p:cNvPr id="623" name="row:AF_XDP:start-label"/>
-          <p:cNvSpPr txBox="1"/>
-          <p:nvPr/>
-        </p:nvSpPr>
-        <p:spPr>
-          <a:xfrm>
-            <a:off x="7220159" y="3923385"/>
+              <a:t>~4.10</a:t>
+            </a:r>
+          </a:p>
+        </p:txBody>
+      </p:sp>
+      <p:sp>
+        <p:nvSpPr>
+          <p:cNvPr id="629" name="row:AF_XDP multi-buffer:start-label"/>
+          <p:cNvSpPr txBox="1"/>
+          <p:nvPr/>
+        </p:nvSpPr>
+        <p:spPr>
+          <a:xfrm>
+            <a:off x="10692022" y="4020493"/>
             <a:ext cx="196623" cy="137160"/>
           </a:xfrm>
           <a:prstGeom prst="rect">
@@ -20252,34 +20282,34 @@
                   <a:srgbClr val="475569"/>
                 </a:solidFill>
               </a:rPr>
-              <a:t>~4.10</a:t>
-            </a:r>
-          </a:p>
-        </p:txBody>
-      </p:sp>
-      <p:sp>
-        <p:nvSpPr>
-          <p:cNvPr id="629" name="row:AF_XDP multi-buffer:start-label"/>
-          <p:cNvSpPr txBox="1"/>
-          <p:nvPr/>
-        </p:nvSpPr>
-        <p:spPr>
-          <a:xfrm>
-            <a:off x="10692022" y="4020493"/>
-            <a:ext cx="196623" cy="137160"/>
-          </a:xfrm>
-          <a:prstGeom prst="rect">
-            <a:avLst/>
-          </a:prstGeom>
-          <a:noFill/>
-        </p:spPr>
-        <p:txBody>
-          <a:bodyPr wrap="square" lIns="0" tIns="0" rIns="0" bIns="0" anchor="ctr">
-            <a:noAutofit/>
-          </a:bodyPr>
-          <a:lstStyle/>
-          <a:p>
-            <a:pPr algn="l">
+              <a:t>~5.16</a:t>
+            </a:r>
+          </a:p>
+        </p:txBody>
+      </p:sp>
+      <p:sp>
+        <p:nvSpPr>
+          <p:cNvPr id="635" name="row:page_pool:start-label"/>
+          <p:cNvSpPr txBox="1"/>
+          <p:nvPr/>
+        </p:nvSpPr>
+        <p:spPr>
+          <a:xfrm>
+            <a:off x="6367989" y="4117601"/>
+            <a:ext cx="205232" cy="137160"/>
+          </a:xfrm>
+          <a:prstGeom prst="rect">
+            <a:avLst/>
+          </a:prstGeom>
+          <a:noFill/>
+        </p:spPr>
+        <p:txBody>
+          <a:bodyPr wrap="square" lIns="0" tIns="0" rIns="0" bIns="0" anchor="ctr">
+            <a:noAutofit/>
+          </a:bodyPr>
+          <a:lstStyle/>
+          <a:p>
+            <a:pPr algn="r">
               <a:defRPr sz="530" i="1">
                 <a:solidFill>
                   <a:srgbClr val="475569"/>
@@ -20292,46 +20322,6 @@
                   <a:srgbClr val="475569"/>
                 </a:solidFill>
               </a:rPr>
-              <a:t>~5.16</a:t>
-            </a:r>
-          </a:p>
-        </p:txBody>
-      </p:sp>
-      <p:sp>
-        <p:nvSpPr>
-          <p:cNvPr id="635" name="row:page_pool:start-label"/>
-          <p:cNvSpPr txBox="1"/>
-          <p:nvPr/>
-        </p:nvSpPr>
-        <p:spPr>
-          <a:xfrm>
-            <a:off x="6367989" y="4117601"/>
-            <a:ext cx="205232" cy="137160"/>
-          </a:xfrm>
-          <a:prstGeom prst="rect">
-            <a:avLst/>
-          </a:prstGeom>
-          <a:noFill/>
-        </p:spPr>
-        <p:txBody>
-          <a:bodyPr wrap="square" lIns="0" tIns="0" rIns="0" bIns="0" anchor="ctr">
-            <a:noAutofit/>
-          </a:bodyPr>
-          <a:lstStyle/>
-          <a:p>
-            <a:pPr algn="r">
-              <a:defRPr sz="530" i="1">
-                <a:solidFill>
-                  <a:srgbClr val="475569"/>
-                </a:solidFill>
-              </a:defRPr>
-            </a:pPr>
-            <a:r>
-              <a:rPr sz="650" i="1">
-                <a:solidFill>
-                  <a:srgbClr val="475569"/>
-                </a:solidFill>
-              </a:rPr>
               <a:t>~4.5</a:t>
             </a:r>
           </a:p>
@@ -20345,7 +20335,7 @@
         </p:nvSpPr>
         <p:spPr>
           <a:xfrm>
-            <a:off x="12052355" y="4214709"/>
+            <a:off x="12071057" y="4156709"/>
             <a:ext cx="154780" cy="137160"/>
           </a:xfrm>
           <a:prstGeom prst="rect">
@@ -20359,7 +20349,7 @@
           </a:bodyPr>
           <a:lstStyle/>
           <a:p>
-            <a:pPr algn="l">
+            <a:pPr algn="ctr">
               <a:defRPr sz="530" i="1">
                 <a:solidFill>
                   <a:srgbClr val="475569"/>
